--- a/presentation/slides.pptx
+++ b/presentation/slides.pptx
@@ -25,9 +25,11 @@
     <p:sldId id="273" r:id="rId19"/>
     <p:sldId id="274" r:id="rId20"/>
     <p:sldId id="275" r:id="rId21"/>
+    <p:sldId id="276" r:id="rId22"/>
+    <p:sldId id="277" r:id="rId23"/>
   </p:sldIdLst>
   <p:notesMasterIdLst>
-    <p:notesMasterId r:id="rId22"/>
+    <p:notesMasterId r:id="rId24"/>
   </p:notesMasterIdLst>
   <p:sldSz cx="9144000" cy="5143500"/>
   <p:notesSz cx="5143500" cy="9144000"/>
@@ -1601,6 +1603,182 @@
             <a:fld id="{F7021451-1387-4CA6-816F-3879F97B5CBC}" type="slidenum">
               <a:rPr lang="en-US"/>
               <a:t>20</a:t>
+            </a:fld>
+            <a:endParaRPr lang="en-US"/>
+          </a:p>
+        </p:txBody>
+      </p:sp>
+    </p:spTree>
+    <p:extLst>
+      <p:ext uri="{BB962C8B-B14F-4D97-AF65-F5344CB8AC3E}">
+        <p14:creationId xmlns:p14="http://schemas.microsoft.com/office/powerpoint/2010/main" val="1024086991"/>
+      </p:ext>
+    </p:extLst>
+  </p:cSld>
+  <p:clrMapOvr>
+    <a:masterClrMapping/>
+  </p:clrMapOvr>
+</p:notes>
+</file>
+
+<file path=ppt/notesSlides/notesSlide21.xml><?xml version="1.0" encoding="utf-8"?>
+<p:notes xmlns:a="http://schemas.openxmlformats.org/drawingml/2006/main" xmlns:r="http://schemas.openxmlformats.org/officeDocument/2006/relationships" xmlns:p="http://schemas.openxmlformats.org/presentationml/2006/main">
+  <p:cSld>
+    <p:spTree>
+      <p:nvGrpSpPr>
+        <p:cNvPr id="1" name=""/>
+        <p:cNvGrpSpPr/>
+        <p:nvPr/>
+      </p:nvGrpSpPr>
+      <p:grpSpPr>
+        <a:xfrm>
+          <a:off x="0" y="0"/>
+          <a:ext cx="0" cy="0"/>
+          <a:chOff x="0" y="0"/>
+          <a:chExt cx="0" cy="0"/>
+        </a:xfrm>
+      </p:grpSpPr>
+      <p:sp>
+        <p:nvSpPr>
+          <p:cNvPr id="2" name="Slide Image Placeholder 1"/>
+          <p:cNvSpPr>
+            <a:spLocks noGrp="1" noRot="1" noChangeAspect="1"/>
+          </p:cNvSpPr>
+          <p:nvPr>
+            <p:ph type="sldImg"/>
+          </p:nvPr>
+        </p:nvSpPr>
+        <p:spPr/>
+      </p:sp>
+      <p:sp>
+        <p:nvSpPr>
+          <p:cNvPr id="3" name="Notes Placeholder 2"/>
+          <p:cNvSpPr>
+            <a:spLocks noGrp="1"/>
+          </p:cNvSpPr>
+          <p:nvPr>
+            <p:ph type="body" idx="1"/>
+          </p:nvPr>
+        </p:nvSpPr>
+        <p:spPr/>
+        <p:txBody>
+          <a:bodyPr/>
+          <a:lstStyle/>
+          <a:p>
+            <a:r>
+              <a:rPr lang="en-US" dirty="0"/>
+              <a:t/>
+            </a:r>
+            <a:endParaRPr lang="en-US" dirty="0"/>
+          </a:p>
+        </p:txBody>
+      </p:sp>
+      <p:sp>
+        <p:nvSpPr>
+          <p:cNvPr id="4" name="Slide Number Placeholder 3"/>
+          <p:cNvSpPr>
+            <a:spLocks noGrp="1"/>
+          </p:cNvSpPr>
+          <p:nvPr>
+            <p:ph type="sldNum" sz="quarter" idx="10"/>
+          </p:nvPr>
+        </p:nvSpPr>
+        <p:spPr/>
+        <p:txBody>
+          <a:bodyPr/>
+          <a:lstStyle/>
+          <a:p>
+            <a:fld id="{F7021451-1387-4CA6-816F-3879F97B5CBC}" type="slidenum">
+              <a:rPr lang="en-US"/>
+              <a:t>21</a:t>
+            </a:fld>
+            <a:endParaRPr lang="en-US"/>
+          </a:p>
+        </p:txBody>
+      </p:sp>
+    </p:spTree>
+    <p:extLst>
+      <p:ext uri="{BB962C8B-B14F-4D97-AF65-F5344CB8AC3E}">
+        <p14:creationId xmlns:p14="http://schemas.microsoft.com/office/powerpoint/2010/main" val="1024086991"/>
+      </p:ext>
+    </p:extLst>
+  </p:cSld>
+  <p:clrMapOvr>
+    <a:masterClrMapping/>
+  </p:clrMapOvr>
+</p:notes>
+</file>
+
+<file path=ppt/notesSlides/notesSlide22.xml><?xml version="1.0" encoding="utf-8"?>
+<p:notes xmlns:a="http://schemas.openxmlformats.org/drawingml/2006/main" xmlns:r="http://schemas.openxmlformats.org/officeDocument/2006/relationships" xmlns:p="http://schemas.openxmlformats.org/presentationml/2006/main">
+  <p:cSld>
+    <p:spTree>
+      <p:nvGrpSpPr>
+        <p:cNvPr id="1" name=""/>
+        <p:cNvGrpSpPr/>
+        <p:nvPr/>
+      </p:nvGrpSpPr>
+      <p:grpSpPr>
+        <a:xfrm>
+          <a:off x="0" y="0"/>
+          <a:ext cx="0" cy="0"/>
+          <a:chOff x="0" y="0"/>
+          <a:chExt cx="0" cy="0"/>
+        </a:xfrm>
+      </p:grpSpPr>
+      <p:sp>
+        <p:nvSpPr>
+          <p:cNvPr id="2" name="Slide Image Placeholder 1"/>
+          <p:cNvSpPr>
+            <a:spLocks noGrp="1" noRot="1" noChangeAspect="1"/>
+          </p:cNvSpPr>
+          <p:nvPr>
+            <p:ph type="sldImg"/>
+          </p:nvPr>
+        </p:nvSpPr>
+        <p:spPr/>
+      </p:sp>
+      <p:sp>
+        <p:nvSpPr>
+          <p:cNvPr id="3" name="Notes Placeholder 2"/>
+          <p:cNvSpPr>
+            <a:spLocks noGrp="1"/>
+          </p:cNvSpPr>
+          <p:nvPr>
+            <p:ph type="body" idx="1"/>
+          </p:nvPr>
+        </p:nvSpPr>
+        <p:spPr/>
+        <p:txBody>
+          <a:bodyPr/>
+          <a:lstStyle/>
+          <a:p>
+            <a:r>
+              <a:rPr lang="en-US" dirty="0"/>
+              <a:t/>
+            </a:r>
+            <a:endParaRPr lang="en-US" dirty="0"/>
+          </a:p>
+        </p:txBody>
+      </p:sp>
+      <p:sp>
+        <p:nvSpPr>
+          <p:cNvPr id="4" name="Slide Number Placeholder 3"/>
+          <p:cNvSpPr>
+            <a:spLocks noGrp="1"/>
+          </p:cNvSpPr>
+          <p:nvPr>
+            <p:ph type="sldNum" sz="quarter" idx="10"/>
+          </p:nvPr>
+        </p:nvSpPr>
+        <p:spPr/>
+        <p:txBody>
+          <a:bodyPr/>
+          <a:lstStyle/>
+          <a:p>
+            <a:fld id="{F7021451-1387-4CA6-816F-3879F97B5CBC}" type="slidenum">
+              <a:rPr lang="en-US"/>
+              <a:t>22</a:t>
             </a:fld>
             <a:endParaRPr lang="en-US"/>
           </a:p>
@@ -2567,8 +2745,8 @@
         </p:nvSpPr>
         <p:spPr>
           <a:xfrm>
-            <a:off x="457200" y="1463040"/>
-            <a:ext cx="8229600" cy="914400"/>
+            <a:off x="457200" y="1188720"/>
+            <a:ext cx="8229600" cy="1463040"/>
           </a:xfrm>
           <a:prstGeom prst="rect">
             <a:avLst/>
@@ -2584,14 +2762,28 @@
               <a:buNone/>
             </a:pPr>
             <a:r>
-              <a:rPr lang="en-US" sz="3600" b="1" dirty="0">
-                <a:solidFill>
-                  <a:srgbClr val="000000"/>
-                </a:solidFill>
-              </a:rPr>
-              <a:t>Evaluating Refactoring as a Process</a:t>
-            </a:r>
-            <a:endParaRPr lang="en-US" sz="3600" dirty="0"/>
+              <a:rPr lang="en-US" sz="3200" b="1" dirty="0">
+                <a:solidFill>
+                  <a:srgbClr val="000000"/>
+                </a:solidFill>
+              </a:rPr>
+              <a:t>Beyond Before-and-After</a:t>
+            </a:r>
+            <a:endParaRPr lang="en-US" sz="3200" dirty="0"/>
+          </a:p>
+          <a:p>
+            <a:pPr algn="ctr" indent="0" marL="0">
+              <a:buNone/>
+            </a:pPr>
+            <a:r>
+              <a:rPr lang="en-US" sz="3200" b="1" dirty="0">
+                <a:solidFill>
+                  <a:srgbClr val="000000"/>
+                </a:solidFill>
+              </a:rPr>
+              <a:t>Process-Quality Evaluation of Refactoring Sessions</a:t>
+            </a:r>
+            <a:endParaRPr lang="en-US" sz="3200" dirty="0"/>
           </a:p>
         </p:txBody>
       </p:sp>
@@ -2603,7 +2795,7 @@
         </p:nvSpPr>
         <p:spPr>
           <a:xfrm>
-            <a:off x="457200" y="2468880"/>
+            <a:off x="457200" y="2834640"/>
             <a:ext cx="8229600" cy="822960"/>
           </a:xfrm>
           <a:prstGeom prst="rect">
@@ -2758,7 +2950,7 @@
                   <a:srgbClr val="000000"/>
                 </a:solidFill>
               </a:rPr>
-              <a:t>Manual-Refactor: detect + synthesise</a:t>
+              <a:t>Four kinds of divergence</a:t>
             </a:r>
             <a:endParaRPr lang="en-US" sz="2800" dirty="0"/>
           </a:p>
@@ -2798,7 +2990,7 @@
                   <a:srgbClr val="000000"/>
                 </a:solidFill>
               </a:rPr>
-              <a:t>What: developer hand-edited something the IDE could have done safely (and with its precondition checks).</a:t>
+              <a:t>Four categories of process waste - each fitting the four requirements: detectable from the event stream, actionable for the developer, synthesisable as a concrete alternative.</a:t>
             </a:r>
             <a:endParaRPr lang="en-US" sz="1600" dirty="0"/>
           </a:p>
@@ -2816,7 +3008,7 @@
                   <a:srgbClr val="000000"/>
                 </a:solidFill>
               </a:rPr>
-              <a:t>Detect: run RefactoringMiner on sliding commit windows; cross-check against the IDE event stream.</a:t>
+              <a:t>Ordering - right refactorings, wrong sequence.</a:t>
             </a:r>
             <a:endParaRPr lang="en-US" sz="1600" dirty="0"/>
           </a:p>
@@ -2834,7 +3026,7 @@
                   <a:srgbClr val="000000"/>
                 </a:solidFill>
               </a:rPr>
-              <a:t>Anything RefactoringMiner finds that the IDE did not emit is a manual refactoring.</a:t>
+              <a:t>Manual-Refactor - wrong tool (hand-edit when the IDE could safely have done it).</a:t>
             </a:r>
             <a:endParaRPr lang="en-US" sz="1600" dirty="0"/>
           </a:p>
@@ -2852,7 +3044,7 @@
                   <a:srgbClr val="000000"/>
                 </a:solidFill>
               </a:rPr>
-              <a:t>Synthesise: apply the equivalent IDE refactoring, then three-way merge the user's other edits back on top.</a:t>
+              <a:t>Rework - wrong churn (added then removed).</a:t>
             </a:r>
             <a:endParaRPr lang="en-US" sz="1600" dirty="0"/>
           </a:p>
@@ -2870,7 +3062,25 @@
                   <a:srgbClr val="000000"/>
                 </a:solidFill>
               </a:rPr>
-              <a:t>Wrap-and-patch layer reconciles minor JDT ↔ IntelliJ AST differences (e.g. static modifiers, variable liveness) so the synthesised path validates.</a:t>
+              <a:t>Hygiene - missing safety checkpoints (no tests, no commits).</a:t>
+            </a:r>
+            <a:endParaRPr lang="en-US" sz="1600" dirty="0"/>
+          </a:p>
+          <a:p>
+            <a:pPr marL="342900" indent="-342900">
+              <a:spcAft>
+                <a:spcPts val="600"/>
+              </a:spcAft>
+              <a:buSzPct val="100000"/>
+              <a:buChar char="•"/>
+            </a:pPr>
+            <a:r>
+              <a:rPr lang="en-US" sz="1600" dirty="0">
+                <a:solidFill>
+                  <a:srgbClr val="000000"/>
+                </a:solidFill>
+              </a:rPr>
+              <a:t>Each kind gets its own slide next, covering both detection and synthesis.</a:t>
             </a:r>
             <a:endParaRPr lang="en-US" sz="1600" dirty="0"/>
           </a:p>
@@ -2931,7 +3141,7 @@
                   <a:srgbClr val="000000"/>
                 </a:solidFill>
               </a:rPr>
-              <a:t>Rework: detect + synthesise</a:t>
+              <a:t>Ordering: detect + synthesise</a:t>
             </a:r>
             <a:endParaRPr lang="en-US" sz="2800" dirty="0"/>
           </a:p>
@@ -2945,8 +3155,8 @@
         </p:nvSpPr>
         <p:spPr>
           <a:xfrm>
-            <a:off x="457200" y="1188720"/>
-            <a:ext cx="8229600" cy="3657600"/>
+            <a:off x="457200" y="1097280"/>
+            <a:ext cx="8229600" cy="1783080"/>
           </a:xfrm>
           <a:prstGeom prst="rect">
             <a:avLst/>
@@ -2966,14 +3176,14 @@
               <a:buChar char="•"/>
             </a:pPr>
             <a:r>
-              <a:rPr lang="en-US" sz="1600" dirty="0">
-                <a:solidFill>
-                  <a:srgbClr val="000000"/>
-                </a:solidFill>
-              </a:rPr>
-              <a:t>What: code added and later removed (or vice versa) — net-zero churn, but real cost while it was there.</a:t>
-            </a:r>
-            <a:endParaRPr lang="en-US" sz="1600" dirty="0"/>
+              <a:rPr lang="en-US" sz="1400" dirty="0">
+                <a:solidFill>
+                  <a:srgbClr val="000000"/>
+                </a:solidFill>
+              </a:rPr>
+              <a:t>What: the right refactorings, performed in a suboptimal order - final state is fine, intermediate states are worse than they needed to be.</a:t>
+            </a:r>
+            <a:endParaRPr lang="en-US" sz="1400" dirty="0"/>
           </a:p>
           <a:p>
             <a:pPr marL="342900" indent="-342900">
@@ -2984,14 +3194,14 @@
               <a:buChar char="•"/>
             </a:pPr>
             <a:r>
-              <a:rPr lang="en-US" sz="1600" dirty="0">
-                <a:solidFill>
-                  <a:srgbClr val="000000"/>
-                </a:solidFill>
-              </a:rPr>
-              <a:t>Detect: hash normalised lines; pair add/remove events by (file, scope, content-hash).</a:t>
-            </a:r>
-            <a:endParaRPr lang="en-US" sz="1600" dirty="0"/>
+              <a:rPr lang="en-US" sz="1400" dirty="0">
+                <a:solidFill>
+                  <a:srgbClr val="000000"/>
+                </a:solidFill>
+              </a:rPr>
+              <a:t>Detect: find a subsequence of refactorings whose reordering still validates to the user's terminal state (canonical AST hash, formatting/comments ignored).</a:t>
+            </a:r>
+            <a:endParaRPr lang="en-US" sz="1400" dirty="0"/>
           </a:p>
           <a:p>
             <a:pPr marL="342900" indent="-342900">
@@ -3002,14 +3212,14 @@
               <a:buChar char="•"/>
             </a:pPr>
             <a:r>
-              <a:rPr lang="en-US" sz="1600" dirty="0">
-                <a:solidFill>
-                  <a:srgbClr val="000000"/>
-                </a:solidFill>
-              </a:rPr>
-              <a:t>Synthesise: strip both halves from the trajectory; replay the rest of the user's edits unchanged; validate the terminal state matches.</a:t>
-            </a:r>
-            <a:endParaRPr lang="en-US" sz="1600" dirty="0"/>
+              <a:rPr lang="en-US" sz="1400" dirty="0">
+                <a:solidFill>
+                  <a:srgbClr val="000000"/>
+                </a:solidFill>
+              </a:rPr>
+              <a:t>Synthesise: build a dependency DAG over the refactorings in the window.</a:t>
+            </a:r>
+            <a:endParaRPr lang="en-US" sz="1400" dirty="0"/>
           </a:p>
           <a:p>
             <a:pPr marL="342900" indent="-342900">
@@ -3020,17 +3230,41 @@
               <a:buChar char="•"/>
             </a:pPr>
             <a:r>
-              <a:rPr lang="en-US" sz="1600" dirty="0">
-                <a:solidFill>
-                  <a:srgbClr val="000000"/>
-                </a:solidFill>
-              </a:rPr>
-              <a:t>Simplest of the four synthesisers, but high recall — precision and recall both 1.00 on the injection set.</a:t>
-            </a:r>
-            <a:endParaRPr lang="en-US" sz="1600" dirty="0"/>
-          </a:p>
-        </p:txBody>
-      </p:sp>
+              <a:rPr lang="en-US" sz="1400" dirty="0">
+                <a:solidFill>
+                  <a:srgbClr val="000000"/>
+                </a:solidFill>
+              </a:rPr>
+              <a:t>Prefix-trie DFS over valid topological orderings - shares work across common prefixes, rolls back with git checkout on backtrack.</a:t>
+            </a:r>
+            <a:endParaRPr lang="en-US" sz="1400" dirty="0"/>
+          </a:p>
+        </p:txBody>
+      </p:sp>
+      <p:pic>
+        <p:nvPicPr>
+          <p:cNvPr id="4" name="Image 0" descr="images/reorder-synthesis.png">    </p:cNvPr>
+          <p:cNvPicPr>
+            <a:picLocks noChangeAspect="1"/>
+          </p:cNvPicPr>
+          <p:nvPr/>
+        </p:nvPicPr>
+        <p:blipFill>
+          <a:blip r:embed="rId1"/>
+          <a:stretch>
+            <a:fillRect/>
+          </a:stretch>
+        </p:blipFill>
+        <p:spPr>
+          <a:xfrm>
+            <a:off x="1828800" y="3017520"/>
+            <a:ext cx="5486400" cy="1874520"/>
+          </a:xfrm>
+          <a:prstGeom prst="rect">
+            <a:avLst/>
+          </a:prstGeom>
+        </p:spPr>
+      </p:pic>
     </p:spTree>
   </p:cSld>
   <p:clrMapOvr>
@@ -3086,7 +3320,7 @@
                   <a:srgbClr val="000000"/>
                 </a:solidFill>
               </a:rPr>
-              <a:t>Hygiene: detect + synthesise</a:t>
+              <a:t>Manual-Refactor: detect + synthesise</a:t>
             </a:r>
             <a:endParaRPr lang="en-US" sz="2800" dirty="0"/>
           </a:p>
@@ -3100,8 +3334,8 @@
         </p:nvSpPr>
         <p:spPr>
           <a:xfrm>
-            <a:off x="457200" y="1188720"/>
-            <a:ext cx="8229600" cy="3657600"/>
+            <a:off x="457200" y="1097280"/>
+            <a:ext cx="8229600" cy="1691640"/>
           </a:xfrm>
           <a:prstGeom prst="rect">
             <a:avLst/>
@@ -3121,14 +3355,14 @@
               <a:buChar char="•"/>
             </a:pPr>
             <a:r>
-              <a:rPr lang="en-US" sz="1600" dirty="0">
-                <a:solidFill>
-                  <a:srgbClr val="000000"/>
-                </a:solidFill>
-              </a:rPr>
-              <a:t>What: long stretches of work without safety checkpoints — no test runs, no commits.</a:t>
-            </a:r>
-            <a:endParaRPr lang="en-US" sz="1600" dirty="0"/>
+              <a:rPr lang="en-US" sz="1300" dirty="0">
+                <a:solidFill>
+                  <a:srgbClr val="000000"/>
+                </a:solidFill>
+              </a:rPr>
+              <a:t>What: developer hand-edited something the IDE could have done safely (and with its precondition checks).</a:t>
+            </a:r>
+            <a:endParaRPr lang="en-US" sz="1300" dirty="0"/>
           </a:p>
           <a:p>
             <a:pPr marL="342900" indent="-342900">
@@ -3139,14 +3373,14 @@
               <a:buChar char="•"/>
             </a:pPr>
             <a:r>
-              <a:rPr lang="en-US" sz="1600" dirty="0">
-                <a:solidFill>
-                  <a:srgbClr val="000000"/>
-                </a:solidFill>
-              </a:rPr>
-              <a:t>Detect: 60-second windows with no test-run events; commit-gap events when commits are spaced beyond threshold.</a:t>
-            </a:r>
-            <a:endParaRPr lang="en-US" sz="1600" dirty="0"/>
+              <a:rPr lang="en-US" sz="1300" dirty="0">
+                <a:solidFill>
+                  <a:srgbClr val="000000"/>
+                </a:solidFill>
+              </a:rPr>
+              <a:t>Detect: run RefactoringMiner on sliding commit windows; cross-check against the IDE event stream — anything RefactoringMiner finds that the IDE did not emit is a manual refactoring.</a:t>
+            </a:r>
+            <a:endParaRPr lang="en-US" sz="1300" dirty="0"/>
           </a:p>
           <a:p>
             <a:pPr marL="342900" indent="-342900">
@@ -3157,14 +3391,14 @@
               <a:buChar char="•"/>
             </a:pPr>
             <a:r>
-              <a:rPr lang="en-US" sz="1600" dirty="0">
-                <a:solidFill>
-                  <a:srgbClr val="000000"/>
-                </a:solidFill>
-              </a:rPr>
-              <a:t>Synthesise: model an alternative cadence that inserts test-run and commit events at the right points.</a:t>
-            </a:r>
-            <a:endParaRPr lang="en-US" sz="1600" dirty="0"/>
+              <a:rPr lang="en-US" sz="1300" dirty="0">
+                <a:solidFill>
+                  <a:srgbClr val="000000"/>
+                </a:solidFill>
+              </a:rPr>
+              <a:t>Synthesise: apply the equivalent IDE refactoring, then three-way merge the user's other edits back on top.</a:t>
+            </a:r>
+            <a:endParaRPr lang="en-US" sz="1300" dirty="0"/>
           </a:p>
           <a:p>
             <a:pPr marL="342900" indent="-342900">
@@ -3175,35 +3409,41 @@
               <a:buChar char="•"/>
             </a:pPr>
             <a:r>
-              <a:rPr lang="en-US" sz="1600" dirty="0">
-                <a:solidFill>
-                  <a:srgbClr val="000000"/>
-                </a:solidFill>
-              </a:rPr>
-              <a:t>The alternative's J(τ) credits those checkpoints via the skip-tests and commit-gap terms.</a:t>
-            </a:r>
-            <a:endParaRPr lang="en-US" sz="1600" dirty="0"/>
-          </a:p>
-          <a:p>
-            <a:pPr marL="342900" indent="-342900">
-              <a:spcAft>
-                <a:spcPts val="600"/>
-              </a:spcAft>
-              <a:buSzPct val="100000"/>
-              <a:buChar char="•"/>
-            </a:pPr>
-            <a:r>
-              <a:rPr lang="en-US" sz="1600" dirty="0">
-                <a:solidFill>
-                  <a:srgbClr val="000000"/>
-                </a:solidFill>
-              </a:rPr>
-              <a:t>Cheap to compute, but consistently surfaces meaningful divergences in the user study.</a:t>
-            </a:r>
-            <a:endParaRPr lang="en-US" sz="1600" dirty="0"/>
-          </a:p>
-        </p:txBody>
-      </p:sp>
+              <a:rPr lang="en-US" sz="1300" dirty="0">
+                <a:solidFill>
+                  <a:srgbClr val="000000"/>
+                </a:solidFill>
+              </a:rPr>
+              <a:t>Wrap-and-patch layer reconciles minor JDT ↔ IntelliJ AST differences (e.g. static modifiers, variable liveness).</a:t>
+            </a:r>
+            <a:endParaRPr lang="en-US" sz="1300" dirty="0"/>
+          </a:p>
+        </p:txBody>
+      </p:sp>
+      <p:pic>
+        <p:nvPicPr>
+          <p:cNvPr id="4" name="Image 0" descr="images/manual-refactor.png">    </p:cNvPr>
+          <p:cNvPicPr>
+            <a:picLocks noChangeAspect="1"/>
+          </p:cNvPicPr>
+          <p:nvPr/>
+        </p:nvPicPr>
+        <p:blipFill>
+          <a:blip r:embed="rId1"/>
+          <a:stretch>
+            <a:fillRect/>
+          </a:stretch>
+        </p:blipFill>
+        <p:spPr>
+          <a:xfrm>
+            <a:off x="1463040" y="2880360"/>
+            <a:ext cx="6217920" cy="2039112"/>
+          </a:xfrm>
+          <a:prstGeom prst="rect">
+            <a:avLst/>
+          </a:prstGeom>
+        </p:spPr>
+      </p:pic>
     </p:spTree>
   </p:cSld>
   <p:clrMapOvr>
@@ -3259,7 +3499,7 @@
                   <a:srgbClr val="000000"/>
                 </a:solidFill>
               </a:rPr>
-              <a:t>Comparable divergence magnitudes</a:t>
+              <a:t>Rework: detect + synthesise</a:t>
             </a:r>
             <a:endParaRPr lang="en-US" sz="2800" dirty="0"/>
           </a:p>
@@ -3273,8 +3513,8 @@
         </p:nvSpPr>
         <p:spPr>
           <a:xfrm>
-            <a:off x="457200" y="1188720"/>
-            <a:ext cx="8229600" cy="3657600"/>
+            <a:off x="457200" y="1097280"/>
+            <a:ext cx="8229600" cy="1691640"/>
           </a:xfrm>
           <a:prstGeom prst="rect">
             <a:avLst/>
@@ -3294,14 +3534,14 @@
               <a:buChar char="•"/>
             </a:pPr>
             <a:r>
-              <a:rPr lang="en-US" sz="1600" dirty="0">
-                <a:solidFill>
-                  <a:srgbClr val="000000"/>
-                </a:solidFill>
-              </a:rPr>
-              <a:t>Magnitude = J(τ*_final) − J(τ_final).</a:t>
-            </a:r>
-            <a:endParaRPr lang="en-US" sz="1600" dirty="0"/>
+              <a:rPr lang="en-US" sz="1300" dirty="0">
+                <a:solidFill>
+                  <a:srgbClr val="000000"/>
+                </a:solidFill>
+              </a:rPr>
+              <a:t>What: code added and later removed (or vice versa) - net-zero churn, but real cost while it was there.</a:t>
+            </a:r>
+            <a:endParaRPr lang="en-US" sz="1300" dirty="0"/>
           </a:p>
           <a:p>
             <a:pPr marL="342900" indent="-342900">
@@ -3312,14 +3552,14 @@
               <a:buChar char="•"/>
             </a:pPr>
             <a:r>
-              <a:rPr lang="en-US" sz="1600" dirty="0">
-                <a:solidFill>
-                  <a:srgbClr val="000000"/>
-                </a:solidFill>
-              </a:rPr>
-              <a:t>The score gap when the alternative is substituted at the divergence point but the rest of the user's trajectory is left unchanged.</a:t>
-            </a:r>
-            <a:endParaRPr lang="en-US" sz="1600" dirty="0"/>
+              <a:rPr lang="en-US" sz="1300" dirty="0">
+                <a:solidFill>
+                  <a:srgbClr val="000000"/>
+                </a:solidFill>
+              </a:rPr>
+              <a:t>Detect: hash normalised lines; pair add/remove events by (file, scope, content-hash).</a:t>
+            </a:r>
+            <a:endParaRPr lang="en-US" sz="1300" dirty="0"/>
           </a:p>
           <a:p>
             <a:pPr marL="342900" indent="-342900">
@@ -3330,14 +3570,14 @@
               <a:buChar char="•"/>
             </a:pPr>
             <a:r>
-              <a:rPr lang="en-US" sz="1600" dirty="0">
-                <a:solidFill>
-                  <a:srgbClr val="000000"/>
-                </a:solidFill>
-              </a:rPr>
-              <a:t>Makes magnitudes comparable across all four divergence kinds.</a:t>
-            </a:r>
-            <a:endParaRPr lang="en-US" sz="1600" dirty="0"/>
+              <a:rPr lang="en-US" sz="1300" dirty="0">
+                <a:solidFill>
+                  <a:srgbClr val="000000"/>
+                </a:solidFill>
+              </a:rPr>
+              <a:t>Synthesise: strip both halves from the trajectory; replay the rest of the user's edits unchanged; validate the terminal state matches.</a:t>
+            </a:r>
+            <a:endParaRPr lang="en-US" sz="1300" dirty="0"/>
           </a:p>
           <a:p>
             <a:pPr marL="342900" indent="-342900">
@@ -3348,35 +3588,41 @@
               <a:buChar char="•"/>
             </a:pPr>
             <a:r>
-              <a:rPr lang="en-US" sz="1600" dirty="0">
-                <a:solidFill>
-                  <a:srgbClr val="000000"/>
-                </a:solidFill>
-              </a:rPr>
-              <a:t>Lets the dashboard rank divergence points and surface the most impactful first.</a:t>
-            </a:r>
-            <a:endParaRPr lang="en-US" sz="1600" dirty="0"/>
-          </a:p>
-          <a:p>
-            <a:pPr marL="342900" indent="-342900">
-              <a:spcAft>
-                <a:spcPts val="600"/>
-              </a:spcAft>
-              <a:buSzPct val="100000"/>
-              <a:buChar char="•"/>
-            </a:pPr>
-            <a:r>
-              <a:rPr lang="en-US" sz="1600" dirty="0">
-                <a:solidFill>
-                  <a:srgbClr val="000000"/>
-                </a:solidFill>
-              </a:rPr>
-              <a:t>This is the number the demo will point at.</a:t>
-            </a:r>
-            <a:endParaRPr lang="en-US" sz="1600" dirty="0"/>
-          </a:p>
-        </p:txBody>
-      </p:sp>
+              <a:rPr lang="en-US" sz="1300" dirty="0">
+                <a:solidFill>
+                  <a:srgbClr val="000000"/>
+                </a:solidFill>
+              </a:rPr>
+              <a:t>Simplest of the four synthesisers, but high recall - precision and recall both 1.00 on the injection set.</a:t>
+            </a:r>
+            <a:endParaRPr lang="en-US" sz="1300" dirty="0"/>
+          </a:p>
+        </p:txBody>
+      </p:sp>
+      <p:pic>
+        <p:nvPicPr>
+          <p:cNvPr id="4" name="Image 0" descr="images/rework.png">    </p:cNvPr>
+          <p:cNvPicPr>
+            <a:picLocks noChangeAspect="1"/>
+          </p:cNvPicPr>
+          <p:nvPr/>
+        </p:nvPicPr>
+        <p:blipFill>
+          <a:blip r:embed="rId1"/>
+          <a:stretch>
+            <a:fillRect/>
+          </a:stretch>
+        </p:blipFill>
+        <p:spPr>
+          <a:xfrm>
+            <a:off x="2377440" y="2834640"/>
+            <a:ext cx="4389120" cy="2121408"/>
+          </a:xfrm>
+          <a:prstGeom prst="rect">
+            <a:avLst/>
+          </a:prstGeom>
+        </p:spPr>
+      </p:pic>
     </p:spTree>
   </p:cSld>
   <p:clrMapOvr>
@@ -3432,7 +3678,7 @@
                   <a:srgbClr val="000000"/>
                 </a:solidFill>
               </a:rPr>
-              <a:t>Three datasets</a:t>
+              <a:t>Hygiene: detect + synthesise</a:t>
             </a:r>
             <a:endParaRPr lang="en-US" sz="2800" dirty="0"/>
           </a:p>
@@ -3472,7 +3718,7 @@
                   <a:srgbClr val="000000"/>
                 </a:solidFill>
               </a:rPr>
-              <a:t>45 hand-recorded injection sessions with deliberately-injected bad behaviours (labelled ground truth).</a:t>
+              <a:t>What: long stretches of work without safety checkpoints - no test runs, no commits.</a:t>
             </a:r>
             <a:endParaRPr lang="en-US" sz="1600" dirty="0"/>
           </a:p>
@@ -3490,7 +3736,7 @@
                   <a:srgbClr val="000000"/>
                 </a:solidFill>
               </a:rPr>
-              <a:t>30-session randomised user study — 5 participants, 3 with-feedback vs 2 no-feedback baseline.</a:t>
+              <a:t>Detect: 60-second windows with no test-run events; commit-gap events when commits are spaced beyond threshold.</a:t>
             </a:r>
             <a:endParaRPr lang="en-US" sz="1600" dirty="0"/>
           </a:p>
@@ -3508,7 +3754,43 @@
                   <a:srgbClr val="000000"/>
                 </a:solidFill>
               </a:rPr>
-              <a:t>48-session agent extension across 8 LLM agent stacks (mentioned briefly — motivates future work).</a:t>
+              <a:t>Synthesise: model an alternative cadence that inserts test-run and commit events at the right points.</a:t>
+            </a:r>
+            <a:endParaRPr lang="en-US" sz="1600" dirty="0"/>
+          </a:p>
+          <a:p>
+            <a:pPr marL="342900" indent="-342900">
+              <a:spcAft>
+                <a:spcPts val="600"/>
+              </a:spcAft>
+              <a:buSzPct val="100000"/>
+              <a:buChar char="•"/>
+            </a:pPr>
+            <a:r>
+              <a:rPr lang="en-US" sz="1600" dirty="0">
+                <a:solidFill>
+                  <a:srgbClr val="000000"/>
+                </a:solidFill>
+              </a:rPr>
+              <a:t>The alternative's J(τ) credits those checkpoints via the skip-tests and commit-gap terms.</a:t>
+            </a:r>
+            <a:endParaRPr lang="en-US" sz="1600" dirty="0"/>
+          </a:p>
+          <a:p>
+            <a:pPr marL="342900" indent="-342900">
+              <a:spcAft>
+                <a:spcPts val="600"/>
+              </a:spcAft>
+              <a:buSzPct val="100000"/>
+              <a:buChar char="•"/>
+            </a:pPr>
+            <a:r>
+              <a:rPr lang="en-US" sz="1600" dirty="0">
+                <a:solidFill>
+                  <a:srgbClr val="000000"/>
+                </a:solidFill>
+              </a:rPr>
+              <a:t>Cheap to compute, but consistently surfaces meaningful divergences in the user study.</a:t>
             </a:r>
             <a:endParaRPr lang="en-US" sz="1600" dirty="0"/>
           </a:p>
@@ -3569,7 +3851,7 @@
                   <a:srgbClr val="000000"/>
                 </a:solidFill>
               </a:rPr>
-              <a:t>Detector precision &amp; recall</a:t>
+              <a:t>Comparable divergence magnitudes</a:t>
             </a:r>
             <a:endParaRPr lang="en-US" sz="2800" dirty="0"/>
           </a:p>
@@ -3609,7 +3891,7 @@
                   <a:srgbClr val="000000"/>
                 </a:solidFill>
               </a:rPr>
-              <a:t>Precision = 1.00 across all four divergence kinds — every detection is valid.</a:t>
+              <a:t>Magnitude = J(τ*_final) − J(τ_final).</a:t>
             </a:r>
             <a:endParaRPr lang="en-US" sz="1600" dirty="0"/>
           </a:p>
@@ -3627,7 +3909,7 @@
                   <a:srgbClr val="000000"/>
                 </a:solidFill>
               </a:rPr>
-              <a:t>Recall — Rework 1.00, Hygiene 1.00, Manual-Refactor 0.76, Ordering 0.40.</a:t>
+              <a:t>The score gap when the alternative is substituted at the divergence point but the rest of the user's trajectory is left unchanged.</a:t>
             </a:r>
             <a:endParaRPr lang="en-US" sz="1600" dirty="0"/>
           </a:p>
@@ -3645,7 +3927,7 @@
                   <a:srgbClr val="000000"/>
                 </a:solidFill>
               </a:rPr>
-              <a:t>Inter-rater agreement (Cohen's κ) — 1.00 for Ordering and Manual-Refactor, 0.86 for Rework, 0.72 for Hygiene.</a:t>
+              <a:t>Makes magnitudes comparable across all four divergence kinds.</a:t>
             </a:r>
             <a:endParaRPr lang="en-US" sz="1600" dirty="0"/>
           </a:p>
@@ -3663,7 +3945,25 @@
                   <a:srgbClr val="000000"/>
                 </a:solidFill>
               </a:rPr>
-              <a:t>Ordering recall gap is honest and explained: the synthesiser rejects windows it cannot safely reproduce. A scope limit, not a detector flaw.</a:t>
+              <a:t>Lets the dashboard surface each divergence point alongside its score impact, so the highest-impact moments are easy to spot in the session summary.</a:t>
+            </a:r>
+            <a:endParaRPr lang="en-US" sz="1600" dirty="0"/>
+          </a:p>
+          <a:p>
+            <a:pPr marL="342900" indent="-342900">
+              <a:spcAft>
+                <a:spcPts val="600"/>
+              </a:spcAft>
+              <a:buSzPct val="100000"/>
+              <a:buChar char="•"/>
+            </a:pPr>
+            <a:r>
+              <a:rPr lang="en-US" sz="1600" dirty="0">
+                <a:solidFill>
+                  <a:srgbClr val="000000"/>
+                </a:solidFill>
+              </a:rPr>
+              <a:t>This is the number the demo will point at.</a:t>
             </a:r>
             <a:endParaRPr lang="en-US" sz="1600" dirty="0"/>
           </a:p>
@@ -3702,8 +4002,8 @@
         </p:nvSpPr>
         <p:spPr>
           <a:xfrm>
-            <a:off x="457200" y="274320"/>
-            <a:ext cx="8229600" cy="640080"/>
+            <a:off x="457200" y="1828800"/>
+            <a:ext cx="8229600" cy="914400"/>
           </a:xfrm>
           <a:prstGeom prst="rect">
             <a:avLst/>
@@ -3715,18 +4015,18 @@
           <a:bodyPr wrap="square" lIns="0" tIns="0" rIns="0" bIns="0" rtlCol="0" anchor="ctr"/>
           <a:lstStyle/>
           <a:p>
-            <a:pPr indent="0" marL="0">
+            <a:pPr algn="ctr" indent="0" marL="0">
               <a:buNone/>
             </a:pPr>
             <a:r>
-              <a:rPr lang="en-US" sz="2800" b="1" dirty="0">
-                <a:solidFill>
-                  <a:srgbClr val="000000"/>
-                </a:solidFill>
-              </a:rPr>
-              <a:t>Score robustness</a:t>
-            </a:r>
-            <a:endParaRPr lang="en-US" sz="2800" dirty="0"/>
+              <a:rPr lang="en-US" sz="4400" b="1" dirty="0">
+                <a:solidFill>
+                  <a:srgbClr val="000000"/>
+                </a:solidFill>
+              </a:rPr>
+              <a:t>Demo (part 2): results</a:t>
+            </a:r>
+            <a:endParaRPr lang="en-US" sz="4400" dirty="0"/>
           </a:p>
         </p:txBody>
       </p:sp>
@@ -3738,8 +4038,8 @@
         </p:nvSpPr>
         <p:spPr>
           <a:xfrm>
-            <a:off x="457200" y="1188720"/>
-            <a:ext cx="8229600" cy="3657600"/>
+            <a:off x="457200" y="2834640"/>
+            <a:ext cx="8229600" cy="1097280"/>
           </a:xfrm>
           <a:prstGeom prst="rect">
             <a:avLst/>
@@ -3748,79 +4048,21 @@
           <a:ln/>
         </p:spPr>
         <p:txBody>
-          <a:bodyPr wrap="square" rtlCol="0" anchor="t"/>
-          <a:lstStyle/>
-          <a:p>
-            <a:pPr marL="342900" indent="-342900">
-              <a:spcAft>
-                <a:spcPts val="600"/>
-              </a:spcAft>
-              <a:buSzPct val="100000"/>
-              <a:buChar char="•"/>
-            </a:pPr>
-            <a:r>
-              <a:rPr lang="en-US" sz="1600" dirty="0">
-                <a:solidFill>
-                  <a:srgbClr val="000000"/>
-                </a:solidFill>
-              </a:rPr>
-              <a:t>Single-knob sensitivity sweep: scale any one weight by {0.1×–10×}, top-1 recommendation is preserved in 96.5% of user-study cases.</a:t>
-            </a:r>
-            <a:endParaRPr lang="en-US" sz="1600" dirty="0"/>
-          </a:p>
-          <a:p>
-            <a:pPr marL="342900" indent="-342900">
-              <a:spcAft>
-                <a:spcPts val="600"/>
-              </a:spcAft>
-              <a:buSzPct val="100000"/>
-              <a:buChar char="•"/>
-            </a:pPr>
-            <a:r>
-              <a:rPr lang="en-US" sz="1600" dirty="0">
-                <a:solidFill>
-                  <a:srgbClr val="000000"/>
-                </a:solidFill>
-              </a:rPr>
-              <a:t>Multi-knob Monte Carlo (200 samples): top-1 stability drops to 84.6%; mean Kendall τ = 0.586.</a:t>
-            </a:r>
-            <a:endParaRPr lang="en-US" sz="1600" dirty="0"/>
-          </a:p>
-          <a:p>
-            <a:pPr marL="342900" indent="-342900">
-              <a:spcAft>
-                <a:spcPts val="600"/>
-              </a:spcAft>
-              <a:buSzPct val="100000"/>
-              <a:buChar char="•"/>
-            </a:pPr>
-            <a:r>
-              <a:rPr lang="en-US" sz="1600" dirty="0">
-                <a:solidFill>
-                  <a:srgbClr val="000000"/>
-                </a:solidFill>
-              </a:rPr>
-              <a:t>Honest framing — stable near the chosen weights, less stable under arbitrary joint perturbations.</a:t>
-            </a:r>
-            <a:endParaRPr lang="en-US" sz="1600" dirty="0"/>
-          </a:p>
-          <a:p>
-            <a:pPr marL="342900" indent="-342900">
-              <a:spcAft>
-                <a:spcPts val="600"/>
-              </a:spcAft>
-              <a:buSzPct val="100000"/>
-              <a:buChar char="•"/>
-            </a:pPr>
-            <a:r>
-              <a:rPr lang="en-US" sz="1600" dirty="0">
-                <a:solidFill>
-                  <a:srgbClr val="000000"/>
-                </a:solidFill>
-              </a:rPr>
-              <a:t>Ablation confirms each process term contributes real signal; endpoint gain alone does not recover the ranking.</a:t>
-            </a:r>
-            <a:endParaRPr lang="en-US" sz="1600" dirty="0"/>
+          <a:bodyPr wrap="square" rtlCol="0" anchor="ctr"/>
+          <a:lstStyle/>
+          <a:p>
+            <a:pPr algn="ctr" indent="0" marL="0">
+              <a:buNone/>
+            </a:pPr>
+            <a:r>
+              <a:rPr lang="en-US" sz="1800" i="1" dirty="0">
+                <a:solidFill>
+                  <a:srgbClr val="555555"/>
+                </a:solidFill>
+              </a:rPr>
+              <a:t>Now the live session has been analysed: walk through the divergence points the tool found, then show a higher-scoring alternative I prepared earlier.</a:t>
+            </a:r>
+            <a:endParaRPr lang="en-US" sz="1800" dirty="0"/>
           </a:p>
         </p:txBody>
       </p:sp>
@@ -3879,106 +4121,520 @@
                   <a:srgbClr val="000000"/>
                 </a:solidFill>
               </a:rPr>
-              <a:t>User study: does feedback change behaviour?</a:t>
+              <a:t>What we wanted to evaluate</a:t>
             </a:r>
             <a:endParaRPr lang="en-US" sz="2800" dirty="0"/>
           </a:p>
         </p:txBody>
       </p:sp>
-      <p:sp>
-        <p:nvSpPr>
-          <p:cNvPr id="3" name="Text 1"/>
-          <p:cNvSpPr/>
-          <p:nvPr/>
-        </p:nvSpPr>
-        <p:spPr>
-          <a:xfrm>
-            <a:off x="457200" y="1188720"/>
-            <a:ext cx="8229600" cy="3657600"/>
-          </a:xfrm>
-          <a:prstGeom prst="rect">
-            <a:avLst/>
-          </a:prstGeom>
-          <a:noFill/>
-          <a:ln/>
-        </p:spPr>
-        <p:txBody>
-          <a:bodyPr wrap="square" rtlCol="0" anchor="t"/>
-          <a:lstStyle/>
-          <a:p>
-            <a:pPr marL="342900" indent="-342900">
-              <a:spcAft>
-                <a:spcPts val="600"/>
-              </a:spcAft>
-              <a:buSzPct val="100000"/>
-              <a:buChar char="•"/>
-            </a:pPr>
-            <a:r>
-              <a:rPr lang="en-US" sz="1600" dirty="0">
-                <a:solidFill>
-                  <a:srgbClr val="000000"/>
-                </a:solidFill>
-              </a:rPr>
-              <a:t>With-feedback group: 2.7 divergence points per session.</a:t>
-            </a:r>
-            <a:endParaRPr lang="en-US" sz="1600" dirty="0"/>
-          </a:p>
-          <a:p>
-            <a:pPr marL="342900" indent="-342900">
-              <a:spcAft>
-                <a:spcPts val="600"/>
-              </a:spcAft>
-              <a:buSzPct val="100000"/>
-              <a:buChar char="•"/>
-            </a:pPr>
-            <a:r>
-              <a:rPr lang="en-US" sz="1600" dirty="0">
-                <a:solidFill>
-                  <a:srgbClr val="000000"/>
-                </a:solidFill>
-              </a:rPr>
-              <a:t>No-feedback baseline: 6.0 divergence points per session — 2.2× difference.</a:t>
-            </a:r>
-            <a:endParaRPr lang="en-US" sz="1600" dirty="0"/>
-          </a:p>
-          <a:p>
-            <a:pPr marL="342900" indent="-342900">
-              <a:spcAft>
-                <a:spcPts val="600"/>
-              </a:spcAft>
-              <a:buSzPct val="100000"/>
-              <a:buChar char="•"/>
-            </a:pPr>
-            <a:r>
-              <a:rPr lang="en-US" sz="1600" dirty="0">
-                <a:solidFill>
-                  <a:srgbClr val="000000"/>
-                </a:solidFill>
-              </a:rPr>
-              <a:t>Gain-stripped process-score slope across the 6-session arc — +4.47 per session with feedback, −0.40 per session without.</a:t>
-            </a:r>
-            <a:endParaRPr lang="en-US" sz="1600" dirty="0"/>
-          </a:p>
-          <a:p>
-            <a:pPr marL="342900" indent="-342900">
-              <a:spcAft>
-                <a:spcPts val="600"/>
-              </a:spcAft>
-              <a:buSzPct val="100000"/>
-              <a:buChar char="•"/>
-            </a:pPr>
-            <a:r>
-              <a:rPr lang="en-US" sz="1600" dirty="0">
-                <a:solidFill>
-                  <a:srgbClr val="000000"/>
-                </a:solidFill>
-              </a:rPr>
-              <a:t>Caveat: n=3 vs n=2 is directional evidence, not a hypothesis test.</a:t>
-            </a:r>
-            <a:endParaRPr lang="en-US" sz="1600" dirty="0"/>
-          </a:p>
-        </p:txBody>
-      </p:sp>
+      <p:graphicFrame>
+        <p:nvGraphicFramePr>
+          <p:cNvPr id="18" name="Table 0"/>
+          <p:cNvGraphicFramePr>
+            <a:graphicFrameLocks noGrp="1"/>
+          </p:cNvGraphicFramePr>
+          <p:nvPr>
+            <p:extLst>
+              <p:ext uri="{D42A27DB-BD31-4B8C-83A1-F6EECF244321}">
+                <p14:modId xmlns:p14="http://schemas.microsoft.com/office/powerpoint/2010/main" val="1579011935"/>
+              </p:ext>
+            </p:extLst>
+          </p:nvPr>
+        </p:nvGraphicFramePr>
+        <p:xfrm>
+          <a:off x="457200" y="1280160"/>
+          <a:ext cx="8229600" cy="914400"/>
+        </p:xfrm>
+        <a:graphic>
+          <a:graphicData uri="http://schemas.openxmlformats.org/drawingml/2006/table">
+            <a:tbl>
+              <a:tblPr/>
+              <a:tblGrid>
+                <a:gridCol w="3474720"/>
+                <a:gridCol w="4754880"/>
+              </a:tblGrid>
+              <a:tr h="0">
+                <a:tc>
+                  <a:txBody>
+                    <a:bodyPr/>
+                    <a:lstStyle/>
+                    <a:p>
+                      <a:pPr algn="l" indent="0" marL="0">
+                        <a:buNone/>
+                      </a:pPr>
+                      <a:r>
+                        <a:rPr lang="en-US" sz="1300" b="1" dirty="0">
+                          <a:solidFill>
+                            <a:srgbClr val="1A1A1A"/>
+                          </a:solidFill>
+                        </a:rPr>
+                        <a:t>Question</a:t>
+                      </a:r>
+                      <a:endParaRPr lang="en-US" sz="1300" dirty="0"/>
+                    </a:p>
+                  </a:txBody>
+                  <a:tcPr marL="73152" marR="73152" marT="73152" marB="73152" anchor="ctr">
+                    <a:lnL w="6350" cap="flat" cmpd="sng" algn="ctr">
+                      <a:solidFill>
+                        <a:srgbClr val="CCCCCC"/>
+                      </a:solidFill>
+                      <a:prstDash val="solid"/>
+                      <a:round/>
+                      <a:headEnd type="none" w="med" len="med"/>
+                      <a:tailEnd type="none" w="med" len="med"/>
+                    </a:lnL>
+                    <a:lnR w="6350" cap="flat" cmpd="sng" algn="ctr">
+                      <a:solidFill>
+                        <a:srgbClr val="CCCCCC"/>
+                      </a:solidFill>
+                      <a:prstDash val="solid"/>
+                      <a:round/>
+                      <a:headEnd type="none" w="med" len="med"/>
+                      <a:tailEnd type="none" w="med" len="med"/>
+                    </a:lnR>
+                    <a:lnT w="6350" cap="flat" cmpd="sng" algn="ctr">
+                      <a:solidFill>
+                        <a:srgbClr val="CCCCCC"/>
+                      </a:solidFill>
+                      <a:prstDash val="solid"/>
+                      <a:round/>
+                      <a:headEnd type="none" w="med" len="med"/>
+                      <a:tailEnd type="none" w="med" len="med"/>
+                    </a:lnT>
+                    <a:lnB w="6350" cap="flat" cmpd="sng" algn="ctr">
+                      <a:solidFill>
+                        <a:srgbClr val="CCCCCC"/>
+                      </a:solidFill>
+                      <a:prstDash val="solid"/>
+                      <a:round/>
+                      <a:headEnd type="none" w="med" len="med"/>
+                      <a:tailEnd type="none" w="med" len="med"/>
+                    </a:lnB>
+                    <a:solidFill>
+                      <a:srgbClr val="F0F0F0"/>
+                    </a:solidFill>
+                  </a:tcPr>
+                </a:tc>
+                <a:tc>
+                  <a:txBody>
+                    <a:bodyPr/>
+                    <a:lstStyle/>
+                    <a:p>
+                      <a:pPr algn="l" indent="0" marL="0">
+                        <a:buNone/>
+                      </a:pPr>
+                      <a:r>
+                        <a:rPr lang="en-US" sz="1300" b="1" dirty="0">
+                          <a:solidFill>
+                            <a:srgbClr val="1A1A1A"/>
+                          </a:solidFill>
+                        </a:rPr>
+                        <a:t>Answered by</a:t>
+                      </a:r>
+                      <a:endParaRPr lang="en-US" sz="1300" dirty="0"/>
+                    </a:p>
+                  </a:txBody>
+                  <a:tcPr marL="73152" marR="73152" marT="73152" marB="73152" anchor="ctr">
+                    <a:lnL w="6350" cap="flat" cmpd="sng" algn="ctr">
+                      <a:solidFill>
+                        <a:srgbClr val="CCCCCC"/>
+                      </a:solidFill>
+                      <a:prstDash val="solid"/>
+                      <a:round/>
+                      <a:headEnd type="none" w="med" len="med"/>
+                      <a:tailEnd type="none" w="med" len="med"/>
+                    </a:lnL>
+                    <a:lnR w="6350" cap="flat" cmpd="sng" algn="ctr">
+                      <a:solidFill>
+                        <a:srgbClr val="CCCCCC"/>
+                      </a:solidFill>
+                      <a:prstDash val="solid"/>
+                      <a:round/>
+                      <a:headEnd type="none" w="med" len="med"/>
+                      <a:tailEnd type="none" w="med" len="med"/>
+                    </a:lnR>
+                    <a:lnT w="6350" cap="flat" cmpd="sng" algn="ctr">
+                      <a:solidFill>
+                        <a:srgbClr val="CCCCCC"/>
+                      </a:solidFill>
+                      <a:prstDash val="solid"/>
+                      <a:round/>
+                      <a:headEnd type="none" w="med" len="med"/>
+                      <a:tailEnd type="none" w="med" len="med"/>
+                    </a:lnT>
+                    <a:lnB w="6350" cap="flat" cmpd="sng" algn="ctr">
+                      <a:solidFill>
+                        <a:srgbClr val="CCCCCC"/>
+                      </a:solidFill>
+                      <a:prstDash val="solid"/>
+                      <a:round/>
+                      <a:headEnd type="none" w="med" len="med"/>
+                      <a:tailEnd type="none" w="med" len="med"/>
+                    </a:lnB>
+                    <a:solidFill>
+                      <a:srgbClr val="F0F0F0"/>
+                    </a:solidFill>
+                  </a:tcPr>
+                </a:tc>
+              </a:tr>
+              <a:tr h="0">
+                <a:tc>
+                  <a:txBody>
+                    <a:bodyPr/>
+                    <a:lstStyle/>
+                    <a:p>
+                      <a:pPr algn="l" indent="0" marL="0">
+                        <a:buNone/>
+                      </a:pPr>
+                      <a:r>
+                        <a:rPr lang="en-US" sz="1300" b="1" dirty="0">
+                          <a:solidFill>
+                            <a:srgbClr val="1A1A1A"/>
+                          </a:solidFill>
+                        </a:rPr>
+                        <a:t>Is the tool accurate? Does it detect real divergences without false positives?</a:t>
+                      </a:r>
+                      <a:endParaRPr lang="en-US" sz="1300" dirty="0"/>
+                    </a:p>
+                  </a:txBody>
+                  <a:tcPr marL="91440" marR="91440" marT="91440" marB="91440" anchor="ctr">
+                    <a:lnL w="6350" cap="flat" cmpd="sng" algn="ctr">
+                      <a:solidFill>
+                        <a:srgbClr val="CCCCCC"/>
+                      </a:solidFill>
+                      <a:prstDash val="solid"/>
+                      <a:round/>
+                      <a:headEnd type="none" w="med" len="med"/>
+                      <a:tailEnd type="none" w="med" len="med"/>
+                    </a:lnL>
+                    <a:lnR w="6350" cap="flat" cmpd="sng" algn="ctr">
+                      <a:solidFill>
+                        <a:srgbClr val="CCCCCC"/>
+                      </a:solidFill>
+                      <a:prstDash val="solid"/>
+                      <a:round/>
+                      <a:headEnd type="none" w="med" len="med"/>
+                      <a:tailEnd type="none" w="med" len="med"/>
+                    </a:lnR>
+                    <a:lnT w="6350" cap="flat" cmpd="sng" algn="ctr">
+                      <a:solidFill>
+                        <a:srgbClr val="CCCCCC"/>
+                      </a:solidFill>
+                      <a:prstDash val="solid"/>
+                      <a:round/>
+                      <a:headEnd type="none" w="med" len="med"/>
+                      <a:tailEnd type="none" w="med" len="med"/>
+                    </a:lnT>
+                    <a:lnB w="6350" cap="flat" cmpd="sng" algn="ctr">
+                      <a:solidFill>
+                        <a:srgbClr val="CCCCCC"/>
+                      </a:solidFill>
+                      <a:prstDash val="solid"/>
+                      <a:round/>
+                      <a:headEnd type="none" w="med" len="med"/>
+                      <a:tailEnd type="none" w="med" len="med"/>
+                    </a:lnB>
+                  </a:tcPr>
+                </a:tc>
+                <a:tc>
+                  <a:txBody>
+                    <a:bodyPr/>
+                    <a:lstStyle/>
+                    <a:p>
+                      <a:pPr algn="l" indent="0" marL="0">
+                        <a:buNone/>
+                      </a:pPr>
+                      <a:r>
+                        <a:rPr lang="en-US" sz="1300" dirty="0">
+                          <a:solidFill>
+                            <a:srgbClr val="555555"/>
+                          </a:solidFill>
+                        </a:rPr>
+                        <a:t>45 labelled injection sessions, scored against per-kind precision and recall (Slide 18).</a:t>
+                      </a:r>
+                      <a:endParaRPr lang="en-US" sz="1300" dirty="0"/>
+                    </a:p>
+                  </a:txBody>
+                  <a:tcPr marL="91440" marR="91440" marT="91440" marB="91440" anchor="ctr">
+                    <a:lnL w="6350" cap="flat" cmpd="sng" algn="ctr">
+                      <a:solidFill>
+                        <a:srgbClr val="CCCCCC"/>
+                      </a:solidFill>
+                      <a:prstDash val="solid"/>
+                      <a:round/>
+                      <a:headEnd type="none" w="med" len="med"/>
+                      <a:tailEnd type="none" w="med" len="med"/>
+                    </a:lnL>
+                    <a:lnR w="6350" cap="flat" cmpd="sng" algn="ctr">
+                      <a:solidFill>
+                        <a:srgbClr val="CCCCCC"/>
+                      </a:solidFill>
+                      <a:prstDash val="solid"/>
+                      <a:round/>
+                      <a:headEnd type="none" w="med" len="med"/>
+                      <a:tailEnd type="none" w="med" len="med"/>
+                    </a:lnR>
+                    <a:lnT w="6350" cap="flat" cmpd="sng" algn="ctr">
+                      <a:solidFill>
+                        <a:srgbClr val="CCCCCC"/>
+                      </a:solidFill>
+                      <a:prstDash val="solid"/>
+                      <a:round/>
+                      <a:headEnd type="none" w="med" len="med"/>
+                      <a:tailEnd type="none" w="med" len="med"/>
+                    </a:lnT>
+                    <a:lnB w="6350" cap="flat" cmpd="sng" algn="ctr">
+                      <a:solidFill>
+                        <a:srgbClr val="CCCCCC"/>
+                      </a:solidFill>
+                      <a:prstDash val="solid"/>
+                      <a:round/>
+                      <a:headEnd type="none" w="med" len="med"/>
+                      <a:tailEnd type="none" w="med" len="med"/>
+                    </a:lnB>
+                  </a:tcPr>
+                </a:tc>
+              </a:tr>
+              <a:tr h="0">
+                <a:tc>
+                  <a:txBody>
+                    <a:bodyPr/>
+                    <a:lstStyle/>
+                    <a:p>
+                      <a:pPr algn="l" indent="0" marL="0">
+                        <a:buNone/>
+                      </a:pPr>
+                      <a:r>
+                        <a:rPr lang="en-US" sz="1300" b="1" dirty="0">
+                          <a:solidFill>
+                            <a:srgbClr val="1A1A1A"/>
+                          </a:solidFill>
+                        </a:rPr>
+                        <a:t>Is the process score reliable? Does the ranking hold up when the weights are perturbed?</a:t>
+                      </a:r>
+                      <a:endParaRPr lang="en-US" sz="1300" dirty="0"/>
+                    </a:p>
+                  </a:txBody>
+                  <a:tcPr marL="91440" marR="91440" marT="91440" marB="91440" anchor="ctr">
+                    <a:lnL w="6350" cap="flat" cmpd="sng" algn="ctr">
+                      <a:solidFill>
+                        <a:srgbClr val="CCCCCC"/>
+                      </a:solidFill>
+                      <a:prstDash val="solid"/>
+                      <a:round/>
+                      <a:headEnd type="none" w="med" len="med"/>
+                      <a:tailEnd type="none" w="med" len="med"/>
+                    </a:lnL>
+                    <a:lnR w="6350" cap="flat" cmpd="sng" algn="ctr">
+                      <a:solidFill>
+                        <a:srgbClr val="CCCCCC"/>
+                      </a:solidFill>
+                      <a:prstDash val="solid"/>
+                      <a:round/>
+                      <a:headEnd type="none" w="med" len="med"/>
+                      <a:tailEnd type="none" w="med" len="med"/>
+                    </a:lnR>
+                    <a:lnT w="6350" cap="flat" cmpd="sng" algn="ctr">
+                      <a:solidFill>
+                        <a:srgbClr val="CCCCCC"/>
+                      </a:solidFill>
+                      <a:prstDash val="solid"/>
+                      <a:round/>
+                      <a:headEnd type="none" w="med" len="med"/>
+                      <a:tailEnd type="none" w="med" len="med"/>
+                    </a:lnT>
+                    <a:lnB w="6350" cap="flat" cmpd="sng" algn="ctr">
+                      <a:solidFill>
+                        <a:srgbClr val="CCCCCC"/>
+                      </a:solidFill>
+                      <a:prstDash val="solid"/>
+                      <a:round/>
+                      <a:headEnd type="none" w="med" len="med"/>
+                      <a:tailEnd type="none" w="med" len="med"/>
+                    </a:lnB>
+                  </a:tcPr>
+                </a:tc>
+                <a:tc>
+                  <a:txBody>
+                    <a:bodyPr/>
+                    <a:lstStyle/>
+                    <a:p>
+                      <a:pPr algn="l" indent="0" marL="0">
+                        <a:buNone/>
+                      </a:pPr>
+                      <a:r>
+                        <a:rPr lang="en-US" sz="1300" dirty="0">
+                          <a:solidFill>
+                            <a:srgbClr val="555555"/>
+                          </a:solidFill>
+                        </a:rPr>
+                        <a:t>Injection set + user-study rankable subset, used for the sensitivity sweep and ablation study (Slide 19).</a:t>
+                      </a:r>
+                      <a:endParaRPr lang="en-US" sz="1300" dirty="0"/>
+                    </a:p>
+                  </a:txBody>
+                  <a:tcPr marL="91440" marR="91440" marT="91440" marB="91440" anchor="ctr">
+                    <a:lnL w="6350" cap="flat" cmpd="sng" algn="ctr">
+                      <a:solidFill>
+                        <a:srgbClr val="CCCCCC"/>
+                      </a:solidFill>
+                      <a:prstDash val="solid"/>
+                      <a:round/>
+                      <a:headEnd type="none" w="med" len="med"/>
+                      <a:tailEnd type="none" w="med" len="med"/>
+                    </a:lnL>
+                    <a:lnR w="6350" cap="flat" cmpd="sng" algn="ctr">
+                      <a:solidFill>
+                        <a:srgbClr val="CCCCCC"/>
+                      </a:solidFill>
+                      <a:prstDash val="solid"/>
+                      <a:round/>
+                      <a:headEnd type="none" w="med" len="med"/>
+                      <a:tailEnd type="none" w="med" len="med"/>
+                    </a:lnR>
+                    <a:lnT w="6350" cap="flat" cmpd="sng" algn="ctr">
+                      <a:solidFill>
+                        <a:srgbClr val="CCCCCC"/>
+                      </a:solidFill>
+                      <a:prstDash val="solid"/>
+                      <a:round/>
+                      <a:headEnd type="none" w="med" len="med"/>
+                      <a:tailEnd type="none" w="med" len="med"/>
+                    </a:lnT>
+                    <a:lnB w="6350" cap="flat" cmpd="sng" algn="ctr">
+                      <a:solidFill>
+                        <a:srgbClr val="CCCCCC"/>
+                      </a:solidFill>
+                      <a:prstDash val="solid"/>
+                      <a:round/>
+                      <a:headEnd type="none" w="med" len="med"/>
+                      <a:tailEnd type="none" w="med" len="med"/>
+                    </a:lnB>
+                  </a:tcPr>
+                </a:tc>
+              </a:tr>
+              <a:tr h="0">
+                <a:tc>
+                  <a:txBody>
+                    <a:bodyPr/>
+                    <a:lstStyle/>
+                    <a:p>
+                      <a:pPr algn="l" indent="0" marL="0">
+                        <a:buNone/>
+                      </a:pPr>
+                      <a:r>
+                        <a:rPr lang="en-US" sz="1300" b="1" dirty="0">
+                          <a:solidFill>
+                            <a:srgbClr val="1A1A1A"/>
+                          </a:solidFill>
+                        </a:rPr>
+                        <a:t>Does the tool change developer behaviour? Fewer divergences over time when feedback is shown?</a:t>
+                      </a:r>
+                      <a:endParaRPr lang="en-US" sz="1300" dirty="0"/>
+                    </a:p>
+                  </a:txBody>
+                  <a:tcPr marL="91440" marR="91440" marT="91440" marB="91440" anchor="ctr">
+                    <a:lnL w="6350" cap="flat" cmpd="sng" algn="ctr">
+                      <a:solidFill>
+                        <a:srgbClr val="CCCCCC"/>
+                      </a:solidFill>
+                      <a:prstDash val="solid"/>
+                      <a:round/>
+                      <a:headEnd type="none" w="med" len="med"/>
+                      <a:tailEnd type="none" w="med" len="med"/>
+                    </a:lnL>
+                    <a:lnR w="6350" cap="flat" cmpd="sng" algn="ctr">
+                      <a:solidFill>
+                        <a:srgbClr val="CCCCCC"/>
+                      </a:solidFill>
+                      <a:prstDash val="solid"/>
+                      <a:round/>
+                      <a:headEnd type="none" w="med" len="med"/>
+                      <a:tailEnd type="none" w="med" len="med"/>
+                    </a:lnR>
+                    <a:lnT w="6350" cap="flat" cmpd="sng" algn="ctr">
+                      <a:solidFill>
+                        <a:srgbClr val="CCCCCC"/>
+                      </a:solidFill>
+                      <a:prstDash val="solid"/>
+                      <a:round/>
+                      <a:headEnd type="none" w="med" len="med"/>
+                      <a:tailEnd type="none" w="med" len="med"/>
+                    </a:lnT>
+                    <a:lnB w="6350" cap="flat" cmpd="sng" algn="ctr">
+                      <a:solidFill>
+                        <a:srgbClr val="CCCCCC"/>
+                      </a:solidFill>
+                      <a:prstDash val="solid"/>
+                      <a:round/>
+                      <a:headEnd type="none" w="med" len="med"/>
+                      <a:tailEnd type="none" w="med" len="med"/>
+                    </a:lnB>
+                  </a:tcPr>
+                </a:tc>
+                <a:tc>
+                  <a:txBody>
+                    <a:bodyPr/>
+                    <a:lstStyle/>
+                    <a:p>
+                      <a:pPr algn="l" indent="0" marL="0">
+                        <a:buNone/>
+                      </a:pPr>
+                      <a:r>
+                        <a:rPr lang="en-US" sz="1300" dirty="0">
+                          <a:solidFill>
+                            <a:srgbClr val="555555"/>
+                          </a:solidFill>
+                        </a:rPr>
+                        <a:t>30-session randomised user study, plus a 48-session agent extension as motivation for future work (Slide 20).</a:t>
+                      </a:r>
+                      <a:endParaRPr lang="en-US" sz="1300" dirty="0"/>
+                    </a:p>
+                  </a:txBody>
+                  <a:tcPr marL="91440" marR="91440" marT="91440" marB="91440" anchor="ctr">
+                    <a:lnL w="6350" cap="flat" cmpd="sng" algn="ctr">
+                      <a:solidFill>
+                        <a:srgbClr val="CCCCCC"/>
+                      </a:solidFill>
+                      <a:prstDash val="solid"/>
+                      <a:round/>
+                      <a:headEnd type="none" w="med" len="med"/>
+                      <a:tailEnd type="none" w="med" len="med"/>
+                    </a:lnL>
+                    <a:lnR w="6350" cap="flat" cmpd="sng" algn="ctr">
+                      <a:solidFill>
+                        <a:srgbClr val="CCCCCC"/>
+                      </a:solidFill>
+                      <a:prstDash val="solid"/>
+                      <a:round/>
+                      <a:headEnd type="none" w="med" len="med"/>
+                      <a:tailEnd type="none" w="med" len="med"/>
+                    </a:lnR>
+                    <a:lnT w="6350" cap="flat" cmpd="sng" algn="ctr">
+                      <a:solidFill>
+                        <a:srgbClr val="CCCCCC"/>
+                      </a:solidFill>
+                      <a:prstDash val="solid"/>
+                      <a:round/>
+                      <a:headEnd type="none" w="med" len="med"/>
+                      <a:tailEnd type="none" w="med" len="med"/>
+                    </a:lnT>
+                    <a:lnB w="6350" cap="flat" cmpd="sng" algn="ctr">
+                      <a:solidFill>
+                        <a:srgbClr val="CCCCCC"/>
+                      </a:solidFill>
+                      <a:prstDash val="solid"/>
+                      <a:round/>
+                      <a:headEnd type="none" w="med" len="med"/>
+                      <a:tailEnd type="none" w="med" len="med"/>
+                    </a:lnB>
+                  </a:tcPr>
+                </a:tc>
+              </a:tr>
+            </a:tbl>
+          </a:graphicData>
+        </a:graphic>
+      </p:graphicFrame>
     </p:spTree>
   </p:cSld>
   <p:clrMapOvr>
@@ -4012,8 +4668,8 @@
         </p:nvSpPr>
         <p:spPr>
           <a:xfrm>
-            <a:off x="457200" y="1828800"/>
-            <a:ext cx="8229600" cy="914400"/>
+            <a:off x="457200" y="274320"/>
+            <a:ext cx="8229600" cy="640080"/>
           </a:xfrm>
           <a:prstGeom prst="rect">
             <a:avLst/>
@@ -4025,18 +4681,18 @@
           <a:bodyPr wrap="square" lIns="0" tIns="0" rIns="0" bIns="0" rtlCol="0" anchor="ctr"/>
           <a:lstStyle/>
           <a:p>
-            <a:pPr algn="ctr" indent="0" marL="0">
+            <a:pPr indent="0" marL="0">
               <a:buNone/>
             </a:pPr>
             <a:r>
-              <a:rPr lang="en-US" sz="4800" b="1" dirty="0">
-                <a:solidFill>
-                  <a:srgbClr val="000000"/>
-                </a:solidFill>
-              </a:rPr>
-              <a:t>Demo</a:t>
-            </a:r>
-            <a:endParaRPr lang="en-US" sz="4800" dirty="0"/>
+              <a:rPr lang="en-US" sz="2800" b="1" dirty="0">
+                <a:solidFill>
+                  <a:srgbClr val="000000"/>
+                </a:solidFill>
+              </a:rPr>
+              <a:t>Detector precision &amp; recall</a:t>
+            </a:r>
+            <a:endParaRPr lang="en-US" sz="2800" dirty="0"/>
           </a:p>
         </p:txBody>
       </p:sp>
@@ -4048,8 +4704,8 @@
         </p:nvSpPr>
         <p:spPr>
           <a:xfrm>
-            <a:off x="457200" y="2834640"/>
-            <a:ext cx="8229600" cy="914400"/>
+            <a:off x="457200" y="1188720"/>
+            <a:ext cx="8229600" cy="3657600"/>
           </a:xfrm>
           <a:prstGeom prst="rect">
             <a:avLst/>
@@ -4058,21 +4714,79 @@
           <a:ln/>
         </p:spPr>
         <p:txBody>
-          <a:bodyPr wrap="square" rtlCol="0" anchor="ctr"/>
-          <a:lstStyle/>
-          <a:p>
-            <a:pPr algn="ctr" indent="0" marL="0">
-              <a:buNone/>
-            </a:pPr>
-            <a:r>
-              <a:rPr lang="en-US" sz="1800" i="1" dirty="0">
-                <a:solidFill>
-                  <a:srgbClr val="555555"/>
-                </a:solidFill>
-              </a:rPr>
-              <a:t>I'll show one identified divergence point and the alternative path the tool constructed — and how much better it scores.</a:t>
-            </a:r>
-            <a:endParaRPr lang="en-US" sz="1800" dirty="0"/>
+          <a:bodyPr wrap="square" rtlCol="0" anchor="t"/>
+          <a:lstStyle/>
+          <a:p>
+            <a:pPr marL="342900" indent="-342900">
+              <a:spcAft>
+                <a:spcPts val="600"/>
+              </a:spcAft>
+              <a:buSzPct val="100000"/>
+              <a:buChar char="•"/>
+            </a:pPr>
+            <a:r>
+              <a:rPr lang="en-US" sz="1600" dirty="0">
+                <a:solidFill>
+                  <a:srgbClr val="000000"/>
+                </a:solidFill>
+              </a:rPr>
+              <a:t>Precision = 1.00 across all four divergence kinds - every detection is valid.</a:t>
+            </a:r>
+            <a:endParaRPr lang="en-US" sz="1600" dirty="0"/>
+          </a:p>
+          <a:p>
+            <a:pPr marL="342900" indent="-342900">
+              <a:spcAft>
+                <a:spcPts val="600"/>
+              </a:spcAft>
+              <a:buSzPct val="100000"/>
+              <a:buChar char="•"/>
+            </a:pPr>
+            <a:r>
+              <a:rPr lang="en-US" sz="1600" dirty="0">
+                <a:solidFill>
+                  <a:srgbClr val="000000"/>
+                </a:solidFill>
+              </a:rPr>
+              <a:t>Recall - Rework 1.00, Hygiene 1.00, Manual-Refactor 0.76, Ordering 0.40.</a:t>
+            </a:r>
+            <a:endParaRPr lang="en-US" sz="1600" dirty="0"/>
+          </a:p>
+          <a:p>
+            <a:pPr marL="342900" indent="-342900">
+              <a:spcAft>
+                <a:spcPts val="600"/>
+              </a:spcAft>
+              <a:buSzPct val="100000"/>
+              <a:buChar char="•"/>
+            </a:pPr>
+            <a:r>
+              <a:rPr lang="en-US" sz="1600" dirty="0">
+                <a:solidFill>
+                  <a:srgbClr val="000000"/>
+                </a:solidFill>
+              </a:rPr>
+              <a:t>Inter-rater agreement (Cohen's κ) -1.00 for Ordering and Manual-Refactor, 0.86 for Rework, 0.72 for Hygiene.</a:t>
+            </a:r>
+            <a:endParaRPr lang="en-US" sz="1600" dirty="0"/>
+          </a:p>
+          <a:p>
+            <a:pPr marL="342900" indent="-342900">
+              <a:spcAft>
+                <a:spcPts val="600"/>
+              </a:spcAft>
+              <a:buSzPct val="100000"/>
+              <a:buChar char="•"/>
+            </a:pPr>
+            <a:r>
+              <a:rPr lang="en-US" sz="1600" dirty="0">
+                <a:solidFill>
+                  <a:srgbClr val="000000"/>
+                </a:solidFill>
+              </a:rPr>
+              <a:t>Ordering recall gap is honest and explained: the synthesiser rejects windows it cannot safely reproduce. A scope limit, not a detector flaw.</a:t>
+            </a:r>
+            <a:endParaRPr lang="en-US" sz="1600" dirty="0"/>
           </a:p>
         </p:txBody>
       </p:sp>
@@ -4131,7 +4845,7 @@
                   <a:srgbClr val="000000"/>
                 </a:solidFill>
               </a:rPr>
-              <a:t>Contributions</a:t>
+              <a:t>Score robustness</a:t>
             </a:r>
             <a:endParaRPr lang="en-US" sz="2800" dirty="0"/>
           </a:p>
@@ -4171,7 +4885,7 @@
                   <a:srgbClr val="000000"/>
                 </a:solidFill>
               </a:rPr>
-              <a:t>A process-quality metric J(τ) combining endpoint, process, and safety signals in one principled score.</a:t>
+              <a:t>Single-knob sensitivity sweep: scale any one weight by {0.1×–10×}, top-1 recommendation is preserved in 96.5% of user-study cases.</a:t>
             </a:r>
             <a:endParaRPr lang="en-US" sz="1600" dirty="0"/>
           </a:p>
@@ -4189,7 +4903,7 @@
                   <a:srgbClr val="000000"/>
                 </a:solidFill>
               </a:rPr>
-              <a:t>A divergence-point detector with four actionable kinds, each with a per-kind synthesiser that constructs a concrete alternative trajectory.</a:t>
+              <a:t>Multi-knob Monte Carlo (200 samples): top-1 stability drops to 84.6%; mean Kendall τ = 0.586.</a:t>
             </a:r>
             <a:endParaRPr lang="en-US" sz="1600" dirty="0"/>
           </a:p>
@@ -4207,7 +4921,7 @@
                   <a:srgbClr val="000000"/>
                 </a:solidFill>
               </a:rPr>
-              <a:t>Three datasets — 45 injection sessions, 30-session user study, 48-session agent extension — with reproducible analysis (Jupyter notebook reproduces every table and figure).</a:t>
+              <a:t>Honest framing - stable near the chosen weights, less stable under arbitrary joint perturbations.</a:t>
             </a:r>
             <a:endParaRPr lang="en-US" sz="1600" dirty="0"/>
           </a:p>
@@ -4225,7 +4939,7 @@
                   <a:srgbClr val="000000"/>
                 </a:solidFill>
               </a:rPr>
-              <a:t>A deployable end-to-end system: IntelliJ plugin, analysis backend, and dashboard.</a:t>
+              <a:t>Ablation confirms each process term contributes real signal; endpoint gain alone does not recover the ranking.</a:t>
             </a:r>
             <a:endParaRPr lang="en-US" sz="1600" dirty="0"/>
           </a:p>
@@ -4437,6 +5151,316 @@
         </p:nvSpPr>
         <p:spPr>
           <a:xfrm>
+            <a:off x="457200" y="274320"/>
+            <a:ext cx="8229600" cy="640080"/>
+          </a:xfrm>
+          <a:prstGeom prst="rect">
+            <a:avLst/>
+          </a:prstGeom>
+          <a:noFill/>
+          <a:ln/>
+        </p:spPr>
+        <p:txBody>
+          <a:bodyPr wrap="square" lIns="0" tIns="0" rIns="0" bIns="0" rtlCol="0" anchor="ctr"/>
+          <a:lstStyle/>
+          <a:p>
+            <a:pPr indent="0" marL="0">
+              <a:buNone/>
+            </a:pPr>
+            <a:r>
+              <a:rPr lang="en-US" sz="2800" b="1" dirty="0">
+                <a:solidFill>
+                  <a:srgbClr val="000000"/>
+                </a:solidFill>
+              </a:rPr>
+              <a:t>User study: does feedback change behaviour?</a:t>
+            </a:r>
+            <a:endParaRPr lang="en-US" sz="2800" dirty="0"/>
+          </a:p>
+        </p:txBody>
+      </p:sp>
+      <p:sp>
+        <p:nvSpPr>
+          <p:cNvPr id="3" name="Text 1"/>
+          <p:cNvSpPr/>
+          <p:nvPr/>
+        </p:nvSpPr>
+        <p:spPr>
+          <a:xfrm>
+            <a:off x="457200" y="1188720"/>
+            <a:ext cx="8229600" cy="3657600"/>
+          </a:xfrm>
+          <a:prstGeom prst="rect">
+            <a:avLst/>
+          </a:prstGeom>
+          <a:noFill/>
+          <a:ln/>
+        </p:spPr>
+        <p:txBody>
+          <a:bodyPr wrap="square" rtlCol="0" anchor="t"/>
+          <a:lstStyle/>
+          <a:p>
+            <a:pPr marL="342900" indent="-342900">
+              <a:spcAft>
+                <a:spcPts val="600"/>
+              </a:spcAft>
+              <a:buSzPct val="100000"/>
+              <a:buChar char="•"/>
+            </a:pPr>
+            <a:r>
+              <a:rPr lang="en-US" sz="1600" dirty="0">
+                <a:solidFill>
+                  <a:srgbClr val="000000"/>
+                </a:solidFill>
+              </a:rPr>
+              <a:t>With-feedback group: 2.7 divergence points per session.</a:t>
+            </a:r>
+            <a:endParaRPr lang="en-US" sz="1600" dirty="0"/>
+          </a:p>
+          <a:p>
+            <a:pPr marL="342900" indent="-342900">
+              <a:spcAft>
+                <a:spcPts val="600"/>
+              </a:spcAft>
+              <a:buSzPct val="100000"/>
+              <a:buChar char="•"/>
+            </a:pPr>
+            <a:r>
+              <a:rPr lang="en-US" sz="1600" dirty="0">
+                <a:solidFill>
+                  <a:srgbClr val="000000"/>
+                </a:solidFill>
+              </a:rPr>
+              <a:t>No-feedback baseline: 6.0 divergence points per session -2.2× difference.</a:t>
+            </a:r>
+            <a:endParaRPr lang="en-US" sz="1600" dirty="0"/>
+          </a:p>
+          <a:p>
+            <a:pPr marL="342900" indent="-342900">
+              <a:spcAft>
+                <a:spcPts val="600"/>
+              </a:spcAft>
+              <a:buSzPct val="100000"/>
+              <a:buChar char="•"/>
+            </a:pPr>
+            <a:r>
+              <a:rPr lang="en-US" sz="1600" dirty="0">
+                <a:solidFill>
+                  <a:srgbClr val="000000"/>
+                </a:solidFill>
+              </a:rPr>
+              <a:t>Gain-stripped process-score slope across the 6-session arc -+4.47 per session with feedback, −0.40 per session without.</a:t>
+            </a:r>
+            <a:endParaRPr lang="en-US" sz="1600" dirty="0"/>
+          </a:p>
+          <a:p>
+            <a:pPr marL="342900" indent="-342900">
+              <a:spcAft>
+                <a:spcPts val="600"/>
+              </a:spcAft>
+              <a:buSzPct val="100000"/>
+              <a:buChar char="•"/>
+            </a:pPr>
+            <a:r>
+              <a:rPr lang="en-US" sz="1600" dirty="0">
+                <a:solidFill>
+                  <a:srgbClr val="000000"/>
+                </a:solidFill>
+              </a:rPr>
+              <a:t>Caveat: n=3 vs n=2 is directional evidence, not a hypothesis test.</a:t>
+            </a:r>
+            <a:endParaRPr lang="en-US" sz="1600" dirty="0"/>
+          </a:p>
+        </p:txBody>
+      </p:sp>
+    </p:spTree>
+  </p:cSld>
+  <p:clrMapOvr>
+    <a:masterClrMapping/>
+  </p:clrMapOvr>
+</p:sld>
+</file>
+
+<file path=ppt/slides/slide21.xml><?xml version="1.0" encoding="utf-8"?>
+<p:sld xmlns:a="http://schemas.openxmlformats.org/drawingml/2006/main" xmlns:r="http://schemas.openxmlformats.org/officeDocument/2006/relationships" xmlns:p="http://schemas.openxmlformats.org/presentationml/2006/main">
+  <p:cSld name="Slide 21">
+    <p:spTree>
+      <p:nvGrpSpPr>
+        <p:cNvPr id="1" name=""/>
+        <p:cNvGrpSpPr/>
+        <p:nvPr/>
+      </p:nvGrpSpPr>
+      <p:grpSpPr>
+        <a:xfrm>
+          <a:off x="0" y="0"/>
+          <a:ext cx="0" cy="0"/>
+          <a:chOff x="0" y="0"/>
+          <a:chExt cx="0" cy="0"/>
+        </a:xfrm>
+      </p:grpSpPr>
+      <p:sp>
+        <p:nvSpPr>
+          <p:cNvPr id="2" name="Text 0"/>
+          <p:cNvSpPr/>
+          <p:nvPr/>
+        </p:nvSpPr>
+        <p:spPr>
+          <a:xfrm>
+            <a:off x="457200" y="274320"/>
+            <a:ext cx="8229600" cy="640080"/>
+          </a:xfrm>
+          <a:prstGeom prst="rect">
+            <a:avLst/>
+          </a:prstGeom>
+          <a:noFill/>
+          <a:ln/>
+        </p:spPr>
+        <p:txBody>
+          <a:bodyPr wrap="square" lIns="0" tIns="0" rIns="0" bIns="0" rtlCol="0" anchor="ctr"/>
+          <a:lstStyle/>
+          <a:p>
+            <a:pPr indent="0" marL="0">
+              <a:buNone/>
+            </a:pPr>
+            <a:r>
+              <a:rPr lang="en-US" sz="2800" b="1" dirty="0">
+                <a:solidFill>
+                  <a:srgbClr val="000000"/>
+                </a:solidFill>
+              </a:rPr>
+              <a:t>Contributions</a:t>
+            </a:r>
+            <a:endParaRPr lang="en-US" sz="2800" dirty="0"/>
+          </a:p>
+        </p:txBody>
+      </p:sp>
+      <p:sp>
+        <p:nvSpPr>
+          <p:cNvPr id="3" name="Text 1"/>
+          <p:cNvSpPr/>
+          <p:nvPr/>
+        </p:nvSpPr>
+        <p:spPr>
+          <a:xfrm>
+            <a:off x="457200" y="1188720"/>
+            <a:ext cx="8229600" cy="3657600"/>
+          </a:xfrm>
+          <a:prstGeom prst="rect">
+            <a:avLst/>
+          </a:prstGeom>
+          <a:noFill/>
+          <a:ln/>
+        </p:spPr>
+        <p:txBody>
+          <a:bodyPr wrap="square" rtlCol="0" anchor="t"/>
+          <a:lstStyle/>
+          <a:p>
+            <a:pPr marL="342900" indent="-342900">
+              <a:spcAft>
+                <a:spcPts val="600"/>
+              </a:spcAft>
+              <a:buSzPct val="100000"/>
+              <a:buChar char="•"/>
+            </a:pPr>
+            <a:r>
+              <a:rPr lang="en-US" sz="1600" dirty="0">
+                <a:solidFill>
+                  <a:srgbClr val="000000"/>
+                </a:solidFill>
+              </a:rPr>
+              <a:t>A process-quality metric J(τ) combining endpoint, process, and safety signals in one principled score.</a:t>
+            </a:r>
+            <a:endParaRPr lang="en-US" sz="1600" dirty="0"/>
+          </a:p>
+          <a:p>
+            <a:pPr marL="342900" indent="-342900">
+              <a:spcAft>
+                <a:spcPts val="600"/>
+              </a:spcAft>
+              <a:buSzPct val="100000"/>
+              <a:buChar char="•"/>
+            </a:pPr>
+            <a:r>
+              <a:rPr lang="en-US" sz="1600" dirty="0">
+                <a:solidFill>
+                  <a:srgbClr val="000000"/>
+                </a:solidFill>
+              </a:rPr>
+              <a:t>A divergence-point detector with four actionable kinds, each with a per-kind synthesiser that constructs a concrete alternative trajectory.</a:t>
+            </a:r>
+            <a:endParaRPr lang="en-US" sz="1600" dirty="0"/>
+          </a:p>
+          <a:p>
+            <a:pPr marL="342900" indent="-342900">
+              <a:spcAft>
+                <a:spcPts val="600"/>
+              </a:spcAft>
+              <a:buSzPct val="100000"/>
+              <a:buChar char="•"/>
+            </a:pPr>
+            <a:r>
+              <a:rPr lang="en-US" sz="1600" dirty="0">
+                <a:solidFill>
+                  <a:srgbClr val="000000"/>
+                </a:solidFill>
+              </a:rPr>
+              <a:t>Three datasets -45 injection sessions, 30-session user study, 48-session agent extension - with reproducible analysis (Jupyter notebook reproduces every table and figure).</a:t>
+            </a:r>
+            <a:endParaRPr lang="en-US" sz="1600" dirty="0"/>
+          </a:p>
+          <a:p>
+            <a:pPr marL="342900" indent="-342900">
+              <a:spcAft>
+                <a:spcPts val="600"/>
+              </a:spcAft>
+              <a:buSzPct val="100000"/>
+              <a:buChar char="•"/>
+            </a:pPr>
+            <a:r>
+              <a:rPr lang="en-US" sz="1600" dirty="0">
+                <a:solidFill>
+                  <a:srgbClr val="000000"/>
+                </a:solidFill>
+              </a:rPr>
+              <a:t>A deployable end-to-end system: IntelliJ plugin, analysis backend, and dashboard.</a:t>
+            </a:r>
+            <a:endParaRPr lang="en-US" sz="1600" dirty="0"/>
+          </a:p>
+        </p:txBody>
+      </p:sp>
+    </p:spTree>
+  </p:cSld>
+  <p:clrMapOvr>
+    <a:masterClrMapping/>
+  </p:clrMapOvr>
+</p:sld>
+</file>
+
+<file path=ppt/slides/slide22.xml><?xml version="1.0" encoding="utf-8"?>
+<p:sld xmlns:a="http://schemas.openxmlformats.org/drawingml/2006/main" xmlns:r="http://schemas.openxmlformats.org/officeDocument/2006/relationships" xmlns:p="http://schemas.openxmlformats.org/presentationml/2006/main">
+  <p:cSld name="Slide 22">
+    <p:spTree>
+      <p:nvGrpSpPr>
+        <p:cNvPr id="1" name=""/>
+        <p:cNvGrpSpPr/>
+        <p:nvPr/>
+      </p:nvGrpSpPr>
+      <p:grpSpPr>
+        <a:xfrm>
+          <a:off x="0" y="0"/>
+          <a:ext cx="0" cy="0"/>
+          <a:chOff x="0" y="0"/>
+          <a:chExt cx="0" cy="0"/>
+        </a:xfrm>
+      </p:grpSpPr>
+      <p:sp>
+        <p:nvSpPr>
+          <p:cNvPr id="2" name="Text 0"/>
+          <p:cNvSpPr/>
+          <p:nvPr/>
+        </p:nvSpPr>
+        <p:spPr>
+          <a:xfrm>
             <a:off x="457200" y="1645920"/>
             <a:ext cx="8229600" cy="1371600"/>
           </a:xfrm>
@@ -4459,7 +5483,7 @@
                   <a:srgbClr val="000000"/>
                 </a:solidFill>
               </a:rPr>
-              <a:t>Refactoring quality isn't just about where you end up — it's about the path you walked to get there.</a:t>
+              <a:t>Refactoring quality isn't just about where you end up - it's about the path you walked to get there.</a:t>
             </a:r>
             <a:endParaRPr lang="en-US" sz="2600" dirty="0"/>
           </a:p>
@@ -4531,7 +5555,7 @@
                   <a:srgbClr val="555555"/>
                 </a:solidFill>
               </a:rPr>
-              <a:t>Thank you — happy to take questions.</a:t>
+              <a:t>Thank you - happy to take questions.</a:t>
             </a:r>
             <a:endParaRPr lang="en-US" sz="1600" dirty="0"/>
           </a:p>
@@ -4747,7 +5771,7 @@
                   <a:srgbClr val="000000"/>
                 </a:solidFill>
               </a:rPr>
-              <a:t>The core idea, visualised</a:t>
+              <a:t>Narrowing the design space</a:t>
             </a:r>
             <a:endParaRPr lang="en-US" sz="2800" dirty="0"/>
           </a:p>
@@ -4761,8 +5785,8 @@
         </p:nvSpPr>
         <p:spPr>
           <a:xfrm>
-            <a:off x="457200" y="1188720"/>
-            <a:ext cx="8229600" cy="3657600"/>
+            <a:off x="457200" y="1097280"/>
+            <a:ext cx="8229600" cy="457200"/>
           </a:xfrm>
           <a:prstGeom prst="rect">
             <a:avLst/>
@@ -4771,6 +5795,42 @@
           <a:ln/>
         </p:spPr>
         <p:txBody>
+          <a:bodyPr wrap="square" lIns="0" tIns="0" rIns="0" bIns="0" rtlCol="0" anchor="ctr"/>
+          <a:lstStyle/>
+          <a:p>
+            <a:pPr indent="0" marL="0">
+              <a:buNone/>
+            </a:pPr>
+            <a:r>
+              <a:rPr lang="en-US" sz="1300" i="1" dirty="0">
+                <a:solidFill>
+                  <a:srgbClr val="555555"/>
+                </a:solidFill>
+              </a:rPr>
+              <a:t>Evaluating refactoring as a process is a wide, mostly-unexplored design space. Four requirements shaped what we built.</a:t>
+            </a:r>
+            <a:endParaRPr lang="en-US" sz="1300" dirty="0"/>
+          </a:p>
+        </p:txBody>
+      </p:sp>
+      <p:sp>
+        <p:nvSpPr>
+          <p:cNvPr id="4" name="Text 2"/>
+          <p:cNvSpPr/>
+          <p:nvPr/>
+        </p:nvSpPr>
+        <p:spPr>
+          <a:xfrm>
+            <a:off x="457200" y="1645920"/>
+            <a:ext cx="8229600" cy="3291840"/>
+          </a:xfrm>
+          <a:prstGeom prst="rect">
+            <a:avLst/>
+          </a:prstGeom>
+          <a:noFill/>
+          <a:ln/>
+        </p:spPr>
+        <p:txBody>
           <a:bodyPr wrap="square" rtlCol="0" anchor="t"/>
           <a:lstStyle/>
           <a:p>
@@ -4782,14 +5842,42 @@
               <a:buChar char="•"/>
             </a:pPr>
             <a:r>
-              <a:rPr lang="en-US" sz="1600" dirty="0">
-                <a:solidFill>
-                  <a:srgbClr val="000000"/>
-                </a:solidFill>
-              </a:rPr>
-              <a:t>Solid line: user's trajectory through code states.</a:t>
-            </a:r>
-            <a:endParaRPr lang="en-US" sz="1600" dirty="0"/>
+              <a:rPr lang="en-US" sz="1300" b="1" dirty="0">
+                <a:solidFill>
+                  <a:srgbClr val="000000"/>
+                </a:solidFill>
+              </a:rPr>
+              <a:t>Quantifiable + comparable score </a:t>
+            </a:r>
+            <a:pPr indent="0" marL="0">
+              <a:spcAft>
+                <a:spcPts val="600"/>
+              </a:spcAft>
+              <a:buNone/>
+            </a:pPr>
+            <a:r>
+              <a:rPr lang="en-US" sz="1300" dirty="0">
+                <a:solidFill>
+                  <a:srgbClr val="000000"/>
+                </a:solidFill>
+              </a:rPr>
+              <a:t>- one number per trajectory so sessions can be compared. </a:t>
+            </a:r>
+            <a:pPr indent="0" marL="0">
+              <a:spcAft>
+                <a:spcPts val="600"/>
+              </a:spcAft>
+              <a:buNone/>
+            </a:pPr>
+            <a:r>
+              <a:rPr lang="en-US" sz="1300" dirty="0">
+                <a:solidFill>
+                  <a:srgbClr val="888888"/>
+                </a:solidFill>
+              </a:rPr>
+              <a:t>Builds on composite quality models (Quamoco, QMOOD), adapted from snapshot- to trajectory-level.</a:t>
+            </a:r>
+            <a:endParaRPr lang="en-US" sz="1300" dirty="0"/>
           </a:p>
           <a:p>
             <a:pPr marL="342900" indent="-342900">
@@ -4800,14 +5888,42 @@
               <a:buChar char="•"/>
             </a:pPr>
             <a:r>
-              <a:rPr lang="en-US" sz="1600" dirty="0">
-                <a:solidFill>
-                  <a:srgbClr val="000000"/>
-                </a:solidFill>
-              </a:rPr>
-              <a:t>Dashed line: synthesised alternative trajectory.</a:t>
-            </a:r>
-            <a:endParaRPr lang="en-US" sz="1600" dirty="0"/>
+              <a:rPr lang="en-US" sz="1300" b="1" dirty="0">
+                <a:solidFill>
+                  <a:srgbClr val="000000"/>
+                </a:solidFill>
+              </a:rPr>
+              <a:t>Seamless, in-workflow capture </a:t>
+            </a:r>
+            <a:pPr indent="0" marL="0">
+              <a:spcAft>
+                <a:spcPts val="600"/>
+              </a:spcAft>
+              <a:buNone/>
+            </a:pPr>
+            <a:r>
+              <a:rPr lang="en-US" sz="1300" dirty="0">
+                <a:solidFill>
+                  <a:srgbClr val="000000"/>
+                </a:solidFill>
+              </a:rPr>
+              <a:t>- zero extra developer effort to use the tool. </a:t>
+            </a:r>
+            <a:pPr indent="0" marL="0">
+              <a:spcAft>
+                <a:spcPts val="600"/>
+              </a:spcAft>
+              <a:buNone/>
+            </a:pPr>
+            <a:r>
+              <a:rPr lang="en-US" sz="1300" dirty="0">
+                <a:solidFill>
+                  <a:srgbClr val="888888"/>
+                </a:solidFill>
+              </a:rPr>
+              <a:t>IDE-event logging is a known-feasible approach (Damevski et al., CodeWatcher).</a:t>
+            </a:r>
+            <a:endParaRPr lang="en-US" sz="1300" dirty="0"/>
           </a:p>
           <a:p>
             <a:pPr marL="342900" indent="-342900">
@@ -4818,14 +5934,42 @@
               <a:buChar char="•"/>
             </a:pPr>
             <a:r>
-              <a:rPr lang="en-US" sz="1600" dirty="0">
-                <a:solidFill>
-                  <a:srgbClr val="000000"/>
-                </a:solidFill>
-              </a:rPr>
-              <a:t>Both end at the same final state.</a:t>
-            </a:r>
-            <a:endParaRPr lang="en-US" sz="1600" dirty="0"/>
+              <a:rPr lang="en-US" sz="1300" b="1" dirty="0">
+                <a:solidFill>
+                  <a:srgbClr val="000000"/>
+                </a:solidFill>
+              </a:rPr>
+              <a:t>Actionable, moment-specific feedback </a:t>
+            </a:r>
+            <a:pPr indent="0" marL="0">
+              <a:spcAft>
+                <a:spcPts val="600"/>
+              </a:spcAft>
+              <a:buNone/>
+            </a:pPr>
+            <a:r>
+              <a:rPr lang="en-US" sz="1300" dirty="0">
+                <a:solidFill>
+                  <a:srgbClr val="000000"/>
+                </a:solidFill>
+              </a:rPr>
+              <a:t>- point to a specific moment AND a "what you could have done instead" alternative. </a:t>
+            </a:r>
+            <a:pPr indent="0" marL="0">
+              <a:spcAft>
+                <a:spcPts val="600"/>
+              </a:spcAft>
+              <a:buNone/>
+            </a:pPr>
+            <a:r>
+              <a:rPr lang="en-US" sz="1300" dirty="0">
+                <a:solidFill>
+                  <a:srgbClr val="888888"/>
+                </a:solidFill>
+              </a:rPr>
+              <a:t>Inverts prior refactoring recommenders (ReSynth, Refactoring Navigator, search-based refactoring): the synthesised sequence becomes the comparison point against an observed trace.</a:t>
+            </a:r>
+            <a:endParaRPr lang="en-US" sz="1300" dirty="0"/>
           </a:p>
           <a:p>
             <a:pPr marL="342900" indent="-342900">
@@ -4836,32 +5980,28 @@
               <a:buChar char="•"/>
             </a:pPr>
             <a:r>
-              <a:rPr lang="en-US" sz="1600" dirty="0">
-                <a:solidFill>
-                  <a:srgbClr val="000000"/>
-                </a:solidFill>
-              </a:rPr>
-              <a:t>Mark the divergence point and the score gap ΔJ between the two final scores.</a:t>
-            </a:r>
-            <a:endParaRPr lang="en-US" sz="1600" dirty="0"/>
-          </a:p>
-          <a:p>
-            <a:pPr marL="342900" indent="-342900">
+              <a:rPr lang="en-US" sz="1300" b="1" dirty="0">
+                <a:solidFill>
+                  <a:srgbClr val="000000"/>
+                </a:solidFill>
+              </a:rPr>
+              <a:t>Efficient alternative synthesis </a:t>
+            </a:r>
+            <a:pPr indent="0" marL="0">
               <a:spcAft>
                 <a:spcPts val="600"/>
               </a:spcAft>
-              <a:buSzPct val="100000"/>
-              <a:buChar char="•"/>
-            </a:pPr>
-            <a:r>
-              <a:rPr lang="en-US" sz="1600" dirty="0">
-                <a:solidFill>
-                  <a:srgbClr val="000000"/>
-                </a:solidFill>
-              </a:rPr>
-              <a:t>[FIGURE: introduction/divergence_diagram.png — to be placed here]</a:t>
-            </a:r>
-            <a:endParaRPr lang="en-US" sz="1600" dirty="0"/>
+              <a:buNone/>
+            </a:pPr>
+            <a:r>
+              <a:rPr lang="en-US" sz="1300" dirty="0">
+                <a:solidFill>
+                  <a:srgbClr val="000000"/>
+                </a:solidFill>
+              </a:rPr>
+              <a:t>- the state-action space over a real codebase is too large to enumerate, so we must find efficient methods of identifying "better" alternatives.</a:t>
+            </a:r>
+            <a:endParaRPr lang="en-US" sz="1300" dirty="0"/>
           </a:p>
         </p:txBody>
       </p:sp>
@@ -4920,7 +6060,7 @@
                   <a:srgbClr val="000000"/>
                 </a:solidFill>
               </a:rPr>
-              <a:t>What the tool does, end to end</a:t>
+              <a:t>Desired outcome: a comparable counterfactual</a:t>
             </a:r>
             <a:endParaRPr lang="en-US" sz="2800" dirty="0"/>
           </a:p>
@@ -4935,7 +6075,7 @@
         <p:spPr>
           <a:xfrm>
             <a:off x="457200" y="1097280"/>
-            <a:ext cx="8229600" cy="1554480"/>
+            <a:ext cx="8229600" cy="1463040"/>
           </a:xfrm>
           <a:prstGeom prst="rect">
             <a:avLst/>
@@ -4960,7 +6100,7 @@
                   <a:srgbClr val="000000"/>
                 </a:solidFill>
               </a:rPr>
-              <a:t>IntelliJ plugin: records every edit, refactoring, build, test, and commit during a session.</a:t>
+              <a:t>Given those four requirements, the concrete thing we wanted the tool to produce, for any recorded session:</a:t>
             </a:r>
             <a:endParaRPr lang="en-US" sz="1600" dirty="0"/>
           </a:p>
@@ -4978,7 +6118,7 @@
                   <a:srgbClr val="000000"/>
                 </a:solidFill>
               </a:rPr>
-              <a:t>Analysis backend: reconstructs the trajectory, scores it, and detects divergence points.</a:t>
+              <a:t>Solid line - the user's actual trajectory through code states.</a:t>
             </a:r>
             <a:endParaRPr lang="en-US" sz="1600" dirty="0"/>
           </a:p>
@@ -4996,576 +6136,54 @@
                   <a:srgbClr val="000000"/>
                 </a:solidFill>
               </a:rPr>
-              <a:t>Dashboard: surfaces where you diverged, an alternative path, how much better it scores, and why.</a:t>
+              <a:t>Dashed line - synthesised alternative; same start, same finish, measurably higher J(τ).</a:t>
             </a:r>
             <a:endParaRPr lang="en-US" sz="1600" dirty="0"/>
           </a:p>
-        </p:txBody>
-      </p:sp>
-      <p:sp>
-        <p:nvSpPr>
-          <p:cNvPr id="4" name="Shape 2"/>
-          <p:cNvSpPr/>
+          <a:p>
+            <a:pPr marL="342900" indent="-342900">
+              <a:spcAft>
+                <a:spcPts val="600"/>
+              </a:spcAft>
+              <a:buSzPct val="100000"/>
+              <a:buChar char="•"/>
+            </a:pPr>
+            <a:r>
+              <a:rPr lang="en-US" sz="1600" dirty="0">
+                <a:solidFill>
+                  <a:srgbClr val="000000"/>
+                </a:solidFill>
+              </a:rPr>
+              <a:t>Divergence point marks where the two paths split; ΔJ quantifies the gap.</a:t>
+            </a:r>
+            <a:endParaRPr lang="en-US" sz="1600" dirty="0"/>
+          </a:p>
+        </p:txBody>
+      </p:sp>
+      <p:pic>
+        <p:nvPicPr>
+          <p:cNvPr id="4" name="Image 0" descr="images/divergence-point.png">    </p:cNvPr>
+          <p:cNvPicPr>
+            <a:picLocks noChangeAspect="1"/>
+          </p:cNvPicPr>
           <p:nvPr/>
-        </p:nvSpPr>
+        </p:nvPicPr>
+        <p:blipFill>
+          <a:blip r:embed="rId1"/>
+          <a:stretch>
+            <a:fillRect/>
+          </a:stretch>
+        </p:blipFill>
         <p:spPr>
           <a:xfrm>
-            <a:off x="182880" y="2788920"/>
-            <a:ext cx="2377440" cy="2103120"/>
+            <a:off x="2651760" y="2697480"/>
+            <a:ext cx="3840480" cy="2276856"/>
           </a:xfrm>
           <a:prstGeom prst="rect">
             <a:avLst/>
           </a:prstGeom>
-          <a:solidFill>
-            <a:srgbClr val="FFFFFF"/>
-          </a:solidFill>
-          <a:ln w="12700">
-            <a:solidFill>
-              <a:srgbClr val="000000"/>
-            </a:solidFill>
-            <a:prstDash val="solid"/>
-          </a:ln>
         </p:spPr>
-      </p:sp>
-      <p:sp>
-        <p:nvSpPr>
-          <p:cNvPr id="5" name="Text 3"/>
-          <p:cNvSpPr/>
-          <p:nvPr/>
-        </p:nvSpPr>
-        <p:spPr>
-          <a:xfrm>
-            <a:off x="274320" y="2971800"/>
-            <a:ext cx="2194560" cy="457200"/>
-          </a:xfrm>
-          <a:prstGeom prst="rect">
-            <a:avLst/>
-          </a:prstGeom>
-          <a:noFill/>
-          <a:ln/>
-        </p:spPr>
-        <p:txBody>
-          <a:bodyPr wrap="square" lIns="0" tIns="0" rIns="0" bIns="0" rtlCol="0" anchor="ctr"/>
-          <a:lstStyle/>
-          <a:p>
-            <a:pPr algn="ctr" indent="0" marL="0">
-              <a:buNone/>
-            </a:pPr>
-            <a:r>
-              <a:rPr lang="en-US" sz="1600" b="1" dirty="0">
-                <a:solidFill>
-                  <a:srgbClr val="000000"/>
-                </a:solidFill>
-              </a:rPr>
-              <a:t>IntelliJ Plugin</a:t>
-            </a:r>
-            <a:endParaRPr lang="en-US" sz="1600" dirty="0"/>
-          </a:p>
-        </p:txBody>
-      </p:sp>
-      <p:sp>
-        <p:nvSpPr>
-          <p:cNvPr id="6" name="Shape 4"/>
-          <p:cNvSpPr/>
-          <p:nvPr/>
-        </p:nvSpPr>
-        <p:spPr>
-          <a:xfrm>
-            <a:off x="457200" y="3520440"/>
-            <a:ext cx="1828800" cy="0"/>
-          </a:xfrm>
-          <a:prstGeom prst="line">
-            <a:avLst/>
-          </a:prstGeom>
-          <a:noFill/>
-          <a:ln w="9525">
-            <a:solidFill>
-              <a:srgbClr val="999999"/>
-            </a:solidFill>
-            <a:prstDash val="solid"/>
-          </a:ln>
-        </p:spPr>
-      </p:sp>
-      <p:sp>
-        <p:nvSpPr>
-          <p:cNvPr id="7" name="Text 5"/>
-          <p:cNvSpPr/>
-          <p:nvPr/>
-        </p:nvSpPr>
-        <p:spPr>
-          <a:xfrm>
-            <a:off x="411480" y="3703320"/>
-            <a:ext cx="2011680" cy="1097280"/>
-          </a:xfrm>
-          <a:prstGeom prst="rect">
-            <a:avLst/>
-          </a:prstGeom>
-          <a:noFill/>
-          <a:ln/>
-        </p:spPr>
-        <p:txBody>
-          <a:bodyPr wrap="square" rtlCol="0" anchor="t"/>
-          <a:lstStyle/>
-          <a:p>
-            <a:pPr marL="342900" indent="-342900">
-              <a:spcAft>
-                <a:spcPts val="800"/>
-              </a:spcAft>
-              <a:buSzPct val="100000"/>
-              <a:buChar char="•"/>
-            </a:pPr>
-            <a:r>
-              <a:rPr lang="en-US" sz="1200" dirty="0">
-                <a:solidFill>
-                  <a:srgbClr val="333333"/>
-                </a:solidFill>
-              </a:rPr>
-              <a:t>Records developer events</a:t>
-            </a:r>
-            <a:endParaRPr lang="en-US" sz="1200" dirty="0"/>
-          </a:p>
-          <a:p>
-            <a:pPr marL="342900" indent="-342900">
-              <a:spcAft>
-                <a:spcPts val="800"/>
-              </a:spcAft>
-              <a:buSzPct val="100000"/>
-              <a:buChar char="•"/>
-            </a:pPr>
-            <a:r>
-              <a:rPr lang="en-US" sz="1200" dirty="0">
-                <a:solidFill>
-                  <a:srgbClr val="333333"/>
-                </a:solidFill>
-              </a:rPr>
-              <a:t>Captures initial codebase</a:t>
-            </a:r>
-            <a:endParaRPr lang="en-US" sz="1200" dirty="0"/>
-          </a:p>
-        </p:txBody>
-      </p:sp>
-      <p:sp>
-        <p:nvSpPr>
-          <p:cNvPr id="8" name="Shape 6"/>
-          <p:cNvSpPr/>
-          <p:nvPr/>
-        </p:nvSpPr>
-        <p:spPr>
-          <a:xfrm>
-            <a:off x="3383280" y="2788920"/>
-            <a:ext cx="2377440" cy="2103120"/>
-          </a:xfrm>
-          <a:prstGeom prst="rect">
-            <a:avLst/>
-          </a:prstGeom>
-          <a:solidFill>
-            <a:srgbClr val="FFFFFF"/>
-          </a:solidFill>
-          <a:ln w="12700">
-            <a:solidFill>
-              <a:srgbClr val="000000"/>
-            </a:solidFill>
-            <a:prstDash val="solid"/>
-          </a:ln>
-        </p:spPr>
-      </p:sp>
-      <p:sp>
-        <p:nvSpPr>
-          <p:cNvPr id="9" name="Text 7"/>
-          <p:cNvSpPr/>
-          <p:nvPr/>
-        </p:nvSpPr>
-        <p:spPr>
-          <a:xfrm>
-            <a:off x="3474720" y="2971800"/>
-            <a:ext cx="2194560" cy="457200"/>
-          </a:xfrm>
-          <a:prstGeom prst="rect">
-            <a:avLst/>
-          </a:prstGeom>
-          <a:noFill/>
-          <a:ln/>
-        </p:spPr>
-        <p:txBody>
-          <a:bodyPr wrap="square" lIns="0" tIns="0" rIns="0" bIns="0" rtlCol="0" anchor="ctr"/>
-          <a:lstStyle/>
-          <a:p>
-            <a:pPr algn="ctr" indent="0" marL="0">
-              <a:buNone/>
-            </a:pPr>
-            <a:r>
-              <a:rPr lang="en-US" sz="1600" b="1" dirty="0">
-                <a:solidFill>
-                  <a:srgbClr val="000000"/>
-                </a:solidFill>
-              </a:rPr>
-              <a:t>Analysis Backend</a:t>
-            </a:r>
-            <a:endParaRPr lang="en-US" sz="1600" dirty="0"/>
-          </a:p>
-        </p:txBody>
-      </p:sp>
-      <p:sp>
-        <p:nvSpPr>
-          <p:cNvPr id="10" name="Shape 8"/>
-          <p:cNvSpPr/>
-          <p:nvPr/>
-        </p:nvSpPr>
-        <p:spPr>
-          <a:xfrm>
-            <a:off x="3657600" y="3520440"/>
-            <a:ext cx="1828800" cy="0"/>
-          </a:xfrm>
-          <a:prstGeom prst="line">
-            <a:avLst/>
-          </a:prstGeom>
-          <a:noFill/>
-          <a:ln w="9525">
-            <a:solidFill>
-              <a:srgbClr val="999999"/>
-            </a:solidFill>
-            <a:prstDash val="solid"/>
-          </a:ln>
-        </p:spPr>
-      </p:sp>
-      <p:sp>
-        <p:nvSpPr>
-          <p:cNvPr id="11" name="Text 9"/>
-          <p:cNvSpPr/>
-          <p:nvPr/>
-        </p:nvSpPr>
-        <p:spPr>
-          <a:xfrm>
-            <a:off x="3611880" y="3703320"/>
-            <a:ext cx="2011680" cy="1097280"/>
-          </a:xfrm>
-          <a:prstGeom prst="rect">
-            <a:avLst/>
-          </a:prstGeom>
-          <a:noFill/>
-          <a:ln/>
-        </p:spPr>
-        <p:txBody>
-          <a:bodyPr wrap="square" rtlCol="0" anchor="t"/>
-          <a:lstStyle/>
-          <a:p>
-            <a:pPr marL="342900" indent="-342900">
-              <a:spcAft>
-                <a:spcPts val="800"/>
-              </a:spcAft>
-              <a:buSzPct val="100000"/>
-              <a:buChar char="•"/>
-            </a:pPr>
-            <a:r>
-              <a:rPr lang="en-US" sz="1200" dirty="0">
-                <a:solidFill>
-                  <a:srgbClr val="333333"/>
-                </a:solidFill>
-              </a:rPr>
-              <a:t>Shadow repo reconstruction</a:t>
-            </a:r>
-            <a:endParaRPr lang="en-US" sz="1200" dirty="0"/>
-          </a:p>
-          <a:p>
-            <a:pPr marL="342900" indent="-342900">
-              <a:spcAft>
-                <a:spcPts val="800"/>
-              </a:spcAft>
-              <a:buSzPct val="100000"/>
-              <a:buChar char="•"/>
-            </a:pPr>
-            <a:r>
-              <a:rPr lang="en-US" sz="1200" dirty="0">
-                <a:solidFill>
-                  <a:srgbClr val="333333"/>
-                </a:solidFill>
-              </a:rPr>
-              <a:t>Metric calculation</a:t>
-            </a:r>
-            <a:endParaRPr lang="en-US" sz="1200" dirty="0"/>
-          </a:p>
-          <a:p>
-            <a:pPr marL="342900" indent="-342900">
-              <a:spcAft>
-                <a:spcPts val="800"/>
-              </a:spcAft>
-              <a:buSzPct val="100000"/>
-              <a:buChar char="•"/>
-            </a:pPr>
-            <a:r>
-              <a:rPr lang="en-US" sz="1200" dirty="0">
-                <a:solidFill>
-                  <a:srgbClr val="333333"/>
-                </a:solidFill>
-              </a:rPr>
-              <a:t>Divergence synthesis</a:t>
-            </a:r>
-            <a:endParaRPr lang="en-US" sz="1200" dirty="0"/>
-          </a:p>
-        </p:txBody>
-      </p:sp>
-      <p:sp>
-        <p:nvSpPr>
-          <p:cNvPr id="12" name="Shape 10"/>
-          <p:cNvSpPr/>
-          <p:nvPr/>
-        </p:nvSpPr>
-        <p:spPr>
-          <a:xfrm>
-            <a:off x="6583680" y="2788920"/>
-            <a:ext cx="2377440" cy="2103120"/>
-          </a:xfrm>
-          <a:prstGeom prst="rect">
-            <a:avLst/>
-          </a:prstGeom>
-          <a:solidFill>
-            <a:srgbClr val="FFFFFF"/>
-          </a:solidFill>
-          <a:ln w="12700">
-            <a:solidFill>
-              <a:srgbClr val="000000"/>
-            </a:solidFill>
-            <a:prstDash val="solid"/>
-          </a:ln>
-        </p:spPr>
-      </p:sp>
-      <p:sp>
-        <p:nvSpPr>
-          <p:cNvPr id="13" name="Text 11"/>
-          <p:cNvSpPr/>
-          <p:nvPr/>
-        </p:nvSpPr>
-        <p:spPr>
-          <a:xfrm>
-            <a:off x="6675120" y="2971800"/>
-            <a:ext cx="2194560" cy="457200"/>
-          </a:xfrm>
-          <a:prstGeom prst="rect">
-            <a:avLst/>
-          </a:prstGeom>
-          <a:noFill/>
-          <a:ln/>
-        </p:spPr>
-        <p:txBody>
-          <a:bodyPr wrap="square" lIns="0" tIns="0" rIns="0" bIns="0" rtlCol="0" anchor="ctr"/>
-          <a:lstStyle/>
-          <a:p>
-            <a:pPr algn="ctr" indent="0" marL="0">
-              <a:buNone/>
-            </a:pPr>
-            <a:r>
-              <a:rPr lang="en-US" sz="1600" b="1" dirty="0">
-                <a:solidFill>
-                  <a:srgbClr val="000000"/>
-                </a:solidFill>
-              </a:rPr>
-              <a:t>Dashboard</a:t>
-            </a:r>
-            <a:endParaRPr lang="en-US" sz="1600" dirty="0"/>
-          </a:p>
-        </p:txBody>
-      </p:sp>
-      <p:sp>
-        <p:nvSpPr>
-          <p:cNvPr id="14" name="Shape 12"/>
-          <p:cNvSpPr/>
-          <p:nvPr/>
-        </p:nvSpPr>
-        <p:spPr>
-          <a:xfrm>
-            <a:off x="6858000" y="3520440"/>
-            <a:ext cx="1828800" cy="0"/>
-          </a:xfrm>
-          <a:prstGeom prst="line">
-            <a:avLst/>
-          </a:prstGeom>
-          <a:noFill/>
-          <a:ln w="9525">
-            <a:solidFill>
-              <a:srgbClr val="999999"/>
-            </a:solidFill>
-            <a:prstDash val="solid"/>
-          </a:ln>
-        </p:spPr>
-      </p:sp>
-      <p:sp>
-        <p:nvSpPr>
-          <p:cNvPr id="15" name="Text 13"/>
-          <p:cNvSpPr/>
-          <p:nvPr/>
-        </p:nvSpPr>
-        <p:spPr>
-          <a:xfrm>
-            <a:off x="6812280" y="3703320"/>
-            <a:ext cx="2011680" cy="1097280"/>
-          </a:xfrm>
-          <a:prstGeom prst="rect">
-            <a:avLst/>
-          </a:prstGeom>
-          <a:noFill/>
-          <a:ln/>
-        </p:spPr>
-        <p:txBody>
-          <a:bodyPr wrap="square" rtlCol="0" anchor="t"/>
-          <a:lstStyle/>
-          <a:p>
-            <a:pPr marL="342900" indent="-342900">
-              <a:spcAft>
-                <a:spcPts val="800"/>
-              </a:spcAft>
-              <a:buSzPct val="100000"/>
-              <a:buChar char="•"/>
-            </a:pPr>
-            <a:r>
-              <a:rPr lang="en-US" sz="1200" dirty="0">
-                <a:solidFill>
-                  <a:srgbClr val="333333"/>
-                </a:solidFill>
-              </a:rPr>
-              <a:t>Ranks divergence points</a:t>
-            </a:r>
-            <a:endParaRPr lang="en-US" sz="1200" dirty="0"/>
-          </a:p>
-          <a:p>
-            <a:pPr marL="342900" indent="-342900">
-              <a:spcAft>
-                <a:spcPts val="800"/>
-              </a:spcAft>
-              <a:buSzPct val="100000"/>
-              <a:buChar char="•"/>
-            </a:pPr>
-            <a:r>
-              <a:rPr lang="en-US" sz="1200" dirty="0">
-                <a:solidFill>
-                  <a:srgbClr val="333333"/>
-                </a:solidFill>
-              </a:rPr>
-              <a:t>Explains alternative paths</a:t>
-            </a:r>
-            <a:endParaRPr lang="en-US" sz="1200" dirty="0"/>
-          </a:p>
-        </p:txBody>
-      </p:sp>
-      <p:sp>
-        <p:nvSpPr>
-          <p:cNvPr id="16" name="Shape 14"/>
-          <p:cNvSpPr/>
-          <p:nvPr/>
-        </p:nvSpPr>
-        <p:spPr>
-          <a:xfrm>
-            <a:off x="2560320" y="3840480"/>
-            <a:ext cx="822960" cy="0"/>
-          </a:xfrm>
-          <a:prstGeom prst="line">
-            <a:avLst/>
-          </a:prstGeom>
-          <a:noFill/>
-          <a:ln w="19050">
-            <a:solidFill>
-              <a:srgbClr val="000000"/>
-            </a:solidFill>
-            <a:prstDash val="solid"/>
-            <a:tailEnd type="triangle"/>
-          </a:ln>
-        </p:spPr>
-      </p:sp>
-      <p:sp>
-        <p:nvSpPr>
-          <p:cNvPr id="17" name="Text 15"/>
-          <p:cNvSpPr/>
-          <p:nvPr/>
-        </p:nvSpPr>
-        <p:spPr>
-          <a:xfrm>
-            <a:off x="2514600" y="3520440"/>
-            <a:ext cx="914400" cy="274320"/>
-          </a:xfrm>
-          <a:prstGeom prst="rect">
-            <a:avLst/>
-          </a:prstGeom>
-          <a:noFill/>
-          <a:ln/>
-        </p:spPr>
-        <p:txBody>
-          <a:bodyPr wrap="square" lIns="0" tIns="0" rIns="0" bIns="0" rtlCol="0" anchor="ctr"/>
-          <a:lstStyle/>
-          <a:p>
-            <a:pPr algn="ctr" indent="0" marL="0">
-              <a:buNone/>
-            </a:pPr>
-            <a:r>
-              <a:rPr lang="en-US" sz="900" i="1" dirty="0">
-                <a:solidFill>
-                  <a:srgbClr val="555555"/>
-                </a:solidFill>
-              </a:rPr>
-              <a:t>events.jsonl + initial-src/</a:t>
-            </a:r>
-            <a:endParaRPr lang="en-US" sz="900" dirty="0"/>
-          </a:p>
-        </p:txBody>
-      </p:sp>
-      <p:sp>
-        <p:nvSpPr>
-          <p:cNvPr id="18" name="Shape 16"/>
-          <p:cNvSpPr/>
-          <p:nvPr/>
-        </p:nvSpPr>
-        <p:spPr>
-          <a:xfrm>
-            <a:off x="5760720" y="3840480"/>
-            <a:ext cx="822960" cy="0"/>
-          </a:xfrm>
-          <a:prstGeom prst="line">
-            <a:avLst/>
-          </a:prstGeom>
-          <a:noFill/>
-          <a:ln w="19050">
-            <a:solidFill>
-              <a:srgbClr val="000000"/>
-            </a:solidFill>
-            <a:prstDash val="solid"/>
-            <a:tailEnd type="triangle"/>
-          </a:ln>
-        </p:spPr>
-      </p:sp>
-      <p:sp>
-        <p:nvSpPr>
-          <p:cNvPr id="19" name="Text 17"/>
-          <p:cNvSpPr/>
-          <p:nvPr/>
-        </p:nvSpPr>
-        <p:spPr>
-          <a:xfrm>
-            <a:off x="5715000" y="3520440"/>
-            <a:ext cx="914400" cy="274320"/>
-          </a:xfrm>
-          <a:prstGeom prst="rect">
-            <a:avLst/>
-          </a:prstGeom>
-          <a:noFill/>
-          <a:ln/>
-        </p:spPr>
-        <p:txBody>
-          <a:bodyPr wrap="square" lIns="0" tIns="0" rIns="0" bIns="0" rtlCol="0" anchor="ctr"/>
-          <a:lstStyle/>
-          <a:p>
-            <a:pPr algn="ctr" indent="0" marL="0">
-              <a:buNone/>
-            </a:pPr>
-            <a:r>
-              <a:rPr lang="en-US" sz="900" i="1" dirty="0">
-                <a:solidFill>
-                  <a:srgbClr val="555555"/>
-                </a:solidFill>
-              </a:rPr>
-              <a:t>analysis-report.json</a:t>
-            </a:r>
-            <a:endParaRPr lang="en-US" sz="900" dirty="0"/>
-          </a:p>
-        </p:txBody>
-      </p:sp>
+      </p:pic>
     </p:spTree>
   </p:cSld>
   <p:clrMapOvr>
@@ -5599,8 +6217,8 @@
         </p:nvSpPr>
         <p:spPr>
           <a:xfrm>
-            <a:off x="457200" y="274320"/>
-            <a:ext cx="8229600" cy="640080"/>
+            <a:off x="457200" y="1828800"/>
+            <a:ext cx="8229600" cy="914400"/>
           </a:xfrm>
           <a:prstGeom prst="rect">
             <a:avLst/>
@@ -5612,18 +6230,18 @@
           <a:bodyPr wrap="square" lIns="0" tIns="0" rIns="0" bIns="0" rtlCol="0" anchor="ctr"/>
           <a:lstStyle/>
           <a:p>
-            <a:pPr indent="0" marL="0">
+            <a:pPr algn="ctr" indent="0" marL="0">
               <a:buNone/>
             </a:pPr>
             <a:r>
-              <a:rPr lang="en-US" sz="2800" b="1" dirty="0">
-                <a:solidFill>
-                  <a:srgbClr val="000000"/>
-                </a:solidFill>
-              </a:rPr>
-              <a:t>Scoring a trajectory: J(τ)</a:t>
-            </a:r>
-            <a:endParaRPr lang="en-US" sz="2800" dirty="0"/>
+              <a:rPr lang="en-US" sz="4400" b="1" dirty="0">
+                <a:solidFill>
+                  <a:srgbClr val="000000"/>
+                </a:solidFill>
+              </a:rPr>
+              <a:t>Demo (part 1): live capture</a:t>
+            </a:r>
+            <a:endParaRPr lang="en-US" sz="4400" dirty="0"/>
           </a:p>
         </p:txBody>
       </p:sp>
@@ -5635,8 +6253,8 @@
         </p:nvSpPr>
         <p:spPr>
           <a:xfrm>
-            <a:off x="457200" y="1188720"/>
-            <a:ext cx="8229600" cy="3657600"/>
+            <a:off x="457200" y="2834640"/>
+            <a:ext cx="8229600" cy="1097280"/>
           </a:xfrm>
           <a:prstGeom prst="rect">
             <a:avLst/>
@@ -5645,115 +6263,21 @@
           <a:ln/>
         </p:spPr>
         <p:txBody>
-          <a:bodyPr wrap="square" rtlCol="0" anchor="t"/>
-          <a:lstStyle/>
-          <a:p>
-            <a:pPr marL="342900" indent="-342900">
-              <a:spcAft>
-                <a:spcPts val="600"/>
-              </a:spcAft>
-              <a:buSzPct val="100000"/>
-              <a:buChar char="•"/>
-            </a:pPr>
-            <a:r>
-              <a:rPr lang="en-US" sz="1600" dirty="0">
-                <a:solidFill>
-                  <a:srgbClr val="000000"/>
-                </a:solidFill>
-              </a:rPr>
-              <a:t>Process score J(τ) on a 0–100 scale, baseline 50.</a:t>
-            </a:r>
-            <a:endParaRPr lang="en-US" sz="1600" dirty="0"/>
-          </a:p>
-          <a:p>
-            <a:pPr marL="342900" indent="-342900">
-              <a:spcAft>
-                <a:spcPts val="600"/>
-              </a:spcAft>
-              <a:buSzPct val="100000"/>
-              <a:buChar char="•"/>
-            </a:pPr>
-            <a:r>
-              <a:rPr lang="en-US" sz="1600" dirty="0">
-                <a:solidFill>
-                  <a:srgbClr val="000000"/>
-                </a:solidFill>
-              </a:rPr>
-              <a:t>Positive terms — cleanliness gain (W_g = 50), step-savings bonus (W_l = 11).</a:t>
-            </a:r>
-            <a:endParaRPr lang="en-US" sz="1600" dirty="0"/>
-          </a:p>
-          <a:p>
-            <a:pPr marL="342900" indent="-342900">
-              <a:spcAft>
-                <a:spcPts val="600"/>
-              </a:spcAft>
-              <a:buSzPct val="100000"/>
-              <a:buChar char="•"/>
-            </a:pPr>
-            <a:r>
-              <a:rPr lang="en-US" sz="1600" dirty="0">
-                <a:solidFill>
-                  <a:srgbClr val="000000"/>
-                </a:solidFill>
-              </a:rPr>
-              <a:t>Process penalties — intermediate-lag (11), commit-gap (7).</a:t>
-            </a:r>
-            <a:endParaRPr lang="en-US" sz="1600" dirty="0"/>
-          </a:p>
-          <a:p>
-            <a:pPr marL="342900" indent="-342900">
-              <a:spcAft>
-                <a:spcPts val="600"/>
-              </a:spcAft>
-              <a:buSzPct val="100000"/>
-              <a:buChar char="•"/>
-            </a:pPr>
-            <a:r>
-              <a:rPr lang="en-US" sz="1600" dirty="0">
-                <a:solidFill>
-                  <a:srgbClr val="000000"/>
-                </a:solidFill>
-              </a:rPr>
-              <a:t>Safety penalties — broken build/test (28), skip-tests (14), manual-when-IDE (11).</a:t>
-            </a:r>
-            <a:endParaRPr lang="en-US" sz="1600" dirty="0"/>
-          </a:p>
-          <a:p>
-            <a:pPr marL="342900" indent="-342900">
-              <a:spcAft>
-                <a:spcPts val="600"/>
-              </a:spcAft>
-              <a:buSzPct val="100000"/>
-              <a:buChar char="•"/>
-            </a:pPr>
-            <a:r>
-              <a:rPr lang="en-US" sz="1600" dirty="0">
-                <a:solidFill>
-                  <a:srgbClr val="000000"/>
-                </a:solidFill>
-              </a:rPr>
-              <a:t>Key design choice: the broken-state penalty is sized so no single-step gain can outweigh a broken build.</a:t>
-            </a:r>
-            <a:endParaRPr lang="en-US" sz="1600" dirty="0"/>
-          </a:p>
-          <a:p>
-            <a:pPr marL="342900" indent="-342900">
-              <a:spcAft>
-                <a:spcPts val="600"/>
-              </a:spcAft>
-              <a:buSzPct val="100000"/>
-              <a:buChar char="•"/>
-            </a:pPr>
-            <a:r>
-              <a:rPr lang="en-US" sz="1600" dirty="0">
-                <a:solidFill>
-                  <a:srgbClr val="000000"/>
-                </a:solidFill>
-              </a:rPr>
-              <a:t>Behaviour preservation is non-negotiable.</a:t>
-            </a:r>
-            <a:endParaRPr lang="en-US" sz="1600" dirty="0"/>
+          <a:bodyPr wrap="square" rtlCol="0" anchor="ctr"/>
+          <a:lstStyle/>
+          <a:p>
+            <a:pPr algn="ctr" indent="0" marL="0">
+              <a:buNone/>
+            </a:pPr>
+            <a:r>
+              <a:rPr lang="en-US" sz="1800" i="1" dirty="0">
+                <a:solidFill>
+                  <a:srgbClr val="555555"/>
+                </a:solidFill>
+              </a:rPr>
+              <a:t>I'll start a short live refactoring session. The tool will analyse it in the background while we walk through the methodology.</a:t>
+            </a:r>
+            <a:endParaRPr lang="en-US" sz="1800" dirty="0"/>
           </a:p>
         </p:txBody>
       </p:sp>
@@ -5812,7 +6336,7 @@
                   <a:srgbClr val="000000"/>
                 </a:solidFill>
               </a:rPr>
-              <a:t>The cleanliness sub-score</a:t>
+              <a:t>What the tool does, end to end</a:t>
             </a:r>
             <a:endParaRPr lang="en-US" sz="2800" dirty="0"/>
           </a:p>
@@ -5826,8 +6350,8 @@
         </p:nvSpPr>
         <p:spPr>
           <a:xfrm>
-            <a:off x="457200" y="1188720"/>
-            <a:ext cx="8229600" cy="3657600"/>
+            <a:off x="457200" y="1097280"/>
+            <a:ext cx="8229600" cy="1554480"/>
           </a:xfrm>
           <a:prstGeom prst="rect">
             <a:avLst/>
@@ -5852,7 +6376,7 @@
                   <a:srgbClr val="000000"/>
                 </a:solidFill>
               </a:rPr>
-              <a:t>Six equally-weighted code-quality signals.</a:t>
+              <a:t>IntelliJ plugin: records every edit, refactoring, build, test, and commit during a session.</a:t>
             </a:r>
             <a:endParaRPr lang="en-US" sz="1600" dirty="0"/>
           </a:p>
@@ -5870,7 +6394,7 @@
                   <a:srgbClr val="000000"/>
                 </a:solidFill>
               </a:rPr>
-              <a:t>Cognitive complexity, coupling (CBO), duplication (CPD), readability, code smells (PMD), cohesion (TCC).</a:t>
+              <a:t>Analysis backend: reconstructs the trajectory, scores it, and detects divergence points.</a:t>
             </a:r>
             <a:endParaRPr lang="en-US" sz="1600" dirty="0"/>
           </a:p>
@@ -5888,27 +6412,573 @@
                   <a:srgbClr val="000000"/>
                 </a:solidFill>
               </a:rPr>
-              <a:t>Normalised against the trajectory's own range, so different sessions are comparable.</a:t>
+              <a:t>Dashboard: surfaces where you diverged, an alternative path, how much better it scores, and why.</a:t>
             </a:r>
             <a:endParaRPr lang="en-US" sz="1600" dirty="0"/>
           </a:p>
+        </p:txBody>
+      </p:sp>
+      <p:sp>
+        <p:nvSpPr>
+          <p:cNvPr id="4" name="Shape 2"/>
+          <p:cNvSpPr/>
+          <p:nvPr/>
+        </p:nvSpPr>
+        <p:spPr>
+          <a:xfrm>
+            <a:off x="182880" y="2788920"/>
+            <a:ext cx="2377440" cy="2103120"/>
+          </a:xfrm>
+          <a:prstGeom prst="rect">
+            <a:avLst/>
+          </a:prstGeom>
+          <a:solidFill>
+            <a:srgbClr val="FFFFFF"/>
+          </a:solidFill>
+          <a:ln w="12700">
+            <a:solidFill>
+              <a:srgbClr val="000000"/>
+            </a:solidFill>
+            <a:prstDash val="solid"/>
+          </a:ln>
+        </p:spPr>
+      </p:sp>
+      <p:sp>
+        <p:nvSpPr>
+          <p:cNvPr id="5" name="Text 3"/>
+          <p:cNvSpPr/>
+          <p:nvPr/>
+        </p:nvSpPr>
+        <p:spPr>
+          <a:xfrm>
+            <a:off x="274320" y="2971800"/>
+            <a:ext cx="2194560" cy="457200"/>
+          </a:xfrm>
+          <a:prstGeom prst="rect">
+            <a:avLst/>
+          </a:prstGeom>
+          <a:noFill/>
+          <a:ln/>
+        </p:spPr>
+        <p:txBody>
+          <a:bodyPr wrap="square" lIns="0" tIns="0" rIns="0" bIns="0" rtlCol="0" anchor="ctr"/>
+          <a:lstStyle/>
+          <a:p>
+            <a:pPr algn="ctr" indent="0" marL="0">
+              <a:buNone/>
+            </a:pPr>
+            <a:r>
+              <a:rPr lang="en-US" sz="1600" b="1" dirty="0">
+                <a:solidFill>
+                  <a:srgbClr val="000000"/>
+                </a:solidFill>
+              </a:rPr>
+              <a:t>IntelliJ Plugin</a:t>
+            </a:r>
+            <a:endParaRPr lang="en-US" sz="1600" dirty="0"/>
+          </a:p>
+        </p:txBody>
+      </p:sp>
+      <p:sp>
+        <p:nvSpPr>
+          <p:cNvPr id="6" name="Shape 4"/>
+          <p:cNvSpPr/>
+          <p:nvPr/>
+        </p:nvSpPr>
+        <p:spPr>
+          <a:xfrm>
+            <a:off x="457200" y="3520440"/>
+            <a:ext cx="1828800" cy="0"/>
+          </a:xfrm>
+          <a:prstGeom prst="line">
+            <a:avLst/>
+          </a:prstGeom>
+          <a:noFill/>
+          <a:ln w="9525">
+            <a:solidFill>
+              <a:srgbClr val="999999"/>
+            </a:solidFill>
+            <a:prstDash val="solid"/>
+          </a:ln>
+        </p:spPr>
+      </p:sp>
+      <p:sp>
+        <p:nvSpPr>
+          <p:cNvPr id="7" name="Text 5"/>
+          <p:cNvSpPr/>
+          <p:nvPr/>
+        </p:nvSpPr>
+        <p:spPr>
+          <a:xfrm>
+            <a:off x="411480" y="3703320"/>
+            <a:ext cx="2011680" cy="1097280"/>
+          </a:xfrm>
+          <a:prstGeom prst="rect">
+            <a:avLst/>
+          </a:prstGeom>
+          <a:noFill/>
+          <a:ln/>
+        </p:spPr>
+        <p:txBody>
+          <a:bodyPr wrap="square" rtlCol="0" anchor="t"/>
+          <a:lstStyle/>
           <a:p>
             <a:pPr marL="342900" indent="-342900">
               <a:spcAft>
-                <a:spcPts val="600"/>
+                <a:spcPts val="800"/>
               </a:spcAft>
               <a:buSzPct val="100000"/>
               <a:buChar char="•"/>
             </a:pPr>
             <a:r>
-              <a:rPr lang="en-US" sz="1600" dirty="0">
-                <a:solidFill>
-                  <a:srgbClr val="000000"/>
-                </a:solidFill>
-              </a:rPr>
-              <a:t>Equal weights are justified: no trajectory-level calibration data exists, so equal weights are the least-assumptive choice.</a:t>
+              <a:rPr lang="en-US" sz="1200" dirty="0">
+                <a:solidFill>
+                  <a:srgbClr val="333333"/>
+                </a:solidFill>
+              </a:rPr>
+              <a:t>Records developer events</a:t>
+            </a:r>
+            <a:endParaRPr lang="en-US" sz="1200" dirty="0"/>
+          </a:p>
+          <a:p>
+            <a:pPr marL="342900" indent="-342900">
+              <a:spcAft>
+                <a:spcPts val="800"/>
+              </a:spcAft>
+              <a:buSzPct val="100000"/>
+              <a:buChar char="•"/>
+            </a:pPr>
+            <a:r>
+              <a:rPr lang="en-US" sz="1200" dirty="0">
+                <a:solidFill>
+                  <a:srgbClr val="333333"/>
+                </a:solidFill>
+              </a:rPr>
+              <a:t>Captures initial codebase</a:t>
+            </a:r>
+            <a:endParaRPr lang="en-US" sz="1200" dirty="0"/>
+          </a:p>
+        </p:txBody>
+      </p:sp>
+      <p:sp>
+        <p:nvSpPr>
+          <p:cNvPr id="8" name="Shape 6"/>
+          <p:cNvSpPr/>
+          <p:nvPr/>
+        </p:nvSpPr>
+        <p:spPr>
+          <a:xfrm>
+            <a:off x="3383280" y="2788920"/>
+            <a:ext cx="2377440" cy="2103120"/>
+          </a:xfrm>
+          <a:prstGeom prst="rect">
+            <a:avLst/>
+          </a:prstGeom>
+          <a:solidFill>
+            <a:srgbClr val="FFFFFF"/>
+          </a:solidFill>
+          <a:ln w="12700">
+            <a:solidFill>
+              <a:srgbClr val="000000"/>
+            </a:solidFill>
+            <a:prstDash val="solid"/>
+          </a:ln>
+        </p:spPr>
+      </p:sp>
+      <p:sp>
+        <p:nvSpPr>
+          <p:cNvPr id="9" name="Text 7"/>
+          <p:cNvSpPr/>
+          <p:nvPr/>
+        </p:nvSpPr>
+        <p:spPr>
+          <a:xfrm>
+            <a:off x="3474720" y="2971800"/>
+            <a:ext cx="2194560" cy="457200"/>
+          </a:xfrm>
+          <a:prstGeom prst="rect">
+            <a:avLst/>
+          </a:prstGeom>
+          <a:noFill/>
+          <a:ln/>
+        </p:spPr>
+        <p:txBody>
+          <a:bodyPr wrap="square" lIns="0" tIns="0" rIns="0" bIns="0" rtlCol="0" anchor="ctr"/>
+          <a:lstStyle/>
+          <a:p>
+            <a:pPr algn="ctr" indent="0" marL="0">
+              <a:buNone/>
+            </a:pPr>
+            <a:r>
+              <a:rPr lang="en-US" sz="1600" b="1" dirty="0">
+                <a:solidFill>
+                  <a:srgbClr val="000000"/>
+                </a:solidFill>
+              </a:rPr>
+              <a:t>Analysis Backend</a:t>
             </a:r>
             <a:endParaRPr lang="en-US" sz="1600" dirty="0"/>
+          </a:p>
+        </p:txBody>
+      </p:sp>
+      <p:sp>
+        <p:nvSpPr>
+          <p:cNvPr id="10" name="Shape 8"/>
+          <p:cNvSpPr/>
+          <p:nvPr/>
+        </p:nvSpPr>
+        <p:spPr>
+          <a:xfrm>
+            <a:off x="3657600" y="3520440"/>
+            <a:ext cx="1828800" cy="0"/>
+          </a:xfrm>
+          <a:prstGeom prst="line">
+            <a:avLst/>
+          </a:prstGeom>
+          <a:noFill/>
+          <a:ln w="9525">
+            <a:solidFill>
+              <a:srgbClr val="999999"/>
+            </a:solidFill>
+            <a:prstDash val="solid"/>
+          </a:ln>
+        </p:spPr>
+      </p:sp>
+      <p:sp>
+        <p:nvSpPr>
+          <p:cNvPr id="11" name="Text 9"/>
+          <p:cNvSpPr/>
+          <p:nvPr/>
+        </p:nvSpPr>
+        <p:spPr>
+          <a:xfrm>
+            <a:off x="3611880" y="3703320"/>
+            <a:ext cx="2011680" cy="1097280"/>
+          </a:xfrm>
+          <a:prstGeom prst="rect">
+            <a:avLst/>
+          </a:prstGeom>
+          <a:noFill/>
+          <a:ln/>
+        </p:spPr>
+        <p:txBody>
+          <a:bodyPr wrap="square" rtlCol="0" anchor="t"/>
+          <a:lstStyle/>
+          <a:p>
+            <a:pPr marL="342900" indent="-342900">
+              <a:spcAft>
+                <a:spcPts val="800"/>
+              </a:spcAft>
+              <a:buSzPct val="100000"/>
+              <a:buChar char="•"/>
+            </a:pPr>
+            <a:r>
+              <a:rPr lang="en-US" sz="1200" dirty="0">
+                <a:solidFill>
+                  <a:srgbClr val="333333"/>
+                </a:solidFill>
+              </a:rPr>
+              <a:t>Shadow repo reconstruction</a:t>
+            </a:r>
+            <a:endParaRPr lang="en-US" sz="1200" dirty="0"/>
+          </a:p>
+          <a:p>
+            <a:pPr marL="342900" indent="-342900">
+              <a:spcAft>
+                <a:spcPts val="800"/>
+              </a:spcAft>
+              <a:buSzPct val="100000"/>
+              <a:buChar char="•"/>
+            </a:pPr>
+            <a:r>
+              <a:rPr lang="en-US" sz="1200" dirty="0">
+                <a:solidFill>
+                  <a:srgbClr val="333333"/>
+                </a:solidFill>
+              </a:rPr>
+              <a:t>Metric calculation</a:t>
+            </a:r>
+            <a:endParaRPr lang="en-US" sz="1200" dirty="0"/>
+          </a:p>
+          <a:p>
+            <a:pPr marL="342900" indent="-342900">
+              <a:spcAft>
+                <a:spcPts val="800"/>
+              </a:spcAft>
+              <a:buSzPct val="100000"/>
+              <a:buChar char="•"/>
+            </a:pPr>
+            <a:r>
+              <a:rPr lang="en-US" sz="1200" dirty="0">
+                <a:solidFill>
+                  <a:srgbClr val="333333"/>
+                </a:solidFill>
+              </a:rPr>
+              <a:t>Divergence synthesis</a:t>
+            </a:r>
+            <a:endParaRPr lang="en-US" sz="1200" dirty="0"/>
+          </a:p>
+        </p:txBody>
+      </p:sp>
+      <p:sp>
+        <p:nvSpPr>
+          <p:cNvPr id="12" name="Shape 10"/>
+          <p:cNvSpPr/>
+          <p:nvPr/>
+        </p:nvSpPr>
+        <p:spPr>
+          <a:xfrm>
+            <a:off x="6583680" y="2788920"/>
+            <a:ext cx="2377440" cy="2103120"/>
+          </a:xfrm>
+          <a:prstGeom prst="rect">
+            <a:avLst/>
+          </a:prstGeom>
+          <a:solidFill>
+            <a:srgbClr val="FFFFFF"/>
+          </a:solidFill>
+          <a:ln w="12700">
+            <a:solidFill>
+              <a:srgbClr val="000000"/>
+            </a:solidFill>
+            <a:prstDash val="solid"/>
+          </a:ln>
+        </p:spPr>
+      </p:sp>
+      <p:sp>
+        <p:nvSpPr>
+          <p:cNvPr id="13" name="Text 11"/>
+          <p:cNvSpPr/>
+          <p:nvPr/>
+        </p:nvSpPr>
+        <p:spPr>
+          <a:xfrm>
+            <a:off x="6675120" y="2971800"/>
+            <a:ext cx="2194560" cy="457200"/>
+          </a:xfrm>
+          <a:prstGeom prst="rect">
+            <a:avLst/>
+          </a:prstGeom>
+          <a:noFill/>
+          <a:ln/>
+        </p:spPr>
+        <p:txBody>
+          <a:bodyPr wrap="square" lIns="0" tIns="0" rIns="0" bIns="0" rtlCol="0" anchor="ctr"/>
+          <a:lstStyle/>
+          <a:p>
+            <a:pPr algn="ctr" indent="0" marL="0">
+              <a:buNone/>
+            </a:pPr>
+            <a:r>
+              <a:rPr lang="en-US" sz="1600" b="1" dirty="0">
+                <a:solidFill>
+                  <a:srgbClr val="000000"/>
+                </a:solidFill>
+              </a:rPr>
+              <a:t>Dashboard</a:t>
+            </a:r>
+            <a:endParaRPr lang="en-US" sz="1600" dirty="0"/>
+          </a:p>
+        </p:txBody>
+      </p:sp>
+      <p:sp>
+        <p:nvSpPr>
+          <p:cNvPr id="14" name="Shape 12"/>
+          <p:cNvSpPr/>
+          <p:nvPr/>
+        </p:nvSpPr>
+        <p:spPr>
+          <a:xfrm>
+            <a:off x="6858000" y="3520440"/>
+            <a:ext cx="1828800" cy="0"/>
+          </a:xfrm>
+          <a:prstGeom prst="line">
+            <a:avLst/>
+          </a:prstGeom>
+          <a:noFill/>
+          <a:ln w="9525">
+            <a:solidFill>
+              <a:srgbClr val="999999"/>
+            </a:solidFill>
+            <a:prstDash val="solid"/>
+          </a:ln>
+        </p:spPr>
+      </p:sp>
+      <p:sp>
+        <p:nvSpPr>
+          <p:cNvPr id="15" name="Text 13"/>
+          <p:cNvSpPr/>
+          <p:nvPr/>
+        </p:nvSpPr>
+        <p:spPr>
+          <a:xfrm>
+            <a:off x="6812280" y="3703320"/>
+            <a:ext cx="2011680" cy="1097280"/>
+          </a:xfrm>
+          <a:prstGeom prst="rect">
+            <a:avLst/>
+          </a:prstGeom>
+          <a:noFill/>
+          <a:ln/>
+        </p:spPr>
+        <p:txBody>
+          <a:bodyPr wrap="square" rtlCol="0" anchor="t"/>
+          <a:lstStyle/>
+          <a:p>
+            <a:pPr marL="342900" indent="-342900">
+              <a:spcAft>
+                <a:spcPts val="800"/>
+              </a:spcAft>
+              <a:buSzPct val="100000"/>
+              <a:buChar char="•"/>
+            </a:pPr>
+            <a:r>
+              <a:rPr lang="en-US" sz="1200" dirty="0">
+                <a:solidFill>
+                  <a:srgbClr val="333333"/>
+                </a:solidFill>
+              </a:rPr>
+              <a:t>Surfaces divergence points in context</a:t>
+            </a:r>
+            <a:endParaRPr lang="en-US" sz="1200" dirty="0"/>
+          </a:p>
+          <a:p>
+            <a:pPr marL="342900" indent="-342900">
+              <a:spcAft>
+                <a:spcPts val="800"/>
+              </a:spcAft>
+              <a:buSzPct val="100000"/>
+              <a:buChar char="•"/>
+            </a:pPr>
+            <a:r>
+              <a:rPr lang="en-US" sz="1200" dirty="0">
+                <a:solidFill>
+                  <a:srgbClr val="333333"/>
+                </a:solidFill>
+              </a:rPr>
+              <a:t>Explains alternative paths</a:t>
+            </a:r>
+            <a:endParaRPr lang="en-US" sz="1200" dirty="0"/>
+          </a:p>
+        </p:txBody>
+      </p:sp>
+      <p:sp>
+        <p:nvSpPr>
+          <p:cNvPr id="16" name="Shape 14"/>
+          <p:cNvSpPr/>
+          <p:nvPr/>
+        </p:nvSpPr>
+        <p:spPr>
+          <a:xfrm>
+            <a:off x="2560320" y="3840480"/>
+            <a:ext cx="822960" cy="0"/>
+          </a:xfrm>
+          <a:prstGeom prst="line">
+            <a:avLst/>
+          </a:prstGeom>
+          <a:noFill/>
+          <a:ln w="19050">
+            <a:solidFill>
+              <a:srgbClr val="000000"/>
+            </a:solidFill>
+            <a:prstDash val="solid"/>
+            <a:tailEnd type="triangle"/>
+          </a:ln>
+        </p:spPr>
+      </p:sp>
+      <p:sp>
+        <p:nvSpPr>
+          <p:cNvPr id="17" name="Text 15"/>
+          <p:cNvSpPr/>
+          <p:nvPr/>
+        </p:nvSpPr>
+        <p:spPr>
+          <a:xfrm>
+            <a:off x="2514600" y="3520440"/>
+            <a:ext cx="914400" cy="274320"/>
+          </a:xfrm>
+          <a:prstGeom prst="rect">
+            <a:avLst/>
+          </a:prstGeom>
+          <a:noFill/>
+          <a:ln/>
+        </p:spPr>
+        <p:txBody>
+          <a:bodyPr wrap="square" lIns="0" tIns="0" rIns="0" bIns="0" rtlCol="0" anchor="ctr"/>
+          <a:lstStyle/>
+          <a:p>
+            <a:pPr algn="ctr" indent="0" marL="0">
+              <a:buNone/>
+            </a:pPr>
+            <a:r>
+              <a:rPr lang="en-US" sz="900" i="1" dirty="0">
+                <a:solidFill>
+                  <a:srgbClr val="555555"/>
+                </a:solidFill>
+              </a:rPr>
+              <a:t>events.jsonl + initial-src/</a:t>
+            </a:r>
+            <a:endParaRPr lang="en-US" sz="900" dirty="0"/>
+          </a:p>
+        </p:txBody>
+      </p:sp>
+      <p:sp>
+        <p:nvSpPr>
+          <p:cNvPr id="18" name="Shape 16"/>
+          <p:cNvSpPr/>
+          <p:nvPr/>
+        </p:nvSpPr>
+        <p:spPr>
+          <a:xfrm>
+            <a:off x="5760720" y="3840480"/>
+            <a:ext cx="822960" cy="0"/>
+          </a:xfrm>
+          <a:prstGeom prst="line">
+            <a:avLst/>
+          </a:prstGeom>
+          <a:noFill/>
+          <a:ln w="19050">
+            <a:solidFill>
+              <a:srgbClr val="000000"/>
+            </a:solidFill>
+            <a:prstDash val="solid"/>
+            <a:tailEnd type="triangle"/>
+          </a:ln>
+        </p:spPr>
+      </p:sp>
+      <p:sp>
+        <p:nvSpPr>
+          <p:cNvPr id="19" name="Text 17"/>
+          <p:cNvSpPr/>
+          <p:nvPr/>
+        </p:nvSpPr>
+        <p:spPr>
+          <a:xfrm>
+            <a:off x="5715000" y="3520440"/>
+            <a:ext cx="914400" cy="274320"/>
+          </a:xfrm>
+          <a:prstGeom prst="rect">
+            <a:avLst/>
+          </a:prstGeom>
+          <a:noFill/>
+          <a:ln/>
+        </p:spPr>
+        <p:txBody>
+          <a:bodyPr wrap="square" lIns="0" tIns="0" rIns="0" bIns="0" rtlCol="0" anchor="ctr"/>
+          <a:lstStyle/>
+          <a:p>
+            <a:pPr algn="ctr" indent="0" marL="0">
+              <a:buNone/>
+            </a:pPr>
+            <a:r>
+              <a:rPr lang="en-US" sz="900" i="1" dirty="0">
+                <a:solidFill>
+                  <a:srgbClr val="555555"/>
+                </a:solidFill>
+              </a:rPr>
+              <a:t>analysis-report.json</a:t>
+            </a:r>
+            <a:endParaRPr lang="en-US" sz="900" dirty="0"/>
           </a:p>
         </p:txBody>
       </p:sp>
@@ -5967,7 +7037,7 @@
                   <a:srgbClr val="000000"/>
                 </a:solidFill>
               </a:rPr>
-              <a:t>Four kinds of divergence</a:t>
+              <a:t>Scoring a trajectory: J(τ)</a:t>
             </a:r>
             <a:endParaRPr lang="en-US" sz="2800" dirty="0"/>
           </a:p>
@@ -5981,8 +7051,8 @@
         </p:nvSpPr>
         <p:spPr>
           <a:xfrm>
-            <a:off x="457200" y="1188720"/>
-            <a:ext cx="8229600" cy="3657600"/>
+            <a:off x="457200" y="1143000"/>
+            <a:ext cx="8229600" cy="548640"/>
           </a:xfrm>
           <a:prstGeom prst="rect">
             <a:avLst/>
@@ -5991,97 +7061,860 @@
           <a:ln/>
         </p:spPr>
         <p:txBody>
-          <a:bodyPr wrap="square" rtlCol="0" anchor="t"/>
-          <a:lstStyle/>
-          <a:p>
-            <a:pPr marL="342900" indent="-342900">
-              <a:spcAft>
-                <a:spcPts val="600"/>
-              </a:spcAft>
-              <a:buSzPct val="100000"/>
-              <a:buChar char="•"/>
-            </a:pPr>
-            <a:r>
-              <a:rPr lang="en-US" sz="1600" dirty="0">
-                <a:solidFill>
-                  <a:srgbClr val="000000"/>
-                </a:solidFill>
-              </a:rPr>
-              <a:t>Ordering — the right refactorings, performed in a suboptimal order.</a:t>
-            </a:r>
-            <a:endParaRPr lang="en-US" sz="1600" dirty="0"/>
-          </a:p>
-          <a:p>
-            <a:pPr marL="342900" indent="-342900">
-              <a:spcAft>
-                <a:spcPts val="600"/>
-              </a:spcAft>
-              <a:buSzPct val="100000"/>
-              <a:buChar char="•"/>
-            </a:pPr>
-            <a:r>
-              <a:rPr lang="en-US" sz="1600" dirty="0">
-                <a:solidFill>
-                  <a:srgbClr val="000000"/>
-                </a:solidFill>
-              </a:rPr>
-              <a:t>Manual-Refactor — hand-edited what the IDE could do safely.</a:t>
-            </a:r>
-            <a:endParaRPr lang="en-US" sz="1600" dirty="0"/>
-          </a:p>
-          <a:p>
-            <a:pPr marL="342900" indent="-342900">
-              <a:spcAft>
-                <a:spcPts val="600"/>
-              </a:spcAft>
-              <a:buSzPct val="100000"/>
-              <a:buChar char="•"/>
-            </a:pPr>
-            <a:r>
-              <a:rPr lang="en-US" sz="1600" dirty="0">
-                <a:solidFill>
-                  <a:srgbClr val="000000"/>
-                </a:solidFill>
-              </a:rPr>
-              <a:t>Rework — added code then removed it (or vice versa); net-zero churn.</a:t>
-            </a:r>
-            <a:endParaRPr lang="en-US" sz="1600" dirty="0"/>
-          </a:p>
-          <a:p>
-            <a:pPr marL="342900" indent="-342900">
-              <a:spcAft>
-                <a:spcPts val="600"/>
-              </a:spcAft>
-              <a:buSzPct val="100000"/>
-              <a:buChar char="•"/>
-            </a:pPr>
-            <a:r>
-              <a:rPr lang="en-US" sz="1600" dirty="0">
-                <a:solidFill>
-                  <a:srgbClr val="000000"/>
-                </a:solidFill>
-              </a:rPr>
-              <a:t>Hygiene — long stretches without tests or commits.</a:t>
-            </a:r>
-            <a:endParaRPr lang="en-US" sz="1600" dirty="0"/>
-          </a:p>
-          <a:p>
-            <a:pPr marL="342900" indent="-342900">
-              <a:spcAft>
-                <a:spcPts val="600"/>
-              </a:spcAft>
-              <a:buSzPct val="100000"/>
-              <a:buChar char="•"/>
-            </a:pPr>
-            <a:r>
-              <a:rPr lang="en-US" sz="1600" dirty="0">
-                <a:solidFill>
-                  <a:srgbClr val="000000"/>
-                </a:solidFill>
-              </a:rPr>
-              <a:t>Each is actionable, and each has its own detector + synthesiser — the next four slides walk through them.</a:t>
-            </a:r>
-            <a:endParaRPr lang="en-US" sz="1600" dirty="0"/>
+          <a:bodyPr wrap="square" lIns="0" tIns="0" rIns="0" bIns="0" rtlCol="0" anchor="ctr"/>
+          <a:lstStyle/>
+          <a:p>
+            <a:pPr algn="ctr" indent="0" marL="0">
+              <a:buNone/>
+            </a:pPr>
+            <a:r>
+              <a:rPr lang="en-US" sz="2200" dirty="0">
+                <a:solidFill>
+                  <a:srgbClr val="000000"/>
+                </a:solidFill>
+              </a:rPr>
+              <a:t>J(τ)  =  clip</a:t>
+            </a:r>
+            <a:pPr algn="ctr" indent="0" marL="0">
+              <a:buNone/>
+            </a:pPr>
+            <a:r>
+              <a:rPr lang="en-US" sz="2200" baseline="-40000" dirty="0">
+                <a:solidFill>
+                  <a:srgbClr val="000000"/>
+                </a:solidFill>
+              </a:rPr>
+              <a:t>[0,100]</a:t>
+            </a:r>
+            <a:pPr algn="ctr" indent="0" marL="0">
+              <a:buNone/>
+            </a:pPr>
+            <a:r>
+              <a:rPr lang="en-US" sz="2200" dirty="0">
+                <a:solidFill>
+                  <a:srgbClr val="000000"/>
+                </a:solidFill>
+              </a:rPr>
+              <a:t>  (    50    </a:t>
+            </a:r>
+            <a:pPr algn="ctr" indent="0" marL="0">
+              <a:buNone/>
+            </a:pPr>
+            <a:r>
+              <a:rPr lang="en-US" sz="2200" i="1" dirty="0">
+                <a:solidFill>
+                  <a:srgbClr val="777777"/>
+                </a:solidFill>
+              </a:rPr>
+              <a:t>(baseline)</a:t>
+            </a:r>
+            <a:pPr algn="ctr" indent="0" marL="0">
+              <a:buNone/>
+            </a:pPr>
+            <a:r>
+              <a:rPr lang="en-US" sz="2200" dirty="0">
+                <a:solidFill>
+                  <a:srgbClr val="000000"/>
+                </a:solidFill>
+              </a:rPr>
+              <a:t>    +</a:t>
+            </a:r>
+            <a:endParaRPr lang="en-US" sz="2200" dirty="0"/>
+          </a:p>
+        </p:txBody>
+      </p:sp>
+      <p:graphicFrame>
+        <p:nvGraphicFramePr>
+          <p:cNvPr id="9" name="Table 0"/>
+          <p:cNvGraphicFramePr>
+            <a:graphicFrameLocks noGrp="1"/>
+          </p:cNvGraphicFramePr>
+          <p:nvPr>
+            <p:extLst>
+              <p:ext uri="{D42A27DB-BD31-4B8C-83A1-F6EECF244321}">
+                <p14:modId xmlns:p14="http://schemas.microsoft.com/office/powerpoint/2010/main" val="1579011935"/>
+              </p:ext>
+            </p:extLst>
+          </p:nvPr>
+        </p:nvGraphicFramePr>
+        <p:xfrm>
+          <a:off x="2377440" y="1874520"/>
+          <a:ext cx="4389120" cy="914400"/>
+        </p:xfrm>
+        <a:graphic>
+          <a:graphicData uri="http://schemas.openxmlformats.org/drawingml/2006/table">
+            <a:tbl>
+              <a:tblPr/>
+              <a:tblGrid>
+                <a:gridCol w="731520"/>
+                <a:gridCol w="365760"/>
+                <a:gridCol w="3291840"/>
+              </a:tblGrid>
+              <a:tr h="310896">
+                <a:tc>
+                  <a:txBody>
+                    <a:bodyPr/>
+                    <a:lstStyle/>
+                    <a:p>
+                      <a:pPr algn="r" indent="0" marL="0">
+                        <a:buNone/>
+                      </a:pPr>
+                      <a:r>
+                        <a:rPr lang="en-US" sz="1600" b="1" dirty="0">
+                          <a:solidFill>
+                            <a:srgbClr val="0A7D2A"/>
+                          </a:solidFill>
+                        </a:rPr>
+                        <a:t>+50</a:t>
+                      </a:r>
+                      <a:endParaRPr lang="en-US" sz="1600" dirty="0"/>
+                    </a:p>
+                  </a:txBody>
+                  <a:tcPr marL="54864" marR="54864" marT="54864" marB="54864" anchor="ctr">
+                    <a:lnL w="0" cap="flat" cmpd="sng" algn="ctr">
+                      <a:noFill/>
+                    </a:lnL>
+                    <a:lnR w="0" cap="flat" cmpd="sng" algn="ctr">
+                      <a:noFill/>
+                    </a:lnR>
+                    <a:lnT w="0" cap="flat" cmpd="sng" algn="ctr">
+                      <a:noFill/>
+                    </a:lnT>
+                    <a:lnB w="0" cap="flat" cmpd="sng" algn="ctr">
+                      <a:noFill/>
+                    </a:lnB>
+                  </a:tcPr>
+                </a:tc>
+                <a:tc>
+                  <a:txBody>
+                    <a:bodyPr/>
+                    <a:lstStyle/>
+                    <a:p>
+                      <a:pPr algn="ctr" indent="0" marL="0">
+                        <a:buNone/>
+                      </a:pPr>
+                      <a:r>
+                        <a:rPr lang="en-US" sz="1600" dirty="0">
+                          <a:solidFill>
+                            <a:srgbClr val="555555"/>
+                          </a:solidFill>
+                        </a:rPr>
+                        <a:t>×</a:t>
+                      </a:r>
+                      <a:endParaRPr lang="en-US" sz="1600" dirty="0"/>
+                    </a:p>
+                  </a:txBody>
+                  <a:tcPr marL="36576" marR="36576" marT="36576" marB="36576" anchor="ctr">
+                    <a:lnL w="0" cap="flat" cmpd="sng" algn="ctr">
+                      <a:noFill/>
+                    </a:lnL>
+                    <a:lnR w="0" cap="flat" cmpd="sng" algn="ctr">
+                      <a:noFill/>
+                    </a:lnR>
+                    <a:lnT w="0" cap="flat" cmpd="sng" algn="ctr">
+                      <a:noFill/>
+                    </a:lnT>
+                    <a:lnB w="0" cap="flat" cmpd="sng" algn="ctr">
+                      <a:noFill/>
+                    </a:lnB>
+                  </a:tcPr>
+                </a:tc>
+                <a:tc>
+                  <a:txBody>
+                    <a:bodyPr/>
+                    <a:lstStyle/>
+                    <a:p>
+                      <a:pPr algn="l" indent="0" marL="0">
+                        <a:buNone/>
+                      </a:pPr>
+                      <a:r>
+                        <a:rPr lang="en-US" sz="1600" dirty="0">
+                          <a:solidFill>
+                            <a:srgbClr val="1A1A1A"/>
+                          </a:solidFill>
+                        </a:rPr>
+                        <a:t>cleanliness gain</a:t>
+                      </a:r>
+                      <a:endParaRPr lang="en-US" sz="1600" dirty="0"/>
+                    </a:p>
+                  </a:txBody>
+                  <a:tcPr marL="54864" marR="54864" marT="54864" marB="54864" anchor="ctr">
+                    <a:lnL w="0" cap="flat" cmpd="sng" algn="ctr">
+                      <a:noFill/>
+                    </a:lnL>
+                    <a:lnR w="0" cap="flat" cmpd="sng" algn="ctr">
+                      <a:noFill/>
+                    </a:lnR>
+                    <a:lnT w="0" cap="flat" cmpd="sng" algn="ctr">
+                      <a:noFill/>
+                    </a:lnT>
+                    <a:lnB w="0" cap="flat" cmpd="sng" algn="ctr">
+                      <a:noFill/>
+                    </a:lnB>
+                  </a:tcPr>
+                </a:tc>
+              </a:tr>
+              <a:tr h="310896">
+                <a:tc>
+                  <a:txBody>
+                    <a:bodyPr/>
+                    <a:lstStyle/>
+                    <a:p>
+                      <a:pPr algn="r" indent="0" marL="0">
+                        <a:buNone/>
+                      </a:pPr>
+                      <a:r>
+                        <a:rPr lang="en-US" sz="1600" b="1" dirty="0">
+                          <a:solidFill>
+                            <a:srgbClr val="0A7D2A"/>
+                          </a:solidFill>
+                        </a:rPr>
+                        <a:t>+11</a:t>
+                      </a:r>
+                      <a:endParaRPr lang="en-US" sz="1600" dirty="0"/>
+                    </a:p>
+                  </a:txBody>
+                  <a:tcPr marL="54864" marR="54864" marT="54864" marB="54864" anchor="ctr">
+                    <a:lnL w="0" cap="flat" cmpd="sng" algn="ctr">
+                      <a:noFill/>
+                    </a:lnL>
+                    <a:lnR w="0" cap="flat" cmpd="sng" algn="ctr">
+                      <a:noFill/>
+                    </a:lnR>
+                    <a:lnT w="0" cap="flat" cmpd="sng" algn="ctr">
+                      <a:noFill/>
+                    </a:lnT>
+                    <a:lnB w="0" cap="flat" cmpd="sng" algn="ctr">
+                      <a:noFill/>
+                    </a:lnB>
+                  </a:tcPr>
+                </a:tc>
+                <a:tc>
+                  <a:txBody>
+                    <a:bodyPr/>
+                    <a:lstStyle/>
+                    <a:p>
+                      <a:pPr algn="ctr" indent="0" marL="0">
+                        <a:buNone/>
+                      </a:pPr>
+                      <a:r>
+                        <a:rPr lang="en-US" sz="1600" dirty="0">
+                          <a:solidFill>
+                            <a:srgbClr val="555555"/>
+                          </a:solidFill>
+                        </a:rPr>
+                        <a:t>×</a:t>
+                      </a:r>
+                      <a:endParaRPr lang="en-US" sz="1600" dirty="0"/>
+                    </a:p>
+                  </a:txBody>
+                  <a:tcPr marL="36576" marR="36576" marT="36576" marB="36576" anchor="ctr">
+                    <a:lnL w="0" cap="flat" cmpd="sng" algn="ctr">
+                      <a:noFill/>
+                    </a:lnL>
+                    <a:lnR w="0" cap="flat" cmpd="sng" algn="ctr">
+                      <a:noFill/>
+                    </a:lnR>
+                    <a:lnT w="0" cap="flat" cmpd="sng" algn="ctr">
+                      <a:noFill/>
+                    </a:lnT>
+                    <a:lnB w="0" cap="flat" cmpd="sng" algn="ctr">
+                      <a:noFill/>
+                    </a:lnB>
+                  </a:tcPr>
+                </a:tc>
+                <a:tc>
+                  <a:txBody>
+                    <a:bodyPr/>
+                    <a:lstStyle/>
+                    <a:p>
+                      <a:pPr algn="l" indent="0" marL="0">
+                        <a:buNone/>
+                      </a:pPr>
+                      <a:r>
+                        <a:rPr lang="en-US" sz="1600" dirty="0">
+                          <a:solidFill>
+                            <a:srgbClr val="1A1A1A"/>
+                          </a:solidFill>
+                        </a:rPr>
+                        <a:t>step-savings bonus</a:t>
+                      </a:r>
+                      <a:endParaRPr lang="en-US" sz="1600" dirty="0"/>
+                    </a:p>
+                  </a:txBody>
+                  <a:tcPr marL="54864" marR="54864" marT="54864" marB="54864" anchor="ctr">
+                    <a:lnL w="0" cap="flat" cmpd="sng" algn="ctr">
+                      <a:noFill/>
+                    </a:lnL>
+                    <a:lnR w="0" cap="flat" cmpd="sng" algn="ctr">
+                      <a:noFill/>
+                    </a:lnR>
+                    <a:lnT w="0" cap="flat" cmpd="sng" algn="ctr">
+                      <a:noFill/>
+                    </a:lnT>
+                    <a:lnB w="0" cap="flat" cmpd="sng" algn="ctr">
+                      <a:noFill/>
+                    </a:lnB>
+                  </a:tcPr>
+                </a:tc>
+              </a:tr>
+              <a:tr h="310896">
+                <a:tc>
+                  <a:txBody>
+                    <a:bodyPr/>
+                    <a:lstStyle/>
+                    <a:p>
+                      <a:pPr algn="r" indent="0" marL="0">
+                        <a:buNone/>
+                      </a:pPr>
+                      <a:r>
+                        <a:rPr lang="en-US" sz="1600" b="1" dirty="0">
+                          <a:solidFill>
+                            <a:srgbClr val="B33A1E"/>
+                          </a:solidFill>
+                        </a:rPr>
+                        <a:t>−28</a:t>
+                      </a:r>
+                      <a:endParaRPr lang="en-US" sz="1600" dirty="0"/>
+                    </a:p>
+                  </a:txBody>
+                  <a:tcPr marL="54864" marR="54864" marT="54864" marB="54864" anchor="ctr">
+                    <a:lnL w="0" cap="flat" cmpd="sng" algn="ctr">
+                      <a:noFill/>
+                    </a:lnL>
+                    <a:lnR w="0" cap="flat" cmpd="sng" algn="ctr">
+                      <a:noFill/>
+                    </a:lnR>
+                    <a:lnT w="0" cap="flat" cmpd="sng" algn="ctr">
+                      <a:noFill/>
+                    </a:lnT>
+                    <a:lnB w="0" cap="flat" cmpd="sng" algn="ctr">
+                      <a:noFill/>
+                    </a:lnB>
+                  </a:tcPr>
+                </a:tc>
+                <a:tc>
+                  <a:txBody>
+                    <a:bodyPr/>
+                    <a:lstStyle/>
+                    <a:p>
+                      <a:pPr algn="ctr" indent="0" marL="0">
+                        <a:buNone/>
+                      </a:pPr>
+                      <a:r>
+                        <a:rPr lang="en-US" sz="1600" dirty="0">
+                          <a:solidFill>
+                            <a:srgbClr val="555555"/>
+                          </a:solidFill>
+                        </a:rPr>
+                        <a:t>×</a:t>
+                      </a:r>
+                      <a:endParaRPr lang="en-US" sz="1600" dirty="0"/>
+                    </a:p>
+                  </a:txBody>
+                  <a:tcPr marL="36576" marR="36576" marT="36576" marB="36576" anchor="ctr">
+                    <a:lnL w="0" cap="flat" cmpd="sng" algn="ctr">
+                      <a:noFill/>
+                    </a:lnL>
+                    <a:lnR w="0" cap="flat" cmpd="sng" algn="ctr">
+                      <a:noFill/>
+                    </a:lnR>
+                    <a:lnT w="0" cap="flat" cmpd="sng" algn="ctr">
+                      <a:noFill/>
+                    </a:lnT>
+                    <a:lnB w="0" cap="flat" cmpd="sng" algn="ctr">
+                      <a:noFill/>
+                    </a:lnB>
+                  </a:tcPr>
+                </a:tc>
+                <a:tc>
+                  <a:txBody>
+                    <a:bodyPr/>
+                    <a:lstStyle/>
+                    <a:p>
+                      <a:pPr algn="l" indent="0" marL="0">
+                        <a:buNone/>
+                      </a:pPr>
+                      <a:r>
+                        <a:rPr lang="en-US" sz="1600" dirty="0">
+                          <a:solidFill>
+                            <a:srgbClr val="1A1A1A"/>
+                          </a:solidFill>
+                        </a:rPr>
+                        <a:t>broken build / test rate</a:t>
+                      </a:r>
+                      <a:endParaRPr lang="en-US" sz="1600" dirty="0"/>
+                    </a:p>
+                  </a:txBody>
+                  <a:tcPr marL="54864" marR="54864" marT="54864" marB="54864" anchor="ctr">
+                    <a:lnL w="0" cap="flat" cmpd="sng" algn="ctr">
+                      <a:noFill/>
+                    </a:lnL>
+                    <a:lnR w="0" cap="flat" cmpd="sng" algn="ctr">
+                      <a:noFill/>
+                    </a:lnR>
+                    <a:lnT w="0" cap="flat" cmpd="sng" algn="ctr">
+                      <a:noFill/>
+                    </a:lnT>
+                    <a:lnB w="0" cap="flat" cmpd="sng" algn="ctr">
+                      <a:noFill/>
+                    </a:lnB>
+                  </a:tcPr>
+                </a:tc>
+              </a:tr>
+              <a:tr h="310896">
+                <a:tc>
+                  <a:txBody>
+                    <a:bodyPr/>
+                    <a:lstStyle/>
+                    <a:p>
+                      <a:pPr algn="r" indent="0" marL="0">
+                        <a:buNone/>
+                      </a:pPr>
+                      <a:r>
+                        <a:rPr lang="en-US" sz="1600" b="1" dirty="0">
+                          <a:solidFill>
+                            <a:srgbClr val="B33A1E"/>
+                          </a:solidFill>
+                        </a:rPr>
+                        <a:t>−14</a:t>
+                      </a:r>
+                      <a:endParaRPr lang="en-US" sz="1600" dirty="0"/>
+                    </a:p>
+                  </a:txBody>
+                  <a:tcPr marL="54864" marR="54864" marT="54864" marB="54864" anchor="ctr">
+                    <a:lnL w="0" cap="flat" cmpd="sng" algn="ctr">
+                      <a:noFill/>
+                    </a:lnL>
+                    <a:lnR w="0" cap="flat" cmpd="sng" algn="ctr">
+                      <a:noFill/>
+                    </a:lnR>
+                    <a:lnT w="0" cap="flat" cmpd="sng" algn="ctr">
+                      <a:noFill/>
+                    </a:lnT>
+                    <a:lnB w="0" cap="flat" cmpd="sng" algn="ctr">
+                      <a:noFill/>
+                    </a:lnB>
+                  </a:tcPr>
+                </a:tc>
+                <a:tc>
+                  <a:txBody>
+                    <a:bodyPr/>
+                    <a:lstStyle/>
+                    <a:p>
+                      <a:pPr algn="ctr" indent="0" marL="0">
+                        <a:buNone/>
+                      </a:pPr>
+                      <a:r>
+                        <a:rPr lang="en-US" sz="1600" dirty="0">
+                          <a:solidFill>
+                            <a:srgbClr val="555555"/>
+                          </a:solidFill>
+                        </a:rPr>
+                        <a:t>×</a:t>
+                      </a:r>
+                      <a:endParaRPr lang="en-US" sz="1600" dirty="0"/>
+                    </a:p>
+                  </a:txBody>
+                  <a:tcPr marL="36576" marR="36576" marT="36576" marB="36576" anchor="ctr">
+                    <a:lnL w="0" cap="flat" cmpd="sng" algn="ctr">
+                      <a:noFill/>
+                    </a:lnL>
+                    <a:lnR w="0" cap="flat" cmpd="sng" algn="ctr">
+                      <a:noFill/>
+                    </a:lnR>
+                    <a:lnT w="0" cap="flat" cmpd="sng" algn="ctr">
+                      <a:noFill/>
+                    </a:lnT>
+                    <a:lnB w="0" cap="flat" cmpd="sng" algn="ctr">
+                      <a:noFill/>
+                    </a:lnB>
+                  </a:tcPr>
+                </a:tc>
+                <a:tc>
+                  <a:txBody>
+                    <a:bodyPr/>
+                    <a:lstStyle/>
+                    <a:p>
+                      <a:pPr algn="l" indent="0" marL="0">
+                        <a:buNone/>
+                      </a:pPr>
+                      <a:r>
+                        <a:rPr lang="en-US" sz="1600" dirty="0">
+                          <a:solidFill>
+                            <a:srgbClr val="1A1A1A"/>
+                          </a:solidFill>
+                        </a:rPr>
+                        <a:t>skipped-test rate</a:t>
+                      </a:r>
+                      <a:endParaRPr lang="en-US" sz="1600" dirty="0"/>
+                    </a:p>
+                  </a:txBody>
+                  <a:tcPr marL="54864" marR="54864" marT="54864" marB="54864" anchor="ctr">
+                    <a:lnL w="0" cap="flat" cmpd="sng" algn="ctr">
+                      <a:noFill/>
+                    </a:lnL>
+                    <a:lnR w="0" cap="flat" cmpd="sng" algn="ctr">
+                      <a:noFill/>
+                    </a:lnR>
+                    <a:lnT w="0" cap="flat" cmpd="sng" algn="ctr">
+                      <a:noFill/>
+                    </a:lnT>
+                    <a:lnB w="0" cap="flat" cmpd="sng" algn="ctr">
+                      <a:noFill/>
+                    </a:lnB>
+                  </a:tcPr>
+                </a:tc>
+              </a:tr>
+              <a:tr h="310896">
+                <a:tc>
+                  <a:txBody>
+                    <a:bodyPr/>
+                    <a:lstStyle/>
+                    <a:p>
+                      <a:pPr algn="r" indent="0" marL="0">
+                        <a:buNone/>
+                      </a:pPr>
+                      <a:r>
+                        <a:rPr lang="en-US" sz="1600" b="1" dirty="0">
+                          <a:solidFill>
+                            <a:srgbClr val="B33A1E"/>
+                          </a:solidFill>
+                        </a:rPr>
+                        <a:t>−11</a:t>
+                      </a:r>
+                      <a:endParaRPr lang="en-US" sz="1600" dirty="0"/>
+                    </a:p>
+                  </a:txBody>
+                  <a:tcPr marL="54864" marR="54864" marT="54864" marB="54864" anchor="ctr">
+                    <a:lnL w="0" cap="flat" cmpd="sng" algn="ctr">
+                      <a:noFill/>
+                    </a:lnL>
+                    <a:lnR w="0" cap="flat" cmpd="sng" algn="ctr">
+                      <a:noFill/>
+                    </a:lnR>
+                    <a:lnT w="0" cap="flat" cmpd="sng" algn="ctr">
+                      <a:noFill/>
+                    </a:lnT>
+                    <a:lnB w="0" cap="flat" cmpd="sng" algn="ctr">
+                      <a:noFill/>
+                    </a:lnB>
+                  </a:tcPr>
+                </a:tc>
+                <a:tc>
+                  <a:txBody>
+                    <a:bodyPr/>
+                    <a:lstStyle/>
+                    <a:p>
+                      <a:pPr algn="ctr" indent="0" marL="0">
+                        <a:buNone/>
+                      </a:pPr>
+                      <a:r>
+                        <a:rPr lang="en-US" sz="1600" dirty="0">
+                          <a:solidFill>
+                            <a:srgbClr val="555555"/>
+                          </a:solidFill>
+                        </a:rPr>
+                        <a:t>×</a:t>
+                      </a:r>
+                      <a:endParaRPr lang="en-US" sz="1600" dirty="0"/>
+                    </a:p>
+                  </a:txBody>
+                  <a:tcPr marL="36576" marR="36576" marT="36576" marB="36576" anchor="ctr">
+                    <a:lnL w="0" cap="flat" cmpd="sng" algn="ctr">
+                      <a:noFill/>
+                    </a:lnL>
+                    <a:lnR w="0" cap="flat" cmpd="sng" algn="ctr">
+                      <a:noFill/>
+                    </a:lnR>
+                    <a:lnT w="0" cap="flat" cmpd="sng" algn="ctr">
+                      <a:noFill/>
+                    </a:lnT>
+                    <a:lnB w="0" cap="flat" cmpd="sng" algn="ctr">
+                      <a:noFill/>
+                    </a:lnB>
+                  </a:tcPr>
+                </a:tc>
+                <a:tc>
+                  <a:txBody>
+                    <a:bodyPr/>
+                    <a:lstStyle/>
+                    <a:p>
+                      <a:pPr algn="l" indent="0" marL="0">
+                        <a:buNone/>
+                      </a:pPr>
+                      <a:r>
+                        <a:rPr lang="en-US" sz="1600" dirty="0">
+                          <a:solidFill>
+                            <a:srgbClr val="1A1A1A"/>
+                          </a:solidFill>
+                        </a:rPr>
+                        <a:t>manual edits the IDE could refactor</a:t>
+                      </a:r>
+                      <a:endParaRPr lang="en-US" sz="1600" dirty="0"/>
+                    </a:p>
+                  </a:txBody>
+                  <a:tcPr marL="54864" marR="54864" marT="54864" marB="54864" anchor="ctr">
+                    <a:lnL w="0" cap="flat" cmpd="sng" algn="ctr">
+                      <a:noFill/>
+                    </a:lnL>
+                    <a:lnR w="0" cap="flat" cmpd="sng" algn="ctr">
+                      <a:noFill/>
+                    </a:lnR>
+                    <a:lnT w="0" cap="flat" cmpd="sng" algn="ctr">
+                      <a:noFill/>
+                    </a:lnT>
+                    <a:lnB w="0" cap="flat" cmpd="sng" algn="ctr">
+                      <a:noFill/>
+                    </a:lnB>
+                  </a:tcPr>
+                </a:tc>
+              </a:tr>
+              <a:tr h="310896">
+                <a:tc>
+                  <a:txBody>
+                    <a:bodyPr/>
+                    <a:lstStyle/>
+                    <a:p>
+                      <a:pPr algn="r" indent="0" marL="0">
+                        <a:buNone/>
+                      </a:pPr>
+                      <a:r>
+                        <a:rPr lang="en-US" sz="1600" b="1" dirty="0">
+                          <a:solidFill>
+                            <a:srgbClr val="B33A1E"/>
+                          </a:solidFill>
+                        </a:rPr>
+                        <a:t>−11</a:t>
+                      </a:r>
+                      <a:endParaRPr lang="en-US" sz="1600" dirty="0"/>
+                    </a:p>
+                  </a:txBody>
+                  <a:tcPr marL="54864" marR="54864" marT="54864" marB="54864" anchor="ctr">
+                    <a:lnL w="0" cap="flat" cmpd="sng" algn="ctr">
+                      <a:noFill/>
+                    </a:lnL>
+                    <a:lnR w="0" cap="flat" cmpd="sng" algn="ctr">
+                      <a:noFill/>
+                    </a:lnR>
+                    <a:lnT w="0" cap="flat" cmpd="sng" algn="ctr">
+                      <a:noFill/>
+                    </a:lnT>
+                    <a:lnB w="0" cap="flat" cmpd="sng" algn="ctr">
+                      <a:noFill/>
+                    </a:lnB>
+                  </a:tcPr>
+                </a:tc>
+                <a:tc>
+                  <a:txBody>
+                    <a:bodyPr/>
+                    <a:lstStyle/>
+                    <a:p>
+                      <a:pPr algn="ctr" indent="0" marL="0">
+                        <a:buNone/>
+                      </a:pPr>
+                      <a:r>
+                        <a:rPr lang="en-US" sz="1600" dirty="0">
+                          <a:solidFill>
+                            <a:srgbClr val="555555"/>
+                          </a:solidFill>
+                        </a:rPr>
+                        <a:t>×</a:t>
+                      </a:r>
+                      <a:endParaRPr lang="en-US" sz="1600" dirty="0"/>
+                    </a:p>
+                  </a:txBody>
+                  <a:tcPr marL="36576" marR="36576" marT="36576" marB="36576" anchor="ctr">
+                    <a:lnL w="0" cap="flat" cmpd="sng" algn="ctr">
+                      <a:noFill/>
+                    </a:lnL>
+                    <a:lnR w="0" cap="flat" cmpd="sng" algn="ctr">
+                      <a:noFill/>
+                    </a:lnR>
+                    <a:lnT w="0" cap="flat" cmpd="sng" algn="ctr">
+                      <a:noFill/>
+                    </a:lnT>
+                    <a:lnB w="0" cap="flat" cmpd="sng" algn="ctr">
+                      <a:noFill/>
+                    </a:lnB>
+                  </a:tcPr>
+                </a:tc>
+                <a:tc>
+                  <a:txBody>
+                    <a:bodyPr/>
+                    <a:lstStyle/>
+                    <a:p>
+                      <a:pPr algn="l" indent="0" marL="0">
+                        <a:buNone/>
+                      </a:pPr>
+                      <a:r>
+                        <a:rPr lang="en-US" sz="1600" dirty="0">
+                          <a:solidFill>
+                            <a:srgbClr val="1A1A1A"/>
+                          </a:solidFill>
+                        </a:rPr>
+                        <a:t>intermediate-state lag</a:t>
+                      </a:r>
+                      <a:endParaRPr lang="en-US" sz="1600" dirty="0"/>
+                    </a:p>
+                  </a:txBody>
+                  <a:tcPr marL="54864" marR="54864" marT="54864" marB="54864" anchor="ctr">
+                    <a:lnL w="0" cap="flat" cmpd="sng" algn="ctr">
+                      <a:noFill/>
+                    </a:lnL>
+                    <a:lnR w="0" cap="flat" cmpd="sng" algn="ctr">
+                      <a:noFill/>
+                    </a:lnR>
+                    <a:lnT w="0" cap="flat" cmpd="sng" algn="ctr">
+                      <a:noFill/>
+                    </a:lnT>
+                    <a:lnB w="0" cap="flat" cmpd="sng" algn="ctr">
+                      <a:noFill/>
+                    </a:lnB>
+                  </a:tcPr>
+                </a:tc>
+              </a:tr>
+              <a:tr h="310896">
+                <a:tc>
+                  <a:txBody>
+                    <a:bodyPr/>
+                    <a:lstStyle/>
+                    <a:p>
+                      <a:pPr algn="r" indent="0" marL="0">
+                        <a:buNone/>
+                      </a:pPr>
+                      <a:r>
+                        <a:rPr lang="en-US" sz="1600" b="1" dirty="0">
+                          <a:solidFill>
+                            <a:srgbClr val="B33A1E"/>
+                          </a:solidFill>
+                        </a:rPr>
+                        <a:t>−7</a:t>
+                      </a:r>
+                      <a:endParaRPr lang="en-US" sz="1600" dirty="0"/>
+                    </a:p>
+                  </a:txBody>
+                  <a:tcPr marL="54864" marR="54864" marT="54864" marB="54864" anchor="ctr">
+                    <a:lnL w="0" cap="flat" cmpd="sng" algn="ctr">
+                      <a:noFill/>
+                    </a:lnL>
+                    <a:lnR w="0" cap="flat" cmpd="sng" algn="ctr">
+                      <a:noFill/>
+                    </a:lnR>
+                    <a:lnT w="0" cap="flat" cmpd="sng" algn="ctr">
+                      <a:noFill/>
+                    </a:lnT>
+                    <a:lnB w="0" cap="flat" cmpd="sng" algn="ctr">
+                      <a:noFill/>
+                    </a:lnB>
+                  </a:tcPr>
+                </a:tc>
+                <a:tc>
+                  <a:txBody>
+                    <a:bodyPr/>
+                    <a:lstStyle/>
+                    <a:p>
+                      <a:pPr algn="ctr" indent="0" marL="0">
+                        <a:buNone/>
+                      </a:pPr>
+                      <a:r>
+                        <a:rPr lang="en-US" sz="1600" dirty="0">
+                          <a:solidFill>
+                            <a:srgbClr val="555555"/>
+                          </a:solidFill>
+                        </a:rPr>
+                        <a:t>×</a:t>
+                      </a:r>
+                      <a:endParaRPr lang="en-US" sz="1600" dirty="0"/>
+                    </a:p>
+                  </a:txBody>
+                  <a:tcPr marL="36576" marR="36576" marT="36576" marB="36576" anchor="ctr">
+                    <a:lnL w="0" cap="flat" cmpd="sng" algn="ctr">
+                      <a:noFill/>
+                    </a:lnL>
+                    <a:lnR w="0" cap="flat" cmpd="sng" algn="ctr">
+                      <a:noFill/>
+                    </a:lnR>
+                    <a:lnT w="0" cap="flat" cmpd="sng" algn="ctr">
+                      <a:noFill/>
+                    </a:lnT>
+                    <a:lnB w="0" cap="flat" cmpd="sng" algn="ctr">
+                      <a:noFill/>
+                    </a:lnB>
+                  </a:tcPr>
+                </a:tc>
+                <a:tc>
+                  <a:txBody>
+                    <a:bodyPr/>
+                    <a:lstStyle/>
+                    <a:p>
+                      <a:pPr algn="l" indent="0" marL="0">
+                        <a:buNone/>
+                      </a:pPr>
+                      <a:r>
+                        <a:rPr lang="en-US" sz="1600" dirty="0">
+                          <a:solidFill>
+                            <a:srgbClr val="1A1A1A"/>
+                          </a:solidFill>
+                        </a:rPr>
+                        <a:t>commit-gap events</a:t>
+                      </a:r>
+                      <a:endParaRPr lang="en-US" sz="1600" dirty="0"/>
+                    </a:p>
+                  </a:txBody>
+                  <a:tcPr marL="54864" marR="54864" marT="54864" marB="54864" anchor="ctr">
+                    <a:lnL w="0" cap="flat" cmpd="sng" algn="ctr">
+                      <a:noFill/>
+                    </a:lnL>
+                    <a:lnR w="0" cap="flat" cmpd="sng" algn="ctr">
+                      <a:noFill/>
+                    </a:lnR>
+                    <a:lnT w="0" cap="flat" cmpd="sng" algn="ctr">
+                      <a:noFill/>
+                    </a:lnT>
+                    <a:lnB w="0" cap="flat" cmpd="sng" algn="ctr">
+                      <a:noFill/>
+                    </a:lnB>
+                  </a:tcPr>
+                </a:tc>
+              </a:tr>
+            </a:tbl>
+          </a:graphicData>
+        </a:graphic>
+      </p:graphicFrame>
+      <p:sp>
+        <p:nvSpPr>
+          <p:cNvPr id="5" name="Text 2"/>
+          <p:cNvSpPr/>
+          <p:nvPr/>
+        </p:nvSpPr>
+        <p:spPr>
+          <a:xfrm>
+            <a:off x="457200" y="4160520"/>
+            <a:ext cx="8229600" cy="457200"/>
+          </a:xfrm>
+          <a:prstGeom prst="rect">
+            <a:avLst/>
+          </a:prstGeom>
+          <a:noFill/>
+          <a:ln/>
+        </p:spPr>
+        <p:txBody>
+          <a:bodyPr wrap="square" lIns="0" tIns="0" rIns="0" bIns="0" rtlCol="0" anchor="ctr"/>
+          <a:lstStyle/>
+          <a:p>
+            <a:pPr algn="ctr" indent="0" marL="0">
+              <a:buNone/>
+            </a:pPr>
+            <a:r>
+              <a:rPr lang="en-US" sz="2200" dirty="0">
+                <a:solidFill>
+                  <a:srgbClr val="000000"/>
+                </a:solidFill>
+              </a:rPr>
+              <a:t>)</a:t>
+            </a:r>
+            <a:endParaRPr lang="en-US" sz="2200" dirty="0"/>
           </a:p>
         </p:txBody>
       </p:sp>
@@ -6140,7 +7973,7 @@
                   <a:srgbClr val="000000"/>
                 </a:solidFill>
               </a:rPr>
-              <a:t>Ordering: detect + synthesise</a:t>
+              <a:t>The cleanliness sub-score</a:t>
             </a:r>
             <a:endParaRPr lang="en-US" sz="2800" dirty="0"/>
           </a:p>
@@ -6180,7 +8013,7 @@
                   <a:srgbClr val="000000"/>
                 </a:solidFill>
               </a:rPr>
-              <a:t>What: the right refactorings, performed in a suboptimal order — final state is fine, intermediate states are worse than they needed to be.</a:t>
+              <a:t>Six equally-weighted code-quality signals.</a:t>
             </a:r>
             <a:endParaRPr lang="en-US" sz="1600" dirty="0"/>
           </a:p>
@@ -6198,7 +8031,7 @@
                   <a:srgbClr val="000000"/>
                 </a:solidFill>
               </a:rPr>
-              <a:t>Detect: find a subsequence of refactorings whose reordering still validates to the user's terminal state (canonical AST hash, formatting/comments ignored).</a:t>
+              <a:t>Cognitive complexity, coupling (CBO), duplication (CPD), readability, code smells (PMD), cohesion (TCC).</a:t>
             </a:r>
             <a:endParaRPr lang="en-US" sz="1600" dirty="0"/>
           </a:p>
@@ -6216,7 +8049,7 @@
                   <a:srgbClr val="000000"/>
                 </a:solidFill>
               </a:rPr>
-              <a:t>Synthesise: build a dependency DAG over the refactorings in the window.</a:t>
+              <a:t>Normalised against the trajectory's own range, so different sessions are comparable.</a:t>
             </a:r>
             <a:endParaRPr lang="en-US" sz="1600" dirty="0"/>
           </a:p>
@@ -6234,25 +8067,7 @@
                   <a:srgbClr val="000000"/>
                 </a:solidFill>
               </a:rPr>
-              <a:t>Prefix-trie DFS over valid topological orderings — shares work across common prefixes, rolls back with git checkout on backtrack.</a:t>
-            </a:r>
-            <a:endParaRPr lang="en-US" sz="1600" dirty="0"/>
-          </a:p>
-          <a:p>
-            <a:pPr marL="342900" indent="-342900">
-              <a:spcAft>
-                <a:spcPts val="600"/>
-              </a:spcAft>
-              <a:buSzPct val="100000"/>
-              <a:buChar char="•"/>
-            </a:pPr>
-            <a:r>
-              <a:rPr lang="en-US" sz="1600" dirty="0">
-                <a:solidFill>
-                  <a:srgbClr val="000000"/>
-                </a:solidFill>
-              </a:rPr>
-              <a:t>[FIGURE: methodology-reorder-trie — to be placed here]</a:t>
+              <a:t>Equal weights are justified: no trajectory-level calibration data exists, so equal weights are the least-assumptive choice.</a:t>
             </a:r>
             <a:endParaRPr lang="en-US" sz="1600" dirty="0"/>
           </a:p>

--- a/presentation/slides.pptx
+++ b/presentation/slides.pptx
@@ -24,12 +24,9 @@
     <p:sldId id="272" r:id="rId18"/>
     <p:sldId id="273" r:id="rId19"/>
     <p:sldId id="274" r:id="rId20"/>
-    <p:sldId id="275" r:id="rId21"/>
-    <p:sldId id="276" r:id="rId22"/>
-    <p:sldId id="277" r:id="rId23"/>
   </p:sldIdLst>
   <p:notesMasterIdLst>
-    <p:notesMasterId r:id="rId24"/>
+    <p:notesMasterId r:id="rId21"/>
   </p:notesMasterIdLst>
   <p:sldSz cx="9144000" cy="5143500"/>
   <p:notesSz cx="5143500" cy="9144000"/>
@@ -1515,270 +1512,6 @@
             <a:fld id="{F7021451-1387-4CA6-816F-3879F97B5CBC}" type="slidenum">
               <a:rPr lang="en-US"/>
               <a:t>2</a:t>
-            </a:fld>
-            <a:endParaRPr lang="en-US"/>
-          </a:p>
-        </p:txBody>
-      </p:sp>
-    </p:spTree>
-    <p:extLst>
-      <p:ext uri="{BB962C8B-B14F-4D97-AF65-F5344CB8AC3E}">
-        <p14:creationId xmlns:p14="http://schemas.microsoft.com/office/powerpoint/2010/main" val="1024086991"/>
-      </p:ext>
-    </p:extLst>
-  </p:cSld>
-  <p:clrMapOvr>
-    <a:masterClrMapping/>
-  </p:clrMapOvr>
-</p:notes>
-</file>
-
-<file path=ppt/notesSlides/notesSlide20.xml><?xml version="1.0" encoding="utf-8"?>
-<p:notes xmlns:a="http://schemas.openxmlformats.org/drawingml/2006/main" xmlns:r="http://schemas.openxmlformats.org/officeDocument/2006/relationships" xmlns:p="http://schemas.openxmlformats.org/presentationml/2006/main">
-  <p:cSld>
-    <p:spTree>
-      <p:nvGrpSpPr>
-        <p:cNvPr id="1" name=""/>
-        <p:cNvGrpSpPr/>
-        <p:nvPr/>
-      </p:nvGrpSpPr>
-      <p:grpSpPr>
-        <a:xfrm>
-          <a:off x="0" y="0"/>
-          <a:ext cx="0" cy="0"/>
-          <a:chOff x="0" y="0"/>
-          <a:chExt cx="0" cy="0"/>
-        </a:xfrm>
-      </p:grpSpPr>
-      <p:sp>
-        <p:nvSpPr>
-          <p:cNvPr id="2" name="Slide Image Placeholder 1"/>
-          <p:cNvSpPr>
-            <a:spLocks noGrp="1" noRot="1" noChangeAspect="1"/>
-          </p:cNvSpPr>
-          <p:nvPr>
-            <p:ph type="sldImg"/>
-          </p:nvPr>
-        </p:nvSpPr>
-        <p:spPr/>
-      </p:sp>
-      <p:sp>
-        <p:nvSpPr>
-          <p:cNvPr id="3" name="Notes Placeholder 2"/>
-          <p:cNvSpPr>
-            <a:spLocks noGrp="1"/>
-          </p:cNvSpPr>
-          <p:nvPr>
-            <p:ph type="body" idx="1"/>
-          </p:nvPr>
-        </p:nvSpPr>
-        <p:spPr/>
-        <p:txBody>
-          <a:bodyPr/>
-          <a:lstStyle/>
-          <a:p>
-            <a:r>
-              <a:rPr lang="en-US" dirty="0"/>
-              <a:t/>
-            </a:r>
-            <a:endParaRPr lang="en-US" dirty="0"/>
-          </a:p>
-        </p:txBody>
-      </p:sp>
-      <p:sp>
-        <p:nvSpPr>
-          <p:cNvPr id="4" name="Slide Number Placeholder 3"/>
-          <p:cNvSpPr>
-            <a:spLocks noGrp="1"/>
-          </p:cNvSpPr>
-          <p:nvPr>
-            <p:ph type="sldNum" sz="quarter" idx="10"/>
-          </p:nvPr>
-        </p:nvSpPr>
-        <p:spPr/>
-        <p:txBody>
-          <a:bodyPr/>
-          <a:lstStyle/>
-          <a:p>
-            <a:fld id="{F7021451-1387-4CA6-816F-3879F97B5CBC}" type="slidenum">
-              <a:rPr lang="en-US"/>
-              <a:t>20</a:t>
-            </a:fld>
-            <a:endParaRPr lang="en-US"/>
-          </a:p>
-        </p:txBody>
-      </p:sp>
-    </p:spTree>
-    <p:extLst>
-      <p:ext uri="{BB962C8B-B14F-4D97-AF65-F5344CB8AC3E}">
-        <p14:creationId xmlns:p14="http://schemas.microsoft.com/office/powerpoint/2010/main" val="1024086991"/>
-      </p:ext>
-    </p:extLst>
-  </p:cSld>
-  <p:clrMapOvr>
-    <a:masterClrMapping/>
-  </p:clrMapOvr>
-</p:notes>
-</file>
-
-<file path=ppt/notesSlides/notesSlide21.xml><?xml version="1.0" encoding="utf-8"?>
-<p:notes xmlns:a="http://schemas.openxmlformats.org/drawingml/2006/main" xmlns:r="http://schemas.openxmlformats.org/officeDocument/2006/relationships" xmlns:p="http://schemas.openxmlformats.org/presentationml/2006/main">
-  <p:cSld>
-    <p:spTree>
-      <p:nvGrpSpPr>
-        <p:cNvPr id="1" name=""/>
-        <p:cNvGrpSpPr/>
-        <p:nvPr/>
-      </p:nvGrpSpPr>
-      <p:grpSpPr>
-        <a:xfrm>
-          <a:off x="0" y="0"/>
-          <a:ext cx="0" cy="0"/>
-          <a:chOff x="0" y="0"/>
-          <a:chExt cx="0" cy="0"/>
-        </a:xfrm>
-      </p:grpSpPr>
-      <p:sp>
-        <p:nvSpPr>
-          <p:cNvPr id="2" name="Slide Image Placeholder 1"/>
-          <p:cNvSpPr>
-            <a:spLocks noGrp="1" noRot="1" noChangeAspect="1"/>
-          </p:cNvSpPr>
-          <p:nvPr>
-            <p:ph type="sldImg"/>
-          </p:nvPr>
-        </p:nvSpPr>
-        <p:spPr/>
-      </p:sp>
-      <p:sp>
-        <p:nvSpPr>
-          <p:cNvPr id="3" name="Notes Placeholder 2"/>
-          <p:cNvSpPr>
-            <a:spLocks noGrp="1"/>
-          </p:cNvSpPr>
-          <p:nvPr>
-            <p:ph type="body" idx="1"/>
-          </p:nvPr>
-        </p:nvSpPr>
-        <p:spPr/>
-        <p:txBody>
-          <a:bodyPr/>
-          <a:lstStyle/>
-          <a:p>
-            <a:r>
-              <a:rPr lang="en-US" dirty="0"/>
-              <a:t/>
-            </a:r>
-            <a:endParaRPr lang="en-US" dirty="0"/>
-          </a:p>
-        </p:txBody>
-      </p:sp>
-      <p:sp>
-        <p:nvSpPr>
-          <p:cNvPr id="4" name="Slide Number Placeholder 3"/>
-          <p:cNvSpPr>
-            <a:spLocks noGrp="1"/>
-          </p:cNvSpPr>
-          <p:nvPr>
-            <p:ph type="sldNum" sz="quarter" idx="10"/>
-          </p:nvPr>
-        </p:nvSpPr>
-        <p:spPr/>
-        <p:txBody>
-          <a:bodyPr/>
-          <a:lstStyle/>
-          <a:p>
-            <a:fld id="{F7021451-1387-4CA6-816F-3879F97B5CBC}" type="slidenum">
-              <a:rPr lang="en-US"/>
-              <a:t>21</a:t>
-            </a:fld>
-            <a:endParaRPr lang="en-US"/>
-          </a:p>
-        </p:txBody>
-      </p:sp>
-    </p:spTree>
-    <p:extLst>
-      <p:ext uri="{BB962C8B-B14F-4D97-AF65-F5344CB8AC3E}">
-        <p14:creationId xmlns:p14="http://schemas.microsoft.com/office/powerpoint/2010/main" val="1024086991"/>
-      </p:ext>
-    </p:extLst>
-  </p:cSld>
-  <p:clrMapOvr>
-    <a:masterClrMapping/>
-  </p:clrMapOvr>
-</p:notes>
-</file>
-
-<file path=ppt/notesSlides/notesSlide22.xml><?xml version="1.0" encoding="utf-8"?>
-<p:notes xmlns:a="http://schemas.openxmlformats.org/drawingml/2006/main" xmlns:r="http://schemas.openxmlformats.org/officeDocument/2006/relationships" xmlns:p="http://schemas.openxmlformats.org/presentationml/2006/main">
-  <p:cSld>
-    <p:spTree>
-      <p:nvGrpSpPr>
-        <p:cNvPr id="1" name=""/>
-        <p:cNvGrpSpPr/>
-        <p:nvPr/>
-      </p:nvGrpSpPr>
-      <p:grpSpPr>
-        <a:xfrm>
-          <a:off x="0" y="0"/>
-          <a:ext cx="0" cy="0"/>
-          <a:chOff x="0" y="0"/>
-          <a:chExt cx="0" cy="0"/>
-        </a:xfrm>
-      </p:grpSpPr>
-      <p:sp>
-        <p:nvSpPr>
-          <p:cNvPr id="2" name="Slide Image Placeholder 1"/>
-          <p:cNvSpPr>
-            <a:spLocks noGrp="1" noRot="1" noChangeAspect="1"/>
-          </p:cNvSpPr>
-          <p:nvPr>
-            <p:ph type="sldImg"/>
-          </p:nvPr>
-        </p:nvSpPr>
-        <p:spPr/>
-      </p:sp>
-      <p:sp>
-        <p:nvSpPr>
-          <p:cNvPr id="3" name="Notes Placeholder 2"/>
-          <p:cNvSpPr>
-            <a:spLocks noGrp="1"/>
-          </p:cNvSpPr>
-          <p:nvPr>
-            <p:ph type="body" idx="1"/>
-          </p:nvPr>
-        </p:nvSpPr>
-        <p:spPr/>
-        <p:txBody>
-          <a:bodyPr/>
-          <a:lstStyle/>
-          <a:p>
-            <a:r>
-              <a:rPr lang="en-US" dirty="0"/>
-              <a:t/>
-            </a:r>
-            <a:endParaRPr lang="en-US" dirty="0"/>
-          </a:p>
-        </p:txBody>
-      </p:sp>
-      <p:sp>
-        <p:nvSpPr>
-          <p:cNvPr id="4" name="Slide Number Placeholder 3"/>
-          <p:cNvSpPr>
-            <a:spLocks noGrp="1"/>
-          </p:cNvSpPr>
-          <p:nvPr>
-            <p:ph type="sldNum" sz="quarter" idx="10"/>
-          </p:nvPr>
-        </p:nvSpPr>
-        <p:spPr/>
-        <p:txBody>
-          <a:bodyPr/>
-          <a:lstStyle/>
-          <a:p>
-            <a:fld id="{F7021451-1387-4CA6-816F-3879F97B5CBC}" type="slidenum">
-              <a:rPr lang="en-US"/>
-              <a:t>22</a:t>
             </a:fld>
             <a:endParaRPr lang="en-US"/>
           </a:p>
@@ -2950,197 +2683,6 @@
                   <a:srgbClr val="000000"/>
                 </a:solidFill>
               </a:rPr>
-              <a:t>Four kinds of divergence</a:t>
-            </a:r>
-            <a:endParaRPr lang="en-US" sz="2800" dirty="0"/>
-          </a:p>
-        </p:txBody>
-      </p:sp>
-      <p:sp>
-        <p:nvSpPr>
-          <p:cNvPr id="3" name="Text 1"/>
-          <p:cNvSpPr/>
-          <p:nvPr/>
-        </p:nvSpPr>
-        <p:spPr>
-          <a:xfrm>
-            <a:off x="457200" y="1188720"/>
-            <a:ext cx="8229600" cy="3657600"/>
-          </a:xfrm>
-          <a:prstGeom prst="rect">
-            <a:avLst/>
-          </a:prstGeom>
-          <a:noFill/>
-          <a:ln/>
-        </p:spPr>
-        <p:txBody>
-          <a:bodyPr wrap="square" rtlCol="0" anchor="t"/>
-          <a:lstStyle/>
-          <a:p>
-            <a:pPr marL="342900" indent="-342900">
-              <a:spcAft>
-                <a:spcPts val="600"/>
-              </a:spcAft>
-              <a:buSzPct val="100000"/>
-              <a:buChar char="•"/>
-            </a:pPr>
-            <a:r>
-              <a:rPr lang="en-US" sz="1600" dirty="0">
-                <a:solidFill>
-                  <a:srgbClr val="000000"/>
-                </a:solidFill>
-              </a:rPr>
-              <a:t>Four categories of process waste - each fitting the four requirements: detectable from the event stream, actionable for the developer, synthesisable as a concrete alternative.</a:t>
-            </a:r>
-            <a:endParaRPr lang="en-US" sz="1600" dirty="0"/>
-          </a:p>
-          <a:p>
-            <a:pPr marL="342900" indent="-342900">
-              <a:spcAft>
-                <a:spcPts val="600"/>
-              </a:spcAft>
-              <a:buSzPct val="100000"/>
-              <a:buChar char="•"/>
-            </a:pPr>
-            <a:r>
-              <a:rPr lang="en-US" sz="1600" dirty="0">
-                <a:solidFill>
-                  <a:srgbClr val="000000"/>
-                </a:solidFill>
-              </a:rPr>
-              <a:t>Ordering - right refactorings, wrong sequence.</a:t>
-            </a:r>
-            <a:endParaRPr lang="en-US" sz="1600" dirty="0"/>
-          </a:p>
-          <a:p>
-            <a:pPr marL="342900" indent="-342900">
-              <a:spcAft>
-                <a:spcPts val="600"/>
-              </a:spcAft>
-              <a:buSzPct val="100000"/>
-              <a:buChar char="•"/>
-            </a:pPr>
-            <a:r>
-              <a:rPr lang="en-US" sz="1600" dirty="0">
-                <a:solidFill>
-                  <a:srgbClr val="000000"/>
-                </a:solidFill>
-              </a:rPr>
-              <a:t>Manual-Refactor - wrong tool (hand-edit when the IDE could safely have done it).</a:t>
-            </a:r>
-            <a:endParaRPr lang="en-US" sz="1600" dirty="0"/>
-          </a:p>
-          <a:p>
-            <a:pPr marL="342900" indent="-342900">
-              <a:spcAft>
-                <a:spcPts val="600"/>
-              </a:spcAft>
-              <a:buSzPct val="100000"/>
-              <a:buChar char="•"/>
-            </a:pPr>
-            <a:r>
-              <a:rPr lang="en-US" sz="1600" dirty="0">
-                <a:solidFill>
-                  <a:srgbClr val="000000"/>
-                </a:solidFill>
-              </a:rPr>
-              <a:t>Rework - wrong churn (added then removed).</a:t>
-            </a:r>
-            <a:endParaRPr lang="en-US" sz="1600" dirty="0"/>
-          </a:p>
-          <a:p>
-            <a:pPr marL="342900" indent="-342900">
-              <a:spcAft>
-                <a:spcPts val="600"/>
-              </a:spcAft>
-              <a:buSzPct val="100000"/>
-              <a:buChar char="•"/>
-            </a:pPr>
-            <a:r>
-              <a:rPr lang="en-US" sz="1600" dirty="0">
-                <a:solidFill>
-                  <a:srgbClr val="000000"/>
-                </a:solidFill>
-              </a:rPr>
-              <a:t>Hygiene - missing safety checkpoints (no tests, no commits).</a:t>
-            </a:r>
-            <a:endParaRPr lang="en-US" sz="1600" dirty="0"/>
-          </a:p>
-          <a:p>
-            <a:pPr marL="342900" indent="-342900">
-              <a:spcAft>
-                <a:spcPts val="600"/>
-              </a:spcAft>
-              <a:buSzPct val="100000"/>
-              <a:buChar char="•"/>
-            </a:pPr>
-            <a:r>
-              <a:rPr lang="en-US" sz="1600" dirty="0">
-                <a:solidFill>
-                  <a:srgbClr val="000000"/>
-                </a:solidFill>
-              </a:rPr>
-              <a:t>Each kind gets its own slide next, covering both detection and synthesis.</a:t>
-            </a:r>
-            <a:endParaRPr lang="en-US" sz="1600" dirty="0"/>
-          </a:p>
-        </p:txBody>
-      </p:sp>
-    </p:spTree>
-  </p:cSld>
-  <p:clrMapOvr>
-    <a:masterClrMapping/>
-  </p:clrMapOvr>
-</p:sld>
-</file>
-
-<file path=ppt/slides/slide11.xml><?xml version="1.0" encoding="utf-8"?>
-<p:sld xmlns:a="http://schemas.openxmlformats.org/drawingml/2006/main" xmlns:r="http://schemas.openxmlformats.org/officeDocument/2006/relationships" xmlns:p="http://schemas.openxmlformats.org/presentationml/2006/main">
-  <p:cSld name="Slide 11">
-    <p:spTree>
-      <p:nvGrpSpPr>
-        <p:cNvPr id="1" name=""/>
-        <p:cNvGrpSpPr/>
-        <p:nvPr/>
-      </p:nvGrpSpPr>
-      <p:grpSpPr>
-        <a:xfrm>
-          <a:off x="0" y="0"/>
-          <a:ext cx="0" cy="0"/>
-          <a:chOff x="0" y="0"/>
-          <a:chExt cx="0" cy="0"/>
-        </a:xfrm>
-      </p:grpSpPr>
-      <p:sp>
-        <p:nvSpPr>
-          <p:cNvPr id="2" name="Text 0"/>
-          <p:cNvSpPr/>
-          <p:nvPr/>
-        </p:nvSpPr>
-        <p:spPr>
-          <a:xfrm>
-            <a:off x="457200" y="274320"/>
-            <a:ext cx="8229600" cy="640080"/>
-          </a:xfrm>
-          <a:prstGeom prst="rect">
-            <a:avLst/>
-          </a:prstGeom>
-          <a:noFill/>
-          <a:ln/>
-        </p:spPr>
-        <p:txBody>
-          <a:bodyPr wrap="square" lIns="0" tIns="0" rIns="0" bIns="0" rtlCol="0" anchor="ctr"/>
-          <a:lstStyle/>
-          <a:p>
-            <a:pPr indent="0" marL="0">
-              <a:buNone/>
-            </a:pPr>
-            <a:r>
-              <a:rPr lang="en-US" sz="2800" b="1" dirty="0">
-                <a:solidFill>
-                  <a:srgbClr val="000000"/>
-                </a:solidFill>
-              </a:rPr>
               <a:t>Ordering: detect + synthesise</a:t>
             </a:r>
             <a:endParaRPr lang="en-US" sz="2800" dirty="0"/>
@@ -3273,9 +2815,9 @@
 </p:sld>
 </file>
 
-<file path=ppt/slides/slide12.xml><?xml version="1.0" encoding="utf-8"?>
+<file path=ppt/slides/slide11.xml><?xml version="1.0" encoding="utf-8"?>
 <p:sld xmlns:a="http://schemas.openxmlformats.org/drawingml/2006/main" xmlns:r="http://schemas.openxmlformats.org/officeDocument/2006/relationships" xmlns:p="http://schemas.openxmlformats.org/presentationml/2006/main">
-  <p:cSld name="Slide 12">
+  <p:cSld name="Slide 11">
     <p:spTree>
       <p:nvGrpSpPr>
         <p:cNvPr id="1" name=""/>
@@ -3452,9 +2994,9 @@
 </p:sld>
 </file>
 
-<file path=ppt/slides/slide13.xml><?xml version="1.0" encoding="utf-8"?>
+<file path=ppt/slides/slide12.xml><?xml version="1.0" encoding="utf-8"?>
 <p:sld xmlns:a="http://schemas.openxmlformats.org/drawingml/2006/main" xmlns:r="http://schemas.openxmlformats.org/officeDocument/2006/relationships" xmlns:p="http://schemas.openxmlformats.org/presentationml/2006/main">
-  <p:cSld name="Slide 13">
+  <p:cSld name="Slide 12">
     <p:spTree>
       <p:nvGrpSpPr>
         <p:cNvPr id="1" name=""/>
@@ -3631,8 +3173,181 @@
 </p:sld>
 </file>
 
+<file path=ppt/slides/slide13.xml><?xml version="1.0" encoding="utf-8"?>
+<p:sld xmlns:a="http://schemas.openxmlformats.org/drawingml/2006/main" xmlns:r="http://schemas.openxmlformats.org/officeDocument/2006/relationships" xmlns:p="http://schemas.openxmlformats.org/presentationml/2006/main">
+  <p:cSld name="Slide 13">
+    <p:spTree>
+      <p:nvGrpSpPr>
+        <p:cNvPr id="1" name=""/>
+        <p:cNvGrpSpPr/>
+        <p:nvPr/>
+      </p:nvGrpSpPr>
+      <p:grpSpPr>
+        <a:xfrm>
+          <a:off x="0" y="0"/>
+          <a:ext cx="0" cy="0"/>
+          <a:chOff x="0" y="0"/>
+          <a:chExt cx="0" cy="0"/>
+        </a:xfrm>
+      </p:grpSpPr>
+      <p:sp>
+        <p:nvSpPr>
+          <p:cNvPr id="2" name="Text 0"/>
+          <p:cNvSpPr/>
+          <p:nvPr/>
+        </p:nvSpPr>
+        <p:spPr>
+          <a:xfrm>
+            <a:off x="457200" y="274320"/>
+            <a:ext cx="8229600" cy="640080"/>
+          </a:xfrm>
+          <a:prstGeom prst="rect">
+            <a:avLst/>
+          </a:prstGeom>
+          <a:noFill/>
+          <a:ln/>
+        </p:spPr>
+        <p:txBody>
+          <a:bodyPr wrap="square" lIns="0" tIns="0" rIns="0" bIns="0" rtlCol="0" anchor="ctr"/>
+          <a:lstStyle/>
+          <a:p>
+            <a:pPr indent="0" marL="0">
+              <a:buNone/>
+            </a:pPr>
+            <a:r>
+              <a:rPr lang="en-US" sz="2800" b="1" dirty="0">
+                <a:solidFill>
+                  <a:srgbClr val="000000"/>
+                </a:solidFill>
+              </a:rPr>
+              <a:t>Hygiene: detect + synthesise</a:t>
+            </a:r>
+            <a:endParaRPr lang="en-US" sz="2800" dirty="0"/>
+          </a:p>
+        </p:txBody>
+      </p:sp>
+      <p:sp>
+        <p:nvSpPr>
+          <p:cNvPr id="3" name="Text 1"/>
+          <p:cNvSpPr/>
+          <p:nvPr/>
+        </p:nvSpPr>
+        <p:spPr>
+          <a:xfrm>
+            <a:off x="457200" y="1188720"/>
+            <a:ext cx="8229600" cy="3657600"/>
+          </a:xfrm>
+          <a:prstGeom prst="rect">
+            <a:avLst/>
+          </a:prstGeom>
+          <a:noFill/>
+          <a:ln/>
+        </p:spPr>
+        <p:txBody>
+          <a:bodyPr wrap="square" rtlCol="0" anchor="t"/>
+          <a:lstStyle/>
+          <a:p>
+            <a:pPr marL="342900" indent="-342900">
+              <a:spcAft>
+                <a:spcPts val="600"/>
+              </a:spcAft>
+              <a:buSzPct val="100000"/>
+              <a:buChar char="•"/>
+            </a:pPr>
+            <a:r>
+              <a:rPr lang="en-US" sz="1600" dirty="0">
+                <a:solidFill>
+                  <a:srgbClr val="000000"/>
+                </a:solidFill>
+              </a:rPr>
+              <a:t>What: long stretches of work without safety checkpoints - no test runs, no commits.</a:t>
+            </a:r>
+            <a:endParaRPr lang="en-US" sz="1600" dirty="0"/>
+          </a:p>
+          <a:p>
+            <a:pPr marL="342900" indent="-342900">
+              <a:spcAft>
+                <a:spcPts val="600"/>
+              </a:spcAft>
+              <a:buSzPct val="100000"/>
+              <a:buChar char="•"/>
+            </a:pPr>
+            <a:r>
+              <a:rPr lang="en-US" sz="1600" dirty="0">
+                <a:solidFill>
+                  <a:srgbClr val="000000"/>
+                </a:solidFill>
+              </a:rPr>
+              <a:t>Detect: 60-second windows with no test-run events; commit-gap events when commits are spaced beyond threshold.</a:t>
+            </a:r>
+            <a:endParaRPr lang="en-US" sz="1600" dirty="0"/>
+          </a:p>
+          <a:p>
+            <a:pPr marL="342900" indent="-342900">
+              <a:spcAft>
+                <a:spcPts val="600"/>
+              </a:spcAft>
+              <a:buSzPct val="100000"/>
+              <a:buChar char="•"/>
+            </a:pPr>
+            <a:r>
+              <a:rPr lang="en-US" sz="1600" dirty="0">
+                <a:solidFill>
+                  <a:srgbClr val="000000"/>
+                </a:solidFill>
+              </a:rPr>
+              <a:t>Synthesise: model an alternative cadence that inserts test-run and commit events at the right points.</a:t>
+            </a:r>
+            <a:endParaRPr lang="en-US" sz="1600" dirty="0"/>
+          </a:p>
+          <a:p>
+            <a:pPr marL="342900" indent="-342900">
+              <a:spcAft>
+                <a:spcPts val="600"/>
+              </a:spcAft>
+              <a:buSzPct val="100000"/>
+              <a:buChar char="•"/>
+            </a:pPr>
+            <a:r>
+              <a:rPr lang="en-US" sz="1600" dirty="0">
+                <a:solidFill>
+                  <a:srgbClr val="000000"/>
+                </a:solidFill>
+              </a:rPr>
+              <a:t>The alternative's J(τ) credits those checkpoints via the skip-tests and commit-gap terms.</a:t>
+            </a:r>
+            <a:endParaRPr lang="en-US" sz="1600" dirty="0"/>
+          </a:p>
+          <a:p>
+            <a:pPr marL="342900" indent="-342900">
+              <a:spcAft>
+                <a:spcPts val="600"/>
+              </a:spcAft>
+              <a:buSzPct val="100000"/>
+              <a:buChar char="•"/>
+            </a:pPr>
+            <a:r>
+              <a:rPr lang="en-US" sz="1600" dirty="0">
+                <a:solidFill>
+                  <a:srgbClr val="000000"/>
+                </a:solidFill>
+              </a:rPr>
+              <a:t>Cheap to compute, but consistently surfaces meaningful divergences in the user study.</a:t>
+            </a:r>
+            <a:endParaRPr lang="en-US" sz="1600" dirty="0"/>
+          </a:p>
+        </p:txBody>
+      </p:sp>
+    </p:spTree>
+  </p:cSld>
+  <p:clrMapOvr>
+    <a:masterClrMapping/>
+  </p:clrMapOvr>
+</p:sld>
+</file>
+
 <file path=ppt/slides/slide14.xml><?xml version="1.0" encoding="utf-8"?>
-<p:sld xmlns:a="http://schemas.openxmlformats.org/drawingml/2006/main" xmlns:r="http://schemas.openxmlformats.org/officeDocument/2006/relationships" xmlns:p="http://schemas.openxmlformats.org/presentationml/2006/main">
+<p:sld xmlns:a="http://schemas.openxmlformats.org/drawingml/2006/main" xmlns:r="http://schemas.openxmlformats.org/officeDocument/2006/relationships" xmlns:p="http://schemas.openxmlformats.org/presentationml/2006/main" show="0">
   <p:cSld name="Slide 14">
     <p:spTree>
       <p:nvGrpSpPr>
@@ -3678,7 +3393,7 @@
                   <a:srgbClr val="000000"/>
                 </a:solidFill>
               </a:rPr>
-              <a:t>Hygiene: detect + synthesise</a:t>
+              <a:t>Comparable divergence magnitudes</a:t>
             </a:r>
             <a:endParaRPr lang="en-US" sz="2800" dirty="0"/>
           </a:p>
@@ -3718,7 +3433,7 @@
                   <a:srgbClr val="000000"/>
                 </a:solidFill>
               </a:rPr>
-              <a:t>What: long stretches of work without safety checkpoints - no test runs, no commits.</a:t>
+              <a:t>Magnitude = J(τ*_final) − J(τ_final).</a:t>
             </a:r>
             <a:endParaRPr lang="en-US" sz="1600" dirty="0"/>
           </a:p>
@@ -3736,7 +3451,7 @@
                   <a:srgbClr val="000000"/>
                 </a:solidFill>
               </a:rPr>
-              <a:t>Detect: 60-second windows with no test-run events; commit-gap events when commits are spaced beyond threshold.</a:t>
+              <a:t>The score gap when the alternative is substituted at the divergence point but the rest of the user's trajectory is left unchanged.</a:t>
             </a:r>
             <a:endParaRPr lang="en-US" sz="1600" dirty="0"/>
           </a:p>
@@ -3754,7 +3469,7 @@
                   <a:srgbClr val="000000"/>
                 </a:solidFill>
               </a:rPr>
-              <a:t>Synthesise: model an alternative cadence that inserts test-run and commit events at the right points.</a:t>
+              <a:t>Makes magnitudes comparable across all four divergence kinds.</a:t>
             </a:r>
             <a:endParaRPr lang="en-US" sz="1600" dirty="0"/>
           </a:p>
@@ -3772,7 +3487,7 @@
                   <a:srgbClr val="000000"/>
                 </a:solidFill>
               </a:rPr>
-              <a:t>The alternative's J(τ) credits those checkpoints via the skip-tests and commit-gap terms.</a:t>
+              <a:t>Lets the dashboard surface each divergence point alongside its score impact, so the highest-impact moments are easy to spot in the session summary.</a:t>
             </a:r>
             <a:endParaRPr lang="en-US" sz="1600" dirty="0"/>
           </a:p>
@@ -3790,7 +3505,7 @@
                   <a:srgbClr val="000000"/>
                 </a:solidFill>
               </a:rPr>
-              <a:t>Cheap to compute, but consistently surfaces meaningful divergences in the user study.</a:t>
+              <a:t>This is the number the demo will point at.</a:t>
             </a:r>
             <a:endParaRPr lang="en-US" sz="1600" dirty="0"/>
           </a:p>
@@ -3851,276 +3566,6 @@
                   <a:srgbClr val="000000"/>
                 </a:solidFill>
               </a:rPr>
-              <a:t>Comparable divergence magnitudes</a:t>
-            </a:r>
-            <a:endParaRPr lang="en-US" sz="2800" dirty="0"/>
-          </a:p>
-        </p:txBody>
-      </p:sp>
-      <p:sp>
-        <p:nvSpPr>
-          <p:cNvPr id="3" name="Text 1"/>
-          <p:cNvSpPr/>
-          <p:nvPr/>
-        </p:nvSpPr>
-        <p:spPr>
-          <a:xfrm>
-            <a:off x="457200" y="1188720"/>
-            <a:ext cx="8229600" cy="3657600"/>
-          </a:xfrm>
-          <a:prstGeom prst="rect">
-            <a:avLst/>
-          </a:prstGeom>
-          <a:noFill/>
-          <a:ln/>
-        </p:spPr>
-        <p:txBody>
-          <a:bodyPr wrap="square" rtlCol="0" anchor="t"/>
-          <a:lstStyle/>
-          <a:p>
-            <a:pPr marL="342900" indent="-342900">
-              <a:spcAft>
-                <a:spcPts val="600"/>
-              </a:spcAft>
-              <a:buSzPct val="100000"/>
-              <a:buChar char="•"/>
-            </a:pPr>
-            <a:r>
-              <a:rPr lang="en-US" sz="1600" dirty="0">
-                <a:solidFill>
-                  <a:srgbClr val="000000"/>
-                </a:solidFill>
-              </a:rPr>
-              <a:t>Magnitude = J(τ*_final) − J(τ_final).</a:t>
-            </a:r>
-            <a:endParaRPr lang="en-US" sz="1600" dirty="0"/>
-          </a:p>
-          <a:p>
-            <a:pPr marL="342900" indent="-342900">
-              <a:spcAft>
-                <a:spcPts val="600"/>
-              </a:spcAft>
-              <a:buSzPct val="100000"/>
-              <a:buChar char="•"/>
-            </a:pPr>
-            <a:r>
-              <a:rPr lang="en-US" sz="1600" dirty="0">
-                <a:solidFill>
-                  <a:srgbClr val="000000"/>
-                </a:solidFill>
-              </a:rPr>
-              <a:t>The score gap when the alternative is substituted at the divergence point but the rest of the user's trajectory is left unchanged.</a:t>
-            </a:r>
-            <a:endParaRPr lang="en-US" sz="1600" dirty="0"/>
-          </a:p>
-          <a:p>
-            <a:pPr marL="342900" indent="-342900">
-              <a:spcAft>
-                <a:spcPts val="600"/>
-              </a:spcAft>
-              <a:buSzPct val="100000"/>
-              <a:buChar char="•"/>
-            </a:pPr>
-            <a:r>
-              <a:rPr lang="en-US" sz="1600" dirty="0">
-                <a:solidFill>
-                  <a:srgbClr val="000000"/>
-                </a:solidFill>
-              </a:rPr>
-              <a:t>Makes magnitudes comparable across all four divergence kinds.</a:t>
-            </a:r>
-            <a:endParaRPr lang="en-US" sz="1600" dirty="0"/>
-          </a:p>
-          <a:p>
-            <a:pPr marL="342900" indent="-342900">
-              <a:spcAft>
-                <a:spcPts val="600"/>
-              </a:spcAft>
-              <a:buSzPct val="100000"/>
-              <a:buChar char="•"/>
-            </a:pPr>
-            <a:r>
-              <a:rPr lang="en-US" sz="1600" dirty="0">
-                <a:solidFill>
-                  <a:srgbClr val="000000"/>
-                </a:solidFill>
-              </a:rPr>
-              <a:t>Lets the dashboard surface each divergence point alongside its score impact, so the highest-impact moments are easy to spot in the session summary.</a:t>
-            </a:r>
-            <a:endParaRPr lang="en-US" sz="1600" dirty="0"/>
-          </a:p>
-          <a:p>
-            <a:pPr marL="342900" indent="-342900">
-              <a:spcAft>
-                <a:spcPts val="600"/>
-              </a:spcAft>
-              <a:buSzPct val="100000"/>
-              <a:buChar char="•"/>
-            </a:pPr>
-            <a:r>
-              <a:rPr lang="en-US" sz="1600" dirty="0">
-                <a:solidFill>
-                  <a:srgbClr val="000000"/>
-                </a:solidFill>
-              </a:rPr>
-              <a:t>This is the number the demo will point at.</a:t>
-            </a:r>
-            <a:endParaRPr lang="en-US" sz="1600" dirty="0"/>
-          </a:p>
-        </p:txBody>
-      </p:sp>
-    </p:spTree>
-  </p:cSld>
-  <p:clrMapOvr>
-    <a:masterClrMapping/>
-  </p:clrMapOvr>
-</p:sld>
-</file>
-
-<file path=ppt/slides/slide16.xml><?xml version="1.0" encoding="utf-8"?>
-<p:sld xmlns:a="http://schemas.openxmlformats.org/drawingml/2006/main" xmlns:r="http://schemas.openxmlformats.org/officeDocument/2006/relationships" xmlns:p="http://schemas.openxmlformats.org/presentationml/2006/main">
-  <p:cSld name="Slide 16">
-    <p:spTree>
-      <p:nvGrpSpPr>
-        <p:cNvPr id="1" name=""/>
-        <p:cNvGrpSpPr/>
-        <p:nvPr/>
-      </p:nvGrpSpPr>
-      <p:grpSpPr>
-        <a:xfrm>
-          <a:off x="0" y="0"/>
-          <a:ext cx="0" cy="0"/>
-          <a:chOff x="0" y="0"/>
-          <a:chExt cx="0" cy="0"/>
-        </a:xfrm>
-      </p:grpSpPr>
-      <p:sp>
-        <p:nvSpPr>
-          <p:cNvPr id="2" name="Text 0"/>
-          <p:cNvSpPr/>
-          <p:nvPr/>
-        </p:nvSpPr>
-        <p:spPr>
-          <a:xfrm>
-            <a:off x="457200" y="1828800"/>
-            <a:ext cx="8229600" cy="914400"/>
-          </a:xfrm>
-          <a:prstGeom prst="rect">
-            <a:avLst/>
-          </a:prstGeom>
-          <a:noFill/>
-          <a:ln/>
-        </p:spPr>
-        <p:txBody>
-          <a:bodyPr wrap="square" lIns="0" tIns="0" rIns="0" bIns="0" rtlCol="0" anchor="ctr"/>
-          <a:lstStyle/>
-          <a:p>
-            <a:pPr algn="ctr" indent="0" marL="0">
-              <a:buNone/>
-            </a:pPr>
-            <a:r>
-              <a:rPr lang="en-US" sz="4400" b="1" dirty="0">
-                <a:solidFill>
-                  <a:srgbClr val="000000"/>
-                </a:solidFill>
-              </a:rPr>
-              <a:t>Demo (part 2): results</a:t>
-            </a:r>
-            <a:endParaRPr lang="en-US" sz="4400" dirty="0"/>
-          </a:p>
-        </p:txBody>
-      </p:sp>
-      <p:sp>
-        <p:nvSpPr>
-          <p:cNvPr id="3" name="Text 1"/>
-          <p:cNvSpPr/>
-          <p:nvPr/>
-        </p:nvSpPr>
-        <p:spPr>
-          <a:xfrm>
-            <a:off x="457200" y="2834640"/>
-            <a:ext cx="8229600" cy="1097280"/>
-          </a:xfrm>
-          <a:prstGeom prst="rect">
-            <a:avLst/>
-          </a:prstGeom>
-          <a:noFill/>
-          <a:ln/>
-        </p:spPr>
-        <p:txBody>
-          <a:bodyPr wrap="square" rtlCol="0" anchor="ctr"/>
-          <a:lstStyle/>
-          <a:p>
-            <a:pPr algn="ctr" indent="0" marL="0">
-              <a:buNone/>
-            </a:pPr>
-            <a:r>
-              <a:rPr lang="en-US" sz="1800" i="1" dirty="0">
-                <a:solidFill>
-                  <a:srgbClr val="555555"/>
-                </a:solidFill>
-              </a:rPr>
-              <a:t>Now the live session has been analysed: walk through the divergence points the tool found, then show a higher-scoring alternative I prepared earlier.</a:t>
-            </a:r>
-            <a:endParaRPr lang="en-US" sz="1800" dirty="0"/>
-          </a:p>
-        </p:txBody>
-      </p:sp>
-    </p:spTree>
-  </p:cSld>
-  <p:clrMapOvr>
-    <a:masterClrMapping/>
-  </p:clrMapOvr>
-</p:sld>
-</file>
-
-<file path=ppt/slides/slide17.xml><?xml version="1.0" encoding="utf-8"?>
-<p:sld xmlns:a="http://schemas.openxmlformats.org/drawingml/2006/main" xmlns:r="http://schemas.openxmlformats.org/officeDocument/2006/relationships" xmlns:p="http://schemas.openxmlformats.org/presentationml/2006/main">
-  <p:cSld name="Slide 17">
-    <p:spTree>
-      <p:nvGrpSpPr>
-        <p:cNvPr id="1" name=""/>
-        <p:cNvGrpSpPr/>
-        <p:nvPr/>
-      </p:nvGrpSpPr>
-      <p:grpSpPr>
-        <a:xfrm>
-          <a:off x="0" y="0"/>
-          <a:ext cx="0" cy="0"/>
-          <a:chOff x="0" y="0"/>
-          <a:chExt cx="0" cy="0"/>
-        </a:xfrm>
-      </p:grpSpPr>
-      <p:sp>
-        <p:nvSpPr>
-          <p:cNvPr id="2" name="Text 0"/>
-          <p:cNvSpPr/>
-          <p:nvPr/>
-        </p:nvSpPr>
-        <p:spPr>
-          <a:xfrm>
-            <a:off x="457200" y="274320"/>
-            <a:ext cx="8229600" cy="640080"/>
-          </a:xfrm>
-          <a:prstGeom prst="rect">
-            <a:avLst/>
-          </a:prstGeom>
-          <a:noFill/>
-          <a:ln/>
-        </p:spPr>
-        <p:txBody>
-          <a:bodyPr wrap="square" lIns="0" tIns="0" rIns="0" bIns="0" rtlCol="0" anchor="ctr"/>
-          <a:lstStyle/>
-          <a:p>
-            <a:pPr indent="0" marL="0">
-              <a:buNone/>
-            </a:pPr>
-            <a:r>
-              <a:rPr lang="en-US" sz="2800" b="1" dirty="0">
-                <a:solidFill>
-                  <a:srgbClr val="000000"/>
-                </a:solidFill>
-              </a:rPr>
               <a:t>What we wanted to evaluate</a:t>
             </a:r>
             <a:endParaRPr lang="en-US" sz="2800" dirty="0"/>
@@ -4129,7 +3574,7 @@
       </p:sp>
       <p:graphicFrame>
         <p:nvGraphicFramePr>
-          <p:cNvPr id="18" name="Table 0"/>
+          <p:cNvPr id="16" name="Table 0"/>
           <p:cNvGraphicFramePr>
             <a:graphicFrameLocks noGrp="1"/>
           </p:cNvGraphicFramePr>
@@ -4350,7 +3795,7 @@
                             <a:srgbClr val="555555"/>
                           </a:solidFill>
                         </a:rPr>
-                        <a:t>45 labelled injection sessions, scored against per-kind precision and recall (Slide 18).</a:t>
+                        <a:t>45 labelled injection sessions, scored against per-kind precision and recall (Slide 16).</a:t>
                       </a:r>
                       <a:endParaRPr lang="en-US" sz="1300" dirty="0"/>
                     </a:p>
@@ -4468,7 +3913,7 @@
                             <a:srgbClr val="555555"/>
                           </a:solidFill>
                         </a:rPr>
-                        <a:t>Injection set + user-study rankable subset, used for the sensitivity sweep and ablation study (Slide 19).</a:t>
+                        <a:t>Injection set + user-study rankable subset, used for the sensitivity sweep and ablation study (Slide 17).</a:t>
                       </a:r>
                       <a:endParaRPr lang="en-US" sz="1300" dirty="0"/>
                     </a:p>
@@ -4586,7 +4031,7 @@
                             <a:srgbClr val="555555"/>
                           </a:solidFill>
                         </a:rPr>
-                        <a:t>30-session randomised user study, plus a 48-session agent extension as motivation for future work (Slide 20).</a:t>
+                        <a:t>30-session randomised user study, plus a 48-session agent extension as motivation for future work (Slide 18).</a:t>
                       </a:r>
                       <a:endParaRPr lang="en-US" sz="1300" dirty="0"/>
                     </a:p>
@@ -4643,6 +4088,316 @@
 </p:sld>
 </file>
 
+<file path=ppt/slides/slide16.xml><?xml version="1.0" encoding="utf-8"?>
+<p:sld xmlns:a="http://schemas.openxmlformats.org/drawingml/2006/main" xmlns:r="http://schemas.openxmlformats.org/officeDocument/2006/relationships" xmlns:p="http://schemas.openxmlformats.org/presentationml/2006/main">
+  <p:cSld name="Slide 16">
+    <p:spTree>
+      <p:nvGrpSpPr>
+        <p:cNvPr id="1" name=""/>
+        <p:cNvGrpSpPr/>
+        <p:nvPr/>
+      </p:nvGrpSpPr>
+      <p:grpSpPr>
+        <a:xfrm>
+          <a:off x="0" y="0"/>
+          <a:ext cx="0" cy="0"/>
+          <a:chOff x="0" y="0"/>
+          <a:chExt cx="0" cy="0"/>
+        </a:xfrm>
+      </p:grpSpPr>
+      <p:sp>
+        <p:nvSpPr>
+          <p:cNvPr id="2" name="Text 0"/>
+          <p:cNvSpPr/>
+          <p:nvPr/>
+        </p:nvSpPr>
+        <p:spPr>
+          <a:xfrm>
+            <a:off x="457200" y="274320"/>
+            <a:ext cx="8229600" cy="640080"/>
+          </a:xfrm>
+          <a:prstGeom prst="rect">
+            <a:avLst/>
+          </a:prstGeom>
+          <a:noFill/>
+          <a:ln/>
+        </p:spPr>
+        <p:txBody>
+          <a:bodyPr wrap="square" lIns="0" tIns="0" rIns="0" bIns="0" rtlCol="0" anchor="ctr"/>
+          <a:lstStyle/>
+          <a:p>
+            <a:pPr indent="0" marL="0">
+              <a:buNone/>
+            </a:pPr>
+            <a:r>
+              <a:rPr lang="en-US" sz="2800" b="1" dirty="0">
+                <a:solidFill>
+                  <a:srgbClr val="000000"/>
+                </a:solidFill>
+              </a:rPr>
+              <a:t>Detector precision &amp; recall</a:t>
+            </a:r>
+            <a:endParaRPr lang="en-US" sz="2800" dirty="0"/>
+          </a:p>
+        </p:txBody>
+      </p:sp>
+      <p:sp>
+        <p:nvSpPr>
+          <p:cNvPr id="3" name="Text 1"/>
+          <p:cNvSpPr/>
+          <p:nvPr/>
+        </p:nvSpPr>
+        <p:spPr>
+          <a:xfrm>
+            <a:off x="457200" y="1188720"/>
+            <a:ext cx="8229600" cy="3657600"/>
+          </a:xfrm>
+          <a:prstGeom prst="rect">
+            <a:avLst/>
+          </a:prstGeom>
+          <a:noFill/>
+          <a:ln/>
+        </p:spPr>
+        <p:txBody>
+          <a:bodyPr wrap="square" rtlCol="0" anchor="t"/>
+          <a:lstStyle/>
+          <a:p>
+            <a:pPr marL="342900" indent="-342900">
+              <a:spcAft>
+                <a:spcPts val="600"/>
+              </a:spcAft>
+              <a:buSzPct val="100000"/>
+              <a:buChar char="•"/>
+            </a:pPr>
+            <a:r>
+              <a:rPr lang="en-US" sz="1600" dirty="0">
+                <a:solidFill>
+                  <a:srgbClr val="000000"/>
+                </a:solidFill>
+              </a:rPr>
+              <a:t>Precision = 1.00 across all four divergence kinds - every detection is valid.</a:t>
+            </a:r>
+            <a:endParaRPr lang="en-US" sz="1600" dirty="0"/>
+          </a:p>
+          <a:p>
+            <a:pPr marL="342900" indent="-342900">
+              <a:spcAft>
+                <a:spcPts val="600"/>
+              </a:spcAft>
+              <a:buSzPct val="100000"/>
+              <a:buChar char="•"/>
+            </a:pPr>
+            <a:r>
+              <a:rPr lang="en-US" sz="1600" dirty="0">
+                <a:solidFill>
+                  <a:srgbClr val="000000"/>
+                </a:solidFill>
+              </a:rPr>
+              <a:t>Recall - Rework 1.00, Hygiene 1.00, Manual-Refactor 0.76, Ordering 0.40.</a:t>
+            </a:r>
+            <a:endParaRPr lang="en-US" sz="1600" dirty="0"/>
+          </a:p>
+          <a:p>
+            <a:pPr marL="342900" indent="-342900">
+              <a:spcAft>
+                <a:spcPts val="600"/>
+              </a:spcAft>
+              <a:buSzPct val="100000"/>
+              <a:buChar char="•"/>
+            </a:pPr>
+            <a:r>
+              <a:rPr lang="en-US" sz="1600" dirty="0">
+                <a:solidFill>
+                  <a:srgbClr val="000000"/>
+                </a:solidFill>
+              </a:rPr>
+              <a:t>Inter-rater agreement (Cohen's κ) -1.00 for Ordering and Manual-Refactor, 0.86 for Rework, 0.72 for Hygiene.</a:t>
+            </a:r>
+            <a:endParaRPr lang="en-US" sz="1600" dirty="0"/>
+          </a:p>
+          <a:p>
+            <a:pPr marL="342900" indent="-342900">
+              <a:spcAft>
+                <a:spcPts val="600"/>
+              </a:spcAft>
+              <a:buSzPct val="100000"/>
+              <a:buChar char="•"/>
+            </a:pPr>
+            <a:r>
+              <a:rPr lang="en-US" sz="1600" dirty="0">
+                <a:solidFill>
+                  <a:srgbClr val="000000"/>
+                </a:solidFill>
+              </a:rPr>
+              <a:t>Ordering recall gap is honest and explained: the synthesiser rejects windows it cannot safely reproduce. A scope limit, not a detector flaw.</a:t>
+            </a:r>
+            <a:endParaRPr lang="en-US" sz="1600" dirty="0"/>
+          </a:p>
+        </p:txBody>
+      </p:sp>
+    </p:spTree>
+  </p:cSld>
+  <p:clrMapOvr>
+    <a:masterClrMapping/>
+  </p:clrMapOvr>
+</p:sld>
+</file>
+
+<file path=ppt/slides/slide17.xml><?xml version="1.0" encoding="utf-8"?>
+<p:sld xmlns:a="http://schemas.openxmlformats.org/drawingml/2006/main" xmlns:r="http://schemas.openxmlformats.org/officeDocument/2006/relationships" xmlns:p="http://schemas.openxmlformats.org/presentationml/2006/main">
+  <p:cSld name="Slide 17">
+    <p:spTree>
+      <p:nvGrpSpPr>
+        <p:cNvPr id="1" name=""/>
+        <p:cNvGrpSpPr/>
+        <p:nvPr/>
+      </p:nvGrpSpPr>
+      <p:grpSpPr>
+        <a:xfrm>
+          <a:off x="0" y="0"/>
+          <a:ext cx="0" cy="0"/>
+          <a:chOff x="0" y="0"/>
+          <a:chExt cx="0" cy="0"/>
+        </a:xfrm>
+      </p:grpSpPr>
+      <p:sp>
+        <p:nvSpPr>
+          <p:cNvPr id="2" name="Text 0"/>
+          <p:cNvSpPr/>
+          <p:nvPr/>
+        </p:nvSpPr>
+        <p:spPr>
+          <a:xfrm>
+            <a:off x="457200" y="274320"/>
+            <a:ext cx="8229600" cy="640080"/>
+          </a:xfrm>
+          <a:prstGeom prst="rect">
+            <a:avLst/>
+          </a:prstGeom>
+          <a:noFill/>
+          <a:ln/>
+        </p:spPr>
+        <p:txBody>
+          <a:bodyPr wrap="square" lIns="0" tIns="0" rIns="0" bIns="0" rtlCol="0" anchor="ctr"/>
+          <a:lstStyle/>
+          <a:p>
+            <a:pPr indent="0" marL="0">
+              <a:buNone/>
+            </a:pPr>
+            <a:r>
+              <a:rPr lang="en-US" sz="2800" b="1" dirty="0">
+                <a:solidFill>
+                  <a:srgbClr val="000000"/>
+                </a:solidFill>
+              </a:rPr>
+              <a:t>Score robustness</a:t>
+            </a:r>
+            <a:endParaRPr lang="en-US" sz="2800" dirty="0"/>
+          </a:p>
+        </p:txBody>
+      </p:sp>
+      <p:sp>
+        <p:nvSpPr>
+          <p:cNvPr id="3" name="Text 1"/>
+          <p:cNvSpPr/>
+          <p:nvPr/>
+        </p:nvSpPr>
+        <p:spPr>
+          <a:xfrm>
+            <a:off x="457200" y="1188720"/>
+            <a:ext cx="8229600" cy="3657600"/>
+          </a:xfrm>
+          <a:prstGeom prst="rect">
+            <a:avLst/>
+          </a:prstGeom>
+          <a:noFill/>
+          <a:ln/>
+        </p:spPr>
+        <p:txBody>
+          <a:bodyPr wrap="square" rtlCol="0" anchor="t"/>
+          <a:lstStyle/>
+          <a:p>
+            <a:pPr marL="342900" indent="-342900">
+              <a:spcAft>
+                <a:spcPts val="600"/>
+              </a:spcAft>
+              <a:buSzPct val="100000"/>
+              <a:buChar char="•"/>
+            </a:pPr>
+            <a:r>
+              <a:rPr lang="en-US" sz="1600" dirty="0">
+                <a:solidFill>
+                  <a:srgbClr val="000000"/>
+                </a:solidFill>
+              </a:rPr>
+              <a:t>Single-knob sensitivity sweep: scale any one weight by {0.1×–10×}, top-1 recommendation is preserved in 96.5% of user-study cases.</a:t>
+            </a:r>
+            <a:endParaRPr lang="en-US" sz="1600" dirty="0"/>
+          </a:p>
+          <a:p>
+            <a:pPr marL="342900" indent="-342900">
+              <a:spcAft>
+                <a:spcPts val="600"/>
+              </a:spcAft>
+              <a:buSzPct val="100000"/>
+              <a:buChar char="•"/>
+            </a:pPr>
+            <a:r>
+              <a:rPr lang="en-US" sz="1600" dirty="0">
+                <a:solidFill>
+                  <a:srgbClr val="000000"/>
+                </a:solidFill>
+              </a:rPr>
+              <a:t>Multi-knob Monte Carlo (200 samples): top-1 stability drops to 84.6%; mean Kendall τ = 0.586.</a:t>
+            </a:r>
+            <a:endParaRPr lang="en-US" sz="1600" dirty="0"/>
+          </a:p>
+          <a:p>
+            <a:pPr marL="342900" indent="-342900">
+              <a:spcAft>
+                <a:spcPts val="600"/>
+              </a:spcAft>
+              <a:buSzPct val="100000"/>
+              <a:buChar char="•"/>
+            </a:pPr>
+            <a:r>
+              <a:rPr lang="en-US" sz="1600" dirty="0">
+                <a:solidFill>
+                  <a:srgbClr val="000000"/>
+                </a:solidFill>
+              </a:rPr>
+              <a:t>Honest framing - stable near the chosen weights, less stable under arbitrary joint perturbations.</a:t>
+            </a:r>
+            <a:endParaRPr lang="en-US" sz="1600" dirty="0"/>
+          </a:p>
+          <a:p>
+            <a:pPr marL="342900" indent="-342900">
+              <a:spcAft>
+                <a:spcPts val="600"/>
+              </a:spcAft>
+              <a:buSzPct val="100000"/>
+              <a:buChar char="•"/>
+            </a:pPr>
+            <a:r>
+              <a:rPr lang="en-US" sz="1600" dirty="0">
+                <a:solidFill>
+                  <a:srgbClr val="000000"/>
+                </a:solidFill>
+              </a:rPr>
+              <a:t>Ablation confirms each process term contributes real signal; endpoint gain alone does not recover the ranking.</a:t>
+            </a:r>
+            <a:endParaRPr lang="en-US" sz="1600" dirty="0"/>
+          </a:p>
+        </p:txBody>
+      </p:sp>
+    </p:spTree>
+  </p:cSld>
+  <p:clrMapOvr>
+    <a:masterClrMapping/>
+  </p:clrMapOvr>
+</p:sld>
+</file>
+
 <file path=ppt/slides/slide18.xml><?xml version="1.0" encoding="utf-8"?>
 <p:sld xmlns:a="http://schemas.openxmlformats.org/drawingml/2006/main" xmlns:r="http://schemas.openxmlformats.org/officeDocument/2006/relationships" xmlns:p="http://schemas.openxmlformats.org/presentationml/2006/main">
   <p:cSld name="Slide 18">
@@ -4690,7 +4445,7 @@
                   <a:srgbClr val="000000"/>
                 </a:solidFill>
               </a:rPr>
-              <a:t>Detector precision &amp; recall</a:t>
+              <a:t>User study: does feedback change behaviour?</a:t>
             </a:r>
             <a:endParaRPr lang="en-US" sz="2800" dirty="0"/>
           </a:p>
@@ -4730,7 +4485,7 @@
                   <a:srgbClr val="000000"/>
                 </a:solidFill>
               </a:rPr>
-              <a:t>Precision = 1.00 across all four divergence kinds - every detection is valid.</a:t>
+              <a:t>With-feedback group: 2.7 divergence points per session.</a:t>
             </a:r>
             <a:endParaRPr lang="en-US" sz="1600" dirty="0"/>
           </a:p>
@@ -4748,7 +4503,7 @@
                   <a:srgbClr val="000000"/>
                 </a:solidFill>
               </a:rPr>
-              <a:t>Recall - Rework 1.00, Hygiene 1.00, Manual-Refactor 0.76, Ordering 0.40.</a:t>
+              <a:t>No-feedback baseline: 6.0 divergence points per session -2.2× difference.</a:t>
             </a:r>
             <a:endParaRPr lang="en-US" sz="1600" dirty="0"/>
           </a:p>
@@ -4766,7 +4521,7 @@
                   <a:srgbClr val="000000"/>
                 </a:solidFill>
               </a:rPr>
-              <a:t>Inter-rater agreement (Cohen's κ) -1.00 for Ordering and Manual-Refactor, 0.86 for Rework, 0.72 for Hygiene.</a:t>
+              <a:t>Gain-stripped process-score slope across the 6-session arc -+4.47 per session with feedback, −0.40 per session without.</a:t>
             </a:r>
             <a:endParaRPr lang="en-US" sz="1600" dirty="0"/>
           </a:p>
@@ -4784,7 +4539,7 @@
                   <a:srgbClr val="000000"/>
                 </a:solidFill>
               </a:rPr>
-              <a:t>Ordering recall gap is honest and explained: the synthesiser rejects windows it cannot safely reproduce. A scope limit, not a detector flaw.</a:t>
+              <a:t>Caveat: n=3 vs n=2 is directional evidence, not a hypothesis test.</a:t>
             </a:r>
             <a:endParaRPr lang="en-US" sz="1600" dirty="0"/>
           </a:p>
@@ -4845,7 +4600,7 @@
                   <a:srgbClr val="000000"/>
                 </a:solidFill>
               </a:rPr>
-              <a:t>Score robustness</a:t>
+              <a:t>Contributions</a:t>
             </a:r>
             <a:endParaRPr lang="en-US" sz="2800" dirty="0"/>
           </a:p>
@@ -4885,7 +4640,7 @@
                   <a:srgbClr val="000000"/>
                 </a:solidFill>
               </a:rPr>
-              <a:t>Single-knob sensitivity sweep: scale any one weight by {0.1×–10×}, top-1 recommendation is preserved in 96.5% of user-study cases.</a:t>
+              <a:t>A process-quality metric J(τ) combining endpoint, process, and safety signals in one principled score.</a:t>
             </a:r>
             <a:endParaRPr lang="en-US" sz="1600" dirty="0"/>
           </a:p>
@@ -4903,7 +4658,7 @@
                   <a:srgbClr val="000000"/>
                 </a:solidFill>
               </a:rPr>
-              <a:t>Multi-knob Monte Carlo (200 samples): top-1 stability drops to 84.6%; mean Kendall τ = 0.586.</a:t>
+              <a:t>A divergence-point detector with four actionable kinds, each with a per-kind synthesiser that constructs a concrete alternative trajectory.</a:t>
             </a:r>
             <a:endParaRPr lang="en-US" sz="1600" dirty="0"/>
           </a:p>
@@ -4921,7 +4676,7 @@
                   <a:srgbClr val="000000"/>
                 </a:solidFill>
               </a:rPr>
-              <a:t>Honest framing - stable near the chosen weights, less stable under arbitrary joint perturbations.</a:t>
+              <a:t>Three datasets -45 injection sessions, 30-session user study, 48-session agent extension - with reproducible analysis (Jupyter notebook reproduces every table and figure).</a:t>
             </a:r>
             <a:endParaRPr lang="en-US" sz="1600" dirty="0"/>
           </a:p>
@@ -4939,7 +4694,7 @@
                   <a:srgbClr val="000000"/>
                 </a:solidFill>
               </a:rPr>
-              <a:t>Ablation confirms each process term contributes real signal; endpoint gain alone does not recover the ranking.</a:t>
+              <a:t>A deployable end-to-end system: IntelliJ plugin, analysis backend, and dashboard.</a:t>
             </a:r>
             <a:endParaRPr lang="en-US" sz="1600" dirty="0"/>
           </a:p>
@@ -5014,8 +4769,8 @@
         </p:nvSpPr>
         <p:spPr>
           <a:xfrm>
-            <a:off x="457200" y="1188720"/>
-            <a:ext cx="8229600" cy="3657600"/>
+            <a:off x="457200" y="1097280"/>
+            <a:ext cx="8229600" cy="2286000"/>
           </a:xfrm>
           <a:prstGeom prst="rect">
             <a:avLst/>
@@ -5080,79 +4835,18 @@
             </a:r>
             <a:endParaRPr lang="en-US" sz="1600" dirty="0"/>
           </a:p>
-          <a:p>
-            <a:pPr marL="342900" indent="-342900">
-              <a:spcAft>
-                <a:spcPts val="600"/>
-              </a:spcAft>
-              <a:buSzPct val="100000"/>
-              <a:buChar char="•"/>
-            </a:pPr>
-            <a:r>
-              <a:rPr lang="en-US" sz="1600" dirty="0">
-                <a:solidFill>
-                  <a:srgbClr val="000000"/>
-                </a:solidFill>
-              </a:rPr>
-              <a:t>Which one would you want on your team?</a:t>
-            </a:r>
-            <a:endParaRPr lang="en-US" sz="1600" dirty="0"/>
-          </a:p>
-          <a:p>
-            <a:pPr marL="342900" indent="-342900">
-              <a:spcAft>
-                <a:spcPts val="600"/>
-              </a:spcAft>
-              <a:buSzPct val="100000"/>
-              <a:buChar char="•"/>
-            </a:pPr>
-            <a:r>
-              <a:rPr lang="en-US" sz="1600" dirty="0">
-                <a:solidFill>
-                  <a:srgbClr val="000000"/>
-                </a:solidFill>
-              </a:rPr>
-              <a:t>Endpoint-only evaluation cannot tell them apart.</a:t>
-            </a:r>
-            <a:endParaRPr lang="en-US" sz="1600" dirty="0"/>
-          </a:p>
-        </p:txBody>
-      </p:sp>
-    </p:spTree>
-  </p:cSld>
-  <p:clrMapOvr>
-    <a:masterClrMapping/>
-  </p:clrMapOvr>
-</p:sld>
-</file>
-
-<file path=ppt/slides/slide20.xml><?xml version="1.0" encoding="utf-8"?>
-<p:sld xmlns:a="http://schemas.openxmlformats.org/drawingml/2006/main" xmlns:r="http://schemas.openxmlformats.org/officeDocument/2006/relationships" xmlns:p="http://schemas.openxmlformats.org/presentationml/2006/main">
-  <p:cSld name="Slide 20">
-    <p:spTree>
-      <p:nvGrpSpPr>
-        <p:cNvPr id="1" name=""/>
-        <p:cNvGrpSpPr/>
-        <p:nvPr/>
-      </p:nvGrpSpPr>
-      <p:grpSpPr>
-        <a:xfrm>
-          <a:off x="0" y="0"/>
-          <a:ext cx="0" cy="0"/>
-          <a:chOff x="0" y="0"/>
-          <a:chExt cx="0" cy="0"/>
-        </a:xfrm>
-      </p:grpSpPr>
-      <p:sp>
-        <p:nvSpPr>
-          <p:cNvPr id="2" name="Text 0"/>
+        </p:txBody>
+      </p:sp>
+      <p:sp>
+        <p:nvSpPr>
+          <p:cNvPr id="4" name="Text 2"/>
           <p:cNvSpPr/>
           <p:nvPr/>
         </p:nvSpPr>
         <p:spPr>
           <a:xfrm>
-            <a:off x="457200" y="274320"/>
-            <a:ext cx="8229600" cy="640080"/>
+            <a:off x="457200" y="3840480"/>
+            <a:ext cx="8229600" cy="1097280"/>
           </a:xfrm>
           <a:prstGeom prst="rect">
             <a:avLst/>
@@ -5161,42 +4855,6 @@
           <a:ln/>
         </p:spPr>
         <p:txBody>
-          <a:bodyPr wrap="square" lIns="0" tIns="0" rIns="0" bIns="0" rtlCol="0" anchor="ctr"/>
-          <a:lstStyle/>
-          <a:p>
-            <a:pPr indent="0" marL="0">
-              <a:buNone/>
-            </a:pPr>
-            <a:r>
-              <a:rPr lang="en-US" sz="2800" b="1" dirty="0">
-                <a:solidFill>
-                  <a:srgbClr val="000000"/>
-                </a:solidFill>
-              </a:rPr>
-              <a:t>User study: does feedback change behaviour?</a:t>
-            </a:r>
-            <a:endParaRPr lang="en-US" sz="2800" dirty="0"/>
-          </a:p>
-        </p:txBody>
-      </p:sp>
-      <p:sp>
-        <p:nvSpPr>
-          <p:cNvPr id="3" name="Text 1"/>
-          <p:cNvSpPr/>
-          <p:nvPr/>
-        </p:nvSpPr>
-        <p:spPr>
-          <a:xfrm>
-            <a:off x="457200" y="1188720"/>
-            <a:ext cx="8229600" cy="3657600"/>
-          </a:xfrm>
-          <a:prstGeom prst="rect">
-            <a:avLst/>
-          </a:prstGeom>
-          <a:noFill/>
-          <a:ln/>
-        </p:spPr>
-        <p:txBody>
           <a:bodyPr wrap="square" rtlCol="0" anchor="t"/>
           <a:lstStyle/>
           <a:p>
@@ -5213,7 +4871,7 @@
                   <a:srgbClr val="000000"/>
                 </a:solidFill>
               </a:rPr>
-              <a:t>With-feedback group: 2.7 divergence points per session.</a:t>
+              <a:t>Which one would you want on your team?</a:t>
             </a:r>
             <a:endParaRPr lang="en-US" sz="1600" dirty="0"/>
           </a:p>
@@ -5231,331 +4889,7 @@
                   <a:srgbClr val="000000"/>
                 </a:solidFill>
               </a:rPr>
-              <a:t>No-feedback baseline: 6.0 divergence points per session -2.2× difference.</a:t>
-            </a:r>
-            <a:endParaRPr lang="en-US" sz="1600" dirty="0"/>
-          </a:p>
-          <a:p>
-            <a:pPr marL="342900" indent="-342900">
-              <a:spcAft>
-                <a:spcPts val="600"/>
-              </a:spcAft>
-              <a:buSzPct val="100000"/>
-              <a:buChar char="•"/>
-            </a:pPr>
-            <a:r>
-              <a:rPr lang="en-US" sz="1600" dirty="0">
-                <a:solidFill>
-                  <a:srgbClr val="000000"/>
-                </a:solidFill>
-              </a:rPr>
-              <a:t>Gain-stripped process-score slope across the 6-session arc -+4.47 per session with feedback, −0.40 per session without.</a:t>
-            </a:r>
-            <a:endParaRPr lang="en-US" sz="1600" dirty="0"/>
-          </a:p>
-          <a:p>
-            <a:pPr marL="342900" indent="-342900">
-              <a:spcAft>
-                <a:spcPts val="600"/>
-              </a:spcAft>
-              <a:buSzPct val="100000"/>
-              <a:buChar char="•"/>
-            </a:pPr>
-            <a:r>
-              <a:rPr lang="en-US" sz="1600" dirty="0">
-                <a:solidFill>
-                  <a:srgbClr val="000000"/>
-                </a:solidFill>
-              </a:rPr>
-              <a:t>Caveat: n=3 vs n=2 is directional evidence, not a hypothesis test.</a:t>
-            </a:r>
-            <a:endParaRPr lang="en-US" sz="1600" dirty="0"/>
-          </a:p>
-        </p:txBody>
-      </p:sp>
-    </p:spTree>
-  </p:cSld>
-  <p:clrMapOvr>
-    <a:masterClrMapping/>
-  </p:clrMapOvr>
-</p:sld>
-</file>
-
-<file path=ppt/slides/slide21.xml><?xml version="1.0" encoding="utf-8"?>
-<p:sld xmlns:a="http://schemas.openxmlformats.org/drawingml/2006/main" xmlns:r="http://schemas.openxmlformats.org/officeDocument/2006/relationships" xmlns:p="http://schemas.openxmlformats.org/presentationml/2006/main">
-  <p:cSld name="Slide 21">
-    <p:spTree>
-      <p:nvGrpSpPr>
-        <p:cNvPr id="1" name=""/>
-        <p:cNvGrpSpPr/>
-        <p:nvPr/>
-      </p:nvGrpSpPr>
-      <p:grpSpPr>
-        <a:xfrm>
-          <a:off x="0" y="0"/>
-          <a:ext cx="0" cy="0"/>
-          <a:chOff x="0" y="0"/>
-          <a:chExt cx="0" cy="0"/>
-        </a:xfrm>
-      </p:grpSpPr>
-      <p:sp>
-        <p:nvSpPr>
-          <p:cNvPr id="2" name="Text 0"/>
-          <p:cNvSpPr/>
-          <p:nvPr/>
-        </p:nvSpPr>
-        <p:spPr>
-          <a:xfrm>
-            <a:off x="457200" y="274320"/>
-            <a:ext cx="8229600" cy="640080"/>
-          </a:xfrm>
-          <a:prstGeom prst="rect">
-            <a:avLst/>
-          </a:prstGeom>
-          <a:noFill/>
-          <a:ln/>
-        </p:spPr>
-        <p:txBody>
-          <a:bodyPr wrap="square" lIns="0" tIns="0" rIns="0" bIns="0" rtlCol="0" anchor="ctr"/>
-          <a:lstStyle/>
-          <a:p>
-            <a:pPr indent="0" marL="0">
-              <a:buNone/>
-            </a:pPr>
-            <a:r>
-              <a:rPr lang="en-US" sz="2800" b="1" dirty="0">
-                <a:solidFill>
-                  <a:srgbClr val="000000"/>
-                </a:solidFill>
-              </a:rPr>
-              <a:t>Contributions</a:t>
-            </a:r>
-            <a:endParaRPr lang="en-US" sz="2800" dirty="0"/>
-          </a:p>
-        </p:txBody>
-      </p:sp>
-      <p:sp>
-        <p:nvSpPr>
-          <p:cNvPr id="3" name="Text 1"/>
-          <p:cNvSpPr/>
-          <p:nvPr/>
-        </p:nvSpPr>
-        <p:spPr>
-          <a:xfrm>
-            <a:off x="457200" y="1188720"/>
-            <a:ext cx="8229600" cy="3657600"/>
-          </a:xfrm>
-          <a:prstGeom prst="rect">
-            <a:avLst/>
-          </a:prstGeom>
-          <a:noFill/>
-          <a:ln/>
-        </p:spPr>
-        <p:txBody>
-          <a:bodyPr wrap="square" rtlCol="0" anchor="t"/>
-          <a:lstStyle/>
-          <a:p>
-            <a:pPr marL="342900" indent="-342900">
-              <a:spcAft>
-                <a:spcPts val="600"/>
-              </a:spcAft>
-              <a:buSzPct val="100000"/>
-              <a:buChar char="•"/>
-            </a:pPr>
-            <a:r>
-              <a:rPr lang="en-US" sz="1600" dirty="0">
-                <a:solidFill>
-                  <a:srgbClr val="000000"/>
-                </a:solidFill>
-              </a:rPr>
-              <a:t>A process-quality metric J(τ) combining endpoint, process, and safety signals in one principled score.</a:t>
-            </a:r>
-            <a:endParaRPr lang="en-US" sz="1600" dirty="0"/>
-          </a:p>
-          <a:p>
-            <a:pPr marL="342900" indent="-342900">
-              <a:spcAft>
-                <a:spcPts val="600"/>
-              </a:spcAft>
-              <a:buSzPct val="100000"/>
-              <a:buChar char="•"/>
-            </a:pPr>
-            <a:r>
-              <a:rPr lang="en-US" sz="1600" dirty="0">
-                <a:solidFill>
-                  <a:srgbClr val="000000"/>
-                </a:solidFill>
-              </a:rPr>
-              <a:t>A divergence-point detector with four actionable kinds, each with a per-kind synthesiser that constructs a concrete alternative trajectory.</a:t>
-            </a:r>
-            <a:endParaRPr lang="en-US" sz="1600" dirty="0"/>
-          </a:p>
-          <a:p>
-            <a:pPr marL="342900" indent="-342900">
-              <a:spcAft>
-                <a:spcPts val="600"/>
-              </a:spcAft>
-              <a:buSzPct val="100000"/>
-              <a:buChar char="•"/>
-            </a:pPr>
-            <a:r>
-              <a:rPr lang="en-US" sz="1600" dirty="0">
-                <a:solidFill>
-                  <a:srgbClr val="000000"/>
-                </a:solidFill>
-              </a:rPr>
-              <a:t>Three datasets -45 injection sessions, 30-session user study, 48-session agent extension - with reproducible analysis (Jupyter notebook reproduces every table and figure).</a:t>
-            </a:r>
-            <a:endParaRPr lang="en-US" sz="1600" dirty="0"/>
-          </a:p>
-          <a:p>
-            <a:pPr marL="342900" indent="-342900">
-              <a:spcAft>
-                <a:spcPts val="600"/>
-              </a:spcAft>
-              <a:buSzPct val="100000"/>
-              <a:buChar char="•"/>
-            </a:pPr>
-            <a:r>
-              <a:rPr lang="en-US" sz="1600" dirty="0">
-                <a:solidFill>
-                  <a:srgbClr val="000000"/>
-                </a:solidFill>
-              </a:rPr>
-              <a:t>A deployable end-to-end system: IntelliJ plugin, analysis backend, and dashboard.</a:t>
-            </a:r>
-            <a:endParaRPr lang="en-US" sz="1600" dirty="0"/>
-          </a:p>
-        </p:txBody>
-      </p:sp>
-    </p:spTree>
-  </p:cSld>
-  <p:clrMapOvr>
-    <a:masterClrMapping/>
-  </p:clrMapOvr>
-</p:sld>
-</file>
-
-<file path=ppt/slides/slide22.xml><?xml version="1.0" encoding="utf-8"?>
-<p:sld xmlns:a="http://schemas.openxmlformats.org/drawingml/2006/main" xmlns:r="http://schemas.openxmlformats.org/officeDocument/2006/relationships" xmlns:p="http://schemas.openxmlformats.org/presentationml/2006/main">
-  <p:cSld name="Slide 22">
-    <p:spTree>
-      <p:nvGrpSpPr>
-        <p:cNvPr id="1" name=""/>
-        <p:cNvGrpSpPr/>
-        <p:nvPr/>
-      </p:nvGrpSpPr>
-      <p:grpSpPr>
-        <a:xfrm>
-          <a:off x="0" y="0"/>
-          <a:ext cx="0" cy="0"/>
-          <a:chOff x="0" y="0"/>
-          <a:chExt cx="0" cy="0"/>
-        </a:xfrm>
-      </p:grpSpPr>
-      <p:sp>
-        <p:nvSpPr>
-          <p:cNvPr id="2" name="Text 0"/>
-          <p:cNvSpPr/>
-          <p:nvPr/>
-        </p:nvSpPr>
-        <p:spPr>
-          <a:xfrm>
-            <a:off x="457200" y="1645920"/>
-            <a:ext cx="8229600" cy="1371600"/>
-          </a:xfrm>
-          <a:prstGeom prst="rect">
-            <a:avLst/>
-          </a:prstGeom>
-          <a:noFill/>
-          <a:ln/>
-        </p:spPr>
-        <p:txBody>
-          <a:bodyPr wrap="square" lIns="0" tIns="0" rIns="0" bIns="0" rtlCol="0" anchor="ctr"/>
-          <a:lstStyle/>
-          <a:p>
-            <a:pPr algn="ctr" indent="0" marL="0">
-              <a:buNone/>
-            </a:pPr>
-            <a:r>
-              <a:rPr lang="en-US" sz="2600" i="1" dirty="0">
-                <a:solidFill>
-                  <a:srgbClr val="000000"/>
-                </a:solidFill>
-              </a:rPr>
-              <a:t>Refactoring quality isn't just about where you end up - it's about the path you walked to get there.</a:t>
-            </a:r>
-            <a:endParaRPr lang="en-US" sz="2600" dirty="0"/>
-          </a:p>
-        </p:txBody>
-      </p:sp>
-      <p:sp>
-        <p:nvSpPr>
-          <p:cNvPr id="3" name="Text 1"/>
-          <p:cNvSpPr/>
-          <p:nvPr/>
-        </p:nvSpPr>
-        <p:spPr>
-          <a:xfrm>
-            <a:off x="457200" y="3108960"/>
-            <a:ext cx="8229600" cy="731520"/>
-          </a:xfrm>
-          <a:prstGeom prst="rect">
-            <a:avLst/>
-          </a:prstGeom>
-          <a:noFill/>
-          <a:ln/>
-        </p:spPr>
-        <p:txBody>
-          <a:bodyPr wrap="square" rtlCol="0" anchor="ctr"/>
-          <a:lstStyle/>
-          <a:p>
-            <a:pPr algn="ctr" indent="0" marL="0">
-              <a:buNone/>
-            </a:pPr>
-            <a:r>
-              <a:rPr lang="en-US" sz="2200" b="1" dirty="0">
-                <a:solidFill>
-                  <a:srgbClr val="000000"/>
-                </a:solidFill>
-              </a:rPr>
-              <a:t>This work makes that path measurable, comparable, and improvable.</a:t>
-            </a:r>
-            <a:endParaRPr lang="en-US" sz="2200" dirty="0"/>
-          </a:p>
-        </p:txBody>
-      </p:sp>
-      <p:sp>
-        <p:nvSpPr>
-          <p:cNvPr id="4" name="Text 2"/>
-          <p:cNvSpPr/>
-          <p:nvPr/>
-        </p:nvSpPr>
-        <p:spPr>
-          <a:xfrm>
-            <a:off x="457200" y="4206240"/>
-            <a:ext cx="8229600" cy="457200"/>
-          </a:xfrm>
-          <a:prstGeom prst="rect">
-            <a:avLst/>
-          </a:prstGeom>
-          <a:noFill/>
-          <a:ln/>
-        </p:spPr>
-        <p:txBody>
-          <a:bodyPr wrap="square" rtlCol="0" anchor="ctr"/>
-          <a:lstStyle/>
-          <a:p>
-            <a:pPr algn="ctr" indent="0" marL="0">
-              <a:buNone/>
-            </a:pPr>
-            <a:r>
-              <a:rPr lang="en-US" sz="1600" dirty="0">
-                <a:solidFill>
-                  <a:srgbClr val="555555"/>
-                </a:solidFill>
-              </a:rPr>
-              <a:t>Thank you - happy to take questions.</a:t>
+              <a:t>Endpoint-only evaluation cannot tell them apart.</a:t>
             </a:r>
             <a:endParaRPr lang="en-US" sz="1600" dirty="0"/>
           </a:p>
@@ -6038,8 +5372,8 @@
         </p:nvSpPr>
         <p:spPr>
           <a:xfrm>
-            <a:off x="457200" y="274320"/>
-            <a:ext cx="8229600" cy="640080"/>
+            <a:off x="457200" y="2011680"/>
+            <a:ext cx="8229600" cy="1097280"/>
           </a:xfrm>
           <a:prstGeom prst="rect">
             <a:avLst/>
@@ -6051,139 +5385,21 @@
           <a:bodyPr wrap="square" lIns="0" tIns="0" rIns="0" bIns="0" rtlCol="0" anchor="ctr"/>
           <a:lstStyle/>
           <a:p>
-            <a:pPr indent="0" marL="0">
+            <a:pPr algn="ctr" indent="0" marL="0">
               <a:buNone/>
             </a:pPr>
             <a:r>
-              <a:rPr lang="en-US" sz="2800" b="1" dirty="0">
-                <a:solidFill>
-                  <a:srgbClr val="000000"/>
-                </a:solidFill>
-              </a:rPr>
-              <a:t>Desired outcome: a comparable counterfactual</a:t>
-            </a:r>
-            <a:endParaRPr lang="en-US" sz="2800" dirty="0"/>
-          </a:p>
-        </p:txBody>
-      </p:sp>
-      <p:sp>
-        <p:nvSpPr>
-          <p:cNvPr id="3" name="Text 1"/>
-          <p:cNvSpPr/>
-          <p:nvPr/>
-        </p:nvSpPr>
-        <p:spPr>
-          <a:xfrm>
-            <a:off x="457200" y="1097280"/>
-            <a:ext cx="8229600" cy="1463040"/>
-          </a:xfrm>
-          <a:prstGeom prst="rect">
-            <a:avLst/>
-          </a:prstGeom>
-          <a:noFill/>
-          <a:ln/>
-        </p:spPr>
-        <p:txBody>
-          <a:bodyPr wrap="square" rtlCol="0" anchor="t"/>
-          <a:lstStyle/>
-          <a:p>
-            <a:pPr marL="342900" indent="-342900">
-              <a:spcAft>
-                <a:spcPts val="600"/>
-              </a:spcAft>
-              <a:buSzPct val="100000"/>
-              <a:buChar char="•"/>
-            </a:pPr>
-            <a:r>
-              <a:rPr lang="en-US" sz="1600" dirty="0">
-                <a:solidFill>
-                  <a:srgbClr val="000000"/>
-                </a:solidFill>
-              </a:rPr>
-              <a:t>Given those four requirements, the concrete thing we wanted the tool to produce, for any recorded session:</a:t>
-            </a:r>
-            <a:endParaRPr lang="en-US" sz="1600" dirty="0"/>
-          </a:p>
-          <a:p>
-            <a:pPr marL="342900" indent="-342900">
-              <a:spcAft>
-                <a:spcPts val="600"/>
-              </a:spcAft>
-              <a:buSzPct val="100000"/>
-              <a:buChar char="•"/>
-            </a:pPr>
-            <a:r>
-              <a:rPr lang="en-US" sz="1600" dirty="0">
-                <a:solidFill>
-                  <a:srgbClr val="000000"/>
-                </a:solidFill>
-              </a:rPr>
-              <a:t>Solid line - the user's actual trajectory through code states.</a:t>
-            </a:r>
-            <a:endParaRPr lang="en-US" sz="1600" dirty="0"/>
-          </a:p>
-          <a:p>
-            <a:pPr marL="342900" indent="-342900">
-              <a:spcAft>
-                <a:spcPts val="600"/>
-              </a:spcAft>
-              <a:buSzPct val="100000"/>
-              <a:buChar char="•"/>
-            </a:pPr>
-            <a:r>
-              <a:rPr lang="en-US" sz="1600" dirty="0">
-                <a:solidFill>
-                  <a:srgbClr val="000000"/>
-                </a:solidFill>
-              </a:rPr>
-              <a:t>Dashed line - synthesised alternative; same start, same finish, measurably higher J(τ).</a:t>
-            </a:r>
-            <a:endParaRPr lang="en-US" sz="1600" dirty="0"/>
-          </a:p>
-          <a:p>
-            <a:pPr marL="342900" indent="-342900">
-              <a:spcAft>
-                <a:spcPts val="600"/>
-              </a:spcAft>
-              <a:buSzPct val="100000"/>
-              <a:buChar char="•"/>
-            </a:pPr>
-            <a:r>
-              <a:rPr lang="en-US" sz="1600" dirty="0">
-                <a:solidFill>
-                  <a:srgbClr val="000000"/>
-                </a:solidFill>
-              </a:rPr>
-              <a:t>Divergence point marks where the two paths split; ΔJ quantifies the gap.</a:t>
-            </a:r>
-            <a:endParaRPr lang="en-US" sz="1600" dirty="0"/>
-          </a:p>
-        </p:txBody>
-      </p:sp>
-      <p:pic>
-        <p:nvPicPr>
-          <p:cNvPr id="4" name="Image 0" descr="images/divergence-point.png">    </p:cNvPr>
-          <p:cNvPicPr>
-            <a:picLocks noChangeAspect="1"/>
-          </p:cNvPicPr>
-          <p:nvPr/>
-        </p:nvPicPr>
-        <p:blipFill>
-          <a:blip r:embed="rId1"/>
-          <a:stretch>
-            <a:fillRect/>
-          </a:stretch>
-        </p:blipFill>
-        <p:spPr>
-          <a:xfrm>
-            <a:off x="2651760" y="2697480"/>
-            <a:ext cx="3840480" cy="2276856"/>
-          </a:xfrm>
-          <a:prstGeom prst="rect">
-            <a:avLst/>
-          </a:prstGeom>
-        </p:spPr>
-      </p:pic>
+              <a:rPr lang="en-US" sz="8000" b="1" dirty="0">
+                <a:solidFill>
+                  <a:srgbClr val="000000"/>
+                </a:solidFill>
+              </a:rPr>
+              <a:t>Demo</a:t>
+            </a:r>
+            <a:endParaRPr lang="en-US" sz="8000" dirty="0"/>
+          </a:p>
+        </p:txBody>
+      </p:sp>
     </p:spTree>
   </p:cSld>
   <p:clrMapOvr>
@@ -6217,8 +5433,8 @@
         </p:nvSpPr>
         <p:spPr>
           <a:xfrm>
-            <a:off x="457200" y="1828800"/>
-            <a:ext cx="8229600" cy="914400"/>
+            <a:off x="457200" y="274320"/>
+            <a:ext cx="8229600" cy="640080"/>
           </a:xfrm>
           <a:prstGeom prst="rect">
             <a:avLst/>
@@ -6230,31 +5446,56 @@
           <a:bodyPr wrap="square" lIns="0" tIns="0" rIns="0" bIns="0" rtlCol="0" anchor="ctr"/>
           <a:lstStyle/>
           <a:p>
-            <a:pPr algn="ctr" indent="0" marL="0">
+            <a:pPr indent="0" marL="0">
               <a:buNone/>
             </a:pPr>
             <a:r>
-              <a:rPr lang="en-US" sz="4400" b="1" dirty="0">
-                <a:solidFill>
-                  <a:srgbClr val="000000"/>
-                </a:solidFill>
-              </a:rPr>
-              <a:t>Demo (part 1): live capture</a:t>
-            </a:r>
-            <a:endParaRPr lang="en-US" sz="4400" dirty="0"/>
-          </a:p>
-        </p:txBody>
-      </p:sp>
-      <p:sp>
-        <p:nvSpPr>
-          <p:cNvPr id="3" name="Text 1"/>
+              <a:rPr lang="en-US" sz="2800" b="1" dirty="0">
+                <a:solidFill>
+                  <a:srgbClr val="000000"/>
+                </a:solidFill>
+              </a:rPr>
+              <a:t>What the tool does, end to end</a:t>
+            </a:r>
+            <a:endParaRPr lang="en-US" sz="2800" dirty="0"/>
+          </a:p>
+        </p:txBody>
+      </p:sp>
+      <p:sp>
+        <p:nvSpPr>
+          <p:cNvPr id="3" name="Shape 1"/>
           <p:cNvSpPr/>
           <p:nvPr/>
         </p:nvSpPr>
         <p:spPr>
           <a:xfrm>
-            <a:off x="457200" y="2834640"/>
-            <a:ext cx="8229600" cy="1097280"/>
+            <a:off x="182880" y="1463040"/>
+            <a:ext cx="2377440" cy="2377440"/>
+          </a:xfrm>
+          <a:prstGeom prst="rect">
+            <a:avLst/>
+          </a:prstGeom>
+          <a:solidFill>
+            <a:srgbClr val="FFFFFF"/>
+          </a:solidFill>
+          <a:ln w="12700">
+            <a:solidFill>
+              <a:srgbClr val="000000"/>
+            </a:solidFill>
+            <a:prstDash val="solid"/>
+          </a:ln>
+        </p:spPr>
+      </p:sp>
+      <p:sp>
+        <p:nvSpPr>
+          <p:cNvPr id="4" name="Text 2"/>
+          <p:cNvSpPr/>
+          <p:nvPr/>
+        </p:nvSpPr>
+        <p:spPr>
+          <a:xfrm>
+            <a:off x="274320" y="1645920"/>
+            <a:ext cx="2194560" cy="457200"/>
           </a:xfrm>
           <a:prstGeom prst="rect">
             <a:avLst/>
@@ -6263,21 +5504,538 @@
           <a:ln/>
         </p:spPr>
         <p:txBody>
-          <a:bodyPr wrap="square" rtlCol="0" anchor="ctr"/>
+          <a:bodyPr wrap="square" lIns="0" tIns="0" rIns="0" bIns="0" rtlCol="0" anchor="ctr"/>
           <a:lstStyle/>
           <a:p>
             <a:pPr algn="ctr" indent="0" marL="0">
               <a:buNone/>
             </a:pPr>
             <a:r>
-              <a:rPr lang="en-US" sz="1800" i="1" dirty="0">
+              <a:rPr lang="en-US" sz="1600" b="1" dirty="0">
+                <a:solidFill>
+                  <a:srgbClr val="000000"/>
+                </a:solidFill>
+              </a:rPr>
+              <a:t>IntelliJ Plugin</a:t>
+            </a:r>
+            <a:endParaRPr lang="en-US" sz="1600" dirty="0"/>
+          </a:p>
+        </p:txBody>
+      </p:sp>
+      <p:sp>
+        <p:nvSpPr>
+          <p:cNvPr id="5" name="Shape 3"/>
+          <p:cNvSpPr/>
+          <p:nvPr/>
+        </p:nvSpPr>
+        <p:spPr>
+          <a:xfrm>
+            <a:off x="457200" y="2194560"/>
+            <a:ext cx="1828800" cy="0"/>
+          </a:xfrm>
+          <a:prstGeom prst="line">
+            <a:avLst/>
+          </a:prstGeom>
+          <a:noFill/>
+          <a:ln w="9525">
+            <a:solidFill>
+              <a:srgbClr val="999999"/>
+            </a:solidFill>
+            <a:prstDash val="solid"/>
+          </a:ln>
+        </p:spPr>
+      </p:sp>
+      <p:sp>
+        <p:nvSpPr>
+          <p:cNvPr id="6" name="Text 4"/>
+          <p:cNvSpPr/>
+          <p:nvPr/>
+        </p:nvSpPr>
+        <p:spPr>
+          <a:xfrm>
+            <a:off x="411480" y="2377440"/>
+            <a:ext cx="2011680" cy="1371600"/>
+          </a:xfrm>
+          <a:prstGeom prst="rect">
+            <a:avLst/>
+          </a:prstGeom>
+          <a:noFill/>
+          <a:ln/>
+        </p:spPr>
+        <p:txBody>
+          <a:bodyPr wrap="square" rtlCol="0" anchor="t"/>
+          <a:lstStyle/>
+          <a:p>
+            <a:pPr marL="342900" indent="-342900">
+              <a:spcAft>
+                <a:spcPts val="800"/>
+              </a:spcAft>
+              <a:buSzPct val="100000"/>
+              <a:buChar char="•"/>
+            </a:pPr>
+            <a:r>
+              <a:rPr lang="en-US" sz="1200" dirty="0">
+                <a:solidFill>
+                  <a:srgbClr val="333333"/>
+                </a:solidFill>
+              </a:rPr>
+              <a:t>Records developer events</a:t>
+            </a:r>
+            <a:endParaRPr lang="en-US" sz="1200" dirty="0"/>
+          </a:p>
+          <a:p>
+            <a:pPr marL="342900" indent="-342900">
+              <a:spcAft>
+                <a:spcPts val="800"/>
+              </a:spcAft>
+              <a:buSzPct val="100000"/>
+              <a:buChar char="•"/>
+            </a:pPr>
+            <a:r>
+              <a:rPr lang="en-US" sz="1200" dirty="0">
+                <a:solidFill>
+                  <a:srgbClr val="333333"/>
+                </a:solidFill>
+              </a:rPr>
+              <a:t>Captures initial codebase</a:t>
+            </a:r>
+            <a:endParaRPr lang="en-US" sz="1200" dirty="0"/>
+          </a:p>
+        </p:txBody>
+      </p:sp>
+      <p:sp>
+        <p:nvSpPr>
+          <p:cNvPr id="7" name="Shape 5"/>
+          <p:cNvSpPr/>
+          <p:nvPr/>
+        </p:nvSpPr>
+        <p:spPr>
+          <a:xfrm>
+            <a:off x="3383280" y="1463040"/>
+            <a:ext cx="2377440" cy="2377440"/>
+          </a:xfrm>
+          <a:prstGeom prst="rect">
+            <a:avLst/>
+          </a:prstGeom>
+          <a:solidFill>
+            <a:srgbClr val="FFFFFF"/>
+          </a:solidFill>
+          <a:ln w="12700">
+            <a:solidFill>
+              <a:srgbClr val="000000"/>
+            </a:solidFill>
+            <a:prstDash val="solid"/>
+          </a:ln>
+        </p:spPr>
+      </p:sp>
+      <p:sp>
+        <p:nvSpPr>
+          <p:cNvPr id="8" name="Text 6"/>
+          <p:cNvSpPr/>
+          <p:nvPr/>
+        </p:nvSpPr>
+        <p:spPr>
+          <a:xfrm>
+            <a:off x="3474720" y="1645920"/>
+            <a:ext cx="2194560" cy="457200"/>
+          </a:xfrm>
+          <a:prstGeom prst="rect">
+            <a:avLst/>
+          </a:prstGeom>
+          <a:noFill/>
+          <a:ln/>
+        </p:spPr>
+        <p:txBody>
+          <a:bodyPr wrap="square" lIns="0" tIns="0" rIns="0" bIns="0" rtlCol="0" anchor="ctr"/>
+          <a:lstStyle/>
+          <a:p>
+            <a:pPr algn="ctr" indent="0" marL="0">
+              <a:buNone/>
+            </a:pPr>
+            <a:r>
+              <a:rPr lang="en-US" sz="1600" b="1" dirty="0">
+                <a:solidFill>
+                  <a:srgbClr val="000000"/>
+                </a:solidFill>
+              </a:rPr>
+              <a:t>Analysis Backend</a:t>
+            </a:r>
+            <a:endParaRPr lang="en-US" sz="1600" dirty="0"/>
+          </a:p>
+        </p:txBody>
+      </p:sp>
+      <p:sp>
+        <p:nvSpPr>
+          <p:cNvPr id="9" name="Shape 7"/>
+          <p:cNvSpPr/>
+          <p:nvPr/>
+        </p:nvSpPr>
+        <p:spPr>
+          <a:xfrm>
+            <a:off x="3657600" y="2194560"/>
+            <a:ext cx="1828800" cy="0"/>
+          </a:xfrm>
+          <a:prstGeom prst="line">
+            <a:avLst/>
+          </a:prstGeom>
+          <a:noFill/>
+          <a:ln w="9525">
+            <a:solidFill>
+              <a:srgbClr val="999999"/>
+            </a:solidFill>
+            <a:prstDash val="solid"/>
+          </a:ln>
+        </p:spPr>
+      </p:sp>
+      <p:sp>
+        <p:nvSpPr>
+          <p:cNvPr id="10" name="Text 8"/>
+          <p:cNvSpPr/>
+          <p:nvPr/>
+        </p:nvSpPr>
+        <p:spPr>
+          <a:xfrm>
+            <a:off x="3611880" y="2377440"/>
+            <a:ext cx="2011680" cy="1371600"/>
+          </a:xfrm>
+          <a:prstGeom prst="rect">
+            <a:avLst/>
+          </a:prstGeom>
+          <a:noFill/>
+          <a:ln/>
+        </p:spPr>
+        <p:txBody>
+          <a:bodyPr wrap="square" rtlCol="0" anchor="t"/>
+          <a:lstStyle/>
+          <a:p>
+            <a:pPr marL="342900" indent="-342900">
+              <a:spcAft>
+                <a:spcPts val="800"/>
+              </a:spcAft>
+              <a:buSzPct val="100000"/>
+              <a:buChar char="•"/>
+            </a:pPr>
+            <a:r>
+              <a:rPr lang="en-US" sz="1200" dirty="0">
+                <a:solidFill>
+                  <a:srgbClr val="333333"/>
+                </a:solidFill>
+              </a:rPr>
+              <a:t>Shadow repo reconstruction</a:t>
+            </a:r>
+            <a:endParaRPr lang="en-US" sz="1200" dirty="0"/>
+          </a:p>
+          <a:p>
+            <a:pPr marL="342900" indent="-342900">
+              <a:spcAft>
+                <a:spcPts val="800"/>
+              </a:spcAft>
+              <a:buSzPct val="100000"/>
+              <a:buChar char="•"/>
+            </a:pPr>
+            <a:r>
+              <a:rPr lang="en-US" sz="1200" dirty="0">
+                <a:solidFill>
+                  <a:srgbClr val="333333"/>
+                </a:solidFill>
+              </a:rPr>
+              <a:t>Metric calculation</a:t>
+            </a:r>
+            <a:endParaRPr lang="en-US" sz="1200" dirty="0"/>
+          </a:p>
+          <a:p>
+            <a:pPr marL="342900" indent="-342900">
+              <a:spcAft>
+                <a:spcPts val="800"/>
+              </a:spcAft>
+              <a:buSzPct val="100000"/>
+              <a:buChar char="•"/>
+            </a:pPr>
+            <a:r>
+              <a:rPr lang="en-US" sz="1200" dirty="0">
+                <a:solidFill>
+                  <a:srgbClr val="333333"/>
+                </a:solidFill>
+              </a:rPr>
+              <a:t>Divergence detection &amp; synthesis</a:t>
+            </a:r>
+            <a:endParaRPr lang="en-US" sz="1200" dirty="0"/>
+          </a:p>
+        </p:txBody>
+      </p:sp>
+      <p:sp>
+        <p:nvSpPr>
+          <p:cNvPr id="11" name="Shape 9"/>
+          <p:cNvSpPr/>
+          <p:nvPr/>
+        </p:nvSpPr>
+        <p:spPr>
+          <a:xfrm>
+            <a:off x="6583680" y="1463040"/>
+            <a:ext cx="2377440" cy="2377440"/>
+          </a:xfrm>
+          <a:prstGeom prst="rect">
+            <a:avLst/>
+          </a:prstGeom>
+          <a:solidFill>
+            <a:srgbClr val="FFFFFF"/>
+          </a:solidFill>
+          <a:ln w="12700">
+            <a:solidFill>
+              <a:srgbClr val="000000"/>
+            </a:solidFill>
+            <a:prstDash val="solid"/>
+          </a:ln>
+        </p:spPr>
+      </p:sp>
+      <p:sp>
+        <p:nvSpPr>
+          <p:cNvPr id="12" name="Text 10"/>
+          <p:cNvSpPr/>
+          <p:nvPr/>
+        </p:nvSpPr>
+        <p:spPr>
+          <a:xfrm>
+            <a:off x="6675120" y="1645920"/>
+            <a:ext cx="2194560" cy="457200"/>
+          </a:xfrm>
+          <a:prstGeom prst="rect">
+            <a:avLst/>
+          </a:prstGeom>
+          <a:noFill/>
+          <a:ln/>
+        </p:spPr>
+        <p:txBody>
+          <a:bodyPr wrap="square" lIns="0" tIns="0" rIns="0" bIns="0" rtlCol="0" anchor="ctr"/>
+          <a:lstStyle/>
+          <a:p>
+            <a:pPr algn="ctr" indent="0" marL="0">
+              <a:buNone/>
+            </a:pPr>
+            <a:r>
+              <a:rPr lang="en-US" sz="1600" b="1" dirty="0">
+                <a:solidFill>
+                  <a:srgbClr val="000000"/>
+                </a:solidFill>
+              </a:rPr>
+              <a:t>Dashboard</a:t>
+            </a:r>
+            <a:endParaRPr lang="en-US" sz="1600" dirty="0"/>
+          </a:p>
+        </p:txBody>
+      </p:sp>
+      <p:sp>
+        <p:nvSpPr>
+          <p:cNvPr id="13" name="Shape 11"/>
+          <p:cNvSpPr/>
+          <p:nvPr/>
+        </p:nvSpPr>
+        <p:spPr>
+          <a:xfrm>
+            <a:off x="6858000" y="2194560"/>
+            <a:ext cx="1828800" cy="0"/>
+          </a:xfrm>
+          <a:prstGeom prst="line">
+            <a:avLst/>
+          </a:prstGeom>
+          <a:noFill/>
+          <a:ln w="9525">
+            <a:solidFill>
+              <a:srgbClr val="999999"/>
+            </a:solidFill>
+            <a:prstDash val="solid"/>
+          </a:ln>
+        </p:spPr>
+      </p:sp>
+      <p:sp>
+        <p:nvSpPr>
+          <p:cNvPr id="14" name="Text 12"/>
+          <p:cNvSpPr/>
+          <p:nvPr/>
+        </p:nvSpPr>
+        <p:spPr>
+          <a:xfrm>
+            <a:off x="6812280" y="2377440"/>
+            <a:ext cx="2011680" cy="1371600"/>
+          </a:xfrm>
+          <a:prstGeom prst="rect">
+            <a:avLst/>
+          </a:prstGeom>
+          <a:noFill/>
+          <a:ln/>
+        </p:spPr>
+        <p:txBody>
+          <a:bodyPr wrap="square" rtlCol="0" anchor="t"/>
+          <a:lstStyle/>
+          <a:p>
+            <a:pPr marL="342900" indent="-342900">
+              <a:spcAft>
+                <a:spcPts val="800"/>
+              </a:spcAft>
+              <a:buSzPct val="100000"/>
+              <a:buChar char="•"/>
+            </a:pPr>
+            <a:r>
+              <a:rPr lang="en-US" sz="1200" dirty="0">
+                <a:solidFill>
+                  <a:srgbClr val="333333"/>
+                </a:solidFill>
+              </a:rPr>
+              <a:t>Surfaces divergence points in context</a:t>
+            </a:r>
+            <a:endParaRPr lang="en-US" sz="1200" dirty="0"/>
+          </a:p>
+          <a:p>
+            <a:pPr marL="342900" indent="-342900">
+              <a:spcAft>
+                <a:spcPts val="800"/>
+              </a:spcAft>
+              <a:buSzPct val="100000"/>
+              <a:buChar char="•"/>
+            </a:pPr>
+            <a:r>
+              <a:rPr lang="en-US" sz="1200" dirty="0">
+                <a:solidFill>
+                  <a:srgbClr val="333333"/>
+                </a:solidFill>
+              </a:rPr>
+              <a:t>Explains alternative paths</a:t>
+            </a:r>
+            <a:endParaRPr lang="en-US" sz="1200" dirty="0"/>
+          </a:p>
+        </p:txBody>
+      </p:sp>
+      <p:sp>
+        <p:nvSpPr>
+          <p:cNvPr id="15" name="Shape 13"/>
+          <p:cNvSpPr/>
+          <p:nvPr/>
+        </p:nvSpPr>
+        <p:spPr>
+          <a:xfrm>
+            <a:off x="2560320" y="2651760"/>
+            <a:ext cx="822960" cy="0"/>
+          </a:xfrm>
+          <a:prstGeom prst="line">
+            <a:avLst/>
+          </a:prstGeom>
+          <a:noFill/>
+          <a:ln w="19050">
+            <a:solidFill>
+              <a:srgbClr val="000000"/>
+            </a:solidFill>
+            <a:prstDash val="solid"/>
+            <a:tailEnd type="triangle"/>
+          </a:ln>
+        </p:spPr>
+      </p:sp>
+      <p:sp>
+        <p:nvSpPr>
+          <p:cNvPr id="16" name="Text 14"/>
+          <p:cNvSpPr/>
+          <p:nvPr/>
+        </p:nvSpPr>
+        <p:spPr>
+          <a:xfrm>
+            <a:off x="2514600" y="2148840"/>
+            <a:ext cx="914400" cy="457200"/>
+          </a:xfrm>
+          <a:prstGeom prst="rect">
+            <a:avLst/>
+          </a:prstGeom>
+          <a:noFill/>
+          <a:ln/>
+        </p:spPr>
+        <p:txBody>
+          <a:bodyPr wrap="square" lIns="0" tIns="0" rIns="0" bIns="0" rtlCol="0" anchor="b"/>
+          <a:lstStyle/>
+          <a:p>
+            <a:pPr algn="ctr" indent="0" marL="0">
+              <a:buNone/>
+            </a:pPr>
+            <a:r>
+              <a:rPr lang="en-US" sz="900" i="1" dirty="0">
                 <a:solidFill>
                   <a:srgbClr val="555555"/>
                 </a:solidFill>
               </a:rPr>
-              <a:t>I'll start a short live refactoring session. The tool will analyse it in the background while we walk through the methodology.</a:t>
-            </a:r>
-            <a:endParaRPr lang="en-US" sz="1800" dirty="0"/>
+              <a:t>events.jsonl + initial-src/</a:t>
+            </a:r>
+            <a:endParaRPr lang="en-US" sz="900" dirty="0"/>
+          </a:p>
+        </p:txBody>
+      </p:sp>
+      <p:sp>
+        <p:nvSpPr>
+          <p:cNvPr id="17" name="Shape 15"/>
+          <p:cNvSpPr/>
+          <p:nvPr/>
+        </p:nvSpPr>
+        <p:spPr>
+          <a:xfrm>
+            <a:off x="5760720" y="2651760"/>
+            <a:ext cx="822960" cy="0"/>
+          </a:xfrm>
+          <a:prstGeom prst="line">
+            <a:avLst/>
+          </a:prstGeom>
+          <a:noFill/>
+          <a:ln w="19050">
+            <a:solidFill>
+              <a:srgbClr val="000000"/>
+            </a:solidFill>
+            <a:prstDash val="solid"/>
+            <a:tailEnd type="triangle"/>
+          </a:ln>
+        </p:spPr>
+      </p:sp>
+      <p:sp>
+        <p:nvSpPr>
+          <p:cNvPr id="18" name="Text 16"/>
+          <p:cNvSpPr/>
+          <p:nvPr/>
+        </p:nvSpPr>
+        <p:spPr>
+          <a:xfrm>
+            <a:off x="5715000" y="2148840"/>
+            <a:ext cx="914400" cy="457200"/>
+          </a:xfrm>
+          <a:prstGeom prst="rect">
+            <a:avLst/>
+          </a:prstGeom>
+          <a:noFill/>
+          <a:ln/>
+        </p:spPr>
+        <p:txBody>
+          <a:bodyPr wrap="square" lIns="0" tIns="0" rIns="0" bIns="0" rtlCol="0" anchor="b"/>
+          <a:lstStyle/>
+          <a:p>
+            <a:pPr algn="ctr" indent="0" marL="0">
+              <a:buNone/>
+            </a:pPr>
+            <a:r>
+              <a:rPr lang="en-US" sz="900" i="1" dirty="0">
+                <a:solidFill>
+                  <a:srgbClr val="555555"/>
+                </a:solidFill>
+              </a:rPr>
+              <a:t>analysis</a:t>
+            </a:r>
+            <a:endParaRPr lang="en-US" sz="900" dirty="0"/>
+          </a:p>
+          <a:p>
+            <a:pPr algn="ctr" indent="0" marL="0">
+              <a:buNone/>
+            </a:pPr>
+            <a:r>
+              <a:rPr lang="en-US" sz="900" i="1" dirty="0">
+                <a:solidFill>
+                  <a:srgbClr val="555555"/>
+                </a:solidFill>
+              </a:rPr>
+              <a:t>-report.json</a:t>
+            </a:r>
+            <a:endParaRPr lang="en-US" sz="900" dirty="0"/>
           </a:p>
         </p:txBody>
       </p:sp>
@@ -6336,7 +6094,7 @@
                   <a:srgbClr val="000000"/>
                 </a:solidFill>
               </a:rPr>
-              <a:t>What the tool does, end to end</a:t>
+              <a:t>Four kinds of divergence</a:t>
             </a:r>
             <a:endParaRPr lang="en-US" sz="2800" dirty="0"/>
           </a:p>
@@ -6350,8 +6108,8 @@
         </p:nvSpPr>
         <p:spPr>
           <a:xfrm>
-            <a:off x="457200" y="1097280"/>
-            <a:ext cx="8229600" cy="1554480"/>
+            <a:off x="457200" y="1371600"/>
+            <a:ext cx="8229600" cy="3200400"/>
           </a:xfrm>
           <a:prstGeom prst="rect">
             <a:avLst/>
@@ -6365,620 +6123,130 @@
           <a:p>
             <a:pPr marL="342900" indent="-342900">
               <a:spcAft>
-                <a:spcPts val="600"/>
+                <a:spcPts val="1000"/>
               </a:spcAft>
               <a:buSzPct val="100000"/>
               <a:buChar char="•"/>
             </a:pPr>
             <a:r>
-              <a:rPr lang="en-US" sz="1600" dirty="0">
-                <a:solidFill>
-                  <a:srgbClr val="000000"/>
-                </a:solidFill>
-              </a:rPr>
-              <a:t>IntelliJ plugin: records every edit, refactoring, build, test, and commit during a session.</a:t>
-            </a:r>
-            <a:endParaRPr lang="en-US" sz="1600" dirty="0"/>
+              <a:rPr lang="en-US" sz="1800" dirty="0">
+                <a:solidFill>
+                  <a:srgbClr val="000000"/>
+                </a:solidFill>
+              </a:rPr>
+              <a:t>Ordering </a:t>
+            </a:r>
+            <a:pPr indent="0" marL="0">
+              <a:spcAft>
+                <a:spcPts val="1000"/>
+              </a:spcAft>
+              <a:buNone/>
+            </a:pPr>
+            <a:r>
+              <a:rPr lang="en-US" sz="1800" dirty="0">
+                <a:solidFill>
+                  <a:srgbClr val="888888"/>
+                </a:solidFill>
+              </a:rPr>
+              <a:t>- right refactorings, wrong sequence.</a:t>
+            </a:r>
+            <a:endParaRPr lang="en-US" sz="1800" dirty="0"/>
           </a:p>
           <a:p>
             <a:pPr marL="342900" indent="-342900">
               <a:spcAft>
-                <a:spcPts val="600"/>
+                <a:spcPts val="1000"/>
               </a:spcAft>
               <a:buSzPct val="100000"/>
               <a:buChar char="•"/>
             </a:pPr>
             <a:r>
-              <a:rPr lang="en-US" sz="1600" dirty="0">
-                <a:solidFill>
-                  <a:srgbClr val="000000"/>
-                </a:solidFill>
-              </a:rPr>
-              <a:t>Analysis backend: reconstructs the trajectory, scores it, and detects divergence points.</a:t>
-            </a:r>
-            <a:endParaRPr lang="en-US" sz="1600" dirty="0"/>
+              <a:rPr lang="en-US" sz="1800" dirty="0">
+                <a:solidFill>
+                  <a:srgbClr val="000000"/>
+                </a:solidFill>
+              </a:rPr>
+              <a:t>Manual-Refactor </a:t>
+            </a:r>
+            <a:pPr indent="0" marL="0">
+              <a:spcAft>
+                <a:spcPts val="1000"/>
+              </a:spcAft>
+              <a:buNone/>
+            </a:pPr>
+            <a:r>
+              <a:rPr lang="en-US" sz="1800" dirty="0">
+                <a:solidFill>
+                  <a:srgbClr val="888888"/>
+                </a:solidFill>
+              </a:rPr>
+              <a:t>- unnecessary risk (hand-edit when the IDE could have safely done it).</a:t>
+            </a:r>
+            <a:endParaRPr lang="en-US" sz="1800" dirty="0"/>
           </a:p>
           <a:p>
             <a:pPr marL="342900" indent="-342900">
               <a:spcAft>
-                <a:spcPts val="600"/>
+                <a:spcPts val="1000"/>
               </a:spcAft>
               <a:buSzPct val="100000"/>
               <a:buChar char="•"/>
             </a:pPr>
             <a:r>
-              <a:rPr lang="en-US" sz="1600" dirty="0">
-                <a:solidFill>
-                  <a:srgbClr val="000000"/>
-                </a:solidFill>
-              </a:rPr>
-              <a:t>Dashboard: surfaces where you diverged, an alternative path, how much better it scores, and why.</a:t>
-            </a:r>
-            <a:endParaRPr lang="en-US" sz="1600" dirty="0"/>
-          </a:p>
-        </p:txBody>
-      </p:sp>
-      <p:sp>
-        <p:nvSpPr>
-          <p:cNvPr id="4" name="Shape 2"/>
-          <p:cNvSpPr/>
-          <p:nvPr/>
-        </p:nvSpPr>
-        <p:spPr>
-          <a:xfrm>
-            <a:off x="182880" y="2788920"/>
-            <a:ext cx="2377440" cy="2103120"/>
-          </a:xfrm>
-          <a:prstGeom prst="rect">
-            <a:avLst/>
-          </a:prstGeom>
-          <a:solidFill>
-            <a:srgbClr val="FFFFFF"/>
-          </a:solidFill>
-          <a:ln w="12700">
-            <a:solidFill>
-              <a:srgbClr val="000000"/>
-            </a:solidFill>
-            <a:prstDash val="solid"/>
-          </a:ln>
-        </p:spPr>
-      </p:sp>
-      <p:sp>
-        <p:nvSpPr>
-          <p:cNvPr id="5" name="Text 3"/>
-          <p:cNvSpPr/>
-          <p:nvPr/>
-        </p:nvSpPr>
-        <p:spPr>
-          <a:xfrm>
-            <a:off x="274320" y="2971800"/>
-            <a:ext cx="2194560" cy="457200"/>
-          </a:xfrm>
-          <a:prstGeom prst="rect">
-            <a:avLst/>
-          </a:prstGeom>
-          <a:noFill/>
-          <a:ln/>
-        </p:spPr>
-        <p:txBody>
-          <a:bodyPr wrap="square" lIns="0" tIns="0" rIns="0" bIns="0" rtlCol="0" anchor="ctr"/>
-          <a:lstStyle/>
-          <a:p>
-            <a:pPr algn="ctr" indent="0" marL="0">
+              <a:rPr lang="en-US" sz="1800" dirty="0">
+                <a:solidFill>
+                  <a:srgbClr val="000000"/>
+                </a:solidFill>
+              </a:rPr>
+              <a:t>Rework </a:t>
+            </a:r>
+            <a:pPr indent="0" marL="0">
+              <a:spcAft>
+                <a:spcPts val="1000"/>
+              </a:spcAft>
               <a:buNone/>
             </a:pPr>
             <a:r>
-              <a:rPr lang="en-US" sz="1600" b="1" dirty="0">
-                <a:solidFill>
-                  <a:srgbClr val="000000"/>
-                </a:solidFill>
-              </a:rPr>
-              <a:t>IntelliJ Plugin</a:t>
-            </a:r>
-            <a:endParaRPr lang="en-US" sz="1600" dirty="0"/>
-          </a:p>
-        </p:txBody>
-      </p:sp>
-      <p:sp>
-        <p:nvSpPr>
-          <p:cNvPr id="6" name="Shape 4"/>
-          <p:cNvSpPr/>
-          <p:nvPr/>
-        </p:nvSpPr>
-        <p:spPr>
-          <a:xfrm>
-            <a:off x="457200" y="3520440"/>
-            <a:ext cx="1828800" cy="0"/>
-          </a:xfrm>
-          <a:prstGeom prst="line">
-            <a:avLst/>
-          </a:prstGeom>
-          <a:noFill/>
-          <a:ln w="9525">
-            <a:solidFill>
-              <a:srgbClr val="999999"/>
-            </a:solidFill>
-            <a:prstDash val="solid"/>
-          </a:ln>
-        </p:spPr>
-      </p:sp>
-      <p:sp>
-        <p:nvSpPr>
-          <p:cNvPr id="7" name="Text 5"/>
-          <p:cNvSpPr/>
-          <p:nvPr/>
-        </p:nvSpPr>
-        <p:spPr>
-          <a:xfrm>
-            <a:off x="411480" y="3703320"/>
-            <a:ext cx="2011680" cy="1097280"/>
-          </a:xfrm>
-          <a:prstGeom prst="rect">
-            <a:avLst/>
-          </a:prstGeom>
-          <a:noFill/>
-          <a:ln/>
-        </p:spPr>
-        <p:txBody>
-          <a:bodyPr wrap="square" rtlCol="0" anchor="t"/>
-          <a:lstStyle/>
+              <a:rPr lang="en-US" sz="1800" dirty="0">
+                <a:solidFill>
+                  <a:srgbClr val="888888"/>
+                </a:solidFill>
+              </a:rPr>
+              <a:t>- unnecessary churn (added then removed).</a:t>
+            </a:r>
+            <a:endParaRPr lang="en-US" sz="1800" dirty="0"/>
+          </a:p>
           <a:p>
             <a:pPr marL="342900" indent="-342900">
               <a:spcAft>
-                <a:spcPts val="800"/>
+                <a:spcPts val="1000"/>
               </a:spcAft>
               <a:buSzPct val="100000"/>
               <a:buChar char="•"/>
             </a:pPr>
             <a:r>
-              <a:rPr lang="en-US" sz="1200" dirty="0">
-                <a:solidFill>
-                  <a:srgbClr val="333333"/>
-                </a:solidFill>
-              </a:rPr>
-              <a:t>Records developer events</a:t>
-            </a:r>
-            <a:endParaRPr lang="en-US" sz="1200" dirty="0"/>
-          </a:p>
-          <a:p>
-            <a:pPr marL="342900" indent="-342900">
+              <a:rPr lang="en-US" sz="1800" dirty="0">
+                <a:solidFill>
+                  <a:srgbClr val="000000"/>
+                </a:solidFill>
+              </a:rPr>
+              <a:t>Hygiene </a:t>
+            </a:r>
+            <a:pPr indent="0" marL="0">
               <a:spcAft>
-                <a:spcPts val="800"/>
+                <a:spcPts val="1000"/>
               </a:spcAft>
-              <a:buSzPct val="100000"/>
-              <a:buChar char="•"/>
-            </a:pPr>
-            <a:r>
-              <a:rPr lang="en-US" sz="1200" dirty="0">
-                <a:solidFill>
-                  <a:srgbClr val="333333"/>
-                </a:solidFill>
-              </a:rPr>
-              <a:t>Captures initial codebase</a:t>
-            </a:r>
-            <a:endParaRPr lang="en-US" sz="1200" dirty="0"/>
-          </a:p>
-        </p:txBody>
-      </p:sp>
-      <p:sp>
-        <p:nvSpPr>
-          <p:cNvPr id="8" name="Shape 6"/>
-          <p:cNvSpPr/>
-          <p:nvPr/>
-        </p:nvSpPr>
-        <p:spPr>
-          <a:xfrm>
-            <a:off x="3383280" y="2788920"/>
-            <a:ext cx="2377440" cy="2103120"/>
-          </a:xfrm>
-          <a:prstGeom prst="rect">
-            <a:avLst/>
-          </a:prstGeom>
-          <a:solidFill>
-            <a:srgbClr val="FFFFFF"/>
-          </a:solidFill>
-          <a:ln w="12700">
-            <a:solidFill>
-              <a:srgbClr val="000000"/>
-            </a:solidFill>
-            <a:prstDash val="solid"/>
-          </a:ln>
-        </p:spPr>
-      </p:sp>
-      <p:sp>
-        <p:nvSpPr>
-          <p:cNvPr id="9" name="Text 7"/>
-          <p:cNvSpPr/>
-          <p:nvPr/>
-        </p:nvSpPr>
-        <p:spPr>
-          <a:xfrm>
-            <a:off x="3474720" y="2971800"/>
-            <a:ext cx="2194560" cy="457200"/>
-          </a:xfrm>
-          <a:prstGeom prst="rect">
-            <a:avLst/>
-          </a:prstGeom>
-          <a:noFill/>
-          <a:ln/>
-        </p:spPr>
-        <p:txBody>
-          <a:bodyPr wrap="square" lIns="0" tIns="0" rIns="0" bIns="0" rtlCol="0" anchor="ctr"/>
-          <a:lstStyle/>
-          <a:p>
-            <a:pPr algn="ctr" indent="0" marL="0">
               <a:buNone/>
             </a:pPr>
             <a:r>
-              <a:rPr lang="en-US" sz="1600" b="1" dirty="0">
-                <a:solidFill>
-                  <a:srgbClr val="000000"/>
-                </a:solidFill>
-              </a:rPr>
-              <a:t>Analysis Backend</a:t>
-            </a:r>
-            <a:endParaRPr lang="en-US" sz="1600" dirty="0"/>
-          </a:p>
-        </p:txBody>
-      </p:sp>
-      <p:sp>
-        <p:nvSpPr>
-          <p:cNvPr id="10" name="Shape 8"/>
-          <p:cNvSpPr/>
-          <p:nvPr/>
-        </p:nvSpPr>
-        <p:spPr>
-          <a:xfrm>
-            <a:off x="3657600" y="3520440"/>
-            <a:ext cx="1828800" cy="0"/>
-          </a:xfrm>
-          <a:prstGeom prst="line">
-            <a:avLst/>
-          </a:prstGeom>
-          <a:noFill/>
-          <a:ln w="9525">
-            <a:solidFill>
-              <a:srgbClr val="999999"/>
-            </a:solidFill>
-            <a:prstDash val="solid"/>
-          </a:ln>
-        </p:spPr>
-      </p:sp>
-      <p:sp>
-        <p:nvSpPr>
-          <p:cNvPr id="11" name="Text 9"/>
-          <p:cNvSpPr/>
-          <p:nvPr/>
-        </p:nvSpPr>
-        <p:spPr>
-          <a:xfrm>
-            <a:off x="3611880" y="3703320"/>
-            <a:ext cx="2011680" cy="1097280"/>
-          </a:xfrm>
-          <a:prstGeom prst="rect">
-            <a:avLst/>
-          </a:prstGeom>
-          <a:noFill/>
-          <a:ln/>
-        </p:spPr>
-        <p:txBody>
-          <a:bodyPr wrap="square" rtlCol="0" anchor="t"/>
-          <a:lstStyle/>
-          <a:p>
-            <a:pPr marL="342900" indent="-342900">
-              <a:spcAft>
-                <a:spcPts val="800"/>
-              </a:spcAft>
-              <a:buSzPct val="100000"/>
-              <a:buChar char="•"/>
-            </a:pPr>
-            <a:r>
-              <a:rPr lang="en-US" sz="1200" dirty="0">
-                <a:solidFill>
-                  <a:srgbClr val="333333"/>
-                </a:solidFill>
-              </a:rPr>
-              <a:t>Shadow repo reconstruction</a:t>
-            </a:r>
-            <a:endParaRPr lang="en-US" sz="1200" dirty="0"/>
-          </a:p>
-          <a:p>
-            <a:pPr marL="342900" indent="-342900">
-              <a:spcAft>
-                <a:spcPts val="800"/>
-              </a:spcAft>
-              <a:buSzPct val="100000"/>
-              <a:buChar char="•"/>
-            </a:pPr>
-            <a:r>
-              <a:rPr lang="en-US" sz="1200" dirty="0">
-                <a:solidFill>
-                  <a:srgbClr val="333333"/>
-                </a:solidFill>
-              </a:rPr>
-              <a:t>Metric calculation</a:t>
-            </a:r>
-            <a:endParaRPr lang="en-US" sz="1200" dirty="0"/>
-          </a:p>
-          <a:p>
-            <a:pPr marL="342900" indent="-342900">
-              <a:spcAft>
-                <a:spcPts val="800"/>
-              </a:spcAft>
-              <a:buSzPct val="100000"/>
-              <a:buChar char="•"/>
-            </a:pPr>
-            <a:r>
-              <a:rPr lang="en-US" sz="1200" dirty="0">
-                <a:solidFill>
-                  <a:srgbClr val="333333"/>
-                </a:solidFill>
-              </a:rPr>
-              <a:t>Divergence synthesis</a:t>
-            </a:r>
-            <a:endParaRPr lang="en-US" sz="1200" dirty="0"/>
-          </a:p>
-        </p:txBody>
-      </p:sp>
-      <p:sp>
-        <p:nvSpPr>
-          <p:cNvPr id="12" name="Shape 10"/>
-          <p:cNvSpPr/>
-          <p:nvPr/>
-        </p:nvSpPr>
-        <p:spPr>
-          <a:xfrm>
-            <a:off x="6583680" y="2788920"/>
-            <a:ext cx="2377440" cy="2103120"/>
-          </a:xfrm>
-          <a:prstGeom prst="rect">
-            <a:avLst/>
-          </a:prstGeom>
-          <a:solidFill>
-            <a:srgbClr val="FFFFFF"/>
-          </a:solidFill>
-          <a:ln w="12700">
-            <a:solidFill>
-              <a:srgbClr val="000000"/>
-            </a:solidFill>
-            <a:prstDash val="solid"/>
-          </a:ln>
-        </p:spPr>
-      </p:sp>
-      <p:sp>
-        <p:nvSpPr>
-          <p:cNvPr id="13" name="Text 11"/>
-          <p:cNvSpPr/>
-          <p:nvPr/>
-        </p:nvSpPr>
-        <p:spPr>
-          <a:xfrm>
-            <a:off x="6675120" y="2971800"/>
-            <a:ext cx="2194560" cy="457200"/>
-          </a:xfrm>
-          <a:prstGeom prst="rect">
-            <a:avLst/>
-          </a:prstGeom>
-          <a:noFill/>
-          <a:ln/>
-        </p:spPr>
-        <p:txBody>
-          <a:bodyPr wrap="square" lIns="0" tIns="0" rIns="0" bIns="0" rtlCol="0" anchor="ctr"/>
-          <a:lstStyle/>
-          <a:p>
-            <a:pPr algn="ctr" indent="0" marL="0">
-              <a:buNone/>
-            </a:pPr>
-            <a:r>
-              <a:rPr lang="en-US" sz="1600" b="1" dirty="0">
-                <a:solidFill>
-                  <a:srgbClr val="000000"/>
-                </a:solidFill>
-              </a:rPr>
-              <a:t>Dashboard</a:t>
-            </a:r>
-            <a:endParaRPr lang="en-US" sz="1600" dirty="0"/>
-          </a:p>
-        </p:txBody>
-      </p:sp>
-      <p:sp>
-        <p:nvSpPr>
-          <p:cNvPr id="14" name="Shape 12"/>
-          <p:cNvSpPr/>
-          <p:nvPr/>
-        </p:nvSpPr>
-        <p:spPr>
-          <a:xfrm>
-            <a:off x="6858000" y="3520440"/>
-            <a:ext cx="1828800" cy="0"/>
-          </a:xfrm>
-          <a:prstGeom prst="line">
-            <a:avLst/>
-          </a:prstGeom>
-          <a:noFill/>
-          <a:ln w="9525">
-            <a:solidFill>
-              <a:srgbClr val="999999"/>
-            </a:solidFill>
-            <a:prstDash val="solid"/>
-          </a:ln>
-        </p:spPr>
-      </p:sp>
-      <p:sp>
-        <p:nvSpPr>
-          <p:cNvPr id="15" name="Text 13"/>
-          <p:cNvSpPr/>
-          <p:nvPr/>
-        </p:nvSpPr>
-        <p:spPr>
-          <a:xfrm>
-            <a:off x="6812280" y="3703320"/>
-            <a:ext cx="2011680" cy="1097280"/>
-          </a:xfrm>
-          <a:prstGeom prst="rect">
-            <a:avLst/>
-          </a:prstGeom>
-          <a:noFill/>
-          <a:ln/>
-        </p:spPr>
-        <p:txBody>
-          <a:bodyPr wrap="square" rtlCol="0" anchor="t"/>
-          <a:lstStyle/>
-          <a:p>
-            <a:pPr marL="342900" indent="-342900">
-              <a:spcAft>
-                <a:spcPts val="800"/>
-              </a:spcAft>
-              <a:buSzPct val="100000"/>
-              <a:buChar char="•"/>
-            </a:pPr>
-            <a:r>
-              <a:rPr lang="en-US" sz="1200" dirty="0">
-                <a:solidFill>
-                  <a:srgbClr val="333333"/>
-                </a:solidFill>
-              </a:rPr>
-              <a:t>Surfaces divergence points in context</a:t>
-            </a:r>
-            <a:endParaRPr lang="en-US" sz="1200" dirty="0"/>
-          </a:p>
-          <a:p>
-            <a:pPr marL="342900" indent="-342900">
-              <a:spcAft>
-                <a:spcPts val="800"/>
-              </a:spcAft>
-              <a:buSzPct val="100000"/>
-              <a:buChar char="•"/>
-            </a:pPr>
-            <a:r>
-              <a:rPr lang="en-US" sz="1200" dirty="0">
-                <a:solidFill>
-                  <a:srgbClr val="333333"/>
-                </a:solidFill>
-              </a:rPr>
-              <a:t>Explains alternative paths</a:t>
-            </a:r>
-            <a:endParaRPr lang="en-US" sz="1200" dirty="0"/>
-          </a:p>
-        </p:txBody>
-      </p:sp>
-      <p:sp>
-        <p:nvSpPr>
-          <p:cNvPr id="16" name="Shape 14"/>
-          <p:cNvSpPr/>
-          <p:nvPr/>
-        </p:nvSpPr>
-        <p:spPr>
-          <a:xfrm>
-            <a:off x="2560320" y="3840480"/>
-            <a:ext cx="822960" cy="0"/>
-          </a:xfrm>
-          <a:prstGeom prst="line">
-            <a:avLst/>
-          </a:prstGeom>
-          <a:noFill/>
-          <a:ln w="19050">
-            <a:solidFill>
-              <a:srgbClr val="000000"/>
-            </a:solidFill>
-            <a:prstDash val="solid"/>
-            <a:tailEnd type="triangle"/>
-          </a:ln>
-        </p:spPr>
-      </p:sp>
-      <p:sp>
-        <p:nvSpPr>
-          <p:cNvPr id="17" name="Text 15"/>
-          <p:cNvSpPr/>
-          <p:nvPr/>
-        </p:nvSpPr>
-        <p:spPr>
-          <a:xfrm>
-            <a:off x="2514600" y="3520440"/>
-            <a:ext cx="914400" cy="274320"/>
-          </a:xfrm>
-          <a:prstGeom prst="rect">
-            <a:avLst/>
-          </a:prstGeom>
-          <a:noFill/>
-          <a:ln/>
-        </p:spPr>
-        <p:txBody>
-          <a:bodyPr wrap="square" lIns="0" tIns="0" rIns="0" bIns="0" rtlCol="0" anchor="ctr"/>
-          <a:lstStyle/>
-          <a:p>
-            <a:pPr algn="ctr" indent="0" marL="0">
-              <a:buNone/>
-            </a:pPr>
-            <a:r>
-              <a:rPr lang="en-US" sz="900" i="1" dirty="0">
-                <a:solidFill>
-                  <a:srgbClr val="555555"/>
-                </a:solidFill>
-              </a:rPr>
-              <a:t>events.jsonl + initial-src/</a:t>
-            </a:r>
-            <a:endParaRPr lang="en-US" sz="900" dirty="0"/>
-          </a:p>
-        </p:txBody>
-      </p:sp>
-      <p:sp>
-        <p:nvSpPr>
-          <p:cNvPr id="18" name="Shape 16"/>
-          <p:cNvSpPr/>
-          <p:nvPr/>
-        </p:nvSpPr>
-        <p:spPr>
-          <a:xfrm>
-            <a:off x="5760720" y="3840480"/>
-            <a:ext cx="822960" cy="0"/>
-          </a:xfrm>
-          <a:prstGeom prst="line">
-            <a:avLst/>
-          </a:prstGeom>
-          <a:noFill/>
-          <a:ln w="19050">
-            <a:solidFill>
-              <a:srgbClr val="000000"/>
-            </a:solidFill>
-            <a:prstDash val="solid"/>
-            <a:tailEnd type="triangle"/>
-          </a:ln>
-        </p:spPr>
-      </p:sp>
-      <p:sp>
-        <p:nvSpPr>
-          <p:cNvPr id="19" name="Text 17"/>
-          <p:cNvSpPr/>
-          <p:nvPr/>
-        </p:nvSpPr>
-        <p:spPr>
-          <a:xfrm>
-            <a:off x="5715000" y="3520440"/>
-            <a:ext cx="914400" cy="274320"/>
-          </a:xfrm>
-          <a:prstGeom prst="rect">
-            <a:avLst/>
-          </a:prstGeom>
-          <a:noFill/>
-          <a:ln/>
-        </p:spPr>
-        <p:txBody>
-          <a:bodyPr wrap="square" lIns="0" tIns="0" rIns="0" bIns="0" rtlCol="0" anchor="ctr"/>
-          <a:lstStyle/>
-          <a:p>
-            <a:pPr algn="ctr" indent="0" marL="0">
-              <a:buNone/>
-            </a:pPr>
-            <a:r>
-              <a:rPr lang="en-US" sz="900" i="1" dirty="0">
-                <a:solidFill>
-                  <a:srgbClr val="555555"/>
-                </a:solidFill>
-              </a:rPr>
-              <a:t>analysis-report.json</a:t>
-            </a:r>
-            <a:endParaRPr lang="en-US" sz="900" dirty="0"/>
+              <a:rPr lang="en-US" sz="1800" dirty="0">
+                <a:solidFill>
+                  <a:srgbClr val="888888"/>
+                </a:solidFill>
+              </a:rPr>
+              <a:t>- missing safety checkpoints (no tests, no commits).</a:t>
+            </a:r>
+            <a:endParaRPr lang="en-US" sz="1800" dirty="0"/>
           </a:p>
         </p:txBody>
       </p:sp>
@@ -7228,14 +6496,14 @@
                         <a:buNone/>
                       </a:pPr>
                       <a:r>
-                        <a:rPr lang="en-US" sz="1600" dirty="0">
+                        <a:rPr lang="en-US" sz="1800" dirty="0">
                           <a:solidFill>
                             <a:srgbClr val="1A1A1A"/>
                           </a:solidFill>
                         </a:rPr>
                         <a:t>cleanliness gain</a:t>
                       </a:r>
-                      <a:endParaRPr lang="en-US" sz="1600" dirty="0"/>
+                      <a:endParaRPr lang="en-US" sz="1800" dirty="0"/>
                     </a:p>
                   </a:txBody>
                   <a:tcPr marL="54864" marR="54864" marT="54864" marB="54864" anchor="ctr">
@@ -7332,14 +6600,14 @@
                         <a:buNone/>
                       </a:pPr>
                       <a:r>
-                        <a:rPr lang="en-US" sz="1600" dirty="0">
+                        <a:rPr lang="en-US" sz="1800" dirty="0">
                           <a:solidFill>
                             <a:srgbClr val="1A1A1A"/>
                           </a:solidFill>
                         </a:rPr>
                         <a:t>step-savings bonus</a:t>
                       </a:r>
-                      <a:endParaRPr lang="en-US" sz="1600" dirty="0"/>
+                      <a:endParaRPr lang="en-US" sz="1800" dirty="0"/>
                     </a:p>
                   </a:txBody>
                   <a:tcPr marL="54864" marR="54864" marT="54864" marB="54864" anchor="ctr">
@@ -7436,14 +6704,14 @@
                         <a:buNone/>
                       </a:pPr>
                       <a:r>
-                        <a:rPr lang="en-US" sz="1600" dirty="0">
+                        <a:rPr lang="en-US" sz="1800" dirty="0">
                           <a:solidFill>
                             <a:srgbClr val="1A1A1A"/>
                           </a:solidFill>
                         </a:rPr>
                         <a:t>broken build / test rate</a:t>
                       </a:r>
-                      <a:endParaRPr lang="en-US" sz="1600" dirty="0"/>
+                      <a:endParaRPr lang="en-US" sz="1800" dirty="0"/>
                     </a:p>
                   </a:txBody>
                   <a:tcPr marL="54864" marR="54864" marT="54864" marB="54864" anchor="ctr">
@@ -7540,14 +6808,14 @@
                         <a:buNone/>
                       </a:pPr>
                       <a:r>
-                        <a:rPr lang="en-US" sz="1600" dirty="0">
+                        <a:rPr lang="en-US" sz="1800" dirty="0">
                           <a:solidFill>
                             <a:srgbClr val="1A1A1A"/>
                           </a:solidFill>
                         </a:rPr>
                         <a:t>skipped-test rate</a:t>
                       </a:r>
-                      <a:endParaRPr lang="en-US" sz="1600" dirty="0"/>
+                      <a:endParaRPr lang="en-US" sz="1800" dirty="0"/>
                     </a:p>
                   </a:txBody>
                   <a:tcPr marL="54864" marR="54864" marT="54864" marB="54864" anchor="ctr">
@@ -7644,14 +6912,14 @@
                         <a:buNone/>
                       </a:pPr>
                       <a:r>
-                        <a:rPr lang="en-US" sz="1600" dirty="0">
+                        <a:rPr lang="en-US" sz="1800" dirty="0">
                           <a:solidFill>
                             <a:srgbClr val="1A1A1A"/>
                           </a:solidFill>
                         </a:rPr>
                         <a:t>manual edits the IDE could refactor</a:t>
                       </a:r>
-                      <a:endParaRPr lang="en-US" sz="1600" dirty="0"/>
+                      <a:endParaRPr lang="en-US" sz="1800" dirty="0"/>
                     </a:p>
                   </a:txBody>
                   <a:tcPr marL="54864" marR="54864" marT="54864" marB="54864" anchor="ctr">
@@ -7748,14 +7016,14 @@
                         <a:buNone/>
                       </a:pPr>
                       <a:r>
-                        <a:rPr lang="en-US" sz="1600" dirty="0">
+                        <a:rPr lang="en-US" sz="1800" dirty="0">
                           <a:solidFill>
                             <a:srgbClr val="1A1A1A"/>
                           </a:solidFill>
                         </a:rPr>
-                        <a:t>intermediate-state lag</a:t>
+                        <a:t>Intermediate cleanliness lag (degradation)</a:t>
                       </a:r>
-                      <a:endParaRPr lang="en-US" sz="1600" dirty="0"/>
+                      <a:endParaRPr lang="en-US" sz="1800" dirty="0"/>
                     </a:p>
                   </a:txBody>
                   <a:tcPr marL="54864" marR="54864" marT="54864" marB="54864" anchor="ctr">
@@ -7852,14 +7120,14 @@
                         <a:buNone/>
                       </a:pPr>
                       <a:r>
-                        <a:rPr lang="en-US" sz="1600" dirty="0">
+                        <a:rPr lang="en-US" sz="1800" dirty="0">
                           <a:solidFill>
                             <a:srgbClr val="1A1A1A"/>
                           </a:solidFill>
                         </a:rPr>
-                        <a:t>commit-gap events</a:t>
+                        <a:t>Long durations without commits</a:t>
                       </a:r>
-                      <a:endParaRPr lang="en-US" sz="1600" dirty="0"/>
+                      <a:endParaRPr lang="en-US" sz="1800" dirty="0"/>
                     </a:p>
                   </a:txBody>
                   <a:tcPr marL="54864" marR="54864" marT="54864" marB="54864" anchor="ctr">
@@ -7927,7 +7195,7 @@
 </file>
 
 <file path=ppt/slides/slide9.xml><?xml version="1.0" encoding="utf-8"?>
-<p:sld xmlns:a="http://schemas.openxmlformats.org/drawingml/2006/main" xmlns:r="http://schemas.openxmlformats.org/officeDocument/2006/relationships" xmlns:p="http://schemas.openxmlformats.org/presentationml/2006/main">
+<p:sld xmlns:a="http://schemas.openxmlformats.org/drawingml/2006/main" xmlns:r="http://schemas.openxmlformats.org/officeDocument/2006/relationships" xmlns:p="http://schemas.openxmlformats.org/presentationml/2006/main" show="0">
   <p:cSld name="Slide 9">
     <p:spTree>
       <p:nvGrpSpPr>

--- a/presentation/slides.pptx
+++ b/presentation/slides.pptx
@@ -6283,7 +6283,7 @@
         </p:nvSpPr>
         <p:spPr>
           <a:xfrm>
-            <a:off x="457200" y="274320"/>
+            <a:off x="457200" y="137160"/>
             <a:ext cx="8229600" cy="640080"/>
           </a:xfrm>
           <a:prstGeom prst="rect">
@@ -6319,8 +6319,8 @@
         </p:nvSpPr>
         <p:spPr>
           <a:xfrm>
-            <a:off x="457200" y="1143000"/>
-            <a:ext cx="8229600" cy="548640"/>
+            <a:off x="457200" y="841248"/>
+            <a:ext cx="8229600" cy="411480"/>
           </a:xfrm>
           <a:prstGeom prst="rect">
             <a:avLst/>
@@ -6406,7 +6406,7 @@
           </p:nvPr>
         </p:nvGraphicFramePr>
         <p:xfrm>
-          <a:off x="2377440" y="1874520"/>
+          <a:off x="2377440" y="1280160"/>
           <a:ext cx="4389120" cy="914400"/>
         </p:xfrm>
         <a:graphic>
@@ -6418,7 +6418,7 @@
                 <a:gridCol w="365760"/>
                 <a:gridCol w="3291840"/>
               </a:tblGrid>
-              <a:tr h="310896">
+              <a:tr h="292608">
                 <a:tc>
                   <a:txBody>
                     <a:bodyPr/>
@@ -6501,7 +6501,7 @@
                             <a:srgbClr val="1A1A1A"/>
                           </a:solidFill>
                         </a:rPr>
-                        <a:t>cleanliness gain</a:t>
+                        <a:t>cleanliness gain*</a:t>
                       </a:r>
                       <a:endParaRPr lang="en-US" sz="1800" dirty="0"/>
                     </a:p>
@@ -6522,7 +6522,7 @@
                   </a:tcPr>
                 </a:tc>
               </a:tr>
-              <a:tr h="310896">
+              <a:tr h="292608">
                 <a:tc>
                   <a:txBody>
                     <a:bodyPr/>
@@ -6626,7 +6626,7 @@
                   </a:tcPr>
                 </a:tc>
               </a:tr>
-              <a:tr h="310896">
+              <a:tr h="292608">
                 <a:tc>
                   <a:txBody>
                     <a:bodyPr/>
@@ -6730,7 +6730,7 @@
                   </a:tcPr>
                 </a:tc>
               </a:tr>
-              <a:tr h="310896">
+              <a:tr h="292608">
                 <a:tc>
                   <a:txBody>
                     <a:bodyPr/>
@@ -6834,7 +6834,7 @@
                   </a:tcPr>
                 </a:tc>
               </a:tr>
-              <a:tr h="310896">
+              <a:tr h="292608">
                 <a:tc>
                   <a:txBody>
                     <a:bodyPr/>
@@ -6938,7 +6938,7 @@
                   </a:tcPr>
                 </a:tc>
               </a:tr>
-              <a:tr h="310896">
+              <a:tr h="292608">
                 <a:tc>
                   <a:txBody>
                     <a:bodyPr/>
@@ -7042,7 +7042,7 @@
                   </a:tcPr>
                 </a:tc>
               </a:tr>
-              <a:tr h="310896">
+              <a:tr h="292608">
                 <a:tc>
                   <a:txBody>
                     <a:bodyPr/>
@@ -7158,8 +7158,8 @@
         </p:nvSpPr>
         <p:spPr>
           <a:xfrm>
-            <a:off x="457200" y="4160520"/>
-            <a:ext cx="8229600" cy="457200"/>
+            <a:off x="457200" y="3749040"/>
+            <a:ext cx="8229600" cy="411480"/>
           </a:xfrm>
           <a:prstGeom prst="rect">
             <a:avLst/>
@@ -7183,6 +7183,56 @@
               <a:t>)</a:t>
             </a:r>
             <a:endParaRPr lang="en-US" sz="2200" dirty="0"/>
+          </a:p>
+        </p:txBody>
+      </p:sp>
+      <p:sp>
+        <p:nvSpPr>
+          <p:cNvPr id="6" name="Text 3"/>
+          <p:cNvSpPr/>
+          <p:nvPr/>
+        </p:nvSpPr>
+        <p:spPr>
+          <a:xfrm>
+            <a:off x="457200" y="4526280"/>
+            <a:ext cx="8229600" cy="548640"/>
+          </a:xfrm>
+          <a:prstGeom prst="rect">
+            <a:avLst/>
+          </a:prstGeom>
+          <a:noFill/>
+          <a:ln/>
+        </p:spPr>
+        <p:txBody>
+          <a:bodyPr wrap="square" lIns="0" tIns="0" rIns="0" bIns="0" rtlCol="0" anchor="ctr"/>
+          <a:lstStyle/>
+          <a:p>
+            <a:pPr algn="ctr" indent="0" marL="0">
+              <a:buNone/>
+            </a:pPr>
+            <a:r>
+              <a:rPr lang="en-US" sz="1100" i="1" dirty="0">
+                <a:solidFill>
+                  <a:srgbClr val="777777"/>
+                </a:solidFill>
+              </a:rPr>
+              <a:t>* cleanliness gain = mean of 6 normalised signals: complexity, coupling, duplication, readability, smells, cohesion.</a:t>
+            </a:r>
+            <a:endParaRPr lang="en-US" sz="1100" dirty="0"/>
+          </a:p>
+          <a:p>
+            <a:pPr algn="ctr" indent="0" marL="0">
+              <a:buNone/>
+            </a:pPr>
+            <a:r>
+              <a:rPr lang="en-US" sz="1100" i="1" dirty="0">
+                <a:solidFill>
+                  <a:srgbClr val="777777"/>
+                </a:solidFill>
+              </a:rPr>
+              <a:t>All 6 weighted equally - no trajectory-level calibration data exists, so equal weights are the least-assumptive choice.</a:t>
+            </a:r>
+            <a:endParaRPr lang="en-US" sz="1100" dirty="0"/>
           </a:p>
         </p:txBody>
       </p:sp>

--- a/presentation/slides.pptx
+++ b/presentation/slides.pptx
@@ -24,9 +24,10 @@
     <p:sldId id="272" r:id="rId18"/>
     <p:sldId id="273" r:id="rId19"/>
     <p:sldId id="274" r:id="rId20"/>
+    <p:sldId id="275" r:id="rId21"/>
   </p:sldIdLst>
   <p:notesMasterIdLst>
-    <p:notesMasterId r:id="rId21"/>
+    <p:notesMasterId r:id="rId22"/>
   </p:notesMasterIdLst>
   <p:sldSz cx="9144000" cy="5143500"/>
   <p:notesSz cx="5143500" cy="9144000"/>
@@ -1512,6 +1513,94 @@
             <a:fld id="{F7021451-1387-4CA6-816F-3879F97B5CBC}" type="slidenum">
               <a:rPr lang="en-US"/>
               <a:t>2</a:t>
+            </a:fld>
+            <a:endParaRPr lang="en-US"/>
+          </a:p>
+        </p:txBody>
+      </p:sp>
+    </p:spTree>
+    <p:extLst>
+      <p:ext uri="{BB962C8B-B14F-4D97-AF65-F5344CB8AC3E}">
+        <p14:creationId xmlns:p14="http://schemas.microsoft.com/office/powerpoint/2010/main" val="1024086991"/>
+      </p:ext>
+    </p:extLst>
+  </p:cSld>
+  <p:clrMapOvr>
+    <a:masterClrMapping/>
+  </p:clrMapOvr>
+</p:notes>
+</file>
+
+<file path=ppt/notesSlides/notesSlide20.xml><?xml version="1.0" encoding="utf-8"?>
+<p:notes xmlns:a="http://schemas.openxmlformats.org/drawingml/2006/main" xmlns:r="http://schemas.openxmlformats.org/officeDocument/2006/relationships" xmlns:p="http://schemas.openxmlformats.org/presentationml/2006/main">
+  <p:cSld>
+    <p:spTree>
+      <p:nvGrpSpPr>
+        <p:cNvPr id="1" name=""/>
+        <p:cNvGrpSpPr/>
+        <p:nvPr/>
+      </p:nvGrpSpPr>
+      <p:grpSpPr>
+        <a:xfrm>
+          <a:off x="0" y="0"/>
+          <a:ext cx="0" cy="0"/>
+          <a:chOff x="0" y="0"/>
+          <a:chExt cx="0" cy="0"/>
+        </a:xfrm>
+      </p:grpSpPr>
+      <p:sp>
+        <p:nvSpPr>
+          <p:cNvPr id="2" name="Slide Image Placeholder 1"/>
+          <p:cNvSpPr>
+            <a:spLocks noGrp="1" noRot="1" noChangeAspect="1"/>
+          </p:cNvSpPr>
+          <p:nvPr>
+            <p:ph type="sldImg"/>
+          </p:nvPr>
+        </p:nvSpPr>
+        <p:spPr/>
+      </p:sp>
+      <p:sp>
+        <p:nvSpPr>
+          <p:cNvPr id="3" name="Notes Placeholder 2"/>
+          <p:cNvSpPr>
+            <a:spLocks noGrp="1"/>
+          </p:cNvSpPr>
+          <p:nvPr>
+            <p:ph type="body" idx="1"/>
+          </p:nvPr>
+        </p:nvSpPr>
+        <p:spPr/>
+        <p:txBody>
+          <a:bodyPr/>
+          <a:lstStyle/>
+          <a:p>
+            <a:r>
+              <a:rPr lang="en-US" dirty="0"/>
+              <a:t/>
+            </a:r>
+            <a:endParaRPr lang="en-US" dirty="0"/>
+          </a:p>
+        </p:txBody>
+      </p:sp>
+      <p:sp>
+        <p:nvSpPr>
+          <p:cNvPr id="4" name="Slide Number Placeholder 3"/>
+          <p:cNvSpPr>
+            <a:spLocks noGrp="1"/>
+          </p:cNvSpPr>
+          <p:nvPr>
+            <p:ph type="sldNum" sz="quarter" idx="10"/>
+          </p:nvPr>
+        </p:nvSpPr>
+        <p:spPr/>
+        <p:txBody>
+          <a:bodyPr/>
+          <a:lstStyle/>
+          <a:p>
+            <a:fld id="{F7021451-1387-4CA6-816F-3879F97B5CBC}" type="slidenum">
+              <a:rPr lang="en-US"/>
+              <a:t>20</a:t>
             </a:fld>
             <a:endParaRPr lang="en-US"/>
           </a:p>
@@ -4135,7 +4224,7 @@
                   <a:srgbClr val="000000"/>
                 </a:solidFill>
               </a:rPr>
-              <a:t>Detector precision &amp; recall</a:t>
+              <a:t>Is the tool accurate?</a:t>
             </a:r>
             <a:endParaRPr lang="en-US" sz="2800" dirty="0"/>
           </a:p>
@@ -4164,74 +4253,162 @@
           <a:p>
             <a:pPr marL="342900" indent="-342900">
               <a:spcAft>
-                <a:spcPts val="600"/>
+                <a:spcPts val="1000"/>
               </a:spcAft>
               <a:buSzPct val="100000"/>
               <a:buChar char="•"/>
             </a:pPr>
             <a:r>
-              <a:rPr lang="en-US" sz="1600" dirty="0">
+              <a:rPr lang="en-US" sz="1500" dirty="0">
                 <a:solidFill>
                   <a:srgbClr val="000000"/>
                 </a:solidFill>
               </a:rPr>
-              <a:t>Precision = 1.00 across all four divergence kinds - every detection is valid.</a:t>
-            </a:r>
-            <a:endParaRPr lang="en-US" sz="1600" dirty="0"/>
+              <a:t>45 hand-labelled injection sessions </a:t>
+            </a:r>
+            <a:pPr indent="0" marL="0">
+              <a:spcAft>
+                <a:spcPts val="1000"/>
+              </a:spcAft>
+              <a:buNone/>
+            </a:pPr>
+            <a:r>
+              <a:rPr lang="en-US" sz="1500" dirty="0">
+                <a:solidFill>
+                  <a:srgbClr val="888888"/>
+                </a:solidFill>
+              </a:rPr>
+              <a:t>- on a Java codebase.</a:t>
+            </a:r>
+            <a:endParaRPr lang="en-US" sz="1500" dirty="0"/>
           </a:p>
           <a:p>
             <a:pPr marL="342900" indent="-342900">
               <a:spcAft>
-                <a:spcPts val="600"/>
+                <a:spcPts val="1000"/>
               </a:spcAft>
               <a:buSzPct val="100000"/>
               <a:buChar char="•"/>
             </a:pPr>
             <a:r>
-              <a:rPr lang="en-US" sz="1600" dirty="0">
+              <a:rPr lang="en-US" sz="1500" dirty="0">
                 <a:solidFill>
                   <a:srgbClr val="000000"/>
                 </a:solidFill>
               </a:rPr>
-              <a:t>Recall - Rework 1.00, Hygiene 1.00, Manual-Refactor 0.76, Ordering 0.40.</a:t>
-            </a:r>
-            <a:endParaRPr lang="en-US" sz="1600" dirty="0"/>
+              <a:t>3 raters (author + 2 external MEng cohort members) </a:t>
+            </a:r>
+            <a:pPr indent="0" marL="0">
+              <a:spcAft>
+                <a:spcPts val="1000"/>
+              </a:spcAft>
+              <a:buNone/>
+            </a:pPr>
+            <a:r>
+              <a:rPr lang="en-US" sz="1500" dirty="0">
+                <a:solidFill>
+                  <a:srgbClr val="888888"/>
+                </a:solidFill>
+              </a:rPr>
+              <a:t>- inter-rater Cohen's κ = 1.00 (Ordering, Manual-Refactor), 0.86–1.00 (Rework), 0.72–0.86 (Hygiene).</a:t>
+            </a:r>
+            <a:endParaRPr lang="en-US" sz="1500" dirty="0"/>
           </a:p>
           <a:p>
             <a:pPr marL="342900" indent="-342900">
               <a:spcAft>
-                <a:spcPts val="600"/>
+                <a:spcPts val="1000"/>
               </a:spcAft>
               <a:buSzPct val="100000"/>
               <a:buChar char="•"/>
             </a:pPr>
             <a:r>
-              <a:rPr lang="en-US" sz="1600" dirty="0">
+              <a:rPr lang="en-US" sz="1500" dirty="0">
                 <a:solidFill>
                   <a:srgbClr val="000000"/>
                 </a:solidFill>
               </a:rPr>
-              <a:t>Inter-rater agreement (Cohen's κ) -1.00 for Ordering and Manual-Refactor, 0.86 for Rework, 0.72 for Hygiene.</a:t>
-            </a:r>
-            <a:endParaRPr lang="en-US" sz="1600" dirty="0"/>
+              <a:t>Disagreements predominantly surrounding hygiene + rework labels </a:t>
+            </a:r>
+            <a:pPr indent="0" marL="0">
+              <a:spcAft>
+                <a:spcPts val="1000"/>
+              </a:spcAft>
+              <a:buNone/>
+            </a:pPr>
+            <a:r>
+              <a:rPr lang="en-US" sz="1500" dirty="0">
+                <a:solidFill>
+                  <a:srgbClr val="888888"/>
+                </a:solidFill>
+              </a:rPr>
+              <a:t>- differences in opinion of what constitutes a step.</a:t>
+            </a:r>
+            <a:endParaRPr lang="en-US" sz="1500" dirty="0"/>
           </a:p>
           <a:p>
             <a:pPr marL="342900" indent="-342900">
               <a:spcAft>
-                <a:spcPts val="600"/>
+                <a:spcPts val="1000"/>
               </a:spcAft>
               <a:buSzPct val="100000"/>
               <a:buChar char="•"/>
             </a:pPr>
             <a:r>
-              <a:rPr lang="en-US" sz="1600" dirty="0">
+              <a:rPr lang="en-US" sz="1500" dirty="0">
                 <a:solidFill>
                   <a:srgbClr val="000000"/>
                 </a:solidFill>
               </a:rPr>
-              <a:t>Ordering recall gap is honest and explained: the synthesiser rejects windows it cannot safely reproduce. A scope limit, not a detector flaw.</a:t>
-            </a:r>
-            <a:endParaRPr lang="en-US" sz="1600" dirty="0"/>
+              <a:t>Track all ordering points detected </a:t>
+            </a:r>
+            <a:pPr indent="0" marL="0">
+              <a:spcAft>
+                <a:spcPts val="1000"/>
+              </a:spcAft>
+              <a:buNone/>
+            </a:pPr>
+            <a:r>
+              <a:rPr lang="en-US" sz="1500" dirty="0">
+                <a:solidFill>
+                  <a:srgbClr val="888888"/>
+                </a:solidFill>
+              </a:rPr>
+              <a:t>- not only ones with a higher process score than the user.</a:t>
+            </a:r>
+            <a:endParaRPr lang="en-US" sz="1500" dirty="0"/>
+          </a:p>
+          <a:p>
+            <a:pPr marL="342900" indent="-342900">
+              <a:spcAft>
+                <a:spcPts val="1000"/>
+              </a:spcAft>
+              <a:buSzPct val="100000"/>
+              <a:buChar char="•"/>
+            </a:pPr>
+            <a:r>
+              <a:rPr lang="en-US" sz="1500" dirty="0">
+                <a:solidFill>
+                  <a:srgbClr val="000000"/>
+                </a:solidFill>
+              </a:rPr>
+              <a:t>Measure precision + recall </a:t>
+            </a:r>
+            <a:pPr indent="0" marL="0">
+              <a:spcAft>
+                <a:spcPts val="1000"/>
+              </a:spcAft>
+              <a:buNone/>
+            </a:pPr>
+            <a:r>
+              <a:rPr lang="en-US" sz="1500" dirty="0">
+                <a:solidFill>
+                  <a:srgbClr val="888888"/>
+                </a:solidFill>
+              </a:rPr>
+              <a:t>- precision guards against FPs that waste the developer's attention. Recall guards against FNs that miss real opportunities. F1 averages the two - so a high score can hide a detector that's annoying users (lots of FPs) or one that's quietly missing things (lots of FNs). Accuracy is dominated by true negatives.</a:t>
+            </a:r>
+            <a:endParaRPr lang="en-US" sz="1500" dirty="0"/>
           </a:p>
         </p:txBody>
       </p:sp>
@@ -4268,8 +4445,8 @@
         </p:nvSpPr>
         <p:spPr>
           <a:xfrm>
-            <a:off x="457200" y="274320"/>
-            <a:ext cx="8229600" cy="640080"/>
+            <a:off x="457200" y="91440"/>
+            <a:ext cx="8229600" cy="548640"/>
           </a:xfrm>
           <a:prstGeom prst="rect">
             <a:avLst/>
@@ -4290,7 +4467,7 @@
                   <a:srgbClr val="000000"/>
                 </a:solidFill>
               </a:rPr>
-              <a:t>Score robustness</a:t>
+              <a:t>Decision matrix per divergence kind</a:t>
             </a:r>
             <a:endParaRPr lang="en-US" sz="2800" dirty="0"/>
           </a:p>
@@ -4304,8 +4481,8 @@
         </p:nvSpPr>
         <p:spPr>
           <a:xfrm>
-            <a:off x="457200" y="1188720"/>
-            <a:ext cx="8229600" cy="3657600"/>
+            <a:off x="457200" y="658368"/>
+            <a:ext cx="8229600" cy="256032"/>
           </a:xfrm>
           <a:prstGeom prst="rect">
             <a:avLst/>
@@ -4314,79 +4491,2253 @@
           <a:ln/>
         </p:spPr>
         <p:txBody>
-          <a:bodyPr wrap="square" rtlCol="0" anchor="t"/>
-          <a:lstStyle/>
-          <a:p>
-            <a:pPr marL="342900" indent="-342900">
-              <a:spcAft>
-                <a:spcPts val="600"/>
-              </a:spcAft>
-              <a:buSzPct val="100000"/>
-              <a:buChar char="•"/>
-            </a:pPr>
-            <a:r>
-              <a:rPr lang="en-US" sz="1600" dirty="0">
+          <a:bodyPr wrap="square" lIns="0" tIns="0" rIns="0" bIns="0" rtlCol="0" anchor="ctr"/>
+          <a:lstStyle/>
+          <a:p>
+            <a:pPr algn="ctr" indent="0" marL="0">
+              <a:buNone/>
+            </a:pPr>
+            <a:r>
+              <a:rPr lang="en-US" sz="1200" i="1" dirty="0">
+                <a:solidFill>
+                  <a:srgbClr val="555555"/>
+                </a:solidFill>
+              </a:rPr>
+              <a:t>Session-level (45 injection sessions).</a:t>
+            </a:r>
+            <a:endParaRPr lang="en-US" sz="1200" dirty="0"/>
+          </a:p>
+        </p:txBody>
+      </p:sp>
+      <p:sp>
+        <p:nvSpPr>
+          <p:cNvPr id="4" name="Text 2"/>
+          <p:cNvSpPr/>
+          <p:nvPr/>
+        </p:nvSpPr>
+        <p:spPr>
+          <a:xfrm>
+            <a:off x="640080" y="914400"/>
+            <a:ext cx="2834640" cy="201168"/>
+          </a:xfrm>
+          <a:prstGeom prst="rect">
+            <a:avLst/>
+          </a:prstGeom>
+          <a:noFill/>
+          <a:ln/>
+        </p:spPr>
+        <p:txBody>
+          <a:bodyPr wrap="square" lIns="0" tIns="0" rIns="0" bIns="0" rtlCol="0" anchor="b"/>
+          <a:lstStyle/>
+          <a:p>
+            <a:pPr algn="ctr" indent="0" marL="0">
+              <a:buNone/>
+            </a:pPr>
+            <a:r>
+              <a:rPr lang="en-US" sz="1400" b="1" dirty="0">
                 <a:solidFill>
                   <a:srgbClr val="000000"/>
                 </a:solidFill>
               </a:rPr>
-              <a:t>Single-knob sensitivity sweep: scale any one weight by {0.1×–10×}, top-1 recommendation is preserved in 96.5% of user-study cases.</a:t>
-            </a:r>
-            <a:endParaRPr lang="en-US" sz="1600" dirty="0"/>
-          </a:p>
-          <a:p>
-            <a:pPr marL="342900" indent="-342900">
-              <a:spcAft>
-                <a:spcPts val="600"/>
-              </a:spcAft>
-              <a:buSzPct val="100000"/>
-              <a:buChar char="•"/>
-            </a:pPr>
-            <a:r>
-              <a:rPr lang="en-US" sz="1600" dirty="0">
+              <a:t>Manual-Refactor</a:t>
+            </a:r>
+            <a:endParaRPr lang="en-US" sz="1400" dirty="0"/>
+          </a:p>
+        </p:txBody>
+      </p:sp>
+      <p:sp>
+        <p:nvSpPr>
+          <p:cNvPr id="5" name="Text 3"/>
+          <p:cNvSpPr/>
+          <p:nvPr/>
+        </p:nvSpPr>
+        <p:spPr>
+          <a:xfrm>
+            <a:off x="1188720" y="1133856"/>
+            <a:ext cx="1143000" cy="201168"/>
+          </a:xfrm>
+          <a:prstGeom prst="rect">
+            <a:avLst/>
+          </a:prstGeom>
+          <a:noFill/>
+          <a:ln/>
+        </p:spPr>
+        <p:txBody>
+          <a:bodyPr wrap="square" lIns="0" tIns="0" rIns="0" bIns="0" rtlCol="0" anchor="ctr"/>
+          <a:lstStyle/>
+          <a:p>
+            <a:pPr algn="ctr" indent="0" marL="0">
+              <a:buNone/>
+            </a:pPr>
+            <a:r>
+              <a:rPr lang="en-US" sz="900" i="1" dirty="0">
+                <a:solidFill>
+                  <a:srgbClr val="555555"/>
+                </a:solidFill>
+              </a:rPr>
+              <a:t>Predicted +</a:t>
+            </a:r>
+            <a:endParaRPr lang="en-US" sz="900" dirty="0"/>
+          </a:p>
+        </p:txBody>
+      </p:sp>
+      <p:sp>
+        <p:nvSpPr>
+          <p:cNvPr id="6" name="Text 4"/>
+          <p:cNvSpPr/>
+          <p:nvPr/>
+        </p:nvSpPr>
+        <p:spPr>
+          <a:xfrm>
+            <a:off x="2331720" y="1133856"/>
+            <a:ext cx="1143000" cy="201168"/>
+          </a:xfrm>
+          <a:prstGeom prst="rect">
+            <a:avLst/>
+          </a:prstGeom>
+          <a:noFill/>
+          <a:ln/>
+        </p:spPr>
+        <p:txBody>
+          <a:bodyPr wrap="square" lIns="0" tIns="0" rIns="0" bIns="0" rtlCol="0" anchor="ctr"/>
+          <a:lstStyle/>
+          <a:p>
+            <a:pPr algn="ctr" indent="0" marL="0">
+              <a:buNone/>
+            </a:pPr>
+            <a:r>
+              <a:rPr lang="en-US" sz="900" i="1" dirty="0">
+                <a:solidFill>
+                  <a:srgbClr val="555555"/>
+                </a:solidFill>
+              </a:rPr>
+              <a:t>Predicted −</a:t>
+            </a:r>
+            <a:endParaRPr lang="en-US" sz="900" dirty="0"/>
+          </a:p>
+        </p:txBody>
+      </p:sp>
+      <p:sp>
+        <p:nvSpPr>
+          <p:cNvPr id="7" name="Text 5"/>
+          <p:cNvSpPr/>
+          <p:nvPr/>
+        </p:nvSpPr>
+        <p:spPr>
+          <a:xfrm>
+            <a:off x="640080" y="1353312"/>
+            <a:ext cx="548640" cy="548640"/>
+          </a:xfrm>
+          <a:prstGeom prst="rect">
+            <a:avLst/>
+          </a:prstGeom>
+          <a:noFill/>
+          <a:ln/>
+        </p:spPr>
+        <p:txBody>
+          <a:bodyPr wrap="square" lIns="508" tIns="508" rIns="508" bIns="508" rtlCol="0" anchor="ctr"/>
+          <a:lstStyle/>
+          <a:p>
+            <a:pPr algn="r" indent="0" marL="0">
+              <a:buNone/>
+            </a:pPr>
+            <a:r>
+              <a:rPr lang="en-US" sz="900" i="1" dirty="0">
+                <a:solidFill>
+                  <a:srgbClr val="555555"/>
+                </a:solidFill>
+              </a:rPr>
+              <a:t>Actual +</a:t>
+            </a:r>
+            <a:endParaRPr lang="en-US" sz="900" dirty="0"/>
+          </a:p>
+        </p:txBody>
+      </p:sp>
+      <p:sp>
+        <p:nvSpPr>
+          <p:cNvPr id="8" name="Text 6"/>
+          <p:cNvSpPr/>
+          <p:nvPr/>
+        </p:nvSpPr>
+        <p:spPr>
+          <a:xfrm>
+            <a:off x="640080" y="1901952"/>
+            <a:ext cx="548640" cy="548640"/>
+          </a:xfrm>
+          <a:prstGeom prst="rect">
+            <a:avLst/>
+          </a:prstGeom>
+          <a:noFill/>
+          <a:ln/>
+        </p:spPr>
+        <p:txBody>
+          <a:bodyPr wrap="square" lIns="508" tIns="508" rIns="508" bIns="508" rtlCol="0" anchor="ctr"/>
+          <a:lstStyle/>
+          <a:p>
+            <a:pPr algn="r" indent="0" marL="0">
+              <a:buNone/>
+            </a:pPr>
+            <a:r>
+              <a:rPr lang="en-US" sz="900" i="1" dirty="0">
+                <a:solidFill>
+                  <a:srgbClr val="555555"/>
+                </a:solidFill>
+              </a:rPr>
+              <a:t>Actual −</a:t>
+            </a:r>
+            <a:endParaRPr lang="en-US" sz="900" dirty="0"/>
+          </a:p>
+        </p:txBody>
+      </p:sp>
+      <p:sp>
+        <p:nvSpPr>
+          <p:cNvPr id="9" name="Shape 7"/>
+          <p:cNvSpPr/>
+          <p:nvPr/>
+        </p:nvSpPr>
+        <p:spPr>
+          <a:xfrm>
+            <a:off x="1188720" y="1426464"/>
+            <a:ext cx="1143000" cy="548640"/>
+          </a:xfrm>
+          <a:prstGeom prst="rect">
+            <a:avLst/>
+          </a:prstGeom>
+          <a:solidFill>
+            <a:srgbClr val="D4F0DC"/>
+          </a:solidFill>
+          <a:ln w="6350">
+            <a:solidFill>
+              <a:srgbClr val="999999"/>
+            </a:solidFill>
+            <a:prstDash val="solid"/>
+          </a:ln>
+        </p:spPr>
+      </p:sp>
+      <p:sp>
+        <p:nvSpPr>
+          <p:cNvPr id="10" name="Text 8"/>
+          <p:cNvSpPr/>
+          <p:nvPr/>
+        </p:nvSpPr>
+        <p:spPr>
+          <a:xfrm>
+            <a:off x="1188720" y="1426464"/>
+            <a:ext cx="1143000" cy="548640"/>
+          </a:xfrm>
+          <a:prstGeom prst="rect">
+            <a:avLst/>
+          </a:prstGeom>
+          <a:noFill/>
+          <a:ln/>
+        </p:spPr>
+        <p:txBody>
+          <a:bodyPr wrap="square" lIns="0" tIns="0" rIns="0" bIns="0" rtlCol="0" anchor="ctr"/>
+          <a:lstStyle/>
+          <a:p>
+            <a:pPr algn="ctr" indent="0" marL="0">
+              <a:buNone/>
+            </a:pPr>
+            <a:r>
+              <a:rPr lang="en-US" sz="2000" b="1" dirty="0">
+                <a:solidFill>
+                  <a:srgbClr val="0A7D2A"/>
+                </a:solidFill>
+              </a:rPr>
+              <a:t>16</a:t>
+            </a:r>
+            <a:endParaRPr lang="en-US" sz="2000" dirty="0"/>
+          </a:p>
+          <a:p>
+            <a:pPr algn="ctr" indent="0" marL="0">
+              <a:buNone/>
+            </a:pPr>
+            <a:r>
+              <a:rPr lang="en-US" sz="900" dirty="0">
+                <a:solidFill>
+                  <a:srgbClr val="666666"/>
+                </a:solidFill>
+              </a:rPr>
+              <a:t>TP</a:t>
+            </a:r>
+            <a:endParaRPr lang="en-US" sz="2000" dirty="0"/>
+          </a:p>
+        </p:txBody>
+      </p:sp>
+      <p:sp>
+        <p:nvSpPr>
+          <p:cNvPr id="11" name="Shape 9"/>
+          <p:cNvSpPr/>
+          <p:nvPr/>
+        </p:nvSpPr>
+        <p:spPr>
+          <a:xfrm>
+            <a:off x="2331720" y="1426464"/>
+            <a:ext cx="1143000" cy="548640"/>
+          </a:xfrm>
+          <a:prstGeom prst="rect">
+            <a:avLst/>
+          </a:prstGeom>
+          <a:solidFill>
+            <a:srgbClr val="F5D5CE"/>
+          </a:solidFill>
+          <a:ln w="6350">
+            <a:solidFill>
+              <a:srgbClr val="999999"/>
+            </a:solidFill>
+            <a:prstDash val="solid"/>
+          </a:ln>
+        </p:spPr>
+      </p:sp>
+      <p:sp>
+        <p:nvSpPr>
+          <p:cNvPr id="12" name="Text 10"/>
+          <p:cNvSpPr/>
+          <p:nvPr/>
+        </p:nvSpPr>
+        <p:spPr>
+          <a:xfrm>
+            <a:off x="2331720" y="1426464"/>
+            <a:ext cx="1143000" cy="548640"/>
+          </a:xfrm>
+          <a:prstGeom prst="rect">
+            <a:avLst/>
+          </a:prstGeom>
+          <a:noFill/>
+          <a:ln/>
+        </p:spPr>
+        <p:txBody>
+          <a:bodyPr wrap="square" lIns="0" tIns="0" rIns="0" bIns="0" rtlCol="0" anchor="ctr"/>
+          <a:lstStyle/>
+          <a:p>
+            <a:pPr algn="ctr" indent="0" marL="0">
+              <a:buNone/>
+            </a:pPr>
+            <a:r>
+              <a:rPr lang="en-US" sz="2000" b="1" dirty="0">
+                <a:solidFill>
+                  <a:srgbClr val="B33A1E"/>
+                </a:solidFill>
+              </a:rPr>
+              <a:t>5</a:t>
+            </a:r>
+            <a:endParaRPr lang="en-US" sz="2000" dirty="0"/>
+          </a:p>
+          <a:p>
+            <a:pPr algn="ctr" indent="0" marL="0">
+              <a:buNone/>
+            </a:pPr>
+            <a:r>
+              <a:rPr lang="en-US" sz="900" dirty="0">
+                <a:solidFill>
+                  <a:srgbClr val="666666"/>
+                </a:solidFill>
+              </a:rPr>
+              <a:t>FN</a:t>
+            </a:r>
+            <a:endParaRPr lang="en-US" sz="2000" dirty="0"/>
+          </a:p>
+        </p:txBody>
+      </p:sp>
+      <p:sp>
+        <p:nvSpPr>
+          <p:cNvPr id="13" name="Shape 11"/>
+          <p:cNvSpPr/>
+          <p:nvPr/>
+        </p:nvSpPr>
+        <p:spPr>
+          <a:xfrm>
+            <a:off x="1188720" y="1975104"/>
+            <a:ext cx="1143000" cy="548640"/>
+          </a:xfrm>
+          <a:prstGeom prst="rect">
+            <a:avLst/>
+          </a:prstGeom>
+          <a:solidFill>
+            <a:srgbClr val="F2F2F2"/>
+          </a:solidFill>
+          <a:ln w="6350">
+            <a:solidFill>
+              <a:srgbClr val="999999"/>
+            </a:solidFill>
+            <a:prstDash val="solid"/>
+          </a:ln>
+        </p:spPr>
+      </p:sp>
+      <p:sp>
+        <p:nvSpPr>
+          <p:cNvPr id="14" name="Text 12"/>
+          <p:cNvSpPr/>
+          <p:nvPr/>
+        </p:nvSpPr>
+        <p:spPr>
+          <a:xfrm>
+            <a:off x="1188720" y="1975104"/>
+            <a:ext cx="1143000" cy="548640"/>
+          </a:xfrm>
+          <a:prstGeom prst="rect">
+            <a:avLst/>
+          </a:prstGeom>
+          <a:noFill/>
+          <a:ln/>
+        </p:spPr>
+        <p:txBody>
+          <a:bodyPr wrap="square" lIns="0" tIns="0" rIns="0" bIns="0" rtlCol="0" anchor="ctr"/>
+          <a:lstStyle/>
+          <a:p>
+            <a:pPr algn="ctr" indent="0" marL="0">
+              <a:buNone/>
+            </a:pPr>
+            <a:r>
+              <a:rPr lang="en-US" sz="2000" b="1" dirty="0">
+                <a:solidFill>
+                  <a:srgbClr val="888888"/>
+                </a:solidFill>
+              </a:rPr>
+              <a:t>0</a:t>
+            </a:r>
+            <a:endParaRPr lang="en-US" sz="2000" dirty="0"/>
+          </a:p>
+          <a:p>
+            <a:pPr algn="ctr" indent="0" marL="0">
+              <a:buNone/>
+            </a:pPr>
+            <a:r>
+              <a:rPr lang="en-US" sz="900" dirty="0">
+                <a:solidFill>
+                  <a:srgbClr val="666666"/>
+                </a:solidFill>
+              </a:rPr>
+              <a:t>FP</a:t>
+            </a:r>
+            <a:endParaRPr lang="en-US" sz="2000" dirty="0"/>
+          </a:p>
+        </p:txBody>
+      </p:sp>
+      <p:sp>
+        <p:nvSpPr>
+          <p:cNvPr id="15" name="Shape 13"/>
+          <p:cNvSpPr/>
+          <p:nvPr/>
+        </p:nvSpPr>
+        <p:spPr>
+          <a:xfrm>
+            <a:off x="2331720" y="1975104"/>
+            <a:ext cx="1143000" cy="548640"/>
+          </a:xfrm>
+          <a:prstGeom prst="rect">
+            <a:avLst/>
+          </a:prstGeom>
+          <a:solidFill>
+            <a:srgbClr val="EAEAEA"/>
+          </a:solidFill>
+          <a:ln w="6350">
+            <a:solidFill>
+              <a:srgbClr val="999999"/>
+            </a:solidFill>
+            <a:prstDash val="solid"/>
+          </a:ln>
+        </p:spPr>
+      </p:sp>
+      <p:sp>
+        <p:nvSpPr>
+          <p:cNvPr id="16" name="Text 14"/>
+          <p:cNvSpPr/>
+          <p:nvPr/>
+        </p:nvSpPr>
+        <p:spPr>
+          <a:xfrm>
+            <a:off x="2331720" y="1975104"/>
+            <a:ext cx="1143000" cy="548640"/>
+          </a:xfrm>
+          <a:prstGeom prst="rect">
+            <a:avLst/>
+          </a:prstGeom>
+          <a:noFill/>
+          <a:ln/>
+        </p:spPr>
+        <p:txBody>
+          <a:bodyPr wrap="square" lIns="0" tIns="0" rIns="0" bIns="0" rtlCol="0" anchor="ctr"/>
+          <a:lstStyle/>
+          <a:p>
+            <a:pPr algn="ctr" indent="0" marL="0">
+              <a:buNone/>
+            </a:pPr>
+            <a:r>
+              <a:rPr lang="en-US" sz="2000" b="1" dirty="0">
+                <a:solidFill>
+                  <a:srgbClr val="555555"/>
+                </a:solidFill>
+              </a:rPr>
+              <a:t>24</a:t>
+            </a:r>
+            <a:endParaRPr lang="en-US" sz="2000" dirty="0"/>
+          </a:p>
+          <a:p>
+            <a:pPr algn="ctr" indent="0" marL="0">
+              <a:buNone/>
+            </a:pPr>
+            <a:r>
+              <a:rPr lang="en-US" sz="900" dirty="0">
+                <a:solidFill>
+                  <a:srgbClr val="666666"/>
+                </a:solidFill>
+              </a:rPr>
+              <a:t>TN</a:t>
+            </a:r>
+            <a:endParaRPr lang="en-US" sz="2000" dirty="0"/>
+          </a:p>
+        </p:txBody>
+      </p:sp>
+      <p:sp>
+        <p:nvSpPr>
+          <p:cNvPr id="17" name="Text 15"/>
+          <p:cNvSpPr/>
+          <p:nvPr/>
+        </p:nvSpPr>
+        <p:spPr>
+          <a:xfrm>
+            <a:off x="640080" y="2542032"/>
+            <a:ext cx="2834640" cy="201168"/>
+          </a:xfrm>
+          <a:prstGeom prst="rect">
+            <a:avLst/>
+          </a:prstGeom>
+          <a:noFill/>
+          <a:ln/>
+        </p:spPr>
+        <p:txBody>
+          <a:bodyPr wrap="square" lIns="0" tIns="0" rIns="0" bIns="0" rtlCol="0" anchor="ctr"/>
+          <a:lstStyle/>
+          <a:p>
+            <a:pPr algn="ctr" indent="0" marL="0">
+              <a:buNone/>
+            </a:pPr>
+            <a:r>
+              <a:rPr lang="en-US" sz="1100" i="1" dirty="0">
+                <a:solidFill>
+                  <a:srgbClr val="555555"/>
+                </a:solidFill>
+              </a:rPr>
+              <a:t>Precision </a:t>
+            </a:r>
+            <a:pPr algn="ctr" indent="0" marL="0">
+              <a:buNone/>
+            </a:pPr>
+            <a:r>
+              <a:rPr lang="en-US" sz="1100" b="1" i="1" dirty="0">
+                <a:solidFill>
+                  <a:srgbClr val="1A1A1A"/>
+                </a:solidFill>
+              </a:rPr>
+              <a:t>1.00</a:t>
+            </a:r>
+            <a:pPr algn="ctr" indent="0" marL="0">
+              <a:buNone/>
+            </a:pPr>
+            <a:r>
+              <a:rPr lang="en-US" sz="1100" i="1" dirty="0">
+                <a:solidFill>
+                  <a:srgbClr val="555555"/>
+                </a:solidFill>
+              </a:rPr>
+              <a:t>   ·   Recall </a:t>
+            </a:r>
+            <a:pPr algn="ctr" indent="0" marL="0">
+              <a:buNone/>
+            </a:pPr>
+            <a:r>
+              <a:rPr lang="en-US" sz="1100" b="1" i="1" dirty="0">
+                <a:solidFill>
+                  <a:srgbClr val="1A1A1A"/>
+                </a:solidFill>
+              </a:rPr>
+              <a:t>0.76</a:t>
+            </a:r>
+            <a:endParaRPr lang="en-US" sz="1100" dirty="0"/>
+          </a:p>
+        </p:txBody>
+      </p:sp>
+      <p:sp>
+        <p:nvSpPr>
+          <p:cNvPr id="18" name="Text 16"/>
+          <p:cNvSpPr/>
+          <p:nvPr/>
+        </p:nvSpPr>
+        <p:spPr>
+          <a:xfrm>
+            <a:off x="4754880" y="914400"/>
+            <a:ext cx="2834640" cy="201168"/>
+          </a:xfrm>
+          <a:prstGeom prst="rect">
+            <a:avLst/>
+          </a:prstGeom>
+          <a:noFill/>
+          <a:ln/>
+        </p:spPr>
+        <p:txBody>
+          <a:bodyPr wrap="square" lIns="0" tIns="0" rIns="0" bIns="0" rtlCol="0" anchor="b"/>
+          <a:lstStyle/>
+          <a:p>
+            <a:pPr algn="ctr" indent="0" marL="0">
+              <a:buNone/>
+            </a:pPr>
+            <a:r>
+              <a:rPr lang="en-US" sz="1400" b="1" dirty="0">
                 <a:solidFill>
                   <a:srgbClr val="000000"/>
                 </a:solidFill>
               </a:rPr>
-              <a:t>Multi-knob Monte Carlo (200 samples): top-1 stability drops to 84.6%; mean Kendall τ = 0.586.</a:t>
-            </a:r>
-            <a:endParaRPr lang="en-US" sz="1600" dirty="0"/>
-          </a:p>
-          <a:p>
-            <a:pPr marL="342900" indent="-342900">
-              <a:spcAft>
-                <a:spcPts val="600"/>
-              </a:spcAft>
-              <a:buSzPct val="100000"/>
-              <a:buChar char="•"/>
-            </a:pPr>
-            <a:r>
-              <a:rPr lang="en-US" sz="1600" dirty="0">
+              <a:t>Ordering</a:t>
+            </a:r>
+            <a:endParaRPr lang="en-US" sz="1400" dirty="0"/>
+          </a:p>
+        </p:txBody>
+      </p:sp>
+      <p:sp>
+        <p:nvSpPr>
+          <p:cNvPr id="19" name="Text 17"/>
+          <p:cNvSpPr/>
+          <p:nvPr/>
+        </p:nvSpPr>
+        <p:spPr>
+          <a:xfrm>
+            <a:off x="5303520" y="1133856"/>
+            <a:ext cx="1143000" cy="201168"/>
+          </a:xfrm>
+          <a:prstGeom prst="rect">
+            <a:avLst/>
+          </a:prstGeom>
+          <a:noFill/>
+          <a:ln/>
+        </p:spPr>
+        <p:txBody>
+          <a:bodyPr wrap="square" lIns="0" tIns="0" rIns="0" bIns="0" rtlCol="0" anchor="ctr"/>
+          <a:lstStyle/>
+          <a:p>
+            <a:pPr algn="ctr" indent="0" marL="0">
+              <a:buNone/>
+            </a:pPr>
+            <a:r>
+              <a:rPr lang="en-US" sz="900" i="1" dirty="0">
+                <a:solidFill>
+                  <a:srgbClr val="555555"/>
+                </a:solidFill>
+              </a:rPr>
+              <a:t>Predicted +</a:t>
+            </a:r>
+            <a:endParaRPr lang="en-US" sz="900" dirty="0"/>
+          </a:p>
+        </p:txBody>
+      </p:sp>
+      <p:sp>
+        <p:nvSpPr>
+          <p:cNvPr id="20" name="Text 18"/>
+          <p:cNvSpPr/>
+          <p:nvPr/>
+        </p:nvSpPr>
+        <p:spPr>
+          <a:xfrm>
+            <a:off x="6446520" y="1133856"/>
+            <a:ext cx="1143000" cy="201168"/>
+          </a:xfrm>
+          <a:prstGeom prst="rect">
+            <a:avLst/>
+          </a:prstGeom>
+          <a:noFill/>
+          <a:ln/>
+        </p:spPr>
+        <p:txBody>
+          <a:bodyPr wrap="square" lIns="0" tIns="0" rIns="0" bIns="0" rtlCol="0" anchor="ctr"/>
+          <a:lstStyle/>
+          <a:p>
+            <a:pPr algn="ctr" indent="0" marL="0">
+              <a:buNone/>
+            </a:pPr>
+            <a:r>
+              <a:rPr lang="en-US" sz="900" i="1" dirty="0">
+                <a:solidFill>
+                  <a:srgbClr val="555555"/>
+                </a:solidFill>
+              </a:rPr>
+              <a:t>Predicted −</a:t>
+            </a:r>
+            <a:endParaRPr lang="en-US" sz="900" dirty="0"/>
+          </a:p>
+        </p:txBody>
+      </p:sp>
+      <p:sp>
+        <p:nvSpPr>
+          <p:cNvPr id="21" name="Text 19"/>
+          <p:cNvSpPr/>
+          <p:nvPr/>
+        </p:nvSpPr>
+        <p:spPr>
+          <a:xfrm>
+            <a:off x="4754880" y="1353312"/>
+            <a:ext cx="548640" cy="548640"/>
+          </a:xfrm>
+          <a:prstGeom prst="rect">
+            <a:avLst/>
+          </a:prstGeom>
+          <a:noFill/>
+          <a:ln/>
+        </p:spPr>
+        <p:txBody>
+          <a:bodyPr wrap="square" lIns="508" tIns="508" rIns="508" bIns="508" rtlCol="0" anchor="ctr"/>
+          <a:lstStyle/>
+          <a:p>
+            <a:pPr algn="r" indent="0" marL="0">
+              <a:buNone/>
+            </a:pPr>
+            <a:r>
+              <a:rPr lang="en-US" sz="900" i="1" dirty="0">
+                <a:solidFill>
+                  <a:srgbClr val="555555"/>
+                </a:solidFill>
+              </a:rPr>
+              <a:t>Actual +</a:t>
+            </a:r>
+            <a:endParaRPr lang="en-US" sz="900" dirty="0"/>
+          </a:p>
+        </p:txBody>
+      </p:sp>
+      <p:sp>
+        <p:nvSpPr>
+          <p:cNvPr id="22" name="Text 20"/>
+          <p:cNvSpPr/>
+          <p:nvPr/>
+        </p:nvSpPr>
+        <p:spPr>
+          <a:xfrm>
+            <a:off x="4754880" y="1901952"/>
+            <a:ext cx="548640" cy="548640"/>
+          </a:xfrm>
+          <a:prstGeom prst="rect">
+            <a:avLst/>
+          </a:prstGeom>
+          <a:noFill/>
+          <a:ln/>
+        </p:spPr>
+        <p:txBody>
+          <a:bodyPr wrap="square" lIns="508" tIns="508" rIns="508" bIns="508" rtlCol="0" anchor="ctr"/>
+          <a:lstStyle/>
+          <a:p>
+            <a:pPr algn="r" indent="0" marL="0">
+              <a:buNone/>
+            </a:pPr>
+            <a:r>
+              <a:rPr lang="en-US" sz="900" i="1" dirty="0">
+                <a:solidFill>
+                  <a:srgbClr val="555555"/>
+                </a:solidFill>
+              </a:rPr>
+              <a:t>Actual −</a:t>
+            </a:r>
+            <a:endParaRPr lang="en-US" sz="900" dirty="0"/>
+          </a:p>
+        </p:txBody>
+      </p:sp>
+      <p:sp>
+        <p:nvSpPr>
+          <p:cNvPr id="23" name="Shape 21"/>
+          <p:cNvSpPr/>
+          <p:nvPr/>
+        </p:nvSpPr>
+        <p:spPr>
+          <a:xfrm>
+            <a:off x="5303520" y="1426464"/>
+            <a:ext cx="1143000" cy="548640"/>
+          </a:xfrm>
+          <a:prstGeom prst="rect">
+            <a:avLst/>
+          </a:prstGeom>
+          <a:solidFill>
+            <a:srgbClr val="D4F0DC"/>
+          </a:solidFill>
+          <a:ln w="6350">
+            <a:solidFill>
+              <a:srgbClr val="999999"/>
+            </a:solidFill>
+            <a:prstDash val="solid"/>
+          </a:ln>
+        </p:spPr>
+      </p:sp>
+      <p:sp>
+        <p:nvSpPr>
+          <p:cNvPr id="24" name="Text 22"/>
+          <p:cNvSpPr/>
+          <p:nvPr/>
+        </p:nvSpPr>
+        <p:spPr>
+          <a:xfrm>
+            <a:off x="5303520" y="1426464"/>
+            <a:ext cx="1143000" cy="548640"/>
+          </a:xfrm>
+          <a:prstGeom prst="rect">
+            <a:avLst/>
+          </a:prstGeom>
+          <a:noFill/>
+          <a:ln/>
+        </p:spPr>
+        <p:txBody>
+          <a:bodyPr wrap="square" lIns="0" tIns="0" rIns="0" bIns="0" rtlCol="0" anchor="ctr"/>
+          <a:lstStyle/>
+          <a:p>
+            <a:pPr algn="ctr" indent="0" marL="0">
+              <a:buNone/>
+            </a:pPr>
+            <a:r>
+              <a:rPr lang="en-US" sz="2000" b="1" dirty="0">
+                <a:solidFill>
+                  <a:srgbClr val="0A7D2A"/>
+                </a:solidFill>
+              </a:rPr>
+              <a:t>14</a:t>
+            </a:r>
+            <a:endParaRPr lang="en-US" sz="2000" dirty="0"/>
+          </a:p>
+          <a:p>
+            <a:pPr algn="ctr" indent="0" marL="0">
+              <a:buNone/>
+            </a:pPr>
+            <a:r>
+              <a:rPr lang="en-US" sz="900" dirty="0">
+                <a:solidFill>
+                  <a:srgbClr val="666666"/>
+                </a:solidFill>
+              </a:rPr>
+              <a:t>TP</a:t>
+            </a:r>
+            <a:endParaRPr lang="en-US" sz="2000" dirty="0"/>
+          </a:p>
+        </p:txBody>
+      </p:sp>
+      <p:sp>
+        <p:nvSpPr>
+          <p:cNvPr id="25" name="Shape 23"/>
+          <p:cNvSpPr/>
+          <p:nvPr/>
+        </p:nvSpPr>
+        <p:spPr>
+          <a:xfrm>
+            <a:off x="6446520" y="1426464"/>
+            <a:ext cx="1143000" cy="548640"/>
+          </a:xfrm>
+          <a:prstGeom prst="rect">
+            <a:avLst/>
+          </a:prstGeom>
+          <a:solidFill>
+            <a:srgbClr val="F5D5CE"/>
+          </a:solidFill>
+          <a:ln w="6350">
+            <a:solidFill>
+              <a:srgbClr val="999999"/>
+            </a:solidFill>
+            <a:prstDash val="solid"/>
+          </a:ln>
+        </p:spPr>
+      </p:sp>
+      <p:sp>
+        <p:nvSpPr>
+          <p:cNvPr id="26" name="Text 24"/>
+          <p:cNvSpPr/>
+          <p:nvPr/>
+        </p:nvSpPr>
+        <p:spPr>
+          <a:xfrm>
+            <a:off x="6446520" y="1426464"/>
+            <a:ext cx="1143000" cy="548640"/>
+          </a:xfrm>
+          <a:prstGeom prst="rect">
+            <a:avLst/>
+          </a:prstGeom>
+          <a:noFill/>
+          <a:ln/>
+        </p:spPr>
+        <p:txBody>
+          <a:bodyPr wrap="square" lIns="0" tIns="0" rIns="0" bIns="0" rtlCol="0" anchor="ctr"/>
+          <a:lstStyle/>
+          <a:p>
+            <a:pPr algn="ctr" indent="0" marL="0">
+              <a:buNone/>
+            </a:pPr>
+            <a:r>
+              <a:rPr lang="en-US" sz="2000" b="1" dirty="0">
+                <a:solidFill>
+                  <a:srgbClr val="B33A1E"/>
+                </a:solidFill>
+              </a:rPr>
+              <a:t>24</a:t>
+            </a:r>
+            <a:endParaRPr lang="en-US" sz="2000" dirty="0"/>
+          </a:p>
+          <a:p>
+            <a:pPr algn="ctr" indent="0" marL="0">
+              <a:buNone/>
+            </a:pPr>
+            <a:r>
+              <a:rPr lang="en-US" sz="900" dirty="0">
+                <a:solidFill>
+                  <a:srgbClr val="666666"/>
+                </a:solidFill>
+              </a:rPr>
+              <a:t>FN</a:t>
+            </a:r>
+            <a:endParaRPr lang="en-US" sz="2000" dirty="0"/>
+          </a:p>
+        </p:txBody>
+      </p:sp>
+      <p:sp>
+        <p:nvSpPr>
+          <p:cNvPr id="27" name="Shape 25"/>
+          <p:cNvSpPr/>
+          <p:nvPr/>
+        </p:nvSpPr>
+        <p:spPr>
+          <a:xfrm>
+            <a:off x="5303520" y="1975104"/>
+            <a:ext cx="1143000" cy="548640"/>
+          </a:xfrm>
+          <a:prstGeom prst="rect">
+            <a:avLst/>
+          </a:prstGeom>
+          <a:solidFill>
+            <a:srgbClr val="F2F2F2"/>
+          </a:solidFill>
+          <a:ln w="6350">
+            <a:solidFill>
+              <a:srgbClr val="999999"/>
+            </a:solidFill>
+            <a:prstDash val="solid"/>
+          </a:ln>
+        </p:spPr>
+      </p:sp>
+      <p:sp>
+        <p:nvSpPr>
+          <p:cNvPr id="28" name="Text 26"/>
+          <p:cNvSpPr/>
+          <p:nvPr/>
+        </p:nvSpPr>
+        <p:spPr>
+          <a:xfrm>
+            <a:off x="5303520" y="1975104"/>
+            <a:ext cx="1143000" cy="548640"/>
+          </a:xfrm>
+          <a:prstGeom prst="rect">
+            <a:avLst/>
+          </a:prstGeom>
+          <a:noFill/>
+          <a:ln/>
+        </p:spPr>
+        <p:txBody>
+          <a:bodyPr wrap="square" lIns="0" tIns="0" rIns="0" bIns="0" rtlCol="0" anchor="ctr"/>
+          <a:lstStyle/>
+          <a:p>
+            <a:pPr algn="ctr" indent="0" marL="0">
+              <a:buNone/>
+            </a:pPr>
+            <a:r>
+              <a:rPr lang="en-US" sz="2000" b="1" dirty="0">
+                <a:solidFill>
+                  <a:srgbClr val="888888"/>
+                </a:solidFill>
+              </a:rPr>
+              <a:t>0</a:t>
+            </a:r>
+            <a:endParaRPr lang="en-US" sz="2000" dirty="0"/>
+          </a:p>
+          <a:p>
+            <a:pPr algn="ctr" indent="0" marL="0">
+              <a:buNone/>
+            </a:pPr>
+            <a:r>
+              <a:rPr lang="en-US" sz="900" dirty="0">
+                <a:solidFill>
+                  <a:srgbClr val="666666"/>
+                </a:solidFill>
+              </a:rPr>
+              <a:t>FP</a:t>
+            </a:r>
+            <a:endParaRPr lang="en-US" sz="2000" dirty="0"/>
+          </a:p>
+        </p:txBody>
+      </p:sp>
+      <p:sp>
+        <p:nvSpPr>
+          <p:cNvPr id="29" name="Shape 27"/>
+          <p:cNvSpPr/>
+          <p:nvPr/>
+        </p:nvSpPr>
+        <p:spPr>
+          <a:xfrm>
+            <a:off x="6446520" y="1975104"/>
+            <a:ext cx="1143000" cy="548640"/>
+          </a:xfrm>
+          <a:prstGeom prst="rect">
+            <a:avLst/>
+          </a:prstGeom>
+          <a:solidFill>
+            <a:srgbClr val="EAEAEA"/>
+          </a:solidFill>
+          <a:ln w="6350">
+            <a:solidFill>
+              <a:srgbClr val="999999"/>
+            </a:solidFill>
+            <a:prstDash val="solid"/>
+          </a:ln>
+        </p:spPr>
+      </p:sp>
+      <p:sp>
+        <p:nvSpPr>
+          <p:cNvPr id="30" name="Text 28"/>
+          <p:cNvSpPr/>
+          <p:nvPr/>
+        </p:nvSpPr>
+        <p:spPr>
+          <a:xfrm>
+            <a:off x="6446520" y="1975104"/>
+            <a:ext cx="1143000" cy="548640"/>
+          </a:xfrm>
+          <a:prstGeom prst="rect">
+            <a:avLst/>
+          </a:prstGeom>
+          <a:noFill/>
+          <a:ln/>
+        </p:spPr>
+        <p:txBody>
+          <a:bodyPr wrap="square" lIns="0" tIns="0" rIns="0" bIns="0" rtlCol="0" anchor="ctr"/>
+          <a:lstStyle/>
+          <a:p>
+            <a:pPr algn="ctr" indent="0" marL="0">
+              <a:buNone/>
+            </a:pPr>
+            <a:r>
+              <a:rPr lang="en-US" sz="2000" b="1" dirty="0">
+                <a:solidFill>
+                  <a:srgbClr val="555555"/>
+                </a:solidFill>
+              </a:rPr>
+              <a:t>7</a:t>
+            </a:r>
+            <a:endParaRPr lang="en-US" sz="2000" dirty="0"/>
+          </a:p>
+          <a:p>
+            <a:pPr algn="ctr" indent="0" marL="0">
+              <a:buNone/>
+            </a:pPr>
+            <a:r>
+              <a:rPr lang="en-US" sz="900" dirty="0">
+                <a:solidFill>
+                  <a:srgbClr val="666666"/>
+                </a:solidFill>
+              </a:rPr>
+              <a:t>TN</a:t>
+            </a:r>
+            <a:endParaRPr lang="en-US" sz="2000" dirty="0"/>
+          </a:p>
+        </p:txBody>
+      </p:sp>
+      <p:sp>
+        <p:nvSpPr>
+          <p:cNvPr id="31" name="Text 29"/>
+          <p:cNvSpPr/>
+          <p:nvPr/>
+        </p:nvSpPr>
+        <p:spPr>
+          <a:xfrm>
+            <a:off x="4754880" y="2542032"/>
+            <a:ext cx="2834640" cy="201168"/>
+          </a:xfrm>
+          <a:prstGeom prst="rect">
+            <a:avLst/>
+          </a:prstGeom>
+          <a:noFill/>
+          <a:ln/>
+        </p:spPr>
+        <p:txBody>
+          <a:bodyPr wrap="square" lIns="0" tIns="0" rIns="0" bIns="0" rtlCol="0" anchor="ctr"/>
+          <a:lstStyle/>
+          <a:p>
+            <a:pPr algn="ctr" indent="0" marL="0">
+              <a:buNone/>
+            </a:pPr>
+            <a:r>
+              <a:rPr lang="en-US" sz="1100" i="1" dirty="0">
+                <a:solidFill>
+                  <a:srgbClr val="555555"/>
+                </a:solidFill>
+              </a:rPr>
+              <a:t>Precision </a:t>
+            </a:r>
+            <a:pPr algn="ctr" indent="0" marL="0">
+              <a:buNone/>
+            </a:pPr>
+            <a:r>
+              <a:rPr lang="en-US" sz="1100" b="1" i="1" dirty="0">
+                <a:solidFill>
+                  <a:srgbClr val="1A1A1A"/>
+                </a:solidFill>
+              </a:rPr>
+              <a:t>1.00</a:t>
+            </a:r>
+            <a:pPr algn="ctr" indent="0" marL="0">
+              <a:buNone/>
+            </a:pPr>
+            <a:r>
+              <a:rPr lang="en-US" sz="1100" i="1" dirty="0">
+                <a:solidFill>
+                  <a:srgbClr val="555555"/>
+                </a:solidFill>
+              </a:rPr>
+              <a:t>   ·   Recall </a:t>
+            </a:r>
+            <a:pPr algn="ctr" indent="0" marL="0">
+              <a:buNone/>
+            </a:pPr>
+            <a:r>
+              <a:rPr lang="en-US" sz="1100" b="1" i="1" dirty="0">
+                <a:solidFill>
+                  <a:srgbClr val="1A1A1A"/>
+                </a:solidFill>
+              </a:rPr>
+              <a:t>0.36</a:t>
+            </a:r>
+            <a:endParaRPr lang="en-US" sz="1100" dirty="0"/>
+          </a:p>
+        </p:txBody>
+      </p:sp>
+      <p:sp>
+        <p:nvSpPr>
+          <p:cNvPr id="32" name="Text 30"/>
+          <p:cNvSpPr/>
+          <p:nvPr/>
+        </p:nvSpPr>
+        <p:spPr>
+          <a:xfrm>
+            <a:off x="640080" y="2926080"/>
+            <a:ext cx="2834640" cy="201168"/>
+          </a:xfrm>
+          <a:prstGeom prst="rect">
+            <a:avLst/>
+          </a:prstGeom>
+          <a:noFill/>
+          <a:ln/>
+        </p:spPr>
+        <p:txBody>
+          <a:bodyPr wrap="square" lIns="0" tIns="0" rIns="0" bIns="0" rtlCol="0" anchor="b"/>
+          <a:lstStyle/>
+          <a:p>
+            <a:pPr algn="ctr" indent="0" marL="0">
+              <a:buNone/>
+            </a:pPr>
+            <a:r>
+              <a:rPr lang="en-US" sz="1400" b="1" dirty="0">
                 <a:solidFill>
                   <a:srgbClr val="000000"/>
                 </a:solidFill>
               </a:rPr>
-              <a:t>Honest framing - stable near the chosen weights, less stable under arbitrary joint perturbations.</a:t>
-            </a:r>
-            <a:endParaRPr lang="en-US" sz="1600" dirty="0"/>
-          </a:p>
-          <a:p>
-            <a:pPr marL="342900" indent="-342900">
-              <a:spcAft>
-                <a:spcPts val="600"/>
-              </a:spcAft>
-              <a:buSzPct val="100000"/>
-              <a:buChar char="•"/>
-            </a:pPr>
-            <a:r>
-              <a:rPr lang="en-US" sz="1600" dirty="0">
+              <a:t>Rework</a:t>
+            </a:r>
+            <a:endParaRPr lang="en-US" sz="1400" dirty="0"/>
+          </a:p>
+        </p:txBody>
+      </p:sp>
+      <p:sp>
+        <p:nvSpPr>
+          <p:cNvPr id="33" name="Text 31"/>
+          <p:cNvSpPr/>
+          <p:nvPr/>
+        </p:nvSpPr>
+        <p:spPr>
+          <a:xfrm>
+            <a:off x="1188720" y="3145536"/>
+            <a:ext cx="1143000" cy="201168"/>
+          </a:xfrm>
+          <a:prstGeom prst="rect">
+            <a:avLst/>
+          </a:prstGeom>
+          <a:noFill/>
+          <a:ln/>
+        </p:spPr>
+        <p:txBody>
+          <a:bodyPr wrap="square" lIns="0" tIns="0" rIns="0" bIns="0" rtlCol="0" anchor="ctr"/>
+          <a:lstStyle/>
+          <a:p>
+            <a:pPr algn="ctr" indent="0" marL="0">
+              <a:buNone/>
+            </a:pPr>
+            <a:r>
+              <a:rPr lang="en-US" sz="900" i="1" dirty="0">
+                <a:solidFill>
+                  <a:srgbClr val="555555"/>
+                </a:solidFill>
+              </a:rPr>
+              <a:t>Predicted +</a:t>
+            </a:r>
+            <a:endParaRPr lang="en-US" sz="900" dirty="0"/>
+          </a:p>
+        </p:txBody>
+      </p:sp>
+      <p:sp>
+        <p:nvSpPr>
+          <p:cNvPr id="34" name="Text 32"/>
+          <p:cNvSpPr/>
+          <p:nvPr/>
+        </p:nvSpPr>
+        <p:spPr>
+          <a:xfrm>
+            <a:off x="2331720" y="3145536"/>
+            <a:ext cx="1143000" cy="201168"/>
+          </a:xfrm>
+          <a:prstGeom prst="rect">
+            <a:avLst/>
+          </a:prstGeom>
+          <a:noFill/>
+          <a:ln/>
+        </p:spPr>
+        <p:txBody>
+          <a:bodyPr wrap="square" lIns="0" tIns="0" rIns="0" bIns="0" rtlCol="0" anchor="ctr"/>
+          <a:lstStyle/>
+          <a:p>
+            <a:pPr algn="ctr" indent="0" marL="0">
+              <a:buNone/>
+            </a:pPr>
+            <a:r>
+              <a:rPr lang="en-US" sz="900" i="1" dirty="0">
+                <a:solidFill>
+                  <a:srgbClr val="555555"/>
+                </a:solidFill>
+              </a:rPr>
+              <a:t>Predicted −</a:t>
+            </a:r>
+            <a:endParaRPr lang="en-US" sz="900" dirty="0"/>
+          </a:p>
+        </p:txBody>
+      </p:sp>
+      <p:sp>
+        <p:nvSpPr>
+          <p:cNvPr id="35" name="Text 33"/>
+          <p:cNvSpPr/>
+          <p:nvPr/>
+        </p:nvSpPr>
+        <p:spPr>
+          <a:xfrm>
+            <a:off x="640080" y="3364992"/>
+            <a:ext cx="548640" cy="548640"/>
+          </a:xfrm>
+          <a:prstGeom prst="rect">
+            <a:avLst/>
+          </a:prstGeom>
+          <a:noFill/>
+          <a:ln/>
+        </p:spPr>
+        <p:txBody>
+          <a:bodyPr wrap="square" lIns="508" tIns="508" rIns="508" bIns="508" rtlCol="0" anchor="ctr"/>
+          <a:lstStyle/>
+          <a:p>
+            <a:pPr algn="r" indent="0" marL="0">
+              <a:buNone/>
+            </a:pPr>
+            <a:r>
+              <a:rPr lang="en-US" sz="900" i="1" dirty="0">
+                <a:solidFill>
+                  <a:srgbClr val="555555"/>
+                </a:solidFill>
+              </a:rPr>
+              <a:t>Actual +</a:t>
+            </a:r>
+            <a:endParaRPr lang="en-US" sz="900" dirty="0"/>
+          </a:p>
+        </p:txBody>
+      </p:sp>
+      <p:sp>
+        <p:nvSpPr>
+          <p:cNvPr id="36" name="Text 34"/>
+          <p:cNvSpPr/>
+          <p:nvPr/>
+        </p:nvSpPr>
+        <p:spPr>
+          <a:xfrm>
+            <a:off x="640080" y="3913632"/>
+            <a:ext cx="548640" cy="548640"/>
+          </a:xfrm>
+          <a:prstGeom prst="rect">
+            <a:avLst/>
+          </a:prstGeom>
+          <a:noFill/>
+          <a:ln/>
+        </p:spPr>
+        <p:txBody>
+          <a:bodyPr wrap="square" lIns="508" tIns="508" rIns="508" bIns="508" rtlCol="0" anchor="ctr"/>
+          <a:lstStyle/>
+          <a:p>
+            <a:pPr algn="r" indent="0" marL="0">
+              <a:buNone/>
+            </a:pPr>
+            <a:r>
+              <a:rPr lang="en-US" sz="900" i="1" dirty="0">
+                <a:solidFill>
+                  <a:srgbClr val="555555"/>
+                </a:solidFill>
+              </a:rPr>
+              <a:t>Actual −</a:t>
+            </a:r>
+            <a:endParaRPr lang="en-US" sz="900" dirty="0"/>
+          </a:p>
+        </p:txBody>
+      </p:sp>
+      <p:sp>
+        <p:nvSpPr>
+          <p:cNvPr id="37" name="Shape 35"/>
+          <p:cNvSpPr/>
+          <p:nvPr/>
+        </p:nvSpPr>
+        <p:spPr>
+          <a:xfrm>
+            <a:off x="1188720" y="3438144"/>
+            <a:ext cx="1143000" cy="548640"/>
+          </a:xfrm>
+          <a:prstGeom prst="rect">
+            <a:avLst/>
+          </a:prstGeom>
+          <a:solidFill>
+            <a:srgbClr val="D4F0DC"/>
+          </a:solidFill>
+          <a:ln w="6350">
+            <a:solidFill>
+              <a:srgbClr val="999999"/>
+            </a:solidFill>
+            <a:prstDash val="solid"/>
+          </a:ln>
+        </p:spPr>
+      </p:sp>
+      <p:sp>
+        <p:nvSpPr>
+          <p:cNvPr id="38" name="Text 36"/>
+          <p:cNvSpPr/>
+          <p:nvPr/>
+        </p:nvSpPr>
+        <p:spPr>
+          <a:xfrm>
+            <a:off x="1188720" y="3438144"/>
+            <a:ext cx="1143000" cy="548640"/>
+          </a:xfrm>
+          <a:prstGeom prst="rect">
+            <a:avLst/>
+          </a:prstGeom>
+          <a:noFill/>
+          <a:ln/>
+        </p:spPr>
+        <p:txBody>
+          <a:bodyPr wrap="square" lIns="0" tIns="0" rIns="0" bIns="0" rtlCol="0" anchor="ctr"/>
+          <a:lstStyle/>
+          <a:p>
+            <a:pPr algn="ctr" indent="0" marL="0">
+              <a:buNone/>
+            </a:pPr>
+            <a:r>
+              <a:rPr lang="en-US" sz="2000" b="1" dirty="0">
+                <a:solidFill>
+                  <a:srgbClr val="0A7D2A"/>
+                </a:solidFill>
+              </a:rPr>
+              <a:t>9</a:t>
+            </a:r>
+            <a:endParaRPr lang="en-US" sz="2000" dirty="0"/>
+          </a:p>
+          <a:p>
+            <a:pPr algn="ctr" indent="0" marL="0">
+              <a:buNone/>
+            </a:pPr>
+            <a:r>
+              <a:rPr lang="en-US" sz="900" dirty="0">
+                <a:solidFill>
+                  <a:srgbClr val="666666"/>
+                </a:solidFill>
+              </a:rPr>
+              <a:t>TP</a:t>
+            </a:r>
+            <a:endParaRPr lang="en-US" sz="2000" dirty="0"/>
+          </a:p>
+        </p:txBody>
+      </p:sp>
+      <p:sp>
+        <p:nvSpPr>
+          <p:cNvPr id="39" name="Shape 37"/>
+          <p:cNvSpPr/>
+          <p:nvPr/>
+        </p:nvSpPr>
+        <p:spPr>
+          <a:xfrm>
+            <a:off x="2331720" y="3438144"/>
+            <a:ext cx="1143000" cy="548640"/>
+          </a:xfrm>
+          <a:prstGeom prst="rect">
+            <a:avLst/>
+          </a:prstGeom>
+          <a:solidFill>
+            <a:srgbClr val="F5D5CE"/>
+          </a:solidFill>
+          <a:ln w="6350">
+            <a:solidFill>
+              <a:srgbClr val="999999"/>
+            </a:solidFill>
+            <a:prstDash val="solid"/>
+          </a:ln>
+        </p:spPr>
+      </p:sp>
+      <p:sp>
+        <p:nvSpPr>
+          <p:cNvPr id="40" name="Text 38"/>
+          <p:cNvSpPr/>
+          <p:nvPr/>
+        </p:nvSpPr>
+        <p:spPr>
+          <a:xfrm>
+            <a:off x="2331720" y="3438144"/>
+            <a:ext cx="1143000" cy="548640"/>
+          </a:xfrm>
+          <a:prstGeom prst="rect">
+            <a:avLst/>
+          </a:prstGeom>
+          <a:noFill/>
+          <a:ln/>
+        </p:spPr>
+        <p:txBody>
+          <a:bodyPr wrap="square" lIns="0" tIns="0" rIns="0" bIns="0" rtlCol="0" anchor="ctr"/>
+          <a:lstStyle/>
+          <a:p>
+            <a:pPr algn="ctr" indent="0" marL="0">
+              <a:buNone/>
+            </a:pPr>
+            <a:r>
+              <a:rPr lang="en-US" sz="2000" b="1" dirty="0">
+                <a:solidFill>
+                  <a:srgbClr val="B33A1E"/>
+                </a:solidFill>
+              </a:rPr>
+              <a:t>0</a:t>
+            </a:r>
+            <a:endParaRPr lang="en-US" sz="2000" dirty="0"/>
+          </a:p>
+          <a:p>
+            <a:pPr algn="ctr" indent="0" marL="0">
+              <a:buNone/>
+            </a:pPr>
+            <a:r>
+              <a:rPr lang="en-US" sz="900" dirty="0">
+                <a:solidFill>
+                  <a:srgbClr val="666666"/>
+                </a:solidFill>
+              </a:rPr>
+              <a:t>FN</a:t>
+            </a:r>
+            <a:endParaRPr lang="en-US" sz="2000" dirty="0"/>
+          </a:p>
+        </p:txBody>
+      </p:sp>
+      <p:sp>
+        <p:nvSpPr>
+          <p:cNvPr id="41" name="Shape 39"/>
+          <p:cNvSpPr/>
+          <p:nvPr/>
+        </p:nvSpPr>
+        <p:spPr>
+          <a:xfrm>
+            <a:off x="1188720" y="3986784"/>
+            <a:ext cx="1143000" cy="548640"/>
+          </a:xfrm>
+          <a:prstGeom prst="rect">
+            <a:avLst/>
+          </a:prstGeom>
+          <a:solidFill>
+            <a:srgbClr val="F2F2F2"/>
+          </a:solidFill>
+          <a:ln w="6350">
+            <a:solidFill>
+              <a:srgbClr val="999999"/>
+            </a:solidFill>
+            <a:prstDash val="solid"/>
+          </a:ln>
+        </p:spPr>
+      </p:sp>
+      <p:sp>
+        <p:nvSpPr>
+          <p:cNvPr id="42" name="Text 40"/>
+          <p:cNvSpPr/>
+          <p:nvPr/>
+        </p:nvSpPr>
+        <p:spPr>
+          <a:xfrm>
+            <a:off x="1188720" y="3986784"/>
+            <a:ext cx="1143000" cy="548640"/>
+          </a:xfrm>
+          <a:prstGeom prst="rect">
+            <a:avLst/>
+          </a:prstGeom>
+          <a:noFill/>
+          <a:ln/>
+        </p:spPr>
+        <p:txBody>
+          <a:bodyPr wrap="square" lIns="0" tIns="0" rIns="0" bIns="0" rtlCol="0" anchor="ctr"/>
+          <a:lstStyle/>
+          <a:p>
+            <a:pPr algn="ctr" indent="0" marL="0">
+              <a:buNone/>
+            </a:pPr>
+            <a:r>
+              <a:rPr lang="en-US" sz="2000" b="1" dirty="0">
+                <a:solidFill>
+                  <a:srgbClr val="888888"/>
+                </a:solidFill>
+              </a:rPr>
+              <a:t>0</a:t>
+            </a:r>
+            <a:endParaRPr lang="en-US" sz="2000" dirty="0"/>
+          </a:p>
+          <a:p>
+            <a:pPr algn="ctr" indent="0" marL="0">
+              <a:buNone/>
+            </a:pPr>
+            <a:r>
+              <a:rPr lang="en-US" sz="900" dirty="0">
+                <a:solidFill>
+                  <a:srgbClr val="666666"/>
+                </a:solidFill>
+              </a:rPr>
+              <a:t>FP</a:t>
+            </a:r>
+            <a:endParaRPr lang="en-US" sz="2000" dirty="0"/>
+          </a:p>
+        </p:txBody>
+      </p:sp>
+      <p:sp>
+        <p:nvSpPr>
+          <p:cNvPr id="43" name="Shape 41"/>
+          <p:cNvSpPr/>
+          <p:nvPr/>
+        </p:nvSpPr>
+        <p:spPr>
+          <a:xfrm>
+            <a:off x="2331720" y="3986784"/>
+            <a:ext cx="1143000" cy="548640"/>
+          </a:xfrm>
+          <a:prstGeom prst="rect">
+            <a:avLst/>
+          </a:prstGeom>
+          <a:solidFill>
+            <a:srgbClr val="EAEAEA"/>
+          </a:solidFill>
+          <a:ln w="6350">
+            <a:solidFill>
+              <a:srgbClr val="999999"/>
+            </a:solidFill>
+            <a:prstDash val="solid"/>
+          </a:ln>
+        </p:spPr>
+      </p:sp>
+      <p:sp>
+        <p:nvSpPr>
+          <p:cNvPr id="44" name="Text 42"/>
+          <p:cNvSpPr/>
+          <p:nvPr/>
+        </p:nvSpPr>
+        <p:spPr>
+          <a:xfrm>
+            <a:off x="2331720" y="3986784"/>
+            <a:ext cx="1143000" cy="548640"/>
+          </a:xfrm>
+          <a:prstGeom prst="rect">
+            <a:avLst/>
+          </a:prstGeom>
+          <a:noFill/>
+          <a:ln/>
+        </p:spPr>
+        <p:txBody>
+          <a:bodyPr wrap="square" lIns="0" tIns="0" rIns="0" bIns="0" rtlCol="0" anchor="ctr"/>
+          <a:lstStyle/>
+          <a:p>
+            <a:pPr algn="ctr" indent="0" marL="0">
+              <a:buNone/>
+            </a:pPr>
+            <a:r>
+              <a:rPr lang="en-US" sz="2000" b="1" dirty="0">
+                <a:solidFill>
+                  <a:srgbClr val="555555"/>
+                </a:solidFill>
+              </a:rPr>
+              <a:t>36</a:t>
+            </a:r>
+            <a:endParaRPr lang="en-US" sz="2000" dirty="0"/>
+          </a:p>
+          <a:p>
+            <a:pPr algn="ctr" indent="0" marL="0">
+              <a:buNone/>
+            </a:pPr>
+            <a:r>
+              <a:rPr lang="en-US" sz="900" dirty="0">
+                <a:solidFill>
+                  <a:srgbClr val="666666"/>
+                </a:solidFill>
+              </a:rPr>
+              <a:t>TN</a:t>
+            </a:r>
+            <a:endParaRPr lang="en-US" sz="2000" dirty="0"/>
+          </a:p>
+        </p:txBody>
+      </p:sp>
+      <p:sp>
+        <p:nvSpPr>
+          <p:cNvPr id="45" name="Text 43"/>
+          <p:cNvSpPr/>
+          <p:nvPr/>
+        </p:nvSpPr>
+        <p:spPr>
+          <a:xfrm>
+            <a:off x="640080" y="4553712"/>
+            <a:ext cx="2834640" cy="201168"/>
+          </a:xfrm>
+          <a:prstGeom prst="rect">
+            <a:avLst/>
+          </a:prstGeom>
+          <a:noFill/>
+          <a:ln/>
+        </p:spPr>
+        <p:txBody>
+          <a:bodyPr wrap="square" lIns="0" tIns="0" rIns="0" bIns="0" rtlCol="0" anchor="ctr"/>
+          <a:lstStyle/>
+          <a:p>
+            <a:pPr algn="ctr" indent="0" marL="0">
+              <a:buNone/>
+            </a:pPr>
+            <a:r>
+              <a:rPr lang="en-US" sz="1100" i="1" dirty="0">
+                <a:solidFill>
+                  <a:srgbClr val="555555"/>
+                </a:solidFill>
+              </a:rPr>
+              <a:t>Precision </a:t>
+            </a:r>
+            <a:pPr algn="ctr" indent="0" marL="0">
+              <a:buNone/>
+            </a:pPr>
+            <a:r>
+              <a:rPr lang="en-US" sz="1100" b="1" i="1" dirty="0">
+                <a:solidFill>
+                  <a:srgbClr val="1A1A1A"/>
+                </a:solidFill>
+              </a:rPr>
+              <a:t>1.00</a:t>
+            </a:r>
+            <a:pPr algn="ctr" indent="0" marL="0">
+              <a:buNone/>
+            </a:pPr>
+            <a:r>
+              <a:rPr lang="en-US" sz="1100" i="1" dirty="0">
+                <a:solidFill>
+                  <a:srgbClr val="555555"/>
+                </a:solidFill>
+              </a:rPr>
+              <a:t>   ·   Recall </a:t>
+            </a:r>
+            <a:pPr algn="ctr" indent="0" marL="0">
+              <a:buNone/>
+            </a:pPr>
+            <a:r>
+              <a:rPr lang="en-US" sz="1100" b="1" i="1" dirty="0">
+                <a:solidFill>
+                  <a:srgbClr val="1A1A1A"/>
+                </a:solidFill>
+              </a:rPr>
+              <a:t>1.00</a:t>
+            </a:r>
+            <a:endParaRPr lang="en-US" sz="1100" dirty="0"/>
+          </a:p>
+        </p:txBody>
+      </p:sp>
+      <p:sp>
+        <p:nvSpPr>
+          <p:cNvPr id="46" name="Text 44"/>
+          <p:cNvSpPr/>
+          <p:nvPr/>
+        </p:nvSpPr>
+        <p:spPr>
+          <a:xfrm>
+            <a:off x="4754880" y="2926080"/>
+            <a:ext cx="2834640" cy="201168"/>
+          </a:xfrm>
+          <a:prstGeom prst="rect">
+            <a:avLst/>
+          </a:prstGeom>
+          <a:noFill/>
+          <a:ln/>
+        </p:spPr>
+        <p:txBody>
+          <a:bodyPr wrap="square" lIns="0" tIns="0" rIns="0" bIns="0" rtlCol="0" anchor="b"/>
+          <a:lstStyle/>
+          <a:p>
+            <a:pPr algn="ctr" indent="0" marL="0">
+              <a:buNone/>
+            </a:pPr>
+            <a:r>
+              <a:rPr lang="en-US" sz="1400" b="1" dirty="0">
                 <a:solidFill>
                   <a:srgbClr val="000000"/>
                 </a:solidFill>
               </a:rPr>
-              <a:t>Ablation confirms each process term contributes real signal; endpoint gain alone does not recover the ranking.</a:t>
-            </a:r>
-            <a:endParaRPr lang="en-US" sz="1600" dirty="0"/>
+              <a:t>Hygiene</a:t>
+            </a:r>
+            <a:endParaRPr lang="en-US" sz="1400" dirty="0"/>
+          </a:p>
+        </p:txBody>
+      </p:sp>
+      <p:sp>
+        <p:nvSpPr>
+          <p:cNvPr id="47" name="Text 45"/>
+          <p:cNvSpPr/>
+          <p:nvPr/>
+        </p:nvSpPr>
+        <p:spPr>
+          <a:xfrm>
+            <a:off x="5303520" y="3145536"/>
+            <a:ext cx="1143000" cy="201168"/>
+          </a:xfrm>
+          <a:prstGeom prst="rect">
+            <a:avLst/>
+          </a:prstGeom>
+          <a:noFill/>
+          <a:ln/>
+        </p:spPr>
+        <p:txBody>
+          <a:bodyPr wrap="square" lIns="0" tIns="0" rIns="0" bIns="0" rtlCol="0" anchor="ctr"/>
+          <a:lstStyle/>
+          <a:p>
+            <a:pPr algn="ctr" indent="0" marL="0">
+              <a:buNone/>
+            </a:pPr>
+            <a:r>
+              <a:rPr lang="en-US" sz="900" i="1" dirty="0">
+                <a:solidFill>
+                  <a:srgbClr val="555555"/>
+                </a:solidFill>
+              </a:rPr>
+              <a:t>Predicted +</a:t>
+            </a:r>
+            <a:endParaRPr lang="en-US" sz="900" dirty="0"/>
+          </a:p>
+        </p:txBody>
+      </p:sp>
+      <p:sp>
+        <p:nvSpPr>
+          <p:cNvPr id="48" name="Text 46"/>
+          <p:cNvSpPr/>
+          <p:nvPr/>
+        </p:nvSpPr>
+        <p:spPr>
+          <a:xfrm>
+            <a:off x="6446520" y="3145536"/>
+            <a:ext cx="1143000" cy="201168"/>
+          </a:xfrm>
+          <a:prstGeom prst="rect">
+            <a:avLst/>
+          </a:prstGeom>
+          <a:noFill/>
+          <a:ln/>
+        </p:spPr>
+        <p:txBody>
+          <a:bodyPr wrap="square" lIns="0" tIns="0" rIns="0" bIns="0" rtlCol="0" anchor="ctr"/>
+          <a:lstStyle/>
+          <a:p>
+            <a:pPr algn="ctr" indent="0" marL="0">
+              <a:buNone/>
+            </a:pPr>
+            <a:r>
+              <a:rPr lang="en-US" sz="900" i="1" dirty="0">
+                <a:solidFill>
+                  <a:srgbClr val="555555"/>
+                </a:solidFill>
+              </a:rPr>
+              <a:t>Predicted −</a:t>
+            </a:r>
+            <a:endParaRPr lang="en-US" sz="900" dirty="0"/>
+          </a:p>
+        </p:txBody>
+      </p:sp>
+      <p:sp>
+        <p:nvSpPr>
+          <p:cNvPr id="49" name="Text 47"/>
+          <p:cNvSpPr/>
+          <p:nvPr/>
+        </p:nvSpPr>
+        <p:spPr>
+          <a:xfrm>
+            <a:off x="4754880" y="3364992"/>
+            <a:ext cx="548640" cy="548640"/>
+          </a:xfrm>
+          <a:prstGeom prst="rect">
+            <a:avLst/>
+          </a:prstGeom>
+          <a:noFill/>
+          <a:ln/>
+        </p:spPr>
+        <p:txBody>
+          <a:bodyPr wrap="square" lIns="508" tIns="508" rIns="508" bIns="508" rtlCol="0" anchor="ctr"/>
+          <a:lstStyle/>
+          <a:p>
+            <a:pPr algn="r" indent="0" marL="0">
+              <a:buNone/>
+            </a:pPr>
+            <a:r>
+              <a:rPr lang="en-US" sz="900" i="1" dirty="0">
+                <a:solidFill>
+                  <a:srgbClr val="555555"/>
+                </a:solidFill>
+              </a:rPr>
+              <a:t>Actual +</a:t>
+            </a:r>
+            <a:endParaRPr lang="en-US" sz="900" dirty="0"/>
+          </a:p>
+        </p:txBody>
+      </p:sp>
+      <p:sp>
+        <p:nvSpPr>
+          <p:cNvPr id="50" name="Text 48"/>
+          <p:cNvSpPr/>
+          <p:nvPr/>
+        </p:nvSpPr>
+        <p:spPr>
+          <a:xfrm>
+            <a:off x="4754880" y="3913632"/>
+            <a:ext cx="548640" cy="548640"/>
+          </a:xfrm>
+          <a:prstGeom prst="rect">
+            <a:avLst/>
+          </a:prstGeom>
+          <a:noFill/>
+          <a:ln/>
+        </p:spPr>
+        <p:txBody>
+          <a:bodyPr wrap="square" lIns="508" tIns="508" rIns="508" bIns="508" rtlCol="0" anchor="ctr"/>
+          <a:lstStyle/>
+          <a:p>
+            <a:pPr algn="r" indent="0" marL="0">
+              <a:buNone/>
+            </a:pPr>
+            <a:r>
+              <a:rPr lang="en-US" sz="900" i="1" dirty="0">
+                <a:solidFill>
+                  <a:srgbClr val="555555"/>
+                </a:solidFill>
+              </a:rPr>
+              <a:t>Actual −</a:t>
+            </a:r>
+            <a:endParaRPr lang="en-US" sz="900" dirty="0"/>
+          </a:p>
+        </p:txBody>
+      </p:sp>
+      <p:sp>
+        <p:nvSpPr>
+          <p:cNvPr id="51" name="Shape 49"/>
+          <p:cNvSpPr/>
+          <p:nvPr/>
+        </p:nvSpPr>
+        <p:spPr>
+          <a:xfrm>
+            <a:off x="5303520" y="3438144"/>
+            <a:ext cx="1143000" cy="548640"/>
+          </a:xfrm>
+          <a:prstGeom prst="rect">
+            <a:avLst/>
+          </a:prstGeom>
+          <a:solidFill>
+            <a:srgbClr val="D4F0DC"/>
+          </a:solidFill>
+          <a:ln w="6350">
+            <a:solidFill>
+              <a:srgbClr val="999999"/>
+            </a:solidFill>
+            <a:prstDash val="solid"/>
+          </a:ln>
+        </p:spPr>
+      </p:sp>
+      <p:sp>
+        <p:nvSpPr>
+          <p:cNvPr id="52" name="Text 50"/>
+          <p:cNvSpPr/>
+          <p:nvPr/>
+        </p:nvSpPr>
+        <p:spPr>
+          <a:xfrm>
+            <a:off x="5303520" y="3438144"/>
+            <a:ext cx="1143000" cy="548640"/>
+          </a:xfrm>
+          <a:prstGeom prst="rect">
+            <a:avLst/>
+          </a:prstGeom>
+          <a:noFill/>
+          <a:ln/>
+        </p:spPr>
+        <p:txBody>
+          <a:bodyPr wrap="square" lIns="0" tIns="0" rIns="0" bIns="0" rtlCol="0" anchor="ctr"/>
+          <a:lstStyle/>
+          <a:p>
+            <a:pPr algn="ctr" indent="0" marL="0">
+              <a:buNone/>
+            </a:pPr>
+            <a:r>
+              <a:rPr lang="en-US" sz="2000" b="1" dirty="0">
+                <a:solidFill>
+                  <a:srgbClr val="0A7D2A"/>
+                </a:solidFill>
+              </a:rPr>
+              <a:t>8</a:t>
+            </a:r>
+            <a:endParaRPr lang="en-US" sz="2000" dirty="0"/>
+          </a:p>
+          <a:p>
+            <a:pPr algn="ctr" indent="0" marL="0">
+              <a:buNone/>
+            </a:pPr>
+            <a:r>
+              <a:rPr lang="en-US" sz="900" dirty="0">
+                <a:solidFill>
+                  <a:srgbClr val="666666"/>
+                </a:solidFill>
+              </a:rPr>
+              <a:t>TP</a:t>
+            </a:r>
+            <a:endParaRPr lang="en-US" sz="2000" dirty="0"/>
+          </a:p>
+        </p:txBody>
+      </p:sp>
+      <p:sp>
+        <p:nvSpPr>
+          <p:cNvPr id="53" name="Shape 51"/>
+          <p:cNvSpPr/>
+          <p:nvPr/>
+        </p:nvSpPr>
+        <p:spPr>
+          <a:xfrm>
+            <a:off x="6446520" y="3438144"/>
+            <a:ext cx="1143000" cy="548640"/>
+          </a:xfrm>
+          <a:prstGeom prst="rect">
+            <a:avLst/>
+          </a:prstGeom>
+          <a:solidFill>
+            <a:srgbClr val="F5D5CE"/>
+          </a:solidFill>
+          <a:ln w="6350">
+            <a:solidFill>
+              <a:srgbClr val="999999"/>
+            </a:solidFill>
+            <a:prstDash val="solid"/>
+          </a:ln>
+        </p:spPr>
+      </p:sp>
+      <p:sp>
+        <p:nvSpPr>
+          <p:cNvPr id="54" name="Text 52"/>
+          <p:cNvSpPr/>
+          <p:nvPr/>
+        </p:nvSpPr>
+        <p:spPr>
+          <a:xfrm>
+            <a:off x="6446520" y="3438144"/>
+            <a:ext cx="1143000" cy="548640"/>
+          </a:xfrm>
+          <a:prstGeom prst="rect">
+            <a:avLst/>
+          </a:prstGeom>
+          <a:noFill/>
+          <a:ln/>
+        </p:spPr>
+        <p:txBody>
+          <a:bodyPr wrap="square" lIns="0" tIns="0" rIns="0" bIns="0" rtlCol="0" anchor="ctr"/>
+          <a:lstStyle/>
+          <a:p>
+            <a:pPr algn="ctr" indent="0" marL="0">
+              <a:buNone/>
+            </a:pPr>
+            <a:r>
+              <a:rPr lang="en-US" sz="2000" b="1" dirty="0">
+                <a:solidFill>
+                  <a:srgbClr val="B33A1E"/>
+                </a:solidFill>
+              </a:rPr>
+              <a:t>0</a:t>
+            </a:r>
+            <a:endParaRPr lang="en-US" sz="2000" dirty="0"/>
+          </a:p>
+          <a:p>
+            <a:pPr algn="ctr" indent="0" marL="0">
+              <a:buNone/>
+            </a:pPr>
+            <a:r>
+              <a:rPr lang="en-US" sz="900" dirty="0">
+                <a:solidFill>
+                  <a:srgbClr val="666666"/>
+                </a:solidFill>
+              </a:rPr>
+              <a:t>FN</a:t>
+            </a:r>
+            <a:endParaRPr lang="en-US" sz="2000" dirty="0"/>
+          </a:p>
+        </p:txBody>
+      </p:sp>
+      <p:sp>
+        <p:nvSpPr>
+          <p:cNvPr id="55" name="Shape 53"/>
+          <p:cNvSpPr/>
+          <p:nvPr/>
+        </p:nvSpPr>
+        <p:spPr>
+          <a:xfrm>
+            <a:off x="5303520" y="3986784"/>
+            <a:ext cx="1143000" cy="548640"/>
+          </a:xfrm>
+          <a:prstGeom prst="rect">
+            <a:avLst/>
+          </a:prstGeom>
+          <a:solidFill>
+            <a:srgbClr val="F2F2F2"/>
+          </a:solidFill>
+          <a:ln w="6350">
+            <a:solidFill>
+              <a:srgbClr val="999999"/>
+            </a:solidFill>
+            <a:prstDash val="solid"/>
+          </a:ln>
+        </p:spPr>
+      </p:sp>
+      <p:sp>
+        <p:nvSpPr>
+          <p:cNvPr id="56" name="Text 54"/>
+          <p:cNvSpPr/>
+          <p:nvPr/>
+        </p:nvSpPr>
+        <p:spPr>
+          <a:xfrm>
+            <a:off x="5303520" y="3986784"/>
+            <a:ext cx="1143000" cy="548640"/>
+          </a:xfrm>
+          <a:prstGeom prst="rect">
+            <a:avLst/>
+          </a:prstGeom>
+          <a:noFill/>
+          <a:ln/>
+        </p:spPr>
+        <p:txBody>
+          <a:bodyPr wrap="square" lIns="0" tIns="0" rIns="0" bIns="0" rtlCol="0" anchor="ctr"/>
+          <a:lstStyle/>
+          <a:p>
+            <a:pPr algn="ctr" indent="0" marL="0">
+              <a:buNone/>
+            </a:pPr>
+            <a:r>
+              <a:rPr lang="en-US" sz="2000" b="1" dirty="0">
+                <a:solidFill>
+                  <a:srgbClr val="888888"/>
+                </a:solidFill>
+              </a:rPr>
+              <a:t>0</a:t>
+            </a:r>
+            <a:endParaRPr lang="en-US" sz="2000" dirty="0"/>
+          </a:p>
+          <a:p>
+            <a:pPr algn="ctr" indent="0" marL="0">
+              <a:buNone/>
+            </a:pPr>
+            <a:r>
+              <a:rPr lang="en-US" sz="900" dirty="0">
+                <a:solidFill>
+                  <a:srgbClr val="666666"/>
+                </a:solidFill>
+              </a:rPr>
+              <a:t>FP</a:t>
+            </a:r>
+            <a:endParaRPr lang="en-US" sz="2000" dirty="0"/>
+          </a:p>
+        </p:txBody>
+      </p:sp>
+      <p:sp>
+        <p:nvSpPr>
+          <p:cNvPr id="57" name="Shape 55"/>
+          <p:cNvSpPr/>
+          <p:nvPr/>
+        </p:nvSpPr>
+        <p:spPr>
+          <a:xfrm>
+            <a:off x="6446520" y="3986784"/>
+            <a:ext cx="1143000" cy="548640"/>
+          </a:xfrm>
+          <a:prstGeom prst="rect">
+            <a:avLst/>
+          </a:prstGeom>
+          <a:solidFill>
+            <a:srgbClr val="EAEAEA"/>
+          </a:solidFill>
+          <a:ln w="6350">
+            <a:solidFill>
+              <a:srgbClr val="999999"/>
+            </a:solidFill>
+            <a:prstDash val="solid"/>
+          </a:ln>
+        </p:spPr>
+      </p:sp>
+      <p:sp>
+        <p:nvSpPr>
+          <p:cNvPr id="58" name="Text 56"/>
+          <p:cNvSpPr/>
+          <p:nvPr/>
+        </p:nvSpPr>
+        <p:spPr>
+          <a:xfrm>
+            <a:off x="6446520" y="3986784"/>
+            <a:ext cx="1143000" cy="548640"/>
+          </a:xfrm>
+          <a:prstGeom prst="rect">
+            <a:avLst/>
+          </a:prstGeom>
+          <a:noFill/>
+          <a:ln/>
+        </p:spPr>
+        <p:txBody>
+          <a:bodyPr wrap="square" lIns="0" tIns="0" rIns="0" bIns="0" rtlCol="0" anchor="ctr"/>
+          <a:lstStyle/>
+          <a:p>
+            <a:pPr algn="ctr" indent="0" marL="0">
+              <a:buNone/>
+            </a:pPr>
+            <a:r>
+              <a:rPr lang="en-US" sz="2000" b="1" dirty="0">
+                <a:solidFill>
+                  <a:srgbClr val="555555"/>
+                </a:solidFill>
+              </a:rPr>
+              <a:t>37</a:t>
+            </a:r>
+            <a:endParaRPr lang="en-US" sz="2000" dirty="0"/>
+          </a:p>
+          <a:p>
+            <a:pPr algn="ctr" indent="0" marL="0">
+              <a:buNone/>
+            </a:pPr>
+            <a:r>
+              <a:rPr lang="en-US" sz="900" dirty="0">
+                <a:solidFill>
+                  <a:srgbClr val="666666"/>
+                </a:solidFill>
+              </a:rPr>
+              <a:t>TN</a:t>
+            </a:r>
+            <a:endParaRPr lang="en-US" sz="2000" dirty="0"/>
+          </a:p>
+        </p:txBody>
+      </p:sp>
+      <p:sp>
+        <p:nvSpPr>
+          <p:cNvPr id="59" name="Text 57"/>
+          <p:cNvSpPr/>
+          <p:nvPr/>
+        </p:nvSpPr>
+        <p:spPr>
+          <a:xfrm>
+            <a:off x="4754880" y="4553712"/>
+            <a:ext cx="2834640" cy="201168"/>
+          </a:xfrm>
+          <a:prstGeom prst="rect">
+            <a:avLst/>
+          </a:prstGeom>
+          <a:noFill/>
+          <a:ln/>
+        </p:spPr>
+        <p:txBody>
+          <a:bodyPr wrap="square" lIns="0" tIns="0" rIns="0" bIns="0" rtlCol="0" anchor="ctr"/>
+          <a:lstStyle/>
+          <a:p>
+            <a:pPr algn="ctr" indent="0" marL="0">
+              <a:buNone/>
+            </a:pPr>
+            <a:r>
+              <a:rPr lang="en-US" sz="1100" i="1" dirty="0">
+                <a:solidFill>
+                  <a:srgbClr val="555555"/>
+                </a:solidFill>
+              </a:rPr>
+              <a:t>Precision </a:t>
+            </a:r>
+            <a:pPr algn="ctr" indent="0" marL="0">
+              <a:buNone/>
+            </a:pPr>
+            <a:r>
+              <a:rPr lang="en-US" sz="1100" b="1" i="1" dirty="0">
+                <a:solidFill>
+                  <a:srgbClr val="1A1A1A"/>
+                </a:solidFill>
+              </a:rPr>
+              <a:t>1.00</a:t>
+            </a:r>
+            <a:pPr algn="ctr" indent="0" marL="0">
+              <a:buNone/>
+            </a:pPr>
+            <a:r>
+              <a:rPr lang="en-US" sz="1100" i="1" dirty="0">
+                <a:solidFill>
+                  <a:srgbClr val="555555"/>
+                </a:solidFill>
+              </a:rPr>
+              <a:t>   ·   Recall </a:t>
+            </a:r>
+            <a:pPr algn="ctr" indent="0" marL="0">
+              <a:buNone/>
+            </a:pPr>
+            <a:r>
+              <a:rPr lang="en-US" sz="1100" b="1" i="1" dirty="0">
+                <a:solidFill>
+                  <a:srgbClr val="1A1A1A"/>
+                </a:solidFill>
+              </a:rPr>
+              <a:t>1.00</a:t>
+            </a:r>
+            <a:endParaRPr lang="en-US" sz="1100" dirty="0"/>
+          </a:p>
+        </p:txBody>
+      </p:sp>
+      <p:sp>
+        <p:nvSpPr>
+          <p:cNvPr id="60" name="Text 58"/>
+          <p:cNvSpPr/>
+          <p:nvPr/>
+        </p:nvSpPr>
+        <p:spPr>
+          <a:xfrm>
+            <a:off x="365760" y="4846320"/>
+            <a:ext cx="8412480" cy="256032"/>
+          </a:xfrm>
+          <a:prstGeom prst="rect">
+            <a:avLst/>
+          </a:prstGeom>
+          <a:noFill/>
+          <a:ln/>
+        </p:spPr>
+        <p:txBody>
+          <a:bodyPr wrap="square" lIns="0" tIns="0" rIns="0" bIns="0" rtlCol="0" anchor="ctr"/>
+          <a:lstStyle/>
+          <a:p>
+            <a:pPr algn="ctr" indent="0" marL="0">
+              <a:buNone/>
+            </a:pPr>
+            <a:r>
+              <a:rPr lang="en-US" sz="900" i="1" dirty="0">
+                <a:solidFill>
+                  <a:srgbClr val="555555"/>
+                </a:solidFill>
+              </a:rPr>
+              <a:t>Ordering recall is the outlier: the reorder synthesiser's splitOnInvalid validator rejects any window containing a step it cannot safely.</a:t>
+            </a:r>
+            <a:endParaRPr lang="en-US" sz="900" dirty="0"/>
           </a:p>
         </p:txBody>
       </p:sp>
@@ -4445,7 +6796,7 @@
                   <a:srgbClr val="000000"/>
                 </a:solidFill>
               </a:rPr>
-              <a:t>User study: does feedback change behaviour?</a:t>
+              <a:t>Score robustness</a:t>
             </a:r>
             <a:endParaRPr lang="en-US" sz="2800" dirty="0"/>
           </a:p>
@@ -4485,7 +6836,7 @@
                   <a:srgbClr val="000000"/>
                 </a:solidFill>
               </a:rPr>
-              <a:t>With-feedback group: 2.7 divergence points per session.</a:t>
+              <a:t>Single-knob sensitivity sweep: scale any one weight by {0.1×–10×}, top-1 recommendation is preserved in 96.5% of user-study cases.</a:t>
             </a:r>
             <a:endParaRPr lang="en-US" sz="1600" dirty="0"/>
           </a:p>
@@ -4503,7 +6854,7 @@
                   <a:srgbClr val="000000"/>
                 </a:solidFill>
               </a:rPr>
-              <a:t>No-feedback baseline: 6.0 divergence points per session -2.2× difference.</a:t>
+              <a:t>Multi-knob Monte Carlo (200 samples): top-1 stability drops to 84.6%; mean Kendall τ = 0.586.</a:t>
             </a:r>
             <a:endParaRPr lang="en-US" sz="1600" dirty="0"/>
           </a:p>
@@ -4521,7 +6872,7 @@
                   <a:srgbClr val="000000"/>
                 </a:solidFill>
               </a:rPr>
-              <a:t>Gain-stripped process-score slope across the 6-session arc -+4.47 per session with feedback, −0.40 per session without.</a:t>
+              <a:t>Honest framing - stable near the chosen weights, less stable under arbitrary joint perturbations.</a:t>
             </a:r>
             <a:endParaRPr lang="en-US" sz="1600" dirty="0"/>
           </a:p>
@@ -4539,7 +6890,7 @@
                   <a:srgbClr val="000000"/>
                 </a:solidFill>
               </a:rPr>
-              <a:t>Caveat: n=3 vs n=2 is directional evidence, not a hypothesis test.</a:t>
+              <a:t>Ablation confirms each process term contributes real signal; endpoint gain alone does not recover the ranking.</a:t>
             </a:r>
             <a:endParaRPr lang="en-US" sz="1600" dirty="0"/>
           </a:p>
@@ -4600,7 +6951,7 @@
                   <a:srgbClr val="000000"/>
                 </a:solidFill>
               </a:rPr>
-              <a:t>Contributions</a:t>
+              <a:t>User study: does feedback change behaviour?</a:t>
             </a:r>
             <a:endParaRPr lang="en-US" sz="2800" dirty="0"/>
           </a:p>
@@ -4640,7 +6991,7 @@
                   <a:srgbClr val="000000"/>
                 </a:solidFill>
               </a:rPr>
-              <a:t>A process-quality metric J(τ) combining endpoint, process, and safety signals in one principled score.</a:t>
+              <a:t>With-feedback group: 2.7 divergence points per session.</a:t>
             </a:r>
             <a:endParaRPr lang="en-US" sz="1600" dirty="0"/>
           </a:p>
@@ -4658,7 +7009,7 @@
                   <a:srgbClr val="000000"/>
                 </a:solidFill>
               </a:rPr>
-              <a:t>A divergence-point detector with four actionable kinds, each with a per-kind synthesiser that constructs a concrete alternative trajectory.</a:t>
+              <a:t>No-feedback baseline: 6.0 divergence points per session -2.2× difference.</a:t>
             </a:r>
             <a:endParaRPr lang="en-US" sz="1600" dirty="0"/>
           </a:p>
@@ -4676,7 +7027,7 @@
                   <a:srgbClr val="000000"/>
                 </a:solidFill>
               </a:rPr>
-              <a:t>Three datasets -45 injection sessions, 30-session user study, 48-session agent extension - with reproducible analysis (Jupyter notebook reproduces every table and figure).</a:t>
+              <a:t>Gain-stripped process-score slope across the 6-session arc -+4.47 per session with feedback, −0.40 per session without.</a:t>
             </a:r>
             <a:endParaRPr lang="en-US" sz="1600" dirty="0"/>
           </a:p>
@@ -4694,7 +7045,7 @@
                   <a:srgbClr val="000000"/>
                 </a:solidFill>
               </a:rPr>
-              <a:t>A deployable end-to-end system: IntelliJ plugin, analysis backend, and dashboard.</a:t>
+              <a:t>Caveat: n=3 vs n=2 is directional evidence, not a hypothesis test.</a:t>
             </a:r>
             <a:endParaRPr lang="en-US" sz="1600" dirty="0"/>
           </a:p>
@@ -4890,6 +7241,161 @@
                 </a:solidFill>
               </a:rPr>
               <a:t>Endpoint-only evaluation cannot tell them apart.</a:t>
+            </a:r>
+            <a:endParaRPr lang="en-US" sz="1600" dirty="0"/>
+          </a:p>
+        </p:txBody>
+      </p:sp>
+    </p:spTree>
+  </p:cSld>
+  <p:clrMapOvr>
+    <a:masterClrMapping/>
+  </p:clrMapOvr>
+</p:sld>
+</file>
+
+<file path=ppt/slides/slide20.xml><?xml version="1.0" encoding="utf-8"?>
+<p:sld xmlns:a="http://schemas.openxmlformats.org/drawingml/2006/main" xmlns:r="http://schemas.openxmlformats.org/officeDocument/2006/relationships" xmlns:p="http://schemas.openxmlformats.org/presentationml/2006/main">
+  <p:cSld name="Slide 20">
+    <p:spTree>
+      <p:nvGrpSpPr>
+        <p:cNvPr id="1" name=""/>
+        <p:cNvGrpSpPr/>
+        <p:nvPr/>
+      </p:nvGrpSpPr>
+      <p:grpSpPr>
+        <a:xfrm>
+          <a:off x="0" y="0"/>
+          <a:ext cx="0" cy="0"/>
+          <a:chOff x="0" y="0"/>
+          <a:chExt cx="0" cy="0"/>
+        </a:xfrm>
+      </p:grpSpPr>
+      <p:sp>
+        <p:nvSpPr>
+          <p:cNvPr id="2" name="Text 0"/>
+          <p:cNvSpPr/>
+          <p:nvPr/>
+        </p:nvSpPr>
+        <p:spPr>
+          <a:xfrm>
+            <a:off x="457200" y="274320"/>
+            <a:ext cx="8229600" cy="640080"/>
+          </a:xfrm>
+          <a:prstGeom prst="rect">
+            <a:avLst/>
+          </a:prstGeom>
+          <a:noFill/>
+          <a:ln/>
+        </p:spPr>
+        <p:txBody>
+          <a:bodyPr wrap="square" lIns="0" tIns="0" rIns="0" bIns="0" rtlCol="0" anchor="ctr"/>
+          <a:lstStyle/>
+          <a:p>
+            <a:pPr indent="0" marL="0">
+              <a:buNone/>
+            </a:pPr>
+            <a:r>
+              <a:rPr lang="en-US" sz="2800" b="1" dirty="0">
+                <a:solidFill>
+                  <a:srgbClr val="000000"/>
+                </a:solidFill>
+              </a:rPr>
+              <a:t>Contributions</a:t>
+            </a:r>
+            <a:endParaRPr lang="en-US" sz="2800" dirty="0"/>
+          </a:p>
+        </p:txBody>
+      </p:sp>
+      <p:sp>
+        <p:nvSpPr>
+          <p:cNvPr id="3" name="Text 1"/>
+          <p:cNvSpPr/>
+          <p:nvPr/>
+        </p:nvSpPr>
+        <p:spPr>
+          <a:xfrm>
+            <a:off x="457200" y="1188720"/>
+            <a:ext cx="8229600" cy="3657600"/>
+          </a:xfrm>
+          <a:prstGeom prst="rect">
+            <a:avLst/>
+          </a:prstGeom>
+          <a:noFill/>
+          <a:ln/>
+        </p:spPr>
+        <p:txBody>
+          <a:bodyPr wrap="square" rtlCol="0" anchor="t"/>
+          <a:lstStyle/>
+          <a:p>
+            <a:pPr marL="342900" indent="-342900">
+              <a:spcAft>
+                <a:spcPts val="600"/>
+              </a:spcAft>
+              <a:buSzPct val="100000"/>
+              <a:buChar char="•"/>
+            </a:pPr>
+            <a:r>
+              <a:rPr lang="en-US" sz="1600" dirty="0">
+                <a:solidFill>
+                  <a:srgbClr val="000000"/>
+                </a:solidFill>
+              </a:rPr>
+              <a:t>A process-quality metric J(τ) combining endpoint, process, and safety signals in one principled score.</a:t>
+            </a:r>
+            <a:endParaRPr lang="en-US" sz="1600" dirty="0"/>
+          </a:p>
+          <a:p>
+            <a:pPr marL="342900" indent="-342900">
+              <a:spcAft>
+                <a:spcPts val="600"/>
+              </a:spcAft>
+              <a:buSzPct val="100000"/>
+              <a:buChar char="•"/>
+            </a:pPr>
+            <a:r>
+              <a:rPr lang="en-US" sz="1600" dirty="0">
+                <a:solidFill>
+                  <a:srgbClr val="000000"/>
+                </a:solidFill>
+              </a:rPr>
+              <a:t>A divergence-point detector with four actionable kinds, each with a per-kind synthesiser that constructs a concrete alternative trajectory.</a:t>
+            </a:r>
+            <a:endParaRPr lang="en-US" sz="1600" dirty="0"/>
+          </a:p>
+          <a:p>
+            <a:pPr marL="342900" indent="-342900">
+              <a:spcAft>
+                <a:spcPts val="600"/>
+              </a:spcAft>
+              <a:buSzPct val="100000"/>
+              <a:buChar char="•"/>
+            </a:pPr>
+            <a:r>
+              <a:rPr lang="en-US" sz="1600" dirty="0">
+                <a:solidFill>
+                  <a:srgbClr val="000000"/>
+                </a:solidFill>
+              </a:rPr>
+              <a:t>Three datasets -45 injection sessions, 30-session user study, 48-session agent extension - with reproducible analysis (Jupyter notebook reproduces every table and figure).</a:t>
+            </a:r>
+            <a:endParaRPr lang="en-US" sz="1600" dirty="0"/>
+          </a:p>
+          <a:p>
+            <a:pPr marL="342900" indent="-342900">
+              <a:spcAft>
+                <a:spcPts val="600"/>
+              </a:spcAft>
+              <a:buSzPct val="100000"/>
+              <a:buChar char="•"/>
+            </a:pPr>
+            <a:r>
+              <a:rPr lang="en-US" sz="1600" dirty="0">
+                <a:solidFill>
+                  <a:srgbClr val="000000"/>
+                </a:solidFill>
+              </a:rPr>
+              <a:t>A deployable end-to-end system: IntelliJ plugin, analysis backend, and dashboard.</a:t>
             </a:r>
             <a:endParaRPr lang="en-US" sz="1600" dirty="0"/>
           </a:p>

--- a/presentation/slides.pptx
+++ b/presentation/slides.pptx
@@ -25,9 +25,10 @@
     <p:sldId id="273" r:id="rId19"/>
     <p:sldId id="274" r:id="rId20"/>
     <p:sldId id="275" r:id="rId21"/>
+    <p:sldId id="276" r:id="rId22"/>
   </p:sldIdLst>
   <p:notesMasterIdLst>
-    <p:notesMasterId r:id="rId22"/>
+    <p:notesMasterId r:id="rId23"/>
   </p:notesMasterIdLst>
   <p:sldSz cx="9144000" cy="5143500"/>
   <p:notesSz cx="5143500" cy="9144000"/>
@@ -1601,6 +1602,94 @@
             <a:fld id="{F7021451-1387-4CA6-816F-3879F97B5CBC}" type="slidenum">
               <a:rPr lang="en-US"/>
               <a:t>20</a:t>
+            </a:fld>
+            <a:endParaRPr lang="en-US"/>
+          </a:p>
+        </p:txBody>
+      </p:sp>
+    </p:spTree>
+    <p:extLst>
+      <p:ext uri="{BB962C8B-B14F-4D97-AF65-F5344CB8AC3E}">
+        <p14:creationId xmlns:p14="http://schemas.microsoft.com/office/powerpoint/2010/main" val="1024086991"/>
+      </p:ext>
+    </p:extLst>
+  </p:cSld>
+  <p:clrMapOvr>
+    <a:masterClrMapping/>
+  </p:clrMapOvr>
+</p:notes>
+</file>
+
+<file path=ppt/notesSlides/notesSlide21.xml><?xml version="1.0" encoding="utf-8"?>
+<p:notes xmlns:a="http://schemas.openxmlformats.org/drawingml/2006/main" xmlns:r="http://schemas.openxmlformats.org/officeDocument/2006/relationships" xmlns:p="http://schemas.openxmlformats.org/presentationml/2006/main">
+  <p:cSld>
+    <p:spTree>
+      <p:nvGrpSpPr>
+        <p:cNvPr id="1" name=""/>
+        <p:cNvGrpSpPr/>
+        <p:nvPr/>
+      </p:nvGrpSpPr>
+      <p:grpSpPr>
+        <a:xfrm>
+          <a:off x="0" y="0"/>
+          <a:ext cx="0" cy="0"/>
+          <a:chOff x="0" y="0"/>
+          <a:chExt cx="0" cy="0"/>
+        </a:xfrm>
+      </p:grpSpPr>
+      <p:sp>
+        <p:nvSpPr>
+          <p:cNvPr id="2" name="Slide Image Placeholder 1"/>
+          <p:cNvSpPr>
+            <a:spLocks noGrp="1" noRot="1" noChangeAspect="1"/>
+          </p:cNvSpPr>
+          <p:nvPr>
+            <p:ph type="sldImg"/>
+          </p:nvPr>
+        </p:nvSpPr>
+        <p:spPr/>
+      </p:sp>
+      <p:sp>
+        <p:nvSpPr>
+          <p:cNvPr id="3" name="Notes Placeholder 2"/>
+          <p:cNvSpPr>
+            <a:spLocks noGrp="1"/>
+          </p:cNvSpPr>
+          <p:nvPr>
+            <p:ph type="body" idx="1"/>
+          </p:nvPr>
+        </p:nvSpPr>
+        <p:spPr/>
+        <p:txBody>
+          <a:bodyPr/>
+          <a:lstStyle/>
+          <a:p>
+            <a:r>
+              <a:rPr lang="en-US" dirty="0"/>
+              <a:t/>
+            </a:r>
+            <a:endParaRPr lang="en-US" dirty="0"/>
+          </a:p>
+        </p:txBody>
+      </p:sp>
+      <p:sp>
+        <p:nvSpPr>
+          <p:cNvPr id="4" name="Slide Number Placeholder 3"/>
+          <p:cNvSpPr>
+            <a:spLocks noGrp="1"/>
+          </p:cNvSpPr>
+          <p:nvPr>
+            <p:ph type="sldNum" sz="quarter" idx="10"/>
+          </p:nvPr>
+        </p:nvSpPr>
+        <p:spPr/>
+        <p:txBody>
+          <a:bodyPr/>
+          <a:lstStyle/>
+          <a:p>
+            <a:fld id="{F7021451-1387-4CA6-816F-3879F97B5CBC}" type="slidenum">
+              <a:rPr lang="en-US"/>
+              <a:t>21</a:t>
             </a:fld>
             <a:endParaRPr lang="en-US"/>
           </a:p>
@@ -3009,7 +3098,7 @@
                   <a:srgbClr val="000000"/>
                 </a:solidFill>
               </a:rPr>
-              <a:t>Detect: run RefactoringMiner on sliding commit windows; cross-check against the IDE event stream — anything RefactoringMiner finds that the IDE did not emit is a manual refactoring.</a:t>
+              <a:t>Detect: run RefactoringMiner on sliding commit windows; cross-check against the IDE event stream - anything RefactoringMiner finds that the IDE did not emit is a manual refactoring.</a:t>
             </a:r>
             <a:endParaRPr lang="en-US" sz="1300" dirty="0"/>
           </a:p>
@@ -3826,7 +3915,7 @@
                             <a:srgbClr val="1A1A1A"/>
                           </a:solidFill>
                         </a:rPr>
-                        <a:t>Is the tool accurate? Does it detect real divergences without false positives?</a:t>
+                        <a:t>Is the tool accurate? Are the alternatives it generates actually better?</a:t>
                       </a:r>
                       <a:endParaRPr lang="en-US" sz="1300" dirty="0"/>
                     </a:p>
@@ -6774,8 +6863,8 @@
         </p:nvSpPr>
         <p:spPr>
           <a:xfrm>
-            <a:off x="457200" y="274320"/>
-            <a:ext cx="8229600" cy="640080"/>
+            <a:off x="457200" y="91440"/>
+            <a:ext cx="8229600" cy="548640"/>
           </a:xfrm>
           <a:prstGeom prst="rect">
             <a:avLst/>
@@ -6796,7 +6885,7 @@
                   <a:srgbClr val="000000"/>
                 </a:solidFill>
               </a:rPr>
-              <a:t>Score robustness</a:t>
+              <a:t>Are the alternatives actually better?</a:t>
             </a:r>
             <a:endParaRPr lang="en-US" sz="2800" dirty="0"/>
           </a:p>
@@ -6810,8 +6899,8 @@
         </p:nvSpPr>
         <p:spPr>
           <a:xfrm>
-            <a:off x="457200" y="1188720"/>
-            <a:ext cx="8229600" cy="3657600"/>
+            <a:off x="457200" y="713232"/>
+            <a:ext cx="8229600" cy="274320"/>
           </a:xfrm>
           <a:prstGeom prst="rect">
             <a:avLst/>
@@ -6820,79 +6909,2200 @@
           <a:ln/>
         </p:spPr>
         <p:txBody>
-          <a:bodyPr wrap="square" rtlCol="0" anchor="t"/>
-          <a:lstStyle/>
-          <a:p>
-            <a:pPr marL="342900" indent="-342900">
-              <a:spcAft>
-                <a:spcPts val="600"/>
-              </a:spcAft>
-              <a:buSzPct val="100000"/>
-              <a:buChar char="•"/>
-            </a:pPr>
-            <a:r>
-              <a:rPr lang="en-US" sz="1600" dirty="0">
-                <a:solidFill>
-                  <a:srgbClr val="000000"/>
-                </a:solidFill>
-              </a:rPr>
-              <a:t>Single-knob sensitivity sweep: scale any one weight by {0.1×–10×}, top-1 recommendation is preserved in 96.5% of user-study cases.</a:t>
-            </a:r>
-            <a:endParaRPr lang="en-US" sz="1600" dirty="0"/>
-          </a:p>
-          <a:p>
-            <a:pPr marL="342900" indent="-342900">
-              <a:spcAft>
-                <a:spcPts val="600"/>
-              </a:spcAft>
-              <a:buSzPct val="100000"/>
-              <a:buChar char="•"/>
-            </a:pPr>
-            <a:r>
-              <a:rPr lang="en-US" sz="1600" dirty="0">
-                <a:solidFill>
-                  <a:srgbClr val="000000"/>
-                </a:solidFill>
-              </a:rPr>
-              <a:t>Multi-knob Monte Carlo (200 samples): top-1 stability drops to 84.6%; mean Kendall τ = 0.586.</a:t>
-            </a:r>
-            <a:endParaRPr lang="en-US" sz="1600" dirty="0"/>
-          </a:p>
-          <a:p>
-            <a:pPr marL="342900" indent="-342900">
-              <a:spcAft>
-                <a:spcPts val="600"/>
-              </a:spcAft>
-              <a:buSzPct val="100000"/>
-              <a:buChar char="•"/>
-            </a:pPr>
-            <a:r>
-              <a:rPr lang="en-US" sz="1600" dirty="0">
-                <a:solidFill>
-                  <a:srgbClr val="000000"/>
-                </a:solidFill>
-              </a:rPr>
-              <a:t>Honest framing - stable near the chosen weights, less stable under arbitrary joint perturbations.</a:t>
-            </a:r>
-            <a:endParaRPr lang="en-US" sz="1600" dirty="0"/>
-          </a:p>
-          <a:p>
-            <a:pPr marL="342900" indent="-342900">
-              <a:spcAft>
-                <a:spcPts val="600"/>
-              </a:spcAft>
-              <a:buSzPct val="100000"/>
-              <a:buChar char="•"/>
-            </a:pPr>
-            <a:r>
-              <a:rPr lang="en-US" sz="1600" dirty="0">
-                <a:solidFill>
-                  <a:srgbClr val="000000"/>
-                </a:solidFill>
-              </a:rPr>
-              <a:t>Ablation confirms each process term contributes real signal; endpoint gain alone does not recover the ranking.</a:t>
-            </a:r>
-            <a:endParaRPr lang="en-US" sz="1600" dirty="0"/>
+          <a:bodyPr wrap="square" lIns="0" tIns="0" rIns="0" bIns="0" rtlCol="0" anchor="ctr"/>
+          <a:lstStyle/>
+          <a:p>
+            <a:pPr algn="ctr" indent="0" marL="0">
+              <a:buNone/>
+            </a:pPr>
+            <a:r>
+              <a:rPr lang="en-US" sz="1300" i="1" dirty="0">
+                <a:solidFill>
+                  <a:srgbClr val="555555"/>
+                </a:solidFill>
+              </a:rPr>
+              <a:t>41 of 66 synthesised alternatives strictly beat the user's trajectory (~62%). Quality varies sharply by kind.</a:t>
+            </a:r>
+            <a:endParaRPr lang="en-US" sz="1300" dirty="0"/>
+          </a:p>
+        </p:txBody>
+      </p:sp>
+      <p:graphicFrame>
+        <p:nvGraphicFramePr>
+          <p:cNvPr id="19" name="Table 0"/>
+          <p:cNvGraphicFramePr>
+            <a:graphicFrameLocks noGrp="1"/>
+          </p:cNvGraphicFramePr>
+          <p:nvPr>
+            <p:extLst>
+              <p:ext uri="{D42A27DB-BD31-4B8C-83A1-F6EECF244321}">
+                <p14:modId xmlns:p14="http://schemas.microsoft.com/office/powerpoint/2010/main" val="1579011935"/>
+              </p:ext>
+            </p:extLst>
+          </p:nvPr>
+        </p:nvGraphicFramePr>
+        <p:xfrm>
+          <a:off x="640080" y="1188720"/>
+          <a:ext cx="7863840" cy="914400"/>
+        </p:xfrm>
+        <a:graphic>
+          <a:graphicData uri="http://schemas.openxmlformats.org/drawingml/2006/table">
+            <a:tbl>
+              <a:tblPr/>
+              <a:tblGrid>
+                <a:gridCol w="1737360"/>
+                <a:gridCol w="640080"/>
+                <a:gridCol w="1005840"/>
+                <a:gridCol w="914400"/>
+                <a:gridCol w="1005840"/>
+                <a:gridCol w="1097280"/>
+                <a:gridCol w="1463040"/>
+              </a:tblGrid>
+              <a:tr h="411480">
+                <a:tc>
+                  <a:txBody>
+                    <a:bodyPr/>
+                    <a:lstStyle/>
+                    <a:p>
+                      <a:pPr algn="l" indent="0" marL="0">
+                        <a:buNone/>
+                      </a:pPr>
+                      <a:r>
+                        <a:rPr lang="en-US" sz="1400" b="1" dirty="0">
+                          <a:solidFill>
+                            <a:srgbClr val="1A1A1A"/>
+                          </a:solidFill>
+                        </a:rPr>
+                        <a:t>Kind</a:t>
+                      </a:r>
+                      <a:endParaRPr lang="en-US" sz="1400" dirty="0"/>
+                    </a:p>
+                  </a:txBody>
+                  <a:tcPr marL="73152" marR="73152" marT="73152" marB="73152" anchor="ctr">
+                    <a:lnL w="6350" cap="flat" cmpd="sng" algn="ctr">
+                      <a:solidFill>
+                        <a:srgbClr val="CCCCCC"/>
+                      </a:solidFill>
+                      <a:prstDash val="solid"/>
+                      <a:round/>
+                      <a:headEnd type="none" w="med" len="med"/>
+                      <a:tailEnd type="none" w="med" len="med"/>
+                    </a:lnL>
+                    <a:lnR w="6350" cap="flat" cmpd="sng" algn="ctr">
+                      <a:solidFill>
+                        <a:srgbClr val="CCCCCC"/>
+                      </a:solidFill>
+                      <a:prstDash val="solid"/>
+                      <a:round/>
+                      <a:headEnd type="none" w="med" len="med"/>
+                      <a:tailEnd type="none" w="med" len="med"/>
+                    </a:lnR>
+                    <a:lnT w="6350" cap="flat" cmpd="sng" algn="ctr">
+                      <a:solidFill>
+                        <a:srgbClr val="CCCCCC"/>
+                      </a:solidFill>
+                      <a:prstDash val="solid"/>
+                      <a:round/>
+                      <a:headEnd type="none" w="med" len="med"/>
+                      <a:tailEnd type="none" w="med" len="med"/>
+                    </a:lnT>
+                    <a:lnB w="6350" cap="flat" cmpd="sng" algn="ctr">
+                      <a:solidFill>
+                        <a:srgbClr val="CCCCCC"/>
+                      </a:solidFill>
+                      <a:prstDash val="solid"/>
+                      <a:round/>
+                      <a:headEnd type="none" w="med" len="med"/>
+                      <a:tailEnd type="none" w="med" len="med"/>
+                    </a:lnB>
+                    <a:solidFill>
+                      <a:srgbClr val="F0F0F0"/>
+                    </a:solidFill>
+                  </a:tcPr>
+                </a:tc>
+                <a:tc>
+                  <a:txBody>
+                    <a:bodyPr/>
+                    <a:lstStyle/>
+                    <a:p>
+                      <a:pPr algn="ctr" indent="0" marL="0">
+                        <a:buNone/>
+                      </a:pPr>
+                      <a:r>
+                        <a:rPr lang="en-US" sz="1400" b="1" dirty="0">
+                          <a:solidFill>
+                            <a:srgbClr val="1A1A1A"/>
+                          </a:solidFill>
+                        </a:rPr>
+                        <a:t>DPs</a:t>
+                      </a:r>
+                      <a:endParaRPr lang="en-US" sz="1400" dirty="0"/>
+                    </a:p>
+                  </a:txBody>
+                  <a:tcPr marL="73152" marR="73152" marT="73152" marB="73152" anchor="ctr">
+                    <a:lnL w="6350" cap="flat" cmpd="sng" algn="ctr">
+                      <a:solidFill>
+                        <a:srgbClr val="CCCCCC"/>
+                      </a:solidFill>
+                      <a:prstDash val="solid"/>
+                      <a:round/>
+                      <a:headEnd type="none" w="med" len="med"/>
+                      <a:tailEnd type="none" w="med" len="med"/>
+                    </a:lnL>
+                    <a:lnR w="6350" cap="flat" cmpd="sng" algn="ctr">
+                      <a:solidFill>
+                        <a:srgbClr val="CCCCCC"/>
+                      </a:solidFill>
+                      <a:prstDash val="solid"/>
+                      <a:round/>
+                      <a:headEnd type="none" w="med" len="med"/>
+                      <a:tailEnd type="none" w="med" len="med"/>
+                    </a:lnR>
+                    <a:lnT w="6350" cap="flat" cmpd="sng" algn="ctr">
+                      <a:solidFill>
+                        <a:srgbClr val="CCCCCC"/>
+                      </a:solidFill>
+                      <a:prstDash val="solid"/>
+                      <a:round/>
+                      <a:headEnd type="none" w="med" len="med"/>
+                      <a:tailEnd type="none" w="med" len="med"/>
+                    </a:lnT>
+                    <a:lnB w="6350" cap="flat" cmpd="sng" algn="ctr">
+                      <a:solidFill>
+                        <a:srgbClr val="CCCCCC"/>
+                      </a:solidFill>
+                      <a:prstDash val="solid"/>
+                      <a:round/>
+                      <a:headEnd type="none" w="med" len="med"/>
+                      <a:tailEnd type="none" w="med" len="med"/>
+                    </a:lnB>
+                    <a:solidFill>
+                      <a:srgbClr val="F0F0F0"/>
+                    </a:solidFill>
+                  </a:tcPr>
+                </a:tc>
+                <a:tc>
+                  <a:txBody>
+                    <a:bodyPr/>
+                    <a:lstStyle/>
+                    <a:p>
+                      <a:pPr algn="ctr" indent="0" marL="0">
+                        <a:buNone/>
+                      </a:pPr>
+                      <a:r>
+                        <a:rPr lang="en-US" sz="1400" b="1" dirty="0">
+                          <a:solidFill>
+                            <a:srgbClr val="1A1A1A"/>
+                          </a:solidFill>
+                        </a:rPr>
+                        <a:t>Beats ✓</a:t>
+                      </a:r>
+                      <a:endParaRPr lang="en-US" sz="1400" dirty="0"/>
+                    </a:p>
+                  </a:txBody>
+                  <a:tcPr marL="73152" marR="73152" marT="73152" marB="73152" anchor="ctr">
+                    <a:lnL w="6350" cap="flat" cmpd="sng" algn="ctr">
+                      <a:solidFill>
+                        <a:srgbClr val="CCCCCC"/>
+                      </a:solidFill>
+                      <a:prstDash val="solid"/>
+                      <a:round/>
+                      <a:headEnd type="none" w="med" len="med"/>
+                      <a:tailEnd type="none" w="med" len="med"/>
+                    </a:lnL>
+                    <a:lnR w="6350" cap="flat" cmpd="sng" algn="ctr">
+                      <a:solidFill>
+                        <a:srgbClr val="CCCCCC"/>
+                      </a:solidFill>
+                      <a:prstDash val="solid"/>
+                      <a:round/>
+                      <a:headEnd type="none" w="med" len="med"/>
+                      <a:tailEnd type="none" w="med" len="med"/>
+                    </a:lnR>
+                    <a:lnT w="6350" cap="flat" cmpd="sng" algn="ctr">
+                      <a:solidFill>
+                        <a:srgbClr val="CCCCCC"/>
+                      </a:solidFill>
+                      <a:prstDash val="solid"/>
+                      <a:round/>
+                      <a:headEnd type="none" w="med" len="med"/>
+                      <a:tailEnd type="none" w="med" len="med"/>
+                    </a:lnT>
+                    <a:lnB w="6350" cap="flat" cmpd="sng" algn="ctr">
+                      <a:solidFill>
+                        <a:srgbClr val="CCCCCC"/>
+                      </a:solidFill>
+                      <a:prstDash val="solid"/>
+                      <a:round/>
+                      <a:headEnd type="none" w="med" len="med"/>
+                      <a:tailEnd type="none" w="med" len="med"/>
+                    </a:lnB>
+                    <a:solidFill>
+                      <a:srgbClr val="F0F0F0"/>
+                    </a:solidFill>
+                  </a:tcPr>
+                </a:tc>
+                <a:tc>
+                  <a:txBody>
+                    <a:bodyPr/>
+                    <a:lstStyle/>
+                    <a:p>
+                      <a:pPr algn="ctr" indent="0" marL="0">
+                        <a:buNone/>
+                      </a:pPr>
+                      <a:r>
+                        <a:rPr lang="en-US" sz="1400" b="1" dirty="0">
+                          <a:solidFill>
+                            <a:srgbClr val="1A1A1A"/>
+                          </a:solidFill>
+                        </a:rPr>
+                        <a:t>Ties =</a:t>
+                      </a:r>
+                      <a:endParaRPr lang="en-US" sz="1400" dirty="0"/>
+                    </a:p>
+                  </a:txBody>
+                  <a:tcPr marL="73152" marR="73152" marT="73152" marB="73152" anchor="ctr">
+                    <a:lnL w="6350" cap="flat" cmpd="sng" algn="ctr">
+                      <a:solidFill>
+                        <a:srgbClr val="CCCCCC"/>
+                      </a:solidFill>
+                      <a:prstDash val="solid"/>
+                      <a:round/>
+                      <a:headEnd type="none" w="med" len="med"/>
+                      <a:tailEnd type="none" w="med" len="med"/>
+                    </a:lnL>
+                    <a:lnR w="6350" cap="flat" cmpd="sng" algn="ctr">
+                      <a:solidFill>
+                        <a:srgbClr val="CCCCCC"/>
+                      </a:solidFill>
+                      <a:prstDash val="solid"/>
+                      <a:round/>
+                      <a:headEnd type="none" w="med" len="med"/>
+                      <a:tailEnd type="none" w="med" len="med"/>
+                    </a:lnR>
+                    <a:lnT w="6350" cap="flat" cmpd="sng" algn="ctr">
+                      <a:solidFill>
+                        <a:srgbClr val="CCCCCC"/>
+                      </a:solidFill>
+                      <a:prstDash val="solid"/>
+                      <a:round/>
+                      <a:headEnd type="none" w="med" len="med"/>
+                      <a:tailEnd type="none" w="med" len="med"/>
+                    </a:lnT>
+                    <a:lnB w="6350" cap="flat" cmpd="sng" algn="ctr">
+                      <a:solidFill>
+                        <a:srgbClr val="CCCCCC"/>
+                      </a:solidFill>
+                      <a:prstDash val="solid"/>
+                      <a:round/>
+                      <a:headEnd type="none" w="med" len="med"/>
+                      <a:tailEnd type="none" w="med" len="med"/>
+                    </a:lnB>
+                    <a:solidFill>
+                      <a:srgbClr val="F0F0F0"/>
+                    </a:solidFill>
+                  </a:tcPr>
+                </a:tc>
+                <a:tc>
+                  <a:txBody>
+                    <a:bodyPr/>
+                    <a:lstStyle/>
+                    <a:p>
+                      <a:pPr algn="ctr" indent="0" marL="0">
+                        <a:buNone/>
+                      </a:pPr>
+                      <a:r>
+                        <a:rPr lang="en-US" sz="1400" b="1" dirty="0">
+                          <a:solidFill>
+                            <a:srgbClr val="1A1A1A"/>
+                          </a:solidFill>
+                        </a:rPr>
+                        <a:t>Loses ✗</a:t>
+                      </a:r>
+                      <a:endParaRPr lang="en-US" sz="1400" dirty="0"/>
+                    </a:p>
+                  </a:txBody>
+                  <a:tcPr marL="73152" marR="73152" marT="73152" marB="73152" anchor="ctr">
+                    <a:lnL w="6350" cap="flat" cmpd="sng" algn="ctr">
+                      <a:solidFill>
+                        <a:srgbClr val="CCCCCC"/>
+                      </a:solidFill>
+                      <a:prstDash val="solid"/>
+                      <a:round/>
+                      <a:headEnd type="none" w="med" len="med"/>
+                      <a:tailEnd type="none" w="med" len="med"/>
+                    </a:lnL>
+                    <a:lnR w="6350" cap="flat" cmpd="sng" algn="ctr">
+                      <a:solidFill>
+                        <a:srgbClr val="CCCCCC"/>
+                      </a:solidFill>
+                      <a:prstDash val="solid"/>
+                      <a:round/>
+                      <a:headEnd type="none" w="med" len="med"/>
+                      <a:tailEnd type="none" w="med" len="med"/>
+                    </a:lnR>
+                    <a:lnT w="6350" cap="flat" cmpd="sng" algn="ctr">
+                      <a:solidFill>
+                        <a:srgbClr val="CCCCCC"/>
+                      </a:solidFill>
+                      <a:prstDash val="solid"/>
+                      <a:round/>
+                      <a:headEnd type="none" w="med" len="med"/>
+                      <a:tailEnd type="none" w="med" len="med"/>
+                    </a:lnT>
+                    <a:lnB w="6350" cap="flat" cmpd="sng" algn="ctr">
+                      <a:solidFill>
+                        <a:srgbClr val="CCCCCC"/>
+                      </a:solidFill>
+                      <a:prstDash val="solid"/>
+                      <a:round/>
+                      <a:headEnd type="none" w="med" len="med"/>
+                      <a:tailEnd type="none" w="med" len="med"/>
+                    </a:lnB>
+                    <a:solidFill>
+                      <a:srgbClr val="F0F0F0"/>
+                    </a:solidFill>
+                  </a:tcPr>
+                </a:tc>
+                <a:tc>
+                  <a:txBody>
+                    <a:bodyPr/>
+                    <a:lstStyle/>
+                    <a:p>
+                      <a:pPr algn="ctr" indent="0" marL="0">
+                        <a:buNone/>
+                      </a:pPr>
+                      <a:r>
+                        <a:rPr lang="en-US" sz="1400" b="1" dirty="0">
+                          <a:solidFill>
+                            <a:srgbClr val="1A1A1A"/>
+                          </a:solidFill>
+                        </a:rPr>
+                        <a:t>Beat rate</a:t>
+                      </a:r>
+                      <a:endParaRPr lang="en-US" sz="1400" dirty="0"/>
+                    </a:p>
+                  </a:txBody>
+                  <a:tcPr marL="73152" marR="73152" marT="73152" marB="73152" anchor="ctr">
+                    <a:lnL w="6350" cap="flat" cmpd="sng" algn="ctr">
+                      <a:solidFill>
+                        <a:srgbClr val="CCCCCC"/>
+                      </a:solidFill>
+                      <a:prstDash val="solid"/>
+                      <a:round/>
+                      <a:headEnd type="none" w="med" len="med"/>
+                      <a:tailEnd type="none" w="med" len="med"/>
+                    </a:lnL>
+                    <a:lnR w="6350" cap="flat" cmpd="sng" algn="ctr">
+                      <a:solidFill>
+                        <a:srgbClr val="CCCCCC"/>
+                      </a:solidFill>
+                      <a:prstDash val="solid"/>
+                      <a:round/>
+                      <a:headEnd type="none" w="med" len="med"/>
+                      <a:tailEnd type="none" w="med" len="med"/>
+                    </a:lnR>
+                    <a:lnT w="6350" cap="flat" cmpd="sng" algn="ctr">
+                      <a:solidFill>
+                        <a:srgbClr val="CCCCCC"/>
+                      </a:solidFill>
+                      <a:prstDash val="solid"/>
+                      <a:round/>
+                      <a:headEnd type="none" w="med" len="med"/>
+                      <a:tailEnd type="none" w="med" len="med"/>
+                    </a:lnT>
+                    <a:lnB w="6350" cap="flat" cmpd="sng" algn="ctr">
+                      <a:solidFill>
+                        <a:srgbClr val="CCCCCC"/>
+                      </a:solidFill>
+                      <a:prstDash val="solid"/>
+                      <a:round/>
+                      <a:headEnd type="none" w="med" len="med"/>
+                      <a:tailEnd type="none" w="med" len="med"/>
+                    </a:lnB>
+                    <a:solidFill>
+                      <a:srgbClr val="F0F0F0"/>
+                    </a:solidFill>
+                  </a:tcPr>
+                </a:tc>
+                <a:tc>
+                  <a:txBody>
+                    <a:bodyPr/>
+                    <a:lstStyle/>
+                    <a:p>
+                      <a:pPr algn="ctr" indent="0" marL="0">
+                        <a:buNone/>
+                      </a:pPr>
+                      <a:r>
+                        <a:rPr lang="en-US" sz="1400" b="1" dirty="0">
+                          <a:solidFill>
+                            <a:srgbClr val="1A1A1A"/>
+                          </a:solidFill>
+                        </a:rPr>
+                        <a:t>Max Δ</a:t>
+                      </a:r>
+                      <a:endParaRPr lang="en-US" sz="1400" dirty="0"/>
+                    </a:p>
+                  </a:txBody>
+                  <a:tcPr marL="73152" marR="73152" marT="73152" marB="73152" anchor="ctr">
+                    <a:lnL w="6350" cap="flat" cmpd="sng" algn="ctr">
+                      <a:solidFill>
+                        <a:srgbClr val="CCCCCC"/>
+                      </a:solidFill>
+                      <a:prstDash val="solid"/>
+                      <a:round/>
+                      <a:headEnd type="none" w="med" len="med"/>
+                      <a:tailEnd type="none" w="med" len="med"/>
+                    </a:lnL>
+                    <a:lnR w="6350" cap="flat" cmpd="sng" algn="ctr">
+                      <a:solidFill>
+                        <a:srgbClr val="CCCCCC"/>
+                      </a:solidFill>
+                      <a:prstDash val="solid"/>
+                      <a:round/>
+                      <a:headEnd type="none" w="med" len="med"/>
+                      <a:tailEnd type="none" w="med" len="med"/>
+                    </a:lnR>
+                    <a:lnT w="6350" cap="flat" cmpd="sng" algn="ctr">
+                      <a:solidFill>
+                        <a:srgbClr val="CCCCCC"/>
+                      </a:solidFill>
+                      <a:prstDash val="solid"/>
+                      <a:round/>
+                      <a:headEnd type="none" w="med" len="med"/>
+                      <a:tailEnd type="none" w="med" len="med"/>
+                    </a:lnT>
+                    <a:lnB w="6350" cap="flat" cmpd="sng" algn="ctr">
+                      <a:solidFill>
+                        <a:srgbClr val="CCCCCC"/>
+                      </a:solidFill>
+                      <a:prstDash val="solid"/>
+                      <a:round/>
+                      <a:headEnd type="none" w="med" len="med"/>
+                      <a:tailEnd type="none" w="med" len="med"/>
+                    </a:lnB>
+                    <a:solidFill>
+                      <a:srgbClr val="F0F0F0"/>
+                    </a:solidFill>
+                  </a:tcPr>
+                </a:tc>
+              </a:tr>
+              <a:tr h="411480">
+                <a:tc>
+                  <a:txBody>
+                    <a:bodyPr/>
+                    <a:lstStyle/>
+                    <a:p>
+                      <a:pPr algn="l" indent="0" marL="0">
+                        <a:buNone/>
+                      </a:pPr>
+                      <a:r>
+                        <a:rPr lang="en-US" sz="1400" b="1" dirty="0">
+                          <a:solidFill>
+                            <a:srgbClr val="1A1A1A"/>
+                          </a:solidFill>
+                        </a:rPr>
+                        <a:t>Hygiene</a:t>
+                      </a:r>
+                      <a:endParaRPr lang="en-US" sz="1400" dirty="0"/>
+                    </a:p>
+                  </a:txBody>
+                  <a:tcPr marL="73152" marR="73152" marT="73152" marB="73152" anchor="ctr">
+                    <a:lnL w="6350" cap="flat" cmpd="sng" algn="ctr">
+                      <a:solidFill>
+                        <a:srgbClr val="CCCCCC"/>
+                      </a:solidFill>
+                      <a:prstDash val="solid"/>
+                      <a:round/>
+                      <a:headEnd type="none" w="med" len="med"/>
+                      <a:tailEnd type="none" w="med" len="med"/>
+                    </a:lnL>
+                    <a:lnR w="6350" cap="flat" cmpd="sng" algn="ctr">
+                      <a:solidFill>
+                        <a:srgbClr val="CCCCCC"/>
+                      </a:solidFill>
+                      <a:prstDash val="solid"/>
+                      <a:round/>
+                      <a:headEnd type="none" w="med" len="med"/>
+                      <a:tailEnd type="none" w="med" len="med"/>
+                    </a:lnR>
+                    <a:lnT w="6350" cap="flat" cmpd="sng" algn="ctr">
+                      <a:solidFill>
+                        <a:srgbClr val="CCCCCC"/>
+                      </a:solidFill>
+                      <a:prstDash val="solid"/>
+                      <a:round/>
+                      <a:headEnd type="none" w="med" len="med"/>
+                      <a:tailEnd type="none" w="med" len="med"/>
+                    </a:lnT>
+                    <a:lnB w="6350" cap="flat" cmpd="sng" algn="ctr">
+                      <a:solidFill>
+                        <a:srgbClr val="CCCCCC"/>
+                      </a:solidFill>
+                      <a:prstDash val="solid"/>
+                      <a:round/>
+                      <a:headEnd type="none" w="med" len="med"/>
+                      <a:tailEnd type="none" w="med" len="med"/>
+                    </a:lnB>
+                  </a:tcPr>
+                </a:tc>
+                <a:tc>
+                  <a:txBody>
+                    <a:bodyPr/>
+                    <a:lstStyle/>
+                    <a:p>
+                      <a:pPr algn="ctr" indent="0" marL="0">
+                        <a:buNone/>
+                      </a:pPr>
+                      <a:r>
+                        <a:rPr lang="en-US" sz="1400" dirty="0">
+                          <a:solidFill>
+                            <a:srgbClr val="1A1A1A"/>
+                          </a:solidFill>
+                        </a:rPr>
+                        <a:t>13</a:t>
+                      </a:r>
+                      <a:endParaRPr lang="en-US" sz="1400" dirty="0"/>
+                    </a:p>
+                  </a:txBody>
+                  <a:tcPr marL="73152" marR="73152" marT="73152" marB="73152" anchor="ctr">
+                    <a:lnL w="6350" cap="flat" cmpd="sng" algn="ctr">
+                      <a:solidFill>
+                        <a:srgbClr val="CCCCCC"/>
+                      </a:solidFill>
+                      <a:prstDash val="solid"/>
+                      <a:round/>
+                      <a:headEnd type="none" w="med" len="med"/>
+                      <a:tailEnd type="none" w="med" len="med"/>
+                    </a:lnL>
+                    <a:lnR w="6350" cap="flat" cmpd="sng" algn="ctr">
+                      <a:solidFill>
+                        <a:srgbClr val="CCCCCC"/>
+                      </a:solidFill>
+                      <a:prstDash val="solid"/>
+                      <a:round/>
+                      <a:headEnd type="none" w="med" len="med"/>
+                      <a:tailEnd type="none" w="med" len="med"/>
+                    </a:lnR>
+                    <a:lnT w="6350" cap="flat" cmpd="sng" algn="ctr">
+                      <a:solidFill>
+                        <a:srgbClr val="CCCCCC"/>
+                      </a:solidFill>
+                      <a:prstDash val="solid"/>
+                      <a:round/>
+                      <a:headEnd type="none" w="med" len="med"/>
+                      <a:tailEnd type="none" w="med" len="med"/>
+                    </a:lnT>
+                    <a:lnB w="6350" cap="flat" cmpd="sng" algn="ctr">
+                      <a:solidFill>
+                        <a:srgbClr val="CCCCCC"/>
+                      </a:solidFill>
+                      <a:prstDash val="solid"/>
+                      <a:round/>
+                      <a:headEnd type="none" w="med" len="med"/>
+                      <a:tailEnd type="none" w="med" len="med"/>
+                    </a:lnB>
+                  </a:tcPr>
+                </a:tc>
+                <a:tc>
+                  <a:txBody>
+                    <a:bodyPr/>
+                    <a:lstStyle/>
+                    <a:p>
+                      <a:pPr algn="ctr" indent="0" marL="0">
+                        <a:buNone/>
+                      </a:pPr>
+                      <a:r>
+                        <a:rPr lang="en-US" sz="1400" b="1" dirty="0">
+                          <a:solidFill>
+                            <a:srgbClr val="0A7D2A"/>
+                          </a:solidFill>
+                        </a:rPr>
+                        <a:t>13</a:t>
+                      </a:r>
+                      <a:endParaRPr lang="en-US" sz="1400" dirty="0"/>
+                    </a:p>
+                  </a:txBody>
+                  <a:tcPr marL="73152" marR="73152" marT="73152" marB="73152" anchor="ctr">
+                    <a:lnL w="6350" cap="flat" cmpd="sng" algn="ctr">
+                      <a:solidFill>
+                        <a:srgbClr val="CCCCCC"/>
+                      </a:solidFill>
+                      <a:prstDash val="solid"/>
+                      <a:round/>
+                      <a:headEnd type="none" w="med" len="med"/>
+                      <a:tailEnd type="none" w="med" len="med"/>
+                    </a:lnL>
+                    <a:lnR w="6350" cap="flat" cmpd="sng" algn="ctr">
+                      <a:solidFill>
+                        <a:srgbClr val="CCCCCC"/>
+                      </a:solidFill>
+                      <a:prstDash val="solid"/>
+                      <a:round/>
+                      <a:headEnd type="none" w="med" len="med"/>
+                      <a:tailEnd type="none" w="med" len="med"/>
+                    </a:lnR>
+                    <a:lnT w="6350" cap="flat" cmpd="sng" algn="ctr">
+                      <a:solidFill>
+                        <a:srgbClr val="CCCCCC"/>
+                      </a:solidFill>
+                      <a:prstDash val="solid"/>
+                      <a:round/>
+                      <a:headEnd type="none" w="med" len="med"/>
+                      <a:tailEnd type="none" w="med" len="med"/>
+                    </a:lnT>
+                    <a:lnB w="6350" cap="flat" cmpd="sng" algn="ctr">
+                      <a:solidFill>
+                        <a:srgbClr val="CCCCCC"/>
+                      </a:solidFill>
+                      <a:prstDash val="solid"/>
+                      <a:round/>
+                      <a:headEnd type="none" w="med" len="med"/>
+                      <a:tailEnd type="none" w="med" len="med"/>
+                    </a:lnB>
+                    <a:solidFill>
+                      <a:srgbClr val="D4F0DC"/>
+                    </a:solidFill>
+                  </a:tcPr>
+                </a:tc>
+                <a:tc>
+                  <a:txBody>
+                    <a:bodyPr/>
+                    <a:lstStyle/>
+                    <a:p>
+                      <a:pPr algn="ctr" indent="0" marL="0">
+                        <a:buNone/>
+                      </a:pPr>
+                      <a:r>
+                        <a:rPr lang="en-US" sz="1400" b="1" dirty="0">
+                          <a:solidFill>
+                            <a:srgbClr val="8A6A00"/>
+                          </a:solidFill>
+                        </a:rPr>
+                        <a:t>0</a:t>
+                      </a:r>
+                      <a:endParaRPr lang="en-US" sz="1400" dirty="0"/>
+                    </a:p>
+                  </a:txBody>
+                  <a:tcPr marL="73152" marR="73152" marT="73152" marB="73152" anchor="ctr">
+                    <a:lnL w="6350" cap="flat" cmpd="sng" algn="ctr">
+                      <a:solidFill>
+                        <a:srgbClr val="CCCCCC"/>
+                      </a:solidFill>
+                      <a:prstDash val="solid"/>
+                      <a:round/>
+                      <a:headEnd type="none" w="med" len="med"/>
+                      <a:tailEnd type="none" w="med" len="med"/>
+                    </a:lnL>
+                    <a:lnR w="6350" cap="flat" cmpd="sng" algn="ctr">
+                      <a:solidFill>
+                        <a:srgbClr val="CCCCCC"/>
+                      </a:solidFill>
+                      <a:prstDash val="solid"/>
+                      <a:round/>
+                      <a:headEnd type="none" w="med" len="med"/>
+                      <a:tailEnd type="none" w="med" len="med"/>
+                    </a:lnR>
+                    <a:lnT w="6350" cap="flat" cmpd="sng" algn="ctr">
+                      <a:solidFill>
+                        <a:srgbClr val="CCCCCC"/>
+                      </a:solidFill>
+                      <a:prstDash val="solid"/>
+                      <a:round/>
+                      <a:headEnd type="none" w="med" len="med"/>
+                      <a:tailEnd type="none" w="med" len="med"/>
+                    </a:lnT>
+                    <a:lnB w="6350" cap="flat" cmpd="sng" algn="ctr">
+                      <a:solidFill>
+                        <a:srgbClr val="CCCCCC"/>
+                      </a:solidFill>
+                      <a:prstDash val="solid"/>
+                      <a:round/>
+                      <a:headEnd type="none" w="med" len="med"/>
+                      <a:tailEnd type="none" w="med" len="med"/>
+                    </a:lnB>
+                    <a:solidFill>
+                      <a:srgbClr val="FFF4D6"/>
+                    </a:solidFill>
+                  </a:tcPr>
+                </a:tc>
+                <a:tc>
+                  <a:txBody>
+                    <a:bodyPr/>
+                    <a:lstStyle/>
+                    <a:p>
+                      <a:pPr algn="ctr" indent="0" marL="0">
+                        <a:buNone/>
+                      </a:pPr>
+                      <a:r>
+                        <a:rPr lang="en-US" sz="1400" b="1" dirty="0">
+                          <a:solidFill>
+                            <a:srgbClr val="B33A1E"/>
+                          </a:solidFill>
+                        </a:rPr>
+                        <a:t>0</a:t>
+                      </a:r>
+                      <a:endParaRPr lang="en-US" sz="1400" dirty="0"/>
+                    </a:p>
+                  </a:txBody>
+                  <a:tcPr marL="73152" marR="73152" marT="73152" marB="73152" anchor="ctr">
+                    <a:lnL w="6350" cap="flat" cmpd="sng" algn="ctr">
+                      <a:solidFill>
+                        <a:srgbClr val="CCCCCC"/>
+                      </a:solidFill>
+                      <a:prstDash val="solid"/>
+                      <a:round/>
+                      <a:headEnd type="none" w="med" len="med"/>
+                      <a:tailEnd type="none" w="med" len="med"/>
+                    </a:lnL>
+                    <a:lnR w="6350" cap="flat" cmpd="sng" algn="ctr">
+                      <a:solidFill>
+                        <a:srgbClr val="CCCCCC"/>
+                      </a:solidFill>
+                      <a:prstDash val="solid"/>
+                      <a:round/>
+                      <a:headEnd type="none" w="med" len="med"/>
+                      <a:tailEnd type="none" w="med" len="med"/>
+                    </a:lnR>
+                    <a:lnT w="6350" cap="flat" cmpd="sng" algn="ctr">
+                      <a:solidFill>
+                        <a:srgbClr val="CCCCCC"/>
+                      </a:solidFill>
+                      <a:prstDash val="solid"/>
+                      <a:round/>
+                      <a:headEnd type="none" w="med" len="med"/>
+                      <a:tailEnd type="none" w="med" len="med"/>
+                    </a:lnT>
+                    <a:lnB w="6350" cap="flat" cmpd="sng" algn="ctr">
+                      <a:solidFill>
+                        <a:srgbClr val="CCCCCC"/>
+                      </a:solidFill>
+                      <a:prstDash val="solid"/>
+                      <a:round/>
+                      <a:headEnd type="none" w="med" len="med"/>
+                      <a:tailEnd type="none" w="med" len="med"/>
+                    </a:lnB>
+                    <a:solidFill>
+                      <a:srgbClr val="F5D5CE"/>
+                    </a:solidFill>
+                  </a:tcPr>
+                </a:tc>
+                <a:tc>
+                  <a:txBody>
+                    <a:bodyPr/>
+                    <a:lstStyle/>
+                    <a:p>
+                      <a:pPr algn="ctr" indent="0" marL="0">
+                        <a:buNone/>
+                      </a:pPr>
+                      <a:r>
+                        <a:rPr lang="en-US" sz="1400" b="1" dirty="0">
+                          <a:solidFill>
+                            <a:srgbClr val="0A7D2A"/>
+                          </a:solidFill>
+                        </a:rPr>
+                        <a:t>100%</a:t>
+                      </a:r>
+                      <a:endParaRPr lang="en-US" sz="1400" dirty="0"/>
+                    </a:p>
+                  </a:txBody>
+                  <a:tcPr marL="73152" marR="73152" marT="73152" marB="73152" anchor="ctr">
+                    <a:lnL w="6350" cap="flat" cmpd="sng" algn="ctr">
+                      <a:solidFill>
+                        <a:srgbClr val="CCCCCC"/>
+                      </a:solidFill>
+                      <a:prstDash val="solid"/>
+                      <a:round/>
+                      <a:headEnd type="none" w="med" len="med"/>
+                      <a:tailEnd type="none" w="med" len="med"/>
+                    </a:lnL>
+                    <a:lnR w="6350" cap="flat" cmpd="sng" algn="ctr">
+                      <a:solidFill>
+                        <a:srgbClr val="CCCCCC"/>
+                      </a:solidFill>
+                      <a:prstDash val="solid"/>
+                      <a:round/>
+                      <a:headEnd type="none" w="med" len="med"/>
+                      <a:tailEnd type="none" w="med" len="med"/>
+                    </a:lnR>
+                    <a:lnT w="6350" cap="flat" cmpd="sng" algn="ctr">
+                      <a:solidFill>
+                        <a:srgbClr val="CCCCCC"/>
+                      </a:solidFill>
+                      <a:prstDash val="solid"/>
+                      <a:round/>
+                      <a:headEnd type="none" w="med" len="med"/>
+                      <a:tailEnd type="none" w="med" len="med"/>
+                    </a:lnT>
+                    <a:lnB w="6350" cap="flat" cmpd="sng" algn="ctr">
+                      <a:solidFill>
+                        <a:srgbClr val="CCCCCC"/>
+                      </a:solidFill>
+                      <a:prstDash val="solid"/>
+                      <a:round/>
+                      <a:headEnd type="none" w="med" len="med"/>
+                      <a:tailEnd type="none" w="med" len="med"/>
+                    </a:lnB>
+                  </a:tcPr>
+                </a:tc>
+                <a:tc>
+                  <a:txBody>
+                    <a:bodyPr/>
+                    <a:lstStyle/>
+                    <a:p>
+                      <a:pPr algn="ctr" indent="0" marL="0">
+                        <a:buNone/>
+                      </a:pPr>
+                      <a:r>
+                        <a:rPr lang="en-US" sz="1400" dirty="0">
+                          <a:solidFill>
+                            <a:srgbClr val="1A1A1A"/>
+                          </a:solidFill>
+                        </a:rPr>
+                        <a:t>+9</a:t>
+                      </a:r>
+                      <a:endParaRPr lang="en-US" sz="1400" dirty="0"/>
+                    </a:p>
+                  </a:txBody>
+                  <a:tcPr marL="73152" marR="73152" marT="73152" marB="73152" anchor="ctr">
+                    <a:lnL w="6350" cap="flat" cmpd="sng" algn="ctr">
+                      <a:solidFill>
+                        <a:srgbClr val="CCCCCC"/>
+                      </a:solidFill>
+                      <a:prstDash val="solid"/>
+                      <a:round/>
+                      <a:headEnd type="none" w="med" len="med"/>
+                      <a:tailEnd type="none" w="med" len="med"/>
+                    </a:lnL>
+                    <a:lnR w="6350" cap="flat" cmpd="sng" algn="ctr">
+                      <a:solidFill>
+                        <a:srgbClr val="CCCCCC"/>
+                      </a:solidFill>
+                      <a:prstDash val="solid"/>
+                      <a:round/>
+                      <a:headEnd type="none" w="med" len="med"/>
+                      <a:tailEnd type="none" w="med" len="med"/>
+                    </a:lnR>
+                    <a:lnT w="6350" cap="flat" cmpd="sng" algn="ctr">
+                      <a:solidFill>
+                        <a:srgbClr val="CCCCCC"/>
+                      </a:solidFill>
+                      <a:prstDash val="solid"/>
+                      <a:round/>
+                      <a:headEnd type="none" w="med" len="med"/>
+                      <a:tailEnd type="none" w="med" len="med"/>
+                    </a:lnT>
+                    <a:lnB w="6350" cap="flat" cmpd="sng" algn="ctr">
+                      <a:solidFill>
+                        <a:srgbClr val="CCCCCC"/>
+                      </a:solidFill>
+                      <a:prstDash val="solid"/>
+                      <a:round/>
+                      <a:headEnd type="none" w="med" len="med"/>
+                      <a:tailEnd type="none" w="med" len="med"/>
+                    </a:lnB>
+                  </a:tcPr>
+                </a:tc>
+              </a:tr>
+              <a:tr h="411480">
+                <a:tc>
+                  <a:txBody>
+                    <a:bodyPr/>
+                    <a:lstStyle/>
+                    <a:p>
+                      <a:pPr algn="l" indent="0" marL="0">
+                        <a:buNone/>
+                      </a:pPr>
+                      <a:r>
+                        <a:rPr lang="en-US" sz="1400" b="1" dirty="0">
+                          <a:solidFill>
+                            <a:srgbClr val="1A1A1A"/>
+                          </a:solidFill>
+                        </a:rPr>
+                        <a:t>Manual-Refactor</a:t>
+                      </a:r>
+                      <a:endParaRPr lang="en-US" sz="1400" dirty="0"/>
+                    </a:p>
+                  </a:txBody>
+                  <a:tcPr marL="73152" marR="73152" marT="73152" marB="73152" anchor="ctr">
+                    <a:lnL w="6350" cap="flat" cmpd="sng" algn="ctr">
+                      <a:solidFill>
+                        <a:srgbClr val="CCCCCC"/>
+                      </a:solidFill>
+                      <a:prstDash val="solid"/>
+                      <a:round/>
+                      <a:headEnd type="none" w="med" len="med"/>
+                      <a:tailEnd type="none" w="med" len="med"/>
+                    </a:lnL>
+                    <a:lnR w="6350" cap="flat" cmpd="sng" algn="ctr">
+                      <a:solidFill>
+                        <a:srgbClr val="CCCCCC"/>
+                      </a:solidFill>
+                      <a:prstDash val="solid"/>
+                      <a:round/>
+                      <a:headEnd type="none" w="med" len="med"/>
+                      <a:tailEnd type="none" w="med" len="med"/>
+                    </a:lnR>
+                    <a:lnT w="6350" cap="flat" cmpd="sng" algn="ctr">
+                      <a:solidFill>
+                        <a:srgbClr val="CCCCCC"/>
+                      </a:solidFill>
+                      <a:prstDash val="solid"/>
+                      <a:round/>
+                      <a:headEnd type="none" w="med" len="med"/>
+                      <a:tailEnd type="none" w="med" len="med"/>
+                    </a:lnT>
+                    <a:lnB w="6350" cap="flat" cmpd="sng" algn="ctr">
+                      <a:solidFill>
+                        <a:srgbClr val="CCCCCC"/>
+                      </a:solidFill>
+                      <a:prstDash val="solid"/>
+                      <a:round/>
+                      <a:headEnd type="none" w="med" len="med"/>
+                      <a:tailEnd type="none" w="med" len="med"/>
+                    </a:lnB>
+                  </a:tcPr>
+                </a:tc>
+                <a:tc>
+                  <a:txBody>
+                    <a:bodyPr/>
+                    <a:lstStyle/>
+                    <a:p>
+                      <a:pPr algn="ctr" indent="0" marL="0">
+                        <a:buNone/>
+                      </a:pPr>
+                      <a:r>
+                        <a:rPr lang="en-US" sz="1400" dirty="0">
+                          <a:solidFill>
+                            <a:srgbClr val="1A1A1A"/>
+                          </a:solidFill>
+                        </a:rPr>
+                        <a:t>16</a:t>
+                      </a:r>
+                      <a:endParaRPr lang="en-US" sz="1400" dirty="0"/>
+                    </a:p>
+                  </a:txBody>
+                  <a:tcPr marL="73152" marR="73152" marT="73152" marB="73152" anchor="ctr">
+                    <a:lnL w="6350" cap="flat" cmpd="sng" algn="ctr">
+                      <a:solidFill>
+                        <a:srgbClr val="CCCCCC"/>
+                      </a:solidFill>
+                      <a:prstDash val="solid"/>
+                      <a:round/>
+                      <a:headEnd type="none" w="med" len="med"/>
+                      <a:tailEnd type="none" w="med" len="med"/>
+                    </a:lnL>
+                    <a:lnR w="6350" cap="flat" cmpd="sng" algn="ctr">
+                      <a:solidFill>
+                        <a:srgbClr val="CCCCCC"/>
+                      </a:solidFill>
+                      <a:prstDash val="solid"/>
+                      <a:round/>
+                      <a:headEnd type="none" w="med" len="med"/>
+                      <a:tailEnd type="none" w="med" len="med"/>
+                    </a:lnR>
+                    <a:lnT w="6350" cap="flat" cmpd="sng" algn="ctr">
+                      <a:solidFill>
+                        <a:srgbClr val="CCCCCC"/>
+                      </a:solidFill>
+                      <a:prstDash val="solid"/>
+                      <a:round/>
+                      <a:headEnd type="none" w="med" len="med"/>
+                      <a:tailEnd type="none" w="med" len="med"/>
+                    </a:lnT>
+                    <a:lnB w="6350" cap="flat" cmpd="sng" algn="ctr">
+                      <a:solidFill>
+                        <a:srgbClr val="CCCCCC"/>
+                      </a:solidFill>
+                      <a:prstDash val="solid"/>
+                      <a:round/>
+                      <a:headEnd type="none" w="med" len="med"/>
+                      <a:tailEnd type="none" w="med" len="med"/>
+                    </a:lnB>
+                  </a:tcPr>
+                </a:tc>
+                <a:tc>
+                  <a:txBody>
+                    <a:bodyPr/>
+                    <a:lstStyle/>
+                    <a:p>
+                      <a:pPr algn="ctr" indent="0" marL="0">
+                        <a:buNone/>
+                      </a:pPr>
+                      <a:r>
+                        <a:rPr lang="en-US" sz="1400" b="1" dirty="0">
+                          <a:solidFill>
+                            <a:srgbClr val="0A7D2A"/>
+                          </a:solidFill>
+                        </a:rPr>
+                        <a:t>12</a:t>
+                      </a:r>
+                      <a:endParaRPr lang="en-US" sz="1400" dirty="0"/>
+                    </a:p>
+                  </a:txBody>
+                  <a:tcPr marL="73152" marR="73152" marT="73152" marB="73152" anchor="ctr">
+                    <a:lnL w="6350" cap="flat" cmpd="sng" algn="ctr">
+                      <a:solidFill>
+                        <a:srgbClr val="CCCCCC"/>
+                      </a:solidFill>
+                      <a:prstDash val="solid"/>
+                      <a:round/>
+                      <a:headEnd type="none" w="med" len="med"/>
+                      <a:tailEnd type="none" w="med" len="med"/>
+                    </a:lnL>
+                    <a:lnR w="6350" cap="flat" cmpd="sng" algn="ctr">
+                      <a:solidFill>
+                        <a:srgbClr val="CCCCCC"/>
+                      </a:solidFill>
+                      <a:prstDash val="solid"/>
+                      <a:round/>
+                      <a:headEnd type="none" w="med" len="med"/>
+                      <a:tailEnd type="none" w="med" len="med"/>
+                    </a:lnR>
+                    <a:lnT w="6350" cap="flat" cmpd="sng" algn="ctr">
+                      <a:solidFill>
+                        <a:srgbClr val="CCCCCC"/>
+                      </a:solidFill>
+                      <a:prstDash val="solid"/>
+                      <a:round/>
+                      <a:headEnd type="none" w="med" len="med"/>
+                      <a:tailEnd type="none" w="med" len="med"/>
+                    </a:lnT>
+                    <a:lnB w="6350" cap="flat" cmpd="sng" algn="ctr">
+                      <a:solidFill>
+                        <a:srgbClr val="CCCCCC"/>
+                      </a:solidFill>
+                      <a:prstDash val="solid"/>
+                      <a:round/>
+                      <a:headEnd type="none" w="med" len="med"/>
+                      <a:tailEnd type="none" w="med" len="med"/>
+                    </a:lnB>
+                    <a:solidFill>
+                      <a:srgbClr val="D4F0DC"/>
+                    </a:solidFill>
+                  </a:tcPr>
+                </a:tc>
+                <a:tc>
+                  <a:txBody>
+                    <a:bodyPr/>
+                    <a:lstStyle/>
+                    <a:p>
+                      <a:pPr algn="ctr" indent="0" marL="0">
+                        <a:buNone/>
+                      </a:pPr>
+                      <a:r>
+                        <a:rPr lang="en-US" sz="1400" b="1" dirty="0">
+                          <a:solidFill>
+                            <a:srgbClr val="8A6A00"/>
+                          </a:solidFill>
+                        </a:rPr>
+                        <a:t>3</a:t>
+                      </a:r>
+                      <a:endParaRPr lang="en-US" sz="1400" dirty="0"/>
+                    </a:p>
+                  </a:txBody>
+                  <a:tcPr marL="73152" marR="73152" marT="73152" marB="73152" anchor="ctr">
+                    <a:lnL w="6350" cap="flat" cmpd="sng" algn="ctr">
+                      <a:solidFill>
+                        <a:srgbClr val="CCCCCC"/>
+                      </a:solidFill>
+                      <a:prstDash val="solid"/>
+                      <a:round/>
+                      <a:headEnd type="none" w="med" len="med"/>
+                      <a:tailEnd type="none" w="med" len="med"/>
+                    </a:lnL>
+                    <a:lnR w="6350" cap="flat" cmpd="sng" algn="ctr">
+                      <a:solidFill>
+                        <a:srgbClr val="CCCCCC"/>
+                      </a:solidFill>
+                      <a:prstDash val="solid"/>
+                      <a:round/>
+                      <a:headEnd type="none" w="med" len="med"/>
+                      <a:tailEnd type="none" w="med" len="med"/>
+                    </a:lnR>
+                    <a:lnT w="6350" cap="flat" cmpd="sng" algn="ctr">
+                      <a:solidFill>
+                        <a:srgbClr val="CCCCCC"/>
+                      </a:solidFill>
+                      <a:prstDash val="solid"/>
+                      <a:round/>
+                      <a:headEnd type="none" w="med" len="med"/>
+                      <a:tailEnd type="none" w="med" len="med"/>
+                    </a:lnT>
+                    <a:lnB w="6350" cap="flat" cmpd="sng" algn="ctr">
+                      <a:solidFill>
+                        <a:srgbClr val="CCCCCC"/>
+                      </a:solidFill>
+                      <a:prstDash val="solid"/>
+                      <a:round/>
+                      <a:headEnd type="none" w="med" len="med"/>
+                      <a:tailEnd type="none" w="med" len="med"/>
+                    </a:lnB>
+                    <a:solidFill>
+                      <a:srgbClr val="FFF4D6"/>
+                    </a:solidFill>
+                  </a:tcPr>
+                </a:tc>
+                <a:tc>
+                  <a:txBody>
+                    <a:bodyPr/>
+                    <a:lstStyle/>
+                    <a:p>
+                      <a:pPr algn="ctr" indent="0" marL="0">
+                        <a:buNone/>
+                      </a:pPr>
+                      <a:r>
+                        <a:rPr lang="en-US" sz="1400" b="1" dirty="0">
+                          <a:solidFill>
+                            <a:srgbClr val="B33A1E"/>
+                          </a:solidFill>
+                        </a:rPr>
+                        <a:t>1</a:t>
+                      </a:r>
+                      <a:endParaRPr lang="en-US" sz="1400" dirty="0"/>
+                    </a:p>
+                  </a:txBody>
+                  <a:tcPr marL="73152" marR="73152" marT="73152" marB="73152" anchor="ctr">
+                    <a:lnL w="6350" cap="flat" cmpd="sng" algn="ctr">
+                      <a:solidFill>
+                        <a:srgbClr val="CCCCCC"/>
+                      </a:solidFill>
+                      <a:prstDash val="solid"/>
+                      <a:round/>
+                      <a:headEnd type="none" w="med" len="med"/>
+                      <a:tailEnd type="none" w="med" len="med"/>
+                    </a:lnL>
+                    <a:lnR w="6350" cap="flat" cmpd="sng" algn="ctr">
+                      <a:solidFill>
+                        <a:srgbClr val="CCCCCC"/>
+                      </a:solidFill>
+                      <a:prstDash val="solid"/>
+                      <a:round/>
+                      <a:headEnd type="none" w="med" len="med"/>
+                      <a:tailEnd type="none" w="med" len="med"/>
+                    </a:lnR>
+                    <a:lnT w="6350" cap="flat" cmpd="sng" algn="ctr">
+                      <a:solidFill>
+                        <a:srgbClr val="CCCCCC"/>
+                      </a:solidFill>
+                      <a:prstDash val="solid"/>
+                      <a:round/>
+                      <a:headEnd type="none" w="med" len="med"/>
+                      <a:tailEnd type="none" w="med" len="med"/>
+                    </a:lnT>
+                    <a:lnB w="6350" cap="flat" cmpd="sng" algn="ctr">
+                      <a:solidFill>
+                        <a:srgbClr val="CCCCCC"/>
+                      </a:solidFill>
+                      <a:prstDash val="solid"/>
+                      <a:round/>
+                      <a:headEnd type="none" w="med" len="med"/>
+                      <a:tailEnd type="none" w="med" len="med"/>
+                    </a:lnB>
+                    <a:solidFill>
+                      <a:srgbClr val="F5D5CE"/>
+                    </a:solidFill>
+                  </a:tcPr>
+                </a:tc>
+                <a:tc>
+                  <a:txBody>
+                    <a:bodyPr/>
+                    <a:lstStyle/>
+                    <a:p>
+                      <a:pPr algn="ctr" indent="0" marL="0">
+                        <a:buNone/>
+                      </a:pPr>
+                      <a:r>
+                        <a:rPr lang="en-US" sz="1400" b="1" dirty="0">
+                          <a:solidFill>
+                            <a:srgbClr val="0A7D2A"/>
+                          </a:solidFill>
+                        </a:rPr>
+                        <a:t>75%</a:t>
+                      </a:r>
+                      <a:endParaRPr lang="en-US" sz="1400" dirty="0"/>
+                    </a:p>
+                  </a:txBody>
+                  <a:tcPr marL="73152" marR="73152" marT="73152" marB="73152" anchor="ctr">
+                    <a:lnL w="6350" cap="flat" cmpd="sng" algn="ctr">
+                      <a:solidFill>
+                        <a:srgbClr val="CCCCCC"/>
+                      </a:solidFill>
+                      <a:prstDash val="solid"/>
+                      <a:round/>
+                      <a:headEnd type="none" w="med" len="med"/>
+                      <a:tailEnd type="none" w="med" len="med"/>
+                    </a:lnL>
+                    <a:lnR w="6350" cap="flat" cmpd="sng" algn="ctr">
+                      <a:solidFill>
+                        <a:srgbClr val="CCCCCC"/>
+                      </a:solidFill>
+                      <a:prstDash val="solid"/>
+                      <a:round/>
+                      <a:headEnd type="none" w="med" len="med"/>
+                      <a:tailEnd type="none" w="med" len="med"/>
+                    </a:lnR>
+                    <a:lnT w="6350" cap="flat" cmpd="sng" algn="ctr">
+                      <a:solidFill>
+                        <a:srgbClr val="CCCCCC"/>
+                      </a:solidFill>
+                      <a:prstDash val="solid"/>
+                      <a:round/>
+                      <a:headEnd type="none" w="med" len="med"/>
+                      <a:tailEnd type="none" w="med" len="med"/>
+                    </a:lnT>
+                    <a:lnB w="6350" cap="flat" cmpd="sng" algn="ctr">
+                      <a:solidFill>
+                        <a:srgbClr val="CCCCCC"/>
+                      </a:solidFill>
+                      <a:prstDash val="solid"/>
+                      <a:round/>
+                      <a:headEnd type="none" w="med" len="med"/>
+                      <a:tailEnd type="none" w="med" len="med"/>
+                    </a:lnB>
+                  </a:tcPr>
+                </a:tc>
+                <a:tc>
+                  <a:txBody>
+                    <a:bodyPr/>
+                    <a:lstStyle/>
+                    <a:p>
+                      <a:pPr algn="ctr" indent="0" marL="0">
+                        <a:buNone/>
+                      </a:pPr>
+                      <a:r>
+                        <a:rPr lang="en-US" sz="1400" b="1" dirty="0">
+                          <a:solidFill>
+                            <a:srgbClr val="0A7D2A"/>
+                          </a:solidFill>
+                        </a:rPr>
+                        <a:t>+23</a:t>
+                      </a:r>
+                      <a:endParaRPr lang="en-US" sz="1400" dirty="0"/>
+                    </a:p>
+                  </a:txBody>
+                  <a:tcPr marL="73152" marR="73152" marT="73152" marB="73152" anchor="ctr">
+                    <a:lnL w="6350" cap="flat" cmpd="sng" algn="ctr">
+                      <a:solidFill>
+                        <a:srgbClr val="CCCCCC"/>
+                      </a:solidFill>
+                      <a:prstDash val="solid"/>
+                      <a:round/>
+                      <a:headEnd type="none" w="med" len="med"/>
+                      <a:tailEnd type="none" w="med" len="med"/>
+                    </a:lnL>
+                    <a:lnR w="6350" cap="flat" cmpd="sng" algn="ctr">
+                      <a:solidFill>
+                        <a:srgbClr val="CCCCCC"/>
+                      </a:solidFill>
+                      <a:prstDash val="solid"/>
+                      <a:round/>
+                      <a:headEnd type="none" w="med" len="med"/>
+                      <a:tailEnd type="none" w="med" len="med"/>
+                    </a:lnR>
+                    <a:lnT w="6350" cap="flat" cmpd="sng" algn="ctr">
+                      <a:solidFill>
+                        <a:srgbClr val="CCCCCC"/>
+                      </a:solidFill>
+                      <a:prstDash val="solid"/>
+                      <a:round/>
+                      <a:headEnd type="none" w="med" len="med"/>
+                      <a:tailEnd type="none" w="med" len="med"/>
+                    </a:lnT>
+                    <a:lnB w="6350" cap="flat" cmpd="sng" algn="ctr">
+                      <a:solidFill>
+                        <a:srgbClr val="CCCCCC"/>
+                      </a:solidFill>
+                      <a:prstDash val="solid"/>
+                      <a:round/>
+                      <a:headEnd type="none" w="med" len="med"/>
+                      <a:tailEnd type="none" w="med" len="med"/>
+                    </a:lnB>
+                  </a:tcPr>
+                </a:tc>
+              </a:tr>
+              <a:tr h="411480">
+                <a:tc>
+                  <a:txBody>
+                    <a:bodyPr/>
+                    <a:lstStyle/>
+                    <a:p>
+                      <a:pPr algn="l" indent="0" marL="0">
+                        <a:buNone/>
+                      </a:pPr>
+                      <a:r>
+                        <a:rPr lang="en-US" sz="1400" b="1" dirty="0">
+                          <a:solidFill>
+                            <a:srgbClr val="1A1A1A"/>
+                          </a:solidFill>
+                        </a:rPr>
+                        <a:t>Rework</a:t>
+                      </a:r>
+                      <a:endParaRPr lang="en-US" sz="1400" dirty="0"/>
+                    </a:p>
+                  </a:txBody>
+                  <a:tcPr marL="73152" marR="73152" marT="73152" marB="73152" anchor="ctr">
+                    <a:lnL w="6350" cap="flat" cmpd="sng" algn="ctr">
+                      <a:solidFill>
+                        <a:srgbClr val="CCCCCC"/>
+                      </a:solidFill>
+                      <a:prstDash val="solid"/>
+                      <a:round/>
+                      <a:headEnd type="none" w="med" len="med"/>
+                      <a:tailEnd type="none" w="med" len="med"/>
+                    </a:lnL>
+                    <a:lnR w="6350" cap="flat" cmpd="sng" algn="ctr">
+                      <a:solidFill>
+                        <a:srgbClr val="CCCCCC"/>
+                      </a:solidFill>
+                      <a:prstDash val="solid"/>
+                      <a:round/>
+                      <a:headEnd type="none" w="med" len="med"/>
+                      <a:tailEnd type="none" w="med" len="med"/>
+                    </a:lnR>
+                    <a:lnT w="6350" cap="flat" cmpd="sng" algn="ctr">
+                      <a:solidFill>
+                        <a:srgbClr val="CCCCCC"/>
+                      </a:solidFill>
+                      <a:prstDash val="solid"/>
+                      <a:round/>
+                      <a:headEnd type="none" w="med" len="med"/>
+                      <a:tailEnd type="none" w="med" len="med"/>
+                    </a:lnT>
+                    <a:lnB w="6350" cap="flat" cmpd="sng" algn="ctr">
+                      <a:solidFill>
+                        <a:srgbClr val="CCCCCC"/>
+                      </a:solidFill>
+                      <a:prstDash val="solid"/>
+                      <a:round/>
+                      <a:headEnd type="none" w="med" len="med"/>
+                      <a:tailEnd type="none" w="med" len="med"/>
+                    </a:lnB>
+                  </a:tcPr>
+                </a:tc>
+                <a:tc>
+                  <a:txBody>
+                    <a:bodyPr/>
+                    <a:lstStyle/>
+                    <a:p>
+                      <a:pPr algn="ctr" indent="0" marL="0">
+                        <a:buNone/>
+                      </a:pPr>
+                      <a:r>
+                        <a:rPr lang="en-US" sz="1400" dirty="0">
+                          <a:solidFill>
+                            <a:srgbClr val="1A1A1A"/>
+                          </a:solidFill>
+                        </a:rPr>
+                        <a:t>13</a:t>
+                      </a:r>
+                      <a:endParaRPr lang="en-US" sz="1400" dirty="0"/>
+                    </a:p>
+                  </a:txBody>
+                  <a:tcPr marL="73152" marR="73152" marT="73152" marB="73152" anchor="ctr">
+                    <a:lnL w="6350" cap="flat" cmpd="sng" algn="ctr">
+                      <a:solidFill>
+                        <a:srgbClr val="CCCCCC"/>
+                      </a:solidFill>
+                      <a:prstDash val="solid"/>
+                      <a:round/>
+                      <a:headEnd type="none" w="med" len="med"/>
+                      <a:tailEnd type="none" w="med" len="med"/>
+                    </a:lnL>
+                    <a:lnR w="6350" cap="flat" cmpd="sng" algn="ctr">
+                      <a:solidFill>
+                        <a:srgbClr val="CCCCCC"/>
+                      </a:solidFill>
+                      <a:prstDash val="solid"/>
+                      <a:round/>
+                      <a:headEnd type="none" w="med" len="med"/>
+                      <a:tailEnd type="none" w="med" len="med"/>
+                    </a:lnR>
+                    <a:lnT w="6350" cap="flat" cmpd="sng" algn="ctr">
+                      <a:solidFill>
+                        <a:srgbClr val="CCCCCC"/>
+                      </a:solidFill>
+                      <a:prstDash val="solid"/>
+                      <a:round/>
+                      <a:headEnd type="none" w="med" len="med"/>
+                      <a:tailEnd type="none" w="med" len="med"/>
+                    </a:lnT>
+                    <a:lnB w="6350" cap="flat" cmpd="sng" algn="ctr">
+                      <a:solidFill>
+                        <a:srgbClr val="CCCCCC"/>
+                      </a:solidFill>
+                      <a:prstDash val="solid"/>
+                      <a:round/>
+                      <a:headEnd type="none" w="med" len="med"/>
+                      <a:tailEnd type="none" w="med" len="med"/>
+                    </a:lnB>
+                  </a:tcPr>
+                </a:tc>
+                <a:tc>
+                  <a:txBody>
+                    <a:bodyPr/>
+                    <a:lstStyle/>
+                    <a:p>
+                      <a:pPr algn="ctr" indent="0" marL="0">
+                        <a:buNone/>
+                      </a:pPr>
+                      <a:r>
+                        <a:rPr lang="en-US" sz="1400" b="1" dirty="0">
+                          <a:solidFill>
+                            <a:srgbClr val="0A7D2A"/>
+                          </a:solidFill>
+                        </a:rPr>
+                        <a:t>6</a:t>
+                      </a:r>
+                      <a:endParaRPr lang="en-US" sz="1400" dirty="0"/>
+                    </a:p>
+                  </a:txBody>
+                  <a:tcPr marL="73152" marR="73152" marT="73152" marB="73152" anchor="ctr">
+                    <a:lnL w="6350" cap="flat" cmpd="sng" algn="ctr">
+                      <a:solidFill>
+                        <a:srgbClr val="CCCCCC"/>
+                      </a:solidFill>
+                      <a:prstDash val="solid"/>
+                      <a:round/>
+                      <a:headEnd type="none" w="med" len="med"/>
+                      <a:tailEnd type="none" w="med" len="med"/>
+                    </a:lnL>
+                    <a:lnR w="6350" cap="flat" cmpd="sng" algn="ctr">
+                      <a:solidFill>
+                        <a:srgbClr val="CCCCCC"/>
+                      </a:solidFill>
+                      <a:prstDash val="solid"/>
+                      <a:round/>
+                      <a:headEnd type="none" w="med" len="med"/>
+                      <a:tailEnd type="none" w="med" len="med"/>
+                    </a:lnR>
+                    <a:lnT w="6350" cap="flat" cmpd="sng" algn="ctr">
+                      <a:solidFill>
+                        <a:srgbClr val="CCCCCC"/>
+                      </a:solidFill>
+                      <a:prstDash val="solid"/>
+                      <a:round/>
+                      <a:headEnd type="none" w="med" len="med"/>
+                      <a:tailEnd type="none" w="med" len="med"/>
+                    </a:lnT>
+                    <a:lnB w="6350" cap="flat" cmpd="sng" algn="ctr">
+                      <a:solidFill>
+                        <a:srgbClr val="CCCCCC"/>
+                      </a:solidFill>
+                      <a:prstDash val="solid"/>
+                      <a:round/>
+                      <a:headEnd type="none" w="med" len="med"/>
+                      <a:tailEnd type="none" w="med" len="med"/>
+                    </a:lnB>
+                    <a:solidFill>
+                      <a:srgbClr val="D4F0DC"/>
+                    </a:solidFill>
+                  </a:tcPr>
+                </a:tc>
+                <a:tc>
+                  <a:txBody>
+                    <a:bodyPr/>
+                    <a:lstStyle/>
+                    <a:p>
+                      <a:pPr algn="ctr" indent="0" marL="0">
+                        <a:buNone/>
+                      </a:pPr>
+                      <a:r>
+                        <a:rPr lang="en-US" sz="1400" b="1" dirty="0">
+                          <a:solidFill>
+                            <a:srgbClr val="8A6A00"/>
+                          </a:solidFill>
+                        </a:rPr>
+                        <a:t>1</a:t>
+                      </a:r>
+                      <a:endParaRPr lang="en-US" sz="1400" dirty="0"/>
+                    </a:p>
+                  </a:txBody>
+                  <a:tcPr marL="73152" marR="73152" marT="73152" marB="73152" anchor="ctr">
+                    <a:lnL w="6350" cap="flat" cmpd="sng" algn="ctr">
+                      <a:solidFill>
+                        <a:srgbClr val="CCCCCC"/>
+                      </a:solidFill>
+                      <a:prstDash val="solid"/>
+                      <a:round/>
+                      <a:headEnd type="none" w="med" len="med"/>
+                      <a:tailEnd type="none" w="med" len="med"/>
+                    </a:lnL>
+                    <a:lnR w="6350" cap="flat" cmpd="sng" algn="ctr">
+                      <a:solidFill>
+                        <a:srgbClr val="CCCCCC"/>
+                      </a:solidFill>
+                      <a:prstDash val="solid"/>
+                      <a:round/>
+                      <a:headEnd type="none" w="med" len="med"/>
+                      <a:tailEnd type="none" w="med" len="med"/>
+                    </a:lnR>
+                    <a:lnT w="6350" cap="flat" cmpd="sng" algn="ctr">
+                      <a:solidFill>
+                        <a:srgbClr val="CCCCCC"/>
+                      </a:solidFill>
+                      <a:prstDash val="solid"/>
+                      <a:round/>
+                      <a:headEnd type="none" w="med" len="med"/>
+                      <a:tailEnd type="none" w="med" len="med"/>
+                    </a:lnT>
+                    <a:lnB w="6350" cap="flat" cmpd="sng" algn="ctr">
+                      <a:solidFill>
+                        <a:srgbClr val="CCCCCC"/>
+                      </a:solidFill>
+                      <a:prstDash val="solid"/>
+                      <a:round/>
+                      <a:headEnd type="none" w="med" len="med"/>
+                      <a:tailEnd type="none" w="med" len="med"/>
+                    </a:lnB>
+                    <a:solidFill>
+                      <a:srgbClr val="FFF4D6"/>
+                    </a:solidFill>
+                  </a:tcPr>
+                </a:tc>
+                <a:tc>
+                  <a:txBody>
+                    <a:bodyPr/>
+                    <a:lstStyle/>
+                    <a:p>
+                      <a:pPr algn="ctr" indent="0" marL="0">
+                        <a:buNone/>
+                      </a:pPr>
+                      <a:r>
+                        <a:rPr lang="en-US" sz="1400" b="1" dirty="0">
+                          <a:solidFill>
+                            <a:srgbClr val="B33A1E"/>
+                          </a:solidFill>
+                        </a:rPr>
+                        <a:t>6</a:t>
+                      </a:r>
+                      <a:endParaRPr lang="en-US" sz="1400" dirty="0"/>
+                    </a:p>
+                  </a:txBody>
+                  <a:tcPr marL="73152" marR="73152" marT="73152" marB="73152" anchor="ctr">
+                    <a:lnL w="6350" cap="flat" cmpd="sng" algn="ctr">
+                      <a:solidFill>
+                        <a:srgbClr val="CCCCCC"/>
+                      </a:solidFill>
+                      <a:prstDash val="solid"/>
+                      <a:round/>
+                      <a:headEnd type="none" w="med" len="med"/>
+                      <a:tailEnd type="none" w="med" len="med"/>
+                    </a:lnL>
+                    <a:lnR w="6350" cap="flat" cmpd="sng" algn="ctr">
+                      <a:solidFill>
+                        <a:srgbClr val="CCCCCC"/>
+                      </a:solidFill>
+                      <a:prstDash val="solid"/>
+                      <a:round/>
+                      <a:headEnd type="none" w="med" len="med"/>
+                      <a:tailEnd type="none" w="med" len="med"/>
+                    </a:lnR>
+                    <a:lnT w="6350" cap="flat" cmpd="sng" algn="ctr">
+                      <a:solidFill>
+                        <a:srgbClr val="CCCCCC"/>
+                      </a:solidFill>
+                      <a:prstDash val="solid"/>
+                      <a:round/>
+                      <a:headEnd type="none" w="med" len="med"/>
+                      <a:tailEnd type="none" w="med" len="med"/>
+                    </a:lnT>
+                    <a:lnB w="6350" cap="flat" cmpd="sng" algn="ctr">
+                      <a:solidFill>
+                        <a:srgbClr val="CCCCCC"/>
+                      </a:solidFill>
+                      <a:prstDash val="solid"/>
+                      <a:round/>
+                      <a:headEnd type="none" w="med" len="med"/>
+                      <a:tailEnd type="none" w="med" len="med"/>
+                    </a:lnB>
+                    <a:solidFill>
+                      <a:srgbClr val="F5D5CE"/>
+                    </a:solidFill>
+                  </a:tcPr>
+                </a:tc>
+                <a:tc>
+                  <a:txBody>
+                    <a:bodyPr/>
+                    <a:lstStyle/>
+                    <a:p>
+                      <a:pPr algn="ctr" indent="0" marL="0">
+                        <a:buNone/>
+                      </a:pPr>
+                      <a:r>
+                        <a:rPr lang="en-US" sz="1400" b="1" dirty="0">
+                          <a:solidFill>
+                            <a:srgbClr val="1A1A1A"/>
+                          </a:solidFill>
+                        </a:rPr>
+                        <a:t>46%</a:t>
+                      </a:r>
+                      <a:endParaRPr lang="en-US" sz="1400" dirty="0"/>
+                    </a:p>
+                  </a:txBody>
+                  <a:tcPr marL="73152" marR="73152" marT="73152" marB="73152" anchor="ctr">
+                    <a:lnL w="6350" cap="flat" cmpd="sng" algn="ctr">
+                      <a:solidFill>
+                        <a:srgbClr val="CCCCCC"/>
+                      </a:solidFill>
+                      <a:prstDash val="solid"/>
+                      <a:round/>
+                      <a:headEnd type="none" w="med" len="med"/>
+                      <a:tailEnd type="none" w="med" len="med"/>
+                    </a:lnL>
+                    <a:lnR w="6350" cap="flat" cmpd="sng" algn="ctr">
+                      <a:solidFill>
+                        <a:srgbClr val="CCCCCC"/>
+                      </a:solidFill>
+                      <a:prstDash val="solid"/>
+                      <a:round/>
+                      <a:headEnd type="none" w="med" len="med"/>
+                      <a:tailEnd type="none" w="med" len="med"/>
+                    </a:lnR>
+                    <a:lnT w="6350" cap="flat" cmpd="sng" algn="ctr">
+                      <a:solidFill>
+                        <a:srgbClr val="CCCCCC"/>
+                      </a:solidFill>
+                      <a:prstDash val="solid"/>
+                      <a:round/>
+                      <a:headEnd type="none" w="med" len="med"/>
+                      <a:tailEnd type="none" w="med" len="med"/>
+                    </a:lnT>
+                    <a:lnB w="6350" cap="flat" cmpd="sng" algn="ctr">
+                      <a:solidFill>
+                        <a:srgbClr val="CCCCCC"/>
+                      </a:solidFill>
+                      <a:prstDash val="solid"/>
+                      <a:round/>
+                      <a:headEnd type="none" w="med" len="med"/>
+                      <a:tailEnd type="none" w="med" len="med"/>
+                    </a:lnB>
+                  </a:tcPr>
+                </a:tc>
+                <a:tc>
+                  <a:txBody>
+                    <a:bodyPr/>
+                    <a:lstStyle/>
+                    <a:p>
+                      <a:pPr algn="ctr" indent="0" marL="0">
+                        <a:buNone/>
+                      </a:pPr>
+                      <a:r>
+                        <a:rPr lang="en-US" sz="1400" dirty="0">
+                          <a:solidFill>
+                            <a:srgbClr val="1A1A1A"/>
+                          </a:solidFill>
+                        </a:rPr>
+                        <a:t>+8</a:t>
+                      </a:r>
+                      <a:endParaRPr lang="en-US" sz="1400" dirty="0"/>
+                    </a:p>
+                  </a:txBody>
+                  <a:tcPr marL="73152" marR="73152" marT="73152" marB="73152" anchor="ctr">
+                    <a:lnL w="6350" cap="flat" cmpd="sng" algn="ctr">
+                      <a:solidFill>
+                        <a:srgbClr val="CCCCCC"/>
+                      </a:solidFill>
+                      <a:prstDash val="solid"/>
+                      <a:round/>
+                      <a:headEnd type="none" w="med" len="med"/>
+                      <a:tailEnd type="none" w="med" len="med"/>
+                    </a:lnL>
+                    <a:lnR w="6350" cap="flat" cmpd="sng" algn="ctr">
+                      <a:solidFill>
+                        <a:srgbClr val="CCCCCC"/>
+                      </a:solidFill>
+                      <a:prstDash val="solid"/>
+                      <a:round/>
+                      <a:headEnd type="none" w="med" len="med"/>
+                      <a:tailEnd type="none" w="med" len="med"/>
+                    </a:lnR>
+                    <a:lnT w="6350" cap="flat" cmpd="sng" algn="ctr">
+                      <a:solidFill>
+                        <a:srgbClr val="CCCCCC"/>
+                      </a:solidFill>
+                      <a:prstDash val="solid"/>
+                      <a:round/>
+                      <a:headEnd type="none" w="med" len="med"/>
+                      <a:tailEnd type="none" w="med" len="med"/>
+                    </a:lnT>
+                    <a:lnB w="6350" cap="flat" cmpd="sng" algn="ctr">
+                      <a:solidFill>
+                        <a:srgbClr val="CCCCCC"/>
+                      </a:solidFill>
+                      <a:prstDash val="solid"/>
+                      <a:round/>
+                      <a:headEnd type="none" w="med" len="med"/>
+                      <a:tailEnd type="none" w="med" len="med"/>
+                    </a:lnB>
+                  </a:tcPr>
+                </a:tc>
+              </a:tr>
+              <a:tr h="411480">
+                <a:tc>
+                  <a:txBody>
+                    <a:bodyPr/>
+                    <a:lstStyle/>
+                    <a:p>
+                      <a:pPr algn="l" indent="0" marL="0">
+                        <a:buNone/>
+                      </a:pPr>
+                      <a:r>
+                        <a:rPr lang="en-US" sz="1400" b="1" dirty="0">
+                          <a:solidFill>
+                            <a:srgbClr val="1A1A1A"/>
+                          </a:solidFill>
+                        </a:rPr>
+                        <a:t>Ordering</a:t>
+                      </a:r>
+                      <a:endParaRPr lang="en-US" sz="1400" dirty="0"/>
+                    </a:p>
+                  </a:txBody>
+                  <a:tcPr marL="73152" marR="73152" marT="73152" marB="73152" anchor="ctr">
+                    <a:lnL w="6350" cap="flat" cmpd="sng" algn="ctr">
+                      <a:solidFill>
+                        <a:srgbClr val="CCCCCC"/>
+                      </a:solidFill>
+                      <a:prstDash val="solid"/>
+                      <a:round/>
+                      <a:headEnd type="none" w="med" len="med"/>
+                      <a:tailEnd type="none" w="med" len="med"/>
+                    </a:lnL>
+                    <a:lnR w="6350" cap="flat" cmpd="sng" algn="ctr">
+                      <a:solidFill>
+                        <a:srgbClr val="CCCCCC"/>
+                      </a:solidFill>
+                      <a:prstDash val="solid"/>
+                      <a:round/>
+                      <a:headEnd type="none" w="med" len="med"/>
+                      <a:tailEnd type="none" w="med" len="med"/>
+                    </a:lnR>
+                    <a:lnT w="6350" cap="flat" cmpd="sng" algn="ctr">
+                      <a:solidFill>
+                        <a:srgbClr val="CCCCCC"/>
+                      </a:solidFill>
+                      <a:prstDash val="solid"/>
+                      <a:round/>
+                      <a:headEnd type="none" w="med" len="med"/>
+                      <a:tailEnd type="none" w="med" len="med"/>
+                    </a:lnT>
+                    <a:lnB w="6350" cap="flat" cmpd="sng" algn="ctr">
+                      <a:solidFill>
+                        <a:srgbClr val="CCCCCC"/>
+                      </a:solidFill>
+                      <a:prstDash val="solid"/>
+                      <a:round/>
+                      <a:headEnd type="none" w="med" len="med"/>
+                      <a:tailEnd type="none" w="med" len="med"/>
+                    </a:lnB>
+                  </a:tcPr>
+                </a:tc>
+                <a:tc>
+                  <a:txBody>
+                    <a:bodyPr/>
+                    <a:lstStyle/>
+                    <a:p>
+                      <a:pPr algn="ctr" indent="0" marL="0">
+                        <a:buNone/>
+                      </a:pPr>
+                      <a:r>
+                        <a:rPr lang="en-US" sz="1400" dirty="0">
+                          <a:solidFill>
+                            <a:srgbClr val="1A1A1A"/>
+                          </a:solidFill>
+                        </a:rPr>
+                        <a:t>24</a:t>
+                      </a:r>
+                      <a:endParaRPr lang="en-US" sz="1400" dirty="0"/>
+                    </a:p>
+                  </a:txBody>
+                  <a:tcPr marL="73152" marR="73152" marT="73152" marB="73152" anchor="ctr">
+                    <a:lnL w="6350" cap="flat" cmpd="sng" algn="ctr">
+                      <a:solidFill>
+                        <a:srgbClr val="CCCCCC"/>
+                      </a:solidFill>
+                      <a:prstDash val="solid"/>
+                      <a:round/>
+                      <a:headEnd type="none" w="med" len="med"/>
+                      <a:tailEnd type="none" w="med" len="med"/>
+                    </a:lnL>
+                    <a:lnR w="6350" cap="flat" cmpd="sng" algn="ctr">
+                      <a:solidFill>
+                        <a:srgbClr val="CCCCCC"/>
+                      </a:solidFill>
+                      <a:prstDash val="solid"/>
+                      <a:round/>
+                      <a:headEnd type="none" w="med" len="med"/>
+                      <a:tailEnd type="none" w="med" len="med"/>
+                    </a:lnR>
+                    <a:lnT w="6350" cap="flat" cmpd="sng" algn="ctr">
+                      <a:solidFill>
+                        <a:srgbClr val="CCCCCC"/>
+                      </a:solidFill>
+                      <a:prstDash val="solid"/>
+                      <a:round/>
+                      <a:headEnd type="none" w="med" len="med"/>
+                      <a:tailEnd type="none" w="med" len="med"/>
+                    </a:lnT>
+                    <a:lnB w="6350" cap="flat" cmpd="sng" algn="ctr">
+                      <a:solidFill>
+                        <a:srgbClr val="CCCCCC"/>
+                      </a:solidFill>
+                      <a:prstDash val="solid"/>
+                      <a:round/>
+                      <a:headEnd type="none" w="med" len="med"/>
+                      <a:tailEnd type="none" w="med" len="med"/>
+                    </a:lnB>
+                  </a:tcPr>
+                </a:tc>
+                <a:tc>
+                  <a:txBody>
+                    <a:bodyPr/>
+                    <a:lstStyle/>
+                    <a:p>
+                      <a:pPr algn="ctr" indent="0" marL="0">
+                        <a:buNone/>
+                      </a:pPr>
+                      <a:r>
+                        <a:rPr lang="en-US" sz="1400" b="1" dirty="0">
+                          <a:solidFill>
+                            <a:srgbClr val="0A7D2A"/>
+                          </a:solidFill>
+                        </a:rPr>
+                        <a:t>10</a:t>
+                      </a:r>
+                      <a:endParaRPr lang="en-US" sz="1400" dirty="0"/>
+                    </a:p>
+                  </a:txBody>
+                  <a:tcPr marL="73152" marR="73152" marT="73152" marB="73152" anchor="ctr">
+                    <a:lnL w="6350" cap="flat" cmpd="sng" algn="ctr">
+                      <a:solidFill>
+                        <a:srgbClr val="CCCCCC"/>
+                      </a:solidFill>
+                      <a:prstDash val="solid"/>
+                      <a:round/>
+                      <a:headEnd type="none" w="med" len="med"/>
+                      <a:tailEnd type="none" w="med" len="med"/>
+                    </a:lnL>
+                    <a:lnR w="6350" cap="flat" cmpd="sng" algn="ctr">
+                      <a:solidFill>
+                        <a:srgbClr val="CCCCCC"/>
+                      </a:solidFill>
+                      <a:prstDash val="solid"/>
+                      <a:round/>
+                      <a:headEnd type="none" w="med" len="med"/>
+                      <a:tailEnd type="none" w="med" len="med"/>
+                    </a:lnR>
+                    <a:lnT w="6350" cap="flat" cmpd="sng" algn="ctr">
+                      <a:solidFill>
+                        <a:srgbClr val="CCCCCC"/>
+                      </a:solidFill>
+                      <a:prstDash val="solid"/>
+                      <a:round/>
+                      <a:headEnd type="none" w="med" len="med"/>
+                      <a:tailEnd type="none" w="med" len="med"/>
+                    </a:lnT>
+                    <a:lnB w="6350" cap="flat" cmpd="sng" algn="ctr">
+                      <a:solidFill>
+                        <a:srgbClr val="CCCCCC"/>
+                      </a:solidFill>
+                      <a:prstDash val="solid"/>
+                      <a:round/>
+                      <a:headEnd type="none" w="med" len="med"/>
+                      <a:tailEnd type="none" w="med" len="med"/>
+                    </a:lnB>
+                    <a:solidFill>
+                      <a:srgbClr val="D4F0DC"/>
+                    </a:solidFill>
+                  </a:tcPr>
+                </a:tc>
+                <a:tc>
+                  <a:txBody>
+                    <a:bodyPr/>
+                    <a:lstStyle/>
+                    <a:p>
+                      <a:pPr algn="ctr" indent="0" marL="0">
+                        <a:buNone/>
+                      </a:pPr>
+                      <a:r>
+                        <a:rPr lang="en-US" sz="1400" b="1" dirty="0">
+                          <a:solidFill>
+                            <a:srgbClr val="8A6A00"/>
+                          </a:solidFill>
+                        </a:rPr>
+                        <a:t>12</a:t>
+                      </a:r>
+                      <a:endParaRPr lang="en-US" sz="1400" dirty="0"/>
+                    </a:p>
+                  </a:txBody>
+                  <a:tcPr marL="73152" marR="73152" marT="73152" marB="73152" anchor="ctr">
+                    <a:lnL w="6350" cap="flat" cmpd="sng" algn="ctr">
+                      <a:solidFill>
+                        <a:srgbClr val="CCCCCC"/>
+                      </a:solidFill>
+                      <a:prstDash val="solid"/>
+                      <a:round/>
+                      <a:headEnd type="none" w="med" len="med"/>
+                      <a:tailEnd type="none" w="med" len="med"/>
+                    </a:lnL>
+                    <a:lnR w="6350" cap="flat" cmpd="sng" algn="ctr">
+                      <a:solidFill>
+                        <a:srgbClr val="CCCCCC"/>
+                      </a:solidFill>
+                      <a:prstDash val="solid"/>
+                      <a:round/>
+                      <a:headEnd type="none" w="med" len="med"/>
+                      <a:tailEnd type="none" w="med" len="med"/>
+                    </a:lnR>
+                    <a:lnT w="6350" cap="flat" cmpd="sng" algn="ctr">
+                      <a:solidFill>
+                        <a:srgbClr val="CCCCCC"/>
+                      </a:solidFill>
+                      <a:prstDash val="solid"/>
+                      <a:round/>
+                      <a:headEnd type="none" w="med" len="med"/>
+                      <a:tailEnd type="none" w="med" len="med"/>
+                    </a:lnT>
+                    <a:lnB w="6350" cap="flat" cmpd="sng" algn="ctr">
+                      <a:solidFill>
+                        <a:srgbClr val="CCCCCC"/>
+                      </a:solidFill>
+                      <a:prstDash val="solid"/>
+                      <a:round/>
+                      <a:headEnd type="none" w="med" len="med"/>
+                      <a:tailEnd type="none" w="med" len="med"/>
+                    </a:lnB>
+                    <a:solidFill>
+                      <a:srgbClr val="FFF4D6"/>
+                    </a:solidFill>
+                  </a:tcPr>
+                </a:tc>
+                <a:tc>
+                  <a:txBody>
+                    <a:bodyPr/>
+                    <a:lstStyle/>
+                    <a:p>
+                      <a:pPr algn="ctr" indent="0" marL="0">
+                        <a:buNone/>
+                      </a:pPr>
+                      <a:r>
+                        <a:rPr lang="en-US" sz="1400" b="1" dirty="0">
+                          <a:solidFill>
+                            <a:srgbClr val="B33A1E"/>
+                          </a:solidFill>
+                        </a:rPr>
+                        <a:t>2</a:t>
+                      </a:r>
+                      <a:endParaRPr lang="en-US" sz="1400" dirty="0"/>
+                    </a:p>
+                  </a:txBody>
+                  <a:tcPr marL="73152" marR="73152" marT="73152" marB="73152" anchor="ctr">
+                    <a:lnL w="6350" cap="flat" cmpd="sng" algn="ctr">
+                      <a:solidFill>
+                        <a:srgbClr val="CCCCCC"/>
+                      </a:solidFill>
+                      <a:prstDash val="solid"/>
+                      <a:round/>
+                      <a:headEnd type="none" w="med" len="med"/>
+                      <a:tailEnd type="none" w="med" len="med"/>
+                    </a:lnL>
+                    <a:lnR w="6350" cap="flat" cmpd="sng" algn="ctr">
+                      <a:solidFill>
+                        <a:srgbClr val="CCCCCC"/>
+                      </a:solidFill>
+                      <a:prstDash val="solid"/>
+                      <a:round/>
+                      <a:headEnd type="none" w="med" len="med"/>
+                      <a:tailEnd type="none" w="med" len="med"/>
+                    </a:lnR>
+                    <a:lnT w="6350" cap="flat" cmpd="sng" algn="ctr">
+                      <a:solidFill>
+                        <a:srgbClr val="CCCCCC"/>
+                      </a:solidFill>
+                      <a:prstDash val="solid"/>
+                      <a:round/>
+                      <a:headEnd type="none" w="med" len="med"/>
+                      <a:tailEnd type="none" w="med" len="med"/>
+                    </a:lnT>
+                    <a:lnB w="6350" cap="flat" cmpd="sng" algn="ctr">
+                      <a:solidFill>
+                        <a:srgbClr val="CCCCCC"/>
+                      </a:solidFill>
+                      <a:prstDash val="solid"/>
+                      <a:round/>
+                      <a:headEnd type="none" w="med" len="med"/>
+                      <a:tailEnd type="none" w="med" len="med"/>
+                    </a:lnB>
+                    <a:solidFill>
+                      <a:srgbClr val="F5D5CE"/>
+                    </a:solidFill>
+                  </a:tcPr>
+                </a:tc>
+                <a:tc>
+                  <a:txBody>
+                    <a:bodyPr/>
+                    <a:lstStyle/>
+                    <a:p>
+                      <a:pPr algn="ctr" indent="0" marL="0">
+                        <a:buNone/>
+                      </a:pPr>
+                      <a:r>
+                        <a:rPr lang="en-US" sz="1400" b="1" dirty="0">
+                          <a:solidFill>
+                            <a:srgbClr val="1A1A1A"/>
+                          </a:solidFill>
+                        </a:rPr>
+                        <a:t>42%</a:t>
+                      </a:r>
+                      <a:endParaRPr lang="en-US" sz="1400" dirty="0"/>
+                    </a:p>
+                  </a:txBody>
+                  <a:tcPr marL="73152" marR="73152" marT="73152" marB="73152" anchor="ctr">
+                    <a:lnL w="6350" cap="flat" cmpd="sng" algn="ctr">
+                      <a:solidFill>
+                        <a:srgbClr val="CCCCCC"/>
+                      </a:solidFill>
+                      <a:prstDash val="solid"/>
+                      <a:round/>
+                      <a:headEnd type="none" w="med" len="med"/>
+                      <a:tailEnd type="none" w="med" len="med"/>
+                    </a:lnL>
+                    <a:lnR w="6350" cap="flat" cmpd="sng" algn="ctr">
+                      <a:solidFill>
+                        <a:srgbClr val="CCCCCC"/>
+                      </a:solidFill>
+                      <a:prstDash val="solid"/>
+                      <a:round/>
+                      <a:headEnd type="none" w="med" len="med"/>
+                      <a:tailEnd type="none" w="med" len="med"/>
+                    </a:lnR>
+                    <a:lnT w="6350" cap="flat" cmpd="sng" algn="ctr">
+                      <a:solidFill>
+                        <a:srgbClr val="CCCCCC"/>
+                      </a:solidFill>
+                      <a:prstDash val="solid"/>
+                      <a:round/>
+                      <a:headEnd type="none" w="med" len="med"/>
+                      <a:tailEnd type="none" w="med" len="med"/>
+                    </a:lnT>
+                    <a:lnB w="6350" cap="flat" cmpd="sng" algn="ctr">
+                      <a:solidFill>
+                        <a:srgbClr val="CCCCCC"/>
+                      </a:solidFill>
+                      <a:prstDash val="solid"/>
+                      <a:round/>
+                      <a:headEnd type="none" w="med" len="med"/>
+                      <a:tailEnd type="none" w="med" len="med"/>
+                    </a:lnB>
+                  </a:tcPr>
+                </a:tc>
+                <a:tc>
+                  <a:txBody>
+                    <a:bodyPr/>
+                    <a:lstStyle/>
+                    <a:p>
+                      <a:pPr algn="ctr" indent="0" marL="0">
+                        <a:buNone/>
+                      </a:pPr>
+                      <a:r>
+                        <a:rPr lang="en-US" sz="1400" dirty="0">
+                          <a:solidFill>
+                            <a:srgbClr val="1A1A1A"/>
+                          </a:solidFill>
+                        </a:rPr>
+                        <a:t>+9</a:t>
+                      </a:r>
+                      <a:endParaRPr lang="en-US" sz="1400" dirty="0"/>
+                    </a:p>
+                  </a:txBody>
+                  <a:tcPr marL="73152" marR="73152" marT="73152" marB="73152" anchor="ctr">
+                    <a:lnL w="6350" cap="flat" cmpd="sng" algn="ctr">
+                      <a:solidFill>
+                        <a:srgbClr val="CCCCCC"/>
+                      </a:solidFill>
+                      <a:prstDash val="solid"/>
+                      <a:round/>
+                      <a:headEnd type="none" w="med" len="med"/>
+                      <a:tailEnd type="none" w="med" len="med"/>
+                    </a:lnL>
+                    <a:lnR w="6350" cap="flat" cmpd="sng" algn="ctr">
+                      <a:solidFill>
+                        <a:srgbClr val="CCCCCC"/>
+                      </a:solidFill>
+                      <a:prstDash val="solid"/>
+                      <a:round/>
+                      <a:headEnd type="none" w="med" len="med"/>
+                      <a:tailEnd type="none" w="med" len="med"/>
+                    </a:lnR>
+                    <a:lnT w="6350" cap="flat" cmpd="sng" algn="ctr">
+                      <a:solidFill>
+                        <a:srgbClr val="CCCCCC"/>
+                      </a:solidFill>
+                      <a:prstDash val="solid"/>
+                      <a:round/>
+                      <a:headEnd type="none" w="med" len="med"/>
+                      <a:tailEnd type="none" w="med" len="med"/>
+                    </a:lnT>
+                    <a:lnB w="6350" cap="flat" cmpd="sng" algn="ctr">
+                      <a:solidFill>
+                        <a:srgbClr val="CCCCCC"/>
+                      </a:solidFill>
+                      <a:prstDash val="solid"/>
+                      <a:round/>
+                      <a:headEnd type="none" w="med" len="med"/>
+                      <a:tailEnd type="none" w="med" len="med"/>
+                    </a:lnB>
+                  </a:tcPr>
+                </a:tc>
+              </a:tr>
+            </a:tbl>
+          </a:graphicData>
+        </a:graphic>
+      </p:graphicFrame>
+      <p:sp>
+        <p:nvSpPr>
+          <p:cNvPr id="5" name="Text 2"/>
+          <p:cNvSpPr/>
+          <p:nvPr/>
+        </p:nvSpPr>
+        <p:spPr>
+          <a:xfrm>
+            <a:off x="365760" y="4206240"/>
+            <a:ext cx="8412480" cy="548640"/>
+          </a:xfrm>
+          <a:prstGeom prst="rect">
+            <a:avLst/>
+          </a:prstGeom>
+          <a:noFill/>
+          <a:ln/>
+        </p:spPr>
+        <p:txBody>
+          <a:bodyPr wrap="square" lIns="0" tIns="0" rIns="0" bIns="0" rtlCol="0" anchor="ctr"/>
+          <a:lstStyle/>
+          <a:p>
+            <a:pPr algn="ctr" indent="0" marL="0">
+              <a:buNone/>
+            </a:pPr>
+            <a:r>
+              <a:rPr lang="en-US" sz="1000" i="1" dirty="0">
+                <a:solidFill>
+                  <a:srgbClr val="777777"/>
+                </a:solidFill>
+              </a:rPr>
+              <a:t>Ordering alternatives share the end state, so only W_lag (intermediate cleanliness) can separate them. They tie when intermediate cleanliness is identical - often when build/tests broke and cleanliness stats are frozen at the last trustworthy value. </a:t>
+            </a:r>
+            <a:pPr algn="ctr" indent="0" marL="0">
+              <a:buNone/>
+            </a:pPr>
+            <a:r>
+              <a:rPr lang="en-US" sz="1000" i="1" dirty="0">
+                <a:solidFill>
+                  <a:srgbClr val="777777"/>
+                </a:solidFill>
+              </a:rPr>
+              <a:t>Manual-Refactor's 3 ties + 1 loss come from the [0,100] score clamp - the user's score is pinned at the floor, so the IDE alternative can't score lower either.</a:t>
+            </a:r>
+            <a:endParaRPr lang="en-US" sz="1000" dirty="0"/>
           </a:p>
         </p:txBody>
       </p:sp>
@@ -6951,7 +9161,7 @@
                   <a:srgbClr val="000000"/>
                 </a:solidFill>
               </a:rPr>
-              <a:t>User study: does feedback change behaviour?</a:t>
+              <a:t>Score robustness</a:t>
             </a:r>
             <a:endParaRPr lang="en-US" sz="2800" dirty="0"/>
           </a:p>
@@ -6991,7 +9201,7 @@
                   <a:srgbClr val="000000"/>
                 </a:solidFill>
               </a:rPr>
-              <a:t>With-feedback group: 2.7 divergence points per session.</a:t>
+              <a:t>Single-knob sensitivity sweep: scale any one weight by {0.1×–10×}, top-1 recommendation is preserved in 96.5% of user-study cases.</a:t>
             </a:r>
             <a:endParaRPr lang="en-US" sz="1600" dirty="0"/>
           </a:p>
@@ -7009,7 +9219,7 @@
                   <a:srgbClr val="000000"/>
                 </a:solidFill>
               </a:rPr>
-              <a:t>No-feedback baseline: 6.0 divergence points per session -2.2× difference.</a:t>
+              <a:t>Multi-knob Monte Carlo (200 samples): top-1 stability drops to 84.6%; mean Kendall τ = 0.586.</a:t>
             </a:r>
             <a:endParaRPr lang="en-US" sz="1600" dirty="0"/>
           </a:p>
@@ -7027,7 +9237,7 @@
                   <a:srgbClr val="000000"/>
                 </a:solidFill>
               </a:rPr>
-              <a:t>Gain-stripped process-score slope across the 6-session arc -+4.47 per session with feedback, −0.40 per session without.</a:t>
+              <a:t>Honest framing - stable near the chosen weights, less stable under arbitrary joint perturbations.</a:t>
             </a:r>
             <a:endParaRPr lang="en-US" sz="1600" dirty="0"/>
           </a:p>
@@ -7045,7 +9255,7 @@
                   <a:srgbClr val="000000"/>
                 </a:solidFill>
               </a:rPr>
-              <a:t>Caveat: n=3 vs n=2 is directional evidence, not a hypothesis test.</a:t>
+              <a:t>Ablation confirms each process term contributes real signal; endpoint gain alone does not recover the ranking.</a:t>
             </a:r>
             <a:endParaRPr lang="en-US" sz="1600" dirty="0"/>
           </a:p>
@@ -7257,6 +9467,161 @@
 <file path=ppt/slides/slide20.xml><?xml version="1.0" encoding="utf-8"?>
 <p:sld xmlns:a="http://schemas.openxmlformats.org/drawingml/2006/main" xmlns:r="http://schemas.openxmlformats.org/officeDocument/2006/relationships" xmlns:p="http://schemas.openxmlformats.org/presentationml/2006/main">
   <p:cSld name="Slide 20">
+    <p:spTree>
+      <p:nvGrpSpPr>
+        <p:cNvPr id="1" name=""/>
+        <p:cNvGrpSpPr/>
+        <p:nvPr/>
+      </p:nvGrpSpPr>
+      <p:grpSpPr>
+        <a:xfrm>
+          <a:off x="0" y="0"/>
+          <a:ext cx="0" cy="0"/>
+          <a:chOff x="0" y="0"/>
+          <a:chExt cx="0" cy="0"/>
+        </a:xfrm>
+      </p:grpSpPr>
+      <p:sp>
+        <p:nvSpPr>
+          <p:cNvPr id="2" name="Text 0"/>
+          <p:cNvSpPr/>
+          <p:nvPr/>
+        </p:nvSpPr>
+        <p:spPr>
+          <a:xfrm>
+            <a:off x="457200" y="274320"/>
+            <a:ext cx="8229600" cy="640080"/>
+          </a:xfrm>
+          <a:prstGeom prst="rect">
+            <a:avLst/>
+          </a:prstGeom>
+          <a:noFill/>
+          <a:ln/>
+        </p:spPr>
+        <p:txBody>
+          <a:bodyPr wrap="square" lIns="0" tIns="0" rIns="0" bIns="0" rtlCol="0" anchor="ctr"/>
+          <a:lstStyle/>
+          <a:p>
+            <a:pPr indent="0" marL="0">
+              <a:buNone/>
+            </a:pPr>
+            <a:r>
+              <a:rPr lang="en-US" sz="2800" b="1" dirty="0">
+                <a:solidFill>
+                  <a:srgbClr val="000000"/>
+                </a:solidFill>
+              </a:rPr>
+              <a:t>User study: does feedback change behaviour?</a:t>
+            </a:r>
+            <a:endParaRPr lang="en-US" sz="2800" dirty="0"/>
+          </a:p>
+        </p:txBody>
+      </p:sp>
+      <p:sp>
+        <p:nvSpPr>
+          <p:cNvPr id="3" name="Text 1"/>
+          <p:cNvSpPr/>
+          <p:nvPr/>
+        </p:nvSpPr>
+        <p:spPr>
+          <a:xfrm>
+            <a:off x="457200" y="1188720"/>
+            <a:ext cx="8229600" cy="3657600"/>
+          </a:xfrm>
+          <a:prstGeom prst="rect">
+            <a:avLst/>
+          </a:prstGeom>
+          <a:noFill/>
+          <a:ln/>
+        </p:spPr>
+        <p:txBody>
+          <a:bodyPr wrap="square" rtlCol="0" anchor="t"/>
+          <a:lstStyle/>
+          <a:p>
+            <a:pPr marL="342900" indent="-342900">
+              <a:spcAft>
+                <a:spcPts val="600"/>
+              </a:spcAft>
+              <a:buSzPct val="100000"/>
+              <a:buChar char="•"/>
+            </a:pPr>
+            <a:r>
+              <a:rPr lang="en-US" sz="1600" dirty="0">
+                <a:solidFill>
+                  <a:srgbClr val="000000"/>
+                </a:solidFill>
+              </a:rPr>
+              <a:t>With-feedback group: 2.7 divergence points per session.</a:t>
+            </a:r>
+            <a:endParaRPr lang="en-US" sz="1600" dirty="0"/>
+          </a:p>
+          <a:p>
+            <a:pPr marL="342900" indent="-342900">
+              <a:spcAft>
+                <a:spcPts val="600"/>
+              </a:spcAft>
+              <a:buSzPct val="100000"/>
+              <a:buChar char="•"/>
+            </a:pPr>
+            <a:r>
+              <a:rPr lang="en-US" sz="1600" dirty="0">
+                <a:solidFill>
+                  <a:srgbClr val="000000"/>
+                </a:solidFill>
+              </a:rPr>
+              <a:t>No-feedback baseline: 6.0 divergence points per session -2.2× difference.</a:t>
+            </a:r>
+            <a:endParaRPr lang="en-US" sz="1600" dirty="0"/>
+          </a:p>
+          <a:p>
+            <a:pPr marL="342900" indent="-342900">
+              <a:spcAft>
+                <a:spcPts val="600"/>
+              </a:spcAft>
+              <a:buSzPct val="100000"/>
+              <a:buChar char="•"/>
+            </a:pPr>
+            <a:r>
+              <a:rPr lang="en-US" sz="1600" dirty="0">
+                <a:solidFill>
+                  <a:srgbClr val="000000"/>
+                </a:solidFill>
+              </a:rPr>
+              <a:t>Gain-stripped process-score slope across the 6-session arc -+4.47 per session with feedback, −0.40 per session without.</a:t>
+            </a:r>
+            <a:endParaRPr lang="en-US" sz="1600" dirty="0"/>
+          </a:p>
+          <a:p>
+            <a:pPr marL="342900" indent="-342900">
+              <a:spcAft>
+                <a:spcPts val="600"/>
+              </a:spcAft>
+              <a:buSzPct val="100000"/>
+              <a:buChar char="•"/>
+            </a:pPr>
+            <a:r>
+              <a:rPr lang="en-US" sz="1600" dirty="0">
+                <a:solidFill>
+                  <a:srgbClr val="000000"/>
+                </a:solidFill>
+              </a:rPr>
+              <a:t>Caveat: n=3 vs n=2 is directional evidence, not a hypothesis test.</a:t>
+            </a:r>
+            <a:endParaRPr lang="en-US" sz="1600" dirty="0"/>
+          </a:p>
+        </p:txBody>
+      </p:sp>
+    </p:spTree>
+  </p:cSld>
+  <p:clrMapOvr>
+    <a:masterClrMapping/>
+  </p:clrMapOvr>
+</p:sld>
+</file>
+
+<file path=ppt/slides/slide21.xml><?xml version="1.0" encoding="utf-8"?>
+<p:sld xmlns:a="http://schemas.openxmlformats.org/drawingml/2006/main" xmlns:r="http://schemas.openxmlformats.org/officeDocument/2006/relationships" xmlns:p="http://schemas.openxmlformats.org/presentationml/2006/main">
+  <p:cSld name="Slide 21">
     <p:spTree>
       <p:nvGrpSpPr>
         <p:cNvPr id="1" name=""/>

--- a/presentation/slides.pptx
+++ b/presentation/slides.pptx
@@ -26,9 +26,10 @@
     <p:sldId id="274" r:id="rId20"/>
     <p:sldId id="275" r:id="rId21"/>
     <p:sldId id="276" r:id="rId22"/>
+    <p:sldId id="277" r:id="rId23"/>
   </p:sldIdLst>
   <p:notesMasterIdLst>
-    <p:notesMasterId r:id="rId23"/>
+    <p:notesMasterId r:id="rId24"/>
   </p:notesMasterIdLst>
   <p:sldSz cx="9144000" cy="5143500"/>
   <p:notesSz cx="5143500" cy="9144000"/>
@@ -1690,6 +1691,94 @@
             <a:fld id="{F7021451-1387-4CA6-816F-3879F97B5CBC}" type="slidenum">
               <a:rPr lang="en-US"/>
               <a:t>21</a:t>
+            </a:fld>
+            <a:endParaRPr lang="en-US"/>
+          </a:p>
+        </p:txBody>
+      </p:sp>
+    </p:spTree>
+    <p:extLst>
+      <p:ext uri="{BB962C8B-B14F-4D97-AF65-F5344CB8AC3E}">
+        <p14:creationId xmlns:p14="http://schemas.microsoft.com/office/powerpoint/2010/main" val="1024086991"/>
+      </p:ext>
+    </p:extLst>
+  </p:cSld>
+  <p:clrMapOvr>
+    <a:masterClrMapping/>
+  </p:clrMapOvr>
+</p:notes>
+</file>
+
+<file path=ppt/notesSlides/notesSlide22.xml><?xml version="1.0" encoding="utf-8"?>
+<p:notes xmlns:a="http://schemas.openxmlformats.org/drawingml/2006/main" xmlns:r="http://schemas.openxmlformats.org/officeDocument/2006/relationships" xmlns:p="http://schemas.openxmlformats.org/presentationml/2006/main">
+  <p:cSld>
+    <p:spTree>
+      <p:nvGrpSpPr>
+        <p:cNvPr id="1" name=""/>
+        <p:cNvGrpSpPr/>
+        <p:nvPr/>
+      </p:nvGrpSpPr>
+      <p:grpSpPr>
+        <a:xfrm>
+          <a:off x="0" y="0"/>
+          <a:ext cx="0" cy="0"/>
+          <a:chOff x="0" y="0"/>
+          <a:chExt cx="0" cy="0"/>
+        </a:xfrm>
+      </p:grpSpPr>
+      <p:sp>
+        <p:nvSpPr>
+          <p:cNvPr id="2" name="Slide Image Placeholder 1"/>
+          <p:cNvSpPr>
+            <a:spLocks noGrp="1" noRot="1" noChangeAspect="1"/>
+          </p:cNvSpPr>
+          <p:nvPr>
+            <p:ph type="sldImg"/>
+          </p:nvPr>
+        </p:nvSpPr>
+        <p:spPr/>
+      </p:sp>
+      <p:sp>
+        <p:nvSpPr>
+          <p:cNvPr id="3" name="Notes Placeholder 2"/>
+          <p:cNvSpPr>
+            <a:spLocks noGrp="1"/>
+          </p:cNvSpPr>
+          <p:nvPr>
+            <p:ph type="body" idx="1"/>
+          </p:nvPr>
+        </p:nvSpPr>
+        <p:spPr/>
+        <p:txBody>
+          <a:bodyPr/>
+          <a:lstStyle/>
+          <a:p>
+            <a:r>
+              <a:rPr lang="en-US" dirty="0"/>
+              <a:t/>
+            </a:r>
+            <a:endParaRPr lang="en-US" dirty="0"/>
+          </a:p>
+        </p:txBody>
+      </p:sp>
+      <p:sp>
+        <p:nvSpPr>
+          <p:cNvPr id="4" name="Slide Number Placeholder 3"/>
+          <p:cNvSpPr>
+            <a:spLocks noGrp="1"/>
+          </p:cNvSpPr>
+          <p:nvPr>
+            <p:ph type="sldNum" sz="quarter" idx="10"/>
+          </p:nvPr>
+        </p:nvSpPr>
+        <p:spPr/>
+        <p:txBody>
+          <a:bodyPr/>
+          <a:lstStyle/>
+          <a:p>
+            <a:fld id="{F7021451-1387-4CA6-816F-3879F97B5CBC}" type="slidenum">
+              <a:rPr lang="en-US"/>
+              <a:t>22</a:t>
             </a:fld>
             <a:endParaRPr lang="en-US"/>
           </a:p>
@@ -4449,7 +4538,7 @@
                   <a:srgbClr val="000000"/>
                 </a:solidFill>
               </a:rPr>
-              <a:t>Track all ordering points detected </a:t>
+              <a:t>Track all divergence points detected </a:t>
             </a:r>
             <a:pPr indent="0" marL="0">
               <a:spcAft>
@@ -9161,7 +9250,7 @@
                   <a:srgbClr val="000000"/>
                 </a:solidFill>
               </a:rPr>
-              <a:t>Score robustness</a:t>
+              <a:t>Is the process score reliable?</a:t>
             </a:r>
             <a:endParaRPr lang="en-US" sz="2800" dirty="0"/>
           </a:p>
@@ -9196,14 +9285,78 @@
               <a:buChar char="•"/>
             </a:pPr>
             <a:r>
-              <a:rPr lang="en-US" sz="1600" dirty="0">
+              <a:rPr lang="en-US" sz="1500" b="1" dirty="0">
                 <a:solidFill>
                   <a:srgbClr val="000000"/>
                 </a:solidFill>
               </a:rPr>
-              <a:t>Single-knob sensitivity sweep: scale any one weight by {0.1×–10×}, top-1 recommendation is preserved in 96.5% of user-study cases.</a:t>
-            </a:r>
-            <a:endParaRPr lang="en-US" sz="1600" dirty="0"/>
+              <a:t>How stable is the score?</a:t>
+            </a:r>
+            <a:endParaRPr lang="en-US" sz="1500" dirty="0"/>
+          </a:p>
+          <a:p>
+            <a:pPr lvl="1" marL="762000" indent="-381000">
+              <a:spcAft>
+                <a:spcPts val="600"/>
+              </a:spcAft>
+              <a:buSzPct val="100000"/>
+              <a:buChar char="•"/>
+            </a:pPr>
+            <a:r>
+              <a:rPr lang="en-US" sz="1500" dirty="0">
+                <a:solidFill>
+                  <a:srgbClr val="000000"/>
+                </a:solidFill>
+              </a:rPr>
+              <a:t>Two perturbation sweeps </a:t>
+            </a:r>
+            <a:pPr indent="0" marL="0">
+              <a:spcAft>
+                <a:spcPts val="600"/>
+              </a:spcAft>
+              <a:buNone/>
+            </a:pPr>
+            <a:r>
+              <a:rPr lang="en-US" sz="1500" dirty="0">
+                <a:solidFill>
+                  <a:srgbClr val="888888"/>
+                </a:solidFill>
+              </a:rPr>
+              <a:t>- single-knob (one weight scaled ×0.1 to ×10) + multi-knob Monte Carlo (200 samples, σ = ln 2, so ~×0.25 to ×4 of production).</a:t>
+            </a:r>
+            <a:endParaRPr lang="en-US" sz="1500" dirty="0"/>
+          </a:p>
+          <a:p>
+            <a:pPr lvl="1" marL="762000" indent="-381000">
+              <a:spcAft>
+                <a:spcPts val="1800"/>
+              </a:spcAft>
+              <a:buSzPct val="100000"/>
+              <a:buChar char="•"/>
+            </a:pPr>
+            <a:r>
+              <a:rPr lang="en-US" sz="1500" dirty="0">
+                <a:solidFill>
+                  <a:srgbClr val="000000"/>
+                </a:solidFill>
+              </a:rPr>
+              <a:t>Stability metrics </a:t>
+            </a:r>
+            <a:pPr indent="0" marL="0">
+              <a:spcAft>
+                <a:spcPts val="1800"/>
+              </a:spcAft>
+              <a:buNone/>
+            </a:pPr>
+            <a:r>
+              <a:rPr lang="en-US" sz="1500" dirty="0">
+                <a:solidFill>
+                  <a:srgbClr val="888888"/>
+                </a:solidFill>
+              </a:rPr>
+              <a:t>- top-1 hit rate (does the top-ranked DP stay on top?) + Kendall's τ-b on per-session rankings.</a:t>
+            </a:r>
+            <a:endParaRPr lang="en-US" sz="1500" dirty="0"/>
           </a:p>
           <a:p>
             <a:pPr marL="342900" indent="-342900">
@@ -9214,17 +9367,17 @@
               <a:buChar char="•"/>
             </a:pPr>
             <a:r>
-              <a:rPr lang="en-US" sz="1600" dirty="0">
+              <a:rPr lang="en-US" sz="1500" b="1" dirty="0">
                 <a:solidFill>
                   <a:srgbClr val="000000"/>
                 </a:solidFill>
               </a:rPr>
-              <a:t>Multi-knob Monte Carlo (200 samples): top-1 stability drops to 84.6%; mean Kendall τ = 0.586.</a:t>
-            </a:r>
-            <a:endParaRPr lang="en-US" sz="1600" dirty="0"/>
-          </a:p>
-          <a:p>
-            <a:pPr marL="342900" indent="-342900">
+              <a:t>Does every component of the process score hold weight?</a:t>
+            </a:r>
+            <a:endParaRPr lang="en-US" sz="1500" dirty="0"/>
+          </a:p>
+          <a:p>
+            <a:pPr lvl="1" marL="762000" indent="-381000">
               <a:spcAft>
                 <a:spcPts val="600"/>
               </a:spcAft>
@@ -9232,17 +9385,31 @@
               <a:buChar char="•"/>
             </a:pPr>
             <a:r>
-              <a:rPr lang="en-US" sz="1600" dirty="0">
+              <a:rPr lang="en-US" sz="1500" dirty="0">
                 <a:solidFill>
                   <a:srgbClr val="000000"/>
                 </a:solidFill>
               </a:rPr>
-              <a:t>Honest framing - stable near the chosen weights, less stable under arbitrary joint perturbations.</a:t>
-            </a:r>
-            <a:endParaRPr lang="en-US" sz="1600" dirty="0"/>
-          </a:p>
-          <a:p>
-            <a:pPr marL="342900" indent="-342900">
+              <a:t>Process-side ablation </a:t>
+            </a:r>
+            <a:pPr indent="0" marL="0">
+              <a:spcAft>
+                <a:spcPts val="600"/>
+              </a:spcAft>
+              <a:buNone/>
+            </a:pPr>
+            <a:r>
+              <a:rPr lang="en-US" sz="1500" dirty="0">
+                <a:solidFill>
+                  <a:srgbClr val="888888"/>
+                </a:solidFill>
+              </a:rPr>
+              <a:t>- enumerate all 2⁷ = 128 subsets of the 7 process weights → 5,760 cases per session set.</a:t>
+            </a:r>
+            <a:endParaRPr lang="en-US" sz="1500" dirty="0"/>
+          </a:p>
+          <a:p>
+            <a:pPr lvl="1" marL="762000" indent="-381000">
               <a:spcAft>
                 <a:spcPts val="600"/>
               </a:spcAft>
@@ -9250,14 +9417,28 @@
               <a:buChar char="•"/>
             </a:pPr>
             <a:r>
-              <a:rPr lang="en-US" sz="1600" dirty="0">
+              <a:rPr lang="en-US" sz="1500" dirty="0">
                 <a:solidFill>
                   <a:srgbClr val="000000"/>
                 </a:solidFill>
               </a:rPr>
-              <a:t>Ablation confirms each process term contributes real signal; endpoint gain alone does not recover the ranking.</a:t>
-            </a:r>
-            <a:endParaRPr lang="en-US" sz="1600" dirty="0"/>
+              <a:t>Recovery metrics </a:t>
+            </a:r>
+            <a:pPr indent="0" marL="0">
+              <a:spcAft>
+                <a:spcPts val="600"/>
+              </a:spcAft>
+              <a:buNone/>
+            </a:pPr>
+            <a:r>
+              <a:rPr lang="en-US" sz="1500" dirty="0">
+                <a:solidFill>
+                  <a:srgbClr val="888888"/>
+                </a:solidFill>
+              </a:rPr>
+              <a:t>- sum-over-sum magnitude recovery (does the term carry signal?) + leave-one-out Kendall's τ-b (does removing it reshuffle rankings?).</a:t>
+            </a:r>
+            <a:endParaRPr lang="en-US" sz="1500" dirty="0"/>
           </a:p>
         </p:txBody>
       </p:sp>
@@ -9511,7 +9692,7 @@
                   <a:srgbClr val="000000"/>
                 </a:solidFill>
               </a:rPr>
-              <a:t>User study: does feedback change behaviour?</a:t>
+              <a:t>Score is locally robust</a:t>
             </a:r>
             <a:endParaRPr lang="en-US" sz="2800" dirty="0"/>
           </a:p>
@@ -9546,14 +9727,78 @@
               <a:buChar char="•"/>
             </a:pPr>
             <a:r>
-              <a:rPr lang="en-US" sz="1600" dirty="0">
+              <a:rPr lang="en-US" sz="1500" b="1" dirty="0">
                 <a:solidFill>
                   <a:srgbClr val="000000"/>
                 </a:solidFill>
               </a:rPr>
-              <a:t>With-feedback group: 2.7 divergence points per session.</a:t>
-            </a:r>
-            <a:endParaRPr lang="en-US" sz="1600" dirty="0"/>
+              <a:t>How stable is the score?</a:t>
+            </a:r>
+            <a:endParaRPr lang="en-US" sz="1500" dirty="0"/>
+          </a:p>
+          <a:p>
+            <a:pPr lvl="1" marL="762000" indent="-381000">
+              <a:spcAft>
+                <a:spcPts val="600"/>
+              </a:spcAft>
+              <a:buSzPct val="100000"/>
+              <a:buChar char="•"/>
+            </a:pPr>
+            <a:r>
+              <a:rPr lang="en-US" sz="1500" dirty="0">
+                <a:solidFill>
+                  <a:srgbClr val="000000"/>
+                </a:solidFill>
+              </a:rPr>
+              <a:t>Single-knob: 96.5% top-1 preserved </a:t>
+            </a:r>
+            <a:pPr indent="0" marL="0">
+              <a:spcAft>
+                <a:spcPts val="600"/>
+              </a:spcAft>
+              <a:buNone/>
+            </a:pPr>
+            <a:r>
+              <a:rPr lang="en-US" sz="1500" dirty="0">
+                <a:solidFill>
+                  <a:srgbClr val="888888"/>
+                </a:solidFill>
+              </a:rPr>
+              <a:t>- top-ranked DP rarely changes under any one-weight perturbation. Only 1.8% of cases are clamp-frozen, so this is genuine response - not a clamp artefact.</a:t>
+            </a:r>
+            <a:endParaRPr lang="en-US" sz="1500" dirty="0"/>
+          </a:p>
+          <a:p>
+            <a:pPr lvl="1" marL="762000" indent="-381000">
+              <a:spcAft>
+                <a:spcPts val="1800"/>
+              </a:spcAft>
+              <a:buSzPct val="100000"/>
+              <a:buChar char="•"/>
+            </a:pPr>
+            <a:r>
+              <a:rPr lang="en-US" sz="1500" dirty="0">
+                <a:solidFill>
+                  <a:srgbClr val="000000"/>
+                </a:solidFill>
+              </a:rPr>
+              <a:t>Multi-knob: 84.6% top-1 preserved (τ-b = 0.586) </a:t>
+            </a:r>
+            <a:pPr indent="0" marL="0">
+              <a:spcAft>
+                <a:spcPts val="1800"/>
+              </a:spcAft>
+              <a:buNone/>
+            </a:pPr>
+            <a:r>
+              <a:rPr lang="en-US" sz="1500" dirty="0">
+                <a:solidFill>
+                  <a:srgbClr val="888888"/>
+                </a:solidFill>
+              </a:rPr>
+              <a:t>- when all weights move at once, top-1 holds in ~85% of cases and ~79% of pairs still rank in the same order. Meaningful correlation, not full preservation.</a:t>
+            </a:r>
+            <a:endParaRPr lang="en-US" sz="1500" dirty="0"/>
           </a:p>
           <a:p>
             <a:pPr marL="342900" indent="-342900">
@@ -9564,17 +9809,17 @@
               <a:buChar char="•"/>
             </a:pPr>
             <a:r>
-              <a:rPr lang="en-US" sz="1600" dirty="0">
+              <a:rPr lang="en-US" sz="1500" b="1" dirty="0">
                 <a:solidFill>
                   <a:srgbClr val="000000"/>
                 </a:solidFill>
               </a:rPr>
-              <a:t>No-feedback baseline: 6.0 divergence points per session -2.2× difference.</a:t>
-            </a:r>
-            <a:endParaRPr lang="en-US" sz="1600" dirty="0"/>
-          </a:p>
-          <a:p>
-            <a:pPr marL="342900" indent="-342900">
+              <a:t>Does every component of the process score hold weight?</a:t>
+            </a:r>
+            <a:endParaRPr lang="en-US" sz="1500" dirty="0"/>
+          </a:p>
+          <a:p>
+            <a:pPr lvl="1" marL="762000" indent="-381000">
               <a:spcAft>
                 <a:spcPts val="600"/>
               </a:spcAft>
@@ -9582,17 +9827,31 @@
               <a:buChar char="•"/>
             </a:pPr>
             <a:r>
-              <a:rPr lang="en-US" sz="1600" dirty="0">
+              <a:rPr lang="en-US" sz="1500" dirty="0">
                 <a:solidFill>
                   <a:srgbClr val="000000"/>
                 </a:solidFill>
               </a:rPr>
-              <a:t>Gain-stripped process-score slope across the 6-session arc -+4.47 per session with feedback, −0.40 per session without.</a:t>
-            </a:r>
-            <a:endParaRPr lang="en-US" sz="1600" dirty="0"/>
-          </a:p>
-          <a:p>
-            <a:pPr marL="342900" indent="-342900">
+              <a:t>Length is the rank-carrier (LOO τ-b = 0.527) </a:t>
+            </a:r>
+            <a:pPr indent="0" marL="0">
+              <a:spcAft>
+                <a:spcPts val="600"/>
+              </a:spcAft>
+              <a:buNone/>
+            </a:pPr>
+            <a:r>
+              <a:rPr lang="en-US" sz="1500" dirty="0">
+                <a:solidFill>
+                  <a:srgbClr val="888888"/>
+                </a:solidFill>
+              </a:rPr>
+              <a:t>- removing length reshuffles the per-session ranking more than removing any other process term - the most influential term.</a:t>
+            </a:r>
+            <a:endParaRPr lang="en-US" sz="1500" dirty="0"/>
+          </a:p>
+          <a:p>
+            <a:pPr lvl="1" marL="762000" indent="-381000">
               <a:spcAft>
                 <a:spcPts val="600"/>
               </a:spcAft>
@@ -9600,14 +9859,28 @@
               <a:buChar char="•"/>
             </a:pPr>
             <a:r>
-              <a:rPr lang="en-US" sz="1600" dirty="0">
+              <a:rPr lang="en-US" sz="1500" dirty="0">
                 <a:solidFill>
                   <a:srgbClr val="000000"/>
                 </a:solidFill>
               </a:rPr>
-              <a:t>Caveat: n=3 vs n=2 is directional evidence, not a hypothesis test.</a:t>
-            </a:r>
-            <a:endParaRPr lang="en-US" sz="1600" dirty="0"/>
+              <a:t>Cleanliness sub-weights: ≤ 0.9% top-1 disruption </a:t>
+            </a:r>
+            <a:pPr indent="0" marL="0">
+              <a:spcAft>
+                <a:spcPts val="600"/>
+              </a:spcAft>
+              <a:buNone/>
+            </a:pPr>
+            <a:r>
+              <a:rPr lang="en-US" sz="1500" dirty="0">
+                <a:solidFill>
+                  <a:srgbClr val="888888"/>
+                </a:solidFill>
+              </a:rPr>
+              <a:t>- perturbing any single one of the 6 cleanliness signals barely shifts the ranking (~10× less than process weights), so equal-weights for the sub-signals is defensible.</a:t>
+            </a:r>
+            <a:endParaRPr lang="en-US" sz="1500" dirty="0"/>
           </a:p>
         </p:txBody>
       </p:sp>
@@ -9622,6 +9895,161 @@
 <file path=ppt/slides/slide21.xml><?xml version="1.0" encoding="utf-8"?>
 <p:sld xmlns:a="http://schemas.openxmlformats.org/drawingml/2006/main" xmlns:r="http://schemas.openxmlformats.org/officeDocument/2006/relationships" xmlns:p="http://schemas.openxmlformats.org/presentationml/2006/main">
   <p:cSld name="Slide 21">
+    <p:spTree>
+      <p:nvGrpSpPr>
+        <p:cNvPr id="1" name=""/>
+        <p:cNvGrpSpPr/>
+        <p:nvPr/>
+      </p:nvGrpSpPr>
+      <p:grpSpPr>
+        <a:xfrm>
+          <a:off x="0" y="0"/>
+          <a:ext cx="0" cy="0"/>
+          <a:chOff x="0" y="0"/>
+          <a:chExt cx="0" cy="0"/>
+        </a:xfrm>
+      </p:grpSpPr>
+      <p:sp>
+        <p:nvSpPr>
+          <p:cNvPr id="2" name="Text 0"/>
+          <p:cNvSpPr/>
+          <p:nvPr/>
+        </p:nvSpPr>
+        <p:spPr>
+          <a:xfrm>
+            <a:off x="457200" y="274320"/>
+            <a:ext cx="8229600" cy="640080"/>
+          </a:xfrm>
+          <a:prstGeom prst="rect">
+            <a:avLst/>
+          </a:prstGeom>
+          <a:noFill/>
+          <a:ln/>
+        </p:spPr>
+        <p:txBody>
+          <a:bodyPr wrap="square" lIns="0" tIns="0" rIns="0" bIns="0" rtlCol="0" anchor="ctr"/>
+          <a:lstStyle/>
+          <a:p>
+            <a:pPr indent="0" marL="0">
+              <a:buNone/>
+            </a:pPr>
+            <a:r>
+              <a:rPr lang="en-US" sz="2800" b="1" dirty="0">
+                <a:solidFill>
+                  <a:srgbClr val="000000"/>
+                </a:solidFill>
+              </a:rPr>
+              <a:t>User study: does feedback change behaviour?</a:t>
+            </a:r>
+            <a:endParaRPr lang="en-US" sz="2800" dirty="0"/>
+          </a:p>
+        </p:txBody>
+      </p:sp>
+      <p:sp>
+        <p:nvSpPr>
+          <p:cNvPr id="3" name="Text 1"/>
+          <p:cNvSpPr/>
+          <p:nvPr/>
+        </p:nvSpPr>
+        <p:spPr>
+          <a:xfrm>
+            <a:off x="457200" y="1188720"/>
+            <a:ext cx="8229600" cy="3657600"/>
+          </a:xfrm>
+          <a:prstGeom prst="rect">
+            <a:avLst/>
+          </a:prstGeom>
+          <a:noFill/>
+          <a:ln/>
+        </p:spPr>
+        <p:txBody>
+          <a:bodyPr wrap="square" rtlCol="0" anchor="t"/>
+          <a:lstStyle/>
+          <a:p>
+            <a:pPr marL="342900" indent="-342900">
+              <a:spcAft>
+                <a:spcPts val="600"/>
+              </a:spcAft>
+              <a:buSzPct val="100000"/>
+              <a:buChar char="•"/>
+            </a:pPr>
+            <a:r>
+              <a:rPr lang="en-US" sz="1600" dirty="0">
+                <a:solidFill>
+                  <a:srgbClr val="000000"/>
+                </a:solidFill>
+              </a:rPr>
+              <a:t>With-feedback group: 2.7 divergence points per session.</a:t>
+            </a:r>
+            <a:endParaRPr lang="en-US" sz="1600" dirty="0"/>
+          </a:p>
+          <a:p>
+            <a:pPr marL="342900" indent="-342900">
+              <a:spcAft>
+                <a:spcPts val="600"/>
+              </a:spcAft>
+              <a:buSzPct val="100000"/>
+              <a:buChar char="•"/>
+            </a:pPr>
+            <a:r>
+              <a:rPr lang="en-US" sz="1600" dirty="0">
+                <a:solidFill>
+                  <a:srgbClr val="000000"/>
+                </a:solidFill>
+              </a:rPr>
+              <a:t>No-feedback baseline: 6.0 divergence points per session -2.2× difference.</a:t>
+            </a:r>
+            <a:endParaRPr lang="en-US" sz="1600" dirty="0"/>
+          </a:p>
+          <a:p>
+            <a:pPr marL="342900" indent="-342900">
+              <a:spcAft>
+                <a:spcPts val="600"/>
+              </a:spcAft>
+              <a:buSzPct val="100000"/>
+              <a:buChar char="•"/>
+            </a:pPr>
+            <a:r>
+              <a:rPr lang="en-US" sz="1600" dirty="0">
+                <a:solidFill>
+                  <a:srgbClr val="000000"/>
+                </a:solidFill>
+              </a:rPr>
+              <a:t>Gain-stripped process-score slope across the 6-session arc -+4.47 per session with feedback, −0.40 per session without.</a:t>
+            </a:r>
+            <a:endParaRPr lang="en-US" sz="1600" dirty="0"/>
+          </a:p>
+          <a:p>
+            <a:pPr marL="342900" indent="-342900">
+              <a:spcAft>
+                <a:spcPts val="600"/>
+              </a:spcAft>
+              <a:buSzPct val="100000"/>
+              <a:buChar char="•"/>
+            </a:pPr>
+            <a:r>
+              <a:rPr lang="en-US" sz="1600" dirty="0">
+                <a:solidFill>
+                  <a:srgbClr val="000000"/>
+                </a:solidFill>
+              </a:rPr>
+              <a:t>Caveat: n=3 vs n=2 is directional evidence, not a hypothesis test.</a:t>
+            </a:r>
+            <a:endParaRPr lang="en-US" sz="1600" dirty="0"/>
+          </a:p>
+        </p:txBody>
+      </p:sp>
+    </p:spTree>
+  </p:cSld>
+  <p:clrMapOvr>
+    <a:masterClrMapping/>
+  </p:clrMapOvr>
+</p:sld>
+</file>
+
+<file path=ppt/slides/slide22.xml><?xml version="1.0" encoding="utf-8"?>
+<p:sld xmlns:a="http://schemas.openxmlformats.org/drawingml/2006/main" xmlns:r="http://schemas.openxmlformats.org/officeDocument/2006/relationships" xmlns:p="http://schemas.openxmlformats.org/presentationml/2006/main">
+  <p:cSld name="Slide 22">
     <p:spTree>
       <p:nvGrpSpPr>
         <p:cNvPr id="1" name=""/>

--- a/presentation/slides.pptx
+++ b/presentation/slides.pptx
@@ -27,9 +27,12 @@
     <p:sldId id="275" r:id="rId21"/>
     <p:sldId id="276" r:id="rId22"/>
     <p:sldId id="277" r:id="rId23"/>
+    <p:sldId id="278" r:id="rId24"/>
+    <p:sldId id="279" r:id="rId25"/>
+    <p:sldId id="280" r:id="rId26"/>
   </p:sldIdLst>
   <p:notesMasterIdLst>
-    <p:notesMasterId r:id="rId24"/>
+    <p:notesMasterId r:id="rId27"/>
   </p:notesMasterIdLst>
   <p:sldSz cx="9144000" cy="5143500"/>
   <p:notesSz cx="5143500" cy="9144000"/>
@@ -126,6 +129,1814 @@
     </a:lvl9pPr>
   </p:defaultTextStyle>
 </p:presentation>
+</file>
+
+<file path=ppt/charts/chart1.xml><?xml version="1.0" encoding="utf-8"?>
+<c:chartSpace xmlns:c="http://schemas.openxmlformats.org/drawingml/2006/chart" xmlns:a="http://schemas.openxmlformats.org/drawingml/2006/main" xmlns:r="http://schemas.openxmlformats.org/officeDocument/2006/relationships">
+  <c:date1904 val="0"/>
+  <c:roundedCorners val="1"/>
+  <c:chart>
+    <c:title>
+      <c:tx>
+        <c:rich>
+          <a:bodyPr/>
+          <a:lstStyle/>
+          <a:p>
+            <a:pPr>
+              <a:defRPr sz="1100" b="0" i="0" u="none" strike="noStrike">
+                <a:solidFill>
+                  <a:srgbClr val="333333"/>
+                </a:solidFill>
+                <a:latin typeface="Arial"/>
+              </a:defRPr>
+            </a:pPr>
+            <a:r>
+              <a:rPr sz="1100" b="0" i="0" u="none" strike="noStrike">
+                <a:solidFill>
+                  <a:srgbClr val="333333"/>
+                </a:solidFill>
+                <a:latin typeface="Arial"/>
+              </a:rPr>
+              <a:t>Divergence points per session (per participant)</a:t>
+            </a:r>
+          </a:p>
+        </c:rich>
+      </c:tx>
+      <c:layout/>
+      <c:overlay val="0"/>
+    </c:title>
+    <c:autoTitleDeleted val="0"/>
+    <c:plotArea>
+      <c:layout/>
+      <c:lineChart>
+        <c:varyColors val="0"/>
+        <c:ser>
+          <c:idx val="0"/>
+          <c:order val="0"/>
+          <c:tx>
+            <c:strRef>
+              <c:f>Sheet1!$B$1</c:f>
+              <c:strCache>
+                <c:ptCount val="1"/>
+                <c:pt idx="0">
+                  <c:v>Feedback (per participant)</c:v>
+                </c:pt>
+              </c:strCache>
+            </c:strRef>
+          </c:tx>
+          <c:spPr>
+            <a:solidFill>
+              <a:srgbClr val="1F3F6F"/>
+            </a:solidFill>
+            <a:ln w="31750" cap="flat">
+              <a:solidFill>
+                <a:srgbClr val="1F3F6F"/>
+              </a:solidFill>
+              <a:prstDash val="solid"/>
+              <a:round/>
+            </a:ln>
+            <a:effectLst/>
+          </c:spPr>
+          <c:invertIfNegative val="0"/>
+          <c:dLbls>
+            <c:numFmt formatCode="#,##0" sourceLinked="0"/>
+            <c:txPr>
+              <a:bodyPr/>
+              <a:lstStyle/>
+              <a:p>
+                <a:pPr>
+                  <a:defRPr b="0" i="0" strike="noStrike" sz="1200" u="none">
+                    <a:solidFill>
+                      <a:srgbClr val="000000"/>
+                    </a:solidFill>
+                    <a:latin typeface="Arial"/>
+                  </a:defRPr>
+                </a:pPr>
+              </a:p>
+            </c:txPr>
+            <c:showLegendKey val="0"/>
+            <c:showVal val="0"/>
+            <c:showCatName val="0"/>
+            <c:showSerName val="0"/>
+            <c:showPercent val="0"/>
+            <c:showBubbleSize val="0"/>
+            <c:showLeaderLines val="0"/>
+          </c:dLbls>
+          <c:marker>
+            <c:symbol val="circle"/>
+            <c:size val="6"/>
+            <c:spPr>
+              <a:solidFill>
+                <a:srgbClr val="1F3F6F"/>
+              </a:solidFill>
+              <a:ln w="9525" cap="flat">
+                <a:solidFill>
+                  <a:srgbClr val="1F3F6F"/>
+                </a:solidFill>
+                <a:prstDash val="solid"/>
+                <a:round/>
+              </a:ln>
+              <a:effectLst/>
+            </c:spPr>
+          </c:marker>
+          <c:cat>
+            <c:multiLvlStrRef>
+              <c:f>Sheet1!$A$2:$A$7</c:f>
+              <c:multiLvlStrCache>
+                <c:ptCount val="6"/>
+                <c:lvl>
+                  <c:pt idx="0">
+                    <c:v>S1</c:v>
+                  </c:pt>
+                  <c:pt idx="1">
+                    <c:v>S2</c:v>
+                  </c:pt>
+                  <c:pt idx="2">
+                    <c:v>S3</c:v>
+                  </c:pt>
+                  <c:pt idx="3">
+                    <c:v>S4</c:v>
+                  </c:pt>
+                  <c:pt idx="4">
+                    <c:v>S5</c:v>
+                  </c:pt>
+                  <c:pt idx="5">
+                    <c:v>S6</c:v>
+                  </c:pt>
+                </c:lvl>
+              </c:multiLvlStrCache>
+            </c:multiLvlStrRef>
+          </c:cat>
+          <c:val>
+            <c:numRef>
+              <c:f>Sheet1!$B$2:$B$7</c:f>
+              <c:numCache>
+                <c:formatCode>General</c:formatCode>
+                <c:ptCount val="6"/>
+                <c:pt idx="0">
+                  <c:v>4</c:v>
+                </c:pt>
+                <c:pt idx="1">
+                  <c:v>5.67</c:v>
+                </c:pt>
+                <c:pt idx="2">
+                  <c:v>3.67</c:v>
+                </c:pt>
+                <c:pt idx="3">
+                  <c:v>0</c:v>
+                </c:pt>
+                <c:pt idx="4">
+                  <c:v>2.33</c:v>
+                </c:pt>
+                <c:pt idx="5">
+                  <c:v>0.67</c:v>
+                </c:pt>
+              </c:numCache>
+            </c:numRef>
+          </c:val>
+          <c:smooth val="0"/>
+        </c:ser>
+        <c:ser>
+          <c:idx val="1"/>
+          <c:order val="1"/>
+          <c:tx>
+            <c:strRef>
+              <c:f>Sheet1!$C$1</c:f>
+              <c:strCache>
+                <c:ptCount val="1"/>
+                <c:pt idx="0">
+                  <c:v>Baseline (per participant)</c:v>
+                </c:pt>
+              </c:strCache>
+            </c:strRef>
+          </c:tx>
+          <c:spPr>
+            <a:solidFill>
+              <a:srgbClr val="B25500"/>
+            </a:solidFill>
+            <a:ln w="31750" cap="flat">
+              <a:solidFill>
+                <a:srgbClr val="B25500"/>
+              </a:solidFill>
+              <a:prstDash val="solid"/>
+              <a:round/>
+            </a:ln>
+            <a:effectLst/>
+          </c:spPr>
+          <c:invertIfNegative val="0"/>
+          <c:dLbls>
+            <c:numFmt formatCode="#,##0" sourceLinked="0"/>
+            <c:txPr>
+              <a:bodyPr/>
+              <a:lstStyle/>
+              <a:p>
+                <a:pPr>
+                  <a:defRPr b="0" i="0" strike="noStrike" sz="1200" u="none">
+                    <a:solidFill>
+                      <a:srgbClr val="000000"/>
+                    </a:solidFill>
+                    <a:latin typeface="Arial"/>
+                  </a:defRPr>
+                </a:pPr>
+              </a:p>
+            </c:txPr>
+            <c:showLegendKey val="0"/>
+            <c:showVal val="0"/>
+            <c:showCatName val="0"/>
+            <c:showSerName val="0"/>
+            <c:showPercent val="0"/>
+            <c:showBubbleSize val="0"/>
+            <c:showLeaderLines val="0"/>
+          </c:dLbls>
+          <c:marker>
+            <c:symbol val="circle"/>
+            <c:size val="6"/>
+            <c:spPr>
+              <a:solidFill>
+                <a:srgbClr val="B25500"/>
+              </a:solidFill>
+              <a:ln w="9525" cap="flat">
+                <a:solidFill>
+                  <a:srgbClr val="B25500"/>
+                </a:solidFill>
+                <a:prstDash val="solid"/>
+                <a:round/>
+              </a:ln>
+              <a:effectLst/>
+            </c:spPr>
+          </c:marker>
+          <c:cat>
+            <c:multiLvlStrRef>
+              <c:f>Sheet1!$A$2:$A$7</c:f>
+              <c:multiLvlStrCache>
+                <c:ptCount val="6"/>
+                <c:lvl>
+                  <c:pt idx="0">
+                    <c:v>S1</c:v>
+                  </c:pt>
+                  <c:pt idx="1">
+                    <c:v>S2</c:v>
+                  </c:pt>
+                  <c:pt idx="2">
+                    <c:v>S3</c:v>
+                  </c:pt>
+                  <c:pt idx="3">
+                    <c:v>S4</c:v>
+                  </c:pt>
+                  <c:pt idx="4">
+                    <c:v>S5</c:v>
+                  </c:pt>
+                  <c:pt idx="5">
+                    <c:v>S6</c:v>
+                  </c:pt>
+                </c:lvl>
+              </c:multiLvlStrCache>
+            </c:multiLvlStrRef>
+          </c:cat>
+          <c:val>
+            <c:numRef>
+              <c:f>Sheet1!$C$2:$C$7</c:f>
+              <c:numCache>
+                <c:formatCode>General</c:formatCode>
+                <c:ptCount val="6"/>
+                <c:pt idx="0">
+                  <c:v>5</c:v>
+                </c:pt>
+                <c:pt idx="1">
+                  <c:v>7.5</c:v>
+                </c:pt>
+                <c:pt idx="2">
+                  <c:v>9.5</c:v>
+                </c:pt>
+                <c:pt idx="3">
+                  <c:v>0</c:v>
+                </c:pt>
+                <c:pt idx="4">
+                  <c:v>6.5</c:v>
+                </c:pt>
+                <c:pt idx="5">
+                  <c:v>7.5</c:v>
+                </c:pt>
+              </c:numCache>
+            </c:numRef>
+          </c:val>
+          <c:smooth val="0"/>
+        </c:ser>
+        <c:dLbls>
+          <c:numFmt formatCode="#,##0" sourceLinked="0"/>
+          <c:txPr>
+            <a:bodyPr/>
+            <a:lstStyle/>
+            <a:p>
+              <a:pPr>
+                <a:defRPr b="0" i="0" strike="noStrike" sz="1200" u="none">
+                  <a:solidFill>
+                    <a:srgbClr val="000000"/>
+                  </a:solidFill>
+                  <a:latin typeface="Arial"/>
+                </a:defRPr>
+              </a:pPr>
+            </a:p>
+          </c:txPr>
+          <c:showLegendKey val="0"/>
+          <c:showVal val="0"/>
+          <c:showCatName val="0"/>
+          <c:showSerName val="0"/>
+          <c:showPercent val="0"/>
+          <c:showBubbleSize val="0"/>
+          <c:showLeaderLines val="0"/>
+        </c:dLbls>
+        <c:marker val="1"/>
+        <c:axId val="2094734554"/>
+        <c:axId val="2094734552"/>
+        <c:axId val="2094734556"/>
+      </c:lineChart>
+      <c:catAx>
+        <c:axId val="2094734554"/>
+        <c:scaling>
+          <c:orientation val="minMax"/>
+        </c:scaling>
+        <c:delete val="0"/>
+        <c:axPos val="b"/>
+        <c:numFmt formatCode="General" sourceLinked="1"/>
+        <c:majorTickMark val="out"/>
+        <c:minorTickMark val="none"/>
+        <c:tickLblPos val="low"/>
+        <c:spPr>
+          <a:ln w="12700" cap="flat">
+            <a:solidFill>
+              <a:srgbClr val="888888"/>
+            </a:solidFill>
+            <a:prstDash val="solid"/>
+            <a:round/>
+          </a:ln>
+        </c:spPr>
+        <c:txPr>
+          <a:bodyPr/>
+          <a:lstStyle/>
+          <a:p>
+            <a:pPr>
+              <a:defRPr sz="900" b="0" i="0" u="none" strike="noStrike">
+                <a:solidFill>
+                  <a:srgbClr val="000000"/>
+                </a:solidFill>
+                <a:latin typeface="Arial"/>
+              </a:defRPr>
+            </a:pPr>
+            <a:endParaRPr lang="en-US"/>
+          </a:p>
+        </c:txPr>
+        <c:crossAx val="2094734552"/>
+        <c:crosses val="autoZero"/>
+        <c:auto val="1"/>
+        <c:lblAlgn val="ctr"/>
+        <c:noMultiLvlLbl val="1"/>
+      </c:catAx>
+      <c:valAx>
+        <c:axId val="2094734552"/>
+        <c:scaling>
+          <c:orientation val="minMax"/>
+          <c:max val="10"/>
+          <c:min val="0"/>
+        </c:scaling>
+        <c:delete val="0"/>
+        <c:axPos val="l"/>
+        <c:majorGridlines>
+          <c:spPr>
+            <a:ln w="12700" cap="flat">
+              <a:solidFill>
+                <a:srgbClr val="888888"/>
+              </a:solidFill>
+              <a:prstDash val="solid"/>
+              <a:round/>
+            </a:ln>
+          </c:spPr>
+        </c:majorGridlines>
+        <c:numFmt formatCode="General" sourceLinked="0"/>
+        <c:majorTickMark val="out"/>
+        <c:minorTickMark val="none"/>
+        <c:tickLblPos val="nextTo"/>
+        <c:spPr>
+          <a:ln w="12700" cap="flat">
+            <a:solidFill>
+              <a:srgbClr val="888888"/>
+            </a:solidFill>
+            <a:prstDash val="solid"/>
+            <a:round/>
+          </a:ln>
+        </c:spPr>
+        <c:txPr>
+          <a:bodyPr/>
+          <a:lstStyle/>
+          <a:p>
+            <a:pPr>
+              <a:defRPr sz="900" b="0" i="0" u="none" strike="noStrike">
+                <a:solidFill>
+                  <a:srgbClr val="000000"/>
+                </a:solidFill>
+                <a:latin typeface="Arial"/>
+              </a:defRPr>
+            </a:pPr>
+            <a:endParaRPr lang="en-US"/>
+          </a:p>
+        </c:txPr>
+        <c:crossAx val="2094734554"/>
+        <c:crosses val="autoZero"/>
+        <c:crossBetween val="between"/>
+        <c:majorUnit val="2"/>
+      </c:valAx>
+      <c:spPr>
+        <a:noFill/>
+        <a:ln>
+          <a:noFill/>
+        </a:ln>
+        <a:effectLst/>
+      </c:spPr>
+    </c:plotArea>
+    <c:legend>
+      <c:legendPos val="b"/>
+      <c:overlay val="0"/>
+      <c:txPr>
+        <a:bodyPr/>
+        <a:lstStyle/>
+        <a:p>
+          <a:pPr>
+            <a:defRPr sz="900">      </a:defRPr>
+          </a:pPr>
+          <a:endParaRPr lang="en-US"/>
+        </a:p>
+      </c:txPr>
+    </c:legend>
+    <c:plotVisOnly val="1"/>
+    <c:dispBlanksAs val="span"/>
+  </c:chart>
+  <c:spPr>
+    <a:noFill/>
+    <a:ln>
+      <a:noFill/>
+    </a:ln>
+    <a:effectLst/>
+  </c:spPr>
+  <c:externalData r:id="rId1">
+    <c:autoUpdate val="0"/>
+  </c:externalData>
+</c:chartSpace>
+</file>
+
+<file path=ppt/charts/chart2.xml><?xml version="1.0" encoding="utf-8"?>
+<c:chartSpace xmlns:c="http://schemas.openxmlformats.org/drawingml/2006/chart" xmlns:a="http://schemas.openxmlformats.org/drawingml/2006/main" xmlns:r="http://schemas.openxmlformats.org/officeDocument/2006/relationships">
+  <c:date1904 val="0"/>
+  <c:roundedCorners val="1"/>
+  <c:chart>
+    <c:title>
+      <c:tx>
+        <c:rich>
+          <a:bodyPr/>
+          <a:lstStyle/>
+          <a:p>
+            <a:pPr>
+              <a:defRPr sz="1100" b="0" i="0" u="none" strike="noStrike">
+                <a:solidFill>
+                  <a:srgbClr val="333333"/>
+                </a:solidFill>
+                <a:latin typeface="Arial"/>
+              </a:defRPr>
+            </a:pPr>
+            <a:r>
+              <a:rPr sz="1100" b="0" i="0" u="none" strike="noStrike">
+                <a:solidFill>
+                  <a:srgbClr val="333333"/>
+                </a:solidFill>
+                <a:latin typeface="Arial"/>
+              </a:rPr>
+              <a:t>Production-weighted process score (with cleanliness gain)</a:t>
+            </a:r>
+          </a:p>
+        </c:rich>
+      </c:tx>
+      <c:layout/>
+      <c:overlay val="0"/>
+    </c:title>
+    <c:autoTitleDeleted val="0"/>
+    <c:plotArea>
+      <c:layout/>
+      <c:lineChart>
+        <c:varyColors val="0"/>
+        <c:ser>
+          <c:idx val="0"/>
+          <c:order val="0"/>
+          <c:tx>
+            <c:strRef>
+              <c:f>Sheet1!$B$1</c:f>
+              <c:strCache>
+                <c:ptCount val="1"/>
+                <c:pt idx="0">
+                  <c:v>Feedback mean</c:v>
+                </c:pt>
+              </c:strCache>
+            </c:strRef>
+          </c:tx>
+          <c:spPr>
+            <a:solidFill>
+              <a:srgbClr val="1F3F6F"/>
+            </a:solidFill>
+            <a:ln w="31750" cap="flat">
+              <a:solidFill>
+                <a:srgbClr val="1F3F6F"/>
+              </a:solidFill>
+              <a:prstDash val="solid"/>
+              <a:round/>
+            </a:ln>
+            <a:effectLst/>
+          </c:spPr>
+          <c:invertIfNegative val="0"/>
+          <c:dLbls>
+            <c:numFmt formatCode="#,##0" sourceLinked="0"/>
+            <c:txPr>
+              <a:bodyPr/>
+              <a:lstStyle/>
+              <a:p>
+                <a:pPr>
+                  <a:defRPr b="0" i="0" strike="noStrike" sz="1200" u="none">
+                    <a:solidFill>
+                      <a:srgbClr val="000000"/>
+                    </a:solidFill>
+                    <a:latin typeface="Arial"/>
+                  </a:defRPr>
+                </a:pPr>
+              </a:p>
+            </c:txPr>
+            <c:showLegendKey val="0"/>
+            <c:showVal val="0"/>
+            <c:showCatName val="0"/>
+            <c:showSerName val="0"/>
+            <c:showPercent val="0"/>
+            <c:showBubbleSize val="0"/>
+            <c:showLeaderLines val="0"/>
+          </c:dLbls>
+          <c:marker>
+            <c:symbol val="circle"/>
+            <c:size val="6"/>
+            <c:spPr>
+              <a:solidFill>
+                <a:srgbClr val="1F3F6F"/>
+              </a:solidFill>
+              <a:ln w="9525" cap="flat">
+                <a:solidFill>
+                  <a:srgbClr val="1F3F6F"/>
+                </a:solidFill>
+                <a:prstDash val="solid"/>
+                <a:round/>
+              </a:ln>
+              <a:effectLst/>
+            </c:spPr>
+          </c:marker>
+          <c:cat>
+            <c:multiLvlStrRef>
+              <c:f>Sheet1!$A$2:$A$7</c:f>
+              <c:multiLvlStrCache>
+                <c:ptCount val="6"/>
+                <c:lvl>
+                  <c:pt idx="0">
+                    <c:v>S1</c:v>
+                  </c:pt>
+                  <c:pt idx="1">
+                    <c:v>S2</c:v>
+                  </c:pt>
+                  <c:pt idx="2">
+                    <c:v>S3</c:v>
+                  </c:pt>
+                  <c:pt idx="3">
+                    <c:v>S4</c:v>
+                  </c:pt>
+                  <c:pt idx="4">
+                    <c:v>S5</c:v>
+                  </c:pt>
+                  <c:pt idx="5">
+                    <c:v>S6</c:v>
+                  </c:pt>
+                </c:lvl>
+              </c:multiLvlStrCache>
+            </c:multiLvlStrRef>
+          </c:cat>
+          <c:val>
+            <c:numRef>
+              <c:f>Sheet1!$B$2:$B$7</c:f>
+              <c:numCache>
+                <c:formatCode>General</c:formatCode>
+                <c:ptCount val="6"/>
+                <c:pt idx="0">
+                  <c:v>13.7</c:v>
+                </c:pt>
+                <c:pt idx="1">
+                  <c:v>66.7</c:v>
+                </c:pt>
+                <c:pt idx="2">
+                  <c:v>33</c:v>
+                </c:pt>
+                <c:pt idx="3">
+                  <c:v>89.7</c:v>
+                </c:pt>
+                <c:pt idx="4">
+                  <c:v>32</c:v>
+                </c:pt>
+                <c:pt idx="5">
+                  <c:v>48.3</c:v>
+                </c:pt>
+              </c:numCache>
+            </c:numRef>
+          </c:val>
+          <c:smooth val="0"/>
+        </c:ser>
+        <c:ser>
+          <c:idx val="1"/>
+          <c:order val="1"/>
+          <c:tx>
+            <c:strRef>
+              <c:f>Sheet1!$C$1</c:f>
+              <c:strCache>
+                <c:ptCount val="1"/>
+                <c:pt idx="0">
+                  <c:v>Baseline mean</c:v>
+                </c:pt>
+              </c:strCache>
+            </c:strRef>
+          </c:tx>
+          <c:spPr>
+            <a:solidFill>
+              <a:srgbClr val="B25500"/>
+            </a:solidFill>
+            <a:ln w="31750" cap="flat">
+              <a:solidFill>
+                <a:srgbClr val="B25500"/>
+              </a:solidFill>
+              <a:prstDash val="solid"/>
+              <a:round/>
+            </a:ln>
+            <a:effectLst/>
+          </c:spPr>
+          <c:invertIfNegative val="0"/>
+          <c:dLbls>
+            <c:numFmt formatCode="#,##0" sourceLinked="0"/>
+            <c:txPr>
+              <a:bodyPr/>
+              <a:lstStyle/>
+              <a:p>
+                <a:pPr>
+                  <a:defRPr b="0" i="0" strike="noStrike" sz="1200" u="none">
+                    <a:solidFill>
+                      <a:srgbClr val="000000"/>
+                    </a:solidFill>
+                    <a:latin typeface="Arial"/>
+                  </a:defRPr>
+                </a:pPr>
+              </a:p>
+            </c:txPr>
+            <c:showLegendKey val="0"/>
+            <c:showVal val="0"/>
+            <c:showCatName val="0"/>
+            <c:showSerName val="0"/>
+            <c:showPercent val="0"/>
+            <c:showBubbleSize val="0"/>
+            <c:showLeaderLines val="0"/>
+          </c:dLbls>
+          <c:marker>
+            <c:symbol val="circle"/>
+            <c:size val="6"/>
+            <c:spPr>
+              <a:solidFill>
+                <a:srgbClr val="B25500"/>
+              </a:solidFill>
+              <a:ln w="9525" cap="flat">
+                <a:solidFill>
+                  <a:srgbClr val="B25500"/>
+                </a:solidFill>
+                <a:prstDash val="solid"/>
+                <a:round/>
+              </a:ln>
+              <a:effectLst/>
+            </c:spPr>
+          </c:marker>
+          <c:cat>
+            <c:multiLvlStrRef>
+              <c:f>Sheet1!$A$2:$A$7</c:f>
+              <c:multiLvlStrCache>
+                <c:ptCount val="6"/>
+                <c:lvl>
+                  <c:pt idx="0">
+                    <c:v>S1</c:v>
+                  </c:pt>
+                  <c:pt idx="1">
+                    <c:v>S2</c:v>
+                  </c:pt>
+                  <c:pt idx="2">
+                    <c:v>S3</c:v>
+                  </c:pt>
+                  <c:pt idx="3">
+                    <c:v>S4</c:v>
+                  </c:pt>
+                  <c:pt idx="4">
+                    <c:v>S5</c:v>
+                  </c:pt>
+                  <c:pt idx="5">
+                    <c:v>S6</c:v>
+                  </c:pt>
+                </c:lvl>
+              </c:multiLvlStrCache>
+            </c:multiLvlStrRef>
+          </c:cat>
+          <c:val>
+            <c:numRef>
+              <c:f>Sheet1!$C$2:$C$7</c:f>
+              <c:numCache>
+                <c:formatCode>General</c:formatCode>
+                <c:ptCount val="6"/>
+                <c:pt idx="0">
+                  <c:v>11.5</c:v>
+                </c:pt>
+                <c:pt idx="1">
+                  <c:v>20</c:v>
+                </c:pt>
+                <c:pt idx="2">
+                  <c:v>15.5</c:v>
+                </c:pt>
+                <c:pt idx="3">
+                  <c:v>76.5</c:v>
+                </c:pt>
+                <c:pt idx="4">
+                  <c:v>44.5</c:v>
+                </c:pt>
+                <c:pt idx="5">
+                  <c:v>27</c:v>
+                </c:pt>
+              </c:numCache>
+            </c:numRef>
+          </c:val>
+          <c:smooth val="0"/>
+        </c:ser>
+        <c:dLbls>
+          <c:numFmt formatCode="#,##0" sourceLinked="0"/>
+          <c:txPr>
+            <a:bodyPr/>
+            <a:lstStyle/>
+            <a:p>
+              <a:pPr>
+                <a:defRPr b="0" i="0" strike="noStrike" sz="1200" u="none">
+                  <a:solidFill>
+                    <a:srgbClr val="000000"/>
+                  </a:solidFill>
+                  <a:latin typeface="Arial"/>
+                </a:defRPr>
+              </a:pPr>
+            </a:p>
+          </c:txPr>
+          <c:showLegendKey val="0"/>
+          <c:showVal val="0"/>
+          <c:showCatName val="0"/>
+          <c:showSerName val="0"/>
+          <c:showPercent val="0"/>
+          <c:showBubbleSize val="0"/>
+          <c:showLeaderLines val="0"/>
+        </c:dLbls>
+        <c:marker val="1"/>
+        <c:axId val="2094734554"/>
+        <c:axId val="2094734552"/>
+        <c:axId val="2094734556"/>
+      </c:lineChart>
+      <c:catAx>
+        <c:axId val="2094734554"/>
+        <c:scaling>
+          <c:orientation val="minMax"/>
+        </c:scaling>
+        <c:delete val="0"/>
+        <c:axPos val="b"/>
+        <c:numFmt formatCode="General" sourceLinked="1"/>
+        <c:majorTickMark val="out"/>
+        <c:minorTickMark val="none"/>
+        <c:tickLblPos val="low"/>
+        <c:spPr>
+          <a:ln w="12700" cap="flat">
+            <a:solidFill>
+              <a:srgbClr val="888888"/>
+            </a:solidFill>
+            <a:prstDash val="solid"/>
+            <a:round/>
+          </a:ln>
+        </c:spPr>
+        <c:txPr>
+          <a:bodyPr/>
+          <a:lstStyle/>
+          <a:p>
+            <a:pPr>
+              <a:defRPr sz="900" b="0" i="0" u="none" strike="noStrike">
+                <a:solidFill>
+                  <a:srgbClr val="000000"/>
+                </a:solidFill>
+                <a:latin typeface="Arial"/>
+              </a:defRPr>
+            </a:pPr>
+            <a:endParaRPr lang="en-US"/>
+          </a:p>
+        </c:txPr>
+        <c:crossAx val="2094734552"/>
+        <c:crosses val="autoZero"/>
+        <c:auto val="1"/>
+        <c:lblAlgn val="ctr"/>
+        <c:noMultiLvlLbl val="1"/>
+      </c:catAx>
+      <c:valAx>
+        <c:axId val="2094734552"/>
+        <c:scaling>
+          <c:orientation val="minMax"/>
+          <c:max val="100"/>
+          <c:min val="0"/>
+        </c:scaling>
+        <c:delete val="0"/>
+        <c:axPos val="l"/>
+        <c:majorGridlines>
+          <c:spPr>
+            <a:ln w="12700" cap="flat">
+              <a:solidFill>
+                <a:srgbClr val="888888"/>
+              </a:solidFill>
+              <a:prstDash val="solid"/>
+              <a:round/>
+            </a:ln>
+          </c:spPr>
+        </c:majorGridlines>
+        <c:numFmt formatCode="General" sourceLinked="0"/>
+        <c:majorTickMark val="out"/>
+        <c:minorTickMark val="none"/>
+        <c:tickLblPos val="nextTo"/>
+        <c:spPr>
+          <a:ln w="12700" cap="flat">
+            <a:solidFill>
+              <a:srgbClr val="888888"/>
+            </a:solidFill>
+            <a:prstDash val="solid"/>
+            <a:round/>
+          </a:ln>
+        </c:spPr>
+        <c:txPr>
+          <a:bodyPr/>
+          <a:lstStyle/>
+          <a:p>
+            <a:pPr>
+              <a:defRPr sz="900" b="0" i="0" u="none" strike="noStrike">
+                <a:solidFill>
+                  <a:srgbClr val="000000"/>
+                </a:solidFill>
+                <a:latin typeface="Arial"/>
+              </a:defRPr>
+            </a:pPr>
+            <a:endParaRPr lang="en-US"/>
+          </a:p>
+        </c:txPr>
+        <c:crossAx val="2094734554"/>
+        <c:crosses val="autoZero"/>
+        <c:crossBetween val="between"/>
+        <c:majorUnit val="25"/>
+      </c:valAx>
+      <c:spPr>
+        <a:noFill/>
+        <a:ln>
+          <a:noFill/>
+        </a:ln>
+        <a:effectLst/>
+      </c:spPr>
+    </c:plotArea>
+    <c:legend>
+      <c:legendPos val="b"/>
+      <c:overlay val="0"/>
+      <c:txPr>
+        <a:bodyPr/>
+        <a:lstStyle/>
+        <a:p>
+          <a:pPr>
+            <a:defRPr sz="900">      </a:defRPr>
+          </a:pPr>
+          <a:endParaRPr lang="en-US"/>
+        </a:p>
+      </c:txPr>
+    </c:legend>
+    <c:plotVisOnly val="1"/>
+    <c:dispBlanksAs val="span"/>
+  </c:chart>
+  <c:spPr>
+    <a:noFill/>
+    <a:ln>
+      <a:noFill/>
+    </a:ln>
+    <a:effectLst/>
+  </c:spPr>
+  <c:externalData r:id="rId1">
+    <c:autoUpdate val="0"/>
+  </c:externalData>
+</c:chartSpace>
+</file>
+
+<file path=ppt/charts/chart3.xml><?xml version="1.0" encoding="utf-8"?>
+<c:chartSpace xmlns:c="http://schemas.openxmlformats.org/drawingml/2006/chart" xmlns:a="http://schemas.openxmlformats.org/drawingml/2006/main" xmlns:r="http://schemas.openxmlformats.org/officeDocument/2006/relationships">
+  <c:date1904 val="0"/>
+  <c:roundedCorners val="1"/>
+  <c:chart>
+    <c:title>
+      <c:tx>
+        <c:rich>
+          <a:bodyPr/>
+          <a:lstStyle/>
+          <a:p>
+            <a:pPr>
+              <a:defRPr sz="1200" b="0" i="0" u="none" strike="noStrike">
+                <a:solidFill>
+                  <a:srgbClr val="333333"/>
+                </a:solidFill>
+                <a:latin typeface="Arial"/>
+              </a:defRPr>
+            </a:pPr>
+            <a:r>
+              <a:rPr sz="1200" b="0" i="0" u="none" strike="noStrike">
+                <a:solidFill>
+                  <a:srgbClr val="333333"/>
+                </a:solidFill>
+                <a:latin typeface="Arial"/>
+              </a:rPr>
+              <a:t>Gain-stripped process score (W_g = W_lag = 0)</a:t>
+            </a:r>
+          </a:p>
+        </c:rich>
+      </c:tx>
+      <c:layout/>
+      <c:overlay val="0"/>
+    </c:title>
+    <c:autoTitleDeleted val="0"/>
+    <c:plotArea>
+      <c:layout/>
+      <c:lineChart>
+        <c:varyColors val="0"/>
+        <c:ser>
+          <c:idx val="0"/>
+          <c:order val="0"/>
+          <c:tx>
+            <c:strRef>
+              <c:f>Sheet1!$B$1</c:f>
+              <c:strCache>
+                <c:ptCount val="1"/>
+                <c:pt idx="0">
+                  <c:v>Feedback mean</c:v>
+                </c:pt>
+              </c:strCache>
+            </c:strRef>
+          </c:tx>
+          <c:spPr>
+            <a:solidFill>
+              <a:srgbClr val="1F3F6F"/>
+            </a:solidFill>
+            <a:ln w="38100" cap="flat">
+              <a:solidFill>
+                <a:srgbClr val="1F3F6F"/>
+              </a:solidFill>
+              <a:prstDash val="solid"/>
+              <a:round/>
+            </a:ln>
+            <a:effectLst/>
+          </c:spPr>
+          <c:invertIfNegative val="0"/>
+          <c:dLbls>
+            <c:numFmt formatCode="#,##0" sourceLinked="0"/>
+            <c:txPr>
+              <a:bodyPr/>
+              <a:lstStyle/>
+              <a:p>
+                <a:pPr>
+                  <a:defRPr b="0" i="0" strike="noStrike" sz="1200" u="none">
+                    <a:solidFill>
+                      <a:srgbClr val="000000"/>
+                    </a:solidFill>
+                    <a:latin typeface="Arial"/>
+                  </a:defRPr>
+                </a:pPr>
+              </a:p>
+            </c:txPr>
+            <c:showLegendKey val="0"/>
+            <c:showVal val="0"/>
+            <c:showCatName val="0"/>
+            <c:showSerName val="0"/>
+            <c:showPercent val="0"/>
+            <c:showBubbleSize val="0"/>
+            <c:showLeaderLines val="0"/>
+          </c:dLbls>
+          <c:marker>
+            <c:symbol val="circle"/>
+            <c:size val="7"/>
+            <c:spPr>
+              <a:solidFill>
+                <a:srgbClr val="1F3F6F"/>
+              </a:solidFill>
+              <a:ln w="9525" cap="flat">
+                <a:solidFill>
+                  <a:srgbClr val="1F3F6F"/>
+                </a:solidFill>
+                <a:prstDash val="solid"/>
+                <a:round/>
+              </a:ln>
+              <a:effectLst/>
+            </c:spPr>
+          </c:marker>
+          <c:cat>
+            <c:multiLvlStrRef>
+              <c:f>Sheet1!$A$2:$A$7</c:f>
+              <c:multiLvlStrCache>
+                <c:ptCount val="6"/>
+                <c:lvl>
+                  <c:pt idx="0">
+                    <c:v>S1</c:v>
+                  </c:pt>
+                  <c:pt idx="1">
+                    <c:v>S2</c:v>
+                  </c:pt>
+                  <c:pt idx="2">
+                    <c:v>S3</c:v>
+                  </c:pt>
+                  <c:pt idx="3">
+                    <c:v>S4</c:v>
+                  </c:pt>
+                  <c:pt idx="4">
+                    <c:v>S5</c:v>
+                  </c:pt>
+                  <c:pt idx="5">
+                    <c:v>S6</c:v>
+                  </c:pt>
+                </c:lvl>
+              </c:multiLvlStrCache>
+            </c:multiLvlStrRef>
+          </c:cat>
+          <c:val>
+            <c:numRef>
+              <c:f>Sheet1!$B$2:$B$7</c:f>
+              <c:numCache>
+                <c:formatCode>General</c:formatCode>
+                <c:ptCount val="6"/>
+                <c:pt idx="0">
+                  <c:v>26.7</c:v>
+                </c:pt>
+                <c:pt idx="1">
+                  <c:v>22</c:v>
+                </c:pt>
+                <c:pt idx="2">
+                  <c:v>38.7</c:v>
+                </c:pt>
+                <c:pt idx="3">
+                  <c:v>47.7</c:v>
+                </c:pt>
+                <c:pt idx="4">
+                  <c:v>36.7</c:v>
+                </c:pt>
+                <c:pt idx="5">
+                  <c:v>49</c:v>
+                </c:pt>
+              </c:numCache>
+            </c:numRef>
+          </c:val>
+          <c:smooth val="0"/>
+        </c:ser>
+        <c:ser>
+          <c:idx val="1"/>
+          <c:order val="1"/>
+          <c:tx>
+            <c:strRef>
+              <c:f>Sheet1!$C$1</c:f>
+              <c:strCache>
+                <c:ptCount val="1"/>
+                <c:pt idx="0">
+                  <c:v>Baseline mean</c:v>
+                </c:pt>
+              </c:strCache>
+            </c:strRef>
+          </c:tx>
+          <c:spPr>
+            <a:solidFill>
+              <a:srgbClr val="B25500"/>
+            </a:solidFill>
+            <a:ln w="38100" cap="flat">
+              <a:solidFill>
+                <a:srgbClr val="B25500"/>
+              </a:solidFill>
+              <a:prstDash val="solid"/>
+              <a:round/>
+            </a:ln>
+            <a:effectLst/>
+          </c:spPr>
+          <c:invertIfNegative val="0"/>
+          <c:dLbls>
+            <c:numFmt formatCode="#,##0" sourceLinked="0"/>
+            <c:txPr>
+              <a:bodyPr/>
+              <a:lstStyle/>
+              <a:p>
+                <a:pPr>
+                  <a:defRPr b="0" i="0" strike="noStrike" sz="1200" u="none">
+                    <a:solidFill>
+                      <a:srgbClr val="000000"/>
+                    </a:solidFill>
+                    <a:latin typeface="Arial"/>
+                  </a:defRPr>
+                </a:pPr>
+              </a:p>
+            </c:txPr>
+            <c:showLegendKey val="0"/>
+            <c:showVal val="0"/>
+            <c:showCatName val="0"/>
+            <c:showSerName val="0"/>
+            <c:showPercent val="0"/>
+            <c:showBubbleSize val="0"/>
+            <c:showLeaderLines val="0"/>
+          </c:dLbls>
+          <c:marker>
+            <c:symbol val="circle"/>
+            <c:size val="7"/>
+            <c:spPr>
+              <a:solidFill>
+                <a:srgbClr val="B25500"/>
+              </a:solidFill>
+              <a:ln w="9525" cap="flat">
+                <a:solidFill>
+                  <a:srgbClr val="B25500"/>
+                </a:solidFill>
+                <a:prstDash val="solid"/>
+                <a:round/>
+              </a:ln>
+              <a:effectLst/>
+            </c:spPr>
+          </c:marker>
+          <c:cat>
+            <c:multiLvlStrRef>
+              <c:f>Sheet1!$A$2:$A$7</c:f>
+              <c:multiLvlStrCache>
+                <c:ptCount val="6"/>
+                <c:lvl>
+                  <c:pt idx="0">
+                    <c:v>S1</c:v>
+                  </c:pt>
+                  <c:pt idx="1">
+                    <c:v>S2</c:v>
+                  </c:pt>
+                  <c:pt idx="2">
+                    <c:v>S3</c:v>
+                  </c:pt>
+                  <c:pt idx="3">
+                    <c:v>S4</c:v>
+                  </c:pt>
+                  <c:pt idx="4">
+                    <c:v>S5</c:v>
+                  </c:pt>
+                  <c:pt idx="5">
+                    <c:v>S6</c:v>
+                  </c:pt>
+                </c:lvl>
+              </c:multiLvlStrCache>
+            </c:multiLvlStrRef>
+          </c:cat>
+          <c:val>
+            <c:numRef>
+              <c:f>Sheet1!$C$2:$C$7</c:f>
+              <c:numCache>
+                <c:formatCode>General</c:formatCode>
+                <c:ptCount val="6"/>
+                <c:pt idx="0">
+                  <c:v>22.5</c:v>
+                </c:pt>
+                <c:pt idx="1">
+                  <c:v>17.5</c:v>
+                </c:pt>
+                <c:pt idx="2">
+                  <c:v>11</c:v>
+                </c:pt>
+                <c:pt idx="3">
+                  <c:v>39</c:v>
+                </c:pt>
+                <c:pt idx="4">
+                  <c:v>16.5</c:v>
+                </c:pt>
+                <c:pt idx="5">
+                  <c:v>20.5</c:v>
+                </c:pt>
+              </c:numCache>
+            </c:numRef>
+          </c:val>
+          <c:smooth val="0"/>
+        </c:ser>
+        <c:dLbls>
+          <c:numFmt formatCode="#,##0" sourceLinked="0"/>
+          <c:txPr>
+            <a:bodyPr/>
+            <a:lstStyle/>
+            <a:p>
+              <a:pPr>
+                <a:defRPr b="0" i="0" strike="noStrike" sz="1200" u="none">
+                  <a:solidFill>
+                    <a:srgbClr val="000000"/>
+                  </a:solidFill>
+                  <a:latin typeface="Arial"/>
+                </a:defRPr>
+              </a:pPr>
+            </a:p>
+          </c:txPr>
+          <c:showLegendKey val="0"/>
+          <c:showVal val="0"/>
+          <c:showCatName val="0"/>
+          <c:showSerName val="0"/>
+          <c:showPercent val="0"/>
+          <c:showBubbleSize val="0"/>
+          <c:showLeaderLines val="0"/>
+        </c:dLbls>
+        <c:marker val="1"/>
+        <c:axId val="2094734554"/>
+        <c:axId val="2094734552"/>
+        <c:axId val="2094734556"/>
+      </c:lineChart>
+      <c:catAx>
+        <c:axId val="2094734554"/>
+        <c:scaling>
+          <c:orientation val="minMax"/>
+        </c:scaling>
+        <c:delete val="0"/>
+        <c:axPos val="b"/>
+        <c:numFmt formatCode="General" sourceLinked="1"/>
+        <c:majorTickMark val="out"/>
+        <c:minorTickMark val="none"/>
+        <c:tickLblPos val="low"/>
+        <c:spPr>
+          <a:ln w="12700" cap="flat">
+            <a:solidFill>
+              <a:srgbClr val="888888"/>
+            </a:solidFill>
+            <a:prstDash val="solid"/>
+            <a:round/>
+          </a:ln>
+        </c:spPr>
+        <c:txPr>
+          <a:bodyPr/>
+          <a:lstStyle/>
+          <a:p>
+            <a:pPr>
+              <a:defRPr sz="1000" b="0" i="0" u="none" strike="noStrike">
+                <a:solidFill>
+                  <a:srgbClr val="000000"/>
+                </a:solidFill>
+                <a:latin typeface="Arial"/>
+              </a:defRPr>
+            </a:pPr>
+            <a:endParaRPr lang="en-US"/>
+          </a:p>
+        </c:txPr>
+        <c:crossAx val="2094734552"/>
+        <c:crosses val="autoZero"/>
+        <c:auto val="1"/>
+        <c:lblAlgn val="ctr"/>
+        <c:noMultiLvlLbl val="1"/>
+      </c:catAx>
+      <c:valAx>
+        <c:axId val="2094734552"/>
+        <c:scaling>
+          <c:orientation val="minMax"/>
+          <c:max val="60"/>
+          <c:min val="0"/>
+        </c:scaling>
+        <c:delete val="0"/>
+        <c:axPos val="l"/>
+        <c:majorGridlines>
+          <c:spPr>
+            <a:ln w="12700" cap="flat">
+              <a:solidFill>
+                <a:srgbClr val="888888"/>
+              </a:solidFill>
+              <a:prstDash val="solid"/>
+              <a:round/>
+            </a:ln>
+          </c:spPr>
+        </c:majorGridlines>
+        <c:numFmt formatCode="General" sourceLinked="0"/>
+        <c:majorTickMark val="out"/>
+        <c:minorTickMark val="none"/>
+        <c:tickLblPos val="nextTo"/>
+        <c:spPr>
+          <a:ln w="12700" cap="flat">
+            <a:solidFill>
+              <a:srgbClr val="888888"/>
+            </a:solidFill>
+            <a:prstDash val="solid"/>
+            <a:round/>
+          </a:ln>
+        </c:spPr>
+        <c:txPr>
+          <a:bodyPr/>
+          <a:lstStyle/>
+          <a:p>
+            <a:pPr>
+              <a:defRPr sz="1000" b="0" i="0" u="none" strike="noStrike">
+                <a:solidFill>
+                  <a:srgbClr val="000000"/>
+                </a:solidFill>
+                <a:latin typeface="Arial"/>
+              </a:defRPr>
+            </a:pPr>
+            <a:endParaRPr lang="en-US"/>
+          </a:p>
+        </c:txPr>
+        <c:crossAx val="2094734554"/>
+        <c:crosses val="autoZero"/>
+        <c:crossBetween val="between"/>
+        <c:majorUnit val="10"/>
+      </c:valAx>
+      <c:spPr>
+        <a:noFill/>
+        <a:ln>
+          <a:noFill/>
+        </a:ln>
+        <a:effectLst/>
+      </c:spPr>
+    </c:plotArea>
+    <c:legend>
+      <c:legendPos val="b"/>
+      <c:overlay val="0"/>
+      <c:txPr>
+        <a:bodyPr/>
+        <a:lstStyle/>
+        <a:p>
+          <a:pPr>
+            <a:defRPr sz="1000">      </a:defRPr>
+          </a:pPr>
+          <a:endParaRPr lang="en-US"/>
+        </a:p>
+      </c:txPr>
+    </c:legend>
+    <c:plotVisOnly val="1"/>
+    <c:dispBlanksAs val="span"/>
+  </c:chart>
+  <c:spPr>
+    <a:noFill/>
+    <a:ln>
+      <a:noFill/>
+    </a:ln>
+    <a:effectLst/>
+  </c:spPr>
+  <c:externalData r:id="rId1">
+    <c:autoUpdate val="0"/>
+  </c:externalData>
+</c:chartSpace>
+</file>
+
+<file path=ppt/charts/chart4.xml><?xml version="1.0" encoding="utf-8"?>
+<c:chartSpace xmlns:c="http://schemas.openxmlformats.org/drawingml/2006/chart" xmlns:a="http://schemas.openxmlformats.org/drawingml/2006/main" xmlns:r="http://schemas.openxmlformats.org/officeDocument/2006/relationships">
+  <c:date1904 val="0"/>
+  <c:roundedCorners val="1"/>
+  <c:chart>
+    <c:title>
+      <c:tx>
+        <c:rich>
+          <a:bodyPr/>
+          <a:lstStyle/>
+          <a:p>
+            <a:pPr>
+              <a:defRPr sz="1100" b="0" i="0" u="none" strike="noStrike">
+                <a:solidFill>
+                  <a:srgbClr val="333333"/>
+                </a:solidFill>
+                <a:latin typeface="Arial"/>
+              </a:defRPr>
+            </a:pPr>
+            <a:r>
+              <a:rPr sz="1100" b="0" i="0" u="none" strike="noStrike">
+                <a:solidFill>
+                  <a:srgbClr val="333333"/>
+                </a:solidFill>
+                <a:latin typeface="Arial"/>
+              </a:rPr>
+              <a:t>Gain-stripped score (same scale as user study)</a:t>
+            </a:r>
+          </a:p>
+        </c:rich>
+      </c:tx>
+      <c:layout/>
+      <c:overlay val="0"/>
+    </c:title>
+    <c:autoTitleDeleted val="0"/>
+    <c:plotArea>
+      <c:layout/>
+      <c:lineChart>
+        <c:varyColors val="0"/>
+        <c:ser>
+          <c:idx val="0"/>
+          <c:order val="0"/>
+          <c:tx>
+            <c:strRef>
+              <c:f>Sheet1!$B$1</c:f>
+              <c:strCache>
+                <c:ptCount val="1"/>
+                <c:pt idx="0">
+                  <c:v>Feedback mean (n=6)</c:v>
+                </c:pt>
+              </c:strCache>
+            </c:strRef>
+          </c:tx>
+          <c:spPr>
+            <a:solidFill>
+              <a:srgbClr val="1F3F6F"/>
+            </a:solidFill>
+            <a:ln w="31750" cap="flat">
+              <a:solidFill>
+                <a:srgbClr val="1F3F6F"/>
+              </a:solidFill>
+              <a:prstDash val="solid"/>
+              <a:round/>
+            </a:ln>
+            <a:effectLst/>
+          </c:spPr>
+          <c:invertIfNegative val="0"/>
+          <c:dLbls>
+            <c:numFmt formatCode="#,##0" sourceLinked="0"/>
+            <c:txPr>
+              <a:bodyPr/>
+              <a:lstStyle/>
+              <a:p>
+                <a:pPr>
+                  <a:defRPr b="0" i="0" strike="noStrike" sz="1200" u="none">
+                    <a:solidFill>
+                      <a:srgbClr val="000000"/>
+                    </a:solidFill>
+                    <a:latin typeface="Arial"/>
+                  </a:defRPr>
+                </a:pPr>
+              </a:p>
+            </c:txPr>
+            <c:showLegendKey val="0"/>
+            <c:showVal val="0"/>
+            <c:showCatName val="0"/>
+            <c:showSerName val="0"/>
+            <c:showPercent val="0"/>
+            <c:showBubbleSize val="0"/>
+            <c:showLeaderLines val="0"/>
+          </c:dLbls>
+          <c:marker>
+            <c:symbol val="circle"/>
+            <c:size val="6"/>
+            <c:spPr>
+              <a:solidFill>
+                <a:srgbClr val="1F3F6F"/>
+              </a:solidFill>
+              <a:ln w="9525" cap="flat">
+                <a:solidFill>
+                  <a:srgbClr val="1F3F6F"/>
+                </a:solidFill>
+                <a:prstDash val="solid"/>
+                <a:round/>
+              </a:ln>
+              <a:effectLst/>
+            </c:spPr>
+          </c:marker>
+          <c:cat>
+            <c:multiLvlStrRef>
+              <c:f>Sheet1!$A$2:$A$7</c:f>
+              <c:multiLvlStrCache>
+                <c:ptCount val="6"/>
+                <c:lvl>
+                  <c:pt idx="0">
+                    <c:v>S1</c:v>
+                  </c:pt>
+                  <c:pt idx="1">
+                    <c:v>S2</c:v>
+                  </c:pt>
+                  <c:pt idx="2">
+                    <c:v>S3</c:v>
+                  </c:pt>
+                  <c:pt idx="3">
+                    <c:v>S4</c:v>
+                  </c:pt>
+                  <c:pt idx="4">
+                    <c:v>S5</c:v>
+                  </c:pt>
+                  <c:pt idx="5">
+                    <c:v>S6</c:v>
+                  </c:pt>
+                </c:lvl>
+              </c:multiLvlStrCache>
+            </c:multiLvlStrRef>
+          </c:cat>
+          <c:val>
+            <c:numRef>
+              <c:f>Sheet1!$B$2:$B$7</c:f>
+              <c:numCache>
+                <c:formatCode>General</c:formatCode>
+                <c:ptCount val="6"/>
+                <c:pt idx="0">
+                  <c:v>36.7</c:v>
+                </c:pt>
+                <c:pt idx="1">
+                  <c:v>40</c:v>
+                </c:pt>
+                <c:pt idx="2">
+                  <c:v>40</c:v>
+                </c:pt>
+                <c:pt idx="3">
+                  <c:v>50</c:v>
+                </c:pt>
+                <c:pt idx="4">
+                  <c:v>42</c:v>
+                </c:pt>
+                <c:pt idx="5">
+                  <c:v>39.7</c:v>
+                </c:pt>
+              </c:numCache>
+            </c:numRef>
+          </c:val>
+          <c:smooth val="0"/>
+        </c:ser>
+        <c:ser>
+          <c:idx val="1"/>
+          <c:order val="1"/>
+          <c:tx>
+            <c:strRef>
+              <c:f>Sheet1!$C$1</c:f>
+              <c:strCache>
+                <c:ptCount val="1"/>
+                <c:pt idx="0">
+                  <c:v>Baseline mean (n=2)</c:v>
+                </c:pt>
+              </c:strCache>
+            </c:strRef>
+          </c:tx>
+          <c:spPr>
+            <a:solidFill>
+              <a:srgbClr val="B25500"/>
+            </a:solidFill>
+            <a:ln w="31750" cap="flat">
+              <a:solidFill>
+                <a:srgbClr val="B25500"/>
+              </a:solidFill>
+              <a:prstDash val="solid"/>
+              <a:round/>
+            </a:ln>
+            <a:effectLst/>
+          </c:spPr>
+          <c:invertIfNegative val="0"/>
+          <c:dLbls>
+            <c:numFmt formatCode="#,##0" sourceLinked="0"/>
+            <c:txPr>
+              <a:bodyPr/>
+              <a:lstStyle/>
+              <a:p>
+                <a:pPr>
+                  <a:defRPr b="0" i="0" strike="noStrike" sz="1200" u="none">
+                    <a:solidFill>
+                      <a:srgbClr val="000000"/>
+                    </a:solidFill>
+                    <a:latin typeface="Arial"/>
+                  </a:defRPr>
+                </a:pPr>
+              </a:p>
+            </c:txPr>
+            <c:showLegendKey val="0"/>
+            <c:showVal val="0"/>
+            <c:showCatName val="0"/>
+            <c:showSerName val="0"/>
+            <c:showPercent val="0"/>
+            <c:showBubbleSize val="0"/>
+            <c:showLeaderLines val="0"/>
+          </c:dLbls>
+          <c:marker>
+            <c:symbol val="circle"/>
+            <c:size val="6"/>
+            <c:spPr>
+              <a:solidFill>
+                <a:srgbClr val="B25500"/>
+              </a:solidFill>
+              <a:ln w="9525" cap="flat">
+                <a:solidFill>
+                  <a:srgbClr val="B25500"/>
+                </a:solidFill>
+                <a:prstDash val="solid"/>
+                <a:round/>
+              </a:ln>
+              <a:effectLst/>
+            </c:spPr>
+          </c:marker>
+          <c:cat>
+            <c:multiLvlStrRef>
+              <c:f>Sheet1!$A$2:$A$7</c:f>
+              <c:multiLvlStrCache>
+                <c:ptCount val="6"/>
+                <c:lvl>
+                  <c:pt idx="0">
+                    <c:v>S1</c:v>
+                  </c:pt>
+                  <c:pt idx="1">
+                    <c:v>S2</c:v>
+                  </c:pt>
+                  <c:pt idx="2">
+                    <c:v>S3</c:v>
+                  </c:pt>
+                  <c:pt idx="3">
+                    <c:v>S4</c:v>
+                  </c:pt>
+                  <c:pt idx="4">
+                    <c:v>S5</c:v>
+                  </c:pt>
+                  <c:pt idx="5">
+                    <c:v>S6</c:v>
+                  </c:pt>
+                </c:lvl>
+              </c:multiLvlStrCache>
+            </c:multiLvlStrRef>
+          </c:cat>
+          <c:val>
+            <c:numRef>
+              <c:f>Sheet1!$C$2:$C$7</c:f>
+              <c:numCache>
+                <c:formatCode>General</c:formatCode>
+                <c:ptCount val="6"/>
+                <c:pt idx="0">
+                  <c:v>34.5</c:v>
+                </c:pt>
+                <c:pt idx="1">
+                  <c:v>40</c:v>
+                </c:pt>
+                <c:pt idx="2">
+                  <c:v>40</c:v>
+                </c:pt>
+                <c:pt idx="3">
+                  <c:v>50</c:v>
+                </c:pt>
+                <c:pt idx="4">
+                  <c:v>42</c:v>
+                </c:pt>
+                <c:pt idx="5">
+                  <c:v>41</c:v>
+                </c:pt>
+              </c:numCache>
+            </c:numRef>
+          </c:val>
+          <c:smooth val="0"/>
+        </c:ser>
+        <c:dLbls>
+          <c:numFmt formatCode="#,##0" sourceLinked="0"/>
+          <c:txPr>
+            <a:bodyPr/>
+            <a:lstStyle/>
+            <a:p>
+              <a:pPr>
+                <a:defRPr b="0" i="0" strike="noStrike" sz="1200" u="none">
+                  <a:solidFill>
+                    <a:srgbClr val="000000"/>
+                  </a:solidFill>
+                  <a:latin typeface="Arial"/>
+                </a:defRPr>
+              </a:pPr>
+            </a:p>
+          </c:txPr>
+          <c:showLegendKey val="0"/>
+          <c:showVal val="0"/>
+          <c:showCatName val="0"/>
+          <c:showSerName val="0"/>
+          <c:showPercent val="0"/>
+          <c:showBubbleSize val="0"/>
+          <c:showLeaderLines val="0"/>
+        </c:dLbls>
+        <c:marker val="1"/>
+        <c:axId val="2094734554"/>
+        <c:axId val="2094734552"/>
+        <c:axId val="2094734556"/>
+      </c:lineChart>
+      <c:catAx>
+        <c:axId val="2094734554"/>
+        <c:scaling>
+          <c:orientation val="minMax"/>
+        </c:scaling>
+        <c:delete val="0"/>
+        <c:axPos val="b"/>
+        <c:numFmt formatCode="General" sourceLinked="1"/>
+        <c:majorTickMark val="out"/>
+        <c:minorTickMark val="none"/>
+        <c:tickLblPos val="low"/>
+        <c:spPr>
+          <a:ln w="12700" cap="flat">
+            <a:solidFill>
+              <a:srgbClr val="888888"/>
+            </a:solidFill>
+            <a:prstDash val="solid"/>
+            <a:round/>
+          </a:ln>
+        </c:spPr>
+        <c:txPr>
+          <a:bodyPr/>
+          <a:lstStyle/>
+          <a:p>
+            <a:pPr>
+              <a:defRPr sz="900" b="0" i="0" u="none" strike="noStrike">
+                <a:solidFill>
+                  <a:srgbClr val="000000"/>
+                </a:solidFill>
+                <a:latin typeface="Arial"/>
+              </a:defRPr>
+            </a:pPr>
+            <a:endParaRPr lang="en-US"/>
+          </a:p>
+        </c:txPr>
+        <c:crossAx val="2094734552"/>
+        <c:crosses val="autoZero"/>
+        <c:auto val="1"/>
+        <c:lblAlgn val="ctr"/>
+        <c:noMultiLvlLbl val="1"/>
+      </c:catAx>
+      <c:valAx>
+        <c:axId val="2094734552"/>
+        <c:scaling>
+          <c:orientation val="minMax"/>
+          <c:max val="60"/>
+          <c:min val="0"/>
+        </c:scaling>
+        <c:delete val="0"/>
+        <c:axPos val="l"/>
+        <c:majorGridlines>
+          <c:spPr>
+            <a:ln w="12700" cap="flat">
+              <a:solidFill>
+                <a:srgbClr val="888888"/>
+              </a:solidFill>
+              <a:prstDash val="solid"/>
+              <a:round/>
+            </a:ln>
+          </c:spPr>
+        </c:majorGridlines>
+        <c:numFmt formatCode="General" sourceLinked="0"/>
+        <c:majorTickMark val="out"/>
+        <c:minorTickMark val="none"/>
+        <c:tickLblPos val="nextTo"/>
+        <c:spPr>
+          <a:ln w="12700" cap="flat">
+            <a:solidFill>
+              <a:srgbClr val="888888"/>
+            </a:solidFill>
+            <a:prstDash val="solid"/>
+            <a:round/>
+          </a:ln>
+        </c:spPr>
+        <c:txPr>
+          <a:bodyPr/>
+          <a:lstStyle/>
+          <a:p>
+            <a:pPr>
+              <a:defRPr sz="900" b="0" i="0" u="none" strike="noStrike">
+                <a:solidFill>
+                  <a:srgbClr val="000000"/>
+                </a:solidFill>
+                <a:latin typeface="Arial"/>
+              </a:defRPr>
+            </a:pPr>
+            <a:endParaRPr lang="en-US"/>
+          </a:p>
+        </c:txPr>
+        <c:crossAx val="2094734554"/>
+        <c:crosses val="autoZero"/>
+        <c:crossBetween val="between"/>
+        <c:majorUnit val="10"/>
+      </c:valAx>
+      <c:spPr>
+        <a:noFill/>
+        <a:ln>
+          <a:noFill/>
+        </a:ln>
+        <a:effectLst/>
+      </c:spPr>
+    </c:plotArea>
+    <c:legend>
+      <c:legendPos val="b"/>
+      <c:overlay val="0"/>
+      <c:txPr>
+        <a:bodyPr/>
+        <a:lstStyle/>
+        <a:p>
+          <a:pPr>
+            <a:defRPr sz="900">      </a:defRPr>
+          </a:pPr>
+          <a:endParaRPr lang="en-US"/>
+        </a:p>
+      </c:txPr>
+    </c:legend>
+    <c:plotVisOnly val="1"/>
+    <c:dispBlanksAs val="span"/>
+  </c:chart>
+  <c:spPr>
+    <a:noFill/>
+    <a:ln>
+      <a:noFill/>
+    </a:ln>
+    <a:effectLst/>
+  </c:spPr>
+  <c:externalData r:id="rId1">
+    <c:autoUpdate val="0"/>
+  </c:externalData>
+</c:chartSpace>
 </file>
 
 <file path=ppt/notesMasters/notesMaster1.xml><?xml version="1.0" encoding="utf-8"?>
@@ -1779,6 +3590,270 @@
             <a:fld id="{F7021451-1387-4CA6-816F-3879F97B5CBC}" type="slidenum">
               <a:rPr lang="en-US"/>
               <a:t>22</a:t>
+            </a:fld>
+            <a:endParaRPr lang="en-US"/>
+          </a:p>
+        </p:txBody>
+      </p:sp>
+    </p:spTree>
+    <p:extLst>
+      <p:ext uri="{BB962C8B-B14F-4D97-AF65-F5344CB8AC3E}">
+        <p14:creationId xmlns:p14="http://schemas.microsoft.com/office/powerpoint/2010/main" val="1024086991"/>
+      </p:ext>
+    </p:extLst>
+  </p:cSld>
+  <p:clrMapOvr>
+    <a:masterClrMapping/>
+  </p:clrMapOvr>
+</p:notes>
+</file>
+
+<file path=ppt/notesSlides/notesSlide23.xml><?xml version="1.0" encoding="utf-8"?>
+<p:notes xmlns:a="http://schemas.openxmlformats.org/drawingml/2006/main" xmlns:r="http://schemas.openxmlformats.org/officeDocument/2006/relationships" xmlns:p="http://schemas.openxmlformats.org/presentationml/2006/main">
+  <p:cSld>
+    <p:spTree>
+      <p:nvGrpSpPr>
+        <p:cNvPr id="1" name=""/>
+        <p:cNvGrpSpPr/>
+        <p:nvPr/>
+      </p:nvGrpSpPr>
+      <p:grpSpPr>
+        <a:xfrm>
+          <a:off x="0" y="0"/>
+          <a:ext cx="0" cy="0"/>
+          <a:chOff x="0" y="0"/>
+          <a:chExt cx="0" cy="0"/>
+        </a:xfrm>
+      </p:grpSpPr>
+      <p:sp>
+        <p:nvSpPr>
+          <p:cNvPr id="2" name="Slide Image Placeholder 1"/>
+          <p:cNvSpPr>
+            <a:spLocks noGrp="1" noRot="1" noChangeAspect="1"/>
+          </p:cNvSpPr>
+          <p:nvPr>
+            <p:ph type="sldImg"/>
+          </p:nvPr>
+        </p:nvSpPr>
+        <p:spPr/>
+      </p:sp>
+      <p:sp>
+        <p:nvSpPr>
+          <p:cNvPr id="3" name="Notes Placeholder 2"/>
+          <p:cNvSpPr>
+            <a:spLocks noGrp="1"/>
+          </p:cNvSpPr>
+          <p:nvPr>
+            <p:ph type="body" idx="1"/>
+          </p:nvPr>
+        </p:nvSpPr>
+        <p:spPr/>
+        <p:txBody>
+          <a:bodyPr/>
+          <a:lstStyle/>
+          <a:p>
+            <a:r>
+              <a:rPr lang="en-US" dirty="0"/>
+              <a:t/>
+            </a:r>
+            <a:endParaRPr lang="en-US" dirty="0"/>
+          </a:p>
+        </p:txBody>
+      </p:sp>
+      <p:sp>
+        <p:nvSpPr>
+          <p:cNvPr id="4" name="Slide Number Placeholder 3"/>
+          <p:cNvSpPr>
+            <a:spLocks noGrp="1"/>
+          </p:cNvSpPr>
+          <p:nvPr>
+            <p:ph type="sldNum" sz="quarter" idx="10"/>
+          </p:nvPr>
+        </p:nvSpPr>
+        <p:spPr/>
+        <p:txBody>
+          <a:bodyPr/>
+          <a:lstStyle/>
+          <a:p>
+            <a:fld id="{F7021451-1387-4CA6-816F-3879F97B5CBC}" type="slidenum">
+              <a:rPr lang="en-US"/>
+              <a:t>23</a:t>
+            </a:fld>
+            <a:endParaRPr lang="en-US"/>
+          </a:p>
+        </p:txBody>
+      </p:sp>
+    </p:spTree>
+    <p:extLst>
+      <p:ext uri="{BB962C8B-B14F-4D97-AF65-F5344CB8AC3E}">
+        <p14:creationId xmlns:p14="http://schemas.microsoft.com/office/powerpoint/2010/main" val="1024086991"/>
+      </p:ext>
+    </p:extLst>
+  </p:cSld>
+  <p:clrMapOvr>
+    <a:masterClrMapping/>
+  </p:clrMapOvr>
+</p:notes>
+</file>
+
+<file path=ppt/notesSlides/notesSlide24.xml><?xml version="1.0" encoding="utf-8"?>
+<p:notes xmlns:a="http://schemas.openxmlformats.org/drawingml/2006/main" xmlns:r="http://schemas.openxmlformats.org/officeDocument/2006/relationships" xmlns:p="http://schemas.openxmlformats.org/presentationml/2006/main">
+  <p:cSld>
+    <p:spTree>
+      <p:nvGrpSpPr>
+        <p:cNvPr id="1" name=""/>
+        <p:cNvGrpSpPr/>
+        <p:nvPr/>
+      </p:nvGrpSpPr>
+      <p:grpSpPr>
+        <a:xfrm>
+          <a:off x="0" y="0"/>
+          <a:ext cx="0" cy="0"/>
+          <a:chOff x="0" y="0"/>
+          <a:chExt cx="0" cy="0"/>
+        </a:xfrm>
+      </p:grpSpPr>
+      <p:sp>
+        <p:nvSpPr>
+          <p:cNvPr id="2" name="Slide Image Placeholder 1"/>
+          <p:cNvSpPr>
+            <a:spLocks noGrp="1" noRot="1" noChangeAspect="1"/>
+          </p:cNvSpPr>
+          <p:nvPr>
+            <p:ph type="sldImg"/>
+          </p:nvPr>
+        </p:nvSpPr>
+        <p:spPr/>
+      </p:sp>
+      <p:sp>
+        <p:nvSpPr>
+          <p:cNvPr id="3" name="Notes Placeholder 2"/>
+          <p:cNvSpPr>
+            <a:spLocks noGrp="1"/>
+          </p:cNvSpPr>
+          <p:nvPr>
+            <p:ph type="body" idx="1"/>
+          </p:nvPr>
+        </p:nvSpPr>
+        <p:spPr/>
+        <p:txBody>
+          <a:bodyPr/>
+          <a:lstStyle/>
+          <a:p>
+            <a:r>
+              <a:rPr lang="en-US" dirty="0"/>
+              <a:t/>
+            </a:r>
+            <a:endParaRPr lang="en-US" dirty="0"/>
+          </a:p>
+        </p:txBody>
+      </p:sp>
+      <p:sp>
+        <p:nvSpPr>
+          <p:cNvPr id="4" name="Slide Number Placeholder 3"/>
+          <p:cNvSpPr>
+            <a:spLocks noGrp="1"/>
+          </p:cNvSpPr>
+          <p:nvPr>
+            <p:ph type="sldNum" sz="quarter" idx="10"/>
+          </p:nvPr>
+        </p:nvSpPr>
+        <p:spPr/>
+        <p:txBody>
+          <a:bodyPr/>
+          <a:lstStyle/>
+          <a:p>
+            <a:fld id="{F7021451-1387-4CA6-816F-3879F97B5CBC}" type="slidenum">
+              <a:rPr lang="en-US"/>
+              <a:t>24</a:t>
+            </a:fld>
+            <a:endParaRPr lang="en-US"/>
+          </a:p>
+        </p:txBody>
+      </p:sp>
+    </p:spTree>
+    <p:extLst>
+      <p:ext uri="{BB962C8B-B14F-4D97-AF65-F5344CB8AC3E}">
+        <p14:creationId xmlns:p14="http://schemas.microsoft.com/office/powerpoint/2010/main" val="1024086991"/>
+      </p:ext>
+    </p:extLst>
+  </p:cSld>
+  <p:clrMapOvr>
+    <a:masterClrMapping/>
+  </p:clrMapOvr>
+</p:notes>
+</file>
+
+<file path=ppt/notesSlides/notesSlide25.xml><?xml version="1.0" encoding="utf-8"?>
+<p:notes xmlns:a="http://schemas.openxmlformats.org/drawingml/2006/main" xmlns:r="http://schemas.openxmlformats.org/officeDocument/2006/relationships" xmlns:p="http://schemas.openxmlformats.org/presentationml/2006/main">
+  <p:cSld>
+    <p:spTree>
+      <p:nvGrpSpPr>
+        <p:cNvPr id="1" name=""/>
+        <p:cNvGrpSpPr/>
+        <p:nvPr/>
+      </p:nvGrpSpPr>
+      <p:grpSpPr>
+        <a:xfrm>
+          <a:off x="0" y="0"/>
+          <a:ext cx="0" cy="0"/>
+          <a:chOff x="0" y="0"/>
+          <a:chExt cx="0" cy="0"/>
+        </a:xfrm>
+      </p:grpSpPr>
+      <p:sp>
+        <p:nvSpPr>
+          <p:cNvPr id="2" name="Slide Image Placeholder 1"/>
+          <p:cNvSpPr>
+            <a:spLocks noGrp="1" noRot="1" noChangeAspect="1"/>
+          </p:cNvSpPr>
+          <p:nvPr>
+            <p:ph type="sldImg"/>
+          </p:nvPr>
+        </p:nvSpPr>
+        <p:spPr/>
+      </p:sp>
+      <p:sp>
+        <p:nvSpPr>
+          <p:cNvPr id="3" name="Notes Placeholder 2"/>
+          <p:cNvSpPr>
+            <a:spLocks noGrp="1"/>
+          </p:cNvSpPr>
+          <p:nvPr>
+            <p:ph type="body" idx="1"/>
+          </p:nvPr>
+        </p:nvSpPr>
+        <p:spPr/>
+        <p:txBody>
+          <a:bodyPr/>
+          <a:lstStyle/>
+          <a:p>
+            <a:r>
+              <a:rPr lang="en-US" dirty="0"/>
+              <a:t/>
+            </a:r>
+            <a:endParaRPr lang="en-US" dirty="0"/>
+          </a:p>
+        </p:txBody>
+      </p:sp>
+      <p:sp>
+        <p:nvSpPr>
+          <p:cNvPr id="4" name="Slide Number Placeholder 3"/>
+          <p:cNvSpPr>
+            <a:spLocks noGrp="1"/>
+          </p:cNvSpPr>
+          <p:nvPr>
+            <p:ph type="sldNum" sz="quarter" idx="10"/>
+          </p:nvPr>
+        </p:nvSpPr>
+        <p:spPr/>
+        <p:txBody>
+          <a:bodyPr/>
+          <a:lstStyle/>
+          <a:p>
+            <a:fld id="{F7021451-1387-4CA6-816F-3879F97B5CBC}" type="slidenum">
+              <a:rPr lang="en-US"/>
+              <a:t>25</a:t>
             </a:fld>
             <a:endParaRPr lang="en-US"/>
           </a:p>
@@ -4004,7 +6079,7 @@
                             <a:srgbClr val="1A1A1A"/>
                           </a:solidFill>
                         </a:rPr>
-                        <a:t>Is the tool accurate? Are the alternatives it generates actually better?</a:t>
+                        <a:t>Is the tool accurate? Are the synthesised alternatives actually better than what the user did?</a:t>
                       </a:r>
                       <a:endParaRPr lang="en-US" sz="1300" dirty="0"/>
                     </a:p>
@@ -4062,7 +6137,7 @@
                             <a:srgbClr val="555555"/>
                           </a:solidFill>
                         </a:rPr>
-                        <a:t>45 labelled injection sessions, scored against per-kind precision and recall (Slide 16).</a:t>
+                        <a:t>45 labelled injection sessions: per-kind precision and recall (Slides 16-17) plus beat/tie/lose breakdown across all 66 detected divergence points (Slide 18).</a:t>
                       </a:r>
                       <a:endParaRPr lang="en-US" sz="1300" dirty="0"/>
                     </a:p>
@@ -4180,7 +6255,7 @@
                             <a:srgbClr val="555555"/>
                           </a:solidFill>
                         </a:rPr>
-                        <a:t>Injection set + user-study rankable subset, used for the sensitivity sweep and ablation study (Slide 17).</a:t>
+                        <a:t>Sensitivity sweep + ablation, headline on the 25-session user-study rankable subset (Slides 19-20).</a:t>
                       </a:r>
                       <a:endParaRPr lang="en-US" sz="1300" dirty="0"/>
                     </a:p>
@@ -4298,7 +6373,7 @@
                             <a:srgbClr val="555555"/>
                           </a:solidFill>
                         </a:rPr>
-                        <a:t>30-session randomised user study, plus a 48-session agent extension as motivation for future work (Slide 18).</a:t>
+                        <a:t>30-session randomised user study, 5 participants split between feedback and no-feedback arms (Slide 21).</a:t>
                       </a:r>
                       <a:endParaRPr lang="en-US" sz="1300" dirty="0"/>
                     </a:p>
@@ -9939,7 +12014,7 @@
                   <a:srgbClr val="000000"/>
                 </a:solidFill>
               </a:rPr>
-              <a:t>User study: does feedback change behaviour?</a:t>
+              <a:t>Does dashboard feedback change developer behaviour?</a:t>
             </a:r>
             <a:endParaRPr lang="en-US" sz="2800" dirty="0"/>
           </a:p>
@@ -9954,7 +12029,7 @@
         <p:spPr>
           <a:xfrm>
             <a:off x="457200" y="1188720"/>
-            <a:ext cx="8229600" cy="3657600"/>
+            <a:ext cx="8229600" cy="3291840"/>
           </a:xfrm>
           <a:prstGeom prst="rect">
             <a:avLst/>
@@ -9974,14 +12049,78 @@
               <a:buChar char="•"/>
             </a:pPr>
             <a:r>
-              <a:rPr lang="en-US" sz="1600" dirty="0">
+              <a:rPr lang="en-US" sz="1500" b="1" dirty="0">
                 <a:solidFill>
                   <a:srgbClr val="000000"/>
                 </a:solidFill>
               </a:rPr>
-              <a:t>With-feedback group: 2.7 divergence points per session.</a:t>
-            </a:r>
-            <a:endParaRPr lang="en-US" sz="1600" dirty="0"/>
+              <a:t>How did we design the study?</a:t>
+            </a:r>
+            <a:endParaRPr lang="en-US" sz="1500" dirty="0"/>
+          </a:p>
+          <a:p>
+            <a:pPr lvl="1" marL="762000" indent="-381000">
+              <a:spcAft>
+                <a:spcPts val="600"/>
+              </a:spcAft>
+              <a:buSzPct val="100000"/>
+              <a:buChar char="•"/>
+            </a:pPr>
+            <a:r>
+              <a:rPr lang="en-US" sz="1500" dirty="0">
+                <a:solidFill>
+                  <a:srgbClr val="000000"/>
+                </a:solidFill>
+              </a:rPr>
+              <a:t>5 MEng Computing participants, 6 sessions each, on an order-processing codebase </a:t>
+            </a:r>
+            <a:pPr indent="0" marL="0">
+              <a:spcAft>
+                <a:spcPts val="600"/>
+              </a:spcAft>
+              <a:buNone/>
+            </a:pPr>
+            <a:r>
+              <a:rPr lang="en-US" sz="1500" dirty="0">
+                <a:solidFill>
+                  <a:srgbClr val="888888"/>
+                </a:solidFill>
+              </a:rPr>
+              <a:t>- 30 sessions total on user-study-fixture/ (separate from the labelled-injection codebase).</a:t>
+            </a:r>
+            <a:endParaRPr lang="en-US" sz="1500" dirty="0"/>
+          </a:p>
+          <a:p>
+            <a:pPr lvl="1" marL="762000" indent="-381000">
+              <a:spcAft>
+                <a:spcPts val="1800"/>
+              </a:spcAft>
+              <a:buSzPct val="100000"/>
+              <a:buChar char="•"/>
+            </a:pPr>
+            <a:r>
+              <a:rPr lang="en-US" sz="1500" dirty="0">
+                <a:solidFill>
+                  <a:srgbClr val="000000"/>
+                </a:solidFill>
+              </a:rPr>
+              <a:t>Randomised into 2 arms </a:t>
+            </a:r>
+            <a:pPr indent="0" marL="0">
+              <a:spcAft>
+                <a:spcPts val="1800"/>
+              </a:spcAft>
+              <a:buNone/>
+            </a:pPr>
+            <a:r>
+              <a:rPr lang="en-US" sz="1500" dirty="0">
+                <a:solidFill>
+                  <a:srgbClr val="888888"/>
+                </a:solidFill>
+              </a:rPr>
+              <a:t>- P1, P2, P3 see dashboard feedback between sessions; P4 and P5 don't. Same playbook, codebase, instrumentation.</a:t>
+            </a:r>
+            <a:endParaRPr lang="en-US" sz="1500" dirty="0"/>
           </a:p>
           <a:p>
             <a:pPr marL="342900" indent="-342900">
@@ -9992,17 +12131,17 @@
               <a:buChar char="•"/>
             </a:pPr>
             <a:r>
-              <a:rPr lang="en-US" sz="1600" dirty="0">
+              <a:rPr lang="en-US" sz="1500" b="1" dirty="0">
                 <a:solidFill>
                   <a:srgbClr val="000000"/>
                 </a:solidFill>
               </a:rPr>
-              <a:t>No-feedback baseline: 6.0 divergence points per session -2.2× difference.</a:t>
-            </a:r>
-            <a:endParaRPr lang="en-US" sz="1600" dirty="0"/>
-          </a:p>
-          <a:p>
-            <a:pPr marL="342900" indent="-342900">
+              <a:t>What did we measure?</a:t>
+            </a:r>
+            <a:endParaRPr lang="en-US" sz="1500" dirty="0"/>
+          </a:p>
+          <a:p>
+            <a:pPr lvl="1" marL="762000" indent="-381000">
               <a:spcAft>
                 <a:spcPts val="600"/>
               </a:spcAft>
@@ -10010,17 +12149,31 @@
               <a:buChar char="•"/>
             </a:pPr>
             <a:r>
-              <a:rPr lang="en-US" sz="1600" dirty="0">
+              <a:rPr lang="en-US" sz="1500" dirty="0">
                 <a:solidFill>
                   <a:srgbClr val="000000"/>
                 </a:solidFill>
               </a:rPr>
-              <a:t>Gain-stripped process-score slope across the 6-session arc -+4.47 per session with feedback, −0.40 per session without.</a:t>
-            </a:r>
-            <a:endParaRPr lang="en-US" sz="1600" dirty="0"/>
-          </a:p>
-          <a:p>
-            <a:pPr marL="342900" indent="-342900">
+              <a:t>Divergence-point count per session </a:t>
+            </a:r>
+            <a:pPr indent="0" marL="0">
+              <a:spcAft>
+                <a:spcPts val="600"/>
+              </a:spcAft>
+              <a:buNone/>
+            </a:pPr>
+            <a:r>
+              <a:rPr lang="en-US" sz="1500" dirty="0">
+                <a:solidFill>
+                  <a:srgbClr val="888888"/>
+                </a:solidFill>
+              </a:rPr>
+              <a:t>- does the detector still surface the same kinds of friction over time?</a:t>
+            </a:r>
+            <a:endParaRPr lang="en-US" sz="1500" dirty="0"/>
+          </a:p>
+          <a:p>
+            <a:pPr lvl="1" marL="762000" indent="-381000">
               <a:spcAft>
                 <a:spcPts val="600"/>
               </a:spcAft>
@@ -10028,14 +12181,64 @@
               <a:buChar char="•"/>
             </a:pPr>
             <a:r>
-              <a:rPr lang="en-US" sz="1600" dirty="0">
+              <a:rPr lang="en-US" sz="1500" dirty="0">
                 <a:solidFill>
                   <a:srgbClr val="000000"/>
                 </a:solidFill>
               </a:rPr>
-              <a:t>Caveat: n=3 vs n=2 is directional evidence, not a hypothesis test.</a:t>
-            </a:r>
-            <a:endParaRPr lang="en-US" sz="1600" dirty="0"/>
+              <a:t>Process score across the arc, two views </a:t>
+            </a:r>
+            <a:pPr indent="0" marL="0">
+              <a:spcAft>
+                <a:spcPts val="600"/>
+              </a:spcAft>
+              <a:buNone/>
+            </a:pPr>
+            <a:r>
+              <a:rPr lang="en-US" sz="1500" dirty="0">
+                <a:solidFill>
+                  <a:srgbClr val="888888"/>
+                </a:solidFill>
+              </a:rPr>
+              <a:t>- the production score, plus a gain-stripped variant (W_g = W_lag = 0) that isolates how the participant worked from how much cleaner the code ended up.</a:t>
+            </a:r>
+            <a:endParaRPr lang="en-US" sz="1500" dirty="0"/>
+          </a:p>
+        </p:txBody>
+      </p:sp>
+      <p:sp>
+        <p:nvSpPr>
+          <p:cNvPr id="4" name="Text 2"/>
+          <p:cNvSpPr/>
+          <p:nvPr/>
+        </p:nvSpPr>
+        <p:spPr>
+          <a:xfrm>
+            <a:off x="457200" y="4617720"/>
+            <a:ext cx="8229600" cy="274320"/>
+          </a:xfrm>
+          <a:prstGeom prst="rect">
+            <a:avLst/>
+          </a:prstGeom>
+          <a:noFill/>
+          <a:ln/>
+        </p:spPr>
+        <p:txBody>
+          <a:bodyPr wrap="square" rtlCol="0" anchor="ctr"/>
+          <a:lstStyle/>
+          <a:p>
+            <a:pPr algn="ctr" indent="0" marL="0">
+              <a:buNone/>
+            </a:pPr>
+            <a:r>
+              <a:rPr lang="en-US" sz="1100" i="1" dirty="0">
+                <a:solidFill>
+                  <a:srgbClr val="888888"/>
+                </a:solidFill>
+              </a:rPr>
+              <a:t>Random assignment, n = 3 vs n = 2. Treated as a directional finding, not a hypothesis test.</a:t>
+            </a:r>
+            <a:endParaRPr lang="en-US" sz="1100" dirty="0"/>
           </a:p>
         </p:txBody>
       </p:sp>
@@ -10050,6 +12253,1300 @@
 <file path=ppt/slides/slide22.xml><?xml version="1.0" encoding="utf-8"?>
 <p:sld xmlns:a="http://schemas.openxmlformats.org/drawingml/2006/main" xmlns:r="http://schemas.openxmlformats.org/officeDocument/2006/relationships" xmlns:p="http://schemas.openxmlformats.org/presentationml/2006/main">
   <p:cSld name="Slide 22">
+    <p:spTree>
+      <p:nvGrpSpPr>
+        <p:cNvPr id="1" name=""/>
+        <p:cNvGrpSpPr/>
+        <p:nvPr/>
+      </p:nvGrpSpPr>
+      <p:grpSpPr>
+        <a:xfrm>
+          <a:off x="0" y="0"/>
+          <a:ext cx="0" cy="0"/>
+          <a:chOff x="0" y="0"/>
+          <a:chExt cx="0" cy="0"/>
+        </a:xfrm>
+      </p:grpSpPr>
+      <p:sp>
+        <p:nvSpPr>
+          <p:cNvPr id="2" name="Text 0"/>
+          <p:cNvSpPr/>
+          <p:nvPr/>
+        </p:nvSpPr>
+        <p:spPr>
+          <a:xfrm>
+            <a:off x="457200" y="137160"/>
+            <a:ext cx="8229600" cy="502920"/>
+          </a:xfrm>
+          <a:prstGeom prst="rect">
+            <a:avLst/>
+          </a:prstGeom>
+          <a:noFill/>
+          <a:ln/>
+        </p:spPr>
+        <p:txBody>
+          <a:bodyPr wrap="square" lIns="0" tIns="0" rIns="0" bIns="0" rtlCol="0" anchor="ctr"/>
+          <a:lstStyle/>
+          <a:p>
+            <a:pPr algn="ctr" indent="0" marL="0">
+              <a:buNone/>
+            </a:pPr>
+            <a:r>
+              <a:rPr lang="en-US" sz="2400" b="1" dirty="0">
+                <a:solidFill>
+                  <a:srgbClr val="000000"/>
+                </a:solidFill>
+              </a:rPr>
+              <a:t>Fewer divergences with feedback - but the raw score is noisy</a:t>
+            </a:r>
+            <a:endParaRPr lang="en-US" sz="2400" dirty="0"/>
+          </a:p>
+        </p:txBody>
+      </p:sp>
+      <p:graphicFrame>
+        <p:nvGraphicFramePr>
+          <p:cNvPr id="3" name="Chart 0" descr=""/>
+          <p:cNvGraphicFramePr/>
+          <p:nvPr/>
+        </p:nvGraphicFramePr>
+        <p:xfrm>
+          <a:off x="274320" y="868680"/>
+          <a:ext cx="4206240" cy="3017520"/>
+        </p:xfrm>
+        <a:graphic xmlns:a="http://schemas.openxmlformats.org/drawingml/2006/main">
+          <a:graphicData uri="http://schemas.openxmlformats.org/drawingml/2006/chart">
+            <c:chart xmlns:c="http://schemas.openxmlformats.org/drawingml/2006/chart" r:id="rId1"/>
+          </a:graphicData>
+        </a:graphic>
+      </p:graphicFrame>
+      <p:graphicFrame>
+        <p:nvGraphicFramePr>
+          <p:cNvPr id="4" name="Chart 1" descr=""/>
+          <p:cNvGraphicFramePr/>
+          <p:nvPr/>
+        </p:nvGraphicFramePr>
+        <p:xfrm>
+          <a:off x="4663440" y="868680"/>
+          <a:ext cx="4206240" cy="3017520"/>
+        </p:xfrm>
+        <a:graphic xmlns:a="http://schemas.openxmlformats.org/drawingml/2006/main">
+          <a:graphicData uri="http://schemas.openxmlformats.org/drawingml/2006/chart">
+            <c:chart xmlns:c="http://schemas.openxmlformats.org/drawingml/2006/chart" r:id="rId2"/>
+          </a:graphicData>
+        </a:graphic>
+      </p:graphicFrame>
+      <p:sp>
+        <p:nvSpPr>
+          <p:cNvPr id="5" name="Text 1"/>
+          <p:cNvSpPr/>
+          <p:nvPr/>
+        </p:nvSpPr>
+        <p:spPr>
+          <a:xfrm>
+            <a:off x="457200" y="4069080"/>
+            <a:ext cx="8229600" cy="868680"/>
+          </a:xfrm>
+          <a:prstGeom prst="rect">
+            <a:avLst/>
+          </a:prstGeom>
+          <a:noFill/>
+          <a:ln/>
+        </p:spPr>
+        <p:txBody>
+          <a:bodyPr wrap="square" lIns="50800" tIns="50800" rIns="50800" bIns="50800" rtlCol="0" anchor="t"/>
+          <a:lstStyle/>
+          <a:p>
+            <a:pPr algn="ctr" indent="0" marL="0">
+              <a:buNone/>
+            </a:pPr>
+            <a:r>
+              <a:rPr lang="en-US" sz="1200" dirty="0">
+                <a:solidFill>
+                  <a:srgbClr val="000000"/>
+                </a:solidFill>
+              </a:rPr>
+              <a:t>DP rate separates clearly: </a:t>
+            </a:r>
+            <a:pPr algn="ctr" indent="0" marL="0">
+              <a:buNone/>
+            </a:pPr>
+            <a:r>
+              <a:rPr lang="en-US" sz="1200" b="1" dirty="0">
+                <a:solidFill>
+                  <a:srgbClr val="1F3F6F"/>
+                </a:solidFill>
+              </a:rPr>
+              <a:t>2.7</a:t>
+            </a:r>
+            <a:pPr algn="ctr" indent="0" marL="0">
+              <a:buNone/>
+            </a:pPr>
+            <a:r>
+              <a:rPr lang="en-US" sz="1200" dirty="0">
+                <a:solidFill>
+                  <a:srgbClr val="000000"/>
+                </a:solidFill>
+              </a:rPr>
+              <a:t> (feedback) vs </a:t>
+            </a:r>
+            <a:pPr algn="ctr" indent="0" marL="0">
+              <a:buNone/>
+            </a:pPr>
+            <a:r>
+              <a:rPr lang="en-US" sz="1200" b="1" dirty="0">
+                <a:solidFill>
+                  <a:srgbClr val="B25500"/>
+                </a:solidFill>
+              </a:rPr>
+              <a:t>6.0</a:t>
+            </a:r>
+            <a:pPr algn="ctr" indent="0" marL="0">
+              <a:spcAft>
+                <a:spcPts val="400"/>
+              </a:spcAft>
+              <a:buNone/>
+            </a:pPr>
+            <a:r>
+              <a:rPr lang="en-US" sz="1200" dirty="0">
+                <a:solidFill>
+                  <a:srgbClr val="000000"/>
+                </a:solidFill>
+              </a:rPr>
+              <a:t> DPs per session per participant - 2.2× difference.</a:t>
+            </a:r>
+            <a:endParaRPr lang="en-US" sz="1200" dirty="0"/>
+          </a:p>
+          <a:p>
+            <a:pPr algn="ctr" indent="0" marL="0">
+              <a:buNone/>
+            </a:pPr>
+            <a:r>
+              <a:rPr lang="en-US" sz="1200" dirty="0">
+                <a:solidFill>
+                  <a:srgbClr val="000000"/>
+                </a:solidFill>
+              </a:rPr>
+              <a:t>But the production-weighted score is dominated by </a:t>
+            </a:r>
+            <a:pPr algn="ctr" indent="0" marL="0">
+              <a:buNone/>
+            </a:pPr>
+            <a:r>
+              <a:rPr lang="en-US" sz="1200" i="1" dirty="0">
+                <a:solidFill>
+                  <a:srgbClr val="000000"/>
+                </a:solidFill>
+              </a:rPr>
+              <a:t>task difficulty</a:t>
+            </a:r>
+            <a:pPr algn="ctr" indent="0" marL="0">
+              <a:buNone/>
+            </a:pPr>
+            <a:r>
+              <a:rPr lang="en-US" sz="1200" dirty="0">
+                <a:solidFill>
+                  <a:srgbClr val="000000"/>
+                </a:solidFill>
+              </a:rPr>
+              <a:t> - both groups peak at S4 (a short, mechanical task) and dip together at S2/S5. The behavioural signal is buried in the cleanliness gain.</a:t>
+            </a:r>
+            <a:endParaRPr lang="en-US" sz="1200" dirty="0"/>
+          </a:p>
+        </p:txBody>
+      </p:sp>
+    </p:spTree>
+  </p:cSld>
+  <p:clrMapOvr>
+    <a:masterClrMapping/>
+  </p:clrMapOvr>
+</p:sld>
+</file>
+
+<file path=ppt/slides/slide23.xml><?xml version="1.0" encoding="utf-8"?>
+<p:sld xmlns:a="http://schemas.openxmlformats.org/drawingml/2006/main" xmlns:r="http://schemas.openxmlformats.org/officeDocument/2006/relationships" xmlns:p="http://schemas.openxmlformats.org/presentationml/2006/main">
+  <p:cSld name="Slide 23">
+    <p:spTree>
+      <p:nvGrpSpPr>
+        <p:cNvPr id="1" name=""/>
+        <p:cNvGrpSpPr/>
+        <p:nvPr/>
+      </p:nvGrpSpPr>
+      <p:grpSpPr>
+        <a:xfrm>
+          <a:off x="0" y="0"/>
+          <a:ext cx="0" cy="0"/>
+          <a:chOff x="0" y="0"/>
+          <a:chExt cx="0" cy="0"/>
+        </a:xfrm>
+      </p:grpSpPr>
+      <p:sp>
+        <p:nvSpPr>
+          <p:cNvPr id="2" name="Text 0"/>
+          <p:cNvSpPr/>
+          <p:nvPr/>
+        </p:nvSpPr>
+        <p:spPr>
+          <a:xfrm>
+            <a:off x="457200" y="137160"/>
+            <a:ext cx="8229600" cy="502920"/>
+          </a:xfrm>
+          <a:prstGeom prst="rect">
+            <a:avLst/>
+          </a:prstGeom>
+          <a:noFill/>
+          <a:ln/>
+        </p:spPr>
+        <p:txBody>
+          <a:bodyPr wrap="square" lIns="0" tIns="0" rIns="0" bIns="0" rtlCol="0" anchor="ctr"/>
+          <a:lstStyle/>
+          <a:p>
+            <a:pPr algn="ctr" indent="0" marL="0">
+              <a:buNone/>
+            </a:pPr>
+            <a:r>
+              <a:rPr lang="en-US" sz="2400" b="1" dirty="0">
+                <a:solidFill>
+                  <a:srgbClr val="000000"/>
+                </a:solidFill>
+              </a:rPr>
+              <a:t>Strip the task signal - process discipline emerges</a:t>
+            </a:r>
+            <a:endParaRPr lang="en-US" sz="2400" dirty="0"/>
+          </a:p>
+        </p:txBody>
+      </p:sp>
+      <p:graphicFrame>
+        <p:nvGraphicFramePr>
+          <p:cNvPr id="3" name="Chart 0" descr=""/>
+          <p:cNvGraphicFramePr/>
+          <p:nvPr/>
+        </p:nvGraphicFramePr>
+        <p:xfrm>
+          <a:off x="1554480" y="777240"/>
+          <a:ext cx="6035040" cy="3108960"/>
+        </p:xfrm>
+        <a:graphic xmlns:a="http://schemas.openxmlformats.org/drawingml/2006/main">
+          <a:graphicData uri="http://schemas.openxmlformats.org/drawingml/2006/chart">
+            <c:chart xmlns:c="http://schemas.openxmlformats.org/drawingml/2006/chart" r:id="rId1"/>
+          </a:graphicData>
+        </a:graphic>
+      </p:graphicFrame>
+      <p:sp>
+        <p:nvSpPr>
+          <p:cNvPr id="4" name="Text 1"/>
+          <p:cNvSpPr/>
+          <p:nvPr/>
+        </p:nvSpPr>
+        <p:spPr>
+          <a:xfrm>
+            <a:off x="457200" y="4069080"/>
+            <a:ext cx="8229600" cy="868680"/>
+          </a:xfrm>
+          <a:prstGeom prst="rect">
+            <a:avLst/>
+          </a:prstGeom>
+          <a:noFill/>
+          <a:ln/>
+        </p:spPr>
+        <p:txBody>
+          <a:bodyPr wrap="square" lIns="50800" tIns="50800" rIns="50800" bIns="50800" rtlCol="0" anchor="t"/>
+          <a:lstStyle/>
+          <a:p>
+            <a:pPr algn="ctr" indent="0" marL="0">
+              <a:buNone/>
+            </a:pPr>
+            <a:r>
+              <a:rPr lang="en-US" sz="1200" dirty="0">
+                <a:solidFill>
+                  <a:srgbClr val="000000"/>
+                </a:solidFill>
+              </a:rPr>
+              <a:t>Once cleanliness gain is removed, the score reflects </a:t>
+            </a:r>
+            <a:pPr algn="ctr" indent="0" marL="0">
+              <a:buNone/>
+            </a:pPr>
+            <a:r>
+              <a:rPr lang="en-US" sz="1200" i="1" dirty="0">
+                <a:solidFill>
+                  <a:srgbClr val="000000"/>
+                </a:solidFill>
+              </a:rPr>
+              <a:t>how disciplined the process was</a:t>
+            </a:r>
+            <a:pPr algn="ctr" indent="0" marL="0">
+              <a:buNone/>
+            </a:pPr>
+            <a:r>
+              <a:rPr lang="en-US" sz="1200" dirty="0">
+                <a:solidFill>
+                  <a:srgbClr val="000000"/>
+                </a:solidFill>
+              </a:rPr>
+              <a:t> - tests run, IDE refactorings used, commits at sensible points. The feedback group climbs </a:t>
+            </a:r>
+            <a:pPr algn="ctr" indent="0" marL="0">
+              <a:buNone/>
+            </a:pPr>
+            <a:r>
+              <a:rPr lang="en-US" sz="1200" b="1" dirty="0">
+                <a:solidFill>
+                  <a:srgbClr val="1F3F6F"/>
+                </a:solidFill>
+              </a:rPr>
+              <a:t>+22.3</a:t>
+            </a:r>
+            <a:pPr algn="ctr" indent="0" marL="0">
+              <a:buNone/>
+            </a:pPr>
+            <a:r>
+              <a:rPr lang="en-US" sz="1200" dirty="0">
+                <a:solidFill>
+                  <a:srgbClr val="000000"/>
+                </a:solidFill>
+              </a:rPr>
+              <a:t> across the arc; the baseline group moves </a:t>
+            </a:r>
+            <a:pPr algn="ctr" indent="0" marL="0">
+              <a:buNone/>
+            </a:pPr>
+            <a:r>
+              <a:rPr lang="en-US" sz="1200" b="1" dirty="0">
+                <a:solidFill>
+                  <a:srgbClr val="B25500"/>
+                </a:solidFill>
+              </a:rPr>
+              <a:t>−2.0</a:t>
+            </a:r>
+            <a:pPr algn="ctr" indent="0" marL="0">
+              <a:spcAft>
+                <a:spcPts val="600"/>
+              </a:spcAft>
+              <a:buNone/>
+            </a:pPr>
+            <a:r>
+              <a:rPr lang="en-US" sz="1200" dirty="0">
+                <a:solidFill>
+                  <a:srgbClr val="000000"/>
+                </a:solidFill>
+              </a:rPr>
+              <a:t>.</a:t>
+            </a:r>
+            <a:endParaRPr lang="en-US" sz="1200" dirty="0"/>
+          </a:p>
+          <a:p>
+            <a:pPr algn="ctr" indent="0" marL="0">
+              <a:buNone/>
+            </a:pPr>
+            <a:r>
+              <a:rPr lang="en-US" sz="1200" i="1" dirty="0">
+                <a:solidFill>
+                  <a:srgbClr val="888888"/>
+                </a:solidFill>
+              </a:rPr>
+              <a:t>n = 3 vs n = 2 - directional finding, not a hypothesis test.</a:t>
+            </a:r>
+            <a:endParaRPr lang="en-US" sz="1200" dirty="0"/>
+          </a:p>
+        </p:txBody>
+      </p:sp>
+    </p:spTree>
+  </p:cSld>
+  <p:clrMapOvr>
+    <a:masterClrMapping/>
+  </p:clrMapOvr>
+</p:sld>
+</file>
+
+<file path=ppt/slides/slide24.xml><?xml version="1.0" encoding="utf-8"?>
+<p:sld xmlns:a="http://schemas.openxmlformats.org/drawingml/2006/main" xmlns:r="http://schemas.openxmlformats.org/officeDocument/2006/relationships" xmlns:p="http://schemas.openxmlformats.org/presentationml/2006/main">
+  <p:cSld name="Slide 24">
+    <p:spTree>
+      <p:nvGrpSpPr>
+        <p:cNvPr id="1" name=""/>
+        <p:cNvGrpSpPr/>
+        <p:nvPr/>
+      </p:nvGrpSpPr>
+      <p:grpSpPr>
+        <a:xfrm>
+          <a:off x="0" y="0"/>
+          <a:ext cx="0" cy="0"/>
+          <a:chOff x="0" y="0"/>
+          <a:chExt cx="0" cy="0"/>
+        </a:xfrm>
+      </p:grpSpPr>
+      <p:sp>
+        <p:nvSpPr>
+          <p:cNvPr id="2" name="Text 0"/>
+          <p:cNvSpPr/>
+          <p:nvPr/>
+        </p:nvSpPr>
+        <p:spPr>
+          <a:xfrm>
+            <a:off x="457200" y="137160"/>
+            <a:ext cx="8229600" cy="457200"/>
+          </a:xfrm>
+          <a:prstGeom prst="rect">
+            <a:avLst/>
+          </a:prstGeom>
+          <a:noFill/>
+          <a:ln/>
+        </p:spPr>
+        <p:txBody>
+          <a:bodyPr wrap="square" lIns="0" tIns="0" rIns="0" bIns="0" rtlCol="0" anchor="ctr"/>
+          <a:lstStyle/>
+          <a:p>
+            <a:pPr algn="ctr" indent="0" marL="0">
+              <a:buNone/>
+            </a:pPr>
+            <a:r>
+              <a:rPr lang="en-US" sz="2400" b="1" dirty="0">
+                <a:solidFill>
+                  <a:srgbClr val="000000"/>
+                </a:solidFill>
+              </a:rPr>
+              <a:t>Tool doesn't transfer cleanly to agent traces</a:t>
+            </a:r>
+            <a:endParaRPr lang="en-US" sz="2400" dirty="0"/>
+          </a:p>
+        </p:txBody>
+      </p:sp>
+      <p:sp>
+        <p:nvSpPr>
+          <p:cNvPr id="3" name="Text 1"/>
+          <p:cNvSpPr/>
+          <p:nvPr/>
+        </p:nvSpPr>
+        <p:spPr>
+          <a:xfrm>
+            <a:off x="457200" y="640080"/>
+            <a:ext cx="8229600" cy="274320"/>
+          </a:xfrm>
+          <a:prstGeom prst="rect">
+            <a:avLst/>
+          </a:prstGeom>
+          <a:noFill/>
+          <a:ln/>
+        </p:spPr>
+        <p:txBody>
+          <a:bodyPr wrap="square" rtlCol="0" anchor="ctr"/>
+          <a:lstStyle/>
+          <a:p>
+            <a:pPr algn="ctr" indent="0" marL="0">
+              <a:buNone/>
+            </a:pPr>
+            <a:r>
+              <a:rPr lang="en-US" sz="1100" i="1" dirty="0">
+                <a:solidFill>
+                  <a:srgbClr val="555555"/>
+                </a:solidFill>
+              </a:rPr>
+              <a:t>48 sessions, 8 agents (Claude / GPT / Gemini × Claude Code / OpenCode / Cursor CLI), same playbook as the user study.</a:t>
+            </a:r>
+            <a:endParaRPr lang="en-US" sz="1100" dirty="0"/>
+          </a:p>
+        </p:txBody>
+      </p:sp>
+      <p:graphicFrame>
+        <p:nvGraphicFramePr>
+          <p:cNvPr id="4" name="Chart 0" descr=""/>
+          <p:cNvGraphicFramePr/>
+          <p:nvPr/>
+        </p:nvGraphicFramePr>
+        <p:xfrm>
+          <a:off x="274320" y="1051560"/>
+          <a:ext cx="4206240" cy="2697480"/>
+        </p:xfrm>
+        <a:graphic xmlns:a="http://schemas.openxmlformats.org/drawingml/2006/main">
+          <a:graphicData uri="http://schemas.openxmlformats.org/drawingml/2006/chart">
+            <c:chart xmlns:c="http://schemas.openxmlformats.org/drawingml/2006/chart" r:id="rId1"/>
+          </a:graphicData>
+        </a:graphic>
+      </p:graphicFrame>
+      <p:graphicFrame>
+        <p:nvGraphicFramePr>
+          <p:cNvPr id="25" name="Table 0"/>
+          <p:cNvGraphicFramePr>
+            <a:graphicFrameLocks noGrp="1"/>
+          </p:cNvGraphicFramePr>
+          <p:nvPr>
+            <p:extLst>
+              <p:ext uri="{D42A27DB-BD31-4B8C-83A1-F6EECF244321}">
+                <p14:modId xmlns:p14="http://schemas.microsoft.com/office/powerpoint/2010/main" val="1579011935"/>
+              </p:ext>
+            </p:extLst>
+          </p:nvPr>
+        </p:nvGraphicFramePr>
+        <p:xfrm>
+          <a:off x="4663440" y="1051560"/>
+          <a:ext cx="4251960" cy="914400"/>
+        </p:xfrm>
+        <a:graphic>
+          <a:graphicData uri="http://schemas.openxmlformats.org/drawingml/2006/table">
+            <a:tbl>
+              <a:tblPr/>
+              <a:tblGrid>
+                <a:gridCol w="1417320"/>
+                <a:gridCol w="502920"/>
+                <a:gridCol w="2331720"/>
+              </a:tblGrid>
+              <a:tr h="457200">
+                <a:tc>
+                  <a:txBody>
+                    <a:bodyPr/>
+                    <a:lstStyle/>
+                    <a:p>
+                      <a:pPr algn="ctr" indent="0" marL="0">
+                        <a:buNone/>
+                      </a:pPr>
+                      <a:r>
+                        <a:rPr lang="en-US" sz="1000" b="1" dirty="0">
+                          <a:solidFill>
+                            <a:srgbClr val="000000"/>
+                          </a:solidFill>
+                          <a:latin typeface="Calibri" pitchFamily="34" charset="0"/>
+                          <a:ea typeface="Calibri" pitchFamily="34" charset="-122"/>
+                          <a:cs typeface="Calibri" pitchFamily="34" charset="-120"/>
+                        </a:rPr>
+                        <a:t>Kind</a:t>
+                      </a:r>
+                      <a:endParaRPr lang="en-US" sz="1000" dirty="0">
+                        <a:latin typeface="Calibri" charset="0"/>
+                        <a:ea typeface="Calibri" charset="0"/>
+                        <a:cs typeface="Calibri" charset="0"/>
+                      </a:endParaRPr>
+                    </a:p>
+                  </a:txBody>
+                  <a:tcPr marL="54864" marR="54864" marT="54864" marB="54864" anchor="ctr">
+                    <a:lnL w="0" cap="flat" cmpd="sng" algn="ctr">
+                      <a:noFill/>
+                    </a:lnL>
+                    <a:lnR w="0" cap="flat" cmpd="sng" algn="ctr">
+                      <a:noFill/>
+                    </a:lnR>
+                    <a:lnT w="0" cap="flat" cmpd="sng" algn="ctr">
+                      <a:noFill/>
+                    </a:lnT>
+                    <a:lnB w="0" cap="flat" cmpd="sng" algn="ctr">
+                      <a:noFill/>
+                    </a:lnB>
+                    <a:solidFill>
+                      <a:srgbClr val="F0F0F0"/>
+                    </a:solidFill>
+                  </a:tcPr>
+                </a:tc>
+                <a:tc>
+                  <a:txBody>
+                    <a:bodyPr/>
+                    <a:lstStyle/>
+                    <a:p>
+                      <a:pPr algn="ctr" indent="0" marL="0">
+                        <a:buNone/>
+                      </a:pPr>
+                      <a:r>
+                        <a:rPr lang="en-US" sz="1000" b="1" dirty="0">
+                          <a:solidFill>
+                            <a:srgbClr val="000000"/>
+                          </a:solidFill>
+                          <a:latin typeface="Calibri" pitchFamily="34" charset="0"/>
+                          <a:ea typeface="Calibri" pitchFamily="34" charset="-122"/>
+                          <a:cs typeface="Calibri" pitchFamily="34" charset="-120"/>
+                        </a:rPr>
+                        <a:t>DPs</a:t>
+                      </a:r>
+                      <a:endParaRPr lang="en-US" sz="1000" dirty="0">
+                        <a:latin typeface="Calibri" charset="0"/>
+                        <a:ea typeface="Calibri" charset="0"/>
+                        <a:cs typeface="Calibri" charset="0"/>
+                      </a:endParaRPr>
+                    </a:p>
+                  </a:txBody>
+                  <a:tcPr marL="54864" marR="54864" marT="54864" marB="54864" anchor="ctr">
+                    <a:lnL w="0" cap="flat" cmpd="sng" algn="ctr">
+                      <a:noFill/>
+                    </a:lnL>
+                    <a:lnR w="0" cap="flat" cmpd="sng" algn="ctr">
+                      <a:noFill/>
+                    </a:lnR>
+                    <a:lnT w="0" cap="flat" cmpd="sng" algn="ctr">
+                      <a:noFill/>
+                    </a:lnT>
+                    <a:lnB w="0" cap="flat" cmpd="sng" algn="ctr">
+                      <a:noFill/>
+                    </a:lnB>
+                    <a:solidFill>
+                      <a:srgbClr val="F0F0F0"/>
+                    </a:solidFill>
+                  </a:tcPr>
+                </a:tc>
+                <a:tc>
+                  <a:txBody>
+                    <a:bodyPr/>
+                    <a:lstStyle/>
+                    <a:p>
+                      <a:pPr algn="ctr" indent="0" marL="0">
+                        <a:buNone/>
+                      </a:pPr>
+                      <a:r>
+                        <a:rPr lang="en-US" sz="1000" b="1" dirty="0">
+                          <a:solidFill>
+                            <a:srgbClr val="000000"/>
+                          </a:solidFill>
+                          <a:latin typeface="Calibri" pitchFamily="34" charset="0"/>
+                          <a:ea typeface="Calibri" pitchFamily="34" charset="-122"/>
+                          <a:cs typeface="Calibri" pitchFamily="34" charset="-120"/>
+                        </a:rPr>
+                        <a:t>Why under-fires</a:t>
+                      </a:r>
+                      <a:endParaRPr lang="en-US" sz="1000" dirty="0">
+                        <a:latin typeface="Calibri" charset="0"/>
+                        <a:ea typeface="Calibri" charset="0"/>
+                        <a:cs typeface="Calibri" charset="0"/>
+                      </a:endParaRPr>
+                    </a:p>
+                  </a:txBody>
+                  <a:tcPr marL="54864" marR="54864" marT="54864" marB="54864" anchor="ctr">
+                    <a:lnL w="0" cap="flat" cmpd="sng" algn="ctr">
+                      <a:noFill/>
+                    </a:lnL>
+                    <a:lnR w="0" cap="flat" cmpd="sng" algn="ctr">
+                      <a:noFill/>
+                    </a:lnR>
+                    <a:lnT w="0" cap="flat" cmpd="sng" algn="ctr">
+                      <a:noFill/>
+                    </a:lnT>
+                    <a:lnB w="0" cap="flat" cmpd="sng" algn="ctr">
+                      <a:noFill/>
+                    </a:lnB>
+                    <a:solidFill>
+                      <a:srgbClr val="F0F0F0"/>
+                    </a:solidFill>
+                  </a:tcPr>
+                </a:tc>
+              </a:tr>
+              <a:tr h="457200">
+                <a:tc>
+                  <a:txBody>
+                    <a:bodyPr/>
+                    <a:lstStyle/>
+                    <a:p>
+                      <a:pPr algn="l" indent="0" marL="0">
+                        <a:buNone/>
+                      </a:pPr>
+                      <a:r>
+                        <a:rPr lang="en-US" sz="1100" b="1" dirty="0">
+                          <a:solidFill>
+                            <a:srgbClr val="000000"/>
+                          </a:solidFill>
+                          <a:latin typeface="Calibri" pitchFamily="34" charset="0"/>
+                          <a:ea typeface="Calibri" pitchFamily="34" charset="-122"/>
+                          <a:cs typeface="Calibri" pitchFamily="34" charset="-120"/>
+                        </a:rPr>
+                        <a:t>Manual-Refactor</a:t>
+                      </a:r>
+                      <a:endParaRPr lang="en-US" sz="1100" dirty="0">
+                        <a:latin typeface="Calibri" charset="0"/>
+                        <a:ea typeface="Calibri" charset="0"/>
+                        <a:cs typeface="Calibri" charset="0"/>
+                      </a:endParaRPr>
+                    </a:p>
+                  </a:txBody>
+                  <a:tcPr marL="54864" marR="54864" marT="54864" marB="54864" anchor="ctr">
+                    <a:lnL w="0" cap="flat" cmpd="sng" algn="ctr">
+                      <a:noFill/>
+                    </a:lnL>
+                    <a:lnR w="0" cap="flat" cmpd="sng" algn="ctr">
+                      <a:noFill/>
+                    </a:lnR>
+                    <a:lnT w="0" cap="flat" cmpd="sng" algn="ctr">
+                      <a:noFill/>
+                    </a:lnT>
+                    <a:lnB w="0" cap="flat" cmpd="sng" algn="ctr">
+                      <a:noFill/>
+                    </a:lnB>
+                  </a:tcPr>
+                </a:tc>
+                <a:tc>
+                  <a:txBody>
+                    <a:bodyPr/>
+                    <a:lstStyle/>
+                    <a:p>
+                      <a:pPr algn="ctr" indent="0" marL="0">
+                        <a:buNone/>
+                      </a:pPr>
+                      <a:r>
+                        <a:rPr lang="en-US" sz="1600" b="1" dirty="0">
+                          <a:solidFill>
+                            <a:srgbClr val="0A7D2A"/>
+                          </a:solidFill>
+                          <a:latin typeface="Calibri" pitchFamily="34" charset="0"/>
+                          <a:ea typeface="Calibri" pitchFamily="34" charset="-122"/>
+                          <a:cs typeface="Calibri" pitchFamily="34" charset="-120"/>
+                        </a:rPr>
+                        <a:t>41</a:t>
+                      </a:r>
+                      <a:endParaRPr lang="en-US" sz="1600" dirty="0">
+                        <a:latin typeface="Calibri" charset="0"/>
+                        <a:ea typeface="Calibri" charset="0"/>
+                        <a:cs typeface="Calibri" charset="0"/>
+                      </a:endParaRPr>
+                    </a:p>
+                  </a:txBody>
+                  <a:tcPr marL="54864" marR="54864" marT="54864" marB="54864" anchor="ctr">
+                    <a:lnL w="0" cap="flat" cmpd="sng" algn="ctr">
+                      <a:noFill/>
+                    </a:lnL>
+                    <a:lnR w="0" cap="flat" cmpd="sng" algn="ctr">
+                      <a:noFill/>
+                    </a:lnR>
+                    <a:lnT w="0" cap="flat" cmpd="sng" algn="ctr">
+                      <a:noFill/>
+                    </a:lnT>
+                    <a:lnB w="0" cap="flat" cmpd="sng" algn="ctr">
+                      <a:noFill/>
+                    </a:lnB>
+                  </a:tcPr>
+                </a:tc>
+                <a:tc>
+                  <a:txBody>
+                    <a:bodyPr/>
+                    <a:lstStyle/>
+                    <a:p>
+                      <a:pPr algn="l" indent="0" marL="0">
+                        <a:buNone/>
+                      </a:pPr>
+                      <a:r>
+                        <a:rPr lang="en-US" sz="1000" dirty="0">
+                          <a:solidFill>
+                            <a:srgbClr val="555555"/>
+                          </a:solidFill>
+                          <a:latin typeface="Calibri" pitchFamily="34" charset="0"/>
+                          <a:ea typeface="Calibri" pitchFamily="34" charset="-122"/>
+                          <a:cs typeface="Calibri" pitchFamily="34" charset="-120"/>
+                        </a:rPr>
+                        <a:t>text edits, not IDE menu</a:t>
+                      </a:r>
+                      <a:endParaRPr lang="en-US" sz="1000" dirty="0">
+                        <a:latin typeface="Calibri" charset="0"/>
+                        <a:ea typeface="Calibri" charset="0"/>
+                        <a:cs typeface="Calibri" charset="0"/>
+                      </a:endParaRPr>
+                    </a:p>
+                  </a:txBody>
+                  <a:tcPr marL="54864" marR="54864" marT="54864" marB="54864" anchor="ctr">
+                    <a:lnL w="0" cap="flat" cmpd="sng" algn="ctr">
+                      <a:noFill/>
+                    </a:lnL>
+                    <a:lnR w="0" cap="flat" cmpd="sng" algn="ctr">
+                      <a:noFill/>
+                    </a:lnR>
+                    <a:lnT w="0" cap="flat" cmpd="sng" algn="ctr">
+                      <a:noFill/>
+                    </a:lnT>
+                    <a:lnB w="0" cap="flat" cmpd="sng" algn="ctr">
+                      <a:noFill/>
+                    </a:lnB>
+                  </a:tcPr>
+                </a:tc>
+              </a:tr>
+              <a:tr h="457200">
+                <a:tc>
+                  <a:txBody>
+                    <a:bodyPr/>
+                    <a:lstStyle/>
+                    <a:p>
+                      <a:pPr algn="l" indent="0" marL="0">
+                        <a:buNone/>
+                      </a:pPr>
+                      <a:r>
+                        <a:rPr lang="en-US" sz="1100" b="1" dirty="0">
+                          <a:solidFill>
+                            <a:srgbClr val="000000"/>
+                          </a:solidFill>
+                          <a:latin typeface="Calibri" pitchFamily="34" charset="0"/>
+                          <a:ea typeface="Calibri" pitchFamily="34" charset="-122"/>
+                          <a:cs typeface="Calibri" pitchFamily="34" charset="-120"/>
+                        </a:rPr>
+                        <a:t>Hygiene</a:t>
+                      </a:r>
+                      <a:endParaRPr lang="en-US" sz="1100" dirty="0">
+                        <a:latin typeface="Calibri" charset="0"/>
+                        <a:ea typeface="Calibri" charset="0"/>
+                        <a:cs typeface="Calibri" charset="0"/>
+                      </a:endParaRPr>
+                    </a:p>
+                  </a:txBody>
+                  <a:tcPr marL="54864" marR="54864" marT="54864" marB="54864" anchor="ctr">
+                    <a:lnL w="0" cap="flat" cmpd="sng" algn="ctr">
+                      <a:noFill/>
+                    </a:lnL>
+                    <a:lnR w="0" cap="flat" cmpd="sng" algn="ctr">
+                      <a:noFill/>
+                    </a:lnR>
+                    <a:lnT w="0" cap="flat" cmpd="sng" algn="ctr">
+                      <a:noFill/>
+                    </a:lnT>
+                    <a:lnB w="0" cap="flat" cmpd="sng" algn="ctr">
+                      <a:noFill/>
+                    </a:lnB>
+                  </a:tcPr>
+                </a:tc>
+                <a:tc>
+                  <a:txBody>
+                    <a:bodyPr/>
+                    <a:lstStyle/>
+                    <a:p>
+                      <a:pPr algn="ctr" indent="0" marL="0">
+                        <a:buNone/>
+                      </a:pPr>
+                      <a:r>
+                        <a:rPr lang="en-US" sz="1400" dirty="0">
+                          <a:solidFill>
+                            <a:srgbClr val="999999"/>
+                          </a:solidFill>
+                          <a:latin typeface="Calibri" pitchFamily="34" charset="0"/>
+                          <a:ea typeface="Calibri" pitchFamily="34" charset="-122"/>
+                          <a:cs typeface="Calibri" pitchFamily="34" charset="-120"/>
+                        </a:rPr>
+                        <a:t>0</a:t>
+                      </a:r>
+                      <a:endParaRPr lang="en-US" sz="1400" dirty="0">
+                        <a:latin typeface="Calibri" charset="0"/>
+                        <a:ea typeface="Calibri" charset="0"/>
+                        <a:cs typeface="Calibri" charset="0"/>
+                      </a:endParaRPr>
+                    </a:p>
+                  </a:txBody>
+                  <a:tcPr marL="54864" marR="54864" marT="54864" marB="54864" anchor="ctr">
+                    <a:lnL w="0" cap="flat" cmpd="sng" algn="ctr">
+                      <a:noFill/>
+                    </a:lnL>
+                    <a:lnR w="0" cap="flat" cmpd="sng" algn="ctr">
+                      <a:noFill/>
+                    </a:lnR>
+                    <a:lnT w="0" cap="flat" cmpd="sng" algn="ctr">
+                      <a:noFill/>
+                    </a:lnT>
+                    <a:lnB w="0" cap="flat" cmpd="sng" algn="ctr">
+                      <a:noFill/>
+                    </a:lnB>
+                  </a:tcPr>
+                </a:tc>
+                <a:tc>
+                  <a:txBody>
+                    <a:bodyPr/>
+                    <a:lstStyle/>
+                    <a:p>
+                      <a:pPr algn="l" indent="0" marL="0">
+                        <a:buNone/>
+                      </a:pPr>
+                      <a:r>
+                        <a:rPr lang="en-US" sz="1000" dirty="0">
+                          <a:solidFill>
+                            <a:srgbClr val="555555"/>
+                          </a:solidFill>
+                          <a:latin typeface="Calibri" pitchFamily="34" charset="0"/>
+                          <a:ea typeface="Calibri" pitchFamily="34" charset="-122"/>
+                          <a:cs typeface="Calibri" pitchFamily="34" charset="-120"/>
+                        </a:rPr>
+                        <a:t>batched commits don't trip threshold</a:t>
+                      </a:r>
+                      <a:endParaRPr lang="en-US" sz="1000" dirty="0">
+                        <a:latin typeface="Calibri" charset="0"/>
+                        <a:ea typeface="Calibri" charset="0"/>
+                        <a:cs typeface="Calibri" charset="0"/>
+                      </a:endParaRPr>
+                    </a:p>
+                  </a:txBody>
+                  <a:tcPr marL="54864" marR="54864" marT="54864" marB="54864" anchor="ctr">
+                    <a:lnL w="0" cap="flat" cmpd="sng" algn="ctr">
+                      <a:noFill/>
+                    </a:lnL>
+                    <a:lnR w="0" cap="flat" cmpd="sng" algn="ctr">
+                      <a:noFill/>
+                    </a:lnR>
+                    <a:lnT w="0" cap="flat" cmpd="sng" algn="ctr">
+                      <a:noFill/>
+                    </a:lnT>
+                    <a:lnB w="0" cap="flat" cmpd="sng" algn="ctr">
+                      <a:noFill/>
+                    </a:lnB>
+                  </a:tcPr>
+                </a:tc>
+              </a:tr>
+              <a:tr h="457200">
+                <a:tc>
+                  <a:txBody>
+                    <a:bodyPr/>
+                    <a:lstStyle/>
+                    <a:p>
+                      <a:pPr algn="l" indent="0" marL="0">
+                        <a:buNone/>
+                      </a:pPr>
+                      <a:r>
+                        <a:rPr lang="en-US" sz="1100" b="1" dirty="0">
+                          <a:solidFill>
+                            <a:srgbClr val="000000"/>
+                          </a:solidFill>
+                          <a:latin typeface="Calibri" pitchFamily="34" charset="0"/>
+                          <a:ea typeface="Calibri" pitchFamily="34" charset="-122"/>
+                          <a:cs typeface="Calibri" pitchFamily="34" charset="-120"/>
+                        </a:rPr>
+                        <a:t>Rework</a:t>
+                      </a:r>
+                      <a:endParaRPr lang="en-US" sz="1100" dirty="0">
+                        <a:latin typeface="Calibri" charset="0"/>
+                        <a:ea typeface="Calibri" charset="0"/>
+                        <a:cs typeface="Calibri" charset="0"/>
+                      </a:endParaRPr>
+                    </a:p>
+                  </a:txBody>
+                  <a:tcPr marL="54864" marR="54864" marT="54864" marB="54864" anchor="ctr">
+                    <a:lnL w="0" cap="flat" cmpd="sng" algn="ctr">
+                      <a:noFill/>
+                    </a:lnL>
+                    <a:lnR w="0" cap="flat" cmpd="sng" algn="ctr">
+                      <a:noFill/>
+                    </a:lnR>
+                    <a:lnT w="0" cap="flat" cmpd="sng" algn="ctr">
+                      <a:noFill/>
+                    </a:lnT>
+                    <a:lnB w="0" cap="flat" cmpd="sng" algn="ctr">
+                      <a:noFill/>
+                    </a:lnB>
+                  </a:tcPr>
+                </a:tc>
+                <a:tc>
+                  <a:txBody>
+                    <a:bodyPr/>
+                    <a:lstStyle/>
+                    <a:p>
+                      <a:pPr algn="ctr" indent="0" marL="0">
+                        <a:buNone/>
+                      </a:pPr>
+                      <a:r>
+                        <a:rPr lang="en-US" sz="1400" dirty="0">
+                          <a:solidFill>
+                            <a:srgbClr val="999999"/>
+                          </a:solidFill>
+                          <a:latin typeface="Calibri" pitchFamily="34" charset="0"/>
+                          <a:ea typeface="Calibri" pitchFamily="34" charset="-122"/>
+                          <a:cs typeface="Calibri" pitchFamily="34" charset="-120"/>
+                        </a:rPr>
+                        <a:t>0</a:t>
+                      </a:r>
+                      <a:endParaRPr lang="en-US" sz="1400" dirty="0">
+                        <a:latin typeface="Calibri" charset="0"/>
+                        <a:ea typeface="Calibri" charset="0"/>
+                        <a:cs typeface="Calibri" charset="0"/>
+                      </a:endParaRPr>
+                    </a:p>
+                  </a:txBody>
+                  <a:tcPr marL="54864" marR="54864" marT="54864" marB="54864" anchor="ctr">
+                    <a:lnL w="0" cap="flat" cmpd="sng" algn="ctr">
+                      <a:noFill/>
+                    </a:lnL>
+                    <a:lnR w="0" cap="flat" cmpd="sng" algn="ctr">
+                      <a:noFill/>
+                    </a:lnR>
+                    <a:lnT w="0" cap="flat" cmpd="sng" algn="ctr">
+                      <a:noFill/>
+                    </a:lnT>
+                    <a:lnB w="0" cap="flat" cmpd="sng" algn="ctr">
+                      <a:noFill/>
+                    </a:lnB>
+                  </a:tcPr>
+                </a:tc>
+                <a:tc>
+                  <a:txBody>
+                    <a:bodyPr/>
+                    <a:lstStyle/>
+                    <a:p>
+                      <a:pPr algn="l" indent="0" marL="0">
+                        <a:buNone/>
+                      </a:pPr>
+                      <a:r>
+                        <a:rPr lang="en-US" sz="1000" dirty="0">
+                          <a:solidFill>
+                            <a:srgbClr val="555555"/>
+                          </a:solidFill>
+                          <a:latin typeface="Calibri" pitchFamily="34" charset="0"/>
+                          <a:ea typeface="Calibri" pitchFamily="34" charset="-122"/>
+                          <a:cs typeface="Calibri" pitchFamily="34" charset="-120"/>
+                        </a:rPr>
+                        <a:t>edit bursts collapse to one</a:t>
+                      </a:r>
+                      <a:endParaRPr lang="en-US" sz="1000" dirty="0">
+                        <a:latin typeface="Calibri" charset="0"/>
+                        <a:ea typeface="Calibri" charset="0"/>
+                        <a:cs typeface="Calibri" charset="0"/>
+                      </a:endParaRPr>
+                    </a:p>
+                  </a:txBody>
+                  <a:tcPr marL="54864" marR="54864" marT="54864" marB="54864" anchor="ctr">
+                    <a:lnL w="0" cap="flat" cmpd="sng" algn="ctr">
+                      <a:noFill/>
+                    </a:lnL>
+                    <a:lnR w="0" cap="flat" cmpd="sng" algn="ctr">
+                      <a:noFill/>
+                    </a:lnR>
+                    <a:lnT w="0" cap="flat" cmpd="sng" algn="ctr">
+                      <a:noFill/>
+                    </a:lnT>
+                    <a:lnB w="0" cap="flat" cmpd="sng" algn="ctr">
+                      <a:noFill/>
+                    </a:lnB>
+                  </a:tcPr>
+                </a:tc>
+              </a:tr>
+              <a:tr h="457200">
+                <a:tc>
+                  <a:txBody>
+                    <a:bodyPr/>
+                    <a:lstStyle/>
+                    <a:p>
+                      <a:pPr algn="l" indent="0" marL="0">
+                        <a:buNone/>
+                      </a:pPr>
+                      <a:r>
+                        <a:rPr lang="en-US" sz="1100" b="1" dirty="0">
+                          <a:solidFill>
+                            <a:srgbClr val="000000"/>
+                          </a:solidFill>
+                          <a:latin typeface="Calibri" pitchFamily="34" charset="0"/>
+                          <a:ea typeface="Calibri" pitchFamily="34" charset="-122"/>
+                          <a:cs typeface="Calibri" pitchFamily="34" charset="-120"/>
+                        </a:rPr>
+                        <a:t>Ordering</a:t>
+                      </a:r>
+                      <a:endParaRPr lang="en-US" sz="1100" dirty="0">
+                        <a:latin typeface="Calibri" charset="0"/>
+                        <a:ea typeface="Calibri" charset="0"/>
+                        <a:cs typeface="Calibri" charset="0"/>
+                      </a:endParaRPr>
+                    </a:p>
+                  </a:txBody>
+                  <a:tcPr marL="54864" marR="54864" marT="54864" marB="54864" anchor="ctr">
+                    <a:lnL w="0" cap="flat" cmpd="sng" algn="ctr">
+                      <a:noFill/>
+                    </a:lnL>
+                    <a:lnR w="0" cap="flat" cmpd="sng" algn="ctr">
+                      <a:noFill/>
+                    </a:lnR>
+                    <a:lnT w="0" cap="flat" cmpd="sng" algn="ctr">
+                      <a:noFill/>
+                    </a:lnT>
+                    <a:lnB w="0" cap="flat" cmpd="sng" algn="ctr">
+                      <a:noFill/>
+                    </a:lnB>
+                  </a:tcPr>
+                </a:tc>
+                <a:tc>
+                  <a:txBody>
+                    <a:bodyPr/>
+                    <a:lstStyle/>
+                    <a:p>
+                      <a:pPr algn="ctr" indent="0" marL="0">
+                        <a:buNone/>
+                      </a:pPr>
+                      <a:r>
+                        <a:rPr lang="en-US" sz="1400" dirty="0">
+                          <a:solidFill>
+                            <a:srgbClr val="999999"/>
+                          </a:solidFill>
+                          <a:latin typeface="Calibri" pitchFamily="34" charset="0"/>
+                          <a:ea typeface="Calibri" pitchFamily="34" charset="-122"/>
+                          <a:cs typeface="Calibri" pitchFamily="34" charset="-120"/>
+                        </a:rPr>
+                        <a:t>1</a:t>
+                      </a:r>
+                      <a:endParaRPr lang="en-US" sz="1400" dirty="0">
+                        <a:latin typeface="Calibri" charset="0"/>
+                        <a:ea typeface="Calibri" charset="0"/>
+                        <a:cs typeface="Calibri" charset="0"/>
+                      </a:endParaRPr>
+                    </a:p>
+                  </a:txBody>
+                  <a:tcPr marL="54864" marR="54864" marT="54864" marB="54864" anchor="ctr">
+                    <a:lnL w="0" cap="flat" cmpd="sng" algn="ctr">
+                      <a:noFill/>
+                    </a:lnL>
+                    <a:lnR w="0" cap="flat" cmpd="sng" algn="ctr">
+                      <a:noFill/>
+                    </a:lnR>
+                    <a:lnT w="0" cap="flat" cmpd="sng" algn="ctr">
+                      <a:noFill/>
+                    </a:lnT>
+                    <a:lnB w="0" cap="flat" cmpd="sng" algn="ctr">
+                      <a:noFill/>
+                    </a:lnB>
+                  </a:tcPr>
+                </a:tc>
+                <a:tc>
+                  <a:txBody>
+                    <a:bodyPr/>
+                    <a:lstStyle/>
+                    <a:p>
+                      <a:pPr algn="l" indent="0" marL="0">
+                        <a:buNone/>
+                      </a:pPr>
+                      <a:r>
+                        <a:rPr lang="en-US" sz="1000" dirty="0">
+                          <a:solidFill>
+                            <a:srgbClr val="555555"/>
+                          </a:solidFill>
+                          <a:latin typeface="Calibri" pitchFamily="34" charset="0"/>
+                          <a:ea typeface="Calibri" pitchFamily="34" charset="-122"/>
+                          <a:cs typeface="Calibri" pitchFamily="34" charset="-120"/>
+                        </a:rPr>
+                        <a:t>same burst-collapse</a:t>
+                      </a:r>
+                      <a:endParaRPr lang="en-US" sz="1000" dirty="0">
+                        <a:latin typeface="Calibri" charset="0"/>
+                        <a:ea typeface="Calibri" charset="0"/>
+                        <a:cs typeface="Calibri" charset="0"/>
+                      </a:endParaRPr>
+                    </a:p>
+                  </a:txBody>
+                  <a:tcPr marL="54864" marR="54864" marT="54864" marB="54864" anchor="ctr">
+                    <a:lnL w="0" cap="flat" cmpd="sng" algn="ctr">
+                      <a:noFill/>
+                    </a:lnL>
+                    <a:lnR w="0" cap="flat" cmpd="sng" algn="ctr">
+                      <a:noFill/>
+                    </a:lnR>
+                    <a:lnT w="0" cap="flat" cmpd="sng" algn="ctr">
+                      <a:noFill/>
+                    </a:lnT>
+                    <a:lnB w="0" cap="flat" cmpd="sng" algn="ctr">
+                      <a:noFill/>
+                    </a:lnB>
+                  </a:tcPr>
+                </a:tc>
+              </a:tr>
+            </a:tbl>
+          </a:graphicData>
+        </a:graphic>
+      </p:graphicFrame>
+      <p:sp>
+        <p:nvSpPr>
+          <p:cNvPr id="6" name="Text 2"/>
+          <p:cNvSpPr/>
+          <p:nvPr/>
+        </p:nvSpPr>
+        <p:spPr>
+          <a:xfrm>
+            <a:off x="457200" y="3931920"/>
+            <a:ext cx="8229600" cy="1097280"/>
+          </a:xfrm>
+          <a:prstGeom prst="rect">
+            <a:avLst/>
+          </a:prstGeom>
+          <a:noFill/>
+          <a:ln/>
+        </p:spPr>
+        <p:txBody>
+          <a:bodyPr wrap="square" lIns="50800" tIns="50800" rIns="50800" bIns="50800" rtlCol="0" anchor="t"/>
+          <a:lstStyle/>
+          <a:p>
+            <a:pPr algn="ctr" indent="0" marL="0">
+              <a:buNone/>
+            </a:pPr>
+            <a:r>
+              <a:rPr lang="en-US" sz="1200" b="1" dirty="0">
+                <a:solidFill>
+                  <a:srgbClr val="000000"/>
+                </a:solidFill>
+              </a:rPr>
+              <a:t>Score is blind to the difference: </a:t>
+            </a:r>
+            <a:pPr algn="ctr" indent="0" marL="0">
+              <a:buNone/>
+            </a:pPr>
+            <a:r>
+              <a:rPr lang="en-US" sz="1200" dirty="0">
+                <a:solidFill>
+                  <a:srgbClr val="000000"/>
+                </a:solidFill>
+              </a:rPr>
+              <a:t>feedback ΔJ </a:t>
+            </a:r>
+            <a:pPr algn="ctr" indent="0" marL="0">
+              <a:buNone/>
+            </a:pPr>
+            <a:r>
+              <a:rPr lang="en-US" sz="1200" b="1" dirty="0">
+                <a:solidFill>
+                  <a:srgbClr val="1F3F6F"/>
+                </a:solidFill>
+              </a:rPr>
+              <a:t>+3.0</a:t>
+            </a:r>
+            <a:pPr algn="ctr" indent="0" marL="0">
+              <a:buNone/>
+            </a:pPr>
+            <a:r>
+              <a:rPr lang="en-US" sz="1200" dirty="0">
+                <a:solidFill>
+                  <a:srgbClr val="000000"/>
+                </a:solidFill>
+              </a:rPr>
+              <a:t> vs baseline </a:t>
+            </a:r>
+            <a:pPr algn="ctr" indent="0" marL="0">
+              <a:buNone/>
+            </a:pPr>
+            <a:r>
+              <a:rPr lang="en-US" sz="1200" b="1" dirty="0">
+                <a:solidFill>
+                  <a:srgbClr val="B25500"/>
+                </a:solidFill>
+              </a:rPr>
+              <a:t>+6.5</a:t>
+            </a:r>
+            <a:pPr algn="ctr" indent="0" marL="0">
+              <a:spcAft>
+                <a:spcPts val="600"/>
+              </a:spcAft>
+              <a:buNone/>
+            </a:pPr>
+            <a:r>
+              <a:rPr lang="en-US" sz="1200" dirty="0">
+                <a:solidFill>
+                  <a:srgbClr val="000000"/>
+                </a:solidFill>
+              </a:rPr>
+              <a:t>. Yet 5 of 6 agents wrote explicit "I'll do X next session" plans citing prior warnings - the detectors just can't see those changes happen.</a:t>
+            </a:r>
+            <a:endParaRPr lang="en-US" sz="1200" dirty="0"/>
+          </a:p>
+          <a:p>
+            <a:pPr algn="ctr" indent="0" marL="0">
+              <a:buNone/>
+            </a:pPr>
+            <a:r>
+              <a:rPr lang="en-US" sz="1200" i="1" dirty="0">
+                <a:solidFill>
+                  <a:srgbClr val="888888"/>
+                </a:solidFill>
+              </a:rPr>
+              <a:t>Scope limit by design - adapting detectors for agent traces is future work.</a:t>
+            </a:r>
+            <a:endParaRPr lang="en-US" sz="1200" dirty="0"/>
+          </a:p>
+        </p:txBody>
+      </p:sp>
+    </p:spTree>
+  </p:cSld>
+  <p:clrMapOvr>
+    <a:masterClrMapping/>
+  </p:clrMapOvr>
+</p:sld>
+</file>
+
+<file path=ppt/slides/slide25.xml><?xml version="1.0" encoding="utf-8"?>
+<p:sld xmlns:a="http://schemas.openxmlformats.org/drawingml/2006/main" xmlns:r="http://schemas.openxmlformats.org/officeDocument/2006/relationships" xmlns:p="http://schemas.openxmlformats.org/presentationml/2006/main">
+  <p:cSld name="Slide 25">
     <p:spTree>
       <p:nvGrpSpPr>
         <p:cNvPr id="1" name=""/>

--- a/presentation/slides.pptx
+++ b/presentation/slides.pptx
@@ -28,11 +28,9 @@
     <p:sldId id="276" r:id="rId22"/>
     <p:sldId id="277" r:id="rId23"/>
     <p:sldId id="278" r:id="rId24"/>
-    <p:sldId id="279" r:id="rId25"/>
-    <p:sldId id="280" r:id="rId26"/>
   </p:sldIdLst>
   <p:notesMasterIdLst>
-    <p:notesMasterId r:id="rId27"/>
+    <p:notesMasterId r:id="rId25"/>
   </p:notesMasterIdLst>
   <p:sldSz cx="9144000" cy="5143500"/>
   <p:notesSz cx="5143500" cy="9144000"/>
@@ -3678,182 +3676,6 @@
             <a:fld id="{F7021451-1387-4CA6-816F-3879F97B5CBC}" type="slidenum">
               <a:rPr lang="en-US"/>
               <a:t>23</a:t>
-            </a:fld>
-            <a:endParaRPr lang="en-US"/>
-          </a:p>
-        </p:txBody>
-      </p:sp>
-    </p:spTree>
-    <p:extLst>
-      <p:ext uri="{BB962C8B-B14F-4D97-AF65-F5344CB8AC3E}">
-        <p14:creationId xmlns:p14="http://schemas.microsoft.com/office/powerpoint/2010/main" val="1024086991"/>
-      </p:ext>
-    </p:extLst>
-  </p:cSld>
-  <p:clrMapOvr>
-    <a:masterClrMapping/>
-  </p:clrMapOvr>
-</p:notes>
-</file>
-
-<file path=ppt/notesSlides/notesSlide24.xml><?xml version="1.0" encoding="utf-8"?>
-<p:notes xmlns:a="http://schemas.openxmlformats.org/drawingml/2006/main" xmlns:r="http://schemas.openxmlformats.org/officeDocument/2006/relationships" xmlns:p="http://schemas.openxmlformats.org/presentationml/2006/main">
-  <p:cSld>
-    <p:spTree>
-      <p:nvGrpSpPr>
-        <p:cNvPr id="1" name=""/>
-        <p:cNvGrpSpPr/>
-        <p:nvPr/>
-      </p:nvGrpSpPr>
-      <p:grpSpPr>
-        <a:xfrm>
-          <a:off x="0" y="0"/>
-          <a:ext cx="0" cy="0"/>
-          <a:chOff x="0" y="0"/>
-          <a:chExt cx="0" cy="0"/>
-        </a:xfrm>
-      </p:grpSpPr>
-      <p:sp>
-        <p:nvSpPr>
-          <p:cNvPr id="2" name="Slide Image Placeholder 1"/>
-          <p:cNvSpPr>
-            <a:spLocks noGrp="1" noRot="1" noChangeAspect="1"/>
-          </p:cNvSpPr>
-          <p:nvPr>
-            <p:ph type="sldImg"/>
-          </p:nvPr>
-        </p:nvSpPr>
-        <p:spPr/>
-      </p:sp>
-      <p:sp>
-        <p:nvSpPr>
-          <p:cNvPr id="3" name="Notes Placeholder 2"/>
-          <p:cNvSpPr>
-            <a:spLocks noGrp="1"/>
-          </p:cNvSpPr>
-          <p:nvPr>
-            <p:ph type="body" idx="1"/>
-          </p:nvPr>
-        </p:nvSpPr>
-        <p:spPr/>
-        <p:txBody>
-          <a:bodyPr/>
-          <a:lstStyle/>
-          <a:p>
-            <a:r>
-              <a:rPr lang="en-US" dirty="0"/>
-              <a:t/>
-            </a:r>
-            <a:endParaRPr lang="en-US" dirty="0"/>
-          </a:p>
-        </p:txBody>
-      </p:sp>
-      <p:sp>
-        <p:nvSpPr>
-          <p:cNvPr id="4" name="Slide Number Placeholder 3"/>
-          <p:cNvSpPr>
-            <a:spLocks noGrp="1"/>
-          </p:cNvSpPr>
-          <p:nvPr>
-            <p:ph type="sldNum" sz="quarter" idx="10"/>
-          </p:nvPr>
-        </p:nvSpPr>
-        <p:spPr/>
-        <p:txBody>
-          <a:bodyPr/>
-          <a:lstStyle/>
-          <a:p>
-            <a:fld id="{F7021451-1387-4CA6-816F-3879F97B5CBC}" type="slidenum">
-              <a:rPr lang="en-US"/>
-              <a:t>24</a:t>
-            </a:fld>
-            <a:endParaRPr lang="en-US"/>
-          </a:p>
-        </p:txBody>
-      </p:sp>
-    </p:spTree>
-    <p:extLst>
-      <p:ext uri="{BB962C8B-B14F-4D97-AF65-F5344CB8AC3E}">
-        <p14:creationId xmlns:p14="http://schemas.microsoft.com/office/powerpoint/2010/main" val="1024086991"/>
-      </p:ext>
-    </p:extLst>
-  </p:cSld>
-  <p:clrMapOvr>
-    <a:masterClrMapping/>
-  </p:clrMapOvr>
-</p:notes>
-</file>
-
-<file path=ppt/notesSlides/notesSlide25.xml><?xml version="1.0" encoding="utf-8"?>
-<p:notes xmlns:a="http://schemas.openxmlformats.org/drawingml/2006/main" xmlns:r="http://schemas.openxmlformats.org/officeDocument/2006/relationships" xmlns:p="http://schemas.openxmlformats.org/presentationml/2006/main">
-  <p:cSld>
-    <p:spTree>
-      <p:nvGrpSpPr>
-        <p:cNvPr id="1" name=""/>
-        <p:cNvGrpSpPr/>
-        <p:nvPr/>
-      </p:nvGrpSpPr>
-      <p:grpSpPr>
-        <a:xfrm>
-          <a:off x="0" y="0"/>
-          <a:ext cx="0" cy="0"/>
-          <a:chOff x="0" y="0"/>
-          <a:chExt cx="0" cy="0"/>
-        </a:xfrm>
-      </p:grpSpPr>
-      <p:sp>
-        <p:nvSpPr>
-          <p:cNvPr id="2" name="Slide Image Placeholder 1"/>
-          <p:cNvSpPr>
-            <a:spLocks noGrp="1" noRot="1" noChangeAspect="1"/>
-          </p:cNvSpPr>
-          <p:nvPr>
-            <p:ph type="sldImg"/>
-          </p:nvPr>
-        </p:nvSpPr>
-        <p:spPr/>
-      </p:sp>
-      <p:sp>
-        <p:nvSpPr>
-          <p:cNvPr id="3" name="Notes Placeholder 2"/>
-          <p:cNvSpPr>
-            <a:spLocks noGrp="1"/>
-          </p:cNvSpPr>
-          <p:nvPr>
-            <p:ph type="body" idx="1"/>
-          </p:nvPr>
-        </p:nvSpPr>
-        <p:spPr/>
-        <p:txBody>
-          <a:bodyPr/>
-          <a:lstStyle/>
-          <a:p>
-            <a:r>
-              <a:rPr lang="en-US" dirty="0"/>
-              <a:t/>
-            </a:r>
-            <a:endParaRPr lang="en-US" dirty="0"/>
-          </a:p>
-        </p:txBody>
-      </p:sp>
-      <p:sp>
-        <p:nvSpPr>
-          <p:cNvPr id="4" name="Slide Number Placeholder 3"/>
-          <p:cNvSpPr>
-            <a:spLocks noGrp="1"/>
-          </p:cNvSpPr>
-          <p:nvPr>
-            <p:ph type="sldNum" sz="quarter" idx="10"/>
-          </p:nvPr>
-        </p:nvSpPr>
-        <p:spPr/>
-        <p:txBody>
-          <a:bodyPr/>
-          <a:lstStyle/>
-          <a:p>
-            <a:fld id="{F7021451-1387-4CA6-816F-3879F97B5CBC}" type="slidenum">
-              <a:rPr lang="en-US"/>
-              <a:t>25</a:t>
             </a:fld>
             <a:endParaRPr lang="en-US"/>
           </a:p>
@@ -5204,185 +5026,6 @@
                   <a:srgbClr val="000000"/>
                 </a:solidFill>
               </a:rPr>
-              <a:t>Manual-Refactor: detect + synthesise</a:t>
-            </a:r>
-            <a:endParaRPr lang="en-US" sz="2800" dirty="0"/>
-          </a:p>
-        </p:txBody>
-      </p:sp>
-      <p:sp>
-        <p:nvSpPr>
-          <p:cNvPr id="3" name="Text 1"/>
-          <p:cNvSpPr/>
-          <p:nvPr/>
-        </p:nvSpPr>
-        <p:spPr>
-          <a:xfrm>
-            <a:off x="457200" y="1097280"/>
-            <a:ext cx="8229600" cy="1691640"/>
-          </a:xfrm>
-          <a:prstGeom prst="rect">
-            <a:avLst/>
-          </a:prstGeom>
-          <a:noFill/>
-          <a:ln/>
-        </p:spPr>
-        <p:txBody>
-          <a:bodyPr wrap="square" rtlCol="0" anchor="t"/>
-          <a:lstStyle/>
-          <a:p>
-            <a:pPr marL="342900" indent="-342900">
-              <a:spcAft>
-                <a:spcPts val="600"/>
-              </a:spcAft>
-              <a:buSzPct val="100000"/>
-              <a:buChar char="•"/>
-            </a:pPr>
-            <a:r>
-              <a:rPr lang="en-US" sz="1300" dirty="0">
-                <a:solidFill>
-                  <a:srgbClr val="000000"/>
-                </a:solidFill>
-              </a:rPr>
-              <a:t>What: developer hand-edited something the IDE could have done safely (and with its precondition checks).</a:t>
-            </a:r>
-            <a:endParaRPr lang="en-US" sz="1300" dirty="0"/>
-          </a:p>
-          <a:p>
-            <a:pPr marL="342900" indent="-342900">
-              <a:spcAft>
-                <a:spcPts val="600"/>
-              </a:spcAft>
-              <a:buSzPct val="100000"/>
-              <a:buChar char="•"/>
-            </a:pPr>
-            <a:r>
-              <a:rPr lang="en-US" sz="1300" dirty="0">
-                <a:solidFill>
-                  <a:srgbClr val="000000"/>
-                </a:solidFill>
-              </a:rPr>
-              <a:t>Detect: run RefactoringMiner on sliding commit windows; cross-check against the IDE event stream - anything RefactoringMiner finds that the IDE did not emit is a manual refactoring.</a:t>
-            </a:r>
-            <a:endParaRPr lang="en-US" sz="1300" dirty="0"/>
-          </a:p>
-          <a:p>
-            <a:pPr marL="342900" indent="-342900">
-              <a:spcAft>
-                <a:spcPts val="600"/>
-              </a:spcAft>
-              <a:buSzPct val="100000"/>
-              <a:buChar char="•"/>
-            </a:pPr>
-            <a:r>
-              <a:rPr lang="en-US" sz="1300" dirty="0">
-                <a:solidFill>
-                  <a:srgbClr val="000000"/>
-                </a:solidFill>
-              </a:rPr>
-              <a:t>Synthesise: apply the equivalent IDE refactoring, then three-way merge the user's other edits back on top.</a:t>
-            </a:r>
-            <a:endParaRPr lang="en-US" sz="1300" dirty="0"/>
-          </a:p>
-          <a:p>
-            <a:pPr marL="342900" indent="-342900">
-              <a:spcAft>
-                <a:spcPts val="600"/>
-              </a:spcAft>
-              <a:buSzPct val="100000"/>
-              <a:buChar char="•"/>
-            </a:pPr>
-            <a:r>
-              <a:rPr lang="en-US" sz="1300" dirty="0">
-                <a:solidFill>
-                  <a:srgbClr val="000000"/>
-                </a:solidFill>
-              </a:rPr>
-              <a:t>Wrap-and-patch layer reconciles minor JDT ↔ IntelliJ AST differences (e.g. static modifiers, variable liveness).</a:t>
-            </a:r>
-            <a:endParaRPr lang="en-US" sz="1300" dirty="0"/>
-          </a:p>
-        </p:txBody>
-      </p:sp>
-      <p:pic>
-        <p:nvPicPr>
-          <p:cNvPr id="4" name="Image 0" descr="images/manual-refactor.png">    </p:cNvPr>
-          <p:cNvPicPr>
-            <a:picLocks noChangeAspect="1"/>
-          </p:cNvPicPr>
-          <p:nvPr/>
-        </p:nvPicPr>
-        <p:blipFill>
-          <a:blip r:embed="rId1"/>
-          <a:stretch>
-            <a:fillRect/>
-          </a:stretch>
-        </p:blipFill>
-        <p:spPr>
-          <a:xfrm>
-            <a:off x="1463040" y="2880360"/>
-            <a:ext cx="6217920" cy="2039112"/>
-          </a:xfrm>
-          <a:prstGeom prst="rect">
-            <a:avLst/>
-          </a:prstGeom>
-        </p:spPr>
-      </p:pic>
-    </p:spTree>
-  </p:cSld>
-  <p:clrMapOvr>
-    <a:masterClrMapping/>
-  </p:clrMapOvr>
-</p:sld>
-</file>
-
-<file path=ppt/slides/slide12.xml><?xml version="1.0" encoding="utf-8"?>
-<p:sld xmlns:a="http://schemas.openxmlformats.org/drawingml/2006/main" xmlns:r="http://schemas.openxmlformats.org/officeDocument/2006/relationships" xmlns:p="http://schemas.openxmlformats.org/presentationml/2006/main">
-  <p:cSld name="Slide 12">
-    <p:spTree>
-      <p:nvGrpSpPr>
-        <p:cNvPr id="1" name=""/>
-        <p:cNvGrpSpPr/>
-        <p:nvPr/>
-      </p:nvGrpSpPr>
-      <p:grpSpPr>
-        <a:xfrm>
-          <a:off x="0" y="0"/>
-          <a:ext cx="0" cy="0"/>
-          <a:chOff x="0" y="0"/>
-          <a:chExt cx="0" cy="0"/>
-        </a:xfrm>
-      </p:grpSpPr>
-      <p:sp>
-        <p:nvSpPr>
-          <p:cNvPr id="2" name="Text 0"/>
-          <p:cNvSpPr/>
-          <p:nvPr/>
-        </p:nvSpPr>
-        <p:spPr>
-          <a:xfrm>
-            <a:off x="457200" y="274320"/>
-            <a:ext cx="8229600" cy="640080"/>
-          </a:xfrm>
-          <a:prstGeom prst="rect">
-            <a:avLst/>
-          </a:prstGeom>
-          <a:noFill/>
-          <a:ln/>
-        </p:spPr>
-        <p:txBody>
-          <a:bodyPr wrap="square" lIns="0" tIns="0" rIns="0" bIns="0" rtlCol="0" anchor="ctr"/>
-          <a:lstStyle/>
-          <a:p>
-            <a:pPr indent="0" marL="0">
-              <a:buNone/>
-            </a:pPr>
-            <a:r>
-              <a:rPr lang="en-US" sz="2800" b="1" dirty="0">
-                <a:solidFill>
-                  <a:srgbClr val="000000"/>
-                </a:solidFill>
-              </a:rPr>
               <a:t>Rework: detect + synthesise</a:t>
             </a:r>
             <a:endParaRPr lang="en-US" sz="2800" dirty="0"/>
@@ -5515,6 +5158,179 @@
 </p:sld>
 </file>
 
+<file path=ppt/slides/slide12.xml><?xml version="1.0" encoding="utf-8"?>
+<p:sld xmlns:a="http://schemas.openxmlformats.org/drawingml/2006/main" xmlns:r="http://schemas.openxmlformats.org/officeDocument/2006/relationships" xmlns:p="http://schemas.openxmlformats.org/presentationml/2006/main">
+  <p:cSld name="Slide 12">
+    <p:spTree>
+      <p:nvGrpSpPr>
+        <p:cNvPr id="1" name=""/>
+        <p:cNvGrpSpPr/>
+        <p:nvPr/>
+      </p:nvGrpSpPr>
+      <p:grpSpPr>
+        <a:xfrm>
+          <a:off x="0" y="0"/>
+          <a:ext cx="0" cy="0"/>
+          <a:chOff x="0" y="0"/>
+          <a:chExt cx="0" cy="0"/>
+        </a:xfrm>
+      </p:grpSpPr>
+      <p:sp>
+        <p:nvSpPr>
+          <p:cNvPr id="2" name="Text 0"/>
+          <p:cNvSpPr/>
+          <p:nvPr/>
+        </p:nvSpPr>
+        <p:spPr>
+          <a:xfrm>
+            <a:off x="457200" y="274320"/>
+            <a:ext cx="8229600" cy="640080"/>
+          </a:xfrm>
+          <a:prstGeom prst="rect">
+            <a:avLst/>
+          </a:prstGeom>
+          <a:noFill/>
+          <a:ln/>
+        </p:spPr>
+        <p:txBody>
+          <a:bodyPr wrap="square" lIns="0" tIns="0" rIns="0" bIns="0" rtlCol="0" anchor="ctr"/>
+          <a:lstStyle/>
+          <a:p>
+            <a:pPr indent="0" marL="0">
+              <a:buNone/>
+            </a:pPr>
+            <a:r>
+              <a:rPr lang="en-US" sz="2800" b="1" dirty="0">
+                <a:solidFill>
+                  <a:srgbClr val="000000"/>
+                </a:solidFill>
+              </a:rPr>
+              <a:t>Hygiene: detect + synthesise</a:t>
+            </a:r>
+            <a:endParaRPr lang="en-US" sz="2800" dirty="0"/>
+          </a:p>
+        </p:txBody>
+      </p:sp>
+      <p:sp>
+        <p:nvSpPr>
+          <p:cNvPr id="3" name="Text 1"/>
+          <p:cNvSpPr/>
+          <p:nvPr/>
+        </p:nvSpPr>
+        <p:spPr>
+          <a:xfrm>
+            <a:off x="457200" y="1188720"/>
+            <a:ext cx="8229600" cy="3657600"/>
+          </a:xfrm>
+          <a:prstGeom prst="rect">
+            <a:avLst/>
+          </a:prstGeom>
+          <a:noFill/>
+          <a:ln/>
+        </p:spPr>
+        <p:txBody>
+          <a:bodyPr wrap="square" rtlCol="0" anchor="t"/>
+          <a:lstStyle/>
+          <a:p>
+            <a:pPr marL="342900" indent="-342900">
+              <a:spcAft>
+                <a:spcPts val="600"/>
+              </a:spcAft>
+              <a:buSzPct val="100000"/>
+              <a:buChar char="•"/>
+            </a:pPr>
+            <a:r>
+              <a:rPr lang="en-US" sz="1600" dirty="0">
+                <a:solidFill>
+                  <a:srgbClr val="000000"/>
+                </a:solidFill>
+              </a:rPr>
+              <a:t>What: long stretches of work without safety checkpoints - no test runs, no commits.</a:t>
+            </a:r>
+            <a:endParaRPr lang="en-US" sz="1600" dirty="0"/>
+          </a:p>
+          <a:p>
+            <a:pPr marL="342900" indent="-342900">
+              <a:spcAft>
+                <a:spcPts val="600"/>
+              </a:spcAft>
+              <a:buSzPct val="100000"/>
+              <a:buChar char="•"/>
+            </a:pPr>
+            <a:r>
+              <a:rPr lang="en-US" sz="1600" dirty="0">
+                <a:solidFill>
+                  <a:srgbClr val="000000"/>
+                </a:solidFill>
+              </a:rPr>
+              <a:t>Detect: 60-second windows with no test-run events; commit-gap events when commits are spaced beyond threshold.</a:t>
+            </a:r>
+            <a:endParaRPr lang="en-US" sz="1600" dirty="0"/>
+          </a:p>
+          <a:p>
+            <a:pPr marL="342900" indent="-342900">
+              <a:spcAft>
+                <a:spcPts val="600"/>
+              </a:spcAft>
+              <a:buSzPct val="100000"/>
+              <a:buChar char="•"/>
+            </a:pPr>
+            <a:r>
+              <a:rPr lang="en-US" sz="1600" dirty="0">
+                <a:solidFill>
+                  <a:srgbClr val="000000"/>
+                </a:solidFill>
+              </a:rPr>
+              <a:t>Synthesise: model an alternative cadence that inserts test-run and commit events at the right points.</a:t>
+            </a:r>
+            <a:endParaRPr lang="en-US" sz="1600" dirty="0"/>
+          </a:p>
+          <a:p>
+            <a:pPr marL="342900" indent="-342900">
+              <a:spcAft>
+                <a:spcPts val="600"/>
+              </a:spcAft>
+              <a:buSzPct val="100000"/>
+              <a:buChar char="•"/>
+            </a:pPr>
+            <a:r>
+              <a:rPr lang="en-US" sz="1600" dirty="0">
+                <a:solidFill>
+                  <a:srgbClr val="000000"/>
+                </a:solidFill>
+              </a:rPr>
+              <a:t>The alternative's J(τ) credits those checkpoints via the skip-tests and commit-gap terms.</a:t>
+            </a:r>
+            <a:endParaRPr lang="en-US" sz="1600" dirty="0"/>
+          </a:p>
+          <a:p>
+            <a:pPr marL="342900" indent="-342900">
+              <a:spcAft>
+                <a:spcPts val="600"/>
+              </a:spcAft>
+              <a:buSzPct val="100000"/>
+              <a:buChar char="•"/>
+            </a:pPr>
+            <a:r>
+              <a:rPr lang="en-US" sz="1600" dirty="0">
+                <a:solidFill>
+                  <a:srgbClr val="000000"/>
+                </a:solidFill>
+              </a:rPr>
+              <a:t>Cheap to compute, but consistently surfaces meaningful divergences in the user study.</a:t>
+            </a:r>
+            <a:endParaRPr lang="en-US" sz="1600" dirty="0"/>
+          </a:p>
+        </p:txBody>
+      </p:sp>
+    </p:spTree>
+  </p:cSld>
+  <p:clrMapOvr>
+    <a:masterClrMapping/>
+  </p:clrMapOvr>
+</p:sld>
+</file>
+
 <file path=ppt/slides/slide13.xml><?xml version="1.0" encoding="utf-8"?>
 <p:sld xmlns:a="http://schemas.openxmlformats.org/drawingml/2006/main" xmlns:r="http://schemas.openxmlformats.org/officeDocument/2006/relationships" xmlns:p="http://schemas.openxmlformats.org/presentationml/2006/main">
   <p:cSld name="Slide 13">
@@ -5562,352 +5378,6 @@
                   <a:srgbClr val="000000"/>
                 </a:solidFill>
               </a:rPr>
-              <a:t>Hygiene: detect + synthesise</a:t>
-            </a:r>
-            <a:endParaRPr lang="en-US" sz="2800" dirty="0"/>
-          </a:p>
-        </p:txBody>
-      </p:sp>
-      <p:sp>
-        <p:nvSpPr>
-          <p:cNvPr id="3" name="Text 1"/>
-          <p:cNvSpPr/>
-          <p:nvPr/>
-        </p:nvSpPr>
-        <p:spPr>
-          <a:xfrm>
-            <a:off x="457200" y="1188720"/>
-            <a:ext cx="8229600" cy="3657600"/>
-          </a:xfrm>
-          <a:prstGeom prst="rect">
-            <a:avLst/>
-          </a:prstGeom>
-          <a:noFill/>
-          <a:ln/>
-        </p:spPr>
-        <p:txBody>
-          <a:bodyPr wrap="square" rtlCol="0" anchor="t"/>
-          <a:lstStyle/>
-          <a:p>
-            <a:pPr marL="342900" indent="-342900">
-              <a:spcAft>
-                <a:spcPts val="600"/>
-              </a:spcAft>
-              <a:buSzPct val="100000"/>
-              <a:buChar char="•"/>
-            </a:pPr>
-            <a:r>
-              <a:rPr lang="en-US" sz="1600" dirty="0">
-                <a:solidFill>
-                  <a:srgbClr val="000000"/>
-                </a:solidFill>
-              </a:rPr>
-              <a:t>What: long stretches of work without safety checkpoints - no test runs, no commits.</a:t>
-            </a:r>
-            <a:endParaRPr lang="en-US" sz="1600" dirty="0"/>
-          </a:p>
-          <a:p>
-            <a:pPr marL="342900" indent="-342900">
-              <a:spcAft>
-                <a:spcPts val="600"/>
-              </a:spcAft>
-              <a:buSzPct val="100000"/>
-              <a:buChar char="•"/>
-            </a:pPr>
-            <a:r>
-              <a:rPr lang="en-US" sz="1600" dirty="0">
-                <a:solidFill>
-                  <a:srgbClr val="000000"/>
-                </a:solidFill>
-              </a:rPr>
-              <a:t>Detect: 60-second windows with no test-run events; commit-gap events when commits are spaced beyond threshold.</a:t>
-            </a:r>
-            <a:endParaRPr lang="en-US" sz="1600" dirty="0"/>
-          </a:p>
-          <a:p>
-            <a:pPr marL="342900" indent="-342900">
-              <a:spcAft>
-                <a:spcPts val="600"/>
-              </a:spcAft>
-              <a:buSzPct val="100000"/>
-              <a:buChar char="•"/>
-            </a:pPr>
-            <a:r>
-              <a:rPr lang="en-US" sz="1600" dirty="0">
-                <a:solidFill>
-                  <a:srgbClr val="000000"/>
-                </a:solidFill>
-              </a:rPr>
-              <a:t>Synthesise: model an alternative cadence that inserts test-run and commit events at the right points.</a:t>
-            </a:r>
-            <a:endParaRPr lang="en-US" sz="1600" dirty="0"/>
-          </a:p>
-          <a:p>
-            <a:pPr marL="342900" indent="-342900">
-              <a:spcAft>
-                <a:spcPts val="600"/>
-              </a:spcAft>
-              <a:buSzPct val="100000"/>
-              <a:buChar char="•"/>
-            </a:pPr>
-            <a:r>
-              <a:rPr lang="en-US" sz="1600" dirty="0">
-                <a:solidFill>
-                  <a:srgbClr val="000000"/>
-                </a:solidFill>
-              </a:rPr>
-              <a:t>The alternative's J(τ) credits those checkpoints via the skip-tests and commit-gap terms.</a:t>
-            </a:r>
-            <a:endParaRPr lang="en-US" sz="1600" dirty="0"/>
-          </a:p>
-          <a:p>
-            <a:pPr marL="342900" indent="-342900">
-              <a:spcAft>
-                <a:spcPts val="600"/>
-              </a:spcAft>
-              <a:buSzPct val="100000"/>
-              <a:buChar char="•"/>
-            </a:pPr>
-            <a:r>
-              <a:rPr lang="en-US" sz="1600" dirty="0">
-                <a:solidFill>
-                  <a:srgbClr val="000000"/>
-                </a:solidFill>
-              </a:rPr>
-              <a:t>Cheap to compute, but consistently surfaces meaningful divergences in the user study.</a:t>
-            </a:r>
-            <a:endParaRPr lang="en-US" sz="1600" dirty="0"/>
-          </a:p>
-        </p:txBody>
-      </p:sp>
-    </p:spTree>
-  </p:cSld>
-  <p:clrMapOvr>
-    <a:masterClrMapping/>
-  </p:clrMapOvr>
-</p:sld>
-</file>
-
-<file path=ppt/slides/slide14.xml><?xml version="1.0" encoding="utf-8"?>
-<p:sld xmlns:a="http://schemas.openxmlformats.org/drawingml/2006/main" xmlns:r="http://schemas.openxmlformats.org/officeDocument/2006/relationships" xmlns:p="http://schemas.openxmlformats.org/presentationml/2006/main" show="0">
-  <p:cSld name="Slide 14">
-    <p:spTree>
-      <p:nvGrpSpPr>
-        <p:cNvPr id="1" name=""/>
-        <p:cNvGrpSpPr/>
-        <p:nvPr/>
-      </p:nvGrpSpPr>
-      <p:grpSpPr>
-        <a:xfrm>
-          <a:off x="0" y="0"/>
-          <a:ext cx="0" cy="0"/>
-          <a:chOff x="0" y="0"/>
-          <a:chExt cx="0" cy="0"/>
-        </a:xfrm>
-      </p:grpSpPr>
-      <p:sp>
-        <p:nvSpPr>
-          <p:cNvPr id="2" name="Text 0"/>
-          <p:cNvSpPr/>
-          <p:nvPr/>
-        </p:nvSpPr>
-        <p:spPr>
-          <a:xfrm>
-            <a:off x="457200" y="274320"/>
-            <a:ext cx="8229600" cy="640080"/>
-          </a:xfrm>
-          <a:prstGeom prst="rect">
-            <a:avLst/>
-          </a:prstGeom>
-          <a:noFill/>
-          <a:ln/>
-        </p:spPr>
-        <p:txBody>
-          <a:bodyPr wrap="square" lIns="0" tIns="0" rIns="0" bIns="0" rtlCol="0" anchor="ctr"/>
-          <a:lstStyle/>
-          <a:p>
-            <a:pPr indent="0" marL="0">
-              <a:buNone/>
-            </a:pPr>
-            <a:r>
-              <a:rPr lang="en-US" sz="2800" b="1" dirty="0">
-                <a:solidFill>
-                  <a:srgbClr val="000000"/>
-                </a:solidFill>
-              </a:rPr>
-              <a:t>Comparable divergence magnitudes</a:t>
-            </a:r>
-            <a:endParaRPr lang="en-US" sz="2800" dirty="0"/>
-          </a:p>
-        </p:txBody>
-      </p:sp>
-      <p:sp>
-        <p:nvSpPr>
-          <p:cNvPr id="3" name="Text 1"/>
-          <p:cNvSpPr/>
-          <p:nvPr/>
-        </p:nvSpPr>
-        <p:spPr>
-          <a:xfrm>
-            <a:off x="457200" y="1188720"/>
-            <a:ext cx="8229600" cy="3657600"/>
-          </a:xfrm>
-          <a:prstGeom prst="rect">
-            <a:avLst/>
-          </a:prstGeom>
-          <a:noFill/>
-          <a:ln/>
-        </p:spPr>
-        <p:txBody>
-          <a:bodyPr wrap="square" rtlCol="0" anchor="t"/>
-          <a:lstStyle/>
-          <a:p>
-            <a:pPr marL="342900" indent="-342900">
-              <a:spcAft>
-                <a:spcPts val="600"/>
-              </a:spcAft>
-              <a:buSzPct val="100000"/>
-              <a:buChar char="•"/>
-            </a:pPr>
-            <a:r>
-              <a:rPr lang="en-US" sz="1600" dirty="0">
-                <a:solidFill>
-                  <a:srgbClr val="000000"/>
-                </a:solidFill>
-              </a:rPr>
-              <a:t>Magnitude = J(τ*_final) − J(τ_final).</a:t>
-            </a:r>
-            <a:endParaRPr lang="en-US" sz="1600" dirty="0"/>
-          </a:p>
-          <a:p>
-            <a:pPr marL="342900" indent="-342900">
-              <a:spcAft>
-                <a:spcPts val="600"/>
-              </a:spcAft>
-              <a:buSzPct val="100000"/>
-              <a:buChar char="•"/>
-            </a:pPr>
-            <a:r>
-              <a:rPr lang="en-US" sz="1600" dirty="0">
-                <a:solidFill>
-                  <a:srgbClr val="000000"/>
-                </a:solidFill>
-              </a:rPr>
-              <a:t>The score gap when the alternative is substituted at the divergence point but the rest of the user's trajectory is left unchanged.</a:t>
-            </a:r>
-            <a:endParaRPr lang="en-US" sz="1600" dirty="0"/>
-          </a:p>
-          <a:p>
-            <a:pPr marL="342900" indent="-342900">
-              <a:spcAft>
-                <a:spcPts val="600"/>
-              </a:spcAft>
-              <a:buSzPct val="100000"/>
-              <a:buChar char="•"/>
-            </a:pPr>
-            <a:r>
-              <a:rPr lang="en-US" sz="1600" dirty="0">
-                <a:solidFill>
-                  <a:srgbClr val="000000"/>
-                </a:solidFill>
-              </a:rPr>
-              <a:t>Makes magnitudes comparable across all four divergence kinds.</a:t>
-            </a:r>
-            <a:endParaRPr lang="en-US" sz="1600" dirty="0"/>
-          </a:p>
-          <a:p>
-            <a:pPr marL="342900" indent="-342900">
-              <a:spcAft>
-                <a:spcPts val="600"/>
-              </a:spcAft>
-              <a:buSzPct val="100000"/>
-              <a:buChar char="•"/>
-            </a:pPr>
-            <a:r>
-              <a:rPr lang="en-US" sz="1600" dirty="0">
-                <a:solidFill>
-                  <a:srgbClr val="000000"/>
-                </a:solidFill>
-              </a:rPr>
-              <a:t>Lets the dashboard surface each divergence point alongside its score impact, so the highest-impact moments are easy to spot in the session summary.</a:t>
-            </a:r>
-            <a:endParaRPr lang="en-US" sz="1600" dirty="0"/>
-          </a:p>
-          <a:p>
-            <a:pPr marL="342900" indent="-342900">
-              <a:spcAft>
-                <a:spcPts val="600"/>
-              </a:spcAft>
-              <a:buSzPct val="100000"/>
-              <a:buChar char="•"/>
-            </a:pPr>
-            <a:r>
-              <a:rPr lang="en-US" sz="1600" dirty="0">
-                <a:solidFill>
-                  <a:srgbClr val="000000"/>
-                </a:solidFill>
-              </a:rPr>
-              <a:t>This is the number the demo will point at.</a:t>
-            </a:r>
-            <a:endParaRPr lang="en-US" sz="1600" dirty="0"/>
-          </a:p>
-        </p:txBody>
-      </p:sp>
-    </p:spTree>
-  </p:cSld>
-  <p:clrMapOvr>
-    <a:masterClrMapping/>
-  </p:clrMapOvr>
-</p:sld>
-</file>
-
-<file path=ppt/slides/slide15.xml><?xml version="1.0" encoding="utf-8"?>
-<p:sld xmlns:a="http://schemas.openxmlformats.org/drawingml/2006/main" xmlns:r="http://schemas.openxmlformats.org/officeDocument/2006/relationships" xmlns:p="http://schemas.openxmlformats.org/presentationml/2006/main">
-  <p:cSld name="Slide 15">
-    <p:spTree>
-      <p:nvGrpSpPr>
-        <p:cNvPr id="1" name=""/>
-        <p:cNvGrpSpPr/>
-        <p:nvPr/>
-      </p:nvGrpSpPr>
-      <p:grpSpPr>
-        <a:xfrm>
-          <a:off x="0" y="0"/>
-          <a:ext cx="0" cy="0"/>
-          <a:chOff x="0" y="0"/>
-          <a:chExt cx="0" cy="0"/>
-        </a:xfrm>
-      </p:grpSpPr>
-      <p:sp>
-        <p:nvSpPr>
-          <p:cNvPr id="2" name="Text 0"/>
-          <p:cNvSpPr/>
-          <p:nvPr/>
-        </p:nvSpPr>
-        <p:spPr>
-          <a:xfrm>
-            <a:off x="457200" y="274320"/>
-            <a:ext cx="8229600" cy="640080"/>
-          </a:xfrm>
-          <a:prstGeom prst="rect">
-            <a:avLst/>
-          </a:prstGeom>
-          <a:noFill/>
-          <a:ln/>
-        </p:spPr>
-        <p:txBody>
-          <a:bodyPr wrap="square" lIns="0" tIns="0" rIns="0" bIns="0" rtlCol="0" anchor="ctr"/>
-          <a:lstStyle/>
-          <a:p>
-            <a:pPr indent="0" marL="0">
-              <a:buNone/>
-            </a:pPr>
-            <a:r>
-              <a:rPr lang="en-US" sz="2800" b="1" dirty="0">
-                <a:solidFill>
-                  <a:srgbClr val="000000"/>
-                </a:solidFill>
-              </a:rPr>
               <a:t>What we wanted to evaluate</a:t>
             </a:r>
             <a:endParaRPr lang="en-US" sz="2800" dirty="0"/>
@@ -5916,7 +5386,7 @@
       </p:sp>
       <p:graphicFrame>
         <p:nvGraphicFramePr>
-          <p:cNvPr id="16" name="Table 0"/>
+          <p:cNvPr id="14" name="Table 0"/>
           <p:cNvGraphicFramePr>
             <a:graphicFrameLocks noGrp="1"/>
           </p:cNvGraphicFramePr>
@@ -6137,7 +5607,7 @@
                             <a:srgbClr val="555555"/>
                           </a:solidFill>
                         </a:rPr>
-                        <a:t>45 labelled injection sessions: per-kind precision and recall (Slides 16-17) plus beat/tie/lose breakdown across all 66 detected divergence points (Slide 18).</a:t>
+                        <a:t>45 labelled injection sessions: per-kind precision and recall (Slides 14-15) plus beat/tie/lose breakdown across all 66 detected divergence points (Slide 16).</a:t>
                       </a:r>
                       <a:endParaRPr lang="en-US" sz="1300" dirty="0"/>
                     </a:p>
@@ -6255,7 +5725,7 @@
                             <a:srgbClr val="555555"/>
                           </a:solidFill>
                         </a:rPr>
-                        <a:t>Sensitivity sweep + ablation, headline on the 25-session user-study rankable subset (Slides 19-20).</a:t>
+                        <a:t>Sensitivity sweep + ablation, headline on the 25-session user-study rankable subset (Slides 17-18).</a:t>
                       </a:r>
                       <a:endParaRPr lang="en-US" sz="1300" dirty="0"/>
                     </a:p>
@@ -6373,7 +5843,7 @@
                             <a:srgbClr val="555555"/>
                           </a:solidFill>
                         </a:rPr>
-                        <a:t>30-session randomised user study, 5 participants split between feedback and no-feedback arms (Slide 21).</a:t>
+                        <a:t>30-session randomised user study, 5 participants split between feedback and no-feedback arms (Slide 19).</a:t>
                       </a:r>
                       <a:endParaRPr lang="en-US" sz="1300" dirty="0"/>
                     </a:p>
@@ -6422,6 +5892,2578 @@
           </a:graphicData>
         </a:graphic>
       </p:graphicFrame>
+    </p:spTree>
+  </p:cSld>
+  <p:clrMapOvr>
+    <a:masterClrMapping/>
+  </p:clrMapOvr>
+</p:sld>
+</file>
+
+<file path=ppt/slides/slide14.xml><?xml version="1.0" encoding="utf-8"?>
+<p:sld xmlns:a="http://schemas.openxmlformats.org/drawingml/2006/main" xmlns:r="http://schemas.openxmlformats.org/officeDocument/2006/relationships" xmlns:p="http://schemas.openxmlformats.org/presentationml/2006/main">
+  <p:cSld name="Slide 14">
+    <p:spTree>
+      <p:nvGrpSpPr>
+        <p:cNvPr id="1" name=""/>
+        <p:cNvGrpSpPr/>
+        <p:nvPr/>
+      </p:nvGrpSpPr>
+      <p:grpSpPr>
+        <a:xfrm>
+          <a:off x="0" y="0"/>
+          <a:ext cx="0" cy="0"/>
+          <a:chOff x="0" y="0"/>
+          <a:chExt cx="0" cy="0"/>
+        </a:xfrm>
+      </p:grpSpPr>
+      <p:sp>
+        <p:nvSpPr>
+          <p:cNvPr id="2" name="Text 0"/>
+          <p:cNvSpPr/>
+          <p:nvPr/>
+        </p:nvSpPr>
+        <p:spPr>
+          <a:xfrm>
+            <a:off x="457200" y="274320"/>
+            <a:ext cx="8229600" cy="640080"/>
+          </a:xfrm>
+          <a:prstGeom prst="rect">
+            <a:avLst/>
+          </a:prstGeom>
+          <a:noFill/>
+          <a:ln/>
+        </p:spPr>
+        <p:txBody>
+          <a:bodyPr wrap="square" lIns="0" tIns="0" rIns="0" bIns="0" rtlCol="0" anchor="ctr"/>
+          <a:lstStyle/>
+          <a:p>
+            <a:pPr indent="0" marL="0">
+              <a:buNone/>
+            </a:pPr>
+            <a:r>
+              <a:rPr lang="en-US" sz="2800" b="1" dirty="0">
+                <a:solidFill>
+                  <a:srgbClr val="000000"/>
+                </a:solidFill>
+              </a:rPr>
+              <a:t>Is the tool accurate?</a:t>
+            </a:r>
+            <a:endParaRPr lang="en-US" sz="2800" dirty="0"/>
+          </a:p>
+        </p:txBody>
+      </p:sp>
+      <p:sp>
+        <p:nvSpPr>
+          <p:cNvPr id="3" name="Text 1"/>
+          <p:cNvSpPr/>
+          <p:nvPr/>
+        </p:nvSpPr>
+        <p:spPr>
+          <a:xfrm>
+            <a:off x="457200" y="1188720"/>
+            <a:ext cx="8229600" cy="3657600"/>
+          </a:xfrm>
+          <a:prstGeom prst="rect">
+            <a:avLst/>
+          </a:prstGeom>
+          <a:noFill/>
+          <a:ln/>
+        </p:spPr>
+        <p:txBody>
+          <a:bodyPr wrap="square" rtlCol="0" anchor="t"/>
+          <a:lstStyle/>
+          <a:p>
+            <a:pPr marL="342900" indent="-342900">
+              <a:spcAft>
+                <a:spcPts val="1000"/>
+              </a:spcAft>
+              <a:buSzPct val="100000"/>
+              <a:buChar char="•"/>
+            </a:pPr>
+            <a:r>
+              <a:rPr lang="en-US" sz="1500" dirty="0">
+                <a:solidFill>
+                  <a:srgbClr val="000000"/>
+                </a:solidFill>
+              </a:rPr>
+              <a:t>45 hand-labelled injection sessions </a:t>
+            </a:r>
+            <a:pPr indent="0" marL="0">
+              <a:spcAft>
+                <a:spcPts val="1000"/>
+              </a:spcAft>
+              <a:buNone/>
+            </a:pPr>
+            <a:r>
+              <a:rPr lang="en-US" sz="1500" dirty="0">
+                <a:solidFill>
+                  <a:srgbClr val="888888"/>
+                </a:solidFill>
+              </a:rPr>
+              <a:t>- on a Java codebase.</a:t>
+            </a:r>
+            <a:endParaRPr lang="en-US" sz="1500" dirty="0"/>
+          </a:p>
+          <a:p>
+            <a:pPr marL="342900" indent="-342900">
+              <a:spcAft>
+                <a:spcPts val="1000"/>
+              </a:spcAft>
+              <a:buSzPct val="100000"/>
+              <a:buChar char="•"/>
+            </a:pPr>
+            <a:r>
+              <a:rPr lang="en-US" sz="1500" dirty="0">
+                <a:solidFill>
+                  <a:srgbClr val="000000"/>
+                </a:solidFill>
+              </a:rPr>
+              <a:t>3 raters (author + 2 external MEng cohort members) </a:t>
+            </a:r>
+            <a:pPr indent="0" marL="0">
+              <a:spcAft>
+                <a:spcPts val="1000"/>
+              </a:spcAft>
+              <a:buNone/>
+            </a:pPr>
+            <a:r>
+              <a:rPr lang="en-US" sz="1500" dirty="0">
+                <a:solidFill>
+                  <a:srgbClr val="888888"/>
+                </a:solidFill>
+              </a:rPr>
+              <a:t>- inter-rater Cohen's κ = 1.00 (Ordering, Manual-Refactor), 0.86–1.00 (Rework), 0.72–0.86 (Hygiene).</a:t>
+            </a:r>
+            <a:endParaRPr lang="en-US" sz="1500" dirty="0"/>
+          </a:p>
+          <a:p>
+            <a:pPr marL="342900" indent="-342900">
+              <a:spcAft>
+                <a:spcPts val="1000"/>
+              </a:spcAft>
+              <a:buSzPct val="100000"/>
+              <a:buChar char="•"/>
+            </a:pPr>
+            <a:r>
+              <a:rPr lang="en-US" sz="1500" dirty="0">
+                <a:solidFill>
+                  <a:srgbClr val="000000"/>
+                </a:solidFill>
+              </a:rPr>
+              <a:t>Disagreements predominantly surrounding hygiene + rework labels </a:t>
+            </a:r>
+            <a:pPr indent="0" marL="0">
+              <a:spcAft>
+                <a:spcPts val="1000"/>
+              </a:spcAft>
+              <a:buNone/>
+            </a:pPr>
+            <a:r>
+              <a:rPr lang="en-US" sz="1500" dirty="0">
+                <a:solidFill>
+                  <a:srgbClr val="888888"/>
+                </a:solidFill>
+              </a:rPr>
+              <a:t>- differences in opinion of what constitutes a step.</a:t>
+            </a:r>
+            <a:endParaRPr lang="en-US" sz="1500" dirty="0"/>
+          </a:p>
+          <a:p>
+            <a:pPr marL="342900" indent="-342900">
+              <a:spcAft>
+                <a:spcPts val="1000"/>
+              </a:spcAft>
+              <a:buSzPct val="100000"/>
+              <a:buChar char="•"/>
+            </a:pPr>
+            <a:r>
+              <a:rPr lang="en-US" sz="1500" dirty="0">
+                <a:solidFill>
+                  <a:srgbClr val="000000"/>
+                </a:solidFill>
+              </a:rPr>
+              <a:t>Track all divergence points detected </a:t>
+            </a:r>
+            <a:pPr indent="0" marL="0">
+              <a:spcAft>
+                <a:spcPts val="1000"/>
+              </a:spcAft>
+              <a:buNone/>
+            </a:pPr>
+            <a:r>
+              <a:rPr lang="en-US" sz="1500" dirty="0">
+                <a:solidFill>
+                  <a:srgbClr val="888888"/>
+                </a:solidFill>
+              </a:rPr>
+              <a:t>- not only ones with a higher process score than the user.</a:t>
+            </a:r>
+            <a:endParaRPr lang="en-US" sz="1500" dirty="0"/>
+          </a:p>
+          <a:p>
+            <a:pPr marL="342900" indent="-342900">
+              <a:spcAft>
+                <a:spcPts val="1000"/>
+              </a:spcAft>
+              <a:buSzPct val="100000"/>
+              <a:buChar char="•"/>
+            </a:pPr>
+            <a:r>
+              <a:rPr lang="en-US" sz="1500" dirty="0">
+                <a:solidFill>
+                  <a:srgbClr val="000000"/>
+                </a:solidFill>
+              </a:rPr>
+              <a:t>Measure precision + recall </a:t>
+            </a:r>
+            <a:pPr indent="0" marL="0">
+              <a:spcAft>
+                <a:spcPts val="1000"/>
+              </a:spcAft>
+              <a:buNone/>
+            </a:pPr>
+            <a:r>
+              <a:rPr lang="en-US" sz="1500" dirty="0">
+                <a:solidFill>
+                  <a:srgbClr val="888888"/>
+                </a:solidFill>
+              </a:rPr>
+              <a:t>- precision guards against FPs that waste the developer's attention. Recall guards against FNs that miss real opportunities. F1 averages the two - so a high score can hide a detector that's annoying users (lots of FPs) or one that's quietly missing things (lots of FNs). Accuracy is dominated by true negatives.</a:t>
+            </a:r>
+            <a:endParaRPr lang="en-US" sz="1500" dirty="0"/>
+          </a:p>
+        </p:txBody>
+      </p:sp>
+    </p:spTree>
+  </p:cSld>
+  <p:clrMapOvr>
+    <a:masterClrMapping/>
+  </p:clrMapOvr>
+</p:sld>
+</file>
+
+<file path=ppt/slides/slide15.xml><?xml version="1.0" encoding="utf-8"?>
+<p:sld xmlns:a="http://schemas.openxmlformats.org/drawingml/2006/main" xmlns:r="http://schemas.openxmlformats.org/officeDocument/2006/relationships" xmlns:p="http://schemas.openxmlformats.org/presentationml/2006/main">
+  <p:cSld name="Slide 15">
+    <p:spTree>
+      <p:nvGrpSpPr>
+        <p:cNvPr id="1" name=""/>
+        <p:cNvGrpSpPr/>
+        <p:nvPr/>
+      </p:nvGrpSpPr>
+      <p:grpSpPr>
+        <a:xfrm>
+          <a:off x="0" y="0"/>
+          <a:ext cx="0" cy="0"/>
+          <a:chOff x="0" y="0"/>
+          <a:chExt cx="0" cy="0"/>
+        </a:xfrm>
+      </p:grpSpPr>
+      <p:sp>
+        <p:nvSpPr>
+          <p:cNvPr id="2" name="Text 0"/>
+          <p:cNvSpPr/>
+          <p:nvPr/>
+        </p:nvSpPr>
+        <p:spPr>
+          <a:xfrm>
+            <a:off x="457200" y="91440"/>
+            <a:ext cx="8229600" cy="548640"/>
+          </a:xfrm>
+          <a:prstGeom prst="rect">
+            <a:avLst/>
+          </a:prstGeom>
+          <a:noFill/>
+          <a:ln/>
+        </p:spPr>
+        <p:txBody>
+          <a:bodyPr wrap="square" lIns="0" tIns="0" rIns="0" bIns="0" rtlCol="0" anchor="ctr"/>
+          <a:lstStyle/>
+          <a:p>
+            <a:pPr indent="0" marL="0">
+              <a:buNone/>
+            </a:pPr>
+            <a:r>
+              <a:rPr lang="en-US" sz="2800" b="1" dirty="0">
+                <a:solidFill>
+                  <a:srgbClr val="000000"/>
+                </a:solidFill>
+              </a:rPr>
+              <a:t>Decision matrix per divergence kind</a:t>
+            </a:r>
+            <a:endParaRPr lang="en-US" sz="2800" dirty="0"/>
+          </a:p>
+        </p:txBody>
+      </p:sp>
+      <p:sp>
+        <p:nvSpPr>
+          <p:cNvPr id="3" name="Text 1"/>
+          <p:cNvSpPr/>
+          <p:nvPr/>
+        </p:nvSpPr>
+        <p:spPr>
+          <a:xfrm>
+            <a:off x="457200" y="658368"/>
+            <a:ext cx="8229600" cy="256032"/>
+          </a:xfrm>
+          <a:prstGeom prst="rect">
+            <a:avLst/>
+          </a:prstGeom>
+          <a:noFill/>
+          <a:ln/>
+        </p:spPr>
+        <p:txBody>
+          <a:bodyPr wrap="square" lIns="0" tIns="0" rIns="0" bIns="0" rtlCol="0" anchor="ctr"/>
+          <a:lstStyle/>
+          <a:p>
+            <a:pPr algn="ctr" indent="0" marL="0">
+              <a:buNone/>
+            </a:pPr>
+            <a:r>
+              <a:rPr lang="en-US" sz="1200" i="1" dirty="0">
+                <a:solidFill>
+                  <a:srgbClr val="555555"/>
+                </a:solidFill>
+              </a:rPr>
+              <a:t>Session-level (45 injection sessions).</a:t>
+            </a:r>
+            <a:endParaRPr lang="en-US" sz="1200" dirty="0"/>
+          </a:p>
+        </p:txBody>
+      </p:sp>
+      <p:sp>
+        <p:nvSpPr>
+          <p:cNvPr id="4" name="Text 2"/>
+          <p:cNvSpPr/>
+          <p:nvPr/>
+        </p:nvSpPr>
+        <p:spPr>
+          <a:xfrm>
+            <a:off x="640080" y="914400"/>
+            <a:ext cx="2834640" cy="201168"/>
+          </a:xfrm>
+          <a:prstGeom prst="rect">
+            <a:avLst/>
+          </a:prstGeom>
+          <a:noFill/>
+          <a:ln/>
+        </p:spPr>
+        <p:txBody>
+          <a:bodyPr wrap="square" lIns="0" tIns="0" rIns="0" bIns="0" rtlCol="0" anchor="b"/>
+          <a:lstStyle/>
+          <a:p>
+            <a:pPr algn="ctr" indent="0" marL="0">
+              <a:buNone/>
+            </a:pPr>
+            <a:r>
+              <a:rPr lang="en-US" sz="1400" b="1" dirty="0">
+                <a:solidFill>
+                  <a:srgbClr val="000000"/>
+                </a:solidFill>
+              </a:rPr>
+              <a:t>Manual-Refactor</a:t>
+            </a:r>
+            <a:endParaRPr lang="en-US" sz="1400" dirty="0"/>
+          </a:p>
+        </p:txBody>
+      </p:sp>
+      <p:sp>
+        <p:nvSpPr>
+          <p:cNvPr id="5" name="Text 3"/>
+          <p:cNvSpPr/>
+          <p:nvPr/>
+        </p:nvSpPr>
+        <p:spPr>
+          <a:xfrm>
+            <a:off x="1188720" y="1133856"/>
+            <a:ext cx="1143000" cy="201168"/>
+          </a:xfrm>
+          <a:prstGeom prst="rect">
+            <a:avLst/>
+          </a:prstGeom>
+          <a:noFill/>
+          <a:ln/>
+        </p:spPr>
+        <p:txBody>
+          <a:bodyPr wrap="square" lIns="0" tIns="0" rIns="0" bIns="0" rtlCol="0" anchor="ctr"/>
+          <a:lstStyle/>
+          <a:p>
+            <a:pPr algn="ctr" indent="0" marL="0">
+              <a:buNone/>
+            </a:pPr>
+            <a:r>
+              <a:rPr lang="en-US" sz="900" i="1" dirty="0">
+                <a:solidFill>
+                  <a:srgbClr val="555555"/>
+                </a:solidFill>
+              </a:rPr>
+              <a:t>Predicted +</a:t>
+            </a:r>
+            <a:endParaRPr lang="en-US" sz="900" dirty="0"/>
+          </a:p>
+        </p:txBody>
+      </p:sp>
+      <p:sp>
+        <p:nvSpPr>
+          <p:cNvPr id="6" name="Text 4"/>
+          <p:cNvSpPr/>
+          <p:nvPr/>
+        </p:nvSpPr>
+        <p:spPr>
+          <a:xfrm>
+            <a:off x="2331720" y="1133856"/>
+            <a:ext cx="1143000" cy="201168"/>
+          </a:xfrm>
+          <a:prstGeom prst="rect">
+            <a:avLst/>
+          </a:prstGeom>
+          <a:noFill/>
+          <a:ln/>
+        </p:spPr>
+        <p:txBody>
+          <a:bodyPr wrap="square" lIns="0" tIns="0" rIns="0" bIns="0" rtlCol="0" anchor="ctr"/>
+          <a:lstStyle/>
+          <a:p>
+            <a:pPr algn="ctr" indent="0" marL="0">
+              <a:buNone/>
+            </a:pPr>
+            <a:r>
+              <a:rPr lang="en-US" sz="900" i="1" dirty="0">
+                <a:solidFill>
+                  <a:srgbClr val="555555"/>
+                </a:solidFill>
+              </a:rPr>
+              <a:t>Predicted −</a:t>
+            </a:r>
+            <a:endParaRPr lang="en-US" sz="900" dirty="0"/>
+          </a:p>
+        </p:txBody>
+      </p:sp>
+      <p:sp>
+        <p:nvSpPr>
+          <p:cNvPr id="7" name="Text 5"/>
+          <p:cNvSpPr/>
+          <p:nvPr/>
+        </p:nvSpPr>
+        <p:spPr>
+          <a:xfrm>
+            <a:off x="640080" y="1353312"/>
+            <a:ext cx="548640" cy="548640"/>
+          </a:xfrm>
+          <a:prstGeom prst="rect">
+            <a:avLst/>
+          </a:prstGeom>
+          <a:noFill/>
+          <a:ln/>
+        </p:spPr>
+        <p:txBody>
+          <a:bodyPr wrap="square" lIns="508" tIns="508" rIns="508" bIns="508" rtlCol="0" anchor="ctr"/>
+          <a:lstStyle/>
+          <a:p>
+            <a:pPr algn="r" indent="0" marL="0">
+              <a:buNone/>
+            </a:pPr>
+            <a:r>
+              <a:rPr lang="en-US" sz="900" i="1" dirty="0">
+                <a:solidFill>
+                  <a:srgbClr val="555555"/>
+                </a:solidFill>
+              </a:rPr>
+              <a:t>Actual +</a:t>
+            </a:r>
+            <a:endParaRPr lang="en-US" sz="900" dirty="0"/>
+          </a:p>
+        </p:txBody>
+      </p:sp>
+      <p:sp>
+        <p:nvSpPr>
+          <p:cNvPr id="8" name="Text 6"/>
+          <p:cNvSpPr/>
+          <p:nvPr/>
+        </p:nvSpPr>
+        <p:spPr>
+          <a:xfrm>
+            <a:off x="640080" y="1901952"/>
+            <a:ext cx="548640" cy="548640"/>
+          </a:xfrm>
+          <a:prstGeom prst="rect">
+            <a:avLst/>
+          </a:prstGeom>
+          <a:noFill/>
+          <a:ln/>
+        </p:spPr>
+        <p:txBody>
+          <a:bodyPr wrap="square" lIns="508" tIns="508" rIns="508" bIns="508" rtlCol="0" anchor="ctr"/>
+          <a:lstStyle/>
+          <a:p>
+            <a:pPr algn="r" indent="0" marL="0">
+              <a:buNone/>
+            </a:pPr>
+            <a:r>
+              <a:rPr lang="en-US" sz="900" i="1" dirty="0">
+                <a:solidFill>
+                  <a:srgbClr val="555555"/>
+                </a:solidFill>
+              </a:rPr>
+              <a:t>Actual −</a:t>
+            </a:r>
+            <a:endParaRPr lang="en-US" sz="900" dirty="0"/>
+          </a:p>
+        </p:txBody>
+      </p:sp>
+      <p:sp>
+        <p:nvSpPr>
+          <p:cNvPr id="9" name="Shape 7"/>
+          <p:cNvSpPr/>
+          <p:nvPr/>
+        </p:nvSpPr>
+        <p:spPr>
+          <a:xfrm>
+            <a:off x="1188720" y="1426464"/>
+            <a:ext cx="1143000" cy="548640"/>
+          </a:xfrm>
+          <a:prstGeom prst="rect">
+            <a:avLst/>
+          </a:prstGeom>
+          <a:solidFill>
+            <a:srgbClr val="D4F0DC"/>
+          </a:solidFill>
+          <a:ln w="6350">
+            <a:solidFill>
+              <a:srgbClr val="999999"/>
+            </a:solidFill>
+            <a:prstDash val="solid"/>
+          </a:ln>
+        </p:spPr>
+      </p:sp>
+      <p:sp>
+        <p:nvSpPr>
+          <p:cNvPr id="10" name="Text 8"/>
+          <p:cNvSpPr/>
+          <p:nvPr/>
+        </p:nvSpPr>
+        <p:spPr>
+          <a:xfrm>
+            <a:off x="1188720" y="1426464"/>
+            <a:ext cx="1143000" cy="548640"/>
+          </a:xfrm>
+          <a:prstGeom prst="rect">
+            <a:avLst/>
+          </a:prstGeom>
+          <a:noFill/>
+          <a:ln/>
+        </p:spPr>
+        <p:txBody>
+          <a:bodyPr wrap="square" lIns="0" tIns="0" rIns="0" bIns="0" rtlCol="0" anchor="ctr"/>
+          <a:lstStyle/>
+          <a:p>
+            <a:pPr algn="ctr" indent="0" marL="0">
+              <a:buNone/>
+            </a:pPr>
+            <a:r>
+              <a:rPr lang="en-US" sz="2000" b="1" dirty="0">
+                <a:solidFill>
+                  <a:srgbClr val="0A7D2A"/>
+                </a:solidFill>
+              </a:rPr>
+              <a:t>16</a:t>
+            </a:r>
+            <a:endParaRPr lang="en-US" sz="2000" dirty="0"/>
+          </a:p>
+          <a:p>
+            <a:pPr algn="ctr" indent="0" marL="0">
+              <a:buNone/>
+            </a:pPr>
+            <a:r>
+              <a:rPr lang="en-US" sz="900" dirty="0">
+                <a:solidFill>
+                  <a:srgbClr val="666666"/>
+                </a:solidFill>
+              </a:rPr>
+              <a:t>TP</a:t>
+            </a:r>
+            <a:endParaRPr lang="en-US" sz="2000" dirty="0"/>
+          </a:p>
+        </p:txBody>
+      </p:sp>
+      <p:sp>
+        <p:nvSpPr>
+          <p:cNvPr id="11" name="Shape 9"/>
+          <p:cNvSpPr/>
+          <p:nvPr/>
+        </p:nvSpPr>
+        <p:spPr>
+          <a:xfrm>
+            <a:off x="2331720" y="1426464"/>
+            <a:ext cx="1143000" cy="548640"/>
+          </a:xfrm>
+          <a:prstGeom prst="rect">
+            <a:avLst/>
+          </a:prstGeom>
+          <a:solidFill>
+            <a:srgbClr val="F5D5CE"/>
+          </a:solidFill>
+          <a:ln w="6350">
+            <a:solidFill>
+              <a:srgbClr val="999999"/>
+            </a:solidFill>
+            <a:prstDash val="solid"/>
+          </a:ln>
+        </p:spPr>
+      </p:sp>
+      <p:sp>
+        <p:nvSpPr>
+          <p:cNvPr id="12" name="Text 10"/>
+          <p:cNvSpPr/>
+          <p:nvPr/>
+        </p:nvSpPr>
+        <p:spPr>
+          <a:xfrm>
+            <a:off x="2331720" y="1426464"/>
+            <a:ext cx="1143000" cy="548640"/>
+          </a:xfrm>
+          <a:prstGeom prst="rect">
+            <a:avLst/>
+          </a:prstGeom>
+          <a:noFill/>
+          <a:ln/>
+        </p:spPr>
+        <p:txBody>
+          <a:bodyPr wrap="square" lIns="0" tIns="0" rIns="0" bIns="0" rtlCol="0" anchor="ctr"/>
+          <a:lstStyle/>
+          <a:p>
+            <a:pPr algn="ctr" indent="0" marL="0">
+              <a:buNone/>
+            </a:pPr>
+            <a:r>
+              <a:rPr lang="en-US" sz="2000" b="1" dirty="0">
+                <a:solidFill>
+                  <a:srgbClr val="B33A1E"/>
+                </a:solidFill>
+              </a:rPr>
+              <a:t>5</a:t>
+            </a:r>
+            <a:endParaRPr lang="en-US" sz="2000" dirty="0"/>
+          </a:p>
+          <a:p>
+            <a:pPr algn="ctr" indent="0" marL="0">
+              <a:buNone/>
+            </a:pPr>
+            <a:r>
+              <a:rPr lang="en-US" sz="900" dirty="0">
+                <a:solidFill>
+                  <a:srgbClr val="666666"/>
+                </a:solidFill>
+              </a:rPr>
+              <a:t>FN</a:t>
+            </a:r>
+            <a:endParaRPr lang="en-US" sz="2000" dirty="0"/>
+          </a:p>
+        </p:txBody>
+      </p:sp>
+      <p:sp>
+        <p:nvSpPr>
+          <p:cNvPr id="13" name="Shape 11"/>
+          <p:cNvSpPr/>
+          <p:nvPr/>
+        </p:nvSpPr>
+        <p:spPr>
+          <a:xfrm>
+            <a:off x="1188720" y="1975104"/>
+            <a:ext cx="1143000" cy="548640"/>
+          </a:xfrm>
+          <a:prstGeom prst="rect">
+            <a:avLst/>
+          </a:prstGeom>
+          <a:solidFill>
+            <a:srgbClr val="F2F2F2"/>
+          </a:solidFill>
+          <a:ln w="6350">
+            <a:solidFill>
+              <a:srgbClr val="999999"/>
+            </a:solidFill>
+            <a:prstDash val="solid"/>
+          </a:ln>
+        </p:spPr>
+      </p:sp>
+      <p:sp>
+        <p:nvSpPr>
+          <p:cNvPr id="14" name="Text 12"/>
+          <p:cNvSpPr/>
+          <p:nvPr/>
+        </p:nvSpPr>
+        <p:spPr>
+          <a:xfrm>
+            <a:off x="1188720" y="1975104"/>
+            <a:ext cx="1143000" cy="548640"/>
+          </a:xfrm>
+          <a:prstGeom prst="rect">
+            <a:avLst/>
+          </a:prstGeom>
+          <a:noFill/>
+          <a:ln/>
+        </p:spPr>
+        <p:txBody>
+          <a:bodyPr wrap="square" lIns="0" tIns="0" rIns="0" bIns="0" rtlCol="0" anchor="ctr"/>
+          <a:lstStyle/>
+          <a:p>
+            <a:pPr algn="ctr" indent="0" marL="0">
+              <a:buNone/>
+            </a:pPr>
+            <a:r>
+              <a:rPr lang="en-US" sz="2000" b="1" dirty="0">
+                <a:solidFill>
+                  <a:srgbClr val="888888"/>
+                </a:solidFill>
+              </a:rPr>
+              <a:t>0</a:t>
+            </a:r>
+            <a:endParaRPr lang="en-US" sz="2000" dirty="0"/>
+          </a:p>
+          <a:p>
+            <a:pPr algn="ctr" indent="0" marL="0">
+              <a:buNone/>
+            </a:pPr>
+            <a:r>
+              <a:rPr lang="en-US" sz="900" dirty="0">
+                <a:solidFill>
+                  <a:srgbClr val="666666"/>
+                </a:solidFill>
+              </a:rPr>
+              <a:t>FP</a:t>
+            </a:r>
+            <a:endParaRPr lang="en-US" sz="2000" dirty="0"/>
+          </a:p>
+        </p:txBody>
+      </p:sp>
+      <p:sp>
+        <p:nvSpPr>
+          <p:cNvPr id="15" name="Shape 13"/>
+          <p:cNvSpPr/>
+          <p:nvPr/>
+        </p:nvSpPr>
+        <p:spPr>
+          <a:xfrm>
+            <a:off x="2331720" y="1975104"/>
+            <a:ext cx="1143000" cy="548640"/>
+          </a:xfrm>
+          <a:prstGeom prst="rect">
+            <a:avLst/>
+          </a:prstGeom>
+          <a:solidFill>
+            <a:srgbClr val="EAEAEA"/>
+          </a:solidFill>
+          <a:ln w="6350">
+            <a:solidFill>
+              <a:srgbClr val="999999"/>
+            </a:solidFill>
+            <a:prstDash val="solid"/>
+          </a:ln>
+        </p:spPr>
+      </p:sp>
+      <p:sp>
+        <p:nvSpPr>
+          <p:cNvPr id="16" name="Text 14"/>
+          <p:cNvSpPr/>
+          <p:nvPr/>
+        </p:nvSpPr>
+        <p:spPr>
+          <a:xfrm>
+            <a:off x="2331720" y="1975104"/>
+            <a:ext cx="1143000" cy="548640"/>
+          </a:xfrm>
+          <a:prstGeom prst="rect">
+            <a:avLst/>
+          </a:prstGeom>
+          <a:noFill/>
+          <a:ln/>
+        </p:spPr>
+        <p:txBody>
+          <a:bodyPr wrap="square" lIns="0" tIns="0" rIns="0" bIns="0" rtlCol="0" anchor="ctr"/>
+          <a:lstStyle/>
+          <a:p>
+            <a:pPr algn="ctr" indent="0" marL="0">
+              <a:buNone/>
+            </a:pPr>
+            <a:r>
+              <a:rPr lang="en-US" sz="2000" b="1" dirty="0">
+                <a:solidFill>
+                  <a:srgbClr val="555555"/>
+                </a:solidFill>
+              </a:rPr>
+              <a:t>24</a:t>
+            </a:r>
+            <a:endParaRPr lang="en-US" sz="2000" dirty="0"/>
+          </a:p>
+          <a:p>
+            <a:pPr algn="ctr" indent="0" marL="0">
+              <a:buNone/>
+            </a:pPr>
+            <a:r>
+              <a:rPr lang="en-US" sz="900" dirty="0">
+                <a:solidFill>
+                  <a:srgbClr val="666666"/>
+                </a:solidFill>
+              </a:rPr>
+              <a:t>TN</a:t>
+            </a:r>
+            <a:endParaRPr lang="en-US" sz="2000" dirty="0"/>
+          </a:p>
+        </p:txBody>
+      </p:sp>
+      <p:sp>
+        <p:nvSpPr>
+          <p:cNvPr id="17" name="Text 15"/>
+          <p:cNvSpPr/>
+          <p:nvPr/>
+        </p:nvSpPr>
+        <p:spPr>
+          <a:xfrm>
+            <a:off x="640080" y="2542032"/>
+            <a:ext cx="2834640" cy="201168"/>
+          </a:xfrm>
+          <a:prstGeom prst="rect">
+            <a:avLst/>
+          </a:prstGeom>
+          <a:noFill/>
+          <a:ln/>
+        </p:spPr>
+        <p:txBody>
+          <a:bodyPr wrap="square" lIns="0" tIns="0" rIns="0" bIns="0" rtlCol="0" anchor="ctr"/>
+          <a:lstStyle/>
+          <a:p>
+            <a:pPr algn="ctr" indent="0" marL="0">
+              <a:buNone/>
+            </a:pPr>
+            <a:r>
+              <a:rPr lang="en-US" sz="1100" i="1" dirty="0">
+                <a:solidFill>
+                  <a:srgbClr val="555555"/>
+                </a:solidFill>
+              </a:rPr>
+              <a:t>Precision </a:t>
+            </a:r>
+            <a:pPr algn="ctr" indent="0" marL="0">
+              <a:buNone/>
+            </a:pPr>
+            <a:r>
+              <a:rPr lang="en-US" sz="1100" b="1" i="1" dirty="0">
+                <a:solidFill>
+                  <a:srgbClr val="1A1A1A"/>
+                </a:solidFill>
+              </a:rPr>
+              <a:t>1.00</a:t>
+            </a:r>
+            <a:pPr algn="ctr" indent="0" marL="0">
+              <a:buNone/>
+            </a:pPr>
+            <a:r>
+              <a:rPr lang="en-US" sz="1100" i="1" dirty="0">
+                <a:solidFill>
+                  <a:srgbClr val="555555"/>
+                </a:solidFill>
+              </a:rPr>
+              <a:t>   ·   Recall </a:t>
+            </a:r>
+            <a:pPr algn="ctr" indent="0" marL="0">
+              <a:buNone/>
+            </a:pPr>
+            <a:r>
+              <a:rPr lang="en-US" sz="1100" b="1" i="1" dirty="0">
+                <a:solidFill>
+                  <a:srgbClr val="1A1A1A"/>
+                </a:solidFill>
+              </a:rPr>
+              <a:t>0.76</a:t>
+            </a:r>
+            <a:endParaRPr lang="en-US" sz="1100" dirty="0"/>
+          </a:p>
+        </p:txBody>
+      </p:sp>
+      <p:sp>
+        <p:nvSpPr>
+          <p:cNvPr id="18" name="Text 16"/>
+          <p:cNvSpPr/>
+          <p:nvPr/>
+        </p:nvSpPr>
+        <p:spPr>
+          <a:xfrm>
+            <a:off x="4754880" y="914400"/>
+            <a:ext cx="2834640" cy="201168"/>
+          </a:xfrm>
+          <a:prstGeom prst="rect">
+            <a:avLst/>
+          </a:prstGeom>
+          <a:noFill/>
+          <a:ln/>
+        </p:spPr>
+        <p:txBody>
+          <a:bodyPr wrap="square" lIns="0" tIns="0" rIns="0" bIns="0" rtlCol="0" anchor="b"/>
+          <a:lstStyle/>
+          <a:p>
+            <a:pPr algn="ctr" indent="0" marL="0">
+              <a:buNone/>
+            </a:pPr>
+            <a:r>
+              <a:rPr lang="en-US" sz="1400" b="1" dirty="0">
+                <a:solidFill>
+                  <a:srgbClr val="000000"/>
+                </a:solidFill>
+              </a:rPr>
+              <a:t>Ordering</a:t>
+            </a:r>
+            <a:endParaRPr lang="en-US" sz="1400" dirty="0"/>
+          </a:p>
+        </p:txBody>
+      </p:sp>
+      <p:sp>
+        <p:nvSpPr>
+          <p:cNvPr id="19" name="Text 17"/>
+          <p:cNvSpPr/>
+          <p:nvPr/>
+        </p:nvSpPr>
+        <p:spPr>
+          <a:xfrm>
+            <a:off x="5303520" y="1133856"/>
+            <a:ext cx="1143000" cy="201168"/>
+          </a:xfrm>
+          <a:prstGeom prst="rect">
+            <a:avLst/>
+          </a:prstGeom>
+          <a:noFill/>
+          <a:ln/>
+        </p:spPr>
+        <p:txBody>
+          <a:bodyPr wrap="square" lIns="0" tIns="0" rIns="0" bIns="0" rtlCol="0" anchor="ctr"/>
+          <a:lstStyle/>
+          <a:p>
+            <a:pPr algn="ctr" indent="0" marL="0">
+              <a:buNone/>
+            </a:pPr>
+            <a:r>
+              <a:rPr lang="en-US" sz="900" i="1" dirty="0">
+                <a:solidFill>
+                  <a:srgbClr val="555555"/>
+                </a:solidFill>
+              </a:rPr>
+              <a:t>Predicted +</a:t>
+            </a:r>
+            <a:endParaRPr lang="en-US" sz="900" dirty="0"/>
+          </a:p>
+        </p:txBody>
+      </p:sp>
+      <p:sp>
+        <p:nvSpPr>
+          <p:cNvPr id="20" name="Text 18"/>
+          <p:cNvSpPr/>
+          <p:nvPr/>
+        </p:nvSpPr>
+        <p:spPr>
+          <a:xfrm>
+            <a:off x="6446520" y="1133856"/>
+            <a:ext cx="1143000" cy="201168"/>
+          </a:xfrm>
+          <a:prstGeom prst="rect">
+            <a:avLst/>
+          </a:prstGeom>
+          <a:noFill/>
+          <a:ln/>
+        </p:spPr>
+        <p:txBody>
+          <a:bodyPr wrap="square" lIns="0" tIns="0" rIns="0" bIns="0" rtlCol="0" anchor="ctr"/>
+          <a:lstStyle/>
+          <a:p>
+            <a:pPr algn="ctr" indent="0" marL="0">
+              <a:buNone/>
+            </a:pPr>
+            <a:r>
+              <a:rPr lang="en-US" sz="900" i="1" dirty="0">
+                <a:solidFill>
+                  <a:srgbClr val="555555"/>
+                </a:solidFill>
+              </a:rPr>
+              <a:t>Predicted −</a:t>
+            </a:r>
+            <a:endParaRPr lang="en-US" sz="900" dirty="0"/>
+          </a:p>
+        </p:txBody>
+      </p:sp>
+      <p:sp>
+        <p:nvSpPr>
+          <p:cNvPr id="21" name="Text 19"/>
+          <p:cNvSpPr/>
+          <p:nvPr/>
+        </p:nvSpPr>
+        <p:spPr>
+          <a:xfrm>
+            <a:off x="4754880" y="1353312"/>
+            <a:ext cx="548640" cy="548640"/>
+          </a:xfrm>
+          <a:prstGeom prst="rect">
+            <a:avLst/>
+          </a:prstGeom>
+          <a:noFill/>
+          <a:ln/>
+        </p:spPr>
+        <p:txBody>
+          <a:bodyPr wrap="square" lIns="508" tIns="508" rIns="508" bIns="508" rtlCol="0" anchor="ctr"/>
+          <a:lstStyle/>
+          <a:p>
+            <a:pPr algn="r" indent="0" marL="0">
+              <a:buNone/>
+            </a:pPr>
+            <a:r>
+              <a:rPr lang="en-US" sz="900" i="1" dirty="0">
+                <a:solidFill>
+                  <a:srgbClr val="555555"/>
+                </a:solidFill>
+              </a:rPr>
+              <a:t>Actual +</a:t>
+            </a:r>
+            <a:endParaRPr lang="en-US" sz="900" dirty="0"/>
+          </a:p>
+        </p:txBody>
+      </p:sp>
+      <p:sp>
+        <p:nvSpPr>
+          <p:cNvPr id="22" name="Text 20"/>
+          <p:cNvSpPr/>
+          <p:nvPr/>
+        </p:nvSpPr>
+        <p:spPr>
+          <a:xfrm>
+            <a:off x="4754880" y="1901952"/>
+            <a:ext cx="548640" cy="548640"/>
+          </a:xfrm>
+          <a:prstGeom prst="rect">
+            <a:avLst/>
+          </a:prstGeom>
+          <a:noFill/>
+          <a:ln/>
+        </p:spPr>
+        <p:txBody>
+          <a:bodyPr wrap="square" lIns="508" tIns="508" rIns="508" bIns="508" rtlCol="0" anchor="ctr"/>
+          <a:lstStyle/>
+          <a:p>
+            <a:pPr algn="r" indent="0" marL="0">
+              <a:buNone/>
+            </a:pPr>
+            <a:r>
+              <a:rPr lang="en-US" sz="900" i="1" dirty="0">
+                <a:solidFill>
+                  <a:srgbClr val="555555"/>
+                </a:solidFill>
+              </a:rPr>
+              <a:t>Actual −</a:t>
+            </a:r>
+            <a:endParaRPr lang="en-US" sz="900" dirty="0"/>
+          </a:p>
+        </p:txBody>
+      </p:sp>
+      <p:sp>
+        <p:nvSpPr>
+          <p:cNvPr id="23" name="Shape 21"/>
+          <p:cNvSpPr/>
+          <p:nvPr/>
+        </p:nvSpPr>
+        <p:spPr>
+          <a:xfrm>
+            <a:off x="5303520" y="1426464"/>
+            <a:ext cx="1143000" cy="548640"/>
+          </a:xfrm>
+          <a:prstGeom prst="rect">
+            <a:avLst/>
+          </a:prstGeom>
+          <a:solidFill>
+            <a:srgbClr val="D4F0DC"/>
+          </a:solidFill>
+          <a:ln w="6350">
+            <a:solidFill>
+              <a:srgbClr val="999999"/>
+            </a:solidFill>
+            <a:prstDash val="solid"/>
+          </a:ln>
+        </p:spPr>
+      </p:sp>
+      <p:sp>
+        <p:nvSpPr>
+          <p:cNvPr id="24" name="Text 22"/>
+          <p:cNvSpPr/>
+          <p:nvPr/>
+        </p:nvSpPr>
+        <p:spPr>
+          <a:xfrm>
+            <a:off x="5303520" y="1426464"/>
+            <a:ext cx="1143000" cy="548640"/>
+          </a:xfrm>
+          <a:prstGeom prst="rect">
+            <a:avLst/>
+          </a:prstGeom>
+          <a:noFill/>
+          <a:ln/>
+        </p:spPr>
+        <p:txBody>
+          <a:bodyPr wrap="square" lIns="0" tIns="0" rIns="0" bIns="0" rtlCol="0" anchor="ctr"/>
+          <a:lstStyle/>
+          <a:p>
+            <a:pPr algn="ctr" indent="0" marL="0">
+              <a:buNone/>
+            </a:pPr>
+            <a:r>
+              <a:rPr lang="en-US" sz="2000" b="1" dirty="0">
+                <a:solidFill>
+                  <a:srgbClr val="0A7D2A"/>
+                </a:solidFill>
+              </a:rPr>
+              <a:t>14</a:t>
+            </a:r>
+            <a:endParaRPr lang="en-US" sz="2000" dirty="0"/>
+          </a:p>
+          <a:p>
+            <a:pPr algn="ctr" indent="0" marL="0">
+              <a:buNone/>
+            </a:pPr>
+            <a:r>
+              <a:rPr lang="en-US" sz="900" dirty="0">
+                <a:solidFill>
+                  <a:srgbClr val="666666"/>
+                </a:solidFill>
+              </a:rPr>
+              <a:t>TP</a:t>
+            </a:r>
+            <a:endParaRPr lang="en-US" sz="2000" dirty="0"/>
+          </a:p>
+        </p:txBody>
+      </p:sp>
+      <p:sp>
+        <p:nvSpPr>
+          <p:cNvPr id="25" name="Shape 23"/>
+          <p:cNvSpPr/>
+          <p:nvPr/>
+        </p:nvSpPr>
+        <p:spPr>
+          <a:xfrm>
+            <a:off x="6446520" y="1426464"/>
+            <a:ext cx="1143000" cy="548640"/>
+          </a:xfrm>
+          <a:prstGeom prst="rect">
+            <a:avLst/>
+          </a:prstGeom>
+          <a:solidFill>
+            <a:srgbClr val="F5D5CE"/>
+          </a:solidFill>
+          <a:ln w="6350">
+            <a:solidFill>
+              <a:srgbClr val="999999"/>
+            </a:solidFill>
+            <a:prstDash val="solid"/>
+          </a:ln>
+        </p:spPr>
+      </p:sp>
+      <p:sp>
+        <p:nvSpPr>
+          <p:cNvPr id="26" name="Text 24"/>
+          <p:cNvSpPr/>
+          <p:nvPr/>
+        </p:nvSpPr>
+        <p:spPr>
+          <a:xfrm>
+            <a:off x="6446520" y="1426464"/>
+            <a:ext cx="1143000" cy="548640"/>
+          </a:xfrm>
+          <a:prstGeom prst="rect">
+            <a:avLst/>
+          </a:prstGeom>
+          <a:noFill/>
+          <a:ln/>
+        </p:spPr>
+        <p:txBody>
+          <a:bodyPr wrap="square" lIns="0" tIns="0" rIns="0" bIns="0" rtlCol="0" anchor="ctr"/>
+          <a:lstStyle/>
+          <a:p>
+            <a:pPr algn="ctr" indent="0" marL="0">
+              <a:buNone/>
+            </a:pPr>
+            <a:r>
+              <a:rPr lang="en-US" sz="2000" b="1" dirty="0">
+                <a:solidFill>
+                  <a:srgbClr val="B33A1E"/>
+                </a:solidFill>
+              </a:rPr>
+              <a:t>24</a:t>
+            </a:r>
+            <a:endParaRPr lang="en-US" sz="2000" dirty="0"/>
+          </a:p>
+          <a:p>
+            <a:pPr algn="ctr" indent="0" marL="0">
+              <a:buNone/>
+            </a:pPr>
+            <a:r>
+              <a:rPr lang="en-US" sz="900" dirty="0">
+                <a:solidFill>
+                  <a:srgbClr val="666666"/>
+                </a:solidFill>
+              </a:rPr>
+              <a:t>FN</a:t>
+            </a:r>
+            <a:endParaRPr lang="en-US" sz="2000" dirty="0"/>
+          </a:p>
+        </p:txBody>
+      </p:sp>
+      <p:sp>
+        <p:nvSpPr>
+          <p:cNvPr id="27" name="Shape 25"/>
+          <p:cNvSpPr/>
+          <p:nvPr/>
+        </p:nvSpPr>
+        <p:spPr>
+          <a:xfrm>
+            <a:off x="5303520" y="1975104"/>
+            <a:ext cx="1143000" cy="548640"/>
+          </a:xfrm>
+          <a:prstGeom prst="rect">
+            <a:avLst/>
+          </a:prstGeom>
+          <a:solidFill>
+            <a:srgbClr val="F2F2F2"/>
+          </a:solidFill>
+          <a:ln w="6350">
+            <a:solidFill>
+              <a:srgbClr val="999999"/>
+            </a:solidFill>
+            <a:prstDash val="solid"/>
+          </a:ln>
+        </p:spPr>
+      </p:sp>
+      <p:sp>
+        <p:nvSpPr>
+          <p:cNvPr id="28" name="Text 26"/>
+          <p:cNvSpPr/>
+          <p:nvPr/>
+        </p:nvSpPr>
+        <p:spPr>
+          <a:xfrm>
+            <a:off x="5303520" y="1975104"/>
+            <a:ext cx="1143000" cy="548640"/>
+          </a:xfrm>
+          <a:prstGeom prst="rect">
+            <a:avLst/>
+          </a:prstGeom>
+          <a:noFill/>
+          <a:ln/>
+        </p:spPr>
+        <p:txBody>
+          <a:bodyPr wrap="square" lIns="0" tIns="0" rIns="0" bIns="0" rtlCol="0" anchor="ctr"/>
+          <a:lstStyle/>
+          <a:p>
+            <a:pPr algn="ctr" indent="0" marL="0">
+              <a:buNone/>
+            </a:pPr>
+            <a:r>
+              <a:rPr lang="en-US" sz="2000" b="1" dirty="0">
+                <a:solidFill>
+                  <a:srgbClr val="888888"/>
+                </a:solidFill>
+              </a:rPr>
+              <a:t>0</a:t>
+            </a:r>
+            <a:endParaRPr lang="en-US" sz="2000" dirty="0"/>
+          </a:p>
+          <a:p>
+            <a:pPr algn="ctr" indent="0" marL="0">
+              <a:buNone/>
+            </a:pPr>
+            <a:r>
+              <a:rPr lang="en-US" sz="900" dirty="0">
+                <a:solidFill>
+                  <a:srgbClr val="666666"/>
+                </a:solidFill>
+              </a:rPr>
+              <a:t>FP</a:t>
+            </a:r>
+            <a:endParaRPr lang="en-US" sz="2000" dirty="0"/>
+          </a:p>
+        </p:txBody>
+      </p:sp>
+      <p:sp>
+        <p:nvSpPr>
+          <p:cNvPr id="29" name="Shape 27"/>
+          <p:cNvSpPr/>
+          <p:nvPr/>
+        </p:nvSpPr>
+        <p:spPr>
+          <a:xfrm>
+            <a:off x="6446520" y="1975104"/>
+            <a:ext cx="1143000" cy="548640"/>
+          </a:xfrm>
+          <a:prstGeom prst="rect">
+            <a:avLst/>
+          </a:prstGeom>
+          <a:solidFill>
+            <a:srgbClr val="EAEAEA"/>
+          </a:solidFill>
+          <a:ln w="6350">
+            <a:solidFill>
+              <a:srgbClr val="999999"/>
+            </a:solidFill>
+            <a:prstDash val="solid"/>
+          </a:ln>
+        </p:spPr>
+      </p:sp>
+      <p:sp>
+        <p:nvSpPr>
+          <p:cNvPr id="30" name="Text 28"/>
+          <p:cNvSpPr/>
+          <p:nvPr/>
+        </p:nvSpPr>
+        <p:spPr>
+          <a:xfrm>
+            <a:off x="6446520" y="1975104"/>
+            <a:ext cx="1143000" cy="548640"/>
+          </a:xfrm>
+          <a:prstGeom prst="rect">
+            <a:avLst/>
+          </a:prstGeom>
+          <a:noFill/>
+          <a:ln/>
+        </p:spPr>
+        <p:txBody>
+          <a:bodyPr wrap="square" lIns="0" tIns="0" rIns="0" bIns="0" rtlCol="0" anchor="ctr"/>
+          <a:lstStyle/>
+          <a:p>
+            <a:pPr algn="ctr" indent="0" marL="0">
+              <a:buNone/>
+            </a:pPr>
+            <a:r>
+              <a:rPr lang="en-US" sz="2000" b="1" dirty="0">
+                <a:solidFill>
+                  <a:srgbClr val="555555"/>
+                </a:solidFill>
+              </a:rPr>
+              <a:t>7</a:t>
+            </a:r>
+            <a:endParaRPr lang="en-US" sz="2000" dirty="0"/>
+          </a:p>
+          <a:p>
+            <a:pPr algn="ctr" indent="0" marL="0">
+              <a:buNone/>
+            </a:pPr>
+            <a:r>
+              <a:rPr lang="en-US" sz="900" dirty="0">
+                <a:solidFill>
+                  <a:srgbClr val="666666"/>
+                </a:solidFill>
+              </a:rPr>
+              <a:t>TN</a:t>
+            </a:r>
+            <a:endParaRPr lang="en-US" sz="2000" dirty="0"/>
+          </a:p>
+        </p:txBody>
+      </p:sp>
+      <p:sp>
+        <p:nvSpPr>
+          <p:cNvPr id="31" name="Text 29"/>
+          <p:cNvSpPr/>
+          <p:nvPr/>
+        </p:nvSpPr>
+        <p:spPr>
+          <a:xfrm>
+            <a:off x="4754880" y="2542032"/>
+            <a:ext cx="2834640" cy="201168"/>
+          </a:xfrm>
+          <a:prstGeom prst="rect">
+            <a:avLst/>
+          </a:prstGeom>
+          <a:noFill/>
+          <a:ln/>
+        </p:spPr>
+        <p:txBody>
+          <a:bodyPr wrap="square" lIns="0" tIns="0" rIns="0" bIns="0" rtlCol="0" anchor="ctr"/>
+          <a:lstStyle/>
+          <a:p>
+            <a:pPr algn="ctr" indent="0" marL="0">
+              <a:buNone/>
+            </a:pPr>
+            <a:r>
+              <a:rPr lang="en-US" sz="1100" i="1" dirty="0">
+                <a:solidFill>
+                  <a:srgbClr val="555555"/>
+                </a:solidFill>
+              </a:rPr>
+              <a:t>Precision </a:t>
+            </a:r>
+            <a:pPr algn="ctr" indent="0" marL="0">
+              <a:buNone/>
+            </a:pPr>
+            <a:r>
+              <a:rPr lang="en-US" sz="1100" b="1" i="1" dirty="0">
+                <a:solidFill>
+                  <a:srgbClr val="1A1A1A"/>
+                </a:solidFill>
+              </a:rPr>
+              <a:t>1.00</a:t>
+            </a:r>
+            <a:pPr algn="ctr" indent="0" marL="0">
+              <a:buNone/>
+            </a:pPr>
+            <a:r>
+              <a:rPr lang="en-US" sz="1100" i="1" dirty="0">
+                <a:solidFill>
+                  <a:srgbClr val="555555"/>
+                </a:solidFill>
+              </a:rPr>
+              <a:t>   ·   Recall </a:t>
+            </a:r>
+            <a:pPr algn="ctr" indent="0" marL="0">
+              <a:buNone/>
+            </a:pPr>
+            <a:r>
+              <a:rPr lang="en-US" sz="1100" b="1" i="1" dirty="0">
+                <a:solidFill>
+                  <a:srgbClr val="1A1A1A"/>
+                </a:solidFill>
+              </a:rPr>
+              <a:t>0.36</a:t>
+            </a:r>
+            <a:endParaRPr lang="en-US" sz="1100" dirty="0"/>
+          </a:p>
+        </p:txBody>
+      </p:sp>
+      <p:sp>
+        <p:nvSpPr>
+          <p:cNvPr id="32" name="Text 30"/>
+          <p:cNvSpPr/>
+          <p:nvPr/>
+        </p:nvSpPr>
+        <p:spPr>
+          <a:xfrm>
+            <a:off x="640080" y="2926080"/>
+            <a:ext cx="2834640" cy="201168"/>
+          </a:xfrm>
+          <a:prstGeom prst="rect">
+            <a:avLst/>
+          </a:prstGeom>
+          <a:noFill/>
+          <a:ln/>
+        </p:spPr>
+        <p:txBody>
+          <a:bodyPr wrap="square" lIns="0" tIns="0" rIns="0" bIns="0" rtlCol="0" anchor="b"/>
+          <a:lstStyle/>
+          <a:p>
+            <a:pPr algn="ctr" indent="0" marL="0">
+              <a:buNone/>
+            </a:pPr>
+            <a:r>
+              <a:rPr lang="en-US" sz="1400" b="1" dirty="0">
+                <a:solidFill>
+                  <a:srgbClr val="000000"/>
+                </a:solidFill>
+              </a:rPr>
+              <a:t>Rework</a:t>
+            </a:r>
+            <a:endParaRPr lang="en-US" sz="1400" dirty="0"/>
+          </a:p>
+        </p:txBody>
+      </p:sp>
+      <p:sp>
+        <p:nvSpPr>
+          <p:cNvPr id="33" name="Text 31"/>
+          <p:cNvSpPr/>
+          <p:nvPr/>
+        </p:nvSpPr>
+        <p:spPr>
+          <a:xfrm>
+            <a:off x="1188720" y="3145536"/>
+            <a:ext cx="1143000" cy="201168"/>
+          </a:xfrm>
+          <a:prstGeom prst="rect">
+            <a:avLst/>
+          </a:prstGeom>
+          <a:noFill/>
+          <a:ln/>
+        </p:spPr>
+        <p:txBody>
+          <a:bodyPr wrap="square" lIns="0" tIns="0" rIns="0" bIns="0" rtlCol="0" anchor="ctr"/>
+          <a:lstStyle/>
+          <a:p>
+            <a:pPr algn="ctr" indent="0" marL="0">
+              <a:buNone/>
+            </a:pPr>
+            <a:r>
+              <a:rPr lang="en-US" sz="900" i="1" dirty="0">
+                <a:solidFill>
+                  <a:srgbClr val="555555"/>
+                </a:solidFill>
+              </a:rPr>
+              <a:t>Predicted +</a:t>
+            </a:r>
+            <a:endParaRPr lang="en-US" sz="900" dirty="0"/>
+          </a:p>
+        </p:txBody>
+      </p:sp>
+      <p:sp>
+        <p:nvSpPr>
+          <p:cNvPr id="34" name="Text 32"/>
+          <p:cNvSpPr/>
+          <p:nvPr/>
+        </p:nvSpPr>
+        <p:spPr>
+          <a:xfrm>
+            <a:off x="2331720" y="3145536"/>
+            <a:ext cx="1143000" cy="201168"/>
+          </a:xfrm>
+          <a:prstGeom prst="rect">
+            <a:avLst/>
+          </a:prstGeom>
+          <a:noFill/>
+          <a:ln/>
+        </p:spPr>
+        <p:txBody>
+          <a:bodyPr wrap="square" lIns="0" tIns="0" rIns="0" bIns="0" rtlCol="0" anchor="ctr"/>
+          <a:lstStyle/>
+          <a:p>
+            <a:pPr algn="ctr" indent="0" marL="0">
+              <a:buNone/>
+            </a:pPr>
+            <a:r>
+              <a:rPr lang="en-US" sz="900" i="1" dirty="0">
+                <a:solidFill>
+                  <a:srgbClr val="555555"/>
+                </a:solidFill>
+              </a:rPr>
+              <a:t>Predicted −</a:t>
+            </a:r>
+            <a:endParaRPr lang="en-US" sz="900" dirty="0"/>
+          </a:p>
+        </p:txBody>
+      </p:sp>
+      <p:sp>
+        <p:nvSpPr>
+          <p:cNvPr id="35" name="Text 33"/>
+          <p:cNvSpPr/>
+          <p:nvPr/>
+        </p:nvSpPr>
+        <p:spPr>
+          <a:xfrm>
+            <a:off x="640080" y="3364992"/>
+            <a:ext cx="548640" cy="548640"/>
+          </a:xfrm>
+          <a:prstGeom prst="rect">
+            <a:avLst/>
+          </a:prstGeom>
+          <a:noFill/>
+          <a:ln/>
+        </p:spPr>
+        <p:txBody>
+          <a:bodyPr wrap="square" lIns="508" tIns="508" rIns="508" bIns="508" rtlCol="0" anchor="ctr"/>
+          <a:lstStyle/>
+          <a:p>
+            <a:pPr algn="r" indent="0" marL="0">
+              <a:buNone/>
+            </a:pPr>
+            <a:r>
+              <a:rPr lang="en-US" sz="900" i="1" dirty="0">
+                <a:solidFill>
+                  <a:srgbClr val="555555"/>
+                </a:solidFill>
+              </a:rPr>
+              <a:t>Actual +</a:t>
+            </a:r>
+            <a:endParaRPr lang="en-US" sz="900" dirty="0"/>
+          </a:p>
+        </p:txBody>
+      </p:sp>
+      <p:sp>
+        <p:nvSpPr>
+          <p:cNvPr id="36" name="Text 34"/>
+          <p:cNvSpPr/>
+          <p:nvPr/>
+        </p:nvSpPr>
+        <p:spPr>
+          <a:xfrm>
+            <a:off x="640080" y="3913632"/>
+            <a:ext cx="548640" cy="548640"/>
+          </a:xfrm>
+          <a:prstGeom prst="rect">
+            <a:avLst/>
+          </a:prstGeom>
+          <a:noFill/>
+          <a:ln/>
+        </p:spPr>
+        <p:txBody>
+          <a:bodyPr wrap="square" lIns="508" tIns="508" rIns="508" bIns="508" rtlCol="0" anchor="ctr"/>
+          <a:lstStyle/>
+          <a:p>
+            <a:pPr algn="r" indent="0" marL="0">
+              <a:buNone/>
+            </a:pPr>
+            <a:r>
+              <a:rPr lang="en-US" sz="900" i="1" dirty="0">
+                <a:solidFill>
+                  <a:srgbClr val="555555"/>
+                </a:solidFill>
+              </a:rPr>
+              <a:t>Actual −</a:t>
+            </a:r>
+            <a:endParaRPr lang="en-US" sz="900" dirty="0"/>
+          </a:p>
+        </p:txBody>
+      </p:sp>
+      <p:sp>
+        <p:nvSpPr>
+          <p:cNvPr id="37" name="Shape 35"/>
+          <p:cNvSpPr/>
+          <p:nvPr/>
+        </p:nvSpPr>
+        <p:spPr>
+          <a:xfrm>
+            <a:off x="1188720" y="3438144"/>
+            <a:ext cx="1143000" cy="548640"/>
+          </a:xfrm>
+          <a:prstGeom prst="rect">
+            <a:avLst/>
+          </a:prstGeom>
+          <a:solidFill>
+            <a:srgbClr val="D4F0DC"/>
+          </a:solidFill>
+          <a:ln w="6350">
+            <a:solidFill>
+              <a:srgbClr val="999999"/>
+            </a:solidFill>
+            <a:prstDash val="solid"/>
+          </a:ln>
+        </p:spPr>
+      </p:sp>
+      <p:sp>
+        <p:nvSpPr>
+          <p:cNvPr id="38" name="Text 36"/>
+          <p:cNvSpPr/>
+          <p:nvPr/>
+        </p:nvSpPr>
+        <p:spPr>
+          <a:xfrm>
+            <a:off x="1188720" y="3438144"/>
+            <a:ext cx="1143000" cy="548640"/>
+          </a:xfrm>
+          <a:prstGeom prst="rect">
+            <a:avLst/>
+          </a:prstGeom>
+          <a:noFill/>
+          <a:ln/>
+        </p:spPr>
+        <p:txBody>
+          <a:bodyPr wrap="square" lIns="0" tIns="0" rIns="0" bIns="0" rtlCol="0" anchor="ctr"/>
+          <a:lstStyle/>
+          <a:p>
+            <a:pPr algn="ctr" indent="0" marL="0">
+              <a:buNone/>
+            </a:pPr>
+            <a:r>
+              <a:rPr lang="en-US" sz="2000" b="1" dirty="0">
+                <a:solidFill>
+                  <a:srgbClr val="0A7D2A"/>
+                </a:solidFill>
+              </a:rPr>
+              <a:t>9</a:t>
+            </a:r>
+            <a:endParaRPr lang="en-US" sz="2000" dirty="0"/>
+          </a:p>
+          <a:p>
+            <a:pPr algn="ctr" indent="0" marL="0">
+              <a:buNone/>
+            </a:pPr>
+            <a:r>
+              <a:rPr lang="en-US" sz="900" dirty="0">
+                <a:solidFill>
+                  <a:srgbClr val="666666"/>
+                </a:solidFill>
+              </a:rPr>
+              <a:t>TP</a:t>
+            </a:r>
+            <a:endParaRPr lang="en-US" sz="2000" dirty="0"/>
+          </a:p>
+        </p:txBody>
+      </p:sp>
+      <p:sp>
+        <p:nvSpPr>
+          <p:cNvPr id="39" name="Shape 37"/>
+          <p:cNvSpPr/>
+          <p:nvPr/>
+        </p:nvSpPr>
+        <p:spPr>
+          <a:xfrm>
+            <a:off x="2331720" y="3438144"/>
+            <a:ext cx="1143000" cy="548640"/>
+          </a:xfrm>
+          <a:prstGeom prst="rect">
+            <a:avLst/>
+          </a:prstGeom>
+          <a:solidFill>
+            <a:srgbClr val="F5D5CE"/>
+          </a:solidFill>
+          <a:ln w="6350">
+            <a:solidFill>
+              <a:srgbClr val="999999"/>
+            </a:solidFill>
+            <a:prstDash val="solid"/>
+          </a:ln>
+        </p:spPr>
+      </p:sp>
+      <p:sp>
+        <p:nvSpPr>
+          <p:cNvPr id="40" name="Text 38"/>
+          <p:cNvSpPr/>
+          <p:nvPr/>
+        </p:nvSpPr>
+        <p:spPr>
+          <a:xfrm>
+            <a:off x="2331720" y="3438144"/>
+            <a:ext cx="1143000" cy="548640"/>
+          </a:xfrm>
+          <a:prstGeom prst="rect">
+            <a:avLst/>
+          </a:prstGeom>
+          <a:noFill/>
+          <a:ln/>
+        </p:spPr>
+        <p:txBody>
+          <a:bodyPr wrap="square" lIns="0" tIns="0" rIns="0" bIns="0" rtlCol="0" anchor="ctr"/>
+          <a:lstStyle/>
+          <a:p>
+            <a:pPr algn="ctr" indent="0" marL="0">
+              <a:buNone/>
+            </a:pPr>
+            <a:r>
+              <a:rPr lang="en-US" sz="2000" b="1" dirty="0">
+                <a:solidFill>
+                  <a:srgbClr val="B33A1E"/>
+                </a:solidFill>
+              </a:rPr>
+              <a:t>0</a:t>
+            </a:r>
+            <a:endParaRPr lang="en-US" sz="2000" dirty="0"/>
+          </a:p>
+          <a:p>
+            <a:pPr algn="ctr" indent="0" marL="0">
+              <a:buNone/>
+            </a:pPr>
+            <a:r>
+              <a:rPr lang="en-US" sz="900" dirty="0">
+                <a:solidFill>
+                  <a:srgbClr val="666666"/>
+                </a:solidFill>
+              </a:rPr>
+              <a:t>FN</a:t>
+            </a:r>
+            <a:endParaRPr lang="en-US" sz="2000" dirty="0"/>
+          </a:p>
+        </p:txBody>
+      </p:sp>
+      <p:sp>
+        <p:nvSpPr>
+          <p:cNvPr id="41" name="Shape 39"/>
+          <p:cNvSpPr/>
+          <p:nvPr/>
+        </p:nvSpPr>
+        <p:spPr>
+          <a:xfrm>
+            <a:off x="1188720" y="3986784"/>
+            <a:ext cx="1143000" cy="548640"/>
+          </a:xfrm>
+          <a:prstGeom prst="rect">
+            <a:avLst/>
+          </a:prstGeom>
+          <a:solidFill>
+            <a:srgbClr val="F2F2F2"/>
+          </a:solidFill>
+          <a:ln w="6350">
+            <a:solidFill>
+              <a:srgbClr val="999999"/>
+            </a:solidFill>
+            <a:prstDash val="solid"/>
+          </a:ln>
+        </p:spPr>
+      </p:sp>
+      <p:sp>
+        <p:nvSpPr>
+          <p:cNvPr id="42" name="Text 40"/>
+          <p:cNvSpPr/>
+          <p:nvPr/>
+        </p:nvSpPr>
+        <p:spPr>
+          <a:xfrm>
+            <a:off x="1188720" y="3986784"/>
+            <a:ext cx="1143000" cy="548640"/>
+          </a:xfrm>
+          <a:prstGeom prst="rect">
+            <a:avLst/>
+          </a:prstGeom>
+          <a:noFill/>
+          <a:ln/>
+        </p:spPr>
+        <p:txBody>
+          <a:bodyPr wrap="square" lIns="0" tIns="0" rIns="0" bIns="0" rtlCol="0" anchor="ctr"/>
+          <a:lstStyle/>
+          <a:p>
+            <a:pPr algn="ctr" indent="0" marL="0">
+              <a:buNone/>
+            </a:pPr>
+            <a:r>
+              <a:rPr lang="en-US" sz="2000" b="1" dirty="0">
+                <a:solidFill>
+                  <a:srgbClr val="888888"/>
+                </a:solidFill>
+              </a:rPr>
+              <a:t>0</a:t>
+            </a:r>
+            <a:endParaRPr lang="en-US" sz="2000" dirty="0"/>
+          </a:p>
+          <a:p>
+            <a:pPr algn="ctr" indent="0" marL="0">
+              <a:buNone/>
+            </a:pPr>
+            <a:r>
+              <a:rPr lang="en-US" sz="900" dirty="0">
+                <a:solidFill>
+                  <a:srgbClr val="666666"/>
+                </a:solidFill>
+              </a:rPr>
+              <a:t>FP</a:t>
+            </a:r>
+            <a:endParaRPr lang="en-US" sz="2000" dirty="0"/>
+          </a:p>
+        </p:txBody>
+      </p:sp>
+      <p:sp>
+        <p:nvSpPr>
+          <p:cNvPr id="43" name="Shape 41"/>
+          <p:cNvSpPr/>
+          <p:nvPr/>
+        </p:nvSpPr>
+        <p:spPr>
+          <a:xfrm>
+            <a:off x="2331720" y="3986784"/>
+            <a:ext cx="1143000" cy="548640"/>
+          </a:xfrm>
+          <a:prstGeom prst="rect">
+            <a:avLst/>
+          </a:prstGeom>
+          <a:solidFill>
+            <a:srgbClr val="EAEAEA"/>
+          </a:solidFill>
+          <a:ln w="6350">
+            <a:solidFill>
+              <a:srgbClr val="999999"/>
+            </a:solidFill>
+            <a:prstDash val="solid"/>
+          </a:ln>
+        </p:spPr>
+      </p:sp>
+      <p:sp>
+        <p:nvSpPr>
+          <p:cNvPr id="44" name="Text 42"/>
+          <p:cNvSpPr/>
+          <p:nvPr/>
+        </p:nvSpPr>
+        <p:spPr>
+          <a:xfrm>
+            <a:off x="2331720" y="3986784"/>
+            <a:ext cx="1143000" cy="548640"/>
+          </a:xfrm>
+          <a:prstGeom prst="rect">
+            <a:avLst/>
+          </a:prstGeom>
+          <a:noFill/>
+          <a:ln/>
+        </p:spPr>
+        <p:txBody>
+          <a:bodyPr wrap="square" lIns="0" tIns="0" rIns="0" bIns="0" rtlCol="0" anchor="ctr"/>
+          <a:lstStyle/>
+          <a:p>
+            <a:pPr algn="ctr" indent="0" marL="0">
+              <a:buNone/>
+            </a:pPr>
+            <a:r>
+              <a:rPr lang="en-US" sz="2000" b="1" dirty="0">
+                <a:solidFill>
+                  <a:srgbClr val="555555"/>
+                </a:solidFill>
+              </a:rPr>
+              <a:t>36</a:t>
+            </a:r>
+            <a:endParaRPr lang="en-US" sz="2000" dirty="0"/>
+          </a:p>
+          <a:p>
+            <a:pPr algn="ctr" indent="0" marL="0">
+              <a:buNone/>
+            </a:pPr>
+            <a:r>
+              <a:rPr lang="en-US" sz="900" dirty="0">
+                <a:solidFill>
+                  <a:srgbClr val="666666"/>
+                </a:solidFill>
+              </a:rPr>
+              <a:t>TN</a:t>
+            </a:r>
+            <a:endParaRPr lang="en-US" sz="2000" dirty="0"/>
+          </a:p>
+        </p:txBody>
+      </p:sp>
+      <p:sp>
+        <p:nvSpPr>
+          <p:cNvPr id="45" name="Text 43"/>
+          <p:cNvSpPr/>
+          <p:nvPr/>
+        </p:nvSpPr>
+        <p:spPr>
+          <a:xfrm>
+            <a:off x="640080" y="4553712"/>
+            <a:ext cx="2834640" cy="201168"/>
+          </a:xfrm>
+          <a:prstGeom prst="rect">
+            <a:avLst/>
+          </a:prstGeom>
+          <a:noFill/>
+          <a:ln/>
+        </p:spPr>
+        <p:txBody>
+          <a:bodyPr wrap="square" lIns="0" tIns="0" rIns="0" bIns="0" rtlCol="0" anchor="ctr"/>
+          <a:lstStyle/>
+          <a:p>
+            <a:pPr algn="ctr" indent="0" marL="0">
+              <a:buNone/>
+            </a:pPr>
+            <a:r>
+              <a:rPr lang="en-US" sz="1100" i="1" dirty="0">
+                <a:solidFill>
+                  <a:srgbClr val="555555"/>
+                </a:solidFill>
+              </a:rPr>
+              <a:t>Precision </a:t>
+            </a:r>
+            <a:pPr algn="ctr" indent="0" marL="0">
+              <a:buNone/>
+            </a:pPr>
+            <a:r>
+              <a:rPr lang="en-US" sz="1100" b="1" i="1" dirty="0">
+                <a:solidFill>
+                  <a:srgbClr val="1A1A1A"/>
+                </a:solidFill>
+              </a:rPr>
+              <a:t>1.00</a:t>
+            </a:r>
+            <a:pPr algn="ctr" indent="0" marL="0">
+              <a:buNone/>
+            </a:pPr>
+            <a:r>
+              <a:rPr lang="en-US" sz="1100" i="1" dirty="0">
+                <a:solidFill>
+                  <a:srgbClr val="555555"/>
+                </a:solidFill>
+              </a:rPr>
+              <a:t>   ·   Recall </a:t>
+            </a:r>
+            <a:pPr algn="ctr" indent="0" marL="0">
+              <a:buNone/>
+            </a:pPr>
+            <a:r>
+              <a:rPr lang="en-US" sz="1100" b="1" i="1" dirty="0">
+                <a:solidFill>
+                  <a:srgbClr val="1A1A1A"/>
+                </a:solidFill>
+              </a:rPr>
+              <a:t>1.00</a:t>
+            </a:r>
+            <a:endParaRPr lang="en-US" sz="1100" dirty="0"/>
+          </a:p>
+        </p:txBody>
+      </p:sp>
+      <p:sp>
+        <p:nvSpPr>
+          <p:cNvPr id="46" name="Text 44"/>
+          <p:cNvSpPr/>
+          <p:nvPr/>
+        </p:nvSpPr>
+        <p:spPr>
+          <a:xfrm>
+            <a:off x="4754880" y="2926080"/>
+            <a:ext cx="2834640" cy="201168"/>
+          </a:xfrm>
+          <a:prstGeom prst="rect">
+            <a:avLst/>
+          </a:prstGeom>
+          <a:noFill/>
+          <a:ln/>
+        </p:spPr>
+        <p:txBody>
+          <a:bodyPr wrap="square" lIns="0" tIns="0" rIns="0" bIns="0" rtlCol="0" anchor="b"/>
+          <a:lstStyle/>
+          <a:p>
+            <a:pPr algn="ctr" indent="0" marL="0">
+              <a:buNone/>
+            </a:pPr>
+            <a:r>
+              <a:rPr lang="en-US" sz="1400" b="1" dirty="0">
+                <a:solidFill>
+                  <a:srgbClr val="000000"/>
+                </a:solidFill>
+              </a:rPr>
+              <a:t>Hygiene</a:t>
+            </a:r>
+            <a:endParaRPr lang="en-US" sz="1400" dirty="0"/>
+          </a:p>
+        </p:txBody>
+      </p:sp>
+      <p:sp>
+        <p:nvSpPr>
+          <p:cNvPr id="47" name="Text 45"/>
+          <p:cNvSpPr/>
+          <p:nvPr/>
+        </p:nvSpPr>
+        <p:spPr>
+          <a:xfrm>
+            <a:off x="5303520" y="3145536"/>
+            <a:ext cx="1143000" cy="201168"/>
+          </a:xfrm>
+          <a:prstGeom prst="rect">
+            <a:avLst/>
+          </a:prstGeom>
+          <a:noFill/>
+          <a:ln/>
+        </p:spPr>
+        <p:txBody>
+          <a:bodyPr wrap="square" lIns="0" tIns="0" rIns="0" bIns="0" rtlCol="0" anchor="ctr"/>
+          <a:lstStyle/>
+          <a:p>
+            <a:pPr algn="ctr" indent="0" marL="0">
+              <a:buNone/>
+            </a:pPr>
+            <a:r>
+              <a:rPr lang="en-US" sz="900" i="1" dirty="0">
+                <a:solidFill>
+                  <a:srgbClr val="555555"/>
+                </a:solidFill>
+              </a:rPr>
+              <a:t>Predicted +</a:t>
+            </a:r>
+            <a:endParaRPr lang="en-US" sz="900" dirty="0"/>
+          </a:p>
+        </p:txBody>
+      </p:sp>
+      <p:sp>
+        <p:nvSpPr>
+          <p:cNvPr id="48" name="Text 46"/>
+          <p:cNvSpPr/>
+          <p:nvPr/>
+        </p:nvSpPr>
+        <p:spPr>
+          <a:xfrm>
+            <a:off x="6446520" y="3145536"/>
+            <a:ext cx="1143000" cy="201168"/>
+          </a:xfrm>
+          <a:prstGeom prst="rect">
+            <a:avLst/>
+          </a:prstGeom>
+          <a:noFill/>
+          <a:ln/>
+        </p:spPr>
+        <p:txBody>
+          <a:bodyPr wrap="square" lIns="0" tIns="0" rIns="0" bIns="0" rtlCol="0" anchor="ctr"/>
+          <a:lstStyle/>
+          <a:p>
+            <a:pPr algn="ctr" indent="0" marL="0">
+              <a:buNone/>
+            </a:pPr>
+            <a:r>
+              <a:rPr lang="en-US" sz="900" i="1" dirty="0">
+                <a:solidFill>
+                  <a:srgbClr val="555555"/>
+                </a:solidFill>
+              </a:rPr>
+              <a:t>Predicted −</a:t>
+            </a:r>
+            <a:endParaRPr lang="en-US" sz="900" dirty="0"/>
+          </a:p>
+        </p:txBody>
+      </p:sp>
+      <p:sp>
+        <p:nvSpPr>
+          <p:cNvPr id="49" name="Text 47"/>
+          <p:cNvSpPr/>
+          <p:nvPr/>
+        </p:nvSpPr>
+        <p:spPr>
+          <a:xfrm>
+            <a:off x="4754880" y="3364992"/>
+            <a:ext cx="548640" cy="548640"/>
+          </a:xfrm>
+          <a:prstGeom prst="rect">
+            <a:avLst/>
+          </a:prstGeom>
+          <a:noFill/>
+          <a:ln/>
+        </p:spPr>
+        <p:txBody>
+          <a:bodyPr wrap="square" lIns="508" tIns="508" rIns="508" bIns="508" rtlCol="0" anchor="ctr"/>
+          <a:lstStyle/>
+          <a:p>
+            <a:pPr algn="r" indent="0" marL="0">
+              <a:buNone/>
+            </a:pPr>
+            <a:r>
+              <a:rPr lang="en-US" sz="900" i="1" dirty="0">
+                <a:solidFill>
+                  <a:srgbClr val="555555"/>
+                </a:solidFill>
+              </a:rPr>
+              <a:t>Actual +</a:t>
+            </a:r>
+            <a:endParaRPr lang="en-US" sz="900" dirty="0"/>
+          </a:p>
+        </p:txBody>
+      </p:sp>
+      <p:sp>
+        <p:nvSpPr>
+          <p:cNvPr id="50" name="Text 48"/>
+          <p:cNvSpPr/>
+          <p:nvPr/>
+        </p:nvSpPr>
+        <p:spPr>
+          <a:xfrm>
+            <a:off x="4754880" y="3913632"/>
+            <a:ext cx="548640" cy="548640"/>
+          </a:xfrm>
+          <a:prstGeom prst="rect">
+            <a:avLst/>
+          </a:prstGeom>
+          <a:noFill/>
+          <a:ln/>
+        </p:spPr>
+        <p:txBody>
+          <a:bodyPr wrap="square" lIns="508" tIns="508" rIns="508" bIns="508" rtlCol="0" anchor="ctr"/>
+          <a:lstStyle/>
+          <a:p>
+            <a:pPr algn="r" indent="0" marL="0">
+              <a:buNone/>
+            </a:pPr>
+            <a:r>
+              <a:rPr lang="en-US" sz="900" i="1" dirty="0">
+                <a:solidFill>
+                  <a:srgbClr val="555555"/>
+                </a:solidFill>
+              </a:rPr>
+              <a:t>Actual −</a:t>
+            </a:r>
+            <a:endParaRPr lang="en-US" sz="900" dirty="0"/>
+          </a:p>
+        </p:txBody>
+      </p:sp>
+      <p:sp>
+        <p:nvSpPr>
+          <p:cNvPr id="51" name="Shape 49"/>
+          <p:cNvSpPr/>
+          <p:nvPr/>
+        </p:nvSpPr>
+        <p:spPr>
+          <a:xfrm>
+            <a:off x="5303520" y="3438144"/>
+            <a:ext cx="1143000" cy="548640"/>
+          </a:xfrm>
+          <a:prstGeom prst="rect">
+            <a:avLst/>
+          </a:prstGeom>
+          <a:solidFill>
+            <a:srgbClr val="D4F0DC"/>
+          </a:solidFill>
+          <a:ln w="6350">
+            <a:solidFill>
+              <a:srgbClr val="999999"/>
+            </a:solidFill>
+            <a:prstDash val="solid"/>
+          </a:ln>
+        </p:spPr>
+      </p:sp>
+      <p:sp>
+        <p:nvSpPr>
+          <p:cNvPr id="52" name="Text 50"/>
+          <p:cNvSpPr/>
+          <p:nvPr/>
+        </p:nvSpPr>
+        <p:spPr>
+          <a:xfrm>
+            <a:off x="5303520" y="3438144"/>
+            <a:ext cx="1143000" cy="548640"/>
+          </a:xfrm>
+          <a:prstGeom prst="rect">
+            <a:avLst/>
+          </a:prstGeom>
+          <a:noFill/>
+          <a:ln/>
+        </p:spPr>
+        <p:txBody>
+          <a:bodyPr wrap="square" lIns="0" tIns="0" rIns="0" bIns="0" rtlCol="0" anchor="ctr"/>
+          <a:lstStyle/>
+          <a:p>
+            <a:pPr algn="ctr" indent="0" marL="0">
+              <a:buNone/>
+            </a:pPr>
+            <a:r>
+              <a:rPr lang="en-US" sz="2000" b="1" dirty="0">
+                <a:solidFill>
+                  <a:srgbClr val="0A7D2A"/>
+                </a:solidFill>
+              </a:rPr>
+              <a:t>8</a:t>
+            </a:r>
+            <a:endParaRPr lang="en-US" sz="2000" dirty="0"/>
+          </a:p>
+          <a:p>
+            <a:pPr algn="ctr" indent="0" marL="0">
+              <a:buNone/>
+            </a:pPr>
+            <a:r>
+              <a:rPr lang="en-US" sz="900" dirty="0">
+                <a:solidFill>
+                  <a:srgbClr val="666666"/>
+                </a:solidFill>
+              </a:rPr>
+              <a:t>TP</a:t>
+            </a:r>
+            <a:endParaRPr lang="en-US" sz="2000" dirty="0"/>
+          </a:p>
+        </p:txBody>
+      </p:sp>
+      <p:sp>
+        <p:nvSpPr>
+          <p:cNvPr id="53" name="Shape 51"/>
+          <p:cNvSpPr/>
+          <p:nvPr/>
+        </p:nvSpPr>
+        <p:spPr>
+          <a:xfrm>
+            <a:off x="6446520" y="3438144"/>
+            <a:ext cx="1143000" cy="548640"/>
+          </a:xfrm>
+          <a:prstGeom prst="rect">
+            <a:avLst/>
+          </a:prstGeom>
+          <a:solidFill>
+            <a:srgbClr val="F5D5CE"/>
+          </a:solidFill>
+          <a:ln w="6350">
+            <a:solidFill>
+              <a:srgbClr val="999999"/>
+            </a:solidFill>
+            <a:prstDash val="solid"/>
+          </a:ln>
+        </p:spPr>
+      </p:sp>
+      <p:sp>
+        <p:nvSpPr>
+          <p:cNvPr id="54" name="Text 52"/>
+          <p:cNvSpPr/>
+          <p:nvPr/>
+        </p:nvSpPr>
+        <p:spPr>
+          <a:xfrm>
+            <a:off x="6446520" y="3438144"/>
+            <a:ext cx="1143000" cy="548640"/>
+          </a:xfrm>
+          <a:prstGeom prst="rect">
+            <a:avLst/>
+          </a:prstGeom>
+          <a:noFill/>
+          <a:ln/>
+        </p:spPr>
+        <p:txBody>
+          <a:bodyPr wrap="square" lIns="0" tIns="0" rIns="0" bIns="0" rtlCol="0" anchor="ctr"/>
+          <a:lstStyle/>
+          <a:p>
+            <a:pPr algn="ctr" indent="0" marL="0">
+              <a:buNone/>
+            </a:pPr>
+            <a:r>
+              <a:rPr lang="en-US" sz="2000" b="1" dirty="0">
+                <a:solidFill>
+                  <a:srgbClr val="B33A1E"/>
+                </a:solidFill>
+              </a:rPr>
+              <a:t>0</a:t>
+            </a:r>
+            <a:endParaRPr lang="en-US" sz="2000" dirty="0"/>
+          </a:p>
+          <a:p>
+            <a:pPr algn="ctr" indent="0" marL="0">
+              <a:buNone/>
+            </a:pPr>
+            <a:r>
+              <a:rPr lang="en-US" sz="900" dirty="0">
+                <a:solidFill>
+                  <a:srgbClr val="666666"/>
+                </a:solidFill>
+              </a:rPr>
+              <a:t>FN</a:t>
+            </a:r>
+            <a:endParaRPr lang="en-US" sz="2000" dirty="0"/>
+          </a:p>
+        </p:txBody>
+      </p:sp>
+      <p:sp>
+        <p:nvSpPr>
+          <p:cNvPr id="55" name="Shape 53"/>
+          <p:cNvSpPr/>
+          <p:nvPr/>
+        </p:nvSpPr>
+        <p:spPr>
+          <a:xfrm>
+            <a:off x="5303520" y="3986784"/>
+            <a:ext cx="1143000" cy="548640"/>
+          </a:xfrm>
+          <a:prstGeom prst="rect">
+            <a:avLst/>
+          </a:prstGeom>
+          <a:solidFill>
+            <a:srgbClr val="F2F2F2"/>
+          </a:solidFill>
+          <a:ln w="6350">
+            <a:solidFill>
+              <a:srgbClr val="999999"/>
+            </a:solidFill>
+            <a:prstDash val="solid"/>
+          </a:ln>
+        </p:spPr>
+      </p:sp>
+      <p:sp>
+        <p:nvSpPr>
+          <p:cNvPr id="56" name="Text 54"/>
+          <p:cNvSpPr/>
+          <p:nvPr/>
+        </p:nvSpPr>
+        <p:spPr>
+          <a:xfrm>
+            <a:off x="5303520" y="3986784"/>
+            <a:ext cx="1143000" cy="548640"/>
+          </a:xfrm>
+          <a:prstGeom prst="rect">
+            <a:avLst/>
+          </a:prstGeom>
+          <a:noFill/>
+          <a:ln/>
+        </p:spPr>
+        <p:txBody>
+          <a:bodyPr wrap="square" lIns="0" tIns="0" rIns="0" bIns="0" rtlCol="0" anchor="ctr"/>
+          <a:lstStyle/>
+          <a:p>
+            <a:pPr algn="ctr" indent="0" marL="0">
+              <a:buNone/>
+            </a:pPr>
+            <a:r>
+              <a:rPr lang="en-US" sz="2000" b="1" dirty="0">
+                <a:solidFill>
+                  <a:srgbClr val="888888"/>
+                </a:solidFill>
+              </a:rPr>
+              <a:t>0</a:t>
+            </a:r>
+            <a:endParaRPr lang="en-US" sz="2000" dirty="0"/>
+          </a:p>
+          <a:p>
+            <a:pPr algn="ctr" indent="0" marL="0">
+              <a:buNone/>
+            </a:pPr>
+            <a:r>
+              <a:rPr lang="en-US" sz="900" dirty="0">
+                <a:solidFill>
+                  <a:srgbClr val="666666"/>
+                </a:solidFill>
+              </a:rPr>
+              <a:t>FP</a:t>
+            </a:r>
+            <a:endParaRPr lang="en-US" sz="2000" dirty="0"/>
+          </a:p>
+        </p:txBody>
+      </p:sp>
+      <p:sp>
+        <p:nvSpPr>
+          <p:cNvPr id="57" name="Shape 55"/>
+          <p:cNvSpPr/>
+          <p:nvPr/>
+        </p:nvSpPr>
+        <p:spPr>
+          <a:xfrm>
+            <a:off x="6446520" y="3986784"/>
+            <a:ext cx="1143000" cy="548640"/>
+          </a:xfrm>
+          <a:prstGeom prst="rect">
+            <a:avLst/>
+          </a:prstGeom>
+          <a:solidFill>
+            <a:srgbClr val="EAEAEA"/>
+          </a:solidFill>
+          <a:ln w="6350">
+            <a:solidFill>
+              <a:srgbClr val="999999"/>
+            </a:solidFill>
+            <a:prstDash val="solid"/>
+          </a:ln>
+        </p:spPr>
+      </p:sp>
+      <p:sp>
+        <p:nvSpPr>
+          <p:cNvPr id="58" name="Text 56"/>
+          <p:cNvSpPr/>
+          <p:nvPr/>
+        </p:nvSpPr>
+        <p:spPr>
+          <a:xfrm>
+            <a:off x="6446520" y="3986784"/>
+            <a:ext cx="1143000" cy="548640"/>
+          </a:xfrm>
+          <a:prstGeom prst="rect">
+            <a:avLst/>
+          </a:prstGeom>
+          <a:noFill/>
+          <a:ln/>
+        </p:spPr>
+        <p:txBody>
+          <a:bodyPr wrap="square" lIns="0" tIns="0" rIns="0" bIns="0" rtlCol="0" anchor="ctr"/>
+          <a:lstStyle/>
+          <a:p>
+            <a:pPr algn="ctr" indent="0" marL="0">
+              <a:buNone/>
+            </a:pPr>
+            <a:r>
+              <a:rPr lang="en-US" sz="2000" b="1" dirty="0">
+                <a:solidFill>
+                  <a:srgbClr val="555555"/>
+                </a:solidFill>
+              </a:rPr>
+              <a:t>37</a:t>
+            </a:r>
+            <a:endParaRPr lang="en-US" sz="2000" dirty="0"/>
+          </a:p>
+          <a:p>
+            <a:pPr algn="ctr" indent="0" marL="0">
+              <a:buNone/>
+            </a:pPr>
+            <a:r>
+              <a:rPr lang="en-US" sz="900" dirty="0">
+                <a:solidFill>
+                  <a:srgbClr val="666666"/>
+                </a:solidFill>
+              </a:rPr>
+              <a:t>TN</a:t>
+            </a:r>
+            <a:endParaRPr lang="en-US" sz="2000" dirty="0"/>
+          </a:p>
+        </p:txBody>
+      </p:sp>
+      <p:sp>
+        <p:nvSpPr>
+          <p:cNvPr id="59" name="Text 57"/>
+          <p:cNvSpPr/>
+          <p:nvPr/>
+        </p:nvSpPr>
+        <p:spPr>
+          <a:xfrm>
+            <a:off x="4754880" y="4553712"/>
+            <a:ext cx="2834640" cy="201168"/>
+          </a:xfrm>
+          <a:prstGeom prst="rect">
+            <a:avLst/>
+          </a:prstGeom>
+          <a:noFill/>
+          <a:ln/>
+        </p:spPr>
+        <p:txBody>
+          <a:bodyPr wrap="square" lIns="0" tIns="0" rIns="0" bIns="0" rtlCol="0" anchor="ctr"/>
+          <a:lstStyle/>
+          <a:p>
+            <a:pPr algn="ctr" indent="0" marL="0">
+              <a:buNone/>
+            </a:pPr>
+            <a:r>
+              <a:rPr lang="en-US" sz="1100" i="1" dirty="0">
+                <a:solidFill>
+                  <a:srgbClr val="555555"/>
+                </a:solidFill>
+              </a:rPr>
+              <a:t>Precision </a:t>
+            </a:r>
+            <a:pPr algn="ctr" indent="0" marL="0">
+              <a:buNone/>
+            </a:pPr>
+            <a:r>
+              <a:rPr lang="en-US" sz="1100" b="1" i="1" dirty="0">
+                <a:solidFill>
+                  <a:srgbClr val="1A1A1A"/>
+                </a:solidFill>
+              </a:rPr>
+              <a:t>1.00</a:t>
+            </a:r>
+            <a:pPr algn="ctr" indent="0" marL="0">
+              <a:buNone/>
+            </a:pPr>
+            <a:r>
+              <a:rPr lang="en-US" sz="1100" i="1" dirty="0">
+                <a:solidFill>
+                  <a:srgbClr val="555555"/>
+                </a:solidFill>
+              </a:rPr>
+              <a:t>   ·   Recall </a:t>
+            </a:r>
+            <a:pPr algn="ctr" indent="0" marL="0">
+              <a:buNone/>
+            </a:pPr>
+            <a:r>
+              <a:rPr lang="en-US" sz="1100" b="1" i="1" dirty="0">
+                <a:solidFill>
+                  <a:srgbClr val="1A1A1A"/>
+                </a:solidFill>
+              </a:rPr>
+              <a:t>1.00</a:t>
+            </a:r>
+            <a:endParaRPr lang="en-US" sz="1100" dirty="0"/>
+          </a:p>
+        </p:txBody>
+      </p:sp>
+      <p:sp>
+        <p:nvSpPr>
+          <p:cNvPr id="60" name="Text 58"/>
+          <p:cNvSpPr/>
+          <p:nvPr/>
+        </p:nvSpPr>
+        <p:spPr>
+          <a:xfrm>
+            <a:off x="365760" y="4846320"/>
+            <a:ext cx="8412480" cy="256032"/>
+          </a:xfrm>
+          <a:prstGeom prst="rect">
+            <a:avLst/>
+          </a:prstGeom>
+          <a:noFill/>
+          <a:ln/>
+        </p:spPr>
+        <p:txBody>
+          <a:bodyPr wrap="square" lIns="0" tIns="0" rIns="0" bIns="0" rtlCol="0" anchor="ctr"/>
+          <a:lstStyle/>
+          <a:p>
+            <a:pPr algn="ctr" indent="0" marL="0">
+              <a:buNone/>
+            </a:pPr>
+            <a:r>
+              <a:rPr lang="en-US" sz="900" i="1" dirty="0">
+                <a:solidFill>
+                  <a:srgbClr val="555555"/>
+                </a:solidFill>
+              </a:rPr>
+              <a:t>Ordering recall is the outlier: the reorder synthesiser's splitOnInvalid validator rejects any window containing a step it cannot safely.</a:t>
+            </a:r>
+            <a:endParaRPr lang="en-US" sz="900" dirty="0"/>
+          </a:p>
+        </p:txBody>
+      </p:sp>
     </p:spTree>
   </p:cSld>
   <p:clrMapOvr>
@@ -6455,2578 +8497,6 @@
         </p:nvSpPr>
         <p:spPr>
           <a:xfrm>
-            <a:off x="457200" y="274320"/>
-            <a:ext cx="8229600" cy="640080"/>
-          </a:xfrm>
-          <a:prstGeom prst="rect">
-            <a:avLst/>
-          </a:prstGeom>
-          <a:noFill/>
-          <a:ln/>
-        </p:spPr>
-        <p:txBody>
-          <a:bodyPr wrap="square" lIns="0" tIns="0" rIns="0" bIns="0" rtlCol="0" anchor="ctr"/>
-          <a:lstStyle/>
-          <a:p>
-            <a:pPr indent="0" marL="0">
-              <a:buNone/>
-            </a:pPr>
-            <a:r>
-              <a:rPr lang="en-US" sz="2800" b="1" dirty="0">
-                <a:solidFill>
-                  <a:srgbClr val="000000"/>
-                </a:solidFill>
-              </a:rPr>
-              <a:t>Is the tool accurate?</a:t>
-            </a:r>
-            <a:endParaRPr lang="en-US" sz="2800" dirty="0"/>
-          </a:p>
-        </p:txBody>
-      </p:sp>
-      <p:sp>
-        <p:nvSpPr>
-          <p:cNvPr id="3" name="Text 1"/>
-          <p:cNvSpPr/>
-          <p:nvPr/>
-        </p:nvSpPr>
-        <p:spPr>
-          <a:xfrm>
-            <a:off x="457200" y="1188720"/>
-            <a:ext cx="8229600" cy="3657600"/>
-          </a:xfrm>
-          <a:prstGeom prst="rect">
-            <a:avLst/>
-          </a:prstGeom>
-          <a:noFill/>
-          <a:ln/>
-        </p:spPr>
-        <p:txBody>
-          <a:bodyPr wrap="square" rtlCol="0" anchor="t"/>
-          <a:lstStyle/>
-          <a:p>
-            <a:pPr marL="342900" indent="-342900">
-              <a:spcAft>
-                <a:spcPts val="1000"/>
-              </a:spcAft>
-              <a:buSzPct val="100000"/>
-              <a:buChar char="•"/>
-            </a:pPr>
-            <a:r>
-              <a:rPr lang="en-US" sz="1500" dirty="0">
-                <a:solidFill>
-                  <a:srgbClr val="000000"/>
-                </a:solidFill>
-              </a:rPr>
-              <a:t>45 hand-labelled injection sessions </a:t>
-            </a:r>
-            <a:pPr indent="0" marL="0">
-              <a:spcAft>
-                <a:spcPts val="1000"/>
-              </a:spcAft>
-              <a:buNone/>
-            </a:pPr>
-            <a:r>
-              <a:rPr lang="en-US" sz="1500" dirty="0">
-                <a:solidFill>
-                  <a:srgbClr val="888888"/>
-                </a:solidFill>
-              </a:rPr>
-              <a:t>- on a Java codebase.</a:t>
-            </a:r>
-            <a:endParaRPr lang="en-US" sz="1500" dirty="0"/>
-          </a:p>
-          <a:p>
-            <a:pPr marL="342900" indent="-342900">
-              <a:spcAft>
-                <a:spcPts val="1000"/>
-              </a:spcAft>
-              <a:buSzPct val="100000"/>
-              <a:buChar char="•"/>
-            </a:pPr>
-            <a:r>
-              <a:rPr lang="en-US" sz="1500" dirty="0">
-                <a:solidFill>
-                  <a:srgbClr val="000000"/>
-                </a:solidFill>
-              </a:rPr>
-              <a:t>3 raters (author + 2 external MEng cohort members) </a:t>
-            </a:r>
-            <a:pPr indent="0" marL="0">
-              <a:spcAft>
-                <a:spcPts val="1000"/>
-              </a:spcAft>
-              <a:buNone/>
-            </a:pPr>
-            <a:r>
-              <a:rPr lang="en-US" sz="1500" dirty="0">
-                <a:solidFill>
-                  <a:srgbClr val="888888"/>
-                </a:solidFill>
-              </a:rPr>
-              <a:t>- inter-rater Cohen's κ = 1.00 (Ordering, Manual-Refactor), 0.86–1.00 (Rework), 0.72–0.86 (Hygiene).</a:t>
-            </a:r>
-            <a:endParaRPr lang="en-US" sz="1500" dirty="0"/>
-          </a:p>
-          <a:p>
-            <a:pPr marL="342900" indent="-342900">
-              <a:spcAft>
-                <a:spcPts val="1000"/>
-              </a:spcAft>
-              <a:buSzPct val="100000"/>
-              <a:buChar char="•"/>
-            </a:pPr>
-            <a:r>
-              <a:rPr lang="en-US" sz="1500" dirty="0">
-                <a:solidFill>
-                  <a:srgbClr val="000000"/>
-                </a:solidFill>
-              </a:rPr>
-              <a:t>Disagreements predominantly surrounding hygiene + rework labels </a:t>
-            </a:r>
-            <a:pPr indent="0" marL="0">
-              <a:spcAft>
-                <a:spcPts val="1000"/>
-              </a:spcAft>
-              <a:buNone/>
-            </a:pPr>
-            <a:r>
-              <a:rPr lang="en-US" sz="1500" dirty="0">
-                <a:solidFill>
-                  <a:srgbClr val="888888"/>
-                </a:solidFill>
-              </a:rPr>
-              <a:t>- differences in opinion of what constitutes a step.</a:t>
-            </a:r>
-            <a:endParaRPr lang="en-US" sz="1500" dirty="0"/>
-          </a:p>
-          <a:p>
-            <a:pPr marL="342900" indent="-342900">
-              <a:spcAft>
-                <a:spcPts val="1000"/>
-              </a:spcAft>
-              <a:buSzPct val="100000"/>
-              <a:buChar char="•"/>
-            </a:pPr>
-            <a:r>
-              <a:rPr lang="en-US" sz="1500" dirty="0">
-                <a:solidFill>
-                  <a:srgbClr val="000000"/>
-                </a:solidFill>
-              </a:rPr>
-              <a:t>Track all divergence points detected </a:t>
-            </a:r>
-            <a:pPr indent="0" marL="0">
-              <a:spcAft>
-                <a:spcPts val="1000"/>
-              </a:spcAft>
-              <a:buNone/>
-            </a:pPr>
-            <a:r>
-              <a:rPr lang="en-US" sz="1500" dirty="0">
-                <a:solidFill>
-                  <a:srgbClr val="888888"/>
-                </a:solidFill>
-              </a:rPr>
-              <a:t>- not only ones with a higher process score than the user.</a:t>
-            </a:r>
-            <a:endParaRPr lang="en-US" sz="1500" dirty="0"/>
-          </a:p>
-          <a:p>
-            <a:pPr marL="342900" indent="-342900">
-              <a:spcAft>
-                <a:spcPts val="1000"/>
-              </a:spcAft>
-              <a:buSzPct val="100000"/>
-              <a:buChar char="•"/>
-            </a:pPr>
-            <a:r>
-              <a:rPr lang="en-US" sz="1500" dirty="0">
-                <a:solidFill>
-                  <a:srgbClr val="000000"/>
-                </a:solidFill>
-              </a:rPr>
-              <a:t>Measure precision + recall </a:t>
-            </a:r>
-            <a:pPr indent="0" marL="0">
-              <a:spcAft>
-                <a:spcPts val="1000"/>
-              </a:spcAft>
-              <a:buNone/>
-            </a:pPr>
-            <a:r>
-              <a:rPr lang="en-US" sz="1500" dirty="0">
-                <a:solidFill>
-                  <a:srgbClr val="888888"/>
-                </a:solidFill>
-              </a:rPr>
-              <a:t>- precision guards against FPs that waste the developer's attention. Recall guards against FNs that miss real opportunities. F1 averages the two - so a high score can hide a detector that's annoying users (lots of FPs) or one that's quietly missing things (lots of FNs). Accuracy is dominated by true negatives.</a:t>
-            </a:r>
-            <a:endParaRPr lang="en-US" sz="1500" dirty="0"/>
-          </a:p>
-        </p:txBody>
-      </p:sp>
-    </p:spTree>
-  </p:cSld>
-  <p:clrMapOvr>
-    <a:masterClrMapping/>
-  </p:clrMapOvr>
-</p:sld>
-</file>
-
-<file path=ppt/slides/slide17.xml><?xml version="1.0" encoding="utf-8"?>
-<p:sld xmlns:a="http://schemas.openxmlformats.org/drawingml/2006/main" xmlns:r="http://schemas.openxmlformats.org/officeDocument/2006/relationships" xmlns:p="http://schemas.openxmlformats.org/presentationml/2006/main">
-  <p:cSld name="Slide 17">
-    <p:spTree>
-      <p:nvGrpSpPr>
-        <p:cNvPr id="1" name=""/>
-        <p:cNvGrpSpPr/>
-        <p:nvPr/>
-      </p:nvGrpSpPr>
-      <p:grpSpPr>
-        <a:xfrm>
-          <a:off x="0" y="0"/>
-          <a:ext cx="0" cy="0"/>
-          <a:chOff x="0" y="0"/>
-          <a:chExt cx="0" cy="0"/>
-        </a:xfrm>
-      </p:grpSpPr>
-      <p:sp>
-        <p:nvSpPr>
-          <p:cNvPr id="2" name="Text 0"/>
-          <p:cNvSpPr/>
-          <p:nvPr/>
-        </p:nvSpPr>
-        <p:spPr>
-          <a:xfrm>
-            <a:off x="457200" y="91440"/>
-            <a:ext cx="8229600" cy="548640"/>
-          </a:xfrm>
-          <a:prstGeom prst="rect">
-            <a:avLst/>
-          </a:prstGeom>
-          <a:noFill/>
-          <a:ln/>
-        </p:spPr>
-        <p:txBody>
-          <a:bodyPr wrap="square" lIns="0" tIns="0" rIns="0" bIns="0" rtlCol="0" anchor="ctr"/>
-          <a:lstStyle/>
-          <a:p>
-            <a:pPr indent="0" marL="0">
-              <a:buNone/>
-            </a:pPr>
-            <a:r>
-              <a:rPr lang="en-US" sz="2800" b="1" dirty="0">
-                <a:solidFill>
-                  <a:srgbClr val="000000"/>
-                </a:solidFill>
-              </a:rPr>
-              <a:t>Decision matrix per divergence kind</a:t>
-            </a:r>
-            <a:endParaRPr lang="en-US" sz="2800" dirty="0"/>
-          </a:p>
-        </p:txBody>
-      </p:sp>
-      <p:sp>
-        <p:nvSpPr>
-          <p:cNvPr id="3" name="Text 1"/>
-          <p:cNvSpPr/>
-          <p:nvPr/>
-        </p:nvSpPr>
-        <p:spPr>
-          <a:xfrm>
-            <a:off x="457200" y="658368"/>
-            <a:ext cx="8229600" cy="256032"/>
-          </a:xfrm>
-          <a:prstGeom prst="rect">
-            <a:avLst/>
-          </a:prstGeom>
-          <a:noFill/>
-          <a:ln/>
-        </p:spPr>
-        <p:txBody>
-          <a:bodyPr wrap="square" lIns="0" tIns="0" rIns="0" bIns="0" rtlCol="0" anchor="ctr"/>
-          <a:lstStyle/>
-          <a:p>
-            <a:pPr algn="ctr" indent="0" marL="0">
-              <a:buNone/>
-            </a:pPr>
-            <a:r>
-              <a:rPr lang="en-US" sz="1200" i="1" dirty="0">
-                <a:solidFill>
-                  <a:srgbClr val="555555"/>
-                </a:solidFill>
-              </a:rPr>
-              <a:t>Session-level (45 injection sessions).</a:t>
-            </a:r>
-            <a:endParaRPr lang="en-US" sz="1200" dirty="0"/>
-          </a:p>
-        </p:txBody>
-      </p:sp>
-      <p:sp>
-        <p:nvSpPr>
-          <p:cNvPr id="4" name="Text 2"/>
-          <p:cNvSpPr/>
-          <p:nvPr/>
-        </p:nvSpPr>
-        <p:spPr>
-          <a:xfrm>
-            <a:off x="640080" y="914400"/>
-            <a:ext cx="2834640" cy="201168"/>
-          </a:xfrm>
-          <a:prstGeom prst="rect">
-            <a:avLst/>
-          </a:prstGeom>
-          <a:noFill/>
-          <a:ln/>
-        </p:spPr>
-        <p:txBody>
-          <a:bodyPr wrap="square" lIns="0" tIns="0" rIns="0" bIns="0" rtlCol="0" anchor="b"/>
-          <a:lstStyle/>
-          <a:p>
-            <a:pPr algn="ctr" indent="0" marL="0">
-              <a:buNone/>
-            </a:pPr>
-            <a:r>
-              <a:rPr lang="en-US" sz="1400" b="1" dirty="0">
-                <a:solidFill>
-                  <a:srgbClr val="000000"/>
-                </a:solidFill>
-              </a:rPr>
-              <a:t>Manual-Refactor</a:t>
-            </a:r>
-            <a:endParaRPr lang="en-US" sz="1400" dirty="0"/>
-          </a:p>
-        </p:txBody>
-      </p:sp>
-      <p:sp>
-        <p:nvSpPr>
-          <p:cNvPr id="5" name="Text 3"/>
-          <p:cNvSpPr/>
-          <p:nvPr/>
-        </p:nvSpPr>
-        <p:spPr>
-          <a:xfrm>
-            <a:off x="1188720" y="1133856"/>
-            <a:ext cx="1143000" cy="201168"/>
-          </a:xfrm>
-          <a:prstGeom prst="rect">
-            <a:avLst/>
-          </a:prstGeom>
-          <a:noFill/>
-          <a:ln/>
-        </p:spPr>
-        <p:txBody>
-          <a:bodyPr wrap="square" lIns="0" tIns="0" rIns="0" bIns="0" rtlCol="0" anchor="ctr"/>
-          <a:lstStyle/>
-          <a:p>
-            <a:pPr algn="ctr" indent="0" marL="0">
-              <a:buNone/>
-            </a:pPr>
-            <a:r>
-              <a:rPr lang="en-US" sz="900" i="1" dirty="0">
-                <a:solidFill>
-                  <a:srgbClr val="555555"/>
-                </a:solidFill>
-              </a:rPr>
-              <a:t>Predicted +</a:t>
-            </a:r>
-            <a:endParaRPr lang="en-US" sz="900" dirty="0"/>
-          </a:p>
-        </p:txBody>
-      </p:sp>
-      <p:sp>
-        <p:nvSpPr>
-          <p:cNvPr id="6" name="Text 4"/>
-          <p:cNvSpPr/>
-          <p:nvPr/>
-        </p:nvSpPr>
-        <p:spPr>
-          <a:xfrm>
-            <a:off x="2331720" y="1133856"/>
-            <a:ext cx="1143000" cy="201168"/>
-          </a:xfrm>
-          <a:prstGeom prst="rect">
-            <a:avLst/>
-          </a:prstGeom>
-          <a:noFill/>
-          <a:ln/>
-        </p:spPr>
-        <p:txBody>
-          <a:bodyPr wrap="square" lIns="0" tIns="0" rIns="0" bIns="0" rtlCol="0" anchor="ctr"/>
-          <a:lstStyle/>
-          <a:p>
-            <a:pPr algn="ctr" indent="0" marL="0">
-              <a:buNone/>
-            </a:pPr>
-            <a:r>
-              <a:rPr lang="en-US" sz="900" i="1" dirty="0">
-                <a:solidFill>
-                  <a:srgbClr val="555555"/>
-                </a:solidFill>
-              </a:rPr>
-              <a:t>Predicted −</a:t>
-            </a:r>
-            <a:endParaRPr lang="en-US" sz="900" dirty="0"/>
-          </a:p>
-        </p:txBody>
-      </p:sp>
-      <p:sp>
-        <p:nvSpPr>
-          <p:cNvPr id="7" name="Text 5"/>
-          <p:cNvSpPr/>
-          <p:nvPr/>
-        </p:nvSpPr>
-        <p:spPr>
-          <a:xfrm>
-            <a:off x="640080" y="1353312"/>
-            <a:ext cx="548640" cy="548640"/>
-          </a:xfrm>
-          <a:prstGeom prst="rect">
-            <a:avLst/>
-          </a:prstGeom>
-          <a:noFill/>
-          <a:ln/>
-        </p:spPr>
-        <p:txBody>
-          <a:bodyPr wrap="square" lIns="508" tIns="508" rIns="508" bIns="508" rtlCol="0" anchor="ctr"/>
-          <a:lstStyle/>
-          <a:p>
-            <a:pPr algn="r" indent="0" marL="0">
-              <a:buNone/>
-            </a:pPr>
-            <a:r>
-              <a:rPr lang="en-US" sz="900" i="1" dirty="0">
-                <a:solidFill>
-                  <a:srgbClr val="555555"/>
-                </a:solidFill>
-              </a:rPr>
-              <a:t>Actual +</a:t>
-            </a:r>
-            <a:endParaRPr lang="en-US" sz="900" dirty="0"/>
-          </a:p>
-        </p:txBody>
-      </p:sp>
-      <p:sp>
-        <p:nvSpPr>
-          <p:cNvPr id="8" name="Text 6"/>
-          <p:cNvSpPr/>
-          <p:nvPr/>
-        </p:nvSpPr>
-        <p:spPr>
-          <a:xfrm>
-            <a:off x="640080" y="1901952"/>
-            <a:ext cx="548640" cy="548640"/>
-          </a:xfrm>
-          <a:prstGeom prst="rect">
-            <a:avLst/>
-          </a:prstGeom>
-          <a:noFill/>
-          <a:ln/>
-        </p:spPr>
-        <p:txBody>
-          <a:bodyPr wrap="square" lIns="508" tIns="508" rIns="508" bIns="508" rtlCol="0" anchor="ctr"/>
-          <a:lstStyle/>
-          <a:p>
-            <a:pPr algn="r" indent="0" marL="0">
-              <a:buNone/>
-            </a:pPr>
-            <a:r>
-              <a:rPr lang="en-US" sz="900" i="1" dirty="0">
-                <a:solidFill>
-                  <a:srgbClr val="555555"/>
-                </a:solidFill>
-              </a:rPr>
-              <a:t>Actual −</a:t>
-            </a:r>
-            <a:endParaRPr lang="en-US" sz="900" dirty="0"/>
-          </a:p>
-        </p:txBody>
-      </p:sp>
-      <p:sp>
-        <p:nvSpPr>
-          <p:cNvPr id="9" name="Shape 7"/>
-          <p:cNvSpPr/>
-          <p:nvPr/>
-        </p:nvSpPr>
-        <p:spPr>
-          <a:xfrm>
-            <a:off x="1188720" y="1426464"/>
-            <a:ext cx="1143000" cy="548640"/>
-          </a:xfrm>
-          <a:prstGeom prst="rect">
-            <a:avLst/>
-          </a:prstGeom>
-          <a:solidFill>
-            <a:srgbClr val="D4F0DC"/>
-          </a:solidFill>
-          <a:ln w="6350">
-            <a:solidFill>
-              <a:srgbClr val="999999"/>
-            </a:solidFill>
-            <a:prstDash val="solid"/>
-          </a:ln>
-        </p:spPr>
-      </p:sp>
-      <p:sp>
-        <p:nvSpPr>
-          <p:cNvPr id="10" name="Text 8"/>
-          <p:cNvSpPr/>
-          <p:nvPr/>
-        </p:nvSpPr>
-        <p:spPr>
-          <a:xfrm>
-            <a:off x="1188720" y="1426464"/>
-            <a:ext cx="1143000" cy="548640"/>
-          </a:xfrm>
-          <a:prstGeom prst="rect">
-            <a:avLst/>
-          </a:prstGeom>
-          <a:noFill/>
-          <a:ln/>
-        </p:spPr>
-        <p:txBody>
-          <a:bodyPr wrap="square" lIns="0" tIns="0" rIns="0" bIns="0" rtlCol="0" anchor="ctr"/>
-          <a:lstStyle/>
-          <a:p>
-            <a:pPr algn="ctr" indent="0" marL="0">
-              <a:buNone/>
-            </a:pPr>
-            <a:r>
-              <a:rPr lang="en-US" sz="2000" b="1" dirty="0">
-                <a:solidFill>
-                  <a:srgbClr val="0A7D2A"/>
-                </a:solidFill>
-              </a:rPr>
-              <a:t>16</a:t>
-            </a:r>
-            <a:endParaRPr lang="en-US" sz="2000" dirty="0"/>
-          </a:p>
-          <a:p>
-            <a:pPr algn="ctr" indent="0" marL="0">
-              <a:buNone/>
-            </a:pPr>
-            <a:r>
-              <a:rPr lang="en-US" sz="900" dirty="0">
-                <a:solidFill>
-                  <a:srgbClr val="666666"/>
-                </a:solidFill>
-              </a:rPr>
-              <a:t>TP</a:t>
-            </a:r>
-            <a:endParaRPr lang="en-US" sz="2000" dirty="0"/>
-          </a:p>
-        </p:txBody>
-      </p:sp>
-      <p:sp>
-        <p:nvSpPr>
-          <p:cNvPr id="11" name="Shape 9"/>
-          <p:cNvSpPr/>
-          <p:nvPr/>
-        </p:nvSpPr>
-        <p:spPr>
-          <a:xfrm>
-            <a:off x="2331720" y="1426464"/>
-            <a:ext cx="1143000" cy="548640"/>
-          </a:xfrm>
-          <a:prstGeom prst="rect">
-            <a:avLst/>
-          </a:prstGeom>
-          <a:solidFill>
-            <a:srgbClr val="F5D5CE"/>
-          </a:solidFill>
-          <a:ln w="6350">
-            <a:solidFill>
-              <a:srgbClr val="999999"/>
-            </a:solidFill>
-            <a:prstDash val="solid"/>
-          </a:ln>
-        </p:spPr>
-      </p:sp>
-      <p:sp>
-        <p:nvSpPr>
-          <p:cNvPr id="12" name="Text 10"/>
-          <p:cNvSpPr/>
-          <p:nvPr/>
-        </p:nvSpPr>
-        <p:spPr>
-          <a:xfrm>
-            <a:off x="2331720" y="1426464"/>
-            <a:ext cx="1143000" cy="548640"/>
-          </a:xfrm>
-          <a:prstGeom prst="rect">
-            <a:avLst/>
-          </a:prstGeom>
-          <a:noFill/>
-          <a:ln/>
-        </p:spPr>
-        <p:txBody>
-          <a:bodyPr wrap="square" lIns="0" tIns="0" rIns="0" bIns="0" rtlCol="0" anchor="ctr"/>
-          <a:lstStyle/>
-          <a:p>
-            <a:pPr algn="ctr" indent="0" marL="0">
-              <a:buNone/>
-            </a:pPr>
-            <a:r>
-              <a:rPr lang="en-US" sz="2000" b="1" dirty="0">
-                <a:solidFill>
-                  <a:srgbClr val="B33A1E"/>
-                </a:solidFill>
-              </a:rPr>
-              <a:t>5</a:t>
-            </a:r>
-            <a:endParaRPr lang="en-US" sz="2000" dirty="0"/>
-          </a:p>
-          <a:p>
-            <a:pPr algn="ctr" indent="0" marL="0">
-              <a:buNone/>
-            </a:pPr>
-            <a:r>
-              <a:rPr lang="en-US" sz="900" dirty="0">
-                <a:solidFill>
-                  <a:srgbClr val="666666"/>
-                </a:solidFill>
-              </a:rPr>
-              <a:t>FN</a:t>
-            </a:r>
-            <a:endParaRPr lang="en-US" sz="2000" dirty="0"/>
-          </a:p>
-        </p:txBody>
-      </p:sp>
-      <p:sp>
-        <p:nvSpPr>
-          <p:cNvPr id="13" name="Shape 11"/>
-          <p:cNvSpPr/>
-          <p:nvPr/>
-        </p:nvSpPr>
-        <p:spPr>
-          <a:xfrm>
-            <a:off x="1188720" y="1975104"/>
-            <a:ext cx="1143000" cy="548640"/>
-          </a:xfrm>
-          <a:prstGeom prst="rect">
-            <a:avLst/>
-          </a:prstGeom>
-          <a:solidFill>
-            <a:srgbClr val="F2F2F2"/>
-          </a:solidFill>
-          <a:ln w="6350">
-            <a:solidFill>
-              <a:srgbClr val="999999"/>
-            </a:solidFill>
-            <a:prstDash val="solid"/>
-          </a:ln>
-        </p:spPr>
-      </p:sp>
-      <p:sp>
-        <p:nvSpPr>
-          <p:cNvPr id="14" name="Text 12"/>
-          <p:cNvSpPr/>
-          <p:nvPr/>
-        </p:nvSpPr>
-        <p:spPr>
-          <a:xfrm>
-            <a:off x="1188720" y="1975104"/>
-            <a:ext cx="1143000" cy="548640"/>
-          </a:xfrm>
-          <a:prstGeom prst="rect">
-            <a:avLst/>
-          </a:prstGeom>
-          <a:noFill/>
-          <a:ln/>
-        </p:spPr>
-        <p:txBody>
-          <a:bodyPr wrap="square" lIns="0" tIns="0" rIns="0" bIns="0" rtlCol="0" anchor="ctr"/>
-          <a:lstStyle/>
-          <a:p>
-            <a:pPr algn="ctr" indent="0" marL="0">
-              <a:buNone/>
-            </a:pPr>
-            <a:r>
-              <a:rPr lang="en-US" sz="2000" b="1" dirty="0">
-                <a:solidFill>
-                  <a:srgbClr val="888888"/>
-                </a:solidFill>
-              </a:rPr>
-              <a:t>0</a:t>
-            </a:r>
-            <a:endParaRPr lang="en-US" sz="2000" dirty="0"/>
-          </a:p>
-          <a:p>
-            <a:pPr algn="ctr" indent="0" marL="0">
-              <a:buNone/>
-            </a:pPr>
-            <a:r>
-              <a:rPr lang="en-US" sz="900" dirty="0">
-                <a:solidFill>
-                  <a:srgbClr val="666666"/>
-                </a:solidFill>
-              </a:rPr>
-              <a:t>FP</a:t>
-            </a:r>
-            <a:endParaRPr lang="en-US" sz="2000" dirty="0"/>
-          </a:p>
-        </p:txBody>
-      </p:sp>
-      <p:sp>
-        <p:nvSpPr>
-          <p:cNvPr id="15" name="Shape 13"/>
-          <p:cNvSpPr/>
-          <p:nvPr/>
-        </p:nvSpPr>
-        <p:spPr>
-          <a:xfrm>
-            <a:off x="2331720" y="1975104"/>
-            <a:ext cx="1143000" cy="548640"/>
-          </a:xfrm>
-          <a:prstGeom prst="rect">
-            <a:avLst/>
-          </a:prstGeom>
-          <a:solidFill>
-            <a:srgbClr val="EAEAEA"/>
-          </a:solidFill>
-          <a:ln w="6350">
-            <a:solidFill>
-              <a:srgbClr val="999999"/>
-            </a:solidFill>
-            <a:prstDash val="solid"/>
-          </a:ln>
-        </p:spPr>
-      </p:sp>
-      <p:sp>
-        <p:nvSpPr>
-          <p:cNvPr id="16" name="Text 14"/>
-          <p:cNvSpPr/>
-          <p:nvPr/>
-        </p:nvSpPr>
-        <p:spPr>
-          <a:xfrm>
-            <a:off x="2331720" y="1975104"/>
-            <a:ext cx="1143000" cy="548640"/>
-          </a:xfrm>
-          <a:prstGeom prst="rect">
-            <a:avLst/>
-          </a:prstGeom>
-          <a:noFill/>
-          <a:ln/>
-        </p:spPr>
-        <p:txBody>
-          <a:bodyPr wrap="square" lIns="0" tIns="0" rIns="0" bIns="0" rtlCol="0" anchor="ctr"/>
-          <a:lstStyle/>
-          <a:p>
-            <a:pPr algn="ctr" indent="0" marL="0">
-              <a:buNone/>
-            </a:pPr>
-            <a:r>
-              <a:rPr lang="en-US" sz="2000" b="1" dirty="0">
-                <a:solidFill>
-                  <a:srgbClr val="555555"/>
-                </a:solidFill>
-              </a:rPr>
-              <a:t>24</a:t>
-            </a:r>
-            <a:endParaRPr lang="en-US" sz="2000" dirty="0"/>
-          </a:p>
-          <a:p>
-            <a:pPr algn="ctr" indent="0" marL="0">
-              <a:buNone/>
-            </a:pPr>
-            <a:r>
-              <a:rPr lang="en-US" sz="900" dirty="0">
-                <a:solidFill>
-                  <a:srgbClr val="666666"/>
-                </a:solidFill>
-              </a:rPr>
-              <a:t>TN</a:t>
-            </a:r>
-            <a:endParaRPr lang="en-US" sz="2000" dirty="0"/>
-          </a:p>
-        </p:txBody>
-      </p:sp>
-      <p:sp>
-        <p:nvSpPr>
-          <p:cNvPr id="17" name="Text 15"/>
-          <p:cNvSpPr/>
-          <p:nvPr/>
-        </p:nvSpPr>
-        <p:spPr>
-          <a:xfrm>
-            <a:off x="640080" y="2542032"/>
-            <a:ext cx="2834640" cy="201168"/>
-          </a:xfrm>
-          <a:prstGeom prst="rect">
-            <a:avLst/>
-          </a:prstGeom>
-          <a:noFill/>
-          <a:ln/>
-        </p:spPr>
-        <p:txBody>
-          <a:bodyPr wrap="square" lIns="0" tIns="0" rIns="0" bIns="0" rtlCol="0" anchor="ctr"/>
-          <a:lstStyle/>
-          <a:p>
-            <a:pPr algn="ctr" indent="0" marL="0">
-              <a:buNone/>
-            </a:pPr>
-            <a:r>
-              <a:rPr lang="en-US" sz="1100" i="1" dirty="0">
-                <a:solidFill>
-                  <a:srgbClr val="555555"/>
-                </a:solidFill>
-              </a:rPr>
-              <a:t>Precision </a:t>
-            </a:r>
-            <a:pPr algn="ctr" indent="0" marL="0">
-              <a:buNone/>
-            </a:pPr>
-            <a:r>
-              <a:rPr lang="en-US" sz="1100" b="1" i="1" dirty="0">
-                <a:solidFill>
-                  <a:srgbClr val="1A1A1A"/>
-                </a:solidFill>
-              </a:rPr>
-              <a:t>1.00</a:t>
-            </a:r>
-            <a:pPr algn="ctr" indent="0" marL="0">
-              <a:buNone/>
-            </a:pPr>
-            <a:r>
-              <a:rPr lang="en-US" sz="1100" i="1" dirty="0">
-                <a:solidFill>
-                  <a:srgbClr val="555555"/>
-                </a:solidFill>
-              </a:rPr>
-              <a:t>   ·   Recall </a:t>
-            </a:r>
-            <a:pPr algn="ctr" indent="0" marL="0">
-              <a:buNone/>
-            </a:pPr>
-            <a:r>
-              <a:rPr lang="en-US" sz="1100" b="1" i="1" dirty="0">
-                <a:solidFill>
-                  <a:srgbClr val="1A1A1A"/>
-                </a:solidFill>
-              </a:rPr>
-              <a:t>0.76</a:t>
-            </a:r>
-            <a:endParaRPr lang="en-US" sz="1100" dirty="0"/>
-          </a:p>
-        </p:txBody>
-      </p:sp>
-      <p:sp>
-        <p:nvSpPr>
-          <p:cNvPr id="18" name="Text 16"/>
-          <p:cNvSpPr/>
-          <p:nvPr/>
-        </p:nvSpPr>
-        <p:spPr>
-          <a:xfrm>
-            <a:off x="4754880" y="914400"/>
-            <a:ext cx="2834640" cy="201168"/>
-          </a:xfrm>
-          <a:prstGeom prst="rect">
-            <a:avLst/>
-          </a:prstGeom>
-          <a:noFill/>
-          <a:ln/>
-        </p:spPr>
-        <p:txBody>
-          <a:bodyPr wrap="square" lIns="0" tIns="0" rIns="0" bIns="0" rtlCol="0" anchor="b"/>
-          <a:lstStyle/>
-          <a:p>
-            <a:pPr algn="ctr" indent="0" marL="0">
-              <a:buNone/>
-            </a:pPr>
-            <a:r>
-              <a:rPr lang="en-US" sz="1400" b="1" dirty="0">
-                <a:solidFill>
-                  <a:srgbClr val="000000"/>
-                </a:solidFill>
-              </a:rPr>
-              <a:t>Ordering</a:t>
-            </a:r>
-            <a:endParaRPr lang="en-US" sz="1400" dirty="0"/>
-          </a:p>
-        </p:txBody>
-      </p:sp>
-      <p:sp>
-        <p:nvSpPr>
-          <p:cNvPr id="19" name="Text 17"/>
-          <p:cNvSpPr/>
-          <p:nvPr/>
-        </p:nvSpPr>
-        <p:spPr>
-          <a:xfrm>
-            <a:off x="5303520" y="1133856"/>
-            <a:ext cx="1143000" cy="201168"/>
-          </a:xfrm>
-          <a:prstGeom prst="rect">
-            <a:avLst/>
-          </a:prstGeom>
-          <a:noFill/>
-          <a:ln/>
-        </p:spPr>
-        <p:txBody>
-          <a:bodyPr wrap="square" lIns="0" tIns="0" rIns="0" bIns="0" rtlCol="0" anchor="ctr"/>
-          <a:lstStyle/>
-          <a:p>
-            <a:pPr algn="ctr" indent="0" marL="0">
-              <a:buNone/>
-            </a:pPr>
-            <a:r>
-              <a:rPr lang="en-US" sz="900" i="1" dirty="0">
-                <a:solidFill>
-                  <a:srgbClr val="555555"/>
-                </a:solidFill>
-              </a:rPr>
-              <a:t>Predicted +</a:t>
-            </a:r>
-            <a:endParaRPr lang="en-US" sz="900" dirty="0"/>
-          </a:p>
-        </p:txBody>
-      </p:sp>
-      <p:sp>
-        <p:nvSpPr>
-          <p:cNvPr id="20" name="Text 18"/>
-          <p:cNvSpPr/>
-          <p:nvPr/>
-        </p:nvSpPr>
-        <p:spPr>
-          <a:xfrm>
-            <a:off x="6446520" y="1133856"/>
-            <a:ext cx="1143000" cy="201168"/>
-          </a:xfrm>
-          <a:prstGeom prst="rect">
-            <a:avLst/>
-          </a:prstGeom>
-          <a:noFill/>
-          <a:ln/>
-        </p:spPr>
-        <p:txBody>
-          <a:bodyPr wrap="square" lIns="0" tIns="0" rIns="0" bIns="0" rtlCol="0" anchor="ctr"/>
-          <a:lstStyle/>
-          <a:p>
-            <a:pPr algn="ctr" indent="0" marL="0">
-              <a:buNone/>
-            </a:pPr>
-            <a:r>
-              <a:rPr lang="en-US" sz="900" i="1" dirty="0">
-                <a:solidFill>
-                  <a:srgbClr val="555555"/>
-                </a:solidFill>
-              </a:rPr>
-              <a:t>Predicted −</a:t>
-            </a:r>
-            <a:endParaRPr lang="en-US" sz="900" dirty="0"/>
-          </a:p>
-        </p:txBody>
-      </p:sp>
-      <p:sp>
-        <p:nvSpPr>
-          <p:cNvPr id="21" name="Text 19"/>
-          <p:cNvSpPr/>
-          <p:nvPr/>
-        </p:nvSpPr>
-        <p:spPr>
-          <a:xfrm>
-            <a:off x="4754880" y="1353312"/>
-            <a:ext cx="548640" cy="548640"/>
-          </a:xfrm>
-          <a:prstGeom prst="rect">
-            <a:avLst/>
-          </a:prstGeom>
-          <a:noFill/>
-          <a:ln/>
-        </p:spPr>
-        <p:txBody>
-          <a:bodyPr wrap="square" lIns="508" tIns="508" rIns="508" bIns="508" rtlCol="0" anchor="ctr"/>
-          <a:lstStyle/>
-          <a:p>
-            <a:pPr algn="r" indent="0" marL="0">
-              <a:buNone/>
-            </a:pPr>
-            <a:r>
-              <a:rPr lang="en-US" sz="900" i="1" dirty="0">
-                <a:solidFill>
-                  <a:srgbClr val="555555"/>
-                </a:solidFill>
-              </a:rPr>
-              <a:t>Actual +</a:t>
-            </a:r>
-            <a:endParaRPr lang="en-US" sz="900" dirty="0"/>
-          </a:p>
-        </p:txBody>
-      </p:sp>
-      <p:sp>
-        <p:nvSpPr>
-          <p:cNvPr id="22" name="Text 20"/>
-          <p:cNvSpPr/>
-          <p:nvPr/>
-        </p:nvSpPr>
-        <p:spPr>
-          <a:xfrm>
-            <a:off x="4754880" y="1901952"/>
-            <a:ext cx="548640" cy="548640"/>
-          </a:xfrm>
-          <a:prstGeom prst="rect">
-            <a:avLst/>
-          </a:prstGeom>
-          <a:noFill/>
-          <a:ln/>
-        </p:spPr>
-        <p:txBody>
-          <a:bodyPr wrap="square" lIns="508" tIns="508" rIns="508" bIns="508" rtlCol="0" anchor="ctr"/>
-          <a:lstStyle/>
-          <a:p>
-            <a:pPr algn="r" indent="0" marL="0">
-              <a:buNone/>
-            </a:pPr>
-            <a:r>
-              <a:rPr lang="en-US" sz="900" i="1" dirty="0">
-                <a:solidFill>
-                  <a:srgbClr val="555555"/>
-                </a:solidFill>
-              </a:rPr>
-              <a:t>Actual −</a:t>
-            </a:r>
-            <a:endParaRPr lang="en-US" sz="900" dirty="0"/>
-          </a:p>
-        </p:txBody>
-      </p:sp>
-      <p:sp>
-        <p:nvSpPr>
-          <p:cNvPr id="23" name="Shape 21"/>
-          <p:cNvSpPr/>
-          <p:nvPr/>
-        </p:nvSpPr>
-        <p:spPr>
-          <a:xfrm>
-            <a:off x="5303520" y="1426464"/>
-            <a:ext cx="1143000" cy="548640"/>
-          </a:xfrm>
-          <a:prstGeom prst="rect">
-            <a:avLst/>
-          </a:prstGeom>
-          <a:solidFill>
-            <a:srgbClr val="D4F0DC"/>
-          </a:solidFill>
-          <a:ln w="6350">
-            <a:solidFill>
-              <a:srgbClr val="999999"/>
-            </a:solidFill>
-            <a:prstDash val="solid"/>
-          </a:ln>
-        </p:spPr>
-      </p:sp>
-      <p:sp>
-        <p:nvSpPr>
-          <p:cNvPr id="24" name="Text 22"/>
-          <p:cNvSpPr/>
-          <p:nvPr/>
-        </p:nvSpPr>
-        <p:spPr>
-          <a:xfrm>
-            <a:off x="5303520" y="1426464"/>
-            <a:ext cx="1143000" cy="548640"/>
-          </a:xfrm>
-          <a:prstGeom prst="rect">
-            <a:avLst/>
-          </a:prstGeom>
-          <a:noFill/>
-          <a:ln/>
-        </p:spPr>
-        <p:txBody>
-          <a:bodyPr wrap="square" lIns="0" tIns="0" rIns="0" bIns="0" rtlCol="0" anchor="ctr"/>
-          <a:lstStyle/>
-          <a:p>
-            <a:pPr algn="ctr" indent="0" marL="0">
-              <a:buNone/>
-            </a:pPr>
-            <a:r>
-              <a:rPr lang="en-US" sz="2000" b="1" dirty="0">
-                <a:solidFill>
-                  <a:srgbClr val="0A7D2A"/>
-                </a:solidFill>
-              </a:rPr>
-              <a:t>14</a:t>
-            </a:r>
-            <a:endParaRPr lang="en-US" sz="2000" dirty="0"/>
-          </a:p>
-          <a:p>
-            <a:pPr algn="ctr" indent="0" marL="0">
-              <a:buNone/>
-            </a:pPr>
-            <a:r>
-              <a:rPr lang="en-US" sz="900" dirty="0">
-                <a:solidFill>
-                  <a:srgbClr val="666666"/>
-                </a:solidFill>
-              </a:rPr>
-              <a:t>TP</a:t>
-            </a:r>
-            <a:endParaRPr lang="en-US" sz="2000" dirty="0"/>
-          </a:p>
-        </p:txBody>
-      </p:sp>
-      <p:sp>
-        <p:nvSpPr>
-          <p:cNvPr id="25" name="Shape 23"/>
-          <p:cNvSpPr/>
-          <p:nvPr/>
-        </p:nvSpPr>
-        <p:spPr>
-          <a:xfrm>
-            <a:off x="6446520" y="1426464"/>
-            <a:ext cx="1143000" cy="548640"/>
-          </a:xfrm>
-          <a:prstGeom prst="rect">
-            <a:avLst/>
-          </a:prstGeom>
-          <a:solidFill>
-            <a:srgbClr val="F5D5CE"/>
-          </a:solidFill>
-          <a:ln w="6350">
-            <a:solidFill>
-              <a:srgbClr val="999999"/>
-            </a:solidFill>
-            <a:prstDash val="solid"/>
-          </a:ln>
-        </p:spPr>
-      </p:sp>
-      <p:sp>
-        <p:nvSpPr>
-          <p:cNvPr id="26" name="Text 24"/>
-          <p:cNvSpPr/>
-          <p:nvPr/>
-        </p:nvSpPr>
-        <p:spPr>
-          <a:xfrm>
-            <a:off x="6446520" y="1426464"/>
-            <a:ext cx="1143000" cy="548640"/>
-          </a:xfrm>
-          <a:prstGeom prst="rect">
-            <a:avLst/>
-          </a:prstGeom>
-          <a:noFill/>
-          <a:ln/>
-        </p:spPr>
-        <p:txBody>
-          <a:bodyPr wrap="square" lIns="0" tIns="0" rIns="0" bIns="0" rtlCol="0" anchor="ctr"/>
-          <a:lstStyle/>
-          <a:p>
-            <a:pPr algn="ctr" indent="0" marL="0">
-              <a:buNone/>
-            </a:pPr>
-            <a:r>
-              <a:rPr lang="en-US" sz="2000" b="1" dirty="0">
-                <a:solidFill>
-                  <a:srgbClr val="B33A1E"/>
-                </a:solidFill>
-              </a:rPr>
-              <a:t>24</a:t>
-            </a:r>
-            <a:endParaRPr lang="en-US" sz="2000" dirty="0"/>
-          </a:p>
-          <a:p>
-            <a:pPr algn="ctr" indent="0" marL="0">
-              <a:buNone/>
-            </a:pPr>
-            <a:r>
-              <a:rPr lang="en-US" sz="900" dirty="0">
-                <a:solidFill>
-                  <a:srgbClr val="666666"/>
-                </a:solidFill>
-              </a:rPr>
-              <a:t>FN</a:t>
-            </a:r>
-            <a:endParaRPr lang="en-US" sz="2000" dirty="0"/>
-          </a:p>
-        </p:txBody>
-      </p:sp>
-      <p:sp>
-        <p:nvSpPr>
-          <p:cNvPr id="27" name="Shape 25"/>
-          <p:cNvSpPr/>
-          <p:nvPr/>
-        </p:nvSpPr>
-        <p:spPr>
-          <a:xfrm>
-            <a:off x="5303520" y="1975104"/>
-            <a:ext cx="1143000" cy="548640"/>
-          </a:xfrm>
-          <a:prstGeom prst="rect">
-            <a:avLst/>
-          </a:prstGeom>
-          <a:solidFill>
-            <a:srgbClr val="F2F2F2"/>
-          </a:solidFill>
-          <a:ln w="6350">
-            <a:solidFill>
-              <a:srgbClr val="999999"/>
-            </a:solidFill>
-            <a:prstDash val="solid"/>
-          </a:ln>
-        </p:spPr>
-      </p:sp>
-      <p:sp>
-        <p:nvSpPr>
-          <p:cNvPr id="28" name="Text 26"/>
-          <p:cNvSpPr/>
-          <p:nvPr/>
-        </p:nvSpPr>
-        <p:spPr>
-          <a:xfrm>
-            <a:off x="5303520" y="1975104"/>
-            <a:ext cx="1143000" cy="548640"/>
-          </a:xfrm>
-          <a:prstGeom prst="rect">
-            <a:avLst/>
-          </a:prstGeom>
-          <a:noFill/>
-          <a:ln/>
-        </p:spPr>
-        <p:txBody>
-          <a:bodyPr wrap="square" lIns="0" tIns="0" rIns="0" bIns="0" rtlCol="0" anchor="ctr"/>
-          <a:lstStyle/>
-          <a:p>
-            <a:pPr algn="ctr" indent="0" marL="0">
-              <a:buNone/>
-            </a:pPr>
-            <a:r>
-              <a:rPr lang="en-US" sz="2000" b="1" dirty="0">
-                <a:solidFill>
-                  <a:srgbClr val="888888"/>
-                </a:solidFill>
-              </a:rPr>
-              <a:t>0</a:t>
-            </a:r>
-            <a:endParaRPr lang="en-US" sz="2000" dirty="0"/>
-          </a:p>
-          <a:p>
-            <a:pPr algn="ctr" indent="0" marL="0">
-              <a:buNone/>
-            </a:pPr>
-            <a:r>
-              <a:rPr lang="en-US" sz="900" dirty="0">
-                <a:solidFill>
-                  <a:srgbClr val="666666"/>
-                </a:solidFill>
-              </a:rPr>
-              <a:t>FP</a:t>
-            </a:r>
-            <a:endParaRPr lang="en-US" sz="2000" dirty="0"/>
-          </a:p>
-        </p:txBody>
-      </p:sp>
-      <p:sp>
-        <p:nvSpPr>
-          <p:cNvPr id="29" name="Shape 27"/>
-          <p:cNvSpPr/>
-          <p:nvPr/>
-        </p:nvSpPr>
-        <p:spPr>
-          <a:xfrm>
-            <a:off x="6446520" y="1975104"/>
-            <a:ext cx="1143000" cy="548640"/>
-          </a:xfrm>
-          <a:prstGeom prst="rect">
-            <a:avLst/>
-          </a:prstGeom>
-          <a:solidFill>
-            <a:srgbClr val="EAEAEA"/>
-          </a:solidFill>
-          <a:ln w="6350">
-            <a:solidFill>
-              <a:srgbClr val="999999"/>
-            </a:solidFill>
-            <a:prstDash val="solid"/>
-          </a:ln>
-        </p:spPr>
-      </p:sp>
-      <p:sp>
-        <p:nvSpPr>
-          <p:cNvPr id="30" name="Text 28"/>
-          <p:cNvSpPr/>
-          <p:nvPr/>
-        </p:nvSpPr>
-        <p:spPr>
-          <a:xfrm>
-            <a:off x="6446520" y="1975104"/>
-            <a:ext cx="1143000" cy="548640"/>
-          </a:xfrm>
-          <a:prstGeom prst="rect">
-            <a:avLst/>
-          </a:prstGeom>
-          <a:noFill/>
-          <a:ln/>
-        </p:spPr>
-        <p:txBody>
-          <a:bodyPr wrap="square" lIns="0" tIns="0" rIns="0" bIns="0" rtlCol="0" anchor="ctr"/>
-          <a:lstStyle/>
-          <a:p>
-            <a:pPr algn="ctr" indent="0" marL="0">
-              <a:buNone/>
-            </a:pPr>
-            <a:r>
-              <a:rPr lang="en-US" sz="2000" b="1" dirty="0">
-                <a:solidFill>
-                  <a:srgbClr val="555555"/>
-                </a:solidFill>
-              </a:rPr>
-              <a:t>7</a:t>
-            </a:r>
-            <a:endParaRPr lang="en-US" sz="2000" dirty="0"/>
-          </a:p>
-          <a:p>
-            <a:pPr algn="ctr" indent="0" marL="0">
-              <a:buNone/>
-            </a:pPr>
-            <a:r>
-              <a:rPr lang="en-US" sz="900" dirty="0">
-                <a:solidFill>
-                  <a:srgbClr val="666666"/>
-                </a:solidFill>
-              </a:rPr>
-              <a:t>TN</a:t>
-            </a:r>
-            <a:endParaRPr lang="en-US" sz="2000" dirty="0"/>
-          </a:p>
-        </p:txBody>
-      </p:sp>
-      <p:sp>
-        <p:nvSpPr>
-          <p:cNvPr id="31" name="Text 29"/>
-          <p:cNvSpPr/>
-          <p:nvPr/>
-        </p:nvSpPr>
-        <p:spPr>
-          <a:xfrm>
-            <a:off x="4754880" y="2542032"/>
-            <a:ext cx="2834640" cy="201168"/>
-          </a:xfrm>
-          <a:prstGeom prst="rect">
-            <a:avLst/>
-          </a:prstGeom>
-          <a:noFill/>
-          <a:ln/>
-        </p:spPr>
-        <p:txBody>
-          <a:bodyPr wrap="square" lIns="0" tIns="0" rIns="0" bIns="0" rtlCol="0" anchor="ctr"/>
-          <a:lstStyle/>
-          <a:p>
-            <a:pPr algn="ctr" indent="0" marL="0">
-              <a:buNone/>
-            </a:pPr>
-            <a:r>
-              <a:rPr lang="en-US" sz="1100" i="1" dirty="0">
-                <a:solidFill>
-                  <a:srgbClr val="555555"/>
-                </a:solidFill>
-              </a:rPr>
-              <a:t>Precision </a:t>
-            </a:r>
-            <a:pPr algn="ctr" indent="0" marL="0">
-              <a:buNone/>
-            </a:pPr>
-            <a:r>
-              <a:rPr lang="en-US" sz="1100" b="1" i="1" dirty="0">
-                <a:solidFill>
-                  <a:srgbClr val="1A1A1A"/>
-                </a:solidFill>
-              </a:rPr>
-              <a:t>1.00</a:t>
-            </a:r>
-            <a:pPr algn="ctr" indent="0" marL="0">
-              <a:buNone/>
-            </a:pPr>
-            <a:r>
-              <a:rPr lang="en-US" sz="1100" i="1" dirty="0">
-                <a:solidFill>
-                  <a:srgbClr val="555555"/>
-                </a:solidFill>
-              </a:rPr>
-              <a:t>   ·   Recall </a:t>
-            </a:r>
-            <a:pPr algn="ctr" indent="0" marL="0">
-              <a:buNone/>
-            </a:pPr>
-            <a:r>
-              <a:rPr lang="en-US" sz="1100" b="1" i="1" dirty="0">
-                <a:solidFill>
-                  <a:srgbClr val="1A1A1A"/>
-                </a:solidFill>
-              </a:rPr>
-              <a:t>0.36</a:t>
-            </a:r>
-            <a:endParaRPr lang="en-US" sz="1100" dirty="0"/>
-          </a:p>
-        </p:txBody>
-      </p:sp>
-      <p:sp>
-        <p:nvSpPr>
-          <p:cNvPr id="32" name="Text 30"/>
-          <p:cNvSpPr/>
-          <p:nvPr/>
-        </p:nvSpPr>
-        <p:spPr>
-          <a:xfrm>
-            <a:off x="640080" y="2926080"/>
-            <a:ext cx="2834640" cy="201168"/>
-          </a:xfrm>
-          <a:prstGeom prst="rect">
-            <a:avLst/>
-          </a:prstGeom>
-          <a:noFill/>
-          <a:ln/>
-        </p:spPr>
-        <p:txBody>
-          <a:bodyPr wrap="square" lIns="0" tIns="0" rIns="0" bIns="0" rtlCol="0" anchor="b"/>
-          <a:lstStyle/>
-          <a:p>
-            <a:pPr algn="ctr" indent="0" marL="0">
-              <a:buNone/>
-            </a:pPr>
-            <a:r>
-              <a:rPr lang="en-US" sz="1400" b="1" dirty="0">
-                <a:solidFill>
-                  <a:srgbClr val="000000"/>
-                </a:solidFill>
-              </a:rPr>
-              <a:t>Rework</a:t>
-            </a:r>
-            <a:endParaRPr lang="en-US" sz="1400" dirty="0"/>
-          </a:p>
-        </p:txBody>
-      </p:sp>
-      <p:sp>
-        <p:nvSpPr>
-          <p:cNvPr id="33" name="Text 31"/>
-          <p:cNvSpPr/>
-          <p:nvPr/>
-        </p:nvSpPr>
-        <p:spPr>
-          <a:xfrm>
-            <a:off x="1188720" y="3145536"/>
-            <a:ext cx="1143000" cy="201168"/>
-          </a:xfrm>
-          <a:prstGeom prst="rect">
-            <a:avLst/>
-          </a:prstGeom>
-          <a:noFill/>
-          <a:ln/>
-        </p:spPr>
-        <p:txBody>
-          <a:bodyPr wrap="square" lIns="0" tIns="0" rIns="0" bIns="0" rtlCol="0" anchor="ctr"/>
-          <a:lstStyle/>
-          <a:p>
-            <a:pPr algn="ctr" indent="0" marL="0">
-              <a:buNone/>
-            </a:pPr>
-            <a:r>
-              <a:rPr lang="en-US" sz="900" i="1" dirty="0">
-                <a:solidFill>
-                  <a:srgbClr val="555555"/>
-                </a:solidFill>
-              </a:rPr>
-              <a:t>Predicted +</a:t>
-            </a:r>
-            <a:endParaRPr lang="en-US" sz="900" dirty="0"/>
-          </a:p>
-        </p:txBody>
-      </p:sp>
-      <p:sp>
-        <p:nvSpPr>
-          <p:cNvPr id="34" name="Text 32"/>
-          <p:cNvSpPr/>
-          <p:nvPr/>
-        </p:nvSpPr>
-        <p:spPr>
-          <a:xfrm>
-            <a:off x="2331720" y="3145536"/>
-            <a:ext cx="1143000" cy="201168"/>
-          </a:xfrm>
-          <a:prstGeom prst="rect">
-            <a:avLst/>
-          </a:prstGeom>
-          <a:noFill/>
-          <a:ln/>
-        </p:spPr>
-        <p:txBody>
-          <a:bodyPr wrap="square" lIns="0" tIns="0" rIns="0" bIns="0" rtlCol="0" anchor="ctr"/>
-          <a:lstStyle/>
-          <a:p>
-            <a:pPr algn="ctr" indent="0" marL="0">
-              <a:buNone/>
-            </a:pPr>
-            <a:r>
-              <a:rPr lang="en-US" sz="900" i="1" dirty="0">
-                <a:solidFill>
-                  <a:srgbClr val="555555"/>
-                </a:solidFill>
-              </a:rPr>
-              <a:t>Predicted −</a:t>
-            </a:r>
-            <a:endParaRPr lang="en-US" sz="900" dirty="0"/>
-          </a:p>
-        </p:txBody>
-      </p:sp>
-      <p:sp>
-        <p:nvSpPr>
-          <p:cNvPr id="35" name="Text 33"/>
-          <p:cNvSpPr/>
-          <p:nvPr/>
-        </p:nvSpPr>
-        <p:spPr>
-          <a:xfrm>
-            <a:off x="640080" y="3364992"/>
-            <a:ext cx="548640" cy="548640"/>
-          </a:xfrm>
-          <a:prstGeom prst="rect">
-            <a:avLst/>
-          </a:prstGeom>
-          <a:noFill/>
-          <a:ln/>
-        </p:spPr>
-        <p:txBody>
-          <a:bodyPr wrap="square" lIns="508" tIns="508" rIns="508" bIns="508" rtlCol="0" anchor="ctr"/>
-          <a:lstStyle/>
-          <a:p>
-            <a:pPr algn="r" indent="0" marL="0">
-              <a:buNone/>
-            </a:pPr>
-            <a:r>
-              <a:rPr lang="en-US" sz="900" i="1" dirty="0">
-                <a:solidFill>
-                  <a:srgbClr val="555555"/>
-                </a:solidFill>
-              </a:rPr>
-              <a:t>Actual +</a:t>
-            </a:r>
-            <a:endParaRPr lang="en-US" sz="900" dirty="0"/>
-          </a:p>
-        </p:txBody>
-      </p:sp>
-      <p:sp>
-        <p:nvSpPr>
-          <p:cNvPr id="36" name="Text 34"/>
-          <p:cNvSpPr/>
-          <p:nvPr/>
-        </p:nvSpPr>
-        <p:spPr>
-          <a:xfrm>
-            <a:off x="640080" y="3913632"/>
-            <a:ext cx="548640" cy="548640"/>
-          </a:xfrm>
-          <a:prstGeom prst="rect">
-            <a:avLst/>
-          </a:prstGeom>
-          <a:noFill/>
-          <a:ln/>
-        </p:spPr>
-        <p:txBody>
-          <a:bodyPr wrap="square" lIns="508" tIns="508" rIns="508" bIns="508" rtlCol="0" anchor="ctr"/>
-          <a:lstStyle/>
-          <a:p>
-            <a:pPr algn="r" indent="0" marL="0">
-              <a:buNone/>
-            </a:pPr>
-            <a:r>
-              <a:rPr lang="en-US" sz="900" i="1" dirty="0">
-                <a:solidFill>
-                  <a:srgbClr val="555555"/>
-                </a:solidFill>
-              </a:rPr>
-              <a:t>Actual −</a:t>
-            </a:r>
-            <a:endParaRPr lang="en-US" sz="900" dirty="0"/>
-          </a:p>
-        </p:txBody>
-      </p:sp>
-      <p:sp>
-        <p:nvSpPr>
-          <p:cNvPr id="37" name="Shape 35"/>
-          <p:cNvSpPr/>
-          <p:nvPr/>
-        </p:nvSpPr>
-        <p:spPr>
-          <a:xfrm>
-            <a:off x="1188720" y="3438144"/>
-            <a:ext cx="1143000" cy="548640"/>
-          </a:xfrm>
-          <a:prstGeom prst="rect">
-            <a:avLst/>
-          </a:prstGeom>
-          <a:solidFill>
-            <a:srgbClr val="D4F0DC"/>
-          </a:solidFill>
-          <a:ln w="6350">
-            <a:solidFill>
-              <a:srgbClr val="999999"/>
-            </a:solidFill>
-            <a:prstDash val="solid"/>
-          </a:ln>
-        </p:spPr>
-      </p:sp>
-      <p:sp>
-        <p:nvSpPr>
-          <p:cNvPr id="38" name="Text 36"/>
-          <p:cNvSpPr/>
-          <p:nvPr/>
-        </p:nvSpPr>
-        <p:spPr>
-          <a:xfrm>
-            <a:off x="1188720" y="3438144"/>
-            <a:ext cx="1143000" cy="548640"/>
-          </a:xfrm>
-          <a:prstGeom prst="rect">
-            <a:avLst/>
-          </a:prstGeom>
-          <a:noFill/>
-          <a:ln/>
-        </p:spPr>
-        <p:txBody>
-          <a:bodyPr wrap="square" lIns="0" tIns="0" rIns="0" bIns="0" rtlCol="0" anchor="ctr"/>
-          <a:lstStyle/>
-          <a:p>
-            <a:pPr algn="ctr" indent="0" marL="0">
-              <a:buNone/>
-            </a:pPr>
-            <a:r>
-              <a:rPr lang="en-US" sz="2000" b="1" dirty="0">
-                <a:solidFill>
-                  <a:srgbClr val="0A7D2A"/>
-                </a:solidFill>
-              </a:rPr>
-              <a:t>9</a:t>
-            </a:r>
-            <a:endParaRPr lang="en-US" sz="2000" dirty="0"/>
-          </a:p>
-          <a:p>
-            <a:pPr algn="ctr" indent="0" marL="0">
-              <a:buNone/>
-            </a:pPr>
-            <a:r>
-              <a:rPr lang="en-US" sz="900" dirty="0">
-                <a:solidFill>
-                  <a:srgbClr val="666666"/>
-                </a:solidFill>
-              </a:rPr>
-              <a:t>TP</a:t>
-            </a:r>
-            <a:endParaRPr lang="en-US" sz="2000" dirty="0"/>
-          </a:p>
-        </p:txBody>
-      </p:sp>
-      <p:sp>
-        <p:nvSpPr>
-          <p:cNvPr id="39" name="Shape 37"/>
-          <p:cNvSpPr/>
-          <p:nvPr/>
-        </p:nvSpPr>
-        <p:spPr>
-          <a:xfrm>
-            <a:off x="2331720" y="3438144"/>
-            <a:ext cx="1143000" cy="548640"/>
-          </a:xfrm>
-          <a:prstGeom prst="rect">
-            <a:avLst/>
-          </a:prstGeom>
-          <a:solidFill>
-            <a:srgbClr val="F5D5CE"/>
-          </a:solidFill>
-          <a:ln w="6350">
-            <a:solidFill>
-              <a:srgbClr val="999999"/>
-            </a:solidFill>
-            <a:prstDash val="solid"/>
-          </a:ln>
-        </p:spPr>
-      </p:sp>
-      <p:sp>
-        <p:nvSpPr>
-          <p:cNvPr id="40" name="Text 38"/>
-          <p:cNvSpPr/>
-          <p:nvPr/>
-        </p:nvSpPr>
-        <p:spPr>
-          <a:xfrm>
-            <a:off x="2331720" y="3438144"/>
-            <a:ext cx="1143000" cy="548640"/>
-          </a:xfrm>
-          <a:prstGeom prst="rect">
-            <a:avLst/>
-          </a:prstGeom>
-          <a:noFill/>
-          <a:ln/>
-        </p:spPr>
-        <p:txBody>
-          <a:bodyPr wrap="square" lIns="0" tIns="0" rIns="0" bIns="0" rtlCol="0" anchor="ctr"/>
-          <a:lstStyle/>
-          <a:p>
-            <a:pPr algn="ctr" indent="0" marL="0">
-              <a:buNone/>
-            </a:pPr>
-            <a:r>
-              <a:rPr lang="en-US" sz="2000" b="1" dirty="0">
-                <a:solidFill>
-                  <a:srgbClr val="B33A1E"/>
-                </a:solidFill>
-              </a:rPr>
-              <a:t>0</a:t>
-            </a:r>
-            <a:endParaRPr lang="en-US" sz="2000" dirty="0"/>
-          </a:p>
-          <a:p>
-            <a:pPr algn="ctr" indent="0" marL="0">
-              <a:buNone/>
-            </a:pPr>
-            <a:r>
-              <a:rPr lang="en-US" sz="900" dirty="0">
-                <a:solidFill>
-                  <a:srgbClr val="666666"/>
-                </a:solidFill>
-              </a:rPr>
-              <a:t>FN</a:t>
-            </a:r>
-            <a:endParaRPr lang="en-US" sz="2000" dirty="0"/>
-          </a:p>
-        </p:txBody>
-      </p:sp>
-      <p:sp>
-        <p:nvSpPr>
-          <p:cNvPr id="41" name="Shape 39"/>
-          <p:cNvSpPr/>
-          <p:nvPr/>
-        </p:nvSpPr>
-        <p:spPr>
-          <a:xfrm>
-            <a:off x="1188720" y="3986784"/>
-            <a:ext cx="1143000" cy="548640"/>
-          </a:xfrm>
-          <a:prstGeom prst="rect">
-            <a:avLst/>
-          </a:prstGeom>
-          <a:solidFill>
-            <a:srgbClr val="F2F2F2"/>
-          </a:solidFill>
-          <a:ln w="6350">
-            <a:solidFill>
-              <a:srgbClr val="999999"/>
-            </a:solidFill>
-            <a:prstDash val="solid"/>
-          </a:ln>
-        </p:spPr>
-      </p:sp>
-      <p:sp>
-        <p:nvSpPr>
-          <p:cNvPr id="42" name="Text 40"/>
-          <p:cNvSpPr/>
-          <p:nvPr/>
-        </p:nvSpPr>
-        <p:spPr>
-          <a:xfrm>
-            <a:off x="1188720" y="3986784"/>
-            <a:ext cx="1143000" cy="548640"/>
-          </a:xfrm>
-          <a:prstGeom prst="rect">
-            <a:avLst/>
-          </a:prstGeom>
-          <a:noFill/>
-          <a:ln/>
-        </p:spPr>
-        <p:txBody>
-          <a:bodyPr wrap="square" lIns="0" tIns="0" rIns="0" bIns="0" rtlCol="0" anchor="ctr"/>
-          <a:lstStyle/>
-          <a:p>
-            <a:pPr algn="ctr" indent="0" marL="0">
-              <a:buNone/>
-            </a:pPr>
-            <a:r>
-              <a:rPr lang="en-US" sz="2000" b="1" dirty="0">
-                <a:solidFill>
-                  <a:srgbClr val="888888"/>
-                </a:solidFill>
-              </a:rPr>
-              <a:t>0</a:t>
-            </a:r>
-            <a:endParaRPr lang="en-US" sz="2000" dirty="0"/>
-          </a:p>
-          <a:p>
-            <a:pPr algn="ctr" indent="0" marL="0">
-              <a:buNone/>
-            </a:pPr>
-            <a:r>
-              <a:rPr lang="en-US" sz="900" dirty="0">
-                <a:solidFill>
-                  <a:srgbClr val="666666"/>
-                </a:solidFill>
-              </a:rPr>
-              <a:t>FP</a:t>
-            </a:r>
-            <a:endParaRPr lang="en-US" sz="2000" dirty="0"/>
-          </a:p>
-        </p:txBody>
-      </p:sp>
-      <p:sp>
-        <p:nvSpPr>
-          <p:cNvPr id="43" name="Shape 41"/>
-          <p:cNvSpPr/>
-          <p:nvPr/>
-        </p:nvSpPr>
-        <p:spPr>
-          <a:xfrm>
-            <a:off x="2331720" y="3986784"/>
-            <a:ext cx="1143000" cy="548640"/>
-          </a:xfrm>
-          <a:prstGeom prst="rect">
-            <a:avLst/>
-          </a:prstGeom>
-          <a:solidFill>
-            <a:srgbClr val="EAEAEA"/>
-          </a:solidFill>
-          <a:ln w="6350">
-            <a:solidFill>
-              <a:srgbClr val="999999"/>
-            </a:solidFill>
-            <a:prstDash val="solid"/>
-          </a:ln>
-        </p:spPr>
-      </p:sp>
-      <p:sp>
-        <p:nvSpPr>
-          <p:cNvPr id="44" name="Text 42"/>
-          <p:cNvSpPr/>
-          <p:nvPr/>
-        </p:nvSpPr>
-        <p:spPr>
-          <a:xfrm>
-            <a:off x="2331720" y="3986784"/>
-            <a:ext cx="1143000" cy="548640"/>
-          </a:xfrm>
-          <a:prstGeom prst="rect">
-            <a:avLst/>
-          </a:prstGeom>
-          <a:noFill/>
-          <a:ln/>
-        </p:spPr>
-        <p:txBody>
-          <a:bodyPr wrap="square" lIns="0" tIns="0" rIns="0" bIns="0" rtlCol="0" anchor="ctr"/>
-          <a:lstStyle/>
-          <a:p>
-            <a:pPr algn="ctr" indent="0" marL="0">
-              <a:buNone/>
-            </a:pPr>
-            <a:r>
-              <a:rPr lang="en-US" sz="2000" b="1" dirty="0">
-                <a:solidFill>
-                  <a:srgbClr val="555555"/>
-                </a:solidFill>
-              </a:rPr>
-              <a:t>36</a:t>
-            </a:r>
-            <a:endParaRPr lang="en-US" sz="2000" dirty="0"/>
-          </a:p>
-          <a:p>
-            <a:pPr algn="ctr" indent="0" marL="0">
-              <a:buNone/>
-            </a:pPr>
-            <a:r>
-              <a:rPr lang="en-US" sz="900" dirty="0">
-                <a:solidFill>
-                  <a:srgbClr val="666666"/>
-                </a:solidFill>
-              </a:rPr>
-              <a:t>TN</a:t>
-            </a:r>
-            <a:endParaRPr lang="en-US" sz="2000" dirty="0"/>
-          </a:p>
-        </p:txBody>
-      </p:sp>
-      <p:sp>
-        <p:nvSpPr>
-          <p:cNvPr id="45" name="Text 43"/>
-          <p:cNvSpPr/>
-          <p:nvPr/>
-        </p:nvSpPr>
-        <p:spPr>
-          <a:xfrm>
-            <a:off x="640080" y="4553712"/>
-            <a:ext cx="2834640" cy="201168"/>
-          </a:xfrm>
-          <a:prstGeom prst="rect">
-            <a:avLst/>
-          </a:prstGeom>
-          <a:noFill/>
-          <a:ln/>
-        </p:spPr>
-        <p:txBody>
-          <a:bodyPr wrap="square" lIns="0" tIns="0" rIns="0" bIns="0" rtlCol="0" anchor="ctr"/>
-          <a:lstStyle/>
-          <a:p>
-            <a:pPr algn="ctr" indent="0" marL="0">
-              <a:buNone/>
-            </a:pPr>
-            <a:r>
-              <a:rPr lang="en-US" sz="1100" i="1" dirty="0">
-                <a:solidFill>
-                  <a:srgbClr val="555555"/>
-                </a:solidFill>
-              </a:rPr>
-              <a:t>Precision </a:t>
-            </a:r>
-            <a:pPr algn="ctr" indent="0" marL="0">
-              <a:buNone/>
-            </a:pPr>
-            <a:r>
-              <a:rPr lang="en-US" sz="1100" b="1" i="1" dirty="0">
-                <a:solidFill>
-                  <a:srgbClr val="1A1A1A"/>
-                </a:solidFill>
-              </a:rPr>
-              <a:t>1.00</a:t>
-            </a:r>
-            <a:pPr algn="ctr" indent="0" marL="0">
-              <a:buNone/>
-            </a:pPr>
-            <a:r>
-              <a:rPr lang="en-US" sz="1100" i="1" dirty="0">
-                <a:solidFill>
-                  <a:srgbClr val="555555"/>
-                </a:solidFill>
-              </a:rPr>
-              <a:t>   ·   Recall </a:t>
-            </a:r>
-            <a:pPr algn="ctr" indent="0" marL="0">
-              <a:buNone/>
-            </a:pPr>
-            <a:r>
-              <a:rPr lang="en-US" sz="1100" b="1" i="1" dirty="0">
-                <a:solidFill>
-                  <a:srgbClr val="1A1A1A"/>
-                </a:solidFill>
-              </a:rPr>
-              <a:t>1.00</a:t>
-            </a:r>
-            <a:endParaRPr lang="en-US" sz="1100" dirty="0"/>
-          </a:p>
-        </p:txBody>
-      </p:sp>
-      <p:sp>
-        <p:nvSpPr>
-          <p:cNvPr id="46" name="Text 44"/>
-          <p:cNvSpPr/>
-          <p:nvPr/>
-        </p:nvSpPr>
-        <p:spPr>
-          <a:xfrm>
-            <a:off x="4754880" y="2926080"/>
-            <a:ext cx="2834640" cy="201168"/>
-          </a:xfrm>
-          <a:prstGeom prst="rect">
-            <a:avLst/>
-          </a:prstGeom>
-          <a:noFill/>
-          <a:ln/>
-        </p:spPr>
-        <p:txBody>
-          <a:bodyPr wrap="square" lIns="0" tIns="0" rIns="0" bIns="0" rtlCol="0" anchor="b"/>
-          <a:lstStyle/>
-          <a:p>
-            <a:pPr algn="ctr" indent="0" marL="0">
-              <a:buNone/>
-            </a:pPr>
-            <a:r>
-              <a:rPr lang="en-US" sz="1400" b="1" dirty="0">
-                <a:solidFill>
-                  <a:srgbClr val="000000"/>
-                </a:solidFill>
-              </a:rPr>
-              <a:t>Hygiene</a:t>
-            </a:r>
-            <a:endParaRPr lang="en-US" sz="1400" dirty="0"/>
-          </a:p>
-        </p:txBody>
-      </p:sp>
-      <p:sp>
-        <p:nvSpPr>
-          <p:cNvPr id="47" name="Text 45"/>
-          <p:cNvSpPr/>
-          <p:nvPr/>
-        </p:nvSpPr>
-        <p:spPr>
-          <a:xfrm>
-            <a:off x="5303520" y="3145536"/>
-            <a:ext cx="1143000" cy="201168"/>
-          </a:xfrm>
-          <a:prstGeom prst="rect">
-            <a:avLst/>
-          </a:prstGeom>
-          <a:noFill/>
-          <a:ln/>
-        </p:spPr>
-        <p:txBody>
-          <a:bodyPr wrap="square" lIns="0" tIns="0" rIns="0" bIns="0" rtlCol="0" anchor="ctr"/>
-          <a:lstStyle/>
-          <a:p>
-            <a:pPr algn="ctr" indent="0" marL="0">
-              <a:buNone/>
-            </a:pPr>
-            <a:r>
-              <a:rPr lang="en-US" sz="900" i="1" dirty="0">
-                <a:solidFill>
-                  <a:srgbClr val="555555"/>
-                </a:solidFill>
-              </a:rPr>
-              <a:t>Predicted +</a:t>
-            </a:r>
-            <a:endParaRPr lang="en-US" sz="900" dirty="0"/>
-          </a:p>
-        </p:txBody>
-      </p:sp>
-      <p:sp>
-        <p:nvSpPr>
-          <p:cNvPr id="48" name="Text 46"/>
-          <p:cNvSpPr/>
-          <p:nvPr/>
-        </p:nvSpPr>
-        <p:spPr>
-          <a:xfrm>
-            <a:off x="6446520" y="3145536"/>
-            <a:ext cx="1143000" cy="201168"/>
-          </a:xfrm>
-          <a:prstGeom prst="rect">
-            <a:avLst/>
-          </a:prstGeom>
-          <a:noFill/>
-          <a:ln/>
-        </p:spPr>
-        <p:txBody>
-          <a:bodyPr wrap="square" lIns="0" tIns="0" rIns="0" bIns="0" rtlCol="0" anchor="ctr"/>
-          <a:lstStyle/>
-          <a:p>
-            <a:pPr algn="ctr" indent="0" marL="0">
-              <a:buNone/>
-            </a:pPr>
-            <a:r>
-              <a:rPr lang="en-US" sz="900" i="1" dirty="0">
-                <a:solidFill>
-                  <a:srgbClr val="555555"/>
-                </a:solidFill>
-              </a:rPr>
-              <a:t>Predicted −</a:t>
-            </a:r>
-            <a:endParaRPr lang="en-US" sz="900" dirty="0"/>
-          </a:p>
-        </p:txBody>
-      </p:sp>
-      <p:sp>
-        <p:nvSpPr>
-          <p:cNvPr id="49" name="Text 47"/>
-          <p:cNvSpPr/>
-          <p:nvPr/>
-        </p:nvSpPr>
-        <p:spPr>
-          <a:xfrm>
-            <a:off x="4754880" y="3364992"/>
-            <a:ext cx="548640" cy="548640"/>
-          </a:xfrm>
-          <a:prstGeom prst="rect">
-            <a:avLst/>
-          </a:prstGeom>
-          <a:noFill/>
-          <a:ln/>
-        </p:spPr>
-        <p:txBody>
-          <a:bodyPr wrap="square" lIns="508" tIns="508" rIns="508" bIns="508" rtlCol="0" anchor="ctr"/>
-          <a:lstStyle/>
-          <a:p>
-            <a:pPr algn="r" indent="0" marL="0">
-              <a:buNone/>
-            </a:pPr>
-            <a:r>
-              <a:rPr lang="en-US" sz="900" i="1" dirty="0">
-                <a:solidFill>
-                  <a:srgbClr val="555555"/>
-                </a:solidFill>
-              </a:rPr>
-              <a:t>Actual +</a:t>
-            </a:r>
-            <a:endParaRPr lang="en-US" sz="900" dirty="0"/>
-          </a:p>
-        </p:txBody>
-      </p:sp>
-      <p:sp>
-        <p:nvSpPr>
-          <p:cNvPr id="50" name="Text 48"/>
-          <p:cNvSpPr/>
-          <p:nvPr/>
-        </p:nvSpPr>
-        <p:spPr>
-          <a:xfrm>
-            <a:off x="4754880" y="3913632"/>
-            <a:ext cx="548640" cy="548640"/>
-          </a:xfrm>
-          <a:prstGeom prst="rect">
-            <a:avLst/>
-          </a:prstGeom>
-          <a:noFill/>
-          <a:ln/>
-        </p:spPr>
-        <p:txBody>
-          <a:bodyPr wrap="square" lIns="508" tIns="508" rIns="508" bIns="508" rtlCol="0" anchor="ctr"/>
-          <a:lstStyle/>
-          <a:p>
-            <a:pPr algn="r" indent="0" marL="0">
-              <a:buNone/>
-            </a:pPr>
-            <a:r>
-              <a:rPr lang="en-US" sz="900" i="1" dirty="0">
-                <a:solidFill>
-                  <a:srgbClr val="555555"/>
-                </a:solidFill>
-              </a:rPr>
-              <a:t>Actual −</a:t>
-            </a:r>
-            <a:endParaRPr lang="en-US" sz="900" dirty="0"/>
-          </a:p>
-        </p:txBody>
-      </p:sp>
-      <p:sp>
-        <p:nvSpPr>
-          <p:cNvPr id="51" name="Shape 49"/>
-          <p:cNvSpPr/>
-          <p:nvPr/>
-        </p:nvSpPr>
-        <p:spPr>
-          <a:xfrm>
-            <a:off x="5303520" y="3438144"/>
-            <a:ext cx="1143000" cy="548640"/>
-          </a:xfrm>
-          <a:prstGeom prst="rect">
-            <a:avLst/>
-          </a:prstGeom>
-          <a:solidFill>
-            <a:srgbClr val="D4F0DC"/>
-          </a:solidFill>
-          <a:ln w="6350">
-            <a:solidFill>
-              <a:srgbClr val="999999"/>
-            </a:solidFill>
-            <a:prstDash val="solid"/>
-          </a:ln>
-        </p:spPr>
-      </p:sp>
-      <p:sp>
-        <p:nvSpPr>
-          <p:cNvPr id="52" name="Text 50"/>
-          <p:cNvSpPr/>
-          <p:nvPr/>
-        </p:nvSpPr>
-        <p:spPr>
-          <a:xfrm>
-            <a:off x="5303520" y="3438144"/>
-            <a:ext cx="1143000" cy="548640"/>
-          </a:xfrm>
-          <a:prstGeom prst="rect">
-            <a:avLst/>
-          </a:prstGeom>
-          <a:noFill/>
-          <a:ln/>
-        </p:spPr>
-        <p:txBody>
-          <a:bodyPr wrap="square" lIns="0" tIns="0" rIns="0" bIns="0" rtlCol="0" anchor="ctr"/>
-          <a:lstStyle/>
-          <a:p>
-            <a:pPr algn="ctr" indent="0" marL="0">
-              <a:buNone/>
-            </a:pPr>
-            <a:r>
-              <a:rPr lang="en-US" sz="2000" b="1" dirty="0">
-                <a:solidFill>
-                  <a:srgbClr val="0A7D2A"/>
-                </a:solidFill>
-              </a:rPr>
-              <a:t>8</a:t>
-            </a:r>
-            <a:endParaRPr lang="en-US" sz="2000" dirty="0"/>
-          </a:p>
-          <a:p>
-            <a:pPr algn="ctr" indent="0" marL="0">
-              <a:buNone/>
-            </a:pPr>
-            <a:r>
-              <a:rPr lang="en-US" sz="900" dirty="0">
-                <a:solidFill>
-                  <a:srgbClr val="666666"/>
-                </a:solidFill>
-              </a:rPr>
-              <a:t>TP</a:t>
-            </a:r>
-            <a:endParaRPr lang="en-US" sz="2000" dirty="0"/>
-          </a:p>
-        </p:txBody>
-      </p:sp>
-      <p:sp>
-        <p:nvSpPr>
-          <p:cNvPr id="53" name="Shape 51"/>
-          <p:cNvSpPr/>
-          <p:nvPr/>
-        </p:nvSpPr>
-        <p:spPr>
-          <a:xfrm>
-            <a:off x="6446520" y="3438144"/>
-            <a:ext cx="1143000" cy="548640"/>
-          </a:xfrm>
-          <a:prstGeom prst="rect">
-            <a:avLst/>
-          </a:prstGeom>
-          <a:solidFill>
-            <a:srgbClr val="F5D5CE"/>
-          </a:solidFill>
-          <a:ln w="6350">
-            <a:solidFill>
-              <a:srgbClr val="999999"/>
-            </a:solidFill>
-            <a:prstDash val="solid"/>
-          </a:ln>
-        </p:spPr>
-      </p:sp>
-      <p:sp>
-        <p:nvSpPr>
-          <p:cNvPr id="54" name="Text 52"/>
-          <p:cNvSpPr/>
-          <p:nvPr/>
-        </p:nvSpPr>
-        <p:spPr>
-          <a:xfrm>
-            <a:off x="6446520" y="3438144"/>
-            <a:ext cx="1143000" cy="548640"/>
-          </a:xfrm>
-          <a:prstGeom prst="rect">
-            <a:avLst/>
-          </a:prstGeom>
-          <a:noFill/>
-          <a:ln/>
-        </p:spPr>
-        <p:txBody>
-          <a:bodyPr wrap="square" lIns="0" tIns="0" rIns="0" bIns="0" rtlCol="0" anchor="ctr"/>
-          <a:lstStyle/>
-          <a:p>
-            <a:pPr algn="ctr" indent="0" marL="0">
-              <a:buNone/>
-            </a:pPr>
-            <a:r>
-              <a:rPr lang="en-US" sz="2000" b="1" dirty="0">
-                <a:solidFill>
-                  <a:srgbClr val="B33A1E"/>
-                </a:solidFill>
-              </a:rPr>
-              <a:t>0</a:t>
-            </a:r>
-            <a:endParaRPr lang="en-US" sz="2000" dirty="0"/>
-          </a:p>
-          <a:p>
-            <a:pPr algn="ctr" indent="0" marL="0">
-              <a:buNone/>
-            </a:pPr>
-            <a:r>
-              <a:rPr lang="en-US" sz="900" dirty="0">
-                <a:solidFill>
-                  <a:srgbClr val="666666"/>
-                </a:solidFill>
-              </a:rPr>
-              <a:t>FN</a:t>
-            </a:r>
-            <a:endParaRPr lang="en-US" sz="2000" dirty="0"/>
-          </a:p>
-        </p:txBody>
-      </p:sp>
-      <p:sp>
-        <p:nvSpPr>
-          <p:cNvPr id="55" name="Shape 53"/>
-          <p:cNvSpPr/>
-          <p:nvPr/>
-        </p:nvSpPr>
-        <p:spPr>
-          <a:xfrm>
-            <a:off x="5303520" y="3986784"/>
-            <a:ext cx="1143000" cy="548640"/>
-          </a:xfrm>
-          <a:prstGeom prst="rect">
-            <a:avLst/>
-          </a:prstGeom>
-          <a:solidFill>
-            <a:srgbClr val="F2F2F2"/>
-          </a:solidFill>
-          <a:ln w="6350">
-            <a:solidFill>
-              <a:srgbClr val="999999"/>
-            </a:solidFill>
-            <a:prstDash val="solid"/>
-          </a:ln>
-        </p:spPr>
-      </p:sp>
-      <p:sp>
-        <p:nvSpPr>
-          <p:cNvPr id="56" name="Text 54"/>
-          <p:cNvSpPr/>
-          <p:nvPr/>
-        </p:nvSpPr>
-        <p:spPr>
-          <a:xfrm>
-            <a:off x="5303520" y="3986784"/>
-            <a:ext cx="1143000" cy="548640"/>
-          </a:xfrm>
-          <a:prstGeom prst="rect">
-            <a:avLst/>
-          </a:prstGeom>
-          <a:noFill/>
-          <a:ln/>
-        </p:spPr>
-        <p:txBody>
-          <a:bodyPr wrap="square" lIns="0" tIns="0" rIns="0" bIns="0" rtlCol="0" anchor="ctr"/>
-          <a:lstStyle/>
-          <a:p>
-            <a:pPr algn="ctr" indent="0" marL="0">
-              <a:buNone/>
-            </a:pPr>
-            <a:r>
-              <a:rPr lang="en-US" sz="2000" b="1" dirty="0">
-                <a:solidFill>
-                  <a:srgbClr val="888888"/>
-                </a:solidFill>
-              </a:rPr>
-              <a:t>0</a:t>
-            </a:r>
-            <a:endParaRPr lang="en-US" sz="2000" dirty="0"/>
-          </a:p>
-          <a:p>
-            <a:pPr algn="ctr" indent="0" marL="0">
-              <a:buNone/>
-            </a:pPr>
-            <a:r>
-              <a:rPr lang="en-US" sz="900" dirty="0">
-                <a:solidFill>
-                  <a:srgbClr val="666666"/>
-                </a:solidFill>
-              </a:rPr>
-              <a:t>FP</a:t>
-            </a:r>
-            <a:endParaRPr lang="en-US" sz="2000" dirty="0"/>
-          </a:p>
-        </p:txBody>
-      </p:sp>
-      <p:sp>
-        <p:nvSpPr>
-          <p:cNvPr id="57" name="Shape 55"/>
-          <p:cNvSpPr/>
-          <p:nvPr/>
-        </p:nvSpPr>
-        <p:spPr>
-          <a:xfrm>
-            <a:off x="6446520" y="3986784"/>
-            <a:ext cx="1143000" cy="548640"/>
-          </a:xfrm>
-          <a:prstGeom prst="rect">
-            <a:avLst/>
-          </a:prstGeom>
-          <a:solidFill>
-            <a:srgbClr val="EAEAEA"/>
-          </a:solidFill>
-          <a:ln w="6350">
-            <a:solidFill>
-              <a:srgbClr val="999999"/>
-            </a:solidFill>
-            <a:prstDash val="solid"/>
-          </a:ln>
-        </p:spPr>
-      </p:sp>
-      <p:sp>
-        <p:nvSpPr>
-          <p:cNvPr id="58" name="Text 56"/>
-          <p:cNvSpPr/>
-          <p:nvPr/>
-        </p:nvSpPr>
-        <p:spPr>
-          <a:xfrm>
-            <a:off x="6446520" y="3986784"/>
-            <a:ext cx="1143000" cy="548640"/>
-          </a:xfrm>
-          <a:prstGeom prst="rect">
-            <a:avLst/>
-          </a:prstGeom>
-          <a:noFill/>
-          <a:ln/>
-        </p:spPr>
-        <p:txBody>
-          <a:bodyPr wrap="square" lIns="0" tIns="0" rIns="0" bIns="0" rtlCol="0" anchor="ctr"/>
-          <a:lstStyle/>
-          <a:p>
-            <a:pPr algn="ctr" indent="0" marL="0">
-              <a:buNone/>
-            </a:pPr>
-            <a:r>
-              <a:rPr lang="en-US" sz="2000" b="1" dirty="0">
-                <a:solidFill>
-                  <a:srgbClr val="555555"/>
-                </a:solidFill>
-              </a:rPr>
-              <a:t>37</a:t>
-            </a:r>
-            <a:endParaRPr lang="en-US" sz="2000" dirty="0"/>
-          </a:p>
-          <a:p>
-            <a:pPr algn="ctr" indent="0" marL="0">
-              <a:buNone/>
-            </a:pPr>
-            <a:r>
-              <a:rPr lang="en-US" sz="900" dirty="0">
-                <a:solidFill>
-                  <a:srgbClr val="666666"/>
-                </a:solidFill>
-              </a:rPr>
-              <a:t>TN</a:t>
-            </a:r>
-            <a:endParaRPr lang="en-US" sz="2000" dirty="0"/>
-          </a:p>
-        </p:txBody>
-      </p:sp>
-      <p:sp>
-        <p:nvSpPr>
-          <p:cNvPr id="59" name="Text 57"/>
-          <p:cNvSpPr/>
-          <p:nvPr/>
-        </p:nvSpPr>
-        <p:spPr>
-          <a:xfrm>
-            <a:off x="4754880" y="4553712"/>
-            <a:ext cx="2834640" cy="201168"/>
-          </a:xfrm>
-          <a:prstGeom prst="rect">
-            <a:avLst/>
-          </a:prstGeom>
-          <a:noFill/>
-          <a:ln/>
-        </p:spPr>
-        <p:txBody>
-          <a:bodyPr wrap="square" lIns="0" tIns="0" rIns="0" bIns="0" rtlCol="0" anchor="ctr"/>
-          <a:lstStyle/>
-          <a:p>
-            <a:pPr algn="ctr" indent="0" marL="0">
-              <a:buNone/>
-            </a:pPr>
-            <a:r>
-              <a:rPr lang="en-US" sz="1100" i="1" dirty="0">
-                <a:solidFill>
-                  <a:srgbClr val="555555"/>
-                </a:solidFill>
-              </a:rPr>
-              <a:t>Precision </a:t>
-            </a:r>
-            <a:pPr algn="ctr" indent="0" marL="0">
-              <a:buNone/>
-            </a:pPr>
-            <a:r>
-              <a:rPr lang="en-US" sz="1100" b="1" i="1" dirty="0">
-                <a:solidFill>
-                  <a:srgbClr val="1A1A1A"/>
-                </a:solidFill>
-              </a:rPr>
-              <a:t>1.00</a:t>
-            </a:r>
-            <a:pPr algn="ctr" indent="0" marL="0">
-              <a:buNone/>
-            </a:pPr>
-            <a:r>
-              <a:rPr lang="en-US" sz="1100" i="1" dirty="0">
-                <a:solidFill>
-                  <a:srgbClr val="555555"/>
-                </a:solidFill>
-              </a:rPr>
-              <a:t>   ·   Recall </a:t>
-            </a:r>
-            <a:pPr algn="ctr" indent="0" marL="0">
-              <a:buNone/>
-            </a:pPr>
-            <a:r>
-              <a:rPr lang="en-US" sz="1100" b="1" i="1" dirty="0">
-                <a:solidFill>
-                  <a:srgbClr val="1A1A1A"/>
-                </a:solidFill>
-              </a:rPr>
-              <a:t>1.00</a:t>
-            </a:r>
-            <a:endParaRPr lang="en-US" sz="1100" dirty="0"/>
-          </a:p>
-        </p:txBody>
-      </p:sp>
-      <p:sp>
-        <p:nvSpPr>
-          <p:cNvPr id="60" name="Text 58"/>
-          <p:cNvSpPr/>
-          <p:nvPr/>
-        </p:nvSpPr>
-        <p:spPr>
-          <a:xfrm>
-            <a:off x="365760" y="4846320"/>
-            <a:ext cx="8412480" cy="256032"/>
-          </a:xfrm>
-          <a:prstGeom prst="rect">
-            <a:avLst/>
-          </a:prstGeom>
-          <a:noFill/>
-          <a:ln/>
-        </p:spPr>
-        <p:txBody>
-          <a:bodyPr wrap="square" lIns="0" tIns="0" rIns="0" bIns="0" rtlCol="0" anchor="ctr"/>
-          <a:lstStyle/>
-          <a:p>
-            <a:pPr algn="ctr" indent="0" marL="0">
-              <a:buNone/>
-            </a:pPr>
-            <a:r>
-              <a:rPr lang="en-US" sz="900" i="1" dirty="0">
-                <a:solidFill>
-                  <a:srgbClr val="555555"/>
-                </a:solidFill>
-              </a:rPr>
-              <a:t>Ordering recall is the outlier: the reorder synthesiser's splitOnInvalid validator rejects any window containing a step it cannot safely.</a:t>
-            </a:r>
-            <a:endParaRPr lang="en-US" sz="900" dirty="0"/>
-          </a:p>
-        </p:txBody>
-      </p:sp>
-    </p:spTree>
-  </p:cSld>
-  <p:clrMapOvr>
-    <a:masterClrMapping/>
-  </p:clrMapOvr>
-</p:sld>
-</file>
-
-<file path=ppt/slides/slide18.xml><?xml version="1.0" encoding="utf-8"?>
-<p:sld xmlns:a="http://schemas.openxmlformats.org/drawingml/2006/main" xmlns:r="http://schemas.openxmlformats.org/officeDocument/2006/relationships" xmlns:p="http://schemas.openxmlformats.org/presentationml/2006/main">
-  <p:cSld name="Slide 18">
-    <p:spTree>
-      <p:nvGrpSpPr>
-        <p:cNvPr id="1" name=""/>
-        <p:cNvGrpSpPr/>
-        <p:nvPr/>
-      </p:nvGrpSpPr>
-      <p:grpSpPr>
-        <a:xfrm>
-          <a:off x="0" y="0"/>
-          <a:ext cx="0" cy="0"/>
-          <a:chOff x="0" y="0"/>
-          <a:chExt cx="0" cy="0"/>
-        </a:xfrm>
-      </p:grpSpPr>
-      <p:sp>
-        <p:nvSpPr>
-          <p:cNvPr id="2" name="Text 0"/>
-          <p:cNvSpPr/>
-          <p:nvPr/>
-        </p:nvSpPr>
-        <p:spPr>
-          <a:xfrm>
             <a:off x="457200" y="91440"/>
             <a:ext cx="8229600" cy="548640"/>
           </a:xfrm>
@@ -9093,7 +8563,7 @@
       </p:sp>
       <p:graphicFrame>
         <p:nvGraphicFramePr>
-          <p:cNvPr id="19" name="Table 0"/>
+          <p:cNvPr id="17" name="Table 0"/>
           <p:cNvGraphicFramePr>
             <a:graphicFrameLocks noGrp="1"/>
           </p:cNvGraphicFramePr>
@@ -11278,6 +10748,500 @@
 </p:sld>
 </file>
 
+<file path=ppt/slides/slide17.xml><?xml version="1.0" encoding="utf-8"?>
+<p:sld xmlns:a="http://schemas.openxmlformats.org/drawingml/2006/main" xmlns:r="http://schemas.openxmlformats.org/officeDocument/2006/relationships" xmlns:p="http://schemas.openxmlformats.org/presentationml/2006/main">
+  <p:cSld name="Slide 17">
+    <p:spTree>
+      <p:nvGrpSpPr>
+        <p:cNvPr id="1" name=""/>
+        <p:cNvGrpSpPr/>
+        <p:nvPr/>
+      </p:nvGrpSpPr>
+      <p:grpSpPr>
+        <a:xfrm>
+          <a:off x="0" y="0"/>
+          <a:ext cx="0" cy="0"/>
+          <a:chOff x="0" y="0"/>
+          <a:chExt cx="0" cy="0"/>
+        </a:xfrm>
+      </p:grpSpPr>
+      <p:sp>
+        <p:nvSpPr>
+          <p:cNvPr id="2" name="Text 0"/>
+          <p:cNvSpPr/>
+          <p:nvPr/>
+        </p:nvSpPr>
+        <p:spPr>
+          <a:xfrm>
+            <a:off x="457200" y="274320"/>
+            <a:ext cx="8229600" cy="640080"/>
+          </a:xfrm>
+          <a:prstGeom prst="rect">
+            <a:avLst/>
+          </a:prstGeom>
+          <a:noFill/>
+          <a:ln/>
+        </p:spPr>
+        <p:txBody>
+          <a:bodyPr wrap="square" lIns="0" tIns="0" rIns="0" bIns="0" rtlCol="0" anchor="ctr"/>
+          <a:lstStyle/>
+          <a:p>
+            <a:pPr indent="0" marL="0">
+              <a:buNone/>
+            </a:pPr>
+            <a:r>
+              <a:rPr lang="en-US" sz="2800" b="1" dirty="0">
+                <a:solidFill>
+                  <a:srgbClr val="000000"/>
+                </a:solidFill>
+              </a:rPr>
+              <a:t>Is the process score reliable?</a:t>
+            </a:r>
+            <a:endParaRPr lang="en-US" sz="2800" dirty="0"/>
+          </a:p>
+        </p:txBody>
+      </p:sp>
+      <p:sp>
+        <p:nvSpPr>
+          <p:cNvPr id="3" name="Text 1"/>
+          <p:cNvSpPr/>
+          <p:nvPr/>
+        </p:nvSpPr>
+        <p:spPr>
+          <a:xfrm>
+            <a:off x="457200" y="1188720"/>
+            <a:ext cx="8229600" cy="3657600"/>
+          </a:xfrm>
+          <a:prstGeom prst="rect">
+            <a:avLst/>
+          </a:prstGeom>
+          <a:noFill/>
+          <a:ln/>
+        </p:spPr>
+        <p:txBody>
+          <a:bodyPr wrap="square" rtlCol="0" anchor="t"/>
+          <a:lstStyle/>
+          <a:p>
+            <a:pPr marL="342900" indent="-342900">
+              <a:spcAft>
+                <a:spcPts val="600"/>
+              </a:spcAft>
+              <a:buSzPct val="100000"/>
+              <a:buChar char="•"/>
+            </a:pPr>
+            <a:r>
+              <a:rPr lang="en-US" sz="1500" b="1" dirty="0">
+                <a:solidFill>
+                  <a:srgbClr val="000000"/>
+                </a:solidFill>
+              </a:rPr>
+              <a:t>How stable is the score?</a:t>
+            </a:r>
+            <a:endParaRPr lang="en-US" sz="1500" dirty="0"/>
+          </a:p>
+          <a:p>
+            <a:pPr lvl="1" marL="762000" indent="-381000">
+              <a:spcAft>
+                <a:spcPts val="600"/>
+              </a:spcAft>
+              <a:buSzPct val="100000"/>
+              <a:buChar char="•"/>
+            </a:pPr>
+            <a:r>
+              <a:rPr lang="en-US" sz="1500" dirty="0">
+                <a:solidFill>
+                  <a:srgbClr val="000000"/>
+                </a:solidFill>
+              </a:rPr>
+              <a:t>Two perturbation sweeps </a:t>
+            </a:r>
+            <a:pPr indent="0" marL="0">
+              <a:spcAft>
+                <a:spcPts val="600"/>
+              </a:spcAft>
+              <a:buNone/>
+            </a:pPr>
+            <a:r>
+              <a:rPr lang="en-US" sz="1500" dirty="0">
+                <a:solidFill>
+                  <a:srgbClr val="888888"/>
+                </a:solidFill>
+              </a:rPr>
+              <a:t>- single-knob (one weight scaled ×0.1 to ×10) + multi-knob Monte Carlo (200 samples, σ = ln 2, so ~×0.25 to ×4 of production).</a:t>
+            </a:r>
+            <a:endParaRPr lang="en-US" sz="1500" dirty="0"/>
+          </a:p>
+          <a:p>
+            <a:pPr lvl="1" marL="762000" indent="-381000">
+              <a:spcAft>
+                <a:spcPts val="1800"/>
+              </a:spcAft>
+              <a:buSzPct val="100000"/>
+              <a:buChar char="•"/>
+            </a:pPr>
+            <a:r>
+              <a:rPr lang="en-US" sz="1500" dirty="0">
+                <a:solidFill>
+                  <a:srgbClr val="000000"/>
+                </a:solidFill>
+              </a:rPr>
+              <a:t>Stability metrics </a:t>
+            </a:r>
+            <a:pPr indent="0" marL="0">
+              <a:spcAft>
+                <a:spcPts val="1800"/>
+              </a:spcAft>
+              <a:buNone/>
+            </a:pPr>
+            <a:r>
+              <a:rPr lang="en-US" sz="1500" dirty="0">
+                <a:solidFill>
+                  <a:srgbClr val="888888"/>
+                </a:solidFill>
+              </a:rPr>
+              <a:t>- top-1 hit rate (does the top-ranked DP stay on top?) + Kendall's τ-b on per-session rankings.</a:t>
+            </a:r>
+            <a:endParaRPr lang="en-US" sz="1500" dirty="0"/>
+          </a:p>
+          <a:p>
+            <a:pPr marL="342900" indent="-342900">
+              <a:spcAft>
+                <a:spcPts val="600"/>
+              </a:spcAft>
+              <a:buSzPct val="100000"/>
+              <a:buChar char="•"/>
+            </a:pPr>
+            <a:r>
+              <a:rPr lang="en-US" sz="1500" b="1" dirty="0">
+                <a:solidFill>
+                  <a:srgbClr val="000000"/>
+                </a:solidFill>
+              </a:rPr>
+              <a:t>Does every component of the process score hold weight?</a:t>
+            </a:r>
+            <a:endParaRPr lang="en-US" sz="1500" dirty="0"/>
+          </a:p>
+          <a:p>
+            <a:pPr lvl="1" marL="762000" indent="-381000">
+              <a:spcAft>
+                <a:spcPts val="600"/>
+              </a:spcAft>
+              <a:buSzPct val="100000"/>
+              <a:buChar char="•"/>
+            </a:pPr>
+            <a:r>
+              <a:rPr lang="en-US" sz="1500" dirty="0">
+                <a:solidFill>
+                  <a:srgbClr val="000000"/>
+                </a:solidFill>
+              </a:rPr>
+              <a:t>Process-side ablation </a:t>
+            </a:r>
+            <a:pPr indent="0" marL="0">
+              <a:spcAft>
+                <a:spcPts val="600"/>
+              </a:spcAft>
+              <a:buNone/>
+            </a:pPr>
+            <a:r>
+              <a:rPr lang="en-US" sz="1500" dirty="0">
+                <a:solidFill>
+                  <a:srgbClr val="888888"/>
+                </a:solidFill>
+              </a:rPr>
+              <a:t>- enumerate all 2⁷ = 128 subsets of the 7 process weights → 5,760 cases per session set.</a:t>
+            </a:r>
+            <a:endParaRPr lang="en-US" sz="1500" dirty="0"/>
+          </a:p>
+          <a:p>
+            <a:pPr lvl="1" marL="762000" indent="-381000">
+              <a:spcAft>
+                <a:spcPts val="600"/>
+              </a:spcAft>
+              <a:buSzPct val="100000"/>
+              <a:buChar char="•"/>
+            </a:pPr>
+            <a:r>
+              <a:rPr lang="en-US" sz="1500" dirty="0">
+                <a:solidFill>
+                  <a:srgbClr val="000000"/>
+                </a:solidFill>
+              </a:rPr>
+              <a:t>Recovery metrics </a:t>
+            </a:r>
+            <a:pPr indent="0" marL="0">
+              <a:spcAft>
+                <a:spcPts val="600"/>
+              </a:spcAft>
+              <a:buNone/>
+            </a:pPr>
+            <a:r>
+              <a:rPr lang="en-US" sz="1500" dirty="0">
+                <a:solidFill>
+                  <a:srgbClr val="888888"/>
+                </a:solidFill>
+              </a:rPr>
+              <a:t>- sum-over-sum magnitude recovery (does the term carry signal?) + leave-one-out Kendall's τ-b (does removing it reshuffle rankings?).</a:t>
+            </a:r>
+            <a:endParaRPr lang="en-US" sz="1500" dirty="0"/>
+          </a:p>
+        </p:txBody>
+      </p:sp>
+    </p:spTree>
+  </p:cSld>
+  <p:clrMapOvr>
+    <a:masterClrMapping/>
+  </p:clrMapOvr>
+</p:sld>
+</file>
+
+<file path=ppt/slides/slide18.xml><?xml version="1.0" encoding="utf-8"?>
+<p:sld xmlns:a="http://schemas.openxmlformats.org/drawingml/2006/main" xmlns:r="http://schemas.openxmlformats.org/officeDocument/2006/relationships" xmlns:p="http://schemas.openxmlformats.org/presentationml/2006/main">
+  <p:cSld name="Slide 18">
+    <p:spTree>
+      <p:nvGrpSpPr>
+        <p:cNvPr id="1" name=""/>
+        <p:cNvGrpSpPr/>
+        <p:nvPr/>
+      </p:nvGrpSpPr>
+      <p:grpSpPr>
+        <a:xfrm>
+          <a:off x="0" y="0"/>
+          <a:ext cx="0" cy="0"/>
+          <a:chOff x="0" y="0"/>
+          <a:chExt cx="0" cy="0"/>
+        </a:xfrm>
+      </p:grpSpPr>
+      <p:sp>
+        <p:nvSpPr>
+          <p:cNvPr id="2" name="Text 0"/>
+          <p:cNvSpPr/>
+          <p:nvPr/>
+        </p:nvSpPr>
+        <p:spPr>
+          <a:xfrm>
+            <a:off x="457200" y="274320"/>
+            <a:ext cx="8229600" cy="640080"/>
+          </a:xfrm>
+          <a:prstGeom prst="rect">
+            <a:avLst/>
+          </a:prstGeom>
+          <a:noFill/>
+          <a:ln/>
+        </p:spPr>
+        <p:txBody>
+          <a:bodyPr wrap="square" lIns="0" tIns="0" rIns="0" bIns="0" rtlCol="0" anchor="ctr"/>
+          <a:lstStyle/>
+          <a:p>
+            <a:pPr indent="0" marL="0">
+              <a:buNone/>
+            </a:pPr>
+            <a:r>
+              <a:rPr lang="en-US" sz="2800" b="1" dirty="0">
+                <a:solidFill>
+                  <a:srgbClr val="000000"/>
+                </a:solidFill>
+              </a:rPr>
+              <a:t>Score is locally robust</a:t>
+            </a:r>
+            <a:endParaRPr lang="en-US" sz="2800" dirty="0"/>
+          </a:p>
+        </p:txBody>
+      </p:sp>
+      <p:sp>
+        <p:nvSpPr>
+          <p:cNvPr id="3" name="Text 1"/>
+          <p:cNvSpPr/>
+          <p:nvPr/>
+        </p:nvSpPr>
+        <p:spPr>
+          <a:xfrm>
+            <a:off x="457200" y="1188720"/>
+            <a:ext cx="8229600" cy="3657600"/>
+          </a:xfrm>
+          <a:prstGeom prst="rect">
+            <a:avLst/>
+          </a:prstGeom>
+          <a:noFill/>
+          <a:ln/>
+        </p:spPr>
+        <p:txBody>
+          <a:bodyPr wrap="square" rtlCol="0" anchor="t"/>
+          <a:lstStyle/>
+          <a:p>
+            <a:pPr marL="342900" indent="-342900">
+              <a:spcAft>
+                <a:spcPts val="600"/>
+              </a:spcAft>
+              <a:buSzPct val="100000"/>
+              <a:buChar char="•"/>
+            </a:pPr>
+            <a:r>
+              <a:rPr lang="en-US" sz="1500" b="1" dirty="0">
+                <a:solidFill>
+                  <a:srgbClr val="000000"/>
+                </a:solidFill>
+              </a:rPr>
+              <a:t>How stable is the score?</a:t>
+            </a:r>
+            <a:endParaRPr lang="en-US" sz="1500" dirty="0"/>
+          </a:p>
+          <a:p>
+            <a:pPr lvl="1" marL="762000" indent="-381000">
+              <a:spcAft>
+                <a:spcPts val="600"/>
+              </a:spcAft>
+              <a:buSzPct val="100000"/>
+              <a:buChar char="•"/>
+            </a:pPr>
+            <a:r>
+              <a:rPr lang="en-US" sz="1500" dirty="0">
+                <a:solidFill>
+                  <a:srgbClr val="000000"/>
+                </a:solidFill>
+              </a:rPr>
+              <a:t>Single-knob: 96.5% top-1 preserved </a:t>
+            </a:r>
+            <a:pPr indent="0" marL="0">
+              <a:spcAft>
+                <a:spcPts val="600"/>
+              </a:spcAft>
+              <a:buNone/>
+            </a:pPr>
+            <a:r>
+              <a:rPr lang="en-US" sz="1500" dirty="0">
+                <a:solidFill>
+                  <a:srgbClr val="888888"/>
+                </a:solidFill>
+              </a:rPr>
+              <a:t>- top-ranked DP rarely changes under any one-weight perturbation. Only 1.8% of cases are clamp-frozen, so this is genuine response - not a clamp artefact.</a:t>
+            </a:r>
+            <a:endParaRPr lang="en-US" sz="1500" dirty="0"/>
+          </a:p>
+          <a:p>
+            <a:pPr lvl="1" marL="762000" indent="-381000">
+              <a:spcAft>
+                <a:spcPts val="1800"/>
+              </a:spcAft>
+              <a:buSzPct val="100000"/>
+              <a:buChar char="•"/>
+            </a:pPr>
+            <a:r>
+              <a:rPr lang="en-US" sz="1500" dirty="0">
+                <a:solidFill>
+                  <a:srgbClr val="000000"/>
+                </a:solidFill>
+              </a:rPr>
+              <a:t>Multi-knob: 84.6% top-1 preserved (τ-b = 0.586) </a:t>
+            </a:r>
+            <a:pPr indent="0" marL="0">
+              <a:spcAft>
+                <a:spcPts val="1800"/>
+              </a:spcAft>
+              <a:buNone/>
+            </a:pPr>
+            <a:r>
+              <a:rPr lang="en-US" sz="1500" dirty="0">
+                <a:solidFill>
+                  <a:srgbClr val="888888"/>
+                </a:solidFill>
+              </a:rPr>
+              <a:t>- when all weights move at once, top-1 holds in ~85% of cases and ~79% of pairs still rank in the same order. Meaningful correlation, not full preservation.</a:t>
+            </a:r>
+            <a:endParaRPr lang="en-US" sz="1500" dirty="0"/>
+          </a:p>
+          <a:p>
+            <a:pPr marL="342900" indent="-342900">
+              <a:spcAft>
+                <a:spcPts val="600"/>
+              </a:spcAft>
+              <a:buSzPct val="100000"/>
+              <a:buChar char="•"/>
+            </a:pPr>
+            <a:r>
+              <a:rPr lang="en-US" sz="1500" b="1" dirty="0">
+                <a:solidFill>
+                  <a:srgbClr val="000000"/>
+                </a:solidFill>
+              </a:rPr>
+              <a:t>Does every component of the process score hold weight?</a:t>
+            </a:r>
+            <a:endParaRPr lang="en-US" sz="1500" dirty="0"/>
+          </a:p>
+          <a:p>
+            <a:pPr lvl="1" marL="762000" indent="-381000">
+              <a:spcAft>
+                <a:spcPts val="600"/>
+              </a:spcAft>
+              <a:buSzPct val="100000"/>
+              <a:buChar char="•"/>
+            </a:pPr>
+            <a:r>
+              <a:rPr lang="en-US" sz="1500" dirty="0">
+                <a:solidFill>
+                  <a:srgbClr val="000000"/>
+                </a:solidFill>
+              </a:rPr>
+              <a:t>Length is the rank-carrier (LOO τ-b = 0.527) </a:t>
+            </a:r>
+            <a:pPr indent="0" marL="0">
+              <a:spcAft>
+                <a:spcPts val="600"/>
+              </a:spcAft>
+              <a:buNone/>
+            </a:pPr>
+            <a:r>
+              <a:rPr lang="en-US" sz="1500" dirty="0">
+                <a:solidFill>
+                  <a:srgbClr val="888888"/>
+                </a:solidFill>
+              </a:rPr>
+              <a:t>- removing length reshuffles the per-session ranking more than removing any other process term - the most influential term.</a:t>
+            </a:r>
+            <a:endParaRPr lang="en-US" sz="1500" dirty="0"/>
+          </a:p>
+          <a:p>
+            <a:pPr lvl="1" marL="762000" indent="-381000">
+              <a:spcAft>
+                <a:spcPts val="600"/>
+              </a:spcAft>
+              <a:buSzPct val="100000"/>
+              <a:buChar char="•"/>
+            </a:pPr>
+            <a:r>
+              <a:rPr lang="en-US" sz="1500" dirty="0">
+                <a:solidFill>
+                  <a:srgbClr val="000000"/>
+                </a:solidFill>
+              </a:rPr>
+              <a:t>Cleanliness sub-weights: ≤ 0.9% top-1 disruption </a:t>
+            </a:r>
+            <a:pPr indent="0" marL="0">
+              <a:spcAft>
+                <a:spcPts val="600"/>
+              </a:spcAft>
+              <a:buNone/>
+            </a:pPr>
+            <a:r>
+              <a:rPr lang="en-US" sz="1500" dirty="0">
+                <a:solidFill>
+                  <a:srgbClr val="888888"/>
+                </a:solidFill>
+              </a:rPr>
+              <a:t>- perturbing any single one of the 6 cleanliness signals barely shifts the ranking (~10× less than process weights), so equal-weights for the sub-signals is defensible.</a:t>
+            </a:r>
+            <a:endParaRPr lang="en-US" sz="1500" dirty="0"/>
+          </a:p>
+        </p:txBody>
+      </p:sp>
+    </p:spTree>
+  </p:cSld>
+  <p:clrMapOvr>
+    <a:masterClrMapping/>
+  </p:clrMapOvr>
+</p:sld>
+</file>
+
 <file path=ppt/slides/slide19.xml><?xml version="1.0" encoding="utf-8"?>
 <p:sld xmlns:a="http://schemas.openxmlformats.org/drawingml/2006/main" xmlns:r="http://schemas.openxmlformats.org/officeDocument/2006/relationships" xmlns:p="http://schemas.openxmlformats.org/presentationml/2006/main">
   <p:cSld name="Slide 19">
@@ -11325,7 +11289,7 @@
                   <a:srgbClr val="000000"/>
                 </a:solidFill>
               </a:rPr>
-              <a:t>Is the process score reliable?</a:t>
+              <a:t>Does dashboard feedback change developer behaviour?</a:t>
             </a:r>
             <a:endParaRPr lang="en-US" sz="2800" dirty="0"/>
           </a:p>
@@ -11340,7 +11304,7 @@
         <p:spPr>
           <a:xfrm>
             <a:off x="457200" y="1188720"/>
-            <a:ext cx="8229600" cy="3657600"/>
+            <a:ext cx="8229600" cy="3291840"/>
           </a:xfrm>
           <a:prstGeom prst="rect">
             <a:avLst/>
@@ -11365,7 +11329,7 @@
                   <a:srgbClr val="000000"/>
                 </a:solidFill>
               </a:rPr>
-              <a:t>How stable is the score?</a:t>
+              <a:t>How did we design the study?</a:t>
             </a:r>
             <a:endParaRPr lang="en-US" sz="1500" dirty="0"/>
           </a:p>
@@ -11383,7 +11347,7 @@
                   <a:srgbClr val="000000"/>
                 </a:solidFill>
               </a:rPr>
-              <a:t>Two perturbation sweeps </a:t>
+              <a:t>5 MEng Computing participants, 6 sessions each, on an order-processing codebase </a:t>
             </a:r>
             <a:pPr indent="0" marL="0">
               <a:spcAft>
@@ -11397,7 +11361,7 @@
                   <a:srgbClr val="888888"/>
                 </a:solidFill>
               </a:rPr>
-              <a:t>- single-knob (one weight scaled ×0.1 to ×10) + multi-knob Monte Carlo (200 samples, σ = ln 2, so ~×0.25 to ×4 of production).</a:t>
+              <a:t>- 30 sessions total on user-study-fixture/ (separate from the labelled-injection codebase).</a:t>
             </a:r>
             <a:endParaRPr lang="en-US" sz="1500" dirty="0"/>
           </a:p>
@@ -11415,7 +11379,7 @@
                   <a:srgbClr val="000000"/>
                 </a:solidFill>
               </a:rPr>
-              <a:t>Stability metrics </a:t>
+              <a:t>Randomised into 2 arms </a:t>
             </a:r>
             <a:pPr indent="0" marL="0">
               <a:spcAft>
@@ -11429,7 +11393,7 @@
                   <a:srgbClr val="888888"/>
                 </a:solidFill>
               </a:rPr>
-              <a:t>- top-1 hit rate (does the top-ranked DP stay on top?) + Kendall's τ-b on per-session rankings.</a:t>
+              <a:t>- P1, P2, P3 see dashboard feedback between sessions; P4 and P5 don't. Same playbook, codebase, instrumentation.</a:t>
             </a:r>
             <a:endParaRPr lang="en-US" sz="1500" dirty="0"/>
           </a:p>
@@ -11447,7 +11411,7 @@
                   <a:srgbClr val="000000"/>
                 </a:solidFill>
               </a:rPr>
-              <a:t>Does every component of the process score hold weight?</a:t>
+              <a:t>What did we measure?</a:t>
             </a:r>
             <a:endParaRPr lang="en-US" sz="1500" dirty="0"/>
           </a:p>
@@ -11465,7 +11429,7 @@
                   <a:srgbClr val="000000"/>
                 </a:solidFill>
               </a:rPr>
-              <a:t>Process-side ablation </a:t>
+              <a:t>Divergence-point count per session </a:t>
             </a:r>
             <a:pPr indent="0" marL="0">
               <a:spcAft>
@@ -11479,7 +11443,7 @@
                   <a:srgbClr val="888888"/>
                 </a:solidFill>
               </a:rPr>
-              <a:t>- enumerate all 2⁷ = 128 subsets of the 7 process weights → 5,760 cases per session set.</a:t>
+              <a:t>- does the detector still surface the same kinds of friction over time?</a:t>
             </a:r>
             <a:endParaRPr lang="en-US" sz="1500" dirty="0"/>
           </a:p>
@@ -11497,7 +11461,7 @@
                   <a:srgbClr val="000000"/>
                 </a:solidFill>
               </a:rPr>
-              <a:t>Recovery metrics </a:t>
+              <a:t>Process score across the arc, two views </a:t>
             </a:r>
             <a:pPr indent="0" marL="0">
               <a:spcAft>
@@ -11511,9 +11475,45 @@
                   <a:srgbClr val="888888"/>
                 </a:solidFill>
               </a:rPr>
-              <a:t>- sum-over-sum magnitude recovery (does the term carry signal?) + leave-one-out Kendall's τ-b (does removing it reshuffle rankings?).</a:t>
+              <a:t>- the production score, plus a gain-stripped variant (W_g = W_lag = 0) that isolates how the participant worked from how much cleaner the code ended up.</a:t>
             </a:r>
             <a:endParaRPr lang="en-US" sz="1500" dirty="0"/>
+          </a:p>
+        </p:txBody>
+      </p:sp>
+      <p:sp>
+        <p:nvSpPr>
+          <p:cNvPr id="4" name="Text 2"/>
+          <p:cNvSpPr/>
+          <p:nvPr/>
+        </p:nvSpPr>
+        <p:spPr>
+          <a:xfrm>
+            <a:off x="457200" y="4617720"/>
+            <a:ext cx="8229600" cy="274320"/>
+          </a:xfrm>
+          <a:prstGeom prst="rect">
+            <a:avLst/>
+          </a:prstGeom>
+          <a:noFill/>
+          <a:ln/>
+        </p:spPr>
+        <p:txBody>
+          <a:bodyPr wrap="square" rtlCol="0" anchor="ctr"/>
+          <a:lstStyle/>
+          <a:p>
+            <a:pPr algn="ctr" indent="0" marL="0">
+              <a:buNone/>
+            </a:pPr>
+            <a:r>
+              <a:rPr lang="en-US" sz="1100" i="1" dirty="0">
+                <a:solidFill>
+                  <a:srgbClr val="888888"/>
+                </a:solidFill>
+              </a:rPr>
+              <a:t>Random assignment, n = 3 vs n = 2. Treated as a directional finding, not a hypothesis test.</a:t>
+            </a:r>
+            <a:endParaRPr lang="en-US" sz="1100" dirty="0"/>
           </a:p>
         </p:txBody>
       </p:sp>
@@ -11723,536 +11723,6 @@
 <file path=ppt/slides/slide20.xml><?xml version="1.0" encoding="utf-8"?>
 <p:sld xmlns:a="http://schemas.openxmlformats.org/drawingml/2006/main" xmlns:r="http://schemas.openxmlformats.org/officeDocument/2006/relationships" xmlns:p="http://schemas.openxmlformats.org/presentationml/2006/main">
   <p:cSld name="Slide 20">
-    <p:spTree>
-      <p:nvGrpSpPr>
-        <p:cNvPr id="1" name=""/>
-        <p:cNvGrpSpPr/>
-        <p:nvPr/>
-      </p:nvGrpSpPr>
-      <p:grpSpPr>
-        <a:xfrm>
-          <a:off x="0" y="0"/>
-          <a:ext cx="0" cy="0"/>
-          <a:chOff x="0" y="0"/>
-          <a:chExt cx="0" cy="0"/>
-        </a:xfrm>
-      </p:grpSpPr>
-      <p:sp>
-        <p:nvSpPr>
-          <p:cNvPr id="2" name="Text 0"/>
-          <p:cNvSpPr/>
-          <p:nvPr/>
-        </p:nvSpPr>
-        <p:spPr>
-          <a:xfrm>
-            <a:off x="457200" y="274320"/>
-            <a:ext cx="8229600" cy="640080"/>
-          </a:xfrm>
-          <a:prstGeom prst="rect">
-            <a:avLst/>
-          </a:prstGeom>
-          <a:noFill/>
-          <a:ln/>
-        </p:spPr>
-        <p:txBody>
-          <a:bodyPr wrap="square" lIns="0" tIns="0" rIns="0" bIns="0" rtlCol="0" anchor="ctr"/>
-          <a:lstStyle/>
-          <a:p>
-            <a:pPr indent="0" marL="0">
-              <a:buNone/>
-            </a:pPr>
-            <a:r>
-              <a:rPr lang="en-US" sz="2800" b="1" dirty="0">
-                <a:solidFill>
-                  <a:srgbClr val="000000"/>
-                </a:solidFill>
-              </a:rPr>
-              <a:t>Score is locally robust</a:t>
-            </a:r>
-            <a:endParaRPr lang="en-US" sz="2800" dirty="0"/>
-          </a:p>
-        </p:txBody>
-      </p:sp>
-      <p:sp>
-        <p:nvSpPr>
-          <p:cNvPr id="3" name="Text 1"/>
-          <p:cNvSpPr/>
-          <p:nvPr/>
-        </p:nvSpPr>
-        <p:spPr>
-          <a:xfrm>
-            <a:off x="457200" y="1188720"/>
-            <a:ext cx="8229600" cy="3657600"/>
-          </a:xfrm>
-          <a:prstGeom prst="rect">
-            <a:avLst/>
-          </a:prstGeom>
-          <a:noFill/>
-          <a:ln/>
-        </p:spPr>
-        <p:txBody>
-          <a:bodyPr wrap="square" rtlCol="0" anchor="t"/>
-          <a:lstStyle/>
-          <a:p>
-            <a:pPr marL="342900" indent="-342900">
-              <a:spcAft>
-                <a:spcPts val="600"/>
-              </a:spcAft>
-              <a:buSzPct val="100000"/>
-              <a:buChar char="•"/>
-            </a:pPr>
-            <a:r>
-              <a:rPr lang="en-US" sz="1500" b="1" dirty="0">
-                <a:solidFill>
-                  <a:srgbClr val="000000"/>
-                </a:solidFill>
-              </a:rPr>
-              <a:t>How stable is the score?</a:t>
-            </a:r>
-            <a:endParaRPr lang="en-US" sz="1500" dirty="0"/>
-          </a:p>
-          <a:p>
-            <a:pPr lvl="1" marL="762000" indent="-381000">
-              <a:spcAft>
-                <a:spcPts val="600"/>
-              </a:spcAft>
-              <a:buSzPct val="100000"/>
-              <a:buChar char="•"/>
-            </a:pPr>
-            <a:r>
-              <a:rPr lang="en-US" sz="1500" dirty="0">
-                <a:solidFill>
-                  <a:srgbClr val="000000"/>
-                </a:solidFill>
-              </a:rPr>
-              <a:t>Single-knob: 96.5% top-1 preserved </a:t>
-            </a:r>
-            <a:pPr indent="0" marL="0">
-              <a:spcAft>
-                <a:spcPts val="600"/>
-              </a:spcAft>
-              <a:buNone/>
-            </a:pPr>
-            <a:r>
-              <a:rPr lang="en-US" sz="1500" dirty="0">
-                <a:solidFill>
-                  <a:srgbClr val="888888"/>
-                </a:solidFill>
-              </a:rPr>
-              <a:t>- top-ranked DP rarely changes under any one-weight perturbation. Only 1.8% of cases are clamp-frozen, so this is genuine response - not a clamp artefact.</a:t>
-            </a:r>
-            <a:endParaRPr lang="en-US" sz="1500" dirty="0"/>
-          </a:p>
-          <a:p>
-            <a:pPr lvl="1" marL="762000" indent="-381000">
-              <a:spcAft>
-                <a:spcPts val="1800"/>
-              </a:spcAft>
-              <a:buSzPct val="100000"/>
-              <a:buChar char="•"/>
-            </a:pPr>
-            <a:r>
-              <a:rPr lang="en-US" sz="1500" dirty="0">
-                <a:solidFill>
-                  <a:srgbClr val="000000"/>
-                </a:solidFill>
-              </a:rPr>
-              <a:t>Multi-knob: 84.6% top-1 preserved (τ-b = 0.586) </a:t>
-            </a:r>
-            <a:pPr indent="0" marL="0">
-              <a:spcAft>
-                <a:spcPts val="1800"/>
-              </a:spcAft>
-              <a:buNone/>
-            </a:pPr>
-            <a:r>
-              <a:rPr lang="en-US" sz="1500" dirty="0">
-                <a:solidFill>
-                  <a:srgbClr val="888888"/>
-                </a:solidFill>
-              </a:rPr>
-              <a:t>- when all weights move at once, top-1 holds in ~85% of cases and ~79% of pairs still rank in the same order. Meaningful correlation, not full preservation.</a:t>
-            </a:r>
-            <a:endParaRPr lang="en-US" sz="1500" dirty="0"/>
-          </a:p>
-          <a:p>
-            <a:pPr marL="342900" indent="-342900">
-              <a:spcAft>
-                <a:spcPts val="600"/>
-              </a:spcAft>
-              <a:buSzPct val="100000"/>
-              <a:buChar char="•"/>
-            </a:pPr>
-            <a:r>
-              <a:rPr lang="en-US" sz="1500" b="1" dirty="0">
-                <a:solidFill>
-                  <a:srgbClr val="000000"/>
-                </a:solidFill>
-              </a:rPr>
-              <a:t>Does every component of the process score hold weight?</a:t>
-            </a:r>
-            <a:endParaRPr lang="en-US" sz="1500" dirty="0"/>
-          </a:p>
-          <a:p>
-            <a:pPr lvl="1" marL="762000" indent="-381000">
-              <a:spcAft>
-                <a:spcPts val="600"/>
-              </a:spcAft>
-              <a:buSzPct val="100000"/>
-              <a:buChar char="•"/>
-            </a:pPr>
-            <a:r>
-              <a:rPr lang="en-US" sz="1500" dirty="0">
-                <a:solidFill>
-                  <a:srgbClr val="000000"/>
-                </a:solidFill>
-              </a:rPr>
-              <a:t>Length is the rank-carrier (LOO τ-b = 0.527) </a:t>
-            </a:r>
-            <a:pPr indent="0" marL="0">
-              <a:spcAft>
-                <a:spcPts val="600"/>
-              </a:spcAft>
-              <a:buNone/>
-            </a:pPr>
-            <a:r>
-              <a:rPr lang="en-US" sz="1500" dirty="0">
-                <a:solidFill>
-                  <a:srgbClr val="888888"/>
-                </a:solidFill>
-              </a:rPr>
-              <a:t>- removing length reshuffles the per-session ranking more than removing any other process term - the most influential term.</a:t>
-            </a:r>
-            <a:endParaRPr lang="en-US" sz="1500" dirty="0"/>
-          </a:p>
-          <a:p>
-            <a:pPr lvl="1" marL="762000" indent="-381000">
-              <a:spcAft>
-                <a:spcPts val="600"/>
-              </a:spcAft>
-              <a:buSzPct val="100000"/>
-              <a:buChar char="•"/>
-            </a:pPr>
-            <a:r>
-              <a:rPr lang="en-US" sz="1500" dirty="0">
-                <a:solidFill>
-                  <a:srgbClr val="000000"/>
-                </a:solidFill>
-              </a:rPr>
-              <a:t>Cleanliness sub-weights: ≤ 0.9% top-1 disruption </a:t>
-            </a:r>
-            <a:pPr indent="0" marL="0">
-              <a:spcAft>
-                <a:spcPts val="600"/>
-              </a:spcAft>
-              <a:buNone/>
-            </a:pPr>
-            <a:r>
-              <a:rPr lang="en-US" sz="1500" dirty="0">
-                <a:solidFill>
-                  <a:srgbClr val="888888"/>
-                </a:solidFill>
-              </a:rPr>
-              <a:t>- perturbing any single one of the 6 cleanliness signals barely shifts the ranking (~10× less than process weights), so equal-weights for the sub-signals is defensible.</a:t>
-            </a:r>
-            <a:endParaRPr lang="en-US" sz="1500" dirty="0"/>
-          </a:p>
-        </p:txBody>
-      </p:sp>
-    </p:spTree>
-  </p:cSld>
-  <p:clrMapOvr>
-    <a:masterClrMapping/>
-  </p:clrMapOvr>
-</p:sld>
-</file>
-
-<file path=ppt/slides/slide21.xml><?xml version="1.0" encoding="utf-8"?>
-<p:sld xmlns:a="http://schemas.openxmlformats.org/drawingml/2006/main" xmlns:r="http://schemas.openxmlformats.org/officeDocument/2006/relationships" xmlns:p="http://schemas.openxmlformats.org/presentationml/2006/main">
-  <p:cSld name="Slide 21">
-    <p:spTree>
-      <p:nvGrpSpPr>
-        <p:cNvPr id="1" name=""/>
-        <p:cNvGrpSpPr/>
-        <p:nvPr/>
-      </p:nvGrpSpPr>
-      <p:grpSpPr>
-        <a:xfrm>
-          <a:off x="0" y="0"/>
-          <a:ext cx="0" cy="0"/>
-          <a:chOff x="0" y="0"/>
-          <a:chExt cx="0" cy="0"/>
-        </a:xfrm>
-      </p:grpSpPr>
-      <p:sp>
-        <p:nvSpPr>
-          <p:cNvPr id="2" name="Text 0"/>
-          <p:cNvSpPr/>
-          <p:nvPr/>
-        </p:nvSpPr>
-        <p:spPr>
-          <a:xfrm>
-            <a:off x="457200" y="274320"/>
-            <a:ext cx="8229600" cy="640080"/>
-          </a:xfrm>
-          <a:prstGeom prst="rect">
-            <a:avLst/>
-          </a:prstGeom>
-          <a:noFill/>
-          <a:ln/>
-        </p:spPr>
-        <p:txBody>
-          <a:bodyPr wrap="square" lIns="0" tIns="0" rIns="0" bIns="0" rtlCol="0" anchor="ctr"/>
-          <a:lstStyle/>
-          <a:p>
-            <a:pPr indent="0" marL="0">
-              <a:buNone/>
-            </a:pPr>
-            <a:r>
-              <a:rPr lang="en-US" sz="2800" b="1" dirty="0">
-                <a:solidFill>
-                  <a:srgbClr val="000000"/>
-                </a:solidFill>
-              </a:rPr>
-              <a:t>Does dashboard feedback change developer behaviour?</a:t>
-            </a:r>
-            <a:endParaRPr lang="en-US" sz="2800" dirty="0"/>
-          </a:p>
-        </p:txBody>
-      </p:sp>
-      <p:sp>
-        <p:nvSpPr>
-          <p:cNvPr id="3" name="Text 1"/>
-          <p:cNvSpPr/>
-          <p:nvPr/>
-        </p:nvSpPr>
-        <p:spPr>
-          <a:xfrm>
-            <a:off x="457200" y="1188720"/>
-            <a:ext cx="8229600" cy="3291840"/>
-          </a:xfrm>
-          <a:prstGeom prst="rect">
-            <a:avLst/>
-          </a:prstGeom>
-          <a:noFill/>
-          <a:ln/>
-        </p:spPr>
-        <p:txBody>
-          <a:bodyPr wrap="square" rtlCol="0" anchor="t"/>
-          <a:lstStyle/>
-          <a:p>
-            <a:pPr marL="342900" indent="-342900">
-              <a:spcAft>
-                <a:spcPts val="600"/>
-              </a:spcAft>
-              <a:buSzPct val="100000"/>
-              <a:buChar char="•"/>
-            </a:pPr>
-            <a:r>
-              <a:rPr lang="en-US" sz="1500" b="1" dirty="0">
-                <a:solidFill>
-                  <a:srgbClr val="000000"/>
-                </a:solidFill>
-              </a:rPr>
-              <a:t>How did we design the study?</a:t>
-            </a:r>
-            <a:endParaRPr lang="en-US" sz="1500" dirty="0"/>
-          </a:p>
-          <a:p>
-            <a:pPr lvl="1" marL="762000" indent="-381000">
-              <a:spcAft>
-                <a:spcPts val="600"/>
-              </a:spcAft>
-              <a:buSzPct val="100000"/>
-              <a:buChar char="•"/>
-            </a:pPr>
-            <a:r>
-              <a:rPr lang="en-US" sz="1500" dirty="0">
-                <a:solidFill>
-                  <a:srgbClr val="000000"/>
-                </a:solidFill>
-              </a:rPr>
-              <a:t>5 MEng Computing participants, 6 sessions each, on an order-processing codebase </a:t>
-            </a:r>
-            <a:pPr indent="0" marL="0">
-              <a:spcAft>
-                <a:spcPts val="600"/>
-              </a:spcAft>
-              <a:buNone/>
-            </a:pPr>
-            <a:r>
-              <a:rPr lang="en-US" sz="1500" dirty="0">
-                <a:solidFill>
-                  <a:srgbClr val="888888"/>
-                </a:solidFill>
-              </a:rPr>
-              <a:t>- 30 sessions total on user-study-fixture/ (separate from the labelled-injection codebase).</a:t>
-            </a:r>
-            <a:endParaRPr lang="en-US" sz="1500" dirty="0"/>
-          </a:p>
-          <a:p>
-            <a:pPr lvl="1" marL="762000" indent="-381000">
-              <a:spcAft>
-                <a:spcPts val="1800"/>
-              </a:spcAft>
-              <a:buSzPct val="100000"/>
-              <a:buChar char="•"/>
-            </a:pPr>
-            <a:r>
-              <a:rPr lang="en-US" sz="1500" dirty="0">
-                <a:solidFill>
-                  <a:srgbClr val="000000"/>
-                </a:solidFill>
-              </a:rPr>
-              <a:t>Randomised into 2 arms </a:t>
-            </a:r>
-            <a:pPr indent="0" marL="0">
-              <a:spcAft>
-                <a:spcPts val="1800"/>
-              </a:spcAft>
-              <a:buNone/>
-            </a:pPr>
-            <a:r>
-              <a:rPr lang="en-US" sz="1500" dirty="0">
-                <a:solidFill>
-                  <a:srgbClr val="888888"/>
-                </a:solidFill>
-              </a:rPr>
-              <a:t>- P1, P2, P3 see dashboard feedback between sessions; P4 and P5 don't. Same playbook, codebase, instrumentation.</a:t>
-            </a:r>
-            <a:endParaRPr lang="en-US" sz="1500" dirty="0"/>
-          </a:p>
-          <a:p>
-            <a:pPr marL="342900" indent="-342900">
-              <a:spcAft>
-                <a:spcPts val="600"/>
-              </a:spcAft>
-              <a:buSzPct val="100000"/>
-              <a:buChar char="•"/>
-            </a:pPr>
-            <a:r>
-              <a:rPr lang="en-US" sz="1500" b="1" dirty="0">
-                <a:solidFill>
-                  <a:srgbClr val="000000"/>
-                </a:solidFill>
-              </a:rPr>
-              <a:t>What did we measure?</a:t>
-            </a:r>
-            <a:endParaRPr lang="en-US" sz="1500" dirty="0"/>
-          </a:p>
-          <a:p>
-            <a:pPr lvl="1" marL="762000" indent="-381000">
-              <a:spcAft>
-                <a:spcPts val="600"/>
-              </a:spcAft>
-              <a:buSzPct val="100000"/>
-              <a:buChar char="•"/>
-            </a:pPr>
-            <a:r>
-              <a:rPr lang="en-US" sz="1500" dirty="0">
-                <a:solidFill>
-                  <a:srgbClr val="000000"/>
-                </a:solidFill>
-              </a:rPr>
-              <a:t>Divergence-point count per session </a:t>
-            </a:r>
-            <a:pPr indent="0" marL="0">
-              <a:spcAft>
-                <a:spcPts val="600"/>
-              </a:spcAft>
-              <a:buNone/>
-            </a:pPr>
-            <a:r>
-              <a:rPr lang="en-US" sz="1500" dirty="0">
-                <a:solidFill>
-                  <a:srgbClr val="888888"/>
-                </a:solidFill>
-              </a:rPr>
-              <a:t>- does the detector still surface the same kinds of friction over time?</a:t>
-            </a:r>
-            <a:endParaRPr lang="en-US" sz="1500" dirty="0"/>
-          </a:p>
-          <a:p>
-            <a:pPr lvl="1" marL="762000" indent="-381000">
-              <a:spcAft>
-                <a:spcPts val="600"/>
-              </a:spcAft>
-              <a:buSzPct val="100000"/>
-              <a:buChar char="•"/>
-            </a:pPr>
-            <a:r>
-              <a:rPr lang="en-US" sz="1500" dirty="0">
-                <a:solidFill>
-                  <a:srgbClr val="000000"/>
-                </a:solidFill>
-              </a:rPr>
-              <a:t>Process score across the arc, two views </a:t>
-            </a:r>
-            <a:pPr indent="0" marL="0">
-              <a:spcAft>
-                <a:spcPts val="600"/>
-              </a:spcAft>
-              <a:buNone/>
-            </a:pPr>
-            <a:r>
-              <a:rPr lang="en-US" sz="1500" dirty="0">
-                <a:solidFill>
-                  <a:srgbClr val="888888"/>
-                </a:solidFill>
-              </a:rPr>
-              <a:t>- the production score, plus a gain-stripped variant (W_g = W_lag = 0) that isolates how the participant worked from how much cleaner the code ended up.</a:t>
-            </a:r>
-            <a:endParaRPr lang="en-US" sz="1500" dirty="0"/>
-          </a:p>
-        </p:txBody>
-      </p:sp>
-      <p:sp>
-        <p:nvSpPr>
-          <p:cNvPr id="4" name="Text 2"/>
-          <p:cNvSpPr/>
-          <p:nvPr/>
-        </p:nvSpPr>
-        <p:spPr>
-          <a:xfrm>
-            <a:off x="457200" y="4617720"/>
-            <a:ext cx="8229600" cy="274320"/>
-          </a:xfrm>
-          <a:prstGeom prst="rect">
-            <a:avLst/>
-          </a:prstGeom>
-          <a:noFill/>
-          <a:ln/>
-        </p:spPr>
-        <p:txBody>
-          <a:bodyPr wrap="square" rtlCol="0" anchor="ctr"/>
-          <a:lstStyle/>
-          <a:p>
-            <a:pPr algn="ctr" indent="0" marL="0">
-              <a:buNone/>
-            </a:pPr>
-            <a:r>
-              <a:rPr lang="en-US" sz="1100" i="1" dirty="0">
-                <a:solidFill>
-                  <a:srgbClr val="888888"/>
-                </a:solidFill>
-              </a:rPr>
-              <a:t>Random assignment, n = 3 vs n = 2. Treated as a directional finding, not a hypothesis test.</a:t>
-            </a:r>
-            <a:endParaRPr lang="en-US" sz="1100" dirty="0"/>
-          </a:p>
-        </p:txBody>
-      </p:sp>
-    </p:spTree>
-  </p:cSld>
-  <p:clrMapOvr>
-    <a:masterClrMapping/>
-  </p:clrMapOvr>
-</p:sld>
-</file>
-
-<file path=ppt/slides/slide22.xml><?xml version="1.0" encoding="utf-8"?>
-<p:sld xmlns:a="http://schemas.openxmlformats.org/drawingml/2006/main" xmlns:r="http://schemas.openxmlformats.org/officeDocument/2006/relationships" xmlns:p="http://schemas.openxmlformats.org/presentationml/2006/main">
-  <p:cSld name="Slide 22">
     <p:spTree>
       <p:nvGrpSpPr>
         <p:cNvPr id="1" name=""/>
@@ -12462,9 +11932,9 @@
 </p:sld>
 </file>
 
-<file path=ppt/slides/slide23.xml><?xml version="1.0" encoding="utf-8"?>
+<file path=ppt/slides/slide21.xml><?xml version="1.0" encoding="utf-8"?>
 <p:sld xmlns:a="http://schemas.openxmlformats.org/drawingml/2006/main" xmlns:r="http://schemas.openxmlformats.org/officeDocument/2006/relationships" xmlns:p="http://schemas.openxmlformats.org/presentationml/2006/main">
-  <p:cSld name="Slide 23">
+  <p:cSld name="Slide 21">
     <p:spTree>
       <p:nvGrpSpPr>
         <p:cNvPr id="1" name=""/>
@@ -12658,9 +12128,9 @@
 </p:sld>
 </file>
 
-<file path=ppt/slides/slide24.xml><?xml version="1.0" encoding="utf-8"?>
+<file path=ppt/slides/slide22.xml><?xml version="1.0" encoding="utf-8"?>
 <p:sld xmlns:a="http://schemas.openxmlformats.org/drawingml/2006/main" xmlns:r="http://schemas.openxmlformats.org/officeDocument/2006/relationships" xmlns:p="http://schemas.openxmlformats.org/presentationml/2006/main">
-  <p:cSld name="Slide 24">
+  <p:cSld name="Slide 22">
     <p:spTree>
       <p:nvGrpSpPr>
         <p:cNvPr id="1" name=""/>
@@ -12765,7 +12235,7 @@
       </p:graphicFrame>
       <p:graphicFrame>
         <p:nvGraphicFramePr>
-          <p:cNvPr id="25" name="Table 0"/>
+          <p:cNvPr id="23" name="Table 0"/>
           <p:cNvGraphicFramePr>
             <a:graphicFrameLocks noGrp="1"/>
           </p:cNvGraphicFramePr>
@@ -13544,9 +13014,9 @@
 </p:sld>
 </file>
 
-<file path=ppt/slides/slide25.xml><?xml version="1.0" encoding="utf-8"?>
+<file path=ppt/slides/slide23.xml><?xml version="1.0" encoding="utf-8"?>
 <p:sld xmlns:a="http://schemas.openxmlformats.org/drawingml/2006/main" xmlns:r="http://schemas.openxmlformats.org/officeDocument/2006/relationships" xmlns:p="http://schemas.openxmlformats.org/presentationml/2006/main">
-  <p:cSld name="Slide 25">
+  <p:cSld name="Slide 23">
     <p:spTree>
       <p:nvGrpSpPr>
         <p:cNvPr id="1" name=""/>
@@ -13591,7 +13061,7 @@
                   <a:srgbClr val="000000"/>
                 </a:solidFill>
               </a:rPr>
-              <a:t>Contributions</a:t>
+              <a:t>Conclusion</a:t>
             </a:r>
             <a:endParaRPr lang="en-US" sz="2800" dirty="0"/>
           </a:p>
@@ -13605,8 +13075,44 @@
         </p:nvSpPr>
         <p:spPr>
           <a:xfrm>
-            <a:off x="457200" y="1188720"/>
-            <a:ext cx="8229600" cy="3657600"/>
+            <a:off x="457200" y="1051560"/>
+            <a:ext cx="8229600" cy="685800"/>
+          </a:xfrm>
+          <a:prstGeom prst="rect">
+            <a:avLst/>
+          </a:prstGeom>
+          <a:noFill/>
+          <a:ln/>
+        </p:spPr>
+        <p:txBody>
+          <a:bodyPr wrap="square" rtlCol="0" anchor="ctr"/>
+          <a:lstStyle/>
+          <a:p>
+            <a:pPr algn="ctr" indent="0" marL="0">
+              <a:buNone/>
+            </a:pPr>
+            <a:r>
+              <a:rPr lang="en-US" sz="1700" i="1" dirty="0">
+                <a:solidFill>
+                  <a:srgbClr val="1F3F6F"/>
+                </a:solidFill>
+              </a:rPr>
+              <a:t>Process-aware refactoring evaluation is tractable, and the resulting feedback shifts developer behaviour.</a:t>
+            </a:r>
+            <a:endParaRPr lang="en-US" sz="1700" dirty="0"/>
+          </a:p>
+        </p:txBody>
+      </p:sp>
+      <p:sp>
+        <p:nvSpPr>
+          <p:cNvPr id="4" name="Text 2"/>
+          <p:cNvSpPr/>
+          <p:nvPr/>
+        </p:nvSpPr>
+        <p:spPr>
+          <a:xfrm>
+            <a:off x="457200" y="1920240"/>
+            <a:ext cx="8229600" cy="3017520"/>
           </a:xfrm>
           <a:prstGeom prst="rect">
             <a:avLst/>
@@ -14930,7 +14436,7 @@
                   <a:srgbClr val="000000"/>
                 </a:solidFill>
               </a:rPr>
-              <a:t>Ordering </a:t>
+              <a:t>Manual-Refactor </a:t>
             </a:r>
             <a:pPr indent="0" marL="0">
               <a:spcAft>
@@ -14944,7 +14450,7 @@
                   <a:srgbClr val="888888"/>
                 </a:solidFill>
               </a:rPr>
-              <a:t>- right refactorings, wrong sequence.</a:t>
+              <a:t>- unnecessary risk (hand-edit when the IDE could have safely done it).</a:t>
             </a:r>
             <a:endParaRPr lang="en-US" sz="1800" dirty="0"/>
           </a:p>
@@ -14962,7 +14468,7 @@
                   <a:srgbClr val="000000"/>
                 </a:solidFill>
               </a:rPr>
-              <a:t>Manual-Refactor </a:t>
+              <a:t>Ordering </a:t>
             </a:r>
             <a:pPr indent="0" marL="0">
               <a:spcAft>
@@ -14976,7 +14482,7 @@
                   <a:srgbClr val="888888"/>
                 </a:solidFill>
               </a:rPr>
-              <a:t>- unnecessary risk (hand-edit when the IDE could have safely done it).</a:t>
+              <a:t>- right refactorings, wrong sequence.</a:t>
             </a:r>
             <a:endParaRPr lang="en-US" sz="1800" dirty="0"/>
           </a:p>
@@ -16041,7 +15547,7 @@
 </file>
 
 <file path=ppt/slides/slide9.xml><?xml version="1.0" encoding="utf-8"?>
-<p:sld xmlns:a="http://schemas.openxmlformats.org/drawingml/2006/main" xmlns:r="http://schemas.openxmlformats.org/officeDocument/2006/relationships" xmlns:p="http://schemas.openxmlformats.org/presentationml/2006/main" show="0">
+<p:sld xmlns:a="http://schemas.openxmlformats.org/drawingml/2006/main" xmlns:r="http://schemas.openxmlformats.org/officeDocument/2006/relationships" xmlns:p="http://schemas.openxmlformats.org/presentationml/2006/main">
   <p:cSld name="Slide 9">
     <p:spTree>
       <p:nvGrpSpPr>
@@ -16087,7 +15593,7 @@
                   <a:srgbClr val="000000"/>
                 </a:solidFill>
               </a:rPr>
-              <a:t>The cleanliness sub-score</a:t>
+              <a:t>Manual-Refactor: detect + synthesise</a:t>
             </a:r>
             <a:endParaRPr lang="en-US" sz="2800" dirty="0"/>
           </a:p>
@@ -16101,8 +15607,8 @@
         </p:nvSpPr>
         <p:spPr>
           <a:xfrm>
-            <a:off x="457200" y="1188720"/>
-            <a:ext cx="8229600" cy="3657600"/>
+            <a:off x="457200" y="1097280"/>
+            <a:ext cx="8229600" cy="1691640"/>
           </a:xfrm>
           <a:prstGeom prst="rect">
             <a:avLst/>
@@ -16122,14 +15628,14 @@
               <a:buChar char="•"/>
             </a:pPr>
             <a:r>
-              <a:rPr lang="en-US" sz="1600" dirty="0">
+              <a:rPr lang="en-US" sz="1300" dirty="0">
                 <a:solidFill>
                   <a:srgbClr val="000000"/>
                 </a:solidFill>
               </a:rPr>
-              <a:t>Six equally-weighted code-quality signals.</a:t>
-            </a:r>
-            <a:endParaRPr lang="en-US" sz="1600" dirty="0"/>
+              <a:t>What: developer hand-edited something the IDE could have done safely (and with its precondition checks).</a:t>
+            </a:r>
+            <a:endParaRPr lang="en-US" sz="1300" dirty="0"/>
           </a:p>
           <a:p>
             <a:pPr marL="342900" indent="-342900">
@@ -16140,14 +15646,14 @@
               <a:buChar char="•"/>
             </a:pPr>
             <a:r>
-              <a:rPr lang="en-US" sz="1600" dirty="0">
+              <a:rPr lang="en-US" sz="1300" dirty="0">
                 <a:solidFill>
                   <a:srgbClr val="000000"/>
                 </a:solidFill>
               </a:rPr>
-              <a:t>Cognitive complexity, coupling (CBO), duplication (CPD), readability, code smells (PMD), cohesion (TCC).</a:t>
-            </a:r>
-            <a:endParaRPr lang="en-US" sz="1600" dirty="0"/>
+              <a:t>Detect: run RefactoringMiner on sliding commit windows; cross-check against the IDE event stream - anything RefactoringMiner finds that the IDE did not emit is a manual refactoring.</a:t>
+            </a:r>
+            <a:endParaRPr lang="en-US" sz="1300" dirty="0"/>
           </a:p>
           <a:p>
             <a:pPr marL="342900" indent="-342900">
@@ -16158,14 +15664,14 @@
               <a:buChar char="•"/>
             </a:pPr>
             <a:r>
-              <a:rPr lang="en-US" sz="1600" dirty="0">
+              <a:rPr lang="en-US" sz="1300" dirty="0">
                 <a:solidFill>
                   <a:srgbClr val="000000"/>
                 </a:solidFill>
               </a:rPr>
-              <a:t>Normalised against the trajectory's own range, so different sessions are comparable.</a:t>
-            </a:r>
-            <a:endParaRPr lang="en-US" sz="1600" dirty="0"/>
+              <a:t>Synthesise: apply the equivalent IDE refactoring, then three-way merge the user's other edits back on top.</a:t>
+            </a:r>
+            <a:endParaRPr lang="en-US" sz="1300" dirty="0"/>
           </a:p>
           <a:p>
             <a:pPr marL="342900" indent="-342900">
@@ -16176,17 +15682,41 @@
               <a:buChar char="•"/>
             </a:pPr>
             <a:r>
-              <a:rPr lang="en-US" sz="1600" dirty="0">
+              <a:rPr lang="en-US" sz="1300" dirty="0">
                 <a:solidFill>
                   <a:srgbClr val="000000"/>
                 </a:solidFill>
               </a:rPr>
-              <a:t>Equal weights are justified: no trajectory-level calibration data exists, so equal weights are the least-assumptive choice.</a:t>
-            </a:r>
-            <a:endParaRPr lang="en-US" sz="1600" dirty="0"/>
+              <a:t>Wrap-and-patch layer reconciles minor JDT ↔ IntelliJ AST differences (e.g. static modifiers, variable liveness).</a:t>
+            </a:r>
+            <a:endParaRPr lang="en-US" sz="1300" dirty="0"/>
           </a:p>
         </p:txBody>
       </p:sp>
+      <p:pic>
+        <p:nvPicPr>
+          <p:cNvPr id="4" name="Image 0" descr="images/manual-refactor.png">    </p:cNvPr>
+          <p:cNvPicPr>
+            <a:picLocks noChangeAspect="1"/>
+          </p:cNvPicPr>
+          <p:nvPr/>
+        </p:nvPicPr>
+        <p:blipFill>
+          <a:blip r:embed="rId1"/>
+          <a:stretch>
+            <a:fillRect/>
+          </a:stretch>
+        </p:blipFill>
+        <p:spPr>
+          <a:xfrm>
+            <a:off x="1463040" y="2880360"/>
+            <a:ext cx="6217920" cy="2039112"/>
+          </a:xfrm>
+          <a:prstGeom prst="rect">
+            <a:avLst/>
+          </a:prstGeom>
+        </p:spPr>
+      </p:pic>
     </p:spTree>
   </p:cSld>
   <p:clrMapOvr>

--- a/presentation/slides.pptx
+++ b/presentation/slides.pptx
@@ -13458,7 +13458,7 @@
         <p:spPr>
           <a:xfrm>
             <a:off x="457200" y="1645920"/>
-            <a:ext cx="8229600" cy="3291840"/>
+            <a:ext cx="8229600" cy="2926080"/>
           </a:xfrm>
           <a:prstGeom prst="rect">
             <a:avLst/>
@@ -13478,7 +13478,7 @@
               <a:buChar char="•"/>
             </a:pPr>
             <a:r>
-              <a:rPr lang="en-US" sz="1300" b="1" dirty="0">
+              <a:rPr lang="en-US" sz="1400" b="1" dirty="0">
                 <a:solidFill>
                   <a:srgbClr val="000000"/>
                 </a:solidFill>
@@ -13492,12 +13492,12 @@
               <a:buNone/>
             </a:pPr>
             <a:r>
-              <a:rPr lang="en-US" sz="1300" dirty="0">
+              <a:rPr lang="en-US" sz="1400" dirty="0">
                 <a:solidFill>
                   <a:srgbClr val="000000"/>
                 </a:solidFill>
               </a:rPr>
-              <a:t>- one number per trajectory so sessions can be compared. </a:t>
+              <a:t>- one number per trajectory so sessions can be compared.</a:t>
             </a:r>
             <a:pPr indent="0" marL="0">
               <a:spcAft>
@@ -13506,14 +13506,14 @@
               <a:buNone/>
             </a:pPr>
             <a:r>
-              <a:rPr lang="en-US" sz="1300" dirty="0">
+              <a:rPr lang="en-US" sz="1400" dirty="0">
                 <a:solidFill>
                   <a:srgbClr val="888888"/>
                 </a:solidFill>
               </a:rPr>
-              <a:t>Builds on composite quality models (Quamoco, QMOOD), adapted from snapshot- to trajectory-level.</a:t>
-            </a:r>
-            <a:endParaRPr lang="en-US" sz="1300" dirty="0"/>
+              <a:t> [1]</a:t>
+            </a:r>
+            <a:endParaRPr lang="en-US" sz="1400" dirty="0"/>
           </a:p>
           <a:p>
             <a:pPr marL="342900" indent="-342900">
@@ -13524,7 +13524,7 @@
               <a:buChar char="•"/>
             </a:pPr>
             <a:r>
-              <a:rPr lang="en-US" sz="1300" b="1" dirty="0">
+              <a:rPr lang="en-US" sz="1400" b="1" dirty="0">
                 <a:solidFill>
                   <a:srgbClr val="000000"/>
                 </a:solidFill>
@@ -13538,12 +13538,12 @@
               <a:buNone/>
             </a:pPr>
             <a:r>
-              <a:rPr lang="en-US" sz="1300" dirty="0">
+              <a:rPr lang="en-US" sz="1400" dirty="0">
                 <a:solidFill>
                   <a:srgbClr val="000000"/>
                 </a:solidFill>
               </a:rPr>
-              <a:t>- zero extra developer effort to use the tool. </a:t>
+              <a:t>- zero extra developer effort to use the tool.</a:t>
             </a:r>
             <a:pPr indent="0" marL="0">
               <a:spcAft>
@@ -13552,14 +13552,14 @@
               <a:buNone/>
             </a:pPr>
             <a:r>
-              <a:rPr lang="en-US" sz="1300" dirty="0">
+              <a:rPr lang="en-US" sz="1400" dirty="0">
                 <a:solidFill>
                   <a:srgbClr val="888888"/>
                 </a:solidFill>
               </a:rPr>
-              <a:t>IDE-event logging is a known-feasible approach (Damevski et al., CodeWatcher).</a:t>
-            </a:r>
-            <a:endParaRPr lang="en-US" sz="1300" dirty="0"/>
+              <a:t> [2]</a:t>
+            </a:r>
+            <a:endParaRPr lang="en-US" sz="1400" dirty="0"/>
           </a:p>
           <a:p>
             <a:pPr marL="342900" indent="-342900">
@@ -13570,7 +13570,7 @@
               <a:buChar char="•"/>
             </a:pPr>
             <a:r>
-              <a:rPr lang="en-US" sz="1300" b="1" dirty="0">
+              <a:rPr lang="en-US" sz="1400" b="1" dirty="0">
                 <a:solidFill>
                   <a:srgbClr val="000000"/>
                 </a:solidFill>
@@ -13584,12 +13584,12 @@
               <a:buNone/>
             </a:pPr>
             <a:r>
-              <a:rPr lang="en-US" sz="1300" dirty="0">
+              <a:rPr lang="en-US" sz="1400" dirty="0">
                 <a:solidFill>
                   <a:srgbClr val="000000"/>
                 </a:solidFill>
               </a:rPr>
-              <a:t>- point to a specific moment AND a "what you could have done instead" alternative. </a:t>
+              <a:t>- point to a specific moment AND a "what you could have done instead" alternative.</a:t>
             </a:r>
             <a:pPr indent="0" marL="0">
               <a:spcAft>
@@ -13598,14 +13598,14 @@
               <a:buNone/>
             </a:pPr>
             <a:r>
-              <a:rPr lang="en-US" sz="1300" dirty="0">
+              <a:rPr lang="en-US" sz="1400" dirty="0">
                 <a:solidFill>
                   <a:srgbClr val="888888"/>
                 </a:solidFill>
               </a:rPr>
-              <a:t>Inverts prior refactoring recommenders (ReSynth, Refactoring Navigator, search-based refactoring): the synthesised sequence becomes the comparison point against an observed trace.</a:t>
-            </a:r>
-            <a:endParaRPr lang="en-US" sz="1300" dirty="0"/>
+              <a:t> [3]</a:t>
+            </a:r>
+            <a:endParaRPr lang="en-US" sz="1400" dirty="0"/>
           </a:p>
           <a:p>
             <a:pPr marL="342900" indent="-342900">
@@ -13616,7 +13616,7 @@
               <a:buChar char="•"/>
             </a:pPr>
             <a:r>
-              <a:rPr lang="en-US" sz="1300" b="1" dirty="0">
+              <a:rPr lang="en-US" sz="1400" b="1" dirty="0">
                 <a:solidFill>
                   <a:srgbClr val="000000"/>
                 </a:solidFill>
@@ -13630,14 +13630,72 @@
               <a:buNone/>
             </a:pPr>
             <a:r>
-              <a:rPr lang="en-US" sz="1300" dirty="0">
+              <a:rPr lang="en-US" sz="1400" dirty="0">
                 <a:solidFill>
                   <a:srgbClr val="000000"/>
                 </a:solidFill>
               </a:rPr>
               <a:t>- the state-action space over a real codebase is too large to enumerate, so we must find efficient methods of identifying "better" alternatives.</a:t>
             </a:r>
-            <a:endParaRPr lang="en-US" sz="1300" dirty="0"/>
+            <a:endParaRPr lang="en-US" sz="1400" dirty="0"/>
+          </a:p>
+        </p:txBody>
+      </p:sp>
+      <p:sp>
+        <p:nvSpPr>
+          <p:cNvPr id="5" name="Text 3"/>
+          <p:cNvSpPr/>
+          <p:nvPr/>
+        </p:nvSpPr>
+        <p:spPr>
+          <a:xfrm>
+            <a:off x="457200" y="4663440"/>
+            <a:ext cx="8229600" cy="411480"/>
+          </a:xfrm>
+          <a:prstGeom prst="rect">
+            <a:avLst/>
+          </a:prstGeom>
+          <a:noFill/>
+          <a:ln/>
+        </p:spPr>
+        <p:txBody>
+          <a:bodyPr wrap="square" lIns="0" tIns="0" rIns="0" bIns="0" rtlCol="0" anchor="t"/>
+          <a:lstStyle/>
+          <a:p>
+            <a:pPr algn="l" indent="0" marL="0">
+              <a:buNone/>
+            </a:pPr>
+            <a:r>
+              <a:rPr lang="en-US" sz="900" i="1" dirty="0">
+                <a:solidFill>
+                  <a:srgbClr val="888888"/>
+                </a:solidFill>
+              </a:rPr>
+              <a:t>[1] Composite quality models (Quamoco, QMOOD), adapted from snapshot- to trajectory-level.   </a:t>
+            </a:r>
+            <a:pPr algn="l" indent="0" marL="0">
+              <a:buNone/>
+            </a:pPr>
+            <a:r>
+              <a:rPr lang="en-US" sz="900" i="1" dirty="0">
+                <a:solidFill>
+                  <a:srgbClr val="888888"/>
+                </a:solidFill>
+              </a:rPr>
+              <a:t>[2] IDE-event logging (Damevski et al., CodeWatcher).   </a:t>
+            </a:r>
+            <a:pPr algn="l" indent="0" marL="0">
+              <a:buNone/>
+            </a:pPr>
+            <a:r>
+              <a:rPr lang="en-US" sz="900" i="1" dirty="0">
+                <a:solidFill>
+                  <a:srgbClr val="888888"/>
+                </a:solidFill>
+              </a:rPr>
+              <a:t>[3] Inverts prior refactoring recommenders (ReSynth, Refactoring Navigator, search-based refactoring).</a:t>
+            </a:r>
+            <a:endParaRPr lang="en-US" sz="900" dirty="0"/>
           </a:p>
         </p:txBody>
       </p:sp>
@@ -14374,217 +14432,6 @@
         </p:nvSpPr>
         <p:spPr>
           <a:xfrm>
-            <a:off x="457200" y="274320"/>
-            <a:ext cx="8229600" cy="640080"/>
-          </a:xfrm>
-          <a:prstGeom prst="rect">
-            <a:avLst/>
-          </a:prstGeom>
-          <a:noFill/>
-          <a:ln/>
-        </p:spPr>
-        <p:txBody>
-          <a:bodyPr wrap="square" lIns="0" tIns="0" rIns="0" bIns="0" rtlCol="0" anchor="ctr"/>
-          <a:lstStyle/>
-          <a:p>
-            <a:pPr indent="0" marL="0">
-              <a:buNone/>
-            </a:pPr>
-            <a:r>
-              <a:rPr lang="en-US" sz="2800" b="1" dirty="0">
-                <a:solidFill>
-                  <a:srgbClr val="000000"/>
-                </a:solidFill>
-              </a:rPr>
-              <a:t>Four kinds of divergence</a:t>
-            </a:r>
-            <a:endParaRPr lang="en-US" sz="2800" dirty="0"/>
-          </a:p>
-        </p:txBody>
-      </p:sp>
-      <p:sp>
-        <p:nvSpPr>
-          <p:cNvPr id="3" name="Text 1"/>
-          <p:cNvSpPr/>
-          <p:nvPr/>
-        </p:nvSpPr>
-        <p:spPr>
-          <a:xfrm>
-            <a:off x="457200" y="1371600"/>
-            <a:ext cx="8229600" cy="3200400"/>
-          </a:xfrm>
-          <a:prstGeom prst="rect">
-            <a:avLst/>
-          </a:prstGeom>
-          <a:noFill/>
-          <a:ln/>
-        </p:spPr>
-        <p:txBody>
-          <a:bodyPr wrap="square" rtlCol="0" anchor="t"/>
-          <a:lstStyle/>
-          <a:p>
-            <a:pPr marL="342900" indent="-342900">
-              <a:spcAft>
-                <a:spcPts val="1000"/>
-              </a:spcAft>
-              <a:buSzPct val="100000"/>
-              <a:buChar char="•"/>
-            </a:pPr>
-            <a:r>
-              <a:rPr lang="en-US" sz="1800" dirty="0">
-                <a:solidFill>
-                  <a:srgbClr val="000000"/>
-                </a:solidFill>
-              </a:rPr>
-              <a:t>Manual-Refactor </a:t>
-            </a:r>
-            <a:pPr indent="0" marL="0">
-              <a:spcAft>
-                <a:spcPts val="1000"/>
-              </a:spcAft>
-              <a:buNone/>
-            </a:pPr>
-            <a:r>
-              <a:rPr lang="en-US" sz="1800" dirty="0">
-                <a:solidFill>
-                  <a:srgbClr val="888888"/>
-                </a:solidFill>
-              </a:rPr>
-              <a:t>- unnecessary risk (hand-edit when the IDE could have safely done it).</a:t>
-            </a:r>
-            <a:endParaRPr lang="en-US" sz="1800" dirty="0"/>
-          </a:p>
-          <a:p>
-            <a:pPr marL="342900" indent="-342900">
-              <a:spcAft>
-                <a:spcPts val="1000"/>
-              </a:spcAft>
-              <a:buSzPct val="100000"/>
-              <a:buChar char="•"/>
-            </a:pPr>
-            <a:r>
-              <a:rPr lang="en-US" sz="1800" dirty="0">
-                <a:solidFill>
-                  <a:srgbClr val="000000"/>
-                </a:solidFill>
-              </a:rPr>
-              <a:t>Ordering </a:t>
-            </a:r>
-            <a:pPr indent="0" marL="0">
-              <a:spcAft>
-                <a:spcPts val="1000"/>
-              </a:spcAft>
-              <a:buNone/>
-            </a:pPr>
-            <a:r>
-              <a:rPr lang="en-US" sz="1800" dirty="0">
-                <a:solidFill>
-                  <a:srgbClr val="888888"/>
-                </a:solidFill>
-              </a:rPr>
-              <a:t>- right refactorings, wrong sequence.</a:t>
-            </a:r>
-            <a:endParaRPr lang="en-US" sz="1800" dirty="0"/>
-          </a:p>
-          <a:p>
-            <a:pPr marL="342900" indent="-342900">
-              <a:spcAft>
-                <a:spcPts val="1000"/>
-              </a:spcAft>
-              <a:buSzPct val="100000"/>
-              <a:buChar char="•"/>
-            </a:pPr>
-            <a:r>
-              <a:rPr lang="en-US" sz="1800" dirty="0">
-                <a:solidFill>
-                  <a:srgbClr val="000000"/>
-                </a:solidFill>
-              </a:rPr>
-              <a:t>Rework </a:t>
-            </a:r>
-            <a:pPr indent="0" marL="0">
-              <a:spcAft>
-                <a:spcPts val="1000"/>
-              </a:spcAft>
-              <a:buNone/>
-            </a:pPr>
-            <a:r>
-              <a:rPr lang="en-US" sz="1800" dirty="0">
-                <a:solidFill>
-                  <a:srgbClr val="888888"/>
-                </a:solidFill>
-              </a:rPr>
-              <a:t>- unnecessary churn (added then removed).</a:t>
-            </a:r>
-            <a:endParaRPr lang="en-US" sz="1800" dirty="0"/>
-          </a:p>
-          <a:p>
-            <a:pPr marL="342900" indent="-342900">
-              <a:spcAft>
-                <a:spcPts val="1000"/>
-              </a:spcAft>
-              <a:buSzPct val="100000"/>
-              <a:buChar char="•"/>
-            </a:pPr>
-            <a:r>
-              <a:rPr lang="en-US" sz="1800" dirty="0">
-                <a:solidFill>
-                  <a:srgbClr val="000000"/>
-                </a:solidFill>
-              </a:rPr>
-              <a:t>Hygiene </a:t>
-            </a:r>
-            <a:pPr indent="0" marL="0">
-              <a:spcAft>
-                <a:spcPts val="1000"/>
-              </a:spcAft>
-              <a:buNone/>
-            </a:pPr>
-            <a:r>
-              <a:rPr lang="en-US" sz="1800" dirty="0">
-                <a:solidFill>
-                  <a:srgbClr val="888888"/>
-                </a:solidFill>
-              </a:rPr>
-              <a:t>- missing safety checkpoints (no tests, no commits).</a:t>
-            </a:r>
-            <a:endParaRPr lang="en-US" sz="1800" dirty="0"/>
-          </a:p>
-        </p:txBody>
-      </p:sp>
-    </p:spTree>
-  </p:cSld>
-  <p:clrMapOvr>
-    <a:masterClrMapping/>
-  </p:clrMapOvr>
-</p:sld>
-</file>
-
-<file path=ppt/slides/slide8.xml><?xml version="1.0" encoding="utf-8"?>
-<p:sld xmlns:a="http://schemas.openxmlformats.org/drawingml/2006/main" xmlns:r="http://schemas.openxmlformats.org/officeDocument/2006/relationships" xmlns:p="http://schemas.openxmlformats.org/presentationml/2006/main">
-  <p:cSld name="Slide 8">
-    <p:spTree>
-      <p:nvGrpSpPr>
-        <p:cNvPr id="1" name=""/>
-        <p:cNvGrpSpPr/>
-        <p:nvPr/>
-      </p:nvGrpSpPr>
-      <p:grpSpPr>
-        <a:xfrm>
-          <a:off x="0" y="0"/>
-          <a:ext cx="0" cy="0"/>
-          <a:chOff x="0" y="0"/>
-          <a:chExt cx="0" cy="0"/>
-        </a:xfrm>
-      </p:grpSpPr>
-      <p:sp>
-        <p:nvSpPr>
-          <p:cNvPr id="2" name="Text 0"/>
-          <p:cNvSpPr/>
-          <p:nvPr/>
-        </p:nvSpPr>
-        <p:spPr>
-          <a:xfrm>
             <a:off x="457200" y="137160"/>
             <a:ext cx="8229600" cy="640080"/>
           </a:xfrm>
@@ -14695,7 +14542,7 @@
       </p:sp>
       <p:graphicFrame>
         <p:nvGraphicFramePr>
-          <p:cNvPr id="9" name="Table 0"/>
+          <p:cNvPr id="8" name="Table 0"/>
           <p:cNvGraphicFramePr>
             <a:graphicFrameLocks noGrp="1"/>
           </p:cNvGraphicFramePr>
@@ -15546,6 +15393,217 @@
 </p:sld>
 </file>
 
+<file path=ppt/slides/slide8.xml><?xml version="1.0" encoding="utf-8"?>
+<p:sld xmlns:a="http://schemas.openxmlformats.org/drawingml/2006/main" xmlns:r="http://schemas.openxmlformats.org/officeDocument/2006/relationships" xmlns:p="http://schemas.openxmlformats.org/presentationml/2006/main">
+  <p:cSld name="Slide 8">
+    <p:spTree>
+      <p:nvGrpSpPr>
+        <p:cNvPr id="1" name=""/>
+        <p:cNvGrpSpPr/>
+        <p:nvPr/>
+      </p:nvGrpSpPr>
+      <p:grpSpPr>
+        <a:xfrm>
+          <a:off x="0" y="0"/>
+          <a:ext cx="0" cy="0"/>
+          <a:chOff x="0" y="0"/>
+          <a:chExt cx="0" cy="0"/>
+        </a:xfrm>
+      </p:grpSpPr>
+      <p:sp>
+        <p:nvSpPr>
+          <p:cNvPr id="2" name="Text 0"/>
+          <p:cNvSpPr/>
+          <p:nvPr/>
+        </p:nvSpPr>
+        <p:spPr>
+          <a:xfrm>
+            <a:off x="457200" y="274320"/>
+            <a:ext cx="8229600" cy="640080"/>
+          </a:xfrm>
+          <a:prstGeom prst="rect">
+            <a:avLst/>
+          </a:prstGeom>
+          <a:noFill/>
+          <a:ln/>
+        </p:spPr>
+        <p:txBody>
+          <a:bodyPr wrap="square" lIns="0" tIns="0" rIns="0" bIns="0" rtlCol="0" anchor="ctr"/>
+          <a:lstStyle/>
+          <a:p>
+            <a:pPr indent="0" marL="0">
+              <a:buNone/>
+            </a:pPr>
+            <a:r>
+              <a:rPr lang="en-US" sz="2800" b="1" dirty="0">
+                <a:solidFill>
+                  <a:srgbClr val="000000"/>
+                </a:solidFill>
+              </a:rPr>
+              <a:t>Four kinds of divergence</a:t>
+            </a:r>
+            <a:endParaRPr lang="en-US" sz="2800" dirty="0"/>
+          </a:p>
+        </p:txBody>
+      </p:sp>
+      <p:sp>
+        <p:nvSpPr>
+          <p:cNvPr id="3" name="Text 1"/>
+          <p:cNvSpPr/>
+          <p:nvPr/>
+        </p:nvSpPr>
+        <p:spPr>
+          <a:xfrm>
+            <a:off x="457200" y="1371600"/>
+            <a:ext cx="8229600" cy="3200400"/>
+          </a:xfrm>
+          <a:prstGeom prst="rect">
+            <a:avLst/>
+          </a:prstGeom>
+          <a:noFill/>
+          <a:ln/>
+        </p:spPr>
+        <p:txBody>
+          <a:bodyPr wrap="square" rtlCol="0" anchor="t"/>
+          <a:lstStyle/>
+          <a:p>
+            <a:pPr marL="342900" indent="-342900">
+              <a:spcAft>
+                <a:spcPts val="1000"/>
+              </a:spcAft>
+              <a:buSzPct val="100000"/>
+              <a:buChar char="•"/>
+            </a:pPr>
+            <a:r>
+              <a:rPr lang="en-US" sz="1800" dirty="0">
+                <a:solidFill>
+                  <a:srgbClr val="000000"/>
+                </a:solidFill>
+              </a:rPr>
+              <a:t>Manual-Refactor </a:t>
+            </a:r>
+            <a:pPr indent="0" marL="0">
+              <a:spcAft>
+                <a:spcPts val="1000"/>
+              </a:spcAft>
+              <a:buNone/>
+            </a:pPr>
+            <a:r>
+              <a:rPr lang="en-US" sz="1800" dirty="0">
+                <a:solidFill>
+                  <a:srgbClr val="888888"/>
+                </a:solidFill>
+              </a:rPr>
+              <a:t>- unnecessary risk (hand-edit when the IDE could have safely done it).</a:t>
+            </a:r>
+            <a:endParaRPr lang="en-US" sz="1800" dirty="0"/>
+          </a:p>
+          <a:p>
+            <a:pPr marL="342900" indent="-342900">
+              <a:spcAft>
+                <a:spcPts val="1000"/>
+              </a:spcAft>
+              <a:buSzPct val="100000"/>
+              <a:buChar char="•"/>
+            </a:pPr>
+            <a:r>
+              <a:rPr lang="en-US" sz="1800" dirty="0">
+                <a:solidFill>
+                  <a:srgbClr val="000000"/>
+                </a:solidFill>
+              </a:rPr>
+              <a:t>Ordering </a:t>
+            </a:r>
+            <a:pPr indent="0" marL="0">
+              <a:spcAft>
+                <a:spcPts val="1000"/>
+              </a:spcAft>
+              <a:buNone/>
+            </a:pPr>
+            <a:r>
+              <a:rPr lang="en-US" sz="1800" dirty="0">
+                <a:solidFill>
+                  <a:srgbClr val="888888"/>
+                </a:solidFill>
+              </a:rPr>
+              <a:t>- right refactorings, wrong sequence.</a:t>
+            </a:r>
+            <a:endParaRPr lang="en-US" sz="1800" dirty="0"/>
+          </a:p>
+          <a:p>
+            <a:pPr marL="342900" indent="-342900">
+              <a:spcAft>
+                <a:spcPts val="1000"/>
+              </a:spcAft>
+              <a:buSzPct val="100000"/>
+              <a:buChar char="•"/>
+            </a:pPr>
+            <a:r>
+              <a:rPr lang="en-US" sz="1800" dirty="0">
+                <a:solidFill>
+                  <a:srgbClr val="000000"/>
+                </a:solidFill>
+              </a:rPr>
+              <a:t>Rework </a:t>
+            </a:r>
+            <a:pPr indent="0" marL="0">
+              <a:spcAft>
+                <a:spcPts val="1000"/>
+              </a:spcAft>
+              <a:buNone/>
+            </a:pPr>
+            <a:r>
+              <a:rPr lang="en-US" sz="1800" dirty="0">
+                <a:solidFill>
+                  <a:srgbClr val="888888"/>
+                </a:solidFill>
+              </a:rPr>
+              <a:t>- unnecessary churn (added then removed).</a:t>
+            </a:r>
+            <a:endParaRPr lang="en-US" sz="1800" dirty="0"/>
+          </a:p>
+          <a:p>
+            <a:pPr marL="342900" indent="-342900">
+              <a:spcAft>
+                <a:spcPts val="1000"/>
+              </a:spcAft>
+              <a:buSzPct val="100000"/>
+              <a:buChar char="•"/>
+            </a:pPr>
+            <a:r>
+              <a:rPr lang="en-US" sz="1800" dirty="0">
+                <a:solidFill>
+                  <a:srgbClr val="000000"/>
+                </a:solidFill>
+              </a:rPr>
+              <a:t>Hygiene </a:t>
+            </a:r>
+            <a:pPr indent="0" marL="0">
+              <a:spcAft>
+                <a:spcPts val="1000"/>
+              </a:spcAft>
+              <a:buNone/>
+            </a:pPr>
+            <a:r>
+              <a:rPr lang="en-US" sz="1800" dirty="0">
+                <a:solidFill>
+                  <a:srgbClr val="888888"/>
+                </a:solidFill>
+              </a:rPr>
+              <a:t>- missing safety checkpoints (no tests, no commits).</a:t>
+            </a:r>
+            <a:endParaRPr lang="en-US" sz="1800" dirty="0"/>
+          </a:p>
+        </p:txBody>
+      </p:sp>
+    </p:spTree>
+  </p:cSld>
+  <p:clrMapOvr>
+    <a:masterClrMapping/>
+  </p:clrMapOvr>
+</p:sld>
+</file>
+
 <file path=ppt/slides/slide9.xml><?xml version="1.0" encoding="utf-8"?>
 <p:sld xmlns:a="http://schemas.openxmlformats.org/drawingml/2006/main" xmlns:r="http://schemas.openxmlformats.org/officeDocument/2006/relationships" xmlns:p="http://schemas.openxmlformats.org/presentationml/2006/main">
   <p:cSld name="Slide 9">

--- a/presentation/slides.pptx
+++ b/presentation/slides.pptx
@@ -28,9 +28,13 @@
     <p:sldId id="276" r:id="rId22"/>
     <p:sldId id="277" r:id="rId23"/>
     <p:sldId id="278" r:id="rId24"/>
+    <p:sldId id="279" r:id="rId25"/>
+    <p:sldId id="280" r:id="rId26"/>
+    <p:sldId id="281" r:id="rId27"/>
+    <p:sldId id="282" r:id="rId28"/>
   </p:sldIdLst>
   <p:notesMasterIdLst>
-    <p:notesMasterId r:id="rId25"/>
+    <p:notesMasterId r:id="rId29"/>
   </p:notesMasterIdLst>
   <p:sldSz cx="9144000" cy="5143500"/>
   <p:notesSz cx="5143500" cy="9144000"/>
@@ -3676,6 +3680,358 @@
             <a:fld id="{F7021451-1387-4CA6-816F-3879F97B5CBC}" type="slidenum">
               <a:rPr lang="en-US"/>
               <a:t>23</a:t>
+            </a:fld>
+            <a:endParaRPr lang="en-US"/>
+          </a:p>
+        </p:txBody>
+      </p:sp>
+    </p:spTree>
+    <p:extLst>
+      <p:ext uri="{BB962C8B-B14F-4D97-AF65-F5344CB8AC3E}">
+        <p14:creationId xmlns:p14="http://schemas.microsoft.com/office/powerpoint/2010/main" val="1024086991"/>
+      </p:ext>
+    </p:extLst>
+  </p:cSld>
+  <p:clrMapOvr>
+    <a:masterClrMapping/>
+  </p:clrMapOvr>
+</p:notes>
+</file>
+
+<file path=ppt/notesSlides/notesSlide24.xml><?xml version="1.0" encoding="utf-8"?>
+<p:notes xmlns:a="http://schemas.openxmlformats.org/drawingml/2006/main" xmlns:r="http://schemas.openxmlformats.org/officeDocument/2006/relationships" xmlns:p="http://schemas.openxmlformats.org/presentationml/2006/main">
+  <p:cSld>
+    <p:spTree>
+      <p:nvGrpSpPr>
+        <p:cNvPr id="1" name=""/>
+        <p:cNvGrpSpPr/>
+        <p:nvPr/>
+      </p:nvGrpSpPr>
+      <p:grpSpPr>
+        <a:xfrm>
+          <a:off x="0" y="0"/>
+          <a:ext cx="0" cy="0"/>
+          <a:chOff x="0" y="0"/>
+          <a:chExt cx="0" cy="0"/>
+        </a:xfrm>
+      </p:grpSpPr>
+      <p:sp>
+        <p:nvSpPr>
+          <p:cNvPr id="2" name="Slide Image Placeholder 1"/>
+          <p:cNvSpPr>
+            <a:spLocks noGrp="1" noRot="1" noChangeAspect="1"/>
+          </p:cNvSpPr>
+          <p:nvPr>
+            <p:ph type="sldImg"/>
+          </p:nvPr>
+        </p:nvSpPr>
+        <p:spPr/>
+      </p:sp>
+      <p:sp>
+        <p:nvSpPr>
+          <p:cNvPr id="3" name="Notes Placeholder 2"/>
+          <p:cNvSpPr>
+            <a:spLocks noGrp="1"/>
+          </p:cNvSpPr>
+          <p:nvPr>
+            <p:ph type="body" idx="1"/>
+          </p:nvPr>
+        </p:nvSpPr>
+        <p:spPr/>
+        <p:txBody>
+          <a:bodyPr/>
+          <a:lstStyle/>
+          <a:p>
+            <a:r>
+              <a:rPr lang="en-US" dirty="0"/>
+              <a:t/>
+            </a:r>
+            <a:endParaRPr lang="en-US" dirty="0"/>
+          </a:p>
+        </p:txBody>
+      </p:sp>
+      <p:sp>
+        <p:nvSpPr>
+          <p:cNvPr id="4" name="Slide Number Placeholder 3"/>
+          <p:cNvSpPr>
+            <a:spLocks noGrp="1"/>
+          </p:cNvSpPr>
+          <p:nvPr>
+            <p:ph type="sldNum" sz="quarter" idx="10"/>
+          </p:nvPr>
+        </p:nvSpPr>
+        <p:spPr/>
+        <p:txBody>
+          <a:bodyPr/>
+          <a:lstStyle/>
+          <a:p>
+            <a:fld id="{F7021451-1387-4CA6-816F-3879F97B5CBC}" type="slidenum">
+              <a:rPr lang="en-US"/>
+              <a:t>24</a:t>
+            </a:fld>
+            <a:endParaRPr lang="en-US"/>
+          </a:p>
+        </p:txBody>
+      </p:sp>
+    </p:spTree>
+    <p:extLst>
+      <p:ext uri="{BB962C8B-B14F-4D97-AF65-F5344CB8AC3E}">
+        <p14:creationId xmlns:p14="http://schemas.microsoft.com/office/powerpoint/2010/main" val="1024086991"/>
+      </p:ext>
+    </p:extLst>
+  </p:cSld>
+  <p:clrMapOvr>
+    <a:masterClrMapping/>
+  </p:clrMapOvr>
+</p:notes>
+</file>
+
+<file path=ppt/notesSlides/notesSlide25.xml><?xml version="1.0" encoding="utf-8"?>
+<p:notes xmlns:a="http://schemas.openxmlformats.org/drawingml/2006/main" xmlns:r="http://schemas.openxmlformats.org/officeDocument/2006/relationships" xmlns:p="http://schemas.openxmlformats.org/presentationml/2006/main">
+  <p:cSld>
+    <p:spTree>
+      <p:nvGrpSpPr>
+        <p:cNvPr id="1" name=""/>
+        <p:cNvGrpSpPr/>
+        <p:nvPr/>
+      </p:nvGrpSpPr>
+      <p:grpSpPr>
+        <a:xfrm>
+          <a:off x="0" y="0"/>
+          <a:ext cx="0" cy="0"/>
+          <a:chOff x="0" y="0"/>
+          <a:chExt cx="0" cy="0"/>
+        </a:xfrm>
+      </p:grpSpPr>
+      <p:sp>
+        <p:nvSpPr>
+          <p:cNvPr id="2" name="Slide Image Placeholder 1"/>
+          <p:cNvSpPr>
+            <a:spLocks noGrp="1" noRot="1" noChangeAspect="1"/>
+          </p:cNvSpPr>
+          <p:nvPr>
+            <p:ph type="sldImg"/>
+          </p:nvPr>
+        </p:nvSpPr>
+        <p:spPr/>
+      </p:sp>
+      <p:sp>
+        <p:nvSpPr>
+          <p:cNvPr id="3" name="Notes Placeholder 2"/>
+          <p:cNvSpPr>
+            <a:spLocks noGrp="1"/>
+          </p:cNvSpPr>
+          <p:nvPr>
+            <p:ph type="body" idx="1"/>
+          </p:nvPr>
+        </p:nvSpPr>
+        <p:spPr/>
+        <p:txBody>
+          <a:bodyPr/>
+          <a:lstStyle/>
+          <a:p>
+            <a:r>
+              <a:rPr lang="en-US" dirty="0"/>
+              <a:t/>
+            </a:r>
+            <a:endParaRPr lang="en-US" dirty="0"/>
+          </a:p>
+        </p:txBody>
+      </p:sp>
+      <p:sp>
+        <p:nvSpPr>
+          <p:cNvPr id="4" name="Slide Number Placeholder 3"/>
+          <p:cNvSpPr>
+            <a:spLocks noGrp="1"/>
+          </p:cNvSpPr>
+          <p:nvPr>
+            <p:ph type="sldNum" sz="quarter" idx="10"/>
+          </p:nvPr>
+        </p:nvSpPr>
+        <p:spPr/>
+        <p:txBody>
+          <a:bodyPr/>
+          <a:lstStyle/>
+          <a:p>
+            <a:fld id="{F7021451-1387-4CA6-816F-3879F97B5CBC}" type="slidenum">
+              <a:rPr lang="en-US"/>
+              <a:t>25</a:t>
+            </a:fld>
+            <a:endParaRPr lang="en-US"/>
+          </a:p>
+        </p:txBody>
+      </p:sp>
+    </p:spTree>
+    <p:extLst>
+      <p:ext uri="{BB962C8B-B14F-4D97-AF65-F5344CB8AC3E}">
+        <p14:creationId xmlns:p14="http://schemas.microsoft.com/office/powerpoint/2010/main" val="1024086991"/>
+      </p:ext>
+    </p:extLst>
+  </p:cSld>
+  <p:clrMapOvr>
+    <a:masterClrMapping/>
+  </p:clrMapOvr>
+</p:notes>
+</file>
+
+<file path=ppt/notesSlides/notesSlide26.xml><?xml version="1.0" encoding="utf-8"?>
+<p:notes xmlns:a="http://schemas.openxmlformats.org/drawingml/2006/main" xmlns:r="http://schemas.openxmlformats.org/officeDocument/2006/relationships" xmlns:p="http://schemas.openxmlformats.org/presentationml/2006/main">
+  <p:cSld>
+    <p:spTree>
+      <p:nvGrpSpPr>
+        <p:cNvPr id="1" name=""/>
+        <p:cNvGrpSpPr/>
+        <p:nvPr/>
+      </p:nvGrpSpPr>
+      <p:grpSpPr>
+        <a:xfrm>
+          <a:off x="0" y="0"/>
+          <a:ext cx="0" cy="0"/>
+          <a:chOff x="0" y="0"/>
+          <a:chExt cx="0" cy="0"/>
+        </a:xfrm>
+      </p:grpSpPr>
+      <p:sp>
+        <p:nvSpPr>
+          <p:cNvPr id="2" name="Slide Image Placeholder 1"/>
+          <p:cNvSpPr>
+            <a:spLocks noGrp="1" noRot="1" noChangeAspect="1"/>
+          </p:cNvSpPr>
+          <p:nvPr>
+            <p:ph type="sldImg"/>
+          </p:nvPr>
+        </p:nvSpPr>
+        <p:spPr/>
+      </p:sp>
+      <p:sp>
+        <p:nvSpPr>
+          <p:cNvPr id="3" name="Notes Placeholder 2"/>
+          <p:cNvSpPr>
+            <a:spLocks noGrp="1"/>
+          </p:cNvSpPr>
+          <p:nvPr>
+            <p:ph type="body" idx="1"/>
+          </p:nvPr>
+        </p:nvSpPr>
+        <p:spPr/>
+        <p:txBody>
+          <a:bodyPr/>
+          <a:lstStyle/>
+          <a:p>
+            <a:r>
+              <a:rPr lang="en-US" dirty="0"/>
+              <a:t/>
+            </a:r>
+            <a:endParaRPr lang="en-US" dirty="0"/>
+          </a:p>
+        </p:txBody>
+      </p:sp>
+      <p:sp>
+        <p:nvSpPr>
+          <p:cNvPr id="4" name="Slide Number Placeholder 3"/>
+          <p:cNvSpPr>
+            <a:spLocks noGrp="1"/>
+          </p:cNvSpPr>
+          <p:nvPr>
+            <p:ph type="sldNum" sz="quarter" idx="10"/>
+          </p:nvPr>
+        </p:nvSpPr>
+        <p:spPr/>
+        <p:txBody>
+          <a:bodyPr/>
+          <a:lstStyle/>
+          <a:p>
+            <a:fld id="{F7021451-1387-4CA6-816F-3879F97B5CBC}" type="slidenum">
+              <a:rPr lang="en-US"/>
+              <a:t>26</a:t>
+            </a:fld>
+            <a:endParaRPr lang="en-US"/>
+          </a:p>
+        </p:txBody>
+      </p:sp>
+    </p:spTree>
+    <p:extLst>
+      <p:ext uri="{BB962C8B-B14F-4D97-AF65-F5344CB8AC3E}">
+        <p14:creationId xmlns:p14="http://schemas.microsoft.com/office/powerpoint/2010/main" val="1024086991"/>
+      </p:ext>
+    </p:extLst>
+  </p:cSld>
+  <p:clrMapOvr>
+    <a:masterClrMapping/>
+  </p:clrMapOvr>
+</p:notes>
+</file>
+
+<file path=ppt/notesSlides/notesSlide27.xml><?xml version="1.0" encoding="utf-8"?>
+<p:notes xmlns:a="http://schemas.openxmlformats.org/drawingml/2006/main" xmlns:r="http://schemas.openxmlformats.org/officeDocument/2006/relationships" xmlns:p="http://schemas.openxmlformats.org/presentationml/2006/main">
+  <p:cSld>
+    <p:spTree>
+      <p:nvGrpSpPr>
+        <p:cNvPr id="1" name=""/>
+        <p:cNvGrpSpPr/>
+        <p:nvPr/>
+      </p:nvGrpSpPr>
+      <p:grpSpPr>
+        <a:xfrm>
+          <a:off x="0" y="0"/>
+          <a:ext cx="0" cy="0"/>
+          <a:chOff x="0" y="0"/>
+          <a:chExt cx="0" cy="0"/>
+        </a:xfrm>
+      </p:grpSpPr>
+      <p:sp>
+        <p:nvSpPr>
+          <p:cNvPr id="2" name="Slide Image Placeholder 1"/>
+          <p:cNvSpPr>
+            <a:spLocks noGrp="1" noRot="1" noChangeAspect="1"/>
+          </p:cNvSpPr>
+          <p:nvPr>
+            <p:ph type="sldImg"/>
+          </p:nvPr>
+        </p:nvSpPr>
+        <p:spPr/>
+      </p:sp>
+      <p:sp>
+        <p:nvSpPr>
+          <p:cNvPr id="3" name="Notes Placeholder 2"/>
+          <p:cNvSpPr>
+            <a:spLocks noGrp="1"/>
+          </p:cNvSpPr>
+          <p:nvPr>
+            <p:ph type="body" idx="1"/>
+          </p:nvPr>
+        </p:nvSpPr>
+        <p:spPr/>
+        <p:txBody>
+          <a:bodyPr/>
+          <a:lstStyle/>
+          <a:p>
+            <a:r>
+              <a:rPr lang="en-US" dirty="0"/>
+              <a:t/>
+            </a:r>
+            <a:endParaRPr lang="en-US" dirty="0"/>
+          </a:p>
+        </p:txBody>
+      </p:sp>
+      <p:sp>
+        <p:nvSpPr>
+          <p:cNvPr id="4" name="Slide Number Placeholder 3"/>
+          <p:cNvSpPr>
+            <a:spLocks noGrp="1"/>
+          </p:cNvSpPr>
+          <p:nvPr>
+            <p:ph type="sldNum" sz="quarter" idx="10"/>
+          </p:nvPr>
+        </p:nvSpPr>
+        <p:spPr/>
+        <p:txBody>
+          <a:bodyPr/>
+          <a:lstStyle/>
+          <a:p>
+            <a:fld id="{F7021451-1387-4CA6-816F-3879F97B5CBC}" type="slidenum">
+              <a:rPr lang="en-US"/>
+              <a:t>27</a:t>
             </a:fld>
             <a:endParaRPr lang="en-US"/>
           </a:p>
@@ -4862,7 +5218,7 @@
         <p:spPr>
           <a:xfrm>
             <a:off x="457200" y="1097280"/>
-            <a:ext cx="8229600" cy="1783080"/>
+            <a:ext cx="8229600" cy="1874520"/>
           </a:xfrm>
           <a:prstGeom prst="rect">
             <a:avLst/>
@@ -4876,7 +5232,7 @@
           <a:p>
             <a:pPr marL="342900" indent="-342900">
               <a:spcAft>
-                <a:spcPts val="600"/>
+                <a:spcPts val="2000"/>
               </a:spcAft>
               <a:buSzPct val="100000"/>
               <a:buChar char="•"/>
@@ -4887,17 +5243,18 @@
                   <a:srgbClr val="000000"/>
                 </a:solidFill>
               </a:rPr>
-              <a:t>What: the right refactorings, performed in a suboptimal order - final state is fine, intermediate states are worse than they needed to be.</a:t>
+              <a:t>Developer performed their refactoring steps in a sub-optimal order, leading to unnecessary intermediate degradation.</a:t>
             </a:r>
             <a:endParaRPr lang="en-US" sz="1400" dirty="0"/>
           </a:p>
           <a:p>
-            <a:pPr marL="342900" indent="-342900">
+            <a:pPr lvl="1" marL="685800" indent="-342900">
               <a:spcAft>
                 <a:spcPts val="600"/>
               </a:spcAft>
               <a:buSzPct val="100000"/>
-              <a:buChar char="•"/>
+              <a:buFont typeface="+mj-lt"/>
+              <a:buAutoNum type="arabicPeriod" startAt="1"/>
             </a:pPr>
             <a:r>
               <a:rPr lang="en-US" sz="1400" dirty="0">
@@ -4905,17 +5262,18 @@
                   <a:srgbClr val="000000"/>
                 </a:solidFill>
               </a:rPr>
-              <a:t>Detect: find a subsequence of refactorings whose reordering still validates to the user's terminal state (canonical AST hash, formatting/comments ignored).</a:t>
+              <a:t>Identify dependencies between steps → DAG.</a:t>
             </a:r>
             <a:endParaRPr lang="en-US" sz="1400" dirty="0"/>
           </a:p>
           <a:p>
-            <a:pPr marL="342900" indent="-342900">
+            <a:pPr lvl="1" marL="685800" indent="-342900">
               <a:spcAft>
                 <a:spcPts val="600"/>
               </a:spcAft>
               <a:buSzPct val="100000"/>
-              <a:buChar char="•"/>
+              <a:buFont typeface="+mj-lt"/>
+              <a:buAutoNum type="arabicPeriod" startAt="1"/>
             </a:pPr>
             <a:r>
               <a:rPr lang="en-US" sz="1400" dirty="0">
@@ -4923,17 +5281,18 @@
                   <a:srgbClr val="000000"/>
                 </a:solidFill>
               </a:rPr>
-              <a:t>Synthesise: build a dependency DAG over the refactorings in the window.</a:t>
+              <a:t>Enumerate valid topological orderings.</a:t>
             </a:r>
             <a:endParaRPr lang="en-US" sz="1400" dirty="0"/>
           </a:p>
           <a:p>
-            <a:pPr marL="342900" indent="-342900">
+            <a:pPr lvl="1" marL="685800" indent="-342900">
               <a:spcAft>
                 <a:spcPts val="600"/>
               </a:spcAft>
               <a:buSzPct val="100000"/>
-              <a:buChar char="•"/>
+              <a:buFont typeface="+mj-lt"/>
+              <a:buAutoNum type="arabicPeriod" startAt="1"/>
             </a:pPr>
             <a:r>
               <a:rPr lang="en-US" sz="1400" dirty="0">
@@ -4941,7 +5300,26 @@
                   <a:srgbClr val="000000"/>
                 </a:solidFill>
               </a:rPr>
-              <a:t>Prefix-trie DFS over valid topological orderings - shares work across common prefixes, rolls back with git checkout on backtrack.</a:t>
+              <a:t>Synthesise (Eclipse / JDT), utilising Prefix Trie (DFS) and git checkouts on backtrack.</a:t>
+            </a:r>
+            <a:endParaRPr lang="en-US" sz="1400" dirty="0"/>
+          </a:p>
+          <a:p>
+            <a:pPr lvl="1" marL="685800" indent="-342900">
+              <a:spcAft>
+                <a:spcPts val="600"/>
+              </a:spcAft>
+              <a:buSzPct val="100000"/>
+              <a:buFont typeface="+mj-lt"/>
+              <a:buAutoNum type="arabicPeriod" startAt="1"/>
+            </a:pPr>
+            <a:r>
+              <a:rPr lang="en-US" sz="1400" dirty="0">
+                <a:solidFill>
+                  <a:srgbClr val="000000"/>
+                </a:solidFill>
+              </a:rPr>
+              <a:t>Normalize AST + compare with original.</a:t>
             </a:r>
             <a:endParaRPr lang="en-US" sz="1400" dirty="0"/>
           </a:p>
@@ -5041,7 +5419,7 @@
         <p:spPr>
           <a:xfrm>
             <a:off x="457200" y="1097280"/>
-            <a:ext cx="8229600" cy="1691640"/>
+            <a:ext cx="8229600" cy="1783080"/>
           </a:xfrm>
           <a:prstGeom prst="rect">
             <a:avLst/>
@@ -5055,7 +5433,7 @@
           <a:p>
             <a:pPr marL="342900" indent="-342900">
               <a:spcAft>
-                <a:spcPts val="600"/>
+                <a:spcPts val="2000"/>
               </a:spcAft>
               <a:buSzPct val="100000"/>
               <a:buChar char="•"/>
@@ -5066,17 +5444,18 @@
                   <a:srgbClr val="000000"/>
                 </a:solidFill>
               </a:rPr>
-              <a:t>What: code added and later removed (or vice versa) - net-zero churn, but real cost while it was there.</a:t>
+              <a:t>Code added and later removed (or vice versa) - unnecessary churn.</a:t>
             </a:r>
             <a:endParaRPr lang="en-US" sz="1300" dirty="0"/>
           </a:p>
           <a:p>
-            <a:pPr marL="342900" indent="-342900">
+            <a:pPr lvl="1" marL="685800" indent="-342900">
               <a:spcAft>
                 <a:spcPts val="600"/>
               </a:spcAft>
               <a:buSzPct val="100000"/>
-              <a:buChar char="•"/>
+              <a:buFont typeface="+mj-lt"/>
+              <a:buAutoNum type="arabicPeriod" startAt="1"/>
             </a:pPr>
             <a:r>
               <a:rPr lang="en-US" sz="1300" dirty="0">
@@ -5084,17 +5463,18 @@
                   <a:srgbClr val="000000"/>
                 </a:solidFill>
               </a:rPr>
-              <a:t>Detect: hash normalised lines; pair add/remove events by (file, scope, content-hash).</a:t>
+              <a:t>Compare git diffs between adjacent steps of shadow repo.</a:t>
             </a:r>
             <a:endParaRPr lang="en-US" sz="1300" dirty="0"/>
           </a:p>
           <a:p>
-            <a:pPr marL="342900" indent="-342900">
+            <a:pPr lvl="1" marL="685800" indent="-342900">
               <a:spcAft>
                 <a:spcPts val="600"/>
               </a:spcAft>
               <a:buSzPct val="100000"/>
-              <a:buChar char="•"/>
+              <a:buFont typeface="+mj-lt"/>
+              <a:buAutoNum type="arabicPeriod" startAt="1"/>
             </a:pPr>
             <a:r>
               <a:rPr lang="en-US" sz="1300" dirty="0">
@@ -5102,17 +5482,18 @@
                   <a:srgbClr val="000000"/>
                 </a:solidFill>
               </a:rPr>
-              <a:t>Synthesise: strip both halves from the trajectory; replay the rest of the user's edits unchanged; validate the terminal state matches.</a:t>
+              <a:t>Hash each hunk, and look for a matching, opposite hunk with matching (file, scope, content-hash) in a future git diff.</a:t>
             </a:r>
             <a:endParaRPr lang="en-US" sz="1300" dirty="0"/>
           </a:p>
           <a:p>
-            <a:pPr marL="342900" indent="-342900">
+            <a:pPr lvl="1" marL="685800" indent="-342900">
               <a:spcAft>
                 <a:spcPts val="600"/>
               </a:spcAft>
               <a:buSzPct val="100000"/>
-              <a:buChar char="•"/>
+              <a:buFont typeface="+mj-lt"/>
+              <a:buAutoNum type="arabicPeriod" startAt="1"/>
             </a:pPr>
             <a:r>
               <a:rPr lang="en-US" sz="1300" dirty="0">
@@ -5120,7 +5501,7 @@
                   <a:srgbClr val="000000"/>
                 </a:solidFill>
               </a:rPr>
-              <a:t>Simplest of the four synthesisers, but high recall - precision and recall both 1.00 on the injection set.</a:t>
+              <a:t>Remove that hunk from both diffs, calculate the updated line numbers of every git diff hunk between each of the intermediate states, and replay these new diffs from the start step.</a:t>
             </a:r>
             <a:endParaRPr lang="en-US" sz="1300" dirty="0"/>
           </a:p>
@@ -5219,7 +5600,7 @@
         </p:nvSpPr>
         <p:spPr>
           <a:xfrm>
-            <a:off x="457200" y="1188720"/>
+            <a:off x="457200" y="1097280"/>
             <a:ext cx="8229600" cy="3657600"/>
           </a:xfrm>
           <a:prstGeom prst="rect">
@@ -5234,20 +5615,96 @@
           <a:p>
             <a:pPr marL="342900" indent="-342900">
               <a:spcAft>
+                <a:spcPts val="2000"/>
+              </a:spcAft>
+              <a:buSzPct val="100000"/>
+              <a:buChar char="•"/>
+            </a:pPr>
+            <a:r>
+              <a:rPr lang="en-US" sz="1400" dirty="0">
+                <a:solidFill>
+                  <a:srgbClr val="000000"/>
+                </a:solidFill>
+              </a:rPr>
+              <a:t>Long stretches of work without test runs, or commits.</a:t>
+            </a:r>
+            <a:endParaRPr lang="en-US" sz="1400" dirty="0"/>
+          </a:p>
+          <a:p>
+            <a:pPr lvl="1" marL="685800" indent="-342900">
+              <a:spcAft>
                 <a:spcPts val="600"/>
               </a:spcAft>
               <a:buSzPct val="100000"/>
-              <a:buChar char="•"/>
-            </a:pPr>
-            <a:r>
-              <a:rPr lang="en-US" sz="1600" dirty="0">
+              <a:buFont typeface="+mj-lt"/>
+              <a:buAutoNum type="arabicPeriod" startAt="1"/>
+            </a:pPr>
+            <a:r>
+              <a:rPr lang="en-US" sz="1400" dirty="0">
                 <a:solidFill>
                   <a:srgbClr val="000000"/>
                 </a:solidFill>
               </a:rPr>
-              <a:t>What: long stretches of work without safety checkpoints - no test runs, no commits.</a:t>
-            </a:r>
-            <a:endParaRPr lang="en-US" sz="1600" dirty="0"/>
+              <a:t>Iterate through each run's IDE events.</a:t>
+            </a:r>
+            <a:endParaRPr lang="en-US" sz="1400" dirty="0"/>
+          </a:p>
+          <a:p>
+            <a:pPr lvl="1" marL="685800" indent="-342900">
+              <a:spcAft>
+                <a:spcPts val="600"/>
+              </a:spcAft>
+              <a:buSzPct val="100000"/>
+              <a:buFont typeface="+mj-lt"/>
+              <a:buAutoNum type="arabicPeriod" startAt="1"/>
+            </a:pPr>
+            <a:r>
+              <a:rPr lang="en-US" sz="1400" dirty="0">
+                <a:solidFill>
+                  <a:srgbClr val="000000"/>
+                </a:solidFill>
+              </a:rPr>
+              <a:t>If there has been &gt; 1 minute since the last edit and still no test run, flag a Test DP.</a:t>
+            </a:r>
+            <a:endParaRPr lang="en-US" sz="1400" dirty="0"/>
+          </a:p>
+          <a:p>
+            <a:pPr lvl="1" marL="685800" indent="-342900">
+              <a:spcAft>
+                <a:spcPts val="600"/>
+              </a:spcAft>
+              <a:buSzPct val="100000"/>
+              <a:buFont typeface="+mj-lt"/>
+              <a:buAutoNum type="arabicPeriod" startAt="1"/>
+            </a:pPr>
+            <a:r>
+              <a:rPr lang="en-US" sz="1400" dirty="0">
+                <a:solidFill>
+                  <a:srgbClr val="000000"/>
+                </a:solidFill>
+              </a:rPr>
+              <a:t>If there has been &gt; 5 refactoring steps since the last commit, flag a Commit DP.</a:t>
+            </a:r>
+            <a:endParaRPr lang="en-US" sz="1400" dirty="0"/>
+          </a:p>
+          <a:p>
+            <a:pPr lvl="1" marL="685800" indent="-342900">
+              <a:spcAft>
+                <a:spcPts val="2000"/>
+              </a:spcAft>
+              <a:buSzPct val="100000"/>
+              <a:buFont typeface="+mj-lt"/>
+              <a:buAutoNum type="arabicPeriod" startAt="1"/>
+            </a:pPr>
+            <a:r>
+              <a:rPr lang="en-US" sz="1400" dirty="0">
+                <a:solidFill>
+                  <a:srgbClr val="000000"/>
+                </a:solidFill>
+              </a:rPr>
+              <a:t>For each DP, generate an identical run but with the corresponding test or commit event.</a:t>
+            </a:r>
+            <a:endParaRPr lang="en-US" sz="1400" dirty="0"/>
           </a:p>
           <a:p>
             <a:pPr marL="342900" indent="-342900">
@@ -5258,68 +5715,14 @@
               <a:buChar char="•"/>
             </a:pPr>
             <a:r>
-              <a:rPr lang="en-US" sz="1600" dirty="0">
+              <a:rPr lang="en-US" sz="1400" dirty="0">
                 <a:solidFill>
                   <a:srgbClr val="000000"/>
                 </a:solidFill>
               </a:rPr>
-              <a:t>Detect: 60-second windows with no test-run events; commit-gap events when commits are spaced beyond threshold.</a:t>
-            </a:r>
-            <a:endParaRPr lang="en-US" sz="1600" dirty="0"/>
-          </a:p>
-          <a:p>
-            <a:pPr marL="342900" indent="-342900">
-              <a:spcAft>
-                <a:spcPts val="600"/>
-              </a:spcAft>
-              <a:buSzPct val="100000"/>
-              <a:buChar char="•"/>
-            </a:pPr>
-            <a:r>
-              <a:rPr lang="en-US" sz="1600" dirty="0">
-                <a:solidFill>
-                  <a:srgbClr val="000000"/>
-                </a:solidFill>
-              </a:rPr>
-              <a:t>Synthesise: model an alternative cadence that inserts test-run and commit events at the right points.</a:t>
-            </a:r>
-            <a:endParaRPr lang="en-US" sz="1600" dirty="0"/>
-          </a:p>
-          <a:p>
-            <a:pPr marL="342900" indent="-342900">
-              <a:spcAft>
-                <a:spcPts val="600"/>
-              </a:spcAft>
-              <a:buSzPct val="100000"/>
-              <a:buChar char="•"/>
-            </a:pPr>
-            <a:r>
-              <a:rPr lang="en-US" sz="1600" dirty="0">
-                <a:solidFill>
-                  <a:srgbClr val="000000"/>
-                </a:solidFill>
-              </a:rPr>
-              <a:t>The alternative's J(τ) credits those checkpoints via the skip-tests and commit-gap terms.</a:t>
-            </a:r>
-            <a:endParaRPr lang="en-US" sz="1600" dirty="0"/>
-          </a:p>
-          <a:p>
-            <a:pPr marL="342900" indent="-342900">
-              <a:spcAft>
-                <a:spcPts val="600"/>
-              </a:spcAft>
-              <a:buSzPct val="100000"/>
-              <a:buChar char="•"/>
-            </a:pPr>
-            <a:r>
-              <a:rPr lang="en-US" sz="1600" dirty="0">
-                <a:solidFill>
-                  <a:srgbClr val="000000"/>
-                </a:solidFill>
-              </a:rPr>
-              <a:t>Cheap to compute, but consistently surfaces meaningful divergences in the user study.</a:t>
-            </a:r>
-            <a:endParaRPr lang="en-US" sz="1600" dirty="0"/>
+              <a:t>Very cheap to compute.</a:t>
+            </a:r>
+            <a:endParaRPr lang="en-US" sz="1400" dirty="0"/>
           </a:p>
         </p:txBody>
       </p:sp>
@@ -5607,7 +6010,7 @@
                             <a:srgbClr val="555555"/>
                           </a:solidFill>
                         </a:rPr>
-                        <a:t>45 labelled injection sessions: per-kind precision and recall (Slides 14-15) plus beat/tie/lose breakdown across all 66 detected divergence points (Slide 16).</a:t>
+                        <a:t>45 labelled injection sessions: per-kind precision and recall (Slides 15-16) plus beat/tie/lose breakdown across all 66 detected divergence points (Slide 17).</a:t>
                       </a:r>
                       <a:endParaRPr lang="en-US" sz="1300" dirty="0"/>
                     </a:p>
@@ -5725,7 +6128,7 @@
                             <a:srgbClr val="555555"/>
                           </a:solidFill>
                         </a:rPr>
-                        <a:t>Sensitivity sweep + ablation, headline on the 25-session user-study rankable subset (Slides 17-18).</a:t>
+                        <a:t>Sensitivity sweep + ablation, headline on the 25-session user-study rankable subset (Slides 19-20).</a:t>
                       </a:r>
                       <a:endParaRPr lang="en-US" sz="1300" dirty="0"/>
                     </a:p>
@@ -5843,7 +6246,7 @@
                             <a:srgbClr val="555555"/>
                           </a:solidFill>
                         </a:rPr>
-                        <a:t>30-session randomised user study, 5 participants split between feedback and no-feedback arms (Slide 19).</a:t>
+                        <a:t>30-session randomised user study, 5 participants split between feedback and no-feedback arms (Slide 22).</a:t>
                       </a:r>
                       <a:endParaRPr lang="en-US" sz="1300" dirty="0"/>
                     </a:p>
@@ -5925,8 +6328,8 @@
         </p:nvSpPr>
         <p:spPr>
           <a:xfrm>
-            <a:off x="457200" y="274320"/>
-            <a:ext cx="8229600" cy="640080"/>
+            <a:off x="457200" y="2011680"/>
+            <a:ext cx="8229600" cy="1097280"/>
           </a:xfrm>
           <a:prstGeom prst="rect">
             <a:avLst/>
@@ -5938,200 +6341,18 @@
           <a:bodyPr wrap="square" lIns="0" tIns="0" rIns="0" bIns="0" rtlCol="0" anchor="ctr"/>
           <a:lstStyle/>
           <a:p>
-            <a:pPr indent="0" marL="0">
-              <a:buNone/>
-            </a:pPr>
-            <a:r>
-              <a:rPr lang="en-US" sz="2800" b="1" dirty="0">
-                <a:solidFill>
-                  <a:srgbClr val="000000"/>
-                </a:solidFill>
-              </a:rPr>
-              <a:t>Is the tool accurate?</a:t>
-            </a:r>
-            <a:endParaRPr lang="en-US" sz="2800" dirty="0"/>
-          </a:p>
-        </p:txBody>
-      </p:sp>
-      <p:sp>
-        <p:nvSpPr>
-          <p:cNvPr id="3" name="Text 1"/>
-          <p:cNvSpPr/>
-          <p:nvPr/>
-        </p:nvSpPr>
-        <p:spPr>
-          <a:xfrm>
-            <a:off x="457200" y="1188720"/>
-            <a:ext cx="8229600" cy="3657600"/>
-          </a:xfrm>
-          <a:prstGeom prst="rect">
-            <a:avLst/>
-          </a:prstGeom>
-          <a:noFill/>
-          <a:ln/>
-        </p:spPr>
-        <p:txBody>
-          <a:bodyPr wrap="square" rtlCol="0" anchor="t"/>
-          <a:lstStyle/>
-          <a:p>
-            <a:pPr marL="342900" indent="-342900">
-              <a:spcAft>
-                <a:spcPts val="1000"/>
-              </a:spcAft>
-              <a:buSzPct val="100000"/>
-              <a:buChar char="•"/>
-            </a:pPr>
-            <a:r>
-              <a:rPr lang="en-US" sz="1500" dirty="0">
-                <a:solidFill>
-                  <a:srgbClr val="000000"/>
-                </a:solidFill>
-              </a:rPr>
-              <a:t>45 hand-labelled injection sessions </a:t>
-            </a:r>
-            <a:pPr indent="0" marL="0">
-              <a:spcAft>
-                <a:spcPts val="1000"/>
-              </a:spcAft>
-              <a:buNone/>
-            </a:pPr>
-            <a:r>
-              <a:rPr lang="en-US" sz="1500" dirty="0">
-                <a:solidFill>
-                  <a:srgbClr val="888888"/>
-                </a:solidFill>
-              </a:rPr>
-              <a:t>- on a Java codebase.</a:t>
-            </a:r>
-            <a:endParaRPr lang="en-US" sz="1500" dirty="0"/>
-          </a:p>
-          <a:p>
-            <a:pPr marL="342900" indent="-342900">
-              <a:spcAft>
-                <a:spcPts val="1000"/>
-              </a:spcAft>
-              <a:buSzPct val="100000"/>
-              <a:buChar char="•"/>
-            </a:pPr>
-            <a:r>
-              <a:rPr lang="en-US" sz="1500" dirty="0">
-                <a:solidFill>
-                  <a:srgbClr val="000000"/>
-                </a:solidFill>
-              </a:rPr>
-              <a:t>3 raters (author + 2 external MEng cohort members) </a:t>
-            </a:r>
-            <a:pPr indent="0" marL="0">
-              <a:spcAft>
-                <a:spcPts val="1000"/>
-              </a:spcAft>
-              <a:buNone/>
-            </a:pPr>
-            <a:r>
-              <a:rPr lang="en-US" sz="1500" dirty="0">
-                <a:solidFill>
-                  <a:srgbClr val="888888"/>
-                </a:solidFill>
-              </a:rPr>
-              <a:t>- inter-rater Cohen's κ = 1.00 (Ordering, Manual-Refactor), 0.86–1.00 (Rework), 0.72–0.86 (Hygiene).</a:t>
-            </a:r>
-            <a:endParaRPr lang="en-US" sz="1500" dirty="0"/>
-          </a:p>
-          <a:p>
-            <a:pPr marL="342900" indent="-342900">
-              <a:spcAft>
-                <a:spcPts val="1000"/>
-              </a:spcAft>
-              <a:buSzPct val="100000"/>
-              <a:buChar char="•"/>
-            </a:pPr>
-            <a:r>
-              <a:rPr lang="en-US" sz="1500" dirty="0">
-                <a:solidFill>
-                  <a:srgbClr val="000000"/>
-                </a:solidFill>
-              </a:rPr>
-              <a:t>Disagreements predominantly surrounding hygiene + rework labels </a:t>
-            </a:r>
-            <a:pPr indent="0" marL="0">
-              <a:spcAft>
-                <a:spcPts val="1000"/>
-              </a:spcAft>
-              <a:buNone/>
-            </a:pPr>
-            <a:r>
-              <a:rPr lang="en-US" sz="1500" dirty="0">
-                <a:solidFill>
-                  <a:srgbClr val="888888"/>
-                </a:solidFill>
-              </a:rPr>
-              <a:t>- differences in opinion of what constitutes a step.</a:t>
-            </a:r>
-            <a:endParaRPr lang="en-US" sz="1500" dirty="0"/>
-          </a:p>
-          <a:p>
-            <a:pPr marL="342900" indent="-342900">
-              <a:spcAft>
-                <a:spcPts val="1000"/>
-              </a:spcAft>
-              <a:buSzPct val="100000"/>
-              <a:buChar char="•"/>
-            </a:pPr>
-            <a:r>
-              <a:rPr lang="en-US" sz="1500" dirty="0">
-                <a:solidFill>
-                  <a:srgbClr val="000000"/>
-                </a:solidFill>
-              </a:rPr>
-              <a:t>Track all divergence points detected </a:t>
-            </a:r>
-            <a:pPr indent="0" marL="0">
-              <a:spcAft>
-                <a:spcPts val="1000"/>
-              </a:spcAft>
-              <a:buNone/>
-            </a:pPr>
-            <a:r>
-              <a:rPr lang="en-US" sz="1500" dirty="0">
-                <a:solidFill>
-                  <a:srgbClr val="888888"/>
-                </a:solidFill>
-              </a:rPr>
-              <a:t>- not only ones with a higher process score than the user.</a:t>
-            </a:r>
-            <a:endParaRPr lang="en-US" sz="1500" dirty="0"/>
-          </a:p>
-          <a:p>
-            <a:pPr marL="342900" indent="-342900">
-              <a:spcAft>
-                <a:spcPts val="1000"/>
-              </a:spcAft>
-              <a:buSzPct val="100000"/>
-              <a:buChar char="•"/>
-            </a:pPr>
-            <a:r>
-              <a:rPr lang="en-US" sz="1500" dirty="0">
-                <a:solidFill>
-                  <a:srgbClr val="000000"/>
-                </a:solidFill>
-              </a:rPr>
-              <a:t>Measure precision + recall </a:t>
-            </a:r>
-            <a:pPr indent="0" marL="0">
-              <a:spcAft>
-                <a:spcPts val="1000"/>
-              </a:spcAft>
-              <a:buNone/>
-            </a:pPr>
-            <a:r>
-              <a:rPr lang="en-US" sz="1500" dirty="0">
-                <a:solidFill>
-                  <a:srgbClr val="888888"/>
-                </a:solidFill>
-              </a:rPr>
-              <a:t>- precision guards against FPs that waste the developer's attention. Recall guards against FNs that miss real opportunities. F1 averages the two - so a high score can hide a detector that's annoying users (lots of FPs) or one that's quietly missing things (lots of FNs). Accuracy is dominated by true negatives.</a:t>
-            </a:r>
-            <a:endParaRPr lang="en-US" sz="1500" dirty="0"/>
+            <a:pPr algn="ctr" indent="0" marL="0">
+              <a:buNone/>
+            </a:pPr>
+            <a:r>
+              <a:rPr lang="en-US" sz="3600" b="1" dirty="0">
+                <a:solidFill>
+                  <a:srgbClr val="1A1A1A"/>
+                </a:solidFill>
+              </a:rPr>
+              <a:t>Experiment 1: Is the tool accurate?</a:t>
+            </a:r>
+            <a:endParaRPr lang="en-US" sz="3600" dirty="0"/>
           </a:p>
         </p:txBody>
       </p:sp>
@@ -6168,8 +6389,8 @@
         </p:nvSpPr>
         <p:spPr>
           <a:xfrm>
-            <a:off x="457200" y="91440"/>
-            <a:ext cx="8229600" cy="548640"/>
+            <a:off x="457200" y="274320"/>
+            <a:ext cx="8229600" cy="640080"/>
           </a:xfrm>
           <a:prstGeom prst="rect">
             <a:avLst/>
@@ -6190,7 +6411,7 @@
                   <a:srgbClr val="000000"/>
                 </a:solidFill>
               </a:rPr>
-              <a:t>Decision matrix per divergence kind</a:t>
+              <a:t>Is the tool accurate?</a:t>
             </a:r>
             <a:endParaRPr lang="en-US" sz="2800" dirty="0"/>
           </a:p>
@@ -6204,8 +6425,8 @@
         </p:nvSpPr>
         <p:spPr>
           <a:xfrm>
-            <a:off x="457200" y="658368"/>
-            <a:ext cx="8229600" cy="256032"/>
+            <a:off x="457200" y="1188720"/>
+            <a:ext cx="8229600" cy="3657600"/>
           </a:xfrm>
           <a:prstGeom prst="rect">
             <a:avLst/>
@@ -6214,2253 +6435,167 @@
           <a:ln/>
         </p:spPr>
         <p:txBody>
-          <a:bodyPr wrap="square" lIns="0" tIns="0" rIns="0" bIns="0" rtlCol="0" anchor="ctr"/>
-          <a:lstStyle/>
-          <a:p>
-            <a:pPr algn="ctr" indent="0" marL="0">
-              <a:buNone/>
-            </a:pPr>
-            <a:r>
-              <a:rPr lang="en-US" sz="1200" i="1" dirty="0">
-                <a:solidFill>
-                  <a:srgbClr val="555555"/>
-                </a:solidFill>
-              </a:rPr>
-              <a:t>Session-level (45 injection sessions).</a:t>
-            </a:r>
-            <a:endParaRPr lang="en-US" sz="1200" dirty="0"/>
-          </a:p>
-        </p:txBody>
-      </p:sp>
-      <p:sp>
-        <p:nvSpPr>
-          <p:cNvPr id="4" name="Text 2"/>
-          <p:cNvSpPr/>
-          <p:nvPr/>
-        </p:nvSpPr>
-        <p:spPr>
-          <a:xfrm>
-            <a:off x="640080" y="914400"/>
-            <a:ext cx="2834640" cy="201168"/>
-          </a:xfrm>
-          <a:prstGeom prst="rect">
-            <a:avLst/>
-          </a:prstGeom>
-          <a:noFill/>
-          <a:ln/>
-        </p:spPr>
-        <p:txBody>
-          <a:bodyPr wrap="square" lIns="0" tIns="0" rIns="0" bIns="0" rtlCol="0" anchor="b"/>
-          <a:lstStyle/>
-          <a:p>
-            <a:pPr algn="ctr" indent="0" marL="0">
-              <a:buNone/>
-            </a:pPr>
-            <a:r>
-              <a:rPr lang="en-US" sz="1400" b="1" dirty="0">
+          <a:bodyPr wrap="square" rtlCol="0" anchor="t"/>
+          <a:lstStyle/>
+          <a:p>
+            <a:pPr marL="342900" indent="-342900">
+              <a:spcAft>
+                <a:spcPts val="1000"/>
+              </a:spcAft>
+              <a:buSzPct val="100000"/>
+              <a:buChar char="•"/>
+            </a:pPr>
+            <a:r>
+              <a:rPr lang="en-US" sz="1500" dirty="0">
                 <a:solidFill>
                   <a:srgbClr val="000000"/>
                 </a:solidFill>
               </a:rPr>
-              <a:t>Manual-Refactor</a:t>
-            </a:r>
-            <a:endParaRPr lang="en-US" sz="1400" dirty="0"/>
-          </a:p>
-        </p:txBody>
-      </p:sp>
-      <p:sp>
-        <p:nvSpPr>
-          <p:cNvPr id="5" name="Text 3"/>
-          <p:cNvSpPr/>
-          <p:nvPr/>
-        </p:nvSpPr>
-        <p:spPr>
-          <a:xfrm>
-            <a:off x="1188720" y="1133856"/>
-            <a:ext cx="1143000" cy="201168"/>
-          </a:xfrm>
-          <a:prstGeom prst="rect">
-            <a:avLst/>
-          </a:prstGeom>
-          <a:noFill/>
-          <a:ln/>
-        </p:spPr>
-        <p:txBody>
-          <a:bodyPr wrap="square" lIns="0" tIns="0" rIns="0" bIns="0" rtlCol="0" anchor="ctr"/>
-          <a:lstStyle/>
-          <a:p>
-            <a:pPr algn="ctr" indent="0" marL="0">
-              <a:buNone/>
-            </a:pPr>
-            <a:r>
-              <a:rPr lang="en-US" sz="900" i="1" dirty="0">
-                <a:solidFill>
-                  <a:srgbClr val="555555"/>
-                </a:solidFill>
-              </a:rPr>
-              <a:t>Predicted +</a:t>
-            </a:r>
-            <a:endParaRPr lang="en-US" sz="900" dirty="0"/>
-          </a:p>
-        </p:txBody>
-      </p:sp>
-      <p:sp>
-        <p:nvSpPr>
-          <p:cNvPr id="6" name="Text 4"/>
-          <p:cNvSpPr/>
-          <p:nvPr/>
-        </p:nvSpPr>
-        <p:spPr>
-          <a:xfrm>
-            <a:off x="2331720" y="1133856"/>
-            <a:ext cx="1143000" cy="201168"/>
-          </a:xfrm>
-          <a:prstGeom prst="rect">
-            <a:avLst/>
-          </a:prstGeom>
-          <a:noFill/>
-          <a:ln/>
-        </p:spPr>
-        <p:txBody>
-          <a:bodyPr wrap="square" lIns="0" tIns="0" rIns="0" bIns="0" rtlCol="0" anchor="ctr"/>
-          <a:lstStyle/>
-          <a:p>
-            <a:pPr algn="ctr" indent="0" marL="0">
-              <a:buNone/>
-            </a:pPr>
-            <a:r>
-              <a:rPr lang="en-US" sz="900" i="1" dirty="0">
-                <a:solidFill>
-                  <a:srgbClr val="555555"/>
-                </a:solidFill>
-              </a:rPr>
-              <a:t>Predicted −</a:t>
-            </a:r>
-            <a:endParaRPr lang="en-US" sz="900" dirty="0"/>
-          </a:p>
-        </p:txBody>
-      </p:sp>
-      <p:sp>
-        <p:nvSpPr>
-          <p:cNvPr id="7" name="Text 5"/>
-          <p:cNvSpPr/>
-          <p:nvPr/>
-        </p:nvSpPr>
-        <p:spPr>
-          <a:xfrm>
-            <a:off x="640080" y="1353312"/>
-            <a:ext cx="548640" cy="548640"/>
-          </a:xfrm>
-          <a:prstGeom prst="rect">
-            <a:avLst/>
-          </a:prstGeom>
-          <a:noFill/>
-          <a:ln/>
-        </p:spPr>
-        <p:txBody>
-          <a:bodyPr wrap="square" lIns="508" tIns="508" rIns="508" bIns="508" rtlCol="0" anchor="ctr"/>
-          <a:lstStyle/>
-          <a:p>
-            <a:pPr algn="r" indent="0" marL="0">
-              <a:buNone/>
-            </a:pPr>
-            <a:r>
-              <a:rPr lang="en-US" sz="900" i="1" dirty="0">
-                <a:solidFill>
-                  <a:srgbClr val="555555"/>
-                </a:solidFill>
-              </a:rPr>
-              <a:t>Actual +</a:t>
-            </a:r>
-            <a:endParaRPr lang="en-US" sz="900" dirty="0"/>
-          </a:p>
-        </p:txBody>
-      </p:sp>
-      <p:sp>
-        <p:nvSpPr>
-          <p:cNvPr id="8" name="Text 6"/>
-          <p:cNvSpPr/>
-          <p:nvPr/>
-        </p:nvSpPr>
-        <p:spPr>
-          <a:xfrm>
-            <a:off x="640080" y="1901952"/>
-            <a:ext cx="548640" cy="548640"/>
-          </a:xfrm>
-          <a:prstGeom prst="rect">
-            <a:avLst/>
-          </a:prstGeom>
-          <a:noFill/>
-          <a:ln/>
-        </p:spPr>
-        <p:txBody>
-          <a:bodyPr wrap="square" lIns="508" tIns="508" rIns="508" bIns="508" rtlCol="0" anchor="ctr"/>
-          <a:lstStyle/>
-          <a:p>
-            <a:pPr algn="r" indent="0" marL="0">
-              <a:buNone/>
-            </a:pPr>
-            <a:r>
-              <a:rPr lang="en-US" sz="900" i="1" dirty="0">
-                <a:solidFill>
-                  <a:srgbClr val="555555"/>
-                </a:solidFill>
-              </a:rPr>
-              <a:t>Actual −</a:t>
-            </a:r>
-            <a:endParaRPr lang="en-US" sz="900" dirty="0"/>
-          </a:p>
-        </p:txBody>
-      </p:sp>
-      <p:sp>
-        <p:nvSpPr>
-          <p:cNvPr id="9" name="Shape 7"/>
-          <p:cNvSpPr/>
-          <p:nvPr/>
-        </p:nvSpPr>
-        <p:spPr>
-          <a:xfrm>
-            <a:off x="1188720" y="1426464"/>
-            <a:ext cx="1143000" cy="548640"/>
-          </a:xfrm>
-          <a:prstGeom prst="rect">
-            <a:avLst/>
-          </a:prstGeom>
-          <a:solidFill>
-            <a:srgbClr val="D4F0DC"/>
-          </a:solidFill>
-          <a:ln w="6350">
-            <a:solidFill>
-              <a:srgbClr val="999999"/>
-            </a:solidFill>
-            <a:prstDash val="solid"/>
-          </a:ln>
-        </p:spPr>
-      </p:sp>
-      <p:sp>
-        <p:nvSpPr>
-          <p:cNvPr id="10" name="Text 8"/>
-          <p:cNvSpPr/>
-          <p:nvPr/>
-        </p:nvSpPr>
-        <p:spPr>
-          <a:xfrm>
-            <a:off x="1188720" y="1426464"/>
-            <a:ext cx="1143000" cy="548640"/>
-          </a:xfrm>
-          <a:prstGeom prst="rect">
-            <a:avLst/>
-          </a:prstGeom>
-          <a:noFill/>
-          <a:ln/>
-        </p:spPr>
-        <p:txBody>
-          <a:bodyPr wrap="square" lIns="0" tIns="0" rIns="0" bIns="0" rtlCol="0" anchor="ctr"/>
-          <a:lstStyle/>
-          <a:p>
-            <a:pPr algn="ctr" indent="0" marL="0">
-              <a:buNone/>
-            </a:pPr>
-            <a:r>
-              <a:rPr lang="en-US" sz="2000" b="1" dirty="0">
-                <a:solidFill>
-                  <a:srgbClr val="0A7D2A"/>
-                </a:solidFill>
-              </a:rPr>
-              <a:t>16</a:t>
-            </a:r>
-            <a:endParaRPr lang="en-US" sz="2000" dirty="0"/>
-          </a:p>
-          <a:p>
-            <a:pPr algn="ctr" indent="0" marL="0">
-              <a:buNone/>
-            </a:pPr>
-            <a:r>
-              <a:rPr lang="en-US" sz="900" dirty="0">
-                <a:solidFill>
-                  <a:srgbClr val="666666"/>
-                </a:solidFill>
-              </a:rPr>
-              <a:t>TP</a:t>
-            </a:r>
-            <a:endParaRPr lang="en-US" sz="2000" dirty="0"/>
-          </a:p>
-        </p:txBody>
-      </p:sp>
-      <p:sp>
-        <p:nvSpPr>
-          <p:cNvPr id="11" name="Shape 9"/>
-          <p:cNvSpPr/>
-          <p:nvPr/>
-        </p:nvSpPr>
-        <p:spPr>
-          <a:xfrm>
-            <a:off x="2331720" y="1426464"/>
-            <a:ext cx="1143000" cy="548640"/>
-          </a:xfrm>
-          <a:prstGeom prst="rect">
-            <a:avLst/>
-          </a:prstGeom>
-          <a:solidFill>
-            <a:srgbClr val="F5D5CE"/>
-          </a:solidFill>
-          <a:ln w="6350">
-            <a:solidFill>
-              <a:srgbClr val="999999"/>
-            </a:solidFill>
-            <a:prstDash val="solid"/>
-          </a:ln>
-        </p:spPr>
-      </p:sp>
-      <p:sp>
-        <p:nvSpPr>
-          <p:cNvPr id="12" name="Text 10"/>
-          <p:cNvSpPr/>
-          <p:nvPr/>
-        </p:nvSpPr>
-        <p:spPr>
-          <a:xfrm>
-            <a:off x="2331720" y="1426464"/>
-            <a:ext cx="1143000" cy="548640"/>
-          </a:xfrm>
-          <a:prstGeom prst="rect">
-            <a:avLst/>
-          </a:prstGeom>
-          <a:noFill/>
-          <a:ln/>
-        </p:spPr>
-        <p:txBody>
-          <a:bodyPr wrap="square" lIns="0" tIns="0" rIns="0" bIns="0" rtlCol="0" anchor="ctr"/>
-          <a:lstStyle/>
-          <a:p>
-            <a:pPr algn="ctr" indent="0" marL="0">
-              <a:buNone/>
-            </a:pPr>
-            <a:r>
-              <a:rPr lang="en-US" sz="2000" b="1" dirty="0">
-                <a:solidFill>
-                  <a:srgbClr val="B33A1E"/>
-                </a:solidFill>
-              </a:rPr>
-              <a:t>5</a:t>
-            </a:r>
-            <a:endParaRPr lang="en-US" sz="2000" dirty="0"/>
-          </a:p>
-          <a:p>
-            <a:pPr algn="ctr" indent="0" marL="0">
-              <a:buNone/>
-            </a:pPr>
-            <a:r>
-              <a:rPr lang="en-US" sz="900" dirty="0">
-                <a:solidFill>
-                  <a:srgbClr val="666666"/>
-                </a:solidFill>
-              </a:rPr>
-              <a:t>FN</a:t>
-            </a:r>
-            <a:endParaRPr lang="en-US" sz="2000" dirty="0"/>
-          </a:p>
-        </p:txBody>
-      </p:sp>
-      <p:sp>
-        <p:nvSpPr>
-          <p:cNvPr id="13" name="Shape 11"/>
-          <p:cNvSpPr/>
-          <p:nvPr/>
-        </p:nvSpPr>
-        <p:spPr>
-          <a:xfrm>
-            <a:off x="1188720" y="1975104"/>
-            <a:ext cx="1143000" cy="548640"/>
-          </a:xfrm>
-          <a:prstGeom prst="rect">
-            <a:avLst/>
-          </a:prstGeom>
-          <a:solidFill>
-            <a:srgbClr val="F2F2F2"/>
-          </a:solidFill>
-          <a:ln w="6350">
-            <a:solidFill>
-              <a:srgbClr val="999999"/>
-            </a:solidFill>
-            <a:prstDash val="solid"/>
-          </a:ln>
-        </p:spPr>
-      </p:sp>
-      <p:sp>
-        <p:nvSpPr>
-          <p:cNvPr id="14" name="Text 12"/>
-          <p:cNvSpPr/>
-          <p:nvPr/>
-        </p:nvSpPr>
-        <p:spPr>
-          <a:xfrm>
-            <a:off x="1188720" y="1975104"/>
-            <a:ext cx="1143000" cy="548640"/>
-          </a:xfrm>
-          <a:prstGeom prst="rect">
-            <a:avLst/>
-          </a:prstGeom>
-          <a:noFill/>
-          <a:ln/>
-        </p:spPr>
-        <p:txBody>
-          <a:bodyPr wrap="square" lIns="0" tIns="0" rIns="0" bIns="0" rtlCol="0" anchor="ctr"/>
-          <a:lstStyle/>
-          <a:p>
-            <a:pPr algn="ctr" indent="0" marL="0">
-              <a:buNone/>
-            </a:pPr>
-            <a:r>
-              <a:rPr lang="en-US" sz="2000" b="1" dirty="0">
+              <a:t>45 hand-labelled injection sessions </a:t>
+            </a:r>
+            <a:pPr indent="0" marL="0">
+              <a:spcAft>
+                <a:spcPts val="1000"/>
+              </a:spcAft>
+              <a:buNone/>
+            </a:pPr>
+            <a:r>
+              <a:rPr lang="en-US" sz="1500" dirty="0">
                 <a:solidFill>
                   <a:srgbClr val="888888"/>
                 </a:solidFill>
               </a:rPr>
-              <a:t>0</a:t>
-            </a:r>
-            <a:endParaRPr lang="en-US" sz="2000" dirty="0"/>
-          </a:p>
-          <a:p>
-            <a:pPr algn="ctr" indent="0" marL="0">
-              <a:buNone/>
-            </a:pPr>
-            <a:r>
-              <a:rPr lang="en-US" sz="900" dirty="0">
-                <a:solidFill>
-                  <a:srgbClr val="666666"/>
-                </a:solidFill>
-              </a:rPr>
-              <a:t>FP</a:t>
-            </a:r>
-            <a:endParaRPr lang="en-US" sz="2000" dirty="0"/>
-          </a:p>
-        </p:txBody>
-      </p:sp>
-      <p:sp>
-        <p:nvSpPr>
-          <p:cNvPr id="15" name="Shape 13"/>
-          <p:cNvSpPr/>
-          <p:nvPr/>
-        </p:nvSpPr>
-        <p:spPr>
-          <a:xfrm>
-            <a:off x="2331720" y="1975104"/>
-            <a:ext cx="1143000" cy="548640"/>
-          </a:xfrm>
-          <a:prstGeom prst="rect">
-            <a:avLst/>
-          </a:prstGeom>
-          <a:solidFill>
-            <a:srgbClr val="EAEAEA"/>
-          </a:solidFill>
-          <a:ln w="6350">
-            <a:solidFill>
-              <a:srgbClr val="999999"/>
-            </a:solidFill>
-            <a:prstDash val="solid"/>
-          </a:ln>
-        </p:spPr>
-      </p:sp>
-      <p:sp>
-        <p:nvSpPr>
-          <p:cNvPr id="16" name="Text 14"/>
-          <p:cNvSpPr/>
-          <p:nvPr/>
-        </p:nvSpPr>
-        <p:spPr>
-          <a:xfrm>
-            <a:off x="2331720" y="1975104"/>
-            <a:ext cx="1143000" cy="548640"/>
-          </a:xfrm>
-          <a:prstGeom prst="rect">
-            <a:avLst/>
-          </a:prstGeom>
-          <a:noFill/>
-          <a:ln/>
-        </p:spPr>
-        <p:txBody>
-          <a:bodyPr wrap="square" lIns="0" tIns="0" rIns="0" bIns="0" rtlCol="0" anchor="ctr"/>
-          <a:lstStyle/>
-          <a:p>
-            <a:pPr algn="ctr" indent="0" marL="0">
-              <a:buNone/>
-            </a:pPr>
-            <a:r>
-              <a:rPr lang="en-US" sz="2000" b="1" dirty="0">
-                <a:solidFill>
-                  <a:srgbClr val="555555"/>
-                </a:solidFill>
-              </a:rPr>
-              <a:t>24</a:t>
-            </a:r>
-            <a:endParaRPr lang="en-US" sz="2000" dirty="0"/>
-          </a:p>
-          <a:p>
-            <a:pPr algn="ctr" indent="0" marL="0">
-              <a:buNone/>
-            </a:pPr>
-            <a:r>
-              <a:rPr lang="en-US" sz="900" dirty="0">
-                <a:solidFill>
-                  <a:srgbClr val="666666"/>
-                </a:solidFill>
-              </a:rPr>
-              <a:t>TN</a:t>
-            </a:r>
-            <a:endParaRPr lang="en-US" sz="2000" dirty="0"/>
-          </a:p>
-        </p:txBody>
-      </p:sp>
-      <p:sp>
-        <p:nvSpPr>
-          <p:cNvPr id="17" name="Text 15"/>
-          <p:cNvSpPr/>
-          <p:nvPr/>
-        </p:nvSpPr>
-        <p:spPr>
-          <a:xfrm>
-            <a:off x="640080" y="2542032"/>
-            <a:ext cx="2834640" cy="201168"/>
-          </a:xfrm>
-          <a:prstGeom prst="rect">
-            <a:avLst/>
-          </a:prstGeom>
-          <a:noFill/>
-          <a:ln/>
-        </p:spPr>
-        <p:txBody>
-          <a:bodyPr wrap="square" lIns="0" tIns="0" rIns="0" bIns="0" rtlCol="0" anchor="ctr"/>
-          <a:lstStyle/>
-          <a:p>
-            <a:pPr algn="ctr" indent="0" marL="0">
-              <a:buNone/>
-            </a:pPr>
-            <a:r>
-              <a:rPr lang="en-US" sz="1100" i="1" dirty="0">
-                <a:solidFill>
-                  <a:srgbClr val="555555"/>
-                </a:solidFill>
-              </a:rPr>
-              <a:t>Precision </a:t>
-            </a:r>
-            <a:pPr algn="ctr" indent="0" marL="0">
-              <a:buNone/>
-            </a:pPr>
-            <a:r>
-              <a:rPr lang="en-US" sz="1100" b="1" i="1" dirty="0">
-                <a:solidFill>
-                  <a:srgbClr val="1A1A1A"/>
-                </a:solidFill>
-              </a:rPr>
-              <a:t>1.00</a:t>
-            </a:r>
-            <a:pPr algn="ctr" indent="0" marL="0">
-              <a:buNone/>
-            </a:pPr>
-            <a:r>
-              <a:rPr lang="en-US" sz="1100" i="1" dirty="0">
-                <a:solidFill>
-                  <a:srgbClr val="555555"/>
-                </a:solidFill>
-              </a:rPr>
-              <a:t>   ·   Recall </a:t>
-            </a:r>
-            <a:pPr algn="ctr" indent="0" marL="0">
-              <a:buNone/>
-            </a:pPr>
-            <a:r>
-              <a:rPr lang="en-US" sz="1100" b="1" i="1" dirty="0">
-                <a:solidFill>
-                  <a:srgbClr val="1A1A1A"/>
-                </a:solidFill>
-              </a:rPr>
-              <a:t>0.76</a:t>
-            </a:r>
-            <a:endParaRPr lang="en-US" sz="1100" dirty="0"/>
-          </a:p>
-        </p:txBody>
-      </p:sp>
-      <p:sp>
-        <p:nvSpPr>
-          <p:cNvPr id="18" name="Text 16"/>
-          <p:cNvSpPr/>
-          <p:nvPr/>
-        </p:nvSpPr>
-        <p:spPr>
-          <a:xfrm>
-            <a:off x="4754880" y="914400"/>
-            <a:ext cx="2834640" cy="201168"/>
-          </a:xfrm>
-          <a:prstGeom prst="rect">
-            <a:avLst/>
-          </a:prstGeom>
-          <a:noFill/>
-          <a:ln/>
-        </p:spPr>
-        <p:txBody>
-          <a:bodyPr wrap="square" lIns="0" tIns="0" rIns="0" bIns="0" rtlCol="0" anchor="b"/>
-          <a:lstStyle/>
-          <a:p>
-            <a:pPr algn="ctr" indent="0" marL="0">
-              <a:buNone/>
-            </a:pPr>
-            <a:r>
-              <a:rPr lang="en-US" sz="1400" b="1" dirty="0">
+              <a:t>- on a Java codebase.</a:t>
+            </a:r>
+            <a:endParaRPr lang="en-US" sz="1500" dirty="0"/>
+          </a:p>
+          <a:p>
+            <a:pPr marL="342900" indent="-342900">
+              <a:spcAft>
+                <a:spcPts val="1000"/>
+              </a:spcAft>
+              <a:buSzPct val="100000"/>
+              <a:buChar char="•"/>
+            </a:pPr>
+            <a:r>
+              <a:rPr lang="en-US" sz="1500" dirty="0">
                 <a:solidFill>
                   <a:srgbClr val="000000"/>
                 </a:solidFill>
               </a:rPr>
-              <a:t>Ordering</a:t>
-            </a:r>
-            <a:endParaRPr lang="en-US" sz="1400" dirty="0"/>
-          </a:p>
-        </p:txBody>
-      </p:sp>
-      <p:sp>
-        <p:nvSpPr>
-          <p:cNvPr id="19" name="Text 17"/>
-          <p:cNvSpPr/>
-          <p:nvPr/>
-        </p:nvSpPr>
-        <p:spPr>
-          <a:xfrm>
-            <a:off x="5303520" y="1133856"/>
-            <a:ext cx="1143000" cy="201168"/>
-          </a:xfrm>
-          <a:prstGeom prst="rect">
-            <a:avLst/>
-          </a:prstGeom>
-          <a:noFill/>
-          <a:ln/>
-        </p:spPr>
-        <p:txBody>
-          <a:bodyPr wrap="square" lIns="0" tIns="0" rIns="0" bIns="0" rtlCol="0" anchor="ctr"/>
-          <a:lstStyle/>
-          <a:p>
-            <a:pPr algn="ctr" indent="0" marL="0">
-              <a:buNone/>
-            </a:pPr>
-            <a:r>
-              <a:rPr lang="en-US" sz="900" i="1" dirty="0">
-                <a:solidFill>
-                  <a:srgbClr val="555555"/>
-                </a:solidFill>
-              </a:rPr>
-              <a:t>Predicted +</a:t>
-            </a:r>
-            <a:endParaRPr lang="en-US" sz="900" dirty="0"/>
-          </a:p>
-        </p:txBody>
-      </p:sp>
-      <p:sp>
-        <p:nvSpPr>
-          <p:cNvPr id="20" name="Text 18"/>
-          <p:cNvSpPr/>
-          <p:nvPr/>
-        </p:nvSpPr>
-        <p:spPr>
-          <a:xfrm>
-            <a:off x="6446520" y="1133856"/>
-            <a:ext cx="1143000" cy="201168"/>
-          </a:xfrm>
-          <a:prstGeom prst="rect">
-            <a:avLst/>
-          </a:prstGeom>
-          <a:noFill/>
-          <a:ln/>
-        </p:spPr>
-        <p:txBody>
-          <a:bodyPr wrap="square" lIns="0" tIns="0" rIns="0" bIns="0" rtlCol="0" anchor="ctr"/>
-          <a:lstStyle/>
-          <a:p>
-            <a:pPr algn="ctr" indent="0" marL="0">
-              <a:buNone/>
-            </a:pPr>
-            <a:r>
-              <a:rPr lang="en-US" sz="900" i="1" dirty="0">
-                <a:solidFill>
-                  <a:srgbClr val="555555"/>
-                </a:solidFill>
-              </a:rPr>
-              <a:t>Predicted −</a:t>
-            </a:r>
-            <a:endParaRPr lang="en-US" sz="900" dirty="0"/>
-          </a:p>
-        </p:txBody>
-      </p:sp>
-      <p:sp>
-        <p:nvSpPr>
-          <p:cNvPr id="21" name="Text 19"/>
-          <p:cNvSpPr/>
-          <p:nvPr/>
-        </p:nvSpPr>
-        <p:spPr>
-          <a:xfrm>
-            <a:off x="4754880" y="1353312"/>
-            <a:ext cx="548640" cy="548640"/>
-          </a:xfrm>
-          <a:prstGeom prst="rect">
-            <a:avLst/>
-          </a:prstGeom>
-          <a:noFill/>
-          <a:ln/>
-        </p:spPr>
-        <p:txBody>
-          <a:bodyPr wrap="square" lIns="508" tIns="508" rIns="508" bIns="508" rtlCol="0" anchor="ctr"/>
-          <a:lstStyle/>
-          <a:p>
-            <a:pPr algn="r" indent="0" marL="0">
-              <a:buNone/>
-            </a:pPr>
-            <a:r>
-              <a:rPr lang="en-US" sz="900" i="1" dirty="0">
-                <a:solidFill>
-                  <a:srgbClr val="555555"/>
-                </a:solidFill>
-              </a:rPr>
-              <a:t>Actual +</a:t>
-            </a:r>
-            <a:endParaRPr lang="en-US" sz="900" dirty="0"/>
-          </a:p>
-        </p:txBody>
-      </p:sp>
-      <p:sp>
-        <p:nvSpPr>
-          <p:cNvPr id="22" name="Text 20"/>
-          <p:cNvSpPr/>
-          <p:nvPr/>
-        </p:nvSpPr>
-        <p:spPr>
-          <a:xfrm>
-            <a:off x="4754880" y="1901952"/>
-            <a:ext cx="548640" cy="548640"/>
-          </a:xfrm>
-          <a:prstGeom prst="rect">
-            <a:avLst/>
-          </a:prstGeom>
-          <a:noFill/>
-          <a:ln/>
-        </p:spPr>
-        <p:txBody>
-          <a:bodyPr wrap="square" lIns="508" tIns="508" rIns="508" bIns="508" rtlCol="0" anchor="ctr"/>
-          <a:lstStyle/>
-          <a:p>
-            <a:pPr algn="r" indent="0" marL="0">
-              <a:buNone/>
-            </a:pPr>
-            <a:r>
-              <a:rPr lang="en-US" sz="900" i="1" dirty="0">
-                <a:solidFill>
-                  <a:srgbClr val="555555"/>
-                </a:solidFill>
-              </a:rPr>
-              <a:t>Actual −</a:t>
-            </a:r>
-            <a:endParaRPr lang="en-US" sz="900" dirty="0"/>
-          </a:p>
-        </p:txBody>
-      </p:sp>
-      <p:sp>
-        <p:nvSpPr>
-          <p:cNvPr id="23" name="Shape 21"/>
-          <p:cNvSpPr/>
-          <p:nvPr/>
-        </p:nvSpPr>
-        <p:spPr>
-          <a:xfrm>
-            <a:off x="5303520" y="1426464"/>
-            <a:ext cx="1143000" cy="548640"/>
-          </a:xfrm>
-          <a:prstGeom prst="rect">
-            <a:avLst/>
-          </a:prstGeom>
-          <a:solidFill>
-            <a:srgbClr val="D4F0DC"/>
-          </a:solidFill>
-          <a:ln w="6350">
-            <a:solidFill>
-              <a:srgbClr val="999999"/>
-            </a:solidFill>
-            <a:prstDash val="solid"/>
-          </a:ln>
-        </p:spPr>
-      </p:sp>
-      <p:sp>
-        <p:nvSpPr>
-          <p:cNvPr id="24" name="Text 22"/>
-          <p:cNvSpPr/>
-          <p:nvPr/>
-        </p:nvSpPr>
-        <p:spPr>
-          <a:xfrm>
-            <a:off x="5303520" y="1426464"/>
-            <a:ext cx="1143000" cy="548640"/>
-          </a:xfrm>
-          <a:prstGeom prst="rect">
-            <a:avLst/>
-          </a:prstGeom>
-          <a:noFill/>
-          <a:ln/>
-        </p:spPr>
-        <p:txBody>
-          <a:bodyPr wrap="square" lIns="0" tIns="0" rIns="0" bIns="0" rtlCol="0" anchor="ctr"/>
-          <a:lstStyle/>
-          <a:p>
-            <a:pPr algn="ctr" indent="0" marL="0">
-              <a:buNone/>
-            </a:pPr>
-            <a:r>
-              <a:rPr lang="en-US" sz="2000" b="1" dirty="0">
-                <a:solidFill>
-                  <a:srgbClr val="0A7D2A"/>
-                </a:solidFill>
-              </a:rPr>
-              <a:t>14</a:t>
-            </a:r>
-            <a:endParaRPr lang="en-US" sz="2000" dirty="0"/>
-          </a:p>
-          <a:p>
-            <a:pPr algn="ctr" indent="0" marL="0">
-              <a:buNone/>
-            </a:pPr>
-            <a:r>
-              <a:rPr lang="en-US" sz="900" dirty="0">
-                <a:solidFill>
-                  <a:srgbClr val="666666"/>
-                </a:solidFill>
-              </a:rPr>
-              <a:t>TP</a:t>
-            </a:r>
-            <a:endParaRPr lang="en-US" sz="2000" dirty="0"/>
-          </a:p>
-        </p:txBody>
-      </p:sp>
-      <p:sp>
-        <p:nvSpPr>
-          <p:cNvPr id="25" name="Shape 23"/>
-          <p:cNvSpPr/>
-          <p:nvPr/>
-        </p:nvSpPr>
-        <p:spPr>
-          <a:xfrm>
-            <a:off x="6446520" y="1426464"/>
-            <a:ext cx="1143000" cy="548640"/>
-          </a:xfrm>
-          <a:prstGeom prst="rect">
-            <a:avLst/>
-          </a:prstGeom>
-          <a:solidFill>
-            <a:srgbClr val="F5D5CE"/>
-          </a:solidFill>
-          <a:ln w="6350">
-            <a:solidFill>
-              <a:srgbClr val="999999"/>
-            </a:solidFill>
-            <a:prstDash val="solid"/>
-          </a:ln>
-        </p:spPr>
-      </p:sp>
-      <p:sp>
-        <p:nvSpPr>
-          <p:cNvPr id="26" name="Text 24"/>
-          <p:cNvSpPr/>
-          <p:nvPr/>
-        </p:nvSpPr>
-        <p:spPr>
-          <a:xfrm>
-            <a:off x="6446520" y="1426464"/>
-            <a:ext cx="1143000" cy="548640"/>
-          </a:xfrm>
-          <a:prstGeom prst="rect">
-            <a:avLst/>
-          </a:prstGeom>
-          <a:noFill/>
-          <a:ln/>
-        </p:spPr>
-        <p:txBody>
-          <a:bodyPr wrap="square" lIns="0" tIns="0" rIns="0" bIns="0" rtlCol="0" anchor="ctr"/>
-          <a:lstStyle/>
-          <a:p>
-            <a:pPr algn="ctr" indent="0" marL="0">
-              <a:buNone/>
-            </a:pPr>
-            <a:r>
-              <a:rPr lang="en-US" sz="2000" b="1" dirty="0">
-                <a:solidFill>
-                  <a:srgbClr val="B33A1E"/>
-                </a:solidFill>
-              </a:rPr>
-              <a:t>24</a:t>
-            </a:r>
-            <a:endParaRPr lang="en-US" sz="2000" dirty="0"/>
-          </a:p>
-          <a:p>
-            <a:pPr algn="ctr" indent="0" marL="0">
-              <a:buNone/>
-            </a:pPr>
-            <a:r>
-              <a:rPr lang="en-US" sz="900" dirty="0">
-                <a:solidFill>
-                  <a:srgbClr val="666666"/>
-                </a:solidFill>
-              </a:rPr>
-              <a:t>FN</a:t>
-            </a:r>
-            <a:endParaRPr lang="en-US" sz="2000" dirty="0"/>
-          </a:p>
-        </p:txBody>
-      </p:sp>
-      <p:sp>
-        <p:nvSpPr>
-          <p:cNvPr id="27" name="Shape 25"/>
-          <p:cNvSpPr/>
-          <p:nvPr/>
-        </p:nvSpPr>
-        <p:spPr>
-          <a:xfrm>
-            <a:off x="5303520" y="1975104"/>
-            <a:ext cx="1143000" cy="548640"/>
-          </a:xfrm>
-          <a:prstGeom prst="rect">
-            <a:avLst/>
-          </a:prstGeom>
-          <a:solidFill>
-            <a:srgbClr val="F2F2F2"/>
-          </a:solidFill>
-          <a:ln w="6350">
-            <a:solidFill>
-              <a:srgbClr val="999999"/>
-            </a:solidFill>
-            <a:prstDash val="solid"/>
-          </a:ln>
-        </p:spPr>
-      </p:sp>
-      <p:sp>
-        <p:nvSpPr>
-          <p:cNvPr id="28" name="Text 26"/>
-          <p:cNvSpPr/>
-          <p:nvPr/>
-        </p:nvSpPr>
-        <p:spPr>
-          <a:xfrm>
-            <a:off x="5303520" y="1975104"/>
-            <a:ext cx="1143000" cy="548640"/>
-          </a:xfrm>
-          <a:prstGeom prst="rect">
-            <a:avLst/>
-          </a:prstGeom>
-          <a:noFill/>
-          <a:ln/>
-        </p:spPr>
-        <p:txBody>
-          <a:bodyPr wrap="square" lIns="0" tIns="0" rIns="0" bIns="0" rtlCol="0" anchor="ctr"/>
-          <a:lstStyle/>
-          <a:p>
-            <a:pPr algn="ctr" indent="0" marL="0">
-              <a:buNone/>
-            </a:pPr>
-            <a:r>
-              <a:rPr lang="en-US" sz="2000" b="1" dirty="0">
+              <a:t>3 raters (author + 2 external MEng cohort members) </a:t>
+            </a:r>
+            <a:pPr indent="0" marL="0">
+              <a:spcAft>
+                <a:spcPts val="1000"/>
+              </a:spcAft>
+              <a:buNone/>
+            </a:pPr>
+            <a:r>
+              <a:rPr lang="en-US" sz="1500" dirty="0">
                 <a:solidFill>
                   <a:srgbClr val="888888"/>
                 </a:solidFill>
               </a:rPr>
-              <a:t>0</a:t>
-            </a:r>
-            <a:endParaRPr lang="en-US" sz="2000" dirty="0"/>
-          </a:p>
-          <a:p>
-            <a:pPr algn="ctr" indent="0" marL="0">
-              <a:buNone/>
-            </a:pPr>
-            <a:r>
-              <a:rPr lang="en-US" sz="900" dirty="0">
-                <a:solidFill>
-                  <a:srgbClr val="666666"/>
-                </a:solidFill>
-              </a:rPr>
-              <a:t>FP</a:t>
-            </a:r>
-            <a:endParaRPr lang="en-US" sz="2000" dirty="0"/>
-          </a:p>
-        </p:txBody>
-      </p:sp>
-      <p:sp>
-        <p:nvSpPr>
-          <p:cNvPr id="29" name="Shape 27"/>
-          <p:cNvSpPr/>
-          <p:nvPr/>
-        </p:nvSpPr>
-        <p:spPr>
-          <a:xfrm>
-            <a:off x="6446520" y="1975104"/>
-            <a:ext cx="1143000" cy="548640"/>
-          </a:xfrm>
-          <a:prstGeom prst="rect">
-            <a:avLst/>
-          </a:prstGeom>
-          <a:solidFill>
-            <a:srgbClr val="EAEAEA"/>
-          </a:solidFill>
-          <a:ln w="6350">
-            <a:solidFill>
-              <a:srgbClr val="999999"/>
-            </a:solidFill>
-            <a:prstDash val="solid"/>
-          </a:ln>
-        </p:spPr>
-      </p:sp>
-      <p:sp>
-        <p:nvSpPr>
-          <p:cNvPr id="30" name="Text 28"/>
-          <p:cNvSpPr/>
-          <p:nvPr/>
-        </p:nvSpPr>
-        <p:spPr>
-          <a:xfrm>
-            <a:off x="6446520" y="1975104"/>
-            <a:ext cx="1143000" cy="548640"/>
-          </a:xfrm>
-          <a:prstGeom prst="rect">
-            <a:avLst/>
-          </a:prstGeom>
-          <a:noFill/>
-          <a:ln/>
-        </p:spPr>
-        <p:txBody>
-          <a:bodyPr wrap="square" lIns="0" tIns="0" rIns="0" bIns="0" rtlCol="0" anchor="ctr"/>
-          <a:lstStyle/>
-          <a:p>
-            <a:pPr algn="ctr" indent="0" marL="0">
-              <a:buNone/>
-            </a:pPr>
-            <a:r>
-              <a:rPr lang="en-US" sz="2000" b="1" dirty="0">
-                <a:solidFill>
-                  <a:srgbClr val="555555"/>
-                </a:solidFill>
-              </a:rPr>
-              <a:t>7</a:t>
-            </a:r>
-            <a:endParaRPr lang="en-US" sz="2000" dirty="0"/>
-          </a:p>
-          <a:p>
-            <a:pPr algn="ctr" indent="0" marL="0">
-              <a:buNone/>
-            </a:pPr>
-            <a:r>
-              <a:rPr lang="en-US" sz="900" dirty="0">
-                <a:solidFill>
-                  <a:srgbClr val="666666"/>
-                </a:solidFill>
-              </a:rPr>
-              <a:t>TN</a:t>
-            </a:r>
-            <a:endParaRPr lang="en-US" sz="2000" dirty="0"/>
-          </a:p>
-        </p:txBody>
-      </p:sp>
-      <p:sp>
-        <p:nvSpPr>
-          <p:cNvPr id="31" name="Text 29"/>
-          <p:cNvSpPr/>
-          <p:nvPr/>
-        </p:nvSpPr>
-        <p:spPr>
-          <a:xfrm>
-            <a:off x="4754880" y="2542032"/>
-            <a:ext cx="2834640" cy="201168"/>
-          </a:xfrm>
-          <a:prstGeom prst="rect">
-            <a:avLst/>
-          </a:prstGeom>
-          <a:noFill/>
-          <a:ln/>
-        </p:spPr>
-        <p:txBody>
-          <a:bodyPr wrap="square" lIns="0" tIns="0" rIns="0" bIns="0" rtlCol="0" anchor="ctr"/>
-          <a:lstStyle/>
-          <a:p>
-            <a:pPr algn="ctr" indent="0" marL="0">
-              <a:buNone/>
-            </a:pPr>
-            <a:r>
-              <a:rPr lang="en-US" sz="1100" i="1" dirty="0">
-                <a:solidFill>
-                  <a:srgbClr val="555555"/>
-                </a:solidFill>
-              </a:rPr>
-              <a:t>Precision </a:t>
-            </a:r>
-            <a:pPr algn="ctr" indent="0" marL="0">
-              <a:buNone/>
-            </a:pPr>
-            <a:r>
-              <a:rPr lang="en-US" sz="1100" b="1" i="1" dirty="0">
-                <a:solidFill>
-                  <a:srgbClr val="1A1A1A"/>
-                </a:solidFill>
-              </a:rPr>
-              <a:t>1.00</a:t>
-            </a:r>
-            <a:pPr algn="ctr" indent="0" marL="0">
-              <a:buNone/>
-            </a:pPr>
-            <a:r>
-              <a:rPr lang="en-US" sz="1100" i="1" dirty="0">
-                <a:solidFill>
-                  <a:srgbClr val="555555"/>
-                </a:solidFill>
-              </a:rPr>
-              <a:t>   ·   Recall </a:t>
-            </a:r>
-            <a:pPr algn="ctr" indent="0" marL="0">
-              <a:buNone/>
-            </a:pPr>
-            <a:r>
-              <a:rPr lang="en-US" sz="1100" b="1" i="1" dirty="0">
-                <a:solidFill>
-                  <a:srgbClr val="1A1A1A"/>
-                </a:solidFill>
-              </a:rPr>
-              <a:t>0.36</a:t>
-            </a:r>
-            <a:endParaRPr lang="en-US" sz="1100" dirty="0"/>
-          </a:p>
-        </p:txBody>
-      </p:sp>
-      <p:sp>
-        <p:nvSpPr>
-          <p:cNvPr id="32" name="Text 30"/>
-          <p:cNvSpPr/>
-          <p:nvPr/>
-        </p:nvSpPr>
-        <p:spPr>
-          <a:xfrm>
-            <a:off x="640080" y="2926080"/>
-            <a:ext cx="2834640" cy="201168"/>
-          </a:xfrm>
-          <a:prstGeom prst="rect">
-            <a:avLst/>
-          </a:prstGeom>
-          <a:noFill/>
-          <a:ln/>
-        </p:spPr>
-        <p:txBody>
-          <a:bodyPr wrap="square" lIns="0" tIns="0" rIns="0" bIns="0" rtlCol="0" anchor="b"/>
-          <a:lstStyle/>
-          <a:p>
-            <a:pPr algn="ctr" indent="0" marL="0">
-              <a:buNone/>
-            </a:pPr>
-            <a:r>
-              <a:rPr lang="en-US" sz="1400" b="1" dirty="0">
+              <a:t>- inter-rater Cohen's κ = 1.00 (Ordering, Manual-Refactor), 0.86–1.00 (Rework), 0.72–0.86 (Hygiene).</a:t>
+            </a:r>
+            <a:endParaRPr lang="en-US" sz="1500" dirty="0"/>
+          </a:p>
+          <a:p>
+            <a:pPr marL="342900" indent="-342900">
+              <a:spcAft>
+                <a:spcPts val="1000"/>
+              </a:spcAft>
+              <a:buSzPct val="100000"/>
+              <a:buChar char="•"/>
+            </a:pPr>
+            <a:r>
+              <a:rPr lang="en-US" sz="1500" dirty="0">
                 <a:solidFill>
                   <a:srgbClr val="000000"/>
                 </a:solidFill>
               </a:rPr>
-              <a:t>Rework</a:t>
-            </a:r>
-            <a:endParaRPr lang="en-US" sz="1400" dirty="0"/>
-          </a:p>
-        </p:txBody>
-      </p:sp>
-      <p:sp>
-        <p:nvSpPr>
-          <p:cNvPr id="33" name="Text 31"/>
-          <p:cNvSpPr/>
-          <p:nvPr/>
-        </p:nvSpPr>
-        <p:spPr>
-          <a:xfrm>
-            <a:off x="1188720" y="3145536"/>
-            <a:ext cx="1143000" cy="201168"/>
-          </a:xfrm>
-          <a:prstGeom prst="rect">
-            <a:avLst/>
-          </a:prstGeom>
-          <a:noFill/>
-          <a:ln/>
-        </p:spPr>
-        <p:txBody>
-          <a:bodyPr wrap="square" lIns="0" tIns="0" rIns="0" bIns="0" rtlCol="0" anchor="ctr"/>
-          <a:lstStyle/>
-          <a:p>
-            <a:pPr algn="ctr" indent="0" marL="0">
-              <a:buNone/>
-            </a:pPr>
-            <a:r>
-              <a:rPr lang="en-US" sz="900" i="1" dirty="0">
-                <a:solidFill>
-                  <a:srgbClr val="555555"/>
-                </a:solidFill>
-              </a:rPr>
-              <a:t>Predicted +</a:t>
-            </a:r>
-            <a:endParaRPr lang="en-US" sz="900" dirty="0"/>
-          </a:p>
-        </p:txBody>
-      </p:sp>
-      <p:sp>
-        <p:nvSpPr>
-          <p:cNvPr id="34" name="Text 32"/>
-          <p:cNvSpPr/>
-          <p:nvPr/>
-        </p:nvSpPr>
-        <p:spPr>
-          <a:xfrm>
-            <a:off x="2331720" y="3145536"/>
-            <a:ext cx="1143000" cy="201168"/>
-          </a:xfrm>
-          <a:prstGeom prst="rect">
-            <a:avLst/>
-          </a:prstGeom>
-          <a:noFill/>
-          <a:ln/>
-        </p:spPr>
-        <p:txBody>
-          <a:bodyPr wrap="square" lIns="0" tIns="0" rIns="0" bIns="0" rtlCol="0" anchor="ctr"/>
-          <a:lstStyle/>
-          <a:p>
-            <a:pPr algn="ctr" indent="0" marL="0">
-              <a:buNone/>
-            </a:pPr>
-            <a:r>
-              <a:rPr lang="en-US" sz="900" i="1" dirty="0">
-                <a:solidFill>
-                  <a:srgbClr val="555555"/>
-                </a:solidFill>
-              </a:rPr>
-              <a:t>Predicted −</a:t>
-            </a:r>
-            <a:endParaRPr lang="en-US" sz="900" dirty="0"/>
-          </a:p>
-        </p:txBody>
-      </p:sp>
-      <p:sp>
-        <p:nvSpPr>
-          <p:cNvPr id="35" name="Text 33"/>
-          <p:cNvSpPr/>
-          <p:nvPr/>
-        </p:nvSpPr>
-        <p:spPr>
-          <a:xfrm>
-            <a:off x="640080" y="3364992"/>
-            <a:ext cx="548640" cy="548640"/>
-          </a:xfrm>
-          <a:prstGeom prst="rect">
-            <a:avLst/>
-          </a:prstGeom>
-          <a:noFill/>
-          <a:ln/>
-        </p:spPr>
-        <p:txBody>
-          <a:bodyPr wrap="square" lIns="508" tIns="508" rIns="508" bIns="508" rtlCol="0" anchor="ctr"/>
-          <a:lstStyle/>
-          <a:p>
-            <a:pPr algn="r" indent="0" marL="0">
-              <a:buNone/>
-            </a:pPr>
-            <a:r>
-              <a:rPr lang="en-US" sz="900" i="1" dirty="0">
-                <a:solidFill>
-                  <a:srgbClr val="555555"/>
-                </a:solidFill>
-              </a:rPr>
-              <a:t>Actual +</a:t>
-            </a:r>
-            <a:endParaRPr lang="en-US" sz="900" dirty="0"/>
-          </a:p>
-        </p:txBody>
-      </p:sp>
-      <p:sp>
-        <p:nvSpPr>
-          <p:cNvPr id="36" name="Text 34"/>
-          <p:cNvSpPr/>
-          <p:nvPr/>
-        </p:nvSpPr>
-        <p:spPr>
-          <a:xfrm>
-            <a:off x="640080" y="3913632"/>
-            <a:ext cx="548640" cy="548640"/>
-          </a:xfrm>
-          <a:prstGeom prst="rect">
-            <a:avLst/>
-          </a:prstGeom>
-          <a:noFill/>
-          <a:ln/>
-        </p:spPr>
-        <p:txBody>
-          <a:bodyPr wrap="square" lIns="508" tIns="508" rIns="508" bIns="508" rtlCol="0" anchor="ctr"/>
-          <a:lstStyle/>
-          <a:p>
-            <a:pPr algn="r" indent="0" marL="0">
-              <a:buNone/>
-            </a:pPr>
-            <a:r>
-              <a:rPr lang="en-US" sz="900" i="1" dirty="0">
-                <a:solidFill>
-                  <a:srgbClr val="555555"/>
-                </a:solidFill>
-              </a:rPr>
-              <a:t>Actual −</a:t>
-            </a:r>
-            <a:endParaRPr lang="en-US" sz="900" dirty="0"/>
-          </a:p>
-        </p:txBody>
-      </p:sp>
-      <p:sp>
-        <p:nvSpPr>
-          <p:cNvPr id="37" name="Shape 35"/>
-          <p:cNvSpPr/>
-          <p:nvPr/>
-        </p:nvSpPr>
-        <p:spPr>
-          <a:xfrm>
-            <a:off x="1188720" y="3438144"/>
-            <a:ext cx="1143000" cy="548640"/>
-          </a:xfrm>
-          <a:prstGeom prst="rect">
-            <a:avLst/>
-          </a:prstGeom>
-          <a:solidFill>
-            <a:srgbClr val="D4F0DC"/>
-          </a:solidFill>
-          <a:ln w="6350">
-            <a:solidFill>
-              <a:srgbClr val="999999"/>
-            </a:solidFill>
-            <a:prstDash val="solid"/>
-          </a:ln>
-        </p:spPr>
-      </p:sp>
-      <p:sp>
-        <p:nvSpPr>
-          <p:cNvPr id="38" name="Text 36"/>
-          <p:cNvSpPr/>
-          <p:nvPr/>
-        </p:nvSpPr>
-        <p:spPr>
-          <a:xfrm>
-            <a:off x="1188720" y="3438144"/>
-            <a:ext cx="1143000" cy="548640"/>
-          </a:xfrm>
-          <a:prstGeom prst="rect">
-            <a:avLst/>
-          </a:prstGeom>
-          <a:noFill/>
-          <a:ln/>
-        </p:spPr>
-        <p:txBody>
-          <a:bodyPr wrap="square" lIns="0" tIns="0" rIns="0" bIns="0" rtlCol="0" anchor="ctr"/>
-          <a:lstStyle/>
-          <a:p>
-            <a:pPr algn="ctr" indent="0" marL="0">
-              <a:buNone/>
-            </a:pPr>
-            <a:r>
-              <a:rPr lang="en-US" sz="2000" b="1" dirty="0">
-                <a:solidFill>
-                  <a:srgbClr val="0A7D2A"/>
-                </a:solidFill>
-              </a:rPr>
-              <a:t>9</a:t>
-            </a:r>
-            <a:endParaRPr lang="en-US" sz="2000" dirty="0"/>
-          </a:p>
-          <a:p>
-            <a:pPr algn="ctr" indent="0" marL="0">
-              <a:buNone/>
-            </a:pPr>
-            <a:r>
-              <a:rPr lang="en-US" sz="900" dirty="0">
-                <a:solidFill>
-                  <a:srgbClr val="666666"/>
-                </a:solidFill>
-              </a:rPr>
-              <a:t>TP</a:t>
-            </a:r>
-            <a:endParaRPr lang="en-US" sz="2000" dirty="0"/>
-          </a:p>
-        </p:txBody>
-      </p:sp>
-      <p:sp>
-        <p:nvSpPr>
-          <p:cNvPr id="39" name="Shape 37"/>
-          <p:cNvSpPr/>
-          <p:nvPr/>
-        </p:nvSpPr>
-        <p:spPr>
-          <a:xfrm>
-            <a:off x="2331720" y="3438144"/>
-            <a:ext cx="1143000" cy="548640"/>
-          </a:xfrm>
-          <a:prstGeom prst="rect">
-            <a:avLst/>
-          </a:prstGeom>
-          <a:solidFill>
-            <a:srgbClr val="F5D5CE"/>
-          </a:solidFill>
-          <a:ln w="6350">
-            <a:solidFill>
-              <a:srgbClr val="999999"/>
-            </a:solidFill>
-            <a:prstDash val="solid"/>
-          </a:ln>
-        </p:spPr>
-      </p:sp>
-      <p:sp>
-        <p:nvSpPr>
-          <p:cNvPr id="40" name="Text 38"/>
-          <p:cNvSpPr/>
-          <p:nvPr/>
-        </p:nvSpPr>
-        <p:spPr>
-          <a:xfrm>
-            <a:off x="2331720" y="3438144"/>
-            <a:ext cx="1143000" cy="548640"/>
-          </a:xfrm>
-          <a:prstGeom prst="rect">
-            <a:avLst/>
-          </a:prstGeom>
-          <a:noFill/>
-          <a:ln/>
-        </p:spPr>
-        <p:txBody>
-          <a:bodyPr wrap="square" lIns="0" tIns="0" rIns="0" bIns="0" rtlCol="0" anchor="ctr"/>
-          <a:lstStyle/>
-          <a:p>
-            <a:pPr algn="ctr" indent="0" marL="0">
-              <a:buNone/>
-            </a:pPr>
-            <a:r>
-              <a:rPr lang="en-US" sz="2000" b="1" dirty="0">
-                <a:solidFill>
-                  <a:srgbClr val="B33A1E"/>
-                </a:solidFill>
-              </a:rPr>
-              <a:t>0</a:t>
-            </a:r>
-            <a:endParaRPr lang="en-US" sz="2000" dirty="0"/>
-          </a:p>
-          <a:p>
-            <a:pPr algn="ctr" indent="0" marL="0">
-              <a:buNone/>
-            </a:pPr>
-            <a:r>
-              <a:rPr lang="en-US" sz="900" dirty="0">
-                <a:solidFill>
-                  <a:srgbClr val="666666"/>
-                </a:solidFill>
-              </a:rPr>
-              <a:t>FN</a:t>
-            </a:r>
-            <a:endParaRPr lang="en-US" sz="2000" dirty="0"/>
-          </a:p>
-        </p:txBody>
-      </p:sp>
-      <p:sp>
-        <p:nvSpPr>
-          <p:cNvPr id="41" name="Shape 39"/>
-          <p:cNvSpPr/>
-          <p:nvPr/>
-        </p:nvSpPr>
-        <p:spPr>
-          <a:xfrm>
-            <a:off x="1188720" y="3986784"/>
-            <a:ext cx="1143000" cy="548640"/>
-          </a:xfrm>
-          <a:prstGeom prst="rect">
-            <a:avLst/>
-          </a:prstGeom>
-          <a:solidFill>
-            <a:srgbClr val="F2F2F2"/>
-          </a:solidFill>
-          <a:ln w="6350">
-            <a:solidFill>
-              <a:srgbClr val="999999"/>
-            </a:solidFill>
-            <a:prstDash val="solid"/>
-          </a:ln>
-        </p:spPr>
-      </p:sp>
-      <p:sp>
-        <p:nvSpPr>
-          <p:cNvPr id="42" name="Text 40"/>
-          <p:cNvSpPr/>
-          <p:nvPr/>
-        </p:nvSpPr>
-        <p:spPr>
-          <a:xfrm>
-            <a:off x="1188720" y="3986784"/>
-            <a:ext cx="1143000" cy="548640"/>
-          </a:xfrm>
-          <a:prstGeom prst="rect">
-            <a:avLst/>
-          </a:prstGeom>
-          <a:noFill/>
-          <a:ln/>
-        </p:spPr>
-        <p:txBody>
-          <a:bodyPr wrap="square" lIns="0" tIns="0" rIns="0" bIns="0" rtlCol="0" anchor="ctr"/>
-          <a:lstStyle/>
-          <a:p>
-            <a:pPr algn="ctr" indent="0" marL="0">
-              <a:buNone/>
-            </a:pPr>
-            <a:r>
-              <a:rPr lang="en-US" sz="2000" b="1" dirty="0">
+              <a:t>Disagreements predominantly surrounding hygiene + rework labels </a:t>
+            </a:r>
+            <a:pPr indent="0" marL="0">
+              <a:spcAft>
+                <a:spcPts val="1000"/>
+              </a:spcAft>
+              <a:buNone/>
+            </a:pPr>
+            <a:r>
+              <a:rPr lang="en-US" sz="1500" dirty="0">
                 <a:solidFill>
                   <a:srgbClr val="888888"/>
                 </a:solidFill>
               </a:rPr>
-              <a:t>0</a:t>
-            </a:r>
-            <a:endParaRPr lang="en-US" sz="2000" dirty="0"/>
-          </a:p>
-          <a:p>
-            <a:pPr algn="ctr" indent="0" marL="0">
-              <a:buNone/>
-            </a:pPr>
-            <a:r>
-              <a:rPr lang="en-US" sz="900" dirty="0">
-                <a:solidFill>
-                  <a:srgbClr val="666666"/>
-                </a:solidFill>
-              </a:rPr>
-              <a:t>FP</a:t>
-            </a:r>
-            <a:endParaRPr lang="en-US" sz="2000" dirty="0"/>
-          </a:p>
-        </p:txBody>
-      </p:sp>
-      <p:sp>
-        <p:nvSpPr>
-          <p:cNvPr id="43" name="Shape 41"/>
-          <p:cNvSpPr/>
-          <p:nvPr/>
-        </p:nvSpPr>
-        <p:spPr>
-          <a:xfrm>
-            <a:off x="2331720" y="3986784"/>
-            <a:ext cx="1143000" cy="548640"/>
-          </a:xfrm>
-          <a:prstGeom prst="rect">
-            <a:avLst/>
-          </a:prstGeom>
-          <a:solidFill>
-            <a:srgbClr val="EAEAEA"/>
-          </a:solidFill>
-          <a:ln w="6350">
-            <a:solidFill>
-              <a:srgbClr val="999999"/>
-            </a:solidFill>
-            <a:prstDash val="solid"/>
-          </a:ln>
-        </p:spPr>
-      </p:sp>
-      <p:sp>
-        <p:nvSpPr>
-          <p:cNvPr id="44" name="Text 42"/>
-          <p:cNvSpPr/>
-          <p:nvPr/>
-        </p:nvSpPr>
-        <p:spPr>
-          <a:xfrm>
-            <a:off x="2331720" y="3986784"/>
-            <a:ext cx="1143000" cy="548640"/>
-          </a:xfrm>
-          <a:prstGeom prst="rect">
-            <a:avLst/>
-          </a:prstGeom>
-          <a:noFill/>
-          <a:ln/>
-        </p:spPr>
-        <p:txBody>
-          <a:bodyPr wrap="square" lIns="0" tIns="0" rIns="0" bIns="0" rtlCol="0" anchor="ctr"/>
-          <a:lstStyle/>
-          <a:p>
-            <a:pPr algn="ctr" indent="0" marL="0">
-              <a:buNone/>
-            </a:pPr>
-            <a:r>
-              <a:rPr lang="en-US" sz="2000" b="1" dirty="0">
-                <a:solidFill>
-                  <a:srgbClr val="555555"/>
-                </a:solidFill>
-              </a:rPr>
-              <a:t>36</a:t>
-            </a:r>
-            <a:endParaRPr lang="en-US" sz="2000" dirty="0"/>
-          </a:p>
-          <a:p>
-            <a:pPr algn="ctr" indent="0" marL="0">
-              <a:buNone/>
-            </a:pPr>
-            <a:r>
-              <a:rPr lang="en-US" sz="900" dirty="0">
-                <a:solidFill>
-                  <a:srgbClr val="666666"/>
-                </a:solidFill>
-              </a:rPr>
-              <a:t>TN</a:t>
-            </a:r>
-            <a:endParaRPr lang="en-US" sz="2000" dirty="0"/>
-          </a:p>
-        </p:txBody>
-      </p:sp>
-      <p:sp>
-        <p:nvSpPr>
-          <p:cNvPr id="45" name="Text 43"/>
-          <p:cNvSpPr/>
-          <p:nvPr/>
-        </p:nvSpPr>
-        <p:spPr>
-          <a:xfrm>
-            <a:off x="640080" y="4553712"/>
-            <a:ext cx="2834640" cy="201168"/>
-          </a:xfrm>
-          <a:prstGeom prst="rect">
-            <a:avLst/>
-          </a:prstGeom>
-          <a:noFill/>
-          <a:ln/>
-        </p:spPr>
-        <p:txBody>
-          <a:bodyPr wrap="square" lIns="0" tIns="0" rIns="0" bIns="0" rtlCol="0" anchor="ctr"/>
-          <a:lstStyle/>
-          <a:p>
-            <a:pPr algn="ctr" indent="0" marL="0">
-              <a:buNone/>
-            </a:pPr>
-            <a:r>
-              <a:rPr lang="en-US" sz="1100" i="1" dirty="0">
-                <a:solidFill>
-                  <a:srgbClr val="555555"/>
-                </a:solidFill>
-              </a:rPr>
-              <a:t>Precision </a:t>
-            </a:r>
-            <a:pPr algn="ctr" indent="0" marL="0">
-              <a:buNone/>
-            </a:pPr>
-            <a:r>
-              <a:rPr lang="en-US" sz="1100" b="1" i="1" dirty="0">
-                <a:solidFill>
-                  <a:srgbClr val="1A1A1A"/>
-                </a:solidFill>
-              </a:rPr>
-              <a:t>1.00</a:t>
-            </a:r>
-            <a:pPr algn="ctr" indent="0" marL="0">
-              <a:buNone/>
-            </a:pPr>
-            <a:r>
-              <a:rPr lang="en-US" sz="1100" i="1" dirty="0">
-                <a:solidFill>
-                  <a:srgbClr val="555555"/>
-                </a:solidFill>
-              </a:rPr>
-              <a:t>   ·   Recall </a:t>
-            </a:r>
-            <a:pPr algn="ctr" indent="0" marL="0">
-              <a:buNone/>
-            </a:pPr>
-            <a:r>
-              <a:rPr lang="en-US" sz="1100" b="1" i="1" dirty="0">
-                <a:solidFill>
-                  <a:srgbClr val="1A1A1A"/>
-                </a:solidFill>
-              </a:rPr>
-              <a:t>1.00</a:t>
-            </a:r>
-            <a:endParaRPr lang="en-US" sz="1100" dirty="0"/>
-          </a:p>
-        </p:txBody>
-      </p:sp>
-      <p:sp>
-        <p:nvSpPr>
-          <p:cNvPr id="46" name="Text 44"/>
-          <p:cNvSpPr/>
-          <p:nvPr/>
-        </p:nvSpPr>
-        <p:spPr>
-          <a:xfrm>
-            <a:off x="4754880" y="2926080"/>
-            <a:ext cx="2834640" cy="201168"/>
-          </a:xfrm>
-          <a:prstGeom prst="rect">
-            <a:avLst/>
-          </a:prstGeom>
-          <a:noFill/>
-          <a:ln/>
-        </p:spPr>
-        <p:txBody>
-          <a:bodyPr wrap="square" lIns="0" tIns="0" rIns="0" bIns="0" rtlCol="0" anchor="b"/>
-          <a:lstStyle/>
-          <a:p>
-            <a:pPr algn="ctr" indent="0" marL="0">
-              <a:buNone/>
-            </a:pPr>
-            <a:r>
-              <a:rPr lang="en-US" sz="1400" b="1" dirty="0">
+              <a:t>- differences in opinion of what constitutes a step.</a:t>
+            </a:r>
+            <a:endParaRPr lang="en-US" sz="1500" dirty="0"/>
+          </a:p>
+          <a:p>
+            <a:pPr marL="342900" indent="-342900">
+              <a:spcAft>
+                <a:spcPts val="1000"/>
+              </a:spcAft>
+              <a:buSzPct val="100000"/>
+              <a:buChar char="•"/>
+            </a:pPr>
+            <a:r>
+              <a:rPr lang="en-US" sz="1500" dirty="0">
                 <a:solidFill>
                   <a:srgbClr val="000000"/>
                 </a:solidFill>
               </a:rPr>
-              <a:t>Hygiene</a:t>
-            </a:r>
-            <a:endParaRPr lang="en-US" sz="1400" dirty="0"/>
-          </a:p>
-        </p:txBody>
-      </p:sp>
-      <p:sp>
-        <p:nvSpPr>
-          <p:cNvPr id="47" name="Text 45"/>
-          <p:cNvSpPr/>
-          <p:nvPr/>
-        </p:nvSpPr>
-        <p:spPr>
-          <a:xfrm>
-            <a:off x="5303520" y="3145536"/>
-            <a:ext cx="1143000" cy="201168"/>
-          </a:xfrm>
-          <a:prstGeom prst="rect">
-            <a:avLst/>
-          </a:prstGeom>
-          <a:noFill/>
-          <a:ln/>
-        </p:spPr>
-        <p:txBody>
-          <a:bodyPr wrap="square" lIns="0" tIns="0" rIns="0" bIns="0" rtlCol="0" anchor="ctr"/>
-          <a:lstStyle/>
-          <a:p>
-            <a:pPr algn="ctr" indent="0" marL="0">
-              <a:buNone/>
-            </a:pPr>
-            <a:r>
-              <a:rPr lang="en-US" sz="900" i="1" dirty="0">
-                <a:solidFill>
-                  <a:srgbClr val="555555"/>
-                </a:solidFill>
-              </a:rPr>
-              <a:t>Predicted +</a:t>
-            </a:r>
-            <a:endParaRPr lang="en-US" sz="900" dirty="0"/>
-          </a:p>
-        </p:txBody>
-      </p:sp>
-      <p:sp>
-        <p:nvSpPr>
-          <p:cNvPr id="48" name="Text 46"/>
-          <p:cNvSpPr/>
-          <p:nvPr/>
-        </p:nvSpPr>
-        <p:spPr>
-          <a:xfrm>
-            <a:off x="6446520" y="3145536"/>
-            <a:ext cx="1143000" cy="201168"/>
-          </a:xfrm>
-          <a:prstGeom prst="rect">
-            <a:avLst/>
-          </a:prstGeom>
-          <a:noFill/>
-          <a:ln/>
-        </p:spPr>
-        <p:txBody>
-          <a:bodyPr wrap="square" lIns="0" tIns="0" rIns="0" bIns="0" rtlCol="0" anchor="ctr"/>
-          <a:lstStyle/>
-          <a:p>
-            <a:pPr algn="ctr" indent="0" marL="0">
-              <a:buNone/>
-            </a:pPr>
-            <a:r>
-              <a:rPr lang="en-US" sz="900" i="1" dirty="0">
-                <a:solidFill>
-                  <a:srgbClr val="555555"/>
-                </a:solidFill>
-              </a:rPr>
-              <a:t>Predicted −</a:t>
-            </a:r>
-            <a:endParaRPr lang="en-US" sz="900" dirty="0"/>
-          </a:p>
-        </p:txBody>
-      </p:sp>
-      <p:sp>
-        <p:nvSpPr>
-          <p:cNvPr id="49" name="Text 47"/>
-          <p:cNvSpPr/>
-          <p:nvPr/>
-        </p:nvSpPr>
-        <p:spPr>
-          <a:xfrm>
-            <a:off x="4754880" y="3364992"/>
-            <a:ext cx="548640" cy="548640"/>
-          </a:xfrm>
-          <a:prstGeom prst="rect">
-            <a:avLst/>
-          </a:prstGeom>
-          <a:noFill/>
-          <a:ln/>
-        </p:spPr>
-        <p:txBody>
-          <a:bodyPr wrap="square" lIns="508" tIns="508" rIns="508" bIns="508" rtlCol="0" anchor="ctr"/>
-          <a:lstStyle/>
-          <a:p>
-            <a:pPr algn="r" indent="0" marL="0">
-              <a:buNone/>
-            </a:pPr>
-            <a:r>
-              <a:rPr lang="en-US" sz="900" i="1" dirty="0">
-                <a:solidFill>
-                  <a:srgbClr val="555555"/>
-                </a:solidFill>
-              </a:rPr>
-              <a:t>Actual +</a:t>
-            </a:r>
-            <a:endParaRPr lang="en-US" sz="900" dirty="0"/>
-          </a:p>
-        </p:txBody>
-      </p:sp>
-      <p:sp>
-        <p:nvSpPr>
-          <p:cNvPr id="50" name="Text 48"/>
-          <p:cNvSpPr/>
-          <p:nvPr/>
-        </p:nvSpPr>
-        <p:spPr>
-          <a:xfrm>
-            <a:off x="4754880" y="3913632"/>
-            <a:ext cx="548640" cy="548640"/>
-          </a:xfrm>
-          <a:prstGeom prst="rect">
-            <a:avLst/>
-          </a:prstGeom>
-          <a:noFill/>
-          <a:ln/>
-        </p:spPr>
-        <p:txBody>
-          <a:bodyPr wrap="square" lIns="508" tIns="508" rIns="508" bIns="508" rtlCol="0" anchor="ctr"/>
-          <a:lstStyle/>
-          <a:p>
-            <a:pPr algn="r" indent="0" marL="0">
-              <a:buNone/>
-            </a:pPr>
-            <a:r>
-              <a:rPr lang="en-US" sz="900" i="1" dirty="0">
-                <a:solidFill>
-                  <a:srgbClr val="555555"/>
-                </a:solidFill>
-              </a:rPr>
-              <a:t>Actual −</a:t>
-            </a:r>
-            <a:endParaRPr lang="en-US" sz="900" dirty="0"/>
-          </a:p>
-        </p:txBody>
-      </p:sp>
-      <p:sp>
-        <p:nvSpPr>
-          <p:cNvPr id="51" name="Shape 49"/>
-          <p:cNvSpPr/>
-          <p:nvPr/>
-        </p:nvSpPr>
-        <p:spPr>
-          <a:xfrm>
-            <a:off x="5303520" y="3438144"/>
-            <a:ext cx="1143000" cy="548640"/>
-          </a:xfrm>
-          <a:prstGeom prst="rect">
-            <a:avLst/>
-          </a:prstGeom>
-          <a:solidFill>
-            <a:srgbClr val="D4F0DC"/>
-          </a:solidFill>
-          <a:ln w="6350">
-            <a:solidFill>
-              <a:srgbClr val="999999"/>
-            </a:solidFill>
-            <a:prstDash val="solid"/>
-          </a:ln>
-        </p:spPr>
-      </p:sp>
-      <p:sp>
-        <p:nvSpPr>
-          <p:cNvPr id="52" name="Text 50"/>
-          <p:cNvSpPr/>
-          <p:nvPr/>
-        </p:nvSpPr>
-        <p:spPr>
-          <a:xfrm>
-            <a:off x="5303520" y="3438144"/>
-            <a:ext cx="1143000" cy="548640"/>
-          </a:xfrm>
-          <a:prstGeom prst="rect">
-            <a:avLst/>
-          </a:prstGeom>
-          <a:noFill/>
-          <a:ln/>
-        </p:spPr>
-        <p:txBody>
-          <a:bodyPr wrap="square" lIns="0" tIns="0" rIns="0" bIns="0" rtlCol="0" anchor="ctr"/>
-          <a:lstStyle/>
-          <a:p>
-            <a:pPr algn="ctr" indent="0" marL="0">
-              <a:buNone/>
-            </a:pPr>
-            <a:r>
-              <a:rPr lang="en-US" sz="2000" b="1" dirty="0">
-                <a:solidFill>
-                  <a:srgbClr val="0A7D2A"/>
-                </a:solidFill>
-              </a:rPr>
-              <a:t>8</a:t>
-            </a:r>
-            <a:endParaRPr lang="en-US" sz="2000" dirty="0"/>
-          </a:p>
-          <a:p>
-            <a:pPr algn="ctr" indent="0" marL="0">
-              <a:buNone/>
-            </a:pPr>
-            <a:r>
-              <a:rPr lang="en-US" sz="900" dirty="0">
-                <a:solidFill>
-                  <a:srgbClr val="666666"/>
-                </a:solidFill>
-              </a:rPr>
-              <a:t>TP</a:t>
-            </a:r>
-            <a:endParaRPr lang="en-US" sz="2000" dirty="0"/>
-          </a:p>
-        </p:txBody>
-      </p:sp>
-      <p:sp>
-        <p:nvSpPr>
-          <p:cNvPr id="53" name="Shape 51"/>
-          <p:cNvSpPr/>
-          <p:nvPr/>
-        </p:nvSpPr>
-        <p:spPr>
-          <a:xfrm>
-            <a:off x="6446520" y="3438144"/>
-            <a:ext cx="1143000" cy="548640"/>
-          </a:xfrm>
-          <a:prstGeom prst="rect">
-            <a:avLst/>
-          </a:prstGeom>
-          <a:solidFill>
-            <a:srgbClr val="F5D5CE"/>
-          </a:solidFill>
-          <a:ln w="6350">
-            <a:solidFill>
-              <a:srgbClr val="999999"/>
-            </a:solidFill>
-            <a:prstDash val="solid"/>
-          </a:ln>
-        </p:spPr>
-      </p:sp>
-      <p:sp>
-        <p:nvSpPr>
-          <p:cNvPr id="54" name="Text 52"/>
-          <p:cNvSpPr/>
-          <p:nvPr/>
-        </p:nvSpPr>
-        <p:spPr>
-          <a:xfrm>
-            <a:off x="6446520" y="3438144"/>
-            <a:ext cx="1143000" cy="548640"/>
-          </a:xfrm>
-          <a:prstGeom prst="rect">
-            <a:avLst/>
-          </a:prstGeom>
-          <a:noFill/>
-          <a:ln/>
-        </p:spPr>
-        <p:txBody>
-          <a:bodyPr wrap="square" lIns="0" tIns="0" rIns="0" bIns="0" rtlCol="0" anchor="ctr"/>
-          <a:lstStyle/>
-          <a:p>
-            <a:pPr algn="ctr" indent="0" marL="0">
-              <a:buNone/>
-            </a:pPr>
-            <a:r>
-              <a:rPr lang="en-US" sz="2000" b="1" dirty="0">
-                <a:solidFill>
-                  <a:srgbClr val="B33A1E"/>
-                </a:solidFill>
-              </a:rPr>
-              <a:t>0</a:t>
-            </a:r>
-            <a:endParaRPr lang="en-US" sz="2000" dirty="0"/>
-          </a:p>
-          <a:p>
-            <a:pPr algn="ctr" indent="0" marL="0">
-              <a:buNone/>
-            </a:pPr>
-            <a:r>
-              <a:rPr lang="en-US" sz="900" dirty="0">
-                <a:solidFill>
-                  <a:srgbClr val="666666"/>
-                </a:solidFill>
-              </a:rPr>
-              <a:t>FN</a:t>
-            </a:r>
-            <a:endParaRPr lang="en-US" sz="2000" dirty="0"/>
-          </a:p>
-        </p:txBody>
-      </p:sp>
-      <p:sp>
-        <p:nvSpPr>
-          <p:cNvPr id="55" name="Shape 53"/>
-          <p:cNvSpPr/>
-          <p:nvPr/>
-        </p:nvSpPr>
-        <p:spPr>
-          <a:xfrm>
-            <a:off x="5303520" y="3986784"/>
-            <a:ext cx="1143000" cy="548640"/>
-          </a:xfrm>
-          <a:prstGeom prst="rect">
-            <a:avLst/>
-          </a:prstGeom>
-          <a:solidFill>
-            <a:srgbClr val="F2F2F2"/>
-          </a:solidFill>
-          <a:ln w="6350">
-            <a:solidFill>
-              <a:srgbClr val="999999"/>
-            </a:solidFill>
-            <a:prstDash val="solid"/>
-          </a:ln>
-        </p:spPr>
-      </p:sp>
-      <p:sp>
-        <p:nvSpPr>
-          <p:cNvPr id="56" name="Text 54"/>
-          <p:cNvSpPr/>
-          <p:nvPr/>
-        </p:nvSpPr>
-        <p:spPr>
-          <a:xfrm>
-            <a:off x="5303520" y="3986784"/>
-            <a:ext cx="1143000" cy="548640"/>
-          </a:xfrm>
-          <a:prstGeom prst="rect">
-            <a:avLst/>
-          </a:prstGeom>
-          <a:noFill/>
-          <a:ln/>
-        </p:spPr>
-        <p:txBody>
-          <a:bodyPr wrap="square" lIns="0" tIns="0" rIns="0" bIns="0" rtlCol="0" anchor="ctr"/>
-          <a:lstStyle/>
-          <a:p>
-            <a:pPr algn="ctr" indent="0" marL="0">
-              <a:buNone/>
-            </a:pPr>
-            <a:r>
-              <a:rPr lang="en-US" sz="2000" b="1" dirty="0">
+              <a:t>Track all divergence points detected </a:t>
+            </a:r>
+            <a:pPr indent="0" marL="0">
+              <a:spcAft>
+                <a:spcPts val="1000"/>
+              </a:spcAft>
+              <a:buNone/>
+            </a:pPr>
+            <a:r>
+              <a:rPr lang="en-US" sz="1500" dirty="0">
                 <a:solidFill>
                   <a:srgbClr val="888888"/>
                 </a:solidFill>
               </a:rPr>
-              <a:t>0</a:t>
-            </a:r>
-            <a:endParaRPr lang="en-US" sz="2000" dirty="0"/>
-          </a:p>
-          <a:p>
-            <a:pPr algn="ctr" indent="0" marL="0">
-              <a:buNone/>
-            </a:pPr>
-            <a:r>
-              <a:rPr lang="en-US" sz="900" dirty="0">
-                <a:solidFill>
-                  <a:srgbClr val="666666"/>
-                </a:solidFill>
-              </a:rPr>
-              <a:t>FP</a:t>
-            </a:r>
-            <a:endParaRPr lang="en-US" sz="2000" dirty="0"/>
-          </a:p>
-        </p:txBody>
-      </p:sp>
-      <p:sp>
-        <p:nvSpPr>
-          <p:cNvPr id="57" name="Shape 55"/>
-          <p:cNvSpPr/>
-          <p:nvPr/>
-        </p:nvSpPr>
-        <p:spPr>
-          <a:xfrm>
-            <a:off x="6446520" y="3986784"/>
-            <a:ext cx="1143000" cy="548640"/>
-          </a:xfrm>
-          <a:prstGeom prst="rect">
-            <a:avLst/>
-          </a:prstGeom>
-          <a:solidFill>
-            <a:srgbClr val="EAEAEA"/>
-          </a:solidFill>
-          <a:ln w="6350">
-            <a:solidFill>
-              <a:srgbClr val="999999"/>
-            </a:solidFill>
-            <a:prstDash val="solid"/>
-          </a:ln>
-        </p:spPr>
-      </p:sp>
-      <p:sp>
-        <p:nvSpPr>
-          <p:cNvPr id="58" name="Text 56"/>
-          <p:cNvSpPr/>
-          <p:nvPr/>
-        </p:nvSpPr>
-        <p:spPr>
-          <a:xfrm>
-            <a:off x="6446520" y="3986784"/>
-            <a:ext cx="1143000" cy="548640"/>
-          </a:xfrm>
-          <a:prstGeom prst="rect">
-            <a:avLst/>
-          </a:prstGeom>
-          <a:noFill/>
-          <a:ln/>
-        </p:spPr>
-        <p:txBody>
-          <a:bodyPr wrap="square" lIns="0" tIns="0" rIns="0" bIns="0" rtlCol="0" anchor="ctr"/>
-          <a:lstStyle/>
-          <a:p>
-            <a:pPr algn="ctr" indent="0" marL="0">
-              <a:buNone/>
-            </a:pPr>
-            <a:r>
-              <a:rPr lang="en-US" sz="2000" b="1" dirty="0">
-                <a:solidFill>
-                  <a:srgbClr val="555555"/>
-                </a:solidFill>
-              </a:rPr>
-              <a:t>37</a:t>
-            </a:r>
-            <a:endParaRPr lang="en-US" sz="2000" dirty="0"/>
-          </a:p>
-          <a:p>
-            <a:pPr algn="ctr" indent="0" marL="0">
-              <a:buNone/>
-            </a:pPr>
-            <a:r>
-              <a:rPr lang="en-US" sz="900" dirty="0">
-                <a:solidFill>
-                  <a:srgbClr val="666666"/>
-                </a:solidFill>
-              </a:rPr>
-              <a:t>TN</a:t>
-            </a:r>
-            <a:endParaRPr lang="en-US" sz="2000" dirty="0"/>
-          </a:p>
-        </p:txBody>
-      </p:sp>
-      <p:sp>
-        <p:nvSpPr>
-          <p:cNvPr id="59" name="Text 57"/>
-          <p:cNvSpPr/>
-          <p:nvPr/>
-        </p:nvSpPr>
-        <p:spPr>
-          <a:xfrm>
-            <a:off x="4754880" y="4553712"/>
-            <a:ext cx="2834640" cy="201168"/>
-          </a:xfrm>
-          <a:prstGeom prst="rect">
-            <a:avLst/>
-          </a:prstGeom>
-          <a:noFill/>
-          <a:ln/>
-        </p:spPr>
-        <p:txBody>
-          <a:bodyPr wrap="square" lIns="0" tIns="0" rIns="0" bIns="0" rtlCol="0" anchor="ctr"/>
-          <a:lstStyle/>
-          <a:p>
-            <a:pPr algn="ctr" indent="0" marL="0">
-              <a:buNone/>
-            </a:pPr>
-            <a:r>
-              <a:rPr lang="en-US" sz="1100" i="1" dirty="0">
-                <a:solidFill>
-                  <a:srgbClr val="555555"/>
-                </a:solidFill>
-              </a:rPr>
-              <a:t>Precision </a:t>
-            </a:r>
-            <a:pPr algn="ctr" indent="0" marL="0">
-              <a:buNone/>
-            </a:pPr>
-            <a:r>
-              <a:rPr lang="en-US" sz="1100" b="1" i="1" dirty="0">
-                <a:solidFill>
-                  <a:srgbClr val="1A1A1A"/>
-                </a:solidFill>
-              </a:rPr>
-              <a:t>1.00</a:t>
-            </a:r>
-            <a:pPr algn="ctr" indent="0" marL="0">
-              <a:buNone/>
-            </a:pPr>
-            <a:r>
-              <a:rPr lang="en-US" sz="1100" i="1" dirty="0">
-                <a:solidFill>
-                  <a:srgbClr val="555555"/>
-                </a:solidFill>
-              </a:rPr>
-              <a:t>   ·   Recall </a:t>
-            </a:r>
-            <a:pPr algn="ctr" indent="0" marL="0">
-              <a:buNone/>
-            </a:pPr>
-            <a:r>
-              <a:rPr lang="en-US" sz="1100" b="1" i="1" dirty="0">
-                <a:solidFill>
-                  <a:srgbClr val="1A1A1A"/>
-                </a:solidFill>
-              </a:rPr>
-              <a:t>1.00</a:t>
-            </a:r>
-            <a:endParaRPr lang="en-US" sz="1100" dirty="0"/>
-          </a:p>
-        </p:txBody>
-      </p:sp>
-      <p:sp>
-        <p:nvSpPr>
-          <p:cNvPr id="60" name="Text 58"/>
-          <p:cNvSpPr/>
-          <p:nvPr/>
-        </p:nvSpPr>
-        <p:spPr>
-          <a:xfrm>
-            <a:off x="365760" y="4846320"/>
-            <a:ext cx="8412480" cy="256032"/>
-          </a:xfrm>
-          <a:prstGeom prst="rect">
-            <a:avLst/>
-          </a:prstGeom>
-          <a:noFill/>
-          <a:ln/>
-        </p:spPr>
-        <p:txBody>
-          <a:bodyPr wrap="square" lIns="0" tIns="0" rIns="0" bIns="0" rtlCol="0" anchor="ctr"/>
-          <a:lstStyle/>
-          <a:p>
-            <a:pPr algn="ctr" indent="0" marL="0">
-              <a:buNone/>
-            </a:pPr>
-            <a:r>
-              <a:rPr lang="en-US" sz="900" i="1" dirty="0">
-                <a:solidFill>
-                  <a:srgbClr val="555555"/>
-                </a:solidFill>
-              </a:rPr>
-              <a:t>Ordering recall is the outlier: the reorder synthesiser's splitOnInvalid validator rejects any window containing a step it cannot safely.</a:t>
-            </a:r>
-            <a:endParaRPr lang="en-US" sz="900" dirty="0"/>
+              <a:t>- not only ones with a higher process score than the user.</a:t>
+            </a:r>
+            <a:endParaRPr lang="en-US" sz="1500" dirty="0"/>
+          </a:p>
+          <a:p>
+            <a:pPr marL="342900" indent="-342900">
+              <a:spcAft>
+                <a:spcPts val="1000"/>
+              </a:spcAft>
+              <a:buSzPct val="100000"/>
+              <a:buChar char="•"/>
+            </a:pPr>
+            <a:r>
+              <a:rPr lang="en-US" sz="1500" dirty="0">
+                <a:solidFill>
+                  <a:srgbClr val="000000"/>
+                </a:solidFill>
+              </a:rPr>
+              <a:t>Measure precision + recall </a:t>
+            </a:r>
+            <a:pPr indent="0" marL="0">
+              <a:spcAft>
+                <a:spcPts val="1000"/>
+              </a:spcAft>
+              <a:buNone/>
+            </a:pPr>
+            <a:r>
+              <a:rPr lang="en-US" sz="1500" dirty="0">
+                <a:solidFill>
+                  <a:srgbClr val="888888"/>
+                </a:solidFill>
+              </a:rPr>
+              <a:t>- precision guards against FPs that waste the developer's attention. Recall guards against FNs that miss real opportunities. F1 averages the two - so a high score can hide a detector that's annoying users (lots of FPs) or one that's quietly missing things (lots of FNs). Accuracy is dominated by true negatives.</a:t>
+            </a:r>
+            <a:endParaRPr lang="en-US" sz="1500" dirty="0"/>
           </a:p>
         </p:txBody>
       </p:sp>
@@ -8519,6 +6654,2335 @@
                   <a:srgbClr val="000000"/>
                 </a:solidFill>
               </a:rPr>
+              <a:t>Decision matrix per divergence kind</a:t>
+            </a:r>
+            <a:endParaRPr lang="en-US" sz="2800" dirty="0"/>
+          </a:p>
+        </p:txBody>
+      </p:sp>
+      <p:sp>
+        <p:nvSpPr>
+          <p:cNvPr id="3" name="Text 1"/>
+          <p:cNvSpPr/>
+          <p:nvPr/>
+        </p:nvSpPr>
+        <p:spPr>
+          <a:xfrm>
+            <a:off x="457200" y="658368"/>
+            <a:ext cx="8229600" cy="256032"/>
+          </a:xfrm>
+          <a:prstGeom prst="rect">
+            <a:avLst/>
+          </a:prstGeom>
+          <a:noFill/>
+          <a:ln/>
+        </p:spPr>
+        <p:txBody>
+          <a:bodyPr wrap="square" lIns="0" tIns="0" rIns="0" bIns="0" rtlCol="0" anchor="ctr"/>
+          <a:lstStyle/>
+          <a:p>
+            <a:pPr algn="ctr" indent="0" marL="0">
+              <a:buNone/>
+            </a:pPr>
+            <a:r>
+              <a:rPr lang="en-US" sz="1200" i="1" dirty="0">
+                <a:solidFill>
+                  <a:srgbClr val="555555"/>
+                </a:solidFill>
+              </a:rPr>
+              <a:t>Session-level (45 injection sessions).</a:t>
+            </a:r>
+            <a:endParaRPr lang="en-US" sz="1200" dirty="0"/>
+          </a:p>
+        </p:txBody>
+      </p:sp>
+      <p:sp>
+        <p:nvSpPr>
+          <p:cNvPr id="4" name="Text 2"/>
+          <p:cNvSpPr/>
+          <p:nvPr/>
+        </p:nvSpPr>
+        <p:spPr>
+          <a:xfrm>
+            <a:off x="640080" y="914400"/>
+            <a:ext cx="2834640" cy="201168"/>
+          </a:xfrm>
+          <a:prstGeom prst="rect">
+            <a:avLst/>
+          </a:prstGeom>
+          <a:noFill/>
+          <a:ln/>
+        </p:spPr>
+        <p:txBody>
+          <a:bodyPr wrap="square" lIns="0" tIns="0" rIns="0" bIns="0" rtlCol="0" anchor="b"/>
+          <a:lstStyle/>
+          <a:p>
+            <a:pPr algn="ctr" indent="0" marL="0">
+              <a:buNone/>
+            </a:pPr>
+            <a:r>
+              <a:rPr lang="en-US" sz="1400" b="1" dirty="0">
+                <a:solidFill>
+                  <a:srgbClr val="000000"/>
+                </a:solidFill>
+              </a:rPr>
+              <a:t>Manual-Refactor</a:t>
+            </a:r>
+            <a:endParaRPr lang="en-US" sz="1400" dirty="0"/>
+          </a:p>
+        </p:txBody>
+      </p:sp>
+      <p:sp>
+        <p:nvSpPr>
+          <p:cNvPr id="5" name="Text 3"/>
+          <p:cNvSpPr/>
+          <p:nvPr/>
+        </p:nvSpPr>
+        <p:spPr>
+          <a:xfrm>
+            <a:off x="1188720" y="1133856"/>
+            <a:ext cx="1143000" cy="201168"/>
+          </a:xfrm>
+          <a:prstGeom prst="rect">
+            <a:avLst/>
+          </a:prstGeom>
+          <a:noFill/>
+          <a:ln/>
+        </p:spPr>
+        <p:txBody>
+          <a:bodyPr wrap="square" lIns="0" tIns="0" rIns="0" bIns="0" rtlCol="0" anchor="ctr"/>
+          <a:lstStyle/>
+          <a:p>
+            <a:pPr algn="ctr" indent="0" marL="0">
+              <a:buNone/>
+            </a:pPr>
+            <a:r>
+              <a:rPr lang="en-US" sz="900" i="1" dirty="0">
+                <a:solidFill>
+                  <a:srgbClr val="555555"/>
+                </a:solidFill>
+              </a:rPr>
+              <a:t>Predicted +</a:t>
+            </a:r>
+            <a:endParaRPr lang="en-US" sz="900" dirty="0"/>
+          </a:p>
+        </p:txBody>
+      </p:sp>
+      <p:sp>
+        <p:nvSpPr>
+          <p:cNvPr id="6" name="Text 4"/>
+          <p:cNvSpPr/>
+          <p:nvPr/>
+        </p:nvSpPr>
+        <p:spPr>
+          <a:xfrm>
+            <a:off x="2331720" y="1133856"/>
+            <a:ext cx="1143000" cy="201168"/>
+          </a:xfrm>
+          <a:prstGeom prst="rect">
+            <a:avLst/>
+          </a:prstGeom>
+          <a:noFill/>
+          <a:ln/>
+        </p:spPr>
+        <p:txBody>
+          <a:bodyPr wrap="square" lIns="0" tIns="0" rIns="0" bIns="0" rtlCol="0" anchor="ctr"/>
+          <a:lstStyle/>
+          <a:p>
+            <a:pPr algn="ctr" indent="0" marL="0">
+              <a:buNone/>
+            </a:pPr>
+            <a:r>
+              <a:rPr lang="en-US" sz="900" i="1" dirty="0">
+                <a:solidFill>
+                  <a:srgbClr val="555555"/>
+                </a:solidFill>
+              </a:rPr>
+              <a:t>Predicted −</a:t>
+            </a:r>
+            <a:endParaRPr lang="en-US" sz="900" dirty="0"/>
+          </a:p>
+        </p:txBody>
+      </p:sp>
+      <p:sp>
+        <p:nvSpPr>
+          <p:cNvPr id="7" name="Text 5"/>
+          <p:cNvSpPr/>
+          <p:nvPr/>
+        </p:nvSpPr>
+        <p:spPr>
+          <a:xfrm>
+            <a:off x="640080" y="1353312"/>
+            <a:ext cx="548640" cy="548640"/>
+          </a:xfrm>
+          <a:prstGeom prst="rect">
+            <a:avLst/>
+          </a:prstGeom>
+          <a:noFill/>
+          <a:ln/>
+        </p:spPr>
+        <p:txBody>
+          <a:bodyPr wrap="square" lIns="508" tIns="508" rIns="508" bIns="508" rtlCol="0" anchor="ctr"/>
+          <a:lstStyle/>
+          <a:p>
+            <a:pPr algn="r" indent="0" marL="0">
+              <a:buNone/>
+            </a:pPr>
+            <a:r>
+              <a:rPr lang="en-US" sz="900" i="1" dirty="0">
+                <a:solidFill>
+                  <a:srgbClr val="555555"/>
+                </a:solidFill>
+              </a:rPr>
+              <a:t>Actual +</a:t>
+            </a:r>
+            <a:endParaRPr lang="en-US" sz="900" dirty="0"/>
+          </a:p>
+        </p:txBody>
+      </p:sp>
+      <p:sp>
+        <p:nvSpPr>
+          <p:cNvPr id="8" name="Text 6"/>
+          <p:cNvSpPr/>
+          <p:nvPr/>
+        </p:nvSpPr>
+        <p:spPr>
+          <a:xfrm>
+            <a:off x="640080" y="1901952"/>
+            <a:ext cx="548640" cy="548640"/>
+          </a:xfrm>
+          <a:prstGeom prst="rect">
+            <a:avLst/>
+          </a:prstGeom>
+          <a:noFill/>
+          <a:ln/>
+        </p:spPr>
+        <p:txBody>
+          <a:bodyPr wrap="square" lIns="508" tIns="508" rIns="508" bIns="508" rtlCol="0" anchor="ctr"/>
+          <a:lstStyle/>
+          <a:p>
+            <a:pPr algn="r" indent="0" marL="0">
+              <a:buNone/>
+            </a:pPr>
+            <a:r>
+              <a:rPr lang="en-US" sz="900" i="1" dirty="0">
+                <a:solidFill>
+                  <a:srgbClr val="555555"/>
+                </a:solidFill>
+              </a:rPr>
+              <a:t>Actual −</a:t>
+            </a:r>
+            <a:endParaRPr lang="en-US" sz="900" dirty="0"/>
+          </a:p>
+        </p:txBody>
+      </p:sp>
+      <p:sp>
+        <p:nvSpPr>
+          <p:cNvPr id="9" name="Shape 7"/>
+          <p:cNvSpPr/>
+          <p:nvPr/>
+        </p:nvSpPr>
+        <p:spPr>
+          <a:xfrm>
+            <a:off x="1188720" y="1426464"/>
+            <a:ext cx="1143000" cy="548640"/>
+          </a:xfrm>
+          <a:prstGeom prst="rect">
+            <a:avLst/>
+          </a:prstGeom>
+          <a:solidFill>
+            <a:srgbClr val="D4F0DC"/>
+          </a:solidFill>
+          <a:ln w="6350">
+            <a:solidFill>
+              <a:srgbClr val="999999"/>
+            </a:solidFill>
+            <a:prstDash val="solid"/>
+          </a:ln>
+        </p:spPr>
+      </p:sp>
+      <p:sp>
+        <p:nvSpPr>
+          <p:cNvPr id="10" name="Text 8"/>
+          <p:cNvSpPr/>
+          <p:nvPr/>
+        </p:nvSpPr>
+        <p:spPr>
+          <a:xfrm>
+            <a:off x="1188720" y="1426464"/>
+            <a:ext cx="1143000" cy="548640"/>
+          </a:xfrm>
+          <a:prstGeom prst="rect">
+            <a:avLst/>
+          </a:prstGeom>
+          <a:noFill/>
+          <a:ln/>
+        </p:spPr>
+        <p:txBody>
+          <a:bodyPr wrap="square" lIns="0" tIns="0" rIns="0" bIns="0" rtlCol="0" anchor="ctr"/>
+          <a:lstStyle/>
+          <a:p>
+            <a:pPr algn="ctr" indent="0" marL="0">
+              <a:buNone/>
+            </a:pPr>
+            <a:r>
+              <a:rPr lang="en-US" sz="2000" b="1" dirty="0">
+                <a:solidFill>
+                  <a:srgbClr val="0A7D2A"/>
+                </a:solidFill>
+              </a:rPr>
+              <a:t>16</a:t>
+            </a:r>
+            <a:endParaRPr lang="en-US" sz="2000" dirty="0"/>
+          </a:p>
+          <a:p>
+            <a:pPr algn="ctr" indent="0" marL="0">
+              <a:buNone/>
+            </a:pPr>
+            <a:r>
+              <a:rPr lang="en-US" sz="900" dirty="0">
+                <a:solidFill>
+                  <a:srgbClr val="666666"/>
+                </a:solidFill>
+              </a:rPr>
+              <a:t>TP</a:t>
+            </a:r>
+            <a:endParaRPr lang="en-US" sz="2000" dirty="0"/>
+          </a:p>
+        </p:txBody>
+      </p:sp>
+      <p:sp>
+        <p:nvSpPr>
+          <p:cNvPr id="11" name="Shape 9"/>
+          <p:cNvSpPr/>
+          <p:nvPr/>
+        </p:nvSpPr>
+        <p:spPr>
+          <a:xfrm>
+            <a:off x="2331720" y="1426464"/>
+            <a:ext cx="1143000" cy="548640"/>
+          </a:xfrm>
+          <a:prstGeom prst="rect">
+            <a:avLst/>
+          </a:prstGeom>
+          <a:solidFill>
+            <a:srgbClr val="F5D5CE"/>
+          </a:solidFill>
+          <a:ln w="6350">
+            <a:solidFill>
+              <a:srgbClr val="999999"/>
+            </a:solidFill>
+            <a:prstDash val="solid"/>
+          </a:ln>
+        </p:spPr>
+      </p:sp>
+      <p:sp>
+        <p:nvSpPr>
+          <p:cNvPr id="12" name="Text 10"/>
+          <p:cNvSpPr/>
+          <p:nvPr/>
+        </p:nvSpPr>
+        <p:spPr>
+          <a:xfrm>
+            <a:off x="2331720" y="1426464"/>
+            <a:ext cx="1143000" cy="548640"/>
+          </a:xfrm>
+          <a:prstGeom prst="rect">
+            <a:avLst/>
+          </a:prstGeom>
+          <a:noFill/>
+          <a:ln/>
+        </p:spPr>
+        <p:txBody>
+          <a:bodyPr wrap="square" lIns="0" tIns="0" rIns="0" bIns="0" rtlCol="0" anchor="ctr"/>
+          <a:lstStyle/>
+          <a:p>
+            <a:pPr algn="ctr" indent="0" marL="0">
+              <a:buNone/>
+            </a:pPr>
+            <a:r>
+              <a:rPr lang="en-US" sz="2000" b="1" dirty="0">
+                <a:solidFill>
+                  <a:srgbClr val="B33A1E"/>
+                </a:solidFill>
+              </a:rPr>
+              <a:t>5</a:t>
+            </a:r>
+            <a:endParaRPr lang="en-US" sz="2000" dirty="0"/>
+          </a:p>
+          <a:p>
+            <a:pPr algn="ctr" indent="0" marL="0">
+              <a:buNone/>
+            </a:pPr>
+            <a:r>
+              <a:rPr lang="en-US" sz="900" dirty="0">
+                <a:solidFill>
+                  <a:srgbClr val="666666"/>
+                </a:solidFill>
+              </a:rPr>
+              <a:t>FN</a:t>
+            </a:r>
+            <a:endParaRPr lang="en-US" sz="2000" dirty="0"/>
+          </a:p>
+        </p:txBody>
+      </p:sp>
+      <p:sp>
+        <p:nvSpPr>
+          <p:cNvPr id="13" name="Shape 11"/>
+          <p:cNvSpPr/>
+          <p:nvPr/>
+        </p:nvSpPr>
+        <p:spPr>
+          <a:xfrm>
+            <a:off x="1188720" y="1975104"/>
+            <a:ext cx="1143000" cy="548640"/>
+          </a:xfrm>
+          <a:prstGeom prst="rect">
+            <a:avLst/>
+          </a:prstGeom>
+          <a:solidFill>
+            <a:srgbClr val="F2F2F2"/>
+          </a:solidFill>
+          <a:ln w="6350">
+            <a:solidFill>
+              <a:srgbClr val="999999"/>
+            </a:solidFill>
+            <a:prstDash val="solid"/>
+          </a:ln>
+        </p:spPr>
+      </p:sp>
+      <p:sp>
+        <p:nvSpPr>
+          <p:cNvPr id="14" name="Text 12"/>
+          <p:cNvSpPr/>
+          <p:nvPr/>
+        </p:nvSpPr>
+        <p:spPr>
+          <a:xfrm>
+            <a:off x="1188720" y="1975104"/>
+            <a:ext cx="1143000" cy="548640"/>
+          </a:xfrm>
+          <a:prstGeom prst="rect">
+            <a:avLst/>
+          </a:prstGeom>
+          <a:noFill/>
+          <a:ln/>
+        </p:spPr>
+        <p:txBody>
+          <a:bodyPr wrap="square" lIns="0" tIns="0" rIns="0" bIns="0" rtlCol="0" anchor="ctr"/>
+          <a:lstStyle/>
+          <a:p>
+            <a:pPr algn="ctr" indent="0" marL="0">
+              <a:buNone/>
+            </a:pPr>
+            <a:r>
+              <a:rPr lang="en-US" sz="2000" b="1" dirty="0">
+                <a:solidFill>
+                  <a:srgbClr val="888888"/>
+                </a:solidFill>
+              </a:rPr>
+              <a:t>0</a:t>
+            </a:r>
+            <a:endParaRPr lang="en-US" sz="2000" dirty="0"/>
+          </a:p>
+          <a:p>
+            <a:pPr algn="ctr" indent="0" marL="0">
+              <a:buNone/>
+            </a:pPr>
+            <a:r>
+              <a:rPr lang="en-US" sz="900" dirty="0">
+                <a:solidFill>
+                  <a:srgbClr val="666666"/>
+                </a:solidFill>
+              </a:rPr>
+              <a:t>FP</a:t>
+            </a:r>
+            <a:endParaRPr lang="en-US" sz="2000" dirty="0"/>
+          </a:p>
+        </p:txBody>
+      </p:sp>
+      <p:sp>
+        <p:nvSpPr>
+          <p:cNvPr id="15" name="Shape 13"/>
+          <p:cNvSpPr/>
+          <p:nvPr/>
+        </p:nvSpPr>
+        <p:spPr>
+          <a:xfrm>
+            <a:off x="2331720" y="1975104"/>
+            <a:ext cx="1143000" cy="548640"/>
+          </a:xfrm>
+          <a:prstGeom prst="rect">
+            <a:avLst/>
+          </a:prstGeom>
+          <a:solidFill>
+            <a:srgbClr val="EAEAEA"/>
+          </a:solidFill>
+          <a:ln w="6350">
+            <a:solidFill>
+              <a:srgbClr val="999999"/>
+            </a:solidFill>
+            <a:prstDash val="solid"/>
+          </a:ln>
+        </p:spPr>
+      </p:sp>
+      <p:sp>
+        <p:nvSpPr>
+          <p:cNvPr id="16" name="Text 14"/>
+          <p:cNvSpPr/>
+          <p:nvPr/>
+        </p:nvSpPr>
+        <p:spPr>
+          <a:xfrm>
+            <a:off x="2331720" y="1975104"/>
+            <a:ext cx="1143000" cy="548640"/>
+          </a:xfrm>
+          <a:prstGeom prst="rect">
+            <a:avLst/>
+          </a:prstGeom>
+          <a:noFill/>
+          <a:ln/>
+        </p:spPr>
+        <p:txBody>
+          <a:bodyPr wrap="square" lIns="0" tIns="0" rIns="0" bIns="0" rtlCol="0" anchor="ctr"/>
+          <a:lstStyle/>
+          <a:p>
+            <a:pPr algn="ctr" indent="0" marL="0">
+              <a:buNone/>
+            </a:pPr>
+            <a:r>
+              <a:rPr lang="en-US" sz="2000" b="1" dirty="0">
+                <a:solidFill>
+                  <a:srgbClr val="555555"/>
+                </a:solidFill>
+              </a:rPr>
+              <a:t>24</a:t>
+            </a:r>
+            <a:endParaRPr lang="en-US" sz="2000" dirty="0"/>
+          </a:p>
+          <a:p>
+            <a:pPr algn="ctr" indent="0" marL="0">
+              <a:buNone/>
+            </a:pPr>
+            <a:r>
+              <a:rPr lang="en-US" sz="900" dirty="0">
+                <a:solidFill>
+                  <a:srgbClr val="666666"/>
+                </a:solidFill>
+              </a:rPr>
+              <a:t>TN</a:t>
+            </a:r>
+            <a:endParaRPr lang="en-US" sz="2000" dirty="0"/>
+          </a:p>
+        </p:txBody>
+      </p:sp>
+      <p:sp>
+        <p:nvSpPr>
+          <p:cNvPr id="17" name="Text 15"/>
+          <p:cNvSpPr/>
+          <p:nvPr/>
+        </p:nvSpPr>
+        <p:spPr>
+          <a:xfrm>
+            <a:off x="640080" y="2542032"/>
+            <a:ext cx="2834640" cy="201168"/>
+          </a:xfrm>
+          <a:prstGeom prst="rect">
+            <a:avLst/>
+          </a:prstGeom>
+          <a:noFill/>
+          <a:ln/>
+        </p:spPr>
+        <p:txBody>
+          <a:bodyPr wrap="square" lIns="0" tIns="0" rIns="0" bIns="0" rtlCol="0" anchor="ctr"/>
+          <a:lstStyle/>
+          <a:p>
+            <a:pPr algn="ctr" indent="0" marL="0">
+              <a:buNone/>
+            </a:pPr>
+            <a:r>
+              <a:rPr lang="en-US" sz="1100" i="1" dirty="0">
+                <a:solidFill>
+                  <a:srgbClr val="555555"/>
+                </a:solidFill>
+              </a:rPr>
+              <a:t>Precision </a:t>
+            </a:r>
+            <a:pPr algn="ctr" indent="0" marL="0">
+              <a:buNone/>
+            </a:pPr>
+            <a:r>
+              <a:rPr lang="en-US" sz="1100" b="1" i="1" dirty="0">
+                <a:solidFill>
+                  <a:srgbClr val="1A1A1A"/>
+                </a:solidFill>
+              </a:rPr>
+              <a:t>1.00</a:t>
+            </a:r>
+            <a:pPr algn="ctr" indent="0" marL="0">
+              <a:buNone/>
+            </a:pPr>
+            <a:r>
+              <a:rPr lang="en-US" sz="1100" i="1" dirty="0">
+                <a:solidFill>
+                  <a:srgbClr val="555555"/>
+                </a:solidFill>
+              </a:rPr>
+              <a:t>   ·   Recall </a:t>
+            </a:r>
+            <a:pPr algn="ctr" indent="0" marL="0">
+              <a:buNone/>
+            </a:pPr>
+            <a:r>
+              <a:rPr lang="en-US" sz="1100" b="1" i="1" dirty="0">
+                <a:solidFill>
+                  <a:srgbClr val="1A1A1A"/>
+                </a:solidFill>
+              </a:rPr>
+              <a:t>0.76</a:t>
+            </a:r>
+            <a:endParaRPr lang="en-US" sz="1100" dirty="0"/>
+          </a:p>
+        </p:txBody>
+      </p:sp>
+      <p:sp>
+        <p:nvSpPr>
+          <p:cNvPr id="18" name="Text 16"/>
+          <p:cNvSpPr/>
+          <p:nvPr/>
+        </p:nvSpPr>
+        <p:spPr>
+          <a:xfrm>
+            <a:off x="4754880" y="914400"/>
+            <a:ext cx="2834640" cy="201168"/>
+          </a:xfrm>
+          <a:prstGeom prst="rect">
+            <a:avLst/>
+          </a:prstGeom>
+          <a:noFill/>
+          <a:ln/>
+        </p:spPr>
+        <p:txBody>
+          <a:bodyPr wrap="square" lIns="0" tIns="0" rIns="0" bIns="0" rtlCol="0" anchor="b"/>
+          <a:lstStyle/>
+          <a:p>
+            <a:pPr algn="ctr" indent="0" marL="0">
+              <a:buNone/>
+            </a:pPr>
+            <a:r>
+              <a:rPr lang="en-US" sz="1400" b="1" dirty="0">
+                <a:solidFill>
+                  <a:srgbClr val="000000"/>
+                </a:solidFill>
+              </a:rPr>
+              <a:t>Ordering</a:t>
+            </a:r>
+            <a:endParaRPr lang="en-US" sz="1400" dirty="0"/>
+          </a:p>
+        </p:txBody>
+      </p:sp>
+      <p:sp>
+        <p:nvSpPr>
+          <p:cNvPr id="19" name="Text 17"/>
+          <p:cNvSpPr/>
+          <p:nvPr/>
+        </p:nvSpPr>
+        <p:spPr>
+          <a:xfrm>
+            <a:off x="5303520" y="1133856"/>
+            <a:ext cx="1143000" cy="201168"/>
+          </a:xfrm>
+          <a:prstGeom prst="rect">
+            <a:avLst/>
+          </a:prstGeom>
+          <a:noFill/>
+          <a:ln/>
+        </p:spPr>
+        <p:txBody>
+          <a:bodyPr wrap="square" lIns="0" tIns="0" rIns="0" bIns="0" rtlCol="0" anchor="ctr"/>
+          <a:lstStyle/>
+          <a:p>
+            <a:pPr algn="ctr" indent="0" marL="0">
+              <a:buNone/>
+            </a:pPr>
+            <a:r>
+              <a:rPr lang="en-US" sz="900" i="1" dirty="0">
+                <a:solidFill>
+                  <a:srgbClr val="555555"/>
+                </a:solidFill>
+              </a:rPr>
+              <a:t>Predicted +</a:t>
+            </a:r>
+            <a:endParaRPr lang="en-US" sz="900" dirty="0"/>
+          </a:p>
+        </p:txBody>
+      </p:sp>
+      <p:sp>
+        <p:nvSpPr>
+          <p:cNvPr id="20" name="Text 18"/>
+          <p:cNvSpPr/>
+          <p:nvPr/>
+        </p:nvSpPr>
+        <p:spPr>
+          <a:xfrm>
+            <a:off x="6446520" y="1133856"/>
+            <a:ext cx="1143000" cy="201168"/>
+          </a:xfrm>
+          <a:prstGeom prst="rect">
+            <a:avLst/>
+          </a:prstGeom>
+          <a:noFill/>
+          <a:ln/>
+        </p:spPr>
+        <p:txBody>
+          <a:bodyPr wrap="square" lIns="0" tIns="0" rIns="0" bIns="0" rtlCol="0" anchor="ctr"/>
+          <a:lstStyle/>
+          <a:p>
+            <a:pPr algn="ctr" indent="0" marL="0">
+              <a:buNone/>
+            </a:pPr>
+            <a:r>
+              <a:rPr lang="en-US" sz="900" i="1" dirty="0">
+                <a:solidFill>
+                  <a:srgbClr val="555555"/>
+                </a:solidFill>
+              </a:rPr>
+              <a:t>Predicted −</a:t>
+            </a:r>
+            <a:endParaRPr lang="en-US" sz="900" dirty="0"/>
+          </a:p>
+        </p:txBody>
+      </p:sp>
+      <p:sp>
+        <p:nvSpPr>
+          <p:cNvPr id="21" name="Text 19"/>
+          <p:cNvSpPr/>
+          <p:nvPr/>
+        </p:nvSpPr>
+        <p:spPr>
+          <a:xfrm>
+            <a:off x="4754880" y="1353312"/>
+            <a:ext cx="548640" cy="548640"/>
+          </a:xfrm>
+          <a:prstGeom prst="rect">
+            <a:avLst/>
+          </a:prstGeom>
+          <a:noFill/>
+          <a:ln/>
+        </p:spPr>
+        <p:txBody>
+          <a:bodyPr wrap="square" lIns="508" tIns="508" rIns="508" bIns="508" rtlCol="0" anchor="ctr"/>
+          <a:lstStyle/>
+          <a:p>
+            <a:pPr algn="r" indent="0" marL="0">
+              <a:buNone/>
+            </a:pPr>
+            <a:r>
+              <a:rPr lang="en-US" sz="900" i="1" dirty="0">
+                <a:solidFill>
+                  <a:srgbClr val="555555"/>
+                </a:solidFill>
+              </a:rPr>
+              <a:t>Actual +</a:t>
+            </a:r>
+            <a:endParaRPr lang="en-US" sz="900" dirty="0"/>
+          </a:p>
+        </p:txBody>
+      </p:sp>
+      <p:sp>
+        <p:nvSpPr>
+          <p:cNvPr id="22" name="Text 20"/>
+          <p:cNvSpPr/>
+          <p:nvPr/>
+        </p:nvSpPr>
+        <p:spPr>
+          <a:xfrm>
+            <a:off x="4754880" y="1901952"/>
+            <a:ext cx="548640" cy="548640"/>
+          </a:xfrm>
+          <a:prstGeom prst="rect">
+            <a:avLst/>
+          </a:prstGeom>
+          <a:noFill/>
+          <a:ln/>
+        </p:spPr>
+        <p:txBody>
+          <a:bodyPr wrap="square" lIns="508" tIns="508" rIns="508" bIns="508" rtlCol="0" anchor="ctr"/>
+          <a:lstStyle/>
+          <a:p>
+            <a:pPr algn="r" indent="0" marL="0">
+              <a:buNone/>
+            </a:pPr>
+            <a:r>
+              <a:rPr lang="en-US" sz="900" i="1" dirty="0">
+                <a:solidFill>
+                  <a:srgbClr val="555555"/>
+                </a:solidFill>
+              </a:rPr>
+              <a:t>Actual −</a:t>
+            </a:r>
+            <a:endParaRPr lang="en-US" sz="900" dirty="0"/>
+          </a:p>
+        </p:txBody>
+      </p:sp>
+      <p:sp>
+        <p:nvSpPr>
+          <p:cNvPr id="23" name="Shape 21"/>
+          <p:cNvSpPr/>
+          <p:nvPr/>
+        </p:nvSpPr>
+        <p:spPr>
+          <a:xfrm>
+            <a:off x="5303520" y="1426464"/>
+            <a:ext cx="1143000" cy="548640"/>
+          </a:xfrm>
+          <a:prstGeom prst="rect">
+            <a:avLst/>
+          </a:prstGeom>
+          <a:solidFill>
+            <a:srgbClr val="D4F0DC"/>
+          </a:solidFill>
+          <a:ln w="6350">
+            <a:solidFill>
+              <a:srgbClr val="999999"/>
+            </a:solidFill>
+            <a:prstDash val="solid"/>
+          </a:ln>
+        </p:spPr>
+      </p:sp>
+      <p:sp>
+        <p:nvSpPr>
+          <p:cNvPr id="24" name="Text 22"/>
+          <p:cNvSpPr/>
+          <p:nvPr/>
+        </p:nvSpPr>
+        <p:spPr>
+          <a:xfrm>
+            <a:off x="5303520" y="1426464"/>
+            <a:ext cx="1143000" cy="548640"/>
+          </a:xfrm>
+          <a:prstGeom prst="rect">
+            <a:avLst/>
+          </a:prstGeom>
+          <a:noFill/>
+          <a:ln/>
+        </p:spPr>
+        <p:txBody>
+          <a:bodyPr wrap="square" lIns="0" tIns="0" rIns="0" bIns="0" rtlCol="0" anchor="ctr"/>
+          <a:lstStyle/>
+          <a:p>
+            <a:pPr algn="ctr" indent="0" marL="0">
+              <a:buNone/>
+            </a:pPr>
+            <a:r>
+              <a:rPr lang="en-US" sz="2000" b="1" dirty="0">
+                <a:solidFill>
+                  <a:srgbClr val="0A7D2A"/>
+                </a:solidFill>
+              </a:rPr>
+              <a:t>14</a:t>
+            </a:r>
+            <a:endParaRPr lang="en-US" sz="2000" dirty="0"/>
+          </a:p>
+          <a:p>
+            <a:pPr algn="ctr" indent="0" marL="0">
+              <a:buNone/>
+            </a:pPr>
+            <a:r>
+              <a:rPr lang="en-US" sz="900" dirty="0">
+                <a:solidFill>
+                  <a:srgbClr val="666666"/>
+                </a:solidFill>
+              </a:rPr>
+              <a:t>TP</a:t>
+            </a:r>
+            <a:endParaRPr lang="en-US" sz="2000" dirty="0"/>
+          </a:p>
+        </p:txBody>
+      </p:sp>
+      <p:sp>
+        <p:nvSpPr>
+          <p:cNvPr id="25" name="Shape 23"/>
+          <p:cNvSpPr/>
+          <p:nvPr/>
+        </p:nvSpPr>
+        <p:spPr>
+          <a:xfrm>
+            <a:off x="6446520" y="1426464"/>
+            <a:ext cx="1143000" cy="548640"/>
+          </a:xfrm>
+          <a:prstGeom prst="rect">
+            <a:avLst/>
+          </a:prstGeom>
+          <a:solidFill>
+            <a:srgbClr val="F5D5CE"/>
+          </a:solidFill>
+          <a:ln w="6350">
+            <a:solidFill>
+              <a:srgbClr val="999999"/>
+            </a:solidFill>
+            <a:prstDash val="solid"/>
+          </a:ln>
+        </p:spPr>
+      </p:sp>
+      <p:sp>
+        <p:nvSpPr>
+          <p:cNvPr id="26" name="Text 24"/>
+          <p:cNvSpPr/>
+          <p:nvPr/>
+        </p:nvSpPr>
+        <p:spPr>
+          <a:xfrm>
+            <a:off x="6446520" y="1426464"/>
+            <a:ext cx="1143000" cy="548640"/>
+          </a:xfrm>
+          <a:prstGeom prst="rect">
+            <a:avLst/>
+          </a:prstGeom>
+          <a:noFill/>
+          <a:ln/>
+        </p:spPr>
+        <p:txBody>
+          <a:bodyPr wrap="square" lIns="0" tIns="0" rIns="0" bIns="0" rtlCol="0" anchor="ctr"/>
+          <a:lstStyle/>
+          <a:p>
+            <a:pPr algn="ctr" indent="0" marL="0">
+              <a:buNone/>
+            </a:pPr>
+            <a:r>
+              <a:rPr lang="en-US" sz="2000" b="1" dirty="0">
+                <a:solidFill>
+                  <a:srgbClr val="B33A1E"/>
+                </a:solidFill>
+              </a:rPr>
+              <a:t>24</a:t>
+            </a:r>
+            <a:endParaRPr lang="en-US" sz="2000" dirty="0"/>
+          </a:p>
+          <a:p>
+            <a:pPr algn="ctr" indent="0" marL="0">
+              <a:buNone/>
+            </a:pPr>
+            <a:r>
+              <a:rPr lang="en-US" sz="900" dirty="0">
+                <a:solidFill>
+                  <a:srgbClr val="666666"/>
+                </a:solidFill>
+              </a:rPr>
+              <a:t>FN</a:t>
+            </a:r>
+            <a:endParaRPr lang="en-US" sz="2000" dirty="0"/>
+          </a:p>
+        </p:txBody>
+      </p:sp>
+      <p:sp>
+        <p:nvSpPr>
+          <p:cNvPr id="27" name="Shape 25"/>
+          <p:cNvSpPr/>
+          <p:nvPr/>
+        </p:nvSpPr>
+        <p:spPr>
+          <a:xfrm>
+            <a:off x="5303520" y="1975104"/>
+            <a:ext cx="1143000" cy="548640"/>
+          </a:xfrm>
+          <a:prstGeom prst="rect">
+            <a:avLst/>
+          </a:prstGeom>
+          <a:solidFill>
+            <a:srgbClr val="F2F2F2"/>
+          </a:solidFill>
+          <a:ln w="6350">
+            <a:solidFill>
+              <a:srgbClr val="999999"/>
+            </a:solidFill>
+            <a:prstDash val="solid"/>
+          </a:ln>
+        </p:spPr>
+      </p:sp>
+      <p:sp>
+        <p:nvSpPr>
+          <p:cNvPr id="28" name="Text 26"/>
+          <p:cNvSpPr/>
+          <p:nvPr/>
+        </p:nvSpPr>
+        <p:spPr>
+          <a:xfrm>
+            <a:off x="5303520" y="1975104"/>
+            <a:ext cx="1143000" cy="548640"/>
+          </a:xfrm>
+          <a:prstGeom prst="rect">
+            <a:avLst/>
+          </a:prstGeom>
+          <a:noFill/>
+          <a:ln/>
+        </p:spPr>
+        <p:txBody>
+          <a:bodyPr wrap="square" lIns="0" tIns="0" rIns="0" bIns="0" rtlCol="0" anchor="ctr"/>
+          <a:lstStyle/>
+          <a:p>
+            <a:pPr algn="ctr" indent="0" marL="0">
+              <a:buNone/>
+            </a:pPr>
+            <a:r>
+              <a:rPr lang="en-US" sz="2000" b="1" dirty="0">
+                <a:solidFill>
+                  <a:srgbClr val="888888"/>
+                </a:solidFill>
+              </a:rPr>
+              <a:t>0</a:t>
+            </a:r>
+            <a:endParaRPr lang="en-US" sz="2000" dirty="0"/>
+          </a:p>
+          <a:p>
+            <a:pPr algn="ctr" indent="0" marL="0">
+              <a:buNone/>
+            </a:pPr>
+            <a:r>
+              <a:rPr lang="en-US" sz="900" dirty="0">
+                <a:solidFill>
+                  <a:srgbClr val="666666"/>
+                </a:solidFill>
+              </a:rPr>
+              <a:t>FP</a:t>
+            </a:r>
+            <a:endParaRPr lang="en-US" sz="2000" dirty="0"/>
+          </a:p>
+        </p:txBody>
+      </p:sp>
+      <p:sp>
+        <p:nvSpPr>
+          <p:cNvPr id="29" name="Shape 27"/>
+          <p:cNvSpPr/>
+          <p:nvPr/>
+        </p:nvSpPr>
+        <p:spPr>
+          <a:xfrm>
+            <a:off x="6446520" y="1975104"/>
+            <a:ext cx="1143000" cy="548640"/>
+          </a:xfrm>
+          <a:prstGeom prst="rect">
+            <a:avLst/>
+          </a:prstGeom>
+          <a:solidFill>
+            <a:srgbClr val="EAEAEA"/>
+          </a:solidFill>
+          <a:ln w="6350">
+            <a:solidFill>
+              <a:srgbClr val="999999"/>
+            </a:solidFill>
+            <a:prstDash val="solid"/>
+          </a:ln>
+        </p:spPr>
+      </p:sp>
+      <p:sp>
+        <p:nvSpPr>
+          <p:cNvPr id="30" name="Text 28"/>
+          <p:cNvSpPr/>
+          <p:nvPr/>
+        </p:nvSpPr>
+        <p:spPr>
+          <a:xfrm>
+            <a:off x="6446520" y="1975104"/>
+            <a:ext cx="1143000" cy="548640"/>
+          </a:xfrm>
+          <a:prstGeom prst="rect">
+            <a:avLst/>
+          </a:prstGeom>
+          <a:noFill/>
+          <a:ln/>
+        </p:spPr>
+        <p:txBody>
+          <a:bodyPr wrap="square" lIns="0" tIns="0" rIns="0" bIns="0" rtlCol="0" anchor="ctr"/>
+          <a:lstStyle/>
+          <a:p>
+            <a:pPr algn="ctr" indent="0" marL="0">
+              <a:buNone/>
+            </a:pPr>
+            <a:r>
+              <a:rPr lang="en-US" sz="2000" b="1" dirty="0">
+                <a:solidFill>
+                  <a:srgbClr val="555555"/>
+                </a:solidFill>
+              </a:rPr>
+              <a:t>7</a:t>
+            </a:r>
+            <a:endParaRPr lang="en-US" sz="2000" dirty="0"/>
+          </a:p>
+          <a:p>
+            <a:pPr algn="ctr" indent="0" marL="0">
+              <a:buNone/>
+            </a:pPr>
+            <a:r>
+              <a:rPr lang="en-US" sz="900" dirty="0">
+                <a:solidFill>
+                  <a:srgbClr val="666666"/>
+                </a:solidFill>
+              </a:rPr>
+              <a:t>TN</a:t>
+            </a:r>
+            <a:endParaRPr lang="en-US" sz="2000" dirty="0"/>
+          </a:p>
+        </p:txBody>
+      </p:sp>
+      <p:sp>
+        <p:nvSpPr>
+          <p:cNvPr id="31" name="Text 29"/>
+          <p:cNvSpPr/>
+          <p:nvPr/>
+        </p:nvSpPr>
+        <p:spPr>
+          <a:xfrm>
+            <a:off x="4754880" y="2542032"/>
+            <a:ext cx="2834640" cy="201168"/>
+          </a:xfrm>
+          <a:prstGeom prst="rect">
+            <a:avLst/>
+          </a:prstGeom>
+          <a:noFill/>
+          <a:ln/>
+        </p:spPr>
+        <p:txBody>
+          <a:bodyPr wrap="square" lIns="0" tIns="0" rIns="0" bIns="0" rtlCol="0" anchor="ctr"/>
+          <a:lstStyle/>
+          <a:p>
+            <a:pPr algn="ctr" indent="0" marL="0">
+              <a:buNone/>
+            </a:pPr>
+            <a:r>
+              <a:rPr lang="en-US" sz="1100" i="1" dirty="0">
+                <a:solidFill>
+                  <a:srgbClr val="555555"/>
+                </a:solidFill>
+              </a:rPr>
+              <a:t>Precision </a:t>
+            </a:r>
+            <a:pPr algn="ctr" indent="0" marL="0">
+              <a:buNone/>
+            </a:pPr>
+            <a:r>
+              <a:rPr lang="en-US" sz="1100" b="1" i="1" dirty="0">
+                <a:solidFill>
+                  <a:srgbClr val="1A1A1A"/>
+                </a:solidFill>
+              </a:rPr>
+              <a:t>1.00</a:t>
+            </a:r>
+            <a:pPr algn="ctr" indent="0" marL="0">
+              <a:buNone/>
+            </a:pPr>
+            <a:r>
+              <a:rPr lang="en-US" sz="1100" i="1" dirty="0">
+                <a:solidFill>
+                  <a:srgbClr val="555555"/>
+                </a:solidFill>
+              </a:rPr>
+              <a:t>   ·   Recall </a:t>
+            </a:r>
+            <a:pPr algn="ctr" indent="0" marL="0">
+              <a:buNone/>
+            </a:pPr>
+            <a:r>
+              <a:rPr lang="en-US" sz="1100" b="1" i="1" dirty="0">
+                <a:solidFill>
+                  <a:srgbClr val="1A1A1A"/>
+                </a:solidFill>
+              </a:rPr>
+              <a:t>0.36</a:t>
+            </a:r>
+            <a:endParaRPr lang="en-US" sz="1100" dirty="0"/>
+          </a:p>
+        </p:txBody>
+      </p:sp>
+      <p:sp>
+        <p:nvSpPr>
+          <p:cNvPr id="32" name="Text 30"/>
+          <p:cNvSpPr/>
+          <p:nvPr/>
+        </p:nvSpPr>
+        <p:spPr>
+          <a:xfrm>
+            <a:off x="640080" y="2926080"/>
+            <a:ext cx="2834640" cy="201168"/>
+          </a:xfrm>
+          <a:prstGeom prst="rect">
+            <a:avLst/>
+          </a:prstGeom>
+          <a:noFill/>
+          <a:ln/>
+        </p:spPr>
+        <p:txBody>
+          <a:bodyPr wrap="square" lIns="0" tIns="0" rIns="0" bIns="0" rtlCol="0" anchor="b"/>
+          <a:lstStyle/>
+          <a:p>
+            <a:pPr algn="ctr" indent="0" marL="0">
+              <a:buNone/>
+            </a:pPr>
+            <a:r>
+              <a:rPr lang="en-US" sz="1400" b="1" dirty="0">
+                <a:solidFill>
+                  <a:srgbClr val="000000"/>
+                </a:solidFill>
+              </a:rPr>
+              <a:t>Rework</a:t>
+            </a:r>
+            <a:endParaRPr lang="en-US" sz="1400" dirty="0"/>
+          </a:p>
+        </p:txBody>
+      </p:sp>
+      <p:sp>
+        <p:nvSpPr>
+          <p:cNvPr id="33" name="Text 31"/>
+          <p:cNvSpPr/>
+          <p:nvPr/>
+        </p:nvSpPr>
+        <p:spPr>
+          <a:xfrm>
+            <a:off x="1188720" y="3145536"/>
+            <a:ext cx="1143000" cy="201168"/>
+          </a:xfrm>
+          <a:prstGeom prst="rect">
+            <a:avLst/>
+          </a:prstGeom>
+          <a:noFill/>
+          <a:ln/>
+        </p:spPr>
+        <p:txBody>
+          <a:bodyPr wrap="square" lIns="0" tIns="0" rIns="0" bIns="0" rtlCol="0" anchor="ctr"/>
+          <a:lstStyle/>
+          <a:p>
+            <a:pPr algn="ctr" indent="0" marL="0">
+              <a:buNone/>
+            </a:pPr>
+            <a:r>
+              <a:rPr lang="en-US" sz="900" i="1" dirty="0">
+                <a:solidFill>
+                  <a:srgbClr val="555555"/>
+                </a:solidFill>
+              </a:rPr>
+              <a:t>Predicted +</a:t>
+            </a:r>
+            <a:endParaRPr lang="en-US" sz="900" dirty="0"/>
+          </a:p>
+        </p:txBody>
+      </p:sp>
+      <p:sp>
+        <p:nvSpPr>
+          <p:cNvPr id="34" name="Text 32"/>
+          <p:cNvSpPr/>
+          <p:nvPr/>
+        </p:nvSpPr>
+        <p:spPr>
+          <a:xfrm>
+            <a:off x="2331720" y="3145536"/>
+            <a:ext cx="1143000" cy="201168"/>
+          </a:xfrm>
+          <a:prstGeom prst="rect">
+            <a:avLst/>
+          </a:prstGeom>
+          <a:noFill/>
+          <a:ln/>
+        </p:spPr>
+        <p:txBody>
+          <a:bodyPr wrap="square" lIns="0" tIns="0" rIns="0" bIns="0" rtlCol="0" anchor="ctr"/>
+          <a:lstStyle/>
+          <a:p>
+            <a:pPr algn="ctr" indent="0" marL="0">
+              <a:buNone/>
+            </a:pPr>
+            <a:r>
+              <a:rPr lang="en-US" sz="900" i="1" dirty="0">
+                <a:solidFill>
+                  <a:srgbClr val="555555"/>
+                </a:solidFill>
+              </a:rPr>
+              <a:t>Predicted −</a:t>
+            </a:r>
+            <a:endParaRPr lang="en-US" sz="900" dirty="0"/>
+          </a:p>
+        </p:txBody>
+      </p:sp>
+      <p:sp>
+        <p:nvSpPr>
+          <p:cNvPr id="35" name="Text 33"/>
+          <p:cNvSpPr/>
+          <p:nvPr/>
+        </p:nvSpPr>
+        <p:spPr>
+          <a:xfrm>
+            <a:off x="640080" y="3364992"/>
+            <a:ext cx="548640" cy="548640"/>
+          </a:xfrm>
+          <a:prstGeom prst="rect">
+            <a:avLst/>
+          </a:prstGeom>
+          <a:noFill/>
+          <a:ln/>
+        </p:spPr>
+        <p:txBody>
+          <a:bodyPr wrap="square" lIns="508" tIns="508" rIns="508" bIns="508" rtlCol="0" anchor="ctr"/>
+          <a:lstStyle/>
+          <a:p>
+            <a:pPr algn="r" indent="0" marL="0">
+              <a:buNone/>
+            </a:pPr>
+            <a:r>
+              <a:rPr lang="en-US" sz="900" i="1" dirty="0">
+                <a:solidFill>
+                  <a:srgbClr val="555555"/>
+                </a:solidFill>
+              </a:rPr>
+              <a:t>Actual +</a:t>
+            </a:r>
+            <a:endParaRPr lang="en-US" sz="900" dirty="0"/>
+          </a:p>
+        </p:txBody>
+      </p:sp>
+      <p:sp>
+        <p:nvSpPr>
+          <p:cNvPr id="36" name="Text 34"/>
+          <p:cNvSpPr/>
+          <p:nvPr/>
+        </p:nvSpPr>
+        <p:spPr>
+          <a:xfrm>
+            <a:off x="640080" y="3913632"/>
+            <a:ext cx="548640" cy="548640"/>
+          </a:xfrm>
+          <a:prstGeom prst="rect">
+            <a:avLst/>
+          </a:prstGeom>
+          <a:noFill/>
+          <a:ln/>
+        </p:spPr>
+        <p:txBody>
+          <a:bodyPr wrap="square" lIns="508" tIns="508" rIns="508" bIns="508" rtlCol="0" anchor="ctr"/>
+          <a:lstStyle/>
+          <a:p>
+            <a:pPr algn="r" indent="0" marL="0">
+              <a:buNone/>
+            </a:pPr>
+            <a:r>
+              <a:rPr lang="en-US" sz="900" i="1" dirty="0">
+                <a:solidFill>
+                  <a:srgbClr val="555555"/>
+                </a:solidFill>
+              </a:rPr>
+              <a:t>Actual −</a:t>
+            </a:r>
+            <a:endParaRPr lang="en-US" sz="900" dirty="0"/>
+          </a:p>
+        </p:txBody>
+      </p:sp>
+      <p:sp>
+        <p:nvSpPr>
+          <p:cNvPr id="37" name="Shape 35"/>
+          <p:cNvSpPr/>
+          <p:nvPr/>
+        </p:nvSpPr>
+        <p:spPr>
+          <a:xfrm>
+            <a:off x="1188720" y="3438144"/>
+            <a:ext cx="1143000" cy="548640"/>
+          </a:xfrm>
+          <a:prstGeom prst="rect">
+            <a:avLst/>
+          </a:prstGeom>
+          <a:solidFill>
+            <a:srgbClr val="D4F0DC"/>
+          </a:solidFill>
+          <a:ln w="6350">
+            <a:solidFill>
+              <a:srgbClr val="999999"/>
+            </a:solidFill>
+            <a:prstDash val="solid"/>
+          </a:ln>
+        </p:spPr>
+      </p:sp>
+      <p:sp>
+        <p:nvSpPr>
+          <p:cNvPr id="38" name="Text 36"/>
+          <p:cNvSpPr/>
+          <p:nvPr/>
+        </p:nvSpPr>
+        <p:spPr>
+          <a:xfrm>
+            <a:off x="1188720" y="3438144"/>
+            <a:ext cx="1143000" cy="548640"/>
+          </a:xfrm>
+          <a:prstGeom prst="rect">
+            <a:avLst/>
+          </a:prstGeom>
+          <a:noFill/>
+          <a:ln/>
+        </p:spPr>
+        <p:txBody>
+          <a:bodyPr wrap="square" lIns="0" tIns="0" rIns="0" bIns="0" rtlCol="0" anchor="ctr"/>
+          <a:lstStyle/>
+          <a:p>
+            <a:pPr algn="ctr" indent="0" marL="0">
+              <a:buNone/>
+            </a:pPr>
+            <a:r>
+              <a:rPr lang="en-US" sz="2000" b="1" dirty="0">
+                <a:solidFill>
+                  <a:srgbClr val="0A7D2A"/>
+                </a:solidFill>
+              </a:rPr>
+              <a:t>9</a:t>
+            </a:r>
+            <a:endParaRPr lang="en-US" sz="2000" dirty="0"/>
+          </a:p>
+          <a:p>
+            <a:pPr algn="ctr" indent="0" marL="0">
+              <a:buNone/>
+            </a:pPr>
+            <a:r>
+              <a:rPr lang="en-US" sz="900" dirty="0">
+                <a:solidFill>
+                  <a:srgbClr val="666666"/>
+                </a:solidFill>
+              </a:rPr>
+              <a:t>TP</a:t>
+            </a:r>
+            <a:endParaRPr lang="en-US" sz="2000" dirty="0"/>
+          </a:p>
+        </p:txBody>
+      </p:sp>
+      <p:sp>
+        <p:nvSpPr>
+          <p:cNvPr id="39" name="Shape 37"/>
+          <p:cNvSpPr/>
+          <p:nvPr/>
+        </p:nvSpPr>
+        <p:spPr>
+          <a:xfrm>
+            <a:off x="2331720" y="3438144"/>
+            <a:ext cx="1143000" cy="548640"/>
+          </a:xfrm>
+          <a:prstGeom prst="rect">
+            <a:avLst/>
+          </a:prstGeom>
+          <a:solidFill>
+            <a:srgbClr val="F5D5CE"/>
+          </a:solidFill>
+          <a:ln w="6350">
+            <a:solidFill>
+              <a:srgbClr val="999999"/>
+            </a:solidFill>
+            <a:prstDash val="solid"/>
+          </a:ln>
+        </p:spPr>
+      </p:sp>
+      <p:sp>
+        <p:nvSpPr>
+          <p:cNvPr id="40" name="Text 38"/>
+          <p:cNvSpPr/>
+          <p:nvPr/>
+        </p:nvSpPr>
+        <p:spPr>
+          <a:xfrm>
+            <a:off x="2331720" y="3438144"/>
+            <a:ext cx="1143000" cy="548640"/>
+          </a:xfrm>
+          <a:prstGeom prst="rect">
+            <a:avLst/>
+          </a:prstGeom>
+          <a:noFill/>
+          <a:ln/>
+        </p:spPr>
+        <p:txBody>
+          <a:bodyPr wrap="square" lIns="0" tIns="0" rIns="0" bIns="0" rtlCol="0" anchor="ctr"/>
+          <a:lstStyle/>
+          <a:p>
+            <a:pPr algn="ctr" indent="0" marL="0">
+              <a:buNone/>
+            </a:pPr>
+            <a:r>
+              <a:rPr lang="en-US" sz="2000" b="1" dirty="0">
+                <a:solidFill>
+                  <a:srgbClr val="B33A1E"/>
+                </a:solidFill>
+              </a:rPr>
+              <a:t>0</a:t>
+            </a:r>
+            <a:endParaRPr lang="en-US" sz="2000" dirty="0"/>
+          </a:p>
+          <a:p>
+            <a:pPr algn="ctr" indent="0" marL="0">
+              <a:buNone/>
+            </a:pPr>
+            <a:r>
+              <a:rPr lang="en-US" sz="900" dirty="0">
+                <a:solidFill>
+                  <a:srgbClr val="666666"/>
+                </a:solidFill>
+              </a:rPr>
+              <a:t>FN</a:t>
+            </a:r>
+            <a:endParaRPr lang="en-US" sz="2000" dirty="0"/>
+          </a:p>
+        </p:txBody>
+      </p:sp>
+      <p:sp>
+        <p:nvSpPr>
+          <p:cNvPr id="41" name="Shape 39"/>
+          <p:cNvSpPr/>
+          <p:nvPr/>
+        </p:nvSpPr>
+        <p:spPr>
+          <a:xfrm>
+            <a:off x="1188720" y="3986784"/>
+            <a:ext cx="1143000" cy="548640"/>
+          </a:xfrm>
+          <a:prstGeom prst="rect">
+            <a:avLst/>
+          </a:prstGeom>
+          <a:solidFill>
+            <a:srgbClr val="F2F2F2"/>
+          </a:solidFill>
+          <a:ln w="6350">
+            <a:solidFill>
+              <a:srgbClr val="999999"/>
+            </a:solidFill>
+            <a:prstDash val="solid"/>
+          </a:ln>
+        </p:spPr>
+      </p:sp>
+      <p:sp>
+        <p:nvSpPr>
+          <p:cNvPr id="42" name="Text 40"/>
+          <p:cNvSpPr/>
+          <p:nvPr/>
+        </p:nvSpPr>
+        <p:spPr>
+          <a:xfrm>
+            <a:off x="1188720" y="3986784"/>
+            <a:ext cx="1143000" cy="548640"/>
+          </a:xfrm>
+          <a:prstGeom prst="rect">
+            <a:avLst/>
+          </a:prstGeom>
+          <a:noFill/>
+          <a:ln/>
+        </p:spPr>
+        <p:txBody>
+          <a:bodyPr wrap="square" lIns="0" tIns="0" rIns="0" bIns="0" rtlCol="0" anchor="ctr"/>
+          <a:lstStyle/>
+          <a:p>
+            <a:pPr algn="ctr" indent="0" marL="0">
+              <a:buNone/>
+            </a:pPr>
+            <a:r>
+              <a:rPr lang="en-US" sz="2000" b="1" dirty="0">
+                <a:solidFill>
+                  <a:srgbClr val="888888"/>
+                </a:solidFill>
+              </a:rPr>
+              <a:t>0</a:t>
+            </a:r>
+            <a:endParaRPr lang="en-US" sz="2000" dirty="0"/>
+          </a:p>
+          <a:p>
+            <a:pPr algn="ctr" indent="0" marL="0">
+              <a:buNone/>
+            </a:pPr>
+            <a:r>
+              <a:rPr lang="en-US" sz="900" dirty="0">
+                <a:solidFill>
+                  <a:srgbClr val="666666"/>
+                </a:solidFill>
+              </a:rPr>
+              <a:t>FP</a:t>
+            </a:r>
+            <a:endParaRPr lang="en-US" sz="2000" dirty="0"/>
+          </a:p>
+        </p:txBody>
+      </p:sp>
+      <p:sp>
+        <p:nvSpPr>
+          <p:cNvPr id="43" name="Shape 41"/>
+          <p:cNvSpPr/>
+          <p:nvPr/>
+        </p:nvSpPr>
+        <p:spPr>
+          <a:xfrm>
+            <a:off x="2331720" y="3986784"/>
+            <a:ext cx="1143000" cy="548640"/>
+          </a:xfrm>
+          <a:prstGeom prst="rect">
+            <a:avLst/>
+          </a:prstGeom>
+          <a:solidFill>
+            <a:srgbClr val="EAEAEA"/>
+          </a:solidFill>
+          <a:ln w="6350">
+            <a:solidFill>
+              <a:srgbClr val="999999"/>
+            </a:solidFill>
+            <a:prstDash val="solid"/>
+          </a:ln>
+        </p:spPr>
+      </p:sp>
+      <p:sp>
+        <p:nvSpPr>
+          <p:cNvPr id="44" name="Text 42"/>
+          <p:cNvSpPr/>
+          <p:nvPr/>
+        </p:nvSpPr>
+        <p:spPr>
+          <a:xfrm>
+            <a:off x="2331720" y="3986784"/>
+            <a:ext cx="1143000" cy="548640"/>
+          </a:xfrm>
+          <a:prstGeom prst="rect">
+            <a:avLst/>
+          </a:prstGeom>
+          <a:noFill/>
+          <a:ln/>
+        </p:spPr>
+        <p:txBody>
+          <a:bodyPr wrap="square" lIns="0" tIns="0" rIns="0" bIns="0" rtlCol="0" anchor="ctr"/>
+          <a:lstStyle/>
+          <a:p>
+            <a:pPr algn="ctr" indent="0" marL="0">
+              <a:buNone/>
+            </a:pPr>
+            <a:r>
+              <a:rPr lang="en-US" sz="2000" b="1" dirty="0">
+                <a:solidFill>
+                  <a:srgbClr val="555555"/>
+                </a:solidFill>
+              </a:rPr>
+              <a:t>36</a:t>
+            </a:r>
+            <a:endParaRPr lang="en-US" sz="2000" dirty="0"/>
+          </a:p>
+          <a:p>
+            <a:pPr algn="ctr" indent="0" marL="0">
+              <a:buNone/>
+            </a:pPr>
+            <a:r>
+              <a:rPr lang="en-US" sz="900" dirty="0">
+                <a:solidFill>
+                  <a:srgbClr val="666666"/>
+                </a:solidFill>
+              </a:rPr>
+              <a:t>TN</a:t>
+            </a:r>
+            <a:endParaRPr lang="en-US" sz="2000" dirty="0"/>
+          </a:p>
+        </p:txBody>
+      </p:sp>
+      <p:sp>
+        <p:nvSpPr>
+          <p:cNvPr id="45" name="Text 43"/>
+          <p:cNvSpPr/>
+          <p:nvPr/>
+        </p:nvSpPr>
+        <p:spPr>
+          <a:xfrm>
+            <a:off x="640080" y="4553712"/>
+            <a:ext cx="2834640" cy="201168"/>
+          </a:xfrm>
+          <a:prstGeom prst="rect">
+            <a:avLst/>
+          </a:prstGeom>
+          <a:noFill/>
+          <a:ln/>
+        </p:spPr>
+        <p:txBody>
+          <a:bodyPr wrap="square" lIns="0" tIns="0" rIns="0" bIns="0" rtlCol="0" anchor="ctr"/>
+          <a:lstStyle/>
+          <a:p>
+            <a:pPr algn="ctr" indent="0" marL="0">
+              <a:buNone/>
+            </a:pPr>
+            <a:r>
+              <a:rPr lang="en-US" sz="1100" i="1" dirty="0">
+                <a:solidFill>
+                  <a:srgbClr val="555555"/>
+                </a:solidFill>
+              </a:rPr>
+              <a:t>Precision </a:t>
+            </a:r>
+            <a:pPr algn="ctr" indent="0" marL="0">
+              <a:buNone/>
+            </a:pPr>
+            <a:r>
+              <a:rPr lang="en-US" sz="1100" b="1" i="1" dirty="0">
+                <a:solidFill>
+                  <a:srgbClr val="1A1A1A"/>
+                </a:solidFill>
+              </a:rPr>
+              <a:t>1.00</a:t>
+            </a:r>
+            <a:pPr algn="ctr" indent="0" marL="0">
+              <a:buNone/>
+            </a:pPr>
+            <a:r>
+              <a:rPr lang="en-US" sz="1100" i="1" dirty="0">
+                <a:solidFill>
+                  <a:srgbClr val="555555"/>
+                </a:solidFill>
+              </a:rPr>
+              <a:t>   ·   Recall </a:t>
+            </a:r>
+            <a:pPr algn="ctr" indent="0" marL="0">
+              <a:buNone/>
+            </a:pPr>
+            <a:r>
+              <a:rPr lang="en-US" sz="1100" b="1" i="1" dirty="0">
+                <a:solidFill>
+                  <a:srgbClr val="1A1A1A"/>
+                </a:solidFill>
+              </a:rPr>
+              <a:t>1.00</a:t>
+            </a:r>
+            <a:endParaRPr lang="en-US" sz="1100" dirty="0"/>
+          </a:p>
+        </p:txBody>
+      </p:sp>
+      <p:sp>
+        <p:nvSpPr>
+          <p:cNvPr id="46" name="Text 44"/>
+          <p:cNvSpPr/>
+          <p:nvPr/>
+        </p:nvSpPr>
+        <p:spPr>
+          <a:xfrm>
+            <a:off x="4754880" y="2926080"/>
+            <a:ext cx="2834640" cy="201168"/>
+          </a:xfrm>
+          <a:prstGeom prst="rect">
+            <a:avLst/>
+          </a:prstGeom>
+          <a:noFill/>
+          <a:ln/>
+        </p:spPr>
+        <p:txBody>
+          <a:bodyPr wrap="square" lIns="0" tIns="0" rIns="0" bIns="0" rtlCol="0" anchor="b"/>
+          <a:lstStyle/>
+          <a:p>
+            <a:pPr algn="ctr" indent="0" marL="0">
+              <a:buNone/>
+            </a:pPr>
+            <a:r>
+              <a:rPr lang="en-US" sz="1400" b="1" dirty="0">
+                <a:solidFill>
+                  <a:srgbClr val="000000"/>
+                </a:solidFill>
+              </a:rPr>
+              <a:t>Hygiene</a:t>
+            </a:r>
+            <a:endParaRPr lang="en-US" sz="1400" dirty="0"/>
+          </a:p>
+        </p:txBody>
+      </p:sp>
+      <p:sp>
+        <p:nvSpPr>
+          <p:cNvPr id="47" name="Text 45"/>
+          <p:cNvSpPr/>
+          <p:nvPr/>
+        </p:nvSpPr>
+        <p:spPr>
+          <a:xfrm>
+            <a:off x="5303520" y="3145536"/>
+            <a:ext cx="1143000" cy="201168"/>
+          </a:xfrm>
+          <a:prstGeom prst="rect">
+            <a:avLst/>
+          </a:prstGeom>
+          <a:noFill/>
+          <a:ln/>
+        </p:spPr>
+        <p:txBody>
+          <a:bodyPr wrap="square" lIns="0" tIns="0" rIns="0" bIns="0" rtlCol="0" anchor="ctr"/>
+          <a:lstStyle/>
+          <a:p>
+            <a:pPr algn="ctr" indent="0" marL="0">
+              <a:buNone/>
+            </a:pPr>
+            <a:r>
+              <a:rPr lang="en-US" sz="900" i="1" dirty="0">
+                <a:solidFill>
+                  <a:srgbClr val="555555"/>
+                </a:solidFill>
+              </a:rPr>
+              <a:t>Predicted +</a:t>
+            </a:r>
+            <a:endParaRPr lang="en-US" sz="900" dirty="0"/>
+          </a:p>
+        </p:txBody>
+      </p:sp>
+      <p:sp>
+        <p:nvSpPr>
+          <p:cNvPr id="48" name="Text 46"/>
+          <p:cNvSpPr/>
+          <p:nvPr/>
+        </p:nvSpPr>
+        <p:spPr>
+          <a:xfrm>
+            <a:off x="6446520" y="3145536"/>
+            <a:ext cx="1143000" cy="201168"/>
+          </a:xfrm>
+          <a:prstGeom prst="rect">
+            <a:avLst/>
+          </a:prstGeom>
+          <a:noFill/>
+          <a:ln/>
+        </p:spPr>
+        <p:txBody>
+          <a:bodyPr wrap="square" lIns="0" tIns="0" rIns="0" bIns="0" rtlCol="0" anchor="ctr"/>
+          <a:lstStyle/>
+          <a:p>
+            <a:pPr algn="ctr" indent="0" marL="0">
+              <a:buNone/>
+            </a:pPr>
+            <a:r>
+              <a:rPr lang="en-US" sz="900" i="1" dirty="0">
+                <a:solidFill>
+                  <a:srgbClr val="555555"/>
+                </a:solidFill>
+              </a:rPr>
+              <a:t>Predicted −</a:t>
+            </a:r>
+            <a:endParaRPr lang="en-US" sz="900" dirty="0"/>
+          </a:p>
+        </p:txBody>
+      </p:sp>
+      <p:sp>
+        <p:nvSpPr>
+          <p:cNvPr id="49" name="Text 47"/>
+          <p:cNvSpPr/>
+          <p:nvPr/>
+        </p:nvSpPr>
+        <p:spPr>
+          <a:xfrm>
+            <a:off x="4754880" y="3364992"/>
+            <a:ext cx="548640" cy="548640"/>
+          </a:xfrm>
+          <a:prstGeom prst="rect">
+            <a:avLst/>
+          </a:prstGeom>
+          <a:noFill/>
+          <a:ln/>
+        </p:spPr>
+        <p:txBody>
+          <a:bodyPr wrap="square" lIns="508" tIns="508" rIns="508" bIns="508" rtlCol="0" anchor="ctr"/>
+          <a:lstStyle/>
+          <a:p>
+            <a:pPr algn="r" indent="0" marL="0">
+              <a:buNone/>
+            </a:pPr>
+            <a:r>
+              <a:rPr lang="en-US" sz="900" i="1" dirty="0">
+                <a:solidFill>
+                  <a:srgbClr val="555555"/>
+                </a:solidFill>
+              </a:rPr>
+              <a:t>Actual +</a:t>
+            </a:r>
+            <a:endParaRPr lang="en-US" sz="900" dirty="0"/>
+          </a:p>
+        </p:txBody>
+      </p:sp>
+      <p:sp>
+        <p:nvSpPr>
+          <p:cNvPr id="50" name="Text 48"/>
+          <p:cNvSpPr/>
+          <p:nvPr/>
+        </p:nvSpPr>
+        <p:spPr>
+          <a:xfrm>
+            <a:off x="4754880" y="3913632"/>
+            <a:ext cx="548640" cy="548640"/>
+          </a:xfrm>
+          <a:prstGeom prst="rect">
+            <a:avLst/>
+          </a:prstGeom>
+          <a:noFill/>
+          <a:ln/>
+        </p:spPr>
+        <p:txBody>
+          <a:bodyPr wrap="square" lIns="508" tIns="508" rIns="508" bIns="508" rtlCol="0" anchor="ctr"/>
+          <a:lstStyle/>
+          <a:p>
+            <a:pPr algn="r" indent="0" marL="0">
+              <a:buNone/>
+            </a:pPr>
+            <a:r>
+              <a:rPr lang="en-US" sz="900" i="1" dirty="0">
+                <a:solidFill>
+                  <a:srgbClr val="555555"/>
+                </a:solidFill>
+              </a:rPr>
+              <a:t>Actual −</a:t>
+            </a:r>
+            <a:endParaRPr lang="en-US" sz="900" dirty="0"/>
+          </a:p>
+        </p:txBody>
+      </p:sp>
+      <p:sp>
+        <p:nvSpPr>
+          <p:cNvPr id="51" name="Shape 49"/>
+          <p:cNvSpPr/>
+          <p:nvPr/>
+        </p:nvSpPr>
+        <p:spPr>
+          <a:xfrm>
+            <a:off x="5303520" y="3438144"/>
+            <a:ext cx="1143000" cy="548640"/>
+          </a:xfrm>
+          <a:prstGeom prst="rect">
+            <a:avLst/>
+          </a:prstGeom>
+          <a:solidFill>
+            <a:srgbClr val="D4F0DC"/>
+          </a:solidFill>
+          <a:ln w="6350">
+            <a:solidFill>
+              <a:srgbClr val="999999"/>
+            </a:solidFill>
+            <a:prstDash val="solid"/>
+          </a:ln>
+        </p:spPr>
+      </p:sp>
+      <p:sp>
+        <p:nvSpPr>
+          <p:cNvPr id="52" name="Text 50"/>
+          <p:cNvSpPr/>
+          <p:nvPr/>
+        </p:nvSpPr>
+        <p:spPr>
+          <a:xfrm>
+            <a:off x="5303520" y="3438144"/>
+            <a:ext cx="1143000" cy="548640"/>
+          </a:xfrm>
+          <a:prstGeom prst="rect">
+            <a:avLst/>
+          </a:prstGeom>
+          <a:noFill/>
+          <a:ln/>
+        </p:spPr>
+        <p:txBody>
+          <a:bodyPr wrap="square" lIns="0" tIns="0" rIns="0" bIns="0" rtlCol="0" anchor="ctr"/>
+          <a:lstStyle/>
+          <a:p>
+            <a:pPr algn="ctr" indent="0" marL="0">
+              <a:buNone/>
+            </a:pPr>
+            <a:r>
+              <a:rPr lang="en-US" sz="2000" b="1" dirty="0">
+                <a:solidFill>
+                  <a:srgbClr val="0A7D2A"/>
+                </a:solidFill>
+              </a:rPr>
+              <a:t>8</a:t>
+            </a:r>
+            <a:endParaRPr lang="en-US" sz="2000" dirty="0"/>
+          </a:p>
+          <a:p>
+            <a:pPr algn="ctr" indent="0" marL="0">
+              <a:buNone/>
+            </a:pPr>
+            <a:r>
+              <a:rPr lang="en-US" sz="900" dirty="0">
+                <a:solidFill>
+                  <a:srgbClr val="666666"/>
+                </a:solidFill>
+              </a:rPr>
+              <a:t>TP</a:t>
+            </a:r>
+            <a:endParaRPr lang="en-US" sz="2000" dirty="0"/>
+          </a:p>
+        </p:txBody>
+      </p:sp>
+      <p:sp>
+        <p:nvSpPr>
+          <p:cNvPr id="53" name="Shape 51"/>
+          <p:cNvSpPr/>
+          <p:nvPr/>
+        </p:nvSpPr>
+        <p:spPr>
+          <a:xfrm>
+            <a:off x="6446520" y="3438144"/>
+            <a:ext cx="1143000" cy="548640"/>
+          </a:xfrm>
+          <a:prstGeom prst="rect">
+            <a:avLst/>
+          </a:prstGeom>
+          <a:solidFill>
+            <a:srgbClr val="F5D5CE"/>
+          </a:solidFill>
+          <a:ln w="6350">
+            <a:solidFill>
+              <a:srgbClr val="999999"/>
+            </a:solidFill>
+            <a:prstDash val="solid"/>
+          </a:ln>
+        </p:spPr>
+      </p:sp>
+      <p:sp>
+        <p:nvSpPr>
+          <p:cNvPr id="54" name="Text 52"/>
+          <p:cNvSpPr/>
+          <p:nvPr/>
+        </p:nvSpPr>
+        <p:spPr>
+          <a:xfrm>
+            <a:off x="6446520" y="3438144"/>
+            <a:ext cx="1143000" cy="548640"/>
+          </a:xfrm>
+          <a:prstGeom prst="rect">
+            <a:avLst/>
+          </a:prstGeom>
+          <a:noFill/>
+          <a:ln/>
+        </p:spPr>
+        <p:txBody>
+          <a:bodyPr wrap="square" lIns="0" tIns="0" rIns="0" bIns="0" rtlCol="0" anchor="ctr"/>
+          <a:lstStyle/>
+          <a:p>
+            <a:pPr algn="ctr" indent="0" marL="0">
+              <a:buNone/>
+            </a:pPr>
+            <a:r>
+              <a:rPr lang="en-US" sz="2000" b="1" dirty="0">
+                <a:solidFill>
+                  <a:srgbClr val="B33A1E"/>
+                </a:solidFill>
+              </a:rPr>
+              <a:t>0</a:t>
+            </a:r>
+            <a:endParaRPr lang="en-US" sz="2000" dirty="0"/>
+          </a:p>
+          <a:p>
+            <a:pPr algn="ctr" indent="0" marL="0">
+              <a:buNone/>
+            </a:pPr>
+            <a:r>
+              <a:rPr lang="en-US" sz="900" dirty="0">
+                <a:solidFill>
+                  <a:srgbClr val="666666"/>
+                </a:solidFill>
+              </a:rPr>
+              <a:t>FN</a:t>
+            </a:r>
+            <a:endParaRPr lang="en-US" sz="2000" dirty="0"/>
+          </a:p>
+        </p:txBody>
+      </p:sp>
+      <p:sp>
+        <p:nvSpPr>
+          <p:cNvPr id="55" name="Shape 53"/>
+          <p:cNvSpPr/>
+          <p:nvPr/>
+        </p:nvSpPr>
+        <p:spPr>
+          <a:xfrm>
+            <a:off x="5303520" y="3986784"/>
+            <a:ext cx="1143000" cy="548640"/>
+          </a:xfrm>
+          <a:prstGeom prst="rect">
+            <a:avLst/>
+          </a:prstGeom>
+          <a:solidFill>
+            <a:srgbClr val="F2F2F2"/>
+          </a:solidFill>
+          <a:ln w="6350">
+            <a:solidFill>
+              <a:srgbClr val="999999"/>
+            </a:solidFill>
+            <a:prstDash val="solid"/>
+          </a:ln>
+        </p:spPr>
+      </p:sp>
+      <p:sp>
+        <p:nvSpPr>
+          <p:cNvPr id="56" name="Text 54"/>
+          <p:cNvSpPr/>
+          <p:nvPr/>
+        </p:nvSpPr>
+        <p:spPr>
+          <a:xfrm>
+            <a:off x="5303520" y="3986784"/>
+            <a:ext cx="1143000" cy="548640"/>
+          </a:xfrm>
+          <a:prstGeom prst="rect">
+            <a:avLst/>
+          </a:prstGeom>
+          <a:noFill/>
+          <a:ln/>
+        </p:spPr>
+        <p:txBody>
+          <a:bodyPr wrap="square" lIns="0" tIns="0" rIns="0" bIns="0" rtlCol="0" anchor="ctr"/>
+          <a:lstStyle/>
+          <a:p>
+            <a:pPr algn="ctr" indent="0" marL="0">
+              <a:buNone/>
+            </a:pPr>
+            <a:r>
+              <a:rPr lang="en-US" sz="2000" b="1" dirty="0">
+                <a:solidFill>
+                  <a:srgbClr val="888888"/>
+                </a:solidFill>
+              </a:rPr>
+              <a:t>0</a:t>
+            </a:r>
+            <a:endParaRPr lang="en-US" sz="2000" dirty="0"/>
+          </a:p>
+          <a:p>
+            <a:pPr algn="ctr" indent="0" marL="0">
+              <a:buNone/>
+            </a:pPr>
+            <a:r>
+              <a:rPr lang="en-US" sz="900" dirty="0">
+                <a:solidFill>
+                  <a:srgbClr val="666666"/>
+                </a:solidFill>
+              </a:rPr>
+              <a:t>FP</a:t>
+            </a:r>
+            <a:endParaRPr lang="en-US" sz="2000" dirty="0"/>
+          </a:p>
+        </p:txBody>
+      </p:sp>
+      <p:sp>
+        <p:nvSpPr>
+          <p:cNvPr id="57" name="Shape 55"/>
+          <p:cNvSpPr/>
+          <p:nvPr/>
+        </p:nvSpPr>
+        <p:spPr>
+          <a:xfrm>
+            <a:off x="6446520" y="3986784"/>
+            <a:ext cx="1143000" cy="548640"/>
+          </a:xfrm>
+          <a:prstGeom prst="rect">
+            <a:avLst/>
+          </a:prstGeom>
+          <a:solidFill>
+            <a:srgbClr val="EAEAEA"/>
+          </a:solidFill>
+          <a:ln w="6350">
+            <a:solidFill>
+              <a:srgbClr val="999999"/>
+            </a:solidFill>
+            <a:prstDash val="solid"/>
+          </a:ln>
+        </p:spPr>
+      </p:sp>
+      <p:sp>
+        <p:nvSpPr>
+          <p:cNvPr id="58" name="Text 56"/>
+          <p:cNvSpPr/>
+          <p:nvPr/>
+        </p:nvSpPr>
+        <p:spPr>
+          <a:xfrm>
+            <a:off x="6446520" y="3986784"/>
+            <a:ext cx="1143000" cy="548640"/>
+          </a:xfrm>
+          <a:prstGeom prst="rect">
+            <a:avLst/>
+          </a:prstGeom>
+          <a:noFill/>
+          <a:ln/>
+        </p:spPr>
+        <p:txBody>
+          <a:bodyPr wrap="square" lIns="0" tIns="0" rIns="0" bIns="0" rtlCol="0" anchor="ctr"/>
+          <a:lstStyle/>
+          <a:p>
+            <a:pPr algn="ctr" indent="0" marL="0">
+              <a:buNone/>
+            </a:pPr>
+            <a:r>
+              <a:rPr lang="en-US" sz="2000" b="1" dirty="0">
+                <a:solidFill>
+                  <a:srgbClr val="555555"/>
+                </a:solidFill>
+              </a:rPr>
+              <a:t>37</a:t>
+            </a:r>
+            <a:endParaRPr lang="en-US" sz="2000" dirty="0"/>
+          </a:p>
+          <a:p>
+            <a:pPr algn="ctr" indent="0" marL="0">
+              <a:buNone/>
+            </a:pPr>
+            <a:r>
+              <a:rPr lang="en-US" sz="900" dirty="0">
+                <a:solidFill>
+                  <a:srgbClr val="666666"/>
+                </a:solidFill>
+              </a:rPr>
+              <a:t>TN</a:t>
+            </a:r>
+            <a:endParaRPr lang="en-US" sz="2000" dirty="0"/>
+          </a:p>
+        </p:txBody>
+      </p:sp>
+      <p:sp>
+        <p:nvSpPr>
+          <p:cNvPr id="59" name="Text 57"/>
+          <p:cNvSpPr/>
+          <p:nvPr/>
+        </p:nvSpPr>
+        <p:spPr>
+          <a:xfrm>
+            <a:off x="4754880" y="4553712"/>
+            <a:ext cx="2834640" cy="201168"/>
+          </a:xfrm>
+          <a:prstGeom prst="rect">
+            <a:avLst/>
+          </a:prstGeom>
+          <a:noFill/>
+          <a:ln/>
+        </p:spPr>
+        <p:txBody>
+          <a:bodyPr wrap="square" lIns="0" tIns="0" rIns="0" bIns="0" rtlCol="0" anchor="ctr"/>
+          <a:lstStyle/>
+          <a:p>
+            <a:pPr algn="ctr" indent="0" marL="0">
+              <a:buNone/>
+            </a:pPr>
+            <a:r>
+              <a:rPr lang="en-US" sz="1100" i="1" dirty="0">
+                <a:solidFill>
+                  <a:srgbClr val="555555"/>
+                </a:solidFill>
+              </a:rPr>
+              <a:t>Precision </a:t>
+            </a:r>
+            <a:pPr algn="ctr" indent="0" marL="0">
+              <a:buNone/>
+            </a:pPr>
+            <a:r>
+              <a:rPr lang="en-US" sz="1100" b="1" i="1" dirty="0">
+                <a:solidFill>
+                  <a:srgbClr val="1A1A1A"/>
+                </a:solidFill>
+              </a:rPr>
+              <a:t>1.00</a:t>
+            </a:r>
+            <a:pPr algn="ctr" indent="0" marL="0">
+              <a:buNone/>
+            </a:pPr>
+            <a:r>
+              <a:rPr lang="en-US" sz="1100" i="1" dirty="0">
+                <a:solidFill>
+                  <a:srgbClr val="555555"/>
+                </a:solidFill>
+              </a:rPr>
+              <a:t>   ·   Recall </a:t>
+            </a:r>
+            <a:pPr algn="ctr" indent="0" marL="0">
+              <a:buNone/>
+            </a:pPr>
+            <a:r>
+              <a:rPr lang="en-US" sz="1100" b="1" i="1" dirty="0">
+                <a:solidFill>
+                  <a:srgbClr val="1A1A1A"/>
+                </a:solidFill>
+              </a:rPr>
+              <a:t>1.00</a:t>
+            </a:r>
+            <a:endParaRPr lang="en-US" sz="1100" dirty="0"/>
+          </a:p>
+        </p:txBody>
+      </p:sp>
+      <p:sp>
+        <p:nvSpPr>
+          <p:cNvPr id="60" name="Text 58"/>
+          <p:cNvSpPr/>
+          <p:nvPr/>
+        </p:nvSpPr>
+        <p:spPr>
+          <a:xfrm>
+            <a:off x="365760" y="4846320"/>
+            <a:ext cx="8412480" cy="256032"/>
+          </a:xfrm>
+          <a:prstGeom prst="rect">
+            <a:avLst/>
+          </a:prstGeom>
+          <a:noFill/>
+          <a:ln/>
+        </p:spPr>
+        <p:txBody>
+          <a:bodyPr wrap="square" lIns="0" tIns="0" rIns="0" bIns="0" rtlCol="0" anchor="ctr"/>
+          <a:lstStyle/>
+          <a:p>
+            <a:pPr algn="ctr" indent="0" marL="0">
+              <a:buNone/>
+            </a:pPr>
+            <a:r>
+              <a:rPr lang="en-US" sz="900" i="1" dirty="0">
+                <a:solidFill>
+                  <a:srgbClr val="555555"/>
+                </a:solidFill>
+              </a:rPr>
+              <a:t>Ordering recall is the outlier: the reorder synthesiser's splitOnInvalid validator rejects any window containing a step it cannot safely.</a:t>
+            </a:r>
+            <a:endParaRPr lang="en-US" sz="900" dirty="0"/>
+          </a:p>
+        </p:txBody>
+      </p:sp>
+    </p:spTree>
+  </p:cSld>
+  <p:clrMapOvr>
+    <a:masterClrMapping/>
+  </p:clrMapOvr>
+</p:sld>
+</file>
+
+<file path=ppt/slides/slide17.xml><?xml version="1.0" encoding="utf-8"?>
+<p:sld xmlns:a="http://schemas.openxmlformats.org/drawingml/2006/main" xmlns:r="http://schemas.openxmlformats.org/officeDocument/2006/relationships" xmlns:p="http://schemas.openxmlformats.org/presentationml/2006/main">
+  <p:cSld name="Slide 17">
+    <p:spTree>
+      <p:nvGrpSpPr>
+        <p:cNvPr id="1" name=""/>
+        <p:cNvGrpSpPr/>
+        <p:nvPr/>
+      </p:nvGrpSpPr>
+      <p:grpSpPr>
+        <a:xfrm>
+          <a:off x="0" y="0"/>
+          <a:ext cx="0" cy="0"/>
+          <a:chOff x="0" y="0"/>
+          <a:chExt cx="0" cy="0"/>
+        </a:xfrm>
+      </p:grpSpPr>
+      <p:sp>
+        <p:nvSpPr>
+          <p:cNvPr id="2" name="Text 0"/>
+          <p:cNvSpPr/>
+          <p:nvPr/>
+        </p:nvSpPr>
+        <p:spPr>
+          <a:xfrm>
+            <a:off x="457200" y="91440"/>
+            <a:ext cx="8229600" cy="548640"/>
+          </a:xfrm>
+          <a:prstGeom prst="rect">
+            <a:avLst/>
+          </a:prstGeom>
+          <a:noFill/>
+          <a:ln/>
+        </p:spPr>
+        <p:txBody>
+          <a:bodyPr wrap="square" lIns="0" tIns="0" rIns="0" bIns="0" rtlCol="0" anchor="ctr"/>
+          <a:lstStyle/>
+          <a:p>
+            <a:pPr indent="0" marL="0">
+              <a:buNone/>
+            </a:pPr>
+            <a:r>
+              <a:rPr lang="en-US" sz="2800" b="1" dirty="0">
+                <a:solidFill>
+                  <a:srgbClr val="000000"/>
+                </a:solidFill>
+              </a:rPr>
               <a:t>Are the alternatives actually better?</a:t>
             </a:r>
             <a:endParaRPr lang="en-US" sz="2800" dirty="0"/>
@@ -8563,7 +9027,7 @@
       </p:sp>
       <p:graphicFrame>
         <p:nvGraphicFramePr>
-          <p:cNvPr id="17" name="Table 0"/>
+          <p:cNvPr id="18" name="Table 0"/>
           <p:cNvGraphicFramePr>
             <a:graphicFrameLocks noGrp="1"/>
           </p:cNvGraphicFramePr>
@@ -10748,253 +11212,6 @@
 </p:sld>
 </file>
 
-<file path=ppt/slides/slide17.xml><?xml version="1.0" encoding="utf-8"?>
-<p:sld xmlns:a="http://schemas.openxmlformats.org/drawingml/2006/main" xmlns:r="http://schemas.openxmlformats.org/officeDocument/2006/relationships" xmlns:p="http://schemas.openxmlformats.org/presentationml/2006/main">
-  <p:cSld name="Slide 17">
-    <p:spTree>
-      <p:nvGrpSpPr>
-        <p:cNvPr id="1" name=""/>
-        <p:cNvGrpSpPr/>
-        <p:nvPr/>
-      </p:nvGrpSpPr>
-      <p:grpSpPr>
-        <a:xfrm>
-          <a:off x="0" y="0"/>
-          <a:ext cx="0" cy="0"/>
-          <a:chOff x="0" y="0"/>
-          <a:chExt cx="0" cy="0"/>
-        </a:xfrm>
-      </p:grpSpPr>
-      <p:sp>
-        <p:nvSpPr>
-          <p:cNvPr id="2" name="Text 0"/>
-          <p:cNvSpPr/>
-          <p:nvPr/>
-        </p:nvSpPr>
-        <p:spPr>
-          <a:xfrm>
-            <a:off x="457200" y="274320"/>
-            <a:ext cx="8229600" cy="640080"/>
-          </a:xfrm>
-          <a:prstGeom prst="rect">
-            <a:avLst/>
-          </a:prstGeom>
-          <a:noFill/>
-          <a:ln/>
-        </p:spPr>
-        <p:txBody>
-          <a:bodyPr wrap="square" lIns="0" tIns="0" rIns="0" bIns="0" rtlCol="0" anchor="ctr"/>
-          <a:lstStyle/>
-          <a:p>
-            <a:pPr indent="0" marL="0">
-              <a:buNone/>
-            </a:pPr>
-            <a:r>
-              <a:rPr lang="en-US" sz="2800" b="1" dirty="0">
-                <a:solidFill>
-                  <a:srgbClr val="000000"/>
-                </a:solidFill>
-              </a:rPr>
-              <a:t>Is the process score reliable?</a:t>
-            </a:r>
-            <a:endParaRPr lang="en-US" sz="2800" dirty="0"/>
-          </a:p>
-        </p:txBody>
-      </p:sp>
-      <p:sp>
-        <p:nvSpPr>
-          <p:cNvPr id="3" name="Text 1"/>
-          <p:cNvSpPr/>
-          <p:nvPr/>
-        </p:nvSpPr>
-        <p:spPr>
-          <a:xfrm>
-            <a:off x="457200" y="1188720"/>
-            <a:ext cx="8229600" cy="3657600"/>
-          </a:xfrm>
-          <a:prstGeom prst="rect">
-            <a:avLst/>
-          </a:prstGeom>
-          <a:noFill/>
-          <a:ln/>
-        </p:spPr>
-        <p:txBody>
-          <a:bodyPr wrap="square" rtlCol="0" anchor="t"/>
-          <a:lstStyle/>
-          <a:p>
-            <a:pPr marL="342900" indent="-342900">
-              <a:spcAft>
-                <a:spcPts val="600"/>
-              </a:spcAft>
-              <a:buSzPct val="100000"/>
-              <a:buChar char="•"/>
-            </a:pPr>
-            <a:r>
-              <a:rPr lang="en-US" sz="1500" b="1" dirty="0">
-                <a:solidFill>
-                  <a:srgbClr val="000000"/>
-                </a:solidFill>
-              </a:rPr>
-              <a:t>How stable is the score?</a:t>
-            </a:r>
-            <a:endParaRPr lang="en-US" sz="1500" dirty="0"/>
-          </a:p>
-          <a:p>
-            <a:pPr lvl="1" marL="762000" indent="-381000">
-              <a:spcAft>
-                <a:spcPts val="600"/>
-              </a:spcAft>
-              <a:buSzPct val="100000"/>
-              <a:buChar char="•"/>
-            </a:pPr>
-            <a:r>
-              <a:rPr lang="en-US" sz="1500" dirty="0">
-                <a:solidFill>
-                  <a:srgbClr val="000000"/>
-                </a:solidFill>
-              </a:rPr>
-              <a:t>Two perturbation sweeps </a:t>
-            </a:r>
-            <a:pPr indent="0" marL="0">
-              <a:spcAft>
-                <a:spcPts val="600"/>
-              </a:spcAft>
-              <a:buNone/>
-            </a:pPr>
-            <a:r>
-              <a:rPr lang="en-US" sz="1500" dirty="0">
-                <a:solidFill>
-                  <a:srgbClr val="888888"/>
-                </a:solidFill>
-              </a:rPr>
-              <a:t>- single-knob (one weight scaled ×0.1 to ×10) + multi-knob Monte Carlo (200 samples, σ = ln 2, so ~×0.25 to ×4 of production).</a:t>
-            </a:r>
-            <a:endParaRPr lang="en-US" sz="1500" dirty="0"/>
-          </a:p>
-          <a:p>
-            <a:pPr lvl="1" marL="762000" indent="-381000">
-              <a:spcAft>
-                <a:spcPts val="1800"/>
-              </a:spcAft>
-              <a:buSzPct val="100000"/>
-              <a:buChar char="•"/>
-            </a:pPr>
-            <a:r>
-              <a:rPr lang="en-US" sz="1500" dirty="0">
-                <a:solidFill>
-                  <a:srgbClr val="000000"/>
-                </a:solidFill>
-              </a:rPr>
-              <a:t>Stability metrics </a:t>
-            </a:r>
-            <a:pPr indent="0" marL="0">
-              <a:spcAft>
-                <a:spcPts val="1800"/>
-              </a:spcAft>
-              <a:buNone/>
-            </a:pPr>
-            <a:r>
-              <a:rPr lang="en-US" sz="1500" dirty="0">
-                <a:solidFill>
-                  <a:srgbClr val="888888"/>
-                </a:solidFill>
-              </a:rPr>
-              <a:t>- top-1 hit rate (does the top-ranked DP stay on top?) + Kendall's τ-b on per-session rankings.</a:t>
-            </a:r>
-            <a:endParaRPr lang="en-US" sz="1500" dirty="0"/>
-          </a:p>
-          <a:p>
-            <a:pPr marL="342900" indent="-342900">
-              <a:spcAft>
-                <a:spcPts val="600"/>
-              </a:spcAft>
-              <a:buSzPct val="100000"/>
-              <a:buChar char="•"/>
-            </a:pPr>
-            <a:r>
-              <a:rPr lang="en-US" sz="1500" b="1" dirty="0">
-                <a:solidFill>
-                  <a:srgbClr val="000000"/>
-                </a:solidFill>
-              </a:rPr>
-              <a:t>Does every component of the process score hold weight?</a:t>
-            </a:r>
-            <a:endParaRPr lang="en-US" sz="1500" dirty="0"/>
-          </a:p>
-          <a:p>
-            <a:pPr lvl="1" marL="762000" indent="-381000">
-              <a:spcAft>
-                <a:spcPts val="600"/>
-              </a:spcAft>
-              <a:buSzPct val="100000"/>
-              <a:buChar char="•"/>
-            </a:pPr>
-            <a:r>
-              <a:rPr lang="en-US" sz="1500" dirty="0">
-                <a:solidFill>
-                  <a:srgbClr val="000000"/>
-                </a:solidFill>
-              </a:rPr>
-              <a:t>Process-side ablation </a:t>
-            </a:r>
-            <a:pPr indent="0" marL="0">
-              <a:spcAft>
-                <a:spcPts val="600"/>
-              </a:spcAft>
-              <a:buNone/>
-            </a:pPr>
-            <a:r>
-              <a:rPr lang="en-US" sz="1500" dirty="0">
-                <a:solidFill>
-                  <a:srgbClr val="888888"/>
-                </a:solidFill>
-              </a:rPr>
-              <a:t>- enumerate all 2⁷ = 128 subsets of the 7 process weights → 5,760 cases per session set.</a:t>
-            </a:r>
-            <a:endParaRPr lang="en-US" sz="1500" dirty="0"/>
-          </a:p>
-          <a:p>
-            <a:pPr lvl="1" marL="762000" indent="-381000">
-              <a:spcAft>
-                <a:spcPts val="600"/>
-              </a:spcAft>
-              <a:buSzPct val="100000"/>
-              <a:buChar char="•"/>
-            </a:pPr>
-            <a:r>
-              <a:rPr lang="en-US" sz="1500" dirty="0">
-                <a:solidFill>
-                  <a:srgbClr val="000000"/>
-                </a:solidFill>
-              </a:rPr>
-              <a:t>Recovery metrics </a:t>
-            </a:r>
-            <a:pPr indent="0" marL="0">
-              <a:spcAft>
-                <a:spcPts val="600"/>
-              </a:spcAft>
-              <a:buNone/>
-            </a:pPr>
-            <a:r>
-              <a:rPr lang="en-US" sz="1500" dirty="0">
-                <a:solidFill>
-                  <a:srgbClr val="888888"/>
-                </a:solidFill>
-              </a:rPr>
-              <a:t>- sum-over-sum magnitude recovery (does the term carry signal?) + leave-one-out Kendall's τ-b (does removing it reshuffle rankings?).</a:t>
-            </a:r>
-            <a:endParaRPr lang="en-US" sz="1500" dirty="0"/>
-          </a:p>
-        </p:txBody>
-      </p:sp>
-    </p:spTree>
-  </p:cSld>
-  <p:clrMapOvr>
-    <a:masterClrMapping/>
-  </p:clrMapOvr>
-</p:sld>
-</file>
-
 <file path=ppt/slides/slide18.xml><?xml version="1.0" encoding="utf-8"?>
 <p:sld xmlns:a="http://schemas.openxmlformats.org/drawingml/2006/main" xmlns:r="http://schemas.openxmlformats.org/officeDocument/2006/relationships" xmlns:p="http://schemas.openxmlformats.org/presentationml/2006/main">
   <p:cSld name="Slide 18">
@@ -11020,8 +11237,8 @@
         </p:nvSpPr>
         <p:spPr>
           <a:xfrm>
-            <a:off x="457200" y="274320"/>
-            <a:ext cx="8229600" cy="640080"/>
+            <a:off x="457200" y="2011680"/>
+            <a:ext cx="8229600" cy="1097280"/>
           </a:xfrm>
           <a:prstGeom prst="rect">
             <a:avLst/>
@@ -11033,204 +11250,18 @@
           <a:bodyPr wrap="square" lIns="0" tIns="0" rIns="0" bIns="0" rtlCol="0" anchor="ctr"/>
           <a:lstStyle/>
           <a:p>
-            <a:pPr indent="0" marL="0">
-              <a:buNone/>
-            </a:pPr>
-            <a:r>
-              <a:rPr lang="en-US" sz="2800" b="1" dirty="0">
-                <a:solidFill>
-                  <a:srgbClr val="000000"/>
-                </a:solidFill>
-              </a:rPr>
-              <a:t>Score is locally robust</a:t>
-            </a:r>
-            <a:endParaRPr lang="en-US" sz="2800" dirty="0"/>
-          </a:p>
-        </p:txBody>
-      </p:sp>
-      <p:sp>
-        <p:nvSpPr>
-          <p:cNvPr id="3" name="Text 1"/>
-          <p:cNvSpPr/>
-          <p:nvPr/>
-        </p:nvSpPr>
-        <p:spPr>
-          <a:xfrm>
-            <a:off x="457200" y="1188720"/>
-            <a:ext cx="8229600" cy="3657600"/>
-          </a:xfrm>
-          <a:prstGeom prst="rect">
-            <a:avLst/>
-          </a:prstGeom>
-          <a:noFill/>
-          <a:ln/>
-        </p:spPr>
-        <p:txBody>
-          <a:bodyPr wrap="square" rtlCol="0" anchor="t"/>
-          <a:lstStyle/>
-          <a:p>
-            <a:pPr marL="342900" indent="-342900">
-              <a:spcAft>
-                <a:spcPts val="600"/>
-              </a:spcAft>
-              <a:buSzPct val="100000"/>
-              <a:buChar char="•"/>
-            </a:pPr>
-            <a:r>
-              <a:rPr lang="en-US" sz="1500" b="1" dirty="0">
-                <a:solidFill>
-                  <a:srgbClr val="000000"/>
-                </a:solidFill>
-              </a:rPr>
-              <a:t>How stable is the score?</a:t>
-            </a:r>
-            <a:endParaRPr lang="en-US" sz="1500" dirty="0"/>
-          </a:p>
-          <a:p>
-            <a:pPr lvl="1" marL="762000" indent="-381000">
-              <a:spcAft>
-                <a:spcPts val="600"/>
-              </a:spcAft>
-              <a:buSzPct val="100000"/>
-              <a:buChar char="•"/>
-            </a:pPr>
-            <a:r>
-              <a:rPr lang="en-US" sz="1500" dirty="0">
-                <a:solidFill>
-                  <a:srgbClr val="000000"/>
-                </a:solidFill>
-              </a:rPr>
-              <a:t>Single-knob: 96.5% top-1 preserved </a:t>
-            </a:r>
-            <a:pPr indent="0" marL="0">
-              <a:spcAft>
-                <a:spcPts val="600"/>
-              </a:spcAft>
-              <a:buNone/>
-            </a:pPr>
-            <a:r>
-              <a:rPr lang="en-US" sz="1500" dirty="0">
-                <a:solidFill>
-                  <a:srgbClr val="888888"/>
-                </a:solidFill>
-              </a:rPr>
-              <a:t>- top-ranked DP rarely changes under any one-weight perturbation. Only 1.8% of cases are clamp-frozen, so this is genuine response - not a clamp artefact.</a:t>
-            </a:r>
-            <a:endParaRPr lang="en-US" sz="1500" dirty="0"/>
-          </a:p>
-          <a:p>
-            <a:pPr lvl="1" marL="762000" indent="-381000">
-              <a:spcAft>
-                <a:spcPts val="1800"/>
-              </a:spcAft>
-              <a:buSzPct val="100000"/>
-              <a:buChar char="•"/>
-            </a:pPr>
-            <a:r>
-              <a:rPr lang="en-US" sz="1500" dirty="0">
-                <a:solidFill>
-                  <a:srgbClr val="000000"/>
-                </a:solidFill>
-              </a:rPr>
-              <a:t>Multi-knob: 84.6% top-1 preserved (τ-b = 0.586) </a:t>
-            </a:r>
-            <a:pPr indent="0" marL="0">
-              <a:spcAft>
-                <a:spcPts val="1800"/>
-              </a:spcAft>
-              <a:buNone/>
-            </a:pPr>
-            <a:r>
-              <a:rPr lang="en-US" sz="1500" dirty="0">
-                <a:solidFill>
-                  <a:srgbClr val="888888"/>
-                </a:solidFill>
-              </a:rPr>
-              <a:t>- when all weights move at once, top-1 holds in ~85% of cases and ~79% of pairs still rank in the same order. Meaningful correlation, not full preservation.</a:t>
-            </a:r>
-            <a:endParaRPr lang="en-US" sz="1500" dirty="0"/>
-          </a:p>
-          <a:p>
-            <a:pPr marL="342900" indent="-342900">
-              <a:spcAft>
-                <a:spcPts val="600"/>
-              </a:spcAft>
-              <a:buSzPct val="100000"/>
-              <a:buChar char="•"/>
-            </a:pPr>
-            <a:r>
-              <a:rPr lang="en-US" sz="1500" b="1" dirty="0">
-                <a:solidFill>
-                  <a:srgbClr val="000000"/>
-                </a:solidFill>
-              </a:rPr>
-              <a:t>Does every component of the process score hold weight?</a:t>
-            </a:r>
-            <a:endParaRPr lang="en-US" sz="1500" dirty="0"/>
-          </a:p>
-          <a:p>
-            <a:pPr lvl="1" marL="762000" indent="-381000">
-              <a:spcAft>
-                <a:spcPts val="600"/>
-              </a:spcAft>
-              <a:buSzPct val="100000"/>
-              <a:buChar char="•"/>
-            </a:pPr>
-            <a:r>
-              <a:rPr lang="en-US" sz="1500" dirty="0">
-                <a:solidFill>
-                  <a:srgbClr val="000000"/>
-                </a:solidFill>
-              </a:rPr>
-              <a:t>Length is the rank-carrier (LOO τ-b = 0.527) </a:t>
-            </a:r>
-            <a:pPr indent="0" marL="0">
-              <a:spcAft>
-                <a:spcPts val="600"/>
-              </a:spcAft>
-              <a:buNone/>
-            </a:pPr>
-            <a:r>
-              <a:rPr lang="en-US" sz="1500" dirty="0">
-                <a:solidFill>
-                  <a:srgbClr val="888888"/>
-                </a:solidFill>
-              </a:rPr>
-              <a:t>- removing length reshuffles the per-session ranking more than removing any other process term - the most influential term.</a:t>
-            </a:r>
-            <a:endParaRPr lang="en-US" sz="1500" dirty="0"/>
-          </a:p>
-          <a:p>
-            <a:pPr lvl="1" marL="762000" indent="-381000">
-              <a:spcAft>
-                <a:spcPts val="600"/>
-              </a:spcAft>
-              <a:buSzPct val="100000"/>
-              <a:buChar char="•"/>
-            </a:pPr>
-            <a:r>
-              <a:rPr lang="en-US" sz="1500" dirty="0">
-                <a:solidFill>
-                  <a:srgbClr val="000000"/>
-                </a:solidFill>
-              </a:rPr>
-              <a:t>Cleanliness sub-weights: ≤ 0.9% top-1 disruption </a:t>
-            </a:r>
-            <a:pPr indent="0" marL="0">
-              <a:spcAft>
-                <a:spcPts val="600"/>
-              </a:spcAft>
-              <a:buNone/>
-            </a:pPr>
-            <a:r>
-              <a:rPr lang="en-US" sz="1500" dirty="0">
-                <a:solidFill>
-                  <a:srgbClr val="888888"/>
-                </a:solidFill>
-              </a:rPr>
-              <a:t>- perturbing any single one of the 6 cleanliness signals barely shifts the ranking (~10× less than process weights), so equal-weights for the sub-signals is defensible.</a:t>
-            </a:r>
-            <a:endParaRPr lang="en-US" sz="1500" dirty="0"/>
+            <a:pPr algn="ctr" indent="0" marL="0">
+              <a:buNone/>
+            </a:pPr>
+            <a:r>
+              <a:rPr lang="en-US" sz="3600" b="1" dirty="0">
+                <a:solidFill>
+                  <a:srgbClr val="1A1A1A"/>
+                </a:solidFill>
+              </a:rPr>
+              <a:t>Experiment 2: Is the process score reliable?</a:t>
+            </a:r>
+            <a:endParaRPr lang="en-US" sz="3600" dirty="0"/>
           </a:p>
         </p:txBody>
       </p:sp>
@@ -11289,7 +11320,7 @@
                   <a:srgbClr val="000000"/>
                 </a:solidFill>
               </a:rPr>
-              <a:t>Does dashboard feedback change developer behaviour?</a:t>
+              <a:t>Is the process score reliable?</a:t>
             </a:r>
             <a:endParaRPr lang="en-US" sz="2800" dirty="0"/>
           </a:p>
@@ -11304,7 +11335,7 @@
         <p:spPr>
           <a:xfrm>
             <a:off x="457200" y="1188720"/>
-            <a:ext cx="8229600" cy="3291840"/>
+            <a:ext cx="8229600" cy="3657600"/>
           </a:xfrm>
           <a:prstGeom prst="rect">
             <a:avLst/>
@@ -11329,7 +11360,7 @@
                   <a:srgbClr val="000000"/>
                 </a:solidFill>
               </a:rPr>
-              <a:t>How did we design the study?</a:t>
+              <a:t>How stable is the score?</a:t>
             </a:r>
             <a:endParaRPr lang="en-US" sz="1500" dirty="0"/>
           </a:p>
@@ -11347,7 +11378,7 @@
                   <a:srgbClr val="000000"/>
                 </a:solidFill>
               </a:rPr>
-              <a:t>5 MEng Computing participants, 6 sessions each, on an order-processing codebase </a:t>
+              <a:t>Two perturbation sweeps </a:t>
             </a:r>
             <a:pPr indent="0" marL="0">
               <a:spcAft>
@@ -11361,7 +11392,7 @@
                   <a:srgbClr val="888888"/>
                 </a:solidFill>
               </a:rPr>
-              <a:t>- 30 sessions total on user-study-fixture/ (separate from the labelled-injection codebase).</a:t>
+              <a:t>- single-knob (one weight scaled ×0.1 to ×10) + multi-knob Monte Carlo (200 samples, σ = ln 2, so ~×0.25 to ×4 of production).</a:t>
             </a:r>
             <a:endParaRPr lang="en-US" sz="1500" dirty="0"/>
           </a:p>
@@ -11379,7 +11410,7 @@
                   <a:srgbClr val="000000"/>
                 </a:solidFill>
               </a:rPr>
-              <a:t>Randomised into 2 arms </a:t>
+              <a:t>Stability metrics </a:t>
             </a:r>
             <a:pPr indent="0" marL="0">
               <a:spcAft>
@@ -11393,7 +11424,7 @@
                   <a:srgbClr val="888888"/>
                 </a:solidFill>
               </a:rPr>
-              <a:t>- P1, P2, P3 see dashboard feedback between sessions; P4 and P5 don't. Same playbook, codebase, instrumentation.</a:t>
+              <a:t>- top-1 hit rate (does the top-ranked DP stay on top?) + Kendall's τ-b on per-session rankings.</a:t>
             </a:r>
             <a:endParaRPr lang="en-US" sz="1500" dirty="0"/>
           </a:p>
@@ -11411,7 +11442,7 @@
                   <a:srgbClr val="000000"/>
                 </a:solidFill>
               </a:rPr>
-              <a:t>What did we measure?</a:t>
+              <a:t>Does every component of the process score hold weight?</a:t>
             </a:r>
             <a:endParaRPr lang="en-US" sz="1500" dirty="0"/>
           </a:p>
@@ -11429,7 +11460,7 @@
                   <a:srgbClr val="000000"/>
                 </a:solidFill>
               </a:rPr>
-              <a:t>Divergence-point count per session </a:t>
+              <a:t>Process-side ablation </a:t>
             </a:r>
             <a:pPr indent="0" marL="0">
               <a:spcAft>
@@ -11443,7 +11474,7 @@
                   <a:srgbClr val="888888"/>
                 </a:solidFill>
               </a:rPr>
-              <a:t>- does the detector still surface the same kinds of friction over time?</a:t>
+              <a:t>- enumerate all 2⁷ = 128 subsets of the 7 process weights → 5,760 cases per session set.</a:t>
             </a:r>
             <a:endParaRPr lang="en-US" sz="1500" dirty="0"/>
           </a:p>
@@ -11461,7 +11492,7 @@
                   <a:srgbClr val="000000"/>
                 </a:solidFill>
               </a:rPr>
-              <a:t>Process score across the arc, two views </a:t>
+              <a:t>Recovery metrics </a:t>
             </a:r>
             <a:pPr indent="0" marL="0">
               <a:spcAft>
@@ -11475,45 +11506,9 @@
                   <a:srgbClr val="888888"/>
                 </a:solidFill>
               </a:rPr>
-              <a:t>- the production score, plus a gain-stripped variant (W_g = W_lag = 0) that isolates how the participant worked from how much cleaner the code ended up.</a:t>
+              <a:t>- sum-over-sum magnitude recovery (does the term carry signal?) + leave-one-out Kendall's τ-b (does removing it reshuffle rankings?).</a:t>
             </a:r>
             <a:endParaRPr lang="en-US" sz="1500" dirty="0"/>
-          </a:p>
-        </p:txBody>
-      </p:sp>
-      <p:sp>
-        <p:nvSpPr>
-          <p:cNvPr id="4" name="Text 2"/>
-          <p:cNvSpPr/>
-          <p:nvPr/>
-        </p:nvSpPr>
-        <p:spPr>
-          <a:xfrm>
-            <a:off x="457200" y="4617720"/>
-            <a:ext cx="8229600" cy="274320"/>
-          </a:xfrm>
-          <a:prstGeom prst="rect">
-            <a:avLst/>
-          </a:prstGeom>
-          <a:noFill/>
-          <a:ln/>
-        </p:spPr>
-        <p:txBody>
-          <a:bodyPr wrap="square" rtlCol="0" anchor="ctr"/>
-          <a:lstStyle/>
-          <a:p>
-            <a:pPr algn="ctr" indent="0" marL="0">
-              <a:buNone/>
-            </a:pPr>
-            <a:r>
-              <a:rPr lang="en-US" sz="1100" i="1" dirty="0">
-                <a:solidFill>
-                  <a:srgbClr val="888888"/>
-                </a:solidFill>
-              </a:rPr>
-              <a:t>Random assignment, n = 3 vs n = 2. Treated as a directional finding, not a hypothesis test.</a:t>
-            </a:r>
-            <a:endParaRPr lang="en-US" sz="1100" dirty="0"/>
           </a:p>
         </p:txBody>
       </p:sp>
@@ -11723,6 +11718,597 @@
 <file path=ppt/slides/slide20.xml><?xml version="1.0" encoding="utf-8"?>
 <p:sld xmlns:a="http://schemas.openxmlformats.org/drawingml/2006/main" xmlns:r="http://schemas.openxmlformats.org/officeDocument/2006/relationships" xmlns:p="http://schemas.openxmlformats.org/presentationml/2006/main">
   <p:cSld name="Slide 20">
+    <p:spTree>
+      <p:nvGrpSpPr>
+        <p:cNvPr id="1" name=""/>
+        <p:cNvGrpSpPr/>
+        <p:nvPr/>
+      </p:nvGrpSpPr>
+      <p:grpSpPr>
+        <a:xfrm>
+          <a:off x="0" y="0"/>
+          <a:ext cx="0" cy="0"/>
+          <a:chOff x="0" y="0"/>
+          <a:chExt cx="0" cy="0"/>
+        </a:xfrm>
+      </p:grpSpPr>
+      <p:sp>
+        <p:nvSpPr>
+          <p:cNvPr id="2" name="Text 0"/>
+          <p:cNvSpPr/>
+          <p:nvPr/>
+        </p:nvSpPr>
+        <p:spPr>
+          <a:xfrm>
+            <a:off x="457200" y="274320"/>
+            <a:ext cx="8229600" cy="640080"/>
+          </a:xfrm>
+          <a:prstGeom prst="rect">
+            <a:avLst/>
+          </a:prstGeom>
+          <a:noFill/>
+          <a:ln/>
+        </p:spPr>
+        <p:txBody>
+          <a:bodyPr wrap="square" lIns="0" tIns="0" rIns="0" bIns="0" rtlCol="0" anchor="ctr"/>
+          <a:lstStyle/>
+          <a:p>
+            <a:pPr indent="0" marL="0">
+              <a:buNone/>
+            </a:pPr>
+            <a:r>
+              <a:rPr lang="en-US" sz="2800" b="1" dirty="0">
+                <a:solidFill>
+                  <a:srgbClr val="000000"/>
+                </a:solidFill>
+              </a:rPr>
+              <a:t>Score is locally robust</a:t>
+            </a:r>
+            <a:endParaRPr lang="en-US" sz="2800" dirty="0"/>
+          </a:p>
+        </p:txBody>
+      </p:sp>
+      <p:sp>
+        <p:nvSpPr>
+          <p:cNvPr id="3" name="Text 1"/>
+          <p:cNvSpPr/>
+          <p:nvPr/>
+        </p:nvSpPr>
+        <p:spPr>
+          <a:xfrm>
+            <a:off x="457200" y="1188720"/>
+            <a:ext cx="8229600" cy="3657600"/>
+          </a:xfrm>
+          <a:prstGeom prst="rect">
+            <a:avLst/>
+          </a:prstGeom>
+          <a:noFill/>
+          <a:ln/>
+        </p:spPr>
+        <p:txBody>
+          <a:bodyPr wrap="square" rtlCol="0" anchor="t"/>
+          <a:lstStyle/>
+          <a:p>
+            <a:pPr marL="342900" indent="-342900">
+              <a:spcAft>
+                <a:spcPts val="600"/>
+              </a:spcAft>
+              <a:buSzPct val="100000"/>
+              <a:buChar char="•"/>
+            </a:pPr>
+            <a:r>
+              <a:rPr lang="en-US" sz="1500" b="1" dirty="0">
+                <a:solidFill>
+                  <a:srgbClr val="000000"/>
+                </a:solidFill>
+              </a:rPr>
+              <a:t>How stable is the score?</a:t>
+            </a:r>
+            <a:endParaRPr lang="en-US" sz="1500" dirty="0"/>
+          </a:p>
+          <a:p>
+            <a:pPr lvl="1" marL="762000" indent="-381000">
+              <a:spcAft>
+                <a:spcPts val="600"/>
+              </a:spcAft>
+              <a:buSzPct val="100000"/>
+              <a:buChar char="•"/>
+            </a:pPr>
+            <a:r>
+              <a:rPr lang="en-US" sz="1500" dirty="0">
+                <a:solidFill>
+                  <a:srgbClr val="000000"/>
+                </a:solidFill>
+              </a:rPr>
+              <a:t>Single-knob: 96.5% top-1 preserved </a:t>
+            </a:r>
+            <a:pPr indent="0" marL="0">
+              <a:spcAft>
+                <a:spcPts val="600"/>
+              </a:spcAft>
+              <a:buNone/>
+            </a:pPr>
+            <a:r>
+              <a:rPr lang="en-US" sz="1500" dirty="0">
+                <a:solidFill>
+                  <a:srgbClr val="888888"/>
+                </a:solidFill>
+              </a:rPr>
+              <a:t>- top-ranked DP rarely changes under any one-weight perturbation. Only 1.8% of cases are clamp-frozen, so this is genuine response - not a clamp artefact.</a:t>
+            </a:r>
+            <a:endParaRPr lang="en-US" sz="1500" dirty="0"/>
+          </a:p>
+          <a:p>
+            <a:pPr lvl="1" marL="762000" indent="-381000">
+              <a:spcAft>
+                <a:spcPts val="1800"/>
+              </a:spcAft>
+              <a:buSzPct val="100000"/>
+              <a:buChar char="•"/>
+            </a:pPr>
+            <a:r>
+              <a:rPr lang="en-US" sz="1500" dirty="0">
+                <a:solidFill>
+                  <a:srgbClr val="000000"/>
+                </a:solidFill>
+              </a:rPr>
+              <a:t>Multi-knob: 84.6% top-1 preserved (τ-b = 0.586) </a:t>
+            </a:r>
+            <a:pPr indent="0" marL="0">
+              <a:spcAft>
+                <a:spcPts val="1800"/>
+              </a:spcAft>
+              <a:buNone/>
+            </a:pPr>
+            <a:r>
+              <a:rPr lang="en-US" sz="1500" dirty="0">
+                <a:solidFill>
+                  <a:srgbClr val="888888"/>
+                </a:solidFill>
+              </a:rPr>
+              <a:t>- when all weights move at once, top-1 holds in ~85% of cases and ~79% of pairs still rank in the same order. Meaningful correlation, not full preservation.</a:t>
+            </a:r>
+            <a:endParaRPr lang="en-US" sz="1500" dirty="0"/>
+          </a:p>
+          <a:p>
+            <a:pPr marL="342900" indent="-342900">
+              <a:spcAft>
+                <a:spcPts val="600"/>
+              </a:spcAft>
+              <a:buSzPct val="100000"/>
+              <a:buChar char="•"/>
+            </a:pPr>
+            <a:r>
+              <a:rPr lang="en-US" sz="1500" b="1" dirty="0">
+                <a:solidFill>
+                  <a:srgbClr val="000000"/>
+                </a:solidFill>
+              </a:rPr>
+              <a:t>Does every component of the process score hold weight?</a:t>
+            </a:r>
+            <a:endParaRPr lang="en-US" sz="1500" dirty="0"/>
+          </a:p>
+          <a:p>
+            <a:pPr lvl="1" marL="762000" indent="-381000">
+              <a:spcAft>
+                <a:spcPts val="600"/>
+              </a:spcAft>
+              <a:buSzPct val="100000"/>
+              <a:buChar char="•"/>
+            </a:pPr>
+            <a:r>
+              <a:rPr lang="en-US" sz="1500" dirty="0">
+                <a:solidFill>
+                  <a:srgbClr val="000000"/>
+                </a:solidFill>
+              </a:rPr>
+              <a:t>Length is the rank-carrier (LOO τ-b = 0.527) </a:t>
+            </a:r>
+            <a:pPr indent="0" marL="0">
+              <a:spcAft>
+                <a:spcPts val="600"/>
+              </a:spcAft>
+              <a:buNone/>
+            </a:pPr>
+            <a:r>
+              <a:rPr lang="en-US" sz="1500" dirty="0">
+                <a:solidFill>
+                  <a:srgbClr val="888888"/>
+                </a:solidFill>
+              </a:rPr>
+              <a:t>- removing length reshuffles the per-session ranking more than removing any other process term - the most influential term.</a:t>
+            </a:r>
+            <a:endParaRPr lang="en-US" sz="1500" dirty="0"/>
+          </a:p>
+          <a:p>
+            <a:pPr lvl="1" marL="762000" indent="-381000">
+              <a:spcAft>
+                <a:spcPts val="600"/>
+              </a:spcAft>
+              <a:buSzPct val="100000"/>
+              <a:buChar char="•"/>
+            </a:pPr>
+            <a:r>
+              <a:rPr lang="en-US" sz="1500" dirty="0">
+                <a:solidFill>
+                  <a:srgbClr val="000000"/>
+                </a:solidFill>
+              </a:rPr>
+              <a:t>Cleanliness sub-weights: ≤ 0.9% top-1 disruption </a:t>
+            </a:r>
+            <a:pPr indent="0" marL="0">
+              <a:spcAft>
+                <a:spcPts val="600"/>
+              </a:spcAft>
+              <a:buNone/>
+            </a:pPr>
+            <a:r>
+              <a:rPr lang="en-US" sz="1500" dirty="0">
+                <a:solidFill>
+                  <a:srgbClr val="888888"/>
+                </a:solidFill>
+              </a:rPr>
+              <a:t>- perturbing any single one of the 6 cleanliness signals barely shifts the ranking (~10× less than process weights), so equal-weights for the sub-signals is defensible.</a:t>
+            </a:r>
+            <a:endParaRPr lang="en-US" sz="1500" dirty="0"/>
+          </a:p>
+        </p:txBody>
+      </p:sp>
+    </p:spTree>
+  </p:cSld>
+  <p:clrMapOvr>
+    <a:masterClrMapping/>
+  </p:clrMapOvr>
+</p:sld>
+</file>
+
+<file path=ppt/slides/slide21.xml><?xml version="1.0" encoding="utf-8"?>
+<p:sld xmlns:a="http://schemas.openxmlformats.org/drawingml/2006/main" xmlns:r="http://schemas.openxmlformats.org/officeDocument/2006/relationships" xmlns:p="http://schemas.openxmlformats.org/presentationml/2006/main">
+  <p:cSld name="Slide 21">
+    <p:spTree>
+      <p:nvGrpSpPr>
+        <p:cNvPr id="1" name=""/>
+        <p:cNvGrpSpPr/>
+        <p:nvPr/>
+      </p:nvGrpSpPr>
+      <p:grpSpPr>
+        <a:xfrm>
+          <a:off x="0" y="0"/>
+          <a:ext cx="0" cy="0"/>
+          <a:chOff x="0" y="0"/>
+          <a:chExt cx="0" cy="0"/>
+        </a:xfrm>
+      </p:grpSpPr>
+      <p:sp>
+        <p:nvSpPr>
+          <p:cNvPr id="2" name="Text 0"/>
+          <p:cNvSpPr/>
+          <p:nvPr/>
+        </p:nvSpPr>
+        <p:spPr>
+          <a:xfrm>
+            <a:off x="457200" y="2011680"/>
+            <a:ext cx="8229600" cy="1097280"/>
+          </a:xfrm>
+          <a:prstGeom prst="rect">
+            <a:avLst/>
+          </a:prstGeom>
+          <a:noFill/>
+          <a:ln/>
+        </p:spPr>
+        <p:txBody>
+          <a:bodyPr wrap="square" lIns="0" tIns="0" rIns="0" bIns="0" rtlCol="0" anchor="ctr"/>
+          <a:lstStyle/>
+          <a:p>
+            <a:pPr algn="ctr" indent="0" marL="0">
+              <a:buNone/>
+            </a:pPr>
+            <a:r>
+              <a:rPr lang="en-US" sz="3200" b="1" dirty="0">
+                <a:solidFill>
+                  <a:srgbClr val="1A1A1A"/>
+                </a:solidFill>
+              </a:rPr>
+              <a:t>Experiment 3: Does feedback change developer behaviour?</a:t>
+            </a:r>
+            <a:endParaRPr lang="en-US" sz="3200" dirty="0"/>
+          </a:p>
+        </p:txBody>
+      </p:sp>
+    </p:spTree>
+  </p:cSld>
+  <p:clrMapOvr>
+    <a:masterClrMapping/>
+  </p:clrMapOvr>
+</p:sld>
+</file>
+
+<file path=ppt/slides/slide22.xml><?xml version="1.0" encoding="utf-8"?>
+<p:sld xmlns:a="http://schemas.openxmlformats.org/drawingml/2006/main" xmlns:r="http://schemas.openxmlformats.org/officeDocument/2006/relationships" xmlns:p="http://schemas.openxmlformats.org/presentationml/2006/main">
+  <p:cSld name="Slide 22">
+    <p:spTree>
+      <p:nvGrpSpPr>
+        <p:cNvPr id="1" name=""/>
+        <p:cNvGrpSpPr/>
+        <p:nvPr/>
+      </p:nvGrpSpPr>
+      <p:grpSpPr>
+        <a:xfrm>
+          <a:off x="0" y="0"/>
+          <a:ext cx="0" cy="0"/>
+          <a:chOff x="0" y="0"/>
+          <a:chExt cx="0" cy="0"/>
+        </a:xfrm>
+      </p:grpSpPr>
+      <p:sp>
+        <p:nvSpPr>
+          <p:cNvPr id="2" name="Text 0"/>
+          <p:cNvSpPr/>
+          <p:nvPr/>
+        </p:nvSpPr>
+        <p:spPr>
+          <a:xfrm>
+            <a:off x="457200" y="274320"/>
+            <a:ext cx="8229600" cy="640080"/>
+          </a:xfrm>
+          <a:prstGeom prst="rect">
+            <a:avLst/>
+          </a:prstGeom>
+          <a:noFill/>
+          <a:ln/>
+        </p:spPr>
+        <p:txBody>
+          <a:bodyPr wrap="square" lIns="0" tIns="0" rIns="0" bIns="0" rtlCol="0" anchor="ctr"/>
+          <a:lstStyle/>
+          <a:p>
+            <a:pPr indent="0" marL="0">
+              <a:buNone/>
+            </a:pPr>
+            <a:r>
+              <a:rPr lang="en-US" sz="2800" b="1" dirty="0">
+                <a:solidFill>
+                  <a:srgbClr val="000000"/>
+                </a:solidFill>
+              </a:rPr>
+              <a:t>Does dashboard feedback change developer behaviour?</a:t>
+            </a:r>
+            <a:endParaRPr lang="en-US" sz="2800" dirty="0"/>
+          </a:p>
+        </p:txBody>
+      </p:sp>
+      <p:sp>
+        <p:nvSpPr>
+          <p:cNvPr id="3" name="Text 1"/>
+          <p:cNvSpPr/>
+          <p:nvPr/>
+        </p:nvSpPr>
+        <p:spPr>
+          <a:xfrm>
+            <a:off x="457200" y="1188720"/>
+            <a:ext cx="8229600" cy="3291840"/>
+          </a:xfrm>
+          <a:prstGeom prst="rect">
+            <a:avLst/>
+          </a:prstGeom>
+          <a:noFill/>
+          <a:ln/>
+        </p:spPr>
+        <p:txBody>
+          <a:bodyPr wrap="square" rtlCol="0" anchor="t"/>
+          <a:lstStyle/>
+          <a:p>
+            <a:pPr marL="342900" indent="-342900">
+              <a:spcAft>
+                <a:spcPts val="600"/>
+              </a:spcAft>
+              <a:buSzPct val="100000"/>
+              <a:buChar char="•"/>
+            </a:pPr>
+            <a:r>
+              <a:rPr lang="en-US" sz="1500" b="1" dirty="0">
+                <a:solidFill>
+                  <a:srgbClr val="000000"/>
+                </a:solidFill>
+              </a:rPr>
+              <a:t>How did we design the study?</a:t>
+            </a:r>
+            <a:endParaRPr lang="en-US" sz="1500" dirty="0"/>
+          </a:p>
+          <a:p>
+            <a:pPr lvl="1" marL="762000" indent="-381000">
+              <a:spcAft>
+                <a:spcPts val="600"/>
+              </a:spcAft>
+              <a:buSzPct val="100000"/>
+              <a:buChar char="•"/>
+            </a:pPr>
+            <a:r>
+              <a:rPr lang="en-US" sz="1500" dirty="0">
+                <a:solidFill>
+                  <a:srgbClr val="000000"/>
+                </a:solidFill>
+              </a:rPr>
+              <a:t>5 MEng Computing participants, 6 sessions each, on an order-processing codebase </a:t>
+            </a:r>
+            <a:pPr indent="0" marL="0">
+              <a:spcAft>
+                <a:spcPts val="600"/>
+              </a:spcAft>
+              <a:buNone/>
+            </a:pPr>
+            <a:r>
+              <a:rPr lang="en-US" sz="1500" dirty="0">
+                <a:solidFill>
+                  <a:srgbClr val="888888"/>
+                </a:solidFill>
+              </a:rPr>
+              <a:t>- 30 sessions total on user-study-fixture/ (separate from the labelled-injection codebase).</a:t>
+            </a:r>
+            <a:endParaRPr lang="en-US" sz="1500" dirty="0"/>
+          </a:p>
+          <a:p>
+            <a:pPr lvl="1" marL="762000" indent="-381000">
+              <a:spcAft>
+                <a:spcPts val="1800"/>
+              </a:spcAft>
+              <a:buSzPct val="100000"/>
+              <a:buChar char="•"/>
+            </a:pPr>
+            <a:r>
+              <a:rPr lang="en-US" sz="1500" dirty="0">
+                <a:solidFill>
+                  <a:srgbClr val="000000"/>
+                </a:solidFill>
+              </a:rPr>
+              <a:t>Randomised into 2 arms </a:t>
+            </a:r>
+            <a:pPr indent="0" marL="0">
+              <a:spcAft>
+                <a:spcPts val="1800"/>
+              </a:spcAft>
+              <a:buNone/>
+            </a:pPr>
+            <a:r>
+              <a:rPr lang="en-US" sz="1500" dirty="0">
+                <a:solidFill>
+                  <a:srgbClr val="888888"/>
+                </a:solidFill>
+              </a:rPr>
+              <a:t>- P1, P2, P3 see dashboard feedback between sessions; P4 and P5 don't. Same playbook, codebase, instrumentation.</a:t>
+            </a:r>
+            <a:endParaRPr lang="en-US" sz="1500" dirty="0"/>
+          </a:p>
+          <a:p>
+            <a:pPr marL="342900" indent="-342900">
+              <a:spcAft>
+                <a:spcPts val="600"/>
+              </a:spcAft>
+              <a:buSzPct val="100000"/>
+              <a:buChar char="•"/>
+            </a:pPr>
+            <a:r>
+              <a:rPr lang="en-US" sz="1500" b="1" dirty="0">
+                <a:solidFill>
+                  <a:srgbClr val="000000"/>
+                </a:solidFill>
+              </a:rPr>
+              <a:t>What did we measure?</a:t>
+            </a:r>
+            <a:endParaRPr lang="en-US" sz="1500" dirty="0"/>
+          </a:p>
+          <a:p>
+            <a:pPr lvl="1" marL="762000" indent="-381000">
+              <a:spcAft>
+                <a:spcPts val="600"/>
+              </a:spcAft>
+              <a:buSzPct val="100000"/>
+              <a:buChar char="•"/>
+            </a:pPr>
+            <a:r>
+              <a:rPr lang="en-US" sz="1500" dirty="0">
+                <a:solidFill>
+                  <a:srgbClr val="000000"/>
+                </a:solidFill>
+              </a:rPr>
+              <a:t>Divergence-point count per session </a:t>
+            </a:r>
+            <a:pPr indent="0" marL="0">
+              <a:spcAft>
+                <a:spcPts val="600"/>
+              </a:spcAft>
+              <a:buNone/>
+            </a:pPr>
+            <a:r>
+              <a:rPr lang="en-US" sz="1500" dirty="0">
+                <a:solidFill>
+                  <a:srgbClr val="888888"/>
+                </a:solidFill>
+              </a:rPr>
+              <a:t>- does the detector still surface the same kinds of friction over time?</a:t>
+            </a:r>
+            <a:endParaRPr lang="en-US" sz="1500" dirty="0"/>
+          </a:p>
+          <a:p>
+            <a:pPr lvl="1" marL="762000" indent="-381000">
+              <a:spcAft>
+                <a:spcPts val="600"/>
+              </a:spcAft>
+              <a:buSzPct val="100000"/>
+              <a:buChar char="•"/>
+            </a:pPr>
+            <a:r>
+              <a:rPr lang="en-US" sz="1500" dirty="0">
+                <a:solidFill>
+                  <a:srgbClr val="000000"/>
+                </a:solidFill>
+              </a:rPr>
+              <a:t>Process score across the arc, two views </a:t>
+            </a:r>
+            <a:pPr indent="0" marL="0">
+              <a:spcAft>
+                <a:spcPts val="600"/>
+              </a:spcAft>
+              <a:buNone/>
+            </a:pPr>
+            <a:r>
+              <a:rPr lang="en-US" sz="1500" dirty="0">
+                <a:solidFill>
+                  <a:srgbClr val="888888"/>
+                </a:solidFill>
+              </a:rPr>
+              <a:t>- the production score, plus a gain-stripped variant (W_g = W_lag = 0) that isolates how the participant worked from how much cleaner the code ended up.</a:t>
+            </a:r>
+            <a:endParaRPr lang="en-US" sz="1500" dirty="0"/>
+          </a:p>
+        </p:txBody>
+      </p:sp>
+      <p:sp>
+        <p:nvSpPr>
+          <p:cNvPr id="4" name="Text 2"/>
+          <p:cNvSpPr/>
+          <p:nvPr/>
+        </p:nvSpPr>
+        <p:spPr>
+          <a:xfrm>
+            <a:off x="457200" y="4617720"/>
+            <a:ext cx="8229600" cy="274320"/>
+          </a:xfrm>
+          <a:prstGeom prst="rect">
+            <a:avLst/>
+          </a:prstGeom>
+          <a:noFill/>
+          <a:ln/>
+        </p:spPr>
+        <p:txBody>
+          <a:bodyPr wrap="square" rtlCol="0" anchor="ctr"/>
+          <a:lstStyle/>
+          <a:p>
+            <a:pPr algn="ctr" indent="0" marL="0">
+              <a:buNone/>
+            </a:pPr>
+            <a:r>
+              <a:rPr lang="en-US" sz="1100" i="1" dirty="0">
+                <a:solidFill>
+                  <a:srgbClr val="888888"/>
+                </a:solidFill>
+              </a:rPr>
+              <a:t>Random assignment, n = 3 vs n = 2. Treated as a directional finding, not a hypothesis test.</a:t>
+            </a:r>
+            <a:endParaRPr lang="en-US" sz="1100" dirty="0"/>
+          </a:p>
+        </p:txBody>
+      </p:sp>
+    </p:spTree>
+  </p:cSld>
+  <p:clrMapOvr>
+    <a:masterClrMapping/>
+  </p:clrMapOvr>
+</p:sld>
+</file>
+
+<file path=ppt/slides/slide23.xml><?xml version="1.0" encoding="utf-8"?>
+<p:sld xmlns:a="http://schemas.openxmlformats.org/drawingml/2006/main" xmlns:r="http://schemas.openxmlformats.org/officeDocument/2006/relationships" xmlns:p="http://schemas.openxmlformats.org/presentationml/2006/main">
+  <p:cSld name="Slide 23">
     <p:spTree>
       <p:nvGrpSpPr>
         <p:cNvPr id="1" name=""/>
@@ -11932,9 +12518,9 @@
 </p:sld>
 </file>
 
-<file path=ppt/slides/slide21.xml><?xml version="1.0" encoding="utf-8"?>
+<file path=ppt/slides/slide24.xml><?xml version="1.0" encoding="utf-8"?>
 <p:sld xmlns:a="http://schemas.openxmlformats.org/drawingml/2006/main" xmlns:r="http://schemas.openxmlformats.org/officeDocument/2006/relationships" xmlns:p="http://schemas.openxmlformats.org/presentationml/2006/main">
-  <p:cSld name="Slide 21">
+  <p:cSld name="Slide 24">
     <p:spTree>
       <p:nvGrpSpPr>
         <p:cNvPr id="1" name=""/>
@@ -12128,9 +12714,70 @@
 </p:sld>
 </file>
 
-<file path=ppt/slides/slide22.xml><?xml version="1.0" encoding="utf-8"?>
+<file path=ppt/slides/slide25.xml><?xml version="1.0" encoding="utf-8"?>
 <p:sld xmlns:a="http://schemas.openxmlformats.org/drawingml/2006/main" xmlns:r="http://schemas.openxmlformats.org/officeDocument/2006/relationships" xmlns:p="http://schemas.openxmlformats.org/presentationml/2006/main">
-  <p:cSld name="Slide 22">
+  <p:cSld name="Slide 25">
+    <p:spTree>
+      <p:nvGrpSpPr>
+        <p:cNvPr id="1" name=""/>
+        <p:cNvGrpSpPr/>
+        <p:nvPr/>
+      </p:nvGrpSpPr>
+      <p:grpSpPr>
+        <a:xfrm>
+          <a:off x="0" y="0"/>
+          <a:ext cx="0" cy="0"/>
+          <a:chOff x="0" y="0"/>
+          <a:chExt cx="0" cy="0"/>
+        </a:xfrm>
+      </p:grpSpPr>
+      <p:sp>
+        <p:nvSpPr>
+          <p:cNvPr id="2" name="Text 0"/>
+          <p:cNvSpPr/>
+          <p:nvPr/>
+        </p:nvSpPr>
+        <p:spPr>
+          <a:xfrm>
+            <a:off x="457200" y="2011680"/>
+            <a:ext cx="8229600" cy="1097280"/>
+          </a:xfrm>
+          <a:prstGeom prst="rect">
+            <a:avLst/>
+          </a:prstGeom>
+          <a:noFill/>
+          <a:ln/>
+        </p:spPr>
+        <p:txBody>
+          <a:bodyPr wrap="square" lIns="0" tIns="0" rIns="0" bIns="0" rtlCol="0" anchor="ctr"/>
+          <a:lstStyle/>
+          <a:p>
+            <a:pPr algn="ctr" indent="0" marL="0">
+              <a:buNone/>
+            </a:pPr>
+            <a:r>
+              <a:rPr lang="en-US" sz="3600" b="1" dirty="0">
+                <a:solidFill>
+                  <a:srgbClr val="1A1A1A"/>
+                </a:solidFill>
+              </a:rPr>
+              <a:t>Extension: Agent Traces</a:t>
+            </a:r>
+            <a:endParaRPr lang="en-US" sz="3600" dirty="0"/>
+          </a:p>
+        </p:txBody>
+      </p:sp>
+    </p:spTree>
+  </p:cSld>
+  <p:clrMapOvr>
+    <a:masterClrMapping/>
+  </p:clrMapOvr>
+</p:sld>
+</file>
+
+<file path=ppt/slides/slide26.xml><?xml version="1.0" encoding="utf-8"?>
+<p:sld xmlns:a="http://schemas.openxmlformats.org/drawingml/2006/main" xmlns:r="http://schemas.openxmlformats.org/officeDocument/2006/relationships" xmlns:p="http://schemas.openxmlformats.org/presentationml/2006/main">
+  <p:cSld name="Slide 26">
     <p:spTree>
       <p:nvGrpSpPr>
         <p:cNvPr id="1" name=""/>
@@ -12235,7 +12882,7 @@
       </p:graphicFrame>
       <p:graphicFrame>
         <p:nvGraphicFramePr>
-          <p:cNvPr id="23" name="Table 0"/>
+          <p:cNvPr id="27" name="Table 0"/>
           <p:cNvGraphicFramePr>
             <a:graphicFrameLocks noGrp="1"/>
           </p:cNvGraphicFramePr>
@@ -13014,9 +13661,9 @@
 </p:sld>
 </file>
 
-<file path=ppt/slides/slide23.xml><?xml version="1.0" encoding="utf-8"?>
+<file path=ppt/slides/slide27.xml><?xml version="1.0" encoding="utf-8"?>
 <p:sld xmlns:a="http://schemas.openxmlformats.org/drawingml/2006/main" xmlns:r="http://schemas.openxmlformats.org/officeDocument/2006/relationships" xmlns:p="http://schemas.openxmlformats.org/presentationml/2006/main">
-  <p:cSld name="Slide 23">
+  <p:cSld name="Slide 27">
     <p:spTree>
       <p:nvGrpSpPr>
         <p:cNvPr id="1" name=""/>
@@ -15666,7 +16313,7 @@
         <p:spPr>
           <a:xfrm>
             <a:off x="457200" y="1097280"/>
-            <a:ext cx="8229600" cy="1691640"/>
+            <a:ext cx="8229600" cy="1783080"/>
           </a:xfrm>
           <a:prstGeom prst="rect">
             <a:avLst/>
@@ -15680,7 +16327,7 @@
           <a:p>
             <a:pPr marL="342900" indent="-342900">
               <a:spcAft>
-                <a:spcPts val="600"/>
+                <a:spcPts val="2000"/>
               </a:spcAft>
               <a:buSzPct val="100000"/>
               <a:buChar char="•"/>
@@ -15691,17 +16338,18 @@
                   <a:srgbClr val="000000"/>
                 </a:solidFill>
               </a:rPr>
-              <a:t>What: developer hand-edited something the IDE could have done safely (and with its precondition checks).</a:t>
+              <a:t>Developer hand-edited something the IDE could have done safely (and with its precondition checks).</a:t>
             </a:r>
             <a:endParaRPr lang="en-US" sz="1300" dirty="0"/>
           </a:p>
           <a:p>
-            <a:pPr marL="342900" indent="-342900">
+            <a:pPr lvl="1" marL="685800" indent="-342900">
               <a:spcAft>
                 <a:spcPts val="600"/>
               </a:spcAft>
               <a:buSzPct val="100000"/>
-              <a:buChar char="•"/>
+              <a:buFont typeface="+mj-lt"/>
+              <a:buAutoNum type="arabicPeriod" startAt="1"/>
             </a:pPr>
             <a:r>
               <a:rPr lang="en-US" sz="1300" dirty="0">
@@ -15709,17 +16357,18 @@
                   <a:srgbClr val="000000"/>
                 </a:solidFill>
               </a:rPr>
-              <a:t>Detect: run RefactoringMiner on sliding commit windows; cross-check against the IDE event stream - anything RefactoringMiner finds that the IDE did not emit is a manual refactoring.</a:t>
+              <a:t>Refactoring Miner on sliding commit windows (of shadow repo) - anything we find that the IDE did not emit an event for is a manual refactoring.</a:t>
             </a:r>
             <a:endParaRPr lang="en-US" sz="1300" dirty="0"/>
           </a:p>
           <a:p>
-            <a:pPr marL="342900" indent="-342900">
+            <a:pPr lvl="1" marL="685800" indent="-342900">
               <a:spcAft>
                 <a:spcPts val="600"/>
               </a:spcAft>
               <a:buSzPct val="100000"/>
-              <a:buChar char="•"/>
+              <a:buFont typeface="+mj-lt"/>
+              <a:buAutoNum type="arabicPeriod" startAt="1"/>
             </a:pPr>
             <a:r>
               <a:rPr lang="en-US" sz="1300" dirty="0">
@@ -15727,17 +16376,18 @@
                   <a:srgbClr val="000000"/>
                 </a:solidFill>
               </a:rPr>
-              <a:t>Synthesise: apply the equivalent IDE refactoring, then three-way merge the user's other edits back on top.</a:t>
+              <a:t>Apply the equivalent IDE refactoring (Eclipse / JDT).</a:t>
             </a:r>
             <a:endParaRPr lang="en-US" sz="1300" dirty="0"/>
           </a:p>
           <a:p>
-            <a:pPr marL="342900" indent="-342900">
+            <a:pPr lvl="1" marL="685800" indent="-342900">
               <a:spcAft>
                 <a:spcPts val="600"/>
               </a:spcAft>
               <a:buSzPct val="100000"/>
-              <a:buChar char="•"/>
+              <a:buFont typeface="+mj-lt"/>
+              <a:buAutoNum type="arabicPeriod" startAt="1"/>
             </a:pPr>
             <a:r>
               <a:rPr lang="en-US" sz="1300" dirty="0">
@@ -15745,7 +16395,26 @@
                   <a:srgbClr val="000000"/>
                 </a:solidFill>
               </a:rPr>
-              <a:t>Wrap-and-patch layer reconciles minor JDT ↔ IntelliJ AST differences (e.g. static modifiers, variable liveness).</a:t>
+              <a:t>Reconcile minor JDT ↔ IntelliJ AST differences (e.g. static modifiers, variable liveness).</a:t>
+            </a:r>
+            <a:endParaRPr lang="en-US" sz="1300" dirty="0"/>
+          </a:p>
+          <a:p>
+            <a:pPr lvl="1" marL="685800" indent="-342900">
+              <a:spcAft>
+                <a:spcPts val="600"/>
+              </a:spcAft>
+              <a:buSzPct val="100000"/>
+              <a:buFont typeface="+mj-lt"/>
+              <a:buAutoNum type="arabicPeriod" startAt="1"/>
+            </a:pPr>
+            <a:r>
+              <a:rPr lang="en-US" sz="1300" dirty="0">
+                <a:solidFill>
+                  <a:srgbClr val="000000"/>
+                </a:solidFill>
+              </a:rPr>
+              <a:t>Merge the user's other edits back on top.</a:t>
             </a:r>
             <a:endParaRPr lang="en-US" sz="1300" dirty="0"/>
           </a:p>

--- a/presentation/slides.pptx
+++ b/presentation/slides.pptx
@@ -32,9 +32,10 @@
     <p:sldId id="280" r:id="rId26"/>
     <p:sldId id="281" r:id="rId27"/>
     <p:sldId id="282" r:id="rId28"/>
+    <p:sldId id="283" r:id="rId29"/>
   </p:sldIdLst>
   <p:notesMasterIdLst>
-    <p:notesMasterId r:id="rId29"/>
+    <p:notesMasterId r:id="rId30"/>
   </p:notesMasterIdLst>
   <p:sldSz cx="9144000" cy="5143500"/>
   <p:notesSz cx="5143500" cy="9144000"/>
@@ -4032,6 +4033,94 @@
             <a:fld id="{F7021451-1387-4CA6-816F-3879F97B5CBC}" type="slidenum">
               <a:rPr lang="en-US"/>
               <a:t>27</a:t>
+            </a:fld>
+            <a:endParaRPr lang="en-US"/>
+          </a:p>
+        </p:txBody>
+      </p:sp>
+    </p:spTree>
+    <p:extLst>
+      <p:ext uri="{BB962C8B-B14F-4D97-AF65-F5344CB8AC3E}">
+        <p14:creationId xmlns:p14="http://schemas.microsoft.com/office/powerpoint/2010/main" val="1024086991"/>
+      </p:ext>
+    </p:extLst>
+  </p:cSld>
+  <p:clrMapOvr>
+    <a:masterClrMapping/>
+  </p:clrMapOvr>
+</p:notes>
+</file>
+
+<file path=ppt/notesSlides/notesSlide28.xml><?xml version="1.0" encoding="utf-8"?>
+<p:notes xmlns:a="http://schemas.openxmlformats.org/drawingml/2006/main" xmlns:r="http://schemas.openxmlformats.org/officeDocument/2006/relationships" xmlns:p="http://schemas.openxmlformats.org/presentationml/2006/main">
+  <p:cSld>
+    <p:spTree>
+      <p:nvGrpSpPr>
+        <p:cNvPr id="1" name=""/>
+        <p:cNvGrpSpPr/>
+        <p:nvPr/>
+      </p:nvGrpSpPr>
+      <p:grpSpPr>
+        <a:xfrm>
+          <a:off x="0" y="0"/>
+          <a:ext cx="0" cy="0"/>
+          <a:chOff x="0" y="0"/>
+          <a:chExt cx="0" cy="0"/>
+        </a:xfrm>
+      </p:grpSpPr>
+      <p:sp>
+        <p:nvSpPr>
+          <p:cNvPr id="2" name="Slide Image Placeholder 1"/>
+          <p:cNvSpPr>
+            <a:spLocks noGrp="1" noRot="1" noChangeAspect="1"/>
+          </p:cNvSpPr>
+          <p:nvPr>
+            <p:ph type="sldImg"/>
+          </p:nvPr>
+        </p:nvSpPr>
+        <p:spPr/>
+      </p:sp>
+      <p:sp>
+        <p:nvSpPr>
+          <p:cNvPr id="3" name="Notes Placeholder 2"/>
+          <p:cNvSpPr>
+            <a:spLocks noGrp="1"/>
+          </p:cNvSpPr>
+          <p:nvPr>
+            <p:ph type="body" idx="1"/>
+          </p:nvPr>
+        </p:nvSpPr>
+        <p:spPr/>
+        <p:txBody>
+          <a:bodyPr/>
+          <a:lstStyle/>
+          <a:p>
+            <a:r>
+              <a:rPr lang="en-US" dirty="0"/>
+              <a:t/>
+            </a:r>
+            <a:endParaRPr lang="en-US" dirty="0"/>
+          </a:p>
+        </p:txBody>
+      </p:sp>
+      <p:sp>
+        <p:nvSpPr>
+          <p:cNvPr id="4" name="Slide Number Placeholder 3"/>
+          <p:cNvSpPr>
+            <a:spLocks noGrp="1"/>
+          </p:cNvSpPr>
+          <p:nvPr>
+            <p:ph type="sldNum" sz="quarter" idx="10"/>
+          </p:nvPr>
+        </p:nvSpPr>
+        <p:spPr/>
+        <p:txBody>
+          <a:bodyPr/>
+          <a:lstStyle/>
+          <a:p>
+            <a:fld id="{F7021451-1387-4CA6-816F-3879F97B5CBC}" type="slidenum">
+              <a:rPr lang="en-US"/>
+              <a:t>28</a:t>
             </a:fld>
             <a:endParaRPr lang="en-US"/>
           </a:p>
@@ -5203,6 +5292,207 @@
                   <a:srgbClr val="000000"/>
                 </a:solidFill>
               </a:rPr>
+              <a:t>Manual-Refactor: detect + synthesise</a:t>
+            </a:r>
+            <a:endParaRPr lang="en-US" sz="2800" dirty="0"/>
+          </a:p>
+        </p:txBody>
+      </p:sp>
+      <p:sp>
+        <p:nvSpPr>
+          <p:cNvPr id="3" name="Text 1"/>
+          <p:cNvSpPr/>
+          <p:nvPr/>
+        </p:nvSpPr>
+        <p:spPr>
+          <a:xfrm>
+            <a:off x="457200" y="1097280"/>
+            <a:ext cx="8229600" cy="1783080"/>
+          </a:xfrm>
+          <a:prstGeom prst="rect">
+            <a:avLst/>
+          </a:prstGeom>
+          <a:noFill/>
+          <a:ln/>
+        </p:spPr>
+        <p:txBody>
+          <a:bodyPr wrap="square" rtlCol="0" anchor="t"/>
+          <a:lstStyle/>
+          <a:p>
+            <a:pPr marL="342900" indent="-342900">
+              <a:spcAft>
+                <a:spcPts val="2000"/>
+              </a:spcAft>
+              <a:buSzPct val="100000"/>
+              <a:buChar char="•"/>
+            </a:pPr>
+            <a:r>
+              <a:rPr lang="en-US" sz="1300" dirty="0">
+                <a:solidFill>
+                  <a:srgbClr val="000000"/>
+                </a:solidFill>
+              </a:rPr>
+              <a:t>Developer hand-edited something the IDE could have done safely (and with its precondition checks).</a:t>
+            </a:r>
+            <a:endParaRPr lang="en-US" sz="1300" dirty="0"/>
+          </a:p>
+          <a:p>
+            <a:pPr lvl="1" marL="685800" indent="-342900">
+              <a:spcAft>
+                <a:spcPts val="600"/>
+              </a:spcAft>
+              <a:buSzPct val="100000"/>
+              <a:buFont typeface="+mj-lt"/>
+              <a:buAutoNum type="arabicPeriod" startAt="1"/>
+            </a:pPr>
+            <a:r>
+              <a:rPr lang="en-US" sz="1300" dirty="0">
+                <a:solidFill>
+                  <a:srgbClr val="000000"/>
+                </a:solidFill>
+              </a:rPr>
+              <a:t>Refactoring Miner on sliding commit windows (of shadow repo) - anything we find that the IDE did not emit an event for is a manual refactoring.</a:t>
+            </a:r>
+            <a:endParaRPr lang="en-US" sz="1300" dirty="0"/>
+          </a:p>
+          <a:p>
+            <a:pPr lvl="1" marL="685800" indent="-342900">
+              <a:spcAft>
+                <a:spcPts val="600"/>
+              </a:spcAft>
+              <a:buSzPct val="100000"/>
+              <a:buFont typeface="+mj-lt"/>
+              <a:buAutoNum type="arabicPeriod" startAt="1"/>
+            </a:pPr>
+            <a:r>
+              <a:rPr lang="en-US" sz="1300" dirty="0">
+                <a:solidFill>
+                  <a:srgbClr val="000000"/>
+                </a:solidFill>
+              </a:rPr>
+              <a:t>Apply the equivalent IDE refactoring (Eclipse / JDT).</a:t>
+            </a:r>
+            <a:endParaRPr lang="en-US" sz="1300" dirty="0"/>
+          </a:p>
+          <a:p>
+            <a:pPr lvl="1" marL="685800" indent="-342900">
+              <a:spcAft>
+                <a:spcPts val="600"/>
+              </a:spcAft>
+              <a:buSzPct val="100000"/>
+              <a:buFont typeface="+mj-lt"/>
+              <a:buAutoNum type="arabicPeriod" startAt="1"/>
+            </a:pPr>
+            <a:r>
+              <a:rPr lang="en-US" sz="1300" dirty="0">
+                <a:solidFill>
+                  <a:srgbClr val="000000"/>
+                </a:solidFill>
+              </a:rPr>
+              <a:t>Reconcile minor JDT ↔ IntelliJ AST differences (e.g. static modifiers, variable liveness).</a:t>
+            </a:r>
+            <a:endParaRPr lang="en-US" sz="1300" dirty="0"/>
+          </a:p>
+          <a:p>
+            <a:pPr lvl="1" marL="685800" indent="-342900">
+              <a:spcAft>
+                <a:spcPts val="600"/>
+              </a:spcAft>
+              <a:buSzPct val="100000"/>
+              <a:buFont typeface="+mj-lt"/>
+              <a:buAutoNum type="arabicPeriod" startAt="1"/>
+            </a:pPr>
+            <a:r>
+              <a:rPr lang="en-US" sz="1300" dirty="0">
+                <a:solidFill>
+                  <a:srgbClr val="000000"/>
+                </a:solidFill>
+              </a:rPr>
+              <a:t>Merge the user's other edits back on top.</a:t>
+            </a:r>
+            <a:endParaRPr lang="en-US" sz="1300" dirty="0"/>
+          </a:p>
+        </p:txBody>
+      </p:sp>
+      <p:pic>
+        <p:nvPicPr>
+          <p:cNvPr id="4" name="Image 0" descr="images/manual-refactor.png">    </p:cNvPr>
+          <p:cNvPicPr>
+            <a:picLocks noChangeAspect="1"/>
+          </p:cNvPicPr>
+          <p:nvPr/>
+        </p:nvPicPr>
+        <p:blipFill>
+          <a:blip r:embed="rId1"/>
+          <a:stretch>
+            <a:fillRect/>
+          </a:stretch>
+        </p:blipFill>
+        <p:spPr>
+          <a:xfrm>
+            <a:off x="1463040" y="2880360"/>
+            <a:ext cx="6217920" cy="2039112"/>
+          </a:xfrm>
+          <a:prstGeom prst="rect">
+            <a:avLst/>
+          </a:prstGeom>
+        </p:spPr>
+      </p:pic>
+    </p:spTree>
+  </p:cSld>
+  <p:clrMapOvr>
+    <a:masterClrMapping/>
+  </p:clrMapOvr>
+</p:sld>
+</file>
+
+<file path=ppt/slides/slide11.xml><?xml version="1.0" encoding="utf-8"?>
+<p:sld xmlns:a="http://schemas.openxmlformats.org/drawingml/2006/main" xmlns:r="http://schemas.openxmlformats.org/officeDocument/2006/relationships" xmlns:p="http://schemas.openxmlformats.org/presentationml/2006/main">
+  <p:cSld name="Slide 11">
+    <p:spTree>
+      <p:nvGrpSpPr>
+        <p:cNvPr id="1" name=""/>
+        <p:cNvGrpSpPr/>
+        <p:nvPr/>
+      </p:nvGrpSpPr>
+      <p:grpSpPr>
+        <a:xfrm>
+          <a:off x="0" y="0"/>
+          <a:ext cx="0" cy="0"/>
+          <a:chOff x="0" y="0"/>
+          <a:chExt cx="0" cy="0"/>
+        </a:xfrm>
+      </p:grpSpPr>
+      <p:sp>
+        <p:nvSpPr>
+          <p:cNvPr id="2" name="Text 0"/>
+          <p:cNvSpPr/>
+          <p:nvPr/>
+        </p:nvSpPr>
+        <p:spPr>
+          <a:xfrm>
+            <a:off x="457200" y="274320"/>
+            <a:ext cx="8229600" cy="640080"/>
+          </a:xfrm>
+          <a:prstGeom prst="rect">
+            <a:avLst/>
+          </a:prstGeom>
+          <a:noFill/>
+          <a:ln/>
+        </p:spPr>
+        <p:txBody>
+          <a:bodyPr wrap="square" lIns="0" tIns="0" rIns="0" bIns="0" rtlCol="0" anchor="ctr"/>
+          <a:lstStyle/>
+          <a:p>
+            <a:pPr indent="0" marL="0">
+              <a:buNone/>
+            </a:pPr>
+            <a:r>
+              <a:rPr lang="en-US" sz="2800" b="1" dirty="0">
+                <a:solidFill>
+                  <a:srgbClr val="000000"/>
+                </a:solidFill>
+              </a:rPr>
               <a:t>Ordering: detect + synthesise</a:t>
             </a:r>
             <a:endParaRPr lang="en-US" sz="2800" dirty="0"/>
@@ -5357,9 +5647,9 @@
 </p:sld>
 </file>
 
-<file path=ppt/slides/slide11.xml><?xml version="1.0" encoding="utf-8"?>
+<file path=ppt/slides/slide12.xml><?xml version="1.0" encoding="utf-8"?>
 <p:sld xmlns:a="http://schemas.openxmlformats.org/drawingml/2006/main" xmlns:r="http://schemas.openxmlformats.org/officeDocument/2006/relationships" xmlns:p="http://schemas.openxmlformats.org/presentationml/2006/main">
-  <p:cSld name="Slide 11">
+  <p:cSld name="Slide 12">
     <p:spTree>
       <p:nvGrpSpPr>
         <p:cNvPr id="1" name=""/>
@@ -5539,201 +5829,6 @@
 </p:sld>
 </file>
 
-<file path=ppt/slides/slide12.xml><?xml version="1.0" encoding="utf-8"?>
-<p:sld xmlns:a="http://schemas.openxmlformats.org/drawingml/2006/main" xmlns:r="http://schemas.openxmlformats.org/officeDocument/2006/relationships" xmlns:p="http://schemas.openxmlformats.org/presentationml/2006/main">
-  <p:cSld name="Slide 12">
-    <p:spTree>
-      <p:nvGrpSpPr>
-        <p:cNvPr id="1" name=""/>
-        <p:cNvGrpSpPr/>
-        <p:nvPr/>
-      </p:nvGrpSpPr>
-      <p:grpSpPr>
-        <a:xfrm>
-          <a:off x="0" y="0"/>
-          <a:ext cx="0" cy="0"/>
-          <a:chOff x="0" y="0"/>
-          <a:chExt cx="0" cy="0"/>
-        </a:xfrm>
-      </p:grpSpPr>
-      <p:sp>
-        <p:nvSpPr>
-          <p:cNvPr id="2" name="Text 0"/>
-          <p:cNvSpPr/>
-          <p:nvPr/>
-        </p:nvSpPr>
-        <p:spPr>
-          <a:xfrm>
-            <a:off x="457200" y="274320"/>
-            <a:ext cx="8229600" cy="640080"/>
-          </a:xfrm>
-          <a:prstGeom prst="rect">
-            <a:avLst/>
-          </a:prstGeom>
-          <a:noFill/>
-          <a:ln/>
-        </p:spPr>
-        <p:txBody>
-          <a:bodyPr wrap="square" lIns="0" tIns="0" rIns="0" bIns="0" rtlCol="0" anchor="ctr"/>
-          <a:lstStyle/>
-          <a:p>
-            <a:pPr indent="0" marL="0">
-              <a:buNone/>
-            </a:pPr>
-            <a:r>
-              <a:rPr lang="en-US" sz="2800" b="1" dirty="0">
-                <a:solidFill>
-                  <a:srgbClr val="000000"/>
-                </a:solidFill>
-              </a:rPr>
-              <a:t>Hygiene: detect + synthesise</a:t>
-            </a:r>
-            <a:endParaRPr lang="en-US" sz="2800" dirty="0"/>
-          </a:p>
-        </p:txBody>
-      </p:sp>
-      <p:sp>
-        <p:nvSpPr>
-          <p:cNvPr id="3" name="Text 1"/>
-          <p:cNvSpPr/>
-          <p:nvPr/>
-        </p:nvSpPr>
-        <p:spPr>
-          <a:xfrm>
-            <a:off x="457200" y="1097280"/>
-            <a:ext cx="8229600" cy="3657600"/>
-          </a:xfrm>
-          <a:prstGeom prst="rect">
-            <a:avLst/>
-          </a:prstGeom>
-          <a:noFill/>
-          <a:ln/>
-        </p:spPr>
-        <p:txBody>
-          <a:bodyPr wrap="square" rtlCol="0" anchor="t"/>
-          <a:lstStyle/>
-          <a:p>
-            <a:pPr marL="342900" indent="-342900">
-              <a:spcAft>
-                <a:spcPts val="2000"/>
-              </a:spcAft>
-              <a:buSzPct val="100000"/>
-              <a:buChar char="•"/>
-            </a:pPr>
-            <a:r>
-              <a:rPr lang="en-US" sz="1400" dirty="0">
-                <a:solidFill>
-                  <a:srgbClr val="000000"/>
-                </a:solidFill>
-              </a:rPr>
-              <a:t>Long stretches of work without test runs, or commits.</a:t>
-            </a:r>
-            <a:endParaRPr lang="en-US" sz="1400" dirty="0"/>
-          </a:p>
-          <a:p>
-            <a:pPr lvl="1" marL="685800" indent="-342900">
-              <a:spcAft>
-                <a:spcPts val="600"/>
-              </a:spcAft>
-              <a:buSzPct val="100000"/>
-              <a:buFont typeface="+mj-lt"/>
-              <a:buAutoNum type="arabicPeriod" startAt="1"/>
-            </a:pPr>
-            <a:r>
-              <a:rPr lang="en-US" sz="1400" dirty="0">
-                <a:solidFill>
-                  <a:srgbClr val="000000"/>
-                </a:solidFill>
-              </a:rPr>
-              <a:t>Iterate through each run's IDE events.</a:t>
-            </a:r>
-            <a:endParaRPr lang="en-US" sz="1400" dirty="0"/>
-          </a:p>
-          <a:p>
-            <a:pPr lvl="1" marL="685800" indent="-342900">
-              <a:spcAft>
-                <a:spcPts val="600"/>
-              </a:spcAft>
-              <a:buSzPct val="100000"/>
-              <a:buFont typeface="+mj-lt"/>
-              <a:buAutoNum type="arabicPeriod" startAt="1"/>
-            </a:pPr>
-            <a:r>
-              <a:rPr lang="en-US" sz="1400" dirty="0">
-                <a:solidFill>
-                  <a:srgbClr val="000000"/>
-                </a:solidFill>
-              </a:rPr>
-              <a:t>If there has been &gt; 1 minute since the last edit and still no test run, flag a Test DP.</a:t>
-            </a:r>
-            <a:endParaRPr lang="en-US" sz="1400" dirty="0"/>
-          </a:p>
-          <a:p>
-            <a:pPr lvl="1" marL="685800" indent="-342900">
-              <a:spcAft>
-                <a:spcPts val="600"/>
-              </a:spcAft>
-              <a:buSzPct val="100000"/>
-              <a:buFont typeface="+mj-lt"/>
-              <a:buAutoNum type="arabicPeriod" startAt="1"/>
-            </a:pPr>
-            <a:r>
-              <a:rPr lang="en-US" sz="1400" dirty="0">
-                <a:solidFill>
-                  <a:srgbClr val="000000"/>
-                </a:solidFill>
-              </a:rPr>
-              <a:t>If there has been &gt; 5 refactoring steps since the last commit, flag a Commit DP.</a:t>
-            </a:r>
-            <a:endParaRPr lang="en-US" sz="1400" dirty="0"/>
-          </a:p>
-          <a:p>
-            <a:pPr lvl="1" marL="685800" indent="-342900">
-              <a:spcAft>
-                <a:spcPts val="2000"/>
-              </a:spcAft>
-              <a:buSzPct val="100000"/>
-              <a:buFont typeface="+mj-lt"/>
-              <a:buAutoNum type="arabicPeriod" startAt="1"/>
-            </a:pPr>
-            <a:r>
-              <a:rPr lang="en-US" sz="1400" dirty="0">
-                <a:solidFill>
-                  <a:srgbClr val="000000"/>
-                </a:solidFill>
-              </a:rPr>
-              <a:t>For each DP, generate an identical run but with the corresponding test or commit event.</a:t>
-            </a:r>
-            <a:endParaRPr lang="en-US" sz="1400" dirty="0"/>
-          </a:p>
-          <a:p>
-            <a:pPr marL="342900" indent="-342900">
-              <a:spcAft>
-                <a:spcPts val="600"/>
-              </a:spcAft>
-              <a:buSzPct val="100000"/>
-              <a:buChar char="•"/>
-            </a:pPr>
-            <a:r>
-              <a:rPr lang="en-US" sz="1400" dirty="0">
-                <a:solidFill>
-                  <a:srgbClr val="000000"/>
-                </a:solidFill>
-              </a:rPr>
-              <a:t>Very cheap to compute.</a:t>
-            </a:r>
-            <a:endParaRPr lang="en-US" sz="1400" dirty="0"/>
-          </a:p>
-        </p:txBody>
-      </p:sp>
-    </p:spTree>
-  </p:cSld>
-  <p:clrMapOvr>
-    <a:masterClrMapping/>
-  </p:clrMapOvr>
-</p:sld>
-</file>
-
 <file path=ppt/slides/slide13.xml><?xml version="1.0" encoding="utf-8"?>
 <p:sld xmlns:a="http://schemas.openxmlformats.org/drawingml/2006/main" xmlns:r="http://schemas.openxmlformats.org/officeDocument/2006/relationships" xmlns:p="http://schemas.openxmlformats.org/presentationml/2006/main">
   <p:cSld name="Slide 13">
@@ -5781,6 +5876,201 @@
                   <a:srgbClr val="000000"/>
                 </a:solidFill>
               </a:rPr>
+              <a:t>Hygiene: detect + synthesise</a:t>
+            </a:r>
+            <a:endParaRPr lang="en-US" sz="2800" dirty="0"/>
+          </a:p>
+        </p:txBody>
+      </p:sp>
+      <p:sp>
+        <p:nvSpPr>
+          <p:cNvPr id="3" name="Text 1"/>
+          <p:cNvSpPr/>
+          <p:nvPr/>
+        </p:nvSpPr>
+        <p:spPr>
+          <a:xfrm>
+            <a:off x="457200" y="1097280"/>
+            <a:ext cx="8229600" cy="3657600"/>
+          </a:xfrm>
+          <a:prstGeom prst="rect">
+            <a:avLst/>
+          </a:prstGeom>
+          <a:noFill/>
+          <a:ln/>
+        </p:spPr>
+        <p:txBody>
+          <a:bodyPr wrap="square" rtlCol="0" anchor="t"/>
+          <a:lstStyle/>
+          <a:p>
+            <a:pPr marL="342900" indent="-342900">
+              <a:spcAft>
+                <a:spcPts val="2000"/>
+              </a:spcAft>
+              <a:buSzPct val="100000"/>
+              <a:buChar char="•"/>
+            </a:pPr>
+            <a:r>
+              <a:rPr lang="en-US" sz="1400" dirty="0">
+                <a:solidFill>
+                  <a:srgbClr val="000000"/>
+                </a:solidFill>
+              </a:rPr>
+              <a:t>Long stretches of work without test runs, or commits.</a:t>
+            </a:r>
+            <a:endParaRPr lang="en-US" sz="1400" dirty="0"/>
+          </a:p>
+          <a:p>
+            <a:pPr lvl="1" marL="685800" indent="-342900">
+              <a:spcAft>
+                <a:spcPts val="600"/>
+              </a:spcAft>
+              <a:buSzPct val="100000"/>
+              <a:buFont typeface="+mj-lt"/>
+              <a:buAutoNum type="arabicPeriod" startAt="1"/>
+            </a:pPr>
+            <a:r>
+              <a:rPr lang="en-US" sz="1400" dirty="0">
+                <a:solidFill>
+                  <a:srgbClr val="000000"/>
+                </a:solidFill>
+              </a:rPr>
+              <a:t>Iterate through each run's IDE events.</a:t>
+            </a:r>
+            <a:endParaRPr lang="en-US" sz="1400" dirty="0"/>
+          </a:p>
+          <a:p>
+            <a:pPr lvl="1" marL="685800" indent="-342900">
+              <a:spcAft>
+                <a:spcPts val="600"/>
+              </a:spcAft>
+              <a:buSzPct val="100000"/>
+              <a:buFont typeface="+mj-lt"/>
+              <a:buAutoNum type="arabicPeriod" startAt="1"/>
+            </a:pPr>
+            <a:r>
+              <a:rPr lang="en-US" sz="1400" dirty="0">
+                <a:solidFill>
+                  <a:srgbClr val="000000"/>
+                </a:solidFill>
+              </a:rPr>
+              <a:t>If there has been &gt; 1 minute since the last edit and still no test run, flag a Test DP.</a:t>
+            </a:r>
+            <a:endParaRPr lang="en-US" sz="1400" dirty="0"/>
+          </a:p>
+          <a:p>
+            <a:pPr lvl="1" marL="685800" indent="-342900">
+              <a:spcAft>
+                <a:spcPts val="600"/>
+              </a:spcAft>
+              <a:buSzPct val="100000"/>
+              <a:buFont typeface="+mj-lt"/>
+              <a:buAutoNum type="arabicPeriod" startAt="1"/>
+            </a:pPr>
+            <a:r>
+              <a:rPr lang="en-US" sz="1400" dirty="0">
+                <a:solidFill>
+                  <a:srgbClr val="000000"/>
+                </a:solidFill>
+              </a:rPr>
+              <a:t>If there has been &gt; 5 refactoring steps since the last commit, flag a Commit DP.</a:t>
+            </a:r>
+            <a:endParaRPr lang="en-US" sz="1400" dirty="0"/>
+          </a:p>
+          <a:p>
+            <a:pPr lvl="1" marL="685800" indent="-342900">
+              <a:spcAft>
+                <a:spcPts val="2000"/>
+              </a:spcAft>
+              <a:buSzPct val="100000"/>
+              <a:buFont typeface="+mj-lt"/>
+              <a:buAutoNum type="arabicPeriod" startAt="1"/>
+            </a:pPr>
+            <a:r>
+              <a:rPr lang="en-US" sz="1400" dirty="0">
+                <a:solidFill>
+                  <a:srgbClr val="000000"/>
+                </a:solidFill>
+              </a:rPr>
+              <a:t>For each DP, generate an identical run but with the corresponding test or commit event.</a:t>
+            </a:r>
+            <a:endParaRPr lang="en-US" sz="1400" dirty="0"/>
+          </a:p>
+          <a:p>
+            <a:pPr marL="342900" indent="-342900">
+              <a:spcAft>
+                <a:spcPts val="600"/>
+              </a:spcAft>
+              <a:buSzPct val="100000"/>
+              <a:buChar char="•"/>
+            </a:pPr>
+            <a:r>
+              <a:rPr lang="en-US" sz="1400" dirty="0">
+                <a:solidFill>
+                  <a:srgbClr val="000000"/>
+                </a:solidFill>
+              </a:rPr>
+              <a:t>Very cheap to compute.</a:t>
+            </a:r>
+            <a:endParaRPr lang="en-US" sz="1400" dirty="0"/>
+          </a:p>
+        </p:txBody>
+      </p:sp>
+    </p:spTree>
+  </p:cSld>
+  <p:clrMapOvr>
+    <a:masterClrMapping/>
+  </p:clrMapOvr>
+</p:sld>
+</file>
+
+<file path=ppt/slides/slide14.xml><?xml version="1.0" encoding="utf-8"?>
+<p:sld xmlns:a="http://schemas.openxmlformats.org/drawingml/2006/main" xmlns:r="http://schemas.openxmlformats.org/officeDocument/2006/relationships" xmlns:p="http://schemas.openxmlformats.org/presentationml/2006/main">
+  <p:cSld name="Slide 14">
+    <p:spTree>
+      <p:nvGrpSpPr>
+        <p:cNvPr id="1" name=""/>
+        <p:cNvGrpSpPr/>
+        <p:nvPr/>
+      </p:nvGrpSpPr>
+      <p:grpSpPr>
+        <a:xfrm>
+          <a:off x="0" y="0"/>
+          <a:ext cx="0" cy="0"/>
+          <a:chOff x="0" y="0"/>
+          <a:chExt cx="0" cy="0"/>
+        </a:xfrm>
+      </p:grpSpPr>
+      <p:sp>
+        <p:nvSpPr>
+          <p:cNvPr id="2" name="Text 0"/>
+          <p:cNvSpPr/>
+          <p:nvPr/>
+        </p:nvSpPr>
+        <p:spPr>
+          <a:xfrm>
+            <a:off x="457200" y="274320"/>
+            <a:ext cx="8229600" cy="640080"/>
+          </a:xfrm>
+          <a:prstGeom prst="rect">
+            <a:avLst/>
+          </a:prstGeom>
+          <a:noFill/>
+          <a:ln/>
+        </p:spPr>
+        <p:txBody>
+          <a:bodyPr wrap="square" lIns="0" tIns="0" rIns="0" bIns="0" rtlCol="0" anchor="ctr"/>
+          <a:lstStyle/>
+          <a:p>
+            <a:pPr indent="0" marL="0">
+              <a:buNone/>
+            </a:pPr>
+            <a:r>
+              <a:rPr lang="en-US" sz="2800" b="1" dirty="0">
+                <a:solidFill>
+                  <a:srgbClr val="000000"/>
+                </a:solidFill>
+              </a:rPr>
               <a:t>What we wanted to evaluate</a:t>
             </a:r>
             <a:endParaRPr lang="en-US" sz="2800" dirty="0"/>
@@ -5789,7 +6079,7 @@
       </p:sp>
       <p:graphicFrame>
         <p:nvGraphicFramePr>
-          <p:cNvPr id="14" name="Table 0"/>
+          <p:cNvPr id="15" name="Table 0"/>
           <p:cNvGraphicFramePr>
             <a:graphicFrameLocks noGrp="1"/>
           </p:cNvGraphicFramePr>
@@ -6010,7 +6300,7 @@
                             <a:srgbClr val="555555"/>
                           </a:solidFill>
                         </a:rPr>
-                        <a:t>45 labelled injection sessions: per-kind precision and recall (Slides 15-16) plus beat/tie/lose breakdown across all 66 detected divergence points (Slide 17).</a:t>
+                        <a:t>45 labelled injection sessions: per-kind precision and recall (Slides 16-17) plus beat/tie/lose breakdown across all 66 detected divergence points (Slide 18).</a:t>
                       </a:r>
                       <a:endParaRPr lang="en-US" sz="1300" dirty="0"/>
                     </a:p>
@@ -6128,7 +6418,7 @@
                             <a:srgbClr val="555555"/>
                           </a:solidFill>
                         </a:rPr>
-                        <a:t>Sensitivity sweep + ablation, headline on the 25-session user-study rankable subset (Slides 19-20).</a:t>
+                        <a:t>Sensitivity sweep + ablation, headline on the 25-session user-study rankable subset (Slides 20-21).</a:t>
                       </a:r>
                       <a:endParaRPr lang="en-US" sz="1300" dirty="0"/>
                     </a:p>
@@ -6246,7 +6536,7 @@
                             <a:srgbClr val="555555"/>
                           </a:solidFill>
                         </a:rPr>
-                        <a:t>30-session randomised user study, 5 participants split between feedback and no-feedback arms (Slide 22).</a:t>
+                        <a:t>30-session randomised user study, 5 participants split between feedback and no-feedback arms (Slide 23).</a:t>
                       </a:r>
                       <a:endParaRPr lang="en-US" sz="1300" dirty="0"/>
                     </a:p>
@@ -6303,67 +6593,6 @@
 </p:sld>
 </file>
 
-<file path=ppt/slides/slide14.xml><?xml version="1.0" encoding="utf-8"?>
-<p:sld xmlns:a="http://schemas.openxmlformats.org/drawingml/2006/main" xmlns:r="http://schemas.openxmlformats.org/officeDocument/2006/relationships" xmlns:p="http://schemas.openxmlformats.org/presentationml/2006/main">
-  <p:cSld name="Slide 14">
-    <p:spTree>
-      <p:nvGrpSpPr>
-        <p:cNvPr id="1" name=""/>
-        <p:cNvGrpSpPr/>
-        <p:nvPr/>
-      </p:nvGrpSpPr>
-      <p:grpSpPr>
-        <a:xfrm>
-          <a:off x="0" y="0"/>
-          <a:ext cx="0" cy="0"/>
-          <a:chOff x="0" y="0"/>
-          <a:chExt cx="0" cy="0"/>
-        </a:xfrm>
-      </p:grpSpPr>
-      <p:sp>
-        <p:nvSpPr>
-          <p:cNvPr id="2" name="Text 0"/>
-          <p:cNvSpPr/>
-          <p:nvPr/>
-        </p:nvSpPr>
-        <p:spPr>
-          <a:xfrm>
-            <a:off x="457200" y="2011680"/>
-            <a:ext cx="8229600" cy="1097280"/>
-          </a:xfrm>
-          <a:prstGeom prst="rect">
-            <a:avLst/>
-          </a:prstGeom>
-          <a:noFill/>
-          <a:ln/>
-        </p:spPr>
-        <p:txBody>
-          <a:bodyPr wrap="square" lIns="0" tIns="0" rIns="0" bIns="0" rtlCol="0" anchor="ctr"/>
-          <a:lstStyle/>
-          <a:p>
-            <a:pPr algn="ctr" indent="0" marL="0">
-              <a:buNone/>
-            </a:pPr>
-            <a:r>
-              <a:rPr lang="en-US" sz="3600" b="1" dirty="0">
-                <a:solidFill>
-                  <a:srgbClr val="1A1A1A"/>
-                </a:solidFill>
-              </a:rPr>
-              <a:t>Experiment 1: Is the tool accurate?</a:t>
-            </a:r>
-            <a:endParaRPr lang="en-US" sz="3600" dirty="0"/>
-          </a:p>
-        </p:txBody>
-      </p:sp>
-    </p:spTree>
-  </p:cSld>
-  <p:clrMapOvr>
-    <a:masterClrMapping/>
-  </p:clrMapOvr>
-</p:sld>
-</file>
-
 <file path=ppt/slides/slide15.xml><?xml version="1.0" encoding="utf-8"?>
 <p:sld xmlns:a="http://schemas.openxmlformats.org/drawingml/2006/main" xmlns:r="http://schemas.openxmlformats.org/officeDocument/2006/relationships" xmlns:p="http://schemas.openxmlformats.org/presentationml/2006/main">
   <p:cSld name="Slide 15">
@@ -6389,8 +6618,8 @@
         </p:nvSpPr>
         <p:spPr>
           <a:xfrm>
-            <a:off x="457200" y="274320"/>
-            <a:ext cx="8229600" cy="640080"/>
+            <a:off x="457200" y="2011680"/>
+            <a:ext cx="8229600" cy="1097280"/>
           </a:xfrm>
           <a:prstGeom prst="rect">
             <a:avLst/>
@@ -6402,200 +6631,18 @@
           <a:bodyPr wrap="square" lIns="0" tIns="0" rIns="0" bIns="0" rtlCol="0" anchor="ctr"/>
           <a:lstStyle/>
           <a:p>
-            <a:pPr indent="0" marL="0">
-              <a:buNone/>
-            </a:pPr>
-            <a:r>
-              <a:rPr lang="en-US" sz="2800" b="1" dirty="0">
-                <a:solidFill>
-                  <a:srgbClr val="000000"/>
-                </a:solidFill>
-              </a:rPr>
-              <a:t>Is the tool accurate?</a:t>
-            </a:r>
-            <a:endParaRPr lang="en-US" sz="2800" dirty="0"/>
-          </a:p>
-        </p:txBody>
-      </p:sp>
-      <p:sp>
-        <p:nvSpPr>
-          <p:cNvPr id="3" name="Text 1"/>
-          <p:cNvSpPr/>
-          <p:nvPr/>
-        </p:nvSpPr>
-        <p:spPr>
-          <a:xfrm>
-            <a:off x="457200" y="1188720"/>
-            <a:ext cx="8229600" cy="3657600"/>
-          </a:xfrm>
-          <a:prstGeom prst="rect">
-            <a:avLst/>
-          </a:prstGeom>
-          <a:noFill/>
-          <a:ln/>
-        </p:spPr>
-        <p:txBody>
-          <a:bodyPr wrap="square" rtlCol="0" anchor="t"/>
-          <a:lstStyle/>
-          <a:p>
-            <a:pPr marL="342900" indent="-342900">
-              <a:spcAft>
-                <a:spcPts val="1000"/>
-              </a:spcAft>
-              <a:buSzPct val="100000"/>
-              <a:buChar char="•"/>
-            </a:pPr>
-            <a:r>
-              <a:rPr lang="en-US" sz="1500" dirty="0">
-                <a:solidFill>
-                  <a:srgbClr val="000000"/>
-                </a:solidFill>
-              </a:rPr>
-              <a:t>45 hand-labelled injection sessions </a:t>
-            </a:r>
-            <a:pPr indent="0" marL="0">
-              <a:spcAft>
-                <a:spcPts val="1000"/>
-              </a:spcAft>
-              <a:buNone/>
-            </a:pPr>
-            <a:r>
-              <a:rPr lang="en-US" sz="1500" dirty="0">
-                <a:solidFill>
-                  <a:srgbClr val="888888"/>
-                </a:solidFill>
-              </a:rPr>
-              <a:t>- on a Java codebase.</a:t>
-            </a:r>
-            <a:endParaRPr lang="en-US" sz="1500" dirty="0"/>
-          </a:p>
-          <a:p>
-            <a:pPr marL="342900" indent="-342900">
-              <a:spcAft>
-                <a:spcPts val="1000"/>
-              </a:spcAft>
-              <a:buSzPct val="100000"/>
-              <a:buChar char="•"/>
-            </a:pPr>
-            <a:r>
-              <a:rPr lang="en-US" sz="1500" dirty="0">
-                <a:solidFill>
-                  <a:srgbClr val="000000"/>
-                </a:solidFill>
-              </a:rPr>
-              <a:t>3 raters (author + 2 external MEng cohort members) </a:t>
-            </a:r>
-            <a:pPr indent="0" marL="0">
-              <a:spcAft>
-                <a:spcPts val="1000"/>
-              </a:spcAft>
-              <a:buNone/>
-            </a:pPr>
-            <a:r>
-              <a:rPr lang="en-US" sz="1500" dirty="0">
-                <a:solidFill>
-                  <a:srgbClr val="888888"/>
-                </a:solidFill>
-              </a:rPr>
-              <a:t>- inter-rater Cohen's κ = 1.00 (Ordering, Manual-Refactor), 0.86–1.00 (Rework), 0.72–0.86 (Hygiene).</a:t>
-            </a:r>
-            <a:endParaRPr lang="en-US" sz="1500" dirty="0"/>
-          </a:p>
-          <a:p>
-            <a:pPr marL="342900" indent="-342900">
-              <a:spcAft>
-                <a:spcPts val="1000"/>
-              </a:spcAft>
-              <a:buSzPct val="100000"/>
-              <a:buChar char="•"/>
-            </a:pPr>
-            <a:r>
-              <a:rPr lang="en-US" sz="1500" dirty="0">
-                <a:solidFill>
-                  <a:srgbClr val="000000"/>
-                </a:solidFill>
-              </a:rPr>
-              <a:t>Disagreements predominantly surrounding hygiene + rework labels </a:t>
-            </a:r>
-            <a:pPr indent="0" marL="0">
-              <a:spcAft>
-                <a:spcPts val="1000"/>
-              </a:spcAft>
-              <a:buNone/>
-            </a:pPr>
-            <a:r>
-              <a:rPr lang="en-US" sz="1500" dirty="0">
-                <a:solidFill>
-                  <a:srgbClr val="888888"/>
-                </a:solidFill>
-              </a:rPr>
-              <a:t>- differences in opinion of what constitutes a step.</a:t>
-            </a:r>
-            <a:endParaRPr lang="en-US" sz="1500" dirty="0"/>
-          </a:p>
-          <a:p>
-            <a:pPr marL="342900" indent="-342900">
-              <a:spcAft>
-                <a:spcPts val="1000"/>
-              </a:spcAft>
-              <a:buSzPct val="100000"/>
-              <a:buChar char="•"/>
-            </a:pPr>
-            <a:r>
-              <a:rPr lang="en-US" sz="1500" dirty="0">
-                <a:solidFill>
-                  <a:srgbClr val="000000"/>
-                </a:solidFill>
-              </a:rPr>
-              <a:t>Track all divergence points detected </a:t>
-            </a:r>
-            <a:pPr indent="0" marL="0">
-              <a:spcAft>
-                <a:spcPts val="1000"/>
-              </a:spcAft>
-              <a:buNone/>
-            </a:pPr>
-            <a:r>
-              <a:rPr lang="en-US" sz="1500" dirty="0">
-                <a:solidFill>
-                  <a:srgbClr val="888888"/>
-                </a:solidFill>
-              </a:rPr>
-              <a:t>- not only ones with a higher process score than the user.</a:t>
-            </a:r>
-            <a:endParaRPr lang="en-US" sz="1500" dirty="0"/>
-          </a:p>
-          <a:p>
-            <a:pPr marL="342900" indent="-342900">
-              <a:spcAft>
-                <a:spcPts val="1000"/>
-              </a:spcAft>
-              <a:buSzPct val="100000"/>
-              <a:buChar char="•"/>
-            </a:pPr>
-            <a:r>
-              <a:rPr lang="en-US" sz="1500" dirty="0">
-                <a:solidFill>
-                  <a:srgbClr val="000000"/>
-                </a:solidFill>
-              </a:rPr>
-              <a:t>Measure precision + recall </a:t>
-            </a:r>
-            <a:pPr indent="0" marL="0">
-              <a:spcAft>
-                <a:spcPts val="1000"/>
-              </a:spcAft>
-              <a:buNone/>
-            </a:pPr>
-            <a:r>
-              <a:rPr lang="en-US" sz="1500" dirty="0">
-                <a:solidFill>
-                  <a:srgbClr val="888888"/>
-                </a:solidFill>
-              </a:rPr>
-              <a:t>- precision guards against FPs that waste the developer's attention. Recall guards against FNs that miss real opportunities. F1 averages the two - so a high score can hide a detector that's annoying users (lots of FPs) or one that's quietly missing things (lots of FNs). Accuracy is dominated by true negatives.</a:t>
-            </a:r>
-            <a:endParaRPr lang="en-US" sz="1500" dirty="0"/>
+            <a:pPr algn="ctr" indent="0" marL="0">
+              <a:buNone/>
+            </a:pPr>
+            <a:r>
+              <a:rPr lang="en-US" sz="3600" b="1" dirty="0">
+                <a:solidFill>
+                  <a:srgbClr val="1A1A1A"/>
+                </a:solidFill>
+              </a:rPr>
+              <a:t>Experiment 1: Is the tool accurate?</a:t>
+            </a:r>
+            <a:endParaRPr lang="en-US" sz="3600" dirty="0"/>
           </a:p>
         </p:txBody>
       </p:sp>
@@ -6632,8 +6679,8 @@
         </p:nvSpPr>
         <p:spPr>
           <a:xfrm>
-            <a:off x="457200" y="91440"/>
-            <a:ext cx="8229600" cy="548640"/>
+            <a:off x="457200" y="274320"/>
+            <a:ext cx="8229600" cy="640080"/>
           </a:xfrm>
           <a:prstGeom prst="rect">
             <a:avLst/>
@@ -6654,7 +6701,7 @@
                   <a:srgbClr val="000000"/>
                 </a:solidFill>
               </a:rPr>
-              <a:t>Decision matrix per divergence kind</a:t>
+              <a:t>Is the tool accurate?</a:t>
             </a:r>
             <a:endParaRPr lang="en-US" sz="2800" dirty="0"/>
           </a:p>
@@ -6668,8 +6715,8 @@
         </p:nvSpPr>
         <p:spPr>
           <a:xfrm>
-            <a:off x="457200" y="658368"/>
-            <a:ext cx="8229600" cy="256032"/>
+            <a:off x="457200" y="1188720"/>
+            <a:ext cx="8229600" cy="3657600"/>
           </a:xfrm>
           <a:prstGeom prst="rect">
             <a:avLst/>
@@ -6678,2253 +6725,167 @@
           <a:ln/>
         </p:spPr>
         <p:txBody>
-          <a:bodyPr wrap="square" lIns="0" tIns="0" rIns="0" bIns="0" rtlCol="0" anchor="ctr"/>
-          <a:lstStyle/>
-          <a:p>
-            <a:pPr algn="ctr" indent="0" marL="0">
-              <a:buNone/>
-            </a:pPr>
-            <a:r>
-              <a:rPr lang="en-US" sz="1200" i="1" dirty="0">
-                <a:solidFill>
-                  <a:srgbClr val="555555"/>
-                </a:solidFill>
-              </a:rPr>
-              <a:t>Session-level (45 injection sessions).</a:t>
-            </a:r>
-            <a:endParaRPr lang="en-US" sz="1200" dirty="0"/>
-          </a:p>
-        </p:txBody>
-      </p:sp>
-      <p:sp>
-        <p:nvSpPr>
-          <p:cNvPr id="4" name="Text 2"/>
-          <p:cNvSpPr/>
-          <p:nvPr/>
-        </p:nvSpPr>
-        <p:spPr>
-          <a:xfrm>
-            <a:off x="640080" y="914400"/>
-            <a:ext cx="2834640" cy="201168"/>
-          </a:xfrm>
-          <a:prstGeom prst="rect">
-            <a:avLst/>
-          </a:prstGeom>
-          <a:noFill/>
-          <a:ln/>
-        </p:spPr>
-        <p:txBody>
-          <a:bodyPr wrap="square" lIns="0" tIns="0" rIns="0" bIns="0" rtlCol="0" anchor="b"/>
-          <a:lstStyle/>
-          <a:p>
-            <a:pPr algn="ctr" indent="0" marL="0">
-              <a:buNone/>
-            </a:pPr>
-            <a:r>
-              <a:rPr lang="en-US" sz="1400" b="1" dirty="0">
+          <a:bodyPr wrap="square" rtlCol="0" anchor="t"/>
+          <a:lstStyle/>
+          <a:p>
+            <a:pPr marL="342900" indent="-342900">
+              <a:spcAft>
+                <a:spcPts val="1000"/>
+              </a:spcAft>
+              <a:buSzPct val="100000"/>
+              <a:buChar char="•"/>
+            </a:pPr>
+            <a:r>
+              <a:rPr lang="en-US" sz="1500" dirty="0">
                 <a:solidFill>
                   <a:srgbClr val="000000"/>
                 </a:solidFill>
               </a:rPr>
-              <a:t>Manual-Refactor</a:t>
-            </a:r>
-            <a:endParaRPr lang="en-US" sz="1400" dirty="0"/>
-          </a:p>
-        </p:txBody>
-      </p:sp>
-      <p:sp>
-        <p:nvSpPr>
-          <p:cNvPr id="5" name="Text 3"/>
-          <p:cNvSpPr/>
-          <p:nvPr/>
-        </p:nvSpPr>
-        <p:spPr>
-          <a:xfrm>
-            <a:off x="1188720" y="1133856"/>
-            <a:ext cx="1143000" cy="201168"/>
-          </a:xfrm>
-          <a:prstGeom prst="rect">
-            <a:avLst/>
-          </a:prstGeom>
-          <a:noFill/>
-          <a:ln/>
-        </p:spPr>
-        <p:txBody>
-          <a:bodyPr wrap="square" lIns="0" tIns="0" rIns="0" bIns="0" rtlCol="0" anchor="ctr"/>
-          <a:lstStyle/>
-          <a:p>
-            <a:pPr algn="ctr" indent="0" marL="0">
-              <a:buNone/>
-            </a:pPr>
-            <a:r>
-              <a:rPr lang="en-US" sz="900" i="1" dirty="0">
-                <a:solidFill>
-                  <a:srgbClr val="555555"/>
-                </a:solidFill>
-              </a:rPr>
-              <a:t>Predicted +</a:t>
-            </a:r>
-            <a:endParaRPr lang="en-US" sz="900" dirty="0"/>
-          </a:p>
-        </p:txBody>
-      </p:sp>
-      <p:sp>
-        <p:nvSpPr>
-          <p:cNvPr id="6" name="Text 4"/>
-          <p:cNvSpPr/>
-          <p:nvPr/>
-        </p:nvSpPr>
-        <p:spPr>
-          <a:xfrm>
-            <a:off x="2331720" y="1133856"/>
-            <a:ext cx="1143000" cy="201168"/>
-          </a:xfrm>
-          <a:prstGeom prst="rect">
-            <a:avLst/>
-          </a:prstGeom>
-          <a:noFill/>
-          <a:ln/>
-        </p:spPr>
-        <p:txBody>
-          <a:bodyPr wrap="square" lIns="0" tIns="0" rIns="0" bIns="0" rtlCol="0" anchor="ctr"/>
-          <a:lstStyle/>
-          <a:p>
-            <a:pPr algn="ctr" indent="0" marL="0">
-              <a:buNone/>
-            </a:pPr>
-            <a:r>
-              <a:rPr lang="en-US" sz="900" i="1" dirty="0">
-                <a:solidFill>
-                  <a:srgbClr val="555555"/>
-                </a:solidFill>
-              </a:rPr>
-              <a:t>Predicted −</a:t>
-            </a:r>
-            <a:endParaRPr lang="en-US" sz="900" dirty="0"/>
-          </a:p>
-        </p:txBody>
-      </p:sp>
-      <p:sp>
-        <p:nvSpPr>
-          <p:cNvPr id="7" name="Text 5"/>
-          <p:cNvSpPr/>
-          <p:nvPr/>
-        </p:nvSpPr>
-        <p:spPr>
-          <a:xfrm>
-            <a:off x="640080" y="1353312"/>
-            <a:ext cx="548640" cy="548640"/>
-          </a:xfrm>
-          <a:prstGeom prst="rect">
-            <a:avLst/>
-          </a:prstGeom>
-          <a:noFill/>
-          <a:ln/>
-        </p:spPr>
-        <p:txBody>
-          <a:bodyPr wrap="square" lIns="508" tIns="508" rIns="508" bIns="508" rtlCol="0" anchor="ctr"/>
-          <a:lstStyle/>
-          <a:p>
-            <a:pPr algn="r" indent="0" marL="0">
-              <a:buNone/>
-            </a:pPr>
-            <a:r>
-              <a:rPr lang="en-US" sz="900" i="1" dirty="0">
-                <a:solidFill>
-                  <a:srgbClr val="555555"/>
-                </a:solidFill>
-              </a:rPr>
-              <a:t>Actual +</a:t>
-            </a:r>
-            <a:endParaRPr lang="en-US" sz="900" dirty="0"/>
-          </a:p>
-        </p:txBody>
-      </p:sp>
-      <p:sp>
-        <p:nvSpPr>
-          <p:cNvPr id="8" name="Text 6"/>
-          <p:cNvSpPr/>
-          <p:nvPr/>
-        </p:nvSpPr>
-        <p:spPr>
-          <a:xfrm>
-            <a:off x="640080" y="1901952"/>
-            <a:ext cx="548640" cy="548640"/>
-          </a:xfrm>
-          <a:prstGeom prst="rect">
-            <a:avLst/>
-          </a:prstGeom>
-          <a:noFill/>
-          <a:ln/>
-        </p:spPr>
-        <p:txBody>
-          <a:bodyPr wrap="square" lIns="508" tIns="508" rIns="508" bIns="508" rtlCol="0" anchor="ctr"/>
-          <a:lstStyle/>
-          <a:p>
-            <a:pPr algn="r" indent="0" marL="0">
-              <a:buNone/>
-            </a:pPr>
-            <a:r>
-              <a:rPr lang="en-US" sz="900" i="1" dirty="0">
-                <a:solidFill>
-                  <a:srgbClr val="555555"/>
-                </a:solidFill>
-              </a:rPr>
-              <a:t>Actual −</a:t>
-            </a:r>
-            <a:endParaRPr lang="en-US" sz="900" dirty="0"/>
-          </a:p>
-        </p:txBody>
-      </p:sp>
-      <p:sp>
-        <p:nvSpPr>
-          <p:cNvPr id="9" name="Shape 7"/>
-          <p:cNvSpPr/>
-          <p:nvPr/>
-        </p:nvSpPr>
-        <p:spPr>
-          <a:xfrm>
-            <a:off x="1188720" y="1426464"/>
-            <a:ext cx="1143000" cy="548640"/>
-          </a:xfrm>
-          <a:prstGeom prst="rect">
-            <a:avLst/>
-          </a:prstGeom>
-          <a:solidFill>
-            <a:srgbClr val="D4F0DC"/>
-          </a:solidFill>
-          <a:ln w="6350">
-            <a:solidFill>
-              <a:srgbClr val="999999"/>
-            </a:solidFill>
-            <a:prstDash val="solid"/>
-          </a:ln>
-        </p:spPr>
-      </p:sp>
-      <p:sp>
-        <p:nvSpPr>
-          <p:cNvPr id="10" name="Text 8"/>
-          <p:cNvSpPr/>
-          <p:nvPr/>
-        </p:nvSpPr>
-        <p:spPr>
-          <a:xfrm>
-            <a:off x="1188720" y="1426464"/>
-            <a:ext cx="1143000" cy="548640"/>
-          </a:xfrm>
-          <a:prstGeom prst="rect">
-            <a:avLst/>
-          </a:prstGeom>
-          <a:noFill/>
-          <a:ln/>
-        </p:spPr>
-        <p:txBody>
-          <a:bodyPr wrap="square" lIns="0" tIns="0" rIns="0" bIns="0" rtlCol="0" anchor="ctr"/>
-          <a:lstStyle/>
-          <a:p>
-            <a:pPr algn="ctr" indent="0" marL="0">
-              <a:buNone/>
-            </a:pPr>
-            <a:r>
-              <a:rPr lang="en-US" sz="2000" b="1" dirty="0">
-                <a:solidFill>
-                  <a:srgbClr val="0A7D2A"/>
-                </a:solidFill>
-              </a:rPr>
-              <a:t>16</a:t>
-            </a:r>
-            <a:endParaRPr lang="en-US" sz="2000" dirty="0"/>
-          </a:p>
-          <a:p>
-            <a:pPr algn="ctr" indent="0" marL="0">
-              <a:buNone/>
-            </a:pPr>
-            <a:r>
-              <a:rPr lang="en-US" sz="900" dirty="0">
-                <a:solidFill>
-                  <a:srgbClr val="666666"/>
-                </a:solidFill>
-              </a:rPr>
-              <a:t>TP</a:t>
-            </a:r>
-            <a:endParaRPr lang="en-US" sz="2000" dirty="0"/>
-          </a:p>
-        </p:txBody>
-      </p:sp>
-      <p:sp>
-        <p:nvSpPr>
-          <p:cNvPr id="11" name="Shape 9"/>
-          <p:cNvSpPr/>
-          <p:nvPr/>
-        </p:nvSpPr>
-        <p:spPr>
-          <a:xfrm>
-            <a:off x="2331720" y="1426464"/>
-            <a:ext cx="1143000" cy="548640"/>
-          </a:xfrm>
-          <a:prstGeom prst="rect">
-            <a:avLst/>
-          </a:prstGeom>
-          <a:solidFill>
-            <a:srgbClr val="F5D5CE"/>
-          </a:solidFill>
-          <a:ln w="6350">
-            <a:solidFill>
-              <a:srgbClr val="999999"/>
-            </a:solidFill>
-            <a:prstDash val="solid"/>
-          </a:ln>
-        </p:spPr>
-      </p:sp>
-      <p:sp>
-        <p:nvSpPr>
-          <p:cNvPr id="12" name="Text 10"/>
-          <p:cNvSpPr/>
-          <p:nvPr/>
-        </p:nvSpPr>
-        <p:spPr>
-          <a:xfrm>
-            <a:off x="2331720" y="1426464"/>
-            <a:ext cx="1143000" cy="548640"/>
-          </a:xfrm>
-          <a:prstGeom prst="rect">
-            <a:avLst/>
-          </a:prstGeom>
-          <a:noFill/>
-          <a:ln/>
-        </p:spPr>
-        <p:txBody>
-          <a:bodyPr wrap="square" lIns="0" tIns="0" rIns="0" bIns="0" rtlCol="0" anchor="ctr"/>
-          <a:lstStyle/>
-          <a:p>
-            <a:pPr algn="ctr" indent="0" marL="0">
-              <a:buNone/>
-            </a:pPr>
-            <a:r>
-              <a:rPr lang="en-US" sz="2000" b="1" dirty="0">
-                <a:solidFill>
-                  <a:srgbClr val="B33A1E"/>
-                </a:solidFill>
-              </a:rPr>
-              <a:t>5</a:t>
-            </a:r>
-            <a:endParaRPr lang="en-US" sz="2000" dirty="0"/>
-          </a:p>
-          <a:p>
-            <a:pPr algn="ctr" indent="0" marL="0">
-              <a:buNone/>
-            </a:pPr>
-            <a:r>
-              <a:rPr lang="en-US" sz="900" dirty="0">
-                <a:solidFill>
-                  <a:srgbClr val="666666"/>
-                </a:solidFill>
-              </a:rPr>
-              <a:t>FN</a:t>
-            </a:r>
-            <a:endParaRPr lang="en-US" sz="2000" dirty="0"/>
-          </a:p>
-        </p:txBody>
-      </p:sp>
-      <p:sp>
-        <p:nvSpPr>
-          <p:cNvPr id="13" name="Shape 11"/>
-          <p:cNvSpPr/>
-          <p:nvPr/>
-        </p:nvSpPr>
-        <p:spPr>
-          <a:xfrm>
-            <a:off x="1188720" y="1975104"/>
-            <a:ext cx="1143000" cy="548640"/>
-          </a:xfrm>
-          <a:prstGeom prst="rect">
-            <a:avLst/>
-          </a:prstGeom>
-          <a:solidFill>
-            <a:srgbClr val="F2F2F2"/>
-          </a:solidFill>
-          <a:ln w="6350">
-            <a:solidFill>
-              <a:srgbClr val="999999"/>
-            </a:solidFill>
-            <a:prstDash val="solid"/>
-          </a:ln>
-        </p:spPr>
-      </p:sp>
-      <p:sp>
-        <p:nvSpPr>
-          <p:cNvPr id="14" name="Text 12"/>
-          <p:cNvSpPr/>
-          <p:nvPr/>
-        </p:nvSpPr>
-        <p:spPr>
-          <a:xfrm>
-            <a:off x="1188720" y="1975104"/>
-            <a:ext cx="1143000" cy="548640"/>
-          </a:xfrm>
-          <a:prstGeom prst="rect">
-            <a:avLst/>
-          </a:prstGeom>
-          <a:noFill/>
-          <a:ln/>
-        </p:spPr>
-        <p:txBody>
-          <a:bodyPr wrap="square" lIns="0" tIns="0" rIns="0" bIns="0" rtlCol="0" anchor="ctr"/>
-          <a:lstStyle/>
-          <a:p>
-            <a:pPr algn="ctr" indent="0" marL="0">
-              <a:buNone/>
-            </a:pPr>
-            <a:r>
-              <a:rPr lang="en-US" sz="2000" b="1" dirty="0">
+              <a:t>45 hand-labelled injection sessions </a:t>
+            </a:r>
+            <a:pPr indent="0" marL="0">
+              <a:spcAft>
+                <a:spcPts val="1000"/>
+              </a:spcAft>
+              <a:buNone/>
+            </a:pPr>
+            <a:r>
+              <a:rPr lang="en-US" sz="1500" dirty="0">
                 <a:solidFill>
                   <a:srgbClr val="888888"/>
                 </a:solidFill>
               </a:rPr>
-              <a:t>0</a:t>
-            </a:r>
-            <a:endParaRPr lang="en-US" sz="2000" dirty="0"/>
-          </a:p>
-          <a:p>
-            <a:pPr algn="ctr" indent="0" marL="0">
-              <a:buNone/>
-            </a:pPr>
-            <a:r>
-              <a:rPr lang="en-US" sz="900" dirty="0">
-                <a:solidFill>
-                  <a:srgbClr val="666666"/>
-                </a:solidFill>
-              </a:rPr>
-              <a:t>FP</a:t>
-            </a:r>
-            <a:endParaRPr lang="en-US" sz="2000" dirty="0"/>
-          </a:p>
-        </p:txBody>
-      </p:sp>
-      <p:sp>
-        <p:nvSpPr>
-          <p:cNvPr id="15" name="Shape 13"/>
-          <p:cNvSpPr/>
-          <p:nvPr/>
-        </p:nvSpPr>
-        <p:spPr>
-          <a:xfrm>
-            <a:off x="2331720" y="1975104"/>
-            <a:ext cx="1143000" cy="548640"/>
-          </a:xfrm>
-          <a:prstGeom prst="rect">
-            <a:avLst/>
-          </a:prstGeom>
-          <a:solidFill>
-            <a:srgbClr val="EAEAEA"/>
-          </a:solidFill>
-          <a:ln w="6350">
-            <a:solidFill>
-              <a:srgbClr val="999999"/>
-            </a:solidFill>
-            <a:prstDash val="solid"/>
-          </a:ln>
-        </p:spPr>
-      </p:sp>
-      <p:sp>
-        <p:nvSpPr>
-          <p:cNvPr id="16" name="Text 14"/>
-          <p:cNvSpPr/>
-          <p:nvPr/>
-        </p:nvSpPr>
-        <p:spPr>
-          <a:xfrm>
-            <a:off x="2331720" y="1975104"/>
-            <a:ext cx="1143000" cy="548640"/>
-          </a:xfrm>
-          <a:prstGeom prst="rect">
-            <a:avLst/>
-          </a:prstGeom>
-          <a:noFill/>
-          <a:ln/>
-        </p:spPr>
-        <p:txBody>
-          <a:bodyPr wrap="square" lIns="0" tIns="0" rIns="0" bIns="0" rtlCol="0" anchor="ctr"/>
-          <a:lstStyle/>
-          <a:p>
-            <a:pPr algn="ctr" indent="0" marL="0">
-              <a:buNone/>
-            </a:pPr>
-            <a:r>
-              <a:rPr lang="en-US" sz="2000" b="1" dirty="0">
-                <a:solidFill>
-                  <a:srgbClr val="555555"/>
-                </a:solidFill>
-              </a:rPr>
-              <a:t>24</a:t>
-            </a:r>
-            <a:endParaRPr lang="en-US" sz="2000" dirty="0"/>
-          </a:p>
-          <a:p>
-            <a:pPr algn="ctr" indent="0" marL="0">
-              <a:buNone/>
-            </a:pPr>
-            <a:r>
-              <a:rPr lang="en-US" sz="900" dirty="0">
-                <a:solidFill>
-                  <a:srgbClr val="666666"/>
-                </a:solidFill>
-              </a:rPr>
-              <a:t>TN</a:t>
-            </a:r>
-            <a:endParaRPr lang="en-US" sz="2000" dirty="0"/>
-          </a:p>
-        </p:txBody>
-      </p:sp>
-      <p:sp>
-        <p:nvSpPr>
-          <p:cNvPr id="17" name="Text 15"/>
-          <p:cNvSpPr/>
-          <p:nvPr/>
-        </p:nvSpPr>
-        <p:spPr>
-          <a:xfrm>
-            <a:off x="640080" y="2542032"/>
-            <a:ext cx="2834640" cy="201168"/>
-          </a:xfrm>
-          <a:prstGeom prst="rect">
-            <a:avLst/>
-          </a:prstGeom>
-          <a:noFill/>
-          <a:ln/>
-        </p:spPr>
-        <p:txBody>
-          <a:bodyPr wrap="square" lIns="0" tIns="0" rIns="0" bIns="0" rtlCol="0" anchor="ctr"/>
-          <a:lstStyle/>
-          <a:p>
-            <a:pPr algn="ctr" indent="0" marL="0">
-              <a:buNone/>
-            </a:pPr>
-            <a:r>
-              <a:rPr lang="en-US" sz="1100" i="1" dirty="0">
-                <a:solidFill>
-                  <a:srgbClr val="555555"/>
-                </a:solidFill>
-              </a:rPr>
-              <a:t>Precision </a:t>
-            </a:r>
-            <a:pPr algn="ctr" indent="0" marL="0">
-              <a:buNone/>
-            </a:pPr>
-            <a:r>
-              <a:rPr lang="en-US" sz="1100" b="1" i="1" dirty="0">
-                <a:solidFill>
-                  <a:srgbClr val="1A1A1A"/>
-                </a:solidFill>
-              </a:rPr>
-              <a:t>1.00</a:t>
-            </a:r>
-            <a:pPr algn="ctr" indent="0" marL="0">
-              <a:buNone/>
-            </a:pPr>
-            <a:r>
-              <a:rPr lang="en-US" sz="1100" i="1" dirty="0">
-                <a:solidFill>
-                  <a:srgbClr val="555555"/>
-                </a:solidFill>
-              </a:rPr>
-              <a:t>   ·   Recall </a:t>
-            </a:r>
-            <a:pPr algn="ctr" indent="0" marL="0">
-              <a:buNone/>
-            </a:pPr>
-            <a:r>
-              <a:rPr lang="en-US" sz="1100" b="1" i="1" dirty="0">
-                <a:solidFill>
-                  <a:srgbClr val="1A1A1A"/>
-                </a:solidFill>
-              </a:rPr>
-              <a:t>0.76</a:t>
-            </a:r>
-            <a:endParaRPr lang="en-US" sz="1100" dirty="0"/>
-          </a:p>
-        </p:txBody>
-      </p:sp>
-      <p:sp>
-        <p:nvSpPr>
-          <p:cNvPr id="18" name="Text 16"/>
-          <p:cNvSpPr/>
-          <p:nvPr/>
-        </p:nvSpPr>
-        <p:spPr>
-          <a:xfrm>
-            <a:off x="4754880" y="914400"/>
-            <a:ext cx="2834640" cy="201168"/>
-          </a:xfrm>
-          <a:prstGeom prst="rect">
-            <a:avLst/>
-          </a:prstGeom>
-          <a:noFill/>
-          <a:ln/>
-        </p:spPr>
-        <p:txBody>
-          <a:bodyPr wrap="square" lIns="0" tIns="0" rIns="0" bIns="0" rtlCol="0" anchor="b"/>
-          <a:lstStyle/>
-          <a:p>
-            <a:pPr algn="ctr" indent="0" marL="0">
-              <a:buNone/>
-            </a:pPr>
-            <a:r>
-              <a:rPr lang="en-US" sz="1400" b="1" dirty="0">
+              <a:t>- on a Java codebase.</a:t>
+            </a:r>
+            <a:endParaRPr lang="en-US" sz="1500" dirty="0"/>
+          </a:p>
+          <a:p>
+            <a:pPr marL="342900" indent="-342900">
+              <a:spcAft>
+                <a:spcPts val="1000"/>
+              </a:spcAft>
+              <a:buSzPct val="100000"/>
+              <a:buChar char="•"/>
+            </a:pPr>
+            <a:r>
+              <a:rPr lang="en-US" sz="1500" dirty="0">
                 <a:solidFill>
                   <a:srgbClr val="000000"/>
                 </a:solidFill>
               </a:rPr>
-              <a:t>Ordering</a:t>
-            </a:r>
-            <a:endParaRPr lang="en-US" sz="1400" dirty="0"/>
-          </a:p>
-        </p:txBody>
-      </p:sp>
-      <p:sp>
-        <p:nvSpPr>
-          <p:cNvPr id="19" name="Text 17"/>
-          <p:cNvSpPr/>
-          <p:nvPr/>
-        </p:nvSpPr>
-        <p:spPr>
-          <a:xfrm>
-            <a:off x="5303520" y="1133856"/>
-            <a:ext cx="1143000" cy="201168"/>
-          </a:xfrm>
-          <a:prstGeom prst="rect">
-            <a:avLst/>
-          </a:prstGeom>
-          <a:noFill/>
-          <a:ln/>
-        </p:spPr>
-        <p:txBody>
-          <a:bodyPr wrap="square" lIns="0" tIns="0" rIns="0" bIns="0" rtlCol="0" anchor="ctr"/>
-          <a:lstStyle/>
-          <a:p>
-            <a:pPr algn="ctr" indent="0" marL="0">
-              <a:buNone/>
-            </a:pPr>
-            <a:r>
-              <a:rPr lang="en-US" sz="900" i="1" dirty="0">
-                <a:solidFill>
-                  <a:srgbClr val="555555"/>
-                </a:solidFill>
-              </a:rPr>
-              <a:t>Predicted +</a:t>
-            </a:r>
-            <a:endParaRPr lang="en-US" sz="900" dirty="0"/>
-          </a:p>
-        </p:txBody>
-      </p:sp>
-      <p:sp>
-        <p:nvSpPr>
-          <p:cNvPr id="20" name="Text 18"/>
-          <p:cNvSpPr/>
-          <p:nvPr/>
-        </p:nvSpPr>
-        <p:spPr>
-          <a:xfrm>
-            <a:off x="6446520" y="1133856"/>
-            <a:ext cx="1143000" cy="201168"/>
-          </a:xfrm>
-          <a:prstGeom prst="rect">
-            <a:avLst/>
-          </a:prstGeom>
-          <a:noFill/>
-          <a:ln/>
-        </p:spPr>
-        <p:txBody>
-          <a:bodyPr wrap="square" lIns="0" tIns="0" rIns="0" bIns="0" rtlCol="0" anchor="ctr"/>
-          <a:lstStyle/>
-          <a:p>
-            <a:pPr algn="ctr" indent="0" marL="0">
-              <a:buNone/>
-            </a:pPr>
-            <a:r>
-              <a:rPr lang="en-US" sz="900" i="1" dirty="0">
-                <a:solidFill>
-                  <a:srgbClr val="555555"/>
-                </a:solidFill>
-              </a:rPr>
-              <a:t>Predicted −</a:t>
-            </a:r>
-            <a:endParaRPr lang="en-US" sz="900" dirty="0"/>
-          </a:p>
-        </p:txBody>
-      </p:sp>
-      <p:sp>
-        <p:nvSpPr>
-          <p:cNvPr id="21" name="Text 19"/>
-          <p:cNvSpPr/>
-          <p:nvPr/>
-        </p:nvSpPr>
-        <p:spPr>
-          <a:xfrm>
-            <a:off x="4754880" y="1353312"/>
-            <a:ext cx="548640" cy="548640"/>
-          </a:xfrm>
-          <a:prstGeom prst="rect">
-            <a:avLst/>
-          </a:prstGeom>
-          <a:noFill/>
-          <a:ln/>
-        </p:spPr>
-        <p:txBody>
-          <a:bodyPr wrap="square" lIns="508" tIns="508" rIns="508" bIns="508" rtlCol="0" anchor="ctr"/>
-          <a:lstStyle/>
-          <a:p>
-            <a:pPr algn="r" indent="0" marL="0">
-              <a:buNone/>
-            </a:pPr>
-            <a:r>
-              <a:rPr lang="en-US" sz="900" i="1" dirty="0">
-                <a:solidFill>
-                  <a:srgbClr val="555555"/>
-                </a:solidFill>
-              </a:rPr>
-              <a:t>Actual +</a:t>
-            </a:r>
-            <a:endParaRPr lang="en-US" sz="900" dirty="0"/>
-          </a:p>
-        </p:txBody>
-      </p:sp>
-      <p:sp>
-        <p:nvSpPr>
-          <p:cNvPr id="22" name="Text 20"/>
-          <p:cNvSpPr/>
-          <p:nvPr/>
-        </p:nvSpPr>
-        <p:spPr>
-          <a:xfrm>
-            <a:off x="4754880" y="1901952"/>
-            <a:ext cx="548640" cy="548640"/>
-          </a:xfrm>
-          <a:prstGeom prst="rect">
-            <a:avLst/>
-          </a:prstGeom>
-          <a:noFill/>
-          <a:ln/>
-        </p:spPr>
-        <p:txBody>
-          <a:bodyPr wrap="square" lIns="508" tIns="508" rIns="508" bIns="508" rtlCol="0" anchor="ctr"/>
-          <a:lstStyle/>
-          <a:p>
-            <a:pPr algn="r" indent="0" marL="0">
-              <a:buNone/>
-            </a:pPr>
-            <a:r>
-              <a:rPr lang="en-US" sz="900" i="1" dirty="0">
-                <a:solidFill>
-                  <a:srgbClr val="555555"/>
-                </a:solidFill>
-              </a:rPr>
-              <a:t>Actual −</a:t>
-            </a:r>
-            <a:endParaRPr lang="en-US" sz="900" dirty="0"/>
-          </a:p>
-        </p:txBody>
-      </p:sp>
-      <p:sp>
-        <p:nvSpPr>
-          <p:cNvPr id="23" name="Shape 21"/>
-          <p:cNvSpPr/>
-          <p:nvPr/>
-        </p:nvSpPr>
-        <p:spPr>
-          <a:xfrm>
-            <a:off x="5303520" y="1426464"/>
-            <a:ext cx="1143000" cy="548640"/>
-          </a:xfrm>
-          <a:prstGeom prst="rect">
-            <a:avLst/>
-          </a:prstGeom>
-          <a:solidFill>
-            <a:srgbClr val="D4F0DC"/>
-          </a:solidFill>
-          <a:ln w="6350">
-            <a:solidFill>
-              <a:srgbClr val="999999"/>
-            </a:solidFill>
-            <a:prstDash val="solid"/>
-          </a:ln>
-        </p:spPr>
-      </p:sp>
-      <p:sp>
-        <p:nvSpPr>
-          <p:cNvPr id="24" name="Text 22"/>
-          <p:cNvSpPr/>
-          <p:nvPr/>
-        </p:nvSpPr>
-        <p:spPr>
-          <a:xfrm>
-            <a:off x="5303520" y="1426464"/>
-            <a:ext cx="1143000" cy="548640"/>
-          </a:xfrm>
-          <a:prstGeom prst="rect">
-            <a:avLst/>
-          </a:prstGeom>
-          <a:noFill/>
-          <a:ln/>
-        </p:spPr>
-        <p:txBody>
-          <a:bodyPr wrap="square" lIns="0" tIns="0" rIns="0" bIns="0" rtlCol="0" anchor="ctr"/>
-          <a:lstStyle/>
-          <a:p>
-            <a:pPr algn="ctr" indent="0" marL="0">
-              <a:buNone/>
-            </a:pPr>
-            <a:r>
-              <a:rPr lang="en-US" sz="2000" b="1" dirty="0">
-                <a:solidFill>
-                  <a:srgbClr val="0A7D2A"/>
-                </a:solidFill>
-              </a:rPr>
-              <a:t>14</a:t>
-            </a:r>
-            <a:endParaRPr lang="en-US" sz="2000" dirty="0"/>
-          </a:p>
-          <a:p>
-            <a:pPr algn="ctr" indent="0" marL="0">
-              <a:buNone/>
-            </a:pPr>
-            <a:r>
-              <a:rPr lang="en-US" sz="900" dirty="0">
-                <a:solidFill>
-                  <a:srgbClr val="666666"/>
-                </a:solidFill>
-              </a:rPr>
-              <a:t>TP</a:t>
-            </a:r>
-            <a:endParaRPr lang="en-US" sz="2000" dirty="0"/>
-          </a:p>
-        </p:txBody>
-      </p:sp>
-      <p:sp>
-        <p:nvSpPr>
-          <p:cNvPr id="25" name="Shape 23"/>
-          <p:cNvSpPr/>
-          <p:nvPr/>
-        </p:nvSpPr>
-        <p:spPr>
-          <a:xfrm>
-            <a:off x="6446520" y="1426464"/>
-            <a:ext cx="1143000" cy="548640"/>
-          </a:xfrm>
-          <a:prstGeom prst="rect">
-            <a:avLst/>
-          </a:prstGeom>
-          <a:solidFill>
-            <a:srgbClr val="F5D5CE"/>
-          </a:solidFill>
-          <a:ln w="6350">
-            <a:solidFill>
-              <a:srgbClr val="999999"/>
-            </a:solidFill>
-            <a:prstDash val="solid"/>
-          </a:ln>
-        </p:spPr>
-      </p:sp>
-      <p:sp>
-        <p:nvSpPr>
-          <p:cNvPr id="26" name="Text 24"/>
-          <p:cNvSpPr/>
-          <p:nvPr/>
-        </p:nvSpPr>
-        <p:spPr>
-          <a:xfrm>
-            <a:off x="6446520" y="1426464"/>
-            <a:ext cx="1143000" cy="548640"/>
-          </a:xfrm>
-          <a:prstGeom prst="rect">
-            <a:avLst/>
-          </a:prstGeom>
-          <a:noFill/>
-          <a:ln/>
-        </p:spPr>
-        <p:txBody>
-          <a:bodyPr wrap="square" lIns="0" tIns="0" rIns="0" bIns="0" rtlCol="0" anchor="ctr"/>
-          <a:lstStyle/>
-          <a:p>
-            <a:pPr algn="ctr" indent="0" marL="0">
-              <a:buNone/>
-            </a:pPr>
-            <a:r>
-              <a:rPr lang="en-US" sz="2000" b="1" dirty="0">
-                <a:solidFill>
-                  <a:srgbClr val="B33A1E"/>
-                </a:solidFill>
-              </a:rPr>
-              <a:t>24</a:t>
-            </a:r>
-            <a:endParaRPr lang="en-US" sz="2000" dirty="0"/>
-          </a:p>
-          <a:p>
-            <a:pPr algn="ctr" indent="0" marL="0">
-              <a:buNone/>
-            </a:pPr>
-            <a:r>
-              <a:rPr lang="en-US" sz="900" dirty="0">
-                <a:solidFill>
-                  <a:srgbClr val="666666"/>
-                </a:solidFill>
-              </a:rPr>
-              <a:t>FN</a:t>
-            </a:r>
-            <a:endParaRPr lang="en-US" sz="2000" dirty="0"/>
-          </a:p>
-        </p:txBody>
-      </p:sp>
-      <p:sp>
-        <p:nvSpPr>
-          <p:cNvPr id="27" name="Shape 25"/>
-          <p:cNvSpPr/>
-          <p:nvPr/>
-        </p:nvSpPr>
-        <p:spPr>
-          <a:xfrm>
-            <a:off x="5303520" y="1975104"/>
-            <a:ext cx="1143000" cy="548640"/>
-          </a:xfrm>
-          <a:prstGeom prst="rect">
-            <a:avLst/>
-          </a:prstGeom>
-          <a:solidFill>
-            <a:srgbClr val="F2F2F2"/>
-          </a:solidFill>
-          <a:ln w="6350">
-            <a:solidFill>
-              <a:srgbClr val="999999"/>
-            </a:solidFill>
-            <a:prstDash val="solid"/>
-          </a:ln>
-        </p:spPr>
-      </p:sp>
-      <p:sp>
-        <p:nvSpPr>
-          <p:cNvPr id="28" name="Text 26"/>
-          <p:cNvSpPr/>
-          <p:nvPr/>
-        </p:nvSpPr>
-        <p:spPr>
-          <a:xfrm>
-            <a:off x="5303520" y="1975104"/>
-            <a:ext cx="1143000" cy="548640"/>
-          </a:xfrm>
-          <a:prstGeom prst="rect">
-            <a:avLst/>
-          </a:prstGeom>
-          <a:noFill/>
-          <a:ln/>
-        </p:spPr>
-        <p:txBody>
-          <a:bodyPr wrap="square" lIns="0" tIns="0" rIns="0" bIns="0" rtlCol="0" anchor="ctr"/>
-          <a:lstStyle/>
-          <a:p>
-            <a:pPr algn="ctr" indent="0" marL="0">
-              <a:buNone/>
-            </a:pPr>
-            <a:r>
-              <a:rPr lang="en-US" sz="2000" b="1" dirty="0">
+              <a:t>3 raters (author + 2 external MEng cohort members) </a:t>
+            </a:r>
+            <a:pPr indent="0" marL="0">
+              <a:spcAft>
+                <a:spcPts val="1000"/>
+              </a:spcAft>
+              <a:buNone/>
+            </a:pPr>
+            <a:r>
+              <a:rPr lang="en-US" sz="1500" dirty="0">
                 <a:solidFill>
                   <a:srgbClr val="888888"/>
                 </a:solidFill>
               </a:rPr>
-              <a:t>0</a:t>
-            </a:r>
-            <a:endParaRPr lang="en-US" sz="2000" dirty="0"/>
-          </a:p>
-          <a:p>
-            <a:pPr algn="ctr" indent="0" marL="0">
-              <a:buNone/>
-            </a:pPr>
-            <a:r>
-              <a:rPr lang="en-US" sz="900" dirty="0">
-                <a:solidFill>
-                  <a:srgbClr val="666666"/>
-                </a:solidFill>
-              </a:rPr>
-              <a:t>FP</a:t>
-            </a:r>
-            <a:endParaRPr lang="en-US" sz="2000" dirty="0"/>
-          </a:p>
-        </p:txBody>
-      </p:sp>
-      <p:sp>
-        <p:nvSpPr>
-          <p:cNvPr id="29" name="Shape 27"/>
-          <p:cNvSpPr/>
-          <p:nvPr/>
-        </p:nvSpPr>
-        <p:spPr>
-          <a:xfrm>
-            <a:off x="6446520" y="1975104"/>
-            <a:ext cx="1143000" cy="548640"/>
-          </a:xfrm>
-          <a:prstGeom prst="rect">
-            <a:avLst/>
-          </a:prstGeom>
-          <a:solidFill>
-            <a:srgbClr val="EAEAEA"/>
-          </a:solidFill>
-          <a:ln w="6350">
-            <a:solidFill>
-              <a:srgbClr val="999999"/>
-            </a:solidFill>
-            <a:prstDash val="solid"/>
-          </a:ln>
-        </p:spPr>
-      </p:sp>
-      <p:sp>
-        <p:nvSpPr>
-          <p:cNvPr id="30" name="Text 28"/>
-          <p:cNvSpPr/>
-          <p:nvPr/>
-        </p:nvSpPr>
-        <p:spPr>
-          <a:xfrm>
-            <a:off x="6446520" y="1975104"/>
-            <a:ext cx="1143000" cy="548640"/>
-          </a:xfrm>
-          <a:prstGeom prst="rect">
-            <a:avLst/>
-          </a:prstGeom>
-          <a:noFill/>
-          <a:ln/>
-        </p:spPr>
-        <p:txBody>
-          <a:bodyPr wrap="square" lIns="0" tIns="0" rIns="0" bIns="0" rtlCol="0" anchor="ctr"/>
-          <a:lstStyle/>
-          <a:p>
-            <a:pPr algn="ctr" indent="0" marL="0">
-              <a:buNone/>
-            </a:pPr>
-            <a:r>
-              <a:rPr lang="en-US" sz="2000" b="1" dirty="0">
-                <a:solidFill>
-                  <a:srgbClr val="555555"/>
-                </a:solidFill>
-              </a:rPr>
-              <a:t>7</a:t>
-            </a:r>
-            <a:endParaRPr lang="en-US" sz="2000" dirty="0"/>
-          </a:p>
-          <a:p>
-            <a:pPr algn="ctr" indent="0" marL="0">
-              <a:buNone/>
-            </a:pPr>
-            <a:r>
-              <a:rPr lang="en-US" sz="900" dirty="0">
-                <a:solidFill>
-                  <a:srgbClr val="666666"/>
-                </a:solidFill>
-              </a:rPr>
-              <a:t>TN</a:t>
-            </a:r>
-            <a:endParaRPr lang="en-US" sz="2000" dirty="0"/>
-          </a:p>
-        </p:txBody>
-      </p:sp>
-      <p:sp>
-        <p:nvSpPr>
-          <p:cNvPr id="31" name="Text 29"/>
-          <p:cNvSpPr/>
-          <p:nvPr/>
-        </p:nvSpPr>
-        <p:spPr>
-          <a:xfrm>
-            <a:off x="4754880" y="2542032"/>
-            <a:ext cx="2834640" cy="201168"/>
-          </a:xfrm>
-          <a:prstGeom prst="rect">
-            <a:avLst/>
-          </a:prstGeom>
-          <a:noFill/>
-          <a:ln/>
-        </p:spPr>
-        <p:txBody>
-          <a:bodyPr wrap="square" lIns="0" tIns="0" rIns="0" bIns="0" rtlCol="0" anchor="ctr"/>
-          <a:lstStyle/>
-          <a:p>
-            <a:pPr algn="ctr" indent="0" marL="0">
-              <a:buNone/>
-            </a:pPr>
-            <a:r>
-              <a:rPr lang="en-US" sz="1100" i="1" dirty="0">
-                <a:solidFill>
-                  <a:srgbClr val="555555"/>
-                </a:solidFill>
-              </a:rPr>
-              <a:t>Precision </a:t>
-            </a:r>
-            <a:pPr algn="ctr" indent="0" marL="0">
-              <a:buNone/>
-            </a:pPr>
-            <a:r>
-              <a:rPr lang="en-US" sz="1100" b="1" i="1" dirty="0">
-                <a:solidFill>
-                  <a:srgbClr val="1A1A1A"/>
-                </a:solidFill>
-              </a:rPr>
-              <a:t>1.00</a:t>
-            </a:r>
-            <a:pPr algn="ctr" indent="0" marL="0">
-              <a:buNone/>
-            </a:pPr>
-            <a:r>
-              <a:rPr lang="en-US" sz="1100" i="1" dirty="0">
-                <a:solidFill>
-                  <a:srgbClr val="555555"/>
-                </a:solidFill>
-              </a:rPr>
-              <a:t>   ·   Recall </a:t>
-            </a:r>
-            <a:pPr algn="ctr" indent="0" marL="0">
-              <a:buNone/>
-            </a:pPr>
-            <a:r>
-              <a:rPr lang="en-US" sz="1100" b="1" i="1" dirty="0">
-                <a:solidFill>
-                  <a:srgbClr val="1A1A1A"/>
-                </a:solidFill>
-              </a:rPr>
-              <a:t>0.36</a:t>
-            </a:r>
-            <a:endParaRPr lang="en-US" sz="1100" dirty="0"/>
-          </a:p>
-        </p:txBody>
-      </p:sp>
-      <p:sp>
-        <p:nvSpPr>
-          <p:cNvPr id="32" name="Text 30"/>
-          <p:cNvSpPr/>
-          <p:nvPr/>
-        </p:nvSpPr>
-        <p:spPr>
-          <a:xfrm>
-            <a:off x="640080" y="2926080"/>
-            <a:ext cx="2834640" cy="201168"/>
-          </a:xfrm>
-          <a:prstGeom prst="rect">
-            <a:avLst/>
-          </a:prstGeom>
-          <a:noFill/>
-          <a:ln/>
-        </p:spPr>
-        <p:txBody>
-          <a:bodyPr wrap="square" lIns="0" tIns="0" rIns="0" bIns="0" rtlCol="0" anchor="b"/>
-          <a:lstStyle/>
-          <a:p>
-            <a:pPr algn="ctr" indent="0" marL="0">
-              <a:buNone/>
-            </a:pPr>
-            <a:r>
-              <a:rPr lang="en-US" sz="1400" b="1" dirty="0">
+              <a:t>- inter-rater Cohen's κ = 1.00 (Ordering, Manual-Refactor), 0.86–1.00 (Rework), 0.72–0.86 (Hygiene).</a:t>
+            </a:r>
+            <a:endParaRPr lang="en-US" sz="1500" dirty="0"/>
+          </a:p>
+          <a:p>
+            <a:pPr marL="342900" indent="-342900">
+              <a:spcAft>
+                <a:spcPts val="1000"/>
+              </a:spcAft>
+              <a:buSzPct val="100000"/>
+              <a:buChar char="•"/>
+            </a:pPr>
+            <a:r>
+              <a:rPr lang="en-US" sz="1500" dirty="0">
                 <a:solidFill>
                   <a:srgbClr val="000000"/>
                 </a:solidFill>
               </a:rPr>
-              <a:t>Rework</a:t>
-            </a:r>
-            <a:endParaRPr lang="en-US" sz="1400" dirty="0"/>
-          </a:p>
-        </p:txBody>
-      </p:sp>
-      <p:sp>
-        <p:nvSpPr>
-          <p:cNvPr id="33" name="Text 31"/>
-          <p:cNvSpPr/>
-          <p:nvPr/>
-        </p:nvSpPr>
-        <p:spPr>
-          <a:xfrm>
-            <a:off x="1188720" y="3145536"/>
-            <a:ext cx="1143000" cy="201168"/>
-          </a:xfrm>
-          <a:prstGeom prst="rect">
-            <a:avLst/>
-          </a:prstGeom>
-          <a:noFill/>
-          <a:ln/>
-        </p:spPr>
-        <p:txBody>
-          <a:bodyPr wrap="square" lIns="0" tIns="0" rIns="0" bIns="0" rtlCol="0" anchor="ctr"/>
-          <a:lstStyle/>
-          <a:p>
-            <a:pPr algn="ctr" indent="0" marL="0">
-              <a:buNone/>
-            </a:pPr>
-            <a:r>
-              <a:rPr lang="en-US" sz="900" i="1" dirty="0">
-                <a:solidFill>
-                  <a:srgbClr val="555555"/>
-                </a:solidFill>
-              </a:rPr>
-              <a:t>Predicted +</a:t>
-            </a:r>
-            <a:endParaRPr lang="en-US" sz="900" dirty="0"/>
-          </a:p>
-        </p:txBody>
-      </p:sp>
-      <p:sp>
-        <p:nvSpPr>
-          <p:cNvPr id="34" name="Text 32"/>
-          <p:cNvSpPr/>
-          <p:nvPr/>
-        </p:nvSpPr>
-        <p:spPr>
-          <a:xfrm>
-            <a:off x="2331720" y="3145536"/>
-            <a:ext cx="1143000" cy="201168"/>
-          </a:xfrm>
-          <a:prstGeom prst="rect">
-            <a:avLst/>
-          </a:prstGeom>
-          <a:noFill/>
-          <a:ln/>
-        </p:spPr>
-        <p:txBody>
-          <a:bodyPr wrap="square" lIns="0" tIns="0" rIns="0" bIns="0" rtlCol="0" anchor="ctr"/>
-          <a:lstStyle/>
-          <a:p>
-            <a:pPr algn="ctr" indent="0" marL="0">
-              <a:buNone/>
-            </a:pPr>
-            <a:r>
-              <a:rPr lang="en-US" sz="900" i="1" dirty="0">
-                <a:solidFill>
-                  <a:srgbClr val="555555"/>
-                </a:solidFill>
-              </a:rPr>
-              <a:t>Predicted −</a:t>
-            </a:r>
-            <a:endParaRPr lang="en-US" sz="900" dirty="0"/>
-          </a:p>
-        </p:txBody>
-      </p:sp>
-      <p:sp>
-        <p:nvSpPr>
-          <p:cNvPr id="35" name="Text 33"/>
-          <p:cNvSpPr/>
-          <p:nvPr/>
-        </p:nvSpPr>
-        <p:spPr>
-          <a:xfrm>
-            <a:off x="640080" y="3364992"/>
-            <a:ext cx="548640" cy="548640"/>
-          </a:xfrm>
-          <a:prstGeom prst="rect">
-            <a:avLst/>
-          </a:prstGeom>
-          <a:noFill/>
-          <a:ln/>
-        </p:spPr>
-        <p:txBody>
-          <a:bodyPr wrap="square" lIns="508" tIns="508" rIns="508" bIns="508" rtlCol="0" anchor="ctr"/>
-          <a:lstStyle/>
-          <a:p>
-            <a:pPr algn="r" indent="0" marL="0">
-              <a:buNone/>
-            </a:pPr>
-            <a:r>
-              <a:rPr lang="en-US" sz="900" i="1" dirty="0">
-                <a:solidFill>
-                  <a:srgbClr val="555555"/>
-                </a:solidFill>
-              </a:rPr>
-              <a:t>Actual +</a:t>
-            </a:r>
-            <a:endParaRPr lang="en-US" sz="900" dirty="0"/>
-          </a:p>
-        </p:txBody>
-      </p:sp>
-      <p:sp>
-        <p:nvSpPr>
-          <p:cNvPr id="36" name="Text 34"/>
-          <p:cNvSpPr/>
-          <p:nvPr/>
-        </p:nvSpPr>
-        <p:spPr>
-          <a:xfrm>
-            <a:off x="640080" y="3913632"/>
-            <a:ext cx="548640" cy="548640"/>
-          </a:xfrm>
-          <a:prstGeom prst="rect">
-            <a:avLst/>
-          </a:prstGeom>
-          <a:noFill/>
-          <a:ln/>
-        </p:spPr>
-        <p:txBody>
-          <a:bodyPr wrap="square" lIns="508" tIns="508" rIns="508" bIns="508" rtlCol="0" anchor="ctr"/>
-          <a:lstStyle/>
-          <a:p>
-            <a:pPr algn="r" indent="0" marL="0">
-              <a:buNone/>
-            </a:pPr>
-            <a:r>
-              <a:rPr lang="en-US" sz="900" i="1" dirty="0">
-                <a:solidFill>
-                  <a:srgbClr val="555555"/>
-                </a:solidFill>
-              </a:rPr>
-              <a:t>Actual −</a:t>
-            </a:r>
-            <a:endParaRPr lang="en-US" sz="900" dirty="0"/>
-          </a:p>
-        </p:txBody>
-      </p:sp>
-      <p:sp>
-        <p:nvSpPr>
-          <p:cNvPr id="37" name="Shape 35"/>
-          <p:cNvSpPr/>
-          <p:nvPr/>
-        </p:nvSpPr>
-        <p:spPr>
-          <a:xfrm>
-            <a:off x="1188720" y="3438144"/>
-            <a:ext cx="1143000" cy="548640"/>
-          </a:xfrm>
-          <a:prstGeom prst="rect">
-            <a:avLst/>
-          </a:prstGeom>
-          <a:solidFill>
-            <a:srgbClr val="D4F0DC"/>
-          </a:solidFill>
-          <a:ln w="6350">
-            <a:solidFill>
-              <a:srgbClr val="999999"/>
-            </a:solidFill>
-            <a:prstDash val="solid"/>
-          </a:ln>
-        </p:spPr>
-      </p:sp>
-      <p:sp>
-        <p:nvSpPr>
-          <p:cNvPr id="38" name="Text 36"/>
-          <p:cNvSpPr/>
-          <p:nvPr/>
-        </p:nvSpPr>
-        <p:spPr>
-          <a:xfrm>
-            <a:off x="1188720" y="3438144"/>
-            <a:ext cx="1143000" cy="548640"/>
-          </a:xfrm>
-          <a:prstGeom prst="rect">
-            <a:avLst/>
-          </a:prstGeom>
-          <a:noFill/>
-          <a:ln/>
-        </p:spPr>
-        <p:txBody>
-          <a:bodyPr wrap="square" lIns="0" tIns="0" rIns="0" bIns="0" rtlCol="0" anchor="ctr"/>
-          <a:lstStyle/>
-          <a:p>
-            <a:pPr algn="ctr" indent="0" marL="0">
-              <a:buNone/>
-            </a:pPr>
-            <a:r>
-              <a:rPr lang="en-US" sz="2000" b="1" dirty="0">
-                <a:solidFill>
-                  <a:srgbClr val="0A7D2A"/>
-                </a:solidFill>
-              </a:rPr>
-              <a:t>9</a:t>
-            </a:r>
-            <a:endParaRPr lang="en-US" sz="2000" dirty="0"/>
-          </a:p>
-          <a:p>
-            <a:pPr algn="ctr" indent="0" marL="0">
-              <a:buNone/>
-            </a:pPr>
-            <a:r>
-              <a:rPr lang="en-US" sz="900" dirty="0">
-                <a:solidFill>
-                  <a:srgbClr val="666666"/>
-                </a:solidFill>
-              </a:rPr>
-              <a:t>TP</a:t>
-            </a:r>
-            <a:endParaRPr lang="en-US" sz="2000" dirty="0"/>
-          </a:p>
-        </p:txBody>
-      </p:sp>
-      <p:sp>
-        <p:nvSpPr>
-          <p:cNvPr id="39" name="Shape 37"/>
-          <p:cNvSpPr/>
-          <p:nvPr/>
-        </p:nvSpPr>
-        <p:spPr>
-          <a:xfrm>
-            <a:off x="2331720" y="3438144"/>
-            <a:ext cx="1143000" cy="548640"/>
-          </a:xfrm>
-          <a:prstGeom prst="rect">
-            <a:avLst/>
-          </a:prstGeom>
-          <a:solidFill>
-            <a:srgbClr val="F5D5CE"/>
-          </a:solidFill>
-          <a:ln w="6350">
-            <a:solidFill>
-              <a:srgbClr val="999999"/>
-            </a:solidFill>
-            <a:prstDash val="solid"/>
-          </a:ln>
-        </p:spPr>
-      </p:sp>
-      <p:sp>
-        <p:nvSpPr>
-          <p:cNvPr id="40" name="Text 38"/>
-          <p:cNvSpPr/>
-          <p:nvPr/>
-        </p:nvSpPr>
-        <p:spPr>
-          <a:xfrm>
-            <a:off x="2331720" y="3438144"/>
-            <a:ext cx="1143000" cy="548640"/>
-          </a:xfrm>
-          <a:prstGeom prst="rect">
-            <a:avLst/>
-          </a:prstGeom>
-          <a:noFill/>
-          <a:ln/>
-        </p:spPr>
-        <p:txBody>
-          <a:bodyPr wrap="square" lIns="0" tIns="0" rIns="0" bIns="0" rtlCol="0" anchor="ctr"/>
-          <a:lstStyle/>
-          <a:p>
-            <a:pPr algn="ctr" indent="0" marL="0">
-              <a:buNone/>
-            </a:pPr>
-            <a:r>
-              <a:rPr lang="en-US" sz="2000" b="1" dirty="0">
-                <a:solidFill>
-                  <a:srgbClr val="B33A1E"/>
-                </a:solidFill>
-              </a:rPr>
-              <a:t>0</a:t>
-            </a:r>
-            <a:endParaRPr lang="en-US" sz="2000" dirty="0"/>
-          </a:p>
-          <a:p>
-            <a:pPr algn="ctr" indent="0" marL="0">
-              <a:buNone/>
-            </a:pPr>
-            <a:r>
-              <a:rPr lang="en-US" sz="900" dirty="0">
-                <a:solidFill>
-                  <a:srgbClr val="666666"/>
-                </a:solidFill>
-              </a:rPr>
-              <a:t>FN</a:t>
-            </a:r>
-            <a:endParaRPr lang="en-US" sz="2000" dirty="0"/>
-          </a:p>
-        </p:txBody>
-      </p:sp>
-      <p:sp>
-        <p:nvSpPr>
-          <p:cNvPr id="41" name="Shape 39"/>
-          <p:cNvSpPr/>
-          <p:nvPr/>
-        </p:nvSpPr>
-        <p:spPr>
-          <a:xfrm>
-            <a:off x="1188720" y="3986784"/>
-            <a:ext cx="1143000" cy="548640"/>
-          </a:xfrm>
-          <a:prstGeom prst="rect">
-            <a:avLst/>
-          </a:prstGeom>
-          <a:solidFill>
-            <a:srgbClr val="F2F2F2"/>
-          </a:solidFill>
-          <a:ln w="6350">
-            <a:solidFill>
-              <a:srgbClr val="999999"/>
-            </a:solidFill>
-            <a:prstDash val="solid"/>
-          </a:ln>
-        </p:spPr>
-      </p:sp>
-      <p:sp>
-        <p:nvSpPr>
-          <p:cNvPr id="42" name="Text 40"/>
-          <p:cNvSpPr/>
-          <p:nvPr/>
-        </p:nvSpPr>
-        <p:spPr>
-          <a:xfrm>
-            <a:off x="1188720" y="3986784"/>
-            <a:ext cx="1143000" cy="548640"/>
-          </a:xfrm>
-          <a:prstGeom prst="rect">
-            <a:avLst/>
-          </a:prstGeom>
-          <a:noFill/>
-          <a:ln/>
-        </p:spPr>
-        <p:txBody>
-          <a:bodyPr wrap="square" lIns="0" tIns="0" rIns="0" bIns="0" rtlCol="0" anchor="ctr"/>
-          <a:lstStyle/>
-          <a:p>
-            <a:pPr algn="ctr" indent="0" marL="0">
-              <a:buNone/>
-            </a:pPr>
-            <a:r>
-              <a:rPr lang="en-US" sz="2000" b="1" dirty="0">
+              <a:t>Disagreements predominantly surrounding hygiene + rework labels </a:t>
+            </a:r>
+            <a:pPr indent="0" marL="0">
+              <a:spcAft>
+                <a:spcPts val="1000"/>
+              </a:spcAft>
+              <a:buNone/>
+            </a:pPr>
+            <a:r>
+              <a:rPr lang="en-US" sz="1500" dirty="0">
                 <a:solidFill>
                   <a:srgbClr val="888888"/>
                 </a:solidFill>
               </a:rPr>
-              <a:t>0</a:t>
-            </a:r>
-            <a:endParaRPr lang="en-US" sz="2000" dirty="0"/>
-          </a:p>
-          <a:p>
-            <a:pPr algn="ctr" indent="0" marL="0">
-              <a:buNone/>
-            </a:pPr>
-            <a:r>
-              <a:rPr lang="en-US" sz="900" dirty="0">
-                <a:solidFill>
-                  <a:srgbClr val="666666"/>
-                </a:solidFill>
-              </a:rPr>
-              <a:t>FP</a:t>
-            </a:r>
-            <a:endParaRPr lang="en-US" sz="2000" dirty="0"/>
-          </a:p>
-        </p:txBody>
-      </p:sp>
-      <p:sp>
-        <p:nvSpPr>
-          <p:cNvPr id="43" name="Shape 41"/>
-          <p:cNvSpPr/>
-          <p:nvPr/>
-        </p:nvSpPr>
-        <p:spPr>
-          <a:xfrm>
-            <a:off x="2331720" y="3986784"/>
-            <a:ext cx="1143000" cy="548640"/>
-          </a:xfrm>
-          <a:prstGeom prst="rect">
-            <a:avLst/>
-          </a:prstGeom>
-          <a:solidFill>
-            <a:srgbClr val="EAEAEA"/>
-          </a:solidFill>
-          <a:ln w="6350">
-            <a:solidFill>
-              <a:srgbClr val="999999"/>
-            </a:solidFill>
-            <a:prstDash val="solid"/>
-          </a:ln>
-        </p:spPr>
-      </p:sp>
-      <p:sp>
-        <p:nvSpPr>
-          <p:cNvPr id="44" name="Text 42"/>
-          <p:cNvSpPr/>
-          <p:nvPr/>
-        </p:nvSpPr>
-        <p:spPr>
-          <a:xfrm>
-            <a:off x="2331720" y="3986784"/>
-            <a:ext cx="1143000" cy="548640"/>
-          </a:xfrm>
-          <a:prstGeom prst="rect">
-            <a:avLst/>
-          </a:prstGeom>
-          <a:noFill/>
-          <a:ln/>
-        </p:spPr>
-        <p:txBody>
-          <a:bodyPr wrap="square" lIns="0" tIns="0" rIns="0" bIns="0" rtlCol="0" anchor="ctr"/>
-          <a:lstStyle/>
-          <a:p>
-            <a:pPr algn="ctr" indent="0" marL="0">
-              <a:buNone/>
-            </a:pPr>
-            <a:r>
-              <a:rPr lang="en-US" sz="2000" b="1" dirty="0">
-                <a:solidFill>
-                  <a:srgbClr val="555555"/>
-                </a:solidFill>
-              </a:rPr>
-              <a:t>36</a:t>
-            </a:r>
-            <a:endParaRPr lang="en-US" sz="2000" dirty="0"/>
-          </a:p>
-          <a:p>
-            <a:pPr algn="ctr" indent="0" marL="0">
-              <a:buNone/>
-            </a:pPr>
-            <a:r>
-              <a:rPr lang="en-US" sz="900" dirty="0">
-                <a:solidFill>
-                  <a:srgbClr val="666666"/>
-                </a:solidFill>
-              </a:rPr>
-              <a:t>TN</a:t>
-            </a:r>
-            <a:endParaRPr lang="en-US" sz="2000" dirty="0"/>
-          </a:p>
-        </p:txBody>
-      </p:sp>
-      <p:sp>
-        <p:nvSpPr>
-          <p:cNvPr id="45" name="Text 43"/>
-          <p:cNvSpPr/>
-          <p:nvPr/>
-        </p:nvSpPr>
-        <p:spPr>
-          <a:xfrm>
-            <a:off x="640080" y="4553712"/>
-            <a:ext cx="2834640" cy="201168"/>
-          </a:xfrm>
-          <a:prstGeom prst="rect">
-            <a:avLst/>
-          </a:prstGeom>
-          <a:noFill/>
-          <a:ln/>
-        </p:spPr>
-        <p:txBody>
-          <a:bodyPr wrap="square" lIns="0" tIns="0" rIns="0" bIns="0" rtlCol="0" anchor="ctr"/>
-          <a:lstStyle/>
-          <a:p>
-            <a:pPr algn="ctr" indent="0" marL="0">
-              <a:buNone/>
-            </a:pPr>
-            <a:r>
-              <a:rPr lang="en-US" sz="1100" i="1" dirty="0">
-                <a:solidFill>
-                  <a:srgbClr val="555555"/>
-                </a:solidFill>
-              </a:rPr>
-              <a:t>Precision </a:t>
-            </a:r>
-            <a:pPr algn="ctr" indent="0" marL="0">
-              <a:buNone/>
-            </a:pPr>
-            <a:r>
-              <a:rPr lang="en-US" sz="1100" b="1" i="1" dirty="0">
-                <a:solidFill>
-                  <a:srgbClr val="1A1A1A"/>
-                </a:solidFill>
-              </a:rPr>
-              <a:t>1.00</a:t>
-            </a:r>
-            <a:pPr algn="ctr" indent="0" marL="0">
-              <a:buNone/>
-            </a:pPr>
-            <a:r>
-              <a:rPr lang="en-US" sz="1100" i="1" dirty="0">
-                <a:solidFill>
-                  <a:srgbClr val="555555"/>
-                </a:solidFill>
-              </a:rPr>
-              <a:t>   ·   Recall </a:t>
-            </a:r>
-            <a:pPr algn="ctr" indent="0" marL="0">
-              <a:buNone/>
-            </a:pPr>
-            <a:r>
-              <a:rPr lang="en-US" sz="1100" b="1" i="1" dirty="0">
-                <a:solidFill>
-                  <a:srgbClr val="1A1A1A"/>
-                </a:solidFill>
-              </a:rPr>
-              <a:t>1.00</a:t>
-            </a:r>
-            <a:endParaRPr lang="en-US" sz="1100" dirty="0"/>
-          </a:p>
-        </p:txBody>
-      </p:sp>
-      <p:sp>
-        <p:nvSpPr>
-          <p:cNvPr id="46" name="Text 44"/>
-          <p:cNvSpPr/>
-          <p:nvPr/>
-        </p:nvSpPr>
-        <p:spPr>
-          <a:xfrm>
-            <a:off x="4754880" y="2926080"/>
-            <a:ext cx="2834640" cy="201168"/>
-          </a:xfrm>
-          <a:prstGeom prst="rect">
-            <a:avLst/>
-          </a:prstGeom>
-          <a:noFill/>
-          <a:ln/>
-        </p:spPr>
-        <p:txBody>
-          <a:bodyPr wrap="square" lIns="0" tIns="0" rIns="0" bIns="0" rtlCol="0" anchor="b"/>
-          <a:lstStyle/>
-          <a:p>
-            <a:pPr algn="ctr" indent="0" marL="0">
-              <a:buNone/>
-            </a:pPr>
-            <a:r>
-              <a:rPr lang="en-US" sz="1400" b="1" dirty="0">
+              <a:t>- differences in opinion of what constitutes a step.</a:t>
+            </a:r>
+            <a:endParaRPr lang="en-US" sz="1500" dirty="0"/>
+          </a:p>
+          <a:p>
+            <a:pPr marL="342900" indent="-342900">
+              <a:spcAft>
+                <a:spcPts val="1000"/>
+              </a:spcAft>
+              <a:buSzPct val="100000"/>
+              <a:buChar char="•"/>
+            </a:pPr>
+            <a:r>
+              <a:rPr lang="en-US" sz="1500" dirty="0">
                 <a:solidFill>
                   <a:srgbClr val="000000"/>
                 </a:solidFill>
               </a:rPr>
-              <a:t>Hygiene</a:t>
-            </a:r>
-            <a:endParaRPr lang="en-US" sz="1400" dirty="0"/>
-          </a:p>
-        </p:txBody>
-      </p:sp>
-      <p:sp>
-        <p:nvSpPr>
-          <p:cNvPr id="47" name="Text 45"/>
-          <p:cNvSpPr/>
-          <p:nvPr/>
-        </p:nvSpPr>
-        <p:spPr>
-          <a:xfrm>
-            <a:off x="5303520" y="3145536"/>
-            <a:ext cx="1143000" cy="201168"/>
-          </a:xfrm>
-          <a:prstGeom prst="rect">
-            <a:avLst/>
-          </a:prstGeom>
-          <a:noFill/>
-          <a:ln/>
-        </p:spPr>
-        <p:txBody>
-          <a:bodyPr wrap="square" lIns="0" tIns="0" rIns="0" bIns="0" rtlCol="0" anchor="ctr"/>
-          <a:lstStyle/>
-          <a:p>
-            <a:pPr algn="ctr" indent="0" marL="0">
-              <a:buNone/>
-            </a:pPr>
-            <a:r>
-              <a:rPr lang="en-US" sz="900" i="1" dirty="0">
-                <a:solidFill>
-                  <a:srgbClr val="555555"/>
-                </a:solidFill>
-              </a:rPr>
-              <a:t>Predicted +</a:t>
-            </a:r>
-            <a:endParaRPr lang="en-US" sz="900" dirty="0"/>
-          </a:p>
-        </p:txBody>
-      </p:sp>
-      <p:sp>
-        <p:nvSpPr>
-          <p:cNvPr id="48" name="Text 46"/>
-          <p:cNvSpPr/>
-          <p:nvPr/>
-        </p:nvSpPr>
-        <p:spPr>
-          <a:xfrm>
-            <a:off x="6446520" y="3145536"/>
-            <a:ext cx="1143000" cy="201168"/>
-          </a:xfrm>
-          <a:prstGeom prst="rect">
-            <a:avLst/>
-          </a:prstGeom>
-          <a:noFill/>
-          <a:ln/>
-        </p:spPr>
-        <p:txBody>
-          <a:bodyPr wrap="square" lIns="0" tIns="0" rIns="0" bIns="0" rtlCol="0" anchor="ctr"/>
-          <a:lstStyle/>
-          <a:p>
-            <a:pPr algn="ctr" indent="0" marL="0">
-              <a:buNone/>
-            </a:pPr>
-            <a:r>
-              <a:rPr lang="en-US" sz="900" i="1" dirty="0">
-                <a:solidFill>
-                  <a:srgbClr val="555555"/>
-                </a:solidFill>
-              </a:rPr>
-              <a:t>Predicted −</a:t>
-            </a:r>
-            <a:endParaRPr lang="en-US" sz="900" dirty="0"/>
-          </a:p>
-        </p:txBody>
-      </p:sp>
-      <p:sp>
-        <p:nvSpPr>
-          <p:cNvPr id="49" name="Text 47"/>
-          <p:cNvSpPr/>
-          <p:nvPr/>
-        </p:nvSpPr>
-        <p:spPr>
-          <a:xfrm>
-            <a:off x="4754880" y="3364992"/>
-            <a:ext cx="548640" cy="548640"/>
-          </a:xfrm>
-          <a:prstGeom prst="rect">
-            <a:avLst/>
-          </a:prstGeom>
-          <a:noFill/>
-          <a:ln/>
-        </p:spPr>
-        <p:txBody>
-          <a:bodyPr wrap="square" lIns="508" tIns="508" rIns="508" bIns="508" rtlCol="0" anchor="ctr"/>
-          <a:lstStyle/>
-          <a:p>
-            <a:pPr algn="r" indent="0" marL="0">
-              <a:buNone/>
-            </a:pPr>
-            <a:r>
-              <a:rPr lang="en-US" sz="900" i="1" dirty="0">
-                <a:solidFill>
-                  <a:srgbClr val="555555"/>
-                </a:solidFill>
-              </a:rPr>
-              <a:t>Actual +</a:t>
-            </a:r>
-            <a:endParaRPr lang="en-US" sz="900" dirty="0"/>
-          </a:p>
-        </p:txBody>
-      </p:sp>
-      <p:sp>
-        <p:nvSpPr>
-          <p:cNvPr id="50" name="Text 48"/>
-          <p:cNvSpPr/>
-          <p:nvPr/>
-        </p:nvSpPr>
-        <p:spPr>
-          <a:xfrm>
-            <a:off x="4754880" y="3913632"/>
-            <a:ext cx="548640" cy="548640"/>
-          </a:xfrm>
-          <a:prstGeom prst="rect">
-            <a:avLst/>
-          </a:prstGeom>
-          <a:noFill/>
-          <a:ln/>
-        </p:spPr>
-        <p:txBody>
-          <a:bodyPr wrap="square" lIns="508" tIns="508" rIns="508" bIns="508" rtlCol="0" anchor="ctr"/>
-          <a:lstStyle/>
-          <a:p>
-            <a:pPr algn="r" indent="0" marL="0">
-              <a:buNone/>
-            </a:pPr>
-            <a:r>
-              <a:rPr lang="en-US" sz="900" i="1" dirty="0">
-                <a:solidFill>
-                  <a:srgbClr val="555555"/>
-                </a:solidFill>
-              </a:rPr>
-              <a:t>Actual −</a:t>
-            </a:r>
-            <a:endParaRPr lang="en-US" sz="900" dirty="0"/>
-          </a:p>
-        </p:txBody>
-      </p:sp>
-      <p:sp>
-        <p:nvSpPr>
-          <p:cNvPr id="51" name="Shape 49"/>
-          <p:cNvSpPr/>
-          <p:nvPr/>
-        </p:nvSpPr>
-        <p:spPr>
-          <a:xfrm>
-            <a:off x="5303520" y="3438144"/>
-            <a:ext cx="1143000" cy="548640"/>
-          </a:xfrm>
-          <a:prstGeom prst="rect">
-            <a:avLst/>
-          </a:prstGeom>
-          <a:solidFill>
-            <a:srgbClr val="D4F0DC"/>
-          </a:solidFill>
-          <a:ln w="6350">
-            <a:solidFill>
-              <a:srgbClr val="999999"/>
-            </a:solidFill>
-            <a:prstDash val="solid"/>
-          </a:ln>
-        </p:spPr>
-      </p:sp>
-      <p:sp>
-        <p:nvSpPr>
-          <p:cNvPr id="52" name="Text 50"/>
-          <p:cNvSpPr/>
-          <p:nvPr/>
-        </p:nvSpPr>
-        <p:spPr>
-          <a:xfrm>
-            <a:off x="5303520" y="3438144"/>
-            <a:ext cx="1143000" cy="548640"/>
-          </a:xfrm>
-          <a:prstGeom prst="rect">
-            <a:avLst/>
-          </a:prstGeom>
-          <a:noFill/>
-          <a:ln/>
-        </p:spPr>
-        <p:txBody>
-          <a:bodyPr wrap="square" lIns="0" tIns="0" rIns="0" bIns="0" rtlCol="0" anchor="ctr"/>
-          <a:lstStyle/>
-          <a:p>
-            <a:pPr algn="ctr" indent="0" marL="0">
-              <a:buNone/>
-            </a:pPr>
-            <a:r>
-              <a:rPr lang="en-US" sz="2000" b="1" dirty="0">
-                <a:solidFill>
-                  <a:srgbClr val="0A7D2A"/>
-                </a:solidFill>
-              </a:rPr>
-              <a:t>8</a:t>
-            </a:r>
-            <a:endParaRPr lang="en-US" sz="2000" dirty="0"/>
-          </a:p>
-          <a:p>
-            <a:pPr algn="ctr" indent="0" marL="0">
-              <a:buNone/>
-            </a:pPr>
-            <a:r>
-              <a:rPr lang="en-US" sz="900" dirty="0">
-                <a:solidFill>
-                  <a:srgbClr val="666666"/>
-                </a:solidFill>
-              </a:rPr>
-              <a:t>TP</a:t>
-            </a:r>
-            <a:endParaRPr lang="en-US" sz="2000" dirty="0"/>
-          </a:p>
-        </p:txBody>
-      </p:sp>
-      <p:sp>
-        <p:nvSpPr>
-          <p:cNvPr id="53" name="Shape 51"/>
-          <p:cNvSpPr/>
-          <p:nvPr/>
-        </p:nvSpPr>
-        <p:spPr>
-          <a:xfrm>
-            <a:off x="6446520" y="3438144"/>
-            <a:ext cx="1143000" cy="548640"/>
-          </a:xfrm>
-          <a:prstGeom prst="rect">
-            <a:avLst/>
-          </a:prstGeom>
-          <a:solidFill>
-            <a:srgbClr val="F5D5CE"/>
-          </a:solidFill>
-          <a:ln w="6350">
-            <a:solidFill>
-              <a:srgbClr val="999999"/>
-            </a:solidFill>
-            <a:prstDash val="solid"/>
-          </a:ln>
-        </p:spPr>
-      </p:sp>
-      <p:sp>
-        <p:nvSpPr>
-          <p:cNvPr id="54" name="Text 52"/>
-          <p:cNvSpPr/>
-          <p:nvPr/>
-        </p:nvSpPr>
-        <p:spPr>
-          <a:xfrm>
-            <a:off x="6446520" y="3438144"/>
-            <a:ext cx="1143000" cy="548640"/>
-          </a:xfrm>
-          <a:prstGeom prst="rect">
-            <a:avLst/>
-          </a:prstGeom>
-          <a:noFill/>
-          <a:ln/>
-        </p:spPr>
-        <p:txBody>
-          <a:bodyPr wrap="square" lIns="0" tIns="0" rIns="0" bIns="0" rtlCol="0" anchor="ctr"/>
-          <a:lstStyle/>
-          <a:p>
-            <a:pPr algn="ctr" indent="0" marL="0">
-              <a:buNone/>
-            </a:pPr>
-            <a:r>
-              <a:rPr lang="en-US" sz="2000" b="1" dirty="0">
-                <a:solidFill>
-                  <a:srgbClr val="B33A1E"/>
-                </a:solidFill>
-              </a:rPr>
-              <a:t>0</a:t>
-            </a:r>
-            <a:endParaRPr lang="en-US" sz="2000" dirty="0"/>
-          </a:p>
-          <a:p>
-            <a:pPr algn="ctr" indent="0" marL="0">
-              <a:buNone/>
-            </a:pPr>
-            <a:r>
-              <a:rPr lang="en-US" sz="900" dirty="0">
-                <a:solidFill>
-                  <a:srgbClr val="666666"/>
-                </a:solidFill>
-              </a:rPr>
-              <a:t>FN</a:t>
-            </a:r>
-            <a:endParaRPr lang="en-US" sz="2000" dirty="0"/>
-          </a:p>
-        </p:txBody>
-      </p:sp>
-      <p:sp>
-        <p:nvSpPr>
-          <p:cNvPr id="55" name="Shape 53"/>
-          <p:cNvSpPr/>
-          <p:nvPr/>
-        </p:nvSpPr>
-        <p:spPr>
-          <a:xfrm>
-            <a:off x="5303520" y="3986784"/>
-            <a:ext cx="1143000" cy="548640"/>
-          </a:xfrm>
-          <a:prstGeom prst="rect">
-            <a:avLst/>
-          </a:prstGeom>
-          <a:solidFill>
-            <a:srgbClr val="F2F2F2"/>
-          </a:solidFill>
-          <a:ln w="6350">
-            <a:solidFill>
-              <a:srgbClr val="999999"/>
-            </a:solidFill>
-            <a:prstDash val="solid"/>
-          </a:ln>
-        </p:spPr>
-      </p:sp>
-      <p:sp>
-        <p:nvSpPr>
-          <p:cNvPr id="56" name="Text 54"/>
-          <p:cNvSpPr/>
-          <p:nvPr/>
-        </p:nvSpPr>
-        <p:spPr>
-          <a:xfrm>
-            <a:off x="5303520" y="3986784"/>
-            <a:ext cx="1143000" cy="548640"/>
-          </a:xfrm>
-          <a:prstGeom prst="rect">
-            <a:avLst/>
-          </a:prstGeom>
-          <a:noFill/>
-          <a:ln/>
-        </p:spPr>
-        <p:txBody>
-          <a:bodyPr wrap="square" lIns="0" tIns="0" rIns="0" bIns="0" rtlCol="0" anchor="ctr"/>
-          <a:lstStyle/>
-          <a:p>
-            <a:pPr algn="ctr" indent="0" marL="0">
-              <a:buNone/>
-            </a:pPr>
-            <a:r>
-              <a:rPr lang="en-US" sz="2000" b="1" dirty="0">
+              <a:t>Track all divergence points detected </a:t>
+            </a:r>
+            <a:pPr indent="0" marL="0">
+              <a:spcAft>
+                <a:spcPts val="1000"/>
+              </a:spcAft>
+              <a:buNone/>
+            </a:pPr>
+            <a:r>
+              <a:rPr lang="en-US" sz="1500" dirty="0">
                 <a:solidFill>
                   <a:srgbClr val="888888"/>
                 </a:solidFill>
               </a:rPr>
-              <a:t>0</a:t>
-            </a:r>
-            <a:endParaRPr lang="en-US" sz="2000" dirty="0"/>
-          </a:p>
-          <a:p>
-            <a:pPr algn="ctr" indent="0" marL="0">
-              <a:buNone/>
-            </a:pPr>
-            <a:r>
-              <a:rPr lang="en-US" sz="900" dirty="0">
-                <a:solidFill>
-                  <a:srgbClr val="666666"/>
-                </a:solidFill>
-              </a:rPr>
-              <a:t>FP</a:t>
-            </a:r>
-            <a:endParaRPr lang="en-US" sz="2000" dirty="0"/>
-          </a:p>
-        </p:txBody>
-      </p:sp>
-      <p:sp>
-        <p:nvSpPr>
-          <p:cNvPr id="57" name="Shape 55"/>
-          <p:cNvSpPr/>
-          <p:nvPr/>
-        </p:nvSpPr>
-        <p:spPr>
-          <a:xfrm>
-            <a:off x="6446520" y="3986784"/>
-            <a:ext cx="1143000" cy="548640"/>
-          </a:xfrm>
-          <a:prstGeom prst="rect">
-            <a:avLst/>
-          </a:prstGeom>
-          <a:solidFill>
-            <a:srgbClr val="EAEAEA"/>
-          </a:solidFill>
-          <a:ln w="6350">
-            <a:solidFill>
-              <a:srgbClr val="999999"/>
-            </a:solidFill>
-            <a:prstDash val="solid"/>
-          </a:ln>
-        </p:spPr>
-      </p:sp>
-      <p:sp>
-        <p:nvSpPr>
-          <p:cNvPr id="58" name="Text 56"/>
-          <p:cNvSpPr/>
-          <p:nvPr/>
-        </p:nvSpPr>
-        <p:spPr>
-          <a:xfrm>
-            <a:off x="6446520" y="3986784"/>
-            <a:ext cx="1143000" cy="548640"/>
-          </a:xfrm>
-          <a:prstGeom prst="rect">
-            <a:avLst/>
-          </a:prstGeom>
-          <a:noFill/>
-          <a:ln/>
-        </p:spPr>
-        <p:txBody>
-          <a:bodyPr wrap="square" lIns="0" tIns="0" rIns="0" bIns="0" rtlCol="0" anchor="ctr"/>
-          <a:lstStyle/>
-          <a:p>
-            <a:pPr algn="ctr" indent="0" marL="0">
-              <a:buNone/>
-            </a:pPr>
-            <a:r>
-              <a:rPr lang="en-US" sz="2000" b="1" dirty="0">
-                <a:solidFill>
-                  <a:srgbClr val="555555"/>
-                </a:solidFill>
-              </a:rPr>
-              <a:t>37</a:t>
-            </a:r>
-            <a:endParaRPr lang="en-US" sz="2000" dirty="0"/>
-          </a:p>
-          <a:p>
-            <a:pPr algn="ctr" indent="0" marL="0">
-              <a:buNone/>
-            </a:pPr>
-            <a:r>
-              <a:rPr lang="en-US" sz="900" dirty="0">
-                <a:solidFill>
-                  <a:srgbClr val="666666"/>
-                </a:solidFill>
-              </a:rPr>
-              <a:t>TN</a:t>
-            </a:r>
-            <a:endParaRPr lang="en-US" sz="2000" dirty="0"/>
-          </a:p>
-        </p:txBody>
-      </p:sp>
-      <p:sp>
-        <p:nvSpPr>
-          <p:cNvPr id="59" name="Text 57"/>
-          <p:cNvSpPr/>
-          <p:nvPr/>
-        </p:nvSpPr>
-        <p:spPr>
-          <a:xfrm>
-            <a:off x="4754880" y="4553712"/>
-            <a:ext cx="2834640" cy="201168"/>
-          </a:xfrm>
-          <a:prstGeom prst="rect">
-            <a:avLst/>
-          </a:prstGeom>
-          <a:noFill/>
-          <a:ln/>
-        </p:spPr>
-        <p:txBody>
-          <a:bodyPr wrap="square" lIns="0" tIns="0" rIns="0" bIns="0" rtlCol="0" anchor="ctr"/>
-          <a:lstStyle/>
-          <a:p>
-            <a:pPr algn="ctr" indent="0" marL="0">
-              <a:buNone/>
-            </a:pPr>
-            <a:r>
-              <a:rPr lang="en-US" sz="1100" i="1" dirty="0">
-                <a:solidFill>
-                  <a:srgbClr val="555555"/>
-                </a:solidFill>
-              </a:rPr>
-              <a:t>Precision </a:t>
-            </a:r>
-            <a:pPr algn="ctr" indent="0" marL="0">
-              <a:buNone/>
-            </a:pPr>
-            <a:r>
-              <a:rPr lang="en-US" sz="1100" b="1" i="1" dirty="0">
-                <a:solidFill>
-                  <a:srgbClr val="1A1A1A"/>
-                </a:solidFill>
-              </a:rPr>
-              <a:t>1.00</a:t>
-            </a:r>
-            <a:pPr algn="ctr" indent="0" marL="0">
-              <a:buNone/>
-            </a:pPr>
-            <a:r>
-              <a:rPr lang="en-US" sz="1100" i="1" dirty="0">
-                <a:solidFill>
-                  <a:srgbClr val="555555"/>
-                </a:solidFill>
-              </a:rPr>
-              <a:t>   ·   Recall </a:t>
-            </a:r>
-            <a:pPr algn="ctr" indent="0" marL="0">
-              <a:buNone/>
-            </a:pPr>
-            <a:r>
-              <a:rPr lang="en-US" sz="1100" b="1" i="1" dirty="0">
-                <a:solidFill>
-                  <a:srgbClr val="1A1A1A"/>
-                </a:solidFill>
-              </a:rPr>
-              <a:t>1.00</a:t>
-            </a:r>
-            <a:endParaRPr lang="en-US" sz="1100" dirty="0"/>
-          </a:p>
-        </p:txBody>
-      </p:sp>
-      <p:sp>
-        <p:nvSpPr>
-          <p:cNvPr id="60" name="Text 58"/>
-          <p:cNvSpPr/>
-          <p:nvPr/>
-        </p:nvSpPr>
-        <p:spPr>
-          <a:xfrm>
-            <a:off x="365760" y="4846320"/>
-            <a:ext cx="8412480" cy="256032"/>
-          </a:xfrm>
-          <a:prstGeom prst="rect">
-            <a:avLst/>
-          </a:prstGeom>
-          <a:noFill/>
-          <a:ln/>
-        </p:spPr>
-        <p:txBody>
-          <a:bodyPr wrap="square" lIns="0" tIns="0" rIns="0" bIns="0" rtlCol="0" anchor="ctr"/>
-          <a:lstStyle/>
-          <a:p>
-            <a:pPr algn="ctr" indent="0" marL="0">
-              <a:buNone/>
-            </a:pPr>
-            <a:r>
-              <a:rPr lang="en-US" sz="900" i="1" dirty="0">
-                <a:solidFill>
-                  <a:srgbClr val="555555"/>
-                </a:solidFill>
-              </a:rPr>
-              <a:t>Ordering recall is the outlier: the reorder synthesiser's splitOnInvalid validator rejects any window containing a step it cannot safely.</a:t>
-            </a:r>
-            <a:endParaRPr lang="en-US" sz="900" dirty="0"/>
+              <a:t>- not only ones with a higher process score than the user.</a:t>
+            </a:r>
+            <a:endParaRPr lang="en-US" sz="1500" dirty="0"/>
+          </a:p>
+          <a:p>
+            <a:pPr marL="342900" indent="-342900">
+              <a:spcAft>
+                <a:spcPts val="1000"/>
+              </a:spcAft>
+              <a:buSzPct val="100000"/>
+              <a:buChar char="•"/>
+            </a:pPr>
+            <a:r>
+              <a:rPr lang="en-US" sz="1500" dirty="0">
+                <a:solidFill>
+                  <a:srgbClr val="000000"/>
+                </a:solidFill>
+              </a:rPr>
+              <a:t>Measure precision + recall </a:t>
+            </a:r>
+            <a:pPr indent="0" marL="0">
+              <a:spcAft>
+                <a:spcPts val="1000"/>
+              </a:spcAft>
+              <a:buNone/>
+            </a:pPr>
+            <a:r>
+              <a:rPr lang="en-US" sz="1500" dirty="0">
+                <a:solidFill>
+                  <a:srgbClr val="888888"/>
+                </a:solidFill>
+              </a:rPr>
+              <a:t>- precision guards against FPs that waste the developer's attention. Recall guards against FNs that miss real opportunities. F1 averages the two - so a high score can hide a detector that's annoying users (lots of FPs) or one that's quietly missing things (lots of FNs). Accuracy is dominated by true negatives.</a:t>
+            </a:r>
+            <a:endParaRPr lang="en-US" sz="1500" dirty="0"/>
           </a:p>
         </p:txBody>
       </p:sp>
@@ -8983,6 +6944,2335 @@
                   <a:srgbClr val="000000"/>
                 </a:solidFill>
               </a:rPr>
+              <a:t>Decision matrix per divergence kind</a:t>
+            </a:r>
+            <a:endParaRPr lang="en-US" sz="2800" dirty="0"/>
+          </a:p>
+        </p:txBody>
+      </p:sp>
+      <p:sp>
+        <p:nvSpPr>
+          <p:cNvPr id="3" name="Text 1"/>
+          <p:cNvSpPr/>
+          <p:nvPr/>
+        </p:nvSpPr>
+        <p:spPr>
+          <a:xfrm>
+            <a:off x="457200" y="658368"/>
+            <a:ext cx="8229600" cy="256032"/>
+          </a:xfrm>
+          <a:prstGeom prst="rect">
+            <a:avLst/>
+          </a:prstGeom>
+          <a:noFill/>
+          <a:ln/>
+        </p:spPr>
+        <p:txBody>
+          <a:bodyPr wrap="square" lIns="0" tIns="0" rIns="0" bIns="0" rtlCol="0" anchor="ctr"/>
+          <a:lstStyle/>
+          <a:p>
+            <a:pPr algn="ctr" indent="0" marL="0">
+              <a:buNone/>
+            </a:pPr>
+            <a:r>
+              <a:rPr lang="en-US" sz="1200" i="1" dirty="0">
+                <a:solidFill>
+                  <a:srgbClr val="555555"/>
+                </a:solidFill>
+              </a:rPr>
+              <a:t>Session-level (45 injection sessions).</a:t>
+            </a:r>
+            <a:endParaRPr lang="en-US" sz="1200" dirty="0"/>
+          </a:p>
+        </p:txBody>
+      </p:sp>
+      <p:sp>
+        <p:nvSpPr>
+          <p:cNvPr id="4" name="Text 2"/>
+          <p:cNvSpPr/>
+          <p:nvPr/>
+        </p:nvSpPr>
+        <p:spPr>
+          <a:xfrm>
+            <a:off x="640080" y="914400"/>
+            <a:ext cx="2834640" cy="201168"/>
+          </a:xfrm>
+          <a:prstGeom prst="rect">
+            <a:avLst/>
+          </a:prstGeom>
+          <a:noFill/>
+          <a:ln/>
+        </p:spPr>
+        <p:txBody>
+          <a:bodyPr wrap="square" lIns="0" tIns="0" rIns="0" bIns="0" rtlCol="0" anchor="b"/>
+          <a:lstStyle/>
+          <a:p>
+            <a:pPr algn="ctr" indent="0" marL="0">
+              <a:buNone/>
+            </a:pPr>
+            <a:r>
+              <a:rPr lang="en-US" sz="1400" b="1" dirty="0">
+                <a:solidFill>
+                  <a:srgbClr val="000000"/>
+                </a:solidFill>
+              </a:rPr>
+              <a:t>Manual-Refactor</a:t>
+            </a:r>
+            <a:endParaRPr lang="en-US" sz="1400" dirty="0"/>
+          </a:p>
+        </p:txBody>
+      </p:sp>
+      <p:sp>
+        <p:nvSpPr>
+          <p:cNvPr id="5" name="Text 3"/>
+          <p:cNvSpPr/>
+          <p:nvPr/>
+        </p:nvSpPr>
+        <p:spPr>
+          <a:xfrm>
+            <a:off x="1188720" y="1133856"/>
+            <a:ext cx="1143000" cy="201168"/>
+          </a:xfrm>
+          <a:prstGeom prst="rect">
+            <a:avLst/>
+          </a:prstGeom>
+          <a:noFill/>
+          <a:ln/>
+        </p:spPr>
+        <p:txBody>
+          <a:bodyPr wrap="square" lIns="0" tIns="0" rIns="0" bIns="0" rtlCol="0" anchor="ctr"/>
+          <a:lstStyle/>
+          <a:p>
+            <a:pPr algn="ctr" indent="0" marL="0">
+              <a:buNone/>
+            </a:pPr>
+            <a:r>
+              <a:rPr lang="en-US" sz="900" i="1" dirty="0">
+                <a:solidFill>
+                  <a:srgbClr val="555555"/>
+                </a:solidFill>
+              </a:rPr>
+              <a:t>Predicted +</a:t>
+            </a:r>
+            <a:endParaRPr lang="en-US" sz="900" dirty="0"/>
+          </a:p>
+        </p:txBody>
+      </p:sp>
+      <p:sp>
+        <p:nvSpPr>
+          <p:cNvPr id="6" name="Text 4"/>
+          <p:cNvSpPr/>
+          <p:nvPr/>
+        </p:nvSpPr>
+        <p:spPr>
+          <a:xfrm>
+            <a:off x="2331720" y="1133856"/>
+            <a:ext cx="1143000" cy="201168"/>
+          </a:xfrm>
+          <a:prstGeom prst="rect">
+            <a:avLst/>
+          </a:prstGeom>
+          <a:noFill/>
+          <a:ln/>
+        </p:spPr>
+        <p:txBody>
+          <a:bodyPr wrap="square" lIns="0" tIns="0" rIns="0" bIns="0" rtlCol="0" anchor="ctr"/>
+          <a:lstStyle/>
+          <a:p>
+            <a:pPr algn="ctr" indent="0" marL="0">
+              <a:buNone/>
+            </a:pPr>
+            <a:r>
+              <a:rPr lang="en-US" sz="900" i="1" dirty="0">
+                <a:solidFill>
+                  <a:srgbClr val="555555"/>
+                </a:solidFill>
+              </a:rPr>
+              <a:t>Predicted −</a:t>
+            </a:r>
+            <a:endParaRPr lang="en-US" sz="900" dirty="0"/>
+          </a:p>
+        </p:txBody>
+      </p:sp>
+      <p:sp>
+        <p:nvSpPr>
+          <p:cNvPr id="7" name="Text 5"/>
+          <p:cNvSpPr/>
+          <p:nvPr/>
+        </p:nvSpPr>
+        <p:spPr>
+          <a:xfrm>
+            <a:off x="640080" y="1353312"/>
+            <a:ext cx="548640" cy="548640"/>
+          </a:xfrm>
+          <a:prstGeom prst="rect">
+            <a:avLst/>
+          </a:prstGeom>
+          <a:noFill/>
+          <a:ln/>
+        </p:spPr>
+        <p:txBody>
+          <a:bodyPr wrap="square" lIns="508" tIns="508" rIns="508" bIns="508" rtlCol="0" anchor="ctr"/>
+          <a:lstStyle/>
+          <a:p>
+            <a:pPr algn="r" indent="0" marL="0">
+              <a:buNone/>
+            </a:pPr>
+            <a:r>
+              <a:rPr lang="en-US" sz="900" i="1" dirty="0">
+                <a:solidFill>
+                  <a:srgbClr val="555555"/>
+                </a:solidFill>
+              </a:rPr>
+              <a:t>Actual +</a:t>
+            </a:r>
+            <a:endParaRPr lang="en-US" sz="900" dirty="0"/>
+          </a:p>
+        </p:txBody>
+      </p:sp>
+      <p:sp>
+        <p:nvSpPr>
+          <p:cNvPr id="8" name="Text 6"/>
+          <p:cNvSpPr/>
+          <p:nvPr/>
+        </p:nvSpPr>
+        <p:spPr>
+          <a:xfrm>
+            <a:off x="640080" y="1901952"/>
+            <a:ext cx="548640" cy="548640"/>
+          </a:xfrm>
+          <a:prstGeom prst="rect">
+            <a:avLst/>
+          </a:prstGeom>
+          <a:noFill/>
+          <a:ln/>
+        </p:spPr>
+        <p:txBody>
+          <a:bodyPr wrap="square" lIns="508" tIns="508" rIns="508" bIns="508" rtlCol="0" anchor="ctr"/>
+          <a:lstStyle/>
+          <a:p>
+            <a:pPr algn="r" indent="0" marL="0">
+              <a:buNone/>
+            </a:pPr>
+            <a:r>
+              <a:rPr lang="en-US" sz="900" i="1" dirty="0">
+                <a:solidFill>
+                  <a:srgbClr val="555555"/>
+                </a:solidFill>
+              </a:rPr>
+              <a:t>Actual −</a:t>
+            </a:r>
+            <a:endParaRPr lang="en-US" sz="900" dirty="0"/>
+          </a:p>
+        </p:txBody>
+      </p:sp>
+      <p:sp>
+        <p:nvSpPr>
+          <p:cNvPr id="9" name="Shape 7"/>
+          <p:cNvSpPr/>
+          <p:nvPr/>
+        </p:nvSpPr>
+        <p:spPr>
+          <a:xfrm>
+            <a:off x="1188720" y="1426464"/>
+            <a:ext cx="1143000" cy="548640"/>
+          </a:xfrm>
+          <a:prstGeom prst="rect">
+            <a:avLst/>
+          </a:prstGeom>
+          <a:solidFill>
+            <a:srgbClr val="D4F0DC"/>
+          </a:solidFill>
+          <a:ln w="6350">
+            <a:solidFill>
+              <a:srgbClr val="999999"/>
+            </a:solidFill>
+            <a:prstDash val="solid"/>
+          </a:ln>
+        </p:spPr>
+      </p:sp>
+      <p:sp>
+        <p:nvSpPr>
+          <p:cNvPr id="10" name="Text 8"/>
+          <p:cNvSpPr/>
+          <p:nvPr/>
+        </p:nvSpPr>
+        <p:spPr>
+          <a:xfrm>
+            <a:off x="1188720" y="1426464"/>
+            <a:ext cx="1143000" cy="548640"/>
+          </a:xfrm>
+          <a:prstGeom prst="rect">
+            <a:avLst/>
+          </a:prstGeom>
+          <a:noFill/>
+          <a:ln/>
+        </p:spPr>
+        <p:txBody>
+          <a:bodyPr wrap="square" lIns="0" tIns="0" rIns="0" bIns="0" rtlCol="0" anchor="ctr"/>
+          <a:lstStyle/>
+          <a:p>
+            <a:pPr algn="ctr" indent="0" marL="0">
+              <a:buNone/>
+            </a:pPr>
+            <a:r>
+              <a:rPr lang="en-US" sz="2000" b="1" dirty="0">
+                <a:solidFill>
+                  <a:srgbClr val="0A7D2A"/>
+                </a:solidFill>
+              </a:rPr>
+              <a:t>16</a:t>
+            </a:r>
+            <a:endParaRPr lang="en-US" sz="2000" dirty="0"/>
+          </a:p>
+          <a:p>
+            <a:pPr algn="ctr" indent="0" marL="0">
+              <a:buNone/>
+            </a:pPr>
+            <a:r>
+              <a:rPr lang="en-US" sz="900" dirty="0">
+                <a:solidFill>
+                  <a:srgbClr val="666666"/>
+                </a:solidFill>
+              </a:rPr>
+              <a:t>TP</a:t>
+            </a:r>
+            <a:endParaRPr lang="en-US" sz="2000" dirty="0"/>
+          </a:p>
+        </p:txBody>
+      </p:sp>
+      <p:sp>
+        <p:nvSpPr>
+          <p:cNvPr id="11" name="Shape 9"/>
+          <p:cNvSpPr/>
+          <p:nvPr/>
+        </p:nvSpPr>
+        <p:spPr>
+          <a:xfrm>
+            <a:off x="2331720" y="1426464"/>
+            <a:ext cx="1143000" cy="548640"/>
+          </a:xfrm>
+          <a:prstGeom prst="rect">
+            <a:avLst/>
+          </a:prstGeom>
+          <a:solidFill>
+            <a:srgbClr val="F5D5CE"/>
+          </a:solidFill>
+          <a:ln w="6350">
+            <a:solidFill>
+              <a:srgbClr val="999999"/>
+            </a:solidFill>
+            <a:prstDash val="solid"/>
+          </a:ln>
+        </p:spPr>
+      </p:sp>
+      <p:sp>
+        <p:nvSpPr>
+          <p:cNvPr id="12" name="Text 10"/>
+          <p:cNvSpPr/>
+          <p:nvPr/>
+        </p:nvSpPr>
+        <p:spPr>
+          <a:xfrm>
+            <a:off x="2331720" y="1426464"/>
+            <a:ext cx="1143000" cy="548640"/>
+          </a:xfrm>
+          <a:prstGeom prst="rect">
+            <a:avLst/>
+          </a:prstGeom>
+          <a:noFill/>
+          <a:ln/>
+        </p:spPr>
+        <p:txBody>
+          <a:bodyPr wrap="square" lIns="0" tIns="0" rIns="0" bIns="0" rtlCol="0" anchor="ctr"/>
+          <a:lstStyle/>
+          <a:p>
+            <a:pPr algn="ctr" indent="0" marL="0">
+              <a:buNone/>
+            </a:pPr>
+            <a:r>
+              <a:rPr lang="en-US" sz="2000" b="1" dirty="0">
+                <a:solidFill>
+                  <a:srgbClr val="B33A1E"/>
+                </a:solidFill>
+              </a:rPr>
+              <a:t>5</a:t>
+            </a:r>
+            <a:endParaRPr lang="en-US" sz="2000" dirty="0"/>
+          </a:p>
+          <a:p>
+            <a:pPr algn="ctr" indent="0" marL="0">
+              <a:buNone/>
+            </a:pPr>
+            <a:r>
+              <a:rPr lang="en-US" sz="900" dirty="0">
+                <a:solidFill>
+                  <a:srgbClr val="666666"/>
+                </a:solidFill>
+              </a:rPr>
+              <a:t>FN</a:t>
+            </a:r>
+            <a:endParaRPr lang="en-US" sz="2000" dirty="0"/>
+          </a:p>
+        </p:txBody>
+      </p:sp>
+      <p:sp>
+        <p:nvSpPr>
+          <p:cNvPr id="13" name="Shape 11"/>
+          <p:cNvSpPr/>
+          <p:nvPr/>
+        </p:nvSpPr>
+        <p:spPr>
+          <a:xfrm>
+            <a:off x="1188720" y="1975104"/>
+            <a:ext cx="1143000" cy="548640"/>
+          </a:xfrm>
+          <a:prstGeom prst="rect">
+            <a:avLst/>
+          </a:prstGeom>
+          <a:solidFill>
+            <a:srgbClr val="F2F2F2"/>
+          </a:solidFill>
+          <a:ln w="6350">
+            <a:solidFill>
+              <a:srgbClr val="999999"/>
+            </a:solidFill>
+            <a:prstDash val="solid"/>
+          </a:ln>
+        </p:spPr>
+      </p:sp>
+      <p:sp>
+        <p:nvSpPr>
+          <p:cNvPr id="14" name="Text 12"/>
+          <p:cNvSpPr/>
+          <p:nvPr/>
+        </p:nvSpPr>
+        <p:spPr>
+          <a:xfrm>
+            <a:off x="1188720" y="1975104"/>
+            <a:ext cx="1143000" cy="548640"/>
+          </a:xfrm>
+          <a:prstGeom prst="rect">
+            <a:avLst/>
+          </a:prstGeom>
+          <a:noFill/>
+          <a:ln/>
+        </p:spPr>
+        <p:txBody>
+          <a:bodyPr wrap="square" lIns="0" tIns="0" rIns="0" bIns="0" rtlCol="0" anchor="ctr"/>
+          <a:lstStyle/>
+          <a:p>
+            <a:pPr algn="ctr" indent="0" marL="0">
+              <a:buNone/>
+            </a:pPr>
+            <a:r>
+              <a:rPr lang="en-US" sz="2000" b="1" dirty="0">
+                <a:solidFill>
+                  <a:srgbClr val="888888"/>
+                </a:solidFill>
+              </a:rPr>
+              <a:t>0</a:t>
+            </a:r>
+            <a:endParaRPr lang="en-US" sz="2000" dirty="0"/>
+          </a:p>
+          <a:p>
+            <a:pPr algn="ctr" indent="0" marL="0">
+              <a:buNone/>
+            </a:pPr>
+            <a:r>
+              <a:rPr lang="en-US" sz="900" dirty="0">
+                <a:solidFill>
+                  <a:srgbClr val="666666"/>
+                </a:solidFill>
+              </a:rPr>
+              <a:t>FP</a:t>
+            </a:r>
+            <a:endParaRPr lang="en-US" sz="2000" dirty="0"/>
+          </a:p>
+        </p:txBody>
+      </p:sp>
+      <p:sp>
+        <p:nvSpPr>
+          <p:cNvPr id="15" name="Shape 13"/>
+          <p:cNvSpPr/>
+          <p:nvPr/>
+        </p:nvSpPr>
+        <p:spPr>
+          <a:xfrm>
+            <a:off x="2331720" y="1975104"/>
+            <a:ext cx="1143000" cy="548640"/>
+          </a:xfrm>
+          <a:prstGeom prst="rect">
+            <a:avLst/>
+          </a:prstGeom>
+          <a:solidFill>
+            <a:srgbClr val="EAEAEA"/>
+          </a:solidFill>
+          <a:ln w="6350">
+            <a:solidFill>
+              <a:srgbClr val="999999"/>
+            </a:solidFill>
+            <a:prstDash val="solid"/>
+          </a:ln>
+        </p:spPr>
+      </p:sp>
+      <p:sp>
+        <p:nvSpPr>
+          <p:cNvPr id="16" name="Text 14"/>
+          <p:cNvSpPr/>
+          <p:nvPr/>
+        </p:nvSpPr>
+        <p:spPr>
+          <a:xfrm>
+            <a:off x="2331720" y="1975104"/>
+            <a:ext cx="1143000" cy="548640"/>
+          </a:xfrm>
+          <a:prstGeom prst="rect">
+            <a:avLst/>
+          </a:prstGeom>
+          <a:noFill/>
+          <a:ln/>
+        </p:spPr>
+        <p:txBody>
+          <a:bodyPr wrap="square" lIns="0" tIns="0" rIns="0" bIns="0" rtlCol="0" anchor="ctr"/>
+          <a:lstStyle/>
+          <a:p>
+            <a:pPr algn="ctr" indent="0" marL="0">
+              <a:buNone/>
+            </a:pPr>
+            <a:r>
+              <a:rPr lang="en-US" sz="2000" b="1" dirty="0">
+                <a:solidFill>
+                  <a:srgbClr val="555555"/>
+                </a:solidFill>
+              </a:rPr>
+              <a:t>24</a:t>
+            </a:r>
+            <a:endParaRPr lang="en-US" sz="2000" dirty="0"/>
+          </a:p>
+          <a:p>
+            <a:pPr algn="ctr" indent="0" marL="0">
+              <a:buNone/>
+            </a:pPr>
+            <a:r>
+              <a:rPr lang="en-US" sz="900" dirty="0">
+                <a:solidFill>
+                  <a:srgbClr val="666666"/>
+                </a:solidFill>
+              </a:rPr>
+              <a:t>TN</a:t>
+            </a:r>
+            <a:endParaRPr lang="en-US" sz="2000" dirty="0"/>
+          </a:p>
+        </p:txBody>
+      </p:sp>
+      <p:sp>
+        <p:nvSpPr>
+          <p:cNvPr id="17" name="Text 15"/>
+          <p:cNvSpPr/>
+          <p:nvPr/>
+        </p:nvSpPr>
+        <p:spPr>
+          <a:xfrm>
+            <a:off x="640080" y="2542032"/>
+            <a:ext cx="2834640" cy="201168"/>
+          </a:xfrm>
+          <a:prstGeom prst="rect">
+            <a:avLst/>
+          </a:prstGeom>
+          <a:noFill/>
+          <a:ln/>
+        </p:spPr>
+        <p:txBody>
+          <a:bodyPr wrap="square" lIns="0" tIns="0" rIns="0" bIns="0" rtlCol="0" anchor="ctr"/>
+          <a:lstStyle/>
+          <a:p>
+            <a:pPr algn="ctr" indent="0" marL="0">
+              <a:buNone/>
+            </a:pPr>
+            <a:r>
+              <a:rPr lang="en-US" sz="1100" i="1" dirty="0">
+                <a:solidFill>
+                  <a:srgbClr val="555555"/>
+                </a:solidFill>
+              </a:rPr>
+              <a:t>Precision </a:t>
+            </a:r>
+            <a:pPr algn="ctr" indent="0" marL="0">
+              <a:buNone/>
+            </a:pPr>
+            <a:r>
+              <a:rPr lang="en-US" sz="1100" b="1" i="1" dirty="0">
+                <a:solidFill>
+                  <a:srgbClr val="1A1A1A"/>
+                </a:solidFill>
+              </a:rPr>
+              <a:t>1.00</a:t>
+            </a:r>
+            <a:pPr algn="ctr" indent="0" marL="0">
+              <a:buNone/>
+            </a:pPr>
+            <a:r>
+              <a:rPr lang="en-US" sz="1100" i="1" dirty="0">
+                <a:solidFill>
+                  <a:srgbClr val="555555"/>
+                </a:solidFill>
+              </a:rPr>
+              <a:t>   ·   Recall </a:t>
+            </a:r>
+            <a:pPr algn="ctr" indent="0" marL="0">
+              <a:buNone/>
+            </a:pPr>
+            <a:r>
+              <a:rPr lang="en-US" sz="1100" b="1" i="1" dirty="0">
+                <a:solidFill>
+                  <a:srgbClr val="1A1A1A"/>
+                </a:solidFill>
+              </a:rPr>
+              <a:t>0.76</a:t>
+            </a:r>
+            <a:endParaRPr lang="en-US" sz="1100" dirty="0"/>
+          </a:p>
+        </p:txBody>
+      </p:sp>
+      <p:sp>
+        <p:nvSpPr>
+          <p:cNvPr id="18" name="Text 16"/>
+          <p:cNvSpPr/>
+          <p:nvPr/>
+        </p:nvSpPr>
+        <p:spPr>
+          <a:xfrm>
+            <a:off x="4754880" y="914400"/>
+            <a:ext cx="2834640" cy="201168"/>
+          </a:xfrm>
+          <a:prstGeom prst="rect">
+            <a:avLst/>
+          </a:prstGeom>
+          <a:noFill/>
+          <a:ln/>
+        </p:spPr>
+        <p:txBody>
+          <a:bodyPr wrap="square" lIns="0" tIns="0" rIns="0" bIns="0" rtlCol="0" anchor="b"/>
+          <a:lstStyle/>
+          <a:p>
+            <a:pPr algn="ctr" indent="0" marL="0">
+              <a:buNone/>
+            </a:pPr>
+            <a:r>
+              <a:rPr lang="en-US" sz="1400" b="1" dirty="0">
+                <a:solidFill>
+                  <a:srgbClr val="000000"/>
+                </a:solidFill>
+              </a:rPr>
+              <a:t>Ordering</a:t>
+            </a:r>
+            <a:endParaRPr lang="en-US" sz="1400" dirty="0"/>
+          </a:p>
+        </p:txBody>
+      </p:sp>
+      <p:sp>
+        <p:nvSpPr>
+          <p:cNvPr id="19" name="Text 17"/>
+          <p:cNvSpPr/>
+          <p:nvPr/>
+        </p:nvSpPr>
+        <p:spPr>
+          <a:xfrm>
+            <a:off x="5303520" y="1133856"/>
+            <a:ext cx="1143000" cy="201168"/>
+          </a:xfrm>
+          <a:prstGeom prst="rect">
+            <a:avLst/>
+          </a:prstGeom>
+          <a:noFill/>
+          <a:ln/>
+        </p:spPr>
+        <p:txBody>
+          <a:bodyPr wrap="square" lIns="0" tIns="0" rIns="0" bIns="0" rtlCol="0" anchor="ctr"/>
+          <a:lstStyle/>
+          <a:p>
+            <a:pPr algn="ctr" indent="0" marL="0">
+              <a:buNone/>
+            </a:pPr>
+            <a:r>
+              <a:rPr lang="en-US" sz="900" i="1" dirty="0">
+                <a:solidFill>
+                  <a:srgbClr val="555555"/>
+                </a:solidFill>
+              </a:rPr>
+              <a:t>Predicted +</a:t>
+            </a:r>
+            <a:endParaRPr lang="en-US" sz="900" dirty="0"/>
+          </a:p>
+        </p:txBody>
+      </p:sp>
+      <p:sp>
+        <p:nvSpPr>
+          <p:cNvPr id="20" name="Text 18"/>
+          <p:cNvSpPr/>
+          <p:nvPr/>
+        </p:nvSpPr>
+        <p:spPr>
+          <a:xfrm>
+            <a:off x="6446520" y="1133856"/>
+            <a:ext cx="1143000" cy="201168"/>
+          </a:xfrm>
+          <a:prstGeom prst="rect">
+            <a:avLst/>
+          </a:prstGeom>
+          <a:noFill/>
+          <a:ln/>
+        </p:spPr>
+        <p:txBody>
+          <a:bodyPr wrap="square" lIns="0" tIns="0" rIns="0" bIns="0" rtlCol="0" anchor="ctr"/>
+          <a:lstStyle/>
+          <a:p>
+            <a:pPr algn="ctr" indent="0" marL="0">
+              <a:buNone/>
+            </a:pPr>
+            <a:r>
+              <a:rPr lang="en-US" sz="900" i="1" dirty="0">
+                <a:solidFill>
+                  <a:srgbClr val="555555"/>
+                </a:solidFill>
+              </a:rPr>
+              <a:t>Predicted −</a:t>
+            </a:r>
+            <a:endParaRPr lang="en-US" sz="900" dirty="0"/>
+          </a:p>
+        </p:txBody>
+      </p:sp>
+      <p:sp>
+        <p:nvSpPr>
+          <p:cNvPr id="21" name="Text 19"/>
+          <p:cNvSpPr/>
+          <p:nvPr/>
+        </p:nvSpPr>
+        <p:spPr>
+          <a:xfrm>
+            <a:off x="4754880" y="1353312"/>
+            <a:ext cx="548640" cy="548640"/>
+          </a:xfrm>
+          <a:prstGeom prst="rect">
+            <a:avLst/>
+          </a:prstGeom>
+          <a:noFill/>
+          <a:ln/>
+        </p:spPr>
+        <p:txBody>
+          <a:bodyPr wrap="square" lIns="508" tIns="508" rIns="508" bIns="508" rtlCol="0" anchor="ctr"/>
+          <a:lstStyle/>
+          <a:p>
+            <a:pPr algn="r" indent="0" marL="0">
+              <a:buNone/>
+            </a:pPr>
+            <a:r>
+              <a:rPr lang="en-US" sz="900" i="1" dirty="0">
+                <a:solidFill>
+                  <a:srgbClr val="555555"/>
+                </a:solidFill>
+              </a:rPr>
+              <a:t>Actual +</a:t>
+            </a:r>
+            <a:endParaRPr lang="en-US" sz="900" dirty="0"/>
+          </a:p>
+        </p:txBody>
+      </p:sp>
+      <p:sp>
+        <p:nvSpPr>
+          <p:cNvPr id="22" name="Text 20"/>
+          <p:cNvSpPr/>
+          <p:nvPr/>
+        </p:nvSpPr>
+        <p:spPr>
+          <a:xfrm>
+            <a:off x="4754880" y="1901952"/>
+            <a:ext cx="548640" cy="548640"/>
+          </a:xfrm>
+          <a:prstGeom prst="rect">
+            <a:avLst/>
+          </a:prstGeom>
+          <a:noFill/>
+          <a:ln/>
+        </p:spPr>
+        <p:txBody>
+          <a:bodyPr wrap="square" lIns="508" tIns="508" rIns="508" bIns="508" rtlCol="0" anchor="ctr"/>
+          <a:lstStyle/>
+          <a:p>
+            <a:pPr algn="r" indent="0" marL="0">
+              <a:buNone/>
+            </a:pPr>
+            <a:r>
+              <a:rPr lang="en-US" sz="900" i="1" dirty="0">
+                <a:solidFill>
+                  <a:srgbClr val="555555"/>
+                </a:solidFill>
+              </a:rPr>
+              <a:t>Actual −</a:t>
+            </a:r>
+            <a:endParaRPr lang="en-US" sz="900" dirty="0"/>
+          </a:p>
+        </p:txBody>
+      </p:sp>
+      <p:sp>
+        <p:nvSpPr>
+          <p:cNvPr id="23" name="Shape 21"/>
+          <p:cNvSpPr/>
+          <p:nvPr/>
+        </p:nvSpPr>
+        <p:spPr>
+          <a:xfrm>
+            <a:off x="5303520" y="1426464"/>
+            <a:ext cx="1143000" cy="548640"/>
+          </a:xfrm>
+          <a:prstGeom prst="rect">
+            <a:avLst/>
+          </a:prstGeom>
+          <a:solidFill>
+            <a:srgbClr val="D4F0DC"/>
+          </a:solidFill>
+          <a:ln w="6350">
+            <a:solidFill>
+              <a:srgbClr val="999999"/>
+            </a:solidFill>
+            <a:prstDash val="solid"/>
+          </a:ln>
+        </p:spPr>
+      </p:sp>
+      <p:sp>
+        <p:nvSpPr>
+          <p:cNvPr id="24" name="Text 22"/>
+          <p:cNvSpPr/>
+          <p:nvPr/>
+        </p:nvSpPr>
+        <p:spPr>
+          <a:xfrm>
+            <a:off x="5303520" y="1426464"/>
+            <a:ext cx="1143000" cy="548640"/>
+          </a:xfrm>
+          <a:prstGeom prst="rect">
+            <a:avLst/>
+          </a:prstGeom>
+          <a:noFill/>
+          <a:ln/>
+        </p:spPr>
+        <p:txBody>
+          <a:bodyPr wrap="square" lIns="0" tIns="0" rIns="0" bIns="0" rtlCol="0" anchor="ctr"/>
+          <a:lstStyle/>
+          <a:p>
+            <a:pPr algn="ctr" indent="0" marL="0">
+              <a:buNone/>
+            </a:pPr>
+            <a:r>
+              <a:rPr lang="en-US" sz="2000" b="1" dirty="0">
+                <a:solidFill>
+                  <a:srgbClr val="0A7D2A"/>
+                </a:solidFill>
+              </a:rPr>
+              <a:t>14</a:t>
+            </a:r>
+            <a:endParaRPr lang="en-US" sz="2000" dirty="0"/>
+          </a:p>
+          <a:p>
+            <a:pPr algn="ctr" indent="0" marL="0">
+              <a:buNone/>
+            </a:pPr>
+            <a:r>
+              <a:rPr lang="en-US" sz="900" dirty="0">
+                <a:solidFill>
+                  <a:srgbClr val="666666"/>
+                </a:solidFill>
+              </a:rPr>
+              <a:t>TP</a:t>
+            </a:r>
+            <a:endParaRPr lang="en-US" sz="2000" dirty="0"/>
+          </a:p>
+        </p:txBody>
+      </p:sp>
+      <p:sp>
+        <p:nvSpPr>
+          <p:cNvPr id="25" name="Shape 23"/>
+          <p:cNvSpPr/>
+          <p:nvPr/>
+        </p:nvSpPr>
+        <p:spPr>
+          <a:xfrm>
+            <a:off x="6446520" y="1426464"/>
+            <a:ext cx="1143000" cy="548640"/>
+          </a:xfrm>
+          <a:prstGeom prst="rect">
+            <a:avLst/>
+          </a:prstGeom>
+          <a:solidFill>
+            <a:srgbClr val="F5D5CE"/>
+          </a:solidFill>
+          <a:ln w="6350">
+            <a:solidFill>
+              <a:srgbClr val="999999"/>
+            </a:solidFill>
+            <a:prstDash val="solid"/>
+          </a:ln>
+        </p:spPr>
+      </p:sp>
+      <p:sp>
+        <p:nvSpPr>
+          <p:cNvPr id="26" name="Text 24"/>
+          <p:cNvSpPr/>
+          <p:nvPr/>
+        </p:nvSpPr>
+        <p:spPr>
+          <a:xfrm>
+            <a:off x="6446520" y="1426464"/>
+            <a:ext cx="1143000" cy="548640"/>
+          </a:xfrm>
+          <a:prstGeom prst="rect">
+            <a:avLst/>
+          </a:prstGeom>
+          <a:noFill/>
+          <a:ln/>
+        </p:spPr>
+        <p:txBody>
+          <a:bodyPr wrap="square" lIns="0" tIns="0" rIns="0" bIns="0" rtlCol="0" anchor="ctr"/>
+          <a:lstStyle/>
+          <a:p>
+            <a:pPr algn="ctr" indent="0" marL="0">
+              <a:buNone/>
+            </a:pPr>
+            <a:r>
+              <a:rPr lang="en-US" sz="2000" b="1" dirty="0">
+                <a:solidFill>
+                  <a:srgbClr val="B33A1E"/>
+                </a:solidFill>
+              </a:rPr>
+              <a:t>24</a:t>
+            </a:r>
+            <a:endParaRPr lang="en-US" sz="2000" dirty="0"/>
+          </a:p>
+          <a:p>
+            <a:pPr algn="ctr" indent="0" marL="0">
+              <a:buNone/>
+            </a:pPr>
+            <a:r>
+              <a:rPr lang="en-US" sz="900" dirty="0">
+                <a:solidFill>
+                  <a:srgbClr val="666666"/>
+                </a:solidFill>
+              </a:rPr>
+              <a:t>FN</a:t>
+            </a:r>
+            <a:endParaRPr lang="en-US" sz="2000" dirty="0"/>
+          </a:p>
+        </p:txBody>
+      </p:sp>
+      <p:sp>
+        <p:nvSpPr>
+          <p:cNvPr id="27" name="Shape 25"/>
+          <p:cNvSpPr/>
+          <p:nvPr/>
+        </p:nvSpPr>
+        <p:spPr>
+          <a:xfrm>
+            <a:off x="5303520" y="1975104"/>
+            <a:ext cx="1143000" cy="548640"/>
+          </a:xfrm>
+          <a:prstGeom prst="rect">
+            <a:avLst/>
+          </a:prstGeom>
+          <a:solidFill>
+            <a:srgbClr val="F2F2F2"/>
+          </a:solidFill>
+          <a:ln w="6350">
+            <a:solidFill>
+              <a:srgbClr val="999999"/>
+            </a:solidFill>
+            <a:prstDash val="solid"/>
+          </a:ln>
+        </p:spPr>
+      </p:sp>
+      <p:sp>
+        <p:nvSpPr>
+          <p:cNvPr id="28" name="Text 26"/>
+          <p:cNvSpPr/>
+          <p:nvPr/>
+        </p:nvSpPr>
+        <p:spPr>
+          <a:xfrm>
+            <a:off x="5303520" y="1975104"/>
+            <a:ext cx="1143000" cy="548640"/>
+          </a:xfrm>
+          <a:prstGeom prst="rect">
+            <a:avLst/>
+          </a:prstGeom>
+          <a:noFill/>
+          <a:ln/>
+        </p:spPr>
+        <p:txBody>
+          <a:bodyPr wrap="square" lIns="0" tIns="0" rIns="0" bIns="0" rtlCol="0" anchor="ctr"/>
+          <a:lstStyle/>
+          <a:p>
+            <a:pPr algn="ctr" indent="0" marL="0">
+              <a:buNone/>
+            </a:pPr>
+            <a:r>
+              <a:rPr lang="en-US" sz="2000" b="1" dirty="0">
+                <a:solidFill>
+                  <a:srgbClr val="888888"/>
+                </a:solidFill>
+              </a:rPr>
+              <a:t>0</a:t>
+            </a:r>
+            <a:endParaRPr lang="en-US" sz="2000" dirty="0"/>
+          </a:p>
+          <a:p>
+            <a:pPr algn="ctr" indent="0" marL="0">
+              <a:buNone/>
+            </a:pPr>
+            <a:r>
+              <a:rPr lang="en-US" sz="900" dirty="0">
+                <a:solidFill>
+                  <a:srgbClr val="666666"/>
+                </a:solidFill>
+              </a:rPr>
+              <a:t>FP</a:t>
+            </a:r>
+            <a:endParaRPr lang="en-US" sz="2000" dirty="0"/>
+          </a:p>
+        </p:txBody>
+      </p:sp>
+      <p:sp>
+        <p:nvSpPr>
+          <p:cNvPr id="29" name="Shape 27"/>
+          <p:cNvSpPr/>
+          <p:nvPr/>
+        </p:nvSpPr>
+        <p:spPr>
+          <a:xfrm>
+            <a:off x="6446520" y="1975104"/>
+            <a:ext cx="1143000" cy="548640"/>
+          </a:xfrm>
+          <a:prstGeom prst="rect">
+            <a:avLst/>
+          </a:prstGeom>
+          <a:solidFill>
+            <a:srgbClr val="EAEAEA"/>
+          </a:solidFill>
+          <a:ln w="6350">
+            <a:solidFill>
+              <a:srgbClr val="999999"/>
+            </a:solidFill>
+            <a:prstDash val="solid"/>
+          </a:ln>
+        </p:spPr>
+      </p:sp>
+      <p:sp>
+        <p:nvSpPr>
+          <p:cNvPr id="30" name="Text 28"/>
+          <p:cNvSpPr/>
+          <p:nvPr/>
+        </p:nvSpPr>
+        <p:spPr>
+          <a:xfrm>
+            <a:off x="6446520" y="1975104"/>
+            <a:ext cx="1143000" cy="548640"/>
+          </a:xfrm>
+          <a:prstGeom prst="rect">
+            <a:avLst/>
+          </a:prstGeom>
+          <a:noFill/>
+          <a:ln/>
+        </p:spPr>
+        <p:txBody>
+          <a:bodyPr wrap="square" lIns="0" tIns="0" rIns="0" bIns="0" rtlCol="0" anchor="ctr"/>
+          <a:lstStyle/>
+          <a:p>
+            <a:pPr algn="ctr" indent="0" marL="0">
+              <a:buNone/>
+            </a:pPr>
+            <a:r>
+              <a:rPr lang="en-US" sz="2000" b="1" dirty="0">
+                <a:solidFill>
+                  <a:srgbClr val="555555"/>
+                </a:solidFill>
+              </a:rPr>
+              <a:t>7</a:t>
+            </a:r>
+            <a:endParaRPr lang="en-US" sz="2000" dirty="0"/>
+          </a:p>
+          <a:p>
+            <a:pPr algn="ctr" indent="0" marL="0">
+              <a:buNone/>
+            </a:pPr>
+            <a:r>
+              <a:rPr lang="en-US" sz="900" dirty="0">
+                <a:solidFill>
+                  <a:srgbClr val="666666"/>
+                </a:solidFill>
+              </a:rPr>
+              <a:t>TN</a:t>
+            </a:r>
+            <a:endParaRPr lang="en-US" sz="2000" dirty="0"/>
+          </a:p>
+        </p:txBody>
+      </p:sp>
+      <p:sp>
+        <p:nvSpPr>
+          <p:cNvPr id="31" name="Text 29"/>
+          <p:cNvSpPr/>
+          <p:nvPr/>
+        </p:nvSpPr>
+        <p:spPr>
+          <a:xfrm>
+            <a:off x="4754880" y="2542032"/>
+            <a:ext cx="2834640" cy="201168"/>
+          </a:xfrm>
+          <a:prstGeom prst="rect">
+            <a:avLst/>
+          </a:prstGeom>
+          <a:noFill/>
+          <a:ln/>
+        </p:spPr>
+        <p:txBody>
+          <a:bodyPr wrap="square" lIns="0" tIns="0" rIns="0" bIns="0" rtlCol="0" anchor="ctr"/>
+          <a:lstStyle/>
+          <a:p>
+            <a:pPr algn="ctr" indent="0" marL="0">
+              <a:buNone/>
+            </a:pPr>
+            <a:r>
+              <a:rPr lang="en-US" sz="1100" i="1" dirty="0">
+                <a:solidFill>
+                  <a:srgbClr val="555555"/>
+                </a:solidFill>
+              </a:rPr>
+              <a:t>Precision </a:t>
+            </a:r>
+            <a:pPr algn="ctr" indent="0" marL="0">
+              <a:buNone/>
+            </a:pPr>
+            <a:r>
+              <a:rPr lang="en-US" sz="1100" b="1" i="1" dirty="0">
+                <a:solidFill>
+                  <a:srgbClr val="1A1A1A"/>
+                </a:solidFill>
+              </a:rPr>
+              <a:t>1.00</a:t>
+            </a:r>
+            <a:pPr algn="ctr" indent="0" marL="0">
+              <a:buNone/>
+            </a:pPr>
+            <a:r>
+              <a:rPr lang="en-US" sz="1100" i="1" dirty="0">
+                <a:solidFill>
+                  <a:srgbClr val="555555"/>
+                </a:solidFill>
+              </a:rPr>
+              <a:t>   ·   Recall </a:t>
+            </a:r>
+            <a:pPr algn="ctr" indent="0" marL="0">
+              <a:buNone/>
+            </a:pPr>
+            <a:r>
+              <a:rPr lang="en-US" sz="1100" b="1" i="1" dirty="0">
+                <a:solidFill>
+                  <a:srgbClr val="1A1A1A"/>
+                </a:solidFill>
+              </a:rPr>
+              <a:t>0.36</a:t>
+            </a:r>
+            <a:endParaRPr lang="en-US" sz="1100" dirty="0"/>
+          </a:p>
+        </p:txBody>
+      </p:sp>
+      <p:sp>
+        <p:nvSpPr>
+          <p:cNvPr id="32" name="Text 30"/>
+          <p:cNvSpPr/>
+          <p:nvPr/>
+        </p:nvSpPr>
+        <p:spPr>
+          <a:xfrm>
+            <a:off x="640080" y="2926080"/>
+            <a:ext cx="2834640" cy="201168"/>
+          </a:xfrm>
+          <a:prstGeom prst="rect">
+            <a:avLst/>
+          </a:prstGeom>
+          <a:noFill/>
+          <a:ln/>
+        </p:spPr>
+        <p:txBody>
+          <a:bodyPr wrap="square" lIns="0" tIns="0" rIns="0" bIns="0" rtlCol="0" anchor="b"/>
+          <a:lstStyle/>
+          <a:p>
+            <a:pPr algn="ctr" indent="0" marL="0">
+              <a:buNone/>
+            </a:pPr>
+            <a:r>
+              <a:rPr lang="en-US" sz="1400" b="1" dirty="0">
+                <a:solidFill>
+                  <a:srgbClr val="000000"/>
+                </a:solidFill>
+              </a:rPr>
+              <a:t>Rework</a:t>
+            </a:r>
+            <a:endParaRPr lang="en-US" sz="1400" dirty="0"/>
+          </a:p>
+        </p:txBody>
+      </p:sp>
+      <p:sp>
+        <p:nvSpPr>
+          <p:cNvPr id="33" name="Text 31"/>
+          <p:cNvSpPr/>
+          <p:nvPr/>
+        </p:nvSpPr>
+        <p:spPr>
+          <a:xfrm>
+            <a:off x="1188720" y="3145536"/>
+            <a:ext cx="1143000" cy="201168"/>
+          </a:xfrm>
+          <a:prstGeom prst="rect">
+            <a:avLst/>
+          </a:prstGeom>
+          <a:noFill/>
+          <a:ln/>
+        </p:spPr>
+        <p:txBody>
+          <a:bodyPr wrap="square" lIns="0" tIns="0" rIns="0" bIns="0" rtlCol="0" anchor="ctr"/>
+          <a:lstStyle/>
+          <a:p>
+            <a:pPr algn="ctr" indent="0" marL="0">
+              <a:buNone/>
+            </a:pPr>
+            <a:r>
+              <a:rPr lang="en-US" sz="900" i="1" dirty="0">
+                <a:solidFill>
+                  <a:srgbClr val="555555"/>
+                </a:solidFill>
+              </a:rPr>
+              <a:t>Predicted +</a:t>
+            </a:r>
+            <a:endParaRPr lang="en-US" sz="900" dirty="0"/>
+          </a:p>
+        </p:txBody>
+      </p:sp>
+      <p:sp>
+        <p:nvSpPr>
+          <p:cNvPr id="34" name="Text 32"/>
+          <p:cNvSpPr/>
+          <p:nvPr/>
+        </p:nvSpPr>
+        <p:spPr>
+          <a:xfrm>
+            <a:off x="2331720" y="3145536"/>
+            <a:ext cx="1143000" cy="201168"/>
+          </a:xfrm>
+          <a:prstGeom prst="rect">
+            <a:avLst/>
+          </a:prstGeom>
+          <a:noFill/>
+          <a:ln/>
+        </p:spPr>
+        <p:txBody>
+          <a:bodyPr wrap="square" lIns="0" tIns="0" rIns="0" bIns="0" rtlCol="0" anchor="ctr"/>
+          <a:lstStyle/>
+          <a:p>
+            <a:pPr algn="ctr" indent="0" marL="0">
+              <a:buNone/>
+            </a:pPr>
+            <a:r>
+              <a:rPr lang="en-US" sz="900" i="1" dirty="0">
+                <a:solidFill>
+                  <a:srgbClr val="555555"/>
+                </a:solidFill>
+              </a:rPr>
+              <a:t>Predicted −</a:t>
+            </a:r>
+            <a:endParaRPr lang="en-US" sz="900" dirty="0"/>
+          </a:p>
+        </p:txBody>
+      </p:sp>
+      <p:sp>
+        <p:nvSpPr>
+          <p:cNvPr id="35" name="Text 33"/>
+          <p:cNvSpPr/>
+          <p:nvPr/>
+        </p:nvSpPr>
+        <p:spPr>
+          <a:xfrm>
+            <a:off x="640080" y="3364992"/>
+            <a:ext cx="548640" cy="548640"/>
+          </a:xfrm>
+          <a:prstGeom prst="rect">
+            <a:avLst/>
+          </a:prstGeom>
+          <a:noFill/>
+          <a:ln/>
+        </p:spPr>
+        <p:txBody>
+          <a:bodyPr wrap="square" lIns="508" tIns="508" rIns="508" bIns="508" rtlCol="0" anchor="ctr"/>
+          <a:lstStyle/>
+          <a:p>
+            <a:pPr algn="r" indent="0" marL="0">
+              <a:buNone/>
+            </a:pPr>
+            <a:r>
+              <a:rPr lang="en-US" sz="900" i="1" dirty="0">
+                <a:solidFill>
+                  <a:srgbClr val="555555"/>
+                </a:solidFill>
+              </a:rPr>
+              <a:t>Actual +</a:t>
+            </a:r>
+            <a:endParaRPr lang="en-US" sz="900" dirty="0"/>
+          </a:p>
+        </p:txBody>
+      </p:sp>
+      <p:sp>
+        <p:nvSpPr>
+          <p:cNvPr id="36" name="Text 34"/>
+          <p:cNvSpPr/>
+          <p:nvPr/>
+        </p:nvSpPr>
+        <p:spPr>
+          <a:xfrm>
+            <a:off x="640080" y="3913632"/>
+            <a:ext cx="548640" cy="548640"/>
+          </a:xfrm>
+          <a:prstGeom prst="rect">
+            <a:avLst/>
+          </a:prstGeom>
+          <a:noFill/>
+          <a:ln/>
+        </p:spPr>
+        <p:txBody>
+          <a:bodyPr wrap="square" lIns="508" tIns="508" rIns="508" bIns="508" rtlCol="0" anchor="ctr"/>
+          <a:lstStyle/>
+          <a:p>
+            <a:pPr algn="r" indent="0" marL="0">
+              <a:buNone/>
+            </a:pPr>
+            <a:r>
+              <a:rPr lang="en-US" sz="900" i="1" dirty="0">
+                <a:solidFill>
+                  <a:srgbClr val="555555"/>
+                </a:solidFill>
+              </a:rPr>
+              <a:t>Actual −</a:t>
+            </a:r>
+            <a:endParaRPr lang="en-US" sz="900" dirty="0"/>
+          </a:p>
+        </p:txBody>
+      </p:sp>
+      <p:sp>
+        <p:nvSpPr>
+          <p:cNvPr id="37" name="Shape 35"/>
+          <p:cNvSpPr/>
+          <p:nvPr/>
+        </p:nvSpPr>
+        <p:spPr>
+          <a:xfrm>
+            <a:off x="1188720" y="3438144"/>
+            <a:ext cx="1143000" cy="548640"/>
+          </a:xfrm>
+          <a:prstGeom prst="rect">
+            <a:avLst/>
+          </a:prstGeom>
+          <a:solidFill>
+            <a:srgbClr val="D4F0DC"/>
+          </a:solidFill>
+          <a:ln w="6350">
+            <a:solidFill>
+              <a:srgbClr val="999999"/>
+            </a:solidFill>
+            <a:prstDash val="solid"/>
+          </a:ln>
+        </p:spPr>
+      </p:sp>
+      <p:sp>
+        <p:nvSpPr>
+          <p:cNvPr id="38" name="Text 36"/>
+          <p:cNvSpPr/>
+          <p:nvPr/>
+        </p:nvSpPr>
+        <p:spPr>
+          <a:xfrm>
+            <a:off x="1188720" y="3438144"/>
+            <a:ext cx="1143000" cy="548640"/>
+          </a:xfrm>
+          <a:prstGeom prst="rect">
+            <a:avLst/>
+          </a:prstGeom>
+          <a:noFill/>
+          <a:ln/>
+        </p:spPr>
+        <p:txBody>
+          <a:bodyPr wrap="square" lIns="0" tIns="0" rIns="0" bIns="0" rtlCol="0" anchor="ctr"/>
+          <a:lstStyle/>
+          <a:p>
+            <a:pPr algn="ctr" indent="0" marL="0">
+              <a:buNone/>
+            </a:pPr>
+            <a:r>
+              <a:rPr lang="en-US" sz="2000" b="1" dirty="0">
+                <a:solidFill>
+                  <a:srgbClr val="0A7D2A"/>
+                </a:solidFill>
+              </a:rPr>
+              <a:t>9</a:t>
+            </a:r>
+            <a:endParaRPr lang="en-US" sz="2000" dirty="0"/>
+          </a:p>
+          <a:p>
+            <a:pPr algn="ctr" indent="0" marL="0">
+              <a:buNone/>
+            </a:pPr>
+            <a:r>
+              <a:rPr lang="en-US" sz="900" dirty="0">
+                <a:solidFill>
+                  <a:srgbClr val="666666"/>
+                </a:solidFill>
+              </a:rPr>
+              <a:t>TP</a:t>
+            </a:r>
+            <a:endParaRPr lang="en-US" sz="2000" dirty="0"/>
+          </a:p>
+        </p:txBody>
+      </p:sp>
+      <p:sp>
+        <p:nvSpPr>
+          <p:cNvPr id="39" name="Shape 37"/>
+          <p:cNvSpPr/>
+          <p:nvPr/>
+        </p:nvSpPr>
+        <p:spPr>
+          <a:xfrm>
+            <a:off x="2331720" y="3438144"/>
+            <a:ext cx="1143000" cy="548640"/>
+          </a:xfrm>
+          <a:prstGeom prst="rect">
+            <a:avLst/>
+          </a:prstGeom>
+          <a:solidFill>
+            <a:srgbClr val="F5D5CE"/>
+          </a:solidFill>
+          <a:ln w="6350">
+            <a:solidFill>
+              <a:srgbClr val="999999"/>
+            </a:solidFill>
+            <a:prstDash val="solid"/>
+          </a:ln>
+        </p:spPr>
+      </p:sp>
+      <p:sp>
+        <p:nvSpPr>
+          <p:cNvPr id="40" name="Text 38"/>
+          <p:cNvSpPr/>
+          <p:nvPr/>
+        </p:nvSpPr>
+        <p:spPr>
+          <a:xfrm>
+            <a:off x="2331720" y="3438144"/>
+            <a:ext cx="1143000" cy="548640"/>
+          </a:xfrm>
+          <a:prstGeom prst="rect">
+            <a:avLst/>
+          </a:prstGeom>
+          <a:noFill/>
+          <a:ln/>
+        </p:spPr>
+        <p:txBody>
+          <a:bodyPr wrap="square" lIns="0" tIns="0" rIns="0" bIns="0" rtlCol="0" anchor="ctr"/>
+          <a:lstStyle/>
+          <a:p>
+            <a:pPr algn="ctr" indent="0" marL="0">
+              <a:buNone/>
+            </a:pPr>
+            <a:r>
+              <a:rPr lang="en-US" sz="2000" b="1" dirty="0">
+                <a:solidFill>
+                  <a:srgbClr val="B33A1E"/>
+                </a:solidFill>
+              </a:rPr>
+              <a:t>0</a:t>
+            </a:r>
+            <a:endParaRPr lang="en-US" sz="2000" dirty="0"/>
+          </a:p>
+          <a:p>
+            <a:pPr algn="ctr" indent="0" marL="0">
+              <a:buNone/>
+            </a:pPr>
+            <a:r>
+              <a:rPr lang="en-US" sz="900" dirty="0">
+                <a:solidFill>
+                  <a:srgbClr val="666666"/>
+                </a:solidFill>
+              </a:rPr>
+              <a:t>FN</a:t>
+            </a:r>
+            <a:endParaRPr lang="en-US" sz="2000" dirty="0"/>
+          </a:p>
+        </p:txBody>
+      </p:sp>
+      <p:sp>
+        <p:nvSpPr>
+          <p:cNvPr id="41" name="Shape 39"/>
+          <p:cNvSpPr/>
+          <p:nvPr/>
+        </p:nvSpPr>
+        <p:spPr>
+          <a:xfrm>
+            <a:off x="1188720" y="3986784"/>
+            <a:ext cx="1143000" cy="548640"/>
+          </a:xfrm>
+          <a:prstGeom prst="rect">
+            <a:avLst/>
+          </a:prstGeom>
+          <a:solidFill>
+            <a:srgbClr val="F2F2F2"/>
+          </a:solidFill>
+          <a:ln w="6350">
+            <a:solidFill>
+              <a:srgbClr val="999999"/>
+            </a:solidFill>
+            <a:prstDash val="solid"/>
+          </a:ln>
+        </p:spPr>
+      </p:sp>
+      <p:sp>
+        <p:nvSpPr>
+          <p:cNvPr id="42" name="Text 40"/>
+          <p:cNvSpPr/>
+          <p:nvPr/>
+        </p:nvSpPr>
+        <p:spPr>
+          <a:xfrm>
+            <a:off x="1188720" y="3986784"/>
+            <a:ext cx="1143000" cy="548640"/>
+          </a:xfrm>
+          <a:prstGeom prst="rect">
+            <a:avLst/>
+          </a:prstGeom>
+          <a:noFill/>
+          <a:ln/>
+        </p:spPr>
+        <p:txBody>
+          <a:bodyPr wrap="square" lIns="0" tIns="0" rIns="0" bIns="0" rtlCol="0" anchor="ctr"/>
+          <a:lstStyle/>
+          <a:p>
+            <a:pPr algn="ctr" indent="0" marL="0">
+              <a:buNone/>
+            </a:pPr>
+            <a:r>
+              <a:rPr lang="en-US" sz="2000" b="1" dirty="0">
+                <a:solidFill>
+                  <a:srgbClr val="888888"/>
+                </a:solidFill>
+              </a:rPr>
+              <a:t>0</a:t>
+            </a:r>
+            <a:endParaRPr lang="en-US" sz="2000" dirty="0"/>
+          </a:p>
+          <a:p>
+            <a:pPr algn="ctr" indent="0" marL="0">
+              <a:buNone/>
+            </a:pPr>
+            <a:r>
+              <a:rPr lang="en-US" sz="900" dirty="0">
+                <a:solidFill>
+                  <a:srgbClr val="666666"/>
+                </a:solidFill>
+              </a:rPr>
+              <a:t>FP</a:t>
+            </a:r>
+            <a:endParaRPr lang="en-US" sz="2000" dirty="0"/>
+          </a:p>
+        </p:txBody>
+      </p:sp>
+      <p:sp>
+        <p:nvSpPr>
+          <p:cNvPr id="43" name="Shape 41"/>
+          <p:cNvSpPr/>
+          <p:nvPr/>
+        </p:nvSpPr>
+        <p:spPr>
+          <a:xfrm>
+            <a:off x="2331720" y="3986784"/>
+            <a:ext cx="1143000" cy="548640"/>
+          </a:xfrm>
+          <a:prstGeom prst="rect">
+            <a:avLst/>
+          </a:prstGeom>
+          <a:solidFill>
+            <a:srgbClr val="EAEAEA"/>
+          </a:solidFill>
+          <a:ln w="6350">
+            <a:solidFill>
+              <a:srgbClr val="999999"/>
+            </a:solidFill>
+            <a:prstDash val="solid"/>
+          </a:ln>
+        </p:spPr>
+      </p:sp>
+      <p:sp>
+        <p:nvSpPr>
+          <p:cNvPr id="44" name="Text 42"/>
+          <p:cNvSpPr/>
+          <p:nvPr/>
+        </p:nvSpPr>
+        <p:spPr>
+          <a:xfrm>
+            <a:off x="2331720" y="3986784"/>
+            <a:ext cx="1143000" cy="548640"/>
+          </a:xfrm>
+          <a:prstGeom prst="rect">
+            <a:avLst/>
+          </a:prstGeom>
+          <a:noFill/>
+          <a:ln/>
+        </p:spPr>
+        <p:txBody>
+          <a:bodyPr wrap="square" lIns="0" tIns="0" rIns="0" bIns="0" rtlCol="0" anchor="ctr"/>
+          <a:lstStyle/>
+          <a:p>
+            <a:pPr algn="ctr" indent="0" marL="0">
+              <a:buNone/>
+            </a:pPr>
+            <a:r>
+              <a:rPr lang="en-US" sz="2000" b="1" dirty="0">
+                <a:solidFill>
+                  <a:srgbClr val="555555"/>
+                </a:solidFill>
+              </a:rPr>
+              <a:t>36</a:t>
+            </a:r>
+            <a:endParaRPr lang="en-US" sz="2000" dirty="0"/>
+          </a:p>
+          <a:p>
+            <a:pPr algn="ctr" indent="0" marL="0">
+              <a:buNone/>
+            </a:pPr>
+            <a:r>
+              <a:rPr lang="en-US" sz="900" dirty="0">
+                <a:solidFill>
+                  <a:srgbClr val="666666"/>
+                </a:solidFill>
+              </a:rPr>
+              <a:t>TN</a:t>
+            </a:r>
+            <a:endParaRPr lang="en-US" sz="2000" dirty="0"/>
+          </a:p>
+        </p:txBody>
+      </p:sp>
+      <p:sp>
+        <p:nvSpPr>
+          <p:cNvPr id="45" name="Text 43"/>
+          <p:cNvSpPr/>
+          <p:nvPr/>
+        </p:nvSpPr>
+        <p:spPr>
+          <a:xfrm>
+            <a:off x="640080" y="4553712"/>
+            <a:ext cx="2834640" cy="201168"/>
+          </a:xfrm>
+          <a:prstGeom prst="rect">
+            <a:avLst/>
+          </a:prstGeom>
+          <a:noFill/>
+          <a:ln/>
+        </p:spPr>
+        <p:txBody>
+          <a:bodyPr wrap="square" lIns="0" tIns="0" rIns="0" bIns="0" rtlCol="0" anchor="ctr"/>
+          <a:lstStyle/>
+          <a:p>
+            <a:pPr algn="ctr" indent="0" marL="0">
+              <a:buNone/>
+            </a:pPr>
+            <a:r>
+              <a:rPr lang="en-US" sz="1100" i="1" dirty="0">
+                <a:solidFill>
+                  <a:srgbClr val="555555"/>
+                </a:solidFill>
+              </a:rPr>
+              <a:t>Precision </a:t>
+            </a:r>
+            <a:pPr algn="ctr" indent="0" marL="0">
+              <a:buNone/>
+            </a:pPr>
+            <a:r>
+              <a:rPr lang="en-US" sz="1100" b="1" i="1" dirty="0">
+                <a:solidFill>
+                  <a:srgbClr val="1A1A1A"/>
+                </a:solidFill>
+              </a:rPr>
+              <a:t>1.00</a:t>
+            </a:r>
+            <a:pPr algn="ctr" indent="0" marL="0">
+              <a:buNone/>
+            </a:pPr>
+            <a:r>
+              <a:rPr lang="en-US" sz="1100" i="1" dirty="0">
+                <a:solidFill>
+                  <a:srgbClr val="555555"/>
+                </a:solidFill>
+              </a:rPr>
+              <a:t>   ·   Recall </a:t>
+            </a:r>
+            <a:pPr algn="ctr" indent="0" marL="0">
+              <a:buNone/>
+            </a:pPr>
+            <a:r>
+              <a:rPr lang="en-US" sz="1100" b="1" i="1" dirty="0">
+                <a:solidFill>
+                  <a:srgbClr val="1A1A1A"/>
+                </a:solidFill>
+              </a:rPr>
+              <a:t>1.00</a:t>
+            </a:r>
+            <a:endParaRPr lang="en-US" sz="1100" dirty="0"/>
+          </a:p>
+        </p:txBody>
+      </p:sp>
+      <p:sp>
+        <p:nvSpPr>
+          <p:cNvPr id="46" name="Text 44"/>
+          <p:cNvSpPr/>
+          <p:nvPr/>
+        </p:nvSpPr>
+        <p:spPr>
+          <a:xfrm>
+            <a:off x="4754880" y="2926080"/>
+            <a:ext cx="2834640" cy="201168"/>
+          </a:xfrm>
+          <a:prstGeom prst="rect">
+            <a:avLst/>
+          </a:prstGeom>
+          <a:noFill/>
+          <a:ln/>
+        </p:spPr>
+        <p:txBody>
+          <a:bodyPr wrap="square" lIns="0" tIns="0" rIns="0" bIns="0" rtlCol="0" anchor="b"/>
+          <a:lstStyle/>
+          <a:p>
+            <a:pPr algn="ctr" indent="0" marL="0">
+              <a:buNone/>
+            </a:pPr>
+            <a:r>
+              <a:rPr lang="en-US" sz="1400" b="1" dirty="0">
+                <a:solidFill>
+                  <a:srgbClr val="000000"/>
+                </a:solidFill>
+              </a:rPr>
+              <a:t>Hygiene</a:t>
+            </a:r>
+            <a:endParaRPr lang="en-US" sz="1400" dirty="0"/>
+          </a:p>
+        </p:txBody>
+      </p:sp>
+      <p:sp>
+        <p:nvSpPr>
+          <p:cNvPr id="47" name="Text 45"/>
+          <p:cNvSpPr/>
+          <p:nvPr/>
+        </p:nvSpPr>
+        <p:spPr>
+          <a:xfrm>
+            <a:off x="5303520" y="3145536"/>
+            <a:ext cx="1143000" cy="201168"/>
+          </a:xfrm>
+          <a:prstGeom prst="rect">
+            <a:avLst/>
+          </a:prstGeom>
+          <a:noFill/>
+          <a:ln/>
+        </p:spPr>
+        <p:txBody>
+          <a:bodyPr wrap="square" lIns="0" tIns="0" rIns="0" bIns="0" rtlCol="0" anchor="ctr"/>
+          <a:lstStyle/>
+          <a:p>
+            <a:pPr algn="ctr" indent="0" marL="0">
+              <a:buNone/>
+            </a:pPr>
+            <a:r>
+              <a:rPr lang="en-US" sz="900" i="1" dirty="0">
+                <a:solidFill>
+                  <a:srgbClr val="555555"/>
+                </a:solidFill>
+              </a:rPr>
+              <a:t>Predicted +</a:t>
+            </a:r>
+            <a:endParaRPr lang="en-US" sz="900" dirty="0"/>
+          </a:p>
+        </p:txBody>
+      </p:sp>
+      <p:sp>
+        <p:nvSpPr>
+          <p:cNvPr id="48" name="Text 46"/>
+          <p:cNvSpPr/>
+          <p:nvPr/>
+        </p:nvSpPr>
+        <p:spPr>
+          <a:xfrm>
+            <a:off x="6446520" y="3145536"/>
+            <a:ext cx="1143000" cy="201168"/>
+          </a:xfrm>
+          <a:prstGeom prst="rect">
+            <a:avLst/>
+          </a:prstGeom>
+          <a:noFill/>
+          <a:ln/>
+        </p:spPr>
+        <p:txBody>
+          <a:bodyPr wrap="square" lIns="0" tIns="0" rIns="0" bIns="0" rtlCol="0" anchor="ctr"/>
+          <a:lstStyle/>
+          <a:p>
+            <a:pPr algn="ctr" indent="0" marL="0">
+              <a:buNone/>
+            </a:pPr>
+            <a:r>
+              <a:rPr lang="en-US" sz="900" i="1" dirty="0">
+                <a:solidFill>
+                  <a:srgbClr val="555555"/>
+                </a:solidFill>
+              </a:rPr>
+              <a:t>Predicted −</a:t>
+            </a:r>
+            <a:endParaRPr lang="en-US" sz="900" dirty="0"/>
+          </a:p>
+        </p:txBody>
+      </p:sp>
+      <p:sp>
+        <p:nvSpPr>
+          <p:cNvPr id="49" name="Text 47"/>
+          <p:cNvSpPr/>
+          <p:nvPr/>
+        </p:nvSpPr>
+        <p:spPr>
+          <a:xfrm>
+            <a:off x="4754880" y="3364992"/>
+            <a:ext cx="548640" cy="548640"/>
+          </a:xfrm>
+          <a:prstGeom prst="rect">
+            <a:avLst/>
+          </a:prstGeom>
+          <a:noFill/>
+          <a:ln/>
+        </p:spPr>
+        <p:txBody>
+          <a:bodyPr wrap="square" lIns="508" tIns="508" rIns="508" bIns="508" rtlCol="0" anchor="ctr"/>
+          <a:lstStyle/>
+          <a:p>
+            <a:pPr algn="r" indent="0" marL="0">
+              <a:buNone/>
+            </a:pPr>
+            <a:r>
+              <a:rPr lang="en-US" sz="900" i="1" dirty="0">
+                <a:solidFill>
+                  <a:srgbClr val="555555"/>
+                </a:solidFill>
+              </a:rPr>
+              <a:t>Actual +</a:t>
+            </a:r>
+            <a:endParaRPr lang="en-US" sz="900" dirty="0"/>
+          </a:p>
+        </p:txBody>
+      </p:sp>
+      <p:sp>
+        <p:nvSpPr>
+          <p:cNvPr id="50" name="Text 48"/>
+          <p:cNvSpPr/>
+          <p:nvPr/>
+        </p:nvSpPr>
+        <p:spPr>
+          <a:xfrm>
+            <a:off x="4754880" y="3913632"/>
+            <a:ext cx="548640" cy="548640"/>
+          </a:xfrm>
+          <a:prstGeom prst="rect">
+            <a:avLst/>
+          </a:prstGeom>
+          <a:noFill/>
+          <a:ln/>
+        </p:spPr>
+        <p:txBody>
+          <a:bodyPr wrap="square" lIns="508" tIns="508" rIns="508" bIns="508" rtlCol="0" anchor="ctr"/>
+          <a:lstStyle/>
+          <a:p>
+            <a:pPr algn="r" indent="0" marL="0">
+              <a:buNone/>
+            </a:pPr>
+            <a:r>
+              <a:rPr lang="en-US" sz="900" i="1" dirty="0">
+                <a:solidFill>
+                  <a:srgbClr val="555555"/>
+                </a:solidFill>
+              </a:rPr>
+              <a:t>Actual −</a:t>
+            </a:r>
+            <a:endParaRPr lang="en-US" sz="900" dirty="0"/>
+          </a:p>
+        </p:txBody>
+      </p:sp>
+      <p:sp>
+        <p:nvSpPr>
+          <p:cNvPr id="51" name="Shape 49"/>
+          <p:cNvSpPr/>
+          <p:nvPr/>
+        </p:nvSpPr>
+        <p:spPr>
+          <a:xfrm>
+            <a:off x="5303520" y="3438144"/>
+            <a:ext cx="1143000" cy="548640"/>
+          </a:xfrm>
+          <a:prstGeom prst="rect">
+            <a:avLst/>
+          </a:prstGeom>
+          <a:solidFill>
+            <a:srgbClr val="D4F0DC"/>
+          </a:solidFill>
+          <a:ln w="6350">
+            <a:solidFill>
+              <a:srgbClr val="999999"/>
+            </a:solidFill>
+            <a:prstDash val="solid"/>
+          </a:ln>
+        </p:spPr>
+      </p:sp>
+      <p:sp>
+        <p:nvSpPr>
+          <p:cNvPr id="52" name="Text 50"/>
+          <p:cNvSpPr/>
+          <p:nvPr/>
+        </p:nvSpPr>
+        <p:spPr>
+          <a:xfrm>
+            <a:off x="5303520" y="3438144"/>
+            <a:ext cx="1143000" cy="548640"/>
+          </a:xfrm>
+          <a:prstGeom prst="rect">
+            <a:avLst/>
+          </a:prstGeom>
+          <a:noFill/>
+          <a:ln/>
+        </p:spPr>
+        <p:txBody>
+          <a:bodyPr wrap="square" lIns="0" tIns="0" rIns="0" bIns="0" rtlCol="0" anchor="ctr"/>
+          <a:lstStyle/>
+          <a:p>
+            <a:pPr algn="ctr" indent="0" marL="0">
+              <a:buNone/>
+            </a:pPr>
+            <a:r>
+              <a:rPr lang="en-US" sz="2000" b="1" dirty="0">
+                <a:solidFill>
+                  <a:srgbClr val="0A7D2A"/>
+                </a:solidFill>
+              </a:rPr>
+              <a:t>8</a:t>
+            </a:r>
+            <a:endParaRPr lang="en-US" sz="2000" dirty="0"/>
+          </a:p>
+          <a:p>
+            <a:pPr algn="ctr" indent="0" marL="0">
+              <a:buNone/>
+            </a:pPr>
+            <a:r>
+              <a:rPr lang="en-US" sz="900" dirty="0">
+                <a:solidFill>
+                  <a:srgbClr val="666666"/>
+                </a:solidFill>
+              </a:rPr>
+              <a:t>TP</a:t>
+            </a:r>
+            <a:endParaRPr lang="en-US" sz="2000" dirty="0"/>
+          </a:p>
+        </p:txBody>
+      </p:sp>
+      <p:sp>
+        <p:nvSpPr>
+          <p:cNvPr id="53" name="Shape 51"/>
+          <p:cNvSpPr/>
+          <p:nvPr/>
+        </p:nvSpPr>
+        <p:spPr>
+          <a:xfrm>
+            <a:off x="6446520" y="3438144"/>
+            <a:ext cx="1143000" cy="548640"/>
+          </a:xfrm>
+          <a:prstGeom prst="rect">
+            <a:avLst/>
+          </a:prstGeom>
+          <a:solidFill>
+            <a:srgbClr val="F5D5CE"/>
+          </a:solidFill>
+          <a:ln w="6350">
+            <a:solidFill>
+              <a:srgbClr val="999999"/>
+            </a:solidFill>
+            <a:prstDash val="solid"/>
+          </a:ln>
+        </p:spPr>
+      </p:sp>
+      <p:sp>
+        <p:nvSpPr>
+          <p:cNvPr id="54" name="Text 52"/>
+          <p:cNvSpPr/>
+          <p:nvPr/>
+        </p:nvSpPr>
+        <p:spPr>
+          <a:xfrm>
+            <a:off x="6446520" y="3438144"/>
+            <a:ext cx="1143000" cy="548640"/>
+          </a:xfrm>
+          <a:prstGeom prst="rect">
+            <a:avLst/>
+          </a:prstGeom>
+          <a:noFill/>
+          <a:ln/>
+        </p:spPr>
+        <p:txBody>
+          <a:bodyPr wrap="square" lIns="0" tIns="0" rIns="0" bIns="0" rtlCol="0" anchor="ctr"/>
+          <a:lstStyle/>
+          <a:p>
+            <a:pPr algn="ctr" indent="0" marL="0">
+              <a:buNone/>
+            </a:pPr>
+            <a:r>
+              <a:rPr lang="en-US" sz="2000" b="1" dirty="0">
+                <a:solidFill>
+                  <a:srgbClr val="B33A1E"/>
+                </a:solidFill>
+              </a:rPr>
+              <a:t>0</a:t>
+            </a:r>
+            <a:endParaRPr lang="en-US" sz="2000" dirty="0"/>
+          </a:p>
+          <a:p>
+            <a:pPr algn="ctr" indent="0" marL="0">
+              <a:buNone/>
+            </a:pPr>
+            <a:r>
+              <a:rPr lang="en-US" sz="900" dirty="0">
+                <a:solidFill>
+                  <a:srgbClr val="666666"/>
+                </a:solidFill>
+              </a:rPr>
+              <a:t>FN</a:t>
+            </a:r>
+            <a:endParaRPr lang="en-US" sz="2000" dirty="0"/>
+          </a:p>
+        </p:txBody>
+      </p:sp>
+      <p:sp>
+        <p:nvSpPr>
+          <p:cNvPr id="55" name="Shape 53"/>
+          <p:cNvSpPr/>
+          <p:nvPr/>
+        </p:nvSpPr>
+        <p:spPr>
+          <a:xfrm>
+            <a:off x="5303520" y="3986784"/>
+            <a:ext cx="1143000" cy="548640"/>
+          </a:xfrm>
+          <a:prstGeom prst="rect">
+            <a:avLst/>
+          </a:prstGeom>
+          <a:solidFill>
+            <a:srgbClr val="F2F2F2"/>
+          </a:solidFill>
+          <a:ln w="6350">
+            <a:solidFill>
+              <a:srgbClr val="999999"/>
+            </a:solidFill>
+            <a:prstDash val="solid"/>
+          </a:ln>
+        </p:spPr>
+      </p:sp>
+      <p:sp>
+        <p:nvSpPr>
+          <p:cNvPr id="56" name="Text 54"/>
+          <p:cNvSpPr/>
+          <p:nvPr/>
+        </p:nvSpPr>
+        <p:spPr>
+          <a:xfrm>
+            <a:off x="5303520" y="3986784"/>
+            <a:ext cx="1143000" cy="548640"/>
+          </a:xfrm>
+          <a:prstGeom prst="rect">
+            <a:avLst/>
+          </a:prstGeom>
+          <a:noFill/>
+          <a:ln/>
+        </p:spPr>
+        <p:txBody>
+          <a:bodyPr wrap="square" lIns="0" tIns="0" rIns="0" bIns="0" rtlCol="0" anchor="ctr"/>
+          <a:lstStyle/>
+          <a:p>
+            <a:pPr algn="ctr" indent="0" marL="0">
+              <a:buNone/>
+            </a:pPr>
+            <a:r>
+              <a:rPr lang="en-US" sz="2000" b="1" dirty="0">
+                <a:solidFill>
+                  <a:srgbClr val="888888"/>
+                </a:solidFill>
+              </a:rPr>
+              <a:t>0</a:t>
+            </a:r>
+            <a:endParaRPr lang="en-US" sz="2000" dirty="0"/>
+          </a:p>
+          <a:p>
+            <a:pPr algn="ctr" indent="0" marL="0">
+              <a:buNone/>
+            </a:pPr>
+            <a:r>
+              <a:rPr lang="en-US" sz="900" dirty="0">
+                <a:solidFill>
+                  <a:srgbClr val="666666"/>
+                </a:solidFill>
+              </a:rPr>
+              <a:t>FP</a:t>
+            </a:r>
+            <a:endParaRPr lang="en-US" sz="2000" dirty="0"/>
+          </a:p>
+        </p:txBody>
+      </p:sp>
+      <p:sp>
+        <p:nvSpPr>
+          <p:cNvPr id="57" name="Shape 55"/>
+          <p:cNvSpPr/>
+          <p:nvPr/>
+        </p:nvSpPr>
+        <p:spPr>
+          <a:xfrm>
+            <a:off x="6446520" y="3986784"/>
+            <a:ext cx="1143000" cy="548640"/>
+          </a:xfrm>
+          <a:prstGeom prst="rect">
+            <a:avLst/>
+          </a:prstGeom>
+          <a:solidFill>
+            <a:srgbClr val="EAEAEA"/>
+          </a:solidFill>
+          <a:ln w="6350">
+            <a:solidFill>
+              <a:srgbClr val="999999"/>
+            </a:solidFill>
+            <a:prstDash val="solid"/>
+          </a:ln>
+        </p:spPr>
+      </p:sp>
+      <p:sp>
+        <p:nvSpPr>
+          <p:cNvPr id="58" name="Text 56"/>
+          <p:cNvSpPr/>
+          <p:nvPr/>
+        </p:nvSpPr>
+        <p:spPr>
+          <a:xfrm>
+            <a:off x="6446520" y="3986784"/>
+            <a:ext cx="1143000" cy="548640"/>
+          </a:xfrm>
+          <a:prstGeom prst="rect">
+            <a:avLst/>
+          </a:prstGeom>
+          <a:noFill/>
+          <a:ln/>
+        </p:spPr>
+        <p:txBody>
+          <a:bodyPr wrap="square" lIns="0" tIns="0" rIns="0" bIns="0" rtlCol="0" anchor="ctr"/>
+          <a:lstStyle/>
+          <a:p>
+            <a:pPr algn="ctr" indent="0" marL="0">
+              <a:buNone/>
+            </a:pPr>
+            <a:r>
+              <a:rPr lang="en-US" sz="2000" b="1" dirty="0">
+                <a:solidFill>
+                  <a:srgbClr val="555555"/>
+                </a:solidFill>
+              </a:rPr>
+              <a:t>37</a:t>
+            </a:r>
+            <a:endParaRPr lang="en-US" sz="2000" dirty="0"/>
+          </a:p>
+          <a:p>
+            <a:pPr algn="ctr" indent="0" marL="0">
+              <a:buNone/>
+            </a:pPr>
+            <a:r>
+              <a:rPr lang="en-US" sz="900" dirty="0">
+                <a:solidFill>
+                  <a:srgbClr val="666666"/>
+                </a:solidFill>
+              </a:rPr>
+              <a:t>TN</a:t>
+            </a:r>
+            <a:endParaRPr lang="en-US" sz="2000" dirty="0"/>
+          </a:p>
+        </p:txBody>
+      </p:sp>
+      <p:sp>
+        <p:nvSpPr>
+          <p:cNvPr id="59" name="Text 57"/>
+          <p:cNvSpPr/>
+          <p:nvPr/>
+        </p:nvSpPr>
+        <p:spPr>
+          <a:xfrm>
+            <a:off x="4754880" y="4553712"/>
+            <a:ext cx="2834640" cy="201168"/>
+          </a:xfrm>
+          <a:prstGeom prst="rect">
+            <a:avLst/>
+          </a:prstGeom>
+          <a:noFill/>
+          <a:ln/>
+        </p:spPr>
+        <p:txBody>
+          <a:bodyPr wrap="square" lIns="0" tIns="0" rIns="0" bIns="0" rtlCol="0" anchor="ctr"/>
+          <a:lstStyle/>
+          <a:p>
+            <a:pPr algn="ctr" indent="0" marL="0">
+              <a:buNone/>
+            </a:pPr>
+            <a:r>
+              <a:rPr lang="en-US" sz="1100" i="1" dirty="0">
+                <a:solidFill>
+                  <a:srgbClr val="555555"/>
+                </a:solidFill>
+              </a:rPr>
+              <a:t>Precision </a:t>
+            </a:r>
+            <a:pPr algn="ctr" indent="0" marL="0">
+              <a:buNone/>
+            </a:pPr>
+            <a:r>
+              <a:rPr lang="en-US" sz="1100" b="1" i="1" dirty="0">
+                <a:solidFill>
+                  <a:srgbClr val="1A1A1A"/>
+                </a:solidFill>
+              </a:rPr>
+              <a:t>1.00</a:t>
+            </a:r>
+            <a:pPr algn="ctr" indent="0" marL="0">
+              <a:buNone/>
+            </a:pPr>
+            <a:r>
+              <a:rPr lang="en-US" sz="1100" i="1" dirty="0">
+                <a:solidFill>
+                  <a:srgbClr val="555555"/>
+                </a:solidFill>
+              </a:rPr>
+              <a:t>   ·   Recall </a:t>
+            </a:r>
+            <a:pPr algn="ctr" indent="0" marL="0">
+              <a:buNone/>
+            </a:pPr>
+            <a:r>
+              <a:rPr lang="en-US" sz="1100" b="1" i="1" dirty="0">
+                <a:solidFill>
+                  <a:srgbClr val="1A1A1A"/>
+                </a:solidFill>
+              </a:rPr>
+              <a:t>1.00</a:t>
+            </a:r>
+            <a:endParaRPr lang="en-US" sz="1100" dirty="0"/>
+          </a:p>
+        </p:txBody>
+      </p:sp>
+      <p:sp>
+        <p:nvSpPr>
+          <p:cNvPr id="60" name="Text 58"/>
+          <p:cNvSpPr/>
+          <p:nvPr/>
+        </p:nvSpPr>
+        <p:spPr>
+          <a:xfrm>
+            <a:off x="365760" y="4846320"/>
+            <a:ext cx="8412480" cy="256032"/>
+          </a:xfrm>
+          <a:prstGeom prst="rect">
+            <a:avLst/>
+          </a:prstGeom>
+          <a:noFill/>
+          <a:ln/>
+        </p:spPr>
+        <p:txBody>
+          <a:bodyPr wrap="square" lIns="0" tIns="0" rIns="0" bIns="0" rtlCol="0" anchor="ctr"/>
+          <a:lstStyle/>
+          <a:p>
+            <a:pPr algn="ctr" indent="0" marL="0">
+              <a:buNone/>
+            </a:pPr>
+            <a:r>
+              <a:rPr lang="en-US" sz="900" i="1" dirty="0">
+                <a:solidFill>
+                  <a:srgbClr val="555555"/>
+                </a:solidFill>
+              </a:rPr>
+              <a:t>Ordering recall is the outlier: the reorder synthesiser's splitOnInvalid validator rejects any window containing a step it cannot safely.</a:t>
+            </a:r>
+            <a:endParaRPr lang="en-US" sz="900" dirty="0"/>
+          </a:p>
+        </p:txBody>
+      </p:sp>
+    </p:spTree>
+  </p:cSld>
+  <p:clrMapOvr>
+    <a:masterClrMapping/>
+  </p:clrMapOvr>
+</p:sld>
+</file>
+
+<file path=ppt/slides/slide18.xml><?xml version="1.0" encoding="utf-8"?>
+<p:sld xmlns:a="http://schemas.openxmlformats.org/drawingml/2006/main" xmlns:r="http://schemas.openxmlformats.org/officeDocument/2006/relationships" xmlns:p="http://schemas.openxmlformats.org/presentationml/2006/main">
+  <p:cSld name="Slide 18">
+    <p:spTree>
+      <p:nvGrpSpPr>
+        <p:cNvPr id="1" name=""/>
+        <p:cNvGrpSpPr/>
+        <p:nvPr/>
+      </p:nvGrpSpPr>
+      <p:grpSpPr>
+        <a:xfrm>
+          <a:off x="0" y="0"/>
+          <a:ext cx="0" cy="0"/>
+          <a:chOff x="0" y="0"/>
+          <a:chExt cx="0" cy="0"/>
+        </a:xfrm>
+      </p:grpSpPr>
+      <p:sp>
+        <p:nvSpPr>
+          <p:cNvPr id="2" name="Text 0"/>
+          <p:cNvSpPr/>
+          <p:nvPr/>
+        </p:nvSpPr>
+        <p:spPr>
+          <a:xfrm>
+            <a:off x="457200" y="91440"/>
+            <a:ext cx="8229600" cy="548640"/>
+          </a:xfrm>
+          <a:prstGeom prst="rect">
+            <a:avLst/>
+          </a:prstGeom>
+          <a:noFill/>
+          <a:ln/>
+        </p:spPr>
+        <p:txBody>
+          <a:bodyPr wrap="square" lIns="0" tIns="0" rIns="0" bIns="0" rtlCol="0" anchor="ctr"/>
+          <a:lstStyle/>
+          <a:p>
+            <a:pPr indent="0" marL="0">
+              <a:buNone/>
+            </a:pPr>
+            <a:r>
+              <a:rPr lang="en-US" sz="2800" b="1" dirty="0">
+                <a:solidFill>
+                  <a:srgbClr val="000000"/>
+                </a:solidFill>
+              </a:rPr>
               <a:t>Are the alternatives actually better?</a:t>
             </a:r>
             <a:endParaRPr lang="en-US" sz="2800" dirty="0"/>
@@ -9027,7 +9317,7 @@
       </p:sp>
       <p:graphicFrame>
         <p:nvGraphicFramePr>
-          <p:cNvPr id="18" name="Table 0"/>
+          <p:cNvPr id="19" name="Table 0"/>
           <p:cNvGraphicFramePr>
             <a:graphicFrameLocks noGrp="1"/>
           </p:cNvGraphicFramePr>
@@ -11212,67 +11502,6 @@
 </p:sld>
 </file>
 
-<file path=ppt/slides/slide18.xml><?xml version="1.0" encoding="utf-8"?>
-<p:sld xmlns:a="http://schemas.openxmlformats.org/drawingml/2006/main" xmlns:r="http://schemas.openxmlformats.org/officeDocument/2006/relationships" xmlns:p="http://schemas.openxmlformats.org/presentationml/2006/main">
-  <p:cSld name="Slide 18">
-    <p:spTree>
-      <p:nvGrpSpPr>
-        <p:cNvPr id="1" name=""/>
-        <p:cNvGrpSpPr/>
-        <p:nvPr/>
-      </p:nvGrpSpPr>
-      <p:grpSpPr>
-        <a:xfrm>
-          <a:off x="0" y="0"/>
-          <a:ext cx="0" cy="0"/>
-          <a:chOff x="0" y="0"/>
-          <a:chExt cx="0" cy="0"/>
-        </a:xfrm>
-      </p:grpSpPr>
-      <p:sp>
-        <p:nvSpPr>
-          <p:cNvPr id="2" name="Text 0"/>
-          <p:cNvSpPr/>
-          <p:nvPr/>
-        </p:nvSpPr>
-        <p:spPr>
-          <a:xfrm>
-            <a:off x="457200" y="2011680"/>
-            <a:ext cx="8229600" cy="1097280"/>
-          </a:xfrm>
-          <a:prstGeom prst="rect">
-            <a:avLst/>
-          </a:prstGeom>
-          <a:noFill/>
-          <a:ln/>
-        </p:spPr>
-        <p:txBody>
-          <a:bodyPr wrap="square" lIns="0" tIns="0" rIns="0" bIns="0" rtlCol="0" anchor="ctr"/>
-          <a:lstStyle/>
-          <a:p>
-            <a:pPr algn="ctr" indent="0" marL="0">
-              <a:buNone/>
-            </a:pPr>
-            <a:r>
-              <a:rPr lang="en-US" sz="3600" b="1" dirty="0">
-                <a:solidFill>
-                  <a:srgbClr val="1A1A1A"/>
-                </a:solidFill>
-              </a:rPr>
-              <a:t>Experiment 2: Is the process score reliable?</a:t>
-            </a:r>
-            <a:endParaRPr lang="en-US" sz="3600" dirty="0"/>
-          </a:p>
-        </p:txBody>
-      </p:sp>
-    </p:spTree>
-  </p:cSld>
-  <p:clrMapOvr>
-    <a:masterClrMapping/>
-  </p:clrMapOvr>
-</p:sld>
-</file>
-
 <file path=ppt/slides/slide19.xml><?xml version="1.0" encoding="utf-8"?>
 <p:sld xmlns:a="http://schemas.openxmlformats.org/drawingml/2006/main" xmlns:r="http://schemas.openxmlformats.org/officeDocument/2006/relationships" xmlns:p="http://schemas.openxmlformats.org/presentationml/2006/main">
   <p:cSld name="Slide 19">
@@ -11298,8 +11527,8 @@
         </p:nvSpPr>
         <p:spPr>
           <a:xfrm>
-            <a:off x="457200" y="274320"/>
-            <a:ext cx="8229600" cy="640080"/>
+            <a:off x="457200" y="2011680"/>
+            <a:ext cx="8229600" cy="1097280"/>
           </a:xfrm>
           <a:prstGeom prst="rect">
             <a:avLst/>
@@ -11311,204 +11540,18 @@
           <a:bodyPr wrap="square" lIns="0" tIns="0" rIns="0" bIns="0" rtlCol="0" anchor="ctr"/>
           <a:lstStyle/>
           <a:p>
-            <a:pPr indent="0" marL="0">
-              <a:buNone/>
-            </a:pPr>
-            <a:r>
-              <a:rPr lang="en-US" sz="2800" b="1" dirty="0">
-                <a:solidFill>
-                  <a:srgbClr val="000000"/>
-                </a:solidFill>
-              </a:rPr>
-              <a:t>Is the process score reliable?</a:t>
-            </a:r>
-            <a:endParaRPr lang="en-US" sz="2800" dirty="0"/>
-          </a:p>
-        </p:txBody>
-      </p:sp>
-      <p:sp>
-        <p:nvSpPr>
-          <p:cNvPr id="3" name="Text 1"/>
-          <p:cNvSpPr/>
-          <p:nvPr/>
-        </p:nvSpPr>
-        <p:spPr>
-          <a:xfrm>
-            <a:off x="457200" y="1188720"/>
-            <a:ext cx="8229600" cy="3657600"/>
-          </a:xfrm>
-          <a:prstGeom prst="rect">
-            <a:avLst/>
-          </a:prstGeom>
-          <a:noFill/>
-          <a:ln/>
-        </p:spPr>
-        <p:txBody>
-          <a:bodyPr wrap="square" rtlCol="0" anchor="t"/>
-          <a:lstStyle/>
-          <a:p>
-            <a:pPr marL="342900" indent="-342900">
-              <a:spcAft>
-                <a:spcPts val="600"/>
-              </a:spcAft>
-              <a:buSzPct val="100000"/>
-              <a:buChar char="•"/>
-            </a:pPr>
-            <a:r>
-              <a:rPr lang="en-US" sz="1500" b="1" dirty="0">
-                <a:solidFill>
-                  <a:srgbClr val="000000"/>
-                </a:solidFill>
-              </a:rPr>
-              <a:t>How stable is the score?</a:t>
-            </a:r>
-            <a:endParaRPr lang="en-US" sz="1500" dirty="0"/>
-          </a:p>
-          <a:p>
-            <a:pPr lvl="1" marL="762000" indent="-381000">
-              <a:spcAft>
-                <a:spcPts val="600"/>
-              </a:spcAft>
-              <a:buSzPct val="100000"/>
-              <a:buChar char="•"/>
-            </a:pPr>
-            <a:r>
-              <a:rPr lang="en-US" sz="1500" dirty="0">
-                <a:solidFill>
-                  <a:srgbClr val="000000"/>
-                </a:solidFill>
-              </a:rPr>
-              <a:t>Two perturbation sweeps </a:t>
-            </a:r>
-            <a:pPr indent="0" marL="0">
-              <a:spcAft>
-                <a:spcPts val="600"/>
-              </a:spcAft>
-              <a:buNone/>
-            </a:pPr>
-            <a:r>
-              <a:rPr lang="en-US" sz="1500" dirty="0">
-                <a:solidFill>
-                  <a:srgbClr val="888888"/>
-                </a:solidFill>
-              </a:rPr>
-              <a:t>- single-knob (one weight scaled ×0.1 to ×10) + multi-knob Monte Carlo (200 samples, σ = ln 2, so ~×0.25 to ×4 of production).</a:t>
-            </a:r>
-            <a:endParaRPr lang="en-US" sz="1500" dirty="0"/>
-          </a:p>
-          <a:p>
-            <a:pPr lvl="1" marL="762000" indent="-381000">
-              <a:spcAft>
-                <a:spcPts val="1800"/>
-              </a:spcAft>
-              <a:buSzPct val="100000"/>
-              <a:buChar char="•"/>
-            </a:pPr>
-            <a:r>
-              <a:rPr lang="en-US" sz="1500" dirty="0">
-                <a:solidFill>
-                  <a:srgbClr val="000000"/>
-                </a:solidFill>
-              </a:rPr>
-              <a:t>Stability metrics </a:t>
-            </a:r>
-            <a:pPr indent="0" marL="0">
-              <a:spcAft>
-                <a:spcPts val="1800"/>
-              </a:spcAft>
-              <a:buNone/>
-            </a:pPr>
-            <a:r>
-              <a:rPr lang="en-US" sz="1500" dirty="0">
-                <a:solidFill>
-                  <a:srgbClr val="888888"/>
-                </a:solidFill>
-              </a:rPr>
-              <a:t>- top-1 hit rate (does the top-ranked DP stay on top?) + Kendall's τ-b on per-session rankings.</a:t>
-            </a:r>
-            <a:endParaRPr lang="en-US" sz="1500" dirty="0"/>
-          </a:p>
-          <a:p>
-            <a:pPr marL="342900" indent="-342900">
-              <a:spcAft>
-                <a:spcPts val="600"/>
-              </a:spcAft>
-              <a:buSzPct val="100000"/>
-              <a:buChar char="•"/>
-            </a:pPr>
-            <a:r>
-              <a:rPr lang="en-US" sz="1500" b="1" dirty="0">
-                <a:solidFill>
-                  <a:srgbClr val="000000"/>
-                </a:solidFill>
-              </a:rPr>
-              <a:t>Does every component of the process score hold weight?</a:t>
-            </a:r>
-            <a:endParaRPr lang="en-US" sz="1500" dirty="0"/>
-          </a:p>
-          <a:p>
-            <a:pPr lvl="1" marL="762000" indent="-381000">
-              <a:spcAft>
-                <a:spcPts val="600"/>
-              </a:spcAft>
-              <a:buSzPct val="100000"/>
-              <a:buChar char="•"/>
-            </a:pPr>
-            <a:r>
-              <a:rPr lang="en-US" sz="1500" dirty="0">
-                <a:solidFill>
-                  <a:srgbClr val="000000"/>
-                </a:solidFill>
-              </a:rPr>
-              <a:t>Process-side ablation </a:t>
-            </a:r>
-            <a:pPr indent="0" marL="0">
-              <a:spcAft>
-                <a:spcPts val="600"/>
-              </a:spcAft>
-              <a:buNone/>
-            </a:pPr>
-            <a:r>
-              <a:rPr lang="en-US" sz="1500" dirty="0">
-                <a:solidFill>
-                  <a:srgbClr val="888888"/>
-                </a:solidFill>
-              </a:rPr>
-              <a:t>- enumerate all 2⁷ = 128 subsets of the 7 process weights → 5,760 cases per session set.</a:t>
-            </a:r>
-            <a:endParaRPr lang="en-US" sz="1500" dirty="0"/>
-          </a:p>
-          <a:p>
-            <a:pPr lvl="1" marL="762000" indent="-381000">
-              <a:spcAft>
-                <a:spcPts val="600"/>
-              </a:spcAft>
-              <a:buSzPct val="100000"/>
-              <a:buChar char="•"/>
-            </a:pPr>
-            <a:r>
-              <a:rPr lang="en-US" sz="1500" dirty="0">
-                <a:solidFill>
-                  <a:srgbClr val="000000"/>
-                </a:solidFill>
-              </a:rPr>
-              <a:t>Recovery metrics </a:t>
-            </a:r>
-            <a:pPr indent="0" marL="0">
-              <a:spcAft>
-                <a:spcPts val="600"/>
-              </a:spcAft>
-              <a:buNone/>
-            </a:pPr>
-            <a:r>
-              <a:rPr lang="en-US" sz="1500" dirty="0">
-                <a:solidFill>
-                  <a:srgbClr val="888888"/>
-                </a:solidFill>
-              </a:rPr>
-              <a:t>- sum-over-sum magnitude recovery (does the term carry signal?) + leave-one-out Kendall's τ-b (does removing it reshuffle rankings?).</a:t>
-            </a:r>
-            <a:endParaRPr lang="en-US" sz="1500" dirty="0"/>
+            <a:pPr algn="ctr" indent="0" marL="0">
+              <a:buNone/>
+            </a:pPr>
+            <a:r>
+              <a:rPr lang="en-US" sz="3600" b="1" dirty="0">
+                <a:solidFill>
+                  <a:srgbClr val="1A1A1A"/>
+                </a:solidFill>
+              </a:rPr>
+              <a:t>Experiment 2: Is the process score reliable?</a:t>
+            </a:r>
+            <a:endParaRPr lang="en-US" sz="3600" dirty="0"/>
           </a:p>
         </p:txBody>
       </p:sp>
@@ -11762,7 +11805,7 @@
                   <a:srgbClr val="000000"/>
                 </a:solidFill>
               </a:rPr>
-              <a:t>Score is locally robust</a:t>
+              <a:t>Is the process score reliable?</a:t>
             </a:r>
             <a:endParaRPr lang="en-US" sz="2800" dirty="0"/>
           </a:p>
@@ -11820,7 +11863,7 @@
                   <a:srgbClr val="000000"/>
                 </a:solidFill>
               </a:rPr>
-              <a:t>Single-knob: 96.5% top-1 preserved </a:t>
+              <a:t>Two perturbation sweeps </a:t>
             </a:r>
             <a:pPr indent="0" marL="0">
               <a:spcAft>
@@ -11834,7 +11877,7 @@
                   <a:srgbClr val="888888"/>
                 </a:solidFill>
               </a:rPr>
-              <a:t>- top-ranked DP rarely changes under any one-weight perturbation. Only 1.8% of cases are clamp-frozen, so this is genuine response - not a clamp artefact.</a:t>
+              <a:t>- single-knob (one weight scaled ×0.1 to ×10) + multi-knob Monte Carlo (200 samples, σ = ln 2, so ~×0.25 to ×4 of production).</a:t>
             </a:r>
             <a:endParaRPr lang="en-US" sz="1500" dirty="0"/>
           </a:p>
@@ -11852,7 +11895,7 @@
                   <a:srgbClr val="000000"/>
                 </a:solidFill>
               </a:rPr>
-              <a:t>Multi-knob: 84.6% top-1 preserved (τ-b = 0.586) </a:t>
+              <a:t>Stability metrics </a:t>
             </a:r>
             <a:pPr indent="0" marL="0">
               <a:spcAft>
@@ -11866,7 +11909,7 @@
                   <a:srgbClr val="888888"/>
                 </a:solidFill>
               </a:rPr>
-              <a:t>- when all weights move at once, top-1 holds in ~85% of cases and ~79% of pairs still rank in the same order. Meaningful correlation, not full preservation.</a:t>
+              <a:t>- top-1 hit rate (does the top-ranked DP stay on top?) + Kendall's τ-b on per-session rankings.</a:t>
             </a:r>
             <a:endParaRPr lang="en-US" sz="1500" dirty="0"/>
           </a:p>
@@ -11902,7 +11945,7 @@
                   <a:srgbClr val="000000"/>
                 </a:solidFill>
               </a:rPr>
-              <a:t>Length is the rank-carrier (LOO τ-b = 0.527) </a:t>
+              <a:t>Process-side ablation </a:t>
             </a:r>
             <a:pPr indent="0" marL="0">
               <a:spcAft>
@@ -11916,7 +11959,7 @@
                   <a:srgbClr val="888888"/>
                 </a:solidFill>
               </a:rPr>
-              <a:t>- removing length reshuffles the per-session ranking more than removing any other process term - the most influential term.</a:t>
+              <a:t>- enumerate all 2⁷ = 128 subsets of the 7 process weights → 5,760 cases per session set.</a:t>
             </a:r>
             <a:endParaRPr lang="en-US" sz="1500" dirty="0"/>
           </a:p>
@@ -11934,7 +11977,7 @@
                   <a:srgbClr val="000000"/>
                 </a:solidFill>
               </a:rPr>
-              <a:t>Cleanliness sub-weights: ≤ 0.9% top-1 disruption </a:t>
+              <a:t>Recovery metrics </a:t>
             </a:r>
             <a:pPr indent="0" marL="0">
               <a:spcAft>
@@ -11948,7 +11991,7 @@
                   <a:srgbClr val="888888"/>
                 </a:solidFill>
               </a:rPr>
-              <a:t>- perturbing any single one of the 6 cleanliness signals barely shifts the ranking (~10× less than process weights), so equal-weights for the sub-signals is defensible.</a:t>
+              <a:t>- sum-over-sum magnitude recovery (does the term carry signal?) + leave-one-out Kendall's τ-b (does removing it reshuffle rankings?).</a:t>
             </a:r>
             <a:endParaRPr lang="en-US" sz="1500" dirty="0"/>
           </a:p>
@@ -11987,8 +12030,8 @@
         </p:nvSpPr>
         <p:spPr>
           <a:xfrm>
-            <a:off x="457200" y="2011680"/>
-            <a:ext cx="8229600" cy="1097280"/>
+            <a:off x="457200" y="274320"/>
+            <a:ext cx="8229600" cy="640080"/>
           </a:xfrm>
           <a:prstGeom prst="rect">
             <a:avLst/>
@@ -12000,18 +12043,204 @@
           <a:bodyPr wrap="square" lIns="0" tIns="0" rIns="0" bIns="0" rtlCol="0" anchor="ctr"/>
           <a:lstStyle/>
           <a:p>
-            <a:pPr algn="ctr" indent="0" marL="0">
-              <a:buNone/>
-            </a:pPr>
-            <a:r>
-              <a:rPr lang="en-US" sz="3200" b="1" dirty="0">
-                <a:solidFill>
-                  <a:srgbClr val="1A1A1A"/>
-                </a:solidFill>
-              </a:rPr>
-              <a:t>Experiment 3: Does feedback change developer behaviour?</a:t>
-            </a:r>
-            <a:endParaRPr lang="en-US" sz="3200" dirty="0"/>
+            <a:pPr indent="0" marL="0">
+              <a:buNone/>
+            </a:pPr>
+            <a:r>
+              <a:rPr lang="en-US" sz="2800" b="1" dirty="0">
+                <a:solidFill>
+                  <a:srgbClr val="000000"/>
+                </a:solidFill>
+              </a:rPr>
+              <a:t>Score is locally robust</a:t>
+            </a:r>
+            <a:endParaRPr lang="en-US" sz="2800" dirty="0"/>
+          </a:p>
+        </p:txBody>
+      </p:sp>
+      <p:sp>
+        <p:nvSpPr>
+          <p:cNvPr id="3" name="Text 1"/>
+          <p:cNvSpPr/>
+          <p:nvPr/>
+        </p:nvSpPr>
+        <p:spPr>
+          <a:xfrm>
+            <a:off x="457200" y="1188720"/>
+            <a:ext cx="8229600" cy="3657600"/>
+          </a:xfrm>
+          <a:prstGeom prst="rect">
+            <a:avLst/>
+          </a:prstGeom>
+          <a:noFill/>
+          <a:ln/>
+        </p:spPr>
+        <p:txBody>
+          <a:bodyPr wrap="square" rtlCol="0" anchor="t"/>
+          <a:lstStyle/>
+          <a:p>
+            <a:pPr marL="342900" indent="-342900">
+              <a:spcAft>
+                <a:spcPts val="600"/>
+              </a:spcAft>
+              <a:buSzPct val="100000"/>
+              <a:buChar char="•"/>
+            </a:pPr>
+            <a:r>
+              <a:rPr lang="en-US" sz="1500" b="1" dirty="0">
+                <a:solidFill>
+                  <a:srgbClr val="000000"/>
+                </a:solidFill>
+              </a:rPr>
+              <a:t>How stable is the score?</a:t>
+            </a:r>
+            <a:endParaRPr lang="en-US" sz="1500" dirty="0"/>
+          </a:p>
+          <a:p>
+            <a:pPr lvl="1" marL="762000" indent="-381000">
+              <a:spcAft>
+                <a:spcPts val="600"/>
+              </a:spcAft>
+              <a:buSzPct val="100000"/>
+              <a:buChar char="•"/>
+            </a:pPr>
+            <a:r>
+              <a:rPr lang="en-US" sz="1500" dirty="0">
+                <a:solidFill>
+                  <a:srgbClr val="000000"/>
+                </a:solidFill>
+              </a:rPr>
+              <a:t>Single-knob: 96.5% top-1 preserved </a:t>
+            </a:r>
+            <a:pPr indent="0" marL="0">
+              <a:spcAft>
+                <a:spcPts val="600"/>
+              </a:spcAft>
+              <a:buNone/>
+            </a:pPr>
+            <a:r>
+              <a:rPr lang="en-US" sz="1500" dirty="0">
+                <a:solidFill>
+                  <a:srgbClr val="888888"/>
+                </a:solidFill>
+              </a:rPr>
+              <a:t>- top-ranked DP rarely changes under any one-weight perturbation. Only 1.8% of cases are clamp-frozen, so this is genuine response - not a clamp artefact.</a:t>
+            </a:r>
+            <a:endParaRPr lang="en-US" sz="1500" dirty="0"/>
+          </a:p>
+          <a:p>
+            <a:pPr lvl="1" marL="762000" indent="-381000">
+              <a:spcAft>
+                <a:spcPts val="1800"/>
+              </a:spcAft>
+              <a:buSzPct val="100000"/>
+              <a:buChar char="•"/>
+            </a:pPr>
+            <a:r>
+              <a:rPr lang="en-US" sz="1500" dirty="0">
+                <a:solidFill>
+                  <a:srgbClr val="000000"/>
+                </a:solidFill>
+              </a:rPr>
+              <a:t>Multi-knob: 84.6% top-1 preserved (τ-b = 0.586) </a:t>
+            </a:r>
+            <a:pPr indent="0" marL="0">
+              <a:spcAft>
+                <a:spcPts val="1800"/>
+              </a:spcAft>
+              <a:buNone/>
+            </a:pPr>
+            <a:r>
+              <a:rPr lang="en-US" sz="1500" dirty="0">
+                <a:solidFill>
+                  <a:srgbClr val="888888"/>
+                </a:solidFill>
+              </a:rPr>
+              <a:t>- when all weights move at once, top-1 holds in ~85% of cases and ~79% of pairs still rank in the same order. Meaningful correlation, not full preservation.</a:t>
+            </a:r>
+            <a:endParaRPr lang="en-US" sz="1500" dirty="0"/>
+          </a:p>
+          <a:p>
+            <a:pPr marL="342900" indent="-342900">
+              <a:spcAft>
+                <a:spcPts val="600"/>
+              </a:spcAft>
+              <a:buSzPct val="100000"/>
+              <a:buChar char="•"/>
+            </a:pPr>
+            <a:r>
+              <a:rPr lang="en-US" sz="1500" b="1" dirty="0">
+                <a:solidFill>
+                  <a:srgbClr val="000000"/>
+                </a:solidFill>
+              </a:rPr>
+              <a:t>Does every component of the process score hold weight?</a:t>
+            </a:r>
+            <a:endParaRPr lang="en-US" sz="1500" dirty="0"/>
+          </a:p>
+          <a:p>
+            <a:pPr lvl="1" marL="762000" indent="-381000">
+              <a:spcAft>
+                <a:spcPts val="600"/>
+              </a:spcAft>
+              <a:buSzPct val="100000"/>
+              <a:buChar char="•"/>
+            </a:pPr>
+            <a:r>
+              <a:rPr lang="en-US" sz="1500" dirty="0">
+                <a:solidFill>
+                  <a:srgbClr val="000000"/>
+                </a:solidFill>
+              </a:rPr>
+              <a:t>Length is the rank-carrier (LOO τ-b = 0.527) </a:t>
+            </a:r>
+            <a:pPr indent="0" marL="0">
+              <a:spcAft>
+                <a:spcPts val="600"/>
+              </a:spcAft>
+              <a:buNone/>
+            </a:pPr>
+            <a:r>
+              <a:rPr lang="en-US" sz="1500" dirty="0">
+                <a:solidFill>
+                  <a:srgbClr val="888888"/>
+                </a:solidFill>
+              </a:rPr>
+              <a:t>- removing length reshuffles the per-session ranking more than removing any other process term - the most influential term.</a:t>
+            </a:r>
+            <a:endParaRPr lang="en-US" sz="1500" dirty="0"/>
+          </a:p>
+          <a:p>
+            <a:pPr lvl="1" marL="762000" indent="-381000">
+              <a:spcAft>
+                <a:spcPts val="600"/>
+              </a:spcAft>
+              <a:buSzPct val="100000"/>
+              <a:buChar char="•"/>
+            </a:pPr>
+            <a:r>
+              <a:rPr lang="en-US" sz="1500" dirty="0">
+                <a:solidFill>
+                  <a:srgbClr val="000000"/>
+                </a:solidFill>
+              </a:rPr>
+              <a:t>Cleanliness sub-weights: ≤ 0.9% top-1 disruption </a:t>
+            </a:r>
+            <a:pPr indent="0" marL="0">
+              <a:spcAft>
+                <a:spcPts val="600"/>
+              </a:spcAft>
+              <a:buNone/>
+            </a:pPr>
+            <a:r>
+              <a:rPr lang="en-US" sz="1500" dirty="0">
+                <a:solidFill>
+                  <a:srgbClr val="888888"/>
+                </a:solidFill>
+              </a:rPr>
+              <a:t>- perturbing any single one of the 6 cleanliness signals barely shifts the ranking (~10× less than process weights), so equal-weights for the sub-signals is defensible.</a:t>
+            </a:r>
+            <a:endParaRPr lang="en-US" sz="1500" dirty="0"/>
           </a:p>
         </p:txBody>
       </p:sp>
@@ -12048,6 +12277,67 @@
         </p:nvSpPr>
         <p:spPr>
           <a:xfrm>
+            <a:off x="457200" y="2011680"/>
+            <a:ext cx="8229600" cy="1097280"/>
+          </a:xfrm>
+          <a:prstGeom prst="rect">
+            <a:avLst/>
+          </a:prstGeom>
+          <a:noFill/>
+          <a:ln/>
+        </p:spPr>
+        <p:txBody>
+          <a:bodyPr wrap="square" lIns="0" tIns="0" rIns="0" bIns="0" rtlCol="0" anchor="ctr"/>
+          <a:lstStyle/>
+          <a:p>
+            <a:pPr algn="ctr" indent="0" marL="0">
+              <a:buNone/>
+            </a:pPr>
+            <a:r>
+              <a:rPr lang="en-US" sz="3200" b="1" dirty="0">
+                <a:solidFill>
+                  <a:srgbClr val="1A1A1A"/>
+                </a:solidFill>
+              </a:rPr>
+              <a:t>Experiment 3: Does feedback change developer behaviour?</a:t>
+            </a:r>
+            <a:endParaRPr lang="en-US" sz="3200" dirty="0"/>
+          </a:p>
+        </p:txBody>
+      </p:sp>
+    </p:spTree>
+  </p:cSld>
+  <p:clrMapOvr>
+    <a:masterClrMapping/>
+  </p:clrMapOvr>
+</p:sld>
+</file>
+
+<file path=ppt/slides/slide23.xml><?xml version="1.0" encoding="utf-8"?>
+<p:sld xmlns:a="http://schemas.openxmlformats.org/drawingml/2006/main" xmlns:r="http://schemas.openxmlformats.org/officeDocument/2006/relationships" xmlns:p="http://schemas.openxmlformats.org/presentationml/2006/main">
+  <p:cSld name="Slide 23">
+    <p:spTree>
+      <p:nvGrpSpPr>
+        <p:cNvPr id="1" name=""/>
+        <p:cNvGrpSpPr/>
+        <p:nvPr/>
+      </p:nvGrpSpPr>
+      <p:grpSpPr>
+        <a:xfrm>
+          <a:off x="0" y="0"/>
+          <a:ext cx="0" cy="0"/>
+          <a:chOff x="0" y="0"/>
+          <a:chExt cx="0" cy="0"/>
+        </a:xfrm>
+      </p:grpSpPr>
+      <p:sp>
+        <p:nvSpPr>
+          <p:cNvPr id="2" name="Text 0"/>
+          <p:cNvSpPr/>
+          <p:nvPr/>
+        </p:nvSpPr>
+        <p:spPr>
+          <a:xfrm>
             <a:off x="457200" y="274320"/>
             <a:ext cx="8229600" cy="640080"/>
           </a:xfrm>
@@ -12306,9 +12596,9 @@
 </p:sld>
 </file>
 
-<file path=ppt/slides/slide23.xml><?xml version="1.0" encoding="utf-8"?>
+<file path=ppt/slides/slide24.xml><?xml version="1.0" encoding="utf-8"?>
 <p:sld xmlns:a="http://schemas.openxmlformats.org/drawingml/2006/main" xmlns:r="http://schemas.openxmlformats.org/officeDocument/2006/relationships" xmlns:p="http://schemas.openxmlformats.org/presentationml/2006/main">
-  <p:cSld name="Slide 23">
+  <p:cSld name="Slide 24">
     <p:spTree>
       <p:nvGrpSpPr>
         <p:cNvPr id="1" name=""/>
@@ -12518,202 +12808,6 @@
 </p:sld>
 </file>
 
-<file path=ppt/slides/slide24.xml><?xml version="1.0" encoding="utf-8"?>
-<p:sld xmlns:a="http://schemas.openxmlformats.org/drawingml/2006/main" xmlns:r="http://schemas.openxmlformats.org/officeDocument/2006/relationships" xmlns:p="http://schemas.openxmlformats.org/presentationml/2006/main">
-  <p:cSld name="Slide 24">
-    <p:spTree>
-      <p:nvGrpSpPr>
-        <p:cNvPr id="1" name=""/>
-        <p:cNvGrpSpPr/>
-        <p:nvPr/>
-      </p:nvGrpSpPr>
-      <p:grpSpPr>
-        <a:xfrm>
-          <a:off x="0" y="0"/>
-          <a:ext cx="0" cy="0"/>
-          <a:chOff x="0" y="0"/>
-          <a:chExt cx="0" cy="0"/>
-        </a:xfrm>
-      </p:grpSpPr>
-      <p:sp>
-        <p:nvSpPr>
-          <p:cNvPr id="2" name="Text 0"/>
-          <p:cNvSpPr/>
-          <p:nvPr/>
-        </p:nvSpPr>
-        <p:spPr>
-          <a:xfrm>
-            <a:off x="457200" y="137160"/>
-            <a:ext cx="8229600" cy="502920"/>
-          </a:xfrm>
-          <a:prstGeom prst="rect">
-            <a:avLst/>
-          </a:prstGeom>
-          <a:noFill/>
-          <a:ln/>
-        </p:spPr>
-        <p:txBody>
-          <a:bodyPr wrap="square" lIns="0" tIns="0" rIns="0" bIns="0" rtlCol="0" anchor="ctr"/>
-          <a:lstStyle/>
-          <a:p>
-            <a:pPr algn="ctr" indent="0" marL="0">
-              <a:buNone/>
-            </a:pPr>
-            <a:r>
-              <a:rPr lang="en-US" sz="2400" b="1" dirty="0">
-                <a:solidFill>
-                  <a:srgbClr val="000000"/>
-                </a:solidFill>
-              </a:rPr>
-              <a:t>Strip the task signal - process discipline emerges</a:t>
-            </a:r>
-            <a:endParaRPr lang="en-US" sz="2400" dirty="0"/>
-          </a:p>
-        </p:txBody>
-      </p:sp>
-      <p:graphicFrame>
-        <p:nvGraphicFramePr>
-          <p:cNvPr id="3" name="Chart 0" descr=""/>
-          <p:cNvGraphicFramePr/>
-          <p:nvPr/>
-        </p:nvGraphicFramePr>
-        <p:xfrm>
-          <a:off x="1554480" y="777240"/>
-          <a:ext cx="6035040" cy="3108960"/>
-        </p:xfrm>
-        <a:graphic xmlns:a="http://schemas.openxmlformats.org/drawingml/2006/main">
-          <a:graphicData uri="http://schemas.openxmlformats.org/drawingml/2006/chart">
-            <c:chart xmlns:c="http://schemas.openxmlformats.org/drawingml/2006/chart" r:id="rId1"/>
-          </a:graphicData>
-        </a:graphic>
-      </p:graphicFrame>
-      <p:sp>
-        <p:nvSpPr>
-          <p:cNvPr id="4" name="Text 1"/>
-          <p:cNvSpPr/>
-          <p:nvPr/>
-        </p:nvSpPr>
-        <p:spPr>
-          <a:xfrm>
-            <a:off x="457200" y="4069080"/>
-            <a:ext cx="8229600" cy="868680"/>
-          </a:xfrm>
-          <a:prstGeom prst="rect">
-            <a:avLst/>
-          </a:prstGeom>
-          <a:noFill/>
-          <a:ln/>
-        </p:spPr>
-        <p:txBody>
-          <a:bodyPr wrap="square" lIns="50800" tIns="50800" rIns="50800" bIns="50800" rtlCol="0" anchor="t"/>
-          <a:lstStyle/>
-          <a:p>
-            <a:pPr algn="ctr" indent="0" marL="0">
-              <a:buNone/>
-            </a:pPr>
-            <a:r>
-              <a:rPr lang="en-US" sz="1200" dirty="0">
-                <a:solidFill>
-                  <a:srgbClr val="000000"/>
-                </a:solidFill>
-              </a:rPr>
-              <a:t>Once cleanliness gain is removed, the score reflects </a:t>
-            </a:r>
-            <a:pPr algn="ctr" indent="0" marL="0">
-              <a:buNone/>
-            </a:pPr>
-            <a:r>
-              <a:rPr lang="en-US" sz="1200" i="1" dirty="0">
-                <a:solidFill>
-                  <a:srgbClr val="000000"/>
-                </a:solidFill>
-              </a:rPr>
-              <a:t>how disciplined the process was</a:t>
-            </a:r>
-            <a:pPr algn="ctr" indent="0" marL="0">
-              <a:buNone/>
-            </a:pPr>
-            <a:r>
-              <a:rPr lang="en-US" sz="1200" dirty="0">
-                <a:solidFill>
-                  <a:srgbClr val="000000"/>
-                </a:solidFill>
-              </a:rPr>
-              <a:t> - tests run, IDE refactorings used, commits at sensible points. The feedback group climbs </a:t>
-            </a:r>
-            <a:pPr algn="ctr" indent="0" marL="0">
-              <a:buNone/>
-            </a:pPr>
-            <a:r>
-              <a:rPr lang="en-US" sz="1200" b="1" dirty="0">
-                <a:solidFill>
-                  <a:srgbClr val="1F3F6F"/>
-                </a:solidFill>
-              </a:rPr>
-              <a:t>+22.3</a:t>
-            </a:r>
-            <a:pPr algn="ctr" indent="0" marL="0">
-              <a:buNone/>
-            </a:pPr>
-            <a:r>
-              <a:rPr lang="en-US" sz="1200" dirty="0">
-                <a:solidFill>
-                  <a:srgbClr val="000000"/>
-                </a:solidFill>
-              </a:rPr>
-              <a:t> across the arc; the baseline group moves </a:t>
-            </a:r>
-            <a:pPr algn="ctr" indent="0" marL="0">
-              <a:buNone/>
-            </a:pPr>
-            <a:r>
-              <a:rPr lang="en-US" sz="1200" b="1" dirty="0">
-                <a:solidFill>
-                  <a:srgbClr val="B25500"/>
-                </a:solidFill>
-              </a:rPr>
-              <a:t>−2.0</a:t>
-            </a:r>
-            <a:pPr algn="ctr" indent="0" marL="0">
-              <a:spcAft>
-                <a:spcPts val="600"/>
-              </a:spcAft>
-              <a:buNone/>
-            </a:pPr>
-            <a:r>
-              <a:rPr lang="en-US" sz="1200" dirty="0">
-                <a:solidFill>
-                  <a:srgbClr val="000000"/>
-                </a:solidFill>
-              </a:rPr>
-              <a:t>.</a:t>
-            </a:r>
-            <a:endParaRPr lang="en-US" sz="1200" dirty="0"/>
-          </a:p>
-          <a:p>
-            <a:pPr algn="ctr" indent="0" marL="0">
-              <a:buNone/>
-            </a:pPr>
-            <a:r>
-              <a:rPr lang="en-US" sz="1200" i="1" dirty="0">
-                <a:solidFill>
-                  <a:srgbClr val="888888"/>
-                </a:solidFill>
-              </a:rPr>
-              <a:t>n = 3 vs n = 2 - directional finding, not a hypothesis test.</a:t>
-            </a:r>
-            <a:endParaRPr lang="en-US" sz="1200" dirty="0"/>
-          </a:p>
-        </p:txBody>
-      </p:sp>
-    </p:spTree>
-  </p:cSld>
-  <p:clrMapOvr>
-    <a:masterClrMapping/>
-  </p:clrMapOvr>
-</p:sld>
-</file>
-
 <file path=ppt/slides/slide25.xml><?xml version="1.0" encoding="utf-8"?>
 <p:sld xmlns:a="http://schemas.openxmlformats.org/drawingml/2006/main" xmlns:r="http://schemas.openxmlformats.org/officeDocument/2006/relationships" xmlns:p="http://schemas.openxmlformats.org/presentationml/2006/main">
   <p:cSld name="Slide 25">
@@ -12739,8 +12833,8 @@
         </p:nvSpPr>
         <p:spPr>
           <a:xfrm>
-            <a:off x="457200" y="2011680"/>
-            <a:ext cx="8229600" cy="1097280"/>
+            <a:off x="457200" y="137160"/>
+            <a:ext cx="8229600" cy="502920"/>
           </a:xfrm>
           <a:prstGeom prst="rect">
             <a:avLst/>
@@ -12756,14 +12850,149 @@
               <a:buNone/>
             </a:pPr>
             <a:r>
-              <a:rPr lang="en-US" sz="3600" b="1" dirty="0">
-                <a:solidFill>
-                  <a:srgbClr val="1A1A1A"/>
-                </a:solidFill>
-              </a:rPr>
-              <a:t>Extension: Agent Traces</a:t>
-            </a:r>
-            <a:endParaRPr lang="en-US" sz="3600" dirty="0"/>
+              <a:rPr lang="en-US" sz="2400" b="1" dirty="0">
+                <a:solidFill>
+                  <a:srgbClr val="000000"/>
+                </a:solidFill>
+              </a:rPr>
+              <a:t>Strip the task signal - process discipline emerges</a:t>
+            </a:r>
+            <a:endParaRPr lang="en-US" sz="2400" dirty="0"/>
+          </a:p>
+        </p:txBody>
+      </p:sp>
+      <p:graphicFrame>
+        <p:nvGraphicFramePr>
+          <p:cNvPr id="3" name="Chart 0" descr=""/>
+          <p:cNvGraphicFramePr/>
+          <p:nvPr/>
+        </p:nvGraphicFramePr>
+        <p:xfrm>
+          <a:off x="1554480" y="777240"/>
+          <a:ext cx="6035040" cy="3108960"/>
+        </p:xfrm>
+        <a:graphic xmlns:a="http://schemas.openxmlformats.org/drawingml/2006/main">
+          <a:graphicData uri="http://schemas.openxmlformats.org/drawingml/2006/chart">
+            <c:chart xmlns:c="http://schemas.openxmlformats.org/drawingml/2006/chart" r:id="rId1"/>
+          </a:graphicData>
+        </a:graphic>
+      </p:graphicFrame>
+      <p:sp>
+        <p:nvSpPr>
+          <p:cNvPr id="4" name="Text 1"/>
+          <p:cNvSpPr/>
+          <p:nvPr/>
+        </p:nvSpPr>
+        <p:spPr>
+          <a:xfrm>
+            <a:off x="457200" y="4069080"/>
+            <a:ext cx="8229600" cy="868680"/>
+          </a:xfrm>
+          <a:prstGeom prst="rect">
+            <a:avLst/>
+          </a:prstGeom>
+          <a:noFill/>
+          <a:ln/>
+        </p:spPr>
+        <p:txBody>
+          <a:bodyPr wrap="square" lIns="50800" tIns="50800" rIns="50800" bIns="50800" rtlCol="0" anchor="t"/>
+          <a:lstStyle/>
+          <a:p>
+            <a:pPr algn="ctr" indent="0" marL="0">
+              <a:buNone/>
+            </a:pPr>
+            <a:r>
+              <a:rPr lang="en-US" sz="1200" dirty="0">
+                <a:solidFill>
+                  <a:srgbClr val="000000"/>
+                </a:solidFill>
+              </a:rPr>
+              <a:t>Once cleanliness gain is removed, the score reflects </a:t>
+            </a:r>
+            <a:pPr algn="ctr" indent="0" marL="0">
+              <a:buNone/>
+            </a:pPr>
+            <a:r>
+              <a:rPr lang="en-US" sz="1200" i="1" dirty="0">
+                <a:solidFill>
+                  <a:srgbClr val="000000"/>
+                </a:solidFill>
+              </a:rPr>
+              <a:t>how disciplined the process was</a:t>
+            </a:r>
+            <a:pPr algn="ctr" indent="0" marL="0">
+              <a:buNone/>
+            </a:pPr>
+            <a:r>
+              <a:rPr lang="en-US" sz="1200" dirty="0">
+                <a:solidFill>
+                  <a:srgbClr val="000000"/>
+                </a:solidFill>
+              </a:rPr>
+              <a:t> - tests run, IDE refactorings used, commits at sensible points. The feedback group climbs </a:t>
+            </a:r>
+            <a:pPr algn="ctr" indent="0" marL="0">
+              <a:buNone/>
+            </a:pPr>
+            <a:r>
+              <a:rPr lang="en-US" sz="1200" b="1" dirty="0">
+                <a:solidFill>
+                  <a:srgbClr val="1F3F6F"/>
+                </a:solidFill>
+              </a:rPr>
+              <a:t>+22.3</a:t>
+            </a:r>
+            <a:pPr algn="ctr" indent="0" marL="0">
+              <a:buNone/>
+            </a:pPr>
+            <a:r>
+              <a:rPr lang="en-US" sz="1200" dirty="0">
+                <a:solidFill>
+                  <a:srgbClr val="000000"/>
+                </a:solidFill>
+              </a:rPr>
+              <a:t> across the arc; the baseline group moves </a:t>
+            </a:r>
+            <a:pPr algn="ctr" indent="0" marL="0">
+              <a:buNone/>
+            </a:pPr>
+            <a:r>
+              <a:rPr lang="en-US" sz="1200" b="1" dirty="0">
+                <a:solidFill>
+                  <a:srgbClr val="B25500"/>
+                </a:solidFill>
+              </a:rPr>
+              <a:t>−2.0</a:t>
+            </a:r>
+            <a:pPr algn="ctr" indent="0" marL="0">
+              <a:spcAft>
+                <a:spcPts val="600"/>
+              </a:spcAft>
+              <a:buNone/>
+            </a:pPr>
+            <a:r>
+              <a:rPr lang="en-US" sz="1200" dirty="0">
+                <a:solidFill>
+                  <a:srgbClr val="000000"/>
+                </a:solidFill>
+              </a:rPr>
+              <a:t>.</a:t>
+            </a:r>
+            <a:endParaRPr lang="en-US" sz="1200" dirty="0"/>
+          </a:p>
+          <a:p>
+            <a:pPr algn="ctr" indent="0" marL="0">
+              <a:buNone/>
+            </a:pPr>
+            <a:r>
+              <a:rPr lang="en-US" sz="1200" i="1" dirty="0">
+                <a:solidFill>
+                  <a:srgbClr val="888888"/>
+                </a:solidFill>
+              </a:rPr>
+              <a:t>n = 3 vs n = 2 - directional finding, not a hypothesis test.</a:t>
+            </a:r>
+            <a:endParaRPr lang="en-US" sz="1200" dirty="0"/>
           </a:p>
         </p:txBody>
       </p:sp>
@@ -12800,6 +13029,67 @@
         </p:nvSpPr>
         <p:spPr>
           <a:xfrm>
+            <a:off x="457200" y="2011680"/>
+            <a:ext cx="8229600" cy="1097280"/>
+          </a:xfrm>
+          <a:prstGeom prst="rect">
+            <a:avLst/>
+          </a:prstGeom>
+          <a:noFill/>
+          <a:ln/>
+        </p:spPr>
+        <p:txBody>
+          <a:bodyPr wrap="square" lIns="0" tIns="0" rIns="0" bIns="0" rtlCol="0" anchor="ctr"/>
+          <a:lstStyle/>
+          <a:p>
+            <a:pPr algn="ctr" indent="0" marL="0">
+              <a:buNone/>
+            </a:pPr>
+            <a:r>
+              <a:rPr lang="en-US" sz="3600" b="1" dirty="0">
+                <a:solidFill>
+                  <a:srgbClr val="1A1A1A"/>
+                </a:solidFill>
+              </a:rPr>
+              <a:t>Extension: Agent Traces</a:t>
+            </a:r>
+            <a:endParaRPr lang="en-US" sz="3600" dirty="0"/>
+          </a:p>
+        </p:txBody>
+      </p:sp>
+    </p:spTree>
+  </p:cSld>
+  <p:clrMapOvr>
+    <a:masterClrMapping/>
+  </p:clrMapOvr>
+</p:sld>
+</file>
+
+<file path=ppt/slides/slide27.xml><?xml version="1.0" encoding="utf-8"?>
+<p:sld xmlns:a="http://schemas.openxmlformats.org/drawingml/2006/main" xmlns:r="http://schemas.openxmlformats.org/officeDocument/2006/relationships" xmlns:p="http://schemas.openxmlformats.org/presentationml/2006/main">
+  <p:cSld name="Slide 27">
+    <p:spTree>
+      <p:nvGrpSpPr>
+        <p:cNvPr id="1" name=""/>
+        <p:cNvGrpSpPr/>
+        <p:nvPr/>
+      </p:nvGrpSpPr>
+      <p:grpSpPr>
+        <a:xfrm>
+          <a:off x="0" y="0"/>
+          <a:ext cx="0" cy="0"/>
+          <a:chOff x="0" y="0"/>
+          <a:chExt cx="0" cy="0"/>
+        </a:xfrm>
+      </p:grpSpPr>
+      <p:sp>
+        <p:nvSpPr>
+          <p:cNvPr id="2" name="Text 0"/>
+          <p:cNvSpPr/>
+          <p:nvPr/>
+        </p:nvSpPr>
+        <p:spPr>
+          <a:xfrm>
             <a:off x="457200" y="137160"/>
             <a:ext cx="8229600" cy="457200"/>
           </a:xfrm>
@@ -12882,7 +13172,7 @@
       </p:graphicFrame>
       <p:graphicFrame>
         <p:nvGraphicFramePr>
-          <p:cNvPr id="27" name="Table 0"/>
+          <p:cNvPr id="28" name="Table 0"/>
           <p:cNvGraphicFramePr>
             <a:graphicFrameLocks noGrp="1"/>
           </p:cNvGraphicFramePr>
@@ -13661,9 +13951,9 @@
 </p:sld>
 </file>
 
-<file path=ppt/slides/slide27.xml><?xml version="1.0" encoding="utf-8"?>
+<file path=ppt/slides/slide28.xml><?xml version="1.0" encoding="utf-8"?>
 <p:sld xmlns:a="http://schemas.openxmlformats.org/drawingml/2006/main" xmlns:r="http://schemas.openxmlformats.org/officeDocument/2006/relationships" xmlns:p="http://schemas.openxmlformats.org/presentationml/2006/main">
-  <p:cSld name="Slide 27">
+  <p:cSld name="Slide 28">
     <p:spTree>
       <p:nvGrpSpPr>
         <p:cNvPr id="1" name=""/>
@@ -13877,7 +14167,7 @@
         </p:nvSpPr>
         <p:spPr>
           <a:xfrm>
-            <a:off x="457200" y="274320"/>
+            <a:off x="457200" y="640080"/>
             <a:ext cx="8229600" cy="640080"/>
           </a:xfrm>
           <a:prstGeom prst="rect">
@@ -13899,7 +14189,7 @@
                   <a:srgbClr val="000000"/>
                 </a:solidFill>
               </a:rPr>
-              <a:t>What's missing in prior work</a:t>
+              <a:t>Evaluating the refactoring process: what's missing in prior work</a:t>
             </a:r>
             <a:endParaRPr lang="en-US" sz="2800" dirty="0"/>
           </a:p>
@@ -13913,7 +14203,7 @@
         </p:nvSpPr>
         <p:spPr>
           <a:xfrm>
-            <a:off x="457200" y="1188720"/>
+            <a:off x="457200" y="1783080"/>
             <a:ext cx="8229600" cy="3657600"/>
           </a:xfrm>
           <a:prstGeom prst="rect">
@@ -13934,12 +14224,26 @@
               <a:buChar char="•"/>
             </a:pPr>
             <a:r>
+              <a:rPr lang="en-US" sz="1600" b="1" dirty="0">
+                <a:solidFill>
+                  <a:srgbClr val="000000"/>
+                </a:solidFill>
+              </a:rPr>
+              <a:t>Endpoint quality metrics (CK, smells, readability):</a:t>
+            </a:r>
+            <a:pPr indent="0" marL="0">
+              <a:spcAft>
+                <a:spcPts val="600"/>
+              </a:spcAft>
+              <a:buNone/>
+            </a:pPr>
+            <a:r>
               <a:rPr lang="en-US" sz="1600" dirty="0">
                 <a:solidFill>
                   <a:srgbClr val="000000"/>
                 </a:solidFill>
               </a:rPr>
-              <a:t>Endpoint quality metrics (CK, smells, readability): compare before vs after, ignore the path taken.</a:t>
+              <a:t> compare before vs after, ignore the path taken.</a:t>
             </a:r>
             <a:endParaRPr lang="en-US" sz="1600" dirty="0"/>
           </a:p>
@@ -13952,12 +14256,26 @@
               <a:buChar char="•"/>
             </a:pPr>
             <a:r>
+              <a:rPr lang="en-US" sz="1600" b="1" dirty="0">
+                <a:solidFill>
+                  <a:srgbClr val="000000"/>
+                </a:solidFill>
+              </a:rPr>
+              <a:t>Refactoring recommenders / sequence generators</a:t>
+            </a:r>
+            <a:pPr indent="0" marL="0">
+              <a:spcAft>
+                <a:spcPts val="600"/>
+              </a:spcAft>
+              <a:buNone/>
+            </a:pPr>
+            <a:r>
               <a:rPr lang="en-US" sz="1600" dirty="0">
                 <a:solidFill>
                   <a:srgbClr val="000000"/>
                 </a:solidFill>
               </a:rPr>
-              <a:t>Refactoring recommenders / sequence generators: produce new sequences, but do not evaluate the one the developer actually walked.</a:t>
+              <a:t>: produce new sequences (typically at small scale), but do not evaluate the one the developer actually walked.</a:t>
             </a:r>
             <a:endParaRPr lang="en-US" sz="1600" dirty="0"/>
           </a:p>
@@ -13970,22 +14288,18 @@
               <a:buChar char="•"/>
             </a:pPr>
             <a:r>
-              <a:rPr lang="en-US" sz="1600" dirty="0">
+              <a:rPr lang="en-US" sz="1600" b="1" dirty="0">
                 <a:solidFill>
                   <a:srgbClr val="000000"/>
                 </a:solidFill>
               </a:rPr>
-              <a:t>Gap: no system scores an arbitrary observed refactoring session against an explicit process-quality metric, and shows where a better path was available.</a:t>
-            </a:r>
-            <a:endParaRPr lang="en-US" sz="1600" dirty="0"/>
-          </a:p>
-          <a:p>
-            <a:pPr marL="342900" indent="-342900">
+              <a:t>Exercise-scoped feedback tools:</a:t>
+            </a:r>
+            <a:pPr indent="0" marL="0">
               <a:spcAft>
                 <a:spcPts val="600"/>
               </a:spcAft>
-              <a:buSzPct val="100000"/>
-              <a:buChar char="•"/>
+              <a:buNone/>
             </a:pPr>
             <a:r>
               <a:rPr lang="en-US" sz="1600" dirty="0">
@@ -13993,7 +14307,7 @@
                   <a:srgbClr val="000000"/>
                 </a:solidFill>
               </a:rPr>
-              <a:t>This is the gap the project fills.</a:t>
+              <a:t> one or two look for explicit events inside predefined exercises - but don't generalise to arbitrary refactoring sessions.</a:t>
             </a:r>
             <a:endParaRPr lang="en-US" sz="1600" dirty="0"/>
           </a:p>
@@ -14054,22 +14368,57 @@
                   <a:srgbClr val="000000"/>
                 </a:solidFill>
               </a:rPr>
-              <a:t>Narrowing the design space</a:t>
+              <a:t>Closest Existing Tool...</a:t>
+            </a:r>
+            <a:pPr indent="0" marL="0">
+              <a:buNone/>
+            </a:pPr>
+            <a:r>
+              <a:rPr lang="en-US" sz="2800" b="1" dirty="0">
+                <a:solidFill>
+                  <a:srgbClr val="888888"/>
+                </a:solidFill>
+              </a:rPr>
+              <a:t>  Industrial Logic</a:t>
             </a:r>
             <a:endParaRPr lang="en-US" sz="2800" dirty="0"/>
           </a:p>
         </p:txBody>
       </p:sp>
-      <p:sp>
-        <p:nvSpPr>
-          <p:cNvPr id="3" name="Text 1"/>
+      <p:pic>
+        <p:nvPicPr>
+          <p:cNvPr id="3" name="Image 0" descr="images/industrial-logic-score.png">    </p:cNvPr>
+          <p:cNvPicPr>
+            <a:picLocks noChangeAspect="1"/>
+          </p:cNvPicPr>
+          <p:nvPr/>
+        </p:nvPicPr>
+        <p:blipFill>
+          <a:blip r:embed="rId1"/>
+          <a:stretch>
+            <a:fillRect/>
+          </a:stretch>
+        </p:blipFill>
+        <p:spPr>
+          <a:xfrm>
+            <a:off x="320040" y="1188720"/>
+            <a:ext cx="2743200" cy="2011680"/>
+          </a:xfrm>
+          <a:prstGeom prst="rect">
+            <a:avLst/>
+          </a:prstGeom>
+        </p:spPr>
+      </p:pic>
+      <p:sp>
+        <p:nvSpPr>
+          <p:cNvPr id="4" name="Text 1"/>
           <p:cNvSpPr/>
           <p:nvPr/>
         </p:nvSpPr>
         <p:spPr>
           <a:xfrm>
-            <a:off x="457200" y="1097280"/>
-            <a:ext cx="8229600" cy="457200"/>
+            <a:off x="320040" y="3291840"/>
+            <a:ext cx="2743200" cy="274320"/>
           </a:xfrm>
           <a:prstGeom prst="rect">
             <a:avLst/>
@@ -14081,31 +14430,55 @@
           <a:bodyPr wrap="square" lIns="0" tIns="0" rIns="0" bIns="0" rtlCol="0" anchor="ctr"/>
           <a:lstStyle/>
           <a:p>
-            <a:pPr indent="0" marL="0">
-              <a:buNone/>
-            </a:pPr>
-            <a:r>
-              <a:rPr lang="en-US" sz="1300" i="1" dirty="0">
+            <a:pPr algn="ctr" indent="0" marL="0">
+              <a:buNone/>
+            </a:pPr>
+            <a:r>
+              <a:rPr lang="en-US" sz="1200" i="1" dirty="0">
                 <a:solidFill>
                   <a:srgbClr val="555555"/>
                 </a:solidFill>
               </a:rPr>
-              <a:t>Evaluating refactoring as a process is a wide, mostly-unexplored design space. Four requirements shaped what we built.</a:t>
-            </a:r>
-            <a:endParaRPr lang="en-US" sz="1300" dirty="0"/>
-          </a:p>
-        </p:txBody>
-      </p:sp>
-      <p:sp>
-        <p:nvSpPr>
-          <p:cNvPr id="4" name="Text 2"/>
+              <a:t>Score</a:t>
+            </a:r>
+            <a:endParaRPr lang="en-US" sz="1200" dirty="0"/>
+          </a:p>
+        </p:txBody>
+      </p:sp>
+      <p:pic>
+        <p:nvPicPr>
+          <p:cNvPr id="5" name="Image 1" descr="images/industrial-logic-compilation-tests.png">    </p:cNvPr>
+          <p:cNvPicPr>
+            <a:picLocks noChangeAspect="1"/>
+          </p:cNvPicPr>
+          <p:nvPr/>
+        </p:nvPicPr>
+        <p:blipFill>
+          <a:blip r:embed="rId2"/>
+          <a:stretch>
+            <a:fillRect/>
+          </a:stretch>
+        </p:blipFill>
+        <p:spPr>
+          <a:xfrm>
+            <a:off x="3200400" y="1188720"/>
+            <a:ext cx="2743200" cy="1335024"/>
+          </a:xfrm>
+          <a:prstGeom prst="rect">
+            <a:avLst/>
+          </a:prstGeom>
+        </p:spPr>
+      </p:pic>
+      <p:sp>
+        <p:nvSpPr>
+          <p:cNvPr id="6" name="Text 2"/>
           <p:cNvSpPr/>
           <p:nvPr/>
         </p:nvSpPr>
         <p:spPr>
           <a:xfrm>
-            <a:off x="457200" y="1645920"/>
-            <a:ext cx="8229600" cy="2926080"/>
+            <a:off x="3200400" y="3291840"/>
+            <a:ext cx="2743200" cy="274320"/>
           </a:xfrm>
           <a:prstGeom prst="rect">
             <a:avLst/>
@@ -14114,190 +14487,58 @@
           <a:ln/>
         </p:spPr>
         <p:txBody>
-          <a:bodyPr wrap="square" rtlCol="0" anchor="t"/>
-          <a:lstStyle/>
-          <a:p>
-            <a:pPr marL="342900" indent="-342900">
-              <a:spcAft>
-                <a:spcPts val="600"/>
-              </a:spcAft>
-              <a:buSzPct val="100000"/>
-              <a:buChar char="•"/>
-            </a:pPr>
-            <a:r>
-              <a:rPr lang="en-US" sz="1400" b="1" dirty="0">
-                <a:solidFill>
-                  <a:srgbClr val="000000"/>
-                </a:solidFill>
-              </a:rPr>
-              <a:t>Quantifiable + comparable score </a:t>
-            </a:r>
-            <a:pPr indent="0" marL="0">
-              <a:spcAft>
-                <a:spcPts val="600"/>
-              </a:spcAft>
-              <a:buNone/>
-            </a:pPr>
-            <a:r>
-              <a:rPr lang="en-US" sz="1400" dirty="0">
-                <a:solidFill>
-                  <a:srgbClr val="000000"/>
-                </a:solidFill>
-              </a:rPr>
-              <a:t>- one number per trajectory so sessions can be compared.</a:t>
-            </a:r>
-            <a:pPr indent="0" marL="0">
-              <a:spcAft>
-                <a:spcPts val="600"/>
-              </a:spcAft>
-              <a:buNone/>
-            </a:pPr>
-            <a:r>
-              <a:rPr lang="en-US" sz="1400" dirty="0">
-                <a:solidFill>
-                  <a:srgbClr val="888888"/>
-                </a:solidFill>
-              </a:rPr>
-              <a:t> [1]</a:t>
-            </a:r>
-            <a:endParaRPr lang="en-US" sz="1400" dirty="0"/>
-          </a:p>
-          <a:p>
-            <a:pPr marL="342900" indent="-342900">
-              <a:spcAft>
-                <a:spcPts val="600"/>
-              </a:spcAft>
-              <a:buSzPct val="100000"/>
-              <a:buChar char="•"/>
-            </a:pPr>
-            <a:r>
-              <a:rPr lang="en-US" sz="1400" b="1" dirty="0">
-                <a:solidFill>
-                  <a:srgbClr val="000000"/>
-                </a:solidFill>
-              </a:rPr>
-              <a:t>Seamless, in-workflow capture </a:t>
-            </a:r>
-            <a:pPr indent="0" marL="0">
-              <a:spcAft>
-                <a:spcPts val="600"/>
-              </a:spcAft>
-              <a:buNone/>
-            </a:pPr>
-            <a:r>
-              <a:rPr lang="en-US" sz="1400" dirty="0">
-                <a:solidFill>
-                  <a:srgbClr val="000000"/>
-                </a:solidFill>
-              </a:rPr>
-              <a:t>- zero extra developer effort to use the tool.</a:t>
-            </a:r>
-            <a:pPr indent="0" marL="0">
-              <a:spcAft>
-                <a:spcPts val="600"/>
-              </a:spcAft>
-              <a:buNone/>
-            </a:pPr>
-            <a:r>
-              <a:rPr lang="en-US" sz="1400" dirty="0">
-                <a:solidFill>
-                  <a:srgbClr val="888888"/>
-                </a:solidFill>
-              </a:rPr>
-              <a:t> [2]</a:t>
-            </a:r>
-            <a:endParaRPr lang="en-US" sz="1400" dirty="0"/>
-          </a:p>
-          <a:p>
-            <a:pPr marL="342900" indent="-342900">
-              <a:spcAft>
-                <a:spcPts val="600"/>
-              </a:spcAft>
-              <a:buSzPct val="100000"/>
-              <a:buChar char="•"/>
-            </a:pPr>
-            <a:r>
-              <a:rPr lang="en-US" sz="1400" b="1" dirty="0">
-                <a:solidFill>
-                  <a:srgbClr val="000000"/>
-                </a:solidFill>
-              </a:rPr>
-              <a:t>Actionable, moment-specific feedback </a:t>
-            </a:r>
-            <a:pPr indent="0" marL="0">
-              <a:spcAft>
-                <a:spcPts val="600"/>
-              </a:spcAft>
-              <a:buNone/>
-            </a:pPr>
-            <a:r>
-              <a:rPr lang="en-US" sz="1400" dirty="0">
-                <a:solidFill>
-                  <a:srgbClr val="000000"/>
-                </a:solidFill>
-              </a:rPr>
-              <a:t>- point to a specific moment AND a "what you could have done instead" alternative.</a:t>
-            </a:r>
-            <a:pPr indent="0" marL="0">
-              <a:spcAft>
-                <a:spcPts val="600"/>
-              </a:spcAft>
-              <a:buNone/>
-            </a:pPr>
-            <a:r>
-              <a:rPr lang="en-US" sz="1400" dirty="0">
-                <a:solidFill>
-                  <a:srgbClr val="888888"/>
-                </a:solidFill>
-              </a:rPr>
-              <a:t> [3]</a:t>
-            </a:r>
-            <a:endParaRPr lang="en-US" sz="1400" dirty="0"/>
-          </a:p>
-          <a:p>
-            <a:pPr marL="342900" indent="-342900">
-              <a:spcAft>
-                <a:spcPts val="600"/>
-              </a:spcAft>
-              <a:buSzPct val="100000"/>
-              <a:buChar char="•"/>
-            </a:pPr>
-            <a:r>
-              <a:rPr lang="en-US" sz="1400" b="1" dirty="0">
-                <a:solidFill>
-                  <a:srgbClr val="000000"/>
-                </a:solidFill>
-              </a:rPr>
-              <a:t>Efficient alternative synthesis </a:t>
-            </a:r>
-            <a:pPr indent="0" marL="0">
-              <a:spcAft>
-                <a:spcPts val="600"/>
-              </a:spcAft>
-              <a:buNone/>
-            </a:pPr>
-            <a:r>
-              <a:rPr lang="en-US" sz="1400" dirty="0">
-                <a:solidFill>
-                  <a:srgbClr val="000000"/>
-                </a:solidFill>
-              </a:rPr>
-              <a:t>- the state-action space over a real codebase is too large to enumerate, so we must find efficient methods of identifying "better" alternatives.</a:t>
-            </a:r>
-            <a:endParaRPr lang="en-US" sz="1400" dirty="0"/>
-          </a:p>
-        </p:txBody>
-      </p:sp>
-      <p:sp>
-        <p:nvSpPr>
-          <p:cNvPr id="5" name="Text 3"/>
+          <a:bodyPr wrap="square" lIns="0" tIns="0" rIns="0" bIns="0" rtlCol="0" anchor="ctr"/>
+          <a:lstStyle/>
+          <a:p>
+            <a:pPr algn="ctr" indent="0" marL="0">
+              <a:buNone/>
+            </a:pPr>
+            <a:r>
+              <a:rPr lang="en-US" sz="1200" i="1" dirty="0">
+                <a:solidFill>
+                  <a:srgbClr val="555555"/>
+                </a:solidFill>
+              </a:rPr>
+              <a:t>Compilation + tests</a:t>
+            </a:r>
+            <a:endParaRPr lang="en-US" sz="1200" dirty="0"/>
+          </a:p>
+        </p:txBody>
+      </p:sp>
+      <p:pic>
+        <p:nvPicPr>
+          <p:cNvPr id="7" name="Image 2" descr="images/industrial-logic-refactorings.png">    </p:cNvPr>
+          <p:cNvPicPr>
+            <a:picLocks noChangeAspect="1"/>
+          </p:cNvPicPr>
+          <p:nvPr/>
+        </p:nvPicPr>
+        <p:blipFill>
+          <a:blip r:embed="rId3"/>
+          <a:stretch>
+            <a:fillRect/>
+          </a:stretch>
+        </p:blipFill>
+        <p:spPr>
+          <a:xfrm>
+            <a:off x="6080760" y="1188720"/>
+            <a:ext cx="2743200" cy="1609344"/>
+          </a:xfrm>
+          <a:prstGeom prst="rect">
+            <a:avLst/>
+          </a:prstGeom>
+        </p:spPr>
+      </p:pic>
+      <p:sp>
+        <p:nvSpPr>
+          <p:cNvPr id="8" name="Text 3"/>
           <p:cNvSpPr/>
           <p:nvPr/>
         </p:nvSpPr>
         <p:spPr>
           <a:xfrm>
-            <a:off x="457200" y="4663440"/>
-            <a:ext cx="8229600" cy="411480"/>
+            <a:off x="6080760" y="3291840"/>
+            <a:ext cx="2743200" cy="274320"/>
           </a:xfrm>
           <a:prstGeom prst="rect">
             <a:avLst/>
@@ -14306,43 +14547,68 @@
           <a:ln/>
         </p:spPr>
         <p:txBody>
-          <a:bodyPr wrap="square" lIns="0" tIns="0" rIns="0" bIns="0" rtlCol="0" anchor="t"/>
-          <a:lstStyle/>
-          <a:p>
-            <a:pPr algn="l" indent="0" marL="0">
-              <a:buNone/>
-            </a:pPr>
-            <a:r>
-              <a:rPr lang="en-US" sz="900" i="1" dirty="0">
-                <a:solidFill>
-                  <a:srgbClr val="888888"/>
-                </a:solidFill>
-              </a:rPr>
-              <a:t>[1] Composite quality models (Quamoco, QMOOD), adapted from snapshot- to trajectory-level.   </a:t>
-            </a:r>
-            <a:pPr algn="l" indent="0" marL="0">
-              <a:buNone/>
-            </a:pPr>
-            <a:r>
-              <a:rPr lang="en-US" sz="900" i="1" dirty="0">
-                <a:solidFill>
-                  <a:srgbClr val="888888"/>
-                </a:solidFill>
-              </a:rPr>
-              <a:t>[2] IDE-event logging (Damevski et al., CodeWatcher).   </a:t>
-            </a:r>
-            <a:pPr algn="l" indent="0" marL="0">
-              <a:buNone/>
-            </a:pPr>
-            <a:r>
-              <a:rPr lang="en-US" sz="900" i="1" dirty="0">
-                <a:solidFill>
-                  <a:srgbClr val="888888"/>
-                </a:solidFill>
-              </a:rPr>
-              <a:t>[3] Inverts prior refactoring recommenders (ReSynth, Refactoring Navigator, search-based refactoring).</a:t>
-            </a:r>
-            <a:endParaRPr lang="en-US" sz="900" dirty="0"/>
+          <a:bodyPr wrap="square" lIns="0" tIns="0" rIns="0" bIns="0" rtlCol="0" anchor="ctr"/>
+          <a:lstStyle/>
+          <a:p>
+            <a:pPr algn="ctr" indent="0" marL="0">
+              <a:buNone/>
+            </a:pPr>
+            <a:r>
+              <a:rPr lang="en-US" sz="1200" i="1" dirty="0">
+                <a:solidFill>
+                  <a:srgbClr val="555555"/>
+                </a:solidFill>
+              </a:rPr>
+              <a:t>Refactorings</a:t>
+            </a:r>
+            <a:endParaRPr lang="en-US" sz="1200" dirty="0"/>
+          </a:p>
+        </p:txBody>
+      </p:sp>
+      <p:sp>
+        <p:nvSpPr>
+          <p:cNvPr id="9" name="Text 4"/>
+          <p:cNvSpPr/>
+          <p:nvPr/>
+        </p:nvSpPr>
+        <p:spPr>
+          <a:xfrm>
+            <a:off x="457200" y="4023360"/>
+            <a:ext cx="8229600" cy="914400"/>
+          </a:xfrm>
+          <a:prstGeom prst="rect">
+            <a:avLst/>
+          </a:prstGeom>
+          <a:noFill/>
+          <a:ln/>
+        </p:spPr>
+        <p:txBody>
+          <a:bodyPr wrap="square" lIns="0" tIns="0" rIns="0" bIns="0" rtlCol="0" anchor="ctr"/>
+          <a:lstStyle/>
+          <a:p>
+            <a:pPr algn="ctr" indent="0" marL="0">
+              <a:buNone/>
+            </a:pPr>
+            <a:r>
+              <a:rPr lang="en-US" sz="1400" b="1" i="1" dirty="0">
+                <a:solidFill>
+                  <a:srgbClr val="1F3F6F"/>
+                </a:solidFill>
+              </a:rPr>
+              <a:t>Gap: </a:t>
+            </a:r>
+            <a:pPr algn="ctr" indent="0" marL="0">
+              <a:buNone/>
+            </a:pPr>
+            <a:r>
+              <a:rPr lang="en-US" sz="1400" i="1" dirty="0">
+                <a:solidFill>
+                  <a:srgbClr val="1F3F6F"/>
+                </a:solidFill>
+              </a:rPr>
+              <a:t>no system scores an arbitrary observed refactoring session against an explicit process-quality metric, and shows where a better path was available.</a:t>
+            </a:r>
+            <a:endParaRPr lang="en-US" sz="1400" dirty="0"/>
           </a:p>
         </p:txBody>
       </p:sp>
@@ -14379,8 +14645,8 @@
         </p:nvSpPr>
         <p:spPr>
           <a:xfrm>
-            <a:off x="457200" y="2011680"/>
-            <a:ext cx="8229600" cy="1097280"/>
+            <a:off x="457200" y="274320"/>
+            <a:ext cx="8229600" cy="640080"/>
           </a:xfrm>
           <a:prstGeom prst="rect">
             <a:avLst/>
@@ -14392,18 +14658,304 @@
           <a:bodyPr wrap="square" lIns="0" tIns="0" rIns="0" bIns="0" rtlCol="0" anchor="ctr"/>
           <a:lstStyle/>
           <a:p>
-            <a:pPr algn="ctr" indent="0" marL="0">
-              <a:buNone/>
-            </a:pPr>
-            <a:r>
-              <a:rPr lang="en-US" sz="8000" b="1" dirty="0">
+            <a:pPr indent="0" marL="0">
+              <a:buNone/>
+            </a:pPr>
+            <a:r>
+              <a:rPr lang="en-US" sz="2800" b="1" dirty="0">
                 <a:solidFill>
                   <a:srgbClr val="000000"/>
                 </a:solidFill>
               </a:rPr>
-              <a:t>Demo</a:t>
-            </a:r>
-            <a:endParaRPr lang="en-US" sz="8000" dirty="0"/>
+              <a:t>Narrowing the design space</a:t>
+            </a:r>
+            <a:endParaRPr lang="en-US" sz="2800" dirty="0"/>
+          </a:p>
+        </p:txBody>
+      </p:sp>
+      <p:sp>
+        <p:nvSpPr>
+          <p:cNvPr id="3" name="Text 1"/>
+          <p:cNvSpPr/>
+          <p:nvPr/>
+        </p:nvSpPr>
+        <p:spPr>
+          <a:xfrm>
+            <a:off x="457200" y="1097280"/>
+            <a:ext cx="8229600" cy="457200"/>
+          </a:xfrm>
+          <a:prstGeom prst="rect">
+            <a:avLst/>
+          </a:prstGeom>
+          <a:noFill/>
+          <a:ln/>
+        </p:spPr>
+        <p:txBody>
+          <a:bodyPr wrap="square" lIns="0" tIns="0" rIns="0" bIns="0" rtlCol="0" anchor="ctr"/>
+          <a:lstStyle/>
+          <a:p>
+            <a:pPr indent="0" marL="0">
+              <a:buNone/>
+            </a:pPr>
+            <a:r>
+              <a:rPr lang="en-US" sz="1300" i="1" dirty="0">
+                <a:solidFill>
+                  <a:srgbClr val="555555"/>
+                </a:solidFill>
+              </a:rPr>
+              <a:t>Evaluating refactoring as a process is a wide, mostly-unexplored design space. Four requirements shaped what we built.</a:t>
+            </a:r>
+            <a:endParaRPr lang="en-US" sz="1300" dirty="0"/>
+          </a:p>
+        </p:txBody>
+      </p:sp>
+      <p:sp>
+        <p:nvSpPr>
+          <p:cNvPr id="4" name="Text 2"/>
+          <p:cNvSpPr/>
+          <p:nvPr/>
+        </p:nvSpPr>
+        <p:spPr>
+          <a:xfrm>
+            <a:off x="457200" y="1645920"/>
+            <a:ext cx="8229600" cy="2926080"/>
+          </a:xfrm>
+          <a:prstGeom prst="rect">
+            <a:avLst/>
+          </a:prstGeom>
+          <a:noFill/>
+          <a:ln/>
+        </p:spPr>
+        <p:txBody>
+          <a:bodyPr wrap="square" rtlCol="0" anchor="t"/>
+          <a:lstStyle/>
+          <a:p>
+            <a:pPr marL="342900" indent="-342900">
+              <a:spcAft>
+                <a:spcPts val="600"/>
+              </a:spcAft>
+              <a:buSzPct val="100000"/>
+              <a:buChar char="•"/>
+            </a:pPr>
+            <a:r>
+              <a:rPr lang="en-US" sz="1400" b="1" dirty="0">
+                <a:solidFill>
+                  <a:srgbClr val="000000"/>
+                </a:solidFill>
+              </a:rPr>
+              <a:t>Quantifiable + comparable score </a:t>
+            </a:r>
+            <a:pPr indent="0" marL="0">
+              <a:spcAft>
+                <a:spcPts val="600"/>
+              </a:spcAft>
+              <a:buNone/>
+            </a:pPr>
+            <a:r>
+              <a:rPr lang="en-US" sz="1400" dirty="0">
+                <a:solidFill>
+                  <a:srgbClr val="000000"/>
+                </a:solidFill>
+              </a:rPr>
+              <a:t>- one number per trajectory so sessions can be compared.</a:t>
+            </a:r>
+            <a:pPr indent="0" marL="0">
+              <a:spcAft>
+                <a:spcPts val="600"/>
+              </a:spcAft>
+              <a:buNone/>
+            </a:pPr>
+            <a:r>
+              <a:rPr lang="en-US" sz="1400" dirty="0">
+                <a:solidFill>
+                  <a:srgbClr val="888888"/>
+                </a:solidFill>
+              </a:rPr>
+              <a:t> [1]</a:t>
+            </a:r>
+            <a:endParaRPr lang="en-US" sz="1400" dirty="0"/>
+          </a:p>
+          <a:p>
+            <a:pPr marL="342900" indent="-342900">
+              <a:spcAft>
+                <a:spcPts val="600"/>
+              </a:spcAft>
+              <a:buSzPct val="100000"/>
+              <a:buChar char="•"/>
+            </a:pPr>
+            <a:r>
+              <a:rPr lang="en-US" sz="1400" b="1" dirty="0">
+                <a:solidFill>
+                  <a:srgbClr val="000000"/>
+                </a:solidFill>
+              </a:rPr>
+              <a:t>Seamless, in-workflow capture </a:t>
+            </a:r>
+            <a:pPr indent="0" marL="0">
+              <a:spcAft>
+                <a:spcPts val="600"/>
+              </a:spcAft>
+              <a:buNone/>
+            </a:pPr>
+            <a:r>
+              <a:rPr lang="en-US" sz="1400" dirty="0">
+                <a:solidFill>
+                  <a:srgbClr val="000000"/>
+                </a:solidFill>
+              </a:rPr>
+              <a:t>- zero extra developer effort to use the tool.</a:t>
+            </a:r>
+            <a:pPr indent="0" marL="0">
+              <a:spcAft>
+                <a:spcPts val="600"/>
+              </a:spcAft>
+              <a:buNone/>
+            </a:pPr>
+            <a:r>
+              <a:rPr lang="en-US" sz="1400" dirty="0">
+                <a:solidFill>
+                  <a:srgbClr val="888888"/>
+                </a:solidFill>
+              </a:rPr>
+              <a:t> [2]</a:t>
+            </a:r>
+            <a:endParaRPr lang="en-US" sz="1400" dirty="0"/>
+          </a:p>
+          <a:p>
+            <a:pPr marL="342900" indent="-342900">
+              <a:spcAft>
+                <a:spcPts val="600"/>
+              </a:spcAft>
+              <a:buSzPct val="100000"/>
+              <a:buChar char="•"/>
+            </a:pPr>
+            <a:r>
+              <a:rPr lang="en-US" sz="1400" b="1" dirty="0">
+                <a:solidFill>
+                  <a:srgbClr val="000000"/>
+                </a:solidFill>
+              </a:rPr>
+              <a:t>Actionable, moment-specific feedback </a:t>
+            </a:r>
+            <a:pPr indent="0" marL="0">
+              <a:spcAft>
+                <a:spcPts val="600"/>
+              </a:spcAft>
+              <a:buNone/>
+            </a:pPr>
+            <a:r>
+              <a:rPr lang="en-US" sz="1400" dirty="0">
+                <a:solidFill>
+                  <a:srgbClr val="000000"/>
+                </a:solidFill>
+              </a:rPr>
+              <a:t>- point to a specific moment AND a "what you could have done instead" alternative.</a:t>
+            </a:r>
+            <a:pPr indent="0" marL="0">
+              <a:spcAft>
+                <a:spcPts val="600"/>
+              </a:spcAft>
+              <a:buNone/>
+            </a:pPr>
+            <a:r>
+              <a:rPr lang="en-US" sz="1400" dirty="0">
+                <a:solidFill>
+                  <a:srgbClr val="888888"/>
+                </a:solidFill>
+              </a:rPr>
+              <a:t> [3]</a:t>
+            </a:r>
+            <a:endParaRPr lang="en-US" sz="1400" dirty="0"/>
+          </a:p>
+          <a:p>
+            <a:pPr marL="342900" indent="-342900">
+              <a:spcAft>
+                <a:spcPts val="600"/>
+              </a:spcAft>
+              <a:buSzPct val="100000"/>
+              <a:buChar char="•"/>
+            </a:pPr>
+            <a:r>
+              <a:rPr lang="en-US" sz="1400" b="1" dirty="0">
+                <a:solidFill>
+                  <a:srgbClr val="000000"/>
+                </a:solidFill>
+              </a:rPr>
+              <a:t>Efficient alternative synthesis </a:t>
+            </a:r>
+            <a:pPr indent="0" marL="0">
+              <a:spcAft>
+                <a:spcPts val="600"/>
+              </a:spcAft>
+              <a:buNone/>
+            </a:pPr>
+            <a:r>
+              <a:rPr lang="en-US" sz="1400" dirty="0">
+                <a:solidFill>
+                  <a:srgbClr val="000000"/>
+                </a:solidFill>
+              </a:rPr>
+              <a:t>- the state-action space over a real codebase is too large to enumerate, so we must find efficient methods of identifying "better" alternatives.</a:t>
+            </a:r>
+            <a:endParaRPr lang="en-US" sz="1400" dirty="0"/>
+          </a:p>
+        </p:txBody>
+      </p:sp>
+      <p:sp>
+        <p:nvSpPr>
+          <p:cNvPr id="5" name="Text 3"/>
+          <p:cNvSpPr/>
+          <p:nvPr/>
+        </p:nvSpPr>
+        <p:spPr>
+          <a:xfrm>
+            <a:off x="457200" y="4663440"/>
+            <a:ext cx="8229600" cy="411480"/>
+          </a:xfrm>
+          <a:prstGeom prst="rect">
+            <a:avLst/>
+          </a:prstGeom>
+          <a:noFill/>
+          <a:ln/>
+        </p:spPr>
+        <p:txBody>
+          <a:bodyPr wrap="square" lIns="0" tIns="0" rIns="0" bIns="0" rtlCol="0" anchor="t"/>
+          <a:lstStyle/>
+          <a:p>
+            <a:pPr algn="l" indent="0" marL="0">
+              <a:buNone/>
+            </a:pPr>
+            <a:r>
+              <a:rPr lang="en-US" sz="900" i="1" dirty="0">
+                <a:solidFill>
+                  <a:srgbClr val="888888"/>
+                </a:solidFill>
+              </a:rPr>
+              <a:t>[1] Composite quality models (Quamoco, QMOOD), adapted from snapshot- to trajectory-level.   </a:t>
+            </a:r>
+            <a:pPr algn="l" indent="0" marL="0">
+              <a:buNone/>
+            </a:pPr>
+            <a:r>
+              <a:rPr lang="en-US" sz="900" i="1" dirty="0">
+                <a:solidFill>
+                  <a:srgbClr val="888888"/>
+                </a:solidFill>
+              </a:rPr>
+              <a:t>[2] IDE-event logging (Damevski et al., CodeWatcher).   </a:t>
+            </a:r>
+            <a:pPr algn="l" indent="0" marL="0">
+              <a:buNone/>
+            </a:pPr>
+            <a:r>
+              <a:rPr lang="en-US" sz="900" i="1" dirty="0">
+                <a:solidFill>
+                  <a:srgbClr val="888888"/>
+                </a:solidFill>
+              </a:rPr>
+              <a:t>[3] Inverts prior refactoring recommenders (ReSynth, Refactoring Navigator, search-based refactoring).</a:t>
+            </a:r>
+            <a:endParaRPr lang="en-US" sz="900" dirty="0"/>
           </a:p>
         </p:txBody>
       </p:sp>
@@ -14440,8 +14992,8 @@
         </p:nvSpPr>
         <p:spPr>
           <a:xfrm>
-            <a:off x="457200" y="274320"/>
-            <a:ext cx="8229600" cy="640080"/>
+            <a:off x="457200" y="2011680"/>
+            <a:ext cx="8229600" cy="1097280"/>
           </a:xfrm>
           <a:prstGeom prst="rect">
             <a:avLst/>
@@ -14453,596 +15005,18 @@
           <a:bodyPr wrap="square" lIns="0" tIns="0" rIns="0" bIns="0" rtlCol="0" anchor="ctr"/>
           <a:lstStyle/>
           <a:p>
-            <a:pPr indent="0" marL="0">
-              <a:buNone/>
-            </a:pPr>
-            <a:r>
-              <a:rPr lang="en-US" sz="2800" b="1" dirty="0">
+            <a:pPr algn="ctr" indent="0" marL="0">
+              <a:buNone/>
+            </a:pPr>
+            <a:r>
+              <a:rPr lang="en-US" sz="8000" b="1" dirty="0">
                 <a:solidFill>
                   <a:srgbClr val="000000"/>
                 </a:solidFill>
               </a:rPr>
-              <a:t>What the tool does, end to end</a:t>
-            </a:r>
-            <a:endParaRPr lang="en-US" sz="2800" dirty="0"/>
-          </a:p>
-        </p:txBody>
-      </p:sp>
-      <p:sp>
-        <p:nvSpPr>
-          <p:cNvPr id="3" name="Shape 1"/>
-          <p:cNvSpPr/>
-          <p:nvPr/>
-        </p:nvSpPr>
-        <p:spPr>
-          <a:xfrm>
-            <a:off x="182880" y="1463040"/>
-            <a:ext cx="2377440" cy="2377440"/>
-          </a:xfrm>
-          <a:prstGeom prst="rect">
-            <a:avLst/>
-          </a:prstGeom>
-          <a:solidFill>
-            <a:srgbClr val="FFFFFF"/>
-          </a:solidFill>
-          <a:ln w="12700">
-            <a:solidFill>
-              <a:srgbClr val="000000"/>
-            </a:solidFill>
-            <a:prstDash val="solid"/>
-          </a:ln>
-        </p:spPr>
-      </p:sp>
-      <p:sp>
-        <p:nvSpPr>
-          <p:cNvPr id="4" name="Text 2"/>
-          <p:cNvSpPr/>
-          <p:nvPr/>
-        </p:nvSpPr>
-        <p:spPr>
-          <a:xfrm>
-            <a:off x="274320" y="1645920"/>
-            <a:ext cx="2194560" cy="457200"/>
-          </a:xfrm>
-          <a:prstGeom prst="rect">
-            <a:avLst/>
-          </a:prstGeom>
-          <a:noFill/>
-          <a:ln/>
-        </p:spPr>
-        <p:txBody>
-          <a:bodyPr wrap="square" lIns="0" tIns="0" rIns="0" bIns="0" rtlCol="0" anchor="ctr"/>
-          <a:lstStyle/>
-          <a:p>
-            <a:pPr algn="ctr" indent="0" marL="0">
-              <a:buNone/>
-            </a:pPr>
-            <a:r>
-              <a:rPr lang="en-US" sz="1600" b="1" dirty="0">
-                <a:solidFill>
-                  <a:srgbClr val="000000"/>
-                </a:solidFill>
-              </a:rPr>
-              <a:t>IntelliJ Plugin</a:t>
-            </a:r>
-            <a:endParaRPr lang="en-US" sz="1600" dirty="0"/>
-          </a:p>
-        </p:txBody>
-      </p:sp>
-      <p:sp>
-        <p:nvSpPr>
-          <p:cNvPr id="5" name="Shape 3"/>
-          <p:cNvSpPr/>
-          <p:nvPr/>
-        </p:nvSpPr>
-        <p:spPr>
-          <a:xfrm>
-            <a:off x="457200" y="2194560"/>
-            <a:ext cx="1828800" cy="0"/>
-          </a:xfrm>
-          <a:prstGeom prst="line">
-            <a:avLst/>
-          </a:prstGeom>
-          <a:noFill/>
-          <a:ln w="9525">
-            <a:solidFill>
-              <a:srgbClr val="999999"/>
-            </a:solidFill>
-            <a:prstDash val="solid"/>
-          </a:ln>
-        </p:spPr>
-      </p:sp>
-      <p:sp>
-        <p:nvSpPr>
-          <p:cNvPr id="6" name="Text 4"/>
-          <p:cNvSpPr/>
-          <p:nvPr/>
-        </p:nvSpPr>
-        <p:spPr>
-          <a:xfrm>
-            <a:off x="411480" y="2377440"/>
-            <a:ext cx="2011680" cy="1371600"/>
-          </a:xfrm>
-          <a:prstGeom prst="rect">
-            <a:avLst/>
-          </a:prstGeom>
-          <a:noFill/>
-          <a:ln/>
-        </p:spPr>
-        <p:txBody>
-          <a:bodyPr wrap="square" rtlCol="0" anchor="t"/>
-          <a:lstStyle/>
-          <a:p>
-            <a:pPr marL="342900" indent="-342900">
-              <a:spcAft>
-                <a:spcPts val="800"/>
-              </a:spcAft>
-              <a:buSzPct val="100000"/>
-              <a:buChar char="•"/>
-            </a:pPr>
-            <a:r>
-              <a:rPr lang="en-US" sz="1200" dirty="0">
-                <a:solidFill>
-                  <a:srgbClr val="333333"/>
-                </a:solidFill>
-              </a:rPr>
-              <a:t>Records developer events</a:t>
-            </a:r>
-            <a:endParaRPr lang="en-US" sz="1200" dirty="0"/>
-          </a:p>
-          <a:p>
-            <a:pPr marL="342900" indent="-342900">
-              <a:spcAft>
-                <a:spcPts val="800"/>
-              </a:spcAft>
-              <a:buSzPct val="100000"/>
-              <a:buChar char="•"/>
-            </a:pPr>
-            <a:r>
-              <a:rPr lang="en-US" sz="1200" dirty="0">
-                <a:solidFill>
-                  <a:srgbClr val="333333"/>
-                </a:solidFill>
-              </a:rPr>
-              <a:t>Captures initial codebase</a:t>
-            </a:r>
-            <a:endParaRPr lang="en-US" sz="1200" dirty="0"/>
-          </a:p>
-        </p:txBody>
-      </p:sp>
-      <p:sp>
-        <p:nvSpPr>
-          <p:cNvPr id="7" name="Shape 5"/>
-          <p:cNvSpPr/>
-          <p:nvPr/>
-        </p:nvSpPr>
-        <p:spPr>
-          <a:xfrm>
-            <a:off x="3383280" y="1463040"/>
-            <a:ext cx="2377440" cy="2377440"/>
-          </a:xfrm>
-          <a:prstGeom prst="rect">
-            <a:avLst/>
-          </a:prstGeom>
-          <a:solidFill>
-            <a:srgbClr val="FFFFFF"/>
-          </a:solidFill>
-          <a:ln w="12700">
-            <a:solidFill>
-              <a:srgbClr val="000000"/>
-            </a:solidFill>
-            <a:prstDash val="solid"/>
-          </a:ln>
-        </p:spPr>
-      </p:sp>
-      <p:sp>
-        <p:nvSpPr>
-          <p:cNvPr id="8" name="Text 6"/>
-          <p:cNvSpPr/>
-          <p:nvPr/>
-        </p:nvSpPr>
-        <p:spPr>
-          <a:xfrm>
-            <a:off x="3474720" y="1645920"/>
-            <a:ext cx="2194560" cy="457200"/>
-          </a:xfrm>
-          <a:prstGeom prst="rect">
-            <a:avLst/>
-          </a:prstGeom>
-          <a:noFill/>
-          <a:ln/>
-        </p:spPr>
-        <p:txBody>
-          <a:bodyPr wrap="square" lIns="0" tIns="0" rIns="0" bIns="0" rtlCol="0" anchor="ctr"/>
-          <a:lstStyle/>
-          <a:p>
-            <a:pPr algn="ctr" indent="0" marL="0">
-              <a:buNone/>
-            </a:pPr>
-            <a:r>
-              <a:rPr lang="en-US" sz="1600" b="1" dirty="0">
-                <a:solidFill>
-                  <a:srgbClr val="000000"/>
-                </a:solidFill>
-              </a:rPr>
-              <a:t>Analysis Backend</a:t>
-            </a:r>
-            <a:endParaRPr lang="en-US" sz="1600" dirty="0"/>
-          </a:p>
-        </p:txBody>
-      </p:sp>
-      <p:sp>
-        <p:nvSpPr>
-          <p:cNvPr id="9" name="Shape 7"/>
-          <p:cNvSpPr/>
-          <p:nvPr/>
-        </p:nvSpPr>
-        <p:spPr>
-          <a:xfrm>
-            <a:off x="3657600" y="2194560"/>
-            <a:ext cx="1828800" cy="0"/>
-          </a:xfrm>
-          <a:prstGeom prst="line">
-            <a:avLst/>
-          </a:prstGeom>
-          <a:noFill/>
-          <a:ln w="9525">
-            <a:solidFill>
-              <a:srgbClr val="999999"/>
-            </a:solidFill>
-            <a:prstDash val="solid"/>
-          </a:ln>
-        </p:spPr>
-      </p:sp>
-      <p:sp>
-        <p:nvSpPr>
-          <p:cNvPr id="10" name="Text 8"/>
-          <p:cNvSpPr/>
-          <p:nvPr/>
-        </p:nvSpPr>
-        <p:spPr>
-          <a:xfrm>
-            <a:off x="3611880" y="2377440"/>
-            <a:ext cx="2011680" cy="1371600"/>
-          </a:xfrm>
-          <a:prstGeom prst="rect">
-            <a:avLst/>
-          </a:prstGeom>
-          <a:noFill/>
-          <a:ln/>
-        </p:spPr>
-        <p:txBody>
-          <a:bodyPr wrap="square" rtlCol="0" anchor="t"/>
-          <a:lstStyle/>
-          <a:p>
-            <a:pPr marL="342900" indent="-342900">
-              <a:spcAft>
-                <a:spcPts val="800"/>
-              </a:spcAft>
-              <a:buSzPct val="100000"/>
-              <a:buChar char="•"/>
-            </a:pPr>
-            <a:r>
-              <a:rPr lang="en-US" sz="1200" dirty="0">
-                <a:solidFill>
-                  <a:srgbClr val="333333"/>
-                </a:solidFill>
-              </a:rPr>
-              <a:t>Shadow repo reconstruction</a:t>
-            </a:r>
-            <a:endParaRPr lang="en-US" sz="1200" dirty="0"/>
-          </a:p>
-          <a:p>
-            <a:pPr marL="342900" indent="-342900">
-              <a:spcAft>
-                <a:spcPts val="800"/>
-              </a:spcAft>
-              <a:buSzPct val="100000"/>
-              <a:buChar char="•"/>
-            </a:pPr>
-            <a:r>
-              <a:rPr lang="en-US" sz="1200" dirty="0">
-                <a:solidFill>
-                  <a:srgbClr val="333333"/>
-                </a:solidFill>
-              </a:rPr>
-              <a:t>Metric calculation</a:t>
-            </a:r>
-            <a:endParaRPr lang="en-US" sz="1200" dirty="0"/>
-          </a:p>
-          <a:p>
-            <a:pPr marL="342900" indent="-342900">
-              <a:spcAft>
-                <a:spcPts val="800"/>
-              </a:spcAft>
-              <a:buSzPct val="100000"/>
-              <a:buChar char="•"/>
-            </a:pPr>
-            <a:r>
-              <a:rPr lang="en-US" sz="1200" dirty="0">
-                <a:solidFill>
-                  <a:srgbClr val="333333"/>
-                </a:solidFill>
-              </a:rPr>
-              <a:t>Divergence detection &amp; synthesis</a:t>
-            </a:r>
-            <a:endParaRPr lang="en-US" sz="1200" dirty="0"/>
-          </a:p>
-        </p:txBody>
-      </p:sp>
-      <p:sp>
-        <p:nvSpPr>
-          <p:cNvPr id="11" name="Shape 9"/>
-          <p:cNvSpPr/>
-          <p:nvPr/>
-        </p:nvSpPr>
-        <p:spPr>
-          <a:xfrm>
-            <a:off x="6583680" y="1463040"/>
-            <a:ext cx="2377440" cy="2377440"/>
-          </a:xfrm>
-          <a:prstGeom prst="rect">
-            <a:avLst/>
-          </a:prstGeom>
-          <a:solidFill>
-            <a:srgbClr val="FFFFFF"/>
-          </a:solidFill>
-          <a:ln w="12700">
-            <a:solidFill>
-              <a:srgbClr val="000000"/>
-            </a:solidFill>
-            <a:prstDash val="solid"/>
-          </a:ln>
-        </p:spPr>
-      </p:sp>
-      <p:sp>
-        <p:nvSpPr>
-          <p:cNvPr id="12" name="Text 10"/>
-          <p:cNvSpPr/>
-          <p:nvPr/>
-        </p:nvSpPr>
-        <p:spPr>
-          <a:xfrm>
-            <a:off x="6675120" y="1645920"/>
-            <a:ext cx="2194560" cy="457200"/>
-          </a:xfrm>
-          <a:prstGeom prst="rect">
-            <a:avLst/>
-          </a:prstGeom>
-          <a:noFill/>
-          <a:ln/>
-        </p:spPr>
-        <p:txBody>
-          <a:bodyPr wrap="square" lIns="0" tIns="0" rIns="0" bIns="0" rtlCol="0" anchor="ctr"/>
-          <a:lstStyle/>
-          <a:p>
-            <a:pPr algn="ctr" indent="0" marL="0">
-              <a:buNone/>
-            </a:pPr>
-            <a:r>
-              <a:rPr lang="en-US" sz="1600" b="1" dirty="0">
-                <a:solidFill>
-                  <a:srgbClr val="000000"/>
-                </a:solidFill>
-              </a:rPr>
-              <a:t>Dashboard</a:t>
-            </a:r>
-            <a:endParaRPr lang="en-US" sz="1600" dirty="0"/>
-          </a:p>
-        </p:txBody>
-      </p:sp>
-      <p:sp>
-        <p:nvSpPr>
-          <p:cNvPr id="13" name="Shape 11"/>
-          <p:cNvSpPr/>
-          <p:nvPr/>
-        </p:nvSpPr>
-        <p:spPr>
-          <a:xfrm>
-            <a:off x="6858000" y="2194560"/>
-            <a:ext cx="1828800" cy="0"/>
-          </a:xfrm>
-          <a:prstGeom prst="line">
-            <a:avLst/>
-          </a:prstGeom>
-          <a:noFill/>
-          <a:ln w="9525">
-            <a:solidFill>
-              <a:srgbClr val="999999"/>
-            </a:solidFill>
-            <a:prstDash val="solid"/>
-          </a:ln>
-        </p:spPr>
-      </p:sp>
-      <p:sp>
-        <p:nvSpPr>
-          <p:cNvPr id="14" name="Text 12"/>
-          <p:cNvSpPr/>
-          <p:nvPr/>
-        </p:nvSpPr>
-        <p:spPr>
-          <a:xfrm>
-            <a:off x="6812280" y="2377440"/>
-            <a:ext cx="2011680" cy="1371600"/>
-          </a:xfrm>
-          <a:prstGeom prst="rect">
-            <a:avLst/>
-          </a:prstGeom>
-          <a:noFill/>
-          <a:ln/>
-        </p:spPr>
-        <p:txBody>
-          <a:bodyPr wrap="square" rtlCol="0" anchor="t"/>
-          <a:lstStyle/>
-          <a:p>
-            <a:pPr marL="342900" indent="-342900">
-              <a:spcAft>
-                <a:spcPts val="800"/>
-              </a:spcAft>
-              <a:buSzPct val="100000"/>
-              <a:buChar char="•"/>
-            </a:pPr>
-            <a:r>
-              <a:rPr lang="en-US" sz="1200" dirty="0">
-                <a:solidFill>
-                  <a:srgbClr val="333333"/>
-                </a:solidFill>
-              </a:rPr>
-              <a:t>Surfaces divergence points in context</a:t>
-            </a:r>
-            <a:endParaRPr lang="en-US" sz="1200" dirty="0"/>
-          </a:p>
-          <a:p>
-            <a:pPr marL="342900" indent="-342900">
-              <a:spcAft>
-                <a:spcPts val="800"/>
-              </a:spcAft>
-              <a:buSzPct val="100000"/>
-              <a:buChar char="•"/>
-            </a:pPr>
-            <a:r>
-              <a:rPr lang="en-US" sz="1200" dirty="0">
-                <a:solidFill>
-                  <a:srgbClr val="333333"/>
-                </a:solidFill>
-              </a:rPr>
-              <a:t>Explains alternative paths</a:t>
-            </a:r>
-            <a:endParaRPr lang="en-US" sz="1200" dirty="0"/>
-          </a:p>
-        </p:txBody>
-      </p:sp>
-      <p:sp>
-        <p:nvSpPr>
-          <p:cNvPr id="15" name="Shape 13"/>
-          <p:cNvSpPr/>
-          <p:nvPr/>
-        </p:nvSpPr>
-        <p:spPr>
-          <a:xfrm>
-            <a:off x="2560320" y="2651760"/>
-            <a:ext cx="822960" cy="0"/>
-          </a:xfrm>
-          <a:prstGeom prst="line">
-            <a:avLst/>
-          </a:prstGeom>
-          <a:noFill/>
-          <a:ln w="19050">
-            <a:solidFill>
-              <a:srgbClr val="000000"/>
-            </a:solidFill>
-            <a:prstDash val="solid"/>
-            <a:tailEnd type="triangle"/>
-          </a:ln>
-        </p:spPr>
-      </p:sp>
-      <p:sp>
-        <p:nvSpPr>
-          <p:cNvPr id="16" name="Text 14"/>
-          <p:cNvSpPr/>
-          <p:nvPr/>
-        </p:nvSpPr>
-        <p:spPr>
-          <a:xfrm>
-            <a:off x="2514600" y="2148840"/>
-            <a:ext cx="914400" cy="457200"/>
-          </a:xfrm>
-          <a:prstGeom prst="rect">
-            <a:avLst/>
-          </a:prstGeom>
-          <a:noFill/>
-          <a:ln/>
-        </p:spPr>
-        <p:txBody>
-          <a:bodyPr wrap="square" lIns="0" tIns="0" rIns="0" bIns="0" rtlCol="0" anchor="b"/>
-          <a:lstStyle/>
-          <a:p>
-            <a:pPr algn="ctr" indent="0" marL="0">
-              <a:buNone/>
-            </a:pPr>
-            <a:r>
-              <a:rPr lang="en-US" sz="900" i="1" dirty="0">
-                <a:solidFill>
-                  <a:srgbClr val="555555"/>
-                </a:solidFill>
-              </a:rPr>
-              <a:t>events.jsonl + initial-src/</a:t>
-            </a:r>
-            <a:endParaRPr lang="en-US" sz="900" dirty="0"/>
-          </a:p>
-        </p:txBody>
-      </p:sp>
-      <p:sp>
-        <p:nvSpPr>
-          <p:cNvPr id="17" name="Shape 15"/>
-          <p:cNvSpPr/>
-          <p:nvPr/>
-        </p:nvSpPr>
-        <p:spPr>
-          <a:xfrm>
-            <a:off x="5760720" y="2651760"/>
-            <a:ext cx="822960" cy="0"/>
-          </a:xfrm>
-          <a:prstGeom prst="line">
-            <a:avLst/>
-          </a:prstGeom>
-          <a:noFill/>
-          <a:ln w="19050">
-            <a:solidFill>
-              <a:srgbClr val="000000"/>
-            </a:solidFill>
-            <a:prstDash val="solid"/>
-            <a:tailEnd type="triangle"/>
-          </a:ln>
-        </p:spPr>
-      </p:sp>
-      <p:sp>
-        <p:nvSpPr>
-          <p:cNvPr id="18" name="Text 16"/>
-          <p:cNvSpPr/>
-          <p:nvPr/>
-        </p:nvSpPr>
-        <p:spPr>
-          <a:xfrm>
-            <a:off x="5715000" y="2148840"/>
-            <a:ext cx="914400" cy="457200"/>
-          </a:xfrm>
-          <a:prstGeom prst="rect">
-            <a:avLst/>
-          </a:prstGeom>
-          <a:noFill/>
-          <a:ln/>
-        </p:spPr>
-        <p:txBody>
-          <a:bodyPr wrap="square" lIns="0" tIns="0" rIns="0" bIns="0" rtlCol="0" anchor="b"/>
-          <a:lstStyle/>
-          <a:p>
-            <a:pPr algn="ctr" indent="0" marL="0">
-              <a:buNone/>
-            </a:pPr>
-            <a:r>
-              <a:rPr lang="en-US" sz="900" i="1" dirty="0">
-                <a:solidFill>
-                  <a:srgbClr val="555555"/>
-                </a:solidFill>
-              </a:rPr>
-              <a:t>analysis</a:t>
-            </a:r>
-            <a:endParaRPr lang="en-US" sz="900" dirty="0"/>
-          </a:p>
-          <a:p>
-            <a:pPr algn="ctr" indent="0" marL="0">
-              <a:buNone/>
-            </a:pPr>
-            <a:r>
-              <a:rPr lang="en-US" sz="900" i="1" dirty="0">
-                <a:solidFill>
-                  <a:srgbClr val="555555"/>
-                </a:solidFill>
-              </a:rPr>
-              <a:t>-report.json</a:t>
-            </a:r>
-            <a:endParaRPr lang="en-US" sz="900" dirty="0"/>
+              <a:t>Demo</a:t>
+            </a:r>
+            <a:endParaRPr lang="en-US" sz="8000" dirty="0"/>
           </a:p>
         </p:txBody>
       </p:sp>
@@ -15079,6 +15053,645 @@
         </p:nvSpPr>
         <p:spPr>
           <a:xfrm>
+            <a:off x="457200" y="274320"/>
+            <a:ext cx="8229600" cy="640080"/>
+          </a:xfrm>
+          <a:prstGeom prst="rect">
+            <a:avLst/>
+          </a:prstGeom>
+          <a:noFill/>
+          <a:ln/>
+        </p:spPr>
+        <p:txBody>
+          <a:bodyPr wrap="square" lIns="0" tIns="0" rIns="0" bIns="0" rtlCol="0" anchor="ctr"/>
+          <a:lstStyle/>
+          <a:p>
+            <a:pPr indent="0" marL="0">
+              <a:buNone/>
+            </a:pPr>
+            <a:r>
+              <a:rPr lang="en-US" sz="2800" b="1" dirty="0">
+                <a:solidFill>
+                  <a:srgbClr val="000000"/>
+                </a:solidFill>
+              </a:rPr>
+              <a:t>What the tool does, end to end</a:t>
+            </a:r>
+            <a:endParaRPr lang="en-US" sz="2800" dirty="0"/>
+          </a:p>
+        </p:txBody>
+      </p:sp>
+      <p:sp>
+        <p:nvSpPr>
+          <p:cNvPr id="3" name="Shape 1"/>
+          <p:cNvSpPr/>
+          <p:nvPr/>
+        </p:nvSpPr>
+        <p:spPr>
+          <a:xfrm>
+            <a:off x="182880" y="1463040"/>
+            <a:ext cx="2377440" cy="2377440"/>
+          </a:xfrm>
+          <a:prstGeom prst="rect">
+            <a:avLst/>
+          </a:prstGeom>
+          <a:solidFill>
+            <a:srgbClr val="FFFFFF"/>
+          </a:solidFill>
+          <a:ln w="12700">
+            <a:solidFill>
+              <a:srgbClr val="000000"/>
+            </a:solidFill>
+            <a:prstDash val="solid"/>
+          </a:ln>
+        </p:spPr>
+      </p:sp>
+      <p:sp>
+        <p:nvSpPr>
+          <p:cNvPr id="4" name="Text 2"/>
+          <p:cNvSpPr/>
+          <p:nvPr/>
+        </p:nvSpPr>
+        <p:spPr>
+          <a:xfrm>
+            <a:off x="274320" y="1645920"/>
+            <a:ext cx="2194560" cy="457200"/>
+          </a:xfrm>
+          <a:prstGeom prst="rect">
+            <a:avLst/>
+          </a:prstGeom>
+          <a:noFill/>
+          <a:ln/>
+        </p:spPr>
+        <p:txBody>
+          <a:bodyPr wrap="square" lIns="0" tIns="0" rIns="0" bIns="0" rtlCol="0" anchor="ctr"/>
+          <a:lstStyle/>
+          <a:p>
+            <a:pPr algn="ctr" indent="0" marL="0">
+              <a:buNone/>
+            </a:pPr>
+            <a:r>
+              <a:rPr lang="en-US" sz="1600" b="1" dirty="0">
+                <a:solidFill>
+                  <a:srgbClr val="000000"/>
+                </a:solidFill>
+              </a:rPr>
+              <a:t>IntelliJ Plugin</a:t>
+            </a:r>
+            <a:endParaRPr lang="en-US" sz="1600" dirty="0"/>
+          </a:p>
+        </p:txBody>
+      </p:sp>
+      <p:sp>
+        <p:nvSpPr>
+          <p:cNvPr id="5" name="Shape 3"/>
+          <p:cNvSpPr/>
+          <p:nvPr/>
+        </p:nvSpPr>
+        <p:spPr>
+          <a:xfrm>
+            <a:off x="457200" y="2194560"/>
+            <a:ext cx="1828800" cy="0"/>
+          </a:xfrm>
+          <a:prstGeom prst="line">
+            <a:avLst/>
+          </a:prstGeom>
+          <a:noFill/>
+          <a:ln w="9525">
+            <a:solidFill>
+              <a:srgbClr val="999999"/>
+            </a:solidFill>
+            <a:prstDash val="solid"/>
+          </a:ln>
+        </p:spPr>
+      </p:sp>
+      <p:sp>
+        <p:nvSpPr>
+          <p:cNvPr id="6" name="Text 4"/>
+          <p:cNvSpPr/>
+          <p:nvPr/>
+        </p:nvSpPr>
+        <p:spPr>
+          <a:xfrm>
+            <a:off x="411480" y="2377440"/>
+            <a:ext cx="2011680" cy="1371600"/>
+          </a:xfrm>
+          <a:prstGeom prst="rect">
+            <a:avLst/>
+          </a:prstGeom>
+          <a:noFill/>
+          <a:ln/>
+        </p:spPr>
+        <p:txBody>
+          <a:bodyPr wrap="square" rtlCol="0" anchor="t"/>
+          <a:lstStyle/>
+          <a:p>
+            <a:pPr marL="342900" indent="-342900">
+              <a:spcAft>
+                <a:spcPts val="800"/>
+              </a:spcAft>
+              <a:buSzPct val="100000"/>
+              <a:buChar char="•"/>
+            </a:pPr>
+            <a:r>
+              <a:rPr lang="en-US" sz="1200" dirty="0">
+                <a:solidFill>
+                  <a:srgbClr val="333333"/>
+                </a:solidFill>
+              </a:rPr>
+              <a:t>Records developer events</a:t>
+            </a:r>
+            <a:endParaRPr lang="en-US" sz="1200" dirty="0"/>
+          </a:p>
+          <a:p>
+            <a:pPr marL="342900" indent="-342900">
+              <a:spcAft>
+                <a:spcPts val="800"/>
+              </a:spcAft>
+              <a:buSzPct val="100000"/>
+              <a:buChar char="•"/>
+            </a:pPr>
+            <a:r>
+              <a:rPr lang="en-US" sz="1200" dirty="0">
+                <a:solidFill>
+                  <a:srgbClr val="333333"/>
+                </a:solidFill>
+              </a:rPr>
+              <a:t>Captures initial codebase</a:t>
+            </a:r>
+            <a:endParaRPr lang="en-US" sz="1200" dirty="0"/>
+          </a:p>
+        </p:txBody>
+      </p:sp>
+      <p:sp>
+        <p:nvSpPr>
+          <p:cNvPr id="7" name="Shape 5"/>
+          <p:cNvSpPr/>
+          <p:nvPr/>
+        </p:nvSpPr>
+        <p:spPr>
+          <a:xfrm>
+            <a:off x="3383280" y="1463040"/>
+            <a:ext cx="2377440" cy="2377440"/>
+          </a:xfrm>
+          <a:prstGeom prst="rect">
+            <a:avLst/>
+          </a:prstGeom>
+          <a:solidFill>
+            <a:srgbClr val="FFFFFF"/>
+          </a:solidFill>
+          <a:ln w="12700">
+            <a:solidFill>
+              <a:srgbClr val="000000"/>
+            </a:solidFill>
+            <a:prstDash val="solid"/>
+          </a:ln>
+        </p:spPr>
+      </p:sp>
+      <p:sp>
+        <p:nvSpPr>
+          <p:cNvPr id="8" name="Text 6"/>
+          <p:cNvSpPr/>
+          <p:nvPr/>
+        </p:nvSpPr>
+        <p:spPr>
+          <a:xfrm>
+            <a:off x="3474720" y="1645920"/>
+            <a:ext cx="2194560" cy="457200"/>
+          </a:xfrm>
+          <a:prstGeom prst="rect">
+            <a:avLst/>
+          </a:prstGeom>
+          <a:noFill/>
+          <a:ln/>
+        </p:spPr>
+        <p:txBody>
+          <a:bodyPr wrap="square" lIns="0" tIns="0" rIns="0" bIns="0" rtlCol="0" anchor="ctr"/>
+          <a:lstStyle/>
+          <a:p>
+            <a:pPr algn="ctr" indent="0" marL="0">
+              <a:buNone/>
+            </a:pPr>
+            <a:r>
+              <a:rPr lang="en-US" sz="1600" b="1" dirty="0">
+                <a:solidFill>
+                  <a:srgbClr val="000000"/>
+                </a:solidFill>
+              </a:rPr>
+              <a:t>Analysis Backend</a:t>
+            </a:r>
+            <a:endParaRPr lang="en-US" sz="1600" dirty="0"/>
+          </a:p>
+        </p:txBody>
+      </p:sp>
+      <p:sp>
+        <p:nvSpPr>
+          <p:cNvPr id="9" name="Shape 7"/>
+          <p:cNvSpPr/>
+          <p:nvPr/>
+        </p:nvSpPr>
+        <p:spPr>
+          <a:xfrm>
+            <a:off x="3657600" y="2194560"/>
+            <a:ext cx="1828800" cy="0"/>
+          </a:xfrm>
+          <a:prstGeom prst="line">
+            <a:avLst/>
+          </a:prstGeom>
+          <a:noFill/>
+          <a:ln w="9525">
+            <a:solidFill>
+              <a:srgbClr val="999999"/>
+            </a:solidFill>
+            <a:prstDash val="solid"/>
+          </a:ln>
+        </p:spPr>
+      </p:sp>
+      <p:sp>
+        <p:nvSpPr>
+          <p:cNvPr id="10" name="Text 8"/>
+          <p:cNvSpPr/>
+          <p:nvPr/>
+        </p:nvSpPr>
+        <p:spPr>
+          <a:xfrm>
+            <a:off x="3611880" y="2377440"/>
+            <a:ext cx="2011680" cy="1371600"/>
+          </a:xfrm>
+          <a:prstGeom prst="rect">
+            <a:avLst/>
+          </a:prstGeom>
+          <a:noFill/>
+          <a:ln/>
+        </p:spPr>
+        <p:txBody>
+          <a:bodyPr wrap="square" rtlCol="0" anchor="t"/>
+          <a:lstStyle/>
+          <a:p>
+            <a:pPr marL="342900" indent="-342900">
+              <a:spcAft>
+                <a:spcPts val="800"/>
+              </a:spcAft>
+              <a:buSzPct val="100000"/>
+              <a:buChar char="•"/>
+            </a:pPr>
+            <a:r>
+              <a:rPr lang="en-US" sz="1200" dirty="0">
+                <a:solidFill>
+                  <a:srgbClr val="333333"/>
+                </a:solidFill>
+              </a:rPr>
+              <a:t>Shadow repo reconstruction</a:t>
+            </a:r>
+            <a:endParaRPr lang="en-US" sz="1200" dirty="0"/>
+          </a:p>
+          <a:p>
+            <a:pPr marL="342900" indent="-342900">
+              <a:spcAft>
+                <a:spcPts val="800"/>
+              </a:spcAft>
+              <a:buSzPct val="100000"/>
+              <a:buChar char="•"/>
+            </a:pPr>
+            <a:r>
+              <a:rPr lang="en-US" sz="1200" dirty="0">
+                <a:solidFill>
+                  <a:srgbClr val="333333"/>
+                </a:solidFill>
+              </a:rPr>
+              <a:t>Metric calculation</a:t>
+            </a:r>
+            <a:endParaRPr lang="en-US" sz="1200" dirty="0"/>
+          </a:p>
+          <a:p>
+            <a:pPr marL="342900" indent="-342900">
+              <a:spcAft>
+                <a:spcPts val="800"/>
+              </a:spcAft>
+              <a:buSzPct val="100000"/>
+              <a:buChar char="•"/>
+            </a:pPr>
+            <a:r>
+              <a:rPr lang="en-US" sz="1200" dirty="0">
+                <a:solidFill>
+                  <a:srgbClr val="333333"/>
+                </a:solidFill>
+              </a:rPr>
+              <a:t>Divergence detection &amp; synthesis</a:t>
+            </a:r>
+            <a:endParaRPr lang="en-US" sz="1200" dirty="0"/>
+          </a:p>
+        </p:txBody>
+      </p:sp>
+      <p:sp>
+        <p:nvSpPr>
+          <p:cNvPr id="11" name="Shape 9"/>
+          <p:cNvSpPr/>
+          <p:nvPr/>
+        </p:nvSpPr>
+        <p:spPr>
+          <a:xfrm>
+            <a:off x="6583680" y="1463040"/>
+            <a:ext cx="2377440" cy="2377440"/>
+          </a:xfrm>
+          <a:prstGeom prst="rect">
+            <a:avLst/>
+          </a:prstGeom>
+          <a:solidFill>
+            <a:srgbClr val="FFFFFF"/>
+          </a:solidFill>
+          <a:ln w="12700">
+            <a:solidFill>
+              <a:srgbClr val="000000"/>
+            </a:solidFill>
+            <a:prstDash val="solid"/>
+          </a:ln>
+        </p:spPr>
+      </p:sp>
+      <p:sp>
+        <p:nvSpPr>
+          <p:cNvPr id="12" name="Text 10"/>
+          <p:cNvSpPr/>
+          <p:nvPr/>
+        </p:nvSpPr>
+        <p:spPr>
+          <a:xfrm>
+            <a:off x="6675120" y="1645920"/>
+            <a:ext cx="2194560" cy="457200"/>
+          </a:xfrm>
+          <a:prstGeom prst="rect">
+            <a:avLst/>
+          </a:prstGeom>
+          <a:noFill/>
+          <a:ln/>
+        </p:spPr>
+        <p:txBody>
+          <a:bodyPr wrap="square" lIns="0" tIns="0" rIns="0" bIns="0" rtlCol="0" anchor="ctr"/>
+          <a:lstStyle/>
+          <a:p>
+            <a:pPr algn="ctr" indent="0" marL="0">
+              <a:buNone/>
+            </a:pPr>
+            <a:r>
+              <a:rPr lang="en-US" sz="1600" b="1" dirty="0">
+                <a:solidFill>
+                  <a:srgbClr val="000000"/>
+                </a:solidFill>
+              </a:rPr>
+              <a:t>Dashboard</a:t>
+            </a:r>
+            <a:endParaRPr lang="en-US" sz="1600" dirty="0"/>
+          </a:p>
+        </p:txBody>
+      </p:sp>
+      <p:sp>
+        <p:nvSpPr>
+          <p:cNvPr id="13" name="Shape 11"/>
+          <p:cNvSpPr/>
+          <p:nvPr/>
+        </p:nvSpPr>
+        <p:spPr>
+          <a:xfrm>
+            <a:off x="6858000" y="2194560"/>
+            <a:ext cx="1828800" cy="0"/>
+          </a:xfrm>
+          <a:prstGeom prst="line">
+            <a:avLst/>
+          </a:prstGeom>
+          <a:noFill/>
+          <a:ln w="9525">
+            <a:solidFill>
+              <a:srgbClr val="999999"/>
+            </a:solidFill>
+            <a:prstDash val="solid"/>
+          </a:ln>
+        </p:spPr>
+      </p:sp>
+      <p:sp>
+        <p:nvSpPr>
+          <p:cNvPr id="14" name="Text 12"/>
+          <p:cNvSpPr/>
+          <p:nvPr/>
+        </p:nvSpPr>
+        <p:spPr>
+          <a:xfrm>
+            <a:off x="6812280" y="2377440"/>
+            <a:ext cx="2011680" cy="1371600"/>
+          </a:xfrm>
+          <a:prstGeom prst="rect">
+            <a:avLst/>
+          </a:prstGeom>
+          <a:noFill/>
+          <a:ln/>
+        </p:spPr>
+        <p:txBody>
+          <a:bodyPr wrap="square" rtlCol="0" anchor="t"/>
+          <a:lstStyle/>
+          <a:p>
+            <a:pPr marL="342900" indent="-342900">
+              <a:spcAft>
+                <a:spcPts val="800"/>
+              </a:spcAft>
+              <a:buSzPct val="100000"/>
+              <a:buChar char="•"/>
+            </a:pPr>
+            <a:r>
+              <a:rPr lang="en-US" sz="1200" dirty="0">
+                <a:solidFill>
+                  <a:srgbClr val="333333"/>
+                </a:solidFill>
+              </a:rPr>
+              <a:t>Surfaces divergence points in context</a:t>
+            </a:r>
+            <a:endParaRPr lang="en-US" sz="1200" dirty="0"/>
+          </a:p>
+          <a:p>
+            <a:pPr marL="342900" indent="-342900">
+              <a:spcAft>
+                <a:spcPts val="800"/>
+              </a:spcAft>
+              <a:buSzPct val="100000"/>
+              <a:buChar char="•"/>
+            </a:pPr>
+            <a:r>
+              <a:rPr lang="en-US" sz="1200" dirty="0">
+                <a:solidFill>
+                  <a:srgbClr val="333333"/>
+                </a:solidFill>
+              </a:rPr>
+              <a:t>Explains alternative paths</a:t>
+            </a:r>
+            <a:endParaRPr lang="en-US" sz="1200" dirty="0"/>
+          </a:p>
+        </p:txBody>
+      </p:sp>
+      <p:sp>
+        <p:nvSpPr>
+          <p:cNvPr id="15" name="Shape 13"/>
+          <p:cNvSpPr/>
+          <p:nvPr/>
+        </p:nvSpPr>
+        <p:spPr>
+          <a:xfrm>
+            <a:off x="2560320" y="2651760"/>
+            <a:ext cx="822960" cy="0"/>
+          </a:xfrm>
+          <a:prstGeom prst="line">
+            <a:avLst/>
+          </a:prstGeom>
+          <a:noFill/>
+          <a:ln w="19050">
+            <a:solidFill>
+              <a:srgbClr val="000000"/>
+            </a:solidFill>
+            <a:prstDash val="solid"/>
+            <a:tailEnd type="triangle"/>
+          </a:ln>
+        </p:spPr>
+      </p:sp>
+      <p:sp>
+        <p:nvSpPr>
+          <p:cNvPr id="16" name="Text 14"/>
+          <p:cNvSpPr/>
+          <p:nvPr/>
+        </p:nvSpPr>
+        <p:spPr>
+          <a:xfrm>
+            <a:off x="2514600" y="2148840"/>
+            <a:ext cx="914400" cy="457200"/>
+          </a:xfrm>
+          <a:prstGeom prst="rect">
+            <a:avLst/>
+          </a:prstGeom>
+          <a:noFill/>
+          <a:ln/>
+        </p:spPr>
+        <p:txBody>
+          <a:bodyPr wrap="square" lIns="0" tIns="0" rIns="0" bIns="0" rtlCol="0" anchor="b"/>
+          <a:lstStyle/>
+          <a:p>
+            <a:pPr algn="ctr" indent="0" marL="0">
+              <a:buNone/>
+            </a:pPr>
+            <a:r>
+              <a:rPr lang="en-US" sz="900" i="1" dirty="0">
+                <a:solidFill>
+                  <a:srgbClr val="555555"/>
+                </a:solidFill>
+              </a:rPr>
+              <a:t>events.jsonl + initial-src/</a:t>
+            </a:r>
+            <a:endParaRPr lang="en-US" sz="900" dirty="0"/>
+          </a:p>
+        </p:txBody>
+      </p:sp>
+      <p:sp>
+        <p:nvSpPr>
+          <p:cNvPr id="17" name="Shape 15"/>
+          <p:cNvSpPr/>
+          <p:nvPr/>
+        </p:nvSpPr>
+        <p:spPr>
+          <a:xfrm>
+            <a:off x="5760720" y="2651760"/>
+            <a:ext cx="822960" cy="0"/>
+          </a:xfrm>
+          <a:prstGeom prst="line">
+            <a:avLst/>
+          </a:prstGeom>
+          <a:noFill/>
+          <a:ln w="19050">
+            <a:solidFill>
+              <a:srgbClr val="000000"/>
+            </a:solidFill>
+            <a:prstDash val="solid"/>
+            <a:tailEnd type="triangle"/>
+          </a:ln>
+        </p:spPr>
+      </p:sp>
+      <p:sp>
+        <p:nvSpPr>
+          <p:cNvPr id="18" name="Text 16"/>
+          <p:cNvSpPr/>
+          <p:nvPr/>
+        </p:nvSpPr>
+        <p:spPr>
+          <a:xfrm>
+            <a:off x="5715000" y="2148840"/>
+            <a:ext cx="914400" cy="457200"/>
+          </a:xfrm>
+          <a:prstGeom prst="rect">
+            <a:avLst/>
+          </a:prstGeom>
+          <a:noFill/>
+          <a:ln/>
+        </p:spPr>
+        <p:txBody>
+          <a:bodyPr wrap="square" lIns="0" tIns="0" rIns="0" bIns="0" rtlCol="0" anchor="b"/>
+          <a:lstStyle/>
+          <a:p>
+            <a:pPr algn="ctr" indent="0" marL="0">
+              <a:buNone/>
+            </a:pPr>
+            <a:r>
+              <a:rPr lang="en-US" sz="900" i="1" dirty="0">
+                <a:solidFill>
+                  <a:srgbClr val="555555"/>
+                </a:solidFill>
+              </a:rPr>
+              <a:t>analysis</a:t>
+            </a:r>
+            <a:endParaRPr lang="en-US" sz="900" dirty="0"/>
+          </a:p>
+          <a:p>
+            <a:pPr algn="ctr" indent="0" marL="0">
+              <a:buNone/>
+            </a:pPr>
+            <a:r>
+              <a:rPr lang="en-US" sz="900" i="1" dirty="0">
+                <a:solidFill>
+                  <a:srgbClr val="555555"/>
+                </a:solidFill>
+              </a:rPr>
+              <a:t>-report.json</a:t>
+            </a:r>
+            <a:endParaRPr lang="en-US" sz="900" dirty="0"/>
+          </a:p>
+        </p:txBody>
+      </p:sp>
+    </p:spTree>
+  </p:cSld>
+  <p:clrMapOvr>
+    <a:masterClrMapping/>
+  </p:clrMapOvr>
+</p:sld>
+</file>
+
+<file path=ppt/slides/slide8.xml><?xml version="1.0" encoding="utf-8"?>
+<p:sld xmlns:a="http://schemas.openxmlformats.org/drawingml/2006/main" xmlns:r="http://schemas.openxmlformats.org/officeDocument/2006/relationships" xmlns:p="http://schemas.openxmlformats.org/presentationml/2006/main">
+  <p:cSld name="Slide 8">
+    <p:spTree>
+      <p:nvGrpSpPr>
+        <p:cNvPr id="1" name=""/>
+        <p:cNvGrpSpPr/>
+        <p:nvPr/>
+      </p:nvGrpSpPr>
+      <p:grpSpPr>
+        <a:xfrm>
+          <a:off x="0" y="0"/>
+          <a:ext cx="0" cy="0"/>
+          <a:chOff x="0" y="0"/>
+          <a:chExt cx="0" cy="0"/>
+        </a:xfrm>
+      </p:grpSpPr>
+      <p:sp>
+        <p:nvSpPr>
+          <p:cNvPr id="2" name="Text 0"/>
+          <p:cNvSpPr/>
+          <p:nvPr/>
+        </p:nvSpPr>
+        <p:spPr>
+          <a:xfrm>
             <a:off x="457200" y="137160"/>
             <a:ext cx="8229600" cy="640080"/>
           </a:xfrm>
@@ -15189,7 +15802,7 @@
       </p:sp>
       <p:graphicFrame>
         <p:nvGraphicFramePr>
-          <p:cNvPr id="8" name="Table 0"/>
+          <p:cNvPr id="9" name="Table 0"/>
           <p:cNvGraphicFramePr>
             <a:graphicFrameLocks noGrp="1"/>
           </p:cNvGraphicFramePr>
@@ -16040,217 +16653,6 @@
 </p:sld>
 </file>
 
-<file path=ppt/slides/slide8.xml><?xml version="1.0" encoding="utf-8"?>
-<p:sld xmlns:a="http://schemas.openxmlformats.org/drawingml/2006/main" xmlns:r="http://schemas.openxmlformats.org/officeDocument/2006/relationships" xmlns:p="http://schemas.openxmlformats.org/presentationml/2006/main">
-  <p:cSld name="Slide 8">
-    <p:spTree>
-      <p:nvGrpSpPr>
-        <p:cNvPr id="1" name=""/>
-        <p:cNvGrpSpPr/>
-        <p:nvPr/>
-      </p:nvGrpSpPr>
-      <p:grpSpPr>
-        <a:xfrm>
-          <a:off x="0" y="0"/>
-          <a:ext cx="0" cy="0"/>
-          <a:chOff x="0" y="0"/>
-          <a:chExt cx="0" cy="0"/>
-        </a:xfrm>
-      </p:grpSpPr>
-      <p:sp>
-        <p:nvSpPr>
-          <p:cNvPr id="2" name="Text 0"/>
-          <p:cNvSpPr/>
-          <p:nvPr/>
-        </p:nvSpPr>
-        <p:spPr>
-          <a:xfrm>
-            <a:off x="457200" y="274320"/>
-            <a:ext cx="8229600" cy="640080"/>
-          </a:xfrm>
-          <a:prstGeom prst="rect">
-            <a:avLst/>
-          </a:prstGeom>
-          <a:noFill/>
-          <a:ln/>
-        </p:spPr>
-        <p:txBody>
-          <a:bodyPr wrap="square" lIns="0" tIns="0" rIns="0" bIns="0" rtlCol="0" anchor="ctr"/>
-          <a:lstStyle/>
-          <a:p>
-            <a:pPr indent="0" marL="0">
-              <a:buNone/>
-            </a:pPr>
-            <a:r>
-              <a:rPr lang="en-US" sz="2800" b="1" dirty="0">
-                <a:solidFill>
-                  <a:srgbClr val="000000"/>
-                </a:solidFill>
-              </a:rPr>
-              <a:t>Four kinds of divergence</a:t>
-            </a:r>
-            <a:endParaRPr lang="en-US" sz="2800" dirty="0"/>
-          </a:p>
-        </p:txBody>
-      </p:sp>
-      <p:sp>
-        <p:nvSpPr>
-          <p:cNvPr id="3" name="Text 1"/>
-          <p:cNvSpPr/>
-          <p:nvPr/>
-        </p:nvSpPr>
-        <p:spPr>
-          <a:xfrm>
-            <a:off x="457200" y="1371600"/>
-            <a:ext cx="8229600" cy="3200400"/>
-          </a:xfrm>
-          <a:prstGeom prst="rect">
-            <a:avLst/>
-          </a:prstGeom>
-          <a:noFill/>
-          <a:ln/>
-        </p:spPr>
-        <p:txBody>
-          <a:bodyPr wrap="square" rtlCol="0" anchor="t"/>
-          <a:lstStyle/>
-          <a:p>
-            <a:pPr marL="342900" indent="-342900">
-              <a:spcAft>
-                <a:spcPts val="1000"/>
-              </a:spcAft>
-              <a:buSzPct val="100000"/>
-              <a:buChar char="•"/>
-            </a:pPr>
-            <a:r>
-              <a:rPr lang="en-US" sz="1800" dirty="0">
-                <a:solidFill>
-                  <a:srgbClr val="000000"/>
-                </a:solidFill>
-              </a:rPr>
-              <a:t>Manual-Refactor </a:t>
-            </a:r>
-            <a:pPr indent="0" marL="0">
-              <a:spcAft>
-                <a:spcPts val="1000"/>
-              </a:spcAft>
-              <a:buNone/>
-            </a:pPr>
-            <a:r>
-              <a:rPr lang="en-US" sz="1800" dirty="0">
-                <a:solidFill>
-                  <a:srgbClr val="888888"/>
-                </a:solidFill>
-              </a:rPr>
-              <a:t>- unnecessary risk (hand-edit when the IDE could have safely done it).</a:t>
-            </a:r>
-            <a:endParaRPr lang="en-US" sz="1800" dirty="0"/>
-          </a:p>
-          <a:p>
-            <a:pPr marL="342900" indent="-342900">
-              <a:spcAft>
-                <a:spcPts val="1000"/>
-              </a:spcAft>
-              <a:buSzPct val="100000"/>
-              <a:buChar char="•"/>
-            </a:pPr>
-            <a:r>
-              <a:rPr lang="en-US" sz="1800" dirty="0">
-                <a:solidFill>
-                  <a:srgbClr val="000000"/>
-                </a:solidFill>
-              </a:rPr>
-              <a:t>Ordering </a:t>
-            </a:r>
-            <a:pPr indent="0" marL="0">
-              <a:spcAft>
-                <a:spcPts val="1000"/>
-              </a:spcAft>
-              <a:buNone/>
-            </a:pPr>
-            <a:r>
-              <a:rPr lang="en-US" sz="1800" dirty="0">
-                <a:solidFill>
-                  <a:srgbClr val="888888"/>
-                </a:solidFill>
-              </a:rPr>
-              <a:t>- right refactorings, wrong sequence.</a:t>
-            </a:r>
-            <a:endParaRPr lang="en-US" sz="1800" dirty="0"/>
-          </a:p>
-          <a:p>
-            <a:pPr marL="342900" indent="-342900">
-              <a:spcAft>
-                <a:spcPts val="1000"/>
-              </a:spcAft>
-              <a:buSzPct val="100000"/>
-              <a:buChar char="•"/>
-            </a:pPr>
-            <a:r>
-              <a:rPr lang="en-US" sz="1800" dirty="0">
-                <a:solidFill>
-                  <a:srgbClr val="000000"/>
-                </a:solidFill>
-              </a:rPr>
-              <a:t>Rework </a:t>
-            </a:r>
-            <a:pPr indent="0" marL="0">
-              <a:spcAft>
-                <a:spcPts val="1000"/>
-              </a:spcAft>
-              <a:buNone/>
-            </a:pPr>
-            <a:r>
-              <a:rPr lang="en-US" sz="1800" dirty="0">
-                <a:solidFill>
-                  <a:srgbClr val="888888"/>
-                </a:solidFill>
-              </a:rPr>
-              <a:t>- unnecessary churn (added then removed).</a:t>
-            </a:r>
-            <a:endParaRPr lang="en-US" sz="1800" dirty="0"/>
-          </a:p>
-          <a:p>
-            <a:pPr marL="342900" indent="-342900">
-              <a:spcAft>
-                <a:spcPts val="1000"/>
-              </a:spcAft>
-              <a:buSzPct val="100000"/>
-              <a:buChar char="•"/>
-            </a:pPr>
-            <a:r>
-              <a:rPr lang="en-US" sz="1800" dirty="0">
-                <a:solidFill>
-                  <a:srgbClr val="000000"/>
-                </a:solidFill>
-              </a:rPr>
-              <a:t>Hygiene </a:t>
-            </a:r>
-            <a:pPr indent="0" marL="0">
-              <a:spcAft>
-                <a:spcPts val="1000"/>
-              </a:spcAft>
-              <a:buNone/>
-            </a:pPr>
-            <a:r>
-              <a:rPr lang="en-US" sz="1800" dirty="0">
-                <a:solidFill>
-                  <a:srgbClr val="888888"/>
-                </a:solidFill>
-              </a:rPr>
-              <a:t>- missing safety checkpoints (no tests, no commits).</a:t>
-            </a:r>
-            <a:endParaRPr lang="en-US" sz="1800" dirty="0"/>
-          </a:p>
-        </p:txBody>
-      </p:sp>
-    </p:spTree>
-  </p:cSld>
-  <p:clrMapOvr>
-    <a:masterClrMapping/>
-  </p:clrMapOvr>
-</p:sld>
-</file>
-
 <file path=ppt/slides/slide9.xml><?xml version="1.0" encoding="utf-8"?>
 <p:sld xmlns:a="http://schemas.openxmlformats.org/drawingml/2006/main" xmlns:r="http://schemas.openxmlformats.org/officeDocument/2006/relationships" xmlns:p="http://schemas.openxmlformats.org/presentationml/2006/main">
   <p:cSld name="Slide 9">
@@ -16298,7 +16700,7 @@
                   <a:srgbClr val="000000"/>
                 </a:solidFill>
               </a:rPr>
-              <a:t>Manual-Refactor: detect + synthesise</a:t>
+              <a:t>Four kinds of divergence</a:t>
             </a:r>
             <a:endParaRPr lang="en-US" sz="2800" dirty="0"/>
           </a:p>
@@ -16312,8 +16714,8 @@
         </p:nvSpPr>
         <p:spPr>
           <a:xfrm>
-            <a:off x="457200" y="1097280"/>
-            <a:ext cx="8229600" cy="1783080"/>
+            <a:off x="457200" y="1371600"/>
+            <a:ext cx="8229600" cy="3200400"/>
           </a:xfrm>
           <a:prstGeom prst="rect">
             <a:avLst/>
@@ -16327,123 +16729,133 @@
           <a:p>
             <a:pPr marL="342900" indent="-342900">
               <a:spcAft>
-                <a:spcPts val="2000"/>
+                <a:spcPts val="1000"/>
               </a:spcAft>
               <a:buSzPct val="100000"/>
               <a:buChar char="•"/>
             </a:pPr>
             <a:r>
-              <a:rPr lang="en-US" sz="1300" dirty="0">
+              <a:rPr lang="en-US" sz="1800" dirty="0">
                 <a:solidFill>
                   <a:srgbClr val="000000"/>
                 </a:solidFill>
               </a:rPr>
-              <a:t>Developer hand-edited something the IDE could have done safely (and with its precondition checks).</a:t>
-            </a:r>
-            <a:endParaRPr lang="en-US" sz="1300" dirty="0"/>
-          </a:p>
-          <a:p>
-            <a:pPr lvl="1" marL="685800" indent="-342900">
+              <a:t>Manual-Refactor </a:t>
+            </a:r>
+            <a:pPr indent="0" marL="0">
               <a:spcAft>
-                <a:spcPts val="600"/>
+                <a:spcPts val="1000"/>
+              </a:spcAft>
+              <a:buNone/>
+            </a:pPr>
+            <a:r>
+              <a:rPr lang="en-US" sz="1800" dirty="0">
+                <a:solidFill>
+                  <a:srgbClr val="888888"/>
+                </a:solidFill>
+              </a:rPr>
+              <a:t>- unnecessary risk (hand-edit when the IDE could have safely done it).</a:t>
+            </a:r>
+            <a:endParaRPr lang="en-US" sz="1800" dirty="0"/>
+          </a:p>
+          <a:p>
+            <a:pPr marL="342900" indent="-342900">
+              <a:spcAft>
+                <a:spcPts val="1000"/>
               </a:spcAft>
               <a:buSzPct val="100000"/>
-              <a:buFont typeface="+mj-lt"/>
-              <a:buAutoNum type="arabicPeriod" startAt="1"/>
-            </a:pPr>
-            <a:r>
-              <a:rPr lang="en-US" sz="1300" dirty="0">
+              <a:buChar char="•"/>
+            </a:pPr>
+            <a:r>
+              <a:rPr lang="en-US" sz="1800" dirty="0">
                 <a:solidFill>
                   <a:srgbClr val="000000"/>
                 </a:solidFill>
               </a:rPr>
-              <a:t>Refactoring Miner on sliding commit windows (of shadow repo) - anything we find that the IDE did not emit an event for is a manual refactoring.</a:t>
-            </a:r>
-            <a:endParaRPr lang="en-US" sz="1300" dirty="0"/>
-          </a:p>
-          <a:p>
-            <a:pPr lvl="1" marL="685800" indent="-342900">
+              <a:t>Ordering </a:t>
+            </a:r>
+            <a:pPr indent="0" marL="0">
               <a:spcAft>
-                <a:spcPts val="600"/>
+                <a:spcPts val="1000"/>
+              </a:spcAft>
+              <a:buNone/>
+            </a:pPr>
+            <a:r>
+              <a:rPr lang="en-US" sz="1800" dirty="0">
+                <a:solidFill>
+                  <a:srgbClr val="888888"/>
+                </a:solidFill>
+              </a:rPr>
+              <a:t>- right refactorings, wrong sequence.</a:t>
+            </a:r>
+            <a:endParaRPr lang="en-US" sz="1800" dirty="0"/>
+          </a:p>
+          <a:p>
+            <a:pPr marL="342900" indent="-342900">
+              <a:spcAft>
+                <a:spcPts val="1000"/>
               </a:spcAft>
               <a:buSzPct val="100000"/>
-              <a:buFont typeface="+mj-lt"/>
-              <a:buAutoNum type="arabicPeriod" startAt="1"/>
-            </a:pPr>
-            <a:r>
-              <a:rPr lang="en-US" sz="1300" dirty="0">
+              <a:buChar char="•"/>
+            </a:pPr>
+            <a:r>
+              <a:rPr lang="en-US" sz="1800" dirty="0">
                 <a:solidFill>
                   <a:srgbClr val="000000"/>
                 </a:solidFill>
               </a:rPr>
-              <a:t>Apply the equivalent IDE refactoring (Eclipse / JDT).</a:t>
-            </a:r>
-            <a:endParaRPr lang="en-US" sz="1300" dirty="0"/>
-          </a:p>
-          <a:p>
-            <a:pPr lvl="1" marL="685800" indent="-342900">
+              <a:t>Rework </a:t>
+            </a:r>
+            <a:pPr indent="0" marL="0">
               <a:spcAft>
-                <a:spcPts val="600"/>
+                <a:spcPts val="1000"/>
+              </a:spcAft>
+              <a:buNone/>
+            </a:pPr>
+            <a:r>
+              <a:rPr lang="en-US" sz="1800" dirty="0">
+                <a:solidFill>
+                  <a:srgbClr val="888888"/>
+                </a:solidFill>
+              </a:rPr>
+              <a:t>- unnecessary churn (added then removed).</a:t>
+            </a:r>
+            <a:endParaRPr lang="en-US" sz="1800" dirty="0"/>
+          </a:p>
+          <a:p>
+            <a:pPr marL="342900" indent="-342900">
+              <a:spcAft>
+                <a:spcPts val="1000"/>
               </a:spcAft>
               <a:buSzPct val="100000"/>
-              <a:buFont typeface="+mj-lt"/>
-              <a:buAutoNum type="arabicPeriod" startAt="1"/>
-            </a:pPr>
-            <a:r>
-              <a:rPr lang="en-US" sz="1300" dirty="0">
+              <a:buChar char="•"/>
+            </a:pPr>
+            <a:r>
+              <a:rPr lang="en-US" sz="1800" dirty="0">
                 <a:solidFill>
                   <a:srgbClr val="000000"/>
                 </a:solidFill>
               </a:rPr>
-              <a:t>Reconcile minor JDT ↔ IntelliJ AST differences (e.g. static modifiers, variable liveness).</a:t>
-            </a:r>
-            <a:endParaRPr lang="en-US" sz="1300" dirty="0"/>
-          </a:p>
-          <a:p>
-            <a:pPr lvl="1" marL="685800" indent="-342900">
+              <a:t>Hygiene </a:t>
+            </a:r>
+            <a:pPr indent="0" marL="0">
               <a:spcAft>
-                <a:spcPts val="600"/>
+                <a:spcPts val="1000"/>
               </a:spcAft>
-              <a:buSzPct val="100000"/>
-              <a:buFont typeface="+mj-lt"/>
-              <a:buAutoNum type="arabicPeriod" startAt="1"/>
-            </a:pPr>
-            <a:r>
-              <a:rPr lang="en-US" sz="1300" dirty="0">
-                <a:solidFill>
-                  <a:srgbClr val="000000"/>
-                </a:solidFill>
-              </a:rPr>
-              <a:t>Merge the user's other edits back on top.</a:t>
-            </a:r>
-            <a:endParaRPr lang="en-US" sz="1300" dirty="0"/>
-          </a:p>
-        </p:txBody>
-      </p:sp>
-      <p:pic>
-        <p:nvPicPr>
-          <p:cNvPr id="4" name="Image 0" descr="images/manual-refactor.png">    </p:cNvPr>
-          <p:cNvPicPr>
-            <a:picLocks noChangeAspect="1"/>
-          </p:cNvPicPr>
-          <p:nvPr/>
-        </p:nvPicPr>
-        <p:blipFill>
-          <a:blip r:embed="rId1"/>
-          <a:stretch>
-            <a:fillRect/>
-          </a:stretch>
-        </p:blipFill>
-        <p:spPr>
-          <a:xfrm>
-            <a:off x="1463040" y="2880360"/>
-            <a:ext cx="6217920" cy="2039112"/>
-          </a:xfrm>
-          <a:prstGeom prst="rect">
-            <a:avLst/>
-          </a:prstGeom>
-        </p:spPr>
-      </p:pic>
+              <a:buNone/>
+            </a:pPr>
+            <a:r>
+              <a:rPr lang="en-US" sz="1800" dirty="0">
+                <a:solidFill>
+                  <a:srgbClr val="888888"/>
+                </a:solidFill>
+              </a:rPr>
+              <a:t>- missing safety checkpoints (no tests, no commits).</a:t>
+            </a:r>
+            <a:endParaRPr lang="en-US" sz="1800" dirty="0"/>
+          </a:p>
+        </p:txBody>
+      </p:sp>
     </p:spTree>
   </p:cSld>
   <p:clrMapOvr>

--- a/presentation/slides.pptx
+++ b/presentation/slides.pptx
@@ -5087,8 +5087,8 @@
         </p:nvSpPr>
         <p:spPr>
           <a:xfrm>
-            <a:off x="457200" y="1188720"/>
-            <a:ext cx="8229600" cy="1463040"/>
+            <a:off x="457200" y="1234440"/>
+            <a:ext cx="8229600" cy="365760"/>
           </a:xfrm>
           <a:prstGeom prst="rect">
             <a:avLst/>
@@ -5104,28 +5104,14 @@
               <a:buNone/>
             </a:pPr>
             <a:r>
-              <a:rPr lang="en-US" sz="3200" b="1" dirty="0">
-                <a:solidFill>
-                  <a:srgbClr val="000000"/>
-                </a:solidFill>
-              </a:rPr>
-              <a:t>Beyond Before-and-After</a:t>
-            </a:r>
-            <a:endParaRPr lang="en-US" sz="3200" dirty="0"/>
-          </a:p>
-          <a:p>
-            <a:pPr algn="ctr" indent="0" marL="0">
-              <a:buNone/>
-            </a:pPr>
-            <a:r>
-              <a:rPr lang="en-US" sz="3200" b="1" dirty="0">
-                <a:solidFill>
-                  <a:srgbClr val="000000"/>
-                </a:solidFill>
-              </a:rPr>
-              <a:t>Process-Quality Evaluation of Refactoring Sessions</a:t>
-            </a:r>
-            <a:endParaRPr lang="en-US" sz="3200" dirty="0"/>
+              <a:rPr lang="en-US" sz="1800" i="1" dirty="0">
+                <a:solidFill>
+                  <a:srgbClr val="555555"/>
+                </a:solidFill>
+              </a:rPr>
+              <a:t>Beyond Before-and-After:</a:t>
+            </a:r>
+            <a:endParaRPr lang="en-US" sz="1800" dirty="0"/>
           </a:p>
         </p:txBody>
       </p:sp>
@@ -5137,7 +5123,7 @@
         </p:nvSpPr>
         <p:spPr>
           <a:xfrm>
-            <a:off x="457200" y="2834640"/>
+            <a:off x="457200" y="1783080"/>
             <a:ext cx="8229600" cy="822960"/>
           </a:xfrm>
           <a:prstGeom prst="rect">
@@ -5147,6 +5133,42 @@
           <a:ln/>
         </p:spPr>
         <p:txBody>
+          <a:bodyPr wrap="square" lIns="0" tIns="0" rIns="0" bIns="0" rtlCol="0" anchor="ctr"/>
+          <a:lstStyle/>
+          <a:p>
+            <a:pPr algn="ctr" indent="0" marL="0">
+              <a:buNone/>
+            </a:pPr>
+            <a:r>
+              <a:rPr lang="en-US" sz="3200" b="1" dirty="0">
+                <a:solidFill>
+                  <a:srgbClr val="000000"/>
+                </a:solidFill>
+              </a:rPr>
+              <a:t>Process-Quality Evaluation of Refactoring Sessions</a:t>
+            </a:r>
+            <a:endParaRPr lang="en-US" sz="3200" dirty="0"/>
+          </a:p>
+        </p:txBody>
+      </p:sp>
+      <p:sp>
+        <p:nvSpPr>
+          <p:cNvPr id="4" name="Text 2"/>
+          <p:cNvSpPr/>
+          <p:nvPr/>
+        </p:nvSpPr>
+        <p:spPr>
+          <a:xfrm>
+            <a:off x="457200" y="2788920"/>
+            <a:ext cx="8229600" cy="822960"/>
+          </a:xfrm>
+          <a:prstGeom prst="rect">
+            <a:avLst/>
+          </a:prstGeom>
+          <a:noFill/>
+          <a:ln/>
+        </p:spPr>
+        <p:txBody>
           <a:bodyPr wrap="square" rtlCol="0" anchor="ctr"/>
           <a:lstStyle/>
           <a:p>
@@ -5167,7 +5189,7 @@
       </p:sp>
       <p:sp>
         <p:nvSpPr>
-          <p:cNvPr id="4" name="Text 2"/>
+          <p:cNvPr id="5" name="Text 3"/>
           <p:cNvSpPr/>
           <p:nvPr/>
         </p:nvSpPr>
@@ -5203,7 +5225,7 @@
       </p:sp>
       <p:sp>
         <p:nvSpPr>
-          <p:cNvPr id="5" name="Text 3"/>
+          <p:cNvPr id="6" name="Text 4"/>
           <p:cNvSpPr/>
           <p:nvPr/>
         </p:nvSpPr>
@@ -5231,7 +5253,7 @@
                   <a:srgbClr val="777777"/>
                 </a:solidFill>
               </a:rPr>
-              <a:t>Supervisor: [Robert Chatley]  ·  Second marker: [Cristian Cadar]</a:t>
+              <a:t>Supervisor: Dr Robert Chatley  ·  Second marker: Dr Cristian Cadar</a:t>
             </a:r>
             <a:endParaRPr lang="en-US" sz="1200" dirty="0"/>
           </a:p>
@@ -5271,7 +5293,7 @@
         <p:spPr>
           <a:xfrm>
             <a:off x="457200" y="274320"/>
-            <a:ext cx="8229600" cy="640080"/>
+            <a:ext cx="5760720" cy="640080"/>
           </a:xfrm>
           <a:prstGeom prst="rect">
             <a:avLst/>
@@ -5287,14 +5309,14 @@
               <a:buNone/>
             </a:pPr>
             <a:r>
-              <a:rPr lang="en-US" sz="2800" b="1" dirty="0">
+              <a:rPr lang="en-US" sz="2400" b="1" dirty="0">
                 <a:solidFill>
                   <a:srgbClr val="000000"/>
                 </a:solidFill>
               </a:rPr>
               <a:t>Manual-Refactor: detect + synthesise</a:t>
             </a:r>
-            <a:endParaRPr lang="en-US" sz="2800" dirty="0"/>
+            <a:endParaRPr lang="en-US" sz="2400" dirty="0"/>
           </a:p>
         </p:txBody>
       </p:sp>
@@ -5414,9 +5436,64 @@
           </a:p>
         </p:txBody>
       </p:sp>
+      <p:sp>
+        <p:nvSpPr>
+          <p:cNvPr id="4" name="Text 2"/>
+          <p:cNvSpPr/>
+          <p:nvPr/>
+        </p:nvSpPr>
+        <p:spPr>
+          <a:xfrm>
+            <a:off x="6446520" y="274320"/>
+            <a:ext cx="2560320" cy="640080"/>
+          </a:xfrm>
+          <a:prstGeom prst="rect">
+            <a:avLst/>
+          </a:prstGeom>
+          <a:solidFill>
+            <a:srgbClr val="F5F5F5"/>
+          </a:solidFill>
+          <a:ln/>
+        </p:spPr>
+        <p:txBody>
+          <a:bodyPr wrap="square" lIns="38100" tIns="38100" rIns="38100" bIns="38100" rtlCol="0" anchor="t"/>
+          <a:lstStyle/>
+          <a:p>
+            <a:pPr indent="0" marL="0">
+              <a:spcAft>
+                <a:spcPts val="200"/>
+              </a:spcAft>
+              <a:buNone/>
+            </a:pPr>
+            <a:r>
+              <a:rPr lang="en-US" sz="1100" i="1" dirty="0">
+                <a:solidFill>
+                  <a:srgbClr val="333333"/>
+                </a:solidFill>
+              </a:rPr>
+              <a:t>“ Very actionable - at the start I didn't know most IntelliJ actions. ”</a:t>
+            </a:r>
+            <a:endParaRPr lang="en-US" sz="1100" dirty="0"/>
+          </a:p>
+          <a:p>
+            <a:pPr indent="0" marL="0">
+              <a:buNone/>
+            </a:pPr>
+            <a:r>
+              <a:rPr lang="en-US" sz="1100" i="1" dirty="0">
+                <a:solidFill>
+                  <a:srgbClr val="888888"/>
+                </a:solidFill>
+              </a:rPr>
+              <a:t>— P2</a:t>
+            </a:r>
+            <a:endParaRPr lang="en-US" sz="1100" dirty="0"/>
+          </a:p>
+        </p:txBody>
+      </p:sp>
       <p:pic>
         <p:nvPicPr>
-          <p:cNvPr id="4" name="Image 0" descr="images/manual-refactor.png">    </p:cNvPr>
+          <p:cNvPr id="5" name="Image 0" descr="images/manual-refactor.png">    </p:cNvPr>
           <p:cNvPicPr>
             <a:picLocks noChangeAspect="1"/>
           </p:cNvPicPr>
@@ -5472,7 +5549,7 @@
         <p:spPr>
           <a:xfrm>
             <a:off x="457200" y="274320"/>
-            <a:ext cx="8229600" cy="640080"/>
+            <a:ext cx="5760720" cy="640080"/>
           </a:xfrm>
           <a:prstGeom prst="rect">
             <a:avLst/>
@@ -5488,14 +5565,14 @@
               <a:buNone/>
             </a:pPr>
             <a:r>
-              <a:rPr lang="en-US" sz="2800" b="1" dirty="0">
+              <a:rPr lang="en-US" sz="2400" b="1" dirty="0">
                 <a:solidFill>
                   <a:srgbClr val="000000"/>
                 </a:solidFill>
               </a:rPr>
               <a:t>Ordering: detect + synthesise</a:t>
             </a:r>
-            <a:endParaRPr lang="en-US" sz="2800" dirty="0"/>
+            <a:endParaRPr lang="en-US" sz="2400" dirty="0"/>
           </a:p>
         </p:txBody>
       </p:sp>
@@ -5615,9 +5692,64 @@
           </a:p>
         </p:txBody>
       </p:sp>
+      <p:sp>
+        <p:nvSpPr>
+          <p:cNvPr id="4" name="Text 2"/>
+          <p:cNvSpPr/>
+          <p:nvPr/>
+        </p:nvSpPr>
+        <p:spPr>
+          <a:xfrm>
+            <a:off x="6446520" y="274320"/>
+            <a:ext cx="2560320" cy="640080"/>
+          </a:xfrm>
+          <a:prstGeom prst="rect">
+            <a:avLst/>
+          </a:prstGeom>
+          <a:solidFill>
+            <a:srgbClr val="F5F5F5"/>
+          </a:solidFill>
+          <a:ln/>
+        </p:spPr>
+        <p:txBody>
+          <a:bodyPr wrap="square" lIns="38100" tIns="38100" rIns="38100" bIns="38100" rtlCol="0" anchor="t"/>
+          <a:lstStyle/>
+          <a:p>
+            <a:pPr indent="0" marL="0">
+              <a:spcAft>
+                <a:spcPts val="200"/>
+              </a:spcAft>
+              <a:buNone/>
+            </a:pPr>
+            <a:r>
+              <a:rPr lang="en-US" sz="1100" i="1" dirty="0">
+                <a:solidFill>
+                  <a:srgbClr val="333333"/>
+                </a:solidFill>
+              </a:rPr>
+              <a:t>“ How can you actually apply that in the future without knowing beforehand? ”</a:t>
+            </a:r>
+            <a:endParaRPr lang="en-US" sz="1100" dirty="0"/>
+          </a:p>
+          <a:p>
+            <a:pPr indent="0" marL="0">
+              <a:buNone/>
+            </a:pPr>
+            <a:r>
+              <a:rPr lang="en-US" sz="1100" i="1" dirty="0">
+                <a:solidFill>
+                  <a:srgbClr val="888888"/>
+                </a:solidFill>
+              </a:rPr>
+              <a:t>— P2</a:t>
+            </a:r>
+            <a:endParaRPr lang="en-US" sz="1100" dirty="0"/>
+          </a:p>
+        </p:txBody>
+      </p:sp>
       <p:pic>
         <p:nvPicPr>
-          <p:cNvPr id="4" name="Image 0" descr="images/reorder-synthesis.png">    </p:cNvPr>
+          <p:cNvPr id="5" name="Image 0" descr="images/reorder-synthesis.png">    </p:cNvPr>
           <p:cNvPicPr>
             <a:picLocks noChangeAspect="1"/>
           </p:cNvPicPr>
@@ -5673,7 +5805,7 @@
         <p:spPr>
           <a:xfrm>
             <a:off x="457200" y="274320"/>
-            <a:ext cx="8229600" cy="640080"/>
+            <a:ext cx="5760720" cy="640080"/>
           </a:xfrm>
           <a:prstGeom prst="rect">
             <a:avLst/>
@@ -5689,14 +5821,14 @@
               <a:buNone/>
             </a:pPr>
             <a:r>
-              <a:rPr lang="en-US" sz="2800" b="1" dirty="0">
+              <a:rPr lang="en-US" sz="2400" b="1" dirty="0">
                 <a:solidFill>
                   <a:srgbClr val="000000"/>
                 </a:solidFill>
               </a:rPr>
               <a:t>Rework: detect + synthesise</a:t>
             </a:r>
-            <a:endParaRPr lang="en-US" sz="2800" dirty="0"/>
+            <a:endParaRPr lang="en-US" sz="2400" dirty="0"/>
           </a:p>
         </p:txBody>
       </p:sp>
@@ -5797,9 +5929,64 @@
           </a:p>
         </p:txBody>
       </p:sp>
+      <p:sp>
+        <p:nvSpPr>
+          <p:cNvPr id="4" name="Text 2"/>
+          <p:cNvSpPr/>
+          <p:nvPr/>
+        </p:nvSpPr>
+        <p:spPr>
+          <a:xfrm>
+            <a:off x="6446520" y="274320"/>
+            <a:ext cx="2560320" cy="640080"/>
+          </a:xfrm>
+          <a:prstGeom prst="rect">
+            <a:avLst/>
+          </a:prstGeom>
+          <a:solidFill>
+            <a:srgbClr val="F5F5F5"/>
+          </a:solidFill>
+          <a:ln/>
+        </p:spPr>
+        <p:txBody>
+          <a:bodyPr wrap="square" lIns="38100" tIns="38100" rIns="38100" bIns="38100" rtlCol="0" anchor="t"/>
+          <a:lstStyle/>
+          <a:p>
+            <a:pPr indent="0" marL="0">
+              <a:spcAft>
+                <a:spcPts val="200"/>
+              </a:spcAft>
+              <a:buNone/>
+            </a:pPr>
+            <a:r>
+              <a:rPr lang="en-US" sz="1100" i="1" dirty="0">
+                <a:solidFill>
+                  <a:srgbClr val="333333"/>
+                </a:solidFill>
+              </a:rPr>
+              <a:t>“ Over-penalised undos + redos. ”</a:t>
+            </a:r>
+            <a:endParaRPr lang="en-US" sz="1100" dirty="0"/>
+          </a:p>
+          <a:p>
+            <a:pPr indent="0" marL="0">
+              <a:buNone/>
+            </a:pPr>
+            <a:r>
+              <a:rPr lang="en-US" sz="1100" i="1" dirty="0">
+                <a:solidFill>
+                  <a:srgbClr val="888888"/>
+                </a:solidFill>
+              </a:rPr>
+              <a:t>— P1</a:t>
+            </a:r>
+            <a:endParaRPr lang="en-US" sz="1100" dirty="0"/>
+          </a:p>
+        </p:txBody>
+      </p:sp>
       <p:pic>
         <p:nvPicPr>
-          <p:cNvPr id="4" name="Image 0" descr="images/rework.png">    </p:cNvPr>
+          <p:cNvPr id="5" name="Image 0" descr="images/rework.png">    </p:cNvPr>
           <p:cNvPicPr>
             <a:picLocks noChangeAspect="1"/>
           </p:cNvPicPr>
@@ -5855,7 +6042,7 @@
         <p:spPr>
           <a:xfrm>
             <a:off x="457200" y="274320"/>
-            <a:ext cx="8229600" cy="640080"/>
+            <a:ext cx="5760720" cy="640080"/>
           </a:xfrm>
           <a:prstGeom prst="rect">
             <a:avLst/>
@@ -5871,14 +6058,14 @@
               <a:buNone/>
             </a:pPr>
             <a:r>
-              <a:rPr lang="en-US" sz="2800" b="1" dirty="0">
+              <a:rPr lang="en-US" sz="2400" b="1" dirty="0">
                 <a:solidFill>
                   <a:srgbClr val="000000"/>
                 </a:solidFill>
               </a:rPr>
               <a:t>Hygiene: detect + synthesise</a:t>
             </a:r>
-            <a:endParaRPr lang="en-US" sz="2800" dirty="0"/>
+            <a:endParaRPr lang="en-US" sz="2400" dirty="0"/>
           </a:p>
         </p:txBody>
       </p:sp>
@@ -6013,6 +6200,61 @@
               <a:t>Very cheap to compute.</a:t>
             </a:r>
             <a:endParaRPr lang="en-US" sz="1400" dirty="0"/>
+          </a:p>
+        </p:txBody>
+      </p:sp>
+      <p:sp>
+        <p:nvSpPr>
+          <p:cNvPr id="4" name="Text 2"/>
+          <p:cNvSpPr/>
+          <p:nvPr/>
+        </p:nvSpPr>
+        <p:spPr>
+          <a:xfrm>
+            <a:off x="6446520" y="274320"/>
+            <a:ext cx="2560320" cy="640080"/>
+          </a:xfrm>
+          <a:prstGeom prst="rect">
+            <a:avLst/>
+          </a:prstGeom>
+          <a:solidFill>
+            <a:srgbClr val="F5F5F5"/>
+          </a:solidFill>
+          <a:ln/>
+        </p:spPr>
+        <p:txBody>
+          <a:bodyPr wrap="square" lIns="38100" tIns="38100" rIns="38100" bIns="38100" rtlCol="0" anchor="t"/>
+          <a:lstStyle/>
+          <a:p>
+            <a:pPr indent="0" marL="0">
+              <a:spcAft>
+                <a:spcPts val="200"/>
+              </a:spcAft>
+              <a:buNone/>
+            </a:pPr>
+            <a:r>
+              <a:rPr lang="en-US" sz="1100" i="1" dirty="0">
+                <a:solidFill>
+                  <a:srgbClr val="333333"/>
+                </a:solidFill>
+              </a:rPr>
+              <a:t>“ The most actionable kind - committing more frequently in particular. ”</a:t>
+            </a:r>
+            <a:endParaRPr lang="en-US" sz="1100" dirty="0"/>
+          </a:p>
+          <a:p>
+            <a:pPr indent="0" marL="0">
+              <a:buNone/>
+            </a:pPr>
+            <a:r>
+              <a:rPr lang="en-US" sz="1100" i="1" dirty="0">
+                <a:solidFill>
+                  <a:srgbClr val="888888"/>
+                </a:solidFill>
+              </a:rPr>
+              <a:t>— P1</a:t>
+            </a:r>
+            <a:endParaRPr lang="en-US" sz="1100" dirty="0"/>
           </a:p>
         </p:txBody>
       </p:sp>
@@ -6077,514 +6319,182 @@
           </a:p>
         </p:txBody>
       </p:sp>
-      <p:graphicFrame>
-        <p:nvGraphicFramePr>
-          <p:cNvPr id="15" name="Table 0"/>
-          <p:cNvGraphicFramePr>
-            <a:graphicFrameLocks noGrp="1"/>
-          </p:cNvGraphicFramePr>
-          <p:nvPr>
-            <p:extLst>
-              <p:ext uri="{D42A27DB-BD31-4B8C-83A1-F6EECF244321}">
-                <p14:modId xmlns:p14="http://schemas.microsoft.com/office/powerpoint/2010/main" val="1579011935"/>
-              </p:ext>
-            </p:extLst>
-          </p:nvPr>
-        </p:nvGraphicFramePr>
-        <p:xfrm>
-          <a:off x="457200" y="1280160"/>
-          <a:ext cx="8229600" cy="914400"/>
-        </p:xfrm>
-        <a:graphic>
-          <a:graphicData uri="http://schemas.openxmlformats.org/drawingml/2006/table">
-            <a:tbl>
-              <a:tblPr/>
-              <a:tblGrid>
-                <a:gridCol w="3474720"/>
-                <a:gridCol w="4754880"/>
-              </a:tblGrid>
-              <a:tr h="0">
-                <a:tc>
-                  <a:txBody>
-                    <a:bodyPr/>
-                    <a:lstStyle/>
-                    <a:p>
-                      <a:pPr algn="l" indent="0" marL="0">
-                        <a:buNone/>
-                      </a:pPr>
-                      <a:r>
-                        <a:rPr lang="en-US" sz="1300" b="1" dirty="0">
-                          <a:solidFill>
-                            <a:srgbClr val="1A1A1A"/>
-                          </a:solidFill>
-                        </a:rPr>
-                        <a:t>Question</a:t>
-                      </a:r>
-                      <a:endParaRPr lang="en-US" sz="1300" dirty="0"/>
-                    </a:p>
-                  </a:txBody>
-                  <a:tcPr marL="73152" marR="73152" marT="73152" marB="73152" anchor="ctr">
-                    <a:lnL w="6350" cap="flat" cmpd="sng" algn="ctr">
-                      <a:solidFill>
-                        <a:srgbClr val="CCCCCC"/>
-                      </a:solidFill>
-                      <a:prstDash val="solid"/>
-                      <a:round/>
-                      <a:headEnd type="none" w="med" len="med"/>
-                      <a:tailEnd type="none" w="med" len="med"/>
-                    </a:lnL>
-                    <a:lnR w="6350" cap="flat" cmpd="sng" algn="ctr">
-                      <a:solidFill>
-                        <a:srgbClr val="CCCCCC"/>
-                      </a:solidFill>
-                      <a:prstDash val="solid"/>
-                      <a:round/>
-                      <a:headEnd type="none" w="med" len="med"/>
-                      <a:tailEnd type="none" w="med" len="med"/>
-                    </a:lnR>
-                    <a:lnT w="6350" cap="flat" cmpd="sng" algn="ctr">
-                      <a:solidFill>
-                        <a:srgbClr val="CCCCCC"/>
-                      </a:solidFill>
-                      <a:prstDash val="solid"/>
-                      <a:round/>
-                      <a:headEnd type="none" w="med" len="med"/>
-                      <a:tailEnd type="none" w="med" len="med"/>
-                    </a:lnT>
-                    <a:lnB w="6350" cap="flat" cmpd="sng" algn="ctr">
-                      <a:solidFill>
-                        <a:srgbClr val="CCCCCC"/>
-                      </a:solidFill>
-                      <a:prstDash val="solid"/>
-                      <a:round/>
-                      <a:headEnd type="none" w="med" len="med"/>
-                      <a:tailEnd type="none" w="med" len="med"/>
-                    </a:lnB>
-                    <a:solidFill>
-                      <a:srgbClr val="F0F0F0"/>
-                    </a:solidFill>
-                  </a:tcPr>
-                </a:tc>
-                <a:tc>
-                  <a:txBody>
-                    <a:bodyPr/>
-                    <a:lstStyle/>
-                    <a:p>
-                      <a:pPr algn="l" indent="0" marL="0">
-                        <a:buNone/>
-                      </a:pPr>
-                      <a:r>
-                        <a:rPr lang="en-US" sz="1300" b="1" dirty="0">
-                          <a:solidFill>
-                            <a:srgbClr val="1A1A1A"/>
-                          </a:solidFill>
-                        </a:rPr>
-                        <a:t>Answered by</a:t>
-                      </a:r>
-                      <a:endParaRPr lang="en-US" sz="1300" dirty="0"/>
-                    </a:p>
-                  </a:txBody>
-                  <a:tcPr marL="73152" marR="73152" marT="73152" marB="73152" anchor="ctr">
-                    <a:lnL w="6350" cap="flat" cmpd="sng" algn="ctr">
-                      <a:solidFill>
-                        <a:srgbClr val="CCCCCC"/>
-                      </a:solidFill>
-                      <a:prstDash val="solid"/>
-                      <a:round/>
-                      <a:headEnd type="none" w="med" len="med"/>
-                      <a:tailEnd type="none" w="med" len="med"/>
-                    </a:lnL>
-                    <a:lnR w="6350" cap="flat" cmpd="sng" algn="ctr">
-                      <a:solidFill>
-                        <a:srgbClr val="CCCCCC"/>
-                      </a:solidFill>
-                      <a:prstDash val="solid"/>
-                      <a:round/>
-                      <a:headEnd type="none" w="med" len="med"/>
-                      <a:tailEnd type="none" w="med" len="med"/>
-                    </a:lnR>
-                    <a:lnT w="6350" cap="flat" cmpd="sng" algn="ctr">
-                      <a:solidFill>
-                        <a:srgbClr val="CCCCCC"/>
-                      </a:solidFill>
-                      <a:prstDash val="solid"/>
-                      <a:round/>
-                      <a:headEnd type="none" w="med" len="med"/>
-                      <a:tailEnd type="none" w="med" len="med"/>
-                    </a:lnT>
-                    <a:lnB w="6350" cap="flat" cmpd="sng" algn="ctr">
-                      <a:solidFill>
-                        <a:srgbClr val="CCCCCC"/>
-                      </a:solidFill>
-                      <a:prstDash val="solid"/>
-                      <a:round/>
-                      <a:headEnd type="none" w="med" len="med"/>
-                      <a:tailEnd type="none" w="med" len="med"/>
-                    </a:lnB>
-                    <a:solidFill>
-                      <a:srgbClr val="F0F0F0"/>
-                    </a:solidFill>
-                  </a:tcPr>
-                </a:tc>
-              </a:tr>
-              <a:tr h="0">
-                <a:tc>
-                  <a:txBody>
-                    <a:bodyPr/>
-                    <a:lstStyle/>
-                    <a:p>
-                      <a:pPr algn="l" indent="0" marL="0">
-                        <a:buNone/>
-                      </a:pPr>
-                      <a:r>
-                        <a:rPr lang="en-US" sz="1300" b="1" dirty="0">
-                          <a:solidFill>
-                            <a:srgbClr val="1A1A1A"/>
-                          </a:solidFill>
-                        </a:rPr>
-                        <a:t>Is the tool accurate? Are the synthesised alternatives actually better than what the user did?</a:t>
-                      </a:r>
-                      <a:endParaRPr lang="en-US" sz="1300" dirty="0"/>
-                    </a:p>
-                  </a:txBody>
-                  <a:tcPr marL="91440" marR="91440" marT="91440" marB="91440" anchor="ctr">
-                    <a:lnL w="6350" cap="flat" cmpd="sng" algn="ctr">
-                      <a:solidFill>
-                        <a:srgbClr val="CCCCCC"/>
-                      </a:solidFill>
-                      <a:prstDash val="solid"/>
-                      <a:round/>
-                      <a:headEnd type="none" w="med" len="med"/>
-                      <a:tailEnd type="none" w="med" len="med"/>
-                    </a:lnL>
-                    <a:lnR w="6350" cap="flat" cmpd="sng" algn="ctr">
-                      <a:solidFill>
-                        <a:srgbClr val="CCCCCC"/>
-                      </a:solidFill>
-                      <a:prstDash val="solid"/>
-                      <a:round/>
-                      <a:headEnd type="none" w="med" len="med"/>
-                      <a:tailEnd type="none" w="med" len="med"/>
-                    </a:lnR>
-                    <a:lnT w="6350" cap="flat" cmpd="sng" algn="ctr">
-                      <a:solidFill>
-                        <a:srgbClr val="CCCCCC"/>
-                      </a:solidFill>
-                      <a:prstDash val="solid"/>
-                      <a:round/>
-                      <a:headEnd type="none" w="med" len="med"/>
-                      <a:tailEnd type="none" w="med" len="med"/>
-                    </a:lnT>
-                    <a:lnB w="6350" cap="flat" cmpd="sng" algn="ctr">
-                      <a:solidFill>
-                        <a:srgbClr val="CCCCCC"/>
-                      </a:solidFill>
-                      <a:prstDash val="solid"/>
-                      <a:round/>
-                      <a:headEnd type="none" w="med" len="med"/>
-                      <a:tailEnd type="none" w="med" len="med"/>
-                    </a:lnB>
-                  </a:tcPr>
-                </a:tc>
-                <a:tc>
-                  <a:txBody>
-                    <a:bodyPr/>
-                    <a:lstStyle/>
-                    <a:p>
-                      <a:pPr algn="l" indent="0" marL="0">
-                        <a:buNone/>
-                      </a:pPr>
-                      <a:r>
-                        <a:rPr lang="en-US" sz="1300" dirty="0">
-                          <a:solidFill>
-                            <a:srgbClr val="555555"/>
-                          </a:solidFill>
-                        </a:rPr>
-                        <a:t>45 labelled injection sessions: per-kind precision and recall (Slides 16-17) plus beat/tie/lose breakdown across all 66 detected divergence points (Slide 18).</a:t>
-                      </a:r>
-                      <a:endParaRPr lang="en-US" sz="1300" dirty="0"/>
-                    </a:p>
-                  </a:txBody>
-                  <a:tcPr marL="91440" marR="91440" marT="91440" marB="91440" anchor="ctr">
-                    <a:lnL w="6350" cap="flat" cmpd="sng" algn="ctr">
-                      <a:solidFill>
-                        <a:srgbClr val="CCCCCC"/>
-                      </a:solidFill>
-                      <a:prstDash val="solid"/>
-                      <a:round/>
-                      <a:headEnd type="none" w="med" len="med"/>
-                      <a:tailEnd type="none" w="med" len="med"/>
-                    </a:lnL>
-                    <a:lnR w="6350" cap="flat" cmpd="sng" algn="ctr">
-                      <a:solidFill>
-                        <a:srgbClr val="CCCCCC"/>
-                      </a:solidFill>
-                      <a:prstDash val="solid"/>
-                      <a:round/>
-                      <a:headEnd type="none" w="med" len="med"/>
-                      <a:tailEnd type="none" w="med" len="med"/>
-                    </a:lnR>
-                    <a:lnT w="6350" cap="flat" cmpd="sng" algn="ctr">
-                      <a:solidFill>
-                        <a:srgbClr val="CCCCCC"/>
-                      </a:solidFill>
-                      <a:prstDash val="solid"/>
-                      <a:round/>
-                      <a:headEnd type="none" w="med" len="med"/>
-                      <a:tailEnd type="none" w="med" len="med"/>
-                    </a:lnT>
-                    <a:lnB w="6350" cap="flat" cmpd="sng" algn="ctr">
-                      <a:solidFill>
-                        <a:srgbClr val="CCCCCC"/>
-                      </a:solidFill>
-                      <a:prstDash val="solid"/>
-                      <a:round/>
-                      <a:headEnd type="none" w="med" len="med"/>
-                      <a:tailEnd type="none" w="med" len="med"/>
-                    </a:lnB>
-                  </a:tcPr>
-                </a:tc>
-              </a:tr>
-              <a:tr h="0">
-                <a:tc>
-                  <a:txBody>
-                    <a:bodyPr/>
-                    <a:lstStyle/>
-                    <a:p>
-                      <a:pPr algn="l" indent="0" marL="0">
-                        <a:buNone/>
-                      </a:pPr>
-                      <a:r>
-                        <a:rPr lang="en-US" sz="1300" b="1" dirty="0">
-                          <a:solidFill>
-                            <a:srgbClr val="1A1A1A"/>
-                          </a:solidFill>
-                        </a:rPr>
-                        <a:t>Is the process score reliable? Does the ranking hold up when the weights are perturbed?</a:t>
-                      </a:r>
-                      <a:endParaRPr lang="en-US" sz="1300" dirty="0"/>
-                    </a:p>
-                  </a:txBody>
-                  <a:tcPr marL="91440" marR="91440" marT="91440" marB="91440" anchor="ctr">
-                    <a:lnL w="6350" cap="flat" cmpd="sng" algn="ctr">
-                      <a:solidFill>
-                        <a:srgbClr val="CCCCCC"/>
-                      </a:solidFill>
-                      <a:prstDash val="solid"/>
-                      <a:round/>
-                      <a:headEnd type="none" w="med" len="med"/>
-                      <a:tailEnd type="none" w="med" len="med"/>
-                    </a:lnL>
-                    <a:lnR w="6350" cap="flat" cmpd="sng" algn="ctr">
-                      <a:solidFill>
-                        <a:srgbClr val="CCCCCC"/>
-                      </a:solidFill>
-                      <a:prstDash val="solid"/>
-                      <a:round/>
-                      <a:headEnd type="none" w="med" len="med"/>
-                      <a:tailEnd type="none" w="med" len="med"/>
-                    </a:lnR>
-                    <a:lnT w="6350" cap="flat" cmpd="sng" algn="ctr">
-                      <a:solidFill>
-                        <a:srgbClr val="CCCCCC"/>
-                      </a:solidFill>
-                      <a:prstDash val="solid"/>
-                      <a:round/>
-                      <a:headEnd type="none" w="med" len="med"/>
-                      <a:tailEnd type="none" w="med" len="med"/>
-                    </a:lnT>
-                    <a:lnB w="6350" cap="flat" cmpd="sng" algn="ctr">
-                      <a:solidFill>
-                        <a:srgbClr val="CCCCCC"/>
-                      </a:solidFill>
-                      <a:prstDash val="solid"/>
-                      <a:round/>
-                      <a:headEnd type="none" w="med" len="med"/>
-                      <a:tailEnd type="none" w="med" len="med"/>
-                    </a:lnB>
-                  </a:tcPr>
-                </a:tc>
-                <a:tc>
-                  <a:txBody>
-                    <a:bodyPr/>
-                    <a:lstStyle/>
-                    <a:p>
-                      <a:pPr algn="l" indent="0" marL="0">
-                        <a:buNone/>
-                      </a:pPr>
-                      <a:r>
-                        <a:rPr lang="en-US" sz="1300" dirty="0">
-                          <a:solidFill>
-                            <a:srgbClr val="555555"/>
-                          </a:solidFill>
-                        </a:rPr>
-                        <a:t>Sensitivity sweep + ablation, headline on the 25-session user-study rankable subset (Slides 20-21).</a:t>
-                      </a:r>
-                      <a:endParaRPr lang="en-US" sz="1300" dirty="0"/>
-                    </a:p>
-                  </a:txBody>
-                  <a:tcPr marL="91440" marR="91440" marT="91440" marB="91440" anchor="ctr">
-                    <a:lnL w="6350" cap="flat" cmpd="sng" algn="ctr">
-                      <a:solidFill>
-                        <a:srgbClr val="CCCCCC"/>
-                      </a:solidFill>
-                      <a:prstDash val="solid"/>
-                      <a:round/>
-                      <a:headEnd type="none" w="med" len="med"/>
-                      <a:tailEnd type="none" w="med" len="med"/>
-                    </a:lnL>
-                    <a:lnR w="6350" cap="flat" cmpd="sng" algn="ctr">
-                      <a:solidFill>
-                        <a:srgbClr val="CCCCCC"/>
-                      </a:solidFill>
-                      <a:prstDash val="solid"/>
-                      <a:round/>
-                      <a:headEnd type="none" w="med" len="med"/>
-                      <a:tailEnd type="none" w="med" len="med"/>
-                    </a:lnR>
-                    <a:lnT w="6350" cap="flat" cmpd="sng" algn="ctr">
-                      <a:solidFill>
-                        <a:srgbClr val="CCCCCC"/>
-                      </a:solidFill>
-                      <a:prstDash val="solid"/>
-                      <a:round/>
-                      <a:headEnd type="none" w="med" len="med"/>
-                      <a:tailEnd type="none" w="med" len="med"/>
-                    </a:lnT>
-                    <a:lnB w="6350" cap="flat" cmpd="sng" algn="ctr">
-                      <a:solidFill>
-                        <a:srgbClr val="CCCCCC"/>
-                      </a:solidFill>
-                      <a:prstDash val="solid"/>
-                      <a:round/>
-                      <a:headEnd type="none" w="med" len="med"/>
-                      <a:tailEnd type="none" w="med" len="med"/>
-                    </a:lnB>
-                  </a:tcPr>
-                </a:tc>
-              </a:tr>
-              <a:tr h="0">
-                <a:tc>
-                  <a:txBody>
-                    <a:bodyPr/>
-                    <a:lstStyle/>
-                    <a:p>
-                      <a:pPr algn="l" indent="0" marL="0">
-                        <a:buNone/>
-                      </a:pPr>
-                      <a:r>
-                        <a:rPr lang="en-US" sz="1300" b="1" dirty="0">
-                          <a:solidFill>
-                            <a:srgbClr val="1A1A1A"/>
-                          </a:solidFill>
-                        </a:rPr>
-                        <a:t>Does the tool change developer behaviour? Fewer divergences over time when feedback is shown?</a:t>
-                      </a:r>
-                      <a:endParaRPr lang="en-US" sz="1300" dirty="0"/>
-                    </a:p>
-                  </a:txBody>
-                  <a:tcPr marL="91440" marR="91440" marT="91440" marB="91440" anchor="ctr">
-                    <a:lnL w="6350" cap="flat" cmpd="sng" algn="ctr">
-                      <a:solidFill>
-                        <a:srgbClr val="CCCCCC"/>
-                      </a:solidFill>
-                      <a:prstDash val="solid"/>
-                      <a:round/>
-                      <a:headEnd type="none" w="med" len="med"/>
-                      <a:tailEnd type="none" w="med" len="med"/>
-                    </a:lnL>
-                    <a:lnR w="6350" cap="flat" cmpd="sng" algn="ctr">
-                      <a:solidFill>
-                        <a:srgbClr val="CCCCCC"/>
-                      </a:solidFill>
-                      <a:prstDash val="solid"/>
-                      <a:round/>
-                      <a:headEnd type="none" w="med" len="med"/>
-                      <a:tailEnd type="none" w="med" len="med"/>
-                    </a:lnR>
-                    <a:lnT w="6350" cap="flat" cmpd="sng" algn="ctr">
-                      <a:solidFill>
-                        <a:srgbClr val="CCCCCC"/>
-                      </a:solidFill>
-                      <a:prstDash val="solid"/>
-                      <a:round/>
-                      <a:headEnd type="none" w="med" len="med"/>
-                      <a:tailEnd type="none" w="med" len="med"/>
-                    </a:lnT>
-                    <a:lnB w="6350" cap="flat" cmpd="sng" algn="ctr">
-                      <a:solidFill>
-                        <a:srgbClr val="CCCCCC"/>
-                      </a:solidFill>
-                      <a:prstDash val="solid"/>
-                      <a:round/>
-                      <a:headEnd type="none" w="med" len="med"/>
-                      <a:tailEnd type="none" w="med" len="med"/>
-                    </a:lnB>
-                  </a:tcPr>
-                </a:tc>
-                <a:tc>
-                  <a:txBody>
-                    <a:bodyPr/>
-                    <a:lstStyle/>
-                    <a:p>
-                      <a:pPr algn="l" indent="0" marL="0">
-                        <a:buNone/>
-                      </a:pPr>
-                      <a:r>
-                        <a:rPr lang="en-US" sz="1300" dirty="0">
-                          <a:solidFill>
-                            <a:srgbClr val="555555"/>
-                          </a:solidFill>
-                        </a:rPr>
-                        <a:t>30-session randomised user study, 5 participants split between feedback and no-feedback arms (Slide 23).</a:t>
-                      </a:r>
-                      <a:endParaRPr lang="en-US" sz="1300" dirty="0"/>
-                    </a:p>
-                  </a:txBody>
-                  <a:tcPr marL="91440" marR="91440" marT="91440" marB="91440" anchor="ctr">
-                    <a:lnL w="6350" cap="flat" cmpd="sng" algn="ctr">
-                      <a:solidFill>
-                        <a:srgbClr val="CCCCCC"/>
-                      </a:solidFill>
-                      <a:prstDash val="solid"/>
-                      <a:round/>
-                      <a:headEnd type="none" w="med" len="med"/>
-                      <a:tailEnd type="none" w="med" len="med"/>
-                    </a:lnL>
-                    <a:lnR w="6350" cap="flat" cmpd="sng" algn="ctr">
-                      <a:solidFill>
-                        <a:srgbClr val="CCCCCC"/>
-                      </a:solidFill>
-                      <a:prstDash val="solid"/>
-                      <a:round/>
-                      <a:headEnd type="none" w="med" len="med"/>
-                      <a:tailEnd type="none" w="med" len="med"/>
-                    </a:lnR>
-                    <a:lnT w="6350" cap="flat" cmpd="sng" algn="ctr">
-                      <a:solidFill>
-                        <a:srgbClr val="CCCCCC"/>
-                      </a:solidFill>
-                      <a:prstDash val="solid"/>
-                      <a:round/>
-                      <a:headEnd type="none" w="med" len="med"/>
-                      <a:tailEnd type="none" w="med" len="med"/>
-                    </a:lnT>
-                    <a:lnB w="6350" cap="flat" cmpd="sng" algn="ctr">
-                      <a:solidFill>
-                        <a:srgbClr val="CCCCCC"/>
-                      </a:solidFill>
-                      <a:prstDash val="solid"/>
-                      <a:round/>
-                      <a:headEnd type="none" w="med" len="med"/>
-                      <a:tailEnd type="none" w="med" len="med"/>
-                    </a:lnB>
-                  </a:tcPr>
-                </a:tc>
-              </a:tr>
-            </a:tbl>
-          </a:graphicData>
-        </a:graphic>
-      </p:graphicFrame>
+      <p:sp>
+        <p:nvSpPr>
+          <p:cNvPr id="3" name="Text 1"/>
+          <p:cNvSpPr/>
+          <p:nvPr/>
+        </p:nvSpPr>
+        <p:spPr>
+          <a:xfrm>
+            <a:off x="457200" y="1188720"/>
+            <a:ext cx="8229600" cy="3657600"/>
+          </a:xfrm>
+          <a:prstGeom prst="rect">
+            <a:avLst/>
+          </a:prstGeom>
+          <a:noFill/>
+          <a:ln/>
+        </p:spPr>
+        <p:txBody>
+          <a:bodyPr wrap="square" rtlCol="0" anchor="t"/>
+          <a:lstStyle/>
+          <a:p>
+            <a:pPr marL="342900" indent="-342900">
+              <a:spcAft>
+                <a:spcPts val="800"/>
+              </a:spcAft>
+              <a:buSzPct val="100000"/>
+              <a:buChar char="•"/>
+            </a:pPr>
+            <a:r>
+              <a:rPr lang="en-US" sz="1600" b="1" dirty="0">
+                <a:solidFill>
+                  <a:srgbClr val="000000"/>
+                </a:solidFill>
+              </a:rPr>
+              <a:t>3 Questions</a:t>
+            </a:r>
+            <a:endParaRPr lang="en-US" sz="1600" dirty="0"/>
+          </a:p>
+          <a:p>
+            <a:pPr lvl="1" marL="762000" indent="-381000">
+              <a:spcAft>
+                <a:spcPts val="600"/>
+              </a:spcAft>
+              <a:buSzPct val="100000"/>
+              <a:buChar char="•"/>
+            </a:pPr>
+            <a:r>
+              <a:rPr lang="en-US" sz="1600" dirty="0">
+                <a:solidFill>
+                  <a:srgbClr val="000000"/>
+                </a:solidFill>
+              </a:rPr>
+              <a:t>Is the tool accurate?</a:t>
+            </a:r>
+            <a:endParaRPr lang="en-US" sz="1600" dirty="0"/>
+          </a:p>
+          <a:p>
+            <a:pPr lvl="1" marL="762000" indent="-381000">
+              <a:spcAft>
+                <a:spcPts val="600"/>
+              </a:spcAft>
+              <a:buSzPct val="100000"/>
+              <a:buChar char="•"/>
+            </a:pPr>
+            <a:r>
+              <a:rPr lang="en-US" sz="1600" dirty="0">
+                <a:solidFill>
+                  <a:srgbClr val="000000"/>
+                </a:solidFill>
+              </a:rPr>
+              <a:t>Is the process score reliable?</a:t>
+            </a:r>
+            <a:endParaRPr lang="en-US" sz="1600" dirty="0"/>
+          </a:p>
+          <a:p>
+            <a:pPr lvl="1" marL="762000" indent="-381000">
+              <a:spcAft>
+                <a:spcPts val="2000"/>
+              </a:spcAft>
+              <a:buSzPct val="100000"/>
+              <a:buChar char="•"/>
+            </a:pPr>
+            <a:r>
+              <a:rPr lang="en-US" sz="1600" dirty="0">
+                <a:solidFill>
+                  <a:srgbClr val="000000"/>
+                </a:solidFill>
+              </a:rPr>
+              <a:t>Does the tool change developer behaviour?</a:t>
+            </a:r>
+            <a:endParaRPr lang="en-US" sz="1600" dirty="0"/>
+          </a:p>
+          <a:p>
+            <a:pPr marL="342900" indent="-342900">
+              <a:spcAft>
+                <a:spcPts val="800"/>
+              </a:spcAft>
+              <a:buSzPct val="100000"/>
+              <a:buChar char="•"/>
+            </a:pPr>
+            <a:r>
+              <a:rPr lang="en-US" sz="1600" b="1" dirty="0">
+                <a:solidFill>
+                  <a:srgbClr val="000000"/>
+                </a:solidFill>
+              </a:rPr>
+              <a:t>2 Datasets</a:t>
+            </a:r>
+            <a:endParaRPr lang="en-US" sz="1600" dirty="0"/>
+          </a:p>
+          <a:p>
+            <a:pPr lvl="1" marL="762000" indent="-381000">
+              <a:spcAft>
+                <a:spcPts val="600"/>
+              </a:spcAft>
+              <a:buSzPct val="100000"/>
+              <a:buChar char="•"/>
+            </a:pPr>
+            <a:r>
+              <a:rPr lang="en-US" sz="1600" dirty="0">
+                <a:solidFill>
+                  <a:srgbClr val="000000"/>
+                </a:solidFill>
+              </a:rPr>
+              <a:t>45-session labelled injection set </a:t>
+            </a:r>
+            <a:pPr indent="0" marL="0">
+              <a:spcAft>
+                <a:spcPts val="600"/>
+              </a:spcAft>
+              <a:buNone/>
+            </a:pPr>
+            <a:r>
+              <a:rPr lang="en-US" sz="1600" dirty="0">
+                <a:solidFill>
+                  <a:srgbClr val="555555"/>
+                </a:solidFill>
+              </a:rPr>
+              <a:t>- controlled, balanced per-kind coverage; ground-truth labels at κ ≥ 0.72.</a:t>
+            </a:r>
+            <a:endParaRPr lang="en-US" sz="1600" dirty="0"/>
+          </a:p>
+          <a:p>
+            <a:pPr lvl="1" marL="762000" indent="-381000">
+              <a:spcAft>
+                <a:spcPts val="600"/>
+              </a:spcAft>
+              <a:buSzPct val="100000"/>
+              <a:buChar char="•"/>
+            </a:pPr>
+            <a:r>
+              <a:rPr lang="en-US" sz="1600" dirty="0">
+                <a:solidFill>
+                  <a:srgbClr val="000000"/>
+                </a:solidFill>
+              </a:rPr>
+              <a:t>30-session randomised user study </a:t>
+            </a:r>
+            <a:pPr indent="0" marL="0">
+              <a:spcAft>
+                <a:spcPts val="600"/>
+              </a:spcAft>
+              <a:buNone/>
+            </a:pPr>
+            <a:r>
+              <a:rPr lang="en-US" sz="1600" dirty="0">
+                <a:solidFill>
+                  <a:srgbClr val="555555"/>
+                </a:solidFill>
+              </a:rPr>
+              <a:t>- 5 MEng participants × 6 sessions, 2 arms (feedback vs no-feedback).</a:t>
+            </a:r>
+            <a:endParaRPr lang="en-US" sz="1600" dirty="0"/>
+          </a:p>
+        </p:txBody>
+      </p:sp>
     </p:spTree>
   </p:cSld>
   <p:clrMapOvr>
@@ -15009,14 +14919,14 @@
               <a:buNone/>
             </a:pPr>
             <a:r>
-              <a:rPr lang="en-US" sz="8000" b="1" dirty="0">
+              <a:rPr lang="en-US" sz="6000" b="1" dirty="0">
                 <a:solidFill>
                   <a:srgbClr val="000000"/>
                 </a:solidFill>
               </a:rPr>
               <a:t>Demo</a:t>
             </a:r>
-            <a:endParaRPr lang="en-US" sz="8000" dirty="0"/>
+            <a:endParaRPr lang="en-US" sz="6000" dirty="0"/>
           </a:p>
         </p:txBody>
       </p:sp>

--- a/presentation/slides.pptx
+++ b/presentation/slides.pptx
@@ -6328,7 +6328,7 @@
         <p:spPr>
           <a:xfrm>
             <a:off x="457200" y="1188720"/>
-            <a:ext cx="8229600" cy="3657600"/>
+            <a:ext cx="8229600" cy="3200400"/>
           </a:xfrm>
           <a:prstGeom prst="rect">
             <a:avLst/>
@@ -6457,7 +6457,7 @@
                   <a:srgbClr val="555555"/>
                 </a:solidFill>
               </a:rPr>
-              <a:t>- controlled, balanced per-kind coverage; ground-truth labels at κ ≥ 0.72.</a:t>
+              <a:t>- controlled, balanced per-kind coverage.</a:t>
             </a:r>
             <a:endParaRPr lang="en-US" sz="1600" dirty="0"/>
           </a:p>
@@ -6492,6 +6492,53 @@
               <a:t>- 5 MEng participants × 6 sessions, 2 arms (feedback vs no-feedback).</a:t>
             </a:r>
             <a:endParaRPr lang="en-US" sz="1600" dirty="0"/>
+          </a:p>
+        </p:txBody>
+      </p:sp>
+      <p:sp>
+        <p:nvSpPr>
+          <p:cNvPr id="4" name="Text 2"/>
+          <p:cNvSpPr/>
+          <p:nvPr/>
+        </p:nvSpPr>
+        <p:spPr>
+          <a:xfrm>
+            <a:off x="457200" y="4572000"/>
+            <a:ext cx="8229600" cy="457200"/>
+          </a:xfrm>
+          <a:prstGeom prst="rect">
+            <a:avLst/>
+          </a:prstGeom>
+          <a:noFill/>
+          <a:ln/>
+        </p:spPr>
+        <p:txBody>
+          <a:bodyPr wrap="square" lIns="0" tIns="0" rIns="0" bIns="0" rtlCol="0" anchor="ctr"/>
+          <a:lstStyle/>
+          <a:p>
+            <a:pPr algn="ctr" indent="0" marL="0">
+              <a:buNone/>
+            </a:pPr>
+            <a:r>
+              <a:rPr lang="en-US" sz="1400" b="1" i="1" dirty="0">
+                <a:solidFill>
+                  <a:srgbClr val="1F3F6F"/>
+                </a:solidFill>
+              </a:rPr>
+              <a:t>Reproducible: </a:t>
+            </a:r>
+            <a:pPr algn="ctr" indent="0" marL="0">
+              <a:buNone/>
+            </a:pPr>
+            <a:r>
+              <a:rPr lang="en-US" sz="1400" i="1" dirty="0">
+                <a:solidFill>
+                  <a:srgbClr val="1F3F6F"/>
+                </a:solidFill>
+              </a:rPr>
+              <a:t>every table and figure is regenerated from the Jupyter notebook in the repo.</a:t>
+            </a:r>
+            <a:endParaRPr lang="en-US" sz="1400" dirty="0"/>
           </a:p>
         </p:txBody>
       </p:sp>
@@ -6832,8 +6879,8 @@
         </p:nvSpPr>
         <p:spPr>
           <a:xfrm>
-            <a:off x="457200" y="91440"/>
-            <a:ext cx="8229600" cy="548640"/>
+            <a:off x="457200" y="45720"/>
+            <a:ext cx="8229600" cy="457200"/>
           </a:xfrm>
           <a:prstGeom prst="rect">
             <a:avLst/>
@@ -6868,8 +6915,8 @@
         </p:nvSpPr>
         <p:spPr>
           <a:xfrm>
-            <a:off x="457200" y="658368"/>
-            <a:ext cx="8229600" cy="256032"/>
+            <a:off x="457200" y="502920"/>
+            <a:ext cx="8229600" cy="201168"/>
           </a:xfrm>
           <a:prstGeom prst="rect">
             <a:avLst/>
@@ -6904,7 +6951,7 @@
         </p:nvSpPr>
         <p:spPr>
           <a:xfrm>
-            <a:off x="640080" y="914400"/>
+            <a:off x="640080" y="777240"/>
             <a:ext cx="2834640" cy="201168"/>
           </a:xfrm>
           <a:prstGeom prst="rect">
@@ -6940,7 +6987,7 @@
         </p:nvSpPr>
         <p:spPr>
           <a:xfrm>
-            <a:off x="1188720" y="1133856"/>
+            <a:off x="1188720" y="996696"/>
             <a:ext cx="1143000" cy="201168"/>
           </a:xfrm>
           <a:prstGeom prst="rect">
@@ -6976,7 +7023,7 @@
         </p:nvSpPr>
         <p:spPr>
           <a:xfrm>
-            <a:off x="2331720" y="1133856"/>
+            <a:off x="2331720" y="996696"/>
             <a:ext cx="1143000" cy="201168"/>
           </a:xfrm>
           <a:prstGeom prst="rect">
@@ -7012,7 +7059,7 @@
         </p:nvSpPr>
         <p:spPr>
           <a:xfrm>
-            <a:off x="640080" y="1353312"/>
+            <a:off x="640080" y="1216152"/>
             <a:ext cx="548640" cy="548640"/>
           </a:xfrm>
           <a:prstGeom prst="rect">
@@ -7048,7 +7095,7 @@
         </p:nvSpPr>
         <p:spPr>
           <a:xfrm>
-            <a:off x="640080" y="1901952"/>
+            <a:off x="640080" y="1764792"/>
             <a:ext cx="548640" cy="548640"/>
           </a:xfrm>
           <a:prstGeom prst="rect">
@@ -7084,7 +7131,7 @@
         </p:nvSpPr>
         <p:spPr>
           <a:xfrm>
-            <a:off x="1188720" y="1426464"/>
+            <a:off x="1188720" y="1289304"/>
             <a:ext cx="1143000" cy="548640"/>
           </a:xfrm>
           <a:prstGeom prst="rect">
@@ -7109,7 +7156,7 @@
         </p:nvSpPr>
         <p:spPr>
           <a:xfrm>
-            <a:off x="1188720" y="1426464"/>
+            <a:off x="1188720" y="1289304"/>
             <a:ext cx="1143000" cy="548640"/>
           </a:xfrm>
           <a:prstGeom prst="rect">
@@ -7159,7 +7206,7 @@
         </p:nvSpPr>
         <p:spPr>
           <a:xfrm>
-            <a:off x="2331720" y="1426464"/>
+            <a:off x="2331720" y="1289304"/>
             <a:ext cx="1143000" cy="548640"/>
           </a:xfrm>
           <a:prstGeom prst="rect">
@@ -7184,7 +7231,7 @@
         </p:nvSpPr>
         <p:spPr>
           <a:xfrm>
-            <a:off x="2331720" y="1426464"/>
+            <a:off x="2331720" y="1289304"/>
             <a:ext cx="1143000" cy="548640"/>
           </a:xfrm>
           <a:prstGeom prst="rect">
@@ -7234,7 +7281,7 @@
         </p:nvSpPr>
         <p:spPr>
           <a:xfrm>
-            <a:off x="1188720" y="1975104"/>
+            <a:off x="1188720" y="1837944"/>
             <a:ext cx="1143000" cy="548640"/>
           </a:xfrm>
           <a:prstGeom prst="rect">
@@ -7259,7 +7306,7 @@
         </p:nvSpPr>
         <p:spPr>
           <a:xfrm>
-            <a:off x="1188720" y="1975104"/>
+            <a:off x="1188720" y="1837944"/>
             <a:ext cx="1143000" cy="548640"/>
           </a:xfrm>
           <a:prstGeom prst="rect">
@@ -7309,7 +7356,7 @@
         </p:nvSpPr>
         <p:spPr>
           <a:xfrm>
-            <a:off x="2331720" y="1975104"/>
+            <a:off x="2331720" y="1837944"/>
             <a:ext cx="1143000" cy="548640"/>
           </a:xfrm>
           <a:prstGeom prst="rect">
@@ -7334,7 +7381,7 @@
         </p:nvSpPr>
         <p:spPr>
           <a:xfrm>
-            <a:off x="2331720" y="1975104"/>
+            <a:off x="2331720" y="1837944"/>
             <a:ext cx="1143000" cy="548640"/>
           </a:xfrm>
           <a:prstGeom prst="rect">
@@ -7384,7 +7431,7 @@
         </p:nvSpPr>
         <p:spPr>
           <a:xfrm>
-            <a:off x="640080" y="2542032"/>
+            <a:off x="640080" y="2404872"/>
             <a:ext cx="2834640" cy="201168"/>
           </a:xfrm>
           <a:prstGeom prst="rect">
@@ -7453,7 +7500,7 @@
         </p:nvSpPr>
         <p:spPr>
           <a:xfrm>
-            <a:off x="4754880" y="914400"/>
+            <a:off x="4754880" y="777240"/>
             <a:ext cx="2834640" cy="201168"/>
           </a:xfrm>
           <a:prstGeom prst="rect">
@@ -7489,7 +7536,7 @@
         </p:nvSpPr>
         <p:spPr>
           <a:xfrm>
-            <a:off x="5303520" y="1133856"/>
+            <a:off x="5303520" y="996696"/>
             <a:ext cx="1143000" cy="201168"/>
           </a:xfrm>
           <a:prstGeom prst="rect">
@@ -7525,7 +7572,7 @@
         </p:nvSpPr>
         <p:spPr>
           <a:xfrm>
-            <a:off x="6446520" y="1133856"/>
+            <a:off x="6446520" y="996696"/>
             <a:ext cx="1143000" cy="201168"/>
           </a:xfrm>
           <a:prstGeom prst="rect">
@@ -7561,7 +7608,7 @@
         </p:nvSpPr>
         <p:spPr>
           <a:xfrm>
-            <a:off x="4754880" y="1353312"/>
+            <a:off x="4754880" y="1216152"/>
             <a:ext cx="548640" cy="548640"/>
           </a:xfrm>
           <a:prstGeom prst="rect">
@@ -7597,7 +7644,7 @@
         </p:nvSpPr>
         <p:spPr>
           <a:xfrm>
-            <a:off x="4754880" y="1901952"/>
+            <a:off x="4754880" y="1764792"/>
             <a:ext cx="548640" cy="548640"/>
           </a:xfrm>
           <a:prstGeom prst="rect">
@@ -7633,7 +7680,7 @@
         </p:nvSpPr>
         <p:spPr>
           <a:xfrm>
-            <a:off x="5303520" y="1426464"/>
+            <a:off x="5303520" y="1289304"/>
             <a:ext cx="1143000" cy="548640"/>
           </a:xfrm>
           <a:prstGeom prst="rect">
@@ -7658,7 +7705,7 @@
         </p:nvSpPr>
         <p:spPr>
           <a:xfrm>
-            <a:off x="5303520" y="1426464"/>
+            <a:off x="5303520" y="1289304"/>
             <a:ext cx="1143000" cy="548640"/>
           </a:xfrm>
           <a:prstGeom prst="rect">
@@ -7708,7 +7755,7 @@
         </p:nvSpPr>
         <p:spPr>
           <a:xfrm>
-            <a:off x="6446520" y="1426464"/>
+            <a:off x="6446520" y="1289304"/>
             <a:ext cx="1143000" cy="548640"/>
           </a:xfrm>
           <a:prstGeom prst="rect">
@@ -7733,7 +7780,7 @@
         </p:nvSpPr>
         <p:spPr>
           <a:xfrm>
-            <a:off x="6446520" y="1426464"/>
+            <a:off x="6446520" y="1289304"/>
             <a:ext cx="1143000" cy="548640"/>
           </a:xfrm>
           <a:prstGeom prst="rect">
@@ -7783,7 +7830,7 @@
         </p:nvSpPr>
         <p:spPr>
           <a:xfrm>
-            <a:off x="5303520" y="1975104"/>
+            <a:off x="5303520" y="1837944"/>
             <a:ext cx="1143000" cy="548640"/>
           </a:xfrm>
           <a:prstGeom prst="rect">
@@ -7808,7 +7855,7 @@
         </p:nvSpPr>
         <p:spPr>
           <a:xfrm>
-            <a:off x="5303520" y="1975104"/>
+            <a:off x="5303520" y="1837944"/>
             <a:ext cx="1143000" cy="548640"/>
           </a:xfrm>
           <a:prstGeom prst="rect">
@@ -7858,7 +7905,7 @@
         </p:nvSpPr>
         <p:spPr>
           <a:xfrm>
-            <a:off x="6446520" y="1975104"/>
+            <a:off x="6446520" y="1837944"/>
             <a:ext cx="1143000" cy="548640"/>
           </a:xfrm>
           <a:prstGeom prst="rect">
@@ -7883,7 +7930,7 @@
         </p:nvSpPr>
         <p:spPr>
           <a:xfrm>
-            <a:off x="6446520" y="1975104"/>
+            <a:off x="6446520" y="1837944"/>
             <a:ext cx="1143000" cy="548640"/>
           </a:xfrm>
           <a:prstGeom prst="rect">
@@ -7933,7 +7980,7 @@
         </p:nvSpPr>
         <p:spPr>
           <a:xfrm>
-            <a:off x="4754880" y="2542032"/>
+            <a:off x="4754880" y="2404872"/>
             <a:ext cx="2834640" cy="201168"/>
           </a:xfrm>
           <a:prstGeom prst="rect">
@@ -8002,7 +8049,7 @@
         </p:nvSpPr>
         <p:spPr>
           <a:xfrm>
-            <a:off x="640080" y="2926080"/>
+            <a:off x="640080" y="2697480"/>
             <a:ext cx="2834640" cy="201168"/>
           </a:xfrm>
           <a:prstGeom prst="rect">
@@ -8038,7 +8085,7 @@
         </p:nvSpPr>
         <p:spPr>
           <a:xfrm>
-            <a:off x="1188720" y="3145536"/>
+            <a:off x="1188720" y="2916936"/>
             <a:ext cx="1143000" cy="201168"/>
           </a:xfrm>
           <a:prstGeom prst="rect">
@@ -8074,7 +8121,7 @@
         </p:nvSpPr>
         <p:spPr>
           <a:xfrm>
-            <a:off x="2331720" y="3145536"/>
+            <a:off x="2331720" y="2916936"/>
             <a:ext cx="1143000" cy="201168"/>
           </a:xfrm>
           <a:prstGeom prst="rect">
@@ -8110,7 +8157,7 @@
         </p:nvSpPr>
         <p:spPr>
           <a:xfrm>
-            <a:off x="640080" y="3364992"/>
+            <a:off x="640080" y="3136392"/>
             <a:ext cx="548640" cy="548640"/>
           </a:xfrm>
           <a:prstGeom prst="rect">
@@ -8146,7 +8193,7 @@
         </p:nvSpPr>
         <p:spPr>
           <a:xfrm>
-            <a:off x="640080" y="3913632"/>
+            <a:off x="640080" y="3685032"/>
             <a:ext cx="548640" cy="548640"/>
           </a:xfrm>
           <a:prstGeom prst="rect">
@@ -8182,7 +8229,7 @@
         </p:nvSpPr>
         <p:spPr>
           <a:xfrm>
-            <a:off x="1188720" y="3438144"/>
+            <a:off x="1188720" y="3209544"/>
             <a:ext cx="1143000" cy="548640"/>
           </a:xfrm>
           <a:prstGeom prst="rect">
@@ -8207,7 +8254,7 @@
         </p:nvSpPr>
         <p:spPr>
           <a:xfrm>
-            <a:off x="1188720" y="3438144"/>
+            <a:off x="1188720" y="3209544"/>
             <a:ext cx="1143000" cy="548640"/>
           </a:xfrm>
           <a:prstGeom prst="rect">
@@ -8257,7 +8304,7 @@
         </p:nvSpPr>
         <p:spPr>
           <a:xfrm>
-            <a:off x="2331720" y="3438144"/>
+            <a:off x="2331720" y="3209544"/>
             <a:ext cx="1143000" cy="548640"/>
           </a:xfrm>
           <a:prstGeom prst="rect">
@@ -8282,7 +8329,7 @@
         </p:nvSpPr>
         <p:spPr>
           <a:xfrm>
-            <a:off x="2331720" y="3438144"/>
+            <a:off x="2331720" y="3209544"/>
             <a:ext cx="1143000" cy="548640"/>
           </a:xfrm>
           <a:prstGeom prst="rect">
@@ -8332,7 +8379,7 @@
         </p:nvSpPr>
         <p:spPr>
           <a:xfrm>
-            <a:off x="1188720" y="3986784"/>
+            <a:off x="1188720" y="3758184"/>
             <a:ext cx="1143000" cy="548640"/>
           </a:xfrm>
           <a:prstGeom prst="rect">
@@ -8357,7 +8404,7 @@
         </p:nvSpPr>
         <p:spPr>
           <a:xfrm>
-            <a:off x="1188720" y="3986784"/>
+            <a:off x="1188720" y="3758184"/>
             <a:ext cx="1143000" cy="548640"/>
           </a:xfrm>
           <a:prstGeom prst="rect">
@@ -8407,7 +8454,7 @@
         </p:nvSpPr>
         <p:spPr>
           <a:xfrm>
-            <a:off x="2331720" y="3986784"/>
+            <a:off x="2331720" y="3758184"/>
             <a:ext cx="1143000" cy="548640"/>
           </a:xfrm>
           <a:prstGeom prst="rect">
@@ -8432,7 +8479,7 @@
         </p:nvSpPr>
         <p:spPr>
           <a:xfrm>
-            <a:off x="2331720" y="3986784"/>
+            <a:off x="2331720" y="3758184"/>
             <a:ext cx="1143000" cy="548640"/>
           </a:xfrm>
           <a:prstGeom prst="rect">
@@ -8482,7 +8529,7 @@
         </p:nvSpPr>
         <p:spPr>
           <a:xfrm>
-            <a:off x="640080" y="4553712"/>
+            <a:off x="640080" y="4325112"/>
             <a:ext cx="2834640" cy="201168"/>
           </a:xfrm>
           <a:prstGeom prst="rect">
@@ -8551,7 +8598,7 @@
         </p:nvSpPr>
         <p:spPr>
           <a:xfrm>
-            <a:off x="4754880" y="2926080"/>
+            <a:off x="4754880" y="2697480"/>
             <a:ext cx="2834640" cy="201168"/>
           </a:xfrm>
           <a:prstGeom prst="rect">
@@ -8587,7 +8634,7 @@
         </p:nvSpPr>
         <p:spPr>
           <a:xfrm>
-            <a:off x="5303520" y="3145536"/>
+            <a:off x="5303520" y="2916936"/>
             <a:ext cx="1143000" cy="201168"/>
           </a:xfrm>
           <a:prstGeom prst="rect">
@@ -8623,7 +8670,7 @@
         </p:nvSpPr>
         <p:spPr>
           <a:xfrm>
-            <a:off x="6446520" y="3145536"/>
+            <a:off x="6446520" y="2916936"/>
             <a:ext cx="1143000" cy="201168"/>
           </a:xfrm>
           <a:prstGeom prst="rect">
@@ -8659,7 +8706,7 @@
         </p:nvSpPr>
         <p:spPr>
           <a:xfrm>
-            <a:off x="4754880" y="3364992"/>
+            <a:off x="4754880" y="3136392"/>
             <a:ext cx="548640" cy="548640"/>
           </a:xfrm>
           <a:prstGeom prst="rect">
@@ -8695,7 +8742,7 @@
         </p:nvSpPr>
         <p:spPr>
           <a:xfrm>
-            <a:off x="4754880" y="3913632"/>
+            <a:off x="4754880" y="3685032"/>
             <a:ext cx="548640" cy="548640"/>
           </a:xfrm>
           <a:prstGeom prst="rect">
@@ -8731,7 +8778,7 @@
         </p:nvSpPr>
         <p:spPr>
           <a:xfrm>
-            <a:off x="5303520" y="3438144"/>
+            <a:off x="5303520" y="3209544"/>
             <a:ext cx="1143000" cy="548640"/>
           </a:xfrm>
           <a:prstGeom prst="rect">
@@ -8756,7 +8803,7 @@
         </p:nvSpPr>
         <p:spPr>
           <a:xfrm>
-            <a:off x="5303520" y="3438144"/>
+            <a:off x="5303520" y="3209544"/>
             <a:ext cx="1143000" cy="548640"/>
           </a:xfrm>
           <a:prstGeom prst="rect">
@@ -8806,7 +8853,7 @@
         </p:nvSpPr>
         <p:spPr>
           <a:xfrm>
-            <a:off x="6446520" y="3438144"/>
+            <a:off x="6446520" y="3209544"/>
             <a:ext cx="1143000" cy="548640"/>
           </a:xfrm>
           <a:prstGeom prst="rect">
@@ -8831,7 +8878,7 @@
         </p:nvSpPr>
         <p:spPr>
           <a:xfrm>
-            <a:off x="6446520" y="3438144"/>
+            <a:off x="6446520" y="3209544"/>
             <a:ext cx="1143000" cy="548640"/>
           </a:xfrm>
           <a:prstGeom prst="rect">
@@ -8881,7 +8928,7 @@
         </p:nvSpPr>
         <p:spPr>
           <a:xfrm>
-            <a:off x="5303520" y="3986784"/>
+            <a:off x="5303520" y="3758184"/>
             <a:ext cx="1143000" cy="548640"/>
           </a:xfrm>
           <a:prstGeom prst="rect">
@@ -8906,7 +8953,7 @@
         </p:nvSpPr>
         <p:spPr>
           <a:xfrm>
-            <a:off x="5303520" y="3986784"/>
+            <a:off x="5303520" y="3758184"/>
             <a:ext cx="1143000" cy="548640"/>
           </a:xfrm>
           <a:prstGeom prst="rect">
@@ -8956,7 +9003,7 @@
         </p:nvSpPr>
         <p:spPr>
           <a:xfrm>
-            <a:off x="6446520" y="3986784"/>
+            <a:off x="6446520" y="3758184"/>
             <a:ext cx="1143000" cy="548640"/>
           </a:xfrm>
           <a:prstGeom prst="rect">
@@ -8981,7 +9028,7 @@
         </p:nvSpPr>
         <p:spPr>
           <a:xfrm>
-            <a:off x="6446520" y="3986784"/>
+            <a:off x="6446520" y="3758184"/>
             <a:ext cx="1143000" cy="548640"/>
           </a:xfrm>
           <a:prstGeom prst="rect">
@@ -9031,7 +9078,7 @@
         </p:nvSpPr>
         <p:spPr>
           <a:xfrm>
-            <a:off x="4754880" y="4553712"/>
+            <a:off x="4754880" y="4325112"/>
             <a:ext cx="2834640" cy="201168"/>
           </a:xfrm>
           <a:prstGeom prst="rect">
@@ -9100,7 +9147,7 @@
         </p:nvSpPr>
         <p:spPr>
           <a:xfrm>
-            <a:off x="365760" y="4846320"/>
+            <a:off x="365760" y="4617720"/>
             <a:ext cx="8412480" cy="256032"/>
           </a:xfrm>
           <a:prstGeom prst="rect">
@@ -9123,6 +9170,42 @@
                 </a:solidFill>
               </a:rPr>
               <a:t>Ordering recall is the outlier: the reorder synthesiser's splitOnInvalid validator rejects any window containing a step it cannot safely.</a:t>
+            </a:r>
+            <a:endParaRPr lang="en-US" sz="900" dirty="0"/>
+          </a:p>
+        </p:txBody>
+      </p:sp>
+      <p:sp>
+        <p:nvSpPr>
+          <p:cNvPr id="61" name="Text 59"/>
+          <p:cNvSpPr/>
+          <p:nvPr/>
+        </p:nvSpPr>
+        <p:spPr>
+          <a:xfrm>
+            <a:off x="365760" y="4873752"/>
+            <a:ext cx="8412480" cy="256032"/>
+          </a:xfrm>
+          <a:prstGeom prst="rect">
+            <a:avLst/>
+          </a:prstGeom>
+          <a:noFill/>
+          <a:ln/>
+        </p:spPr>
+        <p:txBody>
+          <a:bodyPr wrap="square" lIns="0" tIns="0" rIns="0" bIns="0" rtlCol="0" anchor="ctr"/>
+          <a:lstStyle/>
+          <a:p>
+            <a:pPr algn="ctr" indent="0" marL="0">
+              <a:buNone/>
+            </a:pPr>
+            <a:r>
+              <a:rPr lang="en-US" sz="900" i="1" dirty="0">
+                <a:solidFill>
+                  <a:srgbClr val="999999"/>
+                </a:solidFill>
+              </a:rPr>
+              <a:t>Controlled-injection: balanced fixture, scripted behaviour - not shown on real-world refactoring sessions.</a:t>
             </a:r>
             <a:endParaRPr lang="en-US" sz="900" dirty="0"/>
           </a:p>
@@ -11365,7 +11448,7 @@
         </p:nvSpPr>
         <p:spPr>
           <a:xfrm>
-            <a:off x="365760" y="4206240"/>
+            <a:off x="365760" y="4160520"/>
             <a:ext cx="8412480" cy="548640"/>
           </a:xfrm>
           <a:prstGeom prst="rect">
@@ -11401,6 +11484,42 @@
               <a:t>Manual-Refactor's 3 ties + 1 loss come from the [0,100] score clamp - the user's score is pinned at the floor, so the IDE alternative can't score lower either.</a:t>
             </a:r>
             <a:endParaRPr lang="en-US" sz="1000" dirty="0"/>
+          </a:p>
+        </p:txBody>
+      </p:sp>
+      <p:sp>
+        <p:nvSpPr>
+          <p:cNvPr id="6" name="Text 3"/>
+          <p:cNvSpPr/>
+          <p:nvPr/>
+        </p:nvSpPr>
+        <p:spPr>
+          <a:xfrm>
+            <a:off x="365760" y="4754880"/>
+            <a:ext cx="8412480" cy="256032"/>
+          </a:xfrm>
+          <a:prstGeom prst="rect">
+            <a:avLst/>
+          </a:prstGeom>
+          <a:noFill/>
+          <a:ln/>
+        </p:spPr>
+        <p:txBody>
+          <a:bodyPr wrap="square" lIns="0" tIns="0" rIns="0" bIns="0" rtlCol="0" anchor="ctr"/>
+          <a:lstStyle/>
+          <a:p>
+            <a:pPr algn="ctr" indent="0" marL="0">
+              <a:buNone/>
+            </a:pPr>
+            <a:r>
+              <a:rPr lang="en-US" sz="900" i="1" dirty="0">
+                <a:solidFill>
+                  <a:srgbClr val="999999"/>
+                </a:solidFill>
+              </a:rPr>
+              <a:t>Result under J - not yet independently validated by expert ranking.</a:t>
+            </a:r>
+            <a:endParaRPr lang="en-US" sz="900" dirty="0"/>
           </a:p>
         </p:txBody>
       </p:sp>
@@ -11976,8 +12095,8 @@
         </p:nvSpPr>
         <p:spPr>
           <a:xfrm>
-            <a:off x="457200" y="1188720"/>
-            <a:ext cx="8229600" cy="3657600"/>
+            <a:off x="457200" y="1051560"/>
+            <a:ext cx="8229600" cy="1005840"/>
           </a:xfrm>
           <a:prstGeom prst="rect">
             <a:avLst/>
@@ -11997,25 +12116,25 @@
               <a:buChar char="•"/>
             </a:pPr>
             <a:r>
-              <a:rPr lang="en-US" sz="1500" b="1" dirty="0">
+              <a:rPr lang="en-US" sz="1300" b="1" dirty="0">
                 <a:solidFill>
                   <a:srgbClr val="000000"/>
                 </a:solidFill>
               </a:rPr>
               <a:t>How stable is the score?</a:t>
             </a:r>
-            <a:endParaRPr lang="en-US" sz="1500" dirty="0"/>
+            <a:endParaRPr lang="en-US" sz="1300" dirty="0"/>
           </a:p>
           <a:p>
             <a:pPr lvl="1" marL="762000" indent="-381000">
               <a:spcAft>
-                <a:spcPts val="600"/>
+                <a:spcPts val="400"/>
               </a:spcAft>
               <a:buSzPct val="100000"/>
               <a:buChar char="•"/>
             </a:pPr>
             <a:r>
-              <a:rPr lang="en-US" sz="1500" dirty="0">
+              <a:rPr lang="en-US" sz="1300" dirty="0">
                 <a:solidFill>
                   <a:srgbClr val="000000"/>
                 </a:solidFill>
@@ -12024,133 +12143,1736 @@
             </a:r>
             <a:pPr indent="0" marL="0">
               <a:spcAft>
-                <a:spcPts val="600"/>
+                <a:spcPts val="400"/>
               </a:spcAft>
               <a:buNone/>
             </a:pPr>
             <a:r>
-              <a:rPr lang="en-US" sz="1500" dirty="0">
+              <a:rPr lang="en-US" sz="1300" dirty="0">
                 <a:solidFill>
                   <a:srgbClr val="888888"/>
                 </a:solidFill>
               </a:rPr>
-              <a:t>- top-ranked DP rarely changes under any one-weight perturbation. Only 1.8% of cases are clamp-frozen, so this is genuine response - not a clamp artefact.</a:t>
-            </a:r>
-            <a:endParaRPr lang="en-US" sz="1500" dirty="0"/>
+              <a:t>- only 1.8% of cases are clamp-frozen.</a:t>
+            </a:r>
+            <a:endParaRPr lang="en-US" sz="1300" dirty="0"/>
           </a:p>
           <a:p>
             <a:pPr lvl="1" marL="762000" indent="-381000">
               <a:spcAft>
-                <a:spcPts val="1800"/>
+                <a:spcPts val="400"/>
               </a:spcAft>
               <a:buSzPct val="100000"/>
               <a:buChar char="•"/>
             </a:pPr>
             <a:r>
-              <a:rPr lang="en-US" sz="1500" dirty="0">
+              <a:rPr lang="en-US" sz="1300" dirty="0">
                 <a:solidFill>
                   <a:srgbClr val="000000"/>
                 </a:solidFill>
               </a:rPr>
-              <a:t>Multi-knob: 84.6% top-1 preserved (τ-b = 0.586) </a:t>
+              <a:t>Multi-knob: 84.6% top-1 preserved </a:t>
             </a:r>
             <a:pPr indent="0" marL="0">
-              <a:spcAft>
-                <a:spcPts val="1800"/>
-              </a:spcAft>
-              <a:buNone/>
-            </a:pPr>
-            <a:r>
-              <a:rPr lang="en-US" sz="1500" dirty="0">
+              <a:buNone/>
+            </a:pPr>
+            <a:r>
+              <a:rPr lang="en-US" sz="1300" dirty="0">
                 <a:solidFill>
                   <a:srgbClr val="888888"/>
                 </a:solidFill>
               </a:rPr>
-              <a:t>- when all weights move at once, top-1 holds in ~85% of cases and ~79% of pairs still rank in the same order. Meaningful correlation, not full preservation.</a:t>
-            </a:r>
-            <a:endParaRPr lang="en-US" sz="1500" dirty="0"/>
-          </a:p>
-          <a:p>
-            <a:pPr marL="342900" indent="-342900">
-              <a:spcAft>
-                <a:spcPts val="600"/>
-              </a:spcAft>
-              <a:buSzPct val="100000"/>
-              <a:buChar char="•"/>
-            </a:pPr>
-            <a:r>
-              <a:rPr lang="en-US" sz="1500" b="1" dirty="0">
-                <a:solidFill>
-                  <a:srgbClr val="000000"/>
+              <a:t>- meaningful correlation, not full preservation.</a:t>
+            </a:r>
+            <a:endParaRPr lang="en-US" sz="1300" dirty="0"/>
+          </a:p>
+        </p:txBody>
+      </p:sp>
+      <p:sp>
+        <p:nvSpPr>
+          <p:cNvPr id="4" name="Text 2"/>
+          <p:cNvSpPr/>
+          <p:nvPr/>
+        </p:nvSpPr>
+        <p:spPr>
+          <a:xfrm>
+            <a:off x="457200" y="2148840"/>
+            <a:ext cx="8229600" cy="274320"/>
+          </a:xfrm>
+          <a:prstGeom prst="rect">
+            <a:avLst/>
+          </a:prstGeom>
+          <a:noFill/>
+          <a:ln/>
+        </p:spPr>
+        <p:txBody>
+          <a:bodyPr wrap="square" lIns="0" tIns="0" rIns="0" bIns="0" rtlCol="0" anchor="ctr"/>
+          <a:lstStyle/>
+          <a:p>
+            <a:pPr indent="0" marL="0">
+              <a:buNone/>
+            </a:pPr>
+            <a:r>
+              <a:rPr lang="en-US" sz="1300" b="1" dirty="0">
+                <a:solidFill>
+                  <a:srgbClr val="1A1A1A"/>
                 </a:solidFill>
               </a:rPr>
               <a:t>Does every component of the process score hold weight?</a:t>
             </a:r>
-            <a:endParaRPr lang="en-US" sz="1500" dirty="0"/>
-          </a:p>
-          <a:p>
-            <a:pPr lvl="1" marL="762000" indent="-381000">
-              <a:spcAft>
-                <a:spcPts val="600"/>
-              </a:spcAft>
-              <a:buSzPct val="100000"/>
-              <a:buChar char="•"/>
-            </a:pPr>
-            <a:r>
-              <a:rPr lang="en-US" sz="1500" dirty="0">
-                <a:solidFill>
-                  <a:srgbClr val="000000"/>
-                </a:solidFill>
-              </a:rPr>
-              <a:t>Length is the rank-carrier (LOO τ-b = 0.527) </a:t>
-            </a:r>
-            <a:pPr indent="0" marL="0">
-              <a:spcAft>
-                <a:spcPts val="600"/>
-              </a:spcAft>
-              <a:buNone/>
-            </a:pPr>
-            <a:r>
-              <a:rPr lang="en-US" sz="1500" dirty="0">
-                <a:solidFill>
-                  <a:srgbClr val="888888"/>
-                </a:solidFill>
-              </a:rPr>
-              <a:t>- removing length reshuffles the per-session ranking more than removing any other process term - the most influential term.</a:t>
-            </a:r>
-            <a:endParaRPr lang="en-US" sz="1500" dirty="0"/>
-          </a:p>
-          <a:p>
-            <a:pPr lvl="1" marL="762000" indent="-381000">
-              <a:spcAft>
-                <a:spcPts val="600"/>
-              </a:spcAft>
-              <a:buSzPct val="100000"/>
-              <a:buChar char="•"/>
-            </a:pPr>
-            <a:r>
-              <a:rPr lang="en-US" sz="1500" dirty="0">
-                <a:solidFill>
-                  <a:srgbClr val="000000"/>
-                </a:solidFill>
-              </a:rPr>
-              <a:t>Cleanliness sub-weights: ≤ 0.9% top-1 disruption </a:t>
-            </a:r>
-            <a:pPr indent="0" marL="0">
-              <a:spcAft>
-                <a:spcPts val="600"/>
-              </a:spcAft>
-              <a:buNone/>
-            </a:pPr>
-            <a:r>
-              <a:rPr lang="en-US" sz="1500" dirty="0">
-                <a:solidFill>
-                  <a:srgbClr val="888888"/>
-                </a:solidFill>
-              </a:rPr>
-              <a:t>- perturbing any single one of the 6 cleanliness signals barely shifts the ranking (~10× less than process weights), so equal-weights for the sub-signals is defensible.</a:t>
-            </a:r>
-            <a:endParaRPr lang="en-US" sz="1500" dirty="0"/>
+            <a:endParaRPr lang="en-US" sz="1300" dirty="0"/>
+          </a:p>
+        </p:txBody>
+      </p:sp>
+      <p:graphicFrame>
+        <p:nvGraphicFramePr>
+          <p:cNvPr id="22" name="Table 0"/>
+          <p:cNvGraphicFramePr>
+            <a:graphicFrameLocks noGrp="1"/>
+          </p:cNvGraphicFramePr>
+          <p:nvPr>
+            <p:extLst>
+              <p:ext uri="{D42A27DB-BD31-4B8C-83A1-F6EECF244321}">
+                <p14:modId xmlns:p14="http://schemas.microsoft.com/office/powerpoint/2010/main" val="1579011935"/>
+              </p:ext>
+            </p:extLst>
+          </p:nvPr>
+        </p:nvGraphicFramePr>
+        <p:xfrm>
+          <a:off x="914400" y="2468880"/>
+          <a:ext cx="7315200" cy="914400"/>
+        </p:xfrm>
+        <a:graphic>
+          <a:graphicData uri="http://schemas.openxmlformats.org/drawingml/2006/table">
+            <a:tbl>
+              <a:tblPr/>
+              <a:tblGrid>
+                <a:gridCol w="1828800"/>
+                <a:gridCol w="3291840"/>
+                <a:gridCol w="2194560"/>
+              </a:tblGrid>
+              <a:tr h="292608">
+                <a:tc>
+                  <a:txBody>
+                    <a:bodyPr/>
+                    <a:lstStyle/>
+                    <a:p>
+                      <a:pPr algn="ctr" indent="0" marL="0">
+                        <a:buNone/>
+                      </a:pPr>
+                      <a:r>
+                        <a:rPr lang="en-US" sz="1100" b="1" dirty="0">
+                          <a:solidFill>
+                            <a:srgbClr val="1A1A1A"/>
+                          </a:solidFill>
+                          <a:latin typeface="Calibri" pitchFamily="34" charset="0"/>
+                          <a:ea typeface="Calibri" pitchFamily="34" charset="-122"/>
+                          <a:cs typeface="Calibri" pitchFamily="34" charset="-120"/>
+                        </a:rPr>
+                        <a:t>Removed term</a:t>
+                      </a:r>
+                      <a:endParaRPr lang="en-US" sz="1100" dirty="0">
+                        <a:latin typeface="Calibri" charset="0"/>
+                        <a:ea typeface="Calibri" charset="0"/>
+                        <a:cs typeface="Calibri" charset="0"/>
+                      </a:endParaRPr>
+                    </a:p>
+                  </a:txBody>
+                  <a:tcPr marL="54864" marR="54864" marT="54864" marB="54864" anchor="ctr">
+                    <a:lnL w="6350" cap="flat" cmpd="sng" algn="ctr">
+                      <a:solidFill>
+                        <a:srgbClr val="DDDDDD"/>
+                      </a:solidFill>
+                      <a:prstDash val="solid"/>
+                      <a:round/>
+                      <a:headEnd type="none" w="med" len="med"/>
+                      <a:tailEnd type="none" w="med" len="med"/>
+                    </a:lnL>
+                    <a:lnR w="6350" cap="flat" cmpd="sng" algn="ctr">
+                      <a:solidFill>
+                        <a:srgbClr val="DDDDDD"/>
+                      </a:solidFill>
+                      <a:prstDash val="solid"/>
+                      <a:round/>
+                      <a:headEnd type="none" w="med" len="med"/>
+                      <a:tailEnd type="none" w="med" len="med"/>
+                    </a:lnR>
+                    <a:lnT w="6350" cap="flat" cmpd="sng" algn="ctr">
+                      <a:solidFill>
+                        <a:srgbClr val="DDDDDD"/>
+                      </a:solidFill>
+                      <a:prstDash val="solid"/>
+                      <a:round/>
+                      <a:headEnd type="none" w="med" len="med"/>
+                      <a:tailEnd type="none" w="med" len="med"/>
+                    </a:lnT>
+                    <a:lnB w="6350" cap="flat" cmpd="sng" algn="ctr">
+                      <a:solidFill>
+                        <a:srgbClr val="DDDDDD"/>
+                      </a:solidFill>
+                      <a:prstDash val="solid"/>
+                      <a:round/>
+                      <a:headEnd type="none" w="med" len="med"/>
+                      <a:tailEnd type="none" w="med" len="med"/>
+                    </a:lnB>
+                    <a:solidFill>
+                      <a:srgbClr val="F0F0F0"/>
+                    </a:solidFill>
+                  </a:tcPr>
+                </a:tc>
+                <a:tc>
+                  <a:txBody>
+                    <a:bodyPr/>
+                    <a:lstStyle/>
+                    <a:p>
+                      <a:pPr algn="ctr" indent="0" marL="0">
+                        <a:buNone/>
+                      </a:pPr>
+                      <a:r>
+                        <a:rPr lang="en-US" sz="1100" b="1" dirty="0">
+                          <a:solidFill>
+                            <a:srgbClr val="1A1A1A"/>
+                          </a:solidFill>
+                          <a:latin typeface="Calibri" pitchFamily="34" charset="0"/>
+                          <a:ea typeface="Calibri" pitchFamily="34" charset="-122"/>
+                          <a:cs typeface="Calibri" pitchFamily="34" charset="-120"/>
+                        </a:rPr>
+                        <a:t>Leave-one-out τ-b (lower = more rank-carrier)</a:t>
+                      </a:r>
+                      <a:endParaRPr lang="en-US" sz="1100" dirty="0">
+                        <a:latin typeface="Calibri" charset="0"/>
+                        <a:ea typeface="Calibri" charset="0"/>
+                        <a:cs typeface="Calibri" charset="0"/>
+                      </a:endParaRPr>
+                    </a:p>
+                  </a:txBody>
+                  <a:tcPr marL="54864" marR="54864" marT="54864" marB="54864" anchor="ctr">
+                    <a:lnL w="6350" cap="flat" cmpd="sng" algn="ctr">
+                      <a:solidFill>
+                        <a:srgbClr val="DDDDDD"/>
+                      </a:solidFill>
+                      <a:prstDash val="solid"/>
+                      <a:round/>
+                      <a:headEnd type="none" w="med" len="med"/>
+                      <a:tailEnd type="none" w="med" len="med"/>
+                    </a:lnL>
+                    <a:lnR w="6350" cap="flat" cmpd="sng" algn="ctr">
+                      <a:solidFill>
+                        <a:srgbClr val="DDDDDD"/>
+                      </a:solidFill>
+                      <a:prstDash val="solid"/>
+                      <a:round/>
+                      <a:headEnd type="none" w="med" len="med"/>
+                      <a:tailEnd type="none" w="med" len="med"/>
+                    </a:lnR>
+                    <a:lnT w="6350" cap="flat" cmpd="sng" algn="ctr">
+                      <a:solidFill>
+                        <a:srgbClr val="DDDDDD"/>
+                      </a:solidFill>
+                      <a:prstDash val="solid"/>
+                      <a:round/>
+                      <a:headEnd type="none" w="med" len="med"/>
+                      <a:tailEnd type="none" w="med" len="med"/>
+                    </a:lnT>
+                    <a:lnB w="6350" cap="flat" cmpd="sng" algn="ctr">
+                      <a:solidFill>
+                        <a:srgbClr val="DDDDDD"/>
+                      </a:solidFill>
+                      <a:prstDash val="solid"/>
+                      <a:round/>
+                      <a:headEnd type="none" w="med" len="med"/>
+                      <a:tailEnd type="none" w="med" len="med"/>
+                    </a:lnB>
+                    <a:solidFill>
+                      <a:srgbClr val="F0F0F0"/>
+                    </a:solidFill>
+                  </a:tcPr>
+                </a:tc>
+                <a:tc>
+                  <a:txBody>
+                    <a:bodyPr/>
+                    <a:lstStyle/>
+                    <a:p>
+                      <a:pPr algn="ctr" indent="0" marL="0">
+                        <a:buNone/>
+                      </a:pPr>
+                      <a:r>
+                        <a:rPr lang="en-US" sz="1100" b="1" dirty="0">
+                          <a:solidFill>
+                            <a:srgbClr val="1A1A1A"/>
+                          </a:solidFill>
+                          <a:latin typeface="Calibri" pitchFamily="34" charset="0"/>
+                          <a:ea typeface="Calibri" pitchFamily="34" charset="-122"/>
+                          <a:cs typeface="Calibri" pitchFamily="34" charset="-120"/>
+                        </a:rPr>
+                        <a:t>Single-knob top-1 Δ</a:t>
+                      </a:r>
+                      <a:endParaRPr lang="en-US" sz="1100" dirty="0">
+                        <a:latin typeface="Calibri" charset="0"/>
+                        <a:ea typeface="Calibri" charset="0"/>
+                        <a:cs typeface="Calibri" charset="0"/>
+                      </a:endParaRPr>
+                    </a:p>
+                  </a:txBody>
+                  <a:tcPr marL="54864" marR="54864" marT="54864" marB="54864" anchor="ctr">
+                    <a:lnL w="6350" cap="flat" cmpd="sng" algn="ctr">
+                      <a:solidFill>
+                        <a:srgbClr val="DDDDDD"/>
+                      </a:solidFill>
+                      <a:prstDash val="solid"/>
+                      <a:round/>
+                      <a:headEnd type="none" w="med" len="med"/>
+                      <a:tailEnd type="none" w="med" len="med"/>
+                    </a:lnL>
+                    <a:lnR w="6350" cap="flat" cmpd="sng" algn="ctr">
+                      <a:solidFill>
+                        <a:srgbClr val="DDDDDD"/>
+                      </a:solidFill>
+                      <a:prstDash val="solid"/>
+                      <a:round/>
+                      <a:headEnd type="none" w="med" len="med"/>
+                      <a:tailEnd type="none" w="med" len="med"/>
+                    </a:lnR>
+                    <a:lnT w="6350" cap="flat" cmpd="sng" algn="ctr">
+                      <a:solidFill>
+                        <a:srgbClr val="DDDDDD"/>
+                      </a:solidFill>
+                      <a:prstDash val="solid"/>
+                      <a:round/>
+                      <a:headEnd type="none" w="med" len="med"/>
+                      <a:tailEnd type="none" w="med" len="med"/>
+                    </a:lnT>
+                    <a:lnB w="6350" cap="flat" cmpd="sng" algn="ctr">
+                      <a:solidFill>
+                        <a:srgbClr val="DDDDDD"/>
+                      </a:solidFill>
+                      <a:prstDash val="solid"/>
+                      <a:round/>
+                      <a:headEnd type="none" w="med" len="med"/>
+                      <a:tailEnd type="none" w="med" len="med"/>
+                    </a:lnB>
+                    <a:solidFill>
+                      <a:srgbClr val="F0F0F0"/>
+                    </a:solidFill>
+                  </a:tcPr>
+                </a:tc>
+              </a:tr>
+              <a:tr h="292608">
+                <a:tc>
+                  <a:txBody>
+                    <a:bodyPr/>
+                    <a:lstStyle/>
+                    <a:p>
+                      <a:pPr algn="l" indent="0" marL="0">
+                        <a:buNone/>
+                      </a:pPr>
+                      <a:r>
+                        <a:rPr lang="en-US" sz="1200" b="1" dirty="0">
+                          <a:solidFill>
+                            <a:srgbClr val="1A1A1A"/>
+                          </a:solidFill>
+                          <a:latin typeface="Calibri" pitchFamily="34" charset="0"/>
+                          <a:ea typeface="Calibri" pitchFamily="34" charset="-122"/>
+                          <a:cs typeface="Calibri" pitchFamily="34" charset="-120"/>
+                        </a:rPr>
+                        <a:t>length</a:t>
+                      </a:r>
+                      <a:endParaRPr lang="en-US" sz="1200" dirty="0">
+                        <a:latin typeface="Calibri" charset="0"/>
+                        <a:ea typeface="Calibri" charset="0"/>
+                        <a:cs typeface="Calibri" charset="0"/>
+                      </a:endParaRPr>
+                    </a:p>
+                  </a:txBody>
+                  <a:tcPr marL="54864" marR="54864" marT="54864" marB="54864" anchor="ctr">
+                    <a:lnL w="6350" cap="flat" cmpd="sng" algn="ctr">
+                      <a:solidFill>
+                        <a:srgbClr val="DDDDDD"/>
+                      </a:solidFill>
+                      <a:prstDash val="solid"/>
+                      <a:round/>
+                      <a:headEnd type="none" w="med" len="med"/>
+                      <a:tailEnd type="none" w="med" len="med"/>
+                    </a:lnL>
+                    <a:lnR w="6350" cap="flat" cmpd="sng" algn="ctr">
+                      <a:solidFill>
+                        <a:srgbClr val="DDDDDD"/>
+                      </a:solidFill>
+                      <a:prstDash val="solid"/>
+                      <a:round/>
+                      <a:headEnd type="none" w="med" len="med"/>
+                      <a:tailEnd type="none" w="med" len="med"/>
+                    </a:lnR>
+                    <a:lnT w="6350" cap="flat" cmpd="sng" algn="ctr">
+                      <a:solidFill>
+                        <a:srgbClr val="DDDDDD"/>
+                      </a:solidFill>
+                      <a:prstDash val="solid"/>
+                      <a:round/>
+                      <a:headEnd type="none" w="med" len="med"/>
+                      <a:tailEnd type="none" w="med" len="med"/>
+                    </a:lnT>
+                    <a:lnB w="6350" cap="flat" cmpd="sng" algn="ctr">
+                      <a:solidFill>
+                        <a:srgbClr val="DDDDDD"/>
+                      </a:solidFill>
+                      <a:prstDash val="solid"/>
+                      <a:round/>
+                      <a:headEnd type="none" w="med" len="med"/>
+                      <a:tailEnd type="none" w="med" len="med"/>
+                    </a:lnB>
+                  </a:tcPr>
+                </a:tc>
+                <a:tc>
+                  <a:txBody>
+                    <a:bodyPr/>
+                    <a:lstStyle/>
+                    <a:p>
+                      <a:pPr algn="ctr" indent="0" marL="0">
+                        <a:buNone/>
+                      </a:pPr>
+                      <a:r>
+                        <a:rPr lang="en-US" sz="1200" b="1" dirty="0">
+                          <a:solidFill>
+                            <a:srgbClr val="0A7D2A"/>
+                          </a:solidFill>
+                          <a:latin typeface="Calibri" pitchFamily="34" charset="0"/>
+                          <a:ea typeface="Calibri" pitchFamily="34" charset="-122"/>
+                          <a:cs typeface="Calibri" pitchFamily="34" charset="-120"/>
+                        </a:rPr>
+                        <a:t>0.527</a:t>
+                      </a:r>
+                      <a:endParaRPr lang="en-US" sz="1200" dirty="0">
+                        <a:latin typeface="Calibri" charset="0"/>
+                        <a:ea typeface="Calibri" charset="0"/>
+                        <a:cs typeface="Calibri" charset="0"/>
+                      </a:endParaRPr>
+                    </a:p>
+                  </a:txBody>
+                  <a:tcPr marL="54864" marR="54864" marT="54864" marB="54864" anchor="ctr">
+                    <a:lnL w="6350" cap="flat" cmpd="sng" algn="ctr">
+                      <a:solidFill>
+                        <a:srgbClr val="DDDDDD"/>
+                      </a:solidFill>
+                      <a:prstDash val="solid"/>
+                      <a:round/>
+                      <a:headEnd type="none" w="med" len="med"/>
+                      <a:tailEnd type="none" w="med" len="med"/>
+                    </a:lnL>
+                    <a:lnR w="6350" cap="flat" cmpd="sng" algn="ctr">
+                      <a:solidFill>
+                        <a:srgbClr val="DDDDDD"/>
+                      </a:solidFill>
+                      <a:prstDash val="solid"/>
+                      <a:round/>
+                      <a:headEnd type="none" w="med" len="med"/>
+                      <a:tailEnd type="none" w="med" len="med"/>
+                    </a:lnR>
+                    <a:lnT w="6350" cap="flat" cmpd="sng" algn="ctr">
+                      <a:solidFill>
+                        <a:srgbClr val="DDDDDD"/>
+                      </a:solidFill>
+                      <a:prstDash val="solid"/>
+                      <a:round/>
+                      <a:headEnd type="none" w="med" len="med"/>
+                      <a:tailEnd type="none" w="med" len="med"/>
+                    </a:lnT>
+                    <a:lnB w="6350" cap="flat" cmpd="sng" algn="ctr">
+                      <a:solidFill>
+                        <a:srgbClr val="DDDDDD"/>
+                      </a:solidFill>
+                      <a:prstDash val="solid"/>
+                      <a:round/>
+                      <a:headEnd type="none" w="med" len="med"/>
+                      <a:tailEnd type="none" w="med" len="med"/>
+                    </a:lnB>
+                  </a:tcPr>
+                </a:tc>
+                <a:tc>
+                  <a:txBody>
+                    <a:bodyPr/>
+                    <a:lstStyle/>
+                    <a:p>
+                      <a:pPr algn="ctr" indent="0" marL="0">
+                        <a:buNone/>
+                      </a:pPr>
+                      <a:r>
+                        <a:rPr lang="en-US" sz="1200" dirty="0">
+                          <a:solidFill>
+                            <a:srgbClr val="333333"/>
+                          </a:solidFill>
+                          <a:latin typeface="Calibri" pitchFamily="34" charset="0"/>
+                          <a:ea typeface="Calibri" pitchFamily="34" charset="-122"/>
+                          <a:cs typeface="Calibri" pitchFamily="34" charset="-120"/>
+                        </a:rPr>
+                        <a:t>6.2%</a:t>
+                      </a:r>
+                      <a:endParaRPr lang="en-US" sz="1200" dirty="0">
+                        <a:latin typeface="Calibri" charset="0"/>
+                        <a:ea typeface="Calibri" charset="0"/>
+                        <a:cs typeface="Calibri" charset="0"/>
+                      </a:endParaRPr>
+                    </a:p>
+                  </a:txBody>
+                  <a:tcPr marL="54864" marR="54864" marT="54864" marB="54864" anchor="ctr">
+                    <a:lnL w="6350" cap="flat" cmpd="sng" algn="ctr">
+                      <a:solidFill>
+                        <a:srgbClr val="DDDDDD"/>
+                      </a:solidFill>
+                      <a:prstDash val="solid"/>
+                      <a:round/>
+                      <a:headEnd type="none" w="med" len="med"/>
+                      <a:tailEnd type="none" w="med" len="med"/>
+                    </a:lnL>
+                    <a:lnR w="6350" cap="flat" cmpd="sng" algn="ctr">
+                      <a:solidFill>
+                        <a:srgbClr val="DDDDDD"/>
+                      </a:solidFill>
+                      <a:prstDash val="solid"/>
+                      <a:round/>
+                      <a:headEnd type="none" w="med" len="med"/>
+                      <a:tailEnd type="none" w="med" len="med"/>
+                    </a:lnR>
+                    <a:lnT w="6350" cap="flat" cmpd="sng" algn="ctr">
+                      <a:solidFill>
+                        <a:srgbClr val="DDDDDD"/>
+                      </a:solidFill>
+                      <a:prstDash val="solid"/>
+                      <a:round/>
+                      <a:headEnd type="none" w="med" len="med"/>
+                      <a:tailEnd type="none" w="med" len="med"/>
+                    </a:lnT>
+                    <a:lnB w="6350" cap="flat" cmpd="sng" algn="ctr">
+                      <a:solidFill>
+                        <a:srgbClr val="DDDDDD"/>
+                      </a:solidFill>
+                      <a:prstDash val="solid"/>
+                      <a:round/>
+                      <a:headEnd type="none" w="med" len="med"/>
+                      <a:tailEnd type="none" w="med" len="med"/>
+                    </a:lnB>
+                  </a:tcPr>
+                </a:tc>
+              </a:tr>
+              <a:tr h="292608">
+                <a:tc>
+                  <a:txBody>
+                    <a:bodyPr/>
+                    <a:lstStyle/>
+                    <a:p>
+                      <a:pPr algn="l" indent="0" marL="0">
+                        <a:buNone/>
+                      </a:pPr>
+                      <a:r>
+                        <a:rPr lang="en-US" sz="1200" b="1" dirty="0">
+                          <a:solidFill>
+                            <a:srgbClr val="1A1A1A"/>
+                          </a:solidFill>
+                          <a:latin typeface="Calibri" pitchFamily="34" charset="0"/>
+                          <a:ea typeface="Calibri" pitchFamily="34" charset="-122"/>
+                          <a:cs typeface="Calibri" pitchFamily="34" charset="-120"/>
+                        </a:rPr>
+                        <a:t>manualIde</a:t>
+                      </a:r>
+                      <a:endParaRPr lang="en-US" sz="1200" dirty="0">
+                        <a:latin typeface="Calibri" charset="0"/>
+                        <a:ea typeface="Calibri" charset="0"/>
+                        <a:cs typeface="Calibri" charset="0"/>
+                      </a:endParaRPr>
+                    </a:p>
+                  </a:txBody>
+                  <a:tcPr marL="54864" marR="54864" marT="54864" marB="54864" anchor="ctr">
+                    <a:lnL w="6350" cap="flat" cmpd="sng" algn="ctr">
+                      <a:solidFill>
+                        <a:srgbClr val="DDDDDD"/>
+                      </a:solidFill>
+                      <a:prstDash val="solid"/>
+                      <a:round/>
+                      <a:headEnd type="none" w="med" len="med"/>
+                      <a:tailEnd type="none" w="med" len="med"/>
+                    </a:lnL>
+                    <a:lnR w="6350" cap="flat" cmpd="sng" algn="ctr">
+                      <a:solidFill>
+                        <a:srgbClr val="DDDDDD"/>
+                      </a:solidFill>
+                      <a:prstDash val="solid"/>
+                      <a:round/>
+                      <a:headEnd type="none" w="med" len="med"/>
+                      <a:tailEnd type="none" w="med" len="med"/>
+                    </a:lnR>
+                    <a:lnT w="6350" cap="flat" cmpd="sng" algn="ctr">
+                      <a:solidFill>
+                        <a:srgbClr val="DDDDDD"/>
+                      </a:solidFill>
+                      <a:prstDash val="solid"/>
+                      <a:round/>
+                      <a:headEnd type="none" w="med" len="med"/>
+                      <a:tailEnd type="none" w="med" len="med"/>
+                    </a:lnT>
+                    <a:lnB w="6350" cap="flat" cmpd="sng" algn="ctr">
+                      <a:solidFill>
+                        <a:srgbClr val="DDDDDD"/>
+                      </a:solidFill>
+                      <a:prstDash val="solid"/>
+                      <a:round/>
+                      <a:headEnd type="none" w="med" len="med"/>
+                      <a:tailEnd type="none" w="med" len="med"/>
+                    </a:lnB>
+                  </a:tcPr>
+                </a:tc>
+                <a:tc>
+                  <a:txBody>
+                    <a:bodyPr/>
+                    <a:lstStyle/>
+                    <a:p>
+                      <a:pPr algn="ctr" indent="0" marL="0">
+                        <a:buNone/>
+                      </a:pPr>
+                      <a:r>
+                        <a:rPr lang="en-US" sz="1200" dirty="0">
+                          <a:solidFill>
+                            <a:srgbClr val="333333"/>
+                          </a:solidFill>
+                          <a:latin typeface="Calibri" pitchFamily="34" charset="0"/>
+                          <a:ea typeface="Calibri" pitchFamily="34" charset="-122"/>
+                          <a:cs typeface="Calibri" pitchFamily="34" charset="-120"/>
+                        </a:rPr>
+                        <a:t>0.588</a:t>
+                      </a:r>
+                      <a:endParaRPr lang="en-US" sz="1200" dirty="0">
+                        <a:latin typeface="Calibri" charset="0"/>
+                        <a:ea typeface="Calibri" charset="0"/>
+                        <a:cs typeface="Calibri" charset="0"/>
+                      </a:endParaRPr>
+                    </a:p>
+                  </a:txBody>
+                  <a:tcPr marL="54864" marR="54864" marT="54864" marB="54864" anchor="ctr">
+                    <a:lnL w="6350" cap="flat" cmpd="sng" algn="ctr">
+                      <a:solidFill>
+                        <a:srgbClr val="DDDDDD"/>
+                      </a:solidFill>
+                      <a:prstDash val="solid"/>
+                      <a:round/>
+                      <a:headEnd type="none" w="med" len="med"/>
+                      <a:tailEnd type="none" w="med" len="med"/>
+                    </a:lnL>
+                    <a:lnR w="6350" cap="flat" cmpd="sng" algn="ctr">
+                      <a:solidFill>
+                        <a:srgbClr val="DDDDDD"/>
+                      </a:solidFill>
+                      <a:prstDash val="solid"/>
+                      <a:round/>
+                      <a:headEnd type="none" w="med" len="med"/>
+                      <a:tailEnd type="none" w="med" len="med"/>
+                    </a:lnR>
+                    <a:lnT w="6350" cap="flat" cmpd="sng" algn="ctr">
+                      <a:solidFill>
+                        <a:srgbClr val="DDDDDD"/>
+                      </a:solidFill>
+                      <a:prstDash val="solid"/>
+                      <a:round/>
+                      <a:headEnd type="none" w="med" len="med"/>
+                      <a:tailEnd type="none" w="med" len="med"/>
+                    </a:lnT>
+                    <a:lnB w="6350" cap="flat" cmpd="sng" algn="ctr">
+                      <a:solidFill>
+                        <a:srgbClr val="DDDDDD"/>
+                      </a:solidFill>
+                      <a:prstDash val="solid"/>
+                      <a:round/>
+                      <a:headEnd type="none" w="med" len="med"/>
+                      <a:tailEnd type="none" w="med" len="med"/>
+                    </a:lnB>
+                  </a:tcPr>
+                </a:tc>
+                <a:tc>
+                  <a:txBody>
+                    <a:bodyPr/>
+                    <a:lstStyle/>
+                    <a:p>
+                      <a:pPr algn="ctr" indent="0" marL="0">
+                        <a:buNone/>
+                      </a:pPr>
+                      <a:r>
+                        <a:rPr lang="en-US" sz="1200" dirty="0">
+                          <a:solidFill>
+                            <a:srgbClr val="333333"/>
+                          </a:solidFill>
+                          <a:latin typeface="Calibri" pitchFamily="34" charset="0"/>
+                          <a:ea typeface="Calibri" pitchFamily="34" charset="-122"/>
+                          <a:cs typeface="Calibri" pitchFamily="34" charset="-120"/>
+                        </a:rPr>
+                        <a:t>7.6%</a:t>
+                      </a:r>
+                      <a:endParaRPr lang="en-US" sz="1200" dirty="0">
+                        <a:latin typeface="Calibri" charset="0"/>
+                        <a:ea typeface="Calibri" charset="0"/>
+                        <a:cs typeface="Calibri" charset="0"/>
+                      </a:endParaRPr>
+                    </a:p>
+                  </a:txBody>
+                  <a:tcPr marL="54864" marR="54864" marT="54864" marB="54864" anchor="ctr">
+                    <a:lnL w="6350" cap="flat" cmpd="sng" algn="ctr">
+                      <a:solidFill>
+                        <a:srgbClr val="DDDDDD"/>
+                      </a:solidFill>
+                      <a:prstDash val="solid"/>
+                      <a:round/>
+                      <a:headEnd type="none" w="med" len="med"/>
+                      <a:tailEnd type="none" w="med" len="med"/>
+                    </a:lnL>
+                    <a:lnR w="6350" cap="flat" cmpd="sng" algn="ctr">
+                      <a:solidFill>
+                        <a:srgbClr val="DDDDDD"/>
+                      </a:solidFill>
+                      <a:prstDash val="solid"/>
+                      <a:round/>
+                      <a:headEnd type="none" w="med" len="med"/>
+                      <a:tailEnd type="none" w="med" len="med"/>
+                    </a:lnR>
+                    <a:lnT w="6350" cap="flat" cmpd="sng" algn="ctr">
+                      <a:solidFill>
+                        <a:srgbClr val="DDDDDD"/>
+                      </a:solidFill>
+                      <a:prstDash val="solid"/>
+                      <a:round/>
+                      <a:headEnd type="none" w="med" len="med"/>
+                      <a:tailEnd type="none" w="med" len="med"/>
+                    </a:lnT>
+                    <a:lnB w="6350" cap="flat" cmpd="sng" algn="ctr">
+                      <a:solidFill>
+                        <a:srgbClr val="DDDDDD"/>
+                      </a:solidFill>
+                      <a:prstDash val="solid"/>
+                      <a:round/>
+                      <a:headEnd type="none" w="med" len="med"/>
+                      <a:tailEnd type="none" w="med" len="med"/>
+                    </a:lnB>
+                  </a:tcPr>
+                </a:tc>
+              </a:tr>
+              <a:tr h="292608">
+                <a:tc>
+                  <a:txBody>
+                    <a:bodyPr/>
+                    <a:lstStyle/>
+                    <a:p>
+                      <a:pPr algn="l" indent="0" marL="0">
+                        <a:buNone/>
+                      </a:pPr>
+                      <a:r>
+                        <a:rPr lang="en-US" sz="1200" b="1" dirty="0">
+                          <a:solidFill>
+                            <a:srgbClr val="1A1A1A"/>
+                          </a:solidFill>
+                          <a:latin typeface="Calibri" pitchFamily="34" charset="0"/>
+                          <a:ea typeface="Calibri" pitchFamily="34" charset="-122"/>
+                          <a:cs typeface="Calibri" pitchFamily="34" charset="-120"/>
+                        </a:rPr>
+                        <a:t>broken</a:t>
+                      </a:r>
+                      <a:endParaRPr lang="en-US" sz="1200" dirty="0">
+                        <a:latin typeface="Calibri" charset="0"/>
+                        <a:ea typeface="Calibri" charset="0"/>
+                        <a:cs typeface="Calibri" charset="0"/>
+                      </a:endParaRPr>
+                    </a:p>
+                  </a:txBody>
+                  <a:tcPr marL="54864" marR="54864" marT="54864" marB="54864" anchor="ctr">
+                    <a:lnL w="6350" cap="flat" cmpd="sng" algn="ctr">
+                      <a:solidFill>
+                        <a:srgbClr val="DDDDDD"/>
+                      </a:solidFill>
+                      <a:prstDash val="solid"/>
+                      <a:round/>
+                      <a:headEnd type="none" w="med" len="med"/>
+                      <a:tailEnd type="none" w="med" len="med"/>
+                    </a:lnL>
+                    <a:lnR w="6350" cap="flat" cmpd="sng" algn="ctr">
+                      <a:solidFill>
+                        <a:srgbClr val="DDDDDD"/>
+                      </a:solidFill>
+                      <a:prstDash val="solid"/>
+                      <a:round/>
+                      <a:headEnd type="none" w="med" len="med"/>
+                      <a:tailEnd type="none" w="med" len="med"/>
+                    </a:lnR>
+                    <a:lnT w="6350" cap="flat" cmpd="sng" algn="ctr">
+                      <a:solidFill>
+                        <a:srgbClr val="DDDDDD"/>
+                      </a:solidFill>
+                      <a:prstDash val="solid"/>
+                      <a:round/>
+                      <a:headEnd type="none" w="med" len="med"/>
+                      <a:tailEnd type="none" w="med" len="med"/>
+                    </a:lnT>
+                    <a:lnB w="6350" cap="flat" cmpd="sng" algn="ctr">
+                      <a:solidFill>
+                        <a:srgbClr val="DDDDDD"/>
+                      </a:solidFill>
+                      <a:prstDash val="solid"/>
+                      <a:round/>
+                      <a:headEnd type="none" w="med" len="med"/>
+                      <a:tailEnd type="none" w="med" len="med"/>
+                    </a:lnB>
+                  </a:tcPr>
+                </a:tc>
+                <a:tc>
+                  <a:txBody>
+                    <a:bodyPr/>
+                    <a:lstStyle/>
+                    <a:p>
+                      <a:pPr algn="ctr" indent="0" marL="0">
+                        <a:buNone/>
+                      </a:pPr>
+                      <a:r>
+                        <a:rPr lang="en-US" sz="1200" dirty="0">
+                          <a:solidFill>
+                            <a:srgbClr val="333333"/>
+                          </a:solidFill>
+                          <a:latin typeface="Calibri" pitchFamily="34" charset="0"/>
+                          <a:ea typeface="Calibri" pitchFamily="34" charset="-122"/>
+                          <a:cs typeface="Calibri" pitchFamily="34" charset="-120"/>
+                        </a:rPr>
+                        <a:t>0.627</a:t>
+                      </a:r>
+                      <a:endParaRPr lang="en-US" sz="1200" dirty="0">
+                        <a:latin typeface="Calibri" charset="0"/>
+                        <a:ea typeface="Calibri" charset="0"/>
+                        <a:cs typeface="Calibri" charset="0"/>
+                      </a:endParaRPr>
+                    </a:p>
+                  </a:txBody>
+                  <a:tcPr marL="54864" marR="54864" marT="54864" marB="54864" anchor="ctr">
+                    <a:lnL w="6350" cap="flat" cmpd="sng" algn="ctr">
+                      <a:solidFill>
+                        <a:srgbClr val="DDDDDD"/>
+                      </a:solidFill>
+                      <a:prstDash val="solid"/>
+                      <a:round/>
+                      <a:headEnd type="none" w="med" len="med"/>
+                      <a:tailEnd type="none" w="med" len="med"/>
+                    </a:lnL>
+                    <a:lnR w="6350" cap="flat" cmpd="sng" algn="ctr">
+                      <a:solidFill>
+                        <a:srgbClr val="DDDDDD"/>
+                      </a:solidFill>
+                      <a:prstDash val="solid"/>
+                      <a:round/>
+                      <a:headEnd type="none" w="med" len="med"/>
+                      <a:tailEnd type="none" w="med" len="med"/>
+                    </a:lnR>
+                    <a:lnT w="6350" cap="flat" cmpd="sng" algn="ctr">
+                      <a:solidFill>
+                        <a:srgbClr val="DDDDDD"/>
+                      </a:solidFill>
+                      <a:prstDash val="solid"/>
+                      <a:round/>
+                      <a:headEnd type="none" w="med" len="med"/>
+                      <a:tailEnd type="none" w="med" len="med"/>
+                    </a:lnT>
+                    <a:lnB w="6350" cap="flat" cmpd="sng" algn="ctr">
+                      <a:solidFill>
+                        <a:srgbClr val="DDDDDD"/>
+                      </a:solidFill>
+                      <a:prstDash val="solid"/>
+                      <a:round/>
+                      <a:headEnd type="none" w="med" len="med"/>
+                      <a:tailEnd type="none" w="med" len="med"/>
+                    </a:lnB>
+                  </a:tcPr>
+                </a:tc>
+                <a:tc>
+                  <a:txBody>
+                    <a:bodyPr/>
+                    <a:lstStyle/>
+                    <a:p>
+                      <a:pPr algn="ctr" indent="0" marL="0">
+                        <a:buNone/>
+                      </a:pPr>
+                      <a:r>
+                        <a:rPr lang="en-US" sz="1200" dirty="0">
+                          <a:solidFill>
+                            <a:srgbClr val="333333"/>
+                          </a:solidFill>
+                          <a:latin typeface="Calibri" pitchFamily="34" charset="0"/>
+                          <a:ea typeface="Calibri" pitchFamily="34" charset="-122"/>
+                          <a:cs typeface="Calibri" pitchFamily="34" charset="-120"/>
+                        </a:rPr>
+                        <a:t>5.3%</a:t>
+                      </a:r>
+                      <a:endParaRPr lang="en-US" sz="1200" dirty="0">
+                        <a:latin typeface="Calibri" charset="0"/>
+                        <a:ea typeface="Calibri" charset="0"/>
+                        <a:cs typeface="Calibri" charset="0"/>
+                      </a:endParaRPr>
+                    </a:p>
+                  </a:txBody>
+                  <a:tcPr marL="54864" marR="54864" marT="54864" marB="54864" anchor="ctr">
+                    <a:lnL w="6350" cap="flat" cmpd="sng" algn="ctr">
+                      <a:solidFill>
+                        <a:srgbClr val="DDDDDD"/>
+                      </a:solidFill>
+                      <a:prstDash val="solid"/>
+                      <a:round/>
+                      <a:headEnd type="none" w="med" len="med"/>
+                      <a:tailEnd type="none" w="med" len="med"/>
+                    </a:lnL>
+                    <a:lnR w="6350" cap="flat" cmpd="sng" algn="ctr">
+                      <a:solidFill>
+                        <a:srgbClr val="DDDDDD"/>
+                      </a:solidFill>
+                      <a:prstDash val="solid"/>
+                      <a:round/>
+                      <a:headEnd type="none" w="med" len="med"/>
+                      <a:tailEnd type="none" w="med" len="med"/>
+                    </a:lnR>
+                    <a:lnT w="6350" cap="flat" cmpd="sng" algn="ctr">
+                      <a:solidFill>
+                        <a:srgbClr val="DDDDDD"/>
+                      </a:solidFill>
+                      <a:prstDash val="solid"/>
+                      <a:round/>
+                      <a:headEnd type="none" w="med" len="med"/>
+                      <a:tailEnd type="none" w="med" len="med"/>
+                    </a:lnT>
+                    <a:lnB w="6350" cap="flat" cmpd="sng" algn="ctr">
+                      <a:solidFill>
+                        <a:srgbClr val="DDDDDD"/>
+                      </a:solidFill>
+                      <a:prstDash val="solid"/>
+                      <a:round/>
+                      <a:headEnd type="none" w="med" len="med"/>
+                      <a:tailEnd type="none" w="med" len="med"/>
+                    </a:lnB>
+                  </a:tcPr>
+                </a:tc>
+              </a:tr>
+              <a:tr h="292608">
+                <a:tc>
+                  <a:txBody>
+                    <a:bodyPr/>
+                    <a:lstStyle/>
+                    <a:p>
+                      <a:pPr algn="l" indent="0" marL="0">
+                        <a:buNone/>
+                      </a:pPr>
+                      <a:r>
+                        <a:rPr lang="en-US" sz="1200" b="1" dirty="0">
+                          <a:solidFill>
+                            <a:srgbClr val="1A1A1A"/>
+                          </a:solidFill>
+                          <a:latin typeface="Calibri" pitchFamily="34" charset="0"/>
+                          <a:ea typeface="Calibri" pitchFamily="34" charset="-122"/>
+                          <a:cs typeface="Calibri" pitchFamily="34" charset="-120"/>
+                        </a:rPr>
+                        <a:t>commitGap</a:t>
+                      </a:r>
+                      <a:endParaRPr lang="en-US" sz="1200" dirty="0">
+                        <a:latin typeface="Calibri" charset="0"/>
+                        <a:ea typeface="Calibri" charset="0"/>
+                        <a:cs typeface="Calibri" charset="0"/>
+                      </a:endParaRPr>
+                    </a:p>
+                  </a:txBody>
+                  <a:tcPr marL="54864" marR="54864" marT="54864" marB="54864" anchor="ctr">
+                    <a:lnL w="6350" cap="flat" cmpd="sng" algn="ctr">
+                      <a:solidFill>
+                        <a:srgbClr val="DDDDDD"/>
+                      </a:solidFill>
+                      <a:prstDash val="solid"/>
+                      <a:round/>
+                      <a:headEnd type="none" w="med" len="med"/>
+                      <a:tailEnd type="none" w="med" len="med"/>
+                    </a:lnL>
+                    <a:lnR w="6350" cap="flat" cmpd="sng" algn="ctr">
+                      <a:solidFill>
+                        <a:srgbClr val="DDDDDD"/>
+                      </a:solidFill>
+                      <a:prstDash val="solid"/>
+                      <a:round/>
+                      <a:headEnd type="none" w="med" len="med"/>
+                      <a:tailEnd type="none" w="med" len="med"/>
+                    </a:lnR>
+                    <a:lnT w="6350" cap="flat" cmpd="sng" algn="ctr">
+                      <a:solidFill>
+                        <a:srgbClr val="DDDDDD"/>
+                      </a:solidFill>
+                      <a:prstDash val="solid"/>
+                      <a:round/>
+                      <a:headEnd type="none" w="med" len="med"/>
+                      <a:tailEnd type="none" w="med" len="med"/>
+                    </a:lnT>
+                    <a:lnB w="6350" cap="flat" cmpd="sng" algn="ctr">
+                      <a:solidFill>
+                        <a:srgbClr val="DDDDDD"/>
+                      </a:solidFill>
+                      <a:prstDash val="solid"/>
+                      <a:round/>
+                      <a:headEnd type="none" w="med" len="med"/>
+                      <a:tailEnd type="none" w="med" len="med"/>
+                    </a:lnB>
+                  </a:tcPr>
+                </a:tc>
+                <a:tc>
+                  <a:txBody>
+                    <a:bodyPr/>
+                    <a:lstStyle/>
+                    <a:p>
+                      <a:pPr algn="ctr" indent="0" marL="0">
+                        <a:buNone/>
+                      </a:pPr>
+                      <a:r>
+                        <a:rPr lang="en-US" sz="1200" dirty="0">
+                          <a:solidFill>
+                            <a:srgbClr val="333333"/>
+                          </a:solidFill>
+                          <a:latin typeface="Calibri" pitchFamily="34" charset="0"/>
+                          <a:ea typeface="Calibri" pitchFamily="34" charset="-122"/>
+                          <a:cs typeface="Calibri" pitchFamily="34" charset="-120"/>
+                        </a:rPr>
+                        <a:t>0.655</a:t>
+                      </a:r>
+                      <a:endParaRPr lang="en-US" sz="1200" dirty="0">
+                        <a:latin typeface="Calibri" charset="0"/>
+                        <a:ea typeface="Calibri" charset="0"/>
+                        <a:cs typeface="Calibri" charset="0"/>
+                      </a:endParaRPr>
+                    </a:p>
+                  </a:txBody>
+                  <a:tcPr marL="54864" marR="54864" marT="54864" marB="54864" anchor="ctr">
+                    <a:lnL w="6350" cap="flat" cmpd="sng" algn="ctr">
+                      <a:solidFill>
+                        <a:srgbClr val="DDDDDD"/>
+                      </a:solidFill>
+                      <a:prstDash val="solid"/>
+                      <a:round/>
+                      <a:headEnd type="none" w="med" len="med"/>
+                      <a:tailEnd type="none" w="med" len="med"/>
+                    </a:lnL>
+                    <a:lnR w="6350" cap="flat" cmpd="sng" algn="ctr">
+                      <a:solidFill>
+                        <a:srgbClr val="DDDDDD"/>
+                      </a:solidFill>
+                      <a:prstDash val="solid"/>
+                      <a:round/>
+                      <a:headEnd type="none" w="med" len="med"/>
+                      <a:tailEnd type="none" w="med" len="med"/>
+                    </a:lnR>
+                    <a:lnT w="6350" cap="flat" cmpd="sng" algn="ctr">
+                      <a:solidFill>
+                        <a:srgbClr val="DDDDDD"/>
+                      </a:solidFill>
+                      <a:prstDash val="solid"/>
+                      <a:round/>
+                      <a:headEnd type="none" w="med" len="med"/>
+                      <a:tailEnd type="none" w="med" len="med"/>
+                    </a:lnT>
+                    <a:lnB w="6350" cap="flat" cmpd="sng" algn="ctr">
+                      <a:solidFill>
+                        <a:srgbClr val="DDDDDD"/>
+                      </a:solidFill>
+                      <a:prstDash val="solid"/>
+                      <a:round/>
+                      <a:headEnd type="none" w="med" len="med"/>
+                      <a:tailEnd type="none" w="med" len="med"/>
+                    </a:lnB>
+                  </a:tcPr>
+                </a:tc>
+                <a:tc>
+                  <a:txBody>
+                    <a:bodyPr/>
+                    <a:lstStyle/>
+                    <a:p>
+                      <a:pPr algn="ctr" indent="0" marL="0">
+                        <a:buNone/>
+                      </a:pPr>
+                      <a:r>
+                        <a:rPr lang="en-US" sz="1200" dirty="0">
+                          <a:solidFill>
+                            <a:srgbClr val="333333"/>
+                          </a:solidFill>
+                          <a:latin typeface="Calibri" pitchFamily="34" charset="0"/>
+                          <a:ea typeface="Calibri" pitchFamily="34" charset="-122"/>
+                          <a:cs typeface="Calibri" pitchFamily="34" charset="-120"/>
+                        </a:rPr>
+                        <a:t>6.7%</a:t>
+                      </a:r>
+                      <a:endParaRPr lang="en-US" sz="1200" dirty="0">
+                        <a:latin typeface="Calibri" charset="0"/>
+                        <a:ea typeface="Calibri" charset="0"/>
+                        <a:cs typeface="Calibri" charset="0"/>
+                      </a:endParaRPr>
+                    </a:p>
+                  </a:txBody>
+                  <a:tcPr marL="54864" marR="54864" marT="54864" marB="54864" anchor="ctr">
+                    <a:lnL w="6350" cap="flat" cmpd="sng" algn="ctr">
+                      <a:solidFill>
+                        <a:srgbClr val="DDDDDD"/>
+                      </a:solidFill>
+                      <a:prstDash val="solid"/>
+                      <a:round/>
+                      <a:headEnd type="none" w="med" len="med"/>
+                      <a:tailEnd type="none" w="med" len="med"/>
+                    </a:lnL>
+                    <a:lnR w="6350" cap="flat" cmpd="sng" algn="ctr">
+                      <a:solidFill>
+                        <a:srgbClr val="DDDDDD"/>
+                      </a:solidFill>
+                      <a:prstDash val="solid"/>
+                      <a:round/>
+                      <a:headEnd type="none" w="med" len="med"/>
+                      <a:tailEnd type="none" w="med" len="med"/>
+                    </a:lnR>
+                    <a:lnT w="6350" cap="flat" cmpd="sng" algn="ctr">
+                      <a:solidFill>
+                        <a:srgbClr val="DDDDDD"/>
+                      </a:solidFill>
+                      <a:prstDash val="solid"/>
+                      <a:round/>
+                      <a:headEnd type="none" w="med" len="med"/>
+                      <a:tailEnd type="none" w="med" len="med"/>
+                    </a:lnT>
+                    <a:lnB w="6350" cap="flat" cmpd="sng" algn="ctr">
+                      <a:solidFill>
+                        <a:srgbClr val="DDDDDD"/>
+                      </a:solidFill>
+                      <a:prstDash val="solid"/>
+                      <a:round/>
+                      <a:headEnd type="none" w="med" len="med"/>
+                      <a:tailEnd type="none" w="med" len="med"/>
+                    </a:lnB>
+                  </a:tcPr>
+                </a:tc>
+              </a:tr>
+              <a:tr h="292608">
+                <a:tc>
+                  <a:txBody>
+                    <a:bodyPr/>
+                    <a:lstStyle/>
+                    <a:p>
+                      <a:pPr algn="l" indent="0" marL="0">
+                        <a:buNone/>
+                      </a:pPr>
+                      <a:r>
+                        <a:rPr lang="en-US" sz="1200" b="1" dirty="0">
+                          <a:solidFill>
+                            <a:srgbClr val="1A1A1A"/>
+                          </a:solidFill>
+                          <a:latin typeface="Calibri" pitchFamily="34" charset="0"/>
+                          <a:ea typeface="Calibri" pitchFamily="34" charset="-122"/>
+                          <a:cs typeface="Calibri" pitchFamily="34" charset="-120"/>
+                        </a:rPr>
+                        <a:t>skipTests</a:t>
+                      </a:r>
+                      <a:endParaRPr lang="en-US" sz="1200" dirty="0">
+                        <a:latin typeface="Calibri" charset="0"/>
+                        <a:ea typeface="Calibri" charset="0"/>
+                        <a:cs typeface="Calibri" charset="0"/>
+                      </a:endParaRPr>
+                    </a:p>
+                  </a:txBody>
+                  <a:tcPr marL="54864" marR="54864" marT="54864" marB="54864" anchor="ctr">
+                    <a:lnL w="6350" cap="flat" cmpd="sng" algn="ctr">
+                      <a:solidFill>
+                        <a:srgbClr val="DDDDDD"/>
+                      </a:solidFill>
+                      <a:prstDash val="solid"/>
+                      <a:round/>
+                      <a:headEnd type="none" w="med" len="med"/>
+                      <a:tailEnd type="none" w="med" len="med"/>
+                    </a:lnL>
+                    <a:lnR w="6350" cap="flat" cmpd="sng" algn="ctr">
+                      <a:solidFill>
+                        <a:srgbClr val="DDDDDD"/>
+                      </a:solidFill>
+                      <a:prstDash val="solid"/>
+                      <a:round/>
+                      <a:headEnd type="none" w="med" len="med"/>
+                      <a:tailEnd type="none" w="med" len="med"/>
+                    </a:lnR>
+                    <a:lnT w="6350" cap="flat" cmpd="sng" algn="ctr">
+                      <a:solidFill>
+                        <a:srgbClr val="DDDDDD"/>
+                      </a:solidFill>
+                      <a:prstDash val="solid"/>
+                      <a:round/>
+                      <a:headEnd type="none" w="med" len="med"/>
+                      <a:tailEnd type="none" w="med" len="med"/>
+                    </a:lnT>
+                    <a:lnB w="6350" cap="flat" cmpd="sng" algn="ctr">
+                      <a:solidFill>
+                        <a:srgbClr val="DDDDDD"/>
+                      </a:solidFill>
+                      <a:prstDash val="solid"/>
+                      <a:round/>
+                      <a:headEnd type="none" w="med" len="med"/>
+                      <a:tailEnd type="none" w="med" len="med"/>
+                    </a:lnB>
+                  </a:tcPr>
+                </a:tc>
+                <a:tc>
+                  <a:txBody>
+                    <a:bodyPr/>
+                    <a:lstStyle/>
+                    <a:p>
+                      <a:pPr algn="ctr" indent="0" marL="0">
+                        <a:buNone/>
+                      </a:pPr>
+                      <a:r>
+                        <a:rPr lang="en-US" sz="1200" dirty="0">
+                          <a:solidFill>
+                            <a:srgbClr val="333333"/>
+                          </a:solidFill>
+                          <a:latin typeface="Calibri" pitchFamily="34" charset="0"/>
+                          <a:ea typeface="Calibri" pitchFamily="34" charset="-122"/>
+                          <a:cs typeface="Calibri" pitchFamily="34" charset="-120"/>
+                        </a:rPr>
+                        <a:t>0.663</a:t>
+                      </a:r>
+                      <a:endParaRPr lang="en-US" sz="1200" dirty="0">
+                        <a:latin typeface="Calibri" charset="0"/>
+                        <a:ea typeface="Calibri" charset="0"/>
+                        <a:cs typeface="Calibri" charset="0"/>
+                      </a:endParaRPr>
+                    </a:p>
+                  </a:txBody>
+                  <a:tcPr marL="54864" marR="54864" marT="54864" marB="54864" anchor="ctr">
+                    <a:lnL w="6350" cap="flat" cmpd="sng" algn="ctr">
+                      <a:solidFill>
+                        <a:srgbClr val="DDDDDD"/>
+                      </a:solidFill>
+                      <a:prstDash val="solid"/>
+                      <a:round/>
+                      <a:headEnd type="none" w="med" len="med"/>
+                      <a:tailEnd type="none" w="med" len="med"/>
+                    </a:lnL>
+                    <a:lnR w="6350" cap="flat" cmpd="sng" algn="ctr">
+                      <a:solidFill>
+                        <a:srgbClr val="DDDDDD"/>
+                      </a:solidFill>
+                      <a:prstDash val="solid"/>
+                      <a:round/>
+                      <a:headEnd type="none" w="med" len="med"/>
+                      <a:tailEnd type="none" w="med" len="med"/>
+                    </a:lnR>
+                    <a:lnT w="6350" cap="flat" cmpd="sng" algn="ctr">
+                      <a:solidFill>
+                        <a:srgbClr val="DDDDDD"/>
+                      </a:solidFill>
+                      <a:prstDash val="solid"/>
+                      <a:round/>
+                      <a:headEnd type="none" w="med" len="med"/>
+                      <a:tailEnd type="none" w="med" len="med"/>
+                    </a:lnT>
+                    <a:lnB w="6350" cap="flat" cmpd="sng" algn="ctr">
+                      <a:solidFill>
+                        <a:srgbClr val="DDDDDD"/>
+                      </a:solidFill>
+                      <a:prstDash val="solid"/>
+                      <a:round/>
+                      <a:headEnd type="none" w="med" len="med"/>
+                      <a:tailEnd type="none" w="med" len="med"/>
+                    </a:lnB>
+                  </a:tcPr>
+                </a:tc>
+                <a:tc>
+                  <a:txBody>
+                    <a:bodyPr/>
+                    <a:lstStyle/>
+                    <a:p>
+                      <a:pPr algn="ctr" indent="0" marL="0">
+                        <a:buNone/>
+                      </a:pPr>
+                      <a:r>
+                        <a:rPr lang="en-US" sz="1200" dirty="0">
+                          <a:solidFill>
+                            <a:srgbClr val="333333"/>
+                          </a:solidFill>
+                          <a:latin typeface="Calibri" pitchFamily="34" charset="0"/>
+                          <a:ea typeface="Calibri" pitchFamily="34" charset="-122"/>
+                          <a:cs typeface="Calibri" pitchFamily="34" charset="-120"/>
+                        </a:rPr>
+                        <a:t>6.7%</a:t>
+                      </a:r>
+                      <a:endParaRPr lang="en-US" sz="1200" dirty="0">
+                        <a:latin typeface="Calibri" charset="0"/>
+                        <a:ea typeface="Calibri" charset="0"/>
+                        <a:cs typeface="Calibri" charset="0"/>
+                      </a:endParaRPr>
+                    </a:p>
+                  </a:txBody>
+                  <a:tcPr marL="54864" marR="54864" marT="54864" marB="54864" anchor="ctr">
+                    <a:lnL w="6350" cap="flat" cmpd="sng" algn="ctr">
+                      <a:solidFill>
+                        <a:srgbClr val="DDDDDD"/>
+                      </a:solidFill>
+                      <a:prstDash val="solid"/>
+                      <a:round/>
+                      <a:headEnd type="none" w="med" len="med"/>
+                      <a:tailEnd type="none" w="med" len="med"/>
+                    </a:lnL>
+                    <a:lnR w="6350" cap="flat" cmpd="sng" algn="ctr">
+                      <a:solidFill>
+                        <a:srgbClr val="DDDDDD"/>
+                      </a:solidFill>
+                      <a:prstDash val="solid"/>
+                      <a:round/>
+                      <a:headEnd type="none" w="med" len="med"/>
+                      <a:tailEnd type="none" w="med" len="med"/>
+                    </a:lnR>
+                    <a:lnT w="6350" cap="flat" cmpd="sng" algn="ctr">
+                      <a:solidFill>
+                        <a:srgbClr val="DDDDDD"/>
+                      </a:solidFill>
+                      <a:prstDash val="solid"/>
+                      <a:round/>
+                      <a:headEnd type="none" w="med" len="med"/>
+                      <a:tailEnd type="none" w="med" len="med"/>
+                    </a:lnT>
+                    <a:lnB w="6350" cap="flat" cmpd="sng" algn="ctr">
+                      <a:solidFill>
+                        <a:srgbClr val="DDDDDD"/>
+                      </a:solidFill>
+                      <a:prstDash val="solid"/>
+                      <a:round/>
+                      <a:headEnd type="none" w="med" len="med"/>
+                      <a:tailEnd type="none" w="med" len="med"/>
+                    </a:lnB>
+                  </a:tcPr>
+                </a:tc>
+              </a:tr>
+              <a:tr h="292608">
+                <a:tc>
+                  <a:txBody>
+                    <a:bodyPr/>
+                    <a:lstStyle/>
+                    <a:p>
+                      <a:pPr algn="l" indent="0" marL="0">
+                        <a:buNone/>
+                      </a:pPr>
+                      <a:r>
+                        <a:rPr lang="en-US" sz="1200" b="1" dirty="0">
+                          <a:solidFill>
+                            <a:srgbClr val="1A1A1A"/>
+                          </a:solidFill>
+                          <a:latin typeface="Calibri" pitchFamily="34" charset="0"/>
+                          <a:ea typeface="Calibri" pitchFamily="34" charset="-122"/>
+                          <a:cs typeface="Calibri" pitchFamily="34" charset="-120"/>
+                        </a:rPr>
+                        <a:t>gain</a:t>
+                      </a:r>
+                      <a:endParaRPr lang="en-US" sz="1200" dirty="0">
+                        <a:latin typeface="Calibri" charset="0"/>
+                        <a:ea typeface="Calibri" charset="0"/>
+                        <a:cs typeface="Calibri" charset="0"/>
+                      </a:endParaRPr>
+                    </a:p>
+                  </a:txBody>
+                  <a:tcPr marL="54864" marR="54864" marT="54864" marB="54864" anchor="ctr">
+                    <a:lnL w="6350" cap="flat" cmpd="sng" algn="ctr">
+                      <a:solidFill>
+                        <a:srgbClr val="DDDDDD"/>
+                      </a:solidFill>
+                      <a:prstDash val="solid"/>
+                      <a:round/>
+                      <a:headEnd type="none" w="med" len="med"/>
+                      <a:tailEnd type="none" w="med" len="med"/>
+                    </a:lnL>
+                    <a:lnR w="6350" cap="flat" cmpd="sng" algn="ctr">
+                      <a:solidFill>
+                        <a:srgbClr val="DDDDDD"/>
+                      </a:solidFill>
+                      <a:prstDash val="solid"/>
+                      <a:round/>
+                      <a:headEnd type="none" w="med" len="med"/>
+                      <a:tailEnd type="none" w="med" len="med"/>
+                    </a:lnR>
+                    <a:lnT w="6350" cap="flat" cmpd="sng" algn="ctr">
+                      <a:solidFill>
+                        <a:srgbClr val="DDDDDD"/>
+                      </a:solidFill>
+                      <a:prstDash val="solid"/>
+                      <a:round/>
+                      <a:headEnd type="none" w="med" len="med"/>
+                      <a:tailEnd type="none" w="med" len="med"/>
+                    </a:lnT>
+                    <a:lnB w="6350" cap="flat" cmpd="sng" algn="ctr">
+                      <a:solidFill>
+                        <a:srgbClr val="DDDDDD"/>
+                      </a:solidFill>
+                      <a:prstDash val="solid"/>
+                      <a:round/>
+                      <a:headEnd type="none" w="med" len="med"/>
+                      <a:tailEnd type="none" w="med" len="med"/>
+                    </a:lnB>
+                  </a:tcPr>
+                </a:tc>
+                <a:tc>
+                  <a:txBody>
+                    <a:bodyPr/>
+                    <a:lstStyle/>
+                    <a:p>
+                      <a:pPr algn="ctr" indent="0" marL="0">
+                        <a:buNone/>
+                      </a:pPr>
+                      <a:r>
+                        <a:rPr lang="en-US" sz="1200" dirty="0">
+                          <a:solidFill>
+                            <a:srgbClr val="333333"/>
+                          </a:solidFill>
+                          <a:latin typeface="Calibri" pitchFamily="34" charset="0"/>
+                          <a:ea typeface="Calibri" pitchFamily="34" charset="-122"/>
+                          <a:cs typeface="Calibri" pitchFamily="34" charset="-120"/>
+                        </a:rPr>
+                        <a:t>0.683</a:t>
+                      </a:r>
+                      <a:endParaRPr lang="en-US" sz="1200" dirty="0">
+                        <a:latin typeface="Calibri" charset="0"/>
+                        <a:ea typeface="Calibri" charset="0"/>
+                        <a:cs typeface="Calibri" charset="0"/>
+                      </a:endParaRPr>
+                    </a:p>
+                  </a:txBody>
+                  <a:tcPr marL="54864" marR="54864" marT="54864" marB="54864" anchor="ctr">
+                    <a:lnL w="6350" cap="flat" cmpd="sng" algn="ctr">
+                      <a:solidFill>
+                        <a:srgbClr val="DDDDDD"/>
+                      </a:solidFill>
+                      <a:prstDash val="solid"/>
+                      <a:round/>
+                      <a:headEnd type="none" w="med" len="med"/>
+                      <a:tailEnd type="none" w="med" len="med"/>
+                    </a:lnL>
+                    <a:lnR w="6350" cap="flat" cmpd="sng" algn="ctr">
+                      <a:solidFill>
+                        <a:srgbClr val="DDDDDD"/>
+                      </a:solidFill>
+                      <a:prstDash val="solid"/>
+                      <a:round/>
+                      <a:headEnd type="none" w="med" len="med"/>
+                      <a:tailEnd type="none" w="med" len="med"/>
+                    </a:lnR>
+                    <a:lnT w="6350" cap="flat" cmpd="sng" algn="ctr">
+                      <a:solidFill>
+                        <a:srgbClr val="DDDDDD"/>
+                      </a:solidFill>
+                      <a:prstDash val="solid"/>
+                      <a:round/>
+                      <a:headEnd type="none" w="med" len="med"/>
+                      <a:tailEnd type="none" w="med" len="med"/>
+                    </a:lnT>
+                    <a:lnB w="6350" cap="flat" cmpd="sng" algn="ctr">
+                      <a:solidFill>
+                        <a:srgbClr val="DDDDDD"/>
+                      </a:solidFill>
+                      <a:prstDash val="solid"/>
+                      <a:round/>
+                      <a:headEnd type="none" w="med" len="med"/>
+                      <a:tailEnd type="none" w="med" len="med"/>
+                    </a:lnB>
+                  </a:tcPr>
+                </a:tc>
+                <a:tc>
+                  <a:txBody>
+                    <a:bodyPr/>
+                    <a:lstStyle/>
+                    <a:p>
+                      <a:pPr algn="ctr" indent="0" marL="0">
+                        <a:buNone/>
+                      </a:pPr>
+                      <a:r>
+                        <a:rPr lang="en-US" sz="1200" dirty="0">
+                          <a:solidFill>
+                            <a:srgbClr val="333333"/>
+                          </a:solidFill>
+                          <a:latin typeface="Calibri" pitchFamily="34" charset="0"/>
+                          <a:ea typeface="Calibri" pitchFamily="34" charset="-122"/>
+                          <a:cs typeface="Calibri" pitchFamily="34" charset="-120"/>
+                        </a:rPr>
+                        <a:t>10.7%</a:t>
+                      </a:r>
+                      <a:endParaRPr lang="en-US" sz="1200" dirty="0">
+                        <a:latin typeface="Calibri" charset="0"/>
+                        <a:ea typeface="Calibri" charset="0"/>
+                        <a:cs typeface="Calibri" charset="0"/>
+                      </a:endParaRPr>
+                    </a:p>
+                  </a:txBody>
+                  <a:tcPr marL="54864" marR="54864" marT="54864" marB="54864" anchor="ctr">
+                    <a:lnL w="6350" cap="flat" cmpd="sng" algn="ctr">
+                      <a:solidFill>
+                        <a:srgbClr val="DDDDDD"/>
+                      </a:solidFill>
+                      <a:prstDash val="solid"/>
+                      <a:round/>
+                      <a:headEnd type="none" w="med" len="med"/>
+                      <a:tailEnd type="none" w="med" len="med"/>
+                    </a:lnL>
+                    <a:lnR w="6350" cap="flat" cmpd="sng" algn="ctr">
+                      <a:solidFill>
+                        <a:srgbClr val="DDDDDD"/>
+                      </a:solidFill>
+                      <a:prstDash val="solid"/>
+                      <a:round/>
+                      <a:headEnd type="none" w="med" len="med"/>
+                      <a:tailEnd type="none" w="med" len="med"/>
+                    </a:lnR>
+                    <a:lnT w="6350" cap="flat" cmpd="sng" algn="ctr">
+                      <a:solidFill>
+                        <a:srgbClr val="DDDDDD"/>
+                      </a:solidFill>
+                      <a:prstDash val="solid"/>
+                      <a:round/>
+                      <a:headEnd type="none" w="med" len="med"/>
+                      <a:tailEnd type="none" w="med" len="med"/>
+                    </a:lnT>
+                    <a:lnB w="6350" cap="flat" cmpd="sng" algn="ctr">
+                      <a:solidFill>
+                        <a:srgbClr val="DDDDDD"/>
+                      </a:solidFill>
+                      <a:prstDash val="solid"/>
+                      <a:round/>
+                      <a:headEnd type="none" w="med" len="med"/>
+                      <a:tailEnd type="none" w="med" len="med"/>
+                    </a:lnB>
+                  </a:tcPr>
+                </a:tc>
+              </a:tr>
+              <a:tr h="292608">
+                <a:tc>
+                  <a:txBody>
+                    <a:bodyPr/>
+                    <a:lstStyle/>
+                    <a:p>
+                      <a:pPr algn="l" indent="0" marL="0">
+                        <a:buNone/>
+                      </a:pPr>
+                      <a:r>
+                        <a:rPr lang="en-US" sz="1200" b="1" dirty="0">
+                          <a:solidFill>
+                            <a:srgbClr val="1A1A1A"/>
+                          </a:solidFill>
+                          <a:latin typeface="Calibri" pitchFamily="34" charset="0"/>
+                          <a:ea typeface="Calibri" pitchFamily="34" charset="-122"/>
+                          <a:cs typeface="Calibri" pitchFamily="34" charset="-120"/>
+                        </a:rPr>
+                        <a:t>lag</a:t>
+                      </a:r>
+                      <a:endParaRPr lang="en-US" sz="1200" dirty="0">
+                        <a:latin typeface="Calibri" charset="0"/>
+                        <a:ea typeface="Calibri" charset="0"/>
+                        <a:cs typeface="Calibri" charset="0"/>
+                      </a:endParaRPr>
+                    </a:p>
+                  </a:txBody>
+                  <a:tcPr marL="54864" marR="54864" marT="54864" marB="54864" anchor="ctr">
+                    <a:lnL w="6350" cap="flat" cmpd="sng" algn="ctr">
+                      <a:solidFill>
+                        <a:srgbClr val="DDDDDD"/>
+                      </a:solidFill>
+                      <a:prstDash val="solid"/>
+                      <a:round/>
+                      <a:headEnd type="none" w="med" len="med"/>
+                      <a:tailEnd type="none" w="med" len="med"/>
+                    </a:lnL>
+                    <a:lnR w="6350" cap="flat" cmpd="sng" algn="ctr">
+                      <a:solidFill>
+                        <a:srgbClr val="DDDDDD"/>
+                      </a:solidFill>
+                      <a:prstDash val="solid"/>
+                      <a:round/>
+                      <a:headEnd type="none" w="med" len="med"/>
+                      <a:tailEnd type="none" w="med" len="med"/>
+                    </a:lnR>
+                    <a:lnT w="6350" cap="flat" cmpd="sng" algn="ctr">
+                      <a:solidFill>
+                        <a:srgbClr val="DDDDDD"/>
+                      </a:solidFill>
+                      <a:prstDash val="solid"/>
+                      <a:round/>
+                      <a:headEnd type="none" w="med" len="med"/>
+                      <a:tailEnd type="none" w="med" len="med"/>
+                    </a:lnT>
+                    <a:lnB w="6350" cap="flat" cmpd="sng" algn="ctr">
+                      <a:solidFill>
+                        <a:srgbClr val="DDDDDD"/>
+                      </a:solidFill>
+                      <a:prstDash val="solid"/>
+                      <a:round/>
+                      <a:headEnd type="none" w="med" len="med"/>
+                      <a:tailEnd type="none" w="med" len="med"/>
+                    </a:lnB>
+                  </a:tcPr>
+                </a:tc>
+                <a:tc>
+                  <a:txBody>
+                    <a:bodyPr/>
+                    <a:lstStyle/>
+                    <a:p>
+                      <a:pPr algn="ctr" indent="0" marL="0">
+                        <a:buNone/>
+                      </a:pPr>
+                      <a:r>
+                        <a:rPr lang="en-US" sz="1200" i="1" dirty="0">
+                          <a:solidFill>
+                            <a:srgbClr val="999999"/>
+                          </a:solidFill>
+                          <a:latin typeface="Calibri" pitchFamily="34" charset="0"/>
+                          <a:ea typeface="Calibri" pitchFamily="34" charset="-122"/>
+                          <a:cs typeface="Calibri" pitchFamily="34" charset="-120"/>
+                        </a:rPr>
+                        <a:t>0.784</a:t>
+                      </a:r>
+                      <a:endParaRPr lang="en-US" sz="1200" dirty="0">
+                        <a:latin typeface="Calibri" charset="0"/>
+                        <a:ea typeface="Calibri" charset="0"/>
+                        <a:cs typeface="Calibri" charset="0"/>
+                      </a:endParaRPr>
+                    </a:p>
+                  </a:txBody>
+                  <a:tcPr marL="54864" marR="54864" marT="54864" marB="54864" anchor="ctr">
+                    <a:lnL w="6350" cap="flat" cmpd="sng" algn="ctr">
+                      <a:solidFill>
+                        <a:srgbClr val="DDDDDD"/>
+                      </a:solidFill>
+                      <a:prstDash val="solid"/>
+                      <a:round/>
+                      <a:headEnd type="none" w="med" len="med"/>
+                      <a:tailEnd type="none" w="med" len="med"/>
+                    </a:lnL>
+                    <a:lnR w="6350" cap="flat" cmpd="sng" algn="ctr">
+                      <a:solidFill>
+                        <a:srgbClr val="DDDDDD"/>
+                      </a:solidFill>
+                      <a:prstDash val="solid"/>
+                      <a:round/>
+                      <a:headEnd type="none" w="med" len="med"/>
+                      <a:tailEnd type="none" w="med" len="med"/>
+                    </a:lnR>
+                    <a:lnT w="6350" cap="flat" cmpd="sng" algn="ctr">
+                      <a:solidFill>
+                        <a:srgbClr val="DDDDDD"/>
+                      </a:solidFill>
+                      <a:prstDash val="solid"/>
+                      <a:round/>
+                      <a:headEnd type="none" w="med" len="med"/>
+                      <a:tailEnd type="none" w="med" len="med"/>
+                    </a:lnT>
+                    <a:lnB w="6350" cap="flat" cmpd="sng" algn="ctr">
+                      <a:solidFill>
+                        <a:srgbClr val="DDDDDD"/>
+                      </a:solidFill>
+                      <a:prstDash val="solid"/>
+                      <a:round/>
+                      <a:headEnd type="none" w="med" len="med"/>
+                      <a:tailEnd type="none" w="med" len="med"/>
+                    </a:lnB>
+                  </a:tcPr>
+                </a:tc>
+                <a:tc>
+                  <a:txBody>
+                    <a:bodyPr/>
+                    <a:lstStyle/>
+                    <a:p>
+                      <a:pPr algn="ctr" indent="0" marL="0">
+                        <a:buNone/>
+                      </a:pPr>
+                      <a:r>
+                        <a:rPr lang="en-US" sz="1200" i="1" dirty="0">
+                          <a:solidFill>
+                            <a:srgbClr val="999999"/>
+                          </a:solidFill>
+                          <a:latin typeface="Calibri" pitchFamily="34" charset="0"/>
+                          <a:ea typeface="Calibri" pitchFamily="34" charset="-122"/>
+                          <a:cs typeface="Calibri" pitchFamily="34" charset="-120"/>
+                        </a:rPr>
+                        <a:t>0.4%</a:t>
+                      </a:r>
+                      <a:endParaRPr lang="en-US" sz="1200" dirty="0">
+                        <a:latin typeface="Calibri" charset="0"/>
+                        <a:ea typeface="Calibri" charset="0"/>
+                        <a:cs typeface="Calibri" charset="0"/>
+                      </a:endParaRPr>
+                    </a:p>
+                  </a:txBody>
+                  <a:tcPr marL="54864" marR="54864" marT="54864" marB="54864" anchor="ctr">
+                    <a:lnL w="6350" cap="flat" cmpd="sng" algn="ctr">
+                      <a:solidFill>
+                        <a:srgbClr val="DDDDDD"/>
+                      </a:solidFill>
+                      <a:prstDash val="solid"/>
+                      <a:round/>
+                      <a:headEnd type="none" w="med" len="med"/>
+                      <a:tailEnd type="none" w="med" len="med"/>
+                    </a:lnL>
+                    <a:lnR w="6350" cap="flat" cmpd="sng" algn="ctr">
+                      <a:solidFill>
+                        <a:srgbClr val="DDDDDD"/>
+                      </a:solidFill>
+                      <a:prstDash val="solid"/>
+                      <a:round/>
+                      <a:headEnd type="none" w="med" len="med"/>
+                      <a:tailEnd type="none" w="med" len="med"/>
+                    </a:lnR>
+                    <a:lnT w="6350" cap="flat" cmpd="sng" algn="ctr">
+                      <a:solidFill>
+                        <a:srgbClr val="DDDDDD"/>
+                      </a:solidFill>
+                      <a:prstDash val="solid"/>
+                      <a:round/>
+                      <a:headEnd type="none" w="med" len="med"/>
+                      <a:tailEnd type="none" w="med" len="med"/>
+                    </a:lnT>
+                    <a:lnB w="6350" cap="flat" cmpd="sng" algn="ctr">
+                      <a:solidFill>
+                        <a:srgbClr val="DDDDDD"/>
+                      </a:solidFill>
+                      <a:prstDash val="solid"/>
+                      <a:round/>
+                      <a:headEnd type="none" w="med" len="med"/>
+                      <a:tailEnd type="none" w="med" len="med"/>
+                    </a:lnB>
+                  </a:tcPr>
+                </a:tc>
+              </a:tr>
+            </a:tbl>
+          </a:graphicData>
+        </a:graphic>
+      </p:graphicFrame>
+      <p:sp>
+        <p:nvSpPr>
+          <p:cNvPr id="6" name="Text 3"/>
+          <p:cNvSpPr/>
+          <p:nvPr/>
+        </p:nvSpPr>
+        <p:spPr>
+          <a:xfrm>
+            <a:off x="457200" y="4846320"/>
+            <a:ext cx="8229600" cy="256032"/>
+          </a:xfrm>
+          <a:prstGeom prst="rect">
+            <a:avLst/>
+          </a:prstGeom>
+          <a:noFill/>
+          <a:ln/>
+        </p:spPr>
+        <p:txBody>
+          <a:bodyPr wrap="square" lIns="0" tIns="0" rIns="0" bIns="0" rtlCol="0" anchor="ctr"/>
+          <a:lstStyle/>
+          <a:p>
+            <a:pPr algn="ctr" indent="0" marL="0">
+              <a:buNone/>
+            </a:pPr>
+            <a:r>
+              <a:rPr lang="en-US" sz="900" i="1" dirty="0">
+                <a:solidFill>
+                  <a:srgbClr val="999999"/>
+                </a:solidFill>
+              </a:rPr>
+              <a:t>Robustness ≠ calibration. Weights not validated against downstream outcomes.</a:t>
+            </a:r>
+            <a:endParaRPr lang="en-US" sz="900" dirty="0"/>
           </a:p>
         </p:txBody>
       </p:sp>
@@ -12328,21 +14050,7 @@
                   <a:srgbClr val="000000"/>
                 </a:solidFill>
               </a:rPr>
-              <a:t>5 MEng Computing participants, 6 sessions each, on an order-processing codebase </a:t>
-            </a:r>
-            <a:pPr indent="0" marL="0">
-              <a:spcAft>
-                <a:spcPts val="600"/>
-              </a:spcAft>
-              <a:buNone/>
-            </a:pPr>
-            <a:r>
-              <a:rPr lang="en-US" sz="1500" dirty="0">
-                <a:solidFill>
-                  <a:srgbClr val="888888"/>
-                </a:solidFill>
-              </a:rPr>
-              <a:t>- 30 sessions total on user-study-fixture/ (separate from the labelled-injection codebase).</a:t>
+              <a:t>5 MEng Computing participants, 6 sessions each, on an order-processing codebase</a:t>
             </a:r>
             <a:endParaRPr lang="en-US" sz="1500" dirty="0"/>
           </a:p>
@@ -12442,21 +14150,7 @@
                   <a:srgbClr val="000000"/>
                 </a:solidFill>
               </a:rPr>
-              <a:t>Process score across the arc, two views </a:t>
-            </a:r>
-            <a:pPr indent="0" marL="0">
-              <a:spcAft>
-                <a:spcPts val="600"/>
-              </a:spcAft>
-              <a:buNone/>
-            </a:pPr>
-            <a:r>
-              <a:rPr lang="en-US" sz="1500" dirty="0">
-                <a:solidFill>
-                  <a:srgbClr val="888888"/>
-                </a:solidFill>
-              </a:rPr>
-              <a:t>- the production score, plus a gain-stripped variant (W_g = W_lag = 0) that isolates how the participant worked from how much cleaner the code ended up.</a:t>
+              <a:t>Process score across the arc</a:t>
             </a:r>
             <a:endParaRPr lang="en-US" sz="1500" dirty="0"/>
           </a:p>
@@ -13922,8 +15616,8 @@
         </p:nvSpPr>
         <p:spPr>
           <a:xfrm>
-            <a:off x="457200" y="1051560"/>
-            <a:ext cx="8229600" cy="685800"/>
+            <a:off x="457200" y="1005840"/>
+            <a:ext cx="8229600" cy="777240"/>
           </a:xfrm>
           <a:prstGeom prst="rect">
             <a:avLst/>
@@ -13939,14 +15633,14 @@
               <a:buNone/>
             </a:pPr>
             <a:r>
-              <a:rPr lang="en-US" sz="1700" i="1" dirty="0">
+              <a:rPr lang="en-US" sz="1500" i="1" dirty="0">
                 <a:solidFill>
                   <a:srgbClr val="1F3F6F"/>
                 </a:solidFill>
               </a:rPr>
-              <a:t>Process-aware refactoring evaluation is tractable, and the resulting feedback shifts developer behaviour.</a:t>
-            </a:r>
-            <a:endParaRPr lang="en-US" sz="1700" dirty="0"/>
+              <a:t>Process-aware refactoring evaluation is tractable, and a small randomised study gives directional evidence that feedback improves measured process discipline.</a:t>
+            </a:r>
+            <a:endParaRPr lang="en-US" sz="1500" dirty="0"/>
           </a:p>
         </p:txBody>
       </p:sp>
@@ -13959,7 +15653,7 @@
         <p:spPr>
           <a:xfrm>
             <a:off x="457200" y="1920240"/>
-            <a:ext cx="8229600" cy="3017520"/>
+            <a:ext cx="8229600" cy="2651760"/>
           </a:xfrm>
           <a:prstGeom prst="rect">
             <a:avLst/>
@@ -13984,7 +15678,35 @@
                   <a:srgbClr val="000000"/>
                 </a:solidFill>
               </a:rPr>
-              <a:t>A process-quality metric J(τ) combining endpoint, process, and safety signals in one principled score.</a:t>
+              <a:t>A process-quality metric on </a:t>
+            </a:r>
+            <a:pPr indent="0" marL="0">
+              <a:spcAft>
+                <a:spcPts val="600"/>
+              </a:spcAft>
+              <a:buNone/>
+            </a:pPr>
+            <a:r>
+              <a:rPr lang="en-US" sz="1600" i="1" dirty="0">
+                <a:solidFill>
+                  <a:srgbClr val="000000"/>
+                </a:solidFill>
+              </a:rPr>
+              <a:t>arbitrary sessions</a:t>
+            </a:r>
+            <a:pPr indent="0" marL="0">
+              <a:spcAft>
+                <a:spcPts val="600"/>
+              </a:spcAft>
+              <a:buNone/>
+            </a:pPr>
+            <a:r>
+              <a:rPr lang="en-US" sz="1600" dirty="0">
+                <a:solidFill>
+                  <a:srgbClr val="000000"/>
+                </a:solidFill>
+              </a:rPr>
+              <a:t> combining endpoint, process, and safety signals in one principled score.</a:t>
             </a:r>
             <a:endParaRPr lang="en-US" sz="1600" dirty="0"/>
           </a:p>
@@ -14038,9 +15760,56 @@
                   <a:srgbClr val="000000"/>
                 </a:solidFill>
               </a:rPr>
-              <a:t>A deployable end-to-end system: IntelliJ plugin, analysis backend, and dashboard.</a:t>
+              <a:t>A working end-to-end research prototype: IntelliJ plugin, analysis backend, and dashboard.</a:t>
             </a:r>
             <a:endParaRPr lang="en-US" sz="1600" dirty="0"/>
+          </a:p>
+        </p:txBody>
+      </p:sp>
+      <p:sp>
+        <p:nvSpPr>
+          <p:cNvPr id="5" name="Text 3"/>
+          <p:cNvSpPr/>
+          <p:nvPr/>
+        </p:nvSpPr>
+        <p:spPr>
+          <a:xfrm>
+            <a:off x="457200" y="4617720"/>
+            <a:ext cx="8229600" cy="457200"/>
+          </a:xfrm>
+          <a:prstGeom prst="rect">
+            <a:avLst/>
+          </a:prstGeom>
+          <a:noFill/>
+          <a:ln/>
+        </p:spPr>
+        <p:txBody>
+          <a:bodyPr wrap="square" lIns="0" tIns="0" rIns="0" bIns="0" rtlCol="0" anchor="ctr"/>
+          <a:lstStyle/>
+          <a:p>
+            <a:pPr algn="ctr" indent="0" marL="0">
+              <a:buNone/>
+            </a:pPr>
+            <a:r>
+              <a:rPr lang="en-US" sz="1100" b="1" i="1" dirty="0">
+                <a:solidFill>
+                  <a:srgbClr val="888888"/>
+                </a:solidFill>
+              </a:rPr>
+              <a:t>Not yet established: </a:t>
+            </a:r>
+            <a:pPr algn="ctr" indent="0" marL="0">
+              <a:buNone/>
+            </a:pPr>
+            <a:r>
+              <a:rPr lang="en-US" sz="1100" i="1" dirty="0">
+                <a:solidFill>
+                  <a:srgbClr val="888888"/>
+                </a:solidFill>
+              </a:rPr>
+              <a:t>externally calibrated measure of refactoring quality, statistically conclusive behavioural effect, or generalisation beyond Java / IntelliJ / human traces.</a:t>
+            </a:r>
+            <a:endParaRPr lang="en-US" sz="1100" dirty="0"/>
           </a:p>
         </p:txBody>
       </p:sp>
@@ -14902,7 +16671,7 @@
         </p:nvSpPr>
         <p:spPr>
           <a:xfrm>
-            <a:off x="457200" y="2011680"/>
+            <a:off x="457200" y="1783080"/>
             <a:ext cx="8229600" cy="1097280"/>
           </a:xfrm>
           <a:prstGeom prst="rect">
@@ -14927,6 +16696,42 @@
               <a:t>Demo</a:t>
             </a:r>
             <a:endParaRPr lang="en-US" sz="6000" dirty="0"/>
+          </a:p>
+        </p:txBody>
+      </p:sp>
+      <p:sp>
+        <p:nvSpPr>
+          <p:cNvPr id="3" name="Text 1"/>
+          <p:cNvSpPr/>
+          <p:nvPr/>
+        </p:nvSpPr>
+        <p:spPr>
+          <a:xfrm>
+            <a:off x="457200" y="2971800"/>
+            <a:ext cx="8229600" cy="457200"/>
+          </a:xfrm>
+          <a:prstGeom prst="rect">
+            <a:avLst/>
+          </a:prstGeom>
+          <a:noFill/>
+          <a:ln/>
+        </p:spPr>
+        <p:txBody>
+          <a:bodyPr wrap="square" lIns="0" tIns="0" rIns="0" bIns="0" rtlCol="0" anchor="ctr"/>
+          <a:lstStyle/>
+          <a:p>
+            <a:pPr algn="ctr" indent="0" marL="0">
+              <a:buNone/>
+            </a:pPr>
+            <a:r>
+              <a:rPr lang="en-US" sz="2000" i="1" dirty="0">
+                <a:solidFill>
+                  <a:srgbClr val="555555"/>
+                </a:solidFill>
+              </a:rPr>
+              <a:t>OrderProcessor: Breaking up a long method into smaller methods</a:t>
+            </a:r>
+            <a:endParaRPr lang="en-US" sz="2000" dirty="0"/>
           </a:p>
         </p:txBody>
       </p:sp>

--- a/presentation/slides.pptx
+++ b/presentation/slides.pptx
@@ -4,6 +4,9 @@
   <p:sldMasterIdLst>
     <p:sldMasterId id="2147483648" r:id="rId1"/>
   </p:sldMasterIdLst>
+  <p:notesMasterIdLst>
+    <p:notesMasterId r:id="rId30"/>
+  </p:notesMasterIdLst>
   <p:sldIdLst>
     <p:sldId id="256" r:id="rId2"/>
     <p:sldId id="257" r:id="rId3"/>
@@ -34,10 +37,7 @@
     <p:sldId id="282" r:id="rId28"/>
     <p:sldId id="283" r:id="rId29"/>
   </p:sldIdLst>
-  <p:notesMasterIdLst>
-    <p:notesMasterId r:id="rId30"/>
-  </p:notesMasterIdLst>
-  <p:sldSz cx="9144000" cy="5143500"/>
+  <p:sldSz cx="9144000" cy="5143500" type="screen16x9"/>
   <p:notesSz cx="5143500" cy="9144000"/>
   <p:defaultTextStyle>
     <a:lvl1pPr marL="0" algn="l" defTabSz="914400" rtl="0" eaLnBrk="1" latinLnBrk="0" hangingPunct="1">
@@ -131,13 +131,20 @@
       </a:defRPr>
     </a:lvl9pPr>
   </p:defaultTextStyle>
+  <p:extLst>
+    <p:ext uri="{EFAFB233-063F-42B5-8137-9DF3F51BA10A}">
+      <p15:sldGuideLst xmlns:p15="http://schemas.microsoft.com/office/powerpoint/2012/main"/>
+    </p:ext>
+  </p:extLst>
 </p:presentation>
 </file>
 
 <file path=ppt/charts/chart1.xml><?xml version="1.0" encoding="utf-8"?>
-<c:chartSpace xmlns:c="http://schemas.openxmlformats.org/drawingml/2006/chart" xmlns:a="http://schemas.openxmlformats.org/drawingml/2006/main" xmlns:r="http://schemas.openxmlformats.org/officeDocument/2006/relationships">
+<c:chartSpace xmlns:c="http://schemas.openxmlformats.org/drawingml/2006/chart" xmlns:a="http://schemas.openxmlformats.org/drawingml/2006/main" xmlns:r="http://schemas.openxmlformats.org/officeDocument/2006/relationships" xmlns:c16r2="http://schemas.microsoft.com/office/drawing/2015/06/chart">
   <c:date1904 val="0"/>
+  <c:lang val="en-GB"/>
   <c:roundedCorners val="1"/>
+  <c:style val="2"/>
   <c:chart>
     <c:title>
       <c:tx>
@@ -154,7 +161,7 @@
               </a:defRPr>
             </a:pPr>
             <a:r>
-              <a:rPr sz="1100" b="0" i="0" u="none" strike="noStrike">
+              <a:rPr lang="en-GB" sz="1100" b="0" i="0" u="none" strike="noStrike">
                 <a:solidFill>
                   <a:srgbClr val="333333"/>
                 </a:solidFill>
@@ -165,13 +172,13 @@
           </a:p>
         </c:rich>
       </c:tx>
-      <c:layout/>
       <c:overlay val="0"/>
     </c:title>
     <c:autoTitleDeleted val="0"/>
     <c:plotArea>
       <c:layout/>
       <c:lineChart>
+        <c:grouping val="standard"/>
         <c:varyColors val="0"/>
         <c:ser>
           <c:idx val="0"/>
@@ -188,53 +195,25 @@
             </c:strRef>
           </c:tx>
           <c:spPr>
-            <a:solidFill>
-              <a:srgbClr val="1F3F6F"/>
-            </a:solidFill>
             <a:ln w="31750" cap="flat">
               <a:solidFill>
-                <a:srgbClr val="1F3F6F"/>
+                <a:srgbClr val="0000CD"/>
               </a:solidFill>
               <a:prstDash val="solid"/>
               <a:round/>
             </a:ln>
             <a:effectLst/>
           </c:spPr>
-          <c:invertIfNegative val="0"/>
-          <c:dLbls>
-            <c:numFmt formatCode="#,##0" sourceLinked="0"/>
-            <c:txPr>
-              <a:bodyPr/>
-              <a:lstStyle/>
-              <a:p>
-                <a:pPr>
-                  <a:defRPr b="0" i="0" strike="noStrike" sz="1200" u="none">
-                    <a:solidFill>
-                      <a:srgbClr val="000000"/>
-                    </a:solidFill>
-                    <a:latin typeface="Arial"/>
-                  </a:defRPr>
-                </a:pPr>
-              </a:p>
-            </c:txPr>
-            <c:showLegendKey val="0"/>
-            <c:showVal val="0"/>
-            <c:showCatName val="0"/>
-            <c:showSerName val="0"/>
-            <c:showPercent val="0"/>
-            <c:showBubbleSize val="0"/>
-            <c:showLeaderLines val="0"/>
-          </c:dLbls>
           <c:marker>
             <c:symbol val="circle"/>
             <c:size val="6"/>
             <c:spPr>
               <a:solidFill>
-                <a:srgbClr val="1F3F6F"/>
+                <a:srgbClr val="0000CD"/>
               </a:solidFill>
               <a:ln w="9525" cap="flat">
                 <a:solidFill>
-                  <a:srgbClr val="1F3F6F"/>
+                  <a:srgbClr val="0000CD"/>
                 </a:solidFill>
                 <a:prstDash val="solid"/>
                 <a:round/>
@@ -243,32 +222,30 @@
             </c:spPr>
           </c:marker>
           <c:cat>
-            <c:multiLvlStrRef>
+            <c:strRef>
               <c:f>Sheet1!$A$2:$A$7</c:f>
-              <c:multiLvlStrCache>
+              <c:strCache>
                 <c:ptCount val="6"/>
-                <c:lvl>
-                  <c:pt idx="0">
-                    <c:v>S1</c:v>
-                  </c:pt>
-                  <c:pt idx="1">
-                    <c:v>S2</c:v>
-                  </c:pt>
-                  <c:pt idx="2">
-                    <c:v>S3</c:v>
-                  </c:pt>
-                  <c:pt idx="3">
-                    <c:v>S4</c:v>
-                  </c:pt>
-                  <c:pt idx="4">
-                    <c:v>S5</c:v>
-                  </c:pt>
-                  <c:pt idx="5">
-                    <c:v>S6</c:v>
-                  </c:pt>
-                </c:lvl>
-              </c:multiLvlStrCache>
-            </c:multiLvlStrRef>
+                <c:pt idx="0">
+                  <c:v>S1</c:v>
+                </c:pt>
+                <c:pt idx="1">
+                  <c:v>S2</c:v>
+                </c:pt>
+                <c:pt idx="2">
+                  <c:v>S3</c:v>
+                </c:pt>
+                <c:pt idx="3">
+                  <c:v>S4</c:v>
+                </c:pt>
+                <c:pt idx="4">
+                  <c:v>S5</c:v>
+                </c:pt>
+                <c:pt idx="5">
+                  <c:v>S6</c:v>
+                </c:pt>
+              </c:strCache>
+            </c:strRef>
           </c:cat>
           <c:val>
             <c:numRef>
@@ -298,6 +275,11 @@
             </c:numRef>
           </c:val>
           <c:smooth val="0"/>
+          <c:extLst>
+            <c:ext xmlns:c16="http://schemas.microsoft.com/office/drawing/2014/chart" uri="{C3380CC4-5D6E-409C-BE32-E72D297353CC}">
+              <c16:uniqueId val="{00000000-B386-AD4E-BD58-9F83B0D67BF5}"/>
+            </c:ext>
+          </c:extLst>
         </c:ser>
         <c:ser>
           <c:idx val="1"/>
@@ -314,9 +296,6 @@
             </c:strRef>
           </c:tx>
           <c:spPr>
-            <a:solidFill>
-              <a:srgbClr val="B25500"/>
-            </a:solidFill>
             <a:ln w="31750" cap="flat">
               <a:solidFill>
                 <a:srgbClr val="B25500"/>
@@ -326,31 +305,6 @@
             </a:ln>
             <a:effectLst/>
           </c:spPr>
-          <c:invertIfNegative val="0"/>
-          <c:dLbls>
-            <c:numFmt formatCode="#,##0" sourceLinked="0"/>
-            <c:txPr>
-              <a:bodyPr/>
-              <a:lstStyle/>
-              <a:p>
-                <a:pPr>
-                  <a:defRPr b="0" i="0" strike="noStrike" sz="1200" u="none">
-                    <a:solidFill>
-                      <a:srgbClr val="000000"/>
-                    </a:solidFill>
-                    <a:latin typeface="Arial"/>
-                  </a:defRPr>
-                </a:pPr>
-              </a:p>
-            </c:txPr>
-            <c:showLegendKey val="0"/>
-            <c:showVal val="0"/>
-            <c:showCatName val="0"/>
-            <c:showSerName val="0"/>
-            <c:showPercent val="0"/>
-            <c:showBubbleSize val="0"/>
-            <c:showLeaderLines val="0"/>
-          </c:dLbls>
           <c:marker>
             <c:symbol val="circle"/>
             <c:size val="6"/>
@@ -369,32 +323,30 @@
             </c:spPr>
           </c:marker>
           <c:cat>
-            <c:multiLvlStrRef>
+            <c:strRef>
               <c:f>Sheet1!$A$2:$A$7</c:f>
-              <c:multiLvlStrCache>
+              <c:strCache>
                 <c:ptCount val="6"/>
-                <c:lvl>
-                  <c:pt idx="0">
-                    <c:v>S1</c:v>
-                  </c:pt>
-                  <c:pt idx="1">
-                    <c:v>S2</c:v>
-                  </c:pt>
-                  <c:pt idx="2">
-                    <c:v>S3</c:v>
-                  </c:pt>
-                  <c:pt idx="3">
-                    <c:v>S4</c:v>
-                  </c:pt>
-                  <c:pt idx="4">
-                    <c:v>S5</c:v>
-                  </c:pt>
-                  <c:pt idx="5">
-                    <c:v>S6</c:v>
-                  </c:pt>
-                </c:lvl>
-              </c:multiLvlStrCache>
-            </c:multiLvlStrRef>
+                <c:pt idx="0">
+                  <c:v>S1</c:v>
+                </c:pt>
+                <c:pt idx="1">
+                  <c:v>S2</c:v>
+                </c:pt>
+                <c:pt idx="2">
+                  <c:v>S3</c:v>
+                </c:pt>
+                <c:pt idx="3">
+                  <c:v>S4</c:v>
+                </c:pt>
+                <c:pt idx="4">
+                  <c:v>S5</c:v>
+                </c:pt>
+                <c:pt idx="5">
+                  <c:v>S6</c:v>
+                </c:pt>
+              </c:strCache>
+            </c:strRef>
           </c:cat>
           <c:val>
             <c:numRef>
@@ -424,35 +376,24 @@
             </c:numRef>
           </c:val>
           <c:smooth val="0"/>
+          <c:extLst>
+            <c:ext xmlns:c16="http://schemas.microsoft.com/office/drawing/2014/chart" uri="{C3380CC4-5D6E-409C-BE32-E72D297353CC}">
+              <c16:uniqueId val="{00000001-B386-AD4E-BD58-9F83B0D67BF5}"/>
+            </c:ext>
+          </c:extLst>
         </c:ser>
         <c:dLbls>
-          <c:numFmt formatCode="#,##0" sourceLinked="0"/>
-          <c:txPr>
-            <a:bodyPr/>
-            <a:lstStyle/>
-            <a:p>
-              <a:pPr>
-                <a:defRPr b="0" i="0" strike="noStrike" sz="1200" u="none">
-                  <a:solidFill>
-                    <a:srgbClr val="000000"/>
-                  </a:solidFill>
-                  <a:latin typeface="Arial"/>
-                </a:defRPr>
-              </a:pPr>
-            </a:p>
-          </c:txPr>
           <c:showLegendKey val="0"/>
           <c:showVal val="0"/>
           <c:showCatName val="0"/>
           <c:showSerName val="0"/>
           <c:showPercent val="0"/>
           <c:showBubbleSize val="0"/>
-          <c:showLeaderLines val="0"/>
         </c:dLbls>
         <c:marker val="1"/>
+        <c:smooth val="0"/>
         <c:axId val="2094734554"/>
         <c:axId val="2094734552"/>
-        <c:axId val="2094734556"/>
       </c:lineChart>
       <c:catAx>
         <c:axId val="2094734554"/>
@@ -493,6 +434,7 @@
         <c:crosses val="autoZero"/>
         <c:auto val="1"/>
         <c:lblAlgn val="ctr"/>
+        <c:lblOffset val="100"/>
         <c:noMultiLvlLbl val="1"/>
       </c:catAx>
       <c:valAx>
@@ -564,7 +506,7 @@
         <a:lstStyle/>
         <a:p>
           <a:pPr>
-            <a:defRPr sz="900">      </a:defRPr>
+            <a:defRPr sz="900"/>
           </a:pPr>
           <a:endParaRPr lang="en-US"/>
         </a:p>
@@ -572,6 +514,7 @@
     </c:legend>
     <c:plotVisOnly val="1"/>
     <c:dispBlanksAs val="span"/>
+    <c:showDLblsOverMax val="1"/>
   </c:chart>
   <c:spPr>
     <a:noFill/>
@@ -587,9 +530,11 @@
 </file>
 
 <file path=ppt/charts/chart2.xml><?xml version="1.0" encoding="utf-8"?>
-<c:chartSpace xmlns:c="http://schemas.openxmlformats.org/drawingml/2006/chart" xmlns:a="http://schemas.openxmlformats.org/drawingml/2006/main" xmlns:r="http://schemas.openxmlformats.org/officeDocument/2006/relationships">
+<c:chartSpace xmlns:c="http://schemas.openxmlformats.org/drawingml/2006/chart" xmlns:a="http://schemas.openxmlformats.org/drawingml/2006/main" xmlns:r="http://schemas.openxmlformats.org/officeDocument/2006/relationships" xmlns:c16r2="http://schemas.microsoft.com/office/drawing/2015/06/chart">
   <c:date1904 val="0"/>
+  <c:lang val="en-GB"/>
   <c:roundedCorners val="1"/>
+  <c:style val="2"/>
   <c:chart>
     <c:title>
       <c:tx>
@@ -606,7 +551,7 @@
               </a:defRPr>
             </a:pPr>
             <a:r>
-              <a:rPr sz="1100" b="0" i="0" u="none" strike="noStrike">
+              <a:rPr lang="en-GB" sz="1100" b="0" i="0" u="none" strike="noStrike">
                 <a:solidFill>
                   <a:srgbClr val="333333"/>
                 </a:solidFill>
@@ -617,13 +562,13 @@
           </a:p>
         </c:rich>
       </c:tx>
-      <c:layout/>
       <c:overlay val="0"/>
     </c:title>
     <c:autoTitleDeleted val="0"/>
     <c:plotArea>
       <c:layout/>
       <c:lineChart>
+        <c:grouping val="standard"/>
         <c:varyColors val="0"/>
         <c:ser>
           <c:idx val="0"/>
@@ -640,53 +585,25 @@
             </c:strRef>
           </c:tx>
           <c:spPr>
-            <a:solidFill>
-              <a:srgbClr val="1F3F6F"/>
-            </a:solidFill>
             <a:ln w="31750" cap="flat">
               <a:solidFill>
-                <a:srgbClr val="1F3F6F"/>
+                <a:srgbClr val="0000CD"/>
               </a:solidFill>
               <a:prstDash val="solid"/>
               <a:round/>
             </a:ln>
             <a:effectLst/>
           </c:spPr>
-          <c:invertIfNegative val="0"/>
-          <c:dLbls>
-            <c:numFmt formatCode="#,##0" sourceLinked="0"/>
-            <c:txPr>
-              <a:bodyPr/>
-              <a:lstStyle/>
-              <a:p>
-                <a:pPr>
-                  <a:defRPr b="0" i="0" strike="noStrike" sz="1200" u="none">
-                    <a:solidFill>
-                      <a:srgbClr val="000000"/>
-                    </a:solidFill>
-                    <a:latin typeface="Arial"/>
-                  </a:defRPr>
-                </a:pPr>
-              </a:p>
-            </c:txPr>
-            <c:showLegendKey val="0"/>
-            <c:showVal val="0"/>
-            <c:showCatName val="0"/>
-            <c:showSerName val="0"/>
-            <c:showPercent val="0"/>
-            <c:showBubbleSize val="0"/>
-            <c:showLeaderLines val="0"/>
-          </c:dLbls>
           <c:marker>
             <c:symbol val="circle"/>
             <c:size val="6"/>
             <c:spPr>
               <a:solidFill>
-                <a:srgbClr val="1F3F6F"/>
+                <a:srgbClr val="0000CD"/>
               </a:solidFill>
               <a:ln w="9525" cap="flat">
                 <a:solidFill>
-                  <a:srgbClr val="1F3F6F"/>
+                  <a:srgbClr val="0000CD"/>
                 </a:solidFill>
                 <a:prstDash val="solid"/>
                 <a:round/>
@@ -695,32 +612,30 @@
             </c:spPr>
           </c:marker>
           <c:cat>
-            <c:multiLvlStrRef>
+            <c:strRef>
               <c:f>Sheet1!$A$2:$A$7</c:f>
-              <c:multiLvlStrCache>
+              <c:strCache>
                 <c:ptCount val="6"/>
-                <c:lvl>
-                  <c:pt idx="0">
-                    <c:v>S1</c:v>
-                  </c:pt>
-                  <c:pt idx="1">
-                    <c:v>S2</c:v>
-                  </c:pt>
-                  <c:pt idx="2">
-                    <c:v>S3</c:v>
-                  </c:pt>
-                  <c:pt idx="3">
-                    <c:v>S4</c:v>
-                  </c:pt>
-                  <c:pt idx="4">
-                    <c:v>S5</c:v>
-                  </c:pt>
-                  <c:pt idx="5">
-                    <c:v>S6</c:v>
-                  </c:pt>
-                </c:lvl>
-              </c:multiLvlStrCache>
-            </c:multiLvlStrRef>
+                <c:pt idx="0">
+                  <c:v>S1</c:v>
+                </c:pt>
+                <c:pt idx="1">
+                  <c:v>S2</c:v>
+                </c:pt>
+                <c:pt idx="2">
+                  <c:v>S3</c:v>
+                </c:pt>
+                <c:pt idx="3">
+                  <c:v>S4</c:v>
+                </c:pt>
+                <c:pt idx="4">
+                  <c:v>S5</c:v>
+                </c:pt>
+                <c:pt idx="5">
+                  <c:v>S6</c:v>
+                </c:pt>
+              </c:strCache>
+            </c:strRef>
           </c:cat>
           <c:val>
             <c:numRef>
@@ -750,6 +665,11 @@
             </c:numRef>
           </c:val>
           <c:smooth val="0"/>
+          <c:extLst>
+            <c:ext xmlns:c16="http://schemas.microsoft.com/office/drawing/2014/chart" uri="{C3380CC4-5D6E-409C-BE32-E72D297353CC}">
+              <c16:uniqueId val="{00000000-6956-9C4F-AA1C-53C5D05B5B4C}"/>
+            </c:ext>
+          </c:extLst>
         </c:ser>
         <c:ser>
           <c:idx val="1"/>
@@ -766,9 +686,6 @@
             </c:strRef>
           </c:tx>
           <c:spPr>
-            <a:solidFill>
-              <a:srgbClr val="B25500"/>
-            </a:solidFill>
             <a:ln w="31750" cap="flat">
               <a:solidFill>
                 <a:srgbClr val="B25500"/>
@@ -778,31 +695,6 @@
             </a:ln>
             <a:effectLst/>
           </c:spPr>
-          <c:invertIfNegative val="0"/>
-          <c:dLbls>
-            <c:numFmt formatCode="#,##0" sourceLinked="0"/>
-            <c:txPr>
-              <a:bodyPr/>
-              <a:lstStyle/>
-              <a:p>
-                <a:pPr>
-                  <a:defRPr b="0" i="0" strike="noStrike" sz="1200" u="none">
-                    <a:solidFill>
-                      <a:srgbClr val="000000"/>
-                    </a:solidFill>
-                    <a:latin typeface="Arial"/>
-                  </a:defRPr>
-                </a:pPr>
-              </a:p>
-            </c:txPr>
-            <c:showLegendKey val="0"/>
-            <c:showVal val="0"/>
-            <c:showCatName val="0"/>
-            <c:showSerName val="0"/>
-            <c:showPercent val="0"/>
-            <c:showBubbleSize val="0"/>
-            <c:showLeaderLines val="0"/>
-          </c:dLbls>
           <c:marker>
             <c:symbol val="circle"/>
             <c:size val="6"/>
@@ -821,32 +713,30 @@
             </c:spPr>
           </c:marker>
           <c:cat>
-            <c:multiLvlStrRef>
+            <c:strRef>
               <c:f>Sheet1!$A$2:$A$7</c:f>
-              <c:multiLvlStrCache>
+              <c:strCache>
                 <c:ptCount val="6"/>
-                <c:lvl>
-                  <c:pt idx="0">
-                    <c:v>S1</c:v>
-                  </c:pt>
-                  <c:pt idx="1">
-                    <c:v>S2</c:v>
-                  </c:pt>
-                  <c:pt idx="2">
-                    <c:v>S3</c:v>
-                  </c:pt>
-                  <c:pt idx="3">
-                    <c:v>S4</c:v>
-                  </c:pt>
-                  <c:pt idx="4">
-                    <c:v>S5</c:v>
-                  </c:pt>
-                  <c:pt idx="5">
-                    <c:v>S6</c:v>
-                  </c:pt>
-                </c:lvl>
-              </c:multiLvlStrCache>
-            </c:multiLvlStrRef>
+                <c:pt idx="0">
+                  <c:v>S1</c:v>
+                </c:pt>
+                <c:pt idx="1">
+                  <c:v>S2</c:v>
+                </c:pt>
+                <c:pt idx="2">
+                  <c:v>S3</c:v>
+                </c:pt>
+                <c:pt idx="3">
+                  <c:v>S4</c:v>
+                </c:pt>
+                <c:pt idx="4">
+                  <c:v>S5</c:v>
+                </c:pt>
+                <c:pt idx="5">
+                  <c:v>S6</c:v>
+                </c:pt>
+              </c:strCache>
+            </c:strRef>
           </c:cat>
           <c:val>
             <c:numRef>
@@ -876,35 +766,24 @@
             </c:numRef>
           </c:val>
           <c:smooth val="0"/>
+          <c:extLst>
+            <c:ext xmlns:c16="http://schemas.microsoft.com/office/drawing/2014/chart" uri="{C3380CC4-5D6E-409C-BE32-E72D297353CC}">
+              <c16:uniqueId val="{00000001-6956-9C4F-AA1C-53C5D05B5B4C}"/>
+            </c:ext>
+          </c:extLst>
         </c:ser>
         <c:dLbls>
-          <c:numFmt formatCode="#,##0" sourceLinked="0"/>
-          <c:txPr>
-            <a:bodyPr/>
-            <a:lstStyle/>
-            <a:p>
-              <a:pPr>
-                <a:defRPr b="0" i="0" strike="noStrike" sz="1200" u="none">
-                  <a:solidFill>
-                    <a:srgbClr val="000000"/>
-                  </a:solidFill>
-                  <a:latin typeface="Arial"/>
-                </a:defRPr>
-              </a:pPr>
-            </a:p>
-          </c:txPr>
           <c:showLegendKey val="0"/>
           <c:showVal val="0"/>
           <c:showCatName val="0"/>
           <c:showSerName val="0"/>
           <c:showPercent val="0"/>
           <c:showBubbleSize val="0"/>
-          <c:showLeaderLines val="0"/>
         </c:dLbls>
         <c:marker val="1"/>
+        <c:smooth val="0"/>
         <c:axId val="2094734554"/>
         <c:axId val="2094734552"/>
-        <c:axId val="2094734556"/>
       </c:lineChart>
       <c:catAx>
         <c:axId val="2094734554"/>
@@ -945,6 +824,7 @@
         <c:crosses val="autoZero"/>
         <c:auto val="1"/>
         <c:lblAlgn val="ctr"/>
+        <c:lblOffset val="100"/>
         <c:noMultiLvlLbl val="1"/>
       </c:catAx>
       <c:valAx>
@@ -1016,7 +896,7 @@
         <a:lstStyle/>
         <a:p>
           <a:pPr>
-            <a:defRPr sz="900">      </a:defRPr>
+            <a:defRPr sz="900"/>
           </a:pPr>
           <a:endParaRPr lang="en-US"/>
         </a:p>
@@ -1024,6 +904,7 @@
     </c:legend>
     <c:plotVisOnly val="1"/>
     <c:dispBlanksAs val="span"/>
+    <c:showDLblsOverMax val="1"/>
   </c:chart>
   <c:spPr>
     <a:noFill/>
@@ -1039,9 +920,11 @@
 </file>
 
 <file path=ppt/charts/chart3.xml><?xml version="1.0" encoding="utf-8"?>
-<c:chartSpace xmlns:c="http://schemas.openxmlformats.org/drawingml/2006/chart" xmlns:a="http://schemas.openxmlformats.org/drawingml/2006/main" xmlns:r="http://schemas.openxmlformats.org/officeDocument/2006/relationships">
+<c:chartSpace xmlns:c="http://schemas.openxmlformats.org/drawingml/2006/chart" xmlns:a="http://schemas.openxmlformats.org/drawingml/2006/main" xmlns:r="http://schemas.openxmlformats.org/officeDocument/2006/relationships" xmlns:c16r2="http://schemas.microsoft.com/office/drawing/2015/06/chart">
   <c:date1904 val="0"/>
+  <c:lang val="en-GB"/>
   <c:roundedCorners val="1"/>
+  <c:style val="2"/>
   <c:chart>
     <c:title>
       <c:tx>
@@ -1058,7 +941,7 @@
               </a:defRPr>
             </a:pPr>
             <a:r>
-              <a:rPr sz="1200" b="0" i="0" u="none" strike="noStrike">
+              <a:rPr lang="en-GB" sz="1200" b="0" i="0" u="none" strike="noStrike">
                 <a:solidFill>
                   <a:srgbClr val="333333"/>
                 </a:solidFill>
@@ -1069,13 +952,13 @@
           </a:p>
         </c:rich>
       </c:tx>
-      <c:layout/>
       <c:overlay val="0"/>
     </c:title>
     <c:autoTitleDeleted val="0"/>
     <c:plotArea>
       <c:layout/>
       <c:lineChart>
+        <c:grouping val="standard"/>
         <c:varyColors val="0"/>
         <c:ser>
           <c:idx val="0"/>
@@ -1092,53 +975,25 @@
             </c:strRef>
           </c:tx>
           <c:spPr>
-            <a:solidFill>
-              <a:srgbClr val="1F3F6F"/>
-            </a:solidFill>
             <a:ln w="38100" cap="flat">
               <a:solidFill>
-                <a:srgbClr val="1F3F6F"/>
+                <a:srgbClr val="0000CD"/>
               </a:solidFill>
               <a:prstDash val="solid"/>
               <a:round/>
             </a:ln>
             <a:effectLst/>
           </c:spPr>
-          <c:invertIfNegative val="0"/>
-          <c:dLbls>
-            <c:numFmt formatCode="#,##0" sourceLinked="0"/>
-            <c:txPr>
-              <a:bodyPr/>
-              <a:lstStyle/>
-              <a:p>
-                <a:pPr>
-                  <a:defRPr b="0" i="0" strike="noStrike" sz="1200" u="none">
-                    <a:solidFill>
-                      <a:srgbClr val="000000"/>
-                    </a:solidFill>
-                    <a:latin typeface="Arial"/>
-                  </a:defRPr>
-                </a:pPr>
-              </a:p>
-            </c:txPr>
-            <c:showLegendKey val="0"/>
-            <c:showVal val="0"/>
-            <c:showCatName val="0"/>
-            <c:showSerName val="0"/>
-            <c:showPercent val="0"/>
-            <c:showBubbleSize val="0"/>
-            <c:showLeaderLines val="0"/>
-          </c:dLbls>
           <c:marker>
             <c:symbol val="circle"/>
             <c:size val="7"/>
             <c:spPr>
               <a:solidFill>
-                <a:srgbClr val="1F3F6F"/>
+                <a:srgbClr val="0000CD"/>
               </a:solidFill>
               <a:ln w="9525" cap="flat">
                 <a:solidFill>
-                  <a:srgbClr val="1F3F6F"/>
+                  <a:srgbClr val="0000CD"/>
                 </a:solidFill>
                 <a:prstDash val="solid"/>
                 <a:round/>
@@ -1147,32 +1002,30 @@
             </c:spPr>
           </c:marker>
           <c:cat>
-            <c:multiLvlStrRef>
+            <c:strRef>
               <c:f>Sheet1!$A$2:$A$7</c:f>
-              <c:multiLvlStrCache>
+              <c:strCache>
                 <c:ptCount val="6"/>
-                <c:lvl>
-                  <c:pt idx="0">
-                    <c:v>S1</c:v>
-                  </c:pt>
-                  <c:pt idx="1">
-                    <c:v>S2</c:v>
-                  </c:pt>
-                  <c:pt idx="2">
-                    <c:v>S3</c:v>
-                  </c:pt>
-                  <c:pt idx="3">
-                    <c:v>S4</c:v>
-                  </c:pt>
-                  <c:pt idx="4">
-                    <c:v>S5</c:v>
-                  </c:pt>
-                  <c:pt idx="5">
-                    <c:v>S6</c:v>
-                  </c:pt>
-                </c:lvl>
-              </c:multiLvlStrCache>
-            </c:multiLvlStrRef>
+                <c:pt idx="0">
+                  <c:v>S1</c:v>
+                </c:pt>
+                <c:pt idx="1">
+                  <c:v>S2</c:v>
+                </c:pt>
+                <c:pt idx="2">
+                  <c:v>S3</c:v>
+                </c:pt>
+                <c:pt idx="3">
+                  <c:v>S4</c:v>
+                </c:pt>
+                <c:pt idx="4">
+                  <c:v>S5</c:v>
+                </c:pt>
+                <c:pt idx="5">
+                  <c:v>S6</c:v>
+                </c:pt>
+              </c:strCache>
+            </c:strRef>
           </c:cat>
           <c:val>
             <c:numRef>
@@ -1187,13 +1040,13 @@
                   <c:v>22</c:v>
                 </c:pt>
                 <c:pt idx="2">
-                  <c:v>38.7</c:v>
+                  <c:v>38.700000000000003</c:v>
                 </c:pt>
                 <c:pt idx="3">
                   <c:v>47.7</c:v>
                 </c:pt>
                 <c:pt idx="4">
-                  <c:v>36.7</c:v>
+                  <c:v>36.700000000000003</c:v>
                 </c:pt>
                 <c:pt idx="5">
                   <c:v>49</c:v>
@@ -1202,6 +1055,11 @@
             </c:numRef>
           </c:val>
           <c:smooth val="0"/>
+          <c:extLst>
+            <c:ext xmlns:c16="http://schemas.microsoft.com/office/drawing/2014/chart" uri="{C3380CC4-5D6E-409C-BE32-E72D297353CC}">
+              <c16:uniqueId val="{00000000-371D-014C-BD9B-FF670E22C464}"/>
+            </c:ext>
+          </c:extLst>
         </c:ser>
         <c:ser>
           <c:idx val="1"/>
@@ -1218,9 +1076,6 @@
             </c:strRef>
           </c:tx>
           <c:spPr>
-            <a:solidFill>
-              <a:srgbClr val="B25500"/>
-            </a:solidFill>
             <a:ln w="38100" cap="flat">
               <a:solidFill>
                 <a:srgbClr val="B25500"/>
@@ -1230,31 +1085,6 @@
             </a:ln>
             <a:effectLst/>
           </c:spPr>
-          <c:invertIfNegative val="0"/>
-          <c:dLbls>
-            <c:numFmt formatCode="#,##0" sourceLinked="0"/>
-            <c:txPr>
-              <a:bodyPr/>
-              <a:lstStyle/>
-              <a:p>
-                <a:pPr>
-                  <a:defRPr b="0" i="0" strike="noStrike" sz="1200" u="none">
-                    <a:solidFill>
-                      <a:srgbClr val="000000"/>
-                    </a:solidFill>
-                    <a:latin typeface="Arial"/>
-                  </a:defRPr>
-                </a:pPr>
-              </a:p>
-            </c:txPr>
-            <c:showLegendKey val="0"/>
-            <c:showVal val="0"/>
-            <c:showCatName val="0"/>
-            <c:showSerName val="0"/>
-            <c:showPercent val="0"/>
-            <c:showBubbleSize val="0"/>
-            <c:showLeaderLines val="0"/>
-          </c:dLbls>
           <c:marker>
             <c:symbol val="circle"/>
             <c:size val="7"/>
@@ -1273,32 +1103,30 @@
             </c:spPr>
           </c:marker>
           <c:cat>
-            <c:multiLvlStrRef>
+            <c:strRef>
               <c:f>Sheet1!$A$2:$A$7</c:f>
-              <c:multiLvlStrCache>
+              <c:strCache>
                 <c:ptCount val="6"/>
-                <c:lvl>
-                  <c:pt idx="0">
-                    <c:v>S1</c:v>
-                  </c:pt>
-                  <c:pt idx="1">
-                    <c:v>S2</c:v>
-                  </c:pt>
-                  <c:pt idx="2">
-                    <c:v>S3</c:v>
-                  </c:pt>
-                  <c:pt idx="3">
-                    <c:v>S4</c:v>
-                  </c:pt>
-                  <c:pt idx="4">
-                    <c:v>S5</c:v>
-                  </c:pt>
-                  <c:pt idx="5">
-                    <c:v>S6</c:v>
-                  </c:pt>
-                </c:lvl>
-              </c:multiLvlStrCache>
-            </c:multiLvlStrRef>
+                <c:pt idx="0">
+                  <c:v>S1</c:v>
+                </c:pt>
+                <c:pt idx="1">
+                  <c:v>S2</c:v>
+                </c:pt>
+                <c:pt idx="2">
+                  <c:v>S3</c:v>
+                </c:pt>
+                <c:pt idx="3">
+                  <c:v>S4</c:v>
+                </c:pt>
+                <c:pt idx="4">
+                  <c:v>S5</c:v>
+                </c:pt>
+                <c:pt idx="5">
+                  <c:v>S6</c:v>
+                </c:pt>
+              </c:strCache>
+            </c:strRef>
           </c:cat>
           <c:val>
             <c:numRef>
@@ -1328,35 +1156,24 @@
             </c:numRef>
           </c:val>
           <c:smooth val="0"/>
+          <c:extLst>
+            <c:ext xmlns:c16="http://schemas.microsoft.com/office/drawing/2014/chart" uri="{C3380CC4-5D6E-409C-BE32-E72D297353CC}">
+              <c16:uniqueId val="{00000001-371D-014C-BD9B-FF670E22C464}"/>
+            </c:ext>
+          </c:extLst>
         </c:ser>
         <c:dLbls>
-          <c:numFmt formatCode="#,##0" sourceLinked="0"/>
-          <c:txPr>
-            <a:bodyPr/>
-            <a:lstStyle/>
-            <a:p>
-              <a:pPr>
-                <a:defRPr b="0" i="0" strike="noStrike" sz="1200" u="none">
-                  <a:solidFill>
-                    <a:srgbClr val="000000"/>
-                  </a:solidFill>
-                  <a:latin typeface="Arial"/>
-                </a:defRPr>
-              </a:pPr>
-            </a:p>
-          </c:txPr>
           <c:showLegendKey val="0"/>
           <c:showVal val="0"/>
           <c:showCatName val="0"/>
           <c:showSerName val="0"/>
           <c:showPercent val="0"/>
           <c:showBubbleSize val="0"/>
-          <c:showLeaderLines val="0"/>
         </c:dLbls>
         <c:marker val="1"/>
+        <c:smooth val="0"/>
         <c:axId val="2094734554"/>
         <c:axId val="2094734552"/>
-        <c:axId val="2094734556"/>
       </c:lineChart>
       <c:catAx>
         <c:axId val="2094734554"/>
@@ -1397,6 +1214,7 @@
         <c:crosses val="autoZero"/>
         <c:auto val="1"/>
         <c:lblAlgn val="ctr"/>
+        <c:lblOffset val="100"/>
         <c:noMultiLvlLbl val="1"/>
       </c:catAx>
       <c:valAx>
@@ -1468,7 +1286,7 @@
         <a:lstStyle/>
         <a:p>
           <a:pPr>
-            <a:defRPr sz="1000">      </a:defRPr>
+            <a:defRPr sz="1000"/>
           </a:pPr>
           <a:endParaRPr lang="en-US"/>
         </a:p>
@@ -1476,6 +1294,7 @@
     </c:legend>
     <c:plotVisOnly val="1"/>
     <c:dispBlanksAs val="span"/>
+    <c:showDLblsOverMax val="1"/>
   </c:chart>
   <c:spPr>
     <a:noFill/>
@@ -1491,9 +1310,11 @@
 </file>
 
 <file path=ppt/charts/chart4.xml><?xml version="1.0" encoding="utf-8"?>
-<c:chartSpace xmlns:c="http://schemas.openxmlformats.org/drawingml/2006/chart" xmlns:a="http://schemas.openxmlformats.org/drawingml/2006/main" xmlns:r="http://schemas.openxmlformats.org/officeDocument/2006/relationships">
+<c:chartSpace xmlns:c="http://schemas.openxmlformats.org/drawingml/2006/chart" xmlns:a="http://schemas.openxmlformats.org/drawingml/2006/main" xmlns:r="http://schemas.openxmlformats.org/officeDocument/2006/relationships" xmlns:c16r2="http://schemas.microsoft.com/office/drawing/2015/06/chart">
   <c:date1904 val="0"/>
+  <c:lang val="en-GB"/>
   <c:roundedCorners val="1"/>
+  <c:style val="2"/>
   <c:chart>
     <c:title>
       <c:tx>
@@ -1510,7 +1331,7 @@
               </a:defRPr>
             </a:pPr>
             <a:r>
-              <a:rPr sz="1100" b="0" i="0" u="none" strike="noStrike">
+              <a:rPr lang="en-GB" sz="1100" b="0" i="0" u="none" strike="noStrike">
                 <a:solidFill>
                   <a:srgbClr val="333333"/>
                 </a:solidFill>
@@ -1521,13 +1342,13 @@
           </a:p>
         </c:rich>
       </c:tx>
-      <c:layout/>
       <c:overlay val="0"/>
     </c:title>
     <c:autoTitleDeleted val="0"/>
     <c:plotArea>
       <c:layout/>
       <c:lineChart>
+        <c:grouping val="standard"/>
         <c:varyColors val="0"/>
         <c:ser>
           <c:idx val="0"/>
@@ -1544,53 +1365,25 @@
             </c:strRef>
           </c:tx>
           <c:spPr>
-            <a:solidFill>
-              <a:srgbClr val="1F3F6F"/>
-            </a:solidFill>
             <a:ln w="31750" cap="flat">
               <a:solidFill>
-                <a:srgbClr val="1F3F6F"/>
+                <a:srgbClr val="0000CD"/>
               </a:solidFill>
               <a:prstDash val="solid"/>
               <a:round/>
             </a:ln>
             <a:effectLst/>
           </c:spPr>
-          <c:invertIfNegative val="0"/>
-          <c:dLbls>
-            <c:numFmt formatCode="#,##0" sourceLinked="0"/>
-            <c:txPr>
-              <a:bodyPr/>
-              <a:lstStyle/>
-              <a:p>
-                <a:pPr>
-                  <a:defRPr b="0" i="0" strike="noStrike" sz="1200" u="none">
-                    <a:solidFill>
-                      <a:srgbClr val="000000"/>
-                    </a:solidFill>
-                    <a:latin typeface="Arial"/>
-                  </a:defRPr>
-                </a:pPr>
-              </a:p>
-            </c:txPr>
-            <c:showLegendKey val="0"/>
-            <c:showVal val="0"/>
-            <c:showCatName val="0"/>
-            <c:showSerName val="0"/>
-            <c:showPercent val="0"/>
-            <c:showBubbleSize val="0"/>
-            <c:showLeaderLines val="0"/>
-          </c:dLbls>
           <c:marker>
             <c:symbol val="circle"/>
             <c:size val="6"/>
             <c:spPr>
               <a:solidFill>
-                <a:srgbClr val="1F3F6F"/>
+                <a:srgbClr val="0000CD"/>
               </a:solidFill>
               <a:ln w="9525" cap="flat">
                 <a:solidFill>
-                  <a:srgbClr val="1F3F6F"/>
+                  <a:srgbClr val="0000CD"/>
                 </a:solidFill>
                 <a:prstDash val="solid"/>
                 <a:round/>
@@ -1599,32 +1392,30 @@
             </c:spPr>
           </c:marker>
           <c:cat>
-            <c:multiLvlStrRef>
+            <c:strRef>
               <c:f>Sheet1!$A$2:$A$7</c:f>
-              <c:multiLvlStrCache>
+              <c:strCache>
                 <c:ptCount val="6"/>
-                <c:lvl>
-                  <c:pt idx="0">
-                    <c:v>S1</c:v>
-                  </c:pt>
-                  <c:pt idx="1">
-                    <c:v>S2</c:v>
-                  </c:pt>
-                  <c:pt idx="2">
-                    <c:v>S3</c:v>
-                  </c:pt>
-                  <c:pt idx="3">
-                    <c:v>S4</c:v>
-                  </c:pt>
-                  <c:pt idx="4">
-                    <c:v>S5</c:v>
-                  </c:pt>
-                  <c:pt idx="5">
-                    <c:v>S6</c:v>
-                  </c:pt>
-                </c:lvl>
-              </c:multiLvlStrCache>
-            </c:multiLvlStrRef>
+                <c:pt idx="0">
+                  <c:v>S1</c:v>
+                </c:pt>
+                <c:pt idx="1">
+                  <c:v>S2</c:v>
+                </c:pt>
+                <c:pt idx="2">
+                  <c:v>S3</c:v>
+                </c:pt>
+                <c:pt idx="3">
+                  <c:v>S4</c:v>
+                </c:pt>
+                <c:pt idx="4">
+                  <c:v>S5</c:v>
+                </c:pt>
+                <c:pt idx="5">
+                  <c:v>S6</c:v>
+                </c:pt>
+              </c:strCache>
+            </c:strRef>
           </c:cat>
           <c:val>
             <c:numRef>
@@ -1633,7 +1424,7 @@
                 <c:formatCode>General</c:formatCode>
                 <c:ptCount val="6"/>
                 <c:pt idx="0">
-                  <c:v>36.7</c:v>
+                  <c:v>36.700000000000003</c:v>
                 </c:pt>
                 <c:pt idx="1">
                   <c:v>40</c:v>
@@ -1648,12 +1439,17 @@
                   <c:v>42</c:v>
                 </c:pt>
                 <c:pt idx="5">
-                  <c:v>39.7</c:v>
+                  <c:v>39.700000000000003</c:v>
                 </c:pt>
               </c:numCache>
             </c:numRef>
           </c:val>
           <c:smooth val="0"/>
+          <c:extLst>
+            <c:ext xmlns:c16="http://schemas.microsoft.com/office/drawing/2014/chart" uri="{C3380CC4-5D6E-409C-BE32-E72D297353CC}">
+              <c16:uniqueId val="{00000000-9E8E-DF4A-8FEA-C3C7039BD15C}"/>
+            </c:ext>
+          </c:extLst>
         </c:ser>
         <c:ser>
           <c:idx val="1"/>
@@ -1670,9 +1466,6 @@
             </c:strRef>
           </c:tx>
           <c:spPr>
-            <a:solidFill>
-              <a:srgbClr val="B25500"/>
-            </a:solidFill>
             <a:ln w="31750" cap="flat">
               <a:solidFill>
                 <a:srgbClr val="B25500"/>
@@ -1682,31 +1475,6 @@
             </a:ln>
             <a:effectLst/>
           </c:spPr>
-          <c:invertIfNegative val="0"/>
-          <c:dLbls>
-            <c:numFmt formatCode="#,##0" sourceLinked="0"/>
-            <c:txPr>
-              <a:bodyPr/>
-              <a:lstStyle/>
-              <a:p>
-                <a:pPr>
-                  <a:defRPr b="0" i="0" strike="noStrike" sz="1200" u="none">
-                    <a:solidFill>
-                      <a:srgbClr val="000000"/>
-                    </a:solidFill>
-                    <a:latin typeface="Arial"/>
-                  </a:defRPr>
-                </a:pPr>
-              </a:p>
-            </c:txPr>
-            <c:showLegendKey val="0"/>
-            <c:showVal val="0"/>
-            <c:showCatName val="0"/>
-            <c:showSerName val="0"/>
-            <c:showPercent val="0"/>
-            <c:showBubbleSize val="0"/>
-            <c:showLeaderLines val="0"/>
-          </c:dLbls>
           <c:marker>
             <c:symbol val="circle"/>
             <c:size val="6"/>
@@ -1725,32 +1493,30 @@
             </c:spPr>
           </c:marker>
           <c:cat>
-            <c:multiLvlStrRef>
+            <c:strRef>
               <c:f>Sheet1!$A$2:$A$7</c:f>
-              <c:multiLvlStrCache>
+              <c:strCache>
                 <c:ptCount val="6"/>
-                <c:lvl>
-                  <c:pt idx="0">
-                    <c:v>S1</c:v>
-                  </c:pt>
-                  <c:pt idx="1">
-                    <c:v>S2</c:v>
-                  </c:pt>
-                  <c:pt idx="2">
-                    <c:v>S3</c:v>
-                  </c:pt>
-                  <c:pt idx="3">
-                    <c:v>S4</c:v>
-                  </c:pt>
-                  <c:pt idx="4">
-                    <c:v>S5</c:v>
-                  </c:pt>
-                  <c:pt idx="5">
-                    <c:v>S6</c:v>
-                  </c:pt>
-                </c:lvl>
-              </c:multiLvlStrCache>
-            </c:multiLvlStrRef>
+                <c:pt idx="0">
+                  <c:v>S1</c:v>
+                </c:pt>
+                <c:pt idx="1">
+                  <c:v>S2</c:v>
+                </c:pt>
+                <c:pt idx="2">
+                  <c:v>S3</c:v>
+                </c:pt>
+                <c:pt idx="3">
+                  <c:v>S4</c:v>
+                </c:pt>
+                <c:pt idx="4">
+                  <c:v>S5</c:v>
+                </c:pt>
+                <c:pt idx="5">
+                  <c:v>S6</c:v>
+                </c:pt>
+              </c:strCache>
+            </c:strRef>
           </c:cat>
           <c:val>
             <c:numRef>
@@ -1780,35 +1546,24 @@
             </c:numRef>
           </c:val>
           <c:smooth val="0"/>
+          <c:extLst>
+            <c:ext xmlns:c16="http://schemas.microsoft.com/office/drawing/2014/chart" uri="{C3380CC4-5D6E-409C-BE32-E72D297353CC}">
+              <c16:uniqueId val="{00000001-9E8E-DF4A-8FEA-C3C7039BD15C}"/>
+            </c:ext>
+          </c:extLst>
         </c:ser>
         <c:dLbls>
-          <c:numFmt formatCode="#,##0" sourceLinked="0"/>
-          <c:txPr>
-            <a:bodyPr/>
-            <a:lstStyle/>
-            <a:p>
-              <a:pPr>
-                <a:defRPr b="0" i="0" strike="noStrike" sz="1200" u="none">
-                  <a:solidFill>
-                    <a:srgbClr val="000000"/>
-                  </a:solidFill>
-                  <a:latin typeface="Arial"/>
-                </a:defRPr>
-              </a:pPr>
-            </a:p>
-          </c:txPr>
           <c:showLegendKey val="0"/>
           <c:showVal val="0"/>
           <c:showCatName val="0"/>
           <c:showSerName val="0"/>
           <c:showPercent val="0"/>
           <c:showBubbleSize val="0"/>
-          <c:showLeaderLines val="0"/>
         </c:dLbls>
         <c:marker val="1"/>
+        <c:smooth val="0"/>
         <c:axId val="2094734554"/>
         <c:axId val="2094734552"/>
-        <c:axId val="2094734556"/>
       </c:lineChart>
       <c:catAx>
         <c:axId val="2094734554"/>
@@ -1849,6 +1604,7 @@
         <c:crosses val="autoZero"/>
         <c:auto val="1"/>
         <c:lblAlgn val="ctr"/>
+        <c:lblOffset val="100"/>
         <c:noMultiLvlLbl val="1"/>
       </c:catAx>
       <c:valAx>
@@ -1920,7 +1676,7 @@
         <a:lstStyle/>
         <a:p>
           <a:pPr>
-            <a:defRPr sz="900">      </a:defRPr>
+            <a:defRPr sz="900"/>
           </a:pPr>
           <a:endParaRPr lang="en-US"/>
         </a:p>
@@ -1928,6 +1684,7 @@
     </c:legend>
     <c:plotVisOnly val="1"/>
     <c:dispBlanksAs val="span"/>
+    <c:showDLblsOverMax val="1"/>
   </c:chart>
   <c:spPr>
     <a:noFill/>
@@ -1964,234 +1721,10 @@
           <a:chExt cx="0" cy="0"/>
         </a:xfrm>
       </p:grpSpPr>
-      <p:sp>
-        <p:nvSpPr>
-          <p:cNvPr id="2" name="Header Placeholder 1"/>
-          <p:cNvSpPr>
-            <a:spLocks noGrp="1"/>
-          </p:cNvSpPr>
-          <p:nvPr>
-            <p:ph type="hdr" sz="quarter"/>
-          </p:nvPr>
-        </p:nvSpPr>
-        <p:spPr>
-          <a:xfrm>
-            <a:off x="0" y="0"/>
-            <a:ext cx="2971800" cy="458788"/>
-          </a:xfrm>
-          <a:prstGeom prst="rect">
-            <a:avLst/>
-          </a:prstGeom>
-        </p:spPr>
-        <p:txBody>
-          <a:bodyPr vert="horz" lIns="91440" tIns="45720" rIns="91440" bIns="45720" rtlCol="0"/>
-          <a:lstStyle>
-            <a:lvl1pPr algn="l">
-              <a:defRPr sz="1200"/>
-            </a:lvl1pPr>
-          </a:lstStyle>
-          <a:p>
-            <a:endParaRPr lang="en-US"/>
-          </a:p>
-        </p:txBody>
-      </p:sp>
-      <p:sp>
-        <p:nvSpPr>
-          <p:cNvPr id="3" name="Date Placeholder 2"/>
-          <p:cNvSpPr>
-            <a:spLocks noGrp="1"/>
-          </p:cNvSpPr>
-          <p:nvPr>
-            <p:ph type="dt" idx="1"/>
-          </p:nvPr>
-        </p:nvSpPr>
-        <p:spPr>
-          <a:xfrm>
-            <a:off x="3884613" y="0"/>
-            <a:ext cx="2971800" cy="458788"/>
-          </a:xfrm>
-          <a:prstGeom prst="rect">
-            <a:avLst/>
-          </a:prstGeom>
-        </p:spPr>
-        <p:txBody>
-          <a:bodyPr vert="horz" lIns="91440" tIns="45720" rIns="91440" bIns="45720" rtlCol="0"/>
-          <a:lstStyle>
-            <a:lvl1pPr algn="r">
-              <a:defRPr sz="1200"/>
-            </a:lvl1pPr>
-          </a:lstStyle>
-          <a:p>
-            <a:fld id="{5282F153-3F37-0F45-9E97-73ACFA13230C}" type="datetimeFigureOut">
-              <a:rPr lang="en-US"/>
-              <a:t>7/23/19</a:t>
-            </a:fld>
-            <a:endParaRPr lang="en-US"/>
-          </a:p>
-        </p:txBody>
-      </p:sp>
-      <p:sp>
-        <p:nvSpPr>
-          <p:cNvPr id="4" name="Slide Image Placeholder 3"/>
-          <p:cNvSpPr>
-            <a:spLocks noGrp="1" noRot="1" noChangeAspect="1"/>
-          </p:cNvSpPr>
-          <p:nvPr>
-            <p:ph type="sldImg" idx="2"/>
-          </p:nvPr>
-        </p:nvSpPr>
-        <p:spPr>
-          <a:xfrm>
-            <a:off x="685800" y="1143000"/>
-            <a:ext cx="5486400" cy="3086100"/>
-          </a:xfrm>
-          <a:prstGeom prst="rect">
-            <a:avLst/>
-          </a:prstGeom>
-          <a:noFill/>
-          <a:ln w="12700">
-            <a:solidFill>
-              <a:prstClr val="black"/>
-            </a:solidFill>
-          </a:ln>
-        </p:spPr>
-        <p:txBody>
-          <a:bodyPr vert="horz" lIns="91440" tIns="45720" rIns="91440" bIns="45720" rtlCol="0" anchor="ctr"/>
-          <a:lstStyle/>
-          <a:p>
-            <a:endParaRPr lang="en-US"/>
-          </a:p>
-        </p:txBody>
-      </p:sp>
-      <p:sp>
-        <p:nvSpPr>
-          <p:cNvPr id="5" name="Notes Placeholder 4"/>
-          <p:cNvSpPr>
-            <a:spLocks noGrp="1"/>
-          </p:cNvSpPr>
-          <p:nvPr>
-            <p:ph type="body" sz="quarter" idx="3"/>
-          </p:nvPr>
-        </p:nvSpPr>
-        <p:spPr>
-          <a:xfrm>
-            <a:off x="685800" y="4400550"/>
-            <a:ext cx="5486400" cy="3600450"/>
-          </a:xfrm>
-          <a:prstGeom prst="rect">
-            <a:avLst/>
-          </a:prstGeom>
-        </p:spPr>
-        <p:txBody>
-          <a:bodyPr vert="horz" lIns="91440" tIns="45720" rIns="91440" bIns="45720" rtlCol="0"/>
-          <a:lstStyle/>
-          <a:p>
-            <a:pPr lvl="0"/>
-            <a:r>
-              <a:rPr lang="en-US"/>
-              <a:t>Click to edit Master text styles</a:t>
-            </a:r>
-          </a:p>
-          <a:p>
-            <a:pPr lvl="1"/>
-            <a:r>
-              <a:rPr lang="en-US"/>
-              <a:t>Second level</a:t>
-            </a:r>
-          </a:p>
-          <a:p>
-            <a:pPr lvl="2"/>
-            <a:r>
-              <a:rPr lang="en-US"/>
-              <a:t>Third level</a:t>
-            </a:r>
-          </a:p>
-          <a:p>
-            <a:pPr lvl="3"/>
-            <a:r>
-              <a:rPr lang="en-US"/>
-              <a:t>Fourth level</a:t>
-            </a:r>
-          </a:p>
-          <a:p>
-            <a:pPr lvl="4"/>
-            <a:r>
-              <a:rPr lang="en-US"/>
-              <a:t>Fifth level</a:t>
-            </a:r>
-          </a:p>
-        </p:txBody>
-      </p:sp>
-      <p:sp>
-        <p:nvSpPr>
-          <p:cNvPr id="6" name="Footer Placeholder 5"/>
-          <p:cNvSpPr>
-            <a:spLocks noGrp="1"/>
-          </p:cNvSpPr>
-          <p:nvPr>
-            <p:ph type="ftr" sz="quarter" idx="4"/>
-          </p:nvPr>
-        </p:nvSpPr>
-        <p:spPr>
-          <a:xfrm>
-            <a:off x="0" y="8685213"/>
-            <a:ext cx="2971800" cy="458787"/>
-          </a:xfrm>
-          <a:prstGeom prst="rect">
-            <a:avLst/>
-          </a:prstGeom>
-        </p:spPr>
-        <p:txBody>
-          <a:bodyPr vert="horz" lIns="91440" tIns="45720" rIns="91440" bIns="45720" rtlCol="0" anchor="b"/>
-          <a:lstStyle>
-            <a:lvl1pPr algn="l">
-              <a:defRPr sz="1200"/>
-            </a:lvl1pPr>
-          </a:lstStyle>
-          <a:p>
-            <a:endParaRPr lang="en-US"/>
-          </a:p>
-        </p:txBody>
-      </p:sp>
-      <p:sp>
-        <p:nvSpPr>
-          <p:cNvPr id="7" name="Slide Number Placeholder 6"/>
-          <p:cNvSpPr>
-            <a:spLocks noGrp="1"/>
-          </p:cNvSpPr>
-          <p:nvPr>
-            <p:ph type="sldNum" sz="quarter" idx="5"/>
-          </p:nvPr>
-        </p:nvSpPr>
-        <p:spPr>
-          <a:xfrm>
-            <a:off x="3884613" y="8685213"/>
-            <a:ext cx="2971800" cy="458787"/>
-          </a:xfrm>
-          <a:prstGeom prst="rect">
-            <a:avLst/>
-          </a:prstGeom>
-        </p:spPr>
-        <p:txBody>
-          <a:bodyPr vert="horz" lIns="91440" tIns="45720" rIns="91440" bIns="45720" rtlCol="0" anchor="b"/>
-          <a:lstStyle>
-            <a:lvl1pPr algn="r">
-              <a:defRPr sz="1200"/>
-            </a:lvl1pPr>
-          </a:lstStyle>
-          <a:p>
-            <a:fld id="{CE5E9CC1-C706-0F49-92D6-E571CC5EEA8F}" type="slidenum">
-              <a:rPr lang="en-US"/>
-              <a:t>‹#›</a:t>
-            </a:fld>
-            <a:endParaRPr lang="en-US"/>
-          </a:p>
-        </p:txBody>
-      </p:sp>
     </p:spTree>
     <p:extLst>
       <p:ext uri="{BB962C8B-B14F-4D97-AF65-F5344CB8AC3E}">
-        <p14:creationId xmlns:p14="http://schemas.microsoft.com/office/powerpoint/2010/main" val="1024086991"/>
+        <p14:creationId xmlns:p14="http://schemas.microsoft.com/office/powerpoint/2010/main" val="833069191"/>
       </p:ext>
     </p:extLst>
   </p:cSld>
@@ -2335,10 +1868,6 @@
           <a:bodyPr/>
           <a:lstStyle/>
           <a:p>
-            <a:r>
-              <a:rPr lang="en-US" dirty="0"/>
-              <a:t/>
-            </a:r>
             <a:endParaRPr lang="en-US" dirty="0"/>
           </a:p>
         </p:txBody>
@@ -2423,10 +1952,6 @@
           <a:bodyPr/>
           <a:lstStyle/>
           <a:p>
-            <a:r>
-              <a:rPr lang="en-US" dirty="0"/>
-              <a:t/>
-            </a:r>
             <a:endParaRPr lang="en-US" dirty="0"/>
           </a:p>
         </p:txBody>
@@ -2511,10 +2036,6 @@
           <a:bodyPr/>
           <a:lstStyle/>
           <a:p>
-            <a:r>
-              <a:rPr lang="en-US" dirty="0"/>
-              <a:t/>
-            </a:r>
             <a:endParaRPr lang="en-US" dirty="0"/>
           </a:p>
         </p:txBody>
@@ -2599,10 +2120,6 @@
           <a:bodyPr/>
           <a:lstStyle/>
           <a:p>
-            <a:r>
-              <a:rPr lang="en-US" dirty="0"/>
-              <a:t/>
-            </a:r>
             <a:endParaRPr lang="en-US" dirty="0"/>
           </a:p>
         </p:txBody>
@@ -2687,10 +2204,6 @@
           <a:bodyPr/>
           <a:lstStyle/>
           <a:p>
-            <a:r>
-              <a:rPr lang="en-US" dirty="0"/>
-              <a:t/>
-            </a:r>
             <a:endParaRPr lang="en-US" dirty="0"/>
           </a:p>
         </p:txBody>
@@ -2775,10 +2288,6 @@
           <a:bodyPr/>
           <a:lstStyle/>
           <a:p>
-            <a:r>
-              <a:rPr lang="en-US" dirty="0"/>
-              <a:t/>
-            </a:r>
             <a:endParaRPr lang="en-US" dirty="0"/>
           </a:p>
         </p:txBody>
@@ -2863,10 +2372,6 @@
           <a:bodyPr/>
           <a:lstStyle/>
           <a:p>
-            <a:r>
-              <a:rPr lang="en-US" dirty="0"/>
-              <a:t/>
-            </a:r>
             <a:endParaRPr lang="en-US" dirty="0"/>
           </a:p>
         </p:txBody>
@@ -2951,10 +2456,6 @@
           <a:bodyPr/>
           <a:lstStyle/>
           <a:p>
-            <a:r>
-              <a:rPr lang="en-US" dirty="0"/>
-              <a:t/>
-            </a:r>
             <a:endParaRPr lang="en-US" dirty="0"/>
           </a:p>
         </p:txBody>
@@ -3039,10 +2540,6 @@
           <a:bodyPr/>
           <a:lstStyle/>
           <a:p>
-            <a:r>
-              <a:rPr lang="en-US" dirty="0"/>
-              <a:t/>
-            </a:r>
             <a:endParaRPr lang="en-US" dirty="0"/>
           </a:p>
         </p:txBody>
@@ -3127,10 +2624,6 @@
           <a:bodyPr/>
           <a:lstStyle/>
           <a:p>
-            <a:r>
-              <a:rPr lang="en-US" dirty="0"/>
-              <a:t/>
-            </a:r>
             <a:endParaRPr lang="en-US" dirty="0"/>
           </a:p>
         </p:txBody>
@@ -3215,10 +2708,6 @@
           <a:bodyPr/>
           <a:lstStyle/>
           <a:p>
-            <a:r>
-              <a:rPr lang="en-US" dirty="0"/>
-              <a:t/>
-            </a:r>
             <a:endParaRPr lang="en-US" dirty="0"/>
           </a:p>
         </p:txBody>
@@ -3303,10 +2792,6 @@
           <a:bodyPr/>
           <a:lstStyle/>
           <a:p>
-            <a:r>
-              <a:rPr lang="en-US" dirty="0"/>
-              <a:t/>
-            </a:r>
             <a:endParaRPr lang="en-US" dirty="0"/>
           </a:p>
         </p:txBody>
@@ -3391,10 +2876,6 @@
           <a:bodyPr/>
           <a:lstStyle/>
           <a:p>
-            <a:r>
-              <a:rPr lang="en-US" dirty="0"/>
-              <a:t/>
-            </a:r>
             <a:endParaRPr lang="en-US" dirty="0"/>
           </a:p>
         </p:txBody>
@@ -3479,10 +2960,6 @@
           <a:bodyPr/>
           <a:lstStyle/>
           <a:p>
-            <a:r>
-              <a:rPr lang="en-US" dirty="0"/>
-              <a:t/>
-            </a:r>
             <a:endParaRPr lang="en-US" dirty="0"/>
           </a:p>
         </p:txBody>
@@ -3567,10 +3044,6 @@
           <a:bodyPr/>
           <a:lstStyle/>
           <a:p>
-            <a:r>
-              <a:rPr lang="en-US" dirty="0"/>
-              <a:t/>
-            </a:r>
             <a:endParaRPr lang="en-US" dirty="0"/>
           </a:p>
         </p:txBody>
@@ -3655,10 +3128,6 @@
           <a:bodyPr/>
           <a:lstStyle/>
           <a:p>
-            <a:r>
-              <a:rPr lang="en-US" dirty="0"/>
-              <a:t/>
-            </a:r>
             <a:endParaRPr lang="en-US" dirty="0"/>
           </a:p>
         </p:txBody>
@@ -3743,10 +3212,6 @@
           <a:bodyPr/>
           <a:lstStyle/>
           <a:p>
-            <a:r>
-              <a:rPr lang="en-US" dirty="0"/>
-              <a:t/>
-            </a:r>
             <a:endParaRPr lang="en-US" dirty="0"/>
           </a:p>
         </p:txBody>
@@ -3831,10 +3296,6 @@
           <a:bodyPr/>
           <a:lstStyle/>
           <a:p>
-            <a:r>
-              <a:rPr lang="en-US" dirty="0"/>
-              <a:t/>
-            </a:r>
             <a:endParaRPr lang="en-US" dirty="0"/>
           </a:p>
         </p:txBody>
@@ -3919,10 +3380,6 @@
           <a:bodyPr/>
           <a:lstStyle/>
           <a:p>
-            <a:r>
-              <a:rPr lang="en-US" dirty="0"/>
-              <a:t/>
-            </a:r>
             <a:endParaRPr lang="en-US" dirty="0"/>
           </a:p>
         </p:txBody>
@@ -4007,10 +3464,6 @@
           <a:bodyPr/>
           <a:lstStyle/>
           <a:p>
-            <a:r>
-              <a:rPr lang="en-US" dirty="0"/>
-              <a:t/>
-            </a:r>
             <a:endParaRPr lang="en-US" dirty="0"/>
           </a:p>
         </p:txBody>
@@ -4095,10 +3548,6 @@
           <a:bodyPr/>
           <a:lstStyle/>
           <a:p>
-            <a:r>
-              <a:rPr lang="en-US" dirty="0"/>
-              <a:t/>
-            </a:r>
             <a:endParaRPr lang="en-US" dirty="0"/>
           </a:p>
         </p:txBody>
@@ -4183,10 +3632,6 @@
           <a:bodyPr/>
           <a:lstStyle/>
           <a:p>
-            <a:r>
-              <a:rPr lang="en-US" dirty="0"/>
-              <a:t/>
-            </a:r>
             <a:endParaRPr lang="en-US" dirty="0"/>
           </a:p>
         </p:txBody>
@@ -4271,10 +3716,6 @@
           <a:bodyPr/>
           <a:lstStyle/>
           <a:p>
-            <a:r>
-              <a:rPr lang="en-US" dirty="0"/>
-              <a:t/>
-            </a:r>
             <a:endParaRPr lang="en-US" dirty="0"/>
           </a:p>
         </p:txBody>
@@ -4359,10 +3800,6 @@
           <a:bodyPr/>
           <a:lstStyle/>
           <a:p>
-            <a:r>
-              <a:rPr lang="en-US" dirty="0"/>
-              <a:t/>
-            </a:r>
             <a:endParaRPr lang="en-US" dirty="0"/>
           </a:p>
         </p:txBody>
@@ -4447,10 +3884,6 @@
           <a:bodyPr/>
           <a:lstStyle/>
           <a:p>
-            <a:r>
-              <a:rPr lang="en-US" dirty="0"/>
-              <a:t/>
-            </a:r>
             <a:endParaRPr lang="en-US" dirty="0"/>
           </a:p>
         </p:txBody>
@@ -4535,10 +3968,6 @@
           <a:bodyPr/>
           <a:lstStyle/>
           <a:p>
-            <a:r>
-              <a:rPr lang="en-US" dirty="0"/>
-              <a:t/>
-            </a:r>
             <a:endParaRPr lang="en-US" dirty="0"/>
           </a:p>
         </p:txBody>
@@ -4623,10 +4052,6 @@
           <a:bodyPr/>
           <a:lstStyle/>
           <a:p>
-            <a:r>
-              <a:rPr lang="en-US" dirty="0"/>
-              <a:t/>
-            </a:r>
             <a:endParaRPr lang="en-US" dirty="0"/>
           </a:p>
         </p:txBody>
@@ -4711,10 +4136,6 @@
           <a:bodyPr/>
           <a:lstStyle/>
           <a:p>
-            <a:r>
-              <a:rPr lang="en-US" dirty="0"/>
-              <a:t/>
-            </a:r>
             <a:endParaRPr lang="en-US" dirty="0"/>
           </a:p>
         </p:txBody>
@@ -4785,9 +4206,74 @@
 </p:sldLayout>
 </file>
 
+<file path=ppt/slideLayouts/slideLayout2.xml><?xml version="1.0" encoding="utf-8"?>
+<p:sldLayout xmlns:a="http://schemas.openxmlformats.org/drawingml/2006/main" xmlns:r="http://schemas.openxmlformats.org/officeDocument/2006/relationships" xmlns:p="http://schemas.openxmlformats.org/presentationml/2006/main" preserve="1">
+  <p:cSld name="MAIN">
+    <p:bg>
+      <p:bgPr>
+        <a:solidFill>
+          <a:srgbClr val="FAFAFA"/>
+        </a:solidFill>
+        <a:effectLst/>
+      </p:bgPr>
+    </p:bg>
+    <p:spTree>
+      <p:nvGrpSpPr>
+        <p:cNvPr id="1" name=""/>
+        <p:cNvGrpSpPr/>
+        <p:nvPr/>
+      </p:nvGrpSpPr>
+      <p:grpSpPr>
+        <a:xfrm>
+          <a:off x="0" y="0"/>
+          <a:ext cx="0" cy="0"/>
+          <a:chOff x="0" y="0"/>
+          <a:chExt cx="0" cy="0"/>
+        </a:xfrm>
+      </p:grpSpPr>
+      <p:sp>
+        <p:nvSpPr>
+          <p:cNvPr id="2" name="Shape 0"/>
+          <p:cNvSpPr/>
+          <p:nvPr/>
+        </p:nvSpPr>
+        <p:spPr>
+          <a:xfrm>
+            <a:off x="0" y="0"/>
+            <a:ext cx="9144000" cy="45720"/>
+          </a:xfrm>
+          <a:prstGeom prst="rect">
+            <a:avLst/>
+          </a:prstGeom>
+          <a:solidFill>
+            <a:srgbClr val="0000CD"/>
+          </a:solidFill>
+          <a:ln/>
+        </p:spPr>
+        <p:txBody>
+          <a:bodyPr/>
+          <a:lstStyle/>
+          <a:p>
+            <a:endParaRPr lang="en-US"/>
+          </a:p>
+        </p:txBody>
+      </p:sp>
+    </p:spTree>
+  </p:cSld>
+  <p:clrMapOvr>
+    <a:masterClrMapping/>
+  </p:clrMapOvr>
+</p:sldLayout>
+</file>
+
 <file path=ppt/slideMasters/slideMaster1.xml><?xml version="1.0" encoding="utf-8"?>
 <p:sldMaster xmlns:a="http://schemas.openxmlformats.org/drawingml/2006/main" xmlns:r="http://schemas.openxmlformats.org/officeDocument/2006/relationships" xmlns:p="http://schemas.openxmlformats.org/presentationml/2006/main">
   <p:cSld>
+    <p:bg>
+      <p:bgRef idx="1001">
+        <a:schemeClr val="bg1"/>
+      </p:bgRef>
+    </p:bg>
     <p:spTree>
       <p:nvGrpSpPr>
         <p:cNvPr id="1" name=""/>
@@ -4807,6 +4293,7 @@
   <p:clrMap bg1="lt1" tx1="dk1" bg2="lt2" tx2="dk2" accent1="accent1" accent2="accent2" accent3="accent3" accent4="accent4" accent5="accent5" accent6="accent6" hlink="hlink" folHlink="folHlink"/>
   <p:sldLayoutIdLst>
     <p:sldLayoutId id="2147483649" r:id="rId1"/>
+    <p:sldLayoutId id="2147483650" r:id="rId2"/>
   </p:sldLayoutIdLst>
   <p:hf sldNum="0" hdr="0" ftr="0" dt="0"/>
   <p:txStyles>
@@ -5079,9 +4566,33 @@
           <a:chExt cx="0" cy="0"/>
         </a:xfrm>
       </p:grpSpPr>
-      <p:sp>
-        <p:nvSpPr>
-          <p:cNvPr id="2" name="Text 0"/>
+      <p:pic>
+        <p:nvPicPr>
+          <p:cNvPr id="2" name="Image 0" descr="images/Imperial_College_London_new_logo.png"/>
+          <p:cNvPicPr>
+            <a:picLocks noChangeAspect="1"/>
+          </p:cNvPicPr>
+          <p:nvPr/>
+        </p:nvPicPr>
+        <p:blipFill>
+          <a:blip r:embed="rId3"/>
+          <a:stretch>
+            <a:fillRect/>
+          </a:stretch>
+        </p:blipFill>
+        <p:spPr>
+          <a:xfrm>
+            <a:off x="365760" y="274320"/>
+            <a:ext cx="1645920" cy="181051"/>
+          </a:xfrm>
+          <a:prstGeom prst="rect">
+            <a:avLst/>
+          </a:prstGeom>
+        </p:spPr>
+      </p:pic>
+      <p:sp>
+        <p:nvSpPr>
+          <p:cNvPr id="3" name="Text 0"/>
           <p:cNvSpPr/>
           <p:nvPr/>
         </p:nvSpPr>
@@ -5100,7 +4611,7 @@
           <a:bodyPr wrap="square" lIns="0" tIns="0" rIns="0" bIns="0" rtlCol="0" anchor="ctr"/>
           <a:lstStyle/>
           <a:p>
-            <a:pPr algn="ctr" indent="0" marL="0">
+            <a:pPr marL="0" indent="0" algn="ctr">
               <a:buNone/>
             </a:pPr>
             <a:r>
@@ -5117,7 +4628,7 @@
       </p:sp>
       <p:sp>
         <p:nvSpPr>
-          <p:cNvPr id="3" name="Text 1"/>
+          <p:cNvPr id="4" name="Text 1"/>
           <p:cNvSpPr/>
           <p:nvPr/>
         </p:nvSpPr>
@@ -5136,7 +4647,7 @@
           <a:bodyPr wrap="square" lIns="0" tIns="0" rIns="0" bIns="0" rtlCol="0" anchor="ctr"/>
           <a:lstStyle/>
           <a:p>
-            <a:pPr algn="ctr" indent="0" marL="0">
+            <a:pPr marL="0" indent="0" algn="ctr">
               <a:buNone/>
             </a:pPr>
             <a:r>
@@ -5153,7 +4664,7 @@
       </p:sp>
       <p:sp>
         <p:nvSpPr>
-          <p:cNvPr id="4" name="Text 2"/>
+          <p:cNvPr id="5" name="Text 2"/>
           <p:cNvSpPr/>
           <p:nvPr/>
         </p:nvSpPr>
@@ -5172,7 +4683,7 @@
           <a:bodyPr wrap="square" rtlCol="0" anchor="ctr"/>
           <a:lstStyle/>
           <a:p>
-            <a:pPr algn="ctr" indent="0" marL="0">
+            <a:pPr marL="0" indent="0" algn="ctr">
               <a:buNone/>
             </a:pPr>
             <a:r>
@@ -5189,7 +4700,7 @@
       </p:sp>
       <p:sp>
         <p:nvSpPr>
-          <p:cNvPr id="5" name="Text 3"/>
+          <p:cNvPr id="6" name="Text 3"/>
           <p:cNvSpPr/>
           <p:nvPr/>
         </p:nvSpPr>
@@ -5208,7 +4719,7 @@
           <a:bodyPr wrap="square" rtlCol="0" anchor="ctr"/>
           <a:lstStyle/>
           <a:p>
-            <a:pPr algn="ctr" indent="0" marL="0">
+            <a:pPr marL="0" indent="0" algn="ctr">
               <a:buNone/>
             </a:pPr>
             <a:r>
@@ -5225,7 +4736,7 @@
       </p:sp>
       <p:sp>
         <p:nvSpPr>
-          <p:cNvPr id="6" name="Text 4"/>
+          <p:cNvPr id="7" name="Text 4"/>
           <p:cNvSpPr/>
           <p:nvPr/>
         </p:nvSpPr>
@@ -5244,7 +4755,7 @@
           <a:bodyPr wrap="square" rtlCol="0" anchor="ctr"/>
           <a:lstStyle/>
           <a:p>
-            <a:pPr algn="ctr" indent="0" marL="0">
+            <a:pPr marL="0" indent="0" algn="ctr">
               <a:buNone/>
             </a:pPr>
             <a:r>
@@ -5305,7 +4816,7 @@
           <a:bodyPr wrap="square" lIns="0" tIns="0" rIns="0" bIns="0" rtlCol="0" anchor="ctr"/>
           <a:lstStyle/>
           <a:p>
-            <a:pPr indent="0" marL="0">
+            <a:pPr marL="0" indent="0">
               <a:buNone/>
             </a:pPr>
             <a:r>
@@ -5359,13 +4870,13 @@
             <a:endParaRPr lang="en-US" sz="1300" dirty="0"/>
           </a:p>
           <a:p>
-            <a:pPr lvl="1" marL="685800" indent="-342900">
+            <a:pPr marL="685800" lvl="1" indent="-342900">
               <a:spcAft>
                 <a:spcPts val="600"/>
               </a:spcAft>
               <a:buSzPct val="100000"/>
               <a:buFont typeface="+mj-lt"/>
-              <a:buAutoNum type="arabicPeriod" startAt="1"/>
+              <a:buAutoNum type="arabicPeriod"/>
             </a:pPr>
             <a:r>
               <a:rPr lang="en-US" sz="1300" dirty="0">
@@ -5378,13 +4889,13 @@
             <a:endParaRPr lang="en-US" sz="1300" dirty="0"/>
           </a:p>
           <a:p>
-            <a:pPr lvl="1" marL="685800" indent="-342900">
+            <a:pPr marL="685800" lvl="1" indent="-342900">
               <a:spcAft>
                 <a:spcPts val="600"/>
               </a:spcAft>
               <a:buSzPct val="100000"/>
               <a:buFont typeface="+mj-lt"/>
-              <a:buAutoNum type="arabicPeriod" startAt="1"/>
+              <a:buAutoNum type="arabicPeriod"/>
             </a:pPr>
             <a:r>
               <a:rPr lang="en-US" sz="1300" dirty="0">
@@ -5397,13 +4908,13 @@
             <a:endParaRPr lang="en-US" sz="1300" dirty="0"/>
           </a:p>
           <a:p>
-            <a:pPr lvl="1" marL="685800" indent="-342900">
+            <a:pPr marL="685800" lvl="1" indent="-342900">
               <a:spcAft>
                 <a:spcPts val="600"/>
               </a:spcAft>
               <a:buSzPct val="100000"/>
               <a:buFont typeface="+mj-lt"/>
-              <a:buAutoNum type="arabicPeriod" startAt="1"/>
+              <a:buAutoNum type="arabicPeriod"/>
             </a:pPr>
             <a:r>
               <a:rPr lang="en-US" sz="1300" dirty="0">
@@ -5416,13 +4927,13 @@
             <a:endParaRPr lang="en-US" sz="1300" dirty="0"/>
           </a:p>
           <a:p>
-            <a:pPr lvl="1" marL="685800" indent="-342900">
+            <a:pPr marL="685800" lvl="1" indent="-342900">
               <a:spcAft>
                 <a:spcPts val="600"/>
               </a:spcAft>
               <a:buSzPct val="100000"/>
               <a:buFont typeface="+mj-lt"/>
-              <a:buAutoNum type="arabicPeriod" startAt="1"/>
+              <a:buAutoNum type="arabicPeriod"/>
             </a:pPr>
             <a:r>
               <a:rPr lang="en-US" sz="1300" dirty="0">
@@ -5459,7 +4970,7 @@
           <a:bodyPr wrap="square" lIns="38100" tIns="38100" rIns="38100" bIns="38100" rtlCol="0" anchor="t"/>
           <a:lstStyle/>
           <a:p>
-            <a:pPr indent="0" marL="0">
+            <a:pPr marL="0" indent="0">
               <a:spcAft>
                 <a:spcPts val="200"/>
               </a:spcAft>
@@ -5476,7 +4987,7 @@
             <a:endParaRPr lang="en-US" sz="1100" dirty="0"/>
           </a:p>
           <a:p>
-            <a:pPr indent="0" marL="0">
+            <a:pPr marL="0" indent="0">
               <a:buNone/>
             </a:pPr>
             <a:r>
@@ -5493,14 +5004,14 @@
       </p:sp>
       <p:pic>
         <p:nvPicPr>
-          <p:cNvPr id="5" name="Image 0" descr="images/manual-refactor.png">    </p:cNvPr>
+          <p:cNvPr id="5" name="Image 0" descr="images/manual-refactor.png"/>
           <p:cNvPicPr>
             <a:picLocks noChangeAspect="1"/>
           </p:cNvPicPr>
           <p:nvPr/>
         </p:nvPicPr>
         <p:blipFill>
-          <a:blip r:embed="rId1"/>
+          <a:blip r:embed="rId3"/>
           <a:stretch>
             <a:fillRect/>
           </a:stretch>
@@ -5561,7 +5072,7 @@
           <a:bodyPr wrap="square" lIns="0" tIns="0" rIns="0" bIns="0" rtlCol="0" anchor="ctr"/>
           <a:lstStyle/>
           <a:p>
-            <a:pPr indent="0" marL="0">
+            <a:pPr marL="0" indent="0">
               <a:buNone/>
             </a:pPr>
             <a:r>
@@ -5615,13 +5126,13 @@
             <a:endParaRPr lang="en-US" sz="1400" dirty="0"/>
           </a:p>
           <a:p>
-            <a:pPr lvl="1" marL="685800" indent="-342900">
+            <a:pPr marL="685800" lvl="1" indent="-342900">
               <a:spcAft>
                 <a:spcPts val="600"/>
               </a:spcAft>
               <a:buSzPct val="100000"/>
               <a:buFont typeface="+mj-lt"/>
-              <a:buAutoNum type="arabicPeriod" startAt="1"/>
+              <a:buAutoNum type="arabicPeriod"/>
             </a:pPr>
             <a:r>
               <a:rPr lang="en-US" sz="1400" dirty="0">
@@ -5634,13 +5145,13 @@
             <a:endParaRPr lang="en-US" sz="1400" dirty="0"/>
           </a:p>
           <a:p>
-            <a:pPr lvl="1" marL="685800" indent="-342900">
+            <a:pPr marL="685800" lvl="1" indent="-342900">
               <a:spcAft>
                 <a:spcPts val="600"/>
               </a:spcAft>
               <a:buSzPct val="100000"/>
               <a:buFont typeface="+mj-lt"/>
-              <a:buAutoNum type="arabicPeriod" startAt="1"/>
+              <a:buAutoNum type="arabicPeriod"/>
             </a:pPr>
             <a:r>
               <a:rPr lang="en-US" sz="1400" dirty="0">
@@ -5653,13 +5164,13 @@
             <a:endParaRPr lang="en-US" sz="1400" dirty="0"/>
           </a:p>
           <a:p>
-            <a:pPr lvl="1" marL="685800" indent="-342900">
+            <a:pPr marL="685800" lvl="1" indent="-342900">
               <a:spcAft>
                 <a:spcPts val="600"/>
               </a:spcAft>
               <a:buSzPct val="100000"/>
               <a:buFont typeface="+mj-lt"/>
-              <a:buAutoNum type="arabicPeriod" startAt="1"/>
+              <a:buAutoNum type="arabicPeriod"/>
             </a:pPr>
             <a:r>
               <a:rPr lang="en-US" sz="1400" dirty="0">
@@ -5672,13 +5183,13 @@
             <a:endParaRPr lang="en-US" sz="1400" dirty="0"/>
           </a:p>
           <a:p>
-            <a:pPr lvl="1" marL="685800" indent="-342900">
+            <a:pPr marL="685800" lvl="1" indent="-342900">
               <a:spcAft>
                 <a:spcPts val="600"/>
               </a:spcAft>
               <a:buSzPct val="100000"/>
               <a:buFont typeface="+mj-lt"/>
-              <a:buAutoNum type="arabicPeriod" startAt="1"/>
+              <a:buAutoNum type="arabicPeriod"/>
             </a:pPr>
             <a:r>
               <a:rPr lang="en-US" sz="1400" dirty="0">
@@ -5715,7 +5226,7 @@
           <a:bodyPr wrap="square" lIns="38100" tIns="38100" rIns="38100" bIns="38100" rtlCol="0" anchor="t"/>
           <a:lstStyle/>
           <a:p>
-            <a:pPr indent="0" marL="0">
+            <a:pPr marL="0" indent="0">
               <a:spcAft>
                 <a:spcPts val="200"/>
               </a:spcAft>
@@ -5732,7 +5243,7 @@
             <a:endParaRPr lang="en-US" sz="1100" dirty="0"/>
           </a:p>
           <a:p>
-            <a:pPr indent="0" marL="0">
+            <a:pPr marL="0" indent="0">
               <a:buNone/>
             </a:pPr>
             <a:r>
@@ -5749,14 +5260,14 @@
       </p:sp>
       <p:pic>
         <p:nvPicPr>
-          <p:cNvPr id="5" name="Image 0" descr="images/reorder-synthesis.png">    </p:cNvPr>
+          <p:cNvPr id="5" name="Image 0" descr="images/reorder-synthesis.png"/>
           <p:cNvPicPr>
             <a:picLocks noChangeAspect="1"/>
           </p:cNvPicPr>
           <p:nvPr/>
         </p:nvPicPr>
         <p:blipFill>
-          <a:blip r:embed="rId1"/>
+          <a:blip r:embed="rId3"/>
           <a:stretch>
             <a:fillRect/>
           </a:stretch>
@@ -5817,7 +5328,7 @@
           <a:bodyPr wrap="square" lIns="0" tIns="0" rIns="0" bIns="0" rtlCol="0" anchor="ctr"/>
           <a:lstStyle/>
           <a:p>
-            <a:pPr indent="0" marL="0">
+            <a:pPr marL="0" indent="0">
               <a:buNone/>
             </a:pPr>
             <a:r>
@@ -5871,13 +5382,13 @@
             <a:endParaRPr lang="en-US" sz="1300" dirty="0"/>
           </a:p>
           <a:p>
-            <a:pPr lvl="1" marL="685800" indent="-342900">
+            <a:pPr marL="685800" lvl="1" indent="-342900">
               <a:spcAft>
                 <a:spcPts val="600"/>
               </a:spcAft>
               <a:buSzPct val="100000"/>
               <a:buFont typeface="+mj-lt"/>
-              <a:buAutoNum type="arabicPeriod" startAt="1"/>
+              <a:buAutoNum type="arabicPeriod"/>
             </a:pPr>
             <a:r>
               <a:rPr lang="en-US" sz="1300" dirty="0">
@@ -5890,13 +5401,13 @@
             <a:endParaRPr lang="en-US" sz="1300" dirty="0"/>
           </a:p>
           <a:p>
-            <a:pPr lvl="1" marL="685800" indent="-342900">
+            <a:pPr marL="685800" lvl="1" indent="-342900">
               <a:spcAft>
                 <a:spcPts val="600"/>
               </a:spcAft>
               <a:buSzPct val="100000"/>
               <a:buFont typeface="+mj-lt"/>
-              <a:buAutoNum type="arabicPeriod" startAt="1"/>
+              <a:buAutoNum type="arabicPeriod"/>
             </a:pPr>
             <a:r>
               <a:rPr lang="en-US" sz="1300" dirty="0">
@@ -5909,13 +5420,13 @@
             <a:endParaRPr lang="en-US" sz="1300" dirty="0"/>
           </a:p>
           <a:p>
-            <a:pPr lvl="1" marL="685800" indent="-342900">
+            <a:pPr marL="685800" lvl="1" indent="-342900">
               <a:spcAft>
                 <a:spcPts val="600"/>
               </a:spcAft>
               <a:buSzPct val="100000"/>
               <a:buFont typeface="+mj-lt"/>
-              <a:buAutoNum type="arabicPeriod" startAt="1"/>
+              <a:buAutoNum type="arabicPeriod"/>
             </a:pPr>
             <a:r>
               <a:rPr lang="en-US" sz="1300" dirty="0">
@@ -5952,7 +5463,7 @@
           <a:bodyPr wrap="square" lIns="38100" tIns="38100" rIns="38100" bIns="38100" rtlCol="0" anchor="t"/>
           <a:lstStyle/>
           <a:p>
-            <a:pPr indent="0" marL="0">
+            <a:pPr marL="0" indent="0">
               <a:spcAft>
                 <a:spcPts val="200"/>
               </a:spcAft>
@@ -5969,7 +5480,7 @@
             <a:endParaRPr lang="en-US" sz="1100" dirty="0"/>
           </a:p>
           <a:p>
-            <a:pPr indent="0" marL="0">
+            <a:pPr marL="0" indent="0">
               <a:buNone/>
             </a:pPr>
             <a:r>
@@ -5986,14 +5497,14 @@
       </p:sp>
       <p:pic>
         <p:nvPicPr>
-          <p:cNvPr id="5" name="Image 0" descr="images/rework.png">    </p:cNvPr>
+          <p:cNvPr id="5" name="Image 0" descr="images/rework.png"/>
           <p:cNvPicPr>
             <a:picLocks noChangeAspect="1"/>
           </p:cNvPicPr>
           <p:nvPr/>
         </p:nvPicPr>
         <p:blipFill>
-          <a:blip r:embed="rId1"/>
+          <a:blip r:embed="rId3"/>
           <a:stretch>
             <a:fillRect/>
           </a:stretch>
@@ -6054,7 +5565,7 @@
           <a:bodyPr wrap="square" lIns="0" tIns="0" rIns="0" bIns="0" rtlCol="0" anchor="ctr"/>
           <a:lstStyle/>
           <a:p>
-            <a:pPr indent="0" marL="0">
+            <a:pPr marL="0" indent="0">
               <a:buNone/>
             </a:pPr>
             <a:r>
@@ -6108,13 +5619,13 @@
             <a:endParaRPr lang="en-US" sz="1400" dirty="0"/>
           </a:p>
           <a:p>
-            <a:pPr lvl="1" marL="685800" indent="-342900">
+            <a:pPr marL="685800" lvl="1" indent="-342900">
               <a:spcAft>
                 <a:spcPts val="600"/>
               </a:spcAft>
               <a:buSzPct val="100000"/>
               <a:buFont typeface="+mj-lt"/>
-              <a:buAutoNum type="arabicPeriod" startAt="1"/>
+              <a:buAutoNum type="arabicPeriod"/>
             </a:pPr>
             <a:r>
               <a:rPr lang="en-US" sz="1400" dirty="0">
@@ -6127,13 +5638,13 @@
             <a:endParaRPr lang="en-US" sz="1400" dirty="0"/>
           </a:p>
           <a:p>
-            <a:pPr lvl="1" marL="685800" indent="-342900">
+            <a:pPr marL="685800" lvl="1" indent="-342900">
               <a:spcAft>
                 <a:spcPts val="600"/>
               </a:spcAft>
               <a:buSzPct val="100000"/>
               <a:buFont typeface="+mj-lt"/>
-              <a:buAutoNum type="arabicPeriod" startAt="1"/>
+              <a:buAutoNum type="arabicPeriod"/>
             </a:pPr>
             <a:r>
               <a:rPr lang="en-US" sz="1400" dirty="0">
@@ -6146,13 +5657,13 @@
             <a:endParaRPr lang="en-US" sz="1400" dirty="0"/>
           </a:p>
           <a:p>
-            <a:pPr lvl="1" marL="685800" indent="-342900">
+            <a:pPr marL="685800" lvl="1" indent="-342900">
               <a:spcAft>
                 <a:spcPts val="600"/>
               </a:spcAft>
               <a:buSzPct val="100000"/>
               <a:buFont typeface="+mj-lt"/>
-              <a:buAutoNum type="arabicPeriod" startAt="1"/>
+              <a:buAutoNum type="arabicPeriod"/>
             </a:pPr>
             <a:r>
               <a:rPr lang="en-US" sz="1400" dirty="0">
@@ -6165,13 +5676,13 @@
             <a:endParaRPr lang="en-US" sz="1400" dirty="0"/>
           </a:p>
           <a:p>
-            <a:pPr lvl="1" marL="685800" indent="-342900">
+            <a:pPr marL="685800" lvl="1" indent="-342900">
               <a:spcAft>
                 <a:spcPts val="2000"/>
               </a:spcAft>
               <a:buSzPct val="100000"/>
               <a:buFont typeface="+mj-lt"/>
-              <a:buAutoNum type="arabicPeriod" startAt="1"/>
+              <a:buAutoNum type="arabicPeriod"/>
             </a:pPr>
             <a:r>
               <a:rPr lang="en-US" sz="1400" dirty="0">
@@ -6226,7 +5737,7 @@
           <a:bodyPr wrap="square" lIns="38100" tIns="38100" rIns="38100" bIns="38100" rtlCol="0" anchor="t"/>
           <a:lstStyle/>
           <a:p>
-            <a:pPr indent="0" marL="0">
+            <a:pPr marL="0" indent="0">
               <a:spcAft>
                 <a:spcPts val="200"/>
               </a:spcAft>
@@ -6243,7 +5754,7 @@
             <a:endParaRPr lang="en-US" sz="1100" dirty="0"/>
           </a:p>
           <a:p>
-            <a:pPr indent="0" marL="0">
+            <a:pPr marL="0" indent="0">
               <a:buNone/>
             </a:pPr>
             <a:r>
@@ -6304,7 +5815,7 @@
           <a:bodyPr wrap="square" lIns="0" tIns="0" rIns="0" bIns="0" rtlCol="0" anchor="ctr"/>
           <a:lstStyle/>
           <a:p>
-            <a:pPr indent="0" marL="0">
+            <a:pPr marL="0" indent="0">
               <a:buNone/>
             </a:pPr>
             <a:r>
@@ -6358,7 +5869,7 @@
             <a:endParaRPr lang="en-US" sz="1600" dirty="0"/>
           </a:p>
           <a:p>
-            <a:pPr lvl="1" marL="762000" indent="-381000">
+            <a:pPr marL="762000" lvl="1" indent="-381000">
               <a:spcAft>
                 <a:spcPts val="600"/>
               </a:spcAft>
@@ -6376,7 +5887,7 @@
             <a:endParaRPr lang="en-US" sz="1600" dirty="0"/>
           </a:p>
           <a:p>
-            <a:pPr lvl="1" marL="762000" indent="-381000">
+            <a:pPr marL="762000" lvl="1" indent="-381000">
               <a:spcAft>
                 <a:spcPts val="600"/>
               </a:spcAft>
@@ -6394,7 +5905,7 @@
             <a:endParaRPr lang="en-US" sz="1600" dirty="0"/>
           </a:p>
           <a:p>
-            <a:pPr lvl="1" marL="762000" indent="-381000">
+            <a:pPr marL="762000" lvl="1" indent="-381000">
               <a:spcAft>
                 <a:spcPts val="2000"/>
               </a:spcAft>
@@ -6430,7 +5941,7 @@
             <a:endParaRPr lang="en-US" sz="1600" dirty="0"/>
           </a:p>
           <a:p>
-            <a:pPr lvl="1" marL="762000" indent="-381000">
+            <a:pPr marL="762000" lvl="1" indent="-381000">
               <a:spcAft>
                 <a:spcPts val="600"/>
               </a:spcAft>
@@ -6445,12 +5956,6 @@
               </a:rPr>
               <a:t>45-session labelled injection set </a:t>
             </a:r>
-            <a:pPr indent="0" marL="0">
-              <a:spcAft>
-                <a:spcPts val="600"/>
-              </a:spcAft>
-              <a:buNone/>
-            </a:pPr>
             <a:r>
               <a:rPr lang="en-US" sz="1600" dirty="0">
                 <a:solidFill>
@@ -6462,7 +5967,7 @@
             <a:endParaRPr lang="en-US" sz="1600" dirty="0"/>
           </a:p>
           <a:p>
-            <a:pPr lvl="1" marL="762000" indent="-381000">
+            <a:pPr marL="762000" lvl="1" indent="-381000">
               <a:spcAft>
                 <a:spcPts val="600"/>
               </a:spcAft>
@@ -6477,12 +5982,6 @@
               </a:rPr>
               <a:t>30-session randomised user study </a:t>
             </a:r>
-            <a:pPr indent="0" marL="0">
-              <a:spcAft>
-                <a:spcPts val="600"/>
-              </a:spcAft>
-              <a:buNone/>
-            </a:pPr>
             <a:r>
               <a:rPr lang="en-US" sz="1600" dirty="0">
                 <a:solidFill>
@@ -6516,24 +6015,21 @@
           <a:bodyPr wrap="square" lIns="0" tIns="0" rIns="0" bIns="0" rtlCol="0" anchor="ctr"/>
           <a:lstStyle/>
           <a:p>
-            <a:pPr algn="ctr" indent="0" marL="0">
+            <a:pPr marL="0" indent="0" algn="ctr">
               <a:buNone/>
             </a:pPr>
             <a:r>
               <a:rPr lang="en-US" sz="1400" b="1" i="1" dirty="0">
                 <a:solidFill>
-                  <a:srgbClr val="1F3F6F"/>
+                  <a:srgbClr val="0000CD"/>
                 </a:solidFill>
               </a:rPr>
               <a:t>Reproducible: </a:t>
             </a:r>
-            <a:pPr algn="ctr" indent="0" marL="0">
-              <a:buNone/>
-            </a:pPr>
             <a:r>
               <a:rPr lang="en-US" sz="1400" i="1" dirty="0">
                 <a:solidFill>
-                  <a:srgbClr val="1F3F6F"/>
+                  <a:srgbClr val="0000CD"/>
                 </a:solidFill>
               </a:rPr>
               <a:t>every table and figure is regenerated from the Jupyter notebook in the repo.</a:t>
@@ -6588,7 +6084,7 @@
           <a:bodyPr wrap="square" lIns="0" tIns="0" rIns="0" bIns="0" rtlCol="0" anchor="ctr"/>
           <a:lstStyle/>
           <a:p>
-            <a:pPr algn="ctr" indent="0" marL="0">
+            <a:pPr marL="0" indent="0" algn="ctr">
               <a:buNone/>
             </a:pPr>
             <a:r>
@@ -6649,7 +6145,7 @@
           <a:bodyPr wrap="square" lIns="0" tIns="0" rIns="0" bIns="0" rtlCol="0" anchor="ctr"/>
           <a:lstStyle/>
           <a:p>
-            <a:pPr indent="0" marL="0">
+            <a:pPr marL="0" indent="0">
               <a:buNone/>
             </a:pPr>
             <a:r>
@@ -6700,12 +6196,6 @@
               </a:rPr>
               <a:t>45 hand-labelled injection sessions </a:t>
             </a:r>
-            <a:pPr indent="0" marL="0">
-              <a:spcAft>
-                <a:spcPts val="1000"/>
-              </a:spcAft>
-              <a:buNone/>
-            </a:pPr>
             <a:r>
               <a:rPr lang="en-US" sz="1500" dirty="0">
                 <a:solidFill>
@@ -6732,12 +6222,6 @@
               </a:rPr>
               <a:t>3 raters (author + 2 external MEng cohort members) </a:t>
             </a:r>
-            <a:pPr indent="0" marL="0">
-              <a:spcAft>
-                <a:spcPts val="1000"/>
-              </a:spcAft>
-              <a:buNone/>
-            </a:pPr>
             <a:r>
               <a:rPr lang="en-US" sz="1500" dirty="0">
                 <a:solidFill>
@@ -6764,12 +6248,6 @@
               </a:rPr>
               <a:t>Disagreements predominantly surrounding hygiene + rework labels </a:t>
             </a:r>
-            <a:pPr indent="0" marL="0">
-              <a:spcAft>
-                <a:spcPts val="1000"/>
-              </a:spcAft>
-              <a:buNone/>
-            </a:pPr>
             <a:r>
               <a:rPr lang="en-US" sz="1500" dirty="0">
                 <a:solidFill>
@@ -6796,12 +6274,6 @@
               </a:rPr>
               <a:t>Track all divergence points detected </a:t>
             </a:r>
-            <a:pPr indent="0" marL="0">
-              <a:spcAft>
-                <a:spcPts val="1000"/>
-              </a:spcAft>
-              <a:buNone/>
-            </a:pPr>
             <a:r>
               <a:rPr lang="en-US" sz="1500" dirty="0">
                 <a:solidFill>
@@ -6828,12 +6300,6 @@
               </a:rPr>
               <a:t>Measure precision + recall </a:t>
             </a:r>
-            <a:pPr indent="0" marL="0">
-              <a:spcAft>
-                <a:spcPts val="1000"/>
-              </a:spcAft>
-              <a:buNone/>
-            </a:pPr>
             <a:r>
               <a:rPr lang="en-US" sz="1500" dirty="0">
                 <a:solidFill>
@@ -6892,7 +6358,7 @@
           <a:bodyPr wrap="square" lIns="0" tIns="0" rIns="0" bIns="0" rtlCol="0" anchor="ctr"/>
           <a:lstStyle/>
           <a:p>
-            <a:pPr indent="0" marL="0">
+            <a:pPr marL="0" indent="0">
               <a:buNone/>
             </a:pPr>
             <a:r>
@@ -6928,7 +6394,7 @@
           <a:bodyPr wrap="square" lIns="0" tIns="0" rIns="0" bIns="0" rtlCol="0" anchor="ctr"/>
           <a:lstStyle/>
           <a:p>
-            <a:pPr algn="ctr" indent="0" marL="0">
+            <a:pPr marL="0" indent="0" algn="ctr">
               <a:buNone/>
             </a:pPr>
             <a:r>
@@ -6964,7 +6430,7 @@
           <a:bodyPr wrap="square" lIns="0" tIns="0" rIns="0" bIns="0" rtlCol="0" anchor="b"/>
           <a:lstStyle/>
           <a:p>
-            <a:pPr algn="ctr" indent="0" marL="0">
+            <a:pPr marL="0" indent="0" algn="ctr">
               <a:buNone/>
             </a:pPr>
             <a:r>
@@ -7000,7 +6466,7 @@
           <a:bodyPr wrap="square" lIns="0" tIns="0" rIns="0" bIns="0" rtlCol="0" anchor="ctr"/>
           <a:lstStyle/>
           <a:p>
-            <a:pPr algn="ctr" indent="0" marL="0">
+            <a:pPr marL="0" indent="0" algn="ctr">
               <a:buNone/>
             </a:pPr>
             <a:r>
@@ -7036,7 +6502,7 @@
           <a:bodyPr wrap="square" lIns="0" tIns="0" rIns="0" bIns="0" rtlCol="0" anchor="ctr"/>
           <a:lstStyle/>
           <a:p>
-            <a:pPr algn="ctr" indent="0" marL="0">
+            <a:pPr marL="0" indent="0" algn="ctr">
               <a:buNone/>
             </a:pPr>
             <a:r>
@@ -7072,7 +6538,7 @@
           <a:bodyPr wrap="square" lIns="508" tIns="508" rIns="508" bIns="508" rtlCol="0" anchor="ctr"/>
           <a:lstStyle/>
           <a:p>
-            <a:pPr algn="r" indent="0" marL="0">
+            <a:pPr marL="0" indent="0" algn="r">
               <a:buNone/>
             </a:pPr>
             <a:r>
@@ -7108,7 +6574,7 @@
           <a:bodyPr wrap="square" lIns="508" tIns="508" rIns="508" bIns="508" rtlCol="0" anchor="ctr"/>
           <a:lstStyle/>
           <a:p>
-            <a:pPr algn="r" indent="0" marL="0">
+            <a:pPr marL="0" indent="0" algn="r">
               <a:buNone/>
             </a:pPr>
             <a:r>
@@ -7147,6 +6613,13 @@
             <a:prstDash val="solid"/>
           </a:ln>
         </p:spPr>
+        <p:txBody>
+          <a:bodyPr/>
+          <a:lstStyle/>
+          <a:p>
+            <a:endParaRPr lang="en-US"/>
+          </a:p>
+        </p:txBody>
       </p:sp>
       <p:sp>
         <p:nvSpPr>
@@ -7169,7 +6642,7 @@
           <a:bodyPr wrap="square" lIns="0" tIns="0" rIns="0" bIns="0" rtlCol="0" anchor="ctr"/>
           <a:lstStyle/>
           <a:p>
-            <a:pPr algn="ctr" indent="0" marL="0">
+            <a:pPr marL="0" indent="0" algn="ctr">
               <a:buNone/>
             </a:pPr>
             <a:r>
@@ -7183,7 +6656,7 @@
             <a:endParaRPr lang="en-US" sz="2000" dirty="0"/>
           </a:p>
           <a:p>
-            <a:pPr algn="ctr" indent="0" marL="0">
+            <a:pPr marL="0" indent="0" algn="ctr">
               <a:buNone/>
             </a:pPr>
             <a:r>
@@ -7222,6 +6695,13 @@
             <a:prstDash val="solid"/>
           </a:ln>
         </p:spPr>
+        <p:txBody>
+          <a:bodyPr/>
+          <a:lstStyle/>
+          <a:p>
+            <a:endParaRPr lang="en-US"/>
+          </a:p>
+        </p:txBody>
       </p:sp>
       <p:sp>
         <p:nvSpPr>
@@ -7244,7 +6724,7 @@
           <a:bodyPr wrap="square" lIns="0" tIns="0" rIns="0" bIns="0" rtlCol="0" anchor="ctr"/>
           <a:lstStyle/>
           <a:p>
-            <a:pPr algn="ctr" indent="0" marL="0">
+            <a:pPr marL="0" indent="0" algn="ctr">
               <a:buNone/>
             </a:pPr>
             <a:r>
@@ -7258,7 +6738,7 @@
             <a:endParaRPr lang="en-US" sz="2000" dirty="0"/>
           </a:p>
           <a:p>
-            <a:pPr algn="ctr" indent="0" marL="0">
+            <a:pPr marL="0" indent="0" algn="ctr">
               <a:buNone/>
             </a:pPr>
             <a:r>
@@ -7297,6 +6777,13 @@
             <a:prstDash val="solid"/>
           </a:ln>
         </p:spPr>
+        <p:txBody>
+          <a:bodyPr/>
+          <a:lstStyle/>
+          <a:p>
+            <a:endParaRPr lang="en-US"/>
+          </a:p>
+        </p:txBody>
       </p:sp>
       <p:sp>
         <p:nvSpPr>
@@ -7319,7 +6806,7 @@
           <a:bodyPr wrap="square" lIns="0" tIns="0" rIns="0" bIns="0" rtlCol="0" anchor="ctr"/>
           <a:lstStyle/>
           <a:p>
-            <a:pPr algn="ctr" indent="0" marL="0">
+            <a:pPr marL="0" indent="0" algn="ctr">
               <a:buNone/>
             </a:pPr>
             <a:r>
@@ -7333,7 +6820,7 @@
             <a:endParaRPr lang="en-US" sz="2000" dirty="0"/>
           </a:p>
           <a:p>
-            <a:pPr algn="ctr" indent="0" marL="0">
+            <a:pPr marL="0" indent="0" algn="ctr">
               <a:buNone/>
             </a:pPr>
             <a:r>
@@ -7372,6 +6859,13 @@
             <a:prstDash val="solid"/>
           </a:ln>
         </p:spPr>
+        <p:txBody>
+          <a:bodyPr/>
+          <a:lstStyle/>
+          <a:p>
+            <a:endParaRPr lang="en-US"/>
+          </a:p>
+        </p:txBody>
       </p:sp>
       <p:sp>
         <p:nvSpPr>
@@ -7394,7 +6888,7 @@
           <a:bodyPr wrap="square" lIns="0" tIns="0" rIns="0" bIns="0" rtlCol="0" anchor="ctr"/>
           <a:lstStyle/>
           <a:p>
-            <a:pPr algn="ctr" indent="0" marL="0">
+            <a:pPr marL="0" indent="0" algn="ctr">
               <a:buNone/>
             </a:pPr>
             <a:r>
@@ -7408,7 +6902,7 @@
             <a:endParaRPr lang="en-US" sz="2000" dirty="0"/>
           </a:p>
           <a:p>
-            <a:pPr algn="ctr" indent="0" marL="0">
+            <a:pPr marL="0" indent="0" algn="ctr">
               <a:buNone/>
             </a:pPr>
             <a:r>
@@ -7444,7 +6938,7 @@
           <a:bodyPr wrap="square" lIns="0" tIns="0" rIns="0" bIns="0" rtlCol="0" anchor="ctr"/>
           <a:lstStyle/>
           <a:p>
-            <a:pPr algn="ctr" indent="0" marL="0">
+            <a:pPr marL="0" indent="0" algn="ctr">
               <a:buNone/>
             </a:pPr>
             <a:r>
@@ -7455,9 +6949,6 @@
               </a:rPr>
               <a:t>Precision </a:t>
             </a:r>
-            <a:pPr algn="ctr" indent="0" marL="0">
-              <a:buNone/>
-            </a:pPr>
             <a:r>
               <a:rPr lang="en-US" sz="1100" b="1" i="1" dirty="0">
                 <a:solidFill>
@@ -7466,9 +6957,6 @@
               </a:rPr>
               <a:t>1.00</a:t>
             </a:r>
-            <a:pPr algn="ctr" indent="0" marL="0">
-              <a:buNone/>
-            </a:pPr>
             <a:r>
               <a:rPr lang="en-US" sz="1100" i="1" dirty="0">
                 <a:solidFill>
@@ -7477,9 +6965,6 @@
               </a:rPr>
               <a:t>   ·   Recall </a:t>
             </a:r>
-            <a:pPr algn="ctr" indent="0" marL="0">
-              <a:buNone/>
-            </a:pPr>
             <a:r>
               <a:rPr lang="en-US" sz="1100" b="1" i="1" dirty="0">
                 <a:solidFill>
@@ -7513,7 +6998,7 @@
           <a:bodyPr wrap="square" lIns="0" tIns="0" rIns="0" bIns="0" rtlCol="0" anchor="b"/>
           <a:lstStyle/>
           <a:p>
-            <a:pPr algn="ctr" indent="0" marL="0">
+            <a:pPr marL="0" indent="0" algn="ctr">
               <a:buNone/>
             </a:pPr>
             <a:r>
@@ -7549,7 +7034,7 @@
           <a:bodyPr wrap="square" lIns="0" tIns="0" rIns="0" bIns="0" rtlCol="0" anchor="ctr"/>
           <a:lstStyle/>
           <a:p>
-            <a:pPr algn="ctr" indent="0" marL="0">
+            <a:pPr marL="0" indent="0" algn="ctr">
               <a:buNone/>
             </a:pPr>
             <a:r>
@@ -7585,7 +7070,7 @@
           <a:bodyPr wrap="square" lIns="0" tIns="0" rIns="0" bIns="0" rtlCol="0" anchor="ctr"/>
           <a:lstStyle/>
           <a:p>
-            <a:pPr algn="ctr" indent="0" marL="0">
+            <a:pPr marL="0" indent="0" algn="ctr">
               <a:buNone/>
             </a:pPr>
             <a:r>
@@ -7621,7 +7106,7 @@
           <a:bodyPr wrap="square" lIns="508" tIns="508" rIns="508" bIns="508" rtlCol="0" anchor="ctr"/>
           <a:lstStyle/>
           <a:p>
-            <a:pPr algn="r" indent="0" marL="0">
+            <a:pPr marL="0" indent="0" algn="r">
               <a:buNone/>
             </a:pPr>
             <a:r>
@@ -7657,7 +7142,7 @@
           <a:bodyPr wrap="square" lIns="508" tIns="508" rIns="508" bIns="508" rtlCol="0" anchor="ctr"/>
           <a:lstStyle/>
           <a:p>
-            <a:pPr algn="r" indent="0" marL="0">
+            <a:pPr marL="0" indent="0" algn="r">
               <a:buNone/>
             </a:pPr>
             <a:r>
@@ -7696,6 +7181,13 @@
             <a:prstDash val="solid"/>
           </a:ln>
         </p:spPr>
+        <p:txBody>
+          <a:bodyPr/>
+          <a:lstStyle/>
+          <a:p>
+            <a:endParaRPr lang="en-US"/>
+          </a:p>
+        </p:txBody>
       </p:sp>
       <p:sp>
         <p:nvSpPr>
@@ -7718,7 +7210,7 @@
           <a:bodyPr wrap="square" lIns="0" tIns="0" rIns="0" bIns="0" rtlCol="0" anchor="ctr"/>
           <a:lstStyle/>
           <a:p>
-            <a:pPr algn="ctr" indent="0" marL="0">
+            <a:pPr marL="0" indent="0" algn="ctr">
               <a:buNone/>
             </a:pPr>
             <a:r>
@@ -7732,7 +7224,7 @@
             <a:endParaRPr lang="en-US" sz="2000" dirty="0"/>
           </a:p>
           <a:p>
-            <a:pPr algn="ctr" indent="0" marL="0">
+            <a:pPr marL="0" indent="0" algn="ctr">
               <a:buNone/>
             </a:pPr>
             <a:r>
@@ -7771,6 +7263,13 @@
             <a:prstDash val="solid"/>
           </a:ln>
         </p:spPr>
+        <p:txBody>
+          <a:bodyPr/>
+          <a:lstStyle/>
+          <a:p>
+            <a:endParaRPr lang="en-US"/>
+          </a:p>
+        </p:txBody>
       </p:sp>
       <p:sp>
         <p:nvSpPr>
@@ -7793,7 +7292,7 @@
           <a:bodyPr wrap="square" lIns="0" tIns="0" rIns="0" bIns="0" rtlCol="0" anchor="ctr"/>
           <a:lstStyle/>
           <a:p>
-            <a:pPr algn="ctr" indent="0" marL="0">
+            <a:pPr marL="0" indent="0" algn="ctr">
               <a:buNone/>
             </a:pPr>
             <a:r>
@@ -7807,7 +7306,7 @@
             <a:endParaRPr lang="en-US" sz="2000" dirty="0"/>
           </a:p>
           <a:p>
-            <a:pPr algn="ctr" indent="0" marL="0">
+            <a:pPr marL="0" indent="0" algn="ctr">
               <a:buNone/>
             </a:pPr>
             <a:r>
@@ -7846,6 +7345,13 @@
             <a:prstDash val="solid"/>
           </a:ln>
         </p:spPr>
+        <p:txBody>
+          <a:bodyPr/>
+          <a:lstStyle/>
+          <a:p>
+            <a:endParaRPr lang="en-US"/>
+          </a:p>
+        </p:txBody>
       </p:sp>
       <p:sp>
         <p:nvSpPr>
@@ -7868,7 +7374,7 @@
           <a:bodyPr wrap="square" lIns="0" tIns="0" rIns="0" bIns="0" rtlCol="0" anchor="ctr"/>
           <a:lstStyle/>
           <a:p>
-            <a:pPr algn="ctr" indent="0" marL="0">
+            <a:pPr marL="0" indent="0" algn="ctr">
               <a:buNone/>
             </a:pPr>
             <a:r>
@@ -7882,7 +7388,7 @@
             <a:endParaRPr lang="en-US" sz="2000" dirty="0"/>
           </a:p>
           <a:p>
-            <a:pPr algn="ctr" indent="0" marL="0">
+            <a:pPr marL="0" indent="0" algn="ctr">
               <a:buNone/>
             </a:pPr>
             <a:r>
@@ -7921,6 +7427,13 @@
             <a:prstDash val="solid"/>
           </a:ln>
         </p:spPr>
+        <p:txBody>
+          <a:bodyPr/>
+          <a:lstStyle/>
+          <a:p>
+            <a:endParaRPr lang="en-US"/>
+          </a:p>
+        </p:txBody>
       </p:sp>
       <p:sp>
         <p:nvSpPr>
@@ -7943,7 +7456,7 @@
           <a:bodyPr wrap="square" lIns="0" tIns="0" rIns="0" bIns="0" rtlCol="0" anchor="ctr"/>
           <a:lstStyle/>
           <a:p>
-            <a:pPr algn="ctr" indent="0" marL="0">
+            <a:pPr marL="0" indent="0" algn="ctr">
               <a:buNone/>
             </a:pPr>
             <a:r>
@@ -7957,7 +7470,7 @@
             <a:endParaRPr lang="en-US" sz="2000" dirty="0"/>
           </a:p>
           <a:p>
-            <a:pPr algn="ctr" indent="0" marL="0">
+            <a:pPr marL="0" indent="0" algn="ctr">
               <a:buNone/>
             </a:pPr>
             <a:r>
@@ -7993,7 +7506,7 @@
           <a:bodyPr wrap="square" lIns="0" tIns="0" rIns="0" bIns="0" rtlCol="0" anchor="ctr"/>
           <a:lstStyle/>
           <a:p>
-            <a:pPr algn="ctr" indent="0" marL="0">
+            <a:pPr marL="0" indent="0" algn="ctr">
               <a:buNone/>
             </a:pPr>
             <a:r>
@@ -8004,9 +7517,6 @@
               </a:rPr>
               <a:t>Precision </a:t>
             </a:r>
-            <a:pPr algn="ctr" indent="0" marL="0">
-              <a:buNone/>
-            </a:pPr>
             <a:r>
               <a:rPr lang="en-US" sz="1100" b="1" i="1" dirty="0">
                 <a:solidFill>
@@ -8015,9 +7525,6 @@
               </a:rPr>
               <a:t>1.00</a:t>
             </a:r>
-            <a:pPr algn="ctr" indent="0" marL="0">
-              <a:buNone/>
-            </a:pPr>
             <a:r>
               <a:rPr lang="en-US" sz="1100" i="1" dirty="0">
                 <a:solidFill>
@@ -8026,9 +7533,6 @@
               </a:rPr>
               <a:t>   ·   Recall </a:t>
             </a:r>
-            <a:pPr algn="ctr" indent="0" marL="0">
-              <a:buNone/>
-            </a:pPr>
             <a:r>
               <a:rPr lang="en-US" sz="1100" b="1" i="1" dirty="0">
                 <a:solidFill>
@@ -8062,7 +7566,7 @@
           <a:bodyPr wrap="square" lIns="0" tIns="0" rIns="0" bIns="0" rtlCol="0" anchor="b"/>
           <a:lstStyle/>
           <a:p>
-            <a:pPr algn="ctr" indent="0" marL="0">
+            <a:pPr marL="0" indent="0" algn="ctr">
               <a:buNone/>
             </a:pPr>
             <a:r>
@@ -8098,7 +7602,7 @@
           <a:bodyPr wrap="square" lIns="0" tIns="0" rIns="0" bIns="0" rtlCol="0" anchor="ctr"/>
           <a:lstStyle/>
           <a:p>
-            <a:pPr algn="ctr" indent="0" marL="0">
+            <a:pPr marL="0" indent="0" algn="ctr">
               <a:buNone/>
             </a:pPr>
             <a:r>
@@ -8134,7 +7638,7 @@
           <a:bodyPr wrap="square" lIns="0" tIns="0" rIns="0" bIns="0" rtlCol="0" anchor="ctr"/>
           <a:lstStyle/>
           <a:p>
-            <a:pPr algn="ctr" indent="0" marL="0">
+            <a:pPr marL="0" indent="0" algn="ctr">
               <a:buNone/>
             </a:pPr>
             <a:r>
@@ -8170,7 +7674,7 @@
           <a:bodyPr wrap="square" lIns="508" tIns="508" rIns="508" bIns="508" rtlCol="0" anchor="ctr"/>
           <a:lstStyle/>
           <a:p>
-            <a:pPr algn="r" indent="0" marL="0">
+            <a:pPr marL="0" indent="0" algn="r">
               <a:buNone/>
             </a:pPr>
             <a:r>
@@ -8206,7 +7710,7 @@
           <a:bodyPr wrap="square" lIns="508" tIns="508" rIns="508" bIns="508" rtlCol="0" anchor="ctr"/>
           <a:lstStyle/>
           <a:p>
-            <a:pPr algn="r" indent="0" marL="0">
+            <a:pPr marL="0" indent="0" algn="r">
               <a:buNone/>
             </a:pPr>
             <a:r>
@@ -8245,6 +7749,13 @@
             <a:prstDash val="solid"/>
           </a:ln>
         </p:spPr>
+        <p:txBody>
+          <a:bodyPr/>
+          <a:lstStyle/>
+          <a:p>
+            <a:endParaRPr lang="en-US"/>
+          </a:p>
+        </p:txBody>
       </p:sp>
       <p:sp>
         <p:nvSpPr>
@@ -8267,7 +7778,7 @@
           <a:bodyPr wrap="square" lIns="0" tIns="0" rIns="0" bIns="0" rtlCol="0" anchor="ctr"/>
           <a:lstStyle/>
           <a:p>
-            <a:pPr algn="ctr" indent="0" marL="0">
+            <a:pPr marL="0" indent="0" algn="ctr">
               <a:buNone/>
             </a:pPr>
             <a:r>
@@ -8281,7 +7792,7 @@
             <a:endParaRPr lang="en-US" sz="2000" dirty="0"/>
           </a:p>
           <a:p>
-            <a:pPr algn="ctr" indent="0" marL="0">
+            <a:pPr marL="0" indent="0" algn="ctr">
               <a:buNone/>
             </a:pPr>
             <a:r>
@@ -8320,6 +7831,13 @@
             <a:prstDash val="solid"/>
           </a:ln>
         </p:spPr>
+        <p:txBody>
+          <a:bodyPr/>
+          <a:lstStyle/>
+          <a:p>
+            <a:endParaRPr lang="en-US"/>
+          </a:p>
+        </p:txBody>
       </p:sp>
       <p:sp>
         <p:nvSpPr>
@@ -8342,7 +7860,7 @@
           <a:bodyPr wrap="square" lIns="0" tIns="0" rIns="0" bIns="0" rtlCol="0" anchor="ctr"/>
           <a:lstStyle/>
           <a:p>
-            <a:pPr algn="ctr" indent="0" marL="0">
+            <a:pPr marL="0" indent="0" algn="ctr">
               <a:buNone/>
             </a:pPr>
             <a:r>
@@ -8356,7 +7874,7 @@
             <a:endParaRPr lang="en-US" sz="2000" dirty="0"/>
           </a:p>
           <a:p>
-            <a:pPr algn="ctr" indent="0" marL="0">
+            <a:pPr marL="0" indent="0" algn="ctr">
               <a:buNone/>
             </a:pPr>
             <a:r>
@@ -8395,6 +7913,13 @@
             <a:prstDash val="solid"/>
           </a:ln>
         </p:spPr>
+        <p:txBody>
+          <a:bodyPr/>
+          <a:lstStyle/>
+          <a:p>
+            <a:endParaRPr lang="en-US"/>
+          </a:p>
+        </p:txBody>
       </p:sp>
       <p:sp>
         <p:nvSpPr>
@@ -8417,7 +7942,7 @@
           <a:bodyPr wrap="square" lIns="0" tIns="0" rIns="0" bIns="0" rtlCol="0" anchor="ctr"/>
           <a:lstStyle/>
           <a:p>
-            <a:pPr algn="ctr" indent="0" marL="0">
+            <a:pPr marL="0" indent="0" algn="ctr">
               <a:buNone/>
             </a:pPr>
             <a:r>
@@ -8431,7 +7956,7 @@
             <a:endParaRPr lang="en-US" sz="2000" dirty="0"/>
           </a:p>
           <a:p>
-            <a:pPr algn="ctr" indent="0" marL="0">
+            <a:pPr marL="0" indent="0" algn="ctr">
               <a:buNone/>
             </a:pPr>
             <a:r>
@@ -8470,6 +7995,13 @@
             <a:prstDash val="solid"/>
           </a:ln>
         </p:spPr>
+        <p:txBody>
+          <a:bodyPr/>
+          <a:lstStyle/>
+          <a:p>
+            <a:endParaRPr lang="en-US"/>
+          </a:p>
+        </p:txBody>
       </p:sp>
       <p:sp>
         <p:nvSpPr>
@@ -8492,7 +8024,7 @@
           <a:bodyPr wrap="square" lIns="0" tIns="0" rIns="0" bIns="0" rtlCol="0" anchor="ctr"/>
           <a:lstStyle/>
           <a:p>
-            <a:pPr algn="ctr" indent="0" marL="0">
+            <a:pPr marL="0" indent="0" algn="ctr">
               <a:buNone/>
             </a:pPr>
             <a:r>
@@ -8506,7 +8038,7 @@
             <a:endParaRPr lang="en-US" sz="2000" dirty="0"/>
           </a:p>
           <a:p>
-            <a:pPr algn="ctr" indent="0" marL="0">
+            <a:pPr marL="0" indent="0" algn="ctr">
               <a:buNone/>
             </a:pPr>
             <a:r>
@@ -8542,7 +8074,7 @@
           <a:bodyPr wrap="square" lIns="0" tIns="0" rIns="0" bIns="0" rtlCol="0" anchor="ctr"/>
           <a:lstStyle/>
           <a:p>
-            <a:pPr algn="ctr" indent="0" marL="0">
+            <a:pPr marL="0" indent="0" algn="ctr">
               <a:buNone/>
             </a:pPr>
             <a:r>
@@ -8553,9 +8085,6 @@
               </a:rPr>
               <a:t>Precision </a:t>
             </a:r>
-            <a:pPr algn="ctr" indent="0" marL="0">
-              <a:buNone/>
-            </a:pPr>
             <a:r>
               <a:rPr lang="en-US" sz="1100" b="1" i="1" dirty="0">
                 <a:solidFill>
@@ -8564,9 +8093,6 @@
               </a:rPr>
               <a:t>1.00</a:t>
             </a:r>
-            <a:pPr algn="ctr" indent="0" marL="0">
-              <a:buNone/>
-            </a:pPr>
             <a:r>
               <a:rPr lang="en-US" sz="1100" i="1" dirty="0">
                 <a:solidFill>
@@ -8575,9 +8101,6 @@
               </a:rPr>
               <a:t>   ·   Recall </a:t>
             </a:r>
-            <a:pPr algn="ctr" indent="0" marL="0">
-              <a:buNone/>
-            </a:pPr>
             <a:r>
               <a:rPr lang="en-US" sz="1100" b="1" i="1" dirty="0">
                 <a:solidFill>
@@ -8611,7 +8134,7 @@
           <a:bodyPr wrap="square" lIns="0" tIns="0" rIns="0" bIns="0" rtlCol="0" anchor="b"/>
           <a:lstStyle/>
           <a:p>
-            <a:pPr algn="ctr" indent="0" marL="0">
+            <a:pPr marL="0" indent="0" algn="ctr">
               <a:buNone/>
             </a:pPr>
             <a:r>
@@ -8647,7 +8170,7 @@
           <a:bodyPr wrap="square" lIns="0" tIns="0" rIns="0" bIns="0" rtlCol="0" anchor="ctr"/>
           <a:lstStyle/>
           <a:p>
-            <a:pPr algn="ctr" indent="0" marL="0">
+            <a:pPr marL="0" indent="0" algn="ctr">
               <a:buNone/>
             </a:pPr>
             <a:r>
@@ -8683,7 +8206,7 @@
           <a:bodyPr wrap="square" lIns="0" tIns="0" rIns="0" bIns="0" rtlCol="0" anchor="ctr"/>
           <a:lstStyle/>
           <a:p>
-            <a:pPr algn="ctr" indent="0" marL="0">
+            <a:pPr marL="0" indent="0" algn="ctr">
               <a:buNone/>
             </a:pPr>
             <a:r>
@@ -8719,7 +8242,7 @@
           <a:bodyPr wrap="square" lIns="508" tIns="508" rIns="508" bIns="508" rtlCol="0" anchor="ctr"/>
           <a:lstStyle/>
           <a:p>
-            <a:pPr algn="r" indent="0" marL="0">
+            <a:pPr marL="0" indent="0" algn="r">
               <a:buNone/>
             </a:pPr>
             <a:r>
@@ -8755,7 +8278,7 @@
           <a:bodyPr wrap="square" lIns="508" tIns="508" rIns="508" bIns="508" rtlCol="0" anchor="ctr"/>
           <a:lstStyle/>
           <a:p>
-            <a:pPr algn="r" indent="0" marL="0">
+            <a:pPr marL="0" indent="0" algn="r">
               <a:buNone/>
             </a:pPr>
             <a:r>
@@ -8794,6 +8317,13 @@
             <a:prstDash val="solid"/>
           </a:ln>
         </p:spPr>
+        <p:txBody>
+          <a:bodyPr/>
+          <a:lstStyle/>
+          <a:p>
+            <a:endParaRPr lang="en-US"/>
+          </a:p>
+        </p:txBody>
       </p:sp>
       <p:sp>
         <p:nvSpPr>
@@ -8816,7 +8346,7 @@
           <a:bodyPr wrap="square" lIns="0" tIns="0" rIns="0" bIns="0" rtlCol="0" anchor="ctr"/>
           <a:lstStyle/>
           <a:p>
-            <a:pPr algn="ctr" indent="0" marL="0">
+            <a:pPr marL="0" indent="0" algn="ctr">
               <a:buNone/>
             </a:pPr>
             <a:r>
@@ -8830,7 +8360,7 @@
             <a:endParaRPr lang="en-US" sz="2000" dirty="0"/>
           </a:p>
           <a:p>
-            <a:pPr algn="ctr" indent="0" marL="0">
+            <a:pPr marL="0" indent="0" algn="ctr">
               <a:buNone/>
             </a:pPr>
             <a:r>
@@ -8869,6 +8399,13 @@
             <a:prstDash val="solid"/>
           </a:ln>
         </p:spPr>
+        <p:txBody>
+          <a:bodyPr/>
+          <a:lstStyle/>
+          <a:p>
+            <a:endParaRPr lang="en-US"/>
+          </a:p>
+        </p:txBody>
       </p:sp>
       <p:sp>
         <p:nvSpPr>
@@ -8891,7 +8428,7 @@
           <a:bodyPr wrap="square" lIns="0" tIns="0" rIns="0" bIns="0" rtlCol="0" anchor="ctr"/>
           <a:lstStyle/>
           <a:p>
-            <a:pPr algn="ctr" indent="0" marL="0">
+            <a:pPr marL="0" indent="0" algn="ctr">
               <a:buNone/>
             </a:pPr>
             <a:r>
@@ -8905,7 +8442,7 @@
             <a:endParaRPr lang="en-US" sz="2000" dirty="0"/>
           </a:p>
           <a:p>
-            <a:pPr algn="ctr" indent="0" marL="0">
+            <a:pPr marL="0" indent="0" algn="ctr">
               <a:buNone/>
             </a:pPr>
             <a:r>
@@ -8944,6 +8481,13 @@
             <a:prstDash val="solid"/>
           </a:ln>
         </p:spPr>
+        <p:txBody>
+          <a:bodyPr/>
+          <a:lstStyle/>
+          <a:p>
+            <a:endParaRPr lang="en-US"/>
+          </a:p>
+        </p:txBody>
       </p:sp>
       <p:sp>
         <p:nvSpPr>
@@ -8966,7 +8510,7 @@
           <a:bodyPr wrap="square" lIns="0" tIns="0" rIns="0" bIns="0" rtlCol="0" anchor="ctr"/>
           <a:lstStyle/>
           <a:p>
-            <a:pPr algn="ctr" indent="0" marL="0">
+            <a:pPr marL="0" indent="0" algn="ctr">
               <a:buNone/>
             </a:pPr>
             <a:r>
@@ -8980,7 +8524,7 @@
             <a:endParaRPr lang="en-US" sz="2000" dirty="0"/>
           </a:p>
           <a:p>
-            <a:pPr algn="ctr" indent="0" marL="0">
+            <a:pPr marL="0" indent="0" algn="ctr">
               <a:buNone/>
             </a:pPr>
             <a:r>
@@ -9019,6 +8563,13 @@
             <a:prstDash val="solid"/>
           </a:ln>
         </p:spPr>
+        <p:txBody>
+          <a:bodyPr/>
+          <a:lstStyle/>
+          <a:p>
+            <a:endParaRPr lang="en-US"/>
+          </a:p>
+        </p:txBody>
       </p:sp>
       <p:sp>
         <p:nvSpPr>
@@ -9041,7 +8592,7 @@
           <a:bodyPr wrap="square" lIns="0" tIns="0" rIns="0" bIns="0" rtlCol="0" anchor="ctr"/>
           <a:lstStyle/>
           <a:p>
-            <a:pPr algn="ctr" indent="0" marL="0">
+            <a:pPr marL="0" indent="0" algn="ctr">
               <a:buNone/>
             </a:pPr>
             <a:r>
@@ -9055,7 +8606,7 @@
             <a:endParaRPr lang="en-US" sz="2000" dirty="0"/>
           </a:p>
           <a:p>
-            <a:pPr algn="ctr" indent="0" marL="0">
+            <a:pPr marL="0" indent="0" algn="ctr">
               <a:buNone/>
             </a:pPr>
             <a:r>
@@ -9091,7 +8642,7 @@
           <a:bodyPr wrap="square" lIns="0" tIns="0" rIns="0" bIns="0" rtlCol="0" anchor="ctr"/>
           <a:lstStyle/>
           <a:p>
-            <a:pPr algn="ctr" indent="0" marL="0">
+            <a:pPr marL="0" indent="0" algn="ctr">
               <a:buNone/>
             </a:pPr>
             <a:r>
@@ -9102,9 +8653,6 @@
               </a:rPr>
               <a:t>Precision </a:t>
             </a:r>
-            <a:pPr algn="ctr" indent="0" marL="0">
-              <a:buNone/>
-            </a:pPr>
             <a:r>
               <a:rPr lang="en-US" sz="1100" b="1" i="1" dirty="0">
                 <a:solidFill>
@@ -9113,9 +8661,6 @@
               </a:rPr>
               <a:t>1.00</a:t>
             </a:r>
-            <a:pPr algn="ctr" indent="0" marL="0">
-              <a:buNone/>
-            </a:pPr>
             <a:r>
               <a:rPr lang="en-US" sz="1100" i="1" dirty="0">
                 <a:solidFill>
@@ -9124,9 +8669,6 @@
               </a:rPr>
               <a:t>   ·   Recall </a:t>
             </a:r>
-            <a:pPr algn="ctr" indent="0" marL="0">
-              <a:buNone/>
-            </a:pPr>
             <a:r>
               <a:rPr lang="en-US" sz="1100" b="1" i="1" dirty="0">
                 <a:solidFill>
@@ -9160,7 +8702,7 @@
           <a:bodyPr wrap="square" lIns="0" tIns="0" rIns="0" bIns="0" rtlCol="0" anchor="ctr"/>
           <a:lstStyle/>
           <a:p>
-            <a:pPr algn="ctr" indent="0" marL="0">
+            <a:pPr marL="0" indent="0" algn="ctr">
               <a:buNone/>
             </a:pPr>
             <a:r>
@@ -9196,7 +8738,7 @@
           <a:bodyPr wrap="square" lIns="0" tIns="0" rIns="0" bIns="0" rtlCol="0" anchor="ctr"/>
           <a:lstStyle/>
           <a:p>
-            <a:pPr algn="ctr" indent="0" marL="0">
+            <a:pPr marL="0" indent="0" algn="ctr">
               <a:buNone/>
             </a:pPr>
             <a:r>
@@ -9257,7 +8799,7 @@
           <a:bodyPr wrap="square" lIns="0" tIns="0" rIns="0" bIns="0" rtlCol="0" anchor="ctr"/>
           <a:lstStyle/>
           <a:p>
-            <a:pPr indent="0" marL="0">
+            <a:pPr marL="0" indent="0">
               <a:buNone/>
             </a:pPr>
             <a:r>
@@ -9293,7 +8835,7 @@
           <a:bodyPr wrap="square" lIns="0" tIns="0" rIns="0" bIns="0" rtlCol="0" anchor="ctr"/>
           <a:lstStyle/>
           <a:p>
-            <a:pPr algn="ctr" indent="0" marL="0">
+            <a:pPr marL="0" indent="0" algn="ctr">
               <a:buNone/>
             </a:pPr>
             <a:r>
@@ -9331,13 +8873,55 @@
             <a:tbl>
               <a:tblPr/>
               <a:tblGrid>
-                <a:gridCol w="1737360"/>
-                <a:gridCol w="640080"/>
-                <a:gridCol w="1005840"/>
-                <a:gridCol w="914400"/>
-                <a:gridCol w="1005840"/>
-                <a:gridCol w="1097280"/>
-                <a:gridCol w="1463040"/>
+                <a:gridCol w="1737360">
+                  <a:extLst>
+                    <a:ext uri="{9D8B030D-6E8A-4147-A177-3AD203B41FA5}">
+                      <a16:colId xmlns:a16="http://schemas.microsoft.com/office/drawing/2014/main" val="20000"/>
+                    </a:ext>
+                  </a:extLst>
+                </a:gridCol>
+                <a:gridCol w="640080">
+                  <a:extLst>
+                    <a:ext uri="{9D8B030D-6E8A-4147-A177-3AD203B41FA5}">
+                      <a16:colId xmlns:a16="http://schemas.microsoft.com/office/drawing/2014/main" val="20001"/>
+                    </a:ext>
+                  </a:extLst>
+                </a:gridCol>
+                <a:gridCol w="1005840">
+                  <a:extLst>
+                    <a:ext uri="{9D8B030D-6E8A-4147-A177-3AD203B41FA5}">
+                      <a16:colId xmlns:a16="http://schemas.microsoft.com/office/drawing/2014/main" val="20002"/>
+                    </a:ext>
+                  </a:extLst>
+                </a:gridCol>
+                <a:gridCol w="914400">
+                  <a:extLst>
+                    <a:ext uri="{9D8B030D-6E8A-4147-A177-3AD203B41FA5}">
+                      <a16:colId xmlns:a16="http://schemas.microsoft.com/office/drawing/2014/main" val="20003"/>
+                    </a:ext>
+                  </a:extLst>
+                </a:gridCol>
+                <a:gridCol w="1005840">
+                  <a:extLst>
+                    <a:ext uri="{9D8B030D-6E8A-4147-A177-3AD203B41FA5}">
+                      <a16:colId xmlns:a16="http://schemas.microsoft.com/office/drawing/2014/main" val="20004"/>
+                    </a:ext>
+                  </a:extLst>
+                </a:gridCol>
+                <a:gridCol w="1097280">
+                  <a:extLst>
+                    <a:ext uri="{9D8B030D-6E8A-4147-A177-3AD203B41FA5}">
+                      <a16:colId xmlns:a16="http://schemas.microsoft.com/office/drawing/2014/main" val="20005"/>
+                    </a:ext>
+                  </a:extLst>
+                </a:gridCol>
+                <a:gridCol w="1463040">
+                  <a:extLst>
+                    <a:ext uri="{9D8B030D-6E8A-4147-A177-3AD203B41FA5}">
+                      <a16:colId xmlns:a16="http://schemas.microsoft.com/office/drawing/2014/main" val="20006"/>
+                    </a:ext>
+                  </a:extLst>
+                </a:gridCol>
               </a:tblGrid>
               <a:tr h="411480">
                 <a:tc>
@@ -9345,7 +8929,7 @@
                     <a:bodyPr/>
                     <a:lstStyle/>
                     <a:p>
-                      <a:pPr algn="l" indent="0" marL="0">
+                      <a:pPr marL="0" indent="0" algn="l">
                         <a:buNone/>
                       </a:pPr>
                       <a:r>
@@ -9406,7 +8990,7 @@
                     <a:bodyPr/>
                     <a:lstStyle/>
                     <a:p>
-                      <a:pPr algn="ctr" indent="0" marL="0">
+                      <a:pPr marL="0" indent="0" algn="ctr">
                         <a:buNone/>
                       </a:pPr>
                       <a:r>
@@ -9467,7 +9051,7 @@
                     <a:bodyPr/>
                     <a:lstStyle/>
                     <a:p>
-                      <a:pPr algn="ctr" indent="0" marL="0">
+                      <a:pPr marL="0" indent="0" algn="ctr">
                         <a:buNone/>
                       </a:pPr>
                       <a:r>
@@ -9528,7 +9112,7 @@
                     <a:bodyPr/>
                     <a:lstStyle/>
                     <a:p>
-                      <a:pPr algn="ctr" indent="0" marL="0">
+                      <a:pPr marL="0" indent="0" algn="ctr">
                         <a:buNone/>
                       </a:pPr>
                       <a:r>
@@ -9589,7 +9173,7 @@
                     <a:bodyPr/>
                     <a:lstStyle/>
                     <a:p>
-                      <a:pPr algn="ctr" indent="0" marL="0">
+                      <a:pPr marL="0" indent="0" algn="ctr">
                         <a:buNone/>
                       </a:pPr>
                       <a:r>
@@ -9650,7 +9234,7 @@
                     <a:bodyPr/>
                     <a:lstStyle/>
                     <a:p>
-                      <a:pPr algn="ctr" indent="0" marL="0">
+                      <a:pPr marL="0" indent="0" algn="ctr">
                         <a:buNone/>
                       </a:pPr>
                       <a:r>
@@ -9711,7 +9295,7 @@
                     <a:bodyPr/>
                     <a:lstStyle/>
                     <a:p>
-                      <a:pPr algn="ctr" indent="0" marL="0">
+                      <a:pPr marL="0" indent="0" algn="ctr">
                         <a:buNone/>
                       </a:pPr>
                       <a:r>
@@ -9767,6 +9351,11 @@
                     </a:solidFill>
                   </a:tcPr>
                 </a:tc>
+                <a:extLst>
+                  <a:ext uri="{0D108BD9-81ED-4DB2-BD59-A6C34878D82A}">
+                    <a16:rowId xmlns:a16="http://schemas.microsoft.com/office/drawing/2014/main" val="10000"/>
+                  </a:ext>
+                </a:extLst>
               </a:tr>
               <a:tr h="411480">
                 <a:tc>
@@ -9774,7 +9363,7 @@
                     <a:bodyPr/>
                     <a:lstStyle/>
                     <a:p>
-                      <a:pPr algn="l" indent="0" marL="0">
+                      <a:pPr marL="0" indent="0" algn="l">
                         <a:buNone/>
                       </a:pPr>
                       <a:r>
@@ -9832,7 +9421,7 @@
                     <a:bodyPr/>
                     <a:lstStyle/>
                     <a:p>
-                      <a:pPr algn="ctr" indent="0" marL="0">
+                      <a:pPr marL="0" indent="0" algn="ctr">
                         <a:buNone/>
                       </a:pPr>
                       <a:r>
@@ -9890,7 +9479,7 @@
                     <a:bodyPr/>
                     <a:lstStyle/>
                     <a:p>
-                      <a:pPr algn="ctr" indent="0" marL="0">
+                      <a:pPr marL="0" indent="0" algn="ctr">
                         <a:buNone/>
                       </a:pPr>
                       <a:r>
@@ -9951,7 +9540,7 @@
                     <a:bodyPr/>
                     <a:lstStyle/>
                     <a:p>
-                      <a:pPr algn="ctr" indent="0" marL="0">
+                      <a:pPr marL="0" indent="0" algn="ctr">
                         <a:buNone/>
                       </a:pPr>
                       <a:r>
@@ -10012,7 +9601,7 @@
                     <a:bodyPr/>
                     <a:lstStyle/>
                     <a:p>
-                      <a:pPr algn="ctr" indent="0" marL="0">
+                      <a:pPr marL="0" indent="0" algn="ctr">
                         <a:buNone/>
                       </a:pPr>
                       <a:r>
@@ -10073,7 +9662,7 @@
                     <a:bodyPr/>
                     <a:lstStyle/>
                     <a:p>
-                      <a:pPr algn="ctr" indent="0" marL="0">
+                      <a:pPr marL="0" indent="0" algn="ctr">
                         <a:buNone/>
                       </a:pPr>
                       <a:r>
@@ -10131,7 +9720,7 @@
                     <a:bodyPr/>
                     <a:lstStyle/>
                     <a:p>
-                      <a:pPr algn="ctr" indent="0" marL="0">
+                      <a:pPr marL="0" indent="0" algn="ctr">
                         <a:buNone/>
                       </a:pPr>
                       <a:r>
@@ -10184,6 +9773,11 @@
                     </a:lnB>
                   </a:tcPr>
                 </a:tc>
+                <a:extLst>
+                  <a:ext uri="{0D108BD9-81ED-4DB2-BD59-A6C34878D82A}">
+                    <a16:rowId xmlns:a16="http://schemas.microsoft.com/office/drawing/2014/main" val="10001"/>
+                  </a:ext>
+                </a:extLst>
               </a:tr>
               <a:tr h="411480">
                 <a:tc>
@@ -10191,7 +9785,7 @@
                     <a:bodyPr/>
                     <a:lstStyle/>
                     <a:p>
-                      <a:pPr algn="l" indent="0" marL="0">
+                      <a:pPr marL="0" indent="0" algn="l">
                         <a:buNone/>
                       </a:pPr>
                       <a:r>
@@ -10249,7 +9843,7 @@
                     <a:bodyPr/>
                     <a:lstStyle/>
                     <a:p>
-                      <a:pPr algn="ctr" indent="0" marL="0">
+                      <a:pPr marL="0" indent="0" algn="ctr">
                         <a:buNone/>
                       </a:pPr>
                       <a:r>
@@ -10307,7 +9901,7 @@
                     <a:bodyPr/>
                     <a:lstStyle/>
                     <a:p>
-                      <a:pPr algn="ctr" indent="0" marL="0">
+                      <a:pPr marL="0" indent="0" algn="ctr">
                         <a:buNone/>
                       </a:pPr>
                       <a:r>
@@ -10368,7 +9962,7 @@
                     <a:bodyPr/>
                     <a:lstStyle/>
                     <a:p>
-                      <a:pPr algn="ctr" indent="0" marL="0">
+                      <a:pPr marL="0" indent="0" algn="ctr">
                         <a:buNone/>
                       </a:pPr>
                       <a:r>
@@ -10429,7 +10023,7 @@
                     <a:bodyPr/>
                     <a:lstStyle/>
                     <a:p>
-                      <a:pPr algn="ctr" indent="0" marL="0">
+                      <a:pPr marL="0" indent="0" algn="ctr">
                         <a:buNone/>
                       </a:pPr>
                       <a:r>
@@ -10490,7 +10084,7 @@
                     <a:bodyPr/>
                     <a:lstStyle/>
                     <a:p>
-                      <a:pPr algn="ctr" indent="0" marL="0">
+                      <a:pPr marL="0" indent="0" algn="ctr">
                         <a:buNone/>
                       </a:pPr>
                       <a:r>
@@ -10548,7 +10142,7 @@
                     <a:bodyPr/>
                     <a:lstStyle/>
                     <a:p>
-                      <a:pPr algn="ctr" indent="0" marL="0">
+                      <a:pPr marL="0" indent="0" algn="ctr">
                         <a:buNone/>
                       </a:pPr>
                       <a:r>
@@ -10601,6 +10195,11 @@
                     </a:lnB>
                   </a:tcPr>
                 </a:tc>
+                <a:extLst>
+                  <a:ext uri="{0D108BD9-81ED-4DB2-BD59-A6C34878D82A}">
+                    <a16:rowId xmlns:a16="http://schemas.microsoft.com/office/drawing/2014/main" val="10002"/>
+                  </a:ext>
+                </a:extLst>
               </a:tr>
               <a:tr h="411480">
                 <a:tc>
@@ -10608,7 +10207,7 @@
                     <a:bodyPr/>
                     <a:lstStyle/>
                     <a:p>
-                      <a:pPr algn="l" indent="0" marL="0">
+                      <a:pPr marL="0" indent="0" algn="l">
                         <a:buNone/>
                       </a:pPr>
                       <a:r>
@@ -10666,7 +10265,7 @@
                     <a:bodyPr/>
                     <a:lstStyle/>
                     <a:p>
-                      <a:pPr algn="ctr" indent="0" marL="0">
+                      <a:pPr marL="0" indent="0" algn="ctr">
                         <a:buNone/>
                       </a:pPr>
                       <a:r>
@@ -10724,7 +10323,7 @@
                     <a:bodyPr/>
                     <a:lstStyle/>
                     <a:p>
-                      <a:pPr algn="ctr" indent="0" marL="0">
+                      <a:pPr marL="0" indent="0" algn="ctr">
                         <a:buNone/>
                       </a:pPr>
                       <a:r>
@@ -10785,7 +10384,7 @@
                     <a:bodyPr/>
                     <a:lstStyle/>
                     <a:p>
-                      <a:pPr algn="ctr" indent="0" marL="0">
+                      <a:pPr marL="0" indent="0" algn="ctr">
                         <a:buNone/>
                       </a:pPr>
                       <a:r>
@@ -10846,7 +10445,7 @@
                     <a:bodyPr/>
                     <a:lstStyle/>
                     <a:p>
-                      <a:pPr algn="ctr" indent="0" marL="0">
+                      <a:pPr marL="0" indent="0" algn="ctr">
                         <a:buNone/>
                       </a:pPr>
                       <a:r>
@@ -10907,7 +10506,7 @@
                     <a:bodyPr/>
                     <a:lstStyle/>
                     <a:p>
-                      <a:pPr algn="ctr" indent="0" marL="0">
+                      <a:pPr marL="0" indent="0" algn="ctr">
                         <a:buNone/>
                       </a:pPr>
                       <a:r>
@@ -10965,7 +10564,7 @@
                     <a:bodyPr/>
                     <a:lstStyle/>
                     <a:p>
-                      <a:pPr algn="ctr" indent="0" marL="0">
+                      <a:pPr marL="0" indent="0" algn="ctr">
                         <a:buNone/>
                       </a:pPr>
                       <a:r>
@@ -11018,6 +10617,11 @@
                     </a:lnB>
                   </a:tcPr>
                 </a:tc>
+                <a:extLst>
+                  <a:ext uri="{0D108BD9-81ED-4DB2-BD59-A6C34878D82A}">
+                    <a16:rowId xmlns:a16="http://schemas.microsoft.com/office/drawing/2014/main" val="10003"/>
+                  </a:ext>
+                </a:extLst>
               </a:tr>
               <a:tr h="411480">
                 <a:tc>
@@ -11025,7 +10629,7 @@
                     <a:bodyPr/>
                     <a:lstStyle/>
                     <a:p>
-                      <a:pPr algn="l" indent="0" marL="0">
+                      <a:pPr marL="0" indent="0" algn="l">
                         <a:buNone/>
                       </a:pPr>
                       <a:r>
@@ -11083,7 +10687,7 @@
                     <a:bodyPr/>
                     <a:lstStyle/>
                     <a:p>
-                      <a:pPr algn="ctr" indent="0" marL="0">
+                      <a:pPr marL="0" indent="0" algn="ctr">
                         <a:buNone/>
                       </a:pPr>
                       <a:r>
@@ -11141,7 +10745,7 @@
                     <a:bodyPr/>
                     <a:lstStyle/>
                     <a:p>
-                      <a:pPr algn="ctr" indent="0" marL="0">
+                      <a:pPr marL="0" indent="0" algn="ctr">
                         <a:buNone/>
                       </a:pPr>
                       <a:r>
@@ -11202,7 +10806,7 @@
                     <a:bodyPr/>
                     <a:lstStyle/>
                     <a:p>
-                      <a:pPr algn="ctr" indent="0" marL="0">
+                      <a:pPr marL="0" indent="0" algn="ctr">
                         <a:buNone/>
                       </a:pPr>
                       <a:r>
@@ -11263,7 +10867,7 @@
                     <a:bodyPr/>
                     <a:lstStyle/>
                     <a:p>
-                      <a:pPr algn="ctr" indent="0" marL="0">
+                      <a:pPr marL="0" indent="0" algn="ctr">
                         <a:buNone/>
                       </a:pPr>
                       <a:r>
@@ -11324,7 +10928,7 @@
                     <a:bodyPr/>
                     <a:lstStyle/>
                     <a:p>
-                      <a:pPr algn="ctr" indent="0" marL="0">
+                      <a:pPr marL="0" indent="0" algn="ctr">
                         <a:buNone/>
                       </a:pPr>
                       <a:r>
@@ -11382,7 +10986,7 @@
                     <a:bodyPr/>
                     <a:lstStyle/>
                     <a:p>
-                      <a:pPr algn="ctr" indent="0" marL="0">
+                      <a:pPr marL="0" indent="0" algn="ctr">
                         <a:buNone/>
                       </a:pPr>
                       <a:r>
@@ -11435,6 +11039,11 @@
                     </a:lnB>
                   </a:tcPr>
                 </a:tc>
+                <a:extLst>
+                  <a:ext uri="{0D108BD9-81ED-4DB2-BD59-A6C34878D82A}">
+                    <a16:rowId xmlns:a16="http://schemas.microsoft.com/office/drawing/2014/main" val="10004"/>
+                  </a:ext>
+                </a:extLst>
               </a:tr>
             </a:tbl>
           </a:graphicData>
@@ -11461,7 +11070,7 @@
           <a:bodyPr wrap="square" lIns="0" tIns="0" rIns="0" bIns="0" rtlCol="0" anchor="ctr"/>
           <a:lstStyle/>
           <a:p>
-            <a:pPr algn="ctr" indent="0" marL="0">
+            <a:pPr marL="0" indent="0" algn="ctr">
               <a:buNone/>
             </a:pPr>
             <a:r>
@@ -11470,18 +11079,7 @@
                   <a:srgbClr val="777777"/>
                 </a:solidFill>
               </a:rPr>
-              <a:t>Ordering alternatives share the end state, so only W_lag (intermediate cleanliness) can separate them. They tie when intermediate cleanliness is identical - often when build/tests broke and cleanliness stats are frozen at the last trustworthy value. </a:t>
-            </a:r>
-            <a:pPr algn="ctr" indent="0" marL="0">
-              <a:buNone/>
-            </a:pPr>
-            <a:r>
-              <a:rPr lang="en-US" sz="1000" i="1" dirty="0">
-                <a:solidFill>
-                  <a:srgbClr val="777777"/>
-                </a:solidFill>
-              </a:rPr>
-              <a:t>Manual-Refactor's 3 ties + 1 loss come from the [0,100] score clamp - the user's score is pinned at the floor, so the IDE alternative can't score lower either.</a:t>
+              <a:t>Ordering alternatives share the end state, so only W_lag (intermediate cleanliness) can separate them. They tie when intermediate cleanliness is identical - often when build/tests broke and cleanliness stats are frozen at the last trustworthy value. Manual-Refactor's 3 ties + 1 loss come from the [0,100] score clamp - the user's score is pinned at the floor, so the IDE alternative can't score lower either.</a:t>
             </a:r>
             <a:endParaRPr lang="en-US" sz="1000" dirty="0"/>
           </a:p>
@@ -11508,7 +11106,7 @@
           <a:bodyPr wrap="square" lIns="0" tIns="0" rIns="0" bIns="0" rtlCol="0" anchor="ctr"/>
           <a:lstStyle/>
           <a:p>
-            <a:pPr algn="ctr" indent="0" marL="0">
+            <a:pPr marL="0" indent="0" algn="ctr">
               <a:buNone/>
             </a:pPr>
             <a:r>
@@ -11569,7 +11167,7 @@
           <a:bodyPr wrap="square" lIns="0" tIns="0" rIns="0" bIns="0" rtlCol="0" anchor="ctr"/>
           <a:lstStyle/>
           <a:p>
-            <a:pPr algn="ctr" indent="0" marL="0">
+            <a:pPr marL="0" indent="0" algn="ctr">
               <a:buNone/>
             </a:pPr>
             <a:r>
@@ -11630,7 +11228,7 @@
           <a:bodyPr wrap="square" lIns="0" tIns="0" rIns="0" bIns="0" rtlCol="0" anchor="ctr"/>
           <a:lstStyle/>
           <a:p>
-            <a:pPr indent="0" marL="0">
+            <a:pPr marL="0" indent="0">
               <a:buNone/>
             </a:pPr>
             <a:r>
@@ -11825,7 +11423,7 @@
           <a:bodyPr wrap="square" lIns="0" tIns="0" rIns="0" bIns="0" rtlCol="0" anchor="ctr"/>
           <a:lstStyle/>
           <a:p>
-            <a:pPr indent="0" marL="0">
+            <a:pPr marL="0" indent="0">
               <a:buNone/>
             </a:pPr>
             <a:r>
@@ -11879,7 +11477,7 @@
             <a:endParaRPr lang="en-US" sz="1500" dirty="0"/>
           </a:p>
           <a:p>
-            <a:pPr lvl="1" marL="762000" indent="-381000">
+            <a:pPr marL="762000" lvl="1" indent="-381000">
               <a:spcAft>
                 <a:spcPts val="600"/>
               </a:spcAft>
@@ -11894,12 +11492,6 @@
               </a:rPr>
               <a:t>Two perturbation sweeps </a:t>
             </a:r>
-            <a:pPr indent="0" marL="0">
-              <a:spcAft>
-                <a:spcPts val="600"/>
-              </a:spcAft>
-              <a:buNone/>
-            </a:pPr>
             <a:r>
               <a:rPr lang="en-US" sz="1500" dirty="0">
                 <a:solidFill>
@@ -11911,7 +11503,7 @@
             <a:endParaRPr lang="en-US" sz="1500" dirty="0"/>
           </a:p>
           <a:p>
-            <a:pPr lvl="1" marL="762000" indent="-381000">
+            <a:pPr marL="762000" lvl="1" indent="-381000">
               <a:spcAft>
                 <a:spcPts val="1800"/>
               </a:spcAft>
@@ -11926,12 +11518,6 @@
               </a:rPr>
               <a:t>Stability metrics </a:t>
             </a:r>
-            <a:pPr indent="0" marL="0">
-              <a:spcAft>
-                <a:spcPts val="1800"/>
-              </a:spcAft>
-              <a:buNone/>
-            </a:pPr>
             <a:r>
               <a:rPr lang="en-US" sz="1500" dirty="0">
                 <a:solidFill>
@@ -11961,7 +11547,7 @@
             <a:endParaRPr lang="en-US" sz="1500" dirty="0"/>
           </a:p>
           <a:p>
-            <a:pPr lvl="1" marL="762000" indent="-381000">
+            <a:pPr marL="762000" lvl="1" indent="-381000">
               <a:spcAft>
                 <a:spcPts val="600"/>
               </a:spcAft>
@@ -11976,12 +11562,6 @@
               </a:rPr>
               <a:t>Process-side ablation </a:t>
             </a:r>
-            <a:pPr indent="0" marL="0">
-              <a:spcAft>
-                <a:spcPts val="600"/>
-              </a:spcAft>
-              <a:buNone/>
-            </a:pPr>
             <a:r>
               <a:rPr lang="en-US" sz="1500" dirty="0">
                 <a:solidFill>
@@ -11993,7 +11573,7 @@
             <a:endParaRPr lang="en-US" sz="1500" dirty="0"/>
           </a:p>
           <a:p>
-            <a:pPr lvl="1" marL="762000" indent="-381000">
+            <a:pPr marL="762000" lvl="1" indent="-381000">
               <a:spcAft>
                 <a:spcPts val="600"/>
               </a:spcAft>
@@ -12008,12 +11588,6 @@
               </a:rPr>
               <a:t>Recovery metrics </a:t>
             </a:r>
-            <a:pPr indent="0" marL="0">
-              <a:spcAft>
-                <a:spcPts val="600"/>
-              </a:spcAft>
-              <a:buNone/>
-            </a:pPr>
             <a:r>
               <a:rPr lang="en-US" sz="1500" dirty="0">
                 <a:solidFill>
@@ -12072,7 +11646,7 @@
           <a:bodyPr wrap="square" lIns="0" tIns="0" rIns="0" bIns="0" rtlCol="0" anchor="ctr"/>
           <a:lstStyle/>
           <a:p>
-            <a:pPr indent="0" marL="0">
+            <a:pPr marL="0" indent="0">
               <a:buNone/>
             </a:pPr>
             <a:r>
@@ -12126,7 +11700,7 @@
             <a:endParaRPr lang="en-US" sz="1300" dirty="0"/>
           </a:p>
           <a:p>
-            <a:pPr lvl="1" marL="762000" indent="-381000">
+            <a:pPr marL="762000" lvl="1" indent="-381000">
               <a:spcAft>
                 <a:spcPts val="400"/>
               </a:spcAft>
@@ -12141,12 +11715,6 @@
               </a:rPr>
               <a:t>Single-knob: 96.5% top-1 preserved </a:t>
             </a:r>
-            <a:pPr indent="0" marL="0">
-              <a:spcAft>
-                <a:spcPts val="400"/>
-              </a:spcAft>
-              <a:buNone/>
-            </a:pPr>
             <a:r>
               <a:rPr lang="en-US" sz="1300" dirty="0">
                 <a:solidFill>
@@ -12158,7 +11726,7 @@
             <a:endParaRPr lang="en-US" sz="1300" dirty="0"/>
           </a:p>
           <a:p>
-            <a:pPr lvl="1" marL="762000" indent="-381000">
+            <a:pPr marL="762000" lvl="1" indent="-381000">
               <a:spcAft>
                 <a:spcPts val="400"/>
               </a:spcAft>
@@ -12173,9 +11741,6 @@
               </a:rPr>
               <a:t>Multi-knob: 84.6% top-1 preserved </a:t>
             </a:r>
-            <a:pPr indent="0" marL="0">
-              <a:buNone/>
-            </a:pPr>
             <a:r>
               <a:rPr lang="en-US" sz="1300" dirty="0">
                 <a:solidFill>
@@ -12209,7 +11774,7 @@
           <a:bodyPr wrap="square" lIns="0" tIns="0" rIns="0" bIns="0" rtlCol="0" anchor="ctr"/>
           <a:lstStyle/>
           <a:p>
-            <a:pPr indent="0" marL="0">
+            <a:pPr marL="0" indent="0">
               <a:buNone/>
             </a:pPr>
             <a:r>
@@ -12240,16 +11805,34 @@
         </p:nvGraphicFramePr>
         <p:xfrm>
           <a:off x="914400" y="2468880"/>
-          <a:ext cx="7315200" cy="914400"/>
+          <a:ext cx="7315200" cy="2340864"/>
         </p:xfrm>
         <a:graphic>
           <a:graphicData uri="http://schemas.openxmlformats.org/drawingml/2006/table">
             <a:tbl>
               <a:tblPr/>
               <a:tblGrid>
-                <a:gridCol w="1828800"/>
-                <a:gridCol w="3291840"/>
-                <a:gridCol w="2194560"/>
+                <a:gridCol w="1828800">
+                  <a:extLst>
+                    <a:ext uri="{9D8B030D-6E8A-4147-A177-3AD203B41FA5}">
+                      <a16:colId xmlns:a16="http://schemas.microsoft.com/office/drawing/2014/main" val="20000"/>
+                    </a:ext>
+                  </a:extLst>
+                </a:gridCol>
+                <a:gridCol w="3291840">
+                  <a:extLst>
+                    <a:ext uri="{9D8B030D-6E8A-4147-A177-3AD203B41FA5}">
+                      <a16:colId xmlns:a16="http://schemas.microsoft.com/office/drawing/2014/main" val="20001"/>
+                    </a:ext>
+                  </a:extLst>
+                </a:gridCol>
+                <a:gridCol w="2194560">
+                  <a:extLst>
+                    <a:ext uri="{9D8B030D-6E8A-4147-A177-3AD203B41FA5}">
+                      <a16:colId xmlns:a16="http://schemas.microsoft.com/office/drawing/2014/main" val="20002"/>
+                    </a:ext>
+                  </a:extLst>
+                </a:gridCol>
               </a:tblGrid>
               <a:tr h="292608">
                 <a:tc>
@@ -12257,7 +11840,7 @@
                     <a:bodyPr/>
                     <a:lstStyle/>
                     <a:p>
-                      <a:pPr algn="ctr" indent="0" marL="0">
+                      <a:pPr marL="0" indent="0" algn="ctr">
                         <a:buNone/>
                       </a:pPr>
                       <a:r>
@@ -12325,7 +11908,7 @@
                     <a:bodyPr/>
                     <a:lstStyle/>
                     <a:p>
-                      <a:pPr algn="ctr" indent="0" marL="0">
+                      <a:pPr marL="0" indent="0" algn="ctr">
                         <a:buNone/>
                       </a:pPr>
                       <a:r>
@@ -12393,7 +11976,7 @@
                     <a:bodyPr/>
                     <a:lstStyle/>
                     <a:p>
-                      <a:pPr algn="ctr" indent="0" marL="0">
+                      <a:pPr marL="0" indent="0" algn="ctr">
                         <a:buNone/>
                       </a:pPr>
                       <a:r>
@@ -12456,6 +12039,11 @@
                     </a:solidFill>
                   </a:tcPr>
                 </a:tc>
+                <a:extLst>
+                  <a:ext uri="{0D108BD9-81ED-4DB2-BD59-A6C34878D82A}">
+                    <a16:rowId xmlns:a16="http://schemas.microsoft.com/office/drawing/2014/main" val="10000"/>
+                  </a:ext>
+                </a:extLst>
               </a:tr>
               <a:tr h="292608">
                 <a:tc>
@@ -12463,7 +12051,7 @@
                     <a:bodyPr/>
                     <a:lstStyle/>
                     <a:p>
-                      <a:pPr algn="l" indent="0" marL="0">
+                      <a:pPr marL="0" indent="0" algn="l">
                         <a:buNone/>
                       </a:pPr>
                       <a:r>
@@ -12528,7 +12116,7 @@
                     <a:bodyPr/>
                     <a:lstStyle/>
                     <a:p>
-                      <a:pPr algn="ctr" indent="0" marL="0">
+                      <a:pPr marL="0" indent="0" algn="ctr">
                         <a:buNone/>
                       </a:pPr>
                       <a:r>
@@ -12593,7 +12181,7 @@
                     <a:bodyPr/>
                     <a:lstStyle/>
                     <a:p>
-                      <a:pPr algn="ctr" indent="0" marL="0">
+                      <a:pPr marL="0" indent="0" algn="ctr">
                         <a:buNone/>
                       </a:pPr>
                       <a:r>
@@ -12653,6 +12241,11 @@
                     </a:lnB>
                   </a:tcPr>
                 </a:tc>
+                <a:extLst>
+                  <a:ext uri="{0D108BD9-81ED-4DB2-BD59-A6C34878D82A}">
+                    <a16:rowId xmlns:a16="http://schemas.microsoft.com/office/drawing/2014/main" val="10001"/>
+                  </a:ext>
+                </a:extLst>
               </a:tr>
               <a:tr h="292608">
                 <a:tc>
@@ -12660,7 +12253,7 @@
                     <a:bodyPr/>
                     <a:lstStyle/>
                     <a:p>
-                      <a:pPr algn="l" indent="0" marL="0">
+                      <a:pPr marL="0" indent="0" algn="l">
                         <a:buNone/>
                       </a:pPr>
                       <a:r>
@@ -12725,7 +12318,7 @@
                     <a:bodyPr/>
                     <a:lstStyle/>
                     <a:p>
-                      <a:pPr algn="ctr" indent="0" marL="0">
+                      <a:pPr marL="0" indent="0" algn="ctr">
                         <a:buNone/>
                       </a:pPr>
                       <a:r>
@@ -12790,7 +12383,7 @@
                     <a:bodyPr/>
                     <a:lstStyle/>
                     <a:p>
-                      <a:pPr algn="ctr" indent="0" marL="0">
+                      <a:pPr marL="0" indent="0" algn="ctr">
                         <a:buNone/>
                       </a:pPr>
                       <a:r>
@@ -12850,6 +12443,11 @@
                     </a:lnB>
                   </a:tcPr>
                 </a:tc>
+                <a:extLst>
+                  <a:ext uri="{0D108BD9-81ED-4DB2-BD59-A6C34878D82A}">
+                    <a16:rowId xmlns:a16="http://schemas.microsoft.com/office/drawing/2014/main" val="10002"/>
+                  </a:ext>
+                </a:extLst>
               </a:tr>
               <a:tr h="292608">
                 <a:tc>
@@ -12857,7 +12455,7 @@
                     <a:bodyPr/>
                     <a:lstStyle/>
                     <a:p>
-                      <a:pPr algn="l" indent="0" marL="0">
+                      <a:pPr marL="0" indent="0" algn="l">
                         <a:buNone/>
                       </a:pPr>
                       <a:r>
@@ -12922,7 +12520,7 @@
                     <a:bodyPr/>
                     <a:lstStyle/>
                     <a:p>
-                      <a:pPr algn="ctr" indent="0" marL="0">
+                      <a:pPr marL="0" indent="0" algn="ctr">
                         <a:buNone/>
                       </a:pPr>
                       <a:r>
@@ -12987,7 +12585,7 @@
                     <a:bodyPr/>
                     <a:lstStyle/>
                     <a:p>
-                      <a:pPr algn="ctr" indent="0" marL="0">
+                      <a:pPr marL="0" indent="0" algn="ctr">
                         <a:buNone/>
                       </a:pPr>
                       <a:r>
@@ -13047,6 +12645,11 @@
                     </a:lnB>
                   </a:tcPr>
                 </a:tc>
+                <a:extLst>
+                  <a:ext uri="{0D108BD9-81ED-4DB2-BD59-A6C34878D82A}">
+                    <a16:rowId xmlns:a16="http://schemas.microsoft.com/office/drawing/2014/main" val="10003"/>
+                  </a:ext>
+                </a:extLst>
               </a:tr>
               <a:tr h="292608">
                 <a:tc>
@@ -13054,7 +12657,7 @@
                     <a:bodyPr/>
                     <a:lstStyle/>
                     <a:p>
-                      <a:pPr algn="l" indent="0" marL="0">
+                      <a:pPr marL="0" indent="0" algn="l">
                         <a:buNone/>
                       </a:pPr>
                       <a:r>
@@ -13119,7 +12722,7 @@
                     <a:bodyPr/>
                     <a:lstStyle/>
                     <a:p>
-                      <a:pPr algn="ctr" indent="0" marL="0">
+                      <a:pPr marL="0" indent="0" algn="ctr">
                         <a:buNone/>
                       </a:pPr>
                       <a:r>
@@ -13184,7 +12787,7 @@
                     <a:bodyPr/>
                     <a:lstStyle/>
                     <a:p>
-                      <a:pPr algn="ctr" indent="0" marL="0">
+                      <a:pPr marL="0" indent="0" algn="ctr">
                         <a:buNone/>
                       </a:pPr>
                       <a:r>
@@ -13244,6 +12847,11 @@
                     </a:lnB>
                   </a:tcPr>
                 </a:tc>
+                <a:extLst>
+                  <a:ext uri="{0D108BD9-81ED-4DB2-BD59-A6C34878D82A}">
+                    <a16:rowId xmlns:a16="http://schemas.microsoft.com/office/drawing/2014/main" val="10004"/>
+                  </a:ext>
+                </a:extLst>
               </a:tr>
               <a:tr h="292608">
                 <a:tc>
@@ -13251,7 +12859,7 @@
                     <a:bodyPr/>
                     <a:lstStyle/>
                     <a:p>
-                      <a:pPr algn="l" indent="0" marL="0">
+                      <a:pPr marL="0" indent="0" algn="l">
                         <a:buNone/>
                       </a:pPr>
                       <a:r>
@@ -13316,7 +12924,7 @@
                     <a:bodyPr/>
                     <a:lstStyle/>
                     <a:p>
-                      <a:pPr algn="ctr" indent="0" marL="0">
+                      <a:pPr marL="0" indent="0" algn="ctr">
                         <a:buNone/>
                       </a:pPr>
                       <a:r>
@@ -13381,7 +12989,7 @@
                     <a:bodyPr/>
                     <a:lstStyle/>
                     <a:p>
-                      <a:pPr algn="ctr" indent="0" marL="0">
+                      <a:pPr marL="0" indent="0" algn="ctr">
                         <a:buNone/>
                       </a:pPr>
                       <a:r>
@@ -13441,6 +13049,11 @@
                     </a:lnB>
                   </a:tcPr>
                 </a:tc>
+                <a:extLst>
+                  <a:ext uri="{0D108BD9-81ED-4DB2-BD59-A6C34878D82A}">
+                    <a16:rowId xmlns:a16="http://schemas.microsoft.com/office/drawing/2014/main" val="10005"/>
+                  </a:ext>
+                </a:extLst>
               </a:tr>
               <a:tr h="292608">
                 <a:tc>
@@ -13448,7 +13061,7 @@
                     <a:bodyPr/>
                     <a:lstStyle/>
                     <a:p>
-                      <a:pPr algn="l" indent="0" marL="0">
+                      <a:pPr marL="0" indent="0" algn="l">
                         <a:buNone/>
                       </a:pPr>
                       <a:r>
@@ -13513,7 +13126,7 @@
                     <a:bodyPr/>
                     <a:lstStyle/>
                     <a:p>
-                      <a:pPr algn="ctr" indent="0" marL="0">
+                      <a:pPr marL="0" indent="0" algn="ctr">
                         <a:buNone/>
                       </a:pPr>
                       <a:r>
@@ -13578,7 +13191,7 @@
                     <a:bodyPr/>
                     <a:lstStyle/>
                     <a:p>
-                      <a:pPr algn="ctr" indent="0" marL="0">
+                      <a:pPr marL="0" indent="0" algn="ctr">
                         <a:buNone/>
                       </a:pPr>
                       <a:r>
@@ -13638,6 +13251,11 @@
                     </a:lnB>
                   </a:tcPr>
                 </a:tc>
+                <a:extLst>
+                  <a:ext uri="{0D108BD9-81ED-4DB2-BD59-A6C34878D82A}">
+                    <a16:rowId xmlns:a16="http://schemas.microsoft.com/office/drawing/2014/main" val="10006"/>
+                  </a:ext>
+                </a:extLst>
               </a:tr>
               <a:tr h="292608">
                 <a:tc>
@@ -13645,7 +13263,7 @@
                     <a:bodyPr/>
                     <a:lstStyle/>
                     <a:p>
-                      <a:pPr algn="l" indent="0" marL="0">
+                      <a:pPr marL="0" indent="0" algn="l">
                         <a:buNone/>
                       </a:pPr>
                       <a:r>
@@ -13710,7 +13328,7 @@
                     <a:bodyPr/>
                     <a:lstStyle/>
                     <a:p>
-                      <a:pPr algn="ctr" indent="0" marL="0">
+                      <a:pPr marL="0" indent="0" algn="ctr">
                         <a:buNone/>
                       </a:pPr>
                       <a:r>
@@ -13775,7 +13393,7 @@
                     <a:bodyPr/>
                     <a:lstStyle/>
                     <a:p>
-                      <a:pPr algn="ctr" indent="0" marL="0">
+                      <a:pPr marL="0" indent="0" algn="ctr">
                         <a:buNone/>
                       </a:pPr>
                       <a:r>
@@ -13835,6 +13453,11 @@
                     </a:lnB>
                   </a:tcPr>
                 </a:tc>
+                <a:extLst>
+                  <a:ext uri="{0D108BD9-81ED-4DB2-BD59-A6C34878D82A}">
+                    <a16:rowId xmlns:a16="http://schemas.microsoft.com/office/drawing/2014/main" val="10007"/>
+                  </a:ext>
+                </a:extLst>
               </a:tr>
             </a:tbl>
           </a:graphicData>
@@ -13861,7 +13484,7 @@
           <a:bodyPr wrap="square" lIns="0" tIns="0" rIns="0" bIns="0" rtlCol="0" anchor="ctr"/>
           <a:lstStyle/>
           <a:p>
-            <a:pPr algn="ctr" indent="0" marL="0">
+            <a:pPr marL="0" indent="0" algn="ctr">
               <a:buNone/>
             </a:pPr>
             <a:r>
@@ -13922,7 +13545,7 @@
           <a:bodyPr wrap="square" lIns="0" tIns="0" rIns="0" bIns="0" rtlCol="0" anchor="ctr"/>
           <a:lstStyle/>
           <a:p>
-            <a:pPr algn="ctr" indent="0" marL="0">
+            <a:pPr marL="0" indent="0" algn="ctr">
               <a:buNone/>
             </a:pPr>
             <a:r>
@@ -13983,7 +13606,7 @@
           <a:bodyPr wrap="square" lIns="0" tIns="0" rIns="0" bIns="0" rtlCol="0" anchor="ctr"/>
           <a:lstStyle/>
           <a:p>
-            <a:pPr indent="0" marL="0">
+            <a:pPr marL="0" indent="0">
               <a:buNone/>
             </a:pPr>
             <a:r>
@@ -14037,7 +13660,7 @@
             <a:endParaRPr lang="en-US" sz="1500" dirty="0"/>
           </a:p>
           <a:p>
-            <a:pPr lvl="1" marL="762000" indent="-381000">
+            <a:pPr marL="762000" lvl="1" indent="-381000">
               <a:spcAft>
                 <a:spcPts val="600"/>
               </a:spcAft>
@@ -14055,7 +13678,7 @@
             <a:endParaRPr lang="en-US" sz="1500" dirty="0"/>
           </a:p>
           <a:p>
-            <a:pPr lvl="1" marL="762000" indent="-381000">
+            <a:pPr marL="762000" lvl="1" indent="-381000">
               <a:spcAft>
                 <a:spcPts val="1800"/>
               </a:spcAft>
@@ -14070,12 +13693,6 @@
               </a:rPr>
               <a:t>Randomised into 2 arms </a:t>
             </a:r>
-            <a:pPr indent="0" marL="0">
-              <a:spcAft>
-                <a:spcPts val="1800"/>
-              </a:spcAft>
-              <a:buNone/>
-            </a:pPr>
             <a:r>
               <a:rPr lang="en-US" sz="1500" dirty="0">
                 <a:solidFill>
@@ -14105,7 +13722,7 @@
             <a:endParaRPr lang="en-US" sz="1500" dirty="0"/>
           </a:p>
           <a:p>
-            <a:pPr lvl="1" marL="762000" indent="-381000">
+            <a:pPr marL="762000" lvl="1" indent="-381000">
               <a:spcAft>
                 <a:spcPts val="600"/>
               </a:spcAft>
@@ -14120,12 +13737,6 @@
               </a:rPr>
               <a:t>Divergence-point count per session </a:t>
             </a:r>
-            <a:pPr indent="0" marL="0">
-              <a:spcAft>
-                <a:spcPts val="600"/>
-              </a:spcAft>
-              <a:buNone/>
-            </a:pPr>
             <a:r>
               <a:rPr lang="en-US" sz="1500" dirty="0">
                 <a:solidFill>
@@ -14137,7 +13748,7 @@
             <a:endParaRPr lang="en-US" sz="1500" dirty="0"/>
           </a:p>
           <a:p>
-            <a:pPr lvl="1" marL="762000" indent="-381000">
+            <a:pPr marL="762000" lvl="1" indent="-381000">
               <a:spcAft>
                 <a:spcPts val="600"/>
               </a:spcAft>
@@ -14177,7 +13788,7 @@
           <a:bodyPr wrap="square" rtlCol="0" anchor="ctr"/>
           <a:lstStyle/>
           <a:p>
-            <a:pPr algn="ctr" indent="0" marL="0">
+            <a:pPr marL="0" indent="0" algn="ctr">
               <a:buNone/>
             </a:pPr>
             <a:r>
@@ -14238,7 +13849,7 @@
           <a:bodyPr wrap="square" lIns="0" tIns="0" rIns="0" bIns="0" rtlCol="0" anchor="ctr"/>
           <a:lstStyle/>
           <a:p>
-            <a:pPr algn="ctr" indent="0" marL="0">
+            <a:pPr marL="0" indent="0" algn="ctr">
               <a:buNone/>
             </a:pPr>
             <a:r>
@@ -14255,7 +13866,7 @@
       </p:sp>
       <p:graphicFrame>
         <p:nvGraphicFramePr>
-          <p:cNvPr id="3" name="Chart 0" descr=""/>
+          <p:cNvPr id="3" name="Chart 0"/>
           <p:cNvGraphicFramePr/>
           <p:nvPr/>
         </p:nvGraphicFramePr>
@@ -14263,15 +13874,15 @@
           <a:off x="274320" y="868680"/>
           <a:ext cx="4206240" cy="3017520"/>
         </p:xfrm>
-        <a:graphic xmlns:a="http://schemas.openxmlformats.org/drawingml/2006/main">
+        <a:graphic>
           <a:graphicData uri="http://schemas.openxmlformats.org/drawingml/2006/chart">
-            <c:chart xmlns:c="http://schemas.openxmlformats.org/drawingml/2006/chart" r:id="rId1"/>
+            <c:chart xmlns:c="http://schemas.openxmlformats.org/drawingml/2006/chart" xmlns:r="http://schemas.openxmlformats.org/officeDocument/2006/relationships" r:id="rId3"/>
           </a:graphicData>
         </a:graphic>
       </p:graphicFrame>
       <p:graphicFrame>
         <p:nvGraphicFramePr>
-          <p:cNvPr id="4" name="Chart 1" descr=""/>
+          <p:cNvPr id="4" name="Chart 1"/>
           <p:cNvGraphicFramePr/>
           <p:nvPr/>
         </p:nvGraphicFramePr>
@@ -14279,9 +13890,9 @@
           <a:off x="4663440" y="868680"/>
           <a:ext cx="4206240" cy="3017520"/>
         </p:xfrm>
-        <a:graphic xmlns:a="http://schemas.openxmlformats.org/drawingml/2006/main">
+        <a:graphic>
           <a:graphicData uri="http://schemas.openxmlformats.org/drawingml/2006/chart">
-            <c:chart xmlns:c="http://schemas.openxmlformats.org/drawingml/2006/chart" r:id="rId2"/>
+            <c:chart xmlns:c="http://schemas.openxmlformats.org/drawingml/2006/chart" xmlns:r="http://schemas.openxmlformats.org/officeDocument/2006/relationships" r:id="rId4"/>
           </a:graphicData>
         </a:graphic>
       </p:graphicFrame>
@@ -14306,7 +13917,7 @@
           <a:bodyPr wrap="square" lIns="50800" tIns="50800" rIns="50800" bIns="50800" rtlCol="0" anchor="t"/>
           <a:lstStyle/>
           <a:p>
-            <a:pPr algn="ctr" indent="0" marL="0">
+            <a:pPr marL="0" indent="0" algn="ctr">
               <a:buNone/>
             </a:pPr>
             <a:r>
@@ -14317,81 +13928,60 @@
               </a:rPr>
               <a:t>DP rate separates clearly: </a:t>
             </a:r>
-            <a:pPr algn="ctr" indent="0" marL="0">
+            <a:r>
+              <a:rPr lang="en-US" sz="1200" b="1" dirty="0">
+                <a:solidFill>
+                  <a:srgbClr val="0000CD"/>
+                </a:solidFill>
+              </a:rPr>
+              <a:t>2.7</a:t>
+            </a:r>
+            <a:r>
+              <a:rPr lang="en-US" sz="1200" dirty="0">
+                <a:solidFill>
+                  <a:srgbClr val="000000"/>
+                </a:solidFill>
+              </a:rPr>
+              <a:t> (feedback) vs </a:t>
+            </a:r>
+            <a:r>
+              <a:rPr lang="en-US" sz="1200" b="1" dirty="0">
+                <a:solidFill>
+                  <a:srgbClr val="B25500"/>
+                </a:solidFill>
+              </a:rPr>
+              <a:t>6.0</a:t>
+            </a:r>
+            <a:r>
+              <a:rPr lang="en-US" sz="1200" dirty="0">
+                <a:solidFill>
+                  <a:srgbClr val="000000"/>
+                </a:solidFill>
+              </a:rPr>
+              <a:t> DPs per session per participant - 2.2× difference.</a:t>
+            </a:r>
+            <a:endParaRPr lang="en-US" sz="1200" dirty="0"/>
+          </a:p>
+          <a:p>
+            <a:pPr marL="0" indent="0" algn="ctr">
               <a:buNone/>
             </a:pPr>
             <a:r>
-              <a:rPr lang="en-US" sz="1200" b="1" dirty="0">
-                <a:solidFill>
-                  <a:srgbClr val="1F3F6F"/>
-                </a:solidFill>
-              </a:rPr>
-              <a:t>2.7</a:t>
-            </a:r>
-            <a:pPr algn="ctr" indent="0" marL="0">
-              <a:buNone/>
-            </a:pPr>
-            <a:r>
               <a:rPr lang="en-US" sz="1200" dirty="0">
                 <a:solidFill>
                   <a:srgbClr val="000000"/>
                 </a:solidFill>
               </a:rPr>
-              <a:t> (feedback) vs </a:t>
-            </a:r>
-            <a:pPr algn="ctr" indent="0" marL="0">
-              <a:buNone/>
-            </a:pPr>
-            <a:r>
-              <a:rPr lang="en-US" sz="1200" b="1" dirty="0">
-                <a:solidFill>
-                  <a:srgbClr val="B25500"/>
-                </a:solidFill>
-              </a:rPr>
-              <a:t>6.0</a:t>
-            </a:r>
-            <a:pPr algn="ctr" indent="0" marL="0">
-              <a:spcAft>
-                <a:spcPts val="400"/>
-              </a:spcAft>
-              <a:buNone/>
-            </a:pPr>
-            <a:r>
-              <a:rPr lang="en-US" sz="1200" dirty="0">
+              <a:t>But the production-weighted score is dominated by </a:t>
+            </a:r>
+            <a:r>
+              <a:rPr lang="en-US" sz="1200" i="1" dirty="0">
                 <a:solidFill>
                   <a:srgbClr val="000000"/>
                 </a:solidFill>
               </a:rPr>
-              <a:t> DPs per session per participant - 2.2× difference.</a:t>
-            </a:r>
-            <a:endParaRPr lang="en-US" sz="1200" dirty="0"/>
-          </a:p>
-          <a:p>
-            <a:pPr algn="ctr" indent="0" marL="0">
-              <a:buNone/>
-            </a:pPr>
-            <a:r>
-              <a:rPr lang="en-US" sz="1200" dirty="0">
-                <a:solidFill>
-                  <a:srgbClr val="000000"/>
-                </a:solidFill>
-              </a:rPr>
-              <a:t>But the production-weighted score is dominated by </a:t>
-            </a:r>
-            <a:pPr algn="ctr" indent="0" marL="0">
-              <a:buNone/>
-            </a:pPr>
-            <a:r>
-              <a:rPr lang="en-US" sz="1200" i="1" dirty="0">
-                <a:solidFill>
-                  <a:srgbClr val="000000"/>
-                </a:solidFill>
-              </a:rPr>
               <a:t>task difficulty</a:t>
             </a:r>
-            <a:pPr algn="ctr" indent="0" marL="0">
-              <a:buNone/>
-            </a:pPr>
             <a:r>
               <a:rPr lang="en-US" sz="1200" dirty="0">
                 <a:solidFill>
@@ -14450,7 +14040,7 @@
           <a:bodyPr wrap="square" lIns="0" tIns="0" rIns="0" bIns="0" rtlCol="0" anchor="ctr"/>
           <a:lstStyle/>
           <a:p>
-            <a:pPr algn="ctr" indent="0" marL="0">
+            <a:pPr marL="0" indent="0" algn="ctr">
               <a:buNone/>
             </a:pPr>
             <a:r>
@@ -14467,7 +14057,7 @@
       </p:sp>
       <p:graphicFrame>
         <p:nvGraphicFramePr>
-          <p:cNvPr id="3" name="Chart 0" descr=""/>
+          <p:cNvPr id="3" name="Chart 0"/>
           <p:cNvGraphicFramePr/>
           <p:nvPr/>
         </p:nvGraphicFramePr>
@@ -14475,9 +14065,9 @@
           <a:off x="1554480" y="777240"/>
           <a:ext cx="6035040" cy="3108960"/>
         </p:xfrm>
-        <a:graphic xmlns:a="http://schemas.openxmlformats.org/drawingml/2006/main">
+        <a:graphic>
           <a:graphicData uri="http://schemas.openxmlformats.org/drawingml/2006/chart">
-            <c:chart xmlns:c="http://schemas.openxmlformats.org/drawingml/2006/chart" r:id="rId1"/>
+            <c:chart xmlns:c="http://schemas.openxmlformats.org/drawingml/2006/chart" xmlns:r="http://schemas.openxmlformats.org/officeDocument/2006/relationships" r:id="rId3"/>
           </a:graphicData>
         </a:graphic>
       </p:graphicFrame>
@@ -14502,7 +14092,7 @@
           <a:bodyPr wrap="square" lIns="50800" tIns="50800" rIns="50800" bIns="50800" rtlCol="0" anchor="t"/>
           <a:lstStyle/>
           <a:p>
-            <a:pPr algn="ctr" indent="0" marL="0">
+            <a:pPr marL="0" indent="0" algn="ctr">
               <a:buNone/>
             </a:pPr>
             <a:r>
@@ -14513,9 +14103,6 @@
               </a:rPr>
               <a:t>Once cleanliness gain is removed, the score reflects </a:t>
             </a:r>
-            <a:pPr algn="ctr" indent="0" marL="0">
-              <a:buNone/>
-            </a:pPr>
             <a:r>
               <a:rPr lang="en-US" sz="1200" i="1" dirty="0">
                 <a:solidFill>
@@ -14524,9 +14111,6 @@
               </a:rPr>
               <a:t>how disciplined the process was</a:t>
             </a:r>
-            <a:pPr algn="ctr" indent="0" marL="0">
-              <a:buNone/>
-            </a:pPr>
             <a:r>
               <a:rPr lang="en-US" sz="1200" dirty="0">
                 <a:solidFill>
@@ -14535,20 +14119,14 @@
               </a:rPr>
               <a:t> - tests run, IDE refactorings used, commits at sensible points. The feedback group climbs </a:t>
             </a:r>
-            <a:pPr algn="ctr" indent="0" marL="0">
-              <a:buNone/>
-            </a:pPr>
             <a:r>
               <a:rPr lang="en-US" sz="1200" b="1" dirty="0">
                 <a:solidFill>
-                  <a:srgbClr val="1F3F6F"/>
+                  <a:srgbClr val="0000CD"/>
                 </a:solidFill>
               </a:rPr>
               <a:t>+22.3</a:t>
             </a:r>
-            <a:pPr algn="ctr" indent="0" marL="0">
-              <a:buNone/>
-            </a:pPr>
             <a:r>
               <a:rPr lang="en-US" sz="1200" dirty="0">
                 <a:solidFill>
@@ -14557,9 +14135,6 @@
               </a:rPr>
               <a:t> across the arc; the baseline group moves </a:t>
             </a:r>
-            <a:pPr algn="ctr" indent="0" marL="0">
-              <a:buNone/>
-            </a:pPr>
             <a:r>
               <a:rPr lang="en-US" sz="1200" b="1" dirty="0">
                 <a:solidFill>
@@ -14568,12 +14143,6 @@
               </a:rPr>
               <a:t>−2.0</a:t>
             </a:r>
-            <a:pPr algn="ctr" indent="0" marL="0">
-              <a:spcAft>
-                <a:spcPts val="600"/>
-              </a:spcAft>
-              <a:buNone/>
-            </a:pPr>
             <a:r>
               <a:rPr lang="en-US" sz="1200" dirty="0">
                 <a:solidFill>
@@ -14585,7 +14154,7 @@
             <a:endParaRPr lang="en-US" sz="1200" dirty="0"/>
           </a:p>
           <a:p>
-            <a:pPr algn="ctr" indent="0" marL="0">
+            <a:pPr marL="0" indent="0" algn="ctr">
               <a:buNone/>
             </a:pPr>
             <a:r>
@@ -14646,7 +14215,7 @@
           <a:bodyPr wrap="square" lIns="0" tIns="0" rIns="0" bIns="0" rtlCol="0" anchor="ctr"/>
           <a:lstStyle/>
           <a:p>
-            <a:pPr algn="ctr" indent="0" marL="0">
+            <a:pPr marL="0" indent="0" algn="ctr">
               <a:buNone/>
             </a:pPr>
             <a:r>
@@ -14707,7 +14276,7 @@
           <a:bodyPr wrap="square" lIns="0" tIns="0" rIns="0" bIns="0" rtlCol="0" anchor="ctr"/>
           <a:lstStyle/>
           <a:p>
-            <a:pPr algn="ctr" indent="0" marL="0">
+            <a:pPr marL="0" indent="0" algn="ctr">
               <a:buNone/>
             </a:pPr>
             <a:r>
@@ -14743,7 +14312,7 @@
           <a:bodyPr wrap="square" rtlCol="0" anchor="ctr"/>
           <a:lstStyle/>
           <a:p>
-            <a:pPr algn="ctr" indent="0" marL="0">
+            <a:pPr marL="0" indent="0" algn="ctr">
               <a:buNone/>
             </a:pPr>
             <a:r>
@@ -14760,7 +14329,7 @@
       </p:sp>
       <p:graphicFrame>
         <p:nvGraphicFramePr>
-          <p:cNvPr id="4" name="Chart 0" descr=""/>
+          <p:cNvPr id="4" name="Chart 0"/>
           <p:cNvGraphicFramePr/>
           <p:nvPr/>
         </p:nvGraphicFramePr>
@@ -14768,9 +14337,9 @@
           <a:off x="274320" y="1051560"/>
           <a:ext cx="4206240" cy="2697480"/>
         </p:xfrm>
-        <a:graphic xmlns:a="http://schemas.openxmlformats.org/drawingml/2006/main">
+        <a:graphic>
           <a:graphicData uri="http://schemas.openxmlformats.org/drawingml/2006/chart">
-            <c:chart xmlns:c="http://schemas.openxmlformats.org/drawingml/2006/chart" r:id="rId1"/>
+            <c:chart xmlns:c="http://schemas.openxmlformats.org/drawingml/2006/chart" xmlns:r="http://schemas.openxmlformats.org/officeDocument/2006/relationships" r:id="rId3"/>
           </a:graphicData>
         </a:graphic>
       </p:graphicFrame>
@@ -14790,16 +14359,34 @@
         </p:nvGraphicFramePr>
         <p:xfrm>
           <a:off x="4663440" y="1051560"/>
-          <a:ext cx="4251960" cy="914400"/>
+          <a:ext cx="4251960" cy="2286000"/>
         </p:xfrm>
         <a:graphic>
           <a:graphicData uri="http://schemas.openxmlformats.org/drawingml/2006/table">
             <a:tbl>
               <a:tblPr/>
               <a:tblGrid>
-                <a:gridCol w="1417320"/>
-                <a:gridCol w="502920"/>
-                <a:gridCol w="2331720"/>
+                <a:gridCol w="1417320">
+                  <a:extLst>
+                    <a:ext uri="{9D8B030D-6E8A-4147-A177-3AD203B41FA5}">
+                      <a16:colId xmlns:a16="http://schemas.microsoft.com/office/drawing/2014/main" val="20000"/>
+                    </a:ext>
+                  </a:extLst>
+                </a:gridCol>
+                <a:gridCol w="502920">
+                  <a:extLst>
+                    <a:ext uri="{9D8B030D-6E8A-4147-A177-3AD203B41FA5}">
+                      <a16:colId xmlns:a16="http://schemas.microsoft.com/office/drawing/2014/main" val="20001"/>
+                    </a:ext>
+                  </a:extLst>
+                </a:gridCol>
+                <a:gridCol w="2331720">
+                  <a:extLst>
+                    <a:ext uri="{9D8B030D-6E8A-4147-A177-3AD203B41FA5}">
+                      <a16:colId xmlns:a16="http://schemas.microsoft.com/office/drawing/2014/main" val="20002"/>
+                    </a:ext>
+                  </a:extLst>
+                </a:gridCol>
               </a:tblGrid>
               <a:tr h="457200">
                 <a:tc>
@@ -14807,7 +14394,7 @@
                     <a:bodyPr/>
                     <a:lstStyle/>
                     <a:p>
-                      <a:pPr algn="ctr" indent="0" marL="0">
+                      <a:pPr marL="0" indent="0" algn="ctr">
                         <a:buNone/>
                       </a:pPr>
                       <a:r>
@@ -14851,7 +14438,7 @@
                     <a:bodyPr/>
                     <a:lstStyle/>
                     <a:p>
-                      <a:pPr algn="ctr" indent="0" marL="0">
+                      <a:pPr marL="0" indent="0" algn="ctr">
                         <a:buNone/>
                       </a:pPr>
                       <a:r>
@@ -14895,7 +14482,7 @@
                     <a:bodyPr/>
                     <a:lstStyle/>
                     <a:p>
-                      <a:pPr algn="ctr" indent="0" marL="0">
+                      <a:pPr marL="0" indent="0" algn="ctr">
                         <a:buNone/>
                       </a:pPr>
                       <a:r>
@@ -14934,6 +14521,11 @@
                     </a:solidFill>
                   </a:tcPr>
                 </a:tc>
+                <a:extLst>
+                  <a:ext uri="{0D108BD9-81ED-4DB2-BD59-A6C34878D82A}">
+                    <a16:rowId xmlns:a16="http://schemas.microsoft.com/office/drawing/2014/main" val="10000"/>
+                  </a:ext>
+                </a:extLst>
               </a:tr>
               <a:tr h="457200">
                 <a:tc>
@@ -14941,7 +14533,7 @@
                     <a:bodyPr/>
                     <a:lstStyle/>
                     <a:p>
-                      <a:pPr algn="l" indent="0" marL="0">
+                      <a:pPr marL="0" indent="0" algn="l">
                         <a:buNone/>
                       </a:pPr>
                       <a:r>
@@ -14982,7 +14574,7 @@
                     <a:bodyPr/>
                     <a:lstStyle/>
                     <a:p>
-                      <a:pPr algn="ctr" indent="0" marL="0">
+                      <a:pPr marL="0" indent="0" algn="ctr">
                         <a:buNone/>
                       </a:pPr>
                       <a:r>
@@ -15023,7 +14615,7 @@
                     <a:bodyPr/>
                     <a:lstStyle/>
                     <a:p>
-                      <a:pPr algn="l" indent="0" marL="0">
+                      <a:pPr marL="0" indent="0" algn="l">
                         <a:buNone/>
                       </a:pPr>
                       <a:r>
@@ -15059,6 +14651,11 @@
                     </a:lnB>
                   </a:tcPr>
                 </a:tc>
+                <a:extLst>
+                  <a:ext uri="{0D108BD9-81ED-4DB2-BD59-A6C34878D82A}">
+                    <a16:rowId xmlns:a16="http://schemas.microsoft.com/office/drawing/2014/main" val="10001"/>
+                  </a:ext>
+                </a:extLst>
               </a:tr>
               <a:tr h="457200">
                 <a:tc>
@@ -15066,7 +14663,7 @@
                     <a:bodyPr/>
                     <a:lstStyle/>
                     <a:p>
-                      <a:pPr algn="l" indent="0" marL="0">
+                      <a:pPr marL="0" indent="0" algn="l">
                         <a:buNone/>
                       </a:pPr>
                       <a:r>
@@ -15107,7 +14704,7 @@
                     <a:bodyPr/>
                     <a:lstStyle/>
                     <a:p>
-                      <a:pPr algn="ctr" indent="0" marL="0">
+                      <a:pPr marL="0" indent="0" algn="ctr">
                         <a:buNone/>
                       </a:pPr>
                       <a:r>
@@ -15148,7 +14745,7 @@
                     <a:bodyPr/>
                     <a:lstStyle/>
                     <a:p>
-                      <a:pPr algn="l" indent="0" marL="0">
+                      <a:pPr marL="0" indent="0" algn="l">
                         <a:buNone/>
                       </a:pPr>
                       <a:r>
@@ -15184,6 +14781,11 @@
                     </a:lnB>
                   </a:tcPr>
                 </a:tc>
+                <a:extLst>
+                  <a:ext uri="{0D108BD9-81ED-4DB2-BD59-A6C34878D82A}">
+                    <a16:rowId xmlns:a16="http://schemas.microsoft.com/office/drawing/2014/main" val="10002"/>
+                  </a:ext>
+                </a:extLst>
               </a:tr>
               <a:tr h="457200">
                 <a:tc>
@@ -15191,7 +14793,7 @@
                     <a:bodyPr/>
                     <a:lstStyle/>
                     <a:p>
-                      <a:pPr algn="l" indent="0" marL="0">
+                      <a:pPr marL="0" indent="0" algn="l">
                         <a:buNone/>
                       </a:pPr>
                       <a:r>
@@ -15232,7 +14834,7 @@
                     <a:bodyPr/>
                     <a:lstStyle/>
                     <a:p>
-                      <a:pPr algn="ctr" indent="0" marL="0">
+                      <a:pPr marL="0" indent="0" algn="ctr">
                         <a:buNone/>
                       </a:pPr>
                       <a:r>
@@ -15273,7 +14875,7 @@
                     <a:bodyPr/>
                     <a:lstStyle/>
                     <a:p>
-                      <a:pPr algn="l" indent="0" marL="0">
+                      <a:pPr marL="0" indent="0" algn="l">
                         <a:buNone/>
                       </a:pPr>
                       <a:r>
@@ -15309,6 +14911,11 @@
                     </a:lnB>
                   </a:tcPr>
                 </a:tc>
+                <a:extLst>
+                  <a:ext uri="{0D108BD9-81ED-4DB2-BD59-A6C34878D82A}">
+                    <a16:rowId xmlns:a16="http://schemas.microsoft.com/office/drawing/2014/main" val="10003"/>
+                  </a:ext>
+                </a:extLst>
               </a:tr>
               <a:tr h="457200">
                 <a:tc>
@@ -15316,7 +14923,7 @@
                     <a:bodyPr/>
                     <a:lstStyle/>
                     <a:p>
-                      <a:pPr algn="l" indent="0" marL="0">
+                      <a:pPr marL="0" indent="0" algn="l">
                         <a:buNone/>
                       </a:pPr>
                       <a:r>
@@ -15357,7 +14964,7 @@
                     <a:bodyPr/>
                     <a:lstStyle/>
                     <a:p>
-                      <a:pPr algn="ctr" indent="0" marL="0">
+                      <a:pPr marL="0" indent="0" algn="ctr">
                         <a:buNone/>
                       </a:pPr>
                       <a:r>
@@ -15398,7 +15005,7 @@
                     <a:bodyPr/>
                     <a:lstStyle/>
                     <a:p>
-                      <a:pPr algn="l" indent="0" marL="0">
+                      <a:pPr marL="0" indent="0" algn="l">
                         <a:buNone/>
                       </a:pPr>
                       <a:r>
@@ -15434,6 +15041,11 @@
                     </a:lnB>
                   </a:tcPr>
                 </a:tc>
+                <a:extLst>
+                  <a:ext uri="{0D108BD9-81ED-4DB2-BD59-A6C34878D82A}">
+                    <a16:rowId xmlns:a16="http://schemas.microsoft.com/office/drawing/2014/main" val="10004"/>
+                  </a:ext>
+                </a:extLst>
               </a:tr>
             </a:tbl>
           </a:graphicData>
@@ -15460,7 +15072,7 @@
           <a:bodyPr wrap="square" lIns="50800" tIns="50800" rIns="50800" bIns="50800" rtlCol="0" anchor="t"/>
           <a:lstStyle/>
           <a:p>
-            <a:pPr algn="ctr" indent="0" marL="0">
+            <a:pPr marL="0" indent="0" algn="ctr">
               <a:buNone/>
             </a:pPr>
             <a:r>
@@ -15471,9 +15083,6 @@
               </a:rPr>
               <a:t>Score is blind to the difference: </a:t>
             </a:r>
-            <a:pPr algn="ctr" indent="0" marL="0">
-              <a:buNone/>
-            </a:pPr>
             <a:r>
               <a:rPr lang="en-US" sz="1200" dirty="0">
                 <a:solidFill>
@@ -15482,20 +15091,14 @@
               </a:rPr>
               <a:t>feedback ΔJ </a:t>
             </a:r>
-            <a:pPr algn="ctr" indent="0" marL="0">
-              <a:buNone/>
-            </a:pPr>
             <a:r>
               <a:rPr lang="en-US" sz="1200" b="1" dirty="0">
                 <a:solidFill>
-                  <a:srgbClr val="1F3F6F"/>
+                  <a:srgbClr val="0000CD"/>
                 </a:solidFill>
               </a:rPr>
               <a:t>+3.0</a:t>
             </a:r>
-            <a:pPr algn="ctr" indent="0" marL="0">
-              <a:buNone/>
-            </a:pPr>
             <a:r>
               <a:rPr lang="en-US" sz="1200" dirty="0">
                 <a:solidFill>
@@ -15504,9 +15107,6 @@
               </a:rPr>
               <a:t> vs baseline </a:t>
             </a:r>
-            <a:pPr algn="ctr" indent="0" marL="0">
-              <a:buNone/>
-            </a:pPr>
             <a:r>
               <a:rPr lang="en-US" sz="1200" b="1" dirty="0">
                 <a:solidFill>
@@ -15515,12 +15115,6 @@
               </a:rPr>
               <a:t>+6.5</a:t>
             </a:r>
-            <a:pPr algn="ctr" indent="0" marL="0">
-              <a:spcAft>
-                <a:spcPts val="600"/>
-              </a:spcAft>
-              <a:buNone/>
-            </a:pPr>
             <a:r>
               <a:rPr lang="en-US" sz="1200" dirty="0">
                 <a:solidFill>
@@ -15532,7 +15126,7 @@
             <a:endParaRPr lang="en-US" sz="1200" dirty="0"/>
           </a:p>
           <a:p>
-            <a:pPr algn="ctr" indent="0" marL="0">
+            <a:pPr marL="0" indent="0" algn="ctr">
               <a:buNone/>
             </a:pPr>
             <a:r>
@@ -15593,7 +15187,7 @@
           <a:bodyPr wrap="square" lIns="0" tIns="0" rIns="0" bIns="0" rtlCol="0" anchor="ctr"/>
           <a:lstStyle/>
           <a:p>
-            <a:pPr indent="0" marL="0">
+            <a:pPr marL="0" indent="0">
               <a:buNone/>
             </a:pPr>
             <a:r>
@@ -15629,13 +15223,13 @@
           <a:bodyPr wrap="square" rtlCol="0" anchor="ctr"/>
           <a:lstStyle/>
           <a:p>
-            <a:pPr algn="ctr" indent="0" marL="0">
+            <a:pPr marL="0" indent="0" algn="ctr">
               <a:buNone/>
             </a:pPr>
             <a:r>
               <a:rPr lang="en-US" sz="1500" i="1" dirty="0">
                 <a:solidFill>
-                  <a:srgbClr val="1F3F6F"/>
+                  <a:srgbClr val="0000CD"/>
                 </a:solidFill>
               </a:rPr>
               <a:t>Process-aware refactoring evaluation is tractable, and a small randomised study gives directional evidence that feedback improves measured process discipline.</a:t>
@@ -15680,12 +15274,6 @@
               </a:rPr>
               <a:t>A process-quality metric on </a:t>
             </a:r>
-            <a:pPr indent="0" marL="0">
-              <a:spcAft>
-                <a:spcPts val="600"/>
-              </a:spcAft>
-              <a:buNone/>
-            </a:pPr>
             <a:r>
               <a:rPr lang="en-US" sz="1600" i="1" dirty="0">
                 <a:solidFill>
@@ -15694,12 +15282,6 @@
               </a:rPr>
               <a:t>arbitrary sessions</a:t>
             </a:r>
-            <a:pPr indent="0" marL="0">
-              <a:spcAft>
-                <a:spcPts val="600"/>
-              </a:spcAft>
-              <a:buNone/>
-            </a:pPr>
             <a:r>
               <a:rPr lang="en-US" sz="1600" dirty="0">
                 <a:solidFill>
@@ -15787,7 +15369,7 @@
           <a:bodyPr wrap="square" lIns="0" tIns="0" rIns="0" bIns="0" rtlCol="0" anchor="ctr"/>
           <a:lstStyle/>
           <a:p>
-            <a:pPr algn="ctr" indent="0" marL="0">
+            <a:pPr marL="0" indent="0" algn="ctr">
               <a:buNone/>
             </a:pPr>
             <a:r>
@@ -15798,9 +15380,6 @@
               </a:rPr>
               <a:t>Not yet established: </a:t>
             </a:r>
-            <a:pPr algn="ctr" indent="0" marL="0">
-              <a:buNone/>
-            </a:pPr>
             <a:r>
               <a:rPr lang="en-US" sz="1100" i="1" dirty="0">
                 <a:solidFill>
@@ -15859,7 +15438,7 @@
           <a:bodyPr wrap="square" lIns="0" tIns="0" rIns="0" bIns="0" rtlCol="0" anchor="ctr"/>
           <a:lstStyle/>
           <a:p>
-            <a:pPr indent="0" marL="0">
+            <a:pPr marL="0" indent="0">
               <a:buNone/>
             </a:pPr>
             <a:r>
@@ -15910,12 +15489,6 @@
               </a:rPr>
               <a:t>Endpoint quality metrics (CK, smells, readability):</a:t>
             </a:r>
-            <a:pPr indent="0" marL="0">
-              <a:spcAft>
-                <a:spcPts val="600"/>
-              </a:spcAft>
-              <a:buNone/>
-            </a:pPr>
             <a:r>
               <a:rPr lang="en-US" sz="1600" dirty="0">
                 <a:solidFill>
@@ -15942,12 +15515,6 @@
               </a:rPr>
               <a:t>Refactoring recommenders / sequence generators</a:t>
             </a:r>
-            <a:pPr indent="0" marL="0">
-              <a:spcAft>
-                <a:spcPts val="600"/>
-              </a:spcAft>
-              <a:buNone/>
-            </a:pPr>
             <a:r>
               <a:rPr lang="en-US" sz="1600" dirty="0">
                 <a:solidFill>
@@ -15974,12 +15541,6 @@
               </a:rPr>
               <a:t>Exercise-scoped feedback tools:</a:t>
             </a:r>
-            <a:pPr indent="0" marL="0">
-              <a:spcAft>
-                <a:spcPts val="600"/>
-              </a:spcAft>
-              <a:buNone/>
-            </a:pPr>
             <a:r>
               <a:rPr lang="en-US" sz="1600" dirty="0">
                 <a:solidFill>
@@ -16038,7 +15599,7 @@
           <a:bodyPr wrap="square" lIns="0" tIns="0" rIns="0" bIns="0" rtlCol="0" anchor="ctr"/>
           <a:lstStyle/>
           <a:p>
-            <a:pPr indent="0" marL="0">
+            <a:pPr marL="0" indent="0">
               <a:buNone/>
             </a:pPr>
             <a:r>
@@ -16049,9 +15610,6 @@
               </a:rPr>
               <a:t>Closest Existing Tool...</a:t>
             </a:r>
-            <a:pPr indent="0" marL="0">
-              <a:buNone/>
-            </a:pPr>
             <a:r>
               <a:rPr lang="en-US" sz="2800" b="1" dirty="0">
                 <a:solidFill>
@@ -16066,14 +15624,14 @@
       </p:sp>
       <p:pic>
         <p:nvPicPr>
-          <p:cNvPr id="3" name="Image 0" descr="images/industrial-logic-score.png">    </p:cNvPr>
+          <p:cNvPr id="3" name="Image 0" descr="images/industrial-logic-score.png"/>
           <p:cNvPicPr>
             <a:picLocks noChangeAspect="1"/>
           </p:cNvPicPr>
           <p:nvPr/>
         </p:nvPicPr>
         <p:blipFill>
-          <a:blip r:embed="rId1"/>
+          <a:blip r:embed="rId3"/>
           <a:stretch>
             <a:fillRect/>
           </a:stretch>
@@ -16109,7 +15667,7 @@
           <a:bodyPr wrap="square" lIns="0" tIns="0" rIns="0" bIns="0" rtlCol="0" anchor="ctr"/>
           <a:lstStyle/>
           <a:p>
-            <a:pPr algn="ctr" indent="0" marL="0">
+            <a:pPr marL="0" indent="0" algn="ctr">
               <a:buNone/>
             </a:pPr>
             <a:r>
@@ -16126,14 +15684,14 @@
       </p:sp>
       <p:pic>
         <p:nvPicPr>
-          <p:cNvPr id="5" name="Image 1" descr="images/industrial-logic-compilation-tests.png">    </p:cNvPr>
+          <p:cNvPr id="5" name="Image 1" descr="images/industrial-logic-compilation-tests.png"/>
           <p:cNvPicPr>
             <a:picLocks noChangeAspect="1"/>
           </p:cNvPicPr>
           <p:nvPr/>
         </p:nvPicPr>
         <p:blipFill>
-          <a:blip r:embed="rId2"/>
+          <a:blip r:embed="rId4"/>
           <a:stretch>
             <a:fillRect/>
           </a:stretch>
@@ -16169,7 +15727,7 @@
           <a:bodyPr wrap="square" lIns="0" tIns="0" rIns="0" bIns="0" rtlCol="0" anchor="ctr"/>
           <a:lstStyle/>
           <a:p>
-            <a:pPr algn="ctr" indent="0" marL="0">
+            <a:pPr marL="0" indent="0" algn="ctr">
               <a:buNone/>
             </a:pPr>
             <a:r>
@@ -16186,14 +15744,14 @@
       </p:sp>
       <p:pic>
         <p:nvPicPr>
-          <p:cNvPr id="7" name="Image 2" descr="images/industrial-logic-refactorings.png">    </p:cNvPr>
+          <p:cNvPr id="7" name="Image 2" descr="images/industrial-logic-refactorings.png"/>
           <p:cNvPicPr>
             <a:picLocks noChangeAspect="1"/>
           </p:cNvPicPr>
           <p:nvPr/>
         </p:nvPicPr>
         <p:blipFill>
-          <a:blip r:embed="rId3"/>
+          <a:blip r:embed="rId5"/>
           <a:stretch>
             <a:fillRect/>
           </a:stretch>
@@ -16229,7 +15787,7 @@
           <a:bodyPr wrap="square" lIns="0" tIns="0" rIns="0" bIns="0" rtlCol="0" anchor="ctr"/>
           <a:lstStyle/>
           <a:p>
-            <a:pPr algn="ctr" indent="0" marL="0">
+            <a:pPr marL="0" indent="0" algn="ctr">
               <a:buNone/>
             </a:pPr>
             <a:r>
@@ -16265,24 +15823,21 @@
           <a:bodyPr wrap="square" lIns="0" tIns="0" rIns="0" bIns="0" rtlCol="0" anchor="ctr"/>
           <a:lstStyle/>
           <a:p>
-            <a:pPr algn="ctr" indent="0" marL="0">
+            <a:pPr marL="0" indent="0" algn="ctr">
               <a:buNone/>
             </a:pPr>
             <a:r>
               <a:rPr lang="en-US" sz="1400" b="1" i="1" dirty="0">
                 <a:solidFill>
-                  <a:srgbClr val="1F3F6F"/>
+                  <a:srgbClr val="0000CD"/>
                 </a:solidFill>
               </a:rPr>
               <a:t>Gap: </a:t>
             </a:r>
-            <a:pPr algn="ctr" indent="0" marL="0">
-              <a:buNone/>
-            </a:pPr>
             <a:r>
               <a:rPr lang="en-US" sz="1400" i="1" dirty="0">
                 <a:solidFill>
-                  <a:srgbClr val="1F3F6F"/>
+                  <a:srgbClr val="0000CD"/>
                 </a:solidFill>
               </a:rPr>
               <a:t>no system scores an arbitrary observed refactoring session against an explicit process-quality metric, and shows where a better path was available.</a:t>
@@ -16337,7 +15892,7 @@
           <a:bodyPr wrap="square" lIns="0" tIns="0" rIns="0" bIns="0" rtlCol="0" anchor="ctr"/>
           <a:lstStyle/>
           <a:p>
-            <a:pPr indent="0" marL="0">
+            <a:pPr marL="0" indent="0">
               <a:buNone/>
             </a:pPr>
             <a:r>
@@ -16373,7 +15928,7 @@
           <a:bodyPr wrap="square" lIns="0" tIns="0" rIns="0" bIns="0" rtlCol="0" anchor="ctr"/>
           <a:lstStyle/>
           <a:p>
-            <a:pPr indent="0" marL="0">
+            <a:pPr marL="0" indent="0">
               <a:buNone/>
             </a:pPr>
             <a:r>
@@ -16424,33 +15979,13 @@
               </a:rPr>
               <a:t>Quantifiable + comparable score </a:t>
             </a:r>
-            <a:pPr indent="0" marL="0">
-              <a:spcAft>
-                <a:spcPts val="600"/>
-              </a:spcAft>
-              <a:buNone/>
-            </a:pPr>
             <a:r>
               <a:rPr lang="en-US" sz="1400" dirty="0">
                 <a:solidFill>
-                  <a:srgbClr val="000000"/>
-                </a:solidFill>
-              </a:rPr>
-              <a:t>- one number per trajectory so sessions can be compared.</a:t>
-            </a:r>
-            <a:pPr indent="0" marL="0">
-              <a:spcAft>
-                <a:spcPts val="600"/>
-              </a:spcAft>
-              <a:buNone/>
-            </a:pPr>
-            <a:r>
-              <a:rPr lang="en-US" sz="1400" dirty="0">
-                <a:solidFill>
                   <a:srgbClr val="888888"/>
                 </a:solidFill>
               </a:rPr>
-              <a:t> [1]</a:t>
+              <a:t>- one number per trajectory so sessions can be compared. [1]</a:t>
             </a:r>
             <a:endParaRPr lang="en-US" sz="1400" dirty="0"/>
           </a:p>
@@ -16470,33 +16005,13 @@
               </a:rPr>
               <a:t>Seamless, in-workflow capture </a:t>
             </a:r>
-            <a:pPr indent="0" marL="0">
-              <a:spcAft>
-                <a:spcPts val="600"/>
-              </a:spcAft>
-              <a:buNone/>
-            </a:pPr>
             <a:r>
               <a:rPr lang="en-US" sz="1400" dirty="0">
                 <a:solidFill>
-                  <a:srgbClr val="000000"/>
-                </a:solidFill>
-              </a:rPr>
-              <a:t>- zero extra developer effort to use the tool.</a:t>
-            </a:r>
-            <a:pPr indent="0" marL="0">
-              <a:spcAft>
-                <a:spcPts val="600"/>
-              </a:spcAft>
-              <a:buNone/>
-            </a:pPr>
-            <a:r>
-              <a:rPr lang="en-US" sz="1400" dirty="0">
-                <a:solidFill>
                   <a:srgbClr val="888888"/>
                 </a:solidFill>
               </a:rPr>
-              <a:t> [2]</a:t>
+              <a:t>- zero extra developer effort to use the tool. [2]</a:t>
             </a:r>
             <a:endParaRPr lang="en-US" sz="1400" dirty="0"/>
           </a:p>
@@ -16516,33 +16031,13 @@
               </a:rPr>
               <a:t>Actionable, moment-specific feedback </a:t>
             </a:r>
-            <a:pPr indent="0" marL="0">
-              <a:spcAft>
-                <a:spcPts val="600"/>
-              </a:spcAft>
-              <a:buNone/>
-            </a:pPr>
             <a:r>
               <a:rPr lang="en-US" sz="1400" dirty="0">
                 <a:solidFill>
-                  <a:srgbClr val="000000"/>
-                </a:solidFill>
-              </a:rPr>
-              <a:t>- point to a specific moment AND a "what you could have done instead" alternative.</a:t>
-            </a:r>
-            <a:pPr indent="0" marL="0">
-              <a:spcAft>
-                <a:spcPts val="600"/>
-              </a:spcAft>
-              <a:buNone/>
-            </a:pPr>
-            <a:r>
-              <a:rPr lang="en-US" sz="1400" dirty="0">
-                <a:solidFill>
                   <a:srgbClr val="888888"/>
                 </a:solidFill>
               </a:rPr>
-              <a:t> [3]</a:t>
+              <a:t>- point to a specific moment AND a "what you could have done instead" alternative. [3]</a:t>
             </a:r>
             <a:endParaRPr lang="en-US" sz="1400" dirty="0"/>
           </a:p>
@@ -16562,16 +16057,10 @@
               </a:rPr>
               <a:t>Efficient alternative synthesis </a:t>
             </a:r>
-            <a:pPr indent="0" marL="0">
-              <a:spcAft>
-                <a:spcPts val="600"/>
-              </a:spcAft>
-              <a:buNone/>
-            </a:pPr>
             <a:r>
               <a:rPr lang="en-US" sz="1400" dirty="0">
                 <a:solidFill>
-                  <a:srgbClr val="000000"/>
+                  <a:srgbClr val="888888"/>
                 </a:solidFill>
               </a:rPr>
               <a:t>- the state-action space over a real codebase is too large to enumerate, so we must find efficient methods of identifying "better" alternatives.</a:t>
@@ -16601,7 +16090,7 @@
           <a:bodyPr wrap="square" lIns="0" tIns="0" rIns="0" bIns="0" rtlCol="0" anchor="t"/>
           <a:lstStyle/>
           <a:p>
-            <a:pPr algn="l" indent="0" marL="0">
+            <a:pPr marL="0" indent="0" algn="l">
               <a:buNone/>
             </a:pPr>
             <a:r>
@@ -16610,29 +16099,7 @@
                   <a:srgbClr val="888888"/>
                 </a:solidFill>
               </a:rPr>
-              <a:t>[1] Composite quality models (Quamoco, QMOOD), adapted from snapshot- to trajectory-level.   </a:t>
-            </a:r>
-            <a:pPr algn="l" indent="0" marL="0">
-              <a:buNone/>
-            </a:pPr>
-            <a:r>
-              <a:rPr lang="en-US" sz="900" i="1" dirty="0">
-                <a:solidFill>
-                  <a:srgbClr val="888888"/>
-                </a:solidFill>
-              </a:rPr>
-              <a:t>[2] IDE-event logging (Damevski et al., CodeWatcher).   </a:t>
-            </a:r>
-            <a:pPr algn="l" indent="0" marL="0">
-              <a:buNone/>
-            </a:pPr>
-            <a:r>
-              <a:rPr lang="en-US" sz="900" i="1" dirty="0">
-                <a:solidFill>
-                  <a:srgbClr val="888888"/>
-                </a:solidFill>
-              </a:rPr>
-              <a:t>[3] Inverts prior refactoring recommenders (ReSynth, Refactoring Navigator, search-based refactoring).</a:t>
+              <a:t>[1] Composite quality models (Quamoco, QMOOD), adapted from snapshot- to trajectory-level.   [2] IDE-event logging (Damevski et al., CodeWatcher).   [3] Inverts prior refactoring recommenders (ReSynth, Refactoring Navigator, search-based refactoring).</a:t>
             </a:r>
             <a:endParaRPr lang="en-US" sz="900" dirty="0"/>
           </a:p>
@@ -16684,7 +16151,7 @@
           <a:bodyPr wrap="square" lIns="0" tIns="0" rIns="0" bIns="0" rtlCol="0" anchor="ctr"/>
           <a:lstStyle/>
           <a:p>
-            <a:pPr algn="ctr" indent="0" marL="0">
+            <a:pPr marL="0" indent="0" algn="ctr">
               <a:buNone/>
             </a:pPr>
             <a:r>
@@ -16720,7 +16187,7 @@
           <a:bodyPr wrap="square" lIns="0" tIns="0" rIns="0" bIns="0" rtlCol="0" anchor="ctr"/>
           <a:lstStyle/>
           <a:p>
-            <a:pPr algn="ctr" indent="0" marL="0">
+            <a:pPr marL="0" indent="0" algn="ctr">
               <a:buNone/>
             </a:pPr>
             <a:r>
@@ -16781,7 +16248,7 @@
           <a:bodyPr wrap="square" lIns="0" tIns="0" rIns="0" bIns="0" rtlCol="0" anchor="ctr"/>
           <a:lstStyle/>
           <a:p>
-            <a:pPr indent="0" marL="0">
+            <a:pPr marL="0" indent="0">
               <a:buNone/>
             </a:pPr>
             <a:r>
@@ -16820,6 +16287,13 @@
             <a:prstDash val="solid"/>
           </a:ln>
         </p:spPr>
+        <p:txBody>
+          <a:bodyPr/>
+          <a:lstStyle/>
+          <a:p>
+            <a:endParaRPr lang="en-US"/>
+          </a:p>
+        </p:txBody>
       </p:sp>
       <p:sp>
         <p:nvSpPr>
@@ -16842,7 +16316,7 @@
           <a:bodyPr wrap="square" lIns="0" tIns="0" rIns="0" bIns="0" rtlCol="0" anchor="ctr"/>
           <a:lstStyle/>
           <a:p>
-            <a:pPr algn="ctr" indent="0" marL="0">
+            <a:pPr marL="0" indent="0" algn="ctr">
               <a:buNone/>
             </a:pPr>
             <a:r>
@@ -16879,6 +16353,13 @@
             <a:prstDash val="solid"/>
           </a:ln>
         </p:spPr>
+        <p:txBody>
+          <a:bodyPr/>
+          <a:lstStyle/>
+          <a:p>
+            <a:endParaRPr lang="en-US"/>
+          </a:p>
+        </p:txBody>
       </p:sp>
       <p:sp>
         <p:nvSpPr>
@@ -16962,6 +16443,13 @@
             <a:prstDash val="solid"/>
           </a:ln>
         </p:spPr>
+        <p:txBody>
+          <a:bodyPr/>
+          <a:lstStyle/>
+          <a:p>
+            <a:endParaRPr lang="en-US"/>
+          </a:p>
+        </p:txBody>
       </p:sp>
       <p:sp>
         <p:nvSpPr>
@@ -16984,7 +16472,7 @@
           <a:bodyPr wrap="square" lIns="0" tIns="0" rIns="0" bIns="0" rtlCol="0" anchor="ctr"/>
           <a:lstStyle/>
           <a:p>
-            <a:pPr algn="ctr" indent="0" marL="0">
+            <a:pPr marL="0" indent="0" algn="ctr">
               <a:buNone/>
             </a:pPr>
             <a:r>
@@ -17021,6 +16509,13 @@
             <a:prstDash val="solid"/>
           </a:ln>
         </p:spPr>
+        <p:txBody>
+          <a:bodyPr/>
+          <a:lstStyle/>
+          <a:p>
+            <a:endParaRPr lang="en-US"/>
+          </a:p>
+        </p:txBody>
       </p:sp>
       <p:sp>
         <p:nvSpPr>
@@ -17122,6 +16617,13 @@
             <a:prstDash val="solid"/>
           </a:ln>
         </p:spPr>
+        <p:txBody>
+          <a:bodyPr/>
+          <a:lstStyle/>
+          <a:p>
+            <a:endParaRPr lang="en-US"/>
+          </a:p>
+        </p:txBody>
       </p:sp>
       <p:sp>
         <p:nvSpPr>
@@ -17144,7 +16646,7 @@
           <a:bodyPr wrap="square" lIns="0" tIns="0" rIns="0" bIns="0" rtlCol="0" anchor="ctr"/>
           <a:lstStyle/>
           <a:p>
-            <a:pPr algn="ctr" indent="0" marL="0">
+            <a:pPr marL="0" indent="0" algn="ctr">
               <a:buNone/>
             </a:pPr>
             <a:r>
@@ -17181,6 +16683,13 @@
             <a:prstDash val="solid"/>
           </a:ln>
         </p:spPr>
+        <p:txBody>
+          <a:bodyPr/>
+          <a:lstStyle/>
+          <a:p>
+            <a:endParaRPr lang="en-US"/>
+          </a:p>
+        </p:txBody>
       </p:sp>
       <p:sp>
         <p:nvSpPr>
@@ -17263,6 +16772,13 @@
             <a:tailEnd type="triangle"/>
           </a:ln>
         </p:spPr>
+        <p:txBody>
+          <a:bodyPr/>
+          <a:lstStyle/>
+          <a:p>
+            <a:endParaRPr lang="en-US"/>
+          </a:p>
+        </p:txBody>
       </p:sp>
       <p:sp>
         <p:nvSpPr>
@@ -17285,7 +16801,7 @@
           <a:bodyPr wrap="square" lIns="0" tIns="0" rIns="0" bIns="0" rtlCol="0" anchor="b"/>
           <a:lstStyle/>
           <a:p>
-            <a:pPr algn="ctr" indent="0" marL="0">
+            <a:pPr marL="0" indent="0" algn="ctr">
               <a:buNone/>
             </a:pPr>
             <a:r>
@@ -17323,6 +16839,13 @@
             <a:tailEnd type="triangle"/>
           </a:ln>
         </p:spPr>
+        <p:txBody>
+          <a:bodyPr/>
+          <a:lstStyle/>
+          <a:p>
+            <a:endParaRPr lang="en-US"/>
+          </a:p>
+        </p:txBody>
       </p:sp>
       <p:sp>
         <p:nvSpPr>
@@ -17345,7 +16868,7 @@
           <a:bodyPr wrap="square" lIns="0" tIns="0" rIns="0" bIns="0" rtlCol="0" anchor="b"/>
           <a:lstStyle/>
           <a:p>
-            <a:pPr algn="ctr" indent="0" marL="0">
+            <a:pPr marL="0" indent="0" algn="ctr">
               <a:buNone/>
             </a:pPr>
             <a:r>
@@ -17359,7 +16882,7 @@
             <a:endParaRPr lang="en-US" sz="900" dirty="0"/>
           </a:p>
           <a:p>
-            <a:pPr algn="ctr" indent="0" marL="0">
+            <a:pPr marL="0" indent="0" algn="ctr">
               <a:buNone/>
             </a:pPr>
             <a:r>
@@ -17420,7 +16943,7 @@
           <a:bodyPr wrap="square" lIns="0" tIns="0" rIns="0" bIns="0" rtlCol="0" anchor="ctr"/>
           <a:lstStyle/>
           <a:p>
-            <a:pPr indent="0" marL="0">
+            <a:pPr marL="0" indent="0">
               <a:buNone/>
             </a:pPr>
             <a:r>
@@ -17456,7 +16979,7 @@
           <a:bodyPr wrap="square" lIns="0" tIns="0" rIns="0" bIns="0" rtlCol="0" anchor="ctr"/>
           <a:lstStyle/>
           <a:p>
-            <a:pPr algn="ctr" indent="0" marL="0">
+            <a:pPr marL="0" indent="0" algn="ctr">
               <a:buNone/>
             </a:pPr>
             <a:r>
@@ -17467,9 +16990,6 @@
               </a:rPr>
               <a:t>J(τ)  =  clip</a:t>
             </a:r>
-            <a:pPr algn="ctr" indent="0" marL="0">
-              <a:buNone/>
-            </a:pPr>
             <a:r>
               <a:rPr lang="en-US" sz="2200" baseline="-40000" dirty="0">
                 <a:solidFill>
@@ -17478,9 +16998,6 @@
               </a:rPr>
               <a:t>[0,100]</a:t>
             </a:r>
-            <a:pPr algn="ctr" indent="0" marL="0">
-              <a:buNone/>
-            </a:pPr>
             <a:r>
               <a:rPr lang="en-US" sz="2200" dirty="0">
                 <a:solidFill>
@@ -17489,9 +17006,6 @@
               </a:rPr>
               <a:t>  (    50    </a:t>
             </a:r>
-            <a:pPr algn="ctr" indent="0" marL="0">
-              <a:buNone/>
-            </a:pPr>
             <a:r>
               <a:rPr lang="en-US" sz="2200" i="1" dirty="0">
                 <a:solidFill>
@@ -17500,9 +17014,6 @@
               </a:rPr>
               <a:t>(baseline)</a:t>
             </a:r>
-            <a:pPr algn="ctr" indent="0" marL="0">
-              <a:buNone/>
-            </a:pPr>
             <a:r>
               <a:rPr lang="en-US" sz="2200" dirty="0">
                 <a:solidFill>
@@ -17531,16 +17042,34 @@
         </p:nvGraphicFramePr>
         <p:xfrm>
           <a:off x="2377440" y="1280160"/>
-          <a:ext cx="4389120" cy="914400"/>
+          <a:ext cx="4389120" cy="3236976"/>
         </p:xfrm>
         <a:graphic>
           <a:graphicData uri="http://schemas.openxmlformats.org/drawingml/2006/table">
             <a:tbl>
               <a:tblPr/>
               <a:tblGrid>
-                <a:gridCol w="731520"/>
-                <a:gridCol w="365760"/>
-                <a:gridCol w="3291840"/>
+                <a:gridCol w="731520">
+                  <a:extLst>
+                    <a:ext uri="{9D8B030D-6E8A-4147-A177-3AD203B41FA5}">
+                      <a16:colId xmlns:a16="http://schemas.microsoft.com/office/drawing/2014/main" val="20000"/>
+                    </a:ext>
+                  </a:extLst>
+                </a:gridCol>
+                <a:gridCol w="365760">
+                  <a:extLst>
+                    <a:ext uri="{9D8B030D-6E8A-4147-A177-3AD203B41FA5}">
+                      <a16:colId xmlns:a16="http://schemas.microsoft.com/office/drawing/2014/main" val="20001"/>
+                    </a:ext>
+                  </a:extLst>
+                </a:gridCol>
+                <a:gridCol w="3291840">
+                  <a:extLst>
+                    <a:ext uri="{9D8B030D-6E8A-4147-A177-3AD203B41FA5}">
+                      <a16:colId xmlns:a16="http://schemas.microsoft.com/office/drawing/2014/main" val="20002"/>
+                    </a:ext>
+                  </a:extLst>
+                </a:gridCol>
               </a:tblGrid>
               <a:tr h="292608">
                 <a:tc>
@@ -17548,7 +17077,7 @@
                     <a:bodyPr/>
                     <a:lstStyle/>
                     <a:p>
-                      <a:pPr algn="r" indent="0" marL="0">
+                      <a:pPr marL="0" indent="0" algn="r">
                         <a:buNone/>
                       </a:pPr>
                       <a:r>
@@ -17582,7 +17111,7 @@
                     <a:bodyPr/>
                     <a:lstStyle/>
                     <a:p>
-                      <a:pPr algn="ctr" indent="0" marL="0">
+                      <a:pPr marL="0" indent="0" algn="ctr">
                         <a:buNone/>
                       </a:pPr>
                       <a:r>
@@ -17616,7 +17145,7 @@
                     <a:bodyPr/>
                     <a:lstStyle/>
                     <a:p>
-                      <a:pPr algn="l" indent="0" marL="0">
+                      <a:pPr marL="0" indent="0" algn="l">
                         <a:buNone/>
                       </a:pPr>
                       <a:r>
@@ -17645,6 +17174,11 @@
                     </a:lnB>
                   </a:tcPr>
                 </a:tc>
+                <a:extLst>
+                  <a:ext uri="{0D108BD9-81ED-4DB2-BD59-A6C34878D82A}">
+                    <a16:rowId xmlns:a16="http://schemas.microsoft.com/office/drawing/2014/main" val="10000"/>
+                  </a:ext>
+                </a:extLst>
               </a:tr>
               <a:tr h="292608">
                 <a:tc>
@@ -17652,7 +17186,7 @@
                     <a:bodyPr/>
                     <a:lstStyle/>
                     <a:p>
-                      <a:pPr algn="r" indent="0" marL="0">
+                      <a:pPr marL="0" indent="0" algn="r">
                         <a:buNone/>
                       </a:pPr>
                       <a:r>
@@ -17686,7 +17220,7 @@
                     <a:bodyPr/>
                     <a:lstStyle/>
                     <a:p>
-                      <a:pPr algn="ctr" indent="0" marL="0">
+                      <a:pPr marL="0" indent="0" algn="ctr">
                         <a:buNone/>
                       </a:pPr>
                       <a:r>
@@ -17720,7 +17254,7 @@
                     <a:bodyPr/>
                     <a:lstStyle/>
                     <a:p>
-                      <a:pPr algn="l" indent="0" marL="0">
+                      <a:pPr marL="0" indent="0" algn="l">
                         <a:buNone/>
                       </a:pPr>
                       <a:r>
@@ -17749,6 +17283,11 @@
                     </a:lnB>
                   </a:tcPr>
                 </a:tc>
+                <a:extLst>
+                  <a:ext uri="{0D108BD9-81ED-4DB2-BD59-A6C34878D82A}">
+                    <a16:rowId xmlns:a16="http://schemas.microsoft.com/office/drawing/2014/main" val="10001"/>
+                  </a:ext>
+                </a:extLst>
               </a:tr>
               <a:tr h="292608">
                 <a:tc>
@@ -17756,7 +17295,7 @@
                     <a:bodyPr/>
                     <a:lstStyle/>
                     <a:p>
-                      <a:pPr algn="r" indent="0" marL="0">
+                      <a:pPr marL="0" indent="0" algn="r">
                         <a:buNone/>
                       </a:pPr>
                       <a:r>
@@ -17790,7 +17329,7 @@
                     <a:bodyPr/>
                     <a:lstStyle/>
                     <a:p>
-                      <a:pPr algn="ctr" indent="0" marL="0">
+                      <a:pPr marL="0" indent="0" algn="ctr">
                         <a:buNone/>
                       </a:pPr>
                       <a:r>
@@ -17824,7 +17363,7 @@
                     <a:bodyPr/>
                     <a:lstStyle/>
                     <a:p>
-                      <a:pPr algn="l" indent="0" marL="0">
+                      <a:pPr marL="0" indent="0" algn="l">
                         <a:buNone/>
                       </a:pPr>
                       <a:r>
@@ -17853,6 +17392,11 @@
                     </a:lnB>
                   </a:tcPr>
                 </a:tc>
+                <a:extLst>
+                  <a:ext uri="{0D108BD9-81ED-4DB2-BD59-A6C34878D82A}">
+                    <a16:rowId xmlns:a16="http://schemas.microsoft.com/office/drawing/2014/main" val="10002"/>
+                  </a:ext>
+                </a:extLst>
               </a:tr>
               <a:tr h="292608">
                 <a:tc>
@@ -17860,7 +17404,7 @@
                     <a:bodyPr/>
                     <a:lstStyle/>
                     <a:p>
-                      <a:pPr algn="r" indent="0" marL="0">
+                      <a:pPr marL="0" indent="0" algn="r">
                         <a:buNone/>
                       </a:pPr>
                       <a:r>
@@ -17894,7 +17438,7 @@
                     <a:bodyPr/>
                     <a:lstStyle/>
                     <a:p>
-                      <a:pPr algn="ctr" indent="0" marL="0">
+                      <a:pPr marL="0" indent="0" algn="ctr">
                         <a:buNone/>
                       </a:pPr>
                       <a:r>
@@ -17928,7 +17472,7 @@
                     <a:bodyPr/>
                     <a:lstStyle/>
                     <a:p>
-                      <a:pPr algn="l" indent="0" marL="0">
+                      <a:pPr marL="0" indent="0" algn="l">
                         <a:buNone/>
                       </a:pPr>
                       <a:r>
@@ -17957,6 +17501,11 @@
                     </a:lnB>
                   </a:tcPr>
                 </a:tc>
+                <a:extLst>
+                  <a:ext uri="{0D108BD9-81ED-4DB2-BD59-A6C34878D82A}">
+                    <a16:rowId xmlns:a16="http://schemas.microsoft.com/office/drawing/2014/main" val="10003"/>
+                  </a:ext>
+                </a:extLst>
               </a:tr>
               <a:tr h="292608">
                 <a:tc>
@@ -17964,7 +17513,7 @@
                     <a:bodyPr/>
                     <a:lstStyle/>
                     <a:p>
-                      <a:pPr algn="r" indent="0" marL="0">
+                      <a:pPr marL="0" indent="0" algn="r">
                         <a:buNone/>
                       </a:pPr>
                       <a:r>
@@ -17998,7 +17547,7 @@
                     <a:bodyPr/>
                     <a:lstStyle/>
                     <a:p>
-                      <a:pPr algn="ctr" indent="0" marL="0">
+                      <a:pPr marL="0" indent="0" algn="ctr">
                         <a:buNone/>
                       </a:pPr>
                       <a:r>
@@ -18032,7 +17581,7 @@
                     <a:bodyPr/>
                     <a:lstStyle/>
                     <a:p>
-                      <a:pPr algn="l" indent="0" marL="0">
+                      <a:pPr marL="0" indent="0" algn="l">
                         <a:buNone/>
                       </a:pPr>
                       <a:r>
@@ -18061,6 +17610,11 @@
                     </a:lnB>
                   </a:tcPr>
                 </a:tc>
+                <a:extLst>
+                  <a:ext uri="{0D108BD9-81ED-4DB2-BD59-A6C34878D82A}">
+                    <a16:rowId xmlns:a16="http://schemas.microsoft.com/office/drawing/2014/main" val="10004"/>
+                  </a:ext>
+                </a:extLst>
               </a:tr>
               <a:tr h="292608">
                 <a:tc>
@@ -18068,7 +17622,7 @@
                     <a:bodyPr/>
                     <a:lstStyle/>
                     <a:p>
-                      <a:pPr algn="r" indent="0" marL="0">
+                      <a:pPr marL="0" indent="0" algn="r">
                         <a:buNone/>
                       </a:pPr>
                       <a:r>
@@ -18102,7 +17656,7 @@
                     <a:bodyPr/>
                     <a:lstStyle/>
                     <a:p>
-                      <a:pPr algn="ctr" indent="0" marL="0">
+                      <a:pPr marL="0" indent="0" algn="ctr">
                         <a:buNone/>
                       </a:pPr>
                       <a:r>
@@ -18136,7 +17690,7 @@
                     <a:bodyPr/>
                     <a:lstStyle/>
                     <a:p>
-                      <a:pPr algn="l" indent="0" marL="0">
+                      <a:pPr marL="0" indent="0" algn="l">
                         <a:buNone/>
                       </a:pPr>
                       <a:r>
@@ -18165,6 +17719,11 @@
                     </a:lnB>
                   </a:tcPr>
                 </a:tc>
+                <a:extLst>
+                  <a:ext uri="{0D108BD9-81ED-4DB2-BD59-A6C34878D82A}">
+                    <a16:rowId xmlns:a16="http://schemas.microsoft.com/office/drawing/2014/main" val="10005"/>
+                  </a:ext>
+                </a:extLst>
               </a:tr>
               <a:tr h="292608">
                 <a:tc>
@@ -18172,7 +17731,7 @@
                     <a:bodyPr/>
                     <a:lstStyle/>
                     <a:p>
-                      <a:pPr algn="r" indent="0" marL="0">
+                      <a:pPr marL="0" indent="0" algn="r">
                         <a:buNone/>
                       </a:pPr>
                       <a:r>
@@ -18206,7 +17765,7 @@
                     <a:bodyPr/>
                     <a:lstStyle/>
                     <a:p>
-                      <a:pPr algn="ctr" indent="0" marL="0">
+                      <a:pPr marL="0" indent="0" algn="ctr">
                         <a:buNone/>
                       </a:pPr>
                       <a:r>
@@ -18240,7 +17799,7 @@
                     <a:bodyPr/>
                     <a:lstStyle/>
                     <a:p>
-                      <a:pPr algn="l" indent="0" marL="0">
+                      <a:pPr marL="0" indent="0" algn="l">
                         <a:buNone/>
                       </a:pPr>
                       <a:r>
@@ -18269,6 +17828,11 @@
                     </a:lnB>
                   </a:tcPr>
                 </a:tc>
+                <a:extLst>
+                  <a:ext uri="{0D108BD9-81ED-4DB2-BD59-A6C34878D82A}">
+                    <a16:rowId xmlns:a16="http://schemas.microsoft.com/office/drawing/2014/main" val="10006"/>
+                  </a:ext>
+                </a:extLst>
               </a:tr>
             </a:tbl>
           </a:graphicData>
@@ -18295,7 +17859,7 @@
           <a:bodyPr wrap="square" lIns="0" tIns="0" rIns="0" bIns="0" rtlCol="0" anchor="ctr"/>
           <a:lstStyle/>
           <a:p>
-            <a:pPr algn="ctr" indent="0" marL="0">
+            <a:pPr marL="0" indent="0" algn="ctr">
               <a:buNone/>
             </a:pPr>
             <a:r>
@@ -18331,7 +17895,7 @@
           <a:bodyPr wrap="square" lIns="0" tIns="0" rIns="0" bIns="0" rtlCol="0" anchor="ctr"/>
           <a:lstStyle/>
           <a:p>
-            <a:pPr algn="ctr" indent="0" marL="0">
+            <a:pPr marL="0" indent="0" algn="ctr">
               <a:buNone/>
             </a:pPr>
             <a:r>
@@ -18345,7 +17909,7 @@
             <a:endParaRPr lang="en-US" sz="1100" dirty="0"/>
           </a:p>
           <a:p>
-            <a:pPr algn="ctr" indent="0" marL="0">
+            <a:pPr marL="0" indent="0" algn="ctr">
               <a:buNone/>
             </a:pPr>
             <a:r>
@@ -18406,7 +17970,7 @@
           <a:bodyPr wrap="square" lIns="0" tIns="0" rIns="0" bIns="0" rtlCol="0" anchor="ctr"/>
           <a:lstStyle/>
           <a:p>
-            <a:pPr indent="0" marL="0">
+            <a:pPr marL="0" indent="0">
               <a:buNone/>
             </a:pPr>
             <a:r>
@@ -18457,12 +18021,6 @@
               </a:rPr>
               <a:t>Manual-Refactor </a:t>
             </a:r>
-            <a:pPr indent="0" marL="0">
-              <a:spcAft>
-                <a:spcPts val="1000"/>
-              </a:spcAft>
-              <a:buNone/>
-            </a:pPr>
             <a:r>
               <a:rPr lang="en-US" sz="1800" dirty="0">
                 <a:solidFill>
@@ -18489,12 +18047,6 @@
               </a:rPr>
               <a:t>Ordering </a:t>
             </a:r>
-            <a:pPr indent="0" marL="0">
-              <a:spcAft>
-                <a:spcPts val="1000"/>
-              </a:spcAft>
-              <a:buNone/>
-            </a:pPr>
             <a:r>
               <a:rPr lang="en-US" sz="1800" dirty="0">
                 <a:solidFill>
@@ -18521,12 +18073,6 @@
               </a:rPr>
               <a:t>Rework </a:t>
             </a:r>
-            <a:pPr indent="0" marL="0">
-              <a:spcAft>
-                <a:spcPts val="1000"/>
-              </a:spcAft>
-              <a:buNone/>
-            </a:pPr>
             <a:r>
               <a:rPr lang="en-US" sz="1800" dirty="0">
                 <a:solidFill>
@@ -18553,12 +18099,6 @@
               </a:rPr>
               <a:t>Hygiene </a:t>
             </a:r>
-            <a:pPr indent="0" marL="0">
-              <a:spcAft>
-                <a:spcPts val="1000"/>
-              </a:spcAft>
-              <a:buNone/>
-            </a:pPr>
             <a:r>
               <a:rPr lang="en-US" sz="1800" dirty="0">
                 <a:solidFill>
@@ -18872,4 +18412,319 @@
     </a:ext>
   </a:extLst>
 </a:theme>
+</file>
+
+<file path=ppt/theme/theme2.xml><?xml version="1.0" encoding="utf-8"?>
+<a:theme xmlns:a="http://schemas.openxmlformats.org/drawingml/2006/main" name="Office Theme">
+  <a:themeElements>
+    <a:clrScheme name="Office">
+      <a:dk1>
+        <a:sysClr val="windowText" lastClr="000000"/>
+      </a:dk1>
+      <a:lt1>
+        <a:sysClr val="window" lastClr="FFFFFF"/>
+      </a:lt1>
+      <a:dk2>
+        <a:srgbClr val="0E2841"/>
+      </a:dk2>
+      <a:lt2>
+        <a:srgbClr val="E8E8E8"/>
+      </a:lt2>
+      <a:accent1>
+        <a:srgbClr val="156082"/>
+      </a:accent1>
+      <a:accent2>
+        <a:srgbClr val="E97132"/>
+      </a:accent2>
+      <a:accent3>
+        <a:srgbClr val="196B24"/>
+      </a:accent3>
+      <a:accent4>
+        <a:srgbClr val="0F9ED5"/>
+      </a:accent4>
+      <a:accent5>
+        <a:srgbClr val="A02B93"/>
+      </a:accent5>
+      <a:accent6>
+        <a:srgbClr val="4EA72E"/>
+      </a:accent6>
+      <a:hlink>
+        <a:srgbClr val="467886"/>
+      </a:hlink>
+      <a:folHlink>
+        <a:srgbClr val="96607D"/>
+      </a:folHlink>
+    </a:clrScheme>
+    <a:fontScheme name="Office">
+      <a:majorFont>
+        <a:latin typeface="Aptos Display" panose="02110004020202020204"/>
+        <a:ea typeface=""/>
+        <a:cs typeface=""/>
+        <a:font script="Jpan" typeface="游ゴシック Light"/>
+        <a:font script="Hang" typeface="맑은 고딕"/>
+        <a:font script="Hans" typeface="等线 Light"/>
+        <a:font script="Hant" typeface="新細明體"/>
+        <a:font script="Arab" typeface="Times New Roman"/>
+        <a:font script="Hebr" typeface="Times New Roman"/>
+        <a:font script="Thai" typeface="Angsana New"/>
+        <a:font script="Ethi" typeface="Nyala"/>
+        <a:font script="Beng" typeface="Vrinda"/>
+        <a:font script="Gujr" typeface="Shruti"/>
+        <a:font script="Khmr" typeface="MoolBoran"/>
+        <a:font script="Knda" typeface="Tunga"/>
+        <a:font script="Guru" typeface="Raavi"/>
+        <a:font script="Cans" typeface="Euphemia"/>
+        <a:font script="Cher" typeface="Plantagenet Cherokee"/>
+        <a:font script="Yiii" typeface="Microsoft Yi Baiti"/>
+        <a:font script="Tibt" typeface="Microsoft Himalaya"/>
+        <a:font script="Thaa" typeface="MV Boli"/>
+        <a:font script="Deva" typeface="Mangal"/>
+        <a:font script="Telu" typeface="Gautami"/>
+        <a:font script="Taml" typeface="Latha"/>
+        <a:font script="Syrc" typeface="Estrangelo Edessa"/>
+        <a:font script="Orya" typeface="Kalinga"/>
+        <a:font script="Mlym" typeface="Kartika"/>
+        <a:font script="Laoo" typeface="DokChampa"/>
+        <a:font script="Sinh" typeface="Iskoola Pota"/>
+        <a:font script="Mong" typeface="Mongolian Baiti"/>
+        <a:font script="Viet" typeface="Times New Roman"/>
+        <a:font script="Uigh" typeface="Microsoft Uighur"/>
+        <a:font script="Geor" typeface="Sylfaen"/>
+        <a:font script="Armn" typeface="Arial"/>
+        <a:font script="Bugi" typeface="Leelawadee UI"/>
+        <a:font script="Bopo" typeface="Microsoft JhengHei"/>
+        <a:font script="Java" typeface="Javanese Text"/>
+        <a:font script="Lisu" typeface="Segoe UI"/>
+        <a:font script="Mymr" typeface="Myanmar Text"/>
+        <a:font script="Nkoo" typeface="Ebrima"/>
+        <a:font script="Olck" typeface="Nirmala UI"/>
+        <a:font script="Osma" typeface="Ebrima"/>
+        <a:font script="Phag" typeface="Phagspa"/>
+        <a:font script="Syrn" typeface="Estrangelo Edessa"/>
+        <a:font script="Syrj" typeface="Estrangelo Edessa"/>
+        <a:font script="Syre" typeface="Estrangelo Edessa"/>
+        <a:font script="Sora" typeface="Nirmala UI"/>
+        <a:font script="Tale" typeface="Microsoft Tai Le"/>
+        <a:font script="Talu" typeface="Microsoft New Tai Lue"/>
+        <a:font script="Tfng" typeface="Ebrima"/>
+      </a:majorFont>
+      <a:minorFont>
+        <a:latin typeface="Aptos" panose="02110004020202020204"/>
+        <a:ea typeface=""/>
+        <a:cs typeface=""/>
+        <a:font script="Jpan" typeface="游ゴシック"/>
+        <a:font script="Hang" typeface="맑은 고딕"/>
+        <a:font script="Hans" typeface="等线"/>
+        <a:font script="Hant" typeface="新細明體"/>
+        <a:font script="Arab" typeface="Arial"/>
+        <a:font script="Hebr" typeface="Arial"/>
+        <a:font script="Thai" typeface="Cordia New"/>
+        <a:font script="Ethi" typeface="Nyala"/>
+        <a:font script="Beng" typeface="Vrinda"/>
+        <a:font script="Gujr" typeface="Shruti"/>
+        <a:font script="Khmr" typeface="DaunPenh"/>
+        <a:font script="Knda" typeface="Tunga"/>
+        <a:font script="Guru" typeface="Raavi"/>
+        <a:font script="Cans" typeface="Euphemia"/>
+        <a:font script="Cher" typeface="Plantagenet Cherokee"/>
+        <a:font script="Yiii" typeface="Microsoft Yi Baiti"/>
+        <a:font script="Tibt" typeface="Microsoft Himalaya"/>
+        <a:font script="Thaa" typeface="MV Boli"/>
+        <a:font script="Deva" typeface="Mangal"/>
+        <a:font script="Telu" typeface="Gautami"/>
+        <a:font script="Taml" typeface="Latha"/>
+        <a:font script="Syrc" typeface="Estrangelo Edessa"/>
+        <a:font script="Orya" typeface="Kalinga"/>
+        <a:font script="Mlym" typeface="Kartika"/>
+        <a:font script="Laoo" typeface="DokChampa"/>
+        <a:font script="Sinh" typeface="Iskoola Pota"/>
+        <a:font script="Mong" typeface="Mongolian Baiti"/>
+        <a:font script="Viet" typeface="Arial"/>
+        <a:font script="Uigh" typeface="Microsoft Uighur"/>
+        <a:font script="Geor" typeface="Sylfaen"/>
+        <a:font script="Armn" typeface="Arial"/>
+        <a:font script="Bugi" typeface="Leelawadee UI"/>
+        <a:font script="Bopo" typeface="Microsoft JhengHei"/>
+        <a:font script="Java" typeface="Javanese Text"/>
+        <a:font script="Lisu" typeface="Segoe UI"/>
+        <a:font script="Mymr" typeface="Myanmar Text"/>
+        <a:font script="Nkoo" typeface="Ebrima"/>
+        <a:font script="Olck" typeface="Nirmala UI"/>
+        <a:font script="Osma" typeface="Ebrima"/>
+        <a:font script="Phag" typeface="Phagspa"/>
+        <a:font script="Syrn" typeface="Estrangelo Edessa"/>
+        <a:font script="Syrj" typeface="Estrangelo Edessa"/>
+        <a:font script="Syre" typeface="Estrangelo Edessa"/>
+        <a:font script="Sora" typeface="Nirmala UI"/>
+        <a:font script="Tale" typeface="Microsoft Tai Le"/>
+        <a:font script="Talu" typeface="Microsoft New Tai Lue"/>
+        <a:font script="Tfng" typeface="Ebrima"/>
+      </a:minorFont>
+    </a:fontScheme>
+    <a:fmtScheme name="Office">
+      <a:fillStyleLst>
+        <a:solidFill>
+          <a:schemeClr val="phClr"/>
+        </a:solidFill>
+        <a:gradFill rotWithShape="1">
+          <a:gsLst>
+            <a:gs pos="0">
+              <a:schemeClr val="phClr">
+                <a:lumMod val="110000"/>
+                <a:satMod val="105000"/>
+                <a:tint val="67000"/>
+              </a:schemeClr>
+            </a:gs>
+            <a:gs pos="50000">
+              <a:schemeClr val="phClr">
+                <a:lumMod val="105000"/>
+                <a:satMod val="103000"/>
+                <a:tint val="73000"/>
+              </a:schemeClr>
+            </a:gs>
+            <a:gs pos="100000">
+              <a:schemeClr val="phClr">
+                <a:lumMod val="105000"/>
+                <a:satMod val="109000"/>
+                <a:tint val="81000"/>
+              </a:schemeClr>
+            </a:gs>
+          </a:gsLst>
+          <a:lin ang="5400000" scaled="0"/>
+        </a:gradFill>
+        <a:gradFill rotWithShape="1">
+          <a:gsLst>
+            <a:gs pos="0">
+              <a:schemeClr val="phClr">
+                <a:satMod val="103000"/>
+                <a:lumMod val="102000"/>
+                <a:tint val="94000"/>
+              </a:schemeClr>
+            </a:gs>
+            <a:gs pos="50000">
+              <a:schemeClr val="phClr">
+                <a:satMod val="110000"/>
+                <a:lumMod val="100000"/>
+                <a:shade val="100000"/>
+              </a:schemeClr>
+            </a:gs>
+            <a:gs pos="100000">
+              <a:schemeClr val="phClr">
+                <a:lumMod val="99000"/>
+                <a:satMod val="120000"/>
+                <a:shade val="78000"/>
+              </a:schemeClr>
+            </a:gs>
+          </a:gsLst>
+          <a:lin ang="5400000" scaled="0"/>
+        </a:gradFill>
+      </a:fillStyleLst>
+      <a:lnStyleLst>
+        <a:ln w="12700" cap="flat" cmpd="sng" algn="ctr">
+          <a:solidFill>
+            <a:schemeClr val="phClr"/>
+          </a:solidFill>
+          <a:prstDash val="solid"/>
+          <a:miter lim="800000"/>
+        </a:ln>
+        <a:ln w="19050" cap="flat" cmpd="sng" algn="ctr">
+          <a:solidFill>
+            <a:schemeClr val="phClr"/>
+          </a:solidFill>
+          <a:prstDash val="solid"/>
+          <a:miter lim="800000"/>
+        </a:ln>
+        <a:ln w="25400" cap="flat" cmpd="sng" algn="ctr">
+          <a:solidFill>
+            <a:schemeClr val="phClr"/>
+          </a:solidFill>
+          <a:prstDash val="solid"/>
+          <a:miter lim="800000"/>
+        </a:ln>
+      </a:lnStyleLst>
+      <a:effectStyleLst>
+        <a:effectStyle>
+          <a:effectLst/>
+        </a:effectStyle>
+        <a:effectStyle>
+          <a:effectLst/>
+        </a:effectStyle>
+        <a:effectStyle>
+          <a:effectLst>
+            <a:outerShdw blurRad="57150" dist="19050" dir="5400000" algn="ctr" rotWithShape="0">
+              <a:srgbClr val="000000">
+                <a:alpha val="63000"/>
+              </a:srgbClr>
+            </a:outerShdw>
+          </a:effectLst>
+        </a:effectStyle>
+      </a:effectStyleLst>
+      <a:bgFillStyleLst>
+        <a:solidFill>
+          <a:schemeClr val="phClr"/>
+        </a:solidFill>
+        <a:solidFill>
+          <a:schemeClr val="phClr">
+            <a:tint val="95000"/>
+            <a:satMod val="170000"/>
+          </a:schemeClr>
+        </a:solidFill>
+        <a:gradFill rotWithShape="1">
+          <a:gsLst>
+            <a:gs pos="0">
+              <a:schemeClr val="phClr">
+                <a:tint val="93000"/>
+                <a:satMod val="150000"/>
+                <a:shade val="98000"/>
+                <a:lumMod val="102000"/>
+              </a:schemeClr>
+            </a:gs>
+            <a:gs pos="50000">
+              <a:schemeClr val="phClr">
+                <a:tint val="98000"/>
+                <a:satMod val="130000"/>
+                <a:shade val="90000"/>
+                <a:lumMod val="103000"/>
+              </a:schemeClr>
+            </a:gs>
+            <a:gs pos="100000">
+              <a:schemeClr val="phClr">
+                <a:shade val="63000"/>
+                <a:satMod val="120000"/>
+              </a:schemeClr>
+            </a:gs>
+          </a:gsLst>
+          <a:lin ang="5400000" scaled="0"/>
+        </a:gradFill>
+      </a:bgFillStyleLst>
+    </a:fmtScheme>
+  </a:themeElements>
+  <a:objectDefaults>
+    <a:lnDef>
+      <a:spPr/>
+      <a:bodyPr/>
+      <a:lstStyle/>
+      <a:style>
+        <a:lnRef idx="2">
+          <a:schemeClr val="accent1"/>
+        </a:lnRef>
+        <a:fillRef idx="0">
+          <a:schemeClr val="accent1"/>
+        </a:fillRef>
+        <a:effectRef idx="1">
+          <a:schemeClr val="accent1"/>
+        </a:effectRef>
+        <a:fontRef idx="minor">
+          <a:schemeClr val="tx1"/>
+        </a:fontRef>
+      </a:style>
+    </a:lnDef>
+  </a:objectDefaults>
+  <a:extraClrSchemeLst/>
+  <a:extLst>
+    <a:ext uri="{05A4C25C-085E-4340-85A3-A5531E510DB2}">
+      <thm15:themeFamily xmlns:thm15="http://schemas.microsoft.com/office/thememl/2012/main" name="Office Theme" id="{2E142A2C-CD16-42D6-873A-C26D2A0506FA}" vid="{1BDDFF52-6CD6-40A5-AB3C-68EB2F1E4D0A}"/>
+    </a:ext>
+  </a:extLst>
+</a:theme>
 </file>
--- a/presentation/slides.pptx
+++ b/presentation/slides.pptx
@@ -4,9 +4,6 @@
   <p:sldMasterIdLst>
     <p:sldMasterId id="2147483648" r:id="rId1"/>
   </p:sldMasterIdLst>
-  <p:notesMasterIdLst>
-    <p:notesMasterId r:id="rId30"/>
-  </p:notesMasterIdLst>
   <p:sldIdLst>
     <p:sldId id="256" r:id="rId2"/>
     <p:sldId id="257" r:id="rId3"/>
@@ -37,7 +34,10 @@
     <p:sldId id="282" r:id="rId28"/>
     <p:sldId id="283" r:id="rId29"/>
   </p:sldIdLst>
-  <p:sldSz cx="9144000" cy="5143500" type="screen16x9"/>
+  <p:notesMasterIdLst>
+    <p:notesMasterId r:id="rId30"/>
+  </p:notesMasterIdLst>
+  <p:sldSz cx="9144000" cy="5143500"/>
   <p:notesSz cx="5143500" cy="9144000"/>
   <p:defaultTextStyle>
     <a:lvl1pPr marL="0" algn="l" defTabSz="914400" rtl="0" eaLnBrk="1" latinLnBrk="0" hangingPunct="1">
@@ -131,20 +131,13 @@
       </a:defRPr>
     </a:lvl9pPr>
   </p:defaultTextStyle>
-  <p:extLst>
-    <p:ext uri="{EFAFB233-063F-42B5-8137-9DF3F51BA10A}">
-      <p15:sldGuideLst xmlns:p15="http://schemas.microsoft.com/office/powerpoint/2012/main"/>
-    </p:ext>
-  </p:extLst>
 </p:presentation>
 </file>
 
 <file path=ppt/charts/chart1.xml><?xml version="1.0" encoding="utf-8"?>
-<c:chartSpace xmlns:c="http://schemas.openxmlformats.org/drawingml/2006/chart" xmlns:a="http://schemas.openxmlformats.org/drawingml/2006/main" xmlns:r="http://schemas.openxmlformats.org/officeDocument/2006/relationships" xmlns:c16r2="http://schemas.microsoft.com/office/drawing/2015/06/chart">
+<c:chartSpace xmlns:c="http://schemas.openxmlformats.org/drawingml/2006/chart" xmlns:a="http://schemas.openxmlformats.org/drawingml/2006/main" xmlns:r="http://schemas.openxmlformats.org/officeDocument/2006/relationships">
   <c:date1904 val="0"/>
-  <c:lang val="en-GB"/>
   <c:roundedCorners val="1"/>
-  <c:style val="2"/>
   <c:chart>
     <c:title>
       <c:tx>
@@ -161,7 +154,7 @@
               </a:defRPr>
             </a:pPr>
             <a:r>
-              <a:rPr lang="en-GB" sz="1100" b="0" i="0" u="none" strike="noStrike">
+              <a:rPr sz="1100" b="0" i="0" u="none" strike="noStrike">
                 <a:solidFill>
                   <a:srgbClr val="333333"/>
                 </a:solidFill>
@@ -172,13 +165,13 @@
           </a:p>
         </c:rich>
       </c:tx>
+      <c:layout/>
       <c:overlay val="0"/>
     </c:title>
     <c:autoTitleDeleted val="0"/>
     <c:plotArea>
       <c:layout/>
       <c:lineChart>
-        <c:grouping val="standard"/>
         <c:varyColors val="0"/>
         <c:ser>
           <c:idx val="0"/>
@@ -195,6 +188,9 @@
             </c:strRef>
           </c:tx>
           <c:spPr>
+            <a:solidFill>
+              <a:srgbClr val="0000CD"/>
+            </a:solidFill>
             <a:ln w="31750" cap="flat">
               <a:solidFill>
                 <a:srgbClr val="0000CD"/>
@@ -204,6 +200,31 @@
             </a:ln>
             <a:effectLst/>
           </c:spPr>
+          <c:invertIfNegative val="0"/>
+          <c:dLbls>
+            <c:numFmt formatCode="#,##0" sourceLinked="0"/>
+            <c:txPr>
+              <a:bodyPr/>
+              <a:lstStyle/>
+              <a:p>
+                <a:pPr>
+                  <a:defRPr b="0" i="0" strike="noStrike" sz="1200" u="none">
+                    <a:solidFill>
+                      <a:srgbClr val="000000"/>
+                    </a:solidFill>
+                    <a:latin typeface="Arial"/>
+                  </a:defRPr>
+                </a:pPr>
+              </a:p>
+            </c:txPr>
+            <c:showLegendKey val="0"/>
+            <c:showVal val="0"/>
+            <c:showCatName val="0"/>
+            <c:showSerName val="0"/>
+            <c:showPercent val="0"/>
+            <c:showBubbleSize val="0"/>
+            <c:showLeaderLines val="0"/>
+          </c:dLbls>
           <c:marker>
             <c:symbol val="circle"/>
             <c:size val="6"/>
@@ -222,30 +243,32 @@
             </c:spPr>
           </c:marker>
           <c:cat>
-            <c:strRef>
+            <c:multiLvlStrRef>
               <c:f>Sheet1!$A$2:$A$7</c:f>
-              <c:strCache>
+              <c:multiLvlStrCache>
                 <c:ptCount val="6"/>
-                <c:pt idx="0">
-                  <c:v>S1</c:v>
-                </c:pt>
-                <c:pt idx="1">
-                  <c:v>S2</c:v>
-                </c:pt>
-                <c:pt idx="2">
-                  <c:v>S3</c:v>
-                </c:pt>
-                <c:pt idx="3">
-                  <c:v>S4</c:v>
-                </c:pt>
-                <c:pt idx="4">
-                  <c:v>S5</c:v>
-                </c:pt>
-                <c:pt idx="5">
-                  <c:v>S6</c:v>
-                </c:pt>
-              </c:strCache>
-            </c:strRef>
+                <c:lvl>
+                  <c:pt idx="0">
+                    <c:v>S1</c:v>
+                  </c:pt>
+                  <c:pt idx="1">
+                    <c:v>S2</c:v>
+                  </c:pt>
+                  <c:pt idx="2">
+                    <c:v>S3</c:v>
+                  </c:pt>
+                  <c:pt idx="3">
+                    <c:v>S4</c:v>
+                  </c:pt>
+                  <c:pt idx="4">
+                    <c:v>S5</c:v>
+                  </c:pt>
+                  <c:pt idx="5">
+                    <c:v>S6</c:v>
+                  </c:pt>
+                </c:lvl>
+              </c:multiLvlStrCache>
+            </c:multiLvlStrRef>
           </c:cat>
           <c:val>
             <c:numRef>
@@ -275,11 +298,6 @@
             </c:numRef>
           </c:val>
           <c:smooth val="0"/>
-          <c:extLst>
-            <c:ext xmlns:c16="http://schemas.microsoft.com/office/drawing/2014/chart" uri="{C3380CC4-5D6E-409C-BE32-E72D297353CC}">
-              <c16:uniqueId val="{00000000-B386-AD4E-BD58-9F83B0D67BF5}"/>
-            </c:ext>
-          </c:extLst>
         </c:ser>
         <c:ser>
           <c:idx val="1"/>
@@ -296,6 +314,9 @@
             </c:strRef>
           </c:tx>
           <c:spPr>
+            <a:solidFill>
+              <a:srgbClr val="B25500"/>
+            </a:solidFill>
             <a:ln w="31750" cap="flat">
               <a:solidFill>
                 <a:srgbClr val="B25500"/>
@@ -305,6 +326,31 @@
             </a:ln>
             <a:effectLst/>
           </c:spPr>
+          <c:invertIfNegative val="0"/>
+          <c:dLbls>
+            <c:numFmt formatCode="#,##0" sourceLinked="0"/>
+            <c:txPr>
+              <a:bodyPr/>
+              <a:lstStyle/>
+              <a:p>
+                <a:pPr>
+                  <a:defRPr b="0" i="0" strike="noStrike" sz="1200" u="none">
+                    <a:solidFill>
+                      <a:srgbClr val="000000"/>
+                    </a:solidFill>
+                    <a:latin typeface="Arial"/>
+                  </a:defRPr>
+                </a:pPr>
+              </a:p>
+            </c:txPr>
+            <c:showLegendKey val="0"/>
+            <c:showVal val="0"/>
+            <c:showCatName val="0"/>
+            <c:showSerName val="0"/>
+            <c:showPercent val="0"/>
+            <c:showBubbleSize val="0"/>
+            <c:showLeaderLines val="0"/>
+          </c:dLbls>
           <c:marker>
             <c:symbol val="circle"/>
             <c:size val="6"/>
@@ -323,30 +369,32 @@
             </c:spPr>
           </c:marker>
           <c:cat>
-            <c:strRef>
+            <c:multiLvlStrRef>
               <c:f>Sheet1!$A$2:$A$7</c:f>
-              <c:strCache>
+              <c:multiLvlStrCache>
                 <c:ptCount val="6"/>
-                <c:pt idx="0">
-                  <c:v>S1</c:v>
-                </c:pt>
-                <c:pt idx="1">
-                  <c:v>S2</c:v>
-                </c:pt>
-                <c:pt idx="2">
-                  <c:v>S3</c:v>
-                </c:pt>
-                <c:pt idx="3">
-                  <c:v>S4</c:v>
-                </c:pt>
-                <c:pt idx="4">
-                  <c:v>S5</c:v>
-                </c:pt>
-                <c:pt idx="5">
-                  <c:v>S6</c:v>
-                </c:pt>
-              </c:strCache>
-            </c:strRef>
+                <c:lvl>
+                  <c:pt idx="0">
+                    <c:v>S1</c:v>
+                  </c:pt>
+                  <c:pt idx="1">
+                    <c:v>S2</c:v>
+                  </c:pt>
+                  <c:pt idx="2">
+                    <c:v>S3</c:v>
+                  </c:pt>
+                  <c:pt idx="3">
+                    <c:v>S4</c:v>
+                  </c:pt>
+                  <c:pt idx="4">
+                    <c:v>S5</c:v>
+                  </c:pt>
+                  <c:pt idx="5">
+                    <c:v>S6</c:v>
+                  </c:pt>
+                </c:lvl>
+              </c:multiLvlStrCache>
+            </c:multiLvlStrRef>
           </c:cat>
           <c:val>
             <c:numRef>
@@ -376,24 +424,35 @@
             </c:numRef>
           </c:val>
           <c:smooth val="0"/>
-          <c:extLst>
-            <c:ext xmlns:c16="http://schemas.microsoft.com/office/drawing/2014/chart" uri="{C3380CC4-5D6E-409C-BE32-E72D297353CC}">
-              <c16:uniqueId val="{00000001-B386-AD4E-BD58-9F83B0D67BF5}"/>
-            </c:ext>
-          </c:extLst>
         </c:ser>
         <c:dLbls>
+          <c:numFmt formatCode="#,##0" sourceLinked="0"/>
+          <c:txPr>
+            <a:bodyPr/>
+            <a:lstStyle/>
+            <a:p>
+              <a:pPr>
+                <a:defRPr b="0" i="0" strike="noStrike" sz="1200" u="none">
+                  <a:solidFill>
+                    <a:srgbClr val="000000"/>
+                  </a:solidFill>
+                  <a:latin typeface="Arial"/>
+                </a:defRPr>
+              </a:pPr>
+            </a:p>
+          </c:txPr>
           <c:showLegendKey val="0"/>
           <c:showVal val="0"/>
           <c:showCatName val="0"/>
           <c:showSerName val="0"/>
           <c:showPercent val="0"/>
           <c:showBubbleSize val="0"/>
+          <c:showLeaderLines val="0"/>
         </c:dLbls>
         <c:marker val="1"/>
-        <c:smooth val="0"/>
         <c:axId val="2094734554"/>
         <c:axId val="2094734552"/>
+        <c:axId val="2094734556"/>
       </c:lineChart>
       <c:catAx>
         <c:axId val="2094734554"/>
@@ -434,7 +493,6 @@
         <c:crosses val="autoZero"/>
         <c:auto val="1"/>
         <c:lblAlgn val="ctr"/>
-        <c:lblOffset val="100"/>
         <c:noMultiLvlLbl val="1"/>
       </c:catAx>
       <c:valAx>
@@ -506,7 +564,7 @@
         <a:lstStyle/>
         <a:p>
           <a:pPr>
-            <a:defRPr sz="900"/>
+            <a:defRPr sz="900">      </a:defRPr>
           </a:pPr>
           <a:endParaRPr lang="en-US"/>
         </a:p>
@@ -514,7 +572,6 @@
     </c:legend>
     <c:plotVisOnly val="1"/>
     <c:dispBlanksAs val="span"/>
-    <c:showDLblsOverMax val="1"/>
   </c:chart>
   <c:spPr>
     <a:noFill/>
@@ -530,11 +587,9 @@
 </file>
 
 <file path=ppt/charts/chart2.xml><?xml version="1.0" encoding="utf-8"?>
-<c:chartSpace xmlns:c="http://schemas.openxmlformats.org/drawingml/2006/chart" xmlns:a="http://schemas.openxmlformats.org/drawingml/2006/main" xmlns:r="http://schemas.openxmlformats.org/officeDocument/2006/relationships" xmlns:c16r2="http://schemas.microsoft.com/office/drawing/2015/06/chart">
+<c:chartSpace xmlns:c="http://schemas.openxmlformats.org/drawingml/2006/chart" xmlns:a="http://schemas.openxmlformats.org/drawingml/2006/main" xmlns:r="http://schemas.openxmlformats.org/officeDocument/2006/relationships">
   <c:date1904 val="0"/>
-  <c:lang val="en-GB"/>
   <c:roundedCorners val="1"/>
-  <c:style val="2"/>
   <c:chart>
     <c:title>
       <c:tx>
@@ -551,7 +606,7 @@
               </a:defRPr>
             </a:pPr>
             <a:r>
-              <a:rPr lang="en-GB" sz="1100" b="0" i="0" u="none" strike="noStrike">
+              <a:rPr sz="1100" b="0" i="0" u="none" strike="noStrike">
                 <a:solidFill>
                   <a:srgbClr val="333333"/>
                 </a:solidFill>
@@ -562,13 +617,13 @@
           </a:p>
         </c:rich>
       </c:tx>
+      <c:layout/>
       <c:overlay val="0"/>
     </c:title>
     <c:autoTitleDeleted val="0"/>
     <c:plotArea>
       <c:layout/>
       <c:lineChart>
-        <c:grouping val="standard"/>
         <c:varyColors val="0"/>
         <c:ser>
           <c:idx val="0"/>
@@ -585,6 +640,9 @@
             </c:strRef>
           </c:tx>
           <c:spPr>
+            <a:solidFill>
+              <a:srgbClr val="0000CD"/>
+            </a:solidFill>
             <a:ln w="31750" cap="flat">
               <a:solidFill>
                 <a:srgbClr val="0000CD"/>
@@ -594,6 +652,31 @@
             </a:ln>
             <a:effectLst/>
           </c:spPr>
+          <c:invertIfNegative val="0"/>
+          <c:dLbls>
+            <c:numFmt formatCode="#,##0" sourceLinked="0"/>
+            <c:txPr>
+              <a:bodyPr/>
+              <a:lstStyle/>
+              <a:p>
+                <a:pPr>
+                  <a:defRPr b="0" i="0" strike="noStrike" sz="1200" u="none">
+                    <a:solidFill>
+                      <a:srgbClr val="000000"/>
+                    </a:solidFill>
+                    <a:latin typeface="Arial"/>
+                  </a:defRPr>
+                </a:pPr>
+              </a:p>
+            </c:txPr>
+            <c:showLegendKey val="0"/>
+            <c:showVal val="0"/>
+            <c:showCatName val="0"/>
+            <c:showSerName val="0"/>
+            <c:showPercent val="0"/>
+            <c:showBubbleSize val="0"/>
+            <c:showLeaderLines val="0"/>
+          </c:dLbls>
           <c:marker>
             <c:symbol val="circle"/>
             <c:size val="6"/>
@@ -612,30 +695,32 @@
             </c:spPr>
           </c:marker>
           <c:cat>
-            <c:strRef>
+            <c:multiLvlStrRef>
               <c:f>Sheet1!$A$2:$A$7</c:f>
-              <c:strCache>
+              <c:multiLvlStrCache>
                 <c:ptCount val="6"/>
-                <c:pt idx="0">
-                  <c:v>S1</c:v>
-                </c:pt>
-                <c:pt idx="1">
-                  <c:v>S2</c:v>
-                </c:pt>
-                <c:pt idx="2">
-                  <c:v>S3</c:v>
-                </c:pt>
-                <c:pt idx="3">
-                  <c:v>S4</c:v>
-                </c:pt>
-                <c:pt idx="4">
-                  <c:v>S5</c:v>
-                </c:pt>
-                <c:pt idx="5">
-                  <c:v>S6</c:v>
-                </c:pt>
-              </c:strCache>
-            </c:strRef>
+                <c:lvl>
+                  <c:pt idx="0">
+                    <c:v>S1</c:v>
+                  </c:pt>
+                  <c:pt idx="1">
+                    <c:v>S2</c:v>
+                  </c:pt>
+                  <c:pt idx="2">
+                    <c:v>S3</c:v>
+                  </c:pt>
+                  <c:pt idx="3">
+                    <c:v>S4</c:v>
+                  </c:pt>
+                  <c:pt idx="4">
+                    <c:v>S5</c:v>
+                  </c:pt>
+                  <c:pt idx="5">
+                    <c:v>S6</c:v>
+                  </c:pt>
+                </c:lvl>
+              </c:multiLvlStrCache>
+            </c:multiLvlStrRef>
           </c:cat>
           <c:val>
             <c:numRef>
@@ -665,11 +750,6 @@
             </c:numRef>
           </c:val>
           <c:smooth val="0"/>
-          <c:extLst>
-            <c:ext xmlns:c16="http://schemas.microsoft.com/office/drawing/2014/chart" uri="{C3380CC4-5D6E-409C-BE32-E72D297353CC}">
-              <c16:uniqueId val="{00000000-6956-9C4F-AA1C-53C5D05B5B4C}"/>
-            </c:ext>
-          </c:extLst>
         </c:ser>
         <c:ser>
           <c:idx val="1"/>
@@ -686,6 +766,9 @@
             </c:strRef>
           </c:tx>
           <c:spPr>
+            <a:solidFill>
+              <a:srgbClr val="B25500"/>
+            </a:solidFill>
             <a:ln w="31750" cap="flat">
               <a:solidFill>
                 <a:srgbClr val="B25500"/>
@@ -695,6 +778,31 @@
             </a:ln>
             <a:effectLst/>
           </c:spPr>
+          <c:invertIfNegative val="0"/>
+          <c:dLbls>
+            <c:numFmt formatCode="#,##0" sourceLinked="0"/>
+            <c:txPr>
+              <a:bodyPr/>
+              <a:lstStyle/>
+              <a:p>
+                <a:pPr>
+                  <a:defRPr b="0" i="0" strike="noStrike" sz="1200" u="none">
+                    <a:solidFill>
+                      <a:srgbClr val="000000"/>
+                    </a:solidFill>
+                    <a:latin typeface="Arial"/>
+                  </a:defRPr>
+                </a:pPr>
+              </a:p>
+            </c:txPr>
+            <c:showLegendKey val="0"/>
+            <c:showVal val="0"/>
+            <c:showCatName val="0"/>
+            <c:showSerName val="0"/>
+            <c:showPercent val="0"/>
+            <c:showBubbleSize val="0"/>
+            <c:showLeaderLines val="0"/>
+          </c:dLbls>
           <c:marker>
             <c:symbol val="circle"/>
             <c:size val="6"/>
@@ -713,30 +821,32 @@
             </c:spPr>
           </c:marker>
           <c:cat>
-            <c:strRef>
+            <c:multiLvlStrRef>
               <c:f>Sheet1!$A$2:$A$7</c:f>
-              <c:strCache>
+              <c:multiLvlStrCache>
                 <c:ptCount val="6"/>
-                <c:pt idx="0">
-                  <c:v>S1</c:v>
-                </c:pt>
-                <c:pt idx="1">
-                  <c:v>S2</c:v>
-                </c:pt>
-                <c:pt idx="2">
-                  <c:v>S3</c:v>
-                </c:pt>
-                <c:pt idx="3">
-                  <c:v>S4</c:v>
-                </c:pt>
-                <c:pt idx="4">
-                  <c:v>S5</c:v>
-                </c:pt>
-                <c:pt idx="5">
-                  <c:v>S6</c:v>
-                </c:pt>
-              </c:strCache>
-            </c:strRef>
+                <c:lvl>
+                  <c:pt idx="0">
+                    <c:v>S1</c:v>
+                  </c:pt>
+                  <c:pt idx="1">
+                    <c:v>S2</c:v>
+                  </c:pt>
+                  <c:pt idx="2">
+                    <c:v>S3</c:v>
+                  </c:pt>
+                  <c:pt idx="3">
+                    <c:v>S4</c:v>
+                  </c:pt>
+                  <c:pt idx="4">
+                    <c:v>S5</c:v>
+                  </c:pt>
+                  <c:pt idx="5">
+                    <c:v>S6</c:v>
+                  </c:pt>
+                </c:lvl>
+              </c:multiLvlStrCache>
+            </c:multiLvlStrRef>
           </c:cat>
           <c:val>
             <c:numRef>
@@ -766,24 +876,35 @@
             </c:numRef>
           </c:val>
           <c:smooth val="0"/>
-          <c:extLst>
-            <c:ext xmlns:c16="http://schemas.microsoft.com/office/drawing/2014/chart" uri="{C3380CC4-5D6E-409C-BE32-E72D297353CC}">
-              <c16:uniqueId val="{00000001-6956-9C4F-AA1C-53C5D05B5B4C}"/>
-            </c:ext>
-          </c:extLst>
         </c:ser>
         <c:dLbls>
+          <c:numFmt formatCode="#,##0" sourceLinked="0"/>
+          <c:txPr>
+            <a:bodyPr/>
+            <a:lstStyle/>
+            <a:p>
+              <a:pPr>
+                <a:defRPr b="0" i="0" strike="noStrike" sz="1200" u="none">
+                  <a:solidFill>
+                    <a:srgbClr val="000000"/>
+                  </a:solidFill>
+                  <a:latin typeface="Arial"/>
+                </a:defRPr>
+              </a:pPr>
+            </a:p>
+          </c:txPr>
           <c:showLegendKey val="0"/>
           <c:showVal val="0"/>
           <c:showCatName val="0"/>
           <c:showSerName val="0"/>
           <c:showPercent val="0"/>
           <c:showBubbleSize val="0"/>
+          <c:showLeaderLines val="0"/>
         </c:dLbls>
         <c:marker val="1"/>
-        <c:smooth val="0"/>
         <c:axId val="2094734554"/>
         <c:axId val="2094734552"/>
+        <c:axId val="2094734556"/>
       </c:lineChart>
       <c:catAx>
         <c:axId val="2094734554"/>
@@ -824,7 +945,6 @@
         <c:crosses val="autoZero"/>
         <c:auto val="1"/>
         <c:lblAlgn val="ctr"/>
-        <c:lblOffset val="100"/>
         <c:noMultiLvlLbl val="1"/>
       </c:catAx>
       <c:valAx>
@@ -896,7 +1016,7 @@
         <a:lstStyle/>
         <a:p>
           <a:pPr>
-            <a:defRPr sz="900"/>
+            <a:defRPr sz="900">      </a:defRPr>
           </a:pPr>
           <a:endParaRPr lang="en-US"/>
         </a:p>
@@ -904,7 +1024,6 @@
     </c:legend>
     <c:plotVisOnly val="1"/>
     <c:dispBlanksAs val="span"/>
-    <c:showDLblsOverMax val="1"/>
   </c:chart>
   <c:spPr>
     <a:noFill/>
@@ -920,11 +1039,9 @@
 </file>
 
 <file path=ppt/charts/chart3.xml><?xml version="1.0" encoding="utf-8"?>
-<c:chartSpace xmlns:c="http://schemas.openxmlformats.org/drawingml/2006/chart" xmlns:a="http://schemas.openxmlformats.org/drawingml/2006/main" xmlns:r="http://schemas.openxmlformats.org/officeDocument/2006/relationships" xmlns:c16r2="http://schemas.microsoft.com/office/drawing/2015/06/chart">
+<c:chartSpace xmlns:c="http://schemas.openxmlformats.org/drawingml/2006/chart" xmlns:a="http://schemas.openxmlformats.org/drawingml/2006/main" xmlns:r="http://schemas.openxmlformats.org/officeDocument/2006/relationships">
   <c:date1904 val="0"/>
-  <c:lang val="en-GB"/>
   <c:roundedCorners val="1"/>
-  <c:style val="2"/>
   <c:chart>
     <c:title>
       <c:tx>
@@ -941,7 +1058,7 @@
               </a:defRPr>
             </a:pPr>
             <a:r>
-              <a:rPr lang="en-GB" sz="1200" b="0" i="0" u="none" strike="noStrike">
+              <a:rPr sz="1200" b="0" i="0" u="none" strike="noStrike">
                 <a:solidFill>
                   <a:srgbClr val="333333"/>
                 </a:solidFill>
@@ -952,13 +1069,13 @@
           </a:p>
         </c:rich>
       </c:tx>
+      <c:layout/>
       <c:overlay val="0"/>
     </c:title>
     <c:autoTitleDeleted val="0"/>
     <c:plotArea>
       <c:layout/>
       <c:lineChart>
-        <c:grouping val="standard"/>
         <c:varyColors val="0"/>
         <c:ser>
           <c:idx val="0"/>
@@ -975,6 +1092,9 @@
             </c:strRef>
           </c:tx>
           <c:spPr>
+            <a:solidFill>
+              <a:srgbClr val="0000CD"/>
+            </a:solidFill>
             <a:ln w="38100" cap="flat">
               <a:solidFill>
                 <a:srgbClr val="0000CD"/>
@@ -984,6 +1104,31 @@
             </a:ln>
             <a:effectLst/>
           </c:spPr>
+          <c:invertIfNegative val="0"/>
+          <c:dLbls>
+            <c:numFmt formatCode="#,##0" sourceLinked="0"/>
+            <c:txPr>
+              <a:bodyPr/>
+              <a:lstStyle/>
+              <a:p>
+                <a:pPr>
+                  <a:defRPr b="0" i="0" strike="noStrike" sz="1200" u="none">
+                    <a:solidFill>
+                      <a:srgbClr val="000000"/>
+                    </a:solidFill>
+                    <a:latin typeface="Arial"/>
+                  </a:defRPr>
+                </a:pPr>
+              </a:p>
+            </c:txPr>
+            <c:showLegendKey val="0"/>
+            <c:showVal val="0"/>
+            <c:showCatName val="0"/>
+            <c:showSerName val="0"/>
+            <c:showPercent val="0"/>
+            <c:showBubbleSize val="0"/>
+            <c:showLeaderLines val="0"/>
+          </c:dLbls>
           <c:marker>
             <c:symbol val="circle"/>
             <c:size val="7"/>
@@ -1002,30 +1147,32 @@
             </c:spPr>
           </c:marker>
           <c:cat>
-            <c:strRef>
+            <c:multiLvlStrRef>
               <c:f>Sheet1!$A$2:$A$7</c:f>
-              <c:strCache>
+              <c:multiLvlStrCache>
                 <c:ptCount val="6"/>
-                <c:pt idx="0">
-                  <c:v>S1</c:v>
-                </c:pt>
-                <c:pt idx="1">
-                  <c:v>S2</c:v>
-                </c:pt>
-                <c:pt idx="2">
-                  <c:v>S3</c:v>
-                </c:pt>
-                <c:pt idx="3">
-                  <c:v>S4</c:v>
-                </c:pt>
-                <c:pt idx="4">
-                  <c:v>S5</c:v>
-                </c:pt>
-                <c:pt idx="5">
-                  <c:v>S6</c:v>
-                </c:pt>
-              </c:strCache>
-            </c:strRef>
+                <c:lvl>
+                  <c:pt idx="0">
+                    <c:v>S1</c:v>
+                  </c:pt>
+                  <c:pt idx="1">
+                    <c:v>S2</c:v>
+                  </c:pt>
+                  <c:pt idx="2">
+                    <c:v>S3</c:v>
+                  </c:pt>
+                  <c:pt idx="3">
+                    <c:v>S4</c:v>
+                  </c:pt>
+                  <c:pt idx="4">
+                    <c:v>S5</c:v>
+                  </c:pt>
+                  <c:pt idx="5">
+                    <c:v>S6</c:v>
+                  </c:pt>
+                </c:lvl>
+              </c:multiLvlStrCache>
+            </c:multiLvlStrRef>
           </c:cat>
           <c:val>
             <c:numRef>
@@ -1040,13 +1187,13 @@
                   <c:v>22</c:v>
                 </c:pt>
                 <c:pt idx="2">
-                  <c:v>38.700000000000003</c:v>
+                  <c:v>38.7</c:v>
                 </c:pt>
                 <c:pt idx="3">
                   <c:v>47.7</c:v>
                 </c:pt>
                 <c:pt idx="4">
-                  <c:v>36.700000000000003</c:v>
+                  <c:v>36.7</c:v>
                 </c:pt>
                 <c:pt idx="5">
                   <c:v>49</c:v>
@@ -1055,11 +1202,6 @@
             </c:numRef>
           </c:val>
           <c:smooth val="0"/>
-          <c:extLst>
-            <c:ext xmlns:c16="http://schemas.microsoft.com/office/drawing/2014/chart" uri="{C3380CC4-5D6E-409C-BE32-E72D297353CC}">
-              <c16:uniqueId val="{00000000-371D-014C-BD9B-FF670E22C464}"/>
-            </c:ext>
-          </c:extLst>
         </c:ser>
         <c:ser>
           <c:idx val="1"/>
@@ -1076,6 +1218,9 @@
             </c:strRef>
           </c:tx>
           <c:spPr>
+            <a:solidFill>
+              <a:srgbClr val="B25500"/>
+            </a:solidFill>
             <a:ln w="38100" cap="flat">
               <a:solidFill>
                 <a:srgbClr val="B25500"/>
@@ -1085,6 +1230,31 @@
             </a:ln>
             <a:effectLst/>
           </c:spPr>
+          <c:invertIfNegative val="0"/>
+          <c:dLbls>
+            <c:numFmt formatCode="#,##0" sourceLinked="0"/>
+            <c:txPr>
+              <a:bodyPr/>
+              <a:lstStyle/>
+              <a:p>
+                <a:pPr>
+                  <a:defRPr b="0" i="0" strike="noStrike" sz="1200" u="none">
+                    <a:solidFill>
+                      <a:srgbClr val="000000"/>
+                    </a:solidFill>
+                    <a:latin typeface="Arial"/>
+                  </a:defRPr>
+                </a:pPr>
+              </a:p>
+            </c:txPr>
+            <c:showLegendKey val="0"/>
+            <c:showVal val="0"/>
+            <c:showCatName val="0"/>
+            <c:showSerName val="0"/>
+            <c:showPercent val="0"/>
+            <c:showBubbleSize val="0"/>
+            <c:showLeaderLines val="0"/>
+          </c:dLbls>
           <c:marker>
             <c:symbol val="circle"/>
             <c:size val="7"/>
@@ -1103,30 +1273,32 @@
             </c:spPr>
           </c:marker>
           <c:cat>
-            <c:strRef>
+            <c:multiLvlStrRef>
               <c:f>Sheet1!$A$2:$A$7</c:f>
-              <c:strCache>
+              <c:multiLvlStrCache>
                 <c:ptCount val="6"/>
-                <c:pt idx="0">
-                  <c:v>S1</c:v>
-                </c:pt>
-                <c:pt idx="1">
-                  <c:v>S2</c:v>
-                </c:pt>
-                <c:pt idx="2">
-                  <c:v>S3</c:v>
-                </c:pt>
-                <c:pt idx="3">
-                  <c:v>S4</c:v>
-                </c:pt>
-                <c:pt idx="4">
-                  <c:v>S5</c:v>
-                </c:pt>
-                <c:pt idx="5">
-                  <c:v>S6</c:v>
-                </c:pt>
-              </c:strCache>
-            </c:strRef>
+                <c:lvl>
+                  <c:pt idx="0">
+                    <c:v>S1</c:v>
+                  </c:pt>
+                  <c:pt idx="1">
+                    <c:v>S2</c:v>
+                  </c:pt>
+                  <c:pt idx="2">
+                    <c:v>S3</c:v>
+                  </c:pt>
+                  <c:pt idx="3">
+                    <c:v>S4</c:v>
+                  </c:pt>
+                  <c:pt idx="4">
+                    <c:v>S5</c:v>
+                  </c:pt>
+                  <c:pt idx="5">
+                    <c:v>S6</c:v>
+                  </c:pt>
+                </c:lvl>
+              </c:multiLvlStrCache>
+            </c:multiLvlStrRef>
           </c:cat>
           <c:val>
             <c:numRef>
@@ -1156,24 +1328,35 @@
             </c:numRef>
           </c:val>
           <c:smooth val="0"/>
-          <c:extLst>
-            <c:ext xmlns:c16="http://schemas.microsoft.com/office/drawing/2014/chart" uri="{C3380CC4-5D6E-409C-BE32-E72D297353CC}">
-              <c16:uniqueId val="{00000001-371D-014C-BD9B-FF670E22C464}"/>
-            </c:ext>
-          </c:extLst>
         </c:ser>
         <c:dLbls>
+          <c:numFmt formatCode="#,##0" sourceLinked="0"/>
+          <c:txPr>
+            <a:bodyPr/>
+            <a:lstStyle/>
+            <a:p>
+              <a:pPr>
+                <a:defRPr b="0" i="0" strike="noStrike" sz="1200" u="none">
+                  <a:solidFill>
+                    <a:srgbClr val="000000"/>
+                  </a:solidFill>
+                  <a:latin typeface="Arial"/>
+                </a:defRPr>
+              </a:pPr>
+            </a:p>
+          </c:txPr>
           <c:showLegendKey val="0"/>
           <c:showVal val="0"/>
           <c:showCatName val="0"/>
           <c:showSerName val="0"/>
           <c:showPercent val="0"/>
           <c:showBubbleSize val="0"/>
+          <c:showLeaderLines val="0"/>
         </c:dLbls>
         <c:marker val="1"/>
-        <c:smooth val="0"/>
         <c:axId val="2094734554"/>
         <c:axId val="2094734552"/>
+        <c:axId val="2094734556"/>
       </c:lineChart>
       <c:catAx>
         <c:axId val="2094734554"/>
@@ -1214,7 +1397,6 @@
         <c:crosses val="autoZero"/>
         <c:auto val="1"/>
         <c:lblAlgn val="ctr"/>
-        <c:lblOffset val="100"/>
         <c:noMultiLvlLbl val="1"/>
       </c:catAx>
       <c:valAx>
@@ -1286,7 +1468,7 @@
         <a:lstStyle/>
         <a:p>
           <a:pPr>
-            <a:defRPr sz="1000"/>
+            <a:defRPr sz="1000">      </a:defRPr>
           </a:pPr>
           <a:endParaRPr lang="en-US"/>
         </a:p>
@@ -1294,7 +1476,6 @@
     </c:legend>
     <c:plotVisOnly val="1"/>
     <c:dispBlanksAs val="span"/>
-    <c:showDLblsOverMax val="1"/>
   </c:chart>
   <c:spPr>
     <a:noFill/>
@@ -1310,11 +1491,9 @@
 </file>
 
 <file path=ppt/charts/chart4.xml><?xml version="1.0" encoding="utf-8"?>
-<c:chartSpace xmlns:c="http://schemas.openxmlformats.org/drawingml/2006/chart" xmlns:a="http://schemas.openxmlformats.org/drawingml/2006/main" xmlns:r="http://schemas.openxmlformats.org/officeDocument/2006/relationships" xmlns:c16r2="http://schemas.microsoft.com/office/drawing/2015/06/chart">
+<c:chartSpace xmlns:c="http://schemas.openxmlformats.org/drawingml/2006/chart" xmlns:a="http://schemas.openxmlformats.org/drawingml/2006/main" xmlns:r="http://schemas.openxmlformats.org/officeDocument/2006/relationships">
   <c:date1904 val="0"/>
-  <c:lang val="en-GB"/>
   <c:roundedCorners val="1"/>
-  <c:style val="2"/>
   <c:chart>
     <c:title>
       <c:tx>
@@ -1331,7 +1510,7 @@
               </a:defRPr>
             </a:pPr>
             <a:r>
-              <a:rPr lang="en-GB" sz="1100" b="0" i="0" u="none" strike="noStrike">
+              <a:rPr sz="1100" b="0" i="0" u="none" strike="noStrike">
                 <a:solidFill>
                   <a:srgbClr val="333333"/>
                 </a:solidFill>
@@ -1342,13 +1521,13 @@
           </a:p>
         </c:rich>
       </c:tx>
+      <c:layout/>
       <c:overlay val="0"/>
     </c:title>
     <c:autoTitleDeleted val="0"/>
     <c:plotArea>
       <c:layout/>
       <c:lineChart>
-        <c:grouping val="standard"/>
         <c:varyColors val="0"/>
         <c:ser>
           <c:idx val="0"/>
@@ -1365,6 +1544,9 @@
             </c:strRef>
           </c:tx>
           <c:spPr>
+            <a:solidFill>
+              <a:srgbClr val="0000CD"/>
+            </a:solidFill>
             <a:ln w="31750" cap="flat">
               <a:solidFill>
                 <a:srgbClr val="0000CD"/>
@@ -1374,6 +1556,31 @@
             </a:ln>
             <a:effectLst/>
           </c:spPr>
+          <c:invertIfNegative val="0"/>
+          <c:dLbls>
+            <c:numFmt formatCode="#,##0" sourceLinked="0"/>
+            <c:txPr>
+              <a:bodyPr/>
+              <a:lstStyle/>
+              <a:p>
+                <a:pPr>
+                  <a:defRPr b="0" i="0" strike="noStrike" sz="1200" u="none">
+                    <a:solidFill>
+                      <a:srgbClr val="000000"/>
+                    </a:solidFill>
+                    <a:latin typeface="Arial"/>
+                  </a:defRPr>
+                </a:pPr>
+              </a:p>
+            </c:txPr>
+            <c:showLegendKey val="0"/>
+            <c:showVal val="0"/>
+            <c:showCatName val="0"/>
+            <c:showSerName val="0"/>
+            <c:showPercent val="0"/>
+            <c:showBubbleSize val="0"/>
+            <c:showLeaderLines val="0"/>
+          </c:dLbls>
           <c:marker>
             <c:symbol val="circle"/>
             <c:size val="6"/>
@@ -1392,30 +1599,32 @@
             </c:spPr>
           </c:marker>
           <c:cat>
-            <c:strRef>
+            <c:multiLvlStrRef>
               <c:f>Sheet1!$A$2:$A$7</c:f>
-              <c:strCache>
+              <c:multiLvlStrCache>
                 <c:ptCount val="6"/>
-                <c:pt idx="0">
-                  <c:v>S1</c:v>
-                </c:pt>
-                <c:pt idx="1">
-                  <c:v>S2</c:v>
-                </c:pt>
-                <c:pt idx="2">
-                  <c:v>S3</c:v>
-                </c:pt>
-                <c:pt idx="3">
-                  <c:v>S4</c:v>
-                </c:pt>
-                <c:pt idx="4">
-                  <c:v>S5</c:v>
-                </c:pt>
-                <c:pt idx="5">
-                  <c:v>S6</c:v>
-                </c:pt>
-              </c:strCache>
-            </c:strRef>
+                <c:lvl>
+                  <c:pt idx="0">
+                    <c:v>S1</c:v>
+                  </c:pt>
+                  <c:pt idx="1">
+                    <c:v>S2</c:v>
+                  </c:pt>
+                  <c:pt idx="2">
+                    <c:v>S3</c:v>
+                  </c:pt>
+                  <c:pt idx="3">
+                    <c:v>S4</c:v>
+                  </c:pt>
+                  <c:pt idx="4">
+                    <c:v>S5</c:v>
+                  </c:pt>
+                  <c:pt idx="5">
+                    <c:v>S6</c:v>
+                  </c:pt>
+                </c:lvl>
+              </c:multiLvlStrCache>
+            </c:multiLvlStrRef>
           </c:cat>
           <c:val>
             <c:numRef>
@@ -1424,7 +1633,7 @@
                 <c:formatCode>General</c:formatCode>
                 <c:ptCount val="6"/>
                 <c:pt idx="0">
-                  <c:v>36.700000000000003</c:v>
+                  <c:v>36.7</c:v>
                 </c:pt>
                 <c:pt idx="1">
                   <c:v>40</c:v>
@@ -1439,17 +1648,12 @@
                   <c:v>42</c:v>
                 </c:pt>
                 <c:pt idx="5">
-                  <c:v>39.700000000000003</c:v>
+                  <c:v>39.7</c:v>
                 </c:pt>
               </c:numCache>
             </c:numRef>
           </c:val>
           <c:smooth val="0"/>
-          <c:extLst>
-            <c:ext xmlns:c16="http://schemas.microsoft.com/office/drawing/2014/chart" uri="{C3380CC4-5D6E-409C-BE32-E72D297353CC}">
-              <c16:uniqueId val="{00000000-9E8E-DF4A-8FEA-C3C7039BD15C}"/>
-            </c:ext>
-          </c:extLst>
         </c:ser>
         <c:ser>
           <c:idx val="1"/>
@@ -1466,6 +1670,9 @@
             </c:strRef>
           </c:tx>
           <c:spPr>
+            <a:solidFill>
+              <a:srgbClr val="B25500"/>
+            </a:solidFill>
             <a:ln w="31750" cap="flat">
               <a:solidFill>
                 <a:srgbClr val="B25500"/>
@@ -1475,6 +1682,31 @@
             </a:ln>
             <a:effectLst/>
           </c:spPr>
+          <c:invertIfNegative val="0"/>
+          <c:dLbls>
+            <c:numFmt formatCode="#,##0" sourceLinked="0"/>
+            <c:txPr>
+              <a:bodyPr/>
+              <a:lstStyle/>
+              <a:p>
+                <a:pPr>
+                  <a:defRPr b="0" i="0" strike="noStrike" sz="1200" u="none">
+                    <a:solidFill>
+                      <a:srgbClr val="000000"/>
+                    </a:solidFill>
+                    <a:latin typeface="Arial"/>
+                  </a:defRPr>
+                </a:pPr>
+              </a:p>
+            </c:txPr>
+            <c:showLegendKey val="0"/>
+            <c:showVal val="0"/>
+            <c:showCatName val="0"/>
+            <c:showSerName val="0"/>
+            <c:showPercent val="0"/>
+            <c:showBubbleSize val="0"/>
+            <c:showLeaderLines val="0"/>
+          </c:dLbls>
           <c:marker>
             <c:symbol val="circle"/>
             <c:size val="6"/>
@@ -1493,30 +1725,32 @@
             </c:spPr>
           </c:marker>
           <c:cat>
-            <c:strRef>
+            <c:multiLvlStrRef>
               <c:f>Sheet1!$A$2:$A$7</c:f>
-              <c:strCache>
+              <c:multiLvlStrCache>
                 <c:ptCount val="6"/>
-                <c:pt idx="0">
-                  <c:v>S1</c:v>
-                </c:pt>
-                <c:pt idx="1">
-                  <c:v>S2</c:v>
-                </c:pt>
-                <c:pt idx="2">
-                  <c:v>S3</c:v>
-                </c:pt>
-                <c:pt idx="3">
-                  <c:v>S4</c:v>
-                </c:pt>
-                <c:pt idx="4">
-                  <c:v>S5</c:v>
-                </c:pt>
-                <c:pt idx="5">
-                  <c:v>S6</c:v>
-                </c:pt>
-              </c:strCache>
-            </c:strRef>
+                <c:lvl>
+                  <c:pt idx="0">
+                    <c:v>S1</c:v>
+                  </c:pt>
+                  <c:pt idx="1">
+                    <c:v>S2</c:v>
+                  </c:pt>
+                  <c:pt idx="2">
+                    <c:v>S3</c:v>
+                  </c:pt>
+                  <c:pt idx="3">
+                    <c:v>S4</c:v>
+                  </c:pt>
+                  <c:pt idx="4">
+                    <c:v>S5</c:v>
+                  </c:pt>
+                  <c:pt idx="5">
+                    <c:v>S6</c:v>
+                  </c:pt>
+                </c:lvl>
+              </c:multiLvlStrCache>
+            </c:multiLvlStrRef>
           </c:cat>
           <c:val>
             <c:numRef>
@@ -1546,24 +1780,35 @@
             </c:numRef>
           </c:val>
           <c:smooth val="0"/>
-          <c:extLst>
-            <c:ext xmlns:c16="http://schemas.microsoft.com/office/drawing/2014/chart" uri="{C3380CC4-5D6E-409C-BE32-E72D297353CC}">
-              <c16:uniqueId val="{00000001-9E8E-DF4A-8FEA-C3C7039BD15C}"/>
-            </c:ext>
-          </c:extLst>
         </c:ser>
         <c:dLbls>
+          <c:numFmt formatCode="#,##0" sourceLinked="0"/>
+          <c:txPr>
+            <a:bodyPr/>
+            <a:lstStyle/>
+            <a:p>
+              <a:pPr>
+                <a:defRPr b="0" i="0" strike="noStrike" sz="1200" u="none">
+                  <a:solidFill>
+                    <a:srgbClr val="000000"/>
+                  </a:solidFill>
+                  <a:latin typeface="Arial"/>
+                </a:defRPr>
+              </a:pPr>
+            </a:p>
+          </c:txPr>
           <c:showLegendKey val="0"/>
           <c:showVal val="0"/>
           <c:showCatName val="0"/>
           <c:showSerName val="0"/>
           <c:showPercent val="0"/>
           <c:showBubbleSize val="0"/>
+          <c:showLeaderLines val="0"/>
         </c:dLbls>
         <c:marker val="1"/>
-        <c:smooth val="0"/>
         <c:axId val="2094734554"/>
         <c:axId val="2094734552"/>
+        <c:axId val="2094734556"/>
       </c:lineChart>
       <c:catAx>
         <c:axId val="2094734554"/>
@@ -1604,7 +1849,6 @@
         <c:crosses val="autoZero"/>
         <c:auto val="1"/>
         <c:lblAlgn val="ctr"/>
-        <c:lblOffset val="100"/>
         <c:noMultiLvlLbl val="1"/>
       </c:catAx>
       <c:valAx>
@@ -1676,7 +1920,7 @@
         <a:lstStyle/>
         <a:p>
           <a:pPr>
-            <a:defRPr sz="900"/>
+            <a:defRPr sz="900">      </a:defRPr>
           </a:pPr>
           <a:endParaRPr lang="en-US"/>
         </a:p>
@@ -1684,7 +1928,6 @@
     </c:legend>
     <c:plotVisOnly val="1"/>
     <c:dispBlanksAs val="span"/>
-    <c:showDLblsOverMax val="1"/>
   </c:chart>
   <c:spPr>
     <a:noFill/>
@@ -1721,10 +1964,234 @@
           <a:chExt cx="0" cy="0"/>
         </a:xfrm>
       </p:grpSpPr>
+      <p:sp>
+        <p:nvSpPr>
+          <p:cNvPr id="2" name="Header Placeholder 1"/>
+          <p:cNvSpPr>
+            <a:spLocks noGrp="1"/>
+          </p:cNvSpPr>
+          <p:nvPr>
+            <p:ph type="hdr" sz="quarter"/>
+          </p:nvPr>
+        </p:nvSpPr>
+        <p:spPr>
+          <a:xfrm>
+            <a:off x="0" y="0"/>
+            <a:ext cx="2971800" cy="458788"/>
+          </a:xfrm>
+          <a:prstGeom prst="rect">
+            <a:avLst/>
+          </a:prstGeom>
+        </p:spPr>
+        <p:txBody>
+          <a:bodyPr vert="horz" lIns="91440" tIns="45720" rIns="91440" bIns="45720" rtlCol="0"/>
+          <a:lstStyle>
+            <a:lvl1pPr algn="l">
+              <a:defRPr sz="1200"/>
+            </a:lvl1pPr>
+          </a:lstStyle>
+          <a:p>
+            <a:endParaRPr lang="en-US"/>
+          </a:p>
+        </p:txBody>
+      </p:sp>
+      <p:sp>
+        <p:nvSpPr>
+          <p:cNvPr id="3" name="Date Placeholder 2"/>
+          <p:cNvSpPr>
+            <a:spLocks noGrp="1"/>
+          </p:cNvSpPr>
+          <p:nvPr>
+            <p:ph type="dt" idx="1"/>
+          </p:nvPr>
+        </p:nvSpPr>
+        <p:spPr>
+          <a:xfrm>
+            <a:off x="3884613" y="0"/>
+            <a:ext cx="2971800" cy="458788"/>
+          </a:xfrm>
+          <a:prstGeom prst="rect">
+            <a:avLst/>
+          </a:prstGeom>
+        </p:spPr>
+        <p:txBody>
+          <a:bodyPr vert="horz" lIns="91440" tIns="45720" rIns="91440" bIns="45720" rtlCol="0"/>
+          <a:lstStyle>
+            <a:lvl1pPr algn="r">
+              <a:defRPr sz="1200"/>
+            </a:lvl1pPr>
+          </a:lstStyle>
+          <a:p>
+            <a:fld id="{5282F153-3F37-0F45-9E97-73ACFA13230C}" type="datetimeFigureOut">
+              <a:rPr lang="en-US"/>
+              <a:t>7/23/19</a:t>
+            </a:fld>
+            <a:endParaRPr lang="en-US"/>
+          </a:p>
+        </p:txBody>
+      </p:sp>
+      <p:sp>
+        <p:nvSpPr>
+          <p:cNvPr id="4" name="Slide Image Placeholder 3"/>
+          <p:cNvSpPr>
+            <a:spLocks noGrp="1" noRot="1" noChangeAspect="1"/>
+          </p:cNvSpPr>
+          <p:nvPr>
+            <p:ph type="sldImg" idx="2"/>
+          </p:nvPr>
+        </p:nvSpPr>
+        <p:spPr>
+          <a:xfrm>
+            <a:off x="685800" y="1143000"/>
+            <a:ext cx="5486400" cy="3086100"/>
+          </a:xfrm>
+          <a:prstGeom prst="rect">
+            <a:avLst/>
+          </a:prstGeom>
+          <a:noFill/>
+          <a:ln w="12700">
+            <a:solidFill>
+              <a:prstClr val="black"/>
+            </a:solidFill>
+          </a:ln>
+        </p:spPr>
+        <p:txBody>
+          <a:bodyPr vert="horz" lIns="91440" tIns="45720" rIns="91440" bIns="45720" rtlCol="0" anchor="ctr"/>
+          <a:lstStyle/>
+          <a:p>
+            <a:endParaRPr lang="en-US"/>
+          </a:p>
+        </p:txBody>
+      </p:sp>
+      <p:sp>
+        <p:nvSpPr>
+          <p:cNvPr id="5" name="Notes Placeholder 4"/>
+          <p:cNvSpPr>
+            <a:spLocks noGrp="1"/>
+          </p:cNvSpPr>
+          <p:nvPr>
+            <p:ph type="body" sz="quarter" idx="3"/>
+          </p:nvPr>
+        </p:nvSpPr>
+        <p:spPr>
+          <a:xfrm>
+            <a:off x="685800" y="4400550"/>
+            <a:ext cx="5486400" cy="3600450"/>
+          </a:xfrm>
+          <a:prstGeom prst="rect">
+            <a:avLst/>
+          </a:prstGeom>
+        </p:spPr>
+        <p:txBody>
+          <a:bodyPr vert="horz" lIns="91440" tIns="45720" rIns="91440" bIns="45720" rtlCol="0"/>
+          <a:lstStyle/>
+          <a:p>
+            <a:pPr lvl="0"/>
+            <a:r>
+              <a:rPr lang="en-US"/>
+              <a:t>Click to edit Master text styles</a:t>
+            </a:r>
+          </a:p>
+          <a:p>
+            <a:pPr lvl="1"/>
+            <a:r>
+              <a:rPr lang="en-US"/>
+              <a:t>Second level</a:t>
+            </a:r>
+          </a:p>
+          <a:p>
+            <a:pPr lvl="2"/>
+            <a:r>
+              <a:rPr lang="en-US"/>
+              <a:t>Third level</a:t>
+            </a:r>
+          </a:p>
+          <a:p>
+            <a:pPr lvl="3"/>
+            <a:r>
+              <a:rPr lang="en-US"/>
+              <a:t>Fourth level</a:t>
+            </a:r>
+          </a:p>
+          <a:p>
+            <a:pPr lvl="4"/>
+            <a:r>
+              <a:rPr lang="en-US"/>
+              <a:t>Fifth level</a:t>
+            </a:r>
+          </a:p>
+        </p:txBody>
+      </p:sp>
+      <p:sp>
+        <p:nvSpPr>
+          <p:cNvPr id="6" name="Footer Placeholder 5"/>
+          <p:cNvSpPr>
+            <a:spLocks noGrp="1"/>
+          </p:cNvSpPr>
+          <p:nvPr>
+            <p:ph type="ftr" sz="quarter" idx="4"/>
+          </p:nvPr>
+        </p:nvSpPr>
+        <p:spPr>
+          <a:xfrm>
+            <a:off x="0" y="8685213"/>
+            <a:ext cx="2971800" cy="458787"/>
+          </a:xfrm>
+          <a:prstGeom prst="rect">
+            <a:avLst/>
+          </a:prstGeom>
+        </p:spPr>
+        <p:txBody>
+          <a:bodyPr vert="horz" lIns="91440" tIns="45720" rIns="91440" bIns="45720" rtlCol="0" anchor="b"/>
+          <a:lstStyle>
+            <a:lvl1pPr algn="l">
+              <a:defRPr sz="1200"/>
+            </a:lvl1pPr>
+          </a:lstStyle>
+          <a:p>
+            <a:endParaRPr lang="en-US"/>
+          </a:p>
+        </p:txBody>
+      </p:sp>
+      <p:sp>
+        <p:nvSpPr>
+          <p:cNvPr id="7" name="Slide Number Placeholder 6"/>
+          <p:cNvSpPr>
+            <a:spLocks noGrp="1"/>
+          </p:cNvSpPr>
+          <p:nvPr>
+            <p:ph type="sldNum" sz="quarter" idx="5"/>
+          </p:nvPr>
+        </p:nvSpPr>
+        <p:spPr>
+          <a:xfrm>
+            <a:off x="3884613" y="8685213"/>
+            <a:ext cx="2971800" cy="458787"/>
+          </a:xfrm>
+          <a:prstGeom prst="rect">
+            <a:avLst/>
+          </a:prstGeom>
+        </p:spPr>
+        <p:txBody>
+          <a:bodyPr vert="horz" lIns="91440" tIns="45720" rIns="91440" bIns="45720" rtlCol="0" anchor="b"/>
+          <a:lstStyle>
+            <a:lvl1pPr algn="r">
+              <a:defRPr sz="1200"/>
+            </a:lvl1pPr>
+          </a:lstStyle>
+          <a:p>
+            <a:fld id="{CE5E9CC1-C706-0F49-92D6-E571CC5EEA8F}" type="slidenum">
+              <a:rPr lang="en-US"/>
+              <a:t>‹#›</a:t>
+            </a:fld>
+            <a:endParaRPr lang="en-US"/>
+          </a:p>
+        </p:txBody>
+      </p:sp>
     </p:spTree>
     <p:extLst>
       <p:ext uri="{BB962C8B-B14F-4D97-AF65-F5344CB8AC3E}">
-        <p14:creationId xmlns:p14="http://schemas.microsoft.com/office/powerpoint/2010/main" val="833069191"/>
+        <p14:creationId xmlns:p14="http://schemas.microsoft.com/office/powerpoint/2010/main" val="1024086991"/>
       </p:ext>
     </p:extLst>
   </p:cSld>
@@ -1868,6 +2335,10 @@
           <a:bodyPr/>
           <a:lstStyle/>
           <a:p>
+            <a:r>
+              <a:rPr lang="en-US" dirty="0"/>
+              <a:t/>
+            </a:r>
             <a:endParaRPr lang="en-US" dirty="0"/>
           </a:p>
         </p:txBody>
@@ -1952,6 +2423,10 @@
           <a:bodyPr/>
           <a:lstStyle/>
           <a:p>
+            <a:r>
+              <a:rPr lang="en-US" dirty="0"/>
+              <a:t/>
+            </a:r>
             <a:endParaRPr lang="en-US" dirty="0"/>
           </a:p>
         </p:txBody>
@@ -2036,6 +2511,10 @@
           <a:bodyPr/>
           <a:lstStyle/>
           <a:p>
+            <a:r>
+              <a:rPr lang="en-US" dirty="0"/>
+              <a:t/>
+            </a:r>
             <a:endParaRPr lang="en-US" dirty="0"/>
           </a:p>
         </p:txBody>
@@ -2120,6 +2599,10 @@
           <a:bodyPr/>
           <a:lstStyle/>
           <a:p>
+            <a:r>
+              <a:rPr lang="en-US" dirty="0"/>
+              <a:t/>
+            </a:r>
             <a:endParaRPr lang="en-US" dirty="0"/>
           </a:p>
         </p:txBody>
@@ -2204,6 +2687,10 @@
           <a:bodyPr/>
           <a:lstStyle/>
           <a:p>
+            <a:r>
+              <a:rPr lang="en-US" dirty="0"/>
+              <a:t/>
+            </a:r>
             <a:endParaRPr lang="en-US" dirty="0"/>
           </a:p>
         </p:txBody>
@@ -2288,6 +2775,10 @@
           <a:bodyPr/>
           <a:lstStyle/>
           <a:p>
+            <a:r>
+              <a:rPr lang="en-US" dirty="0"/>
+              <a:t/>
+            </a:r>
             <a:endParaRPr lang="en-US" dirty="0"/>
           </a:p>
         </p:txBody>
@@ -2372,6 +2863,10 @@
           <a:bodyPr/>
           <a:lstStyle/>
           <a:p>
+            <a:r>
+              <a:rPr lang="en-US" dirty="0"/>
+              <a:t/>
+            </a:r>
             <a:endParaRPr lang="en-US" dirty="0"/>
           </a:p>
         </p:txBody>
@@ -2456,6 +2951,10 @@
           <a:bodyPr/>
           <a:lstStyle/>
           <a:p>
+            <a:r>
+              <a:rPr lang="en-US" dirty="0"/>
+              <a:t/>
+            </a:r>
             <a:endParaRPr lang="en-US" dirty="0"/>
           </a:p>
         </p:txBody>
@@ -2540,6 +3039,10 @@
           <a:bodyPr/>
           <a:lstStyle/>
           <a:p>
+            <a:r>
+              <a:rPr lang="en-US" dirty="0"/>
+              <a:t/>
+            </a:r>
             <a:endParaRPr lang="en-US" dirty="0"/>
           </a:p>
         </p:txBody>
@@ -2624,6 +3127,10 @@
           <a:bodyPr/>
           <a:lstStyle/>
           <a:p>
+            <a:r>
+              <a:rPr lang="en-US" dirty="0"/>
+              <a:t/>
+            </a:r>
             <a:endParaRPr lang="en-US" dirty="0"/>
           </a:p>
         </p:txBody>
@@ -2708,6 +3215,10 @@
           <a:bodyPr/>
           <a:lstStyle/>
           <a:p>
+            <a:r>
+              <a:rPr lang="en-US" dirty="0"/>
+              <a:t/>
+            </a:r>
             <a:endParaRPr lang="en-US" dirty="0"/>
           </a:p>
         </p:txBody>
@@ -2792,6 +3303,10 @@
           <a:bodyPr/>
           <a:lstStyle/>
           <a:p>
+            <a:r>
+              <a:rPr lang="en-US" dirty="0"/>
+              <a:t/>
+            </a:r>
             <a:endParaRPr lang="en-US" dirty="0"/>
           </a:p>
         </p:txBody>
@@ -2876,6 +3391,10 @@
           <a:bodyPr/>
           <a:lstStyle/>
           <a:p>
+            <a:r>
+              <a:rPr lang="en-US" dirty="0"/>
+              <a:t/>
+            </a:r>
             <a:endParaRPr lang="en-US" dirty="0"/>
           </a:p>
         </p:txBody>
@@ -2960,6 +3479,10 @@
           <a:bodyPr/>
           <a:lstStyle/>
           <a:p>
+            <a:r>
+              <a:rPr lang="en-US" dirty="0"/>
+              <a:t/>
+            </a:r>
             <a:endParaRPr lang="en-US" dirty="0"/>
           </a:p>
         </p:txBody>
@@ -3044,6 +3567,10 @@
           <a:bodyPr/>
           <a:lstStyle/>
           <a:p>
+            <a:r>
+              <a:rPr lang="en-US" dirty="0"/>
+              <a:t/>
+            </a:r>
             <a:endParaRPr lang="en-US" dirty="0"/>
           </a:p>
         </p:txBody>
@@ -3128,6 +3655,10 @@
           <a:bodyPr/>
           <a:lstStyle/>
           <a:p>
+            <a:r>
+              <a:rPr lang="en-US" dirty="0"/>
+              <a:t/>
+            </a:r>
             <a:endParaRPr lang="en-US" dirty="0"/>
           </a:p>
         </p:txBody>
@@ -3212,6 +3743,10 @@
           <a:bodyPr/>
           <a:lstStyle/>
           <a:p>
+            <a:r>
+              <a:rPr lang="en-US" dirty="0"/>
+              <a:t/>
+            </a:r>
             <a:endParaRPr lang="en-US" dirty="0"/>
           </a:p>
         </p:txBody>
@@ -3296,6 +3831,10 @@
           <a:bodyPr/>
           <a:lstStyle/>
           <a:p>
+            <a:r>
+              <a:rPr lang="en-US" dirty="0"/>
+              <a:t/>
+            </a:r>
             <a:endParaRPr lang="en-US" dirty="0"/>
           </a:p>
         </p:txBody>
@@ -3380,6 +3919,10 @@
           <a:bodyPr/>
           <a:lstStyle/>
           <a:p>
+            <a:r>
+              <a:rPr lang="en-US" dirty="0"/>
+              <a:t/>
+            </a:r>
             <a:endParaRPr lang="en-US" dirty="0"/>
           </a:p>
         </p:txBody>
@@ -3464,6 +4007,10 @@
           <a:bodyPr/>
           <a:lstStyle/>
           <a:p>
+            <a:r>
+              <a:rPr lang="en-US" dirty="0"/>
+              <a:t/>
+            </a:r>
             <a:endParaRPr lang="en-US" dirty="0"/>
           </a:p>
         </p:txBody>
@@ -3548,6 +4095,10 @@
           <a:bodyPr/>
           <a:lstStyle/>
           <a:p>
+            <a:r>
+              <a:rPr lang="en-US" dirty="0"/>
+              <a:t/>
+            </a:r>
             <a:endParaRPr lang="en-US" dirty="0"/>
           </a:p>
         </p:txBody>
@@ -3632,6 +4183,10 @@
           <a:bodyPr/>
           <a:lstStyle/>
           <a:p>
+            <a:r>
+              <a:rPr lang="en-US" dirty="0"/>
+              <a:t/>
+            </a:r>
             <a:endParaRPr lang="en-US" dirty="0"/>
           </a:p>
         </p:txBody>
@@ -3716,6 +4271,10 @@
           <a:bodyPr/>
           <a:lstStyle/>
           <a:p>
+            <a:r>
+              <a:rPr lang="en-US" dirty="0"/>
+              <a:t/>
+            </a:r>
             <a:endParaRPr lang="en-US" dirty="0"/>
           </a:p>
         </p:txBody>
@@ -3800,6 +4359,10 @@
           <a:bodyPr/>
           <a:lstStyle/>
           <a:p>
+            <a:r>
+              <a:rPr lang="en-US" dirty="0"/>
+              <a:t/>
+            </a:r>
             <a:endParaRPr lang="en-US" dirty="0"/>
           </a:p>
         </p:txBody>
@@ -3884,6 +4447,10 @@
           <a:bodyPr/>
           <a:lstStyle/>
           <a:p>
+            <a:r>
+              <a:rPr lang="en-US" dirty="0"/>
+              <a:t/>
+            </a:r>
             <a:endParaRPr lang="en-US" dirty="0"/>
           </a:p>
         </p:txBody>
@@ -3968,6 +4535,10 @@
           <a:bodyPr/>
           <a:lstStyle/>
           <a:p>
+            <a:r>
+              <a:rPr lang="en-US" dirty="0"/>
+              <a:t/>
+            </a:r>
             <a:endParaRPr lang="en-US" dirty="0"/>
           </a:p>
         </p:txBody>
@@ -4052,6 +4623,10 @@
           <a:bodyPr/>
           <a:lstStyle/>
           <a:p>
+            <a:r>
+              <a:rPr lang="en-US" dirty="0"/>
+              <a:t/>
+            </a:r>
             <a:endParaRPr lang="en-US" dirty="0"/>
           </a:p>
         </p:txBody>
@@ -4136,6 +4711,10 @@
           <a:bodyPr/>
           <a:lstStyle/>
           <a:p>
+            <a:r>
+              <a:rPr lang="en-US" dirty="0"/>
+              <a:t/>
+            </a:r>
             <a:endParaRPr lang="en-US" dirty="0"/>
           </a:p>
         </p:txBody>
@@ -4214,7 +4793,6 @@
         <a:solidFill>
           <a:srgbClr val="FAFAFA"/>
         </a:solidFill>
-        <a:effectLst/>
       </p:bgPr>
     </p:bg>
     <p:spTree>
@@ -4250,13 +4828,6 @@
           </a:solidFill>
           <a:ln/>
         </p:spPr>
-        <p:txBody>
-          <a:bodyPr/>
-          <a:lstStyle/>
-          <a:p>
-            <a:endParaRPr lang="en-US"/>
-          </a:p>
-        </p:txBody>
       </p:sp>
     </p:spTree>
   </p:cSld>
@@ -4269,11 +4840,6 @@
 <file path=ppt/slideMasters/slideMaster1.xml><?xml version="1.0" encoding="utf-8"?>
 <p:sldMaster xmlns:a="http://schemas.openxmlformats.org/drawingml/2006/main" xmlns:r="http://schemas.openxmlformats.org/officeDocument/2006/relationships" xmlns:p="http://schemas.openxmlformats.org/presentationml/2006/main">
   <p:cSld>
-    <p:bg>
-      <p:bgRef idx="1001">
-        <a:schemeClr val="bg1"/>
-      </p:bgRef>
-    </p:bg>
     <p:spTree>
       <p:nvGrpSpPr>
         <p:cNvPr id="1" name=""/>
@@ -4568,14 +5134,14 @@
       </p:grpSpPr>
       <p:pic>
         <p:nvPicPr>
-          <p:cNvPr id="2" name="Image 0" descr="images/Imperial_College_London_new_logo.png"/>
+          <p:cNvPr id="2" name="Image 0" descr="images/Imperial_College_London_new_logo.png">    </p:cNvPr>
           <p:cNvPicPr>
             <a:picLocks noChangeAspect="1"/>
           </p:cNvPicPr>
           <p:nvPr/>
         </p:nvPicPr>
         <p:blipFill>
-          <a:blip r:embed="rId3"/>
+          <a:blip r:embed="rId1"/>
           <a:stretch>
             <a:fillRect/>
           </a:stretch>
@@ -4611,7 +5177,7 @@
           <a:bodyPr wrap="square" lIns="0" tIns="0" rIns="0" bIns="0" rtlCol="0" anchor="ctr"/>
           <a:lstStyle/>
           <a:p>
-            <a:pPr marL="0" indent="0" algn="ctr">
+            <a:pPr algn="ctr" indent="0" marL="0">
               <a:buNone/>
             </a:pPr>
             <a:r>
@@ -4647,7 +5213,7 @@
           <a:bodyPr wrap="square" lIns="0" tIns="0" rIns="0" bIns="0" rtlCol="0" anchor="ctr"/>
           <a:lstStyle/>
           <a:p>
-            <a:pPr marL="0" indent="0" algn="ctr">
+            <a:pPr algn="ctr" indent="0" marL="0">
               <a:buNone/>
             </a:pPr>
             <a:r>
@@ -4683,7 +5249,7 @@
           <a:bodyPr wrap="square" rtlCol="0" anchor="ctr"/>
           <a:lstStyle/>
           <a:p>
-            <a:pPr marL="0" indent="0" algn="ctr">
+            <a:pPr algn="ctr" indent="0" marL="0">
               <a:buNone/>
             </a:pPr>
             <a:r>
@@ -4719,7 +5285,7 @@
           <a:bodyPr wrap="square" rtlCol="0" anchor="ctr"/>
           <a:lstStyle/>
           <a:p>
-            <a:pPr marL="0" indent="0" algn="ctr">
+            <a:pPr algn="ctr" indent="0" marL="0">
               <a:buNone/>
             </a:pPr>
             <a:r>
@@ -4755,7 +5321,7 @@
           <a:bodyPr wrap="square" rtlCol="0" anchor="ctr"/>
           <a:lstStyle/>
           <a:p>
-            <a:pPr marL="0" indent="0" algn="ctr">
+            <a:pPr algn="ctr" indent="0" marL="0">
               <a:buNone/>
             </a:pPr>
             <a:r>
@@ -4816,7 +5382,7 @@
           <a:bodyPr wrap="square" lIns="0" tIns="0" rIns="0" bIns="0" rtlCol="0" anchor="ctr"/>
           <a:lstStyle/>
           <a:p>
-            <a:pPr marL="0" indent="0">
+            <a:pPr indent="0" marL="0">
               <a:buNone/>
             </a:pPr>
             <a:r>
@@ -4870,13 +5436,13 @@
             <a:endParaRPr lang="en-US" sz="1300" dirty="0"/>
           </a:p>
           <a:p>
-            <a:pPr marL="685800" lvl="1" indent="-342900">
+            <a:pPr lvl="1" marL="685800" indent="-342900">
               <a:spcAft>
                 <a:spcPts val="600"/>
               </a:spcAft>
               <a:buSzPct val="100000"/>
               <a:buFont typeface="+mj-lt"/>
-              <a:buAutoNum type="arabicPeriod"/>
+              <a:buAutoNum type="arabicPeriod" startAt="1"/>
             </a:pPr>
             <a:r>
               <a:rPr lang="en-US" sz="1300" dirty="0">
@@ -4889,13 +5455,13 @@
             <a:endParaRPr lang="en-US" sz="1300" dirty="0"/>
           </a:p>
           <a:p>
-            <a:pPr marL="685800" lvl="1" indent="-342900">
+            <a:pPr lvl="1" marL="685800" indent="-342900">
               <a:spcAft>
                 <a:spcPts val="600"/>
               </a:spcAft>
               <a:buSzPct val="100000"/>
               <a:buFont typeface="+mj-lt"/>
-              <a:buAutoNum type="arabicPeriod"/>
+              <a:buAutoNum type="arabicPeriod" startAt="1"/>
             </a:pPr>
             <a:r>
               <a:rPr lang="en-US" sz="1300" dirty="0">
@@ -4908,13 +5474,13 @@
             <a:endParaRPr lang="en-US" sz="1300" dirty="0"/>
           </a:p>
           <a:p>
-            <a:pPr marL="685800" lvl="1" indent="-342900">
+            <a:pPr lvl="1" marL="685800" indent="-342900">
               <a:spcAft>
                 <a:spcPts val="600"/>
               </a:spcAft>
               <a:buSzPct val="100000"/>
               <a:buFont typeface="+mj-lt"/>
-              <a:buAutoNum type="arabicPeriod"/>
+              <a:buAutoNum type="arabicPeriod" startAt="1"/>
             </a:pPr>
             <a:r>
               <a:rPr lang="en-US" sz="1300" dirty="0">
@@ -4927,13 +5493,13 @@
             <a:endParaRPr lang="en-US" sz="1300" dirty="0"/>
           </a:p>
           <a:p>
-            <a:pPr marL="685800" lvl="1" indent="-342900">
+            <a:pPr lvl="1" marL="685800" indent="-342900">
               <a:spcAft>
                 <a:spcPts val="600"/>
               </a:spcAft>
               <a:buSzPct val="100000"/>
               <a:buFont typeface="+mj-lt"/>
-              <a:buAutoNum type="arabicPeriod"/>
+              <a:buAutoNum type="arabicPeriod" startAt="1"/>
             </a:pPr>
             <a:r>
               <a:rPr lang="en-US" sz="1300" dirty="0">
@@ -4970,7 +5536,7 @@
           <a:bodyPr wrap="square" lIns="38100" tIns="38100" rIns="38100" bIns="38100" rtlCol="0" anchor="t"/>
           <a:lstStyle/>
           <a:p>
-            <a:pPr marL="0" indent="0">
+            <a:pPr indent="0" marL="0">
               <a:spcAft>
                 <a:spcPts val="200"/>
               </a:spcAft>
@@ -4987,7 +5553,7 @@
             <a:endParaRPr lang="en-US" sz="1100" dirty="0"/>
           </a:p>
           <a:p>
-            <a:pPr marL="0" indent="0">
+            <a:pPr indent="0" marL="0">
               <a:buNone/>
             </a:pPr>
             <a:r>
@@ -5004,14 +5570,14 @@
       </p:sp>
       <p:pic>
         <p:nvPicPr>
-          <p:cNvPr id="5" name="Image 0" descr="images/manual-refactor.png"/>
+          <p:cNvPr id="5" name="Image 0" descr="images/manual-refactor.png">    </p:cNvPr>
           <p:cNvPicPr>
             <a:picLocks noChangeAspect="1"/>
           </p:cNvPicPr>
           <p:nvPr/>
         </p:nvPicPr>
         <p:blipFill>
-          <a:blip r:embed="rId3"/>
+          <a:blip r:embed="rId1"/>
           <a:stretch>
             <a:fillRect/>
           </a:stretch>
@@ -5072,7 +5638,7 @@
           <a:bodyPr wrap="square" lIns="0" tIns="0" rIns="0" bIns="0" rtlCol="0" anchor="ctr"/>
           <a:lstStyle/>
           <a:p>
-            <a:pPr marL="0" indent="0">
+            <a:pPr indent="0" marL="0">
               <a:buNone/>
             </a:pPr>
             <a:r>
@@ -5126,13 +5692,13 @@
             <a:endParaRPr lang="en-US" sz="1400" dirty="0"/>
           </a:p>
           <a:p>
-            <a:pPr marL="685800" lvl="1" indent="-342900">
+            <a:pPr lvl="1" marL="685800" indent="-342900">
               <a:spcAft>
                 <a:spcPts val="600"/>
               </a:spcAft>
               <a:buSzPct val="100000"/>
               <a:buFont typeface="+mj-lt"/>
-              <a:buAutoNum type="arabicPeriod"/>
+              <a:buAutoNum type="arabicPeriod" startAt="1"/>
             </a:pPr>
             <a:r>
               <a:rPr lang="en-US" sz="1400" dirty="0">
@@ -5145,13 +5711,13 @@
             <a:endParaRPr lang="en-US" sz="1400" dirty="0"/>
           </a:p>
           <a:p>
-            <a:pPr marL="685800" lvl="1" indent="-342900">
+            <a:pPr lvl="1" marL="685800" indent="-342900">
               <a:spcAft>
                 <a:spcPts val="600"/>
               </a:spcAft>
               <a:buSzPct val="100000"/>
               <a:buFont typeface="+mj-lt"/>
-              <a:buAutoNum type="arabicPeriod"/>
+              <a:buAutoNum type="arabicPeriod" startAt="1"/>
             </a:pPr>
             <a:r>
               <a:rPr lang="en-US" sz="1400" dirty="0">
@@ -5164,13 +5730,13 @@
             <a:endParaRPr lang="en-US" sz="1400" dirty="0"/>
           </a:p>
           <a:p>
-            <a:pPr marL="685800" lvl="1" indent="-342900">
+            <a:pPr lvl="1" marL="685800" indent="-342900">
               <a:spcAft>
                 <a:spcPts val="600"/>
               </a:spcAft>
               <a:buSzPct val="100000"/>
               <a:buFont typeface="+mj-lt"/>
-              <a:buAutoNum type="arabicPeriod"/>
+              <a:buAutoNum type="arabicPeriod" startAt="1"/>
             </a:pPr>
             <a:r>
               <a:rPr lang="en-US" sz="1400" dirty="0">
@@ -5183,13 +5749,13 @@
             <a:endParaRPr lang="en-US" sz="1400" dirty="0"/>
           </a:p>
           <a:p>
-            <a:pPr marL="685800" lvl="1" indent="-342900">
+            <a:pPr lvl="1" marL="685800" indent="-342900">
               <a:spcAft>
                 <a:spcPts val="600"/>
               </a:spcAft>
               <a:buSzPct val="100000"/>
               <a:buFont typeface="+mj-lt"/>
-              <a:buAutoNum type="arabicPeriod"/>
+              <a:buAutoNum type="arabicPeriod" startAt="1"/>
             </a:pPr>
             <a:r>
               <a:rPr lang="en-US" sz="1400" dirty="0">
@@ -5226,7 +5792,7 @@
           <a:bodyPr wrap="square" lIns="38100" tIns="38100" rIns="38100" bIns="38100" rtlCol="0" anchor="t"/>
           <a:lstStyle/>
           <a:p>
-            <a:pPr marL="0" indent="0">
+            <a:pPr indent="0" marL="0">
               <a:spcAft>
                 <a:spcPts val="200"/>
               </a:spcAft>
@@ -5243,7 +5809,7 @@
             <a:endParaRPr lang="en-US" sz="1100" dirty="0"/>
           </a:p>
           <a:p>
-            <a:pPr marL="0" indent="0">
+            <a:pPr indent="0" marL="0">
               <a:buNone/>
             </a:pPr>
             <a:r>
@@ -5260,14 +5826,14 @@
       </p:sp>
       <p:pic>
         <p:nvPicPr>
-          <p:cNvPr id="5" name="Image 0" descr="images/reorder-synthesis.png"/>
+          <p:cNvPr id="5" name="Image 0" descr="images/reorder-synthesis.png">    </p:cNvPr>
           <p:cNvPicPr>
             <a:picLocks noChangeAspect="1"/>
           </p:cNvPicPr>
           <p:nvPr/>
         </p:nvPicPr>
         <p:blipFill>
-          <a:blip r:embed="rId3"/>
+          <a:blip r:embed="rId1"/>
           <a:stretch>
             <a:fillRect/>
           </a:stretch>
@@ -5328,7 +5894,7 @@
           <a:bodyPr wrap="square" lIns="0" tIns="0" rIns="0" bIns="0" rtlCol="0" anchor="ctr"/>
           <a:lstStyle/>
           <a:p>
-            <a:pPr marL="0" indent="0">
+            <a:pPr indent="0" marL="0">
               <a:buNone/>
             </a:pPr>
             <a:r>
@@ -5382,13 +5948,13 @@
             <a:endParaRPr lang="en-US" sz="1300" dirty="0"/>
           </a:p>
           <a:p>
-            <a:pPr marL="685800" lvl="1" indent="-342900">
+            <a:pPr lvl="1" marL="685800" indent="-342900">
               <a:spcAft>
                 <a:spcPts val="600"/>
               </a:spcAft>
               <a:buSzPct val="100000"/>
               <a:buFont typeface="+mj-lt"/>
-              <a:buAutoNum type="arabicPeriod"/>
+              <a:buAutoNum type="arabicPeriod" startAt="1"/>
             </a:pPr>
             <a:r>
               <a:rPr lang="en-US" sz="1300" dirty="0">
@@ -5401,13 +5967,13 @@
             <a:endParaRPr lang="en-US" sz="1300" dirty="0"/>
           </a:p>
           <a:p>
-            <a:pPr marL="685800" lvl="1" indent="-342900">
+            <a:pPr lvl="1" marL="685800" indent="-342900">
               <a:spcAft>
                 <a:spcPts val="600"/>
               </a:spcAft>
               <a:buSzPct val="100000"/>
               <a:buFont typeface="+mj-lt"/>
-              <a:buAutoNum type="arabicPeriod"/>
+              <a:buAutoNum type="arabicPeriod" startAt="1"/>
             </a:pPr>
             <a:r>
               <a:rPr lang="en-US" sz="1300" dirty="0">
@@ -5420,13 +5986,13 @@
             <a:endParaRPr lang="en-US" sz="1300" dirty="0"/>
           </a:p>
           <a:p>
-            <a:pPr marL="685800" lvl="1" indent="-342900">
+            <a:pPr lvl="1" marL="685800" indent="-342900">
               <a:spcAft>
                 <a:spcPts val="600"/>
               </a:spcAft>
               <a:buSzPct val="100000"/>
               <a:buFont typeface="+mj-lt"/>
-              <a:buAutoNum type="arabicPeriod"/>
+              <a:buAutoNum type="arabicPeriod" startAt="1"/>
             </a:pPr>
             <a:r>
               <a:rPr lang="en-US" sz="1300" dirty="0">
@@ -5463,7 +6029,7 @@
           <a:bodyPr wrap="square" lIns="38100" tIns="38100" rIns="38100" bIns="38100" rtlCol="0" anchor="t"/>
           <a:lstStyle/>
           <a:p>
-            <a:pPr marL="0" indent="0">
+            <a:pPr indent="0" marL="0">
               <a:spcAft>
                 <a:spcPts val="200"/>
               </a:spcAft>
@@ -5480,7 +6046,7 @@
             <a:endParaRPr lang="en-US" sz="1100" dirty="0"/>
           </a:p>
           <a:p>
-            <a:pPr marL="0" indent="0">
+            <a:pPr indent="0" marL="0">
               <a:buNone/>
             </a:pPr>
             <a:r>
@@ -5497,14 +6063,14 @@
       </p:sp>
       <p:pic>
         <p:nvPicPr>
-          <p:cNvPr id="5" name="Image 0" descr="images/rework.png"/>
+          <p:cNvPr id="5" name="Image 0" descr="images/rework.png">    </p:cNvPr>
           <p:cNvPicPr>
             <a:picLocks noChangeAspect="1"/>
           </p:cNvPicPr>
           <p:nvPr/>
         </p:nvPicPr>
         <p:blipFill>
-          <a:blip r:embed="rId3"/>
+          <a:blip r:embed="rId1"/>
           <a:stretch>
             <a:fillRect/>
           </a:stretch>
@@ -5565,7 +6131,7 @@
           <a:bodyPr wrap="square" lIns="0" tIns="0" rIns="0" bIns="0" rtlCol="0" anchor="ctr"/>
           <a:lstStyle/>
           <a:p>
-            <a:pPr marL="0" indent="0">
+            <a:pPr indent="0" marL="0">
               <a:buNone/>
             </a:pPr>
             <a:r>
@@ -5619,13 +6185,13 @@
             <a:endParaRPr lang="en-US" sz="1400" dirty="0"/>
           </a:p>
           <a:p>
-            <a:pPr marL="685800" lvl="1" indent="-342900">
+            <a:pPr lvl="1" marL="685800" indent="-342900">
               <a:spcAft>
                 <a:spcPts val="600"/>
               </a:spcAft>
               <a:buSzPct val="100000"/>
               <a:buFont typeface="+mj-lt"/>
-              <a:buAutoNum type="arabicPeriod"/>
+              <a:buAutoNum type="arabicPeriod" startAt="1"/>
             </a:pPr>
             <a:r>
               <a:rPr lang="en-US" sz="1400" dirty="0">
@@ -5638,13 +6204,13 @@
             <a:endParaRPr lang="en-US" sz="1400" dirty="0"/>
           </a:p>
           <a:p>
-            <a:pPr marL="685800" lvl="1" indent="-342900">
+            <a:pPr lvl="1" marL="685800" indent="-342900">
               <a:spcAft>
                 <a:spcPts val="600"/>
               </a:spcAft>
               <a:buSzPct val="100000"/>
               <a:buFont typeface="+mj-lt"/>
-              <a:buAutoNum type="arabicPeriod"/>
+              <a:buAutoNum type="arabicPeriod" startAt="1"/>
             </a:pPr>
             <a:r>
               <a:rPr lang="en-US" sz="1400" dirty="0">
@@ -5657,13 +6223,13 @@
             <a:endParaRPr lang="en-US" sz="1400" dirty="0"/>
           </a:p>
           <a:p>
-            <a:pPr marL="685800" lvl="1" indent="-342900">
+            <a:pPr lvl="1" marL="685800" indent="-342900">
               <a:spcAft>
                 <a:spcPts val="600"/>
               </a:spcAft>
               <a:buSzPct val="100000"/>
               <a:buFont typeface="+mj-lt"/>
-              <a:buAutoNum type="arabicPeriod"/>
+              <a:buAutoNum type="arabicPeriod" startAt="1"/>
             </a:pPr>
             <a:r>
               <a:rPr lang="en-US" sz="1400" dirty="0">
@@ -5676,13 +6242,13 @@
             <a:endParaRPr lang="en-US" sz="1400" dirty="0"/>
           </a:p>
           <a:p>
-            <a:pPr marL="685800" lvl="1" indent="-342900">
+            <a:pPr lvl="1" marL="685800" indent="-342900">
               <a:spcAft>
                 <a:spcPts val="2000"/>
               </a:spcAft>
               <a:buSzPct val="100000"/>
               <a:buFont typeface="+mj-lt"/>
-              <a:buAutoNum type="arabicPeriod"/>
+              <a:buAutoNum type="arabicPeriod" startAt="1"/>
             </a:pPr>
             <a:r>
               <a:rPr lang="en-US" sz="1400" dirty="0">
@@ -5737,7 +6303,7 @@
           <a:bodyPr wrap="square" lIns="38100" tIns="38100" rIns="38100" bIns="38100" rtlCol="0" anchor="t"/>
           <a:lstStyle/>
           <a:p>
-            <a:pPr marL="0" indent="0">
+            <a:pPr indent="0" marL="0">
               <a:spcAft>
                 <a:spcPts val="200"/>
               </a:spcAft>
@@ -5754,7 +6320,7 @@
             <a:endParaRPr lang="en-US" sz="1100" dirty="0"/>
           </a:p>
           <a:p>
-            <a:pPr marL="0" indent="0">
+            <a:pPr indent="0" marL="0">
               <a:buNone/>
             </a:pPr>
             <a:r>
@@ -5815,7 +6381,7 @@
           <a:bodyPr wrap="square" lIns="0" tIns="0" rIns="0" bIns="0" rtlCol="0" anchor="ctr"/>
           <a:lstStyle/>
           <a:p>
-            <a:pPr marL="0" indent="0">
+            <a:pPr indent="0" marL="0">
               <a:buNone/>
             </a:pPr>
             <a:r>
@@ -5869,7 +6435,7 @@
             <a:endParaRPr lang="en-US" sz="1600" dirty="0"/>
           </a:p>
           <a:p>
-            <a:pPr marL="762000" lvl="1" indent="-381000">
+            <a:pPr lvl="1" marL="762000" indent="-381000">
               <a:spcAft>
                 <a:spcPts val="600"/>
               </a:spcAft>
@@ -5887,7 +6453,7 @@
             <a:endParaRPr lang="en-US" sz="1600" dirty="0"/>
           </a:p>
           <a:p>
-            <a:pPr marL="762000" lvl="1" indent="-381000">
+            <a:pPr lvl="1" marL="762000" indent="-381000">
               <a:spcAft>
                 <a:spcPts val="600"/>
               </a:spcAft>
@@ -5905,7 +6471,7 @@
             <a:endParaRPr lang="en-US" sz="1600" dirty="0"/>
           </a:p>
           <a:p>
-            <a:pPr marL="762000" lvl="1" indent="-381000">
+            <a:pPr lvl="1" marL="762000" indent="-381000">
               <a:spcAft>
                 <a:spcPts val="2000"/>
               </a:spcAft>
@@ -5941,7 +6507,7 @@
             <a:endParaRPr lang="en-US" sz="1600" dirty="0"/>
           </a:p>
           <a:p>
-            <a:pPr marL="762000" lvl="1" indent="-381000">
+            <a:pPr lvl="1" marL="762000" indent="-381000">
               <a:spcAft>
                 <a:spcPts val="600"/>
               </a:spcAft>
@@ -5956,6 +6522,12 @@
               </a:rPr>
               <a:t>45-session labelled injection set </a:t>
             </a:r>
+            <a:pPr indent="0" marL="0">
+              <a:spcAft>
+                <a:spcPts val="600"/>
+              </a:spcAft>
+              <a:buNone/>
+            </a:pPr>
             <a:r>
               <a:rPr lang="en-US" sz="1600" dirty="0">
                 <a:solidFill>
@@ -5967,7 +6539,7 @@
             <a:endParaRPr lang="en-US" sz="1600" dirty="0"/>
           </a:p>
           <a:p>
-            <a:pPr marL="762000" lvl="1" indent="-381000">
+            <a:pPr lvl="1" marL="762000" indent="-381000">
               <a:spcAft>
                 <a:spcPts val="600"/>
               </a:spcAft>
@@ -5982,6 +6554,12 @@
               </a:rPr>
               <a:t>30-session randomised user study </a:t>
             </a:r>
+            <a:pPr indent="0" marL="0">
+              <a:spcAft>
+                <a:spcPts val="600"/>
+              </a:spcAft>
+              <a:buNone/>
+            </a:pPr>
             <a:r>
               <a:rPr lang="en-US" sz="1600" dirty="0">
                 <a:solidFill>
@@ -6015,7 +6593,7 @@
           <a:bodyPr wrap="square" lIns="0" tIns="0" rIns="0" bIns="0" rtlCol="0" anchor="ctr"/>
           <a:lstStyle/>
           <a:p>
-            <a:pPr marL="0" indent="0" algn="ctr">
+            <a:pPr algn="ctr" indent="0" marL="0">
               <a:buNone/>
             </a:pPr>
             <a:r>
@@ -6026,6 +6604,9 @@
               </a:rPr>
               <a:t>Reproducible: </a:t>
             </a:r>
+            <a:pPr algn="ctr" indent="0" marL="0">
+              <a:buNone/>
+            </a:pPr>
             <a:r>
               <a:rPr lang="en-US" sz="1400" i="1" dirty="0">
                 <a:solidFill>
@@ -6084,7 +6665,7 @@
           <a:bodyPr wrap="square" lIns="0" tIns="0" rIns="0" bIns="0" rtlCol="0" anchor="ctr"/>
           <a:lstStyle/>
           <a:p>
-            <a:pPr marL="0" indent="0" algn="ctr">
+            <a:pPr algn="ctr" indent="0" marL="0">
               <a:buNone/>
             </a:pPr>
             <a:r>
@@ -6145,7 +6726,7 @@
           <a:bodyPr wrap="square" lIns="0" tIns="0" rIns="0" bIns="0" rtlCol="0" anchor="ctr"/>
           <a:lstStyle/>
           <a:p>
-            <a:pPr marL="0" indent="0">
+            <a:pPr indent="0" marL="0">
               <a:buNone/>
             </a:pPr>
             <a:r>
@@ -6196,6 +6777,12 @@
               </a:rPr>
               <a:t>45 hand-labelled injection sessions </a:t>
             </a:r>
+            <a:pPr indent="0" marL="0">
+              <a:spcAft>
+                <a:spcPts val="1000"/>
+              </a:spcAft>
+              <a:buNone/>
+            </a:pPr>
             <a:r>
               <a:rPr lang="en-US" sz="1500" dirty="0">
                 <a:solidFill>
@@ -6222,6 +6809,12 @@
               </a:rPr>
               <a:t>3 raters (author + 2 external MEng cohort members) </a:t>
             </a:r>
+            <a:pPr indent="0" marL="0">
+              <a:spcAft>
+                <a:spcPts val="1000"/>
+              </a:spcAft>
+              <a:buNone/>
+            </a:pPr>
             <a:r>
               <a:rPr lang="en-US" sz="1500" dirty="0">
                 <a:solidFill>
@@ -6248,6 +6841,12 @@
               </a:rPr>
               <a:t>Disagreements predominantly surrounding hygiene + rework labels </a:t>
             </a:r>
+            <a:pPr indent="0" marL="0">
+              <a:spcAft>
+                <a:spcPts val="1000"/>
+              </a:spcAft>
+              <a:buNone/>
+            </a:pPr>
             <a:r>
               <a:rPr lang="en-US" sz="1500" dirty="0">
                 <a:solidFill>
@@ -6274,6 +6873,12 @@
               </a:rPr>
               <a:t>Track all divergence points detected </a:t>
             </a:r>
+            <a:pPr indent="0" marL="0">
+              <a:spcAft>
+                <a:spcPts val="1000"/>
+              </a:spcAft>
+              <a:buNone/>
+            </a:pPr>
             <a:r>
               <a:rPr lang="en-US" sz="1500" dirty="0">
                 <a:solidFill>
@@ -6300,6 +6905,12 @@
               </a:rPr>
               <a:t>Measure precision + recall </a:t>
             </a:r>
+            <a:pPr indent="0" marL="0">
+              <a:spcAft>
+                <a:spcPts val="1000"/>
+              </a:spcAft>
+              <a:buNone/>
+            </a:pPr>
             <a:r>
               <a:rPr lang="en-US" sz="1500" dirty="0">
                 <a:solidFill>
@@ -6358,7 +6969,7 @@
           <a:bodyPr wrap="square" lIns="0" tIns="0" rIns="0" bIns="0" rtlCol="0" anchor="ctr"/>
           <a:lstStyle/>
           <a:p>
-            <a:pPr marL="0" indent="0">
+            <a:pPr indent="0" marL="0">
               <a:buNone/>
             </a:pPr>
             <a:r>
@@ -6394,7 +7005,7 @@
           <a:bodyPr wrap="square" lIns="0" tIns="0" rIns="0" bIns="0" rtlCol="0" anchor="ctr"/>
           <a:lstStyle/>
           <a:p>
-            <a:pPr marL="0" indent="0" algn="ctr">
+            <a:pPr algn="ctr" indent="0" marL="0">
               <a:buNone/>
             </a:pPr>
             <a:r>
@@ -6430,7 +7041,7 @@
           <a:bodyPr wrap="square" lIns="0" tIns="0" rIns="0" bIns="0" rtlCol="0" anchor="b"/>
           <a:lstStyle/>
           <a:p>
-            <a:pPr marL="0" indent="0" algn="ctr">
+            <a:pPr algn="ctr" indent="0" marL="0">
               <a:buNone/>
             </a:pPr>
             <a:r>
@@ -6466,7 +7077,7 @@
           <a:bodyPr wrap="square" lIns="0" tIns="0" rIns="0" bIns="0" rtlCol="0" anchor="ctr"/>
           <a:lstStyle/>
           <a:p>
-            <a:pPr marL="0" indent="0" algn="ctr">
+            <a:pPr algn="ctr" indent="0" marL="0">
               <a:buNone/>
             </a:pPr>
             <a:r>
@@ -6502,7 +7113,7 @@
           <a:bodyPr wrap="square" lIns="0" tIns="0" rIns="0" bIns="0" rtlCol="0" anchor="ctr"/>
           <a:lstStyle/>
           <a:p>
-            <a:pPr marL="0" indent="0" algn="ctr">
+            <a:pPr algn="ctr" indent="0" marL="0">
               <a:buNone/>
             </a:pPr>
             <a:r>
@@ -6538,7 +7149,7 @@
           <a:bodyPr wrap="square" lIns="508" tIns="508" rIns="508" bIns="508" rtlCol="0" anchor="ctr"/>
           <a:lstStyle/>
           <a:p>
-            <a:pPr marL="0" indent="0" algn="r">
+            <a:pPr algn="r" indent="0" marL="0">
               <a:buNone/>
             </a:pPr>
             <a:r>
@@ -6574,7 +7185,7 @@
           <a:bodyPr wrap="square" lIns="508" tIns="508" rIns="508" bIns="508" rtlCol="0" anchor="ctr"/>
           <a:lstStyle/>
           <a:p>
-            <a:pPr marL="0" indent="0" algn="r">
+            <a:pPr algn="r" indent="0" marL="0">
               <a:buNone/>
             </a:pPr>
             <a:r>
@@ -6613,13 +7224,6 @@
             <a:prstDash val="solid"/>
           </a:ln>
         </p:spPr>
-        <p:txBody>
-          <a:bodyPr/>
-          <a:lstStyle/>
-          <a:p>
-            <a:endParaRPr lang="en-US"/>
-          </a:p>
-        </p:txBody>
       </p:sp>
       <p:sp>
         <p:nvSpPr>
@@ -6642,7 +7246,7 @@
           <a:bodyPr wrap="square" lIns="0" tIns="0" rIns="0" bIns="0" rtlCol="0" anchor="ctr"/>
           <a:lstStyle/>
           <a:p>
-            <a:pPr marL="0" indent="0" algn="ctr">
+            <a:pPr algn="ctr" indent="0" marL="0">
               <a:buNone/>
             </a:pPr>
             <a:r>
@@ -6656,7 +7260,7 @@
             <a:endParaRPr lang="en-US" sz="2000" dirty="0"/>
           </a:p>
           <a:p>
-            <a:pPr marL="0" indent="0" algn="ctr">
+            <a:pPr algn="ctr" indent="0" marL="0">
               <a:buNone/>
             </a:pPr>
             <a:r>
@@ -6695,13 +7299,6 @@
             <a:prstDash val="solid"/>
           </a:ln>
         </p:spPr>
-        <p:txBody>
-          <a:bodyPr/>
-          <a:lstStyle/>
-          <a:p>
-            <a:endParaRPr lang="en-US"/>
-          </a:p>
-        </p:txBody>
       </p:sp>
       <p:sp>
         <p:nvSpPr>
@@ -6724,7 +7321,7 @@
           <a:bodyPr wrap="square" lIns="0" tIns="0" rIns="0" bIns="0" rtlCol="0" anchor="ctr"/>
           <a:lstStyle/>
           <a:p>
-            <a:pPr marL="0" indent="0" algn="ctr">
+            <a:pPr algn="ctr" indent="0" marL="0">
               <a:buNone/>
             </a:pPr>
             <a:r>
@@ -6738,7 +7335,7 @@
             <a:endParaRPr lang="en-US" sz="2000" dirty="0"/>
           </a:p>
           <a:p>
-            <a:pPr marL="0" indent="0" algn="ctr">
+            <a:pPr algn="ctr" indent="0" marL="0">
               <a:buNone/>
             </a:pPr>
             <a:r>
@@ -6777,13 +7374,6 @@
             <a:prstDash val="solid"/>
           </a:ln>
         </p:spPr>
-        <p:txBody>
-          <a:bodyPr/>
-          <a:lstStyle/>
-          <a:p>
-            <a:endParaRPr lang="en-US"/>
-          </a:p>
-        </p:txBody>
       </p:sp>
       <p:sp>
         <p:nvSpPr>
@@ -6806,7 +7396,7 @@
           <a:bodyPr wrap="square" lIns="0" tIns="0" rIns="0" bIns="0" rtlCol="0" anchor="ctr"/>
           <a:lstStyle/>
           <a:p>
-            <a:pPr marL="0" indent="0" algn="ctr">
+            <a:pPr algn="ctr" indent="0" marL="0">
               <a:buNone/>
             </a:pPr>
             <a:r>
@@ -6820,7 +7410,7 @@
             <a:endParaRPr lang="en-US" sz="2000" dirty="0"/>
           </a:p>
           <a:p>
-            <a:pPr marL="0" indent="0" algn="ctr">
+            <a:pPr algn="ctr" indent="0" marL="0">
               <a:buNone/>
             </a:pPr>
             <a:r>
@@ -6859,13 +7449,6 @@
             <a:prstDash val="solid"/>
           </a:ln>
         </p:spPr>
-        <p:txBody>
-          <a:bodyPr/>
-          <a:lstStyle/>
-          <a:p>
-            <a:endParaRPr lang="en-US"/>
-          </a:p>
-        </p:txBody>
       </p:sp>
       <p:sp>
         <p:nvSpPr>
@@ -6888,7 +7471,7 @@
           <a:bodyPr wrap="square" lIns="0" tIns="0" rIns="0" bIns="0" rtlCol="0" anchor="ctr"/>
           <a:lstStyle/>
           <a:p>
-            <a:pPr marL="0" indent="0" algn="ctr">
+            <a:pPr algn="ctr" indent="0" marL="0">
               <a:buNone/>
             </a:pPr>
             <a:r>
@@ -6902,7 +7485,7 @@
             <a:endParaRPr lang="en-US" sz="2000" dirty="0"/>
           </a:p>
           <a:p>
-            <a:pPr marL="0" indent="0" algn="ctr">
+            <a:pPr algn="ctr" indent="0" marL="0">
               <a:buNone/>
             </a:pPr>
             <a:r>
@@ -6938,7 +7521,7 @@
           <a:bodyPr wrap="square" lIns="0" tIns="0" rIns="0" bIns="0" rtlCol="0" anchor="ctr"/>
           <a:lstStyle/>
           <a:p>
-            <a:pPr marL="0" indent="0" algn="ctr">
+            <a:pPr algn="ctr" indent="0" marL="0">
               <a:buNone/>
             </a:pPr>
             <a:r>
@@ -6949,6 +7532,9 @@
               </a:rPr>
               <a:t>Precision </a:t>
             </a:r>
+            <a:pPr algn="ctr" indent="0" marL="0">
+              <a:buNone/>
+            </a:pPr>
             <a:r>
               <a:rPr lang="en-US" sz="1100" b="1" i="1" dirty="0">
                 <a:solidFill>
@@ -6957,6 +7543,9 @@
               </a:rPr>
               <a:t>1.00</a:t>
             </a:r>
+            <a:pPr algn="ctr" indent="0" marL="0">
+              <a:buNone/>
+            </a:pPr>
             <a:r>
               <a:rPr lang="en-US" sz="1100" i="1" dirty="0">
                 <a:solidFill>
@@ -6965,6 +7554,9 @@
               </a:rPr>
               <a:t>   ·   Recall </a:t>
             </a:r>
+            <a:pPr algn="ctr" indent="0" marL="0">
+              <a:buNone/>
+            </a:pPr>
             <a:r>
               <a:rPr lang="en-US" sz="1100" b="1" i="1" dirty="0">
                 <a:solidFill>
@@ -6998,7 +7590,7 @@
           <a:bodyPr wrap="square" lIns="0" tIns="0" rIns="0" bIns="0" rtlCol="0" anchor="b"/>
           <a:lstStyle/>
           <a:p>
-            <a:pPr marL="0" indent="0" algn="ctr">
+            <a:pPr algn="ctr" indent="0" marL="0">
               <a:buNone/>
             </a:pPr>
             <a:r>
@@ -7034,7 +7626,7 @@
           <a:bodyPr wrap="square" lIns="0" tIns="0" rIns="0" bIns="0" rtlCol="0" anchor="ctr"/>
           <a:lstStyle/>
           <a:p>
-            <a:pPr marL="0" indent="0" algn="ctr">
+            <a:pPr algn="ctr" indent="0" marL="0">
               <a:buNone/>
             </a:pPr>
             <a:r>
@@ -7070,7 +7662,7 @@
           <a:bodyPr wrap="square" lIns="0" tIns="0" rIns="0" bIns="0" rtlCol="0" anchor="ctr"/>
           <a:lstStyle/>
           <a:p>
-            <a:pPr marL="0" indent="0" algn="ctr">
+            <a:pPr algn="ctr" indent="0" marL="0">
               <a:buNone/>
             </a:pPr>
             <a:r>
@@ -7106,7 +7698,7 @@
           <a:bodyPr wrap="square" lIns="508" tIns="508" rIns="508" bIns="508" rtlCol="0" anchor="ctr"/>
           <a:lstStyle/>
           <a:p>
-            <a:pPr marL="0" indent="0" algn="r">
+            <a:pPr algn="r" indent="0" marL="0">
               <a:buNone/>
             </a:pPr>
             <a:r>
@@ -7142,7 +7734,7 @@
           <a:bodyPr wrap="square" lIns="508" tIns="508" rIns="508" bIns="508" rtlCol="0" anchor="ctr"/>
           <a:lstStyle/>
           <a:p>
-            <a:pPr marL="0" indent="0" algn="r">
+            <a:pPr algn="r" indent="0" marL="0">
               <a:buNone/>
             </a:pPr>
             <a:r>
@@ -7181,13 +7773,6 @@
             <a:prstDash val="solid"/>
           </a:ln>
         </p:spPr>
-        <p:txBody>
-          <a:bodyPr/>
-          <a:lstStyle/>
-          <a:p>
-            <a:endParaRPr lang="en-US"/>
-          </a:p>
-        </p:txBody>
       </p:sp>
       <p:sp>
         <p:nvSpPr>
@@ -7210,7 +7795,7 @@
           <a:bodyPr wrap="square" lIns="0" tIns="0" rIns="0" bIns="0" rtlCol="0" anchor="ctr"/>
           <a:lstStyle/>
           <a:p>
-            <a:pPr marL="0" indent="0" algn="ctr">
+            <a:pPr algn="ctr" indent="0" marL="0">
               <a:buNone/>
             </a:pPr>
             <a:r>
@@ -7224,7 +7809,7 @@
             <a:endParaRPr lang="en-US" sz="2000" dirty="0"/>
           </a:p>
           <a:p>
-            <a:pPr marL="0" indent="0" algn="ctr">
+            <a:pPr algn="ctr" indent="0" marL="0">
               <a:buNone/>
             </a:pPr>
             <a:r>
@@ -7263,13 +7848,6 @@
             <a:prstDash val="solid"/>
           </a:ln>
         </p:spPr>
-        <p:txBody>
-          <a:bodyPr/>
-          <a:lstStyle/>
-          <a:p>
-            <a:endParaRPr lang="en-US"/>
-          </a:p>
-        </p:txBody>
       </p:sp>
       <p:sp>
         <p:nvSpPr>
@@ -7292,7 +7870,7 @@
           <a:bodyPr wrap="square" lIns="0" tIns="0" rIns="0" bIns="0" rtlCol="0" anchor="ctr"/>
           <a:lstStyle/>
           <a:p>
-            <a:pPr marL="0" indent="0" algn="ctr">
+            <a:pPr algn="ctr" indent="0" marL="0">
               <a:buNone/>
             </a:pPr>
             <a:r>
@@ -7306,7 +7884,7 @@
             <a:endParaRPr lang="en-US" sz="2000" dirty="0"/>
           </a:p>
           <a:p>
-            <a:pPr marL="0" indent="0" algn="ctr">
+            <a:pPr algn="ctr" indent="0" marL="0">
               <a:buNone/>
             </a:pPr>
             <a:r>
@@ -7345,13 +7923,6 @@
             <a:prstDash val="solid"/>
           </a:ln>
         </p:spPr>
-        <p:txBody>
-          <a:bodyPr/>
-          <a:lstStyle/>
-          <a:p>
-            <a:endParaRPr lang="en-US"/>
-          </a:p>
-        </p:txBody>
       </p:sp>
       <p:sp>
         <p:nvSpPr>
@@ -7374,7 +7945,7 @@
           <a:bodyPr wrap="square" lIns="0" tIns="0" rIns="0" bIns="0" rtlCol="0" anchor="ctr"/>
           <a:lstStyle/>
           <a:p>
-            <a:pPr marL="0" indent="0" algn="ctr">
+            <a:pPr algn="ctr" indent="0" marL="0">
               <a:buNone/>
             </a:pPr>
             <a:r>
@@ -7388,7 +7959,7 @@
             <a:endParaRPr lang="en-US" sz="2000" dirty="0"/>
           </a:p>
           <a:p>
-            <a:pPr marL="0" indent="0" algn="ctr">
+            <a:pPr algn="ctr" indent="0" marL="0">
               <a:buNone/>
             </a:pPr>
             <a:r>
@@ -7427,13 +7998,6 @@
             <a:prstDash val="solid"/>
           </a:ln>
         </p:spPr>
-        <p:txBody>
-          <a:bodyPr/>
-          <a:lstStyle/>
-          <a:p>
-            <a:endParaRPr lang="en-US"/>
-          </a:p>
-        </p:txBody>
       </p:sp>
       <p:sp>
         <p:nvSpPr>
@@ -7456,7 +8020,7 @@
           <a:bodyPr wrap="square" lIns="0" tIns="0" rIns="0" bIns="0" rtlCol="0" anchor="ctr"/>
           <a:lstStyle/>
           <a:p>
-            <a:pPr marL="0" indent="0" algn="ctr">
+            <a:pPr algn="ctr" indent="0" marL="0">
               <a:buNone/>
             </a:pPr>
             <a:r>
@@ -7470,7 +8034,7 @@
             <a:endParaRPr lang="en-US" sz="2000" dirty="0"/>
           </a:p>
           <a:p>
-            <a:pPr marL="0" indent="0" algn="ctr">
+            <a:pPr algn="ctr" indent="0" marL="0">
               <a:buNone/>
             </a:pPr>
             <a:r>
@@ -7506,7 +8070,7 @@
           <a:bodyPr wrap="square" lIns="0" tIns="0" rIns="0" bIns="0" rtlCol="0" anchor="ctr"/>
           <a:lstStyle/>
           <a:p>
-            <a:pPr marL="0" indent="0" algn="ctr">
+            <a:pPr algn="ctr" indent="0" marL="0">
               <a:buNone/>
             </a:pPr>
             <a:r>
@@ -7517,6 +8081,9 @@
               </a:rPr>
               <a:t>Precision </a:t>
             </a:r>
+            <a:pPr algn="ctr" indent="0" marL="0">
+              <a:buNone/>
+            </a:pPr>
             <a:r>
               <a:rPr lang="en-US" sz="1100" b="1" i="1" dirty="0">
                 <a:solidFill>
@@ -7525,6 +8092,9 @@
               </a:rPr>
               <a:t>1.00</a:t>
             </a:r>
+            <a:pPr algn="ctr" indent="0" marL="0">
+              <a:buNone/>
+            </a:pPr>
             <a:r>
               <a:rPr lang="en-US" sz="1100" i="1" dirty="0">
                 <a:solidFill>
@@ -7533,6 +8103,9 @@
               </a:rPr>
               <a:t>   ·   Recall </a:t>
             </a:r>
+            <a:pPr algn="ctr" indent="0" marL="0">
+              <a:buNone/>
+            </a:pPr>
             <a:r>
               <a:rPr lang="en-US" sz="1100" b="1" i="1" dirty="0">
                 <a:solidFill>
@@ -7566,7 +8139,7 @@
           <a:bodyPr wrap="square" lIns="0" tIns="0" rIns="0" bIns="0" rtlCol="0" anchor="b"/>
           <a:lstStyle/>
           <a:p>
-            <a:pPr marL="0" indent="0" algn="ctr">
+            <a:pPr algn="ctr" indent="0" marL="0">
               <a:buNone/>
             </a:pPr>
             <a:r>
@@ -7602,7 +8175,7 @@
           <a:bodyPr wrap="square" lIns="0" tIns="0" rIns="0" bIns="0" rtlCol="0" anchor="ctr"/>
           <a:lstStyle/>
           <a:p>
-            <a:pPr marL="0" indent="0" algn="ctr">
+            <a:pPr algn="ctr" indent="0" marL="0">
               <a:buNone/>
             </a:pPr>
             <a:r>
@@ -7638,7 +8211,7 @@
           <a:bodyPr wrap="square" lIns="0" tIns="0" rIns="0" bIns="0" rtlCol="0" anchor="ctr"/>
           <a:lstStyle/>
           <a:p>
-            <a:pPr marL="0" indent="0" algn="ctr">
+            <a:pPr algn="ctr" indent="0" marL="0">
               <a:buNone/>
             </a:pPr>
             <a:r>
@@ -7674,7 +8247,7 @@
           <a:bodyPr wrap="square" lIns="508" tIns="508" rIns="508" bIns="508" rtlCol="0" anchor="ctr"/>
           <a:lstStyle/>
           <a:p>
-            <a:pPr marL="0" indent="0" algn="r">
+            <a:pPr algn="r" indent="0" marL="0">
               <a:buNone/>
             </a:pPr>
             <a:r>
@@ -7710,7 +8283,7 @@
           <a:bodyPr wrap="square" lIns="508" tIns="508" rIns="508" bIns="508" rtlCol="0" anchor="ctr"/>
           <a:lstStyle/>
           <a:p>
-            <a:pPr marL="0" indent="0" algn="r">
+            <a:pPr algn="r" indent="0" marL="0">
               <a:buNone/>
             </a:pPr>
             <a:r>
@@ -7749,13 +8322,6 @@
             <a:prstDash val="solid"/>
           </a:ln>
         </p:spPr>
-        <p:txBody>
-          <a:bodyPr/>
-          <a:lstStyle/>
-          <a:p>
-            <a:endParaRPr lang="en-US"/>
-          </a:p>
-        </p:txBody>
       </p:sp>
       <p:sp>
         <p:nvSpPr>
@@ -7778,7 +8344,7 @@
           <a:bodyPr wrap="square" lIns="0" tIns="0" rIns="0" bIns="0" rtlCol="0" anchor="ctr"/>
           <a:lstStyle/>
           <a:p>
-            <a:pPr marL="0" indent="0" algn="ctr">
+            <a:pPr algn="ctr" indent="0" marL="0">
               <a:buNone/>
             </a:pPr>
             <a:r>
@@ -7792,7 +8358,7 @@
             <a:endParaRPr lang="en-US" sz="2000" dirty="0"/>
           </a:p>
           <a:p>
-            <a:pPr marL="0" indent="0" algn="ctr">
+            <a:pPr algn="ctr" indent="0" marL="0">
               <a:buNone/>
             </a:pPr>
             <a:r>
@@ -7831,13 +8397,6 @@
             <a:prstDash val="solid"/>
           </a:ln>
         </p:spPr>
-        <p:txBody>
-          <a:bodyPr/>
-          <a:lstStyle/>
-          <a:p>
-            <a:endParaRPr lang="en-US"/>
-          </a:p>
-        </p:txBody>
       </p:sp>
       <p:sp>
         <p:nvSpPr>
@@ -7860,7 +8419,7 @@
           <a:bodyPr wrap="square" lIns="0" tIns="0" rIns="0" bIns="0" rtlCol="0" anchor="ctr"/>
           <a:lstStyle/>
           <a:p>
-            <a:pPr marL="0" indent="0" algn="ctr">
+            <a:pPr algn="ctr" indent="0" marL="0">
               <a:buNone/>
             </a:pPr>
             <a:r>
@@ -7874,7 +8433,7 @@
             <a:endParaRPr lang="en-US" sz="2000" dirty="0"/>
           </a:p>
           <a:p>
-            <a:pPr marL="0" indent="0" algn="ctr">
+            <a:pPr algn="ctr" indent="0" marL="0">
               <a:buNone/>
             </a:pPr>
             <a:r>
@@ -7913,13 +8472,6 @@
             <a:prstDash val="solid"/>
           </a:ln>
         </p:spPr>
-        <p:txBody>
-          <a:bodyPr/>
-          <a:lstStyle/>
-          <a:p>
-            <a:endParaRPr lang="en-US"/>
-          </a:p>
-        </p:txBody>
       </p:sp>
       <p:sp>
         <p:nvSpPr>
@@ -7942,7 +8494,7 @@
           <a:bodyPr wrap="square" lIns="0" tIns="0" rIns="0" bIns="0" rtlCol="0" anchor="ctr"/>
           <a:lstStyle/>
           <a:p>
-            <a:pPr marL="0" indent="0" algn="ctr">
+            <a:pPr algn="ctr" indent="0" marL="0">
               <a:buNone/>
             </a:pPr>
             <a:r>
@@ -7956,7 +8508,7 @@
             <a:endParaRPr lang="en-US" sz="2000" dirty="0"/>
           </a:p>
           <a:p>
-            <a:pPr marL="0" indent="0" algn="ctr">
+            <a:pPr algn="ctr" indent="0" marL="0">
               <a:buNone/>
             </a:pPr>
             <a:r>
@@ -7995,13 +8547,6 @@
             <a:prstDash val="solid"/>
           </a:ln>
         </p:spPr>
-        <p:txBody>
-          <a:bodyPr/>
-          <a:lstStyle/>
-          <a:p>
-            <a:endParaRPr lang="en-US"/>
-          </a:p>
-        </p:txBody>
       </p:sp>
       <p:sp>
         <p:nvSpPr>
@@ -8024,7 +8569,7 @@
           <a:bodyPr wrap="square" lIns="0" tIns="0" rIns="0" bIns="0" rtlCol="0" anchor="ctr"/>
           <a:lstStyle/>
           <a:p>
-            <a:pPr marL="0" indent="0" algn="ctr">
+            <a:pPr algn="ctr" indent="0" marL="0">
               <a:buNone/>
             </a:pPr>
             <a:r>
@@ -8038,7 +8583,7 @@
             <a:endParaRPr lang="en-US" sz="2000" dirty="0"/>
           </a:p>
           <a:p>
-            <a:pPr marL="0" indent="0" algn="ctr">
+            <a:pPr algn="ctr" indent="0" marL="0">
               <a:buNone/>
             </a:pPr>
             <a:r>
@@ -8074,7 +8619,7 @@
           <a:bodyPr wrap="square" lIns="0" tIns="0" rIns="0" bIns="0" rtlCol="0" anchor="ctr"/>
           <a:lstStyle/>
           <a:p>
-            <a:pPr marL="0" indent="0" algn="ctr">
+            <a:pPr algn="ctr" indent="0" marL="0">
               <a:buNone/>
             </a:pPr>
             <a:r>
@@ -8085,6 +8630,9 @@
               </a:rPr>
               <a:t>Precision </a:t>
             </a:r>
+            <a:pPr algn="ctr" indent="0" marL="0">
+              <a:buNone/>
+            </a:pPr>
             <a:r>
               <a:rPr lang="en-US" sz="1100" b="1" i="1" dirty="0">
                 <a:solidFill>
@@ -8093,6 +8641,9 @@
               </a:rPr>
               <a:t>1.00</a:t>
             </a:r>
+            <a:pPr algn="ctr" indent="0" marL="0">
+              <a:buNone/>
+            </a:pPr>
             <a:r>
               <a:rPr lang="en-US" sz="1100" i="1" dirty="0">
                 <a:solidFill>
@@ -8101,6 +8652,9 @@
               </a:rPr>
               <a:t>   ·   Recall </a:t>
             </a:r>
+            <a:pPr algn="ctr" indent="0" marL="0">
+              <a:buNone/>
+            </a:pPr>
             <a:r>
               <a:rPr lang="en-US" sz="1100" b="1" i="1" dirty="0">
                 <a:solidFill>
@@ -8134,7 +8688,7 @@
           <a:bodyPr wrap="square" lIns="0" tIns="0" rIns="0" bIns="0" rtlCol="0" anchor="b"/>
           <a:lstStyle/>
           <a:p>
-            <a:pPr marL="0" indent="0" algn="ctr">
+            <a:pPr algn="ctr" indent="0" marL="0">
               <a:buNone/>
             </a:pPr>
             <a:r>
@@ -8170,7 +8724,7 @@
           <a:bodyPr wrap="square" lIns="0" tIns="0" rIns="0" bIns="0" rtlCol="0" anchor="ctr"/>
           <a:lstStyle/>
           <a:p>
-            <a:pPr marL="0" indent="0" algn="ctr">
+            <a:pPr algn="ctr" indent="0" marL="0">
               <a:buNone/>
             </a:pPr>
             <a:r>
@@ -8206,7 +8760,7 @@
           <a:bodyPr wrap="square" lIns="0" tIns="0" rIns="0" bIns="0" rtlCol="0" anchor="ctr"/>
           <a:lstStyle/>
           <a:p>
-            <a:pPr marL="0" indent="0" algn="ctr">
+            <a:pPr algn="ctr" indent="0" marL="0">
               <a:buNone/>
             </a:pPr>
             <a:r>
@@ -8242,7 +8796,7 @@
           <a:bodyPr wrap="square" lIns="508" tIns="508" rIns="508" bIns="508" rtlCol="0" anchor="ctr"/>
           <a:lstStyle/>
           <a:p>
-            <a:pPr marL="0" indent="0" algn="r">
+            <a:pPr algn="r" indent="0" marL="0">
               <a:buNone/>
             </a:pPr>
             <a:r>
@@ -8278,7 +8832,7 @@
           <a:bodyPr wrap="square" lIns="508" tIns="508" rIns="508" bIns="508" rtlCol="0" anchor="ctr"/>
           <a:lstStyle/>
           <a:p>
-            <a:pPr marL="0" indent="0" algn="r">
+            <a:pPr algn="r" indent="0" marL="0">
               <a:buNone/>
             </a:pPr>
             <a:r>
@@ -8317,13 +8871,6 @@
             <a:prstDash val="solid"/>
           </a:ln>
         </p:spPr>
-        <p:txBody>
-          <a:bodyPr/>
-          <a:lstStyle/>
-          <a:p>
-            <a:endParaRPr lang="en-US"/>
-          </a:p>
-        </p:txBody>
       </p:sp>
       <p:sp>
         <p:nvSpPr>
@@ -8346,7 +8893,7 @@
           <a:bodyPr wrap="square" lIns="0" tIns="0" rIns="0" bIns="0" rtlCol="0" anchor="ctr"/>
           <a:lstStyle/>
           <a:p>
-            <a:pPr marL="0" indent="0" algn="ctr">
+            <a:pPr algn="ctr" indent="0" marL="0">
               <a:buNone/>
             </a:pPr>
             <a:r>
@@ -8360,7 +8907,7 @@
             <a:endParaRPr lang="en-US" sz="2000" dirty="0"/>
           </a:p>
           <a:p>
-            <a:pPr marL="0" indent="0" algn="ctr">
+            <a:pPr algn="ctr" indent="0" marL="0">
               <a:buNone/>
             </a:pPr>
             <a:r>
@@ -8399,13 +8946,6 @@
             <a:prstDash val="solid"/>
           </a:ln>
         </p:spPr>
-        <p:txBody>
-          <a:bodyPr/>
-          <a:lstStyle/>
-          <a:p>
-            <a:endParaRPr lang="en-US"/>
-          </a:p>
-        </p:txBody>
       </p:sp>
       <p:sp>
         <p:nvSpPr>
@@ -8428,7 +8968,7 @@
           <a:bodyPr wrap="square" lIns="0" tIns="0" rIns="0" bIns="0" rtlCol="0" anchor="ctr"/>
           <a:lstStyle/>
           <a:p>
-            <a:pPr marL="0" indent="0" algn="ctr">
+            <a:pPr algn="ctr" indent="0" marL="0">
               <a:buNone/>
             </a:pPr>
             <a:r>
@@ -8442,7 +8982,7 @@
             <a:endParaRPr lang="en-US" sz="2000" dirty="0"/>
           </a:p>
           <a:p>
-            <a:pPr marL="0" indent="0" algn="ctr">
+            <a:pPr algn="ctr" indent="0" marL="0">
               <a:buNone/>
             </a:pPr>
             <a:r>
@@ -8481,13 +9021,6 @@
             <a:prstDash val="solid"/>
           </a:ln>
         </p:spPr>
-        <p:txBody>
-          <a:bodyPr/>
-          <a:lstStyle/>
-          <a:p>
-            <a:endParaRPr lang="en-US"/>
-          </a:p>
-        </p:txBody>
       </p:sp>
       <p:sp>
         <p:nvSpPr>
@@ -8510,7 +9043,7 @@
           <a:bodyPr wrap="square" lIns="0" tIns="0" rIns="0" bIns="0" rtlCol="0" anchor="ctr"/>
           <a:lstStyle/>
           <a:p>
-            <a:pPr marL="0" indent="0" algn="ctr">
+            <a:pPr algn="ctr" indent="0" marL="0">
               <a:buNone/>
             </a:pPr>
             <a:r>
@@ -8524,7 +9057,7 @@
             <a:endParaRPr lang="en-US" sz="2000" dirty="0"/>
           </a:p>
           <a:p>
-            <a:pPr marL="0" indent="0" algn="ctr">
+            <a:pPr algn="ctr" indent="0" marL="0">
               <a:buNone/>
             </a:pPr>
             <a:r>
@@ -8563,13 +9096,6 @@
             <a:prstDash val="solid"/>
           </a:ln>
         </p:spPr>
-        <p:txBody>
-          <a:bodyPr/>
-          <a:lstStyle/>
-          <a:p>
-            <a:endParaRPr lang="en-US"/>
-          </a:p>
-        </p:txBody>
       </p:sp>
       <p:sp>
         <p:nvSpPr>
@@ -8592,7 +9118,7 @@
           <a:bodyPr wrap="square" lIns="0" tIns="0" rIns="0" bIns="0" rtlCol="0" anchor="ctr"/>
           <a:lstStyle/>
           <a:p>
-            <a:pPr marL="0" indent="0" algn="ctr">
+            <a:pPr algn="ctr" indent="0" marL="0">
               <a:buNone/>
             </a:pPr>
             <a:r>
@@ -8606,7 +9132,7 @@
             <a:endParaRPr lang="en-US" sz="2000" dirty="0"/>
           </a:p>
           <a:p>
-            <a:pPr marL="0" indent="0" algn="ctr">
+            <a:pPr algn="ctr" indent="0" marL="0">
               <a:buNone/>
             </a:pPr>
             <a:r>
@@ -8642,7 +9168,7 @@
           <a:bodyPr wrap="square" lIns="0" tIns="0" rIns="0" bIns="0" rtlCol="0" anchor="ctr"/>
           <a:lstStyle/>
           <a:p>
-            <a:pPr marL="0" indent="0" algn="ctr">
+            <a:pPr algn="ctr" indent="0" marL="0">
               <a:buNone/>
             </a:pPr>
             <a:r>
@@ -8653,6 +9179,9 @@
               </a:rPr>
               <a:t>Precision </a:t>
             </a:r>
+            <a:pPr algn="ctr" indent="0" marL="0">
+              <a:buNone/>
+            </a:pPr>
             <a:r>
               <a:rPr lang="en-US" sz="1100" b="1" i="1" dirty="0">
                 <a:solidFill>
@@ -8661,6 +9190,9 @@
               </a:rPr>
               <a:t>1.00</a:t>
             </a:r>
+            <a:pPr algn="ctr" indent="0" marL="0">
+              <a:buNone/>
+            </a:pPr>
             <a:r>
               <a:rPr lang="en-US" sz="1100" i="1" dirty="0">
                 <a:solidFill>
@@ -8669,6 +9201,9 @@
               </a:rPr>
               <a:t>   ·   Recall </a:t>
             </a:r>
+            <a:pPr algn="ctr" indent="0" marL="0">
+              <a:buNone/>
+            </a:pPr>
             <a:r>
               <a:rPr lang="en-US" sz="1100" b="1" i="1" dirty="0">
                 <a:solidFill>
@@ -8702,7 +9237,7 @@
           <a:bodyPr wrap="square" lIns="0" tIns="0" rIns="0" bIns="0" rtlCol="0" anchor="ctr"/>
           <a:lstStyle/>
           <a:p>
-            <a:pPr marL="0" indent="0" algn="ctr">
+            <a:pPr algn="ctr" indent="0" marL="0">
               <a:buNone/>
             </a:pPr>
             <a:r>
@@ -8738,7 +9273,7 @@
           <a:bodyPr wrap="square" lIns="0" tIns="0" rIns="0" bIns="0" rtlCol="0" anchor="ctr"/>
           <a:lstStyle/>
           <a:p>
-            <a:pPr marL="0" indent="0" algn="ctr">
+            <a:pPr algn="ctr" indent="0" marL="0">
               <a:buNone/>
             </a:pPr>
             <a:r>
@@ -8799,7 +9334,7 @@
           <a:bodyPr wrap="square" lIns="0" tIns="0" rIns="0" bIns="0" rtlCol="0" anchor="ctr"/>
           <a:lstStyle/>
           <a:p>
-            <a:pPr marL="0" indent="0">
+            <a:pPr indent="0" marL="0">
               <a:buNone/>
             </a:pPr>
             <a:r>
@@ -8835,7 +9370,7 @@
           <a:bodyPr wrap="square" lIns="0" tIns="0" rIns="0" bIns="0" rtlCol="0" anchor="ctr"/>
           <a:lstStyle/>
           <a:p>
-            <a:pPr marL="0" indent="0" algn="ctr">
+            <a:pPr algn="ctr" indent="0" marL="0">
               <a:buNone/>
             </a:pPr>
             <a:r>
@@ -8873,55 +9408,13 @@
             <a:tbl>
               <a:tblPr/>
               <a:tblGrid>
-                <a:gridCol w="1737360">
-                  <a:extLst>
-                    <a:ext uri="{9D8B030D-6E8A-4147-A177-3AD203B41FA5}">
-                      <a16:colId xmlns:a16="http://schemas.microsoft.com/office/drawing/2014/main" val="20000"/>
-                    </a:ext>
-                  </a:extLst>
-                </a:gridCol>
-                <a:gridCol w="640080">
-                  <a:extLst>
-                    <a:ext uri="{9D8B030D-6E8A-4147-A177-3AD203B41FA5}">
-                      <a16:colId xmlns:a16="http://schemas.microsoft.com/office/drawing/2014/main" val="20001"/>
-                    </a:ext>
-                  </a:extLst>
-                </a:gridCol>
-                <a:gridCol w="1005840">
-                  <a:extLst>
-                    <a:ext uri="{9D8B030D-6E8A-4147-A177-3AD203B41FA5}">
-                      <a16:colId xmlns:a16="http://schemas.microsoft.com/office/drawing/2014/main" val="20002"/>
-                    </a:ext>
-                  </a:extLst>
-                </a:gridCol>
-                <a:gridCol w="914400">
-                  <a:extLst>
-                    <a:ext uri="{9D8B030D-6E8A-4147-A177-3AD203B41FA5}">
-                      <a16:colId xmlns:a16="http://schemas.microsoft.com/office/drawing/2014/main" val="20003"/>
-                    </a:ext>
-                  </a:extLst>
-                </a:gridCol>
-                <a:gridCol w="1005840">
-                  <a:extLst>
-                    <a:ext uri="{9D8B030D-6E8A-4147-A177-3AD203B41FA5}">
-                      <a16:colId xmlns:a16="http://schemas.microsoft.com/office/drawing/2014/main" val="20004"/>
-                    </a:ext>
-                  </a:extLst>
-                </a:gridCol>
-                <a:gridCol w="1097280">
-                  <a:extLst>
-                    <a:ext uri="{9D8B030D-6E8A-4147-A177-3AD203B41FA5}">
-                      <a16:colId xmlns:a16="http://schemas.microsoft.com/office/drawing/2014/main" val="20005"/>
-                    </a:ext>
-                  </a:extLst>
-                </a:gridCol>
-                <a:gridCol w="1463040">
-                  <a:extLst>
-                    <a:ext uri="{9D8B030D-6E8A-4147-A177-3AD203B41FA5}">
-                      <a16:colId xmlns:a16="http://schemas.microsoft.com/office/drawing/2014/main" val="20006"/>
-                    </a:ext>
-                  </a:extLst>
-                </a:gridCol>
+                <a:gridCol w="1737360"/>
+                <a:gridCol w="640080"/>
+                <a:gridCol w="1005840"/>
+                <a:gridCol w="914400"/>
+                <a:gridCol w="1005840"/>
+                <a:gridCol w="1097280"/>
+                <a:gridCol w="1463040"/>
               </a:tblGrid>
               <a:tr h="411480">
                 <a:tc>
@@ -8929,7 +9422,7 @@
                     <a:bodyPr/>
                     <a:lstStyle/>
                     <a:p>
-                      <a:pPr marL="0" indent="0" algn="l">
+                      <a:pPr algn="l" indent="0" marL="0">
                         <a:buNone/>
                       </a:pPr>
                       <a:r>
@@ -8990,7 +9483,7 @@
                     <a:bodyPr/>
                     <a:lstStyle/>
                     <a:p>
-                      <a:pPr marL="0" indent="0" algn="ctr">
+                      <a:pPr algn="ctr" indent="0" marL="0">
                         <a:buNone/>
                       </a:pPr>
                       <a:r>
@@ -9051,7 +9544,7 @@
                     <a:bodyPr/>
                     <a:lstStyle/>
                     <a:p>
-                      <a:pPr marL="0" indent="0" algn="ctr">
+                      <a:pPr algn="ctr" indent="0" marL="0">
                         <a:buNone/>
                       </a:pPr>
                       <a:r>
@@ -9112,7 +9605,7 @@
                     <a:bodyPr/>
                     <a:lstStyle/>
                     <a:p>
-                      <a:pPr marL="0" indent="0" algn="ctr">
+                      <a:pPr algn="ctr" indent="0" marL="0">
                         <a:buNone/>
                       </a:pPr>
                       <a:r>
@@ -9173,7 +9666,7 @@
                     <a:bodyPr/>
                     <a:lstStyle/>
                     <a:p>
-                      <a:pPr marL="0" indent="0" algn="ctr">
+                      <a:pPr algn="ctr" indent="0" marL="0">
                         <a:buNone/>
                       </a:pPr>
                       <a:r>
@@ -9234,7 +9727,7 @@
                     <a:bodyPr/>
                     <a:lstStyle/>
                     <a:p>
-                      <a:pPr marL="0" indent="0" algn="ctr">
+                      <a:pPr algn="ctr" indent="0" marL="0">
                         <a:buNone/>
                       </a:pPr>
                       <a:r>
@@ -9295,7 +9788,7 @@
                     <a:bodyPr/>
                     <a:lstStyle/>
                     <a:p>
-                      <a:pPr marL="0" indent="0" algn="ctr">
+                      <a:pPr algn="ctr" indent="0" marL="0">
                         <a:buNone/>
                       </a:pPr>
                       <a:r>
@@ -9351,11 +9844,6 @@
                     </a:solidFill>
                   </a:tcPr>
                 </a:tc>
-                <a:extLst>
-                  <a:ext uri="{0D108BD9-81ED-4DB2-BD59-A6C34878D82A}">
-                    <a16:rowId xmlns:a16="http://schemas.microsoft.com/office/drawing/2014/main" val="10000"/>
-                  </a:ext>
-                </a:extLst>
               </a:tr>
               <a:tr h="411480">
                 <a:tc>
@@ -9363,7 +9851,7 @@
                     <a:bodyPr/>
                     <a:lstStyle/>
                     <a:p>
-                      <a:pPr marL="0" indent="0" algn="l">
+                      <a:pPr algn="l" indent="0" marL="0">
                         <a:buNone/>
                       </a:pPr>
                       <a:r>
@@ -9421,7 +9909,7 @@
                     <a:bodyPr/>
                     <a:lstStyle/>
                     <a:p>
-                      <a:pPr marL="0" indent="0" algn="ctr">
+                      <a:pPr algn="ctr" indent="0" marL="0">
                         <a:buNone/>
                       </a:pPr>
                       <a:r>
@@ -9479,7 +9967,7 @@
                     <a:bodyPr/>
                     <a:lstStyle/>
                     <a:p>
-                      <a:pPr marL="0" indent="0" algn="ctr">
+                      <a:pPr algn="ctr" indent="0" marL="0">
                         <a:buNone/>
                       </a:pPr>
                       <a:r>
@@ -9540,7 +10028,7 @@
                     <a:bodyPr/>
                     <a:lstStyle/>
                     <a:p>
-                      <a:pPr marL="0" indent="0" algn="ctr">
+                      <a:pPr algn="ctr" indent="0" marL="0">
                         <a:buNone/>
                       </a:pPr>
                       <a:r>
@@ -9601,7 +10089,7 @@
                     <a:bodyPr/>
                     <a:lstStyle/>
                     <a:p>
-                      <a:pPr marL="0" indent="0" algn="ctr">
+                      <a:pPr algn="ctr" indent="0" marL="0">
                         <a:buNone/>
                       </a:pPr>
                       <a:r>
@@ -9662,7 +10150,7 @@
                     <a:bodyPr/>
                     <a:lstStyle/>
                     <a:p>
-                      <a:pPr marL="0" indent="0" algn="ctr">
+                      <a:pPr algn="ctr" indent="0" marL="0">
                         <a:buNone/>
                       </a:pPr>
                       <a:r>
@@ -9720,7 +10208,7 @@
                     <a:bodyPr/>
                     <a:lstStyle/>
                     <a:p>
-                      <a:pPr marL="0" indent="0" algn="ctr">
+                      <a:pPr algn="ctr" indent="0" marL="0">
                         <a:buNone/>
                       </a:pPr>
                       <a:r>
@@ -9773,11 +10261,6 @@
                     </a:lnB>
                   </a:tcPr>
                 </a:tc>
-                <a:extLst>
-                  <a:ext uri="{0D108BD9-81ED-4DB2-BD59-A6C34878D82A}">
-                    <a16:rowId xmlns:a16="http://schemas.microsoft.com/office/drawing/2014/main" val="10001"/>
-                  </a:ext>
-                </a:extLst>
               </a:tr>
               <a:tr h="411480">
                 <a:tc>
@@ -9785,7 +10268,7 @@
                     <a:bodyPr/>
                     <a:lstStyle/>
                     <a:p>
-                      <a:pPr marL="0" indent="0" algn="l">
+                      <a:pPr algn="l" indent="0" marL="0">
                         <a:buNone/>
                       </a:pPr>
                       <a:r>
@@ -9843,7 +10326,7 @@
                     <a:bodyPr/>
                     <a:lstStyle/>
                     <a:p>
-                      <a:pPr marL="0" indent="0" algn="ctr">
+                      <a:pPr algn="ctr" indent="0" marL="0">
                         <a:buNone/>
                       </a:pPr>
                       <a:r>
@@ -9901,7 +10384,7 @@
                     <a:bodyPr/>
                     <a:lstStyle/>
                     <a:p>
-                      <a:pPr marL="0" indent="0" algn="ctr">
+                      <a:pPr algn="ctr" indent="0" marL="0">
                         <a:buNone/>
                       </a:pPr>
                       <a:r>
@@ -9962,7 +10445,7 @@
                     <a:bodyPr/>
                     <a:lstStyle/>
                     <a:p>
-                      <a:pPr marL="0" indent="0" algn="ctr">
+                      <a:pPr algn="ctr" indent="0" marL="0">
                         <a:buNone/>
                       </a:pPr>
                       <a:r>
@@ -10023,7 +10506,7 @@
                     <a:bodyPr/>
                     <a:lstStyle/>
                     <a:p>
-                      <a:pPr marL="0" indent="0" algn="ctr">
+                      <a:pPr algn="ctr" indent="0" marL="0">
                         <a:buNone/>
                       </a:pPr>
                       <a:r>
@@ -10084,7 +10567,7 @@
                     <a:bodyPr/>
                     <a:lstStyle/>
                     <a:p>
-                      <a:pPr marL="0" indent="0" algn="ctr">
+                      <a:pPr algn="ctr" indent="0" marL="0">
                         <a:buNone/>
                       </a:pPr>
                       <a:r>
@@ -10142,7 +10625,7 @@
                     <a:bodyPr/>
                     <a:lstStyle/>
                     <a:p>
-                      <a:pPr marL="0" indent="0" algn="ctr">
+                      <a:pPr algn="ctr" indent="0" marL="0">
                         <a:buNone/>
                       </a:pPr>
                       <a:r>
@@ -10195,11 +10678,6 @@
                     </a:lnB>
                   </a:tcPr>
                 </a:tc>
-                <a:extLst>
-                  <a:ext uri="{0D108BD9-81ED-4DB2-BD59-A6C34878D82A}">
-                    <a16:rowId xmlns:a16="http://schemas.microsoft.com/office/drawing/2014/main" val="10002"/>
-                  </a:ext>
-                </a:extLst>
               </a:tr>
               <a:tr h="411480">
                 <a:tc>
@@ -10207,7 +10685,7 @@
                     <a:bodyPr/>
                     <a:lstStyle/>
                     <a:p>
-                      <a:pPr marL="0" indent="0" algn="l">
+                      <a:pPr algn="l" indent="0" marL="0">
                         <a:buNone/>
                       </a:pPr>
                       <a:r>
@@ -10265,7 +10743,7 @@
                     <a:bodyPr/>
                     <a:lstStyle/>
                     <a:p>
-                      <a:pPr marL="0" indent="0" algn="ctr">
+                      <a:pPr algn="ctr" indent="0" marL="0">
                         <a:buNone/>
                       </a:pPr>
                       <a:r>
@@ -10323,7 +10801,7 @@
                     <a:bodyPr/>
                     <a:lstStyle/>
                     <a:p>
-                      <a:pPr marL="0" indent="0" algn="ctr">
+                      <a:pPr algn="ctr" indent="0" marL="0">
                         <a:buNone/>
                       </a:pPr>
                       <a:r>
@@ -10384,7 +10862,7 @@
                     <a:bodyPr/>
                     <a:lstStyle/>
                     <a:p>
-                      <a:pPr marL="0" indent="0" algn="ctr">
+                      <a:pPr algn="ctr" indent="0" marL="0">
                         <a:buNone/>
                       </a:pPr>
                     